--- a/site/downloads/pixan-bank-deck-medium-en.pptx
+++ b/site/downloads/pixan-bank-deck-medium-en.pptx
@@ -2,24 +2,24 @@
 <file path=ppt/presentation.xml><?xml version="1.0" encoding="utf-8"?>
 <p:presentation xmlns:p="http://schemas.openxmlformats.org/presentationml/2006/main">
   <p:sldMasterIdLst>
-    <p:sldMasterId xmlns:r="http://schemas.openxmlformats.org/officeDocument/2006/relationships" id="2147483648" r:id="R0c3fc52388da496f"/>
+    <p:sldMasterId xmlns:r="http://schemas.openxmlformats.org/officeDocument/2006/relationships" id="2147483648" r:id="Rdd445964e1224988"/>
   </p:sldMasterIdLst>
   <p:notesMasterIdLst>
-    <p:notesMasterId xmlns:r="http://schemas.openxmlformats.org/officeDocument/2006/relationships" r:id="Rea091cef66784f5a"/>
+    <p:notesMasterId xmlns:r="http://schemas.openxmlformats.org/officeDocument/2006/relationships" r:id="R3d82eb59c81e4f2e"/>
   </p:notesMasterIdLst>
   <p:sldIdLst>
-    <p:sldId xmlns:r="http://schemas.openxmlformats.org/officeDocument/2006/relationships" id="256" r:id="R95f0e03bb15d426b"/>
-    <p:sldId xmlns:r="http://schemas.openxmlformats.org/officeDocument/2006/relationships" id="257" r:id="Ree0d9a31afcf4f24"/>
-    <p:sldId xmlns:r="http://schemas.openxmlformats.org/officeDocument/2006/relationships" id="258" r:id="R3697a1ec9f5341c5"/>
-    <p:sldId xmlns:r="http://schemas.openxmlformats.org/officeDocument/2006/relationships" id="259" r:id="R89cddf2b16fc48c1"/>
-    <p:sldId xmlns:r="http://schemas.openxmlformats.org/officeDocument/2006/relationships" id="260" r:id="R83601565effe41b7"/>
-    <p:sldId xmlns:r="http://schemas.openxmlformats.org/officeDocument/2006/relationships" id="261" r:id="Rc08e5bdc27384d68"/>
-    <p:sldId xmlns:r="http://schemas.openxmlformats.org/officeDocument/2006/relationships" id="262" r:id="R9281cc3e194345e1"/>
-    <p:sldId xmlns:r="http://schemas.openxmlformats.org/officeDocument/2006/relationships" id="263" r:id="R6b0a5f34c04e4f6f"/>
-    <p:sldId xmlns:r="http://schemas.openxmlformats.org/officeDocument/2006/relationships" id="264" r:id="R6f46a338131a4198"/>
-    <p:sldId xmlns:r="http://schemas.openxmlformats.org/officeDocument/2006/relationships" id="265" r:id="Race96e5372f24cda"/>
-    <p:sldId xmlns:r="http://schemas.openxmlformats.org/officeDocument/2006/relationships" id="266" r:id="Rc994ce7164f64054"/>
-    <p:sldId xmlns:r="http://schemas.openxmlformats.org/officeDocument/2006/relationships" id="267" r:id="R7ff67c28b6814f06"/>
+    <p:sldId xmlns:r="http://schemas.openxmlformats.org/officeDocument/2006/relationships" id="256" r:id="R003f579f8a194e2c"/>
+    <p:sldId xmlns:r="http://schemas.openxmlformats.org/officeDocument/2006/relationships" id="257" r:id="Re1ad71d2320d45b3"/>
+    <p:sldId xmlns:r="http://schemas.openxmlformats.org/officeDocument/2006/relationships" id="258" r:id="R23daa6b36876471f"/>
+    <p:sldId xmlns:r="http://schemas.openxmlformats.org/officeDocument/2006/relationships" id="259" r:id="R9b83d6d7e67d44e1"/>
+    <p:sldId xmlns:r="http://schemas.openxmlformats.org/officeDocument/2006/relationships" id="260" r:id="R039bb486c469492e"/>
+    <p:sldId xmlns:r="http://schemas.openxmlformats.org/officeDocument/2006/relationships" id="261" r:id="R69714a8b3695426b"/>
+    <p:sldId xmlns:r="http://schemas.openxmlformats.org/officeDocument/2006/relationships" id="262" r:id="R36c0879c1593405b"/>
+    <p:sldId xmlns:r="http://schemas.openxmlformats.org/officeDocument/2006/relationships" id="263" r:id="Rb7824543adc24a09"/>
+    <p:sldId xmlns:r="http://schemas.openxmlformats.org/officeDocument/2006/relationships" id="264" r:id="Re64b2ef82ff54f39"/>
+    <p:sldId xmlns:r="http://schemas.openxmlformats.org/officeDocument/2006/relationships" id="265" r:id="R1dfbc74ee9fd4ca3"/>
+    <p:sldId xmlns:r="http://schemas.openxmlformats.org/officeDocument/2006/relationships" id="266" r:id="R7e242f0d0b264172"/>
+    <p:sldId xmlns:r="http://schemas.openxmlformats.org/officeDocument/2006/relationships" id="267" r:id="Re47d4ba42a354b18"/>
   </p:sldIdLst>
   <p:sldSz cx="12191999" cy="6858000"/>
   <p:notesSz cx="6858000" cy="9144000"/>
@@ -1340,7 +1340,7 @@
           <p:cNvPr id="2" name="Title 1">
             <a:extLst xmlns:a="http://schemas.openxmlformats.org/drawingml/2006/main">
               <a:ext uri="{FF2B5EF4-FFF2-40B4-BE49-F238E27FC236}">
-                <a16:creationId xmlns:a16="http://schemas.microsoft.com/office/drawing/2014/main" id="{31200344-7976-4505-B370-B23924861862}"/>
+                <a16:creationId xmlns:a16="http://schemas.microsoft.com/office/drawing/2014/main" id="{9B29DEF9-C3CC-4339-8C7B-C0D46E19DBFD}"/>
               </a:ext>
             </a:extLst>
           </p:cNvPr>
@@ -1372,7 +1372,7 @@
           <p:cNvPr id="3" name="Subtitle 2">
             <a:extLst xmlns:a="http://schemas.openxmlformats.org/drawingml/2006/main">
               <a:ext uri="{FF2B5EF4-FFF2-40B4-BE49-F238E27FC236}">
-                <a16:creationId xmlns:a16="http://schemas.microsoft.com/office/drawing/2014/main" id="{E14F0157-8C5E-4589-8D0F-0F9A397B8F7E}"/>
+                <a16:creationId xmlns:a16="http://schemas.microsoft.com/office/drawing/2014/main" id="{B4DF59F7-30E8-4A6A-A9B1-136FFDE39D05}"/>
               </a:ext>
             </a:extLst>
           </p:cNvPr>
@@ -1495,7 +1495,7 @@
           <p:cNvPr id="4" name="Date Placeholder 3">
             <a:extLst xmlns:a="http://schemas.openxmlformats.org/drawingml/2006/main">
               <a:ext uri="{FF2B5EF4-FFF2-40B4-BE49-F238E27FC236}">
-                <a16:creationId xmlns:a16="http://schemas.microsoft.com/office/drawing/2014/main" id="{F17F4E1E-213E-48D4-82FB-99FE77F06513}"/>
+                <a16:creationId xmlns:a16="http://schemas.microsoft.com/office/drawing/2014/main" id="{5CA430E6-83CD-48EC-A114-5CB9A95E522D}"/>
               </a:ext>
             </a:extLst>
           </p:cNvPr>
@@ -1522,7 +1522,7 @@
           <p:cNvPr id="5" name="Footer Placeholder 4">
             <a:extLst xmlns:a="http://schemas.openxmlformats.org/drawingml/2006/main">
               <a:ext uri="{FF2B5EF4-FFF2-40B4-BE49-F238E27FC236}">
-                <a16:creationId xmlns:a16="http://schemas.microsoft.com/office/drawing/2014/main" id="{9DFF8711-7E57-44A8-B5FA-9762DC45EF59}"/>
+                <a16:creationId xmlns:a16="http://schemas.microsoft.com/office/drawing/2014/main" id="{ADA3E8E5-7ABB-43F1-BE0C-4F5DDA6E5E22}"/>
               </a:ext>
             </a:extLst>
           </p:cNvPr>
@@ -1545,7 +1545,7 @@
           <p:cNvPr id="6" name="Slide Number Placeholder 5">
             <a:extLst xmlns:a="http://schemas.openxmlformats.org/drawingml/2006/main">
               <a:ext uri="{FF2B5EF4-FFF2-40B4-BE49-F238E27FC236}">
-                <a16:creationId xmlns:a16="http://schemas.microsoft.com/office/drawing/2014/main" id="{19134DFD-6D53-406D-B0B3-94EC9DE90295}"/>
+                <a16:creationId xmlns:a16="http://schemas.microsoft.com/office/drawing/2014/main" id="{C9191598-58E3-4533-883A-AAA4258B6F63}"/>
               </a:ext>
             </a:extLst>
           </p:cNvPr>
@@ -1589,7 +1589,7 @@
           <p:cNvPr id="2" name="Title 1">
             <a:extLst xmlns:a="http://schemas.openxmlformats.org/drawingml/2006/main">
               <a:ext uri="{FF2B5EF4-FFF2-40B4-BE49-F238E27FC236}">
-                <a16:creationId xmlns:a16="http://schemas.microsoft.com/office/drawing/2014/main" id="{16B7F87F-8A28-4CEA-8669-ECC19E3236E5}"/>
+                <a16:creationId xmlns:a16="http://schemas.microsoft.com/office/drawing/2014/main" id="{7F2F4A45-2390-43A0-B251-F1CA1622DA28}"/>
               </a:ext>
             </a:extLst>
           </p:cNvPr>
@@ -1616,7 +1616,7 @@
           <p:cNvPr id="3" name="Vertical Text Placeholder 2">
             <a:extLst xmlns:a="http://schemas.openxmlformats.org/drawingml/2006/main">
               <a:ext uri="{FF2B5EF4-FFF2-40B4-BE49-F238E27FC236}">
-                <a16:creationId xmlns:a16="http://schemas.microsoft.com/office/drawing/2014/main" id="{E6B15C42-C4DA-4CFC-AE90-B5E6E24CBFBA}"/>
+                <a16:creationId xmlns:a16="http://schemas.microsoft.com/office/drawing/2014/main" id="{53DBD538-61D2-43FE-8D84-617C62FD35D0}"/>
               </a:ext>
             </a:extLst>
           </p:cNvPr>
@@ -1678,7 +1678,7 @@
           <p:cNvPr id="4" name="Date Placeholder 3">
             <a:extLst xmlns:a="http://schemas.openxmlformats.org/drawingml/2006/main">
               <a:ext uri="{FF2B5EF4-FFF2-40B4-BE49-F238E27FC236}">
-                <a16:creationId xmlns:a16="http://schemas.microsoft.com/office/drawing/2014/main" id="{3B408456-C55F-415A-A193-2F73A579C26D}"/>
+                <a16:creationId xmlns:a16="http://schemas.microsoft.com/office/drawing/2014/main" id="{CDC731D3-B9C2-4079-B811-C7073D038601}"/>
               </a:ext>
             </a:extLst>
           </p:cNvPr>
@@ -1705,7 +1705,7 @@
           <p:cNvPr id="5" name="Footer Placeholder 4">
             <a:extLst xmlns:a="http://schemas.openxmlformats.org/drawingml/2006/main">
               <a:ext uri="{FF2B5EF4-FFF2-40B4-BE49-F238E27FC236}">
-                <a16:creationId xmlns:a16="http://schemas.microsoft.com/office/drawing/2014/main" id="{62B50B7A-C594-4AEE-8EA3-2856FF20333D}"/>
+                <a16:creationId xmlns:a16="http://schemas.microsoft.com/office/drawing/2014/main" id="{3E135D3C-E1C9-4786-8FA1-C6DA4EDEEECF}"/>
               </a:ext>
             </a:extLst>
           </p:cNvPr>
@@ -1728,7 +1728,7 @@
           <p:cNvPr id="6" name="Slide Number Placeholder 5">
             <a:extLst xmlns:a="http://schemas.openxmlformats.org/drawingml/2006/main">
               <a:ext uri="{FF2B5EF4-FFF2-40B4-BE49-F238E27FC236}">
-                <a16:creationId xmlns:a16="http://schemas.microsoft.com/office/drawing/2014/main" id="{189E605F-D1B6-4915-91A7-5023376FC10F}"/>
+                <a16:creationId xmlns:a16="http://schemas.microsoft.com/office/drawing/2014/main" id="{3DCE73FF-9B17-4124-A297-2B9986B89F10}"/>
               </a:ext>
             </a:extLst>
           </p:cNvPr>
@@ -1772,7 +1772,7 @@
           <p:cNvPr id="2" name="Vertical Title 1">
             <a:extLst xmlns:a="http://schemas.openxmlformats.org/drawingml/2006/main">
               <a:ext uri="{FF2B5EF4-FFF2-40B4-BE49-F238E27FC236}">
-                <a16:creationId xmlns:a16="http://schemas.microsoft.com/office/drawing/2014/main" id="{C5A515F5-C6FE-4692-886E-A241EC50847F}"/>
+                <a16:creationId xmlns:a16="http://schemas.microsoft.com/office/drawing/2014/main" id="{09E407AE-DE7B-4A36-A775-3BF636E7BC67}"/>
               </a:ext>
             </a:extLst>
           </p:cNvPr>
@@ -1804,7 +1804,7 @@
           <p:cNvPr id="3" name="Vertical Text Placeholder 2">
             <a:extLst xmlns:a="http://schemas.openxmlformats.org/drawingml/2006/main">
               <a:ext uri="{FF2B5EF4-FFF2-40B4-BE49-F238E27FC236}">
-                <a16:creationId xmlns:a16="http://schemas.microsoft.com/office/drawing/2014/main" id="{4960F8D7-82A5-4F67-9A5A-5E91784EAEF7}"/>
+                <a16:creationId xmlns:a16="http://schemas.microsoft.com/office/drawing/2014/main" id="{B691A616-44C4-4172-BCB3-C2D2F1C16DA6}"/>
               </a:ext>
             </a:extLst>
           </p:cNvPr>
@@ -1871,7 +1871,7 @@
           <p:cNvPr id="4" name="Date Placeholder 3">
             <a:extLst xmlns:a="http://schemas.openxmlformats.org/drawingml/2006/main">
               <a:ext uri="{FF2B5EF4-FFF2-40B4-BE49-F238E27FC236}">
-                <a16:creationId xmlns:a16="http://schemas.microsoft.com/office/drawing/2014/main" id="{714E0513-A4D7-4952-BA32-8554374513A7}"/>
+                <a16:creationId xmlns:a16="http://schemas.microsoft.com/office/drawing/2014/main" id="{5A11158A-9CBB-4F5A-B81C-89F2F6BEA935}"/>
               </a:ext>
             </a:extLst>
           </p:cNvPr>
@@ -1898,7 +1898,7 @@
           <p:cNvPr id="5" name="Footer Placeholder 4">
             <a:extLst xmlns:a="http://schemas.openxmlformats.org/drawingml/2006/main">
               <a:ext uri="{FF2B5EF4-FFF2-40B4-BE49-F238E27FC236}">
-                <a16:creationId xmlns:a16="http://schemas.microsoft.com/office/drawing/2014/main" id="{9897B6A9-91C7-4307-8AA4-48787E6441AC}"/>
+                <a16:creationId xmlns:a16="http://schemas.microsoft.com/office/drawing/2014/main" id="{CB925B0F-2F42-4365-B79E-DEB6521C1D7C}"/>
               </a:ext>
             </a:extLst>
           </p:cNvPr>
@@ -1921,7 +1921,7 @@
           <p:cNvPr id="6" name="Slide Number Placeholder 5">
             <a:extLst xmlns:a="http://schemas.openxmlformats.org/drawingml/2006/main">
               <a:ext uri="{FF2B5EF4-FFF2-40B4-BE49-F238E27FC236}">
-                <a16:creationId xmlns:a16="http://schemas.microsoft.com/office/drawing/2014/main" id="{23E01878-EA1E-4C07-8CA4-89D431BD6B17}"/>
+                <a16:creationId xmlns:a16="http://schemas.microsoft.com/office/drawing/2014/main" id="{291C4454-0A0B-48BF-AB64-ADA9EBB392B7}"/>
               </a:ext>
             </a:extLst>
           </p:cNvPr>
@@ -1965,7 +1965,7 @@
           <p:cNvPr id="2" name="Title 1">
             <a:extLst xmlns:a="http://schemas.openxmlformats.org/drawingml/2006/main">
               <a:ext uri="{FF2B5EF4-FFF2-40B4-BE49-F238E27FC236}">
-                <a16:creationId xmlns:a16="http://schemas.microsoft.com/office/drawing/2014/main" id="{D338F168-0C5F-4C7B-A73E-D8AF629D20CB}"/>
+                <a16:creationId xmlns:a16="http://schemas.microsoft.com/office/drawing/2014/main" id="{49A1F941-6117-49C7-9BB5-D68E02D88FF8}"/>
               </a:ext>
             </a:extLst>
           </p:cNvPr>
@@ -1992,7 +1992,7 @@
           <p:cNvPr id="3" name="Content Placeholder 2">
             <a:extLst xmlns:a="http://schemas.openxmlformats.org/drawingml/2006/main">
               <a:ext uri="{FF2B5EF4-FFF2-40B4-BE49-F238E27FC236}">
-                <a16:creationId xmlns:a16="http://schemas.microsoft.com/office/drawing/2014/main" id="{7E9D45C1-2D20-4D58-844D-7AD891A32DB0}"/>
+                <a16:creationId xmlns:a16="http://schemas.microsoft.com/office/drawing/2014/main" id="{273E07DD-B78F-4A7F-8B0E-04DAA4255181}"/>
               </a:ext>
             </a:extLst>
           </p:cNvPr>
@@ -2054,7 +2054,7 @@
           <p:cNvPr id="4" name="Date Placeholder 3">
             <a:extLst xmlns:a="http://schemas.openxmlformats.org/drawingml/2006/main">
               <a:ext uri="{FF2B5EF4-FFF2-40B4-BE49-F238E27FC236}">
-                <a16:creationId xmlns:a16="http://schemas.microsoft.com/office/drawing/2014/main" id="{0B4DFF6D-3798-4DF2-BDFB-99F39849723E}"/>
+                <a16:creationId xmlns:a16="http://schemas.microsoft.com/office/drawing/2014/main" id="{A7783A41-01BA-4779-BC23-75593E549702}"/>
               </a:ext>
             </a:extLst>
           </p:cNvPr>
@@ -2081,7 +2081,7 @@
           <p:cNvPr id="5" name="Footer Placeholder 4">
             <a:extLst xmlns:a="http://schemas.openxmlformats.org/drawingml/2006/main">
               <a:ext uri="{FF2B5EF4-FFF2-40B4-BE49-F238E27FC236}">
-                <a16:creationId xmlns:a16="http://schemas.microsoft.com/office/drawing/2014/main" id="{4F635981-D52D-443E-84EF-6E7185B16570}"/>
+                <a16:creationId xmlns:a16="http://schemas.microsoft.com/office/drawing/2014/main" id="{71BE5CC2-63FB-49CE-B272-7C4D63909DE7}"/>
               </a:ext>
             </a:extLst>
           </p:cNvPr>
@@ -2104,7 +2104,7 @@
           <p:cNvPr id="6" name="Slide Number Placeholder 5">
             <a:extLst xmlns:a="http://schemas.openxmlformats.org/drawingml/2006/main">
               <a:ext uri="{FF2B5EF4-FFF2-40B4-BE49-F238E27FC236}">
-                <a16:creationId xmlns:a16="http://schemas.microsoft.com/office/drawing/2014/main" id="{1C1F2A4D-3560-4C70-B100-9B2E4966D81B}"/>
+                <a16:creationId xmlns:a16="http://schemas.microsoft.com/office/drawing/2014/main" id="{2FE80054-4E69-49F0-8BD6-8F9C241F8BB2}"/>
               </a:ext>
             </a:extLst>
           </p:cNvPr>
@@ -2148,7 +2148,7 @@
           <p:cNvPr id="2" name="Title 1">
             <a:extLst xmlns:a="http://schemas.openxmlformats.org/drawingml/2006/main">
               <a:ext uri="{FF2B5EF4-FFF2-40B4-BE49-F238E27FC236}">
-                <a16:creationId xmlns:a16="http://schemas.microsoft.com/office/drawing/2014/main" id="{5CF0DCD6-56A6-4BDC-94AC-3FEC990A0924}"/>
+                <a16:creationId xmlns:a16="http://schemas.microsoft.com/office/drawing/2014/main" id="{C251F159-48B4-4621-8012-0C16373FBDFF}"/>
               </a:ext>
             </a:extLst>
           </p:cNvPr>
@@ -2185,7 +2185,7 @@
           <p:cNvPr id="3" name="Text Placeholder 2">
             <a:extLst xmlns:a="http://schemas.openxmlformats.org/drawingml/2006/main">
               <a:ext uri="{FF2B5EF4-FFF2-40B4-BE49-F238E27FC236}">
-                <a16:creationId xmlns:a16="http://schemas.microsoft.com/office/drawing/2014/main" id="{B6775DBE-B354-4AE4-B3EE-D3A244A4A22F}"/>
+                <a16:creationId xmlns:a16="http://schemas.microsoft.com/office/drawing/2014/main" id="{86DA8B31-473B-4DB9-AEAE-8A63BA57373F}"/>
               </a:ext>
             </a:extLst>
           </p:cNvPr>
@@ -2311,7 +2311,7 @@
           <p:cNvPr id="4" name="Date Placeholder 3">
             <a:extLst xmlns:a="http://schemas.openxmlformats.org/drawingml/2006/main">
               <a:ext uri="{FF2B5EF4-FFF2-40B4-BE49-F238E27FC236}">
-                <a16:creationId xmlns:a16="http://schemas.microsoft.com/office/drawing/2014/main" id="{C24D23AC-DD41-47FA-A905-F9228685ABF9}"/>
+                <a16:creationId xmlns:a16="http://schemas.microsoft.com/office/drawing/2014/main" id="{64A7FB00-91B9-4690-A07C-02E896E9A2CA}"/>
               </a:ext>
             </a:extLst>
           </p:cNvPr>
@@ -2338,7 +2338,7 @@
           <p:cNvPr id="5" name="Footer Placeholder 4">
             <a:extLst xmlns:a="http://schemas.openxmlformats.org/drawingml/2006/main">
               <a:ext uri="{FF2B5EF4-FFF2-40B4-BE49-F238E27FC236}">
-                <a16:creationId xmlns:a16="http://schemas.microsoft.com/office/drawing/2014/main" id="{43475250-5260-45B7-B9FF-FBAB9EDA1E1F}"/>
+                <a16:creationId xmlns:a16="http://schemas.microsoft.com/office/drawing/2014/main" id="{D48B02A4-FF97-4FF6-A2F1-177A25CEBEBC}"/>
               </a:ext>
             </a:extLst>
           </p:cNvPr>
@@ -2361,7 +2361,7 @@
           <p:cNvPr id="6" name="Slide Number Placeholder 5">
             <a:extLst xmlns:a="http://schemas.openxmlformats.org/drawingml/2006/main">
               <a:ext uri="{FF2B5EF4-FFF2-40B4-BE49-F238E27FC236}">
-                <a16:creationId xmlns:a16="http://schemas.microsoft.com/office/drawing/2014/main" id="{530C787D-C91E-402A-BB7C-DEC731D3BC3F}"/>
+                <a16:creationId xmlns:a16="http://schemas.microsoft.com/office/drawing/2014/main" id="{74C7BFE4-4D5C-4746-869D-CBA92B829A53}"/>
               </a:ext>
             </a:extLst>
           </p:cNvPr>
@@ -2405,7 +2405,7 @@
           <p:cNvPr id="2" name="Title 1">
             <a:extLst xmlns:a="http://schemas.openxmlformats.org/drawingml/2006/main">
               <a:ext uri="{FF2B5EF4-FFF2-40B4-BE49-F238E27FC236}">
-                <a16:creationId xmlns:a16="http://schemas.microsoft.com/office/drawing/2014/main" id="{37E3FE53-3F58-4F0F-9022-717C09B745B4}"/>
+                <a16:creationId xmlns:a16="http://schemas.microsoft.com/office/drawing/2014/main" id="{907A147E-2A5F-4234-920D-AAEC9E7ACDD8}"/>
               </a:ext>
             </a:extLst>
           </p:cNvPr>
@@ -2432,7 +2432,7 @@
           <p:cNvPr id="3" name="Content Placeholder 2">
             <a:extLst xmlns:a="http://schemas.openxmlformats.org/drawingml/2006/main">
               <a:ext uri="{FF2B5EF4-FFF2-40B4-BE49-F238E27FC236}">
-                <a16:creationId xmlns:a16="http://schemas.microsoft.com/office/drawing/2014/main" id="{381B161F-0BE8-4ECD-B55A-59E286BA4732}"/>
+                <a16:creationId xmlns:a16="http://schemas.microsoft.com/office/drawing/2014/main" id="{CBC8FD5E-F672-4093-B71F-26D2184F07EB}"/>
               </a:ext>
             </a:extLst>
           </p:cNvPr>
@@ -2536,7 +2536,7 @@
           <p:cNvPr id="4" name="Content Placeholder 3">
             <a:extLst xmlns:a="http://schemas.openxmlformats.org/drawingml/2006/main">
               <a:ext uri="{FF2B5EF4-FFF2-40B4-BE49-F238E27FC236}">
-                <a16:creationId xmlns:a16="http://schemas.microsoft.com/office/drawing/2014/main" id="{14BA41CC-DBCA-48CB-8BB2-8C4F4FFFA778}"/>
+                <a16:creationId xmlns:a16="http://schemas.microsoft.com/office/drawing/2014/main" id="{D67C588C-6DB2-43B0-A0AF-1568966CB49C}"/>
               </a:ext>
             </a:extLst>
           </p:cNvPr>
@@ -2640,7 +2640,7 @@
           <p:cNvPr id="5" name="Date Placeholder 4">
             <a:extLst xmlns:a="http://schemas.openxmlformats.org/drawingml/2006/main">
               <a:ext uri="{FF2B5EF4-FFF2-40B4-BE49-F238E27FC236}">
-                <a16:creationId xmlns:a16="http://schemas.microsoft.com/office/drawing/2014/main" id="{D21CD5F8-21EE-4C08-84E4-EFC64524A878}"/>
+                <a16:creationId xmlns:a16="http://schemas.microsoft.com/office/drawing/2014/main" id="{CB0562A1-49F1-4525-97F3-E5EDE10CA13E}"/>
               </a:ext>
             </a:extLst>
           </p:cNvPr>
@@ -2667,7 +2667,7 @@
           <p:cNvPr id="6" name="Footer Placeholder 5">
             <a:extLst xmlns:a="http://schemas.openxmlformats.org/drawingml/2006/main">
               <a:ext uri="{FF2B5EF4-FFF2-40B4-BE49-F238E27FC236}">
-                <a16:creationId xmlns:a16="http://schemas.microsoft.com/office/drawing/2014/main" id="{555E5D71-038F-4F8B-BBE6-55D9F6B82A98}"/>
+                <a16:creationId xmlns:a16="http://schemas.microsoft.com/office/drawing/2014/main" id="{D78F0F3C-A812-40F8-A4C6-D0400A09F3BE}"/>
               </a:ext>
             </a:extLst>
           </p:cNvPr>
@@ -2690,7 +2690,7 @@
           <p:cNvPr id="7" name="Slide Number Placeholder 6">
             <a:extLst xmlns:a="http://schemas.openxmlformats.org/drawingml/2006/main">
               <a:ext uri="{FF2B5EF4-FFF2-40B4-BE49-F238E27FC236}">
-                <a16:creationId xmlns:a16="http://schemas.microsoft.com/office/drawing/2014/main" id="{7BA1DE19-CEAE-49F6-9156-1F0E0BF826B3}"/>
+                <a16:creationId xmlns:a16="http://schemas.microsoft.com/office/drawing/2014/main" id="{8AE751DE-9F84-40D0-A2E8-C0F186C2BC94}"/>
               </a:ext>
             </a:extLst>
           </p:cNvPr>
@@ -2734,7 +2734,7 @@
           <p:cNvPr id="2" name="Title 1">
             <a:extLst xmlns:a="http://schemas.openxmlformats.org/drawingml/2006/main">
               <a:ext uri="{FF2B5EF4-FFF2-40B4-BE49-F238E27FC236}">
-                <a16:creationId xmlns:a16="http://schemas.microsoft.com/office/drawing/2014/main" id="{B31F424F-5D98-4233-BCB3-A34CF1860577}"/>
+                <a16:creationId xmlns:a16="http://schemas.microsoft.com/office/drawing/2014/main" id="{51848F42-E702-458C-8D77-75A9025ED335}"/>
               </a:ext>
             </a:extLst>
           </p:cNvPr>
@@ -2766,7 +2766,7 @@
           <p:cNvPr id="3" name="Text Placeholder 2">
             <a:extLst xmlns:a="http://schemas.openxmlformats.org/drawingml/2006/main">
               <a:ext uri="{FF2B5EF4-FFF2-40B4-BE49-F238E27FC236}">
-                <a16:creationId xmlns:a16="http://schemas.microsoft.com/office/drawing/2014/main" id="{2F56872E-8839-4208-A52D-88B2321D96C8}"/>
+                <a16:creationId xmlns:a16="http://schemas.microsoft.com/office/drawing/2014/main" id="{49188E59-65FE-4DF7-9C66-7B8A160B61AF}"/>
               </a:ext>
             </a:extLst>
           </p:cNvPr>
@@ -2838,7 +2838,7 @@
           <p:cNvPr id="4" name="Content Placeholder 3">
             <a:extLst xmlns:a="http://schemas.openxmlformats.org/drawingml/2006/main">
               <a:ext uri="{FF2B5EF4-FFF2-40B4-BE49-F238E27FC236}">
-                <a16:creationId xmlns:a16="http://schemas.microsoft.com/office/drawing/2014/main" id="{51A392D6-4DFE-45F1-AC03-F1A026152F60}"/>
+                <a16:creationId xmlns:a16="http://schemas.microsoft.com/office/drawing/2014/main" id="{9780AC62-F5E5-448C-8E52-34BCA85C7AD8}"/>
               </a:ext>
             </a:extLst>
           </p:cNvPr>
@@ -2942,7 +2942,7 @@
           <p:cNvPr id="5" name="Text Placeholder 4">
             <a:extLst xmlns:a="http://schemas.openxmlformats.org/drawingml/2006/main">
               <a:ext uri="{FF2B5EF4-FFF2-40B4-BE49-F238E27FC236}">
-                <a16:creationId xmlns:a16="http://schemas.microsoft.com/office/drawing/2014/main" id="{7C6269A4-CC76-4DB9-B472-5252B6907869}"/>
+                <a16:creationId xmlns:a16="http://schemas.microsoft.com/office/drawing/2014/main" id="{58D4BD7A-DD76-4028-A78D-23305F5A1D0A}"/>
               </a:ext>
             </a:extLst>
           </p:cNvPr>
@@ -3014,7 +3014,7 @@
           <p:cNvPr id="6" name="Content Placeholder 5">
             <a:extLst xmlns:a="http://schemas.openxmlformats.org/drawingml/2006/main">
               <a:ext uri="{FF2B5EF4-FFF2-40B4-BE49-F238E27FC236}">
-                <a16:creationId xmlns:a16="http://schemas.microsoft.com/office/drawing/2014/main" id="{C090DB99-E6B3-44B0-B609-BE1215758B60}"/>
+                <a16:creationId xmlns:a16="http://schemas.microsoft.com/office/drawing/2014/main" id="{DFB89A84-270F-4C66-988E-9D0DC61DD4A8}"/>
               </a:ext>
             </a:extLst>
           </p:cNvPr>
@@ -3118,7 +3118,7 @@
           <p:cNvPr id="7" name="Date Placeholder 6">
             <a:extLst xmlns:a="http://schemas.openxmlformats.org/drawingml/2006/main">
               <a:ext uri="{FF2B5EF4-FFF2-40B4-BE49-F238E27FC236}">
-                <a16:creationId xmlns:a16="http://schemas.microsoft.com/office/drawing/2014/main" id="{EA007B62-4521-4464-9BBC-9297DB6BF6FC}"/>
+                <a16:creationId xmlns:a16="http://schemas.microsoft.com/office/drawing/2014/main" id="{5651B9F5-B1A5-4143-AF67-D7F5CF2F45C9}"/>
               </a:ext>
             </a:extLst>
           </p:cNvPr>
@@ -3145,7 +3145,7 @@
           <p:cNvPr id="8" name="Footer Placeholder 7">
             <a:extLst xmlns:a="http://schemas.openxmlformats.org/drawingml/2006/main">
               <a:ext uri="{FF2B5EF4-FFF2-40B4-BE49-F238E27FC236}">
-                <a16:creationId xmlns:a16="http://schemas.microsoft.com/office/drawing/2014/main" id="{00B63CB1-082D-42CB-85EA-903F68FA49F1}"/>
+                <a16:creationId xmlns:a16="http://schemas.microsoft.com/office/drawing/2014/main" id="{C7295A70-A7C0-4A3A-B1DE-486754936772}"/>
               </a:ext>
             </a:extLst>
           </p:cNvPr>
@@ -3168,7 +3168,7 @@
           <p:cNvPr id="9" name="Slide Number Placeholder 8">
             <a:extLst xmlns:a="http://schemas.openxmlformats.org/drawingml/2006/main">
               <a:ext uri="{FF2B5EF4-FFF2-40B4-BE49-F238E27FC236}">
-                <a16:creationId xmlns:a16="http://schemas.microsoft.com/office/drawing/2014/main" id="{D51B6D17-124C-4990-AC1D-58A58FBF5FEA}"/>
+                <a16:creationId xmlns:a16="http://schemas.microsoft.com/office/drawing/2014/main" id="{B2F6A2CC-AC34-4010-896D-8FBF48BDD5FE}"/>
               </a:ext>
             </a:extLst>
           </p:cNvPr>
@@ -3212,7 +3212,7 @@
           <p:cNvPr id="2" name="Title 1">
             <a:extLst xmlns:a="http://schemas.openxmlformats.org/drawingml/2006/main">
               <a:ext uri="{FF2B5EF4-FFF2-40B4-BE49-F238E27FC236}">
-                <a16:creationId xmlns:a16="http://schemas.microsoft.com/office/drawing/2014/main" id="{EB407E7B-55B7-47A1-A8F8-22A383E72A9D}"/>
+                <a16:creationId xmlns:a16="http://schemas.microsoft.com/office/drawing/2014/main" id="{D56C3309-4229-47A0-BEA9-B7B6F7D9A1D3}"/>
               </a:ext>
             </a:extLst>
           </p:cNvPr>
@@ -3239,7 +3239,7 @@
           <p:cNvPr id="3" name="Date Placeholder 2">
             <a:extLst xmlns:a="http://schemas.openxmlformats.org/drawingml/2006/main">
               <a:ext uri="{FF2B5EF4-FFF2-40B4-BE49-F238E27FC236}">
-                <a16:creationId xmlns:a16="http://schemas.microsoft.com/office/drawing/2014/main" id="{B99C6E25-8DB7-4DC6-B677-1B7E6646A8CC}"/>
+                <a16:creationId xmlns:a16="http://schemas.microsoft.com/office/drawing/2014/main" id="{646E320F-A0B5-4309-8656-CB21D6F54033}"/>
               </a:ext>
             </a:extLst>
           </p:cNvPr>
@@ -3266,7 +3266,7 @@
           <p:cNvPr id="4" name="Footer Placeholder 3">
             <a:extLst xmlns:a="http://schemas.openxmlformats.org/drawingml/2006/main">
               <a:ext uri="{FF2B5EF4-FFF2-40B4-BE49-F238E27FC236}">
-                <a16:creationId xmlns:a16="http://schemas.microsoft.com/office/drawing/2014/main" id="{BDED7558-145D-41F1-BFDF-D4E1EFCAA824}"/>
+                <a16:creationId xmlns:a16="http://schemas.microsoft.com/office/drawing/2014/main" id="{461D27A8-6904-4BB8-BA66-BDF0C83C60A9}"/>
               </a:ext>
             </a:extLst>
           </p:cNvPr>
@@ -3289,7 +3289,7 @@
           <p:cNvPr id="5" name="Slide Number Placeholder 4">
             <a:extLst xmlns:a="http://schemas.openxmlformats.org/drawingml/2006/main">
               <a:ext uri="{FF2B5EF4-FFF2-40B4-BE49-F238E27FC236}">
-                <a16:creationId xmlns:a16="http://schemas.microsoft.com/office/drawing/2014/main" id="{D30CD743-6EBC-4696-B062-5D2A576F41E4}"/>
+                <a16:creationId xmlns:a16="http://schemas.microsoft.com/office/drawing/2014/main" id="{EBA28729-ADED-454C-88E6-1480116E16DA}"/>
               </a:ext>
             </a:extLst>
           </p:cNvPr>
@@ -3333,7 +3333,7 @@
           <p:cNvPr id="2" name="Date Placeholder 1">
             <a:extLst xmlns:a="http://schemas.openxmlformats.org/drawingml/2006/main">
               <a:ext uri="{FF2B5EF4-FFF2-40B4-BE49-F238E27FC236}">
-                <a16:creationId xmlns:a16="http://schemas.microsoft.com/office/drawing/2014/main" id="{99C1A41D-DC69-4153-A5B9-675D7DC6604F}"/>
+                <a16:creationId xmlns:a16="http://schemas.microsoft.com/office/drawing/2014/main" id="{23FF6ADD-93C9-413E-ACF5-F9001D7FEB2C}"/>
               </a:ext>
             </a:extLst>
           </p:cNvPr>
@@ -3360,7 +3360,7 @@
           <p:cNvPr id="3" name="Footer Placeholder 2">
             <a:extLst xmlns:a="http://schemas.openxmlformats.org/drawingml/2006/main">
               <a:ext uri="{FF2B5EF4-FFF2-40B4-BE49-F238E27FC236}">
-                <a16:creationId xmlns:a16="http://schemas.microsoft.com/office/drawing/2014/main" id="{C782BCFD-43F3-4B11-BF50-B553B835DBAB}"/>
+                <a16:creationId xmlns:a16="http://schemas.microsoft.com/office/drawing/2014/main" id="{8598A010-6B22-44AE-B993-8690C534DBEF}"/>
               </a:ext>
             </a:extLst>
           </p:cNvPr>
@@ -3383,7 +3383,7 @@
           <p:cNvPr id="4" name="Slide Number Placeholder 3">
             <a:extLst xmlns:a="http://schemas.openxmlformats.org/drawingml/2006/main">
               <a:ext uri="{FF2B5EF4-FFF2-40B4-BE49-F238E27FC236}">
-                <a16:creationId xmlns:a16="http://schemas.microsoft.com/office/drawing/2014/main" id="{05FDBD63-DA9E-42CE-B394-B0F2CEAFFA20}"/>
+                <a16:creationId xmlns:a16="http://schemas.microsoft.com/office/drawing/2014/main" id="{7D6AC03A-531B-4167-A0C3-6CC9C83DE498}"/>
               </a:ext>
             </a:extLst>
           </p:cNvPr>
@@ -3427,7 +3427,7 @@
           <p:cNvPr id="2" name="Title 1">
             <a:extLst xmlns:a="http://schemas.openxmlformats.org/drawingml/2006/main">
               <a:ext uri="{FF2B5EF4-FFF2-40B4-BE49-F238E27FC236}">
-                <a16:creationId xmlns:a16="http://schemas.microsoft.com/office/drawing/2014/main" id="{7AE194CF-2404-4F24-BAFC-D54EEE2B452B}"/>
+                <a16:creationId xmlns:a16="http://schemas.microsoft.com/office/drawing/2014/main" id="{FD007805-F947-4508-96CC-52453818AC15}"/>
               </a:ext>
             </a:extLst>
           </p:cNvPr>
@@ -3464,7 +3464,7 @@
           <p:cNvPr id="3" name="Content Placeholder 2">
             <a:extLst xmlns:a="http://schemas.openxmlformats.org/drawingml/2006/main">
               <a:ext uri="{FF2B5EF4-FFF2-40B4-BE49-F238E27FC236}">
-                <a16:creationId xmlns:a16="http://schemas.microsoft.com/office/drawing/2014/main" id="{9B79358A-547F-4A3D-86A0-44B39912B676}"/>
+                <a16:creationId xmlns:a16="http://schemas.microsoft.com/office/drawing/2014/main" id="{D8258A30-7A00-4C4D-B7E6-4DFFC82D8C59}"/>
               </a:ext>
             </a:extLst>
           </p:cNvPr>
@@ -3568,7 +3568,7 @@
           <p:cNvPr id="4" name="Text Placeholder 3">
             <a:extLst xmlns:a="http://schemas.openxmlformats.org/drawingml/2006/main">
               <a:ext uri="{FF2B5EF4-FFF2-40B4-BE49-F238E27FC236}">
-                <a16:creationId xmlns:a16="http://schemas.microsoft.com/office/drawing/2014/main" id="{C970957B-2604-4D7F-89B4-9C05B5D8D300}"/>
+                <a16:creationId xmlns:a16="http://schemas.microsoft.com/office/drawing/2014/main" id="{7779503D-3B36-4473-AB43-7A2765DBDC06}"/>
               </a:ext>
             </a:extLst>
           </p:cNvPr>
@@ -3640,7 +3640,7 @@
           <p:cNvPr id="5" name="Date Placeholder 4">
             <a:extLst xmlns:a="http://schemas.openxmlformats.org/drawingml/2006/main">
               <a:ext uri="{FF2B5EF4-FFF2-40B4-BE49-F238E27FC236}">
-                <a16:creationId xmlns:a16="http://schemas.microsoft.com/office/drawing/2014/main" id="{077306C0-67EF-404B-8F34-B32F6C42B603}"/>
+                <a16:creationId xmlns:a16="http://schemas.microsoft.com/office/drawing/2014/main" id="{31AAA5BD-1E38-456C-B408-1587D42F5385}"/>
               </a:ext>
             </a:extLst>
           </p:cNvPr>
@@ -3667,7 +3667,7 @@
           <p:cNvPr id="6" name="Footer Placeholder 5">
             <a:extLst xmlns:a="http://schemas.openxmlformats.org/drawingml/2006/main">
               <a:ext uri="{FF2B5EF4-FFF2-40B4-BE49-F238E27FC236}">
-                <a16:creationId xmlns:a16="http://schemas.microsoft.com/office/drawing/2014/main" id="{D9969834-BF3E-497A-BFBC-05C4728CA039}"/>
+                <a16:creationId xmlns:a16="http://schemas.microsoft.com/office/drawing/2014/main" id="{BBC81108-AFEF-43AE-9787-6FEC0F1C6961}"/>
               </a:ext>
             </a:extLst>
           </p:cNvPr>
@@ -3690,7 +3690,7 @@
           <p:cNvPr id="7" name="Slide Number Placeholder 6">
             <a:extLst xmlns:a="http://schemas.openxmlformats.org/drawingml/2006/main">
               <a:ext uri="{FF2B5EF4-FFF2-40B4-BE49-F238E27FC236}">
-                <a16:creationId xmlns:a16="http://schemas.microsoft.com/office/drawing/2014/main" id="{1F55E12C-4007-42D0-9610-8AFC3C572D30}"/>
+                <a16:creationId xmlns:a16="http://schemas.microsoft.com/office/drawing/2014/main" id="{07C629CE-B505-47D4-BAE6-85C2198701D1}"/>
               </a:ext>
             </a:extLst>
           </p:cNvPr>
@@ -3734,7 +3734,7 @@
           <p:cNvPr id="2" name="Title 1">
             <a:extLst xmlns:a="http://schemas.openxmlformats.org/drawingml/2006/main">
               <a:ext uri="{FF2B5EF4-FFF2-40B4-BE49-F238E27FC236}">
-                <a16:creationId xmlns:a16="http://schemas.microsoft.com/office/drawing/2014/main" id="{CEC06BD5-D8D0-4E76-B14E-BAE3596909F2}"/>
+                <a16:creationId xmlns:a16="http://schemas.microsoft.com/office/drawing/2014/main" id="{7C02B5AA-704D-45D5-A9DF-E5D7049625CD}"/>
               </a:ext>
             </a:extLst>
           </p:cNvPr>
@@ -3771,7 +3771,7 @@
           <p:cNvPr id="3" name="Picture Placeholder 2">
             <a:extLst xmlns:a="http://schemas.openxmlformats.org/drawingml/2006/main">
               <a:ext uri="{FF2B5EF4-FFF2-40B4-BE49-F238E27FC236}">
-                <a16:creationId xmlns:a16="http://schemas.microsoft.com/office/drawing/2014/main" id="{2ABD5380-2526-45F3-AAD6-B5ECDB148505}"/>
+                <a16:creationId xmlns:a16="http://schemas.microsoft.com/office/drawing/2014/main" id="{A753B77C-7C5F-409B-ADA2-9A7ADE91556E}"/>
               </a:ext>
             </a:extLst>
           </p:cNvPr>
@@ -3836,7 +3836,7 @@
           <p:cNvPr id="4" name="Text Placeholder 3">
             <a:extLst xmlns:a="http://schemas.openxmlformats.org/drawingml/2006/main">
               <a:ext uri="{FF2B5EF4-FFF2-40B4-BE49-F238E27FC236}">
-                <a16:creationId xmlns:a16="http://schemas.microsoft.com/office/drawing/2014/main" id="{5178A4E9-6166-40F5-8D0F-B6DCF0D12EAE}"/>
+                <a16:creationId xmlns:a16="http://schemas.microsoft.com/office/drawing/2014/main" id="{40000973-8DD5-46E7-8685-D1C1A3C1FF65}"/>
               </a:ext>
             </a:extLst>
           </p:cNvPr>
@@ -3908,7 +3908,7 @@
           <p:cNvPr id="5" name="Date Placeholder 4">
             <a:extLst xmlns:a="http://schemas.openxmlformats.org/drawingml/2006/main">
               <a:ext uri="{FF2B5EF4-FFF2-40B4-BE49-F238E27FC236}">
-                <a16:creationId xmlns:a16="http://schemas.microsoft.com/office/drawing/2014/main" id="{87CDC893-E68E-427F-8C4E-6BEC798DD193}"/>
+                <a16:creationId xmlns:a16="http://schemas.microsoft.com/office/drawing/2014/main" id="{5D997647-85D3-464F-A619-33E1F6429110}"/>
               </a:ext>
             </a:extLst>
           </p:cNvPr>
@@ -3935,7 +3935,7 @@
           <p:cNvPr id="6" name="Footer Placeholder 5">
             <a:extLst xmlns:a="http://schemas.openxmlformats.org/drawingml/2006/main">
               <a:ext uri="{FF2B5EF4-FFF2-40B4-BE49-F238E27FC236}">
-                <a16:creationId xmlns:a16="http://schemas.microsoft.com/office/drawing/2014/main" id="{2DB08065-5791-4A5B-A7D7-F35553B8C335}"/>
+                <a16:creationId xmlns:a16="http://schemas.microsoft.com/office/drawing/2014/main" id="{814FCEBF-69A1-4306-9930-315C119C2E4C}"/>
               </a:ext>
             </a:extLst>
           </p:cNvPr>
@@ -3958,7 +3958,7 @@
           <p:cNvPr id="7" name="Slide Number Placeholder 6">
             <a:extLst xmlns:a="http://schemas.openxmlformats.org/drawingml/2006/main">
               <a:ext uri="{FF2B5EF4-FFF2-40B4-BE49-F238E27FC236}">
-                <a16:creationId xmlns:a16="http://schemas.microsoft.com/office/drawing/2014/main" id="{0067515B-B8FA-4057-B04E-32C3422F3B9E}"/>
+                <a16:creationId xmlns:a16="http://schemas.microsoft.com/office/drawing/2014/main" id="{4E83EB28-5F42-4A4A-9B66-FD424FF7D3E9}"/>
               </a:ext>
             </a:extLst>
           </p:cNvPr>
@@ -4007,7 +4007,7 @@
           <p:cNvPr id="2" name="Title Placeholder 1">
             <a:extLst xmlns:a="http://schemas.openxmlformats.org/drawingml/2006/main">
               <a:ext uri="{FF2B5EF4-FFF2-40B4-BE49-F238E27FC236}">
-                <a16:creationId xmlns:a16="http://schemas.microsoft.com/office/drawing/2014/main" id="{1FB54C53-E602-4434-9D36-CC2E51861689}"/>
+                <a16:creationId xmlns:a16="http://schemas.microsoft.com/office/drawing/2014/main" id="{4321528C-3964-403E-86FB-796BFA4A5435}"/>
               </a:ext>
             </a:extLst>
           </p:cNvPr>
@@ -4044,7 +4044,7 @@
           <p:cNvPr id="3" name="Text Placeholder 2">
             <a:extLst xmlns:a="http://schemas.openxmlformats.org/drawingml/2006/main">
               <a:ext uri="{FF2B5EF4-FFF2-40B4-BE49-F238E27FC236}">
-                <a16:creationId xmlns:a16="http://schemas.microsoft.com/office/drawing/2014/main" id="{1FD5AF25-70D8-458D-A242-CF4D7376798A}"/>
+                <a16:creationId xmlns:a16="http://schemas.microsoft.com/office/drawing/2014/main" id="{6232091F-10B6-49B4-AC75-11DD41503204}"/>
               </a:ext>
             </a:extLst>
           </p:cNvPr>
@@ -4116,7 +4116,7 @@
           <p:cNvPr id="4" name="Date Placeholder 3">
             <a:extLst xmlns:a="http://schemas.openxmlformats.org/drawingml/2006/main">
               <a:ext uri="{FF2B5EF4-FFF2-40B4-BE49-F238E27FC236}">
-                <a16:creationId xmlns:a16="http://schemas.microsoft.com/office/drawing/2014/main" id="{01B28B1D-2DDA-40C1-922F-62FFE45422A5}"/>
+                <a16:creationId xmlns:a16="http://schemas.microsoft.com/office/drawing/2014/main" id="{25BE6C51-669B-4405-B18D-25D6FE11C615}"/>
               </a:ext>
             </a:extLst>
           </p:cNvPr>
@@ -4162,7 +4162,7 @@
           <p:cNvPr id="5" name="Footer Placeholder 4">
             <a:extLst xmlns:a="http://schemas.openxmlformats.org/drawingml/2006/main">
               <a:ext uri="{FF2B5EF4-FFF2-40B4-BE49-F238E27FC236}">
-                <a16:creationId xmlns:a16="http://schemas.microsoft.com/office/drawing/2014/main" id="{4A6124A3-3BFF-4E81-BE8D-144186E8C75B}"/>
+                <a16:creationId xmlns:a16="http://schemas.microsoft.com/office/drawing/2014/main" id="{47B82A3F-5E1C-443F-AC1F-08DC0A62D892}"/>
               </a:ext>
             </a:extLst>
           </p:cNvPr>
@@ -4204,7 +4204,7 @@
           <p:cNvPr id="6" name="Slide Number Placeholder 5">
             <a:extLst xmlns:a="http://schemas.openxmlformats.org/drawingml/2006/main">
               <a:ext uri="{FF2B5EF4-FFF2-40B4-BE49-F238E27FC236}">
-                <a16:creationId xmlns:a16="http://schemas.microsoft.com/office/drawing/2014/main" id="{A01F7A0B-1639-4D98-AE0B-EADCE4E2E3C0}"/>
+                <a16:creationId xmlns:a16="http://schemas.microsoft.com/office/drawing/2014/main" id="{0B3A2A5D-9BC5-4A12-B2D6-C50A75C4E5F4}"/>
               </a:ext>
             </a:extLst>
           </p:cNvPr>
@@ -4249,17 +4249,17 @@
   </p:cSld>
   <p:clrMap bg1="lt1" tx1="dk1" bg2="lt2" tx2="dk2" accent1="accent1" accent2="accent2" accent3="accent3" accent4="accent4" accent5="accent5" accent6="accent6" hlink="hlink" folHlink="folHlink"/>
   <p:sldLayoutIdLst>
-    <p:sldLayoutId xmlns:r="http://schemas.openxmlformats.org/officeDocument/2006/relationships" id="2147483649" r:id="Rebbbc7fce43a4d1c"/>
-    <p:sldLayoutId xmlns:r="http://schemas.openxmlformats.org/officeDocument/2006/relationships" id="2147483650" r:id="Re46c5e864cf04551"/>
-    <p:sldLayoutId xmlns:r="http://schemas.openxmlformats.org/officeDocument/2006/relationships" id="2147483651" r:id="R3fbda93aa9e54c53"/>
-    <p:sldLayoutId xmlns:r="http://schemas.openxmlformats.org/officeDocument/2006/relationships" id="2147483652" r:id="R5fd2be7953604822"/>
-    <p:sldLayoutId xmlns:r="http://schemas.openxmlformats.org/officeDocument/2006/relationships" id="2147483653" r:id="Rd35183cb10164b2c"/>
-    <p:sldLayoutId xmlns:r="http://schemas.openxmlformats.org/officeDocument/2006/relationships" id="2147483654" r:id="Rb48125d411dd44e6"/>
-    <p:sldLayoutId xmlns:r="http://schemas.openxmlformats.org/officeDocument/2006/relationships" id="2147483655" r:id="R93905f76e634440f"/>
-    <p:sldLayoutId xmlns:r="http://schemas.openxmlformats.org/officeDocument/2006/relationships" id="2147483656" r:id="R98efac9ddbcf40be"/>
-    <p:sldLayoutId xmlns:r="http://schemas.openxmlformats.org/officeDocument/2006/relationships" id="2147483657" r:id="R9b10fcb0c80a4418"/>
-    <p:sldLayoutId xmlns:r="http://schemas.openxmlformats.org/officeDocument/2006/relationships" id="2147483658" r:id="Ra18c1f9f842a425d"/>
-    <p:sldLayoutId xmlns:r="http://schemas.openxmlformats.org/officeDocument/2006/relationships" id="2147483659" r:id="Ra2087aeb05934f60"/>
+    <p:sldLayoutId xmlns:r="http://schemas.openxmlformats.org/officeDocument/2006/relationships" id="2147483649" r:id="R5fd239470d124bd8"/>
+    <p:sldLayoutId xmlns:r="http://schemas.openxmlformats.org/officeDocument/2006/relationships" id="2147483650" r:id="Rcdac8467ba944db6"/>
+    <p:sldLayoutId xmlns:r="http://schemas.openxmlformats.org/officeDocument/2006/relationships" id="2147483651" r:id="R0dbf9d6b78384c92"/>
+    <p:sldLayoutId xmlns:r="http://schemas.openxmlformats.org/officeDocument/2006/relationships" id="2147483652" r:id="R688101e3fdd0415f"/>
+    <p:sldLayoutId xmlns:r="http://schemas.openxmlformats.org/officeDocument/2006/relationships" id="2147483653" r:id="R2bd0175924ec4e01"/>
+    <p:sldLayoutId xmlns:r="http://schemas.openxmlformats.org/officeDocument/2006/relationships" id="2147483654" r:id="Rd8d3ce94702446eb"/>
+    <p:sldLayoutId xmlns:r="http://schemas.openxmlformats.org/officeDocument/2006/relationships" id="2147483655" r:id="R2481a0d512c84594"/>
+    <p:sldLayoutId xmlns:r="http://schemas.openxmlformats.org/officeDocument/2006/relationships" id="2147483656" r:id="Rb6c8143d35934776"/>
+    <p:sldLayoutId xmlns:r="http://schemas.openxmlformats.org/officeDocument/2006/relationships" id="2147483657" r:id="Rb2cd271ef7e54d9a"/>
+    <p:sldLayoutId xmlns:r="http://schemas.openxmlformats.org/officeDocument/2006/relationships" id="2147483658" r:id="R34a75ddb8bfb4405"/>
+    <p:sldLayoutId xmlns:r="http://schemas.openxmlformats.org/officeDocument/2006/relationships" id="2147483659" r:id="Rba96debb6e994f18"/>
   </p:sldLayoutIdLst>
   <p:txStyles>
     <p:titleStyle>
@@ -4812,7 +4812,7 @@
           <p:cNvPr id="2" name="Rectangle 1">
             <a:extLst xmlns:a="http://schemas.openxmlformats.org/drawingml/2006/main">
               <a:ext uri="{FF2B5EF4-FFF2-40B4-BE49-F238E27FC236}">
-                <a16:creationId xmlns:a16="http://schemas.microsoft.com/office/drawing/2014/main" id="{0416BA84-F1D4-4B36-BD04-27CDA9B809FF}"/>
+                <a16:creationId xmlns:a16="http://schemas.microsoft.com/office/drawing/2014/main" id="{FB360A5E-D150-4826-BE0E-D3C1BCD213EE}"/>
               </a:ext>
             </a:extLst>
           </p:cNvPr>
@@ -4867,7 +4867,7 @@
           <p:cNvPr id="3" name="TextBox 2">
             <a:extLst xmlns:a="http://schemas.openxmlformats.org/drawingml/2006/main">
               <a:ext uri="{FF2B5EF4-FFF2-40B4-BE49-F238E27FC236}">
-                <a16:creationId xmlns:a16="http://schemas.microsoft.com/office/drawing/2014/main" id="{6505BEAA-40AC-40E2-B23A-A0802A88FE11}"/>
+                <a16:creationId xmlns:a16="http://schemas.microsoft.com/office/drawing/2014/main" id="{BE81E7FF-122B-4BEA-9BA7-60E463F7CC86}"/>
               </a:ext>
             </a:extLst>
           </p:cNvPr>
@@ -4914,7 +4914,7 @@
           <p:cNvPr id="4" name="TextBox 3">
             <a:extLst xmlns:a="http://schemas.openxmlformats.org/drawingml/2006/main">
               <a:ext uri="{FF2B5EF4-FFF2-40B4-BE49-F238E27FC236}">
-                <a16:creationId xmlns:a16="http://schemas.microsoft.com/office/drawing/2014/main" id="{D05C4878-2BE9-4BC4-9B3F-DE6B3CF68E77}"/>
+                <a16:creationId xmlns:a16="http://schemas.microsoft.com/office/drawing/2014/main" id="{6BE18854-8869-4800-BE28-D3521371F9EB}"/>
               </a:ext>
             </a:extLst>
           </p:cNvPr>
@@ -4982,7 +4982,7 @@
           <p:cNvPr id="5" name="TextBox 4">
             <a:extLst xmlns:a="http://schemas.openxmlformats.org/drawingml/2006/main">
               <a:ext uri="{FF2B5EF4-FFF2-40B4-BE49-F238E27FC236}">
-                <a16:creationId xmlns:a16="http://schemas.microsoft.com/office/drawing/2014/main" id="{35C3034D-5861-45A7-AAEC-B682E1EC3C62}"/>
+                <a16:creationId xmlns:a16="http://schemas.microsoft.com/office/drawing/2014/main" id="{3C788FC1-3E00-4B90-A2DC-4542C9037684}"/>
               </a:ext>
             </a:extLst>
           </p:cNvPr>
@@ -5029,7 +5029,7 @@
           <p:cNvPr id="6" name="Rectangle 5">
             <a:extLst xmlns:a="http://schemas.openxmlformats.org/drawingml/2006/main">
               <a:ext uri="{FF2B5EF4-FFF2-40B4-BE49-F238E27FC236}">
-                <a16:creationId xmlns:a16="http://schemas.microsoft.com/office/drawing/2014/main" id="{FFE73922-554A-42F7-A58D-937A46DB707F}"/>
+                <a16:creationId xmlns:a16="http://schemas.microsoft.com/office/drawing/2014/main" id="{BBD726D6-4E83-4DEA-9F46-6AB6BF354FAA}"/>
               </a:ext>
             </a:extLst>
           </p:cNvPr>
@@ -5084,7 +5084,7 @@
           <p:cNvPr id="7" name="TextBox 6">
             <a:extLst xmlns:a="http://schemas.openxmlformats.org/drawingml/2006/main">
               <a:ext uri="{FF2B5EF4-FFF2-40B4-BE49-F238E27FC236}">
-                <a16:creationId xmlns:a16="http://schemas.microsoft.com/office/drawing/2014/main" id="{4853AE13-557D-4753-B3F3-244091A8DD2F}"/>
+                <a16:creationId xmlns:a16="http://schemas.microsoft.com/office/drawing/2014/main" id="{1B3AB595-52B3-4D8D-A6CC-0BC94100243A}"/>
               </a:ext>
             </a:extLst>
           </p:cNvPr>
@@ -5131,7 +5131,7 @@
           <p:cNvPr id="8" name="TextBox 7">
             <a:extLst xmlns:a="http://schemas.openxmlformats.org/drawingml/2006/main">
               <a:ext uri="{FF2B5EF4-FFF2-40B4-BE49-F238E27FC236}">
-                <a16:creationId xmlns:a16="http://schemas.microsoft.com/office/drawing/2014/main" id="{776D89C7-ABFE-492F-B3D4-BD1FF2055693}"/>
+                <a16:creationId xmlns:a16="http://schemas.microsoft.com/office/drawing/2014/main" id="{997F5A60-FC5F-4487-9BCA-02A933288172}"/>
               </a:ext>
             </a:extLst>
           </p:cNvPr>
@@ -5168,7 +5168,7 @@
                 <a:ea typeface="Aptos"/>
                 <a:cs typeface="Aptos"/>
               </a:rPr>
-              <a:t>2026.07.22-8</a:t>
+              <a:t>2026.07.22-9</a:t>
             </a:r>
           </a:p>
         </p:txBody>
@@ -5178,7 +5178,7 @@
           <p:cNvPr id="9" name="TextBox 8">
             <a:extLst xmlns:a="http://schemas.openxmlformats.org/drawingml/2006/main">
               <a:ext uri="{FF2B5EF4-FFF2-40B4-BE49-F238E27FC236}">
-                <a16:creationId xmlns:a16="http://schemas.microsoft.com/office/drawing/2014/main" id="{494A7E97-4C6B-411D-B5E2-073E6BC621CF}"/>
+                <a16:creationId xmlns:a16="http://schemas.microsoft.com/office/drawing/2014/main" id="{5D774118-D2BE-4E1E-BF1A-73CB765369E1}"/>
               </a:ext>
             </a:extLst>
           </p:cNvPr>
@@ -5246,7 +5246,7 @@
           <p:cNvPr id="10" name="TextBox 9">
             <a:extLst xmlns:a="http://schemas.openxmlformats.org/drawingml/2006/main">
               <a:ext uri="{FF2B5EF4-FFF2-40B4-BE49-F238E27FC236}">
-                <a16:creationId xmlns:a16="http://schemas.microsoft.com/office/drawing/2014/main" id="{4AFD3323-6FC8-4846-903F-CB583DA385BB}"/>
+                <a16:creationId xmlns:a16="http://schemas.microsoft.com/office/drawing/2014/main" id="{8D20A22E-440B-465B-838F-8AD2E31A50ED}"/>
               </a:ext>
             </a:extLst>
           </p:cNvPr>
@@ -5293,7 +5293,7 @@
           <p:cNvPr id="11" name="TextBox 10">
             <a:extLst xmlns:a="http://schemas.openxmlformats.org/drawingml/2006/main">
               <a:ext uri="{FF2B5EF4-FFF2-40B4-BE49-F238E27FC236}">
-                <a16:creationId xmlns:a16="http://schemas.microsoft.com/office/drawing/2014/main" id="{6D340B5A-0B75-4113-BD39-343BC9265604}"/>
+                <a16:creationId xmlns:a16="http://schemas.microsoft.com/office/drawing/2014/main" id="{F1267EA7-9E4A-4869-B096-BF1A8E20C6F8}"/>
               </a:ext>
             </a:extLst>
           </p:cNvPr>
@@ -5340,7 +5340,7 @@
           <p:cNvPr id="12" name="TextBox 11">
             <a:extLst xmlns:a="http://schemas.openxmlformats.org/drawingml/2006/main">
               <a:ext uri="{FF2B5EF4-FFF2-40B4-BE49-F238E27FC236}">
-                <a16:creationId xmlns:a16="http://schemas.microsoft.com/office/drawing/2014/main" id="{6ABBE741-8650-45AE-A0C0-E1762C17D26D}"/>
+                <a16:creationId xmlns:a16="http://schemas.microsoft.com/office/drawing/2014/main" id="{F7A79862-8BE2-4057-AF7E-335F4F052DA8}"/>
               </a:ext>
             </a:extLst>
           </p:cNvPr>
@@ -5387,7 +5387,7 @@
           <p:cNvPr id="13" name="TextBox 12">
             <a:extLst xmlns:a="http://schemas.openxmlformats.org/drawingml/2006/main">
               <a:ext uri="{FF2B5EF4-FFF2-40B4-BE49-F238E27FC236}">
-                <a16:creationId xmlns:a16="http://schemas.microsoft.com/office/drawing/2014/main" id="{C7284389-7FDA-4276-A2D0-6C23BD61E178}"/>
+                <a16:creationId xmlns:a16="http://schemas.microsoft.com/office/drawing/2014/main" id="{375FEA72-D73F-4730-929C-70ECD73508B8}"/>
               </a:ext>
             </a:extLst>
           </p:cNvPr>
@@ -5432,7 +5432,7 @@
     </p:spTree>
     <p:extLst>
       <p:ext uri="{BB962C8B-B14F-4D97-AF65-F5344CB8AC3E}">
-        <p14:creationId xmlns:p14="http://schemas.microsoft.com/office/powerpoint/2010/main" val="1021630367"/>
+        <p14:creationId xmlns:p14="http://schemas.microsoft.com/office/powerpoint/2010/main" val="1130866537"/>
       </p:ext>
     </p:extLst>
   </p:cSld>
@@ -5456,7 +5456,7 @@
           <p:cNvPr id="2" name="TextBox 1">
             <a:extLst xmlns:a="http://schemas.openxmlformats.org/drawingml/2006/main">
               <a:ext uri="{FF2B5EF4-FFF2-40B4-BE49-F238E27FC236}">
-                <a16:creationId xmlns:a16="http://schemas.microsoft.com/office/drawing/2014/main" id="{05109C86-8EC6-4355-AD04-C928EF8FCD88}"/>
+                <a16:creationId xmlns:a16="http://schemas.microsoft.com/office/drawing/2014/main" id="{FD6C30C3-11C8-4FA3-9AF9-D6830DC07179}"/>
               </a:ext>
             </a:extLst>
           </p:cNvPr>
@@ -5503,7 +5503,7 @@
           <p:cNvPr id="3" name="TextBox 2">
             <a:extLst xmlns:a="http://schemas.openxmlformats.org/drawingml/2006/main">
               <a:ext uri="{FF2B5EF4-FFF2-40B4-BE49-F238E27FC236}">
-                <a16:creationId xmlns:a16="http://schemas.microsoft.com/office/drawing/2014/main" id="{033170A8-143F-410C-83BC-B67E7AB48E55}"/>
+                <a16:creationId xmlns:a16="http://schemas.microsoft.com/office/drawing/2014/main" id="{737B01BC-0B66-483A-937D-4446348A15F9}"/>
               </a:ext>
             </a:extLst>
           </p:cNvPr>
@@ -5550,7 +5550,7 @@
           <p:cNvPr id="4" name="Rectangle 3">
             <a:extLst xmlns:a="http://schemas.openxmlformats.org/drawingml/2006/main">
               <a:ext uri="{FF2B5EF4-FFF2-40B4-BE49-F238E27FC236}">
-                <a16:creationId xmlns:a16="http://schemas.microsoft.com/office/drawing/2014/main" id="{C877D445-1675-417A-937B-E52D6E5682C3}"/>
+                <a16:creationId xmlns:a16="http://schemas.microsoft.com/office/drawing/2014/main" id="{F8842717-5575-45C8-A04C-5185DE2AAD3D}"/>
               </a:ext>
             </a:extLst>
           </p:cNvPr>
@@ -5605,7 +5605,7 @@
           <p:cNvPr id="5" name="Rectangle 4">
             <a:extLst xmlns:a="http://schemas.openxmlformats.org/drawingml/2006/main">
               <a:ext uri="{FF2B5EF4-FFF2-40B4-BE49-F238E27FC236}">
-                <a16:creationId xmlns:a16="http://schemas.microsoft.com/office/drawing/2014/main" id="{4A14891D-B103-47B2-9A39-B79661558B23}"/>
+                <a16:creationId xmlns:a16="http://schemas.microsoft.com/office/drawing/2014/main" id="{CCF28730-9A1E-4283-94D7-04C55FE59F59}"/>
               </a:ext>
             </a:extLst>
           </p:cNvPr>
@@ -5660,7 +5660,7 @@
           <p:cNvPr id="6" name="TextBox 5">
             <a:extLst xmlns:a="http://schemas.openxmlformats.org/drawingml/2006/main">
               <a:ext uri="{FF2B5EF4-FFF2-40B4-BE49-F238E27FC236}">
-                <a16:creationId xmlns:a16="http://schemas.microsoft.com/office/drawing/2014/main" id="{154609B8-8BF6-4306-B501-91753C76F993}"/>
+                <a16:creationId xmlns:a16="http://schemas.microsoft.com/office/drawing/2014/main" id="{2231FFC6-0A21-46CA-B478-5E20371C51A4}"/>
               </a:ext>
             </a:extLst>
           </p:cNvPr>
@@ -5697,7 +5697,7 @@
                 <a:ea typeface="Aptos"/>
                 <a:cs typeface="Aptos"/>
               </a:rPr>
-              <a:t>Independent public evidence summary · 2026.07.22-8 · 2026-07-22 · Sources: WIPO licensing; dispute resolution; IPscore</a:t>
+              <a:t>Independent public evidence summary · 2026.07.22-9 · 2026-07-22 · Sources: WIPO licensing; dispute resolution; IPscore</a:t>
             </a:r>
           </a:p>
         </p:txBody>
@@ -5707,7 +5707,7 @@
           <p:cNvPr id="7" name="TextBox 6">
             <a:extLst xmlns:a="http://schemas.openxmlformats.org/drawingml/2006/main">
               <a:ext uri="{FF2B5EF4-FFF2-40B4-BE49-F238E27FC236}">
-                <a16:creationId xmlns:a16="http://schemas.microsoft.com/office/drawing/2014/main" id="{C257587B-714A-43FE-ABBA-84A94952B817}"/>
+                <a16:creationId xmlns:a16="http://schemas.microsoft.com/office/drawing/2014/main" id="{96916373-0A9D-451E-9BA5-1456F58024C4}"/>
               </a:ext>
             </a:extLst>
           </p:cNvPr>
@@ -5754,7 +5754,7 @@
           <p:cNvPr id="8" name="Rounded Rectangle 7">
             <a:extLst xmlns:a="http://schemas.openxmlformats.org/drawingml/2006/main">
               <a:ext uri="{FF2B5EF4-FFF2-40B4-BE49-F238E27FC236}">
-                <a16:creationId xmlns:a16="http://schemas.microsoft.com/office/drawing/2014/main" id="{1CA9323D-F434-4D68-98B7-CB5B75A14416}"/>
+                <a16:creationId xmlns:a16="http://schemas.microsoft.com/office/drawing/2014/main" id="{EDADE5A7-19AC-48DD-8796-7BFDD21164CB}"/>
               </a:ext>
             </a:extLst>
           </p:cNvPr>
@@ -5811,7 +5811,7 @@
           <p:cNvPr id="9" name="TextBox 8">
             <a:extLst xmlns:a="http://schemas.openxmlformats.org/drawingml/2006/main">
               <a:ext uri="{FF2B5EF4-FFF2-40B4-BE49-F238E27FC236}">
-                <a16:creationId xmlns:a16="http://schemas.microsoft.com/office/drawing/2014/main" id="{ED3F421D-ABD4-4C6D-A2EF-635349E44390}"/>
+                <a16:creationId xmlns:a16="http://schemas.microsoft.com/office/drawing/2014/main" id="{EF5F5443-D284-4473-98B3-3320E2DE8F6F}"/>
               </a:ext>
             </a:extLst>
           </p:cNvPr>
@@ -5858,7 +5858,7 @@
           <p:cNvPr id="10" name="TextBox 9">
             <a:extLst xmlns:a="http://schemas.openxmlformats.org/drawingml/2006/main">
               <a:ext uri="{FF2B5EF4-FFF2-40B4-BE49-F238E27FC236}">
-                <a16:creationId xmlns:a16="http://schemas.microsoft.com/office/drawing/2014/main" id="{9E502387-D89C-40C1-8FD6-B33AF4C4C260}"/>
+                <a16:creationId xmlns:a16="http://schemas.microsoft.com/office/drawing/2014/main" id="{E89DC1F9-D136-46F3-8CDB-0950FC75B9C2}"/>
               </a:ext>
             </a:extLst>
           </p:cNvPr>
@@ -5905,7 +5905,7 @@
           <p:cNvPr id="11" name="TextBox 10">
             <a:extLst xmlns:a="http://schemas.openxmlformats.org/drawingml/2006/main">
               <a:ext uri="{FF2B5EF4-FFF2-40B4-BE49-F238E27FC236}">
-                <a16:creationId xmlns:a16="http://schemas.microsoft.com/office/drawing/2014/main" id="{377A0967-E2EB-4560-9325-3FBCD3E093B2}"/>
+                <a16:creationId xmlns:a16="http://schemas.microsoft.com/office/drawing/2014/main" id="{510CF3A9-91AC-4D25-8999-E9B23B5492AE}"/>
               </a:ext>
             </a:extLst>
           </p:cNvPr>
@@ -5952,7 +5952,7 @@
           <p:cNvPr id="12" name="Rounded Rectangle 11">
             <a:extLst xmlns:a="http://schemas.openxmlformats.org/drawingml/2006/main">
               <a:ext uri="{FF2B5EF4-FFF2-40B4-BE49-F238E27FC236}">
-                <a16:creationId xmlns:a16="http://schemas.microsoft.com/office/drawing/2014/main" id="{D2835C03-346D-49F5-A871-83EF4DFFF608}"/>
+                <a16:creationId xmlns:a16="http://schemas.microsoft.com/office/drawing/2014/main" id="{77F877FC-D95D-4961-A07F-576ECCD2E52B}"/>
               </a:ext>
             </a:extLst>
           </p:cNvPr>
@@ -6009,7 +6009,7 @@
           <p:cNvPr id="13" name="TextBox 12">
             <a:extLst xmlns:a="http://schemas.openxmlformats.org/drawingml/2006/main">
               <a:ext uri="{FF2B5EF4-FFF2-40B4-BE49-F238E27FC236}">
-                <a16:creationId xmlns:a16="http://schemas.microsoft.com/office/drawing/2014/main" id="{315AF7E2-F094-412B-A839-18FEECF55395}"/>
+                <a16:creationId xmlns:a16="http://schemas.microsoft.com/office/drawing/2014/main" id="{7A49E1BF-6B50-42ED-9B84-242AB046D3BD}"/>
               </a:ext>
             </a:extLst>
           </p:cNvPr>
@@ -6056,7 +6056,7 @@
           <p:cNvPr id="14" name="TextBox 13">
             <a:extLst xmlns:a="http://schemas.openxmlformats.org/drawingml/2006/main">
               <a:ext uri="{FF2B5EF4-FFF2-40B4-BE49-F238E27FC236}">
-                <a16:creationId xmlns:a16="http://schemas.microsoft.com/office/drawing/2014/main" id="{3BE1CE36-5225-4336-84C3-512C7E50B3C4}"/>
+                <a16:creationId xmlns:a16="http://schemas.microsoft.com/office/drawing/2014/main" id="{970ACCFA-3D26-44DB-AE17-F226BF9449CF}"/>
               </a:ext>
             </a:extLst>
           </p:cNvPr>
@@ -6103,7 +6103,7 @@
           <p:cNvPr id="15" name="TextBox 14">
             <a:extLst xmlns:a="http://schemas.openxmlformats.org/drawingml/2006/main">
               <a:ext uri="{FF2B5EF4-FFF2-40B4-BE49-F238E27FC236}">
-                <a16:creationId xmlns:a16="http://schemas.microsoft.com/office/drawing/2014/main" id="{B4500646-3F32-4253-A5D1-9012FA6C738D}"/>
+                <a16:creationId xmlns:a16="http://schemas.microsoft.com/office/drawing/2014/main" id="{C8EA758C-997C-4BF5-8767-F3971D548C1C}"/>
               </a:ext>
             </a:extLst>
           </p:cNvPr>
@@ -6150,7 +6150,7 @@
           <p:cNvPr id="16" name="Rounded Rectangle 15">
             <a:extLst xmlns:a="http://schemas.openxmlformats.org/drawingml/2006/main">
               <a:ext uri="{FF2B5EF4-FFF2-40B4-BE49-F238E27FC236}">
-                <a16:creationId xmlns:a16="http://schemas.microsoft.com/office/drawing/2014/main" id="{C24640AB-54B2-4880-8BE0-E530564EF662}"/>
+                <a16:creationId xmlns:a16="http://schemas.microsoft.com/office/drawing/2014/main" id="{3765DD77-6714-49BA-A032-7C26439EC31B}"/>
               </a:ext>
             </a:extLst>
           </p:cNvPr>
@@ -6207,7 +6207,7 @@
           <p:cNvPr id="17" name="TextBox 16">
             <a:extLst xmlns:a="http://schemas.openxmlformats.org/drawingml/2006/main">
               <a:ext uri="{FF2B5EF4-FFF2-40B4-BE49-F238E27FC236}">
-                <a16:creationId xmlns:a16="http://schemas.microsoft.com/office/drawing/2014/main" id="{3D8D2FA2-9CB4-4F38-8C80-68779A12AA48}"/>
+                <a16:creationId xmlns:a16="http://schemas.microsoft.com/office/drawing/2014/main" id="{7FD89226-3768-4F10-8E98-74AEA401CDD3}"/>
               </a:ext>
             </a:extLst>
           </p:cNvPr>
@@ -6254,7 +6254,7 @@
           <p:cNvPr id="18" name="TextBox 17">
             <a:extLst xmlns:a="http://schemas.openxmlformats.org/drawingml/2006/main">
               <a:ext uri="{FF2B5EF4-FFF2-40B4-BE49-F238E27FC236}">
-                <a16:creationId xmlns:a16="http://schemas.microsoft.com/office/drawing/2014/main" id="{145106C2-732A-4E4B-BB2C-27108982C5C8}"/>
+                <a16:creationId xmlns:a16="http://schemas.microsoft.com/office/drawing/2014/main" id="{505FE3E6-8331-4F72-84A5-F1AB0ADA3D32}"/>
               </a:ext>
             </a:extLst>
           </p:cNvPr>
@@ -6301,7 +6301,7 @@
           <p:cNvPr id="19" name="TextBox 18">
             <a:extLst xmlns:a="http://schemas.openxmlformats.org/drawingml/2006/main">
               <a:ext uri="{FF2B5EF4-FFF2-40B4-BE49-F238E27FC236}">
-                <a16:creationId xmlns:a16="http://schemas.microsoft.com/office/drawing/2014/main" id="{4F2AD5EC-3372-4357-A110-D6AC3D42DBCE}"/>
+                <a16:creationId xmlns:a16="http://schemas.microsoft.com/office/drawing/2014/main" id="{D2620B82-038E-4EEF-A3DF-FFE8D2F50EB8}"/>
               </a:ext>
             </a:extLst>
           </p:cNvPr>
@@ -6348,7 +6348,7 @@
           <p:cNvPr id="20" name="Rounded Rectangle 19">
             <a:extLst xmlns:a="http://schemas.openxmlformats.org/drawingml/2006/main">
               <a:ext uri="{FF2B5EF4-FFF2-40B4-BE49-F238E27FC236}">
-                <a16:creationId xmlns:a16="http://schemas.microsoft.com/office/drawing/2014/main" id="{AC415AFA-597F-40BB-91D1-0782A9305F5A}"/>
+                <a16:creationId xmlns:a16="http://schemas.microsoft.com/office/drawing/2014/main" id="{C027390C-DFE1-4772-A617-3B531E1B3121}"/>
               </a:ext>
             </a:extLst>
           </p:cNvPr>
@@ -6405,7 +6405,7 @@
           <p:cNvPr id="21" name="TextBox 20">
             <a:extLst xmlns:a="http://schemas.openxmlformats.org/drawingml/2006/main">
               <a:ext uri="{FF2B5EF4-FFF2-40B4-BE49-F238E27FC236}">
-                <a16:creationId xmlns:a16="http://schemas.microsoft.com/office/drawing/2014/main" id="{128FA5A6-AB1E-48A8-AB6A-413942FD14A4}"/>
+                <a16:creationId xmlns:a16="http://schemas.microsoft.com/office/drawing/2014/main" id="{A0EA7F01-F99C-49F2-9853-70E960DBE8BC}"/>
               </a:ext>
             </a:extLst>
           </p:cNvPr>
@@ -6452,7 +6452,7 @@
           <p:cNvPr id="22" name="TextBox 21">
             <a:extLst xmlns:a="http://schemas.openxmlformats.org/drawingml/2006/main">
               <a:ext uri="{FF2B5EF4-FFF2-40B4-BE49-F238E27FC236}">
-                <a16:creationId xmlns:a16="http://schemas.microsoft.com/office/drawing/2014/main" id="{293DE7AA-00C5-44C6-9C30-D940C743E3CA}"/>
+                <a16:creationId xmlns:a16="http://schemas.microsoft.com/office/drawing/2014/main" id="{428DD6E2-CBA1-4F50-AAB1-37B8721C6FE1}"/>
               </a:ext>
             </a:extLst>
           </p:cNvPr>
@@ -6499,7 +6499,7 @@
           <p:cNvPr id="23" name="TextBox 22">
             <a:extLst xmlns:a="http://schemas.openxmlformats.org/drawingml/2006/main">
               <a:ext uri="{FF2B5EF4-FFF2-40B4-BE49-F238E27FC236}">
-                <a16:creationId xmlns:a16="http://schemas.microsoft.com/office/drawing/2014/main" id="{6B803DBD-4897-4618-948B-A828BDFF8EFC}"/>
+                <a16:creationId xmlns:a16="http://schemas.microsoft.com/office/drawing/2014/main" id="{430067A0-F501-4419-B6B8-680BD6D68363}"/>
               </a:ext>
             </a:extLst>
           </p:cNvPr>
@@ -6546,7 +6546,7 @@
           <p:cNvPr id="24" name="TextBox 23">
             <a:extLst xmlns:a="http://schemas.openxmlformats.org/drawingml/2006/main">
               <a:ext uri="{FF2B5EF4-FFF2-40B4-BE49-F238E27FC236}">
-                <a16:creationId xmlns:a16="http://schemas.microsoft.com/office/drawing/2014/main" id="{EAFD106F-7345-4BE8-9087-F5F33B59C26F}"/>
+                <a16:creationId xmlns:a16="http://schemas.microsoft.com/office/drawing/2014/main" id="{DE593E4B-5C52-445E-BE5B-6FC55050EBF6}"/>
               </a:ext>
             </a:extLst>
           </p:cNvPr>
@@ -6591,7 +6591,7 @@
     </p:spTree>
     <p:extLst>
       <p:ext uri="{BB962C8B-B14F-4D97-AF65-F5344CB8AC3E}">
-        <p14:creationId xmlns:p14="http://schemas.microsoft.com/office/powerpoint/2010/main" val="836590638"/>
+        <p14:creationId xmlns:p14="http://schemas.microsoft.com/office/powerpoint/2010/main" val="1639076334"/>
       </p:ext>
     </p:extLst>
   </p:cSld>
@@ -6615,7 +6615,7 @@
           <p:cNvPr id="2" name="TextBox 1">
             <a:extLst xmlns:a="http://schemas.openxmlformats.org/drawingml/2006/main">
               <a:ext uri="{FF2B5EF4-FFF2-40B4-BE49-F238E27FC236}">
-                <a16:creationId xmlns:a16="http://schemas.microsoft.com/office/drawing/2014/main" id="{BD0B80EA-555F-49E8-85F8-5846A6BBB3BF}"/>
+                <a16:creationId xmlns:a16="http://schemas.microsoft.com/office/drawing/2014/main" id="{4E232710-B184-4CCC-A1B2-309BA89E5F88}"/>
               </a:ext>
             </a:extLst>
           </p:cNvPr>
@@ -6662,7 +6662,7 @@
           <p:cNvPr id="3" name="TextBox 2">
             <a:extLst xmlns:a="http://schemas.openxmlformats.org/drawingml/2006/main">
               <a:ext uri="{FF2B5EF4-FFF2-40B4-BE49-F238E27FC236}">
-                <a16:creationId xmlns:a16="http://schemas.microsoft.com/office/drawing/2014/main" id="{DB9BCB8E-1F93-4A15-A4C2-5A92015413E1}"/>
+                <a16:creationId xmlns:a16="http://schemas.microsoft.com/office/drawing/2014/main" id="{F718CDD5-1624-4B2E-BCA9-B89401915207}"/>
               </a:ext>
             </a:extLst>
           </p:cNvPr>
@@ -6709,7 +6709,7 @@
           <p:cNvPr id="4" name="Rectangle 3">
             <a:extLst xmlns:a="http://schemas.openxmlformats.org/drawingml/2006/main">
               <a:ext uri="{FF2B5EF4-FFF2-40B4-BE49-F238E27FC236}">
-                <a16:creationId xmlns:a16="http://schemas.microsoft.com/office/drawing/2014/main" id="{61721E74-CF86-4B97-B6E9-9D27FB67A618}"/>
+                <a16:creationId xmlns:a16="http://schemas.microsoft.com/office/drawing/2014/main" id="{C22F6029-DC11-4B53-BCEB-00C75E6490F6}"/>
               </a:ext>
             </a:extLst>
           </p:cNvPr>
@@ -6764,7 +6764,7 @@
           <p:cNvPr id="5" name="Rectangle 4">
             <a:extLst xmlns:a="http://schemas.openxmlformats.org/drawingml/2006/main">
               <a:ext uri="{FF2B5EF4-FFF2-40B4-BE49-F238E27FC236}">
-                <a16:creationId xmlns:a16="http://schemas.microsoft.com/office/drawing/2014/main" id="{F777791D-9044-4600-B072-FF89B259A1BF}"/>
+                <a16:creationId xmlns:a16="http://schemas.microsoft.com/office/drawing/2014/main" id="{6D4F1229-0084-4FE6-A720-77DF2BB15B8A}"/>
               </a:ext>
             </a:extLst>
           </p:cNvPr>
@@ -6819,7 +6819,7 @@
           <p:cNvPr id="6" name="TextBox 5">
             <a:extLst xmlns:a="http://schemas.openxmlformats.org/drawingml/2006/main">
               <a:ext uri="{FF2B5EF4-FFF2-40B4-BE49-F238E27FC236}">
-                <a16:creationId xmlns:a16="http://schemas.microsoft.com/office/drawing/2014/main" id="{3B6BD54E-80BE-43A6-A46F-9417D9345D2A}"/>
+                <a16:creationId xmlns:a16="http://schemas.microsoft.com/office/drawing/2014/main" id="{8817350E-FF33-4D07-A37F-25CA27ACE29C}"/>
               </a:ext>
             </a:extLst>
           </p:cNvPr>
@@ -6856,7 +6856,7 @@
                 <a:ea typeface="Aptos"/>
                 <a:cs typeface="Aptos"/>
               </a:rPr>
-              <a:t>Independent public evidence summary · 2026.07.22-8 · 2026-07-22 · Sources: WIPO IP valuation; Market-values</a:t>
+              <a:t>Independent public evidence summary · 2026.07.22-9 · 2026-07-22 · Sources: WIPO IP valuation; Market-values</a:t>
             </a:r>
           </a:p>
         </p:txBody>
@@ -6866,7 +6866,7 @@
           <p:cNvPr id="7" name="TextBox 6">
             <a:extLst xmlns:a="http://schemas.openxmlformats.org/drawingml/2006/main">
               <a:ext uri="{FF2B5EF4-FFF2-40B4-BE49-F238E27FC236}">
-                <a16:creationId xmlns:a16="http://schemas.microsoft.com/office/drawing/2014/main" id="{F4E21E96-7DAA-49DD-8481-30AC2479BD11}"/>
+                <a16:creationId xmlns:a16="http://schemas.microsoft.com/office/drawing/2014/main" id="{484CE04D-9463-4D33-AE67-39738F36DA14}"/>
               </a:ext>
             </a:extLst>
           </p:cNvPr>
@@ -7436,7 +7436,7 @@
           <p:cNvPr id="9" name="TextBox 8">
             <a:extLst xmlns:a="http://schemas.openxmlformats.org/drawingml/2006/main">
               <a:ext uri="{FF2B5EF4-FFF2-40B4-BE49-F238E27FC236}">
-                <a16:creationId xmlns:a16="http://schemas.microsoft.com/office/drawing/2014/main" id="{71478B49-4840-4DC1-83DA-924DA29970A1}"/>
+                <a16:creationId xmlns:a16="http://schemas.microsoft.com/office/drawing/2014/main" id="{7E1F9BA1-E041-4D6E-8269-C8B03165B6B5}"/>
               </a:ext>
             </a:extLst>
           </p:cNvPr>
@@ -7481,7 +7481,7 @@
     </p:spTree>
     <p:extLst>
       <p:ext uri="{BB962C8B-B14F-4D97-AF65-F5344CB8AC3E}">
-        <p14:creationId xmlns:p14="http://schemas.microsoft.com/office/powerpoint/2010/main" val="1799968614"/>
+        <p14:creationId xmlns:p14="http://schemas.microsoft.com/office/powerpoint/2010/main" val="1221737421"/>
       </p:ext>
     </p:extLst>
   </p:cSld>
@@ -7512,7 +7512,7 @@
           <p:cNvPr id="2" name="TextBox 1">
             <a:extLst xmlns:a="http://schemas.openxmlformats.org/drawingml/2006/main">
               <a:ext uri="{FF2B5EF4-FFF2-40B4-BE49-F238E27FC236}">
-                <a16:creationId xmlns:a16="http://schemas.microsoft.com/office/drawing/2014/main" id="{14B95CD5-F7F2-4D60-B6F4-B265A93C9C3C}"/>
+                <a16:creationId xmlns:a16="http://schemas.microsoft.com/office/drawing/2014/main" id="{28D087D5-3408-44A5-B2CC-37C97F7A5BC3}"/>
               </a:ext>
             </a:extLst>
           </p:cNvPr>
@@ -7559,7 +7559,7 @@
           <p:cNvPr id="3" name="TextBox 2">
             <a:extLst xmlns:a="http://schemas.openxmlformats.org/drawingml/2006/main">
               <a:ext uri="{FF2B5EF4-FFF2-40B4-BE49-F238E27FC236}">
-                <a16:creationId xmlns:a16="http://schemas.microsoft.com/office/drawing/2014/main" id="{C980DF3C-0508-4DB7-ADF2-04EBB3E1F23D}"/>
+                <a16:creationId xmlns:a16="http://schemas.microsoft.com/office/drawing/2014/main" id="{5A64A17D-BB48-4FA0-BE76-DE0B0A9DB339}"/>
               </a:ext>
             </a:extLst>
           </p:cNvPr>
@@ -7606,7 +7606,7 @@
           <p:cNvPr id="4" name="TextBox 3">
             <a:extLst xmlns:a="http://schemas.openxmlformats.org/drawingml/2006/main">
               <a:ext uri="{FF2B5EF4-FFF2-40B4-BE49-F238E27FC236}">
-                <a16:creationId xmlns:a16="http://schemas.microsoft.com/office/drawing/2014/main" id="{FEC8D81F-65F6-4B6B-B99C-71C6C574560B}"/>
+                <a16:creationId xmlns:a16="http://schemas.microsoft.com/office/drawing/2014/main" id="{AAC9CD18-B141-4CBB-845C-AD01F7685D1B}"/>
               </a:ext>
             </a:extLst>
           </p:cNvPr>
@@ -7747,7 +7747,7 @@
           <p:cNvPr id="5" name="TextBox 4">
             <a:extLst xmlns:a="http://schemas.openxmlformats.org/drawingml/2006/main">
               <a:ext uri="{FF2B5EF4-FFF2-40B4-BE49-F238E27FC236}">
-                <a16:creationId xmlns:a16="http://schemas.microsoft.com/office/drawing/2014/main" id="{A25B3123-E9B7-4526-BB3C-999BC1927C40}"/>
+                <a16:creationId xmlns:a16="http://schemas.microsoft.com/office/drawing/2014/main" id="{0658B046-4307-4E7C-BEAA-E51D71EDBF24}"/>
               </a:ext>
             </a:extLst>
           </p:cNvPr>
@@ -7784,7 +7784,7 @@
                 <a:ea typeface="Aptos"/>
                 <a:cs typeface="Aptos"/>
               </a:rPr>
-              <a:t>Version 2026.07.22-8 · 2026-07-22 · 12 / 12</a:t>
+              <a:t>Version 2026.07.22-9 · 2026-07-22 · 12 / 12</a:t>
             </a:r>
           </a:p>
         </p:txBody>
@@ -7794,7 +7794,7 @@
           <p:cNvPr id="6" name="TextBox 5">
             <a:extLst xmlns:a="http://schemas.openxmlformats.org/drawingml/2006/main">
               <a:ext uri="{FF2B5EF4-FFF2-40B4-BE49-F238E27FC236}">
-                <a16:creationId xmlns:a16="http://schemas.microsoft.com/office/drawing/2014/main" id="{2754450B-1935-4DA1-ABAA-DCE3D32305E6}"/>
+                <a16:creationId xmlns:a16="http://schemas.microsoft.com/office/drawing/2014/main" id="{C73AD958-5550-4C4F-8C2D-68AE7D30B043}"/>
               </a:ext>
             </a:extLst>
           </p:cNvPr>
@@ -7839,7 +7839,7 @@
     </p:spTree>
     <p:extLst>
       <p:ext uri="{BB962C8B-B14F-4D97-AF65-F5344CB8AC3E}">
-        <p14:creationId xmlns:p14="http://schemas.microsoft.com/office/powerpoint/2010/main" val="1678084732"/>
+        <p14:creationId xmlns:p14="http://schemas.microsoft.com/office/powerpoint/2010/main" val="1549444585"/>
       </p:ext>
     </p:extLst>
   </p:cSld>
@@ -7863,7 +7863,7 @@
           <p:cNvPr id="2" name="TextBox 1">
             <a:extLst xmlns:a="http://schemas.openxmlformats.org/drawingml/2006/main">
               <a:ext uri="{FF2B5EF4-FFF2-40B4-BE49-F238E27FC236}">
-                <a16:creationId xmlns:a16="http://schemas.microsoft.com/office/drawing/2014/main" id="{308FE9C4-B76D-46BF-9809-D1D9EF76E017}"/>
+                <a16:creationId xmlns:a16="http://schemas.microsoft.com/office/drawing/2014/main" id="{09E04BCC-6912-477F-91A5-E3C1FA85A064}"/>
               </a:ext>
             </a:extLst>
           </p:cNvPr>
@@ -7910,7 +7910,7 @@
           <p:cNvPr id="3" name="TextBox 2">
             <a:extLst xmlns:a="http://schemas.openxmlformats.org/drawingml/2006/main">
               <a:ext uri="{FF2B5EF4-FFF2-40B4-BE49-F238E27FC236}">
-                <a16:creationId xmlns:a16="http://schemas.microsoft.com/office/drawing/2014/main" id="{FE94564F-EAA9-41D3-BE0E-85C00D1B5CDD}"/>
+                <a16:creationId xmlns:a16="http://schemas.microsoft.com/office/drawing/2014/main" id="{1E0D2A11-462D-4BF0-9910-D1C8D20F7725}"/>
               </a:ext>
             </a:extLst>
           </p:cNvPr>
@@ -7957,7 +7957,7 @@
           <p:cNvPr id="4" name="Rectangle 3">
             <a:extLst xmlns:a="http://schemas.openxmlformats.org/drawingml/2006/main">
               <a:ext uri="{FF2B5EF4-FFF2-40B4-BE49-F238E27FC236}">
-                <a16:creationId xmlns:a16="http://schemas.microsoft.com/office/drawing/2014/main" id="{96353E6D-4829-44FD-8AD1-9E976AB2849E}"/>
+                <a16:creationId xmlns:a16="http://schemas.microsoft.com/office/drawing/2014/main" id="{AC331220-A23C-43D8-810B-DB7E97B5FEDE}"/>
               </a:ext>
             </a:extLst>
           </p:cNvPr>
@@ -8012,7 +8012,7 @@
           <p:cNvPr id="5" name="Rectangle 4">
             <a:extLst xmlns:a="http://schemas.openxmlformats.org/drawingml/2006/main">
               <a:ext uri="{FF2B5EF4-FFF2-40B4-BE49-F238E27FC236}">
-                <a16:creationId xmlns:a16="http://schemas.microsoft.com/office/drawing/2014/main" id="{958EDE96-42B2-4AE9-B732-3D91BCE3B371}"/>
+                <a16:creationId xmlns:a16="http://schemas.microsoft.com/office/drawing/2014/main" id="{C9E364CF-CF0D-4548-93DF-709E9A86B088}"/>
               </a:ext>
             </a:extLst>
           </p:cNvPr>
@@ -8067,7 +8067,7 @@
           <p:cNvPr id="6" name="TextBox 5">
             <a:extLst xmlns:a="http://schemas.openxmlformats.org/drawingml/2006/main">
               <a:ext uri="{FF2B5EF4-FFF2-40B4-BE49-F238E27FC236}">
-                <a16:creationId xmlns:a16="http://schemas.microsoft.com/office/drawing/2014/main" id="{B92CB096-27D9-46F3-BEB0-7E465E7302DB}"/>
+                <a16:creationId xmlns:a16="http://schemas.microsoft.com/office/drawing/2014/main" id="{942E0562-C5F3-488F-B7C1-A1CDE3F07D2E}"/>
               </a:ext>
             </a:extLst>
           </p:cNvPr>
@@ -8104,7 +8104,7 @@
                 <a:ea typeface="Aptos"/>
                 <a:cs typeface="Aptos"/>
               </a:rPr>
-              <a:t>Independent public evidence summary · 2026.07.22-8 · 2026-07-22 · Sources: Atlas readiness; WIPO</a:t>
+              <a:t>Independent public evidence summary · 2026.07.22-9 · 2026-07-22 · Sources: Atlas readiness; WIPO</a:t>
             </a:r>
           </a:p>
         </p:txBody>
@@ -8114,7 +8114,7 @@
           <p:cNvPr id="7" name="TextBox 6">
             <a:extLst xmlns:a="http://schemas.openxmlformats.org/drawingml/2006/main">
               <a:ext uri="{FF2B5EF4-FFF2-40B4-BE49-F238E27FC236}">
-                <a16:creationId xmlns:a16="http://schemas.microsoft.com/office/drawing/2014/main" id="{14609923-B59A-45CC-BBC8-1D5C1EA4A1C6}"/>
+                <a16:creationId xmlns:a16="http://schemas.microsoft.com/office/drawing/2014/main" id="{59A1F81A-140C-4A8A-9640-68C59375C8EE}"/>
               </a:ext>
             </a:extLst>
           </p:cNvPr>
@@ -8161,7 +8161,7 @@
           <p:cNvPr id="8" name="TextBox 7">
             <a:extLst xmlns:a="http://schemas.openxmlformats.org/drawingml/2006/main">
               <a:ext uri="{FF2B5EF4-FFF2-40B4-BE49-F238E27FC236}">
-                <a16:creationId xmlns:a16="http://schemas.microsoft.com/office/drawing/2014/main" id="{5B0923B6-833F-491D-86D2-A5109418D414}"/>
+                <a16:creationId xmlns:a16="http://schemas.microsoft.com/office/drawing/2014/main" id="{D32920F7-8902-4CDC-9EB7-4CC714E1A1C5}"/>
               </a:ext>
             </a:extLst>
           </p:cNvPr>
@@ -8208,7 +8208,7 @@
           <p:cNvPr id="9" name="TextBox 8">
             <a:extLst xmlns:a="http://schemas.openxmlformats.org/drawingml/2006/main">
               <a:ext uri="{FF2B5EF4-FFF2-40B4-BE49-F238E27FC236}">
-                <a16:creationId xmlns:a16="http://schemas.microsoft.com/office/drawing/2014/main" id="{E905FF16-E0B9-4D2A-B52B-A60034B36D25}"/>
+                <a16:creationId xmlns:a16="http://schemas.microsoft.com/office/drawing/2014/main" id="{0D8947A3-99C8-4290-B184-74EA10397903}"/>
               </a:ext>
             </a:extLst>
           </p:cNvPr>
@@ -8305,7 +8305,7 @@
           <p:cNvPr id="10" name="Rounded Rectangle 9">
             <a:extLst xmlns:a="http://schemas.openxmlformats.org/drawingml/2006/main">
               <a:ext uri="{FF2B5EF4-FFF2-40B4-BE49-F238E27FC236}">
-                <a16:creationId xmlns:a16="http://schemas.microsoft.com/office/drawing/2014/main" id="{E159806A-3478-442A-ACB9-B56725E1C593}"/>
+                <a16:creationId xmlns:a16="http://schemas.microsoft.com/office/drawing/2014/main" id="{329CC2EF-2149-4399-A53F-4256C5344829}"/>
               </a:ext>
             </a:extLst>
           </p:cNvPr>
@@ -8362,7 +8362,7 @@
           <p:cNvPr id="11" name="TextBox 10">
             <a:extLst xmlns:a="http://schemas.openxmlformats.org/drawingml/2006/main">
               <a:ext uri="{FF2B5EF4-FFF2-40B4-BE49-F238E27FC236}">
-                <a16:creationId xmlns:a16="http://schemas.microsoft.com/office/drawing/2014/main" id="{D6202756-5D19-4072-B974-BF4EF5396A8F}"/>
+                <a16:creationId xmlns:a16="http://schemas.microsoft.com/office/drawing/2014/main" id="{3606F239-70E2-4961-BB74-BA06D4C97125}"/>
               </a:ext>
             </a:extLst>
           </p:cNvPr>
@@ -8409,7 +8409,7 @@
           <p:cNvPr id="12" name="TextBox 11">
             <a:extLst xmlns:a="http://schemas.openxmlformats.org/drawingml/2006/main">
               <a:ext uri="{FF2B5EF4-FFF2-40B4-BE49-F238E27FC236}">
-                <a16:creationId xmlns:a16="http://schemas.microsoft.com/office/drawing/2014/main" id="{CEBE1D95-6E92-463F-80D9-0ED36EF4C5FD}"/>
+                <a16:creationId xmlns:a16="http://schemas.microsoft.com/office/drawing/2014/main" id="{D3613AE4-4565-4E86-80E3-E6BB9B2B14EA}"/>
               </a:ext>
             </a:extLst>
           </p:cNvPr>
@@ -8454,7 +8454,7 @@
     </p:spTree>
     <p:extLst>
       <p:ext uri="{BB962C8B-B14F-4D97-AF65-F5344CB8AC3E}">
-        <p14:creationId xmlns:p14="http://schemas.microsoft.com/office/powerpoint/2010/main" val="1301849253"/>
+        <p14:creationId xmlns:p14="http://schemas.microsoft.com/office/powerpoint/2010/main" val="1774329846"/>
       </p:ext>
     </p:extLst>
   </p:cSld>
@@ -8478,7 +8478,7 @@
           <p:cNvPr id="2" name="TextBox 1">
             <a:extLst xmlns:a="http://schemas.openxmlformats.org/drawingml/2006/main">
               <a:ext uri="{FF2B5EF4-FFF2-40B4-BE49-F238E27FC236}">
-                <a16:creationId xmlns:a16="http://schemas.microsoft.com/office/drawing/2014/main" id="{955BFDE9-A41E-458F-98B8-F993217EEBCD}"/>
+                <a16:creationId xmlns:a16="http://schemas.microsoft.com/office/drawing/2014/main" id="{890A9D2B-0272-4EAE-8655-2E5F50399495}"/>
               </a:ext>
             </a:extLst>
           </p:cNvPr>
@@ -8525,7 +8525,7 @@
           <p:cNvPr id="3" name="TextBox 2">
             <a:extLst xmlns:a="http://schemas.openxmlformats.org/drawingml/2006/main">
               <a:ext uri="{FF2B5EF4-FFF2-40B4-BE49-F238E27FC236}">
-                <a16:creationId xmlns:a16="http://schemas.microsoft.com/office/drawing/2014/main" id="{5B30F2EA-3C95-45A4-8B50-E6AF212191E9}"/>
+                <a16:creationId xmlns:a16="http://schemas.microsoft.com/office/drawing/2014/main" id="{D69D36D0-4614-4C55-A82A-CAD3AD5C7121}"/>
               </a:ext>
             </a:extLst>
           </p:cNvPr>
@@ -8572,7 +8572,7 @@
           <p:cNvPr id="4" name="Rectangle 3">
             <a:extLst xmlns:a="http://schemas.openxmlformats.org/drawingml/2006/main">
               <a:ext uri="{FF2B5EF4-FFF2-40B4-BE49-F238E27FC236}">
-                <a16:creationId xmlns:a16="http://schemas.microsoft.com/office/drawing/2014/main" id="{39BA07C3-A756-4DF8-851C-DA233F9FAE28}"/>
+                <a16:creationId xmlns:a16="http://schemas.microsoft.com/office/drawing/2014/main" id="{FB2C96EF-3290-46EC-B161-195350199B8D}"/>
               </a:ext>
             </a:extLst>
           </p:cNvPr>
@@ -8627,7 +8627,7 @@
           <p:cNvPr id="5" name="Rectangle 4">
             <a:extLst xmlns:a="http://schemas.openxmlformats.org/drawingml/2006/main">
               <a:ext uri="{FF2B5EF4-FFF2-40B4-BE49-F238E27FC236}">
-                <a16:creationId xmlns:a16="http://schemas.microsoft.com/office/drawing/2014/main" id="{E2B112EE-FC90-46B0-8E7E-E16F3AA4A435}"/>
+                <a16:creationId xmlns:a16="http://schemas.microsoft.com/office/drawing/2014/main" id="{CBA61D7F-13F6-4C89-83EE-4461E5059D6E}"/>
               </a:ext>
             </a:extLst>
           </p:cNvPr>
@@ -8682,7 +8682,7 @@
           <p:cNvPr id="6" name="TextBox 5">
             <a:extLst xmlns:a="http://schemas.openxmlformats.org/drawingml/2006/main">
               <a:ext uri="{FF2B5EF4-FFF2-40B4-BE49-F238E27FC236}">
-                <a16:creationId xmlns:a16="http://schemas.microsoft.com/office/drawing/2014/main" id="{B8C74737-9147-4754-AC62-9B554677B8C9}"/>
+                <a16:creationId xmlns:a16="http://schemas.microsoft.com/office/drawing/2014/main" id="{48E36840-5754-43FC-ABC0-88B7AC5F1B5B}"/>
               </a:ext>
             </a:extLst>
           </p:cNvPr>
@@ -8719,7 +8719,7 @@
                 <a:ea typeface="Aptos"/>
                 <a:cs typeface="Aptos"/>
               </a:rPr>
-              <a:t>Independent public evidence summary · 2026.07.22-8 · 2026-07-22 · Sources: EP3032975B2</a:t>
+              <a:t>Independent public evidence summary · 2026.07.22-9 · 2026-07-22 · Sources: EP3032975B2</a:t>
             </a:r>
           </a:p>
         </p:txBody>
@@ -8729,7 +8729,7 @@
           <p:cNvPr id="7" name="TextBox 6">
             <a:extLst xmlns:a="http://schemas.openxmlformats.org/drawingml/2006/main">
               <a:ext uri="{FF2B5EF4-FFF2-40B4-BE49-F238E27FC236}">
-                <a16:creationId xmlns:a16="http://schemas.microsoft.com/office/drawing/2014/main" id="{99804AB0-0940-4372-B343-DA4F3FCFFE5F}"/>
+                <a16:creationId xmlns:a16="http://schemas.microsoft.com/office/drawing/2014/main" id="{E0F56736-3DD4-4799-B335-148D5A995312}"/>
               </a:ext>
             </a:extLst>
           </p:cNvPr>
@@ -8776,7 +8776,7 @@
           <p:cNvPr id="8" name="TextBox 7">
             <a:extLst xmlns:a="http://schemas.openxmlformats.org/drawingml/2006/main">
               <a:ext uri="{FF2B5EF4-FFF2-40B4-BE49-F238E27FC236}">
-                <a16:creationId xmlns:a16="http://schemas.microsoft.com/office/drawing/2014/main" id="{CB6660C8-8A2D-4155-BFF8-A4AB313E9604}"/>
+                <a16:creationId xmlns:a16="http://schemas.microsoft.com/office/drawing/2014/main" id="{E62A49D9-A749-431B-B419-49504B647CD6}"/>
               </a:ext>
             </a:extLst>
           </p:cNvPr>
@@ -8823,7 +8823,7 @@
           <p:cNvPr id="9" name="TextBox 8">
             <a:extLst xmlns:a="http://schemas.openxmlformats.org/drawingml/2006/main">
               <a:ext uri="{FF2B5EF4-FFF2-40B4-BE49-F238E27FC236}">
-                <a16:creationId xmlns:a16="http://schemas.microsoft.com/office/drawing/2014/main" id="{CB65B450-BEA4-4956-B22D-5003E4C670C8}"/>
+                <a16:creationId xmlns:a16="http://schemas.microsoft.com/office/drawing/2014/main" id="{C0648472-5620-45D9-8748-A7C575038659}"/>
               </a:ext>
             </a:extLst>
           </p:cNvPr>
@@ -8920,7 +8920,7 @@
           <p:cNvPr id="10" name="Rounded Rectangle 9">
             <a:extLst xmlns:a="http://schemas.openxmlformats.org/drawingml/2006/main">
               <a:ext uri="{FF2B5EF4-FFF2-40B4-BE49-F238E27FC236}">
-                <a16:creationId xmlns:a16="http://schemas.microsoft.com/office/drawing/2014/main" id="{FF828121-29DD-4EE3-B184-8A8B579046EE}"/>
+                <a16:creationId xmlns:a16="http://schemas.microsoft.com/office/drawing/2014/main" id="{6E859AD5-A764-4D47-A234-814B0B779055}"/>
               </a:ext>
             </a:extLst>
           </p:cNvPr>
@@ -8977,7 +8977,7 @@
           <p:cNvPr id="11" name="TextBox 10">
             <a:extLst xmlns:a="http://schemas.openxmlformats.org/drawingml/2006/main">
               <a:ext uri="{FF2B5EF4-FFF2-40B4-BE49-F238E27FC236}">
-                <a16:creationId xmlns:a16="http://schemas.microsoft.com/office/drawing/2014/main" id="{0D3B28E6-37F9-409D-A122-B968F8F01D74}"/>
+                <a16:creationId xmlns:a16="http://schemas.microsoft.com/office/drawing/2014/main" id="{70F7AC2B-0E06-41A1-BA7D-2DC6EB2EE128}"/>
               </a:ext>
             </a:extLst>
           </p:cNvPr>
@@ -9024,7 +9024,7 @@
           <p:cNvPr id="12" name="TextBox 11">
             <a:extLst xmlns:a="http://schemas.openxmlformats.org/drawingml/2006/main">
               <a:ext uri="{FF2B5EF4-FFF2-40B4-BE49-F238E27FC236}">
-                <a16:creationId xmlns:a16="http://schemas.microsoft.com/office/drawing/2014/main" id="{8998504D-9BA3-4AF4-AE6F-4E7C2D3499D5}"/>
+                <a16:creationId xmlns:a16="http://schemas.microsoft.com/office/drawing/2014/main" id="{70595FA7-EB98-48D3-ADDA-01166715EFD9}"/>
               </a:ext>
             </a:extLst>
           </p:cNvPr>
@@ -9069,7 +9069,7 @@
     </p:spTree>
     <p:extLst>
       <p:ext uri="{BB962C8B-B14F-4D97-AF65-F5344CB8AC3E}">
-        <p14:creationId xmlns:p14="http://schemas.microsoft.com/office/powerpoint/2010/main" val="1540061012"/>
+        <p14:creationId xmlns:p14="http://schemas.microsoft.com/office/powerpoint/2010/main" val="845346353"/>
       </p:ext>
     </p:extLst>
   </p:cSld>
@@ -9093,7 +9093,7 @@
           <p:cNvPr id="2" name="TextBox 1">
             <a:extLst xmlns:a="http://schemas.openxmlformats.org/drawingml/2006/main">
               <a:ext uri="{FF2B5EF4-FFF2-40B4-BE49-F238E27FC236}">
-                <a16:creationId xmlns:a16="http://schemas.microsoft.com/office/drawing/2014/main" id="{8DB57721-741A-43D7-B8C4-04AF1B048ACB}"/>
+                <a16:creationId xmlns:a16="http://schemas.microsoft.com/office/drawing/2014/main" id="{72CE93BE-ADBC-4ECB-862B-B2F0783AA824}"/>
               </a:ext>
             </a:extLst>
           </p:cNvPr>
@@ -9140,7 +9140,7 @@
           <p:cNvPr id="3" name="TextBox 2">
             <a:extLst xmlns:a="http://schemas.openxmlformats.org/drawingml/2006/main">
               <a:ext uri="{FF2B5EF4-FFF2-40B4-BE49-F238E27FC236}">
-                <a16:creationId xmlns:a16="http://schemas.microsoft.com/office/drawing/2014/main" id="{CD42FFD4-63BD-471F-8D2F-0F449816DE9F}"/>
+                <a16:creationId xmlns:a16="http://schemas.microsoft.com/office/drawing/2014/main" id="{D591052D-25BE-4196-A90B-A7A4F4148663}"/>
               </a:ext>
             </a:extLst>
           </p:cNvPr>
@@ -9187,7 +9187,7 @@
           <p:cNvPr id="4" name="Rectangle 3">
             <a:extLst xmlns:a="http://schemas.openxmlformats.org/drawingml/2006/main">
               <a:ext uri="{FF2B5EF4-FFF2-40B4-BE49-F238E27FC236}">
-                <a16:creationId xmlns:a16="http://schemas.microsoft.com/office/drawing/2014/main" id="{3B7313AD-CBCA-4B9D-ACBD-056B2F901441}"/>
+                <a16:creationId xmlns:a16="http://schemas.microsoft.com/office/drawing/2014/main" id="{6BA39B5D-A1C4-4BAE-A655-6F530A848D16}"/>
               </a:ext>
             </a:extLst>
           </p:cNvPr>
@@ -9242,7 +9242,7 @@
           <p:cNvPr id="5" name="Rectangle 4">
             <a:extLst xmlns:a="http://schemas.openxmlformats.org/drawingml/2006/main">
               <a:ext uri="{FF2B5EF4-FFF2-40B4-BE49-F238E27FC236}">
-                <a16:creationId xmlns:a16="http://schemas.microsoft.com/office/drawing/2014/main" id="{1D2A3577-944F-4E21-8363-460923317A79}"/>
+                <a16:creationId xmlns:a16="http://schemas.microsoft.com/office/drawing/2014/main" id="{7E13B91A-B5E0-4C66-A81B-7D3E2F4FC80C}"/>
               </a:ext>
             </a:extLst>
           </p:cNvPr>
@@ -9297,7 +9297,7 @@
           <p:cNvPr id="6" name="TextBox 5">
             <a:extLst xmlns:a="http://schemas.openxmlformats.org/drawingml/2006/main">
               <a:ext uri="{FF2B5EF4-FFF2-40B4-BE49-F238E27FC236}">
-                <a16:creationId xmlns:a16="http://schemas.microsoft.com/office/drawing/2014/main" id="{73849C60-A17C-430A-877F-18DF6E455E91}"/>
+                <a16:creationId xmlns:a16="http://schemas.microsoft.com/office/drawing/2014/main" id="{823FDA40-8976-4774-9A70-D45A4F3D4D24}"/>
               </a:ext>
             </a:extLst>
           </p:cNvPr>
@@ -9334,7 +9334,7 @@
                 <a:ea typeface="Aptos"/>
                 <a:cs typeface="Aptos"/>
               </a:rPr>
-              <a:t>Independent public evidence summary · 2026.07.22-8 · 2026-07-22 · Sources: EPO Register; EP3032975B2</a:t>
+              <a:t>Independent public evidence summary · 2026.07.22-9 · 2026-07-22 · Sources: EPO Register; EP3032975B2</a:t>
             </a:r>
           </a:p>
         </p:txBody>
@@ -9344,7 +9344,7 @@
           <p:cNvPr id="7" name="TextBox 6">
             <a:extLst xmlns:a="http://schemas.openxmlformats.org/drawingml/2006/main">
               <a:ext uri="{FF2B5EF4-FFF2-40B4-BE49-F238E27FC236}">
-                <a16:creationId xmlns:a16="http://schemas.microsoft.com/office/drawing/2014/main" id="{C8676B2D-D917-44D2-B496-3D84146F9062}"/>
+                <a16:creationId xmlns:a16="http://schemas.microsoft.com/office/drawing/2014/main" id="{517E8624-FEB4-4827-8806-B9B8E6D91327}"/>
               </a:ext>
             </a:extLst>
           </p:cNvPr>
@@ -9391,7 +9391,7 @@
           <p:cNvPr id="8" name="Rounded Rectangle 7">
             <a:extLst xmlns:a="http://schemas.openxmlformats.org/drawingml/2006/main">
               <a:ext uri="{FF2B5EF4-FFF2-40B4-BE49-F238E27FC236}">
-                <a16:creationId xmlns:a16="http://schemas.microsoft.com/office/drawing/2014/main" id="{32AD4106-9419-4EA7-A63F-66C720FBC72A}"/>
+                <a16:creationId xmlns:a16="http://schemas.microsoft.com/office/drawing/2014/main" id="{35FEE5EB-B3E8-414D-8AB2-C7BC34CCDF7D}"/>
               </a:ext>
             </a:extLst>
           </p:cNvPr>
@@ -9448,7 +9448,7 @@
           <p:cNvPr id="9" name="TextBox 8">
             <a:extLst xmlns:a="http://schemas.openxmlformats.org/drawingml/2006/main">
               <a:ext uri="{FF2B5EF4-FFF2-40B4-BE49-F238E27FC236}">
-                <a16:creationId xmlns:a16="http://schemas.microsoft.com/office/drawing/2014/main" id="{9B0D7857-08E2-4D1A-9967-432AC4C9D76A}"/>
+                <a16:creationId xmlns:a16="http://schemas.microsoft.com/office/drawing/2014/main" id="{15CF180C-81AE-49D7-A434-057DB76972AC}"/>
               </a:ext>
             </a:extLst>
           </p:cNvPr>
@@ -9495,7 +9495,7 @@
           <p:cNvPr id="10" name="TextBox 9">
             <a:extLst xmlns:a="http://schemas.openxmlformats.org/drawingml/2006/main">
               <a:ext uri="{FF2B5EF4-FFF2-40B4-BE49-F238E27FC236}">
-                <a16:creationId xmlns:a16="http://schemas.microsoft.com/office/drawing/2014/main" id="{10FF8F70-8445-4C96-8254-F13B990D1A92}"/>
+                <a16:creationId xmlns:a16="http://schemas.microsoft.com/office/drawing/2014/main" id="{1B25BC9C-1BE7-4871-9345-F5D9B125F8BB}"/>
               </a:ext>
             </a:extLst>
           </p:cNvPr>
@@ -9542,7 +9542,7 @@
           <p:cNvPr id="11" name="Rounded Rectangle 10">
             <a:extLst xmlns:a="http://schemas.openxmlformats.org/drawingml/2006/main">
               <a:ext uri="{FF2B5EF4-FFF2-40B4-BE49-F238E27FC236}">
-                <a16:creationId xmlns:a16="http://schemas.microsoft.com/office/drawing/2014/main" id="{24F18D8D-38CB-4907-B84F-67CD528DE598}"/>
+                <a16:creationId xmlns:a16="http://schemas.microsoft.com/office/drawing/2014/main" id="{16BC7DBC-C411-4238-A2E3-B874B9550817}"/>
               </a:ext>
             </a:extLst>
           </p:cNvPr>
@@ -9599,7 +9599,7 @@
           <p:cNvPr id="12" name="TextBox 11">
             <a:extLst xmlns:a="http://schemas.openxmlformats.org/drawingml/2006/main">
               <a:ext uri="{FF2B5EF4-FFF2-40B4-BE49-F238E27FC236}">
-                <a16:creationId xmlns:a16="http://schemas.microsoft.com/office/drawing/2014/main" id="{92BDCE74-5A6C-4AAD-A8C4-68AFA13BA327}"/>
+                <a16:creationId xmlns:a16="http://schemas.microsoft.com/office/drawing/2014/main" id="{CF69023B-E8EA-4D86-8E10-8CD1A0267C28}"/>
               </a:ext>
             </a:extLst>
           </p:cNvPr>
@@ -9646,7 +9646,7 @@
           <p:cNvPr id="13" name="TextBox 12">
             <a:extLst xmlns:a="http://schemas.openxmlformats.org/drawingml/2006/main">
               <a:ext uri="{FF2B5EF4-FFF2-40B4-BE49-F238E27FC236}">
-                <a16:creationId xmlns:a16="http://schemas.microsoft.com/office/drawing/2014/main" id="{C5262039-C8C1-4524-9246-4AE8AEFA5EF2}"/>
+                <a16:creationId xmlns:a16="http://schemas.microsoft.com/office/drawing/2014/main" id="{FBB67B59-8AAC-4E4C-B698-4968C4772F7A}"/>
               </a:ext>
             </a:extLst>
           </p:cNvPr>
@@ -9693,7 +9693,7 @@
           <p:cNvPr id="14" name="Rounded Rectangle 13">
             <a:extLst xmlns:a="http://schemas.openxmlformats.org/drawingml/2006/main">
               <a:ext uri="{FF2B5EF4-FFF2-40B4-BE49-F238E27FC236}">
-                <a16:creationId xmlns:a16="http://schemas.microsoft.com/office/drawing/2014/main" id="{F82B12FF-2E59-451C-B229-7376989D71E9}"/>
+                <a16:creationId xmlns:a16="http://schemas.microsoft.com/office/drawing/2014/main" id="{4C4EFC9F-3184-4102-A484-33BE00EF45DE}"/>
               </a:ext>
             </a:extLst>
           </p:cNvPr>
@@ -9750,7 +9750,7 @@
           <p:cNvPr id="15" name="TextBox 14">
             <a:extLst xmlns:a="http://schemas.openxmlformats.org/drawingml/2006/main">
               <a:ext uri="{FF2B5EF4-FFF2-40B4-BE49-F238E27FC236}">
-                <a16:creationId xmlns:a16="http://schemas.microsoft.com/office/drawing/2014/main" id="{251D1A66-0F82-45A7-9648-B9BC2ABC7695}"/>
+                <a16:creationId xmlns:a16="http://schemas.microsoft.com/office/drawing/2014/main" id="{C9F4944F-D45D-48CB-AB00-D18604016AC8}"/>
               </a:ext>
             </a:extLst>
           </p:cNvPr>
@@ -9797,7 +9797,7 @@
           <p:cNvPr id="16" name="TextBox 15">
             <a:extLst xmlns:a="http://schemas.openxmlformats.org/drawingml/2006/main">
               <a:ext uri="{FF2B5EF4-FFF2-40B4-BE49-F238E27FC236}">
-                <a16:creationId xmlns:a16="http://schemas.microsoft.com/office/drawing/2014/main" id="{01210D73-D131-472A-BE7D-77D596004304}"/>
+                <a16:creationId xmlns:a16="http://schemas.microsoft.com/office/drawing/2014/main" id="{10861D56-0599-47A7-83B4-569016B3962D}"/>
               </a:ext>
             </a:extLst>
           </p:cNvPr>
@@ -9844,7 +9844,7 @@
           <p:cNvPr id="17" name="TextBox 16">
             <a:extLst xmlns:a="http://schemas.openxmlformats.org/drawingml/2006/main">
               <a:ext uri="{FF2B5EF4-FFF2-40B4-BE49-F238E27FC236}">
-                <a16:creationId xmlns:a16="http://schemas.microsoft.com/office/drawing/2014/main" id="{3978D52A-3109-4292-9049-7F1999123E28}"/>
+                <a16:creationId xmlns:a16="http://schemas.microsoft.com/office/drawing/2014/main" id="{A09B05AE-ADB2-421B-B567-5757CD85D3F5}"/>
               </a:ext>
             </a:extLst>
           </p:cNvPr>
@@ -9891,7 +9891,7 @@
           <p:cNvPr id="18" name="Rounded Rectangle 17">
             <a:extLst xmlns:a="http://schemas.openxmlformats.org/drawingml/2006/main">
               <a:ext uri="{FF2B5EF4-FFF2-40B4-BE49-F238E27FC236}">
-                <a16:creationId xmlns:a16="http://schemas.microsoft.com/office/drawing/2014/main" id="{D577A4E6-0CF9-4B89-8805-233FDA3DD711}"/>
+                <a16:creationId xmlns:a16="http://schemas.microsoft.com/office/drawing/2014/main" id="{3ADFFBCF-7BCD-4DF6-899F-9001F1903C93}"/>
               </a:ext>
             </a:extLst>
           </p:cNvPr>
@@ -9948,7 +9948,7 @@
           <p:cNvPr id="19" name="TextBox 18">
             <a:extLst xmlns:a="http://schemas.openxmlformats.org/drawingml/2006/main">
               <a:ext uri="{FF2B5EF4-FFF2-40B4-BE49-F238E27FC236}">
-                <a16:creationId xmlns:a16="http://schemas.microsoft.com/office/drawing/2014/main" id="{47EA9E13-81F6-4BAA-A686-A7FC6DC6E634}"/>
+                <a16:creationId xmlns:a16="http://schemas.microsoft.com/office/drawing/2014/main" id="{9346B84E-9753-4740-ACD7-17FDCB700096}"/>
               </a:ext>
             </a:extLst>
           </p:cNvPr>
@@ -9995,7 +9995,7 @@
           <p:cNvPr id="20" name="TextBox 19">
             <a:extLst xmlns:a="http://schemas.openxmlformats.org/drawingml/2006/main">
               <a:ext uri="{FF2B5EF4-FFF2-40B4-BE49-F238E27FC236}">
-                <a16:creationId xmlns:a16="http://schemas.microsoft.com/office/drawing/2014/main" id="{6A6C71B8-1F98-43B3-955C-0C95C204CBFB}"/>
+                <a16:creationId xmlns:a16="http://schemas.microsoft.com/office/drawing/2014/main" id="{7DCBA330-93FC-407B-9357-3CDD5C4D50F9}"/>
               </a:ext>
             </a:extLst>
           </p:cNvPr>
@@ -10040,7 +10040,7 @@
     </p:spTree>
     <p:extLst>
       <p:ext uri="{BB962C8B-B14F-4D97-AF65-F5344CB8AC3E}">
-        <p14:creationId xmlns:p14="http://schemas.microsoft.com/office/powerpoint/2010/main" val="1002596698"/>
+        <p14:creationId xmlns:p14="http://schemas.microsoft.com/office/powerpoint/2010/main" val="82677182"/>
       </p:ext>
     </p:extLst>
   </p:cSld>
@@ -10064,7 +10064,7 @@
           <p:cNvPr id="2" name="TextBox 1">
             <a:extLst xmlns:a="http://schemas.openxmlformats.org/drawingml/2006/main">
               <a:ext uri="{FF2B5EF4-FFF2-40B4-BE49-F238E27FC236}">
-                <a16:creationId xmlns:a16="http://schemas.microsoft.com/office/drawing/2014/main" id="{ADF4281E-C41A-467C-B317-9FC6306B4DA9}"/>
+                <a16:creationId xmlns:a16="http://schemas.microsoft.com/office/drawing/2014/main" id="{FB6B7EAC-2C94-4BD9-9986-AF972C28653D}"/>
               </a:ext>
             </a:extLst>
           </p:cNvPr>
@@ -10111,7 +10111,7 @@
           <p:cNvPr id="3" name="TextBox 2">
             <a:extLst xmlns:a="http://schemas.openxmlformats.org/drawingml/2006/main">
               <a:ext uri="{FF2B5EF4-FFF2-40B4-BE49-F238E27FC236}">
-                <a16:creationId xmlns:a16="http://schemas.microsoft.com/office/drawing/2014/main" id="{F1279C52-FF7C-4D4E-9197-3B8A2B1F0D89}"/>
+                <a16:creationId xmlns:a16="http://schemas.microsoft.com/office/drawing/2014/main" id="{5BF86E35-5563-4AE4-8126-FE8F11D4AF07}"/>
               </a:ext>
             </a:extLst>
           </p:cNvPr>
@@ -10158,7 +10158,7 @@
           <p:cNvPr id="4" name="Rectangle 3">
             <a:extLst xmlns:a="http://schemas.openxmlformats.org/drawingml/2006/main">
               <a:ext uri="{FF2B5EF4-FFF2-40B4-BE49-F238E27FC236}">
-                <a16:creationId xmlns:a16="http://schemas.microsoft.com/office/drawing/2014/main" id="{C65F34CA-14BD-47CE-914D-DF4403426F98}"/>
+                <a16:creationId xmlns:a16="http://schemas.microsoft.com/office/drawing/2014/main" id="{65898FD3-3A25-49CE-B920-14D0FB0BB6BA}"/>
               </a:ext>
             </a:extLst>
           </p:cNvPr>
@@ -10213,7 +10213,7 @@
           <p:cNvPr id="5" name="Rectangle 4">
             <a:extLst xmlns:a="http://schemas.openxmlformats.org/drawingml/2006/main">
               <a:ext uri="{FF2B5EF4-FFF2-40B4-BE49-F238E27FC236}">
-                <a16:creationId xmlns:a16="http://schemas.microsoft.com/office/drawing/2014/main" id="{B4032EF7-B12A-4E02-90CC-945368E21715}"/>
+                <a16:creationId xmlns:a16="http://schemas.microsoft.com/office/drawing/2014/main" id="{63C19A39-EB1E-44FB-8E9E-98338C770AD6}"/>
               </a:ext>
             </a:extLst>
           </p:cNvPr>
@@ -10268,7 +10268,7 @@
           <p:cNvPr id="6" name="TextBox 5">
             <a:extLst xmlns:a="http://schemas.openxmlformats.org/drawingml/2006/main">
               <a:ext uri="{FF2B5EF4-FFF2-40B4-BE49-F238E27FC236}">
-                <a16:creationId xmlns:a16="http://schemas.microsoft.com/office/drawing/2014/main" id="{68F4BBD3-4481-4224-9091-9C774321774D}"/>
+                <a16:creationId xmlns:a16="http://schemas.microsoft.com/office/drawing/2014/main" id="{84CA68FD-6331-439B-A51A-D2175C873CF8}"/>
               </a:ext>
             </a:extLst>
           </p:cNvPr>
@@ -10305,7 +10305,7 @@
                 <a:ea typeface="Aptos"/>
                 <a:cs typeface="Aptos"/>
               </a:rPr>
-              <a:t>Independent public evidence summary · 2026.07.22-8 · 2026-07-22 · Sources: EP3032975B2; 7 O 3341/24</a:t>
+              <a:t>Independent public evidence summary · 2026.07.22-9 · 2026-07-22 · Sources: EP3032975B2; 7 O 3341/24</a:t>
             </a:r>
           </a:p>
         </p:txBody>
@@ -10315,7 +10315,7 @@
           <p:cNvPr id="7" name="TextBox 6">
             <a:extLst xmlns:a="http://schemas.openxmlformats.org/drawingml/2006/main">
               <a:ext uri="{FF2B5EF4-FFF2-40B4-BE49-F238E27FC236}">
-                <a16:creationId xmlns:a16="http://schemas.microsoft.com/office/drawing/2014/main" id="{1F76ABA9-035F-4AFE-95E9-D4B4A3F41F97}"/>
+                <a16:creationId xmlns:a16="http://schemas.microsoft.com/office/drawing/2014/main" id="{D9286D33-8702-4EA0-BD5F-1042BE959590}"/>
               </a:ext>
             </a:extLst>
           </p:cNvPr>
@@ -10362,7 +10362,7 @@
           <p:cNvPr id="8" name="TextBox 7">
             <a:extLst xmlns:a="http://schemas.openxmlformats.org/drawingml/2006/main">
               <a:ext uri="{FF2B5EF4-FFF2-40B4-BE49-F238E27FC236}">
-                <a16:creationId xmlns:a16="http://schemas.microsoft.com/office/drawing/2014/main" id="{90249E53-28AB-4F8B-BD95-8011068D7150}"/>
+                <a16:creationId xmlns:a16="http://schemas.microsoft.com/office/drawing/2014/main" id="{831E2B19-35B4-4CAF-99D8-2E6106835E75}"/>
               </a:ext>
             </a:extLst>
           </p:cNvPr>
@@ -10409,7 +10409,7 @@
           <p:cNvPr id="9" name="TextBox 8">
             <a:extLst xmlns:a="http://schemas.openxmlformats.org/drawingml/2006/main">
               <a:ext uri="{FF2B5EF4-FFF2-40B4-BE49-F238E27FC236}">
-                <a16:creationId xmlns:a16="http://schemas.microsoft.com/office/drawing/2014/main" id="{F238CB37-1FAA-40EC-9245-DC7422E0A015}"/>
+                <a16:creationId xmlns:a16="http://schemas.microsoft.com/office/drawing/2014/main" id="{A521DDAD-61E8-4A78-8349-C43A316F7143}"/>
               </a:ext>
             </a:extLst>
           </p:cNvPr>
@@ -10506,7 +10506,7 @@
           <p:cNvPr id="10" name="Rounded Rectangle 9">
             <a:extLst xmlns:a="http://schemas.openxmlformats.org/drawingml/2006/main">
               <a:ext uri="{FF2B5EF4-FFF2-40B4-BE49-F238E27FC236}">
-                <a16:creationId xmlns:a16="http://schemas.microsoft.com/office/drawing/2014/main" id="{0E4BA2D3-0C07-4981-B8F7-E796D7E420D1}"/>
+                <a16:creationId xmlns:a16="http://schemas.microsoft.com/office/drawing/2014/main" id="{A258EEAF-C4A5-4E05-8596-63B0FC2BA418}"/>
               </a:ext>
             </a:extLst>
           </p:cNvPr>
@@ -10563,7 +10563,7 @@
           <p:cNvPr id="11" name="TextBox 10">
             <a:extLst xmlns:a="http://schemas.openxmlformats.org/drawingml/2006/main">
               <a:ext uri="{FF2B5EF4-FFF2-40B4-BE49-F238E27FC236}">
-                <a16:creationId xmlns:a16="http://schemas.microsoft.com/office/drawing/2014/main" id="{5A8ED014-586D-407A-983D-EAF9D6DC1B77}"/>
+                <a16:creationId xmlns:a16="http://schemas.microsoft.com/office/drawing/2014/main" id="{1FF00502-8F67-4340-ACFC-FC78DEAD811D}"/>
               </a:ext>
             </a:extLst>
           </p:cNvPr>
@@ -10610,7 +10610,7 @@
           <p:cNvPr id="12" name="TextBox 11">
             <a:extLst xmlns:a="http://schemas.openxmlformats.org/drawingml/2006/main">
               <a:ext uri="{FF2B5EF4-FFF2-40B4-BE49-F238E27FC236}">
-                <a16:creationId xmlns:a16="http://schemas.microsoft.com/office/drawing/2014/main" id="{865A10F7-3E3F-4804-96F9-4BD8EA16A6D8}"/>
+                <a16:creationId xmlns:a16="http://schemas.microsoft.com/office/drawing/2014/main" id="{015F55C5-9B47-4E0B-8A18-FF20413DCB5A}"/>
               </a:ext>
             </a:extLst>
           </p:cNvPr>
@@ -10655,7 +10655,7 @@
     </p:spTree>
     <p:extLst>
       <p:ext uri="{BB962C8B-B14F-4D97-AF65-F5344CB8AC3E}">
-        <p14:creationId xmlns:p14="http://schemas.microsoft.com/office/powerpoint/2010/main" val="1505079154"/>
+        <p14:creationId xmlns:p14="http://schemas.microsoft.com/office/powerpoint/2010/main" val="439742809"/>
       </p:ext>
     </p:extLst>
   </p:cSld>
@@ -10679,7 +10679,7 @@
           <p:cNvPr id="2" name="TextBox 1">
             <a:extLst xmlns:a="http://schemas.openxmlformats.org/drawingml/2006/main">
               <a:ext uri="{FF2B5EF4-FFF2-40B4-BE49-F238E27FC236}">
-                <a16:creationId xmlns:a16="http://schemas.microsoft.com/office/drawing/2014/main" id="{83942DB7-B9CF-40FD-A378-C300806A57B8}"/>
+                <a16:creationId xmlns:a16="http://schemas.microsoft.com/office/drawing/2014/main" id="{9005B68D-AE0C-4D76-953B-37F5476BA1CB}"/>
               </a:ext>
             </a:extLst>
           </p:cNvPr>
@@ -10726,7 +10726,7 @@
           <p:cNvPr id="3" name="TextBox 2">
             <a:extLst xmlns:a="http://schemas.openxmlformats.org/drawingml/2006/main">
               <a:ext uri="{FF2B5EF4-FFF2-40B4-BE49-F238E27FC236}">
-                <a16:creationId xmlns:a16="http://schemas.microsoft.com/office/drawing/2014/main" id="{EC880418-4622-4D76-9D7B-A575926EDA4A}"/>
+                <a16:creationId xmlns:a16="http://schemas.microsoft.com/office/drawing/2014/main" id="{D06B8F27-2A5B-4041-A84C-B772B3C8F861}"/>
               </a:ext>
             </a:extLst>
           </p:cNvPr>
@@ -10773,7 +10773,7 @@
           <p:cNvPr id="4" name="Rectangle 3">
             <a:extLst xmlns:a="http://schemas.openxmlformats.org/drawingml/2006/main">
               <a:ext uri="{FF2B5EF4-FFF2-40B4-BE49-F238E27FC236}">
-                <a16:creationId xmlns:a16="http://schemas.microsoft.com/office/drawing/2014/main" id="{C5A63B72-C38C-4128-89BD-32DBF52B3200}"/>
+                <a16:creationId xmlns:a16="http://schemas.microsoft.com/office/drawing/2014/main" id="{B7BF46F9-11F1-4C79-B283-669A6C23AB75}"/>
               </a:ext>
             </a:extLst>
           </p:cNvPr>
@@ -10828,7 +10828,7 @@
           <p:cNvPr id="5" name="Rectangle 4">
             <a:extLst xmlns:a="http://schemas.openxmlformats.org/drawingml/2006/main">
               <a:ext uri="{FF2B5EF4-FFF2-40B4-BE49-F238E27FC236}">
-                <a16:creationId xmlns:a16="http://schemas.microsoft.com/office/drawing/2014/main" id="{0A00A252-C03F-41F4-804C-D128AD3B2691}"/>
+                <a16:creationId xmlns:a16="http://schemas.microsoft.com/office/drawing/2014/main" id="{2352A9F5-46EA-4A1B-855C-5AA780F2AC2B}"/>
               </a:ext>
             </a:extLst>
           </p:cNvPr>
@@ -10883,7 +10883,7 @@
           <p:cNvPr id="6" name="TextBox 5">
             <a:extLst xmlns:a="http://schemas.openxmlformats.org/drawingml/2006/main">
               <a:ext uri="{FF2B5EF4-FFF2-40B4-BE49-F238E27FC236}">
-                <a16:creationId xmlns:a16="http://schemas.microsoft.com/office/drawing/2014/main" id="{FEF29C6C-3333-4824-A0AD-EC6DD9945E0A}"/>
+                <a16:creationId xmlns:a16="http://schemas.microsoft.com/office/drawing/2014/main" id="{4B1C8D14-C37A-4E1B-AAFE-A8AA94611718}"/>
               </a:ext>
             </a:extLst>
           </p:cNvPr>
@@ -10920,7 +10920,7 @@
                 <a:ea typeface="Aptos"/>
                 <a:cs typeface="Aptos"/>
               </a:rPr>
-              <a:t>Independent public evidence summary · 2026.07.22-8 · 2026-07-22 · Sources: Market-values; IMARC; GVR; Fortune</a:t>
+              <a:t>Independent public evidence summary · 2026.07.22-9 · 2026-07-22 · Sources: Market-values; IMARC; GVR; Fortune</a:t>
             </a:r>
           </a:p>
         </p:txBody>
@@ -10930,7 +10930,7 @@
           <p:cNvPr id="7" name="TextBox 6">
             <a:extLst xmlns:a="http://schemas.openxmlformats.org/drawingml/2006/main">
               <a:ext uri="{FF2B5EF4-FFF2-40B4-BE49-F238E27FC236}">
-                <a16:creationId xmlns:a16="http://schemas.microsoft.com/office/drawing/2014/main" id="{577B5AAD-CC41-4AFC-B658-954A53C1286F}"/>
+                <a16:creationId xmlns:a16="http://schemas.microsoft.com/office/drawing/2014/main" id="{7F037393-1A3F-45F9-B68F-EE52205BCCC6}"/>
               </a:ext>
             </a:extLst>
           </p:cNvPr>
@@ -10977,7 +10977,7 @@
           <p:cNvPr id="8" name="Rounded Rectangle 7">
             <a:extLst xmlns:a="http://schemas.openxmlformats.org/drawingml/2006/main">
               <a:ext uri="{FF2B5EF4-FFF2-40B4-BE49-F238E27FC236}">
-                <a16:creationId xmlns:a16="http://schemas.microsoft.com/office/drawing/2014/main" id="{BB21CECE-78A9-47C1-A43B-6B69A6D3EF0D}"/>
+                <a16:creationId xmlns:a16="http://schemas.microsoft.com/office/drawing/2014/main" id="{E040D1AA-1B68-4C3E-9707-441F37AAB0FA}"/>
               </a:ext>
             </a:extLst>
           </p:cNvPr>
@@ -11034,7 +11034,7 @@
           <p:cNvPr id="9" name="TextBox 8">
             <a:extLst xmlns:a="http://schemas.openxmlformats.org/drawingml/2006/main">
               <a:ext uri="{FF2B5EF4-FFF2-40B4-BE49-F238E27FC236}">
-                <a16:creationId xmlns:a16="http://schemas.microsoft.com/office/drawing/2014/main" id="{AA18227E-F0B0-4424-8DDA-10BF1B3A2667}"/>
+                <a16:creationId xmlns:a16="http://schemas.microsoft.com/office/drawing/2014/main" id="{F2573276-9B62-4918-AE23-732CA3DAF1FC}"/>
               </a:ext>
             </a:extLst>
           </p:cNvPr>
@@ -11081,7 +11081,7 @@
           <p:cNvPr id="10" name="TextBox 9">
             <a:extLst xmlns:a="http://schemas.openxmlformats.org/drawingml/2006/main">
               <a:ext uri="{FF2B5EF4-FFF2-40B4-BE49-F238E27FC236}">
-                <a16:creationId xmlns:a16="http://schemas.microsoft.com/office/drawing/2014/main" id="{5EC2F01F-4846-4403-B8E6-8D802BE5D202}"/>
+                <a16:creationId xmlns:a16="http://schemas.microsoft.com/office/drawing/2014/main" id="{39B4FCAD-523A-42E9-B3F3-A5E6DCAF6537}"/>
               </a:ext>
             </a:extLst>
           </p:cNvPr>
@@ -11128,7 +11128,7 @@
           <p:cNvPr id="11" name="Rounded Rectangle 10">
             <a:extLst xmlns:a="http://schemas.openxmlformats.org/drawingml/2006/main">
               <a:ext uri="{FF2B5EF4-FFF2-40B4-BE49-F238E27FC236}">
-                <a16:creationId xmlns:a16="http://schemas.microsoft.com/office/drawing/2014/main" id="{7005FAD3-D71F-4DB7-920F-A593ECD2A44E}"/>
+                <a16:creationId xmlns:a16="http://schemas.microsoft.com/office/drawing/2014/main" id="{63C1D6E3-3D14-4EBE-A89F-ECBE29D5A3DF}"/>
               </a:ext>
             </a:extLst>
           </p:cNvPr>
@@ -11185,7 +11185,7 @@
           <p:cNvPr id="12" name="TextBox 11">
             <a:extLst xmlns:a="http://schemas.openxmlformats.org/drawingml/2006/main">
               <a:ext uri="{FF2B5EF4-FFF2-40B4-BE49-F238E27FC236}">
-                <a16:creationId xmlns:a16="http://schemas.microsoft.com/office/drawing/2014/main" id="{73031DD3-AB46-42CF-95E9-25A7872B8777}"/>
+                <a16:creationId xmlns:a16="http://schemas.microsoft.com/office/drawing/2014/main" id="{93ECAC4B-244A-427C-A2A2-B7F4770261AA}"/>
               </a:ext>
             </a:extLst>
           </p:cNvPr>
@@ -11232,7 +11232,7 @@
           <p:cNvPr id="13" name="TextBox 12">
             <a:extLst xmlns:a="http://schemas.openxmlformats.org/drawingml/2006/main">
               <a:ext uri="{FF2B5EF4-FFF2-40B4-BE49-F238E27FC236}">
-                <a16:creationId xmlns:a16="http://schemas.microsoft.com/office/drawing/2014/main" id="{2F29B91A-C989-44D0-B657-B365BF857D56}"/>
+                <a16:creationId xmlns:a16="http://schemas.microsoft.com/office/drawing/2014/main" id="{669C9A28-CA56-4695-8E15-61EE8F14AE13}"/>
               </a:ext>
             </a:extLst>
           </p:cNvPr>
@@ -11279,7 +11279,7 @@
           <p:cNvPr id="14" name="Rounded Rectangle 13">
             <a:extLst xmlns:a="http://schemas.openxmlformats.org/drawingml/2006/main">
               <a:ext uri="{FF2B5EF4-FFF2-40B4-BE49-F238E27FC236}">
-                <a16:creationId xmlns:a16="http://schemas.microsoft.com/office/drawing/2014/main" id="{0B6B387D-4C33-43D1-849D-BACD00E21500}"/>
+                <a16:creationId xmlns:a16="http://schemas.microsoft.com/office/drawing/2014/main" id="{B6CED7F8-4DA9-423C-9A8E-2BC49DD62627}"/>
               </a:ext>
             </a:extLst>
           </p:cNvPr>
@@ -11336,7 +11336,7 @@
           <p:cNvPr id="15" name="TextBox 14">
             <a:extLst xmlns:a="http://schemas.openxmlformats.org/drawingml/2006/main">
               <a:ext uri="{FF2B5EF4-FFF2-40B4-BE49-F238E27FC236}">
-                <a16:creationId xmlns:a16="http://schemas.microsoft.com/office/drawing/2014/main" id="{84B6124F-FE95-434D-B0E3-A6251993E0EC}"/>
+                <a16:creationId xmlns:a16="http://schemas.microsoft.com/office/drawing/2014/main" id="{91048F51-C4A8-4693-9527-C65793D52110}"/>
               </a:ext>
             </a:extLst>
           </p:cNvPr>
@@ -11383,7 +11383,7 @@
           <p:cNvPr id="16" name="TextBox 15">
             <a:extLst xmlns:a="http://schemas.openxmlformats.org/drawingml/2006/main">
               <a:ext uri="{FF2B5EF4-FFF2-40B4-BE49-F238E27FC236}">
-                <a16:creationId xmlns:a16="http://schemas.microsoft.com/office/drawing/2014/main" id="{3DFD684C-4DC0-4C22-9679-C7D14B930729}"/>
+                <a16:creationId xmlns:a16="http://schemas.microsoft.com/office/drawing/2014/main" id="{08E40494-F98D-46D0-9F98-A939D0F0A523}"/>
               </a:ext>
             </a:extLst>
           </p:cNvPr>
@@ -11430,7 +11430,7 @@
           <p:cNvPr id="17" name="TextBox 16">
             <a:extLst xmlns:a="http://schemas.openxmlformats.org/drawingml/2006/main">
               <a:ext uri="{FF2B5EF4-FFF2-40B4-BE49-F238E27FC236}">
-                <a16:creationId xmlns:a16="http://schemas.microsoft.com/office/drawing/2014/main" id="{28D6720C-7465-40FC-8E24-A8E9A1048154}"/>
+                <a16:creationId xmlns:a16="http://schemas.microsoft.com/office/drawing/2014/main" id="{B300B04D-0D8A-4D3A-914A-E024B8E2C929}"/>
               </a:ext>
             </a:extLst>
           </p:cNvPr>
@@ -11477,7 +11477,7 @@
           <p:cNvPr id="18" name="Rounded Rectangle 17">
             <a:extLst xmlns:a="http://schemas.openxmlformats.org/drawingml/2006/main">
               <a:ext uri="{FF2B5EF4-FFF2-40B4-BE49-F238E27FC236}">
-                <a16:creationId xmlns:a16="http://schemas.microsoft.com/office/drawing/2014/main" id="{D21C60DA-CE3E-47F8-88C3-1AA9DD1E2C2D}"/>
+                <a16:creationId xmlns:a16="http://schemas.microsoft.com/office/drawing/2014/main" id="{25EFEEC6-49F5-4F16-A96D-211E49F7C87A}"/>
               </a:ext>
             </a:extLst>
           </p:cNvPr>
@@ -11534,7 +11534,7 @@
           <p:cNvPr id="19" name="TextBox 18">
             <a:extLst xmlns:a="http://schemas.openxmlformats.org/drawingml/2006/main">
               <a:ext uri="{FF2B5EF4-FFF2-40B4-BE49-F238E27FC236}">
-                <a16:creationId xmlns:a16="http://schemas.microsoft.com/office/drawing/2014/main" id="{E2B9EFA5-63C4-4A69-A5E4-BFC462411A76}"/>
+                <a16:creationId xmlns:a16="http://schemas.microsoft.com/office/drawing/2014/main" id="{2A6B2AC0-2F2B-42F9-B4BE-F827F6D629DF}"/>
               </a:ext>
             </a:extLst>
           </p:cNvPr>
@@ -11581,7 +11581,7 @@
           <p:cNvPr id="20" name="TextBox 19">
             <a:extLst xmlns:a="http://schemas.openxmlformats.org/drawingml/2006/main">
               <a:ext uri="{FF2B5EF4-FFF2-40B4-BE49-F238E27FC236}">
-                <a16:creationId xmlns:a16="http://schemas.microsoft.com/office/drawing/2014/main" id="{6C76CF5A-4EA5-4932-B173-5F2DF6E4C59E}"/>
+                <a16:creationId xmlns:a16="http://schemas.microsoft.com/office/drawing/2014/main" id="{78F8908A-8423-4CE6-B28D-EB380A5CEDB1}"/>
               </a:ext>
             </a:extLst>
           </p:cNvPr>
@@ -11626,7 +11626,7 @@
     </p:spTree>
     <p:extLst>
       <p:ext uri="{BB962C8B-B14F-4D97-AF65-F5344CB8AC3E}">
-        <p14:creationId xmlns:p14="http://schemas.microsoft.com/office/powerpoint/2010/main" val="1579545463"/>
+        <p14:creationId xmlns:p14="http://schemas.microsoft.com/office/powerpoint/2010/main" val="2091767491"/>
       </p:ext>
     </p:extLst>
   </p:cSld>
@@ -11650,7 +11650,7 @@
           <p:cNvPr id="2" name="TextBox 1">
             <a:extLst xmlns:a="http://schemas.openxmlformats.org/drawingml/2006/main">
               <a:ext uri="{FF2B5EF4-FFF2-40B4-BE49-F238E27FC236}">
-                <a16:creationId xmlns:a16="http://schemas.microsoft.com/office/drawing/2014/main" id="{C4F29ED2-558C-45AD-852D-120E7230C1ED}"/>
+                <a16:creationId xmlns:a16="http://schemas.microsoft.com/office/drawing/2014/main" id="{F419ACCB-EF61-45C2-B45C-4885222CF581}"/>
               </a:ext>
             </a:extLst>
           </p:cNvPr>
@@ -11697,7 +11697,7 @@
           <p:cNvPr id="3" name="TextBox 2">
             <a:extLst xmlns:a="http://schemas.openxmlformats.org/drawingml/2006/main">
               <a:ext uri="{FF2B5EF4-FFF2-40B4-BE49-F238E27FC236}">
-                <a16:creationId xmlns:a16="http://schemas.microsoft.com/office/drawing/2014/main" id="{B4B4E743-D5C9-48F6-B8F2-97EBDC20DE6E}"/>
+                <a16:creationId xmlns:a16="http://schemas.microsoft.com/office/drawing/2014/main" id="{4C1D878C-1088-4EEF-B357-A03A3836B3AF}"/>
               </a:ext>
             </a:extLst>
           </p:cNvPr>
@@ -11744,7 +11744,7 @@
           <p:cNvPr id="4" name="Rectangle 3">
             <a:extLst xmlns:a="http://schemas.openxmlformats.org/drawingml/2006/main">
               <a:ext uri="{FF2B5EF4-FFF2-40B4-BE49-F238E27FC236}">
-                <a16:creationId xmlns:a16="http://schemas.microsoft.com/office/drawing/2014/main" id="{F5BF4B10-D3FB-4E15-8B0C-D7644D179A19}"/>
+                <a16:creationId xmlns:a16="http://schemas.microsoft.com/office/drawing/2014/main" id="{7CC36072-EBF5-4605-AFBB-A7F6C000D97D}"/>
               </a:ext>
             </a:extLst>
           </p:cNvPr>
@@ -11799,7 +11799,7 @@
           <p:cNvPr id="5" name="Rectangle 4">
             <a:extLst xmlns:a="http://schemas.openxmlformats.org/drawingml/2006/main">
               <a:ext uri="{FF2B5EF4-FFF2-40B4-BE49-F238E27FC236}">
-                <a16:creationId xmlns:a16="http://schemas.microsoft.com/office/drawing/2014/main" id="{D2AC016F-4115-40E5-A939-E34C576823D6}"/>
+                <a16:creationId xmlns:a16="http://schemas.microsoft.com/office/drawing/2014/main" id="{AF616CDD-3157-4E4E-A673-3AD15686B2E8}"/>
               </a:ext>
             </a:extLst>
           </p:cNvPr>
@@ -11854,7 +11854,7 @@
           <p:cNvPr id="6" name="TextBox 5">
             <a:extLst xmlns:a="http://schemas.openxmlformats.org/drawingml/2006/main">
               <a:ext uri="{FF2B5EF4-FFF2-40B4-BE49-F238E27FC236}">
-                <a16:creationId xmlns:a16="http://schemas.microsoft.com/office/drawing/2014/main" id="{1DAA6A12-A122-411D-B8DC-F910433BD8AB}"/>
+                <a16:creationId xmlns:a16="http://schemas.microsoft.com/office/drawing/2014/main" id="{1489B7CE-0DF9-4CAD-B1FB-8040E90EAA8E}"/>
               </a:ext>
             </a:extLst>
           </p:cNvPr>
@@ -11891,7 +11891,7 @@
                 <a:ea typeface="Aptos"/>
                 <a:cs typeface="Aptos"/>
               </a:rPr>
-              <a:t>Independent public evidence summary · 2026.07.22-8 · 2026-07-22 · Sources: WIPO licensing; WIPO IP Finance</a:t>
+              <a:t>Independent public evidence summary · 2026.07.22-9 · 2026-07-22 · Sources: WIPO licensing; WIPO IP Finance</a:t>
             </a:r>
           </a:p>
         </p:txBody>
@@ -11901,7 +11901,7 @@
           <p:cNvPr id="7" name="TextBox 6">
             <a:extLst xmlns:a="http://schemas.openxmlformats.org/drawingml/2006/main">
               <a:ext uri="{FF2B5EF4-FFF2-40B4-BE49-F238E27FC236}">
-                <a16:creationId xmlns:a16="http://schemas.microsoft.com/office/drawing/2014/main" id="{DFA8AFB3-44A1-422E-9D23-BF6D9366F1EA}"/>
+                <a16:creationId xmlns:a16="http://schemas.microsoft.com/office/drawing/2014/main" id="{E15EBB6D-728E-4545-A3F6-7E34E030C5E8}"/>
               </a:ext>
             </a:extLst>
           </p:cNvPr>
@@ -11948,7 +11948,7 @@
           <p:cNvPr id="8" name="TextBox 7">
             <a:extLst xmlns:a="http://schemas.openxmlformats.org/drawingml/2006/main">
               <a:ext uri="{FF2B5EF4-FFF2-40B4-BE49-F238E27FC236}">
-                <a16:creationId xmlns:a16="http://schemas.microsoft.com/office/drawing/2014/main" id="{FA92CAFA-6D4C-40FB-96E3-F7CBFD60FB7E}"/>
+                <a16:creationId xmlns:a16="http://schemas.microsoft.com/office/drawing/2014/main" id="{0F1927D9-C39C-4D6B-B686-02BFE999D2BE}"/>
               </a:ext>
             </a:extLst>
           </p:cNvPr>
@@ -11995,7 +11995,7 @@
           <p:cNvPr id="9" name="TextBox 8">
             <a:extLst xmlns:a="http://schemas.openxmlformats.org/drawingml/2006/main">
               <a:ext uri="{FF2B5EF4-FFF2-40B4-BE49-F238E27FC236}">
-                <a16:creationId xmlns:a16="http://schemas.microsoft.com/office/drawing/2014/main" id="{17781AB3-7A2C-474B-8C65-B53CB6C3C65C}"/>
+                <a16:creationId xmlns:a16="http://schemas.microsoft.com/office/drawing/2014/main" id="{EEFF9788-8605-456D-B49C-16A262C9A83F}"/>
               </a:ext>
             </a:extLst>
           </p:cNvPr>
@@ -12092,7 +12092,7 @@
           <p:cNvPr id="10" name="Rounded Rectangle 9">
             <a:extLst xmlns:a="http://schemas.openxmlformats.org/drawingml/2006/main">
               <a:ext uri="{FF2B5EF4-FFF2-40B4-BE49-F238E27FC236}">
-                <a16:creationId xmlns:a16="http://schemas.microsoft.com/office/drawing/2014/main" id="{1704303B-E3D8-439F-9AB3-821D840FAB9E}"/>
+                <a16:creationId xmlns:a16="http://schemas.microsoft.com/office/drawing/2014/main" id="{F2270BF7-0A5D-4628-B55C-F2788787DE5C}"/>
               </a:ext>
             </a:extLst>
           </p:cNvPr>
@@ -12149,7 +12149,7 @@
           <p:cNvPr id="11" name="TextBox 10">
             <a:extLst xmlns:a="http://schemas.openxmlformats.org/drawingml/2006/main">
               <a:ext uri="{FF2B5EF4-FFF2-40B4-BE49-F238E27FC236}">
-                <a16:creationId xmlns:a16="http://schemas.microsoft.com/office/drawing/2014/main" id="{8DE1AAC6-90CF-4C3F-87F7-ED61A53DB980}"/>
+                <a16:creationId xmlns:a16="http://schemas.microsoft.com/office/drawing/2014/main" id="{322CAF19-5C90-40C2-8746-0C54926CD0AC}"/>
               </a:ext>
             </a:extLst>
           </p:cNvPr>
@@ -12196,7 +12196,7 @@
           <p:cNvPr id="12" name="TextBox 11">
             <a:extLst xmlns:a="http://schemas.openxmlformats.org/drawingml/2006/main">
               <a:ext uri="{FF2B5EF4-FFF2-40B4-BE49-F238E27FC236}">
-                <a16:creationId xmlns:a16="http://schemas.microsoft.com/office/drawing/2014/main" id="{4C491848-07EF-43FD-881A-D76BCEF1EA9B}"/>
+                <a16:creationId xmlns:a16="http://schemas.microsoft.com/office/drawing/2014/main" id="{C42D156A-6742-4B0D-A966-1B4378DD6D64}"/>
               </a:ext>
             </a:extLst>
           </p:cNvPr>
@@ -12241,7 +12241,7 @@
     </p:spTree>
     <p:extLst>
       <p:ext uri="{BB962C8B-B14F-4D97-AF65-F5344CB8AC3E}">
-        <p14:creationId xmlns:p14="http://schemas.microsoft.com/office/powerpoint/2010/main" val="1347015087"/>
+        <p14:creationId xmlns:p14="http://schemas.microsoft.com/office/powerpoint/2010/main" val="1456163167"/>
       </p:ext>
     </p:extLst>
   </p:cSld>
@@ -12265,7 +12265,7 @@
           <p:cNvPr id="2" name="TextBox 1">
             <a:extLst xmlns:a="http://schemas.openxmlformats.org/drawingml/2006/main">
               <a:ext uri="{FF2B5EF4-FFF2-40B4-BE49-F238E27FC236}">
-                <a16:creationId xmlns:a16="http://schemas.microsoft.com/office/drawing/2014/main" id="{7AE7775F-0874-4991-9C92-5A3F825B71A2}"/>
+                <a16:creationId xmlns:a16="http://schemas.microsoft.com/office/drawing/2014/main" id="{35838485-BA9B-4BFE-9820-FF04DCDE2388}"/>
               </a:ext>
             </a:extLst>
           </p:cNvPr>
@@ -12312,7 +12312,7 @@
           <p:cNvPr id="3" name="TextBox 2">
             <a:extLst xmlns:a="http://schemas.openxmlformats.org/drawingml/2006/main">
               <a:ext uri="{FF2B5EF4-FFF2-40B4-BE49-F238E27FC236}">
-                <a16:creationId xmlns:a16="http://schemas.microsoft.com/office/drawing/2014/main" id="{242C3BFB-6599-4C48-BF86-9E3F63D34CC8}"/>
+                <a16:creationId xmlns:a16="http://schemas.microsoft.com/office/drawing/2014/main" id="{C96FC13A-77DB-4D5B-967F-6C8E9B16F951}"/>
               </a:ext>
             </a:extLst>
           </p:cNvPr>
@@ -12359,7 +12359,7 @@
           <p:cNvPr id="4" name="Rectangle 3">
             <a:extLst xmlns:a="http://schemas.openxmlformats.org/drawingml/2006/main">
               <a:ext uri="{FF2B5EF4-FFF2-40B4-BE49-F238E27FC236}">
-                <a16:creationId xmlns:a16="http://schemas.microsoft.com/office/drawing/2014/main" id="{51FC86A3-26C4-4FC6-91DE-F3C465F1D977}"/>
+                <a16:creationId xmlns:a16="http://schemas.microsoft.com/office/drawing/2014/main" id="{98A7D335-E36E-450A-B49F-C254719B782B}"/>
               </a:ext>
             </a:extLst>
           </p:cNvPr>
@@ -12414,7 +12414,7 @@
           <p:cNvPr id="5" name="Rectangle 4">
             <a:extLst xmlns:a="http://schemas.openxmlformats.org/drawingml/2006/main">
               <a:ext uri="{FF2B5EF4-FFF2-40B4-BE49-F238E27FC236}">
-                <a16:creationId xmlns:a16="http://schemas.microsoft.com/office/drawing/2014/main" id="{DB62D77F-298D-4567-AC8D-5F7CF71617E8}"/>
+                <a16:creationId xmlns:a16="http://schemas.microsoft.com/office/drawing/2014/main" id="{09E38D97-0C53-40E7-AE98-2B9106AC20CB}"/>
               </a:ext>
             </a:extLst>
           </p:cNvPr>
@@ -12469,7 +12469,7 @@
           <p:cNvPr id="6" name="TextBox 5">
             <a:extLst xmlns:a="http://schemas.openxmlformats.org/drawingml/2006/main">
               <a:ext uri="{FF2B5EF4-FFF2-40B4-BE49-F238E27FC236}">
-                <a16:creationId xmlns:a16="http://schemas.microsoft.com/office/drawing/2014/main" id="{0C9CA5A4-4E26-43C2-BF12-DEF2F83F201F}"/>
+                <a16:creationId xmlns:a16="http://schemas.microsoft.com/office/drawing/2014/main" id="{AF545ABC-5580-4E21-9E69-CE639697D5B3}"/>
               </a:ext>
             </a:extLst>
           </p:cNvPr>
@@ -12506,7 +12506,7 @@
                 <a:ea typeface="Aptos"/>
                 <a:cs typeface="Aptos"/>
               </a:rPr>
-              <a:t>Independent public evidence summary · 2026.07.22-8 · 2026-07-22 · Sources: Evidence Register; EPO; WIPO</a:t>
+              <a:t>Independent public evidence summary · 2026.07.22-9 · 2026-07-22 · Sources: Evidence Register; EPO; WIPO</a:t>
             </a:r>
           </a:p>
         </p:txBody>
@@ -12516,7 +12516,7 @@
           <p:cNvPr id="7" name="TextBox 6">
             <a:extLst xmlns:a="http://schemas.openxmlformats.org/drawingml/2006/main">
               <a:ext uri="{FF2B5EF4-FFF2-40B4-BE49-F238E27FC236}">
-                <a16:creationId xmlns:a16="http://schemas.microsoft.com/office/drawing/2014/main" id="{1EFDBA88-39BE-4DC7-AE34-9468722699CC}"/>
+                <a16:creationId xmlns:a16="http://schemas.microsoft.com/office/drawing/2014/main" id="{EEBC5121-71EB-40DF-A519-A51F7F87D4BF}"/>
               </a:ext>
             </a:extLst>
           </p:cNvPr>
@@ -13003,7 +13003,7 @@
           <p:cNvPr id="9" name="TextBox 8">
             <a:extLst xmlns:a="http://schemas.openxmlformats.org/drawingml/2006/main">
               <a:ext uri="{FF2B5EF4-FFF2-40B4-BE49-F238E27FC236}">
-                <a16:creationId xmlns:a16="http://schemas.microsoft.com/office/drawing/2014/main" id="{95C4B25A-8D06-40C6-A66F-011CC89A8A2C}"/>
+                <a16:creationId xmlns:a16="http://schemas.microsoft.com/office/drawing/2014/main" id="{65207E0B-AD5A-4A0E-AF4B-DF1DBBAE3D79}"/>
               </a:ext>
             </a:extLst>
           </p:cNvPr>
@@ -13048,7 +13048,7 @@
     </p:spTree>
     <p:extLst>
       <p:ext uri="{BB962C8B-B14F-4D97-AF65-F5344CB8AC3E}">
-        <p14:creationId xmlns:p14="http://schemas.microsoft.com/office/powerpoint/2010/main" val="1337952387"/>
+        <p14:creationId xmlns:p14="http://schemas.microsoft.com/office/powerpoint/2010/main" val="1504271334"/>
       </p:ext>
     </p:extLst>
   </p:cSld>
@@ -13072,7 +13072,7 @@
           <p:cNvPr id="2" name="TextBox 1">
             <a:extLst xmlns:a="http://schemas.openxmlformats.org/drawingml/2006/main">
               <a:ext uri="{FF2B5EF4-FFF2-40B4-BE49-F238E27FC236}">
-                <a16:creationId xmlns:a16="http://schemas.microsoft.com/office/drawing/2014/main" id="{559C0C1E-ED13-4B59-8FD5-2E9AA7CDE80A}"/>
+                <a16:creationId xmlns:a16="http://schemas.microsoft.com/office/drawing/2014/main" id="{68707A51-AC8B-4565-B148-F320A886366E}"/>
               </a:ext>
             </a:extLst>
           </p:cNvPr>
@@ -13119,7 +13119,7 @@
           <p:cNvPr id="3" name="TextBox 2">
             <a:extLst xmlns:a="http://schemas.openxmlformats.org/drawingml/2006/main">
               <a:ext uri="{FF2B5EF4-FFF2-40B4-BE49-F238E27FC236}">
-                <a16:creationId xmlns:a16="http://schemas.microsoft.com/office/drawing/2014/main" id="{126018B6-25D1-4031-8B69-26E48E5F65A8}"/>
+                <a16:creationId xmlns:a16="http://schemas.microsoft.com/office/drawing/2014/main" id="{AA7523EA-6CB5-4E03-9E82-9B61F1C9CB3E}"/>
               </a:ext>
             </a:extLst>
           </p:cNvPr>
@@ -13166,7 +13166,7 @@
           <p:cNvPr id="4" name="Rectangle 3">
             <a:extLst xmlns:a="http://schemas.openxmlformats.org/drawingml/2006/main">
               <a:ext uri="{FF2B5EF4-FFF2-40B4-BE49-F238E27FC236}">
-                <a16:creationId xmlns:a16="http://schemas.microsoft.com/office/drawing/2014/main" id="{EF70DAC1-BC43-44E0-AA59-4E769C605027}"/>
+                <a16:creationId xmlns:a16="http://schemas.microsoft.com/office/drawing/2014/main" id="{A75521A9-D575-4948-A945-CF49FC0B4837}"/>
               </a:ext>
             </a:extLst>
           </p:cNvPr>
@@ -13221,7 +13221,7 @@
           <p:cNvPr id="5" name="Rectangle 4">
             <a:extLst xmlns:a="http://schemas.openxmlformats.org/drawingml/2006/main">
               <a:ext uri="{FF2B5EF4-FFF2-40B4-BE49-F238E27FC236}">
-                <a16:creationId xmlns:a16="http://schemas.microsoft.com/office/drawing/2014/main" id="{10F841CA-ABD5-42A7-8965-BC949531D2B3}"/>
+                <a16:creationId xmlns:a16="http://schemas.microsoft.com/office/drawing/2014/main" id="{8CA6D8FE-103D-463F-A0F2-C1645EB3E3FC}"/>
               </a:ext>
             </a:extLst>
           </p:cNvPr>
@@ -13276,7 +13276,7 @@
           <p:cNvPr id="6" name="TextBox 5">
             <a:extLst xmlns:a="http://schemas.openxmlformats.org/drawingml/2006/main">
               <a:ext uri="{FF2B5EF4-FFF2-40B4-BE49-F238E27FC236}">
-                <a16:creationId xmlns:a16="http://schemas.microsoft.com/office/drawing/2014/main" id="{B11D5133-0B06-4044-B239-A2931DBEF449}"/>
+                <a16:creationId xmlns:a16="http://schemas.microsoft.com/office/drawing/2014/main" id="{7C0C99BE-AC89-4EC4-A4FC-69DE3B616A29}"/>
               </a:ext>
             </a:extLst>
           </p:cNvPr>
@@ -13313,7 +13313,7 @@
                 <a:ea typeface="Aptos"/>
                 <a:cs typeface="Aptos"/>
               </a:rPr>
-              <a:t>Independent public evidence summary · 2026.07.22-8 · 2026-07-22 · Sources: Evidence Register</a:t>
+              <a:t>Independent public evidence summary · 2026.07.22-9 · 2026-07-22 · Sources: Evidence Register</a:t>
             </a:r>
           </a:p>
         </p:txBody>
@@ -13323,7 +13323,7 @@
           <p:cNvPr id="7" name="TextBox 6">
             <a:extLst xmlns:a="http://schemas.openxmlformats.org/drawingml/2006/main">
               <a:ext uri="{FF2B5EF4-FFF2-40B4-BE49-F238E27FC236}">
-                <a16:creationId xmlns:a16="http://schemas.microsoft.com/office/drawing/2014/main" id="{87114FFC-7668-4D73-9F67-07514B79E227}"/>
+                <a16:creationId xmlns:a16="http://schemas.microsoft.com/office/drawing/2014/main" id="{F72FF125-E6A8-43CD-A5E3-0C6C8B61BEAA}"/>
               </a:ext>
             </a:extLst>
           </p:cNvPr>
@@ -14056,7 +14056,7 @@
           <p:cNvPr id="9" name="TextBox 8">
             <a:extLst xmlns:a="http://schemas.openxmlformats.org/drawingml/2006/main">
               <a:ext uri="{FF2B5EF4-FFF2-40B4-BE49-F238E27FC236}">
-                <a16:creationId xmlns:a16="http://schemas.microsoft.com/office/drawing/2014/main" id="{C21350DD-3B70-46C3-8FFB-C33847B57DCD}"/>
+                <a16:creationId xmlns:a16="http://schemas.microsoft.com/office/drawing/2014/main" id="{7676C966-82C7-4C46-98B5-F4747ADE95DC}"/>
               </a:ext>
             </a:extLst>
           </p:cNvPr>
@@ -14101,7 +14101,7 @@
     </p:spTree>
     <p:extLst>
       <p:ext uri="{BB962C8B-B14F-4D97-AF65-F5344CB8AC3E}">
-        <p14:creationId xmlns:p14="http://schemas.microsoft.com/office/powerpoint/2010/main" val="1761654253"/>
+        <p14:creationId xmlns:p14="http://schemas.microsoft.com/office/powerpoint/2010/main" val="1335032449"/>
       </p:ext>
     </p:extLst>
   </p:cSld>

--- a/site/downloads/pixan-bank-deck-medium-en.pptx
+++ b/site/downloads/pixan-bank-deck-medium-en.pptx
@@ -2,24 +2,24 @@
 <file path=ppt/presentation.xml><?xml version="1.0" encoding="utf-8"?>
 <p:presentation xmlns:p="http://schemas.openxmlformats.org/presentationml/2006/main">
   <p:sldMasterIdLst>
-    <p:sldMasterId xmlns:r="http://schemas.openxmlformats.org/officeDocument/2006/relationships" id="2147483648" r:id="Rdd445964e1224988"/>
+    <p:sldMasterId xmlns:r="http://schemas.openxmlformats.org/officeDocument/2006/relationships" id="2147483648" r:id="R56590a6f56894f96"/>
   </p:sldMasterIdLst>
   <p:notesMasterIdLst>
-    <p:notesMasterId xmlns:r="http://schemas.openxmlformats.org/officeDocument/2006/relationships" r:id="R3d82eb59c81e4f2e"/>
+    <p:notesMasterId xmlns:r="http://schemas.openxmlformats.org/officeDocument/2006/relationships" r:id="R96589331129a425f"/>
   </p:notesMasterIdLst>
   <p:sldIdLst>
-    <p:sldId xmlns:r="http://schemas.openxmlformats.org/officeDocument/2006/relationships" id="256" r:id="R003f579f8a194e2c"/>
-    <p:sldId xmlns:r="http://schemas.openxmlformats.org/officeDocument/2006/relationships" id="257" r:id="Re1ad71d2320d45b3"/>
-    <p:sldId xmlns:r="http://schemas.openxmlformats.org/officeDocument/2006/relationships" id="258" r:id="R23daa6b36876471f"/>
-    <p:sldId xmlns:r="http://schemas.openxmlformats.org/officeDocument/2006/relationships" id="259" r:id="R9b83d6d7e67d44e1"/>
-    <p:sldId xmlns:r="http://schemas.openxmlformats.org/officeDocument/2006/relationships" id="260" r:id="R039bb486c469492e"/>
-    <p:sldId xmlns:r="http://schemas.openxmlformats.org/officeDocument/2006/relationships" id="261" r:id="R69714a8b3695426b"/>
-    <p:sldId xmlns:r="http://schemas.openxmlformats.org/officeDocument/2006/relationships" id="262" r:id="R36c0879c1593405b"/>
-    <p:sldId xmlns:r="http://schemas.openxmlformats.org/officeDocument/2006/relationships" id="263" r:id="Rb7824543adc24a09"/>
-    <p:sldId xmlns:r="http://schemas.openxmlformats.org/officeDocument/2006/relationships" id="264" r:id="Re64b2ef82ff54f39"/>
-    <p:sldId xmlns:r="http://schemas.openxmlformats.org/officeDocument/2006/relationships" id="265" r:id="R1dfbc74ee9fd4ca3"/>
-    <p:sldId xmlns:r="http://schemas.openxmlformats.org/officeDocument/2006/relationships" id="266" r:id="R7e242f0d0b264172"/>
-    <p:sldId xmlns:r="http://schemas.openxmlformats.org/officeDocument/2006/relationships" id="267" r:id="Re47d4ba42a354b18"/>
+    <p:sldId xmlns:r="http://schemas.openxmlformats.org/officeDocument/2006/relationships" id="256" r:id="Rddd4a143d55c451d"/>
+    <p:sldId xmlns:r="http://schemas.openxmlformats.org/officeDocument/2006/relationships" id="257" r:id="R1f08c9a1ed1d42b1"/>
+    <p:sldId xmlns:r="http://schemas.openxmlformats.org/officeDocument/2006/relationships" id="258" r:id="Rb26b8126951b4846"/>
+    <p:sldId xmlns:r="http://schemas.openxmlformats.org/officeDocument/2006/relationships" id="259" r:id="Rf3618fcdbd4a439e"/>
+    <p:sldId xmlns:r="http://schemas.openxmlformats.org/officeDocument/2006/relationships" id="260" r:id="R46e46374e9c6437c"/>
+    <p:sldId xmlns:r="http://schemas.openxmlformats.org/officeDocument/2006/relationships" id="261" r:id="Rfca1e33fd38c4308"/>
+    <p:sldId xmlns:r="http://schemas.openxmlformats.org/officeDocument/2006/relationships" id="262" r:id="Rab290f85329f44c7"/>
+    <p:sldId xmlns:r="http://schemas.openxmlformats.org/officeDocument/2006/relationships" id="263" r:id="Rbe5117bbeb174f5c"/>
+    <p:sldId xmlns:r="http://schemas.openxmlformats.org/officeDocument/2006/relationships" id="264" r:id="Rcffaefbe9b3f4b33"/>
+    <p:sldId xmlns:r="http://schemas.openxmlformats.org/officeDocument/2006/relationships" id="265" r:id="Rd6af4678847c480c"/>
+    <p:sldId xmlns:r="http://schemas.openxmlformats.org/officeDocument/2006/relationships" id="266" r:id="R30a042643e234adf"/>
+    <p:sldId xmlns:r="http://schemas.openxmlformats.org/officeDocument/2006/relationships" id="267" r:id="R0df5c6582559446a"/>
   </p:sldIdLst>
   <p:sldSz cx="12191999" cy="6858000"/>
   <p:notesSz cx="6858000" cy="9144000"/>
@@ -1340,7 +1340,7 @@
           <p:cNvPr id="2" name="Title 1">
             <a:extLst xmlns:a="http://schemas.openxmlformats.org/drawingml/2006/main">
               <a:ext uri="{FF2B5EF4-FFF2-40B4-BE49-F238E27FC236}">
-                <a16:creationId xmlns:a16="http://schemas.microsoft.com/office/drawing/2014/main" id="{9B29DEF9-C3CC-4339-8C7B-C0D46E19DBFD}"/>
+                <a16:creationId xmlns:a16="http://schemas.microsoft.com/office/drawing/2014/main" id="{FB5A9052-1296-463F-9B9C-CAE2E10FD004}"/>
               </a:ext>
             </a:extLst>
           </p:cNvPr>
@@ -1372,7 +1372,7 @@
           <p:cNvPr id="3" name="Subtitle 2">
             <a:extLst xmlns:a="http://schemas.openxmlformats.org/drawingml/2006/main">
               <a:ext uri="{FF2B5EF4-FFF2-40B4-BE49-F238E27FC236}">
-                <a16:creationId xmlns:a16="http://schemas.microsoft.com/office/drawing/2014/main" id="{B4DF59F7-30E8-4A6A-A9B1-136FFDE39D05}"/>
+                <a16:creationId xmlns:a16="http://schemas.microsoft.com/office/drawing/2014/main" id="{683E8531-802B-4066-8E38-F308FEA1D6DF}"/>
               </a:ext>
             </a:extLst>
           </p:cNvPr>
@@ -1495,7 +1495,7 @@
           <p:cNvPr id="4" name="Date Placeholder 3">
             <a:extLst xmlns:a="http://schemas.openxmlformats.org/drawingml/2006/main">
               <a:ext uri="{FF2B5EF4-FFF2-40B4-BE49-F238E27FC236}">
-                <a16:creationId xmlns:a16="http://schemas.microsoft.com/office/drawing/2014/main" id="{5CA430E6-83CD-48EC-A114-5CB9A95E522D}"/>
+                <a16:creationId xmlns:a16="http://schemas.microsoft.com/office/drawing/2014/main" id="{9A6C74CC-4785-4016-A75B-46542A742A55}"/>
               </a:ext>
             </a:extLst>
           </p:cNvPr>
@@ -1522,7 +1522,7 @@
           <p:cNvPr id="5" name="Footer Placeholder 4">
             <a:extLst xmlns:a="http://schemas.openxmlformats.org/drawingml/2006/main">
               <a:ext uri="{FF2B5EF4-FFF2-40B4-BE49-F238E27FC236}">
-                <a16:creationId xmlns:a16="http://schemas.microsoft.com/office/drawing/2014/main" id="{ADA3E8E5-7ABB-43F1-BE0C-4F5DDA6E5E22}"/>
+                <a16:creationId xmlns:a16="http://schemas.microsoft.com/office/drawing/2014/main" id="{80D8B97C-2B30-459A-98F1-B935FFB144CA}"/>
               </a:ext>
             </a:extLst>
           </p:cNvPr>
@@ -1545,7 +1545,7 @@
           <p:cNvPr id="6" name="Slide Number Placeholder 5">
             <a:extLst xmlns:a="http://schemas.openxmlformats.org/drawingml/2006/main">
               <a:ext uri="{FF2B5EF4-FFF2-40B4-BE49-F238E27FC236}">
-                <a16:creationId xmlns:a16="http://schemas.microsoft.com/office/drawing/2014/main" id="{C9191598-58E3-4533-883A-AAA4258B6F63}"/>
+                <a16:creationId xmlns:a16="http://schemas.microsoft.com/office/drawing/2014/main" id="{08A15436-00CD-4389-951A-837344B69362}"/>
               </a:ext>
             </a:extLst>
           </p:cNvPr>
@@ -1589,7 +1589,7 @@
           <p:cNvPr id="2" name="Title 1">
             <a:extLst xmlns:a="http://schemas.openxmlformats.org/drawingml/2006/main">
               <a:ext uri="{FF2B5EF4-FFF2-40B4-BE49-F238E27FC236}">
-                <a16:creationId xmlns:a16="http://schemas.microsoft.com/office/drawing/2014/main" id="{7F2F4A45-2390-43A0-B251-F1CA1622DA28}"/>
+                <a16:creationId xmlns:a16="http://schemas.microsoft.com/office/drawing/2014/main" id="{E093D239-7B42-4AD4-A082-BECF285B009E}"/>
               </a:ext>
             </a:extLst>
           </p:cNvPr>
@@ -1616,7 +1616,7 @@
           <p:cNvPr id="3" name="Vertical Text Placeholder 2">
             <a:extLst xmlns:a="http://schemas.openxmlformats.org/drawingml/2006/main">
               <a:ext uri="{FF2B5EF4-FFF2-40B4-BE49-F238E27FC236}">
-                <a16:creationId xmlns:a16="http://schemas.microsoft.com/office/drawing/2014/main" id="{53DBD538-61D2-43FE-8D84-617C62FD35D0}"/>
+                <a16:creationId xmlns:a16="http://schemas.microsoft.com/office/drawing/2014/main" id="{F28F54FD-A585-4B92-A999-655F464CAC18}"/>
               </a:ext>
             </a:extLst>
           </p:cNvPr>
@@ -1678,7 +1678,7 @@
           <p:cNvPr id="4" name="Date Placeholder 3">
             <a:extLst xmlns:a="http://schemas.openxmlformats.org/drawingml/2006/main">
               <a:ext uri="{FF2B5EF4-FFF2-40B4-BE49-F238E27FC236}">
-                <a16:creationId xmlns:a16="http://schemas.microsoft.com/office/drawing/2014/main" id="{CDC731D3-B9C2-4079-B811-C7073D038601}"/>
+                <a16:creationId xmlns:a16="http://schemas.microsoft.com/office/drawing/2014/main" id="{C53ABBEB-4C6A-4205-B9F1-9FDF935583B5}"/>
               </a:ext>
             </a:extLst>
           </p:cNvPr>
@@ -1705,7 +1705,7 @@
           <p:cNvPr id="5" name="Footer Placeholder 4">
             <a:extLst xmlns:a="http://schemas.openxmlformats.org/drawingml/2006/main">
               <a:ext uri="{FF2B5EF4-FFF2-40B4-BE49-F238E27FC236}">
-                <a16:creationId xmlns:a16="http://schemas.microsoft.com/office/drawing/2014/main" id="{3E135D3C-E1C9-4786-8FA1-C6DA4EDEEECF}"/>
+                <a16:creationId xmlns:a16="http://schemas.microsoft.com/office/drawing/2014/main" id="{C6694F3C-ED69-4EEE-91BB-2A62EDD82064}"/>
               </a:ext>
             </a:extLst>
           </p:cNvPr>
@@ -1728,7 +1728,7 @@
           <p:cNvPr id="6" name="Slide Number Placeholder 5">
             <a:extLst xmlns:a="http://schemas.openxmlformats.org/drawingml/2006/main">
               <a:ext uri="{FF2B5EF4-FFF2-40B4-BE49-F238E27FC236}">
-                <a16:creationId xmlns:a16="http://schemas.microsoft.com/office/drawing/2014/main" id="{3DCE73FF-9B17-4124-A297-2B9986B89F10}"/>
+                <a16:creationId xmlns:a16="http://schemas.microsoft.com/office/drawing/2014/main" id="{513107E2-E271-4C2B-8DBB-64B0E1BB7593}"/>
               </a:ext>
             </a:extLst>
           </p:cNvPr>
@@ -1772,7 +1772,7 @@
           <p:cNvPr id="2" name="Vertical Title 1">
             <a:extLst xmlns:a="http://schemas.openxmlformats.org/drawingml/2006/main">
               <a:ext uri="{FF2B5EF4-FFF2-40B4-BE49-F238E27FC236}">
-                <a16:creationId xmlns:a16="http://schemas.microsoft.com/office/drawing/2014/main" id="{09E407AE-DE7B-4A36-A775-3BF636E7BC67}"/>
+                <a16:creationId xmlns:a16="http://schemas.microsoft.com/office/drawing/2014/main" id="{AD4ED9C9-67EE-4035-8A86-F17CB99B7CA7}"/>
               </a:ext>
             </a:extLst>
           </p:cNvPr>
@@ -1804,7 +1804,7 @@
           <p:cNvPr id="3" name="Vertical Text Placeholder 2">
             <a:extLst xmlns:a="http://schemas.openxmlformats.org/drawingml/2006/main">
               <a:ext uri="{FF2B5EF4-FFF2-40B4-BE49-F238E27FC236}">
-                <a16:creationId xmlns:a16="http://schemas.microsoft.com/office/drawing/2014/main" id="{B691A616-44C4-4172-BCB3-C2D2F1C16DA6}"/>
+                <a16:creationId xmlns:a16="http://schemas.microsoft.com/office/drawing/2014/main" id="{81BB09EC-4FC5-40A3-9535-9C4DD3DCBDFE}"/>
               </a:ext>
             </a:extLst>
           </p:cNvPr>
@@ -1871,7 +1871,7 @@
           <p:cNvPr id="4" name="Date Placeholder 3">
             <a:extLst xmlns:a="http://schemas.openxmlformats.org/drawingml/2006/main">
               <a:ext uri="{FF2B5EF4-FFF2-40B4-BE49-F238E27FC236}">
-                <a16:creationId xmlns:a16="http://schemas.microsoft.com/office/drawing/2014/main" id="{5A11158A-9CBB-4F5A-B81C-89F2F6BEA935}"/>
+                <a16:creationId xmlns:a16="http://schemas.microsoft.com/office/drawing/2014/main" id="{4C502415-B3F4-488C-A8FC-A6CE6988636A}"/>
               </a:ext>
             </a:extLst>
           </p:cNvPr>
@@ -1898,7 +1898,7 @@
           <p:cNvPr id="5" name="Footer Placeholder 4">
             <a:extLst xmlns:a="http://schemas.openxmlformats.org/drawingml/2006/main">
               <a:ext uri="{FF2B5EF4-FFF2-40B4-BE49-F238E27FC236}">
-                <a16:creationId xmlns:a16="http://schemas.microsoft.com/office/drawing/2014/main" id="{CB925B0F-2F42-4365-B79E-DEB6521C1D7C}"/>
+                <a16:creationId xmlns:a16="http://schemas.microsoft.com/office/drawing/2014/main" id="{3E5395ED-F908-4247-B26B-B695E775E046}"/>
               </a:ext>
             </a:extLst>
           </p:cNvPr>
@@ -1921,7 +1921,7 @@
           <p:cNvPr id="6" name="Slide Number Placeholder 5">
             <a:extLst xmlns:a="http://schemas.openxmlformats.org/drawingml/2006/main">
               <a:ext uri="{FF2B5EF4-FFF2-40B4-BE49-F238E27FC236}">
-                <a16:creationId xmlns:a16="http://schemas.microsoft.com/office/drawing/2014/main" id="{291C4454-0A0B-48BF-AB64-ADA9EBB392B7}"/>
+                <a16:creationId xmlns:a16="http://schemas.microsoft.com/office/drawing/2014/main" id="{2862AB2A-BED8-4A55-BA0D-DA39CB845EFA}"/>
               </a:ext>
             </a:extLst>
           </p:cNvPr>
@@ -1965,7 +1965,7 @@
           <p:cNvPr id="2" name="Title 1">
             <a:extLst xmlns:a="http://schemas.openxmlformats.org/drawingml/2006/main">
               <a:ext uri="{FF2B5EF4-FFF2-40B4-BE49-F238E27FC236}">
-                <a16:creationId xmlns:a16="http://schemas.microsoft.com/office/drawing/2014/main" id="{49A1F941-6117-49C7-9BB5-D68E02D88FF8}"/>
+                <a16:creationId xmlns:a16="http://schemas.microsoft.com/office/drawing/2014/main" id="{D64E65B1-76AF-4CBA-9E0E-7DD2C70554F2}"/>
               </a:ext>
             </a:extLst>
           </p:cNvPr>
@@ -1992,7 +1992,7 @@
           <p:cNvPr id="3" name="Content Placeholder 2">
             <a:extLst xmlns:a="http://schemas.openxmlformats.org/drawingml/2006/main">
               <a:ext uri="{FF2B5EF4-FFF2-40B4-BE49-F238E27FC236}">
-                <a16:creationId xmlns:a16="http://schemas.microsoft.com/office/drawing/2014/main" id="{273E07DD-B78F-4A7F-8B0E-04DAA4255181}"/>
+                <a16:creationId xmlns:a16="http://schemas.microsoft.com/office/drawing/2014/main" id="{C3A65829-ED9D-4AE9-8CE2-95BB49902D56}"/>
               </a:ext>
             </a:extLst>
           </p:cNvPr>
@@ -2054,7 +2054,7 @@
           <p:cNvPr id="4" name="Date Placeholder 3">
             <a:extLst xmlns:a="http://schemas.openxmlformats.org/drawingml/2006/main">
               <a:ext uri="{FF2B5EF4-FFF2-40B4-BE49-F238E27FC236}">
-                <a16:creationId xmlns:a16="http://schemas.microsoft.com/office/drawing/2014/main" id="{A7783A41-01BA-4779-BC23-75593E549702}"/>
+                <a16:creationId xmlns:a16="http://schemas.microsoft.com/office/drawing/2014/main" id="{DE47E1AA-FFF2-4403-841C-CF04750C78E2}"/>
               </a:ext>
             </a:extLst>
           </p:cNvPr>
@@ -2081,7 +2081,7 @@
           <p:cNvPr id="5" name="Footer Placeholder 4">
             <a:extLst xmlns:a="http://schemas.openxmlformats.org/drawingml/2006/main">
               <a:ext uri="{FF2B5EF4-FFF2-40B4-BE49-F238E27FC236}">
-                <a16:creationId xmlns:a16="http://schemas.microsoft.com/office/drawing/2014/main" id="{71BE5CC2-63FB-49CE-B272-7C4D63909DE7}"/>
+                <a16:creationId xmlns:a16="http://schemas.microsoft.com/office/drawing/2014/main" id="{F77EA4CE-DEDD-4C34-8F77-25749331DCA8}"/>
               </a:ext>
             </a:extLst>
           </p:cNvPr>
@@ -2104,7 +2104,7 @@
           <p:cNvPr id="6" name="Slide Number Placeholder 5">
             <a:extLst xmlns:a="http://schemas.openxmlformats.org/drawingml/2006/main">
               <a:ext uri="{FF2B5EF4-FFF2-40B4-BE49-F238E27FC236}">
-                <a16:creationId xmlns:a16="http://schemas.microsoft.com/office/drawing/2014/main" id="{2FE80054-4E69-49F0-8BD6-8F9C241F8BB2}"/>
+                <a16:creationId xmlns:a16="http://schemas.microsoft.com/office/drawing/2014/main" id="{4C79A083-836A-45E7-A448-14F1056FB63D}"/>
               </a:ext>
             </a:extLst>
           </p:cNvPr>
@@ -2148,7 +2148,7 @@
           <p:cNvPr id="2" name="Title 1">
             <a:extLst xmlns:a="http://schemas.openxmlformats.org/drawingml/2006/main">
               <a:ext uri="{FF2B5EF4-FFF2-40B4-BE49-F238E27FC236}">
-                <a16:creationId xmlns:a16="http://schemas.microsoft.com/office/drawing/2014/main" id="{C251F159-48B4-4621-8012-0C16373FBDFF}"/>
+                <a16:creationId xmlns:a16="http://schemas.microsoft.com/office/drawing/2014/main" id="{F4D57A5F-A3BF-4577-8C38-C71BA0F85BCE}"/>
               </a:ext>
             </a:extLst>
           </p:cNvPr>
@@ -2185,7 +2185,7 @@
           <p:cNvPr id="3" name="Text Placeholder 2">
             <a:extLst xmlns:a="http://schemas.openxmlformats.org/drawingml/2006/main">
               <a:ext uri="{FF2B5EF4-FFF2-40B4-BE49-F238E27FC236}">
-                <a16:creationId xmlns:a16="http://schemas.microsoft.com/office/drawing/2014/main" id="{86DA8B31-473B-4DB9-AEAE-8A63BA57373F}"/>
+                <a16:creationId xmlns:a16="http://schemas.microsoft.com/office/drawing/2014/main" id="{74E6CD42-D2E7-4FC1-87DD-839C5E857C78}"/>
               </a:ext>
             </a:extLst>
           </p:cNvPr>
@@ -2311,7 +2311,7 @@
           <p:cNvPr id="4" name="Date Placeholder 3">
             <a:extLst xmlns:a="http://schemas.openxmlformats.org/drawingml/2006/main">
               <a:ext uri="{FF2B5EF4-FFF2-40B4-BE49-F238E27FC236}">
-                <a16:creationId xmlns:a16="http://schemas.microsoft.com/office/drawing/2014/main" id="{64A7FB00-91B9-4690-A07C-02E896E9A2CA}"/>
+                <a16:creationId xmlns:a16="http://schemas.microsoft.com/office/drawing/2014/main" id="{6F8471F7-163B-4191-B514-1B95DE596E03}"/>
               </a:ext>
             </a:extLst>
           </p:cNvPr>
@@ -2338,7 +2338,7 @@
           <p:cNvPr id="5" name="Footer Placeholder 4">
             <a:extLst xmlns:a="http://schemas.openxmlformats.org/drawingml/2006/main">
               <a:ext uri="{FF2B5EF4-FFF2-40B4-BE49-F238E27FC236}">
-                <a16:creationId xmlns:a16="http://schemas.microsoft.com/office/drawing/2014/main" id="{D48B02A4-FF97-4FF6-A2F1-177A25CEBEBC}"/>
+                <a16:creationId xmlns:a16="http://schemas.microsoft.com/office/drawing/2014/main" id="{D72D2E44-31C2-4F47-A643-9956B2A5B543}"/>
               </a:ext>
             </a:extLst>
           </p:cNvPr>
@@ -2361,7 +2361,7 @@
           <p:cNvPr id="6" name="Slide Number Placeholder 5">
             <a:extLst xmlns:a="http://schemas.openxmlformats.org/drawingml/2006/main">
               <a:ext uri="{FF2B5EF4-FFF2-40B4-BE49-F238E27FC236}">
-                <a16:creationId xmlns:a16="http://schemas.microsoft.com/office/drawing/2014/main" id="{74C7BFE4-4D5C-4746-869D-CBA92B829A53}"/>
+                <a16:creationId xmlns:a16="http://schemas.microsoft.com/office/drawing/2014/main" id="{43D974E6-E8B2-40AA-ACBA-8144CCA692EE}"/>
               </a:ext>
             </a:extLst>
           </p:cNvPr>
@@ -2405,7 +2405,7 @@
           <p:cNvPr id="2" name="Title 1">
             <a:extLst xmlns:a="http://schemas.openxmlformats.org/drawingml/2006/main">
               <a:ext uri="{FF2B5EF4-FFF2-40B4-BE49-F238E27FC236}">
-                <a16:creationId xmlns:a16="http://schemas.microsoft.com/office/drawing/2014/main" id="{907A147E-2A5F-4234-920D-AAEC9E7ACDD8}"/>
+                <a16:creationId xmlns:a16="http://schemas.microsoft.com/office/drawing/2014/main" id="{54B38006-3D0A-4BE1-BF78-BD7458B99DF8}"/>
               </a:ext>
             </a:extLst>
           </p:cNvPr>
@@ -2432,7 +2432,7 @@
           <p:cNvPr id="3" name="Content Placeholder 2">
             <a:extLst xmlns:a="http://schemas.openxmlformats.org/drawingml/2006/main">
               <a:ext uri="{FF2B5EF4-FFF2-40B4-BE49-F238E27FC236}">
-                <a16:creationId xmlns:a16="http://schemas.microsoft.com/office/drawing/2014/main" id="{CBC8FD5E-F672-4093-B71F-26D2184F07EB}"/>
+                <a16:creationId xmlns:a16="http://schemas.microsoft.com/office/drawing/2014/main" id="{B593592F-CCA7-4EBA-A3D6-068B6169DD78}"/>
               </a:ext>
             </a:extLst>
           </p:cNvPr>
@@ -2536,7 +2536,7 @@
           <p:cNvPr id="4" name="Content Placeholder 3">
             <a:extLst xmlns:a="http://schemas.openxmlformats.org/drawingml/2006/main">
               <a:ext uri="{FF2B5EF4-FFF2-40B4-BE49-F238E27FC236}">
-                <a16:creationId xmlns:a16="http://schemas.microsoft.com/office/drawing/2014/main" id="{D67C588C-6DB2-43B0-A0AF-1568966CB49C}"/>
+                <a16:creationId xmlns:a16="http://schemas.microsoft.com/office/drawing/2014/main" id="{0E6498A8-8BA0-4838-A8D8-79BF5C666F91}"/>
               </a:ext>
             </a:extLst>
           </p:cNvPr>
@@ -2640,7 +2640,7 @@
           <p:cNvPr id="5" name="Date Placeholder 4">
             <a:extLst xmlns:a="http://schemas.openxmlformats.org/drawingml/2006/main">
               <a:ext uri="{FF2B5EF4-FFF2-40B4-BE49-F238E27FC236}">
-                <a16:creationId xmlns:a16="http://schemas.microsoft.com/office/drawing/2014/main" id="{CB0562A1-49F1-4525-97F3-E5EDE10CA13E}"/>
+                <a16:creationId xmlns:a16="http://schemas.microsoft.com/office/drawing/2014/main" id="{3B7195DB-9358-48C0-8D63-803B32D056D7}"/>
               </a:ext>
             </a:extLst>
           </p:cNvPr>
@@ -2667,7 +2667,7 @@
           <p:cNvPr id="6" name="Footer Placeholder 5">
             <a:extLst xmlns:a="http://schemas.openxmlformats.org/drawingml/2006/main">
               <a:ext uri="{FF2B5EF4-FFF2-40B4-BE49-F238E27FC236}">
-                <a16:creationId xmlns:a16="http://schemas.microsoft.com/office/drawing/2014/main" id="{D78F0F3C-A812-40F8-A4C6-D0400A09F3BE}"/>
+                <a16:creationId xmlns:a16="http://schemas.microsoft.com/office/drawing/2014/main" id="{2AC9E7A6-2B94-45A3-BC12-3241A49929B1}"/>
               </a:ext>
             </a:extLst>
           </p:cNvPr>
@@ -2690,7 +2690,7 @@
           <p:cNvPr id="7" name="Slide Number Placeholder 6">
             <a:extLst xmlns:a="http://schemas.openxmlformats.org/drawingml/2006/main">
               <a:ext uri="{FF2B5EF4-FFF2-40B4-BE49-F238E27FC236}">
-                <a16:creationId xmlns:a16="http://schemas.microsoft.com/office/drawing/2014/main" id="{8AE751DE-9F84-40D0-A2E8-C0F186C2BC94}"/>
+                <a16:creationId xmlns:a16="http://schemas.microsoft.com/office/drawing/2014/main" id="{6C2D402C-B600-4C25-A907-E14156A33A97}"/>
               </a:ext>
             </a:extLst>
           </p:cNvPr>
@@ -2734,7 +2734,7 @@
           <p:cNvPr id="2" name="Title 1">
             <a:extLst xmlns:a="http://schemas.openxmlformats.org/drawingml/2006/main">
               <a:ext uri="{FF2B5EF4-FFF2-40B4-BE49-F238E27FC236}">
-                <a16:creationId xmlns:a16="http://schemas.microsoft.com/office/drawing/2014/main" id="{51848F42-E702-458C-8D77-75A9025ED335}"/>
+                <a16:creationId xmlns:a16="http://schemas.microsoft.com/office/drawing/2014/main" id="{ACFB2C4A-D6A1-4F6C-B9DE-206E2808577F}"/>
               </a:ext>
             </a:extLst>
           </p:cNvPr>
@@ -2766,7 +2766,7 @@
           <p:cNvPr id="3" name="Text Placeholder 2">
             <a:extLst xmlns:a="http://schemas.openxmlformats.org/drawingml/2006/main">
               <a:ext uri="{FF2B5EF4-FFF2-40B4-BE49-F238E27FC236}">
-                <a16:creationId xmlns:a16="http://schemas.microsoft.com/office/drawing/2014/main" id="{49188E59-65FE-4DF7-9C66-7B8A160B61AF}"/>
+                <a16:creationId xmlns:a16="http://schemas.microsoft.com/office/drawing/2014/main" id="{5E4F0F05-DC9E-441B-B239-5A0B25772582}"/>
               </a:ext>
             </a:extLst>
           </p:cNvPr>
@@ -2838,7 +2838,7 @@
           <p:cNvPr id="4" name="Content Placeholder 3">
             <a:extLst xmlns:a="http://schemas.openxmlformats.org/drawingml/2006/main">
               <a:ext uri="{FF2B5EF4-FFF2-40B4-BE49-F238E27FC236}">
-                <a16:creationId xmlns:a16="http://schemas.microsoft.com/office/drawing/2014/main" id="{9780AC62-F5E5-448C-8E52-34BCA85C7AD8}"/>
+                <a16:creationId xmlns:a16="http://schemas.microsoft.com/office/drawing/2014/main" id="{4490E52C-7101-41F7-803F-D0B757A1BBB8}"/>
               </a:ext>
             </a:extLst>
           </p:cNvPr>
@@ -2942,7 +2942,7 @@
           <p:cNvPr id="5" name="Text Placeholder 4">
             <a:extLst xmlns:a="http://schemas.openxmlformats.org/drawingml/2006/main">
               <a:ext uri="{FF2B5EF4-FFF2-40B4-BE49-F238E27FC236}">
-                <a16:creationId xmlns:a16="http://schemas.microsoft.com/office/drawing/2014/main" id="{58D4BD7A-DD76-4028-A78D-23305F5A1D0A}"/>
+                <a16:creationId xmlns:a16="http://schemas.microsoft.com/office/drawing/2014/main" id="{C7D4CC92-B963-42B2-B69E-6ACE263BBED4}"/>
               </a:ext>
             </a:extLst>
           </p:cNvPr>
@@ -3014,7 +3014,7 @@
           <p:cNvPr id="6" name="Content Placeholder 5">
             <a:extLst xmlns:a="http://schemas.openxmlformats.org/drawingml/2006/main">
               <a:ext uri="{FF2B5EF4-FFF2-40B4-BE49-F238E27FC236}">
-                <a16:creationId xmlns:a16="http://schemas.microsoft.com/office/drawing/2014/main" id="{DFB89A84-270F-4C66-988E-9D0DC61DD4A8}"/>
+                <a16:creationId xmlns:a16="http://schemas.microsoft.com/office/drawing/2014/main" id="{C68FFD18-CE73-4095-9AF7-31559E74B5BF}"/>
               </a:ext>
             </a:extLst>
           </p:cNvPr>
@@ -3118,7 +3118,7 @@
           <p:cNvPr id="7" name="Date Placeholder 6">
             <a:extLst xmlns:a="http://schemas.openxmlformats.org/drawingml/2006/main">
               <a:ext uri="{FF2B5EF4-FFF2-40B4-BE49-F238E27FC236}">
-                <a16:creationId xmlns:a16="http://schemas.microsoft.com/office/drawing/2014/main" id="{5651B9F5-B1A5-4143-AF67-D7F5CF2F45C9}"/>
+                <a16:creationId xmlns:a16="http://schemas.microsoft.com/office/drawing/2014/main" id="{4FD775A9-83AE-4B09-A4A6-6952DFA3FC2E}"/>
               </a:ext>
             </a:extLst>
           </p:cNvPr>
@@ -3145,7 +3145,7 @@
           <p:cNvPr id="8" name="Footer Placeholder 7">
             <a:extLst xmlns:a="http://schemas.openxmlformats.org/drawingml/2006/main">
               <a:ext uri="{FF2B5EF4-FFF2-40B4-BE49-F238E27FC236}">
-                <a16:creationId xmlns:a16="http://schemas.microsoft.com/office/drawing/2014/main" id="{C7295A70-A7C0-4A3A-B1DE-486754936772}"/>
+                <a16:creationId xmlns:a16="http://schemas.microsoft.com/office/drawing/2014/main" id="{46A60501-1215-49C0-88B4-408D19D66A7B}"/>
               </a:ext>
             </a:extLst>
           </p:cNvPr>
@@ -3168,7 +3168,7 @@
           <p:cNvPr id="9" name="Slide Number Placeholder 8">
             <a:extLst xmlns:a="http://schemas.openxmlformats.org/drawingml/2006/main">
               <a:ext uri="{FF2B5EF4-FFF2-40B4-BE49-F238E27FC236}">
-                <a16:creationId xmlns:a16="http://schemas.microsoft.com/office/drawing/2014/main" id="{B2F6A2CC-AC34-4010-896D-8FBF48BDD5FE}"/>
+                <a16:creationId xmlns:a16="http://schemas.microsoft.com/office/drawing/2014/main" id="{7A38AAFD-C04F-417A-AA3F-4BF63DADF13E}"/>
               </a:ext>
             </a:extLst>
           </p:cNvPr>
@@ -3212,7 +3212,7 @@
           <p:cNvPr id="2" name="Title 1">
             <a:extLst xmlns:a="http://schemas.openxmlformats.org/drawingml/2006/main">
               <a:ext uri="{FF2B5EF4-FFF2-40B4-BE49-F238E27FC236}">
-                <a16:creationId xmlns:a16="http://schemas.microsoft.com/office/drawing/2014/main" id="{D56C3309-4229-47A0-BEA9-B7B6F7D9A1D3}"/>
+                <a16:creationId xmlns:a16="http://schemas.microsoft.com/office/drawing/2014/main" id="{F9BED791-8FDF-410E-A9C8-FDE07EB7E8C7}"/>
               </a:ext>
             </a:extLst>
           </p:cNvPr>
@@ -3239,7 +3239,7 @@
           <p:cNvPr id="3" name="Date Placeholder 2">
             <a:extLst xmlns:a="http://schemas.openxmlformats.org/drawingml/2006/main">
               <a:ext uri="{FF2B5EF4-FFF2-40B4-BE49-F238E27FC236}">
-                <a16:creationId xmlns:a16="http://schemas.microsoft.com/office/drawing/2014/main" id="{646E320F-A0B5-4309-8656-CB21D6F54033}"/>
+                <a16:creationId xmlns:a16="http://schemas.microsoft.com/office/drawing/2014/main" id="{463028CF-87D6-48F4-B283-64904812DA3E}"/>
               </a:ext>
             </a:extLst>
           </p:cNvPr>
@@ -3266,7 +3266,7 @@
           <p:cNvPr id="4" name="Footer Placeholder 3">
             <a:extLst xmlns:a="http://schemas.openxmlformats.org/drawingml/2006/main">
               <a:ext uri="{FF2B5EF4-FFF2-40B4-BE49-F238E27FC236}">
-                <a16:creationId xmlns:a16="http://schemas.microsoft.com/office/drawing/2014/main" id="{461D27A8-6904-4BB8-BA66-BDF0C83C60A9}"/>
+                <a16:creationId xmlns:a16="http://schemas.microsoft.com/office/drawing/2014/main" id="{295E7BF2-E7AF-4D7B-8F5F-EBDB65C9A3C2}"/>
               </a:ext>
             </a:extLst>
           </p:cNvPr>
@@ -3289,7 +3289,7 @@
           <p:cNvPr id="5" name="Slide Number Placeholder 4">
             <a:extLst xmlns:a="http://schemas.openxmlformats.org/drawingml/2006/main">
               <a:ext uri="{FF2B5EF4-FFF2-40B4-BE49-F238E27FC236}">
-                <a16:creationId xmlns:a16="http://schemas.microsoft.com/office/drawing/2014/main" id="{EBA28729-ADED-454C-88E6-1480116E16DA}"/>
+                <a16:creationId xmlns:a16="http://schemas.microsoft.com/office/drawing/2014/main" id="{67E295DD-55A7-436D-BB7C-2C6DF45FFC6C}"/>
               </a:ext>
             </a:extLst>
           </p:cNvPr>
@@ -3333,7 +3333,7 @@
           <p:cNvPr id="2" name="Date Placeholder 1">
             <a:extLst xmlns:a="http://schemas.openxmlformats.org/drawingml/2006/main">
               <a:ext uri="{FF2B5EF4-FFF2-40B4-BE49-F238E27FC236}">
-                <a16:creationId xmlns:a16="http://schemas.microsoft.com/office/drawing/2014/main" id="{23FF6ADD-93C9-413E-ACF5-F9001D7FEB2C}"/>
+                <a16:creationId xmlns:a16="http://schemas.microsoft.com/office/drawing/2014/main" id="{D8EEF0CF-0312-4677-8D0E-A3AD64B47F09}"/>
               </a:ext>
             </a:extLst>
           </p:cNvPr>
@@ -3360,7 +3360,7 @@
           <p:cNvPr id="3" name="Footer Placeholder 2">
             <a:extLst xmlns:a="http://schemas.openxmlformats.org/drawingml/2006/main">
               <a:ext uri="{FF2B5EF4-FFF2-40B4-BE49-F238E27FC236}">
-                <a16:creationId xmlns:a16="http://schemas.microsoft.com/office/drawing/2014/main" id="{8598A010-6B22-44AE-B993-8690C534DBEF}"/>
+                <a16:creationId xmlns:a16="http://schemas.microsoft.com/office/drawing/2014/main" id="{E26C4469-BBA8-4E7F-A4D2-1E027B790DF3}"/>
               </a:ext>
             </a:extLst>
           </p:cNvPr>
@@ -3383,7 +3383,7 @@
           <p:cNvPr id="4" name="Slide Number Placeholder 3">
             <a:extLst xmlns:a="http://schemas.openxmlformats.org/drawingml/2006/main">
               <a:ext uri="{FF2B5EF4-FFF2-40B4-BE49-F238E27FC236}">
-                <a16:creationId xmlns:a16="http://schemas.microsoft.com/office/drawing/2014/main" id="{7D6AC03A-531B-4167-A0C3-6CC9C83DE498}"/>
+                <a16:creationId xmlns:a16="http://schemas.microsoft.com/office/drawing/2014/main" id="{78B51D1F-1C8A-47B0-99A3-9303C2730B7D}"/>
               </a:ext>
             </a:extLst>
           </p:cNvPr>
@@ -3427,7 +3427,7 @@
           <p:cNvPr id="2" name="Title 1">
             <a:extLst xmlns:a="http://schemas.openxmlformats.org/drawingml/2006/main">
               <a:ext uri="{FF2B5EF4-FFF2-40B4-BE49-F238E27FC236}">
-                <a16:creationId xmlns:a16="http://schemas.microsoft.com/office/drawing/2014/main" id="{FD007805-F947-4508-96CC-52453818AC15}"/>
+                <a16:creationId xmlns:a16="http://schemas.microsoft.com/office/drawing/2014/main" id="{24ACA267-77EC-47F7-9B6F-8DF10D86CB24}"/>
               </a:ext>
             </a:extLst>
           </p:cNvPr>
@@ -3464,7 +3464,7 @@
           <p:cNvPr id="3" name="Content Placeholder 2">
             <a:extLst xmlns:a="http://schemas.openxmlformats.org/drawingml/2006/main">
               <a:ext uri="{FF2B5EF4-FFF2-40B4-BE49-F238E27FC236}">
-                <a16:creationId xmlns:a16="http://schemas.microsoft.com/office/drawing/2014/main" id="{D8258A30-7A00-4C4D-B7E6-4DFFC82D8C59}"/>
+                <a16:creationId xmlns:a16="http://schemas.microsoft.com/office/drawing/2014/main" id="{E29DCB99-483B-428A-86E3-E2A262A2C51D}"/>
               </a:ext>
             </a:extLst>
           </p:cNvPr>
@@ -3568,7 +3568,7 @@
           <p:cNvPr id="4" name="Text Placeholder 3">
             <a:extLst xmlns:a="http://schemas.openxmlformats.org/drawingml/2006/main">
               <a:ext uri="{FF2B5EF4-FFF2-40B4-BE49-F238E27FC236}">
-                <a16:creationId xmlns:a16="http://schemas.microsoft.com/office/drawing/2014/main" id="{7779503D-3B36-4473-AB43-7A2765DBDC06}"/>
+                <a16:creationId xmlns:a16="http://schemas.microsoft.com/office/drawing/2014/main" id="{0A7DA2EC-981F-49EB-960C-E7180DC3F7EE}"/>
               </a:ext>
             </a:extLst>
           </p:cNvPr>
@@ -3640,7 +3640,7 @@
           <p:cNvPr id="5" name="Date Placeholder 4">
             <a:extLst xmlns:a="http://schemas.openxmlformats.org/drawingml/2006/main">
               <a:ext uri="{FF2B5EF4-FFF2-40B4-BE49-F238E27FC236}">
-                <a16:creationId xmlns:a16="http://schemas.microsoft.com/office/drawing/2014/main" id="{31AAA5BD-1E38-456C-B408-1587D42F5385}"/>
+                <a16:creationId xmlns:a16="http://schemas.microsoft.com/office/drawing/2014/main" id="{01E12126-9B43-4084-9B27-BD8B9AA5E62A}"/>
               </a:ext>
             </a:extLst>
           </p:cNvPr>
@@ -3667,7 +3667,7 @@
           <p:cNvPr id="6" name="Footer Placeholder 5">
             <a:extLst xmlns:a="http://schemas.openxmlformats.org/drawingml/2006/main">
               <a:ext uri="{FF2B5EF4-FFF2-40B4-BE49-F238E27FC236}">
-                <a16:creationId xmlns:a16="http://schemas.microsoft.com/office/drawing/2014/main" id="{BBC81108-AFEF-43AE-9787-6FEC0F1C6961}"/>
+                <a16:creationId xmlns:a16="http://schemas.microsoft.com/office/drawing/2014/main" id="{67A88F3F-CF2C-43E0-A9D6-0A2890776426}"/>
               </a:ext>
             </a:extLst>
           </p:cNvPr>
@@ -3690,7 +3690,7 @@
           <p:cNvPr id="7" name="Slide Number Placeholder 6">
             <a:extLst xmlns:a="http://schemas.openxmlformats.org/drawingml/2006/main">
               <a:ext uri="{FF2B5EF4-FFF2-40B4-BE49-F238E27FC236}">
-                <a16:creationId xmlns:a16="http://schemas.microsoft.com/office/drawing/2014/main" id="{07C629CE-B505-47D4-BAE6-85C2198701D1}"/>
+                <a16:creationId xmlns:a16="http://schemas.microsoft.com/office/drawing/2014/main" id="{A6C7DFEA-96D5-4E99-B0A6-0B1F5710DAA8}"/>
               </a:ext>
             </a:extLst>
           </p:cNvPr>
@@ -3734,7 +3734,7 @@
           <p:cNvPr id="2" name="Title 1">
             <a:extLst xmlns:a="http://schemas.openxmlformats.org/drawingml/2006/main">
               <a:ext uri="{FF2B5EF4-FFF2-40B4-BE49-F238E27FC236}">
-                <a16:creationId xmlns:a16="http://schemas.microsoft.com/office/drawing/2014/main" id="{7C02B5AA-704D-45D5-A9DF-E5D7049625CD}"/>
+                <a16:creationId xmlns:a16="http://schemas.microsoft.com/office/drawing/2014/main" id="{9ABD4FC7-2FEE-445C-B821-B5EAC8DFB29C}"/>
               </a:ext>
             </a:extLst>
           </p:cNvPr>
@@ -3771,7 +3771,7 @@
           <p:cNvPr id="3" name="Picture Placeholder 2">
             <a:extLst xmlns:a="http://schemas.openxmlformats.org/drawingml/2006/main">
               <a:ext uri="{FF2B5EF4-FFF2-40B4-BE49-F238E27FC236}">
-                <a16:creationId xmlns:a16="http://schemas.microsoft.com/office/drawing/2014/main" id="{A753B77C-7C5F-409B-ADA2-9A7ADE91556E}"/>
+                <a16:creationId xmlns:a16="http://schemas.microsoft.com/office/drawing/2014/main" id="{F7F5CC6D-E557-4DD3-AFDC-19D43841A29A}"/>
               </a:ext>
             </a:extLst>
           </p:cNvPr>
@@ -3836,7 +3836,7 @@
           <p:cNvPr id="4" name="Text Placeholder 3">
             <a:extLst xmlns:a="http://schemas.openxmlformats.org/drawingml/2006/main">
               <a:ext uri="{FF2B5EF4-FFF2-40B4-BE49-F238E27FC236}">
-                <a16:creationId xmlns:a16="http://schemas.microsoft.com/office/drawing/2014/main" id="{40000973-8DD5-46E7-8685-D1C1A3C1FF65}"/>
+                <a16:creationId xmlns:a16="http://schemas.microsoft.com/office/drawing/2014/main" id="{D4D54638-2E23-44E1-B308-C0F887E14D23}"/>
               </a:ext>
             </a:extLst>
           </p:cNvPr>
@@ -3908,7 +3908,7 @@
           <p:cNvPr id="5" name="Date Placeholder 4">
             <a:extLst xmlns:a="http://schemas.openxmlformats.org/drawingml/2006/main">
               <a:ext uri="{FF2B5EF4-FFF2-40B4-BE49-F238E27FC236}">
-                <a16:creationId xmlns:a16="http://schemas.microsoft.com/office/drawing/2014/main" id="{5D997647-85D3-464F-A619-33E1F6429110}"/>
+                <a16:creationId xmlns:a16="http://schemas.microsoft.com/office/drawing/2014/main" id="{2FBC226B-DD4C-493E-8DD1-506F81D89DFF}"/>
               </a:ext>
             </a:extLst>
           </p:cNvPr>
@@ -3935,7 +3935,7 @@
           <p:cNvPr id="6" name="Footer Placeholder 5">
             <a:extLst xmlns:a="http://schemas.openxmlformats.org/drawingml/2006/main">
               <a:ext uri="{FF2B5EF4-FFF2-40B4-BE49-F238E27FC236}">
-                <a16:creationId xmlns:a16="http://schemas.microsoft.com/office/drawing/2014/main" id="{814FCEBF-69A1-4306-9930-315C119C2E4C}"/>
+                <a16:creationId xmlns:a16="http://schemas.microsoft.com/office/drawing/2014/main" id="{C35A0719-0A27-4A48-AA2A-CDDC24B45786}"/>
               </a:ext>
             </a:extLst>
           </p:cNvPr>
@@ -3958,7 +3958,7 @@
           <p:cNvPr id="7" name="Slide Number Placeholder 6">
             <a:extLst xmlns:a="http://schemas.openxmlformats.org/drawingml/2006/main">
               <a:ext uri="{FF2B5EF4-FFF2-40B4-BE49-F238E27FC236}">
-                <a16:creationId xmlns:a16="http://schemas.microsoft.com/office/drawing/2014/main" id="{4E83EB28-5F42-4A4A-9B66-FD424FF7D3E9}"/>
+                <a16:creationId xmlns:a16="http://schemas.microsoft.com/office/drawing/2014/main" id="{3E587390-A7DF-485E-AE37-D369D92AC535}"/>
               </a:ext>
             </a:extLst>
           </p:cNvPr>
@@ -4007,7 +4007,7 @@
           <p:cNvPr id="2" name="Title Placeholder 1">
             <a:extLst xmlns:a="http://schemas.openxmlformats.org/drawingml/2006/main">
               <a:ext uri="{FF2B5EF4-FFF2-40B4-BE49-F238E27FC236}">
-                <a16:creationId xmlns:a16="http://schemas.microsoft.com/office/drawing/2014/main" id="{4321528C-3964-403E-86FB-796BFA4A5435}"/>
+                <a16:creationId xmlns:a16="http://schemas.microsoft.com/office/drawing/2014/main" id="{C5C32A93-A251-4949-9915-1C65644096D8}"/>
               </a:ext>
             </a:extLst>
           </p:cNvPr>
@@ -4044,7 +4044,7 @@
           <p:cNvPr id="3" name="Text Placeholder 2">
             <a:extLst xmlns:a="http://schemas.openxmlformats.org/drawingml/2006/main">
               <a:ext uri="{FF2B5EF4-FFF2-40B4-BE49-F238E27FC236}">
-                <a16:creationId xmlns:a16="http://schemas.microsoft.com/office/drawing/2014/main" id="{6232091F-10B6-49B4-AC75-11DD41503204}"/>
+                <a16:creationId xmlns:a16="http://schemas.microsoft.com/office/drawing/2014/main" id="{A67EF216-870A-4BF0-AA9A-AE90B78B6427}"/>
               </a:ext>
             </a:extLst>
           </p:cNvPr>
@@ -4116,7 +4116,7 @@
           <p:cNvPr id="4" name="Date Placeholder 3">
             <a:extLst xmlns:a="http://schemas.openxmlformats.org/drawingml/2006/main">
               <a:ext uri="{FF2B5EF4-FFF2-40B4-BE49-F238E27FC236}">
-                <a16:creationId xmlns:a16="http://schemas.microsoft.com/office/drawing/2014/main" id="{25BE6C51-669B-4405-B18D-25D6FE11C615}"/>
+                <a16:creationId xmlns:a16="http://schemas.microsoft.com/office/drawing/2014/main" id="{31B21B47-7933-4B5A-8FC3-2A17004CFA30}"/>
               </a:ext>
             </a:extLst>
           </p:cNvPr>
@@ -4162,7 +4162,7 @@
           <p:cNvPr id="5" name="Footer Placeholder 4">
             <a:extLst xmlns:a="http://schemas.openxmlformats.org/drawingml/2006/main">
               <a:ext uri="{FF2B5EF4-FFF2-40B4-BE49-F238E27FC236}">
-                <a16:creationId xmlns:a16="http://schemas.microsoft.com/office/drawing/2014/main" id="{47B82A3F-5E1C-443F-AC1F-08DC0A62D892}"/>
+                <a16:creationId xmlns:a16="http://schemas.microsoft.com/office/drawing/2014/main" id="{56BADC6C-2752-4811-B7B5-801A143760C0}"/>
               </a:ext>
             </a:extLst>
           </p:cNvPr>
@@ -4204,7 +4204,7 @@
           <p:cNvPr id="6" name="Slide Number Placeholder 5">
             <a:extLst xmlns:a="http://schemas.openxmlformats.org/drawingml/2006/main">
               <a:ext uri="{FF2B5EF4-FFF2-40B4-BE49-F238E27FC236}">
-                <a16:creationId xmlns:a16="http://schemas.microsoft.com/office/drawing/2014/main" id="{0B3A2A5D-9BC5-4A12-B2D6-C50A75C4E5F4}"/>
+                <a16:creationId xmlns:a16="http://schemas.microsoft.com/office/drawing/2014/main" id="{010A006B-240A-4FEF-9DA0-BB863CFF1ADC}"/>
               </a:ext>
             </a:extLst>
           </p:cNvPr>
@@ -4249,17 +4249,17 @@
   </p:cSld>
   <p:clrMap bg1="lt1" tx1="dk1" bg2="lt2" tx2="dk2" accent1="accent1" accent2="accent2" accent3="accent3" accent4="accent4" accent5="accent5" accent6="accent6" hlink="hlink" folHlink="folHlink"/>
   <p:sldLayoutIdLst>
-    <p:sldLayoutId xmlns:r="http://schemas.openxmlformats.org/officeDocument/2006/relationships" id="2147483649" r:id="R5fd239470d124bd8"/>
-    <p:sldLayoutId xmlns:r="http://schemas.openxmlformats.org/officeDocument/2006/relationships" id="2147483650" r:id="Rcdac8467ba944db6"/>
-    <p:sldLayoutId xmlns:r="http://schemas.openxmlformats.org/officeDocument/2006/relationships" id="2147483651" r:id="R0dbf9d6b78384c92"/>
-    <p:sldLayoutId xmlns:r="http://schemas.openxmlformats.org/officeDocument/2006/relationships" id="2147483652" r:id="R688101e3fdd0415f"/>
-    <p:sldLayoutId xmlns:r="http://schemas.openxmlformats.org/officeDocument/2006/relationships" id="2147483653" r:id="R2bd0175924ec4e01"/>
-    <p:sldLayoutId xmlns:r="http://schemas.openxmlformats.org/officeDocument/2006/relationships" id="2147483654" r:id="Rd8d3ce94702446eb"/>
-    <p:sldLayoutId xmlns:r="http://schemas.openxmlformats.org/officeDocument/2006/relationships" id="2147483655" r:id="R2481a0d512c84594"/>
-    <p:sldLayoutId xmlns:r="http://schemas.openxmlformats.org/officeDocument/2006/relationships" id="2147483656" r:id="Rb6c8143d35934776"/>
-    <p:sldLayoutId xmlns:r="http://schemas.openxmlformats.org/officeDocument/2006/relationships" id="2147483657" r:id="Rb2cd271ef7e54d9a"/>
-    <p:sldLayoutId xmlns:r="http://schemas.openxmlformats.org/officeDocument/2006/relationships" id="2147483658" r:id="R34a75ddb8bfb4405"/>
-    <p:sldLayoutId xmlns:r="http://schemas.openxmlformats.org/officeDocument/2006/relationships" id="2147483659" r:id="Rba96debb6e994f18"/>
+    <p:sldLayoutId xmlns:r="http://schemas.openxmlformats.org/officeDocument/2006/relationships" id="2147483649" r:id="R77a3e4e89ee142d2"/>
+    <p:sldLayoutId xmlns:r="http://schemas.openxmlformats.org/officeDocument/2006/relationships" id="2147483650" r:id="Ra99e70203fea40ef"/>
+    <p:sldLayoutId xmlns:r="http://schemas.openxmlformats.org/officeDocument/2006/relationships" id="2147483651" r:id="R7cfe0762974647c5"/>
+    <p:sldLayoutId xmlns:r="http://schemas.openxmlformats.org/officeDocument/2006/relationships" id="2147483652" r:id="Rcdf12847cb7c45a2"/>
+    <p:sldLayoutId xmlns:r="http://schemas.openxmlformats.org/officeDocument/2006/relationships" id="2147483653" r:id="Rbb69686d8b624a30"/>
+    <p:sldLayoutId xmlns:r="http://schemas.openxmlformats.org/officeDocument/2006/relationships" id="2147483654" r:id="R7e08d3348c034ef4"/>
+    <p:sldLayoutId xmlns:r="http://schemas.openxmlformats.org/officeDocument/2006/relationships" id="2147483655" r:id="Refb57027de6f489f"/>
+    <p:sldLayoutId xmlns:r="http://schemas.openxmlformats.org/officeDocument/2006/relationships" id="2147483656" r:id="R67350719e6004ade"/>
+    <p:sldLayoutId xmlns:r="http://schemas.openxmlformats.org/officeDocument/2006/relationships" id="2147483657" r:id="R3ef7e1a259034c9c"/>
+    <p:sldLayoutId xmlns:r="http://schemas.openxmlformats.org/officeDocument/2006/relationships" id="2147483658" r:id="R84b1f6b138b84ec2"/>
+    <p:sldLayoutId xmlns:r="http://schemas.openxmlformats.org/officeDocument/2006/relationships" id="2147483659" r:id="R47ee849155404ded"/>
   </p:sldLayoutIdLst>
   <p:txStyles>
     <p:titleStyle>
@@ -4812,7 +4812,7 @@
           <p:cNvPr id="2" name="Rectangle 1">
             <a:extLst xmlns:a="http://schemas.openxmlformats.org/drawingml/2006/main">
               <a:ext uri="{FF2B5EF4-FFF2-40B4-BE49-F238E27FC236}">
-                <a16:creationId xmlns:a16="http://schemas.microsoft.com/office/drawing/2014/main" id="{FB360A5E-D150-4826-BE0E-D3C1BCD213EE}"/>
+                <a16:creationId xmlns:a16="http://schemas.microsoft.com/office/drawing/2014/main" id="{2A200AB8-6697-4C5C-BEE5-15B9196CF8B0}"/>
               </a:ext>
             </a:extLst>
           </p:cNvPr>
@@ -4867,7 +4867,7 @@
           <p:cNvPr id="3" name="TextBox 2">
             <a:extLst xmlns:a="http://schemas.openxmlformats.org/drawingml/2006/main">
               <a:ext uri="{FF2B5EF4-FFF2-40B4-BE49-F238E27FC236}">
-                <a16:creationId xmlns:a16="http://schemas.microsoft.com/office/drawing/2014/main" id="{BE81E7FF-122B-4BEA-9BA7-60E463F7CC86}"/>
+                <a16:creationId xmlns:a16="http://schemas.microsoft.com/office/drawing/2014/main" id="{5564D042-A8BC-4C0F-B249-188DDDF97339}"/>
               </a:ext>
             </a:extLst>
           </p:cNvPr>
@@ -4914,7 +4914,7 @@
           <p:cNvPr id="4" name="TextBox 3">
             <a:extLst xmlns:a="http://schemas.openxmlformats.org/drawingml/2006/main">
               <a:ext uri="{FF2B5EF4-FFF2-40B4-BE49-F238E27FC236}">
-                <a16:creationId xmlns:a16="http://schemas.microsoft.com/office/drawing/2014/main" id="{6BE18854-8869-4800-BE28-D3521371F9EB}"/>
+                <a16:creationId xmlns:a16="http://schemas.microsoft.com/office/drawing/2014/main" id="{CF93215C-33B0-45F5-AF6B-A6F5254F30A7}"/>
               </a:ext>
             </a:extLst>
           </p:cNvPr>
@@ -4982,7 +4982,7 @@
           <p:cNvPr id="5" name="TextBox 4">
             <a:extLst xmlns:a="http://schemas.openxmlformats.org/drawingml/2006/main">
               <a:ext uri="{FF2B5EF4-FFF2-40B4-BE49-F238E27FC236}">
-                <a16:creationId xmlns:a16="http://schemas.microsoft.com/office/drawing/2014/main" id="{3C788FC1-3E00-4B90-A2DC-4542C9037684}"/>
+                <a16:creationId xmlns:a16="http://schemas.microsoft.com/office/drawing/2014/main" id="{0674585E-D9F7-4F48-B83E-D93B69780F2F}"/>
               </a:ext>
             </a:extLst>
           </p:cNvPr>
@@ -5029,7 +5029,7 @@
           <p:cNvPr id="6" name="Rectangle 5">
             <a:extLst xmlns:a="http://schemas.openxmlformats.org/drawingml/2006/main">
               <a:ext uri="{FF2B5EF4-FFF2-40B4-BE49-F238E27FC236}">
-                <a16:creationId xmlns:a16="http://schemas.microsoft.com/office/drawing/2014/main" id="{BBD726D6-4E83-4DEA-9F46-6AB6BF354FAA}"/>
+                <a16:creationId xmlns:a16="http://schemas.microsoft.com/office/drawing/2014/main" id="{1CBDCD5C-BEAD-4425-8DFE-458FE17EBD13}"/>
               </a:ext>
             </a:extLst>
           </p:cNvPr>
@@ -5084,7 +5084,7 @@
           <p:cNvPr id="7" name="TextBox 6">
             <a:extLst xmlns:a="http://schemas.openxmlformats.org/drawingml/2006/main">
               <a:ext uri="{FF2B5EF4-FFF2-40B4-BE49-F238E27FC236}">
-                <a16:creationId xmlns:a16="http://schemas.microsoft.com/office/drawing/2014/main" id="{1B3AB595-52B3-4D8D-A6CC-0BC94100243A}"/>
+                <a16:creationId xmlns:a16="http://schemas.microsoft.com/office/drawing/2014/main" id="{1843A209-B903-4834-A6D9-B318AF3916CE}"/>
               </a:ext>
             </a:extLst>
           </p:cNvPr>
@@ -5131,7 +5131,7 @@
           <p:cNvPr id="8" name="TextBox 7">
             <a:extLst xmlns:a="http://schemas.openxmlformats.org/drawingml/2006/main">
               <a:ext uri="{FF2B5EF4-FFF2-40B4-BE49-F238E27FC236}">
-                <a16:creationId xmlns:a16="http://schemas.microsoft.com/office/drawing/2014/main" id="{997F5A60-FC5F-4487-9BCA-02A933288172}"/>
+                <a16:creationId xmlns:a16="http://schemas.microsoft.com/office/drawing/2014/main" id="{BFCF4E11-2C6B-47FD-8076-550161F4827F}"/>
               </a:ext>
             </a:extLst>
           </p:cNvPr>
@@ -5168,7 +5168,7 @@
                 <a:ea typeface="Aptos"/>
                 <a:cs typeface="Aptos"/>
               </a:rPr>
-              <a:t>2026.07.22-9</a:t>
+              <a:t>2026.07.23-10</a:t>
             </a:r>
           </a:p>
         </p:txBody>
@@ -5178,7 +5178,7 @@
           <p:cNvPr id="9" name="TextBox 8">
             <a:extLst xmlns:a="http://schemas.openxmlformats.org/drawingml/2006/main">
               <a:ext uri="{FF2B5EF4-FFF2-40B4-BE49-F238E27FC236}">
-                <a16:creationId xmlns:a16="http://schemas.microsoft.com/office/drawing/2014/main" id="{5D774118-D2BE-4E1E-BF1A-73CB765369E1}"/>
+                <a16:creationId xmlns:a16="http://schemas.microsoft.com/office/drawing/2014/main" id="{70D0AC0F-6366-44F3-9888-CCDDA1E30D41}"/>
               </a:ext>
             </a:extLst>
           </p:cNvPr>
@@ -5246,7 +5246,7 @@
           <p:cNvPr id="10" name="TextBox 9">
             <a:extLst xmlns:a="http://schemas.openxmlformats.org/drawingml/2006/main">
               <a:ext uri="{FF2B5EF4-FFF2-40B4-BE49-F238E27FC236}">
-                <a16:creationId xmlns:a16="http://schemas.microsoft.com/office/drawing/2014/main" id="{8D20A22E-440B-465B-838F-8AD2E31A50ED}"/>
+                <a16:creationId xmlns:a16="http://schemas.microsoft.com/office/drawing/2014/main" id="{669FD38D-3DAE-41F7-85A5-3B612C98B081}"/>
               </a:ext>
             </a:extLst>
           </p:cNvPr>
@@ -5293,7 +5293,7 @@
           <p:cNvPr id="11" name="TextBox 10">
             <a:extLst xmlns:a="http://schemas.openxmlformats.org/drawingml/2006/main">
               <a:ext uri="{FF2B5EF4-FFF2-40B4-BE49-F238E27FC236}">
-                <a16:creationId xmlns:a16="http://schemas.microsoft.com/office/drawing/2014/main" id="{F1267EA7-9E4A-4869-B096-BF1A8E20C6F8}"/>
+                <a16:creationId xmlns:a16="http://schemas.microsoft.com/office/drawing/2014/main" id="{46F3B3AE-542B-42CB-97A2-6D1B495DB800}"/>
               </a:ext>
             </a:extLst>
           </p:cNvPr>
@@ -5340,7 +5340,7 @@
           <p:cNvPr id="12" name="TextBox 11">
             <a:extLst xmlns:a="http://schemas.openxmlformats.org/drawingml/2006/main">
               <a:ext uri="{FF2B5EF4-FFF2-40B4-BE49-F238E27FC236}">
-                <a16:creationId xmlns:a16="http://schemas.microsoft.com/office/drawing/2014/main" id="{F7A79862-8BE2-4057-AF7E-335F4F052DA8}"/>
+                <a16:creationId xmlns:a16="http://schemas.microsoft.com/office/drawing/2014/main" id="{FE1AD37D-C60F-4180-A609-152B5EFA1411}"/>
               </a:ext>
             </a:extLst>
           </p:cNvPr>
@@ -5387,7 +5387,7 @@
           <p:cNvPr id="13" name="TextBox 12">
             <a:extLst xmlns:a="http://schemas.openxmlformats.org/drawingml/2006/main">
               <a:ext uri="{FF2B5EF4-FFF2-40B4-BE49-F238E27FC236}">
-                <a16:creationId xmlns:a16="http://schemas.microsoft.com/office/drawing/2014/main" id="{375FEA72-D73F-4730-929C-70ECD73508B8}"/>
+                <a16:creationId xmlns:a16="http://schemas.microsoft.com/office/drawing/2014/main" id="{505127A2-7782-4BC2-B95C-C16106652751}"/>
               </a:ext>
             </a:extLst>
           </p:cNvPr>
@@ -5432,7 +5432,7 @@
     </p:spTree>
     <p:extLst>
       <p:ext uri="{BB962C8B-B14F-4D97-AF65-F5344CB8AC3E}">
-        <p14:creationId xmlns:p14="http://schemas.microsoft.com/office/powerpoint/2010/main" val="1130866537"/>
+        <p14:creationId xmlns:p14="http://schemas.microsoft.com/office/powerpoint/2010/main" val="377808811"/>
       </p:ext>
     </p:extLst>
   </p:cSld>
@@ -5456,7 +5456,7 @@
           <p:cNvPr id="2" name="TextBox 1">
             <a:extLst xmlns:a="http://schemas.openxmlformats.org/drawingml/2006/main">
               <a:ext uri="{FF2B5EF4-FFF2-40B4-BE49-F238E27FC236}">
-                <a16:creationId xmlns:a16="http://schemas.microsoft.com/office/drawing/2014/main" id="{FD6C30C3-11C8-4FA3-9AF9-D6830DC07179}"/>
+                <a16:creationId xmlns:a16="http://schemas.microsoft.com/office/drawing/2014/main" id="{CD3E75E9-239D-4292-A4C3-8ABD59E1E431}"/>
               </a:ext>
             </a:extLst>
           </p:cNvPr>
@@ -5503,7 +5503,7 @@
           <p:cNvPr id="3" name="TextBox 2">
             <a:extLst xmlns:a="http://schemas.openxmlformats.org/drawingml/2006/main">
               <a:ext uri="{FF2B5EF4-FFF2-40B4-BE49-F238E27FC236}">
-                <a16:creationId xmlns:a16="http://schemas.microsoft.com/office/drawing/2014/main" id="{737B01BC-0B66-483A-937D-4446348A15F9}"/>
+                <a16:creationId xmlns:a16="http://schemas.microsoft.com/office/drawing/2014/main" id="{7A0F17EA-3248-4039-83A1-CA521A474D26}"/>
               </a:ext>
             </a:extLst>
           </p:cNvPr>
@@ -5550,7 +5550,7 @@
           <p:cNvPr id="4" name="Rectangle 3">
             <a:extLst xmlns:a="http://schemas.openxmlformats.org/drawingml/2006/main">
               <a:ext uri="{FF2B5EF4-FFF2-40B4-BE49-F238E27FC236}">
-                <a16:creationId xmlns:a16="http://schemas.microsoft.com/office/drawing/2014/main" id="{F8842717-5575-45C8-A04C-5185DE2AAD3D}"/>
+                <a16:creationId xmlns:a16="http://schemas.microsoft.com/office/drawing/2014/main" id="{E00F13C2-2039-4F5E-AD7E-E1532B857E51}"/>
               </a:ext>
             </a:extLst>
           </p:cNvPr>
@@ -5605,7 +5605,7 @@
           <p:cNvPr id="5" name="Rectangle 4">
             <a:extLst xmlns:a="http://schemas.openxmlformats.org/drawingml/2006/main">
               <a:ext uri="{FF2B5EF4-FFF2-40B4-BE49-F238E27FC236}">
-                <a16:creationId xmlns:a16="http://schemas.microsoft.com/office/drawing/2014/main" id="{CCF28730-9A1E-4283-94D7-04C55FE59F59}"/>
+                <a16:creationId xmlns:a16="http://schemas.microsoft.com/office/drawing/2014/main" id="{0CCD7D97-47A2-4031-A1F2-FA6234BEFC16}"/>
               </a:ext>
             </a:extLst>
           </p:cNvPr>
@@ -5660,7 +5660,7 @@
           <p:cNvPr id="6" name="TextBox 5">
             <a:extLst xmlns:a="http://schemas.openxmlformats.org/drawingml/2006/main">
               <a:ext uri="{FF2B5EF4-FFF2-40B4-BE49-F238E27FC236}">
-                <a16:creationId xmlns:a16="http://schemas.microsoft.com/office/drawing/2014/main" id="{2231FFC6-0A21-46CA-B478-5E20371C51A4}"/>
+                <a16:creationId xmlns:a16="http://schemas.microsoft.com/office/drawing/2014/main" id="{57B2976A-F54D-4668-AE76-E228427EC627}"/>
               </a:ext>
             </a:extLst>
           </p:cNvPr>
@@ -5697,7 +5697,7 @@
                 <a:ea typeface="Aptos"/>
                 <a:cs typeface="Aptos"/>
               </a:rPr>
-              <a:t>Independent public evidence summary · 2026.07.22-9 · 2026-07-22 · Sources: WIPO licensing; dispute resolution; IPscore</a:t>
+              <a:t>Independent public evidence summary · 2026.07.23-10 · 2026-07-22 · Sources: WIPO licensing; dispute resolution; IPscore</a:t>
             </a:r>
           </a:p>
         </p:txBody>
@@ -5707,7 +5707,7 @@
           <p:cNvPr id="7" name="TextBox 6">
             <a:extLst xmlns:a="http://schemas.openxmlformats.org/drawingml/2006/main">
               <a:ext uri="{FF2B5EF4-FFF2-40B4-BE49-F238E27FC236}">
-                <a16:creationId xmlns:a16="http://schemas.microsoft.com/office/drawing/2014/main" id="{96916373-0A9D-451E-9BA5-1456F58024C4}"/>
+                <a16:creationId xmlns:a16="http://schemas.microsoft.com/office/drawing/2014/main" id="{D8D74D2C-A797-4C4F-8912-16726AFF32A8}"/>
               </a:ext>
             </a:extLst>
           </p:cNvPr>
@@ -5754,7 +5754,7 @@
           <p:cNvPr id="8" name="Rounded Rectangle 7">
             <a:extLst xmlns:a="http://schemas.openxmlformats.org/drawingml/2006/main">
               <a:ext uri="{FF2B5EF4-FFF2-40B4-BE49-F238E27FC236}">
-                <a16:creationId xmlns:a16="http://schemas.microsoft.com/office/drawing/2014/main" id="{EDADE5A7-19AC-48DD-8796-7BFDD21164CB}"/>
+                <a16:creationId xmlns:a16="http://schemas.microsoft.com/office/drawing/2014/main" id="{B27D78CE-E728-4EC2-A466-453882A5D243}"/>
               </a:ext>
             </a:extLst>
           </p:cNvPr>
@@ -5811,7 +5811,7 @@
           <p:cNvPr id="9" name="TextBox 8">
             <a:extLst xmlns:a="http://schemas.openxmlformats.org/drawingml/2006/main">
               <a:ext uri="{FF2B5EF4-FFF2-40B4-BE49-F238E27FC236}">
-                <a16:creationId xmlns:a16="http://schemas.microsoft.com/office/drawing/2014/main" id="{EF5F5443-D284-4473-98B3-3320E2DE8F6F}"/>
+                <a16:creationId xmlns:a16="http://schemas.microsoft.com/office/drawing/2014/main" id="{A186D1B0-1EAD-45D3-B8E0-0A8E10ED3063}"/>
               </a:ext>
             </a:extLst>
           </p:cNvPr>
@@ -5858,7 +5858,7 @@
           <p:cNvPr id="10" name="TextBox 9">
             <a:extLst xmlns:a="http://schemas.openxmlformats.org/drawingml/2006/main">
               <a:ext uri="{FF2B5EF4-FFF2-40B4-BE49-F238E27FC236}">
-                <a16:creationId xmlns:a16="http://schemas.microsoft.com/office/drawing/2014/main" id="{E89DC1F9-D136-46F3-8CDB-0950FC75B9C2}"/>
+                <a16:creationId xmlns:a16="http://schemas.microsoft.com/office/drawing/2014/main" id="{CF0F8889-61DF-48D6-B164-0855B08C444C}"/>
               </a:ext>
             </a:extLst>
           </p:cNvPr>
@@ -5905,7 +5905,7 @@
           <p:cNvPr id="11" name="TextBox 10">
             <a:extLst xmlns:a="http://schemas.openxmlformats.org/drawingml/2006/main">
               <a:ext uri="{FF2B5EF4-FFF2-40B4-BE49-F238E27FC236}">
-                <a16:creationId xmlns:a16="http://schemas.microsoft.com/office/drawing/2014/main" id="{510CF3A9-91AC-4D25-8999-E9B23B5492AE}"/>
+                <a16:creationId xmlns:a16="http://schemas.microsoft.com/office/drawing/2014/main" id="{E611C2CB-E102-42EA-A964-F3382B056427}"/>
               </a:ext>
             </a:extLst>
           </p:cNvPr>
@@ -5952,7 +5952,7 @@
           <p:cNvPr id="12" name="Rounded Rectangle 11">
             <a:extLst xmlns:a="http://schemas.openxmlformats.org/drawingml/2006/main">
               <a:ext uri="{FF2B5EF4-FFF2-40B4-BE49-F238E27FC236}">
-                <a16:creationId xmlns:a16="http://schemas.microsoft.com/office/drawing/2014/main" id="{77F877FC-D95D-4961-A07F-576ECCD2E52B}"/>
+                <a16:creationId xmlns:a16="http://schemas.microsoft.com/office/drawing/2014/main" id="{F5FE146D-186C-4DFC-A311-BCEAA4396763}"/>
               </a:ext>
             </a:extLst>
           </p:cNvPr>
@@ -6009,7 +6009,7 @@
           <p:cNvPr id="13" name="TextBox 12">
             <a:extLst xmlns:a="http://schemas.openxmlformats.org/drawingml/2006/main">
               <a:ext uri="{FF2B5EF4-FFF2-40B4-BE49-F238E27FC236}">
-                <a16:creationId xmlns:a16="http://schemas.microsoft.com/office/drawing/2014/main" id="{7A49E1BF-6B50-42ED-9B84-242AB046D3BD}"/>
+                <a16:creationId xmlns:a16="http://schemas.microsoft.com/office/drawing/2014/main" id="{FCB1EEA2-7CF7-4F80-8C2A-A18C5C44F11C}"/>
               </a:ext>
             </a:extLst>
           </p:cNvPr>
@@ -6056,7 +6056,7 @@
           <p:cNvPr id="14" name="TextBox 13">
             <a:extLst xmlns:a="http://schemas.openxmlformats.org/drawingml/2006/main">
               <a:ext uri="{FF2B5EF4-FFF2-40B4-BE49-F238E27FC236}">
-                <a16:creationId xmlns:a16="http://schemas.microsoft.com/office/drawing/2014/main" id="{970ACCFA-3D26-44DB-AE17-F226BF9449CF}"/>
+                <a16:creationId xmlns:a16="http://schemas.microsoft.com/office/drawing/2014/main" id="{C74BDD53-5AE5-4865-BB2C-A410CC83F994}"/>
               </a:ext>
             </a:extLst>
           </p:cNvPr>
@@ -6103,7 +6103,7 @@
           <p:cNvPr id="15" name="TextBox 14">
             <a:extLst xmlns:a="http://schemas.openxmlformats.org/drawingml/2006/main">
               <a:ext uri="{FF2B5EF4-FFF2-40B4-BE49-F238E27FC236}">
-                <a16:creationId xmlns:a16="http://schemas.microsoft.com/office/drawing/2014/main" id="{C8EA758C-997C-4BF5-8767-F3971D548C1C}"/>
+                <a16:creationId xmlns:a16="http://schemas.microsoft.com/office/drawing/2014/main" id="{3407D1E4-7095-43BC-A74C-8D1F6FDE51D3}"/>
               </a:ext>
             </a:extLst>
           </p:cNvPr>
@@ -6150,7 +6150,7 @@
           <p:cNvPr id="16" name="Rounded Rectangle 15">
             <a:extLst xmlns:a="http://schemas.openxmlformats.org/drawingml/2006/main">
               <a:ext uri="{FF2B5EF4-FFF2-40B4-BE49-F238E27FC236}">
-                <a16:creationId xmlns:a16="http://schemas.microsoft.com/office/drawing/2014/main" id="{3765DD77-6714-49BA-A032-7C26439EC31B}"/>
+                <a16:creationId xmlns:a16="http://schemas.microsoft.com/office/drawing/2014/main" id="{A7C4C40A-E7B3-450E-AEE1-2A53F09D2B76}"/>
               </a:ext>
             </a:extLst>
           </p:cNvPr>
@@ -6207,7 +6207,7 @@
           <p:cNvPr id="17" name="TextBox 16">
             <a:extLst xmlns:a="http://schemas.openxmlformats.org/drawingml/2006/main">
               <a:ext uri="{FF2B5EF4-FFF2-40B4-BE49-F238E27FC236}">
-                <a16:creationId xmlns:a16="http://schemas.microsoft.com/office/drawing/2014/main" id="{7FD89226-3768-4F10-8E98-74AEA401CDD3}"/>
+                <a16:creationId xmlns:a16="http://schemas.microsoft.com/office/drawing/2014/main" id="{A5C91283-8FCF-46C4-BD73-091F187EFBA1}"/>
               </a:ext>
             </a:extLst>
           </p:cNvPr>
@@ -6254,7 +6254,7 @@
           <p:cNvPr id="18" name="TextBox 17">
             <a:extLst xmlns:a="http://schemas.openxmlformats.org/drawingml/2006/main">
               <a:ext uri="{FF2B5EF4-FFF2-40B4-BE49-F238E27FC236}">
-                <a16:creationId xmlns:a16="http://schemas.microsoft.com/office/drawing/2014/main" id="{505FE3E6-8331-4F72-84A5-F1AB0ADA3D32}"/>
+                <a16:creationId xmlns:a16="http://schemas.microsoft.com/office/drawing/2014/main" id="{011413AE-8EF4-496A-811C-A6CDE28CE3C2}"/>
               </a:ext>
             </a:extLst>
           </p:cNvPr>
@@ -6301,7 +6301,7 @@
           <p:cNvPr id="19" name="TextBox 18">
             <a:extLst xmlns:a="http://schemas.openxmlformats.org/drawingml/2006/main">
               <a:ext uri="{FF2B5EF4-FFF2-40B4-BE49-F238E27FC236}">
-                <a16:creationId xmlns:a16="http://schemas.microsoft.com/office/drawing/2014/main" id="{D2620B82-038E-4EEF-A3DF-FFE8D2F50EB8}"/>
+                <a16:creationId xmlns:a16="http://schemas.microsoft.com/office/drawing/2014/main" id="{5EFE8EB6-71E7-4515-8CB5-B0D3079518B5}"/>
               </a:ext>
             </a:extLst>
           </p:cNvPr>
@@ -6348,7 +6348,7 @@
           <p:cNvPr id="20" name="Rounded Rectangle 19">
             <a:extLst xmlns:a="http://schemas.openxmlformats.org/drawingml/2006/main">
               <a:ext uri="{FF2B5EF4-FFF2-40B4-BE49-F238E27FC236}">
-                <a16:creationId xmlns:a16="http://schemas.microsoft.com/office/drawing/2014/main" id="{C027390C-DFE1-4772-A617-3B531E1B3121}"/>
+                <a16:creationId xmlns:a16="http://schemas.microsoft.com/office/drawing/2014/main" id="{B623B203-483E-4B5E-9563-D54A12173682}"/>
               </a:ext>
             </a:extLst>
           </p:cNvPr>
@@ -6405,7 +6405,7 @@
           <p:cNvPr id="21" name="TextBox 20">
             <a:extLst xmlns:a="http://schemas.openxmlformats.org/drawingml/2006/main">
               <a:ext uri="{FF2B5EF4-FFF2-40B4-BE49-F238E27FC236}">
-                <a16:creationId xmlns:a16="http://schemas.microsoft.com/office/drawing/2014/main" id="{A0EA7F01-F99C-49F2-9853-70E960DBE8BC}"/>
+                <a16:creationId xmlns:a16="http://schemas.microsoft.com/office/drawing/2014/main" id="{8D75C95B-616D-4540-9610-4AAE210AF3B5}"/>
               </a:ext>
             </a:extLst>
           </p:cNvPr>
@@ -6452,7 +6452,7 @@
           <p:cNvPr id="22" name="TextBox 21">
             <a:extLst xmlns:a="http://schemas.openxmlformats.org/drawingml/2006/main">
               <a:ext uri="{FF2B5EF4-FFF2-40B4-BE49-F238E27FC236}">
-                <a16:creationId xmlns:a16="http://schemas.microsoft.com/office/drawing/2014/main" id="{428DD6E2-CBA1-4F50-AAB1-37B8721C6FE1}"/>
+                <a16:creationId xmlns:a16="http://schemas.microsoft.com/office/drawing/2014/main" id="{002DFCBE-9702-463E-AEFE-279089CE5D4A}"/>
               </a:ext>
             </a:extLst>
           </p:cNvPr>
@@ -6499,7 +6499,7 @@
           <p:cNvPr id="23" name="TextBox 22">
             <a:extLst xmlns:a="http://schemas.openxmlformats.org/drawingml/2006/main">
               <a:ext uri="{FF2B5EF4-FFF2-40B4-BE49-F238E27FC236}">
-                <a16:creationId xmlns:a16="http://schemas.microsoft.com/office/drawing/2014/main" id="{430067A0-F501-4419-B6B8-680BD6D68363}"/>
+                <a16:creationId xmlns:a16="http://schemas.microsoft.com/office/drawing/2014/main" id="{C2F08B53-4190-432D-8845-FCF0948E7ED3}"/>
               </a:ext>
             </a:extLst>
           </p:cNvPr>
@@ -6546,7 +6546,7 @@
           <p:cNvPr id="24" name="TextBox 23">
             <a:extLst xmlns:a="http://schemas.openxmlformats.org/drawingml/2006/main">
               <a:ext uri="{FF2B5EF4-FFF2-40B4-BE49-F238E27FC236}">
-                <a16:creationId xmlns:a16="http://schemas.microsoft.com/office/drawing/2014/main" id="{DE593E4B-5C52-445E-BE5B-6FC55050EBF6}"/>
+                <a16:creationId xmlns:a16="http://schemas.microsoft.com/office/drawing/2014/main" id="{B207E3BE-4B4B-4BD9-BEDD-D204629B611B}"/>
               </a:ext>
             </a:extLst>
           </p:cNvPr>
@@ -6591,7 +6591,7 @@
     </p:spTree>
     <p:extLst>
       <p:ext uri="{BB962C8B-B14F-4D97-AF65-F5344CB8AC3E}">
-        <p14:creationId xmlns:p14="http://schemas.microsoft.com/office/powerpoint/2010/main" val="1639076334"/>
+        <p14:creationId xmlns:p14="http://schemas.microsoft.com/office/powerpoint/2010/main" val="1576017501"/>
       </p:ext>
     </p:extLst>
   </p:cSld>
@@ -6615,7 +6615,7 @@
           <p:cNvPr id="2" name="TextBox 1">
             <a:extLst xmlns:a="http://schemas.openxmlformats.org/drawingml/2006/main">
               <a:ext uri="{FF2B5EF4-FFF2-40B4-BE49-F238E27FC236}">
-                <a16:creationId xmlns:a16="http://schemas.microsoft.com/office/drawing/2014/main" id="{4E232710-B184-4CCC-A1B2-309BA89E5F88}"/>
+                <a16:creationId xmlns:a16="http://schemas.microsoft.com/office/drawing/2014/main" id="{79E9A73C-75C0-465C-BDCF-B79B6A2AF43D}"/>
               </a:ext>
             </a:extLst>
           </p:cNvPr>
@@ -6662,7 +6662,7 @@
           <p:cNvPr id="3" name="TextBox 2">
             <a:extLst xmlns:a="http://schemas.openxmlformats.org/drawingml/2006/main">
               <a:ext uri="{FF2B5EF4-FFF2-40B4-BE49-F238E27FC236}">
-                <a16:creationId xmlns:a16="http://schemas.microsoft.com/office/drawing/2014/main" id="{F718CDD5-1624-4B2E-BCA9-B89401915207}"/>
+                <a16:creationId xmlns:a16="http://schemas.microsoft.com/office/drawing/2014/main" id="{AC49513D-2558-4A10-811C-11453A1695D8}"/>
               </a:ext>
             </a:extLst>
           </p:cNvPr>
@@ -6709,7 +6709,7 @@
           <p:cNvPr id="4" name="Rectangle 3">
             <a:extLst xmlns:a="http://schemas.openxmlformats.org/drawingml/2006/main">
               <a:ext uri="{FF2B5EF4-FFF2-40B4-BE49-F238E27FC236}">
-                <a16:creationId xmlns:a16="http://schemas.microsoft.com/office/drawing/2014/main" id="{C22F6029-DC11-4B53-BCEB-00C75E6490F6}"/>
+                <a16:creationId xmlns:a16="http://schemas.microsoft.com/office/drawing/2014/main" id="{F9EB7186-5F97-41E9-B8D5-137DB6D567BF}"/>
               </a:ext>
             </a:extLst>
           </p:cNvPr>
@@ -6764,7 +6764,7 @@
           <p:cNvPr id="5" name="Rectangle 4">
             <a:extLst xmlns:a="http://schemas.openxmlformats.org/drawingml/2006/main">
               <a:ext uri="{FF2B5EF4-FFF2-40B4-BE49-F238E27FC236}">
-                <a16:creationId xmlns:a16="http://schemas.microsoft.com/office/drawing/2014/main" id="{6D4F1229-0084-4FE6-A720-77DF2BB15B8A}"/>
+                <a16:creationId xmlns:a16="http://schemas.microsoft.com/office/drawing/2014/main" id="{CA13B586-8A1D-4B38-8DE3-0C230D51CEE5}"/>
               </a:ext>
             </a:extLst>
           </p:cNvPr>
@@ -6819,7 +6819,7 @@
           <p:cNvPr id="6" name="TextBox 5">
             <a:extLst xmlns:a="http://schemas.openxmlformats.org/drawingml/2006/main">
               <a:ext uri="{FF2B5EF4-FFF2-40B4-BE49-F238E27FC236}">
-                <a16:creationId xmlns:a16="http://schemas.microsoft.com/office/drawing/2014/main" id="{8817350E-FF33-4D07-A37F-25CA27ACE29C}"/>
+                <a16:creationId xmlns:a16="http://schemas.microsoft.com/office/drawing/2014/main" id="{9078EEEC-472A-46B0-BC50-437D8065D130}"/>
               </a:ext>
             </a:extLst>
           </p:cNvPr>
@@ -6856,7 +6856,7 @@
                 <a:ea typeface="Aptos"/>
                 <a:cs typeface="Aptos"/>
               </a:rPr>
-              <a:t>Independent public evidence summary · 2026.07.22-9 · 2026-07-22 · Sources: WIPO IP valuation; Market-values</a:t>
+              <a:t>Independent public evidence summary · 2026.07.23-10 · 2026-07-22 · Sources: WIPO IP valuation; Market-values</a:t>
             </a:r>
           </a:p>
         </p:txBody>
@@ -6866,7 +6866,7 @@
           <p:cNvPr id="7" name="TextBox 6">
             <a:extLst xmlns:a="http://schemas.openxmlformats.org/drawingml/2006/main">
               <a:ext uri="{FF2B5EF4-FFF2-40B4-BE49-F238E27FC236}">
-                <a16:creationId xmlns:a16="http://schemas.microsoft.com/office/drawing/2014/main" id="{484CE04D-9463-4D33-AE67-39738F36DA14}"/>
+                <a16:creationId xmlns:a16="http://schemas.microsoft.com/office/drawing/2014/main" id="{0AB16858-B8B3-4054-8D02-8F1D4E5BAEFC}"/>
               </a:ext>
             </a:extLst>
           </p:cNvPr>
@@ -7436,7 +7436,7 @@
           <p:cNvPr id="9" name="TextBox 8">
             <a:extLst xmlns:a="http://schemas.openxmlformats.org/drawingml/2006/main">
               <a:ext uri="{FF2B5EF4-FFF2-40B4-BE49-F238E27FC236}">
-                <a16:creationId xmlns:a16="http://schemas.microsoft.com/office/drawing/2014/main" id="{7E1F9BA1-E041-4D6E-8269-C8B03165B6B5}"/>
+                <a16:creationId xmlns:a16="http://schemas.microsoft.com/office/drawing/2014/main" id="{E7D158E3-2665-492C-8A95-53F7D7ABEEC9}"/>
               </a:ext>
             </a:extLst>
           </p:cNvPr>
@@ -7481,7 +7481,7 @@
     </p:spTree>
     <p:extLst>
       <p:ext uri="{BB962C8B-B14F-4D97-AF65-F5344CB8AC3E}">
-        <p14:creationId xmlns:p14="http://schemas.microsoft.com/office/powerpoint/2010/main" val="1221737421"/>
+        <p14:creationId xmlns:p14="http://schemas.microsoft.com/office/powerpoint/2010/main" val="2007093740"/>
       </p:ext>
     </p:extLst>
   </p:cSld>
@@ -7512,7 +7512,7 @@
           <p:cNvPr id="2" name="TextBox 1">
             <a:extLst xmlns:a="http://schemas.openxmlformats.org/drawingml/2006/main">
               <a:ext uri="{FF2B5EF4-FFF2-40B4-BE49-F238E27FC236}">
-                <a16:creationId xmlns:a16="http://schemas.microsoft.com/office/drawing/2014/main" id="{28D087D5-3408-44A5-B2CC-37C97F7A5BC3}"/>
+                <a16:creationId xmlns:a16="http://schemas.microsoft.com/office/drawing/2014/main" id="{D7DE7FC8-68A4-47DB-B9DC-611777BCCEEA}"/>
               </a:ext>
             </a:extLst>
           </p:cNvPr>
@@ -7559,7 +7559,7 @@
           <p:cNvPr id="3" name="TextBox 2">
             <a:extLst xmlns:a="http://schemas.openxmlformats.org/drawingml/2006/main">
               <a:ext uri="{FF2B5EF4-FFF2-40B4-BE49-F238E27FC236}">
-                <a16:creationId xmlns:a16="http://schemas.microsoft.com/office/drawing/2014/main" id="{5A64A17D-BB48-4FA0-BE76-DE0B0A9DB339}"/>
+                <a16:creationId xmlns:a16="http://schemas.microsoft.com/office/drawing/2014/main" id="{C1DCC4C0-19DE-4913-9ED9-F8D90DA0A4B8}"/>
               </a:ext>
             </a:extLst>
           </p:cNvPr>
@@ -7606,7 +7606,7 @@
           <p:cNvPr id="4" name="TextBox 3">
             <a:extLst xmlns:a="http://schemas.openxmlformats.org/drawingml/2006/main">
               <a:ext uri="{FF2B5EF4-FFF2-40B4-BE49-F238E27FC236}">
-                <a16:creationId xmlns:a16="http://schemas.microsoft.com/office/drawing/2014/main" id="{AAC9CD18-B141-4CBB-845C-AD01F7685D1B}"/>
+                <a16:creationId xmlns:a16="http://schemas.microsoft.com/office/drawing/2014/main" id="{8A1C5EDF-43ED-4155-BBB5-7AB61EBE6EE5}"/>
               </a:ext>
             </a:extLst>
           </p:cNvPr>
@@ -7747,7 +7747,7 @@
           <p:cNvPr id="5" name="TextBox 4">
             <a:extLst xmlns:a="http://schemas.openxmlformats.org/drawingml/2006/main">
               <a:ext uri="{FF2B5EF4-FFF2-40B4-BE49-F238E27FC236}">
-                <a16:creationId xmlns:a16="http://schemas.microsoft.com/office/drawing/2014/main" id="{0658B046-4307-4E7C-BEAA-E51D71EDBF24}"/>
+                <a16:creationId xmlns:a16="http://schemas.microsoft.com/office/drawing/2014/main" id="{2E9344D7-4565-4257-A828-31AB29071354}"/>
               </a:ext>
             </a:extLst>
           </p:cNvPr>
@@ -7784,7 +7784,7 @@
                 <a:ea typeface="Aptos"/>
                 <a:cs typeface="Aptos"/>
               </a:rPr>
-              <a:t>Version 2026.07.22-9 · 2026-07-22 · 12 / 12</a:t>
+              <a:t>Version 2026.07.23-10 · 2026-07-22 · 12 / 12</a:t>
             </a:r>
           </a:p>
         </p:txBody>
@@ -7794,7 +7794,7 @@
           <p:cNvPr id="6" name="TextBox 5">
             <a:extLst xmlns:a="http://schemas.openxmlformats.org/drawingml/2006/main">
               <a:ext uri="{FF2B5EF4-FFF2-40B4-BE49-F238E27FC236}">
-                <a16:creationId xmlns:a16="http://schemas.microsoft.com/office/drawing/2014/main" id="{C73AD958-5550-4C4F-8C2D-68AE7D30B043}"/>
+                <a16:creationId xmlns:a16="http://schemas.microsoft.com/office/drawing/2014/main" id="{901C855A-5FCB-4025-AE9C-CD7B15E79617}"/>
               </a:ext>
             </a:extLst>
           </p:cNvPr>
@@ -7839,7 +7839,7 @@
     </p:spTree>
     <p:extLst>
       <p:ext uri="{BB962C8B-B14F-4D97-AF65-F5344CB8AC3E}">
-        <p14:creationId xmlns:p14="http://schemas.microsoft.com/office/powerpoint/2010/main" val="1549444585"/>
+        <p14:creationId xmlns:p14="http://schemas.microsoft.com/office/powerpoint/2010/main" val="1240678598"/>
       </p:ext>
     </p:extLst>
   </p:cSld>
@@ -7863,7 +7863,7 @@
           <p:cNvPr id="2" name="TextBox 1">
             <a:extLst xmlns:a="http://schemas.openxmlformats.org/drawingml/2006/main">
               <a:ext uri="{FF2B5EF4-FFF2-40B4-BE49-F238E27FC236}">
-                <a16:creationId xmlns:a16="http://schemas.microsoft.com/office/drawing/2014/main" id="{09E04BCC-6912-477F-91A5-E3C1FA85A064}"/>
+                <a16:creationId xmlns:a16="http://schemas.microsoft.com/office/drawing/2014/main" id="{9D0CB1D5-DE5B-4B0A-9CBE-4942402B5D60}"/>
               </a:ext>
             </a:extLst>
           </p:cNvPr>
@@ -7910,7 +7910,7 @@
           <p:cNvPr id="3" name="TextBox 2">
             <a:extLst xmlns:a="http://schemas.openxmlformats.org/drawingml/2006/main">
               <a:ext uri="{FF2B5EF4-FFF2-40B4-BE49-F238E27FC236}">
-                <a16:creationId xmlns:a16="http://schemas.microsoft.com/office/drawing/2014/main" id="{1E0D2A11-462D-4BF0-9910-D1C8D20F7725}"/>
+                <a16:creationId xmlns:a16="http://schemas.microsoft.com/office/drawing/2014/main" id="{C2A1A254-F927-4D01-B0E8-9AD1C18F7621}"/>
               </a:ext>
             </a:extLst>
           </p:cNvPr>
@@ -7957,7 +7957,7 @@
           <p:cNvPr id="4" name="Rectangle 3">
             <a:extLst xmlns:a="http://schemas.openxmlformats.org/drawingml/2006/main">
               <a:ext uri="{FF2B5EF4-FFF2-40B4-BE49-F238E27FC236}">
-                <a16:creationId xmlns:a16="http://schemas.microsoft.com/office/drawing/2014/main" id="{AC331220-A23C-43D8-810B-DB7E97B5FEDE}"/>
+                <a16:creationId xmlns:a16="http://schemas.microsoft.com/office/drawing/2014/main" id="{07B0BB45-0ECE-4BE8-B74C-EB841C96DBB9}"/>
               </a:ext>
             </a:extLst>
           </p:cNvPr>
@@ -8012,7 +8012,7 @@
           <p:cNvPr id="5" name="Rectangle 4">
             <a:extLst xmlns:a="http://schemas.openxmlformats.org/drawingml/2006/main">
               <a:ext uri="{FF2B5EF4-FFF2-40B4-BE49-F238E27FC236}">
-                <a16:creationId xmlns:a16="http://schemas.microsoft.com/office/drawing/2014/main" id="{C9E364CF-CF0D-4548-93DF-709E9A86B088}"/>
+                <a16:creationId xmlns:a16="http://schemas.microsoft.com/office/drawing/2014/main" id="{32C7C4D7-54F2-46A7-8724-DCC9BB11D8DD}"/>
               </a:ext>
             </a:extLst>
           </p:cNvPr>
@@ -8067,7 +8067,7 @@
           <p:cNvPr id="6" name="TextBox 5">
             <a:extLst xmlns:a="http://schemas.openxmlformats.org/drawingml/2006/main">
               <a:ext uri="{FF2B5EF4-FFF2-40B4-BE49-F238E27FC236}">
-                <a16:creationId xmlns:a16="http://schemas.microsoft.com/office/drawing/2014/main" id="{942E0562-C5F3-488F-B7C1-A1CDE3F07D2E}"/>
+                <a16:creationId xmlns:a16="http://schemas.microsoft.com/office/drawing/2014/main" id="{31DC57B1-5CA2-46D8-9D7D-B2E36FC30BED}"/>
               </a:ext>
             </a:extLst>
           </p:cNvPr>
@@ -8104,7 +8104,7 @@
                 <a:ea typeface="Aptos"/>
                 <a:cs typeface="Aptos"/>
               </a:rPr>
-              <a:t>Independent public evidence summary · 2026.07.22-9 · 2026-07-22 · Sources: Atlas readiness; WIPO</a:t>
+              <a:t>Independent public evidence summary · 2026.07.23-10 · 2026-07-22 · Sources: Atlas readiness; WIPO</a:t>
             </a:r>
           </a:p>
         </p:txBody>
@@ -8114,7 +8114,7 @@
           <p:cNvPr id="7" name="TextBox 6">
             <a:extLst xmlns:a="http://schemas.openxmlformats.org/drawingml/2006/main">
               <a:ext uri="{FF2B5EF4-FFF2-40B4-BE49-F238E27FC236}">
-                <a16:creationId xmlns:a16="http://schemas.microsoft.com/office/drawing/2014/main" id="{59A1F81A-140C-4A8A-9640-68C59375C8EE}"/>
+                <a16:creationId xmlns:a16="http://schemas.microsoft.com/office/drawing/2014/main" id="{7AEC287E-1232-4BCB-80C3-841336B0B191}"/>
               </a:ext>
             </a:extLst>
           </p:cNvPr>
@@ -8161,7 +8161,7 @@
           <p:cNvPr id="8" name="TextBox 7">
             <a:extLst xmlns:a="http://schemas.openxmlformats.org/drawingml/2006/main">
               <a:ext uri="{FF2B5EF4-FFF2-40B4-BE49-F238E27FC236}">
-                <a16:creationId xmlns:a16="http://schemas.microsoft.com/office/drawing/2014/main" id="{D32920F7-8902-4CDC-9EB7-4CC714E1A1C5}"/>
+                <a16:creationId xmlns:a16="http://schemas.microsoft.com/office/drawing/2014/main" id="{7931CA49-058D-436D-A8E0-22C0DE092F93}"/>
               </a:ext>
             </a:extLst>
           </p:cNvPr>
@@ -8208,7 +8208,7 @@
           <p:cNvPr id="9" name="TextBox 8">
             <a:extLst xmlns:a="http://schemas.openxmlformats.org/drawingml/2006/main">
               <a:ext uri="{FF2B5EF4-FFF2-40B4-BE49-F238E27FC236}">
-                <a16:creationId xmlns:a16="http://schemas.microsoft.com/office/drawing/2014/main" id="{0D8947A3-99C8-4290-B184-74EA10397903}"/>
+                <a16:creationId xmlns:a16="http://schemas.microsoft.com/office/drawing/2014/main" id="{4A5689FF-B7F0-4B05-970B-753914FEB28C}"/>
               </a:ext>
             </a:extLst>
           </p:cNvPr>
@@ -8305,7 +8305,7 @@
           <p:cNvPr id="10" name="Rounded Rectangle 9">
             <a:extLst xmlns:a="http://schemas.openxmlformats.org/drawingml/2006/main">
               <a:ext uri="{FF2B5EF4-FFF2-40B4-BE49-F238E27FC236}">
-                <a16:creationId xmlns:a16="http://schemas.microsoft.com/office/drawing/2014/main" id="{329CC2EF-2149-4399-A53F-4256C5344829}"/>
+                <a16:creationId xmlns:a16="http://schemas.microsoft.com/office/drawing/2014/main" id="{7B8868C1-2EBF-4D57-892F-1CABEDC8B92D}"/>
               </a:ext>
             </a:extLst>
           </p:cNvPr>
@@ -8362,7 +8362,7 @@
           <p:cNvPr id="11" name="TextBox 10">
             <a:extLst xmlns:a="http://schemas.openxmlformats.org/drawingml/2006/main">
               <a:ext uri="{FF2B5EF4-FFF2-40B4-BE49-F238E27FC236}">
-                <a16:creationId xmlns:a16="http://schemas.microsoft.com/office/drawing/2014/main" id="{3606F239-70E2-4961-BB74-BA06D4C97125}"/>
+                <a16:creationId xmlns:a16="http://schemas.microsoft.com/office/drawing/2014/main" id="{4B5DB393-CB7B-4D59-A5C7-23D4C51C6A8E}"/>
               </a:ext>
             </a:extLst>
           </p:cNvPr>
@@ -8409,7 +8409,7 @@
           <p:cNvPr id="12" name="TextBox 11">
             <a:extLst xmlns:a="http://schemas.openxmlformats.org/drawingml/2006/main">
               <a:ext uri="{FF2B5EF4-FFF2-40B4-BE49-F238E27FC236}">
-                <a16:creationId xmlns:a16="http://schemas.microsoft.com/office/drawing/2014/main" id="{D3613AE4-4565-4E86-80E3-E6BB9B2B14EA}"/>
+                <a16:creationId xmlns:a16="http://schemas.microsoft.com/office/drawing/2014/main" id="{5E46CA9B-4783-4A26-8CA5-25425C0A6C0D}"/>
               </a:ext>
             </a:extLst>
           </p:cNvPr>
@@ -8454,7 +8454,7 @@
     </p:spTree>
     <p:extLst>
       <p:ext uri="{BB962C8B-B14F-4D97-AF65-F5344CB8AC3E}">
-        <p14:creationId xmlns:p14="http://schemas.microsoft.com/office/powerpoint/2010/main" val="1774329846"/>
+        <p14:creationId xmlns:p14="http://schemas.microsoft.com/office/powerpoint/2010/main" val="1488488454"/>
       </p:ext>
     </p:extLst>
   </p:cSld>
@@ -8478,7 +8478,7 @@
           <p:cNvPr id="2" name="TextBox 1">
             <a:extLst xmlns:a="http://schemas.openxmlformats.org/drawingml/2006/main">
               <a:ext uri="{FF2B5EF4-FFF2-40B4-BE49-F238E27FC236}">
-                <a16:creationId xmlns:a16="http://schemas.microsoft.com/office/drawing/2014/main" id="{890A9D2B-0272-4EAE-8655-2E5F50399495}"/>
+                <a16:creationId xmlns:a16="http://schemas.microsoft.com/office/drawing/2014/main" id="{D7377DAF-3C96-44FC-A780-CAE213B1CC96}"/>
               </a:ext>
             </a:extLst>
           </p:cNvPr>
@@ -8525,7 +8525,7 @@
           <p:cNvPr id="3" name="TextBox 2">
             <a:extLst xmlns:a="http://schemas.openxmlformats.org/drawingml/2006/main">
               <a:ext uri="{FF2B5EF4-FFF2-40B4-BE49-F238E27FC236}">
-                <a16:creationId xmlns:a16="http://schemas.microsoft.com/office/drawing/2014/main" id="{D69D36D0-4614-4C55-A82A-CAD3AD5C7121}"/>
+                <a16:creationId xmlns:a16="http://schemas.microsoft.com/office/drawing/2014/main" id="{E781592C-621F-4618-A20F-48144F7ABE4E}"/>
               </a:ext>
             </a:extLst>
           </p:cNvPr>
@@ -8572,7 +8572,7 @@
           <p:cNvPr id="4" name="Rectangle 3">
             <a:extLst xmlns:a="http://schemas.openxmlformats.org/drawingml/2006/main">
               <a:ext uri="{FF2B5EF4-FFF2-40B4-BE49-F238E27FC236}">
-                <a16:creationId xmlns:a16="http://schemas.microsoft.com/office/drawing/2014/main" id="{FB2C96EF-3290-46EC-B161-195350199B8D}"/>
+                <a16:creationId xmlns:a16="http://schemas.microsoft.com/office/drawing/2014/main" id="{5498E72F-2E9F-454F-AD3C-28A4923BFDDF}"/>
               </a:ext>
             </a:extLst>
           </p:cNvPr>
@@ -8627,7 +8627,7 @@
           <p:cNvPr id="5" name="Rectangle 4">
             <a:extLst xmlns:a="http://schemas.openxmlformats.org/drawingml/2006/main">
               <a:ext uri="{FF2B5EF4-FFF2-40B4-BE49-F238E27FC236}">
-                <a16:creationId xmlns:a16="http://schemas.microsoft.com/office/drawing/2014/main" id="{CBA61D7F-13F6-4C89-83EE-4461E5059D6E}"/>
+                <a16:creationId xmlns:a16="http://schemas.microsoft.com/office/drawing/2014/main" id="{A92A91DC-FC3B-47C3-9D0E-F681ACA2494D}"/>
               </a:ext>
             </a:extLst>
           </p:cNvPr>
@@ -8682,7 +8682,7 @@
           <p:cNvPr id="6" name="TextBox 5">
             <a:extLst xmlns:a="http://schemas.openxmlformats.org/drawingml/2006/main">
               <a:ext uri="{FF2B5EF4-FFF2-40B4-BE49-F238E27FC236}">
-                <a16:creationId xmlns:a16="http://schemas.microsoft.com/office/drawing/2014/main" id="{48E36840-5754-43FC-ABC0-88B7AC5F1B5B}"/>
+                <a16:creationId xmlns:a16="http://schemas.microsoft.com/office/drawing/2014/main" id="{4131EBDE-CD89-4CE7-A6CF-27628DCDB49E}"/>
               </a:ext>
             </a:extLst>
           </p:cNvPr>
@@ -8719,7 +8719,7 @@
                 <a:ea typeface="Aptos"/>
                 <a:cs typeface="Aptos"/>
               </a:rPr>
-              <a:t>Independent public evidence summary · 2026.07.22-9 · 2026-07-22 · Sources: EP3032975B2</a:t>
+              <a:t>Independent public evidence summary · 2026.07.23-10 · 2026-07-22 · Sources: EP3032975B2</a:t>
             </a:r>
           </a:p>
         </p:txBody>
@@ -8729,7 +8729,7 @@
           <p:cNvPr id="7" name="TextBox 6">
             <a:extLst xmlns:a="http://schemas.openxmlformats.org/drawingml/2006/main">
               <a:ext uri="{FF2B5EF4-FFF2-40B4-BE49-F238E27FC236}">
-                <a16:creationId xmlns:a16="http://schemas.microsoft.com/office/drawing/2014/main" id="{E0F56736-3DD4-4799-B335-148D5A995312}"/>
+                <a16:creationId xmlns:a16="http://schemas.microsoft.com/office/drawing/2014/main" id="{94067BCB-4DE0-4ACC-B123-9DF91AEB8895}"/>
               </a:ext>
             </a:extLst>
           </p:cNvPr>
@@ -8776,7 +8776,7 @@
           <p:cNvPr id="8" name="TextBox 7">
             <a:extLst xmlns:a="http://schemas.openxmlformats.org/drawingml/2006/main">
               <a:ext uri="{FF2B5EF4-FFF2-40B4-BE49-F238E27FC236}">
-                <a16:creationId xmlns:a16="http://schemas.microsoft.com/office/drawing/2014/main" id="{E62A49D9-A749-431B-B419-49504B647CD6}"/>
+                <a16:creationId xmlns:a16="http://schemas.microsoft.com/office/drawing/2014/main" id="{7F8B2C26-0C98-4CFE-91B4-F73E0D216BFA}"/>
               </a:ext>
             </a:extLst>
           </p:cNvPr>
@@ -8823,7 +8823,7 @@
           <p:cNvPr id="9" name="TextBox 8">
             <a:extLst xmlns:a="http://schemas.openxmlformats.org/drawingml/2006/main">
               <a:ext uri="{FF2B5EF4-FFF2-40B4-BE49-F238E27FC236}">
-                <a16:creationId xmlns:a16="http://schemas.microsoft.com/office/drawing/2014/main" id="{C0648472-5620-45D9-8748-A7C575038659}"/>
+                <a16:creationId xmlns:a16="http://schemas.microsoft.com/office/drawing/2014/main" id="{FFEE749D-0F8E-47F9-947F-F3F0F3F69CED}"/>
               </a:ext>
             </a:extLst>
           </p:cNvPr>
@@ -8920,7 +8920,7 @@
           <p:cNvPr id="10" name="Rounded Rectangle 9">
             <a:extLst xmlns:a="http://schemas.openxmlformats.org/drawingml/2006/main">
               <a:ext uri="{FF2B5EF4-FFF2-40B4-BE49-F238E27FC236}">
-                <a16:creationId xmlns:a16="http://schemas.microsoft.com/office/drawing/2014/main" id="{6E859AD5-A764-4D47-A234-814B0B779055}"/>
+                <a16:creationId xmlns:a16="http://schemas.microsoft.com/office/drawing/2014/main" id="{9AC613D9-1A7A-401F-A8C5-DACD6475A4DB}"/>
               </a:ext>
             </a:extLst>
           </p:cNvPr>
@@ -8977,7 +8977,7 @@
           <p:cNvPr id="11" name="TextBox 10">
             <a:extLst xmlns:a="http://schemas.openxmlformats.org/drawingml/2006/main">
               <a:ext uri="{FF2B5EF4-FFF2-40B4-BE49-F238E27FC236}">
-                <a16:creationId xmlns:a16="http://schemas.microsoft.com/office/drawing/2014/main" id="{70F7AC2B-0E06-41A1-BA7D-2DC6EB2EE128}"/>
+                <a16:creationId xmlns:a16="http://schemas.microsoft.com/office/drawing/2014/main" id="{5D710353-9C70-4FFC-93A9-3F6C49679FC4}"/>
               </a:ext>
             </a:extLst>
           </p:cNvPr>
@@ -9024,7 +9024,7 @@
           <p:cNvPr id="12" name="TextBox 11">
             <a:extLst xmlns:a="http://schemas.openxmlformats.org/drawingml/2006/main">
               <a:ext uri="{FF2B5EF4-FFF2-40B4-BE49-F238E27FC236}">
-                <a16:creationId xmlns:a16="http://schemas.microsoft.com/office/drawing/2014/main" id="{70595FA7-EB98-48D3-ADDA-01166715EFD9}"/>
+                <a16:creationId xmlns:a16="http://schemas.microsoft.com/office/drawing/2014/main" id="{F6990641-3E7F-4548-ABF7-5C7A56688EF7}"/>
               </a:ext>
             </a:extLst>
           </p:cNvPr>
@@ -9069,7 +9069,7 @@
     </p:spTree>
     <p:extLst>
       <p:ext uri="{BB962C8B-B14F-4D97-AF65-F5344CB8AC3E}">
-        <p14:creationId xmlns:p14="http://schemas.microsoft.com/office/powerpoint/2010/main" val="845346353"/>
+        <p14:creationId xmlns:p14="http://schemas.microsoft.com/office/powerpoint/2010/main" val="80600213"/>
       </p:ext>
     </p:extLst>
   </p:cSld>
@@ -9093,7 +9093,7 @@
           <p:cNvPr id="2" name="TextBox 1">
             <a:extLst xmlns:a="http://schemas.openxmlformats.org/drawingml/2006/main">
               <a:ext uri="{FF2B5EF4-FFF2-40B4-BE49-F238E27FC236}">
-                <a16:creationId xmlns:a16="http://schemas.microsoft.com/office/drawing/2014/main" id="{72CE93BE-ADBC-4ECB-862B-B2F0783AA824}"/>
+                <a16:creationId xmlns:a16="http://schemas.microsoft.com/office/drawing/2014/main" id="{A5FFC027-1AC7-4CA4-9338-763BDF627B0E}"/>
               </a:ext>
             </a:extLst>
           </p:cNvPr>
@@ -9140,7 +9140,7 @@
           <p:cNvPr id="3" name="TextBox 2">
             <a:extLst xmlns:a="http://schemas.openxmlformats.org/drawingml/2006/main">
               <a:ext uri="{FF2B5EF4-FFF2-40B4-BE49-F238E27FC236}">
-                <a16:creationId xmlns:a16="http://schemas.microsoft.com/office/drawing/2014/main" id="{D591052D-25BE-4196-A90B-A7A4F4148663}"/>
+                <a16:creationId xmlns:a16="http://schemas.microsoft.com/office/drawing/2014/main" id="{4515D287-2D5F-44A7-9368-3D65503F1F00}"/>
               </a:ext>
             </a:extLst>
           </p:cNvPr>
@@ -9187,7 +9187,7 @@
           <p:cNvPr id="4" name="Rectangle 3">
             <a:extLst xmlns:a="http://schemas.openxmlformats.org/drawingml/2006/main">
               <a:ext uri="{FF2B5EF4-FFF2-40B4-BE49-F238E27FC236}">
-                <a16:creationId xmlns:a16="http://schemas.microsoft.com/office/drawing/2014/main" id="{6BA39B5D-A1C4-4BAE-A655-6F530A848D16}"/>
+                <a16:creationId xmlns:a16="http://schemas.microsoft.com/office/drawing/2014/main" id="{B50FE150-BE70-4BF0-9A11-D7938B46A671}"/>
               </a:ext>
             </a:extLst>
           </p:cNvPr>
@@ -9242,7 +9242,7 @@
           <p:cNvPr id="5" name="Rectangle 4">
             <a:extLst xmlns:a="http://schemas.openxmlformats.org/drawingml/2006/main">
               <a:ext uri="{FF2B5EF4-FFF2-40B4-BE49-F238E27FC236}">
-                <a16:creationId xmlns:a16="http://schemas.microsoft.com/office/drawing/2014/main" id="{7E13B91A-B5E0-4C66-A81B-7D3E2F4FC80C}"/>
+                <a16:creationId xmlns:a16="http://schemas.microsoft.com/office/drawing/2014/main" id="{AABB5C2D-5D8C-41D5-9049-70AD10D1290D}"/>
               </a:ext>
             </a:extLst>
           </p:cNvPr>
@@ -9297,7 +9297,7 @@
           <p:cNvPr id="6" name="TextBox 5">
             <a:extLst xmlns:a="http://schemas.openxmlformats.org/drawingml/2006/main">
               <a:ext uri="{FF2B5EF4-FFF2-40B4-BE49-F238E27FC236}">
-                <a16:creationId xmlns:a16="http://schemas.microsoft.com/office/drawing/2014/main" id="{823FDA40-8976-4774-9A70-D45A4F3D4D24}"/>
+                <a16:creationId xmlns:a16="http://schemas.microsoft.com/office/drawing/2014/main" id="{3655D1C7-B137-426A-91E1-D545E21C2492}"/>
               </a:ext>
             </a:extLst>
           </p:cNvPr>
@@ -9334,7 +9334,7 @@
                 <a:ea typeface="Aptos"/>
                 <a:cs typeface="Aptos"/>
               </a:rPr>
-              <a:t>Independent public evidence summary · 2026.07.22-9 · 2026-07-22 · Sources: EPO Register; EP3032975B2</a:t>
+              <a:t>Independent public evidence summary · 2026.07.23-10 · 2026-07-22 · Sources: EPO Register; EP3032975B2</a:t>
             </a:r>
           </a:p>
         </p:txBody>
@@ -9344,7 +9344,7 @@
           <p:cNvPr id="7" name="TextBox 6">
             <a:extLst xmlns:a="http://schemas.openxmlformats.org/drawingml/2006/main">
               <a:ext uri="{FF2B5EF4-FFF2-40B4-BE49-F238E27FC236}">
-                <a16:creationId xmlns:a16="http://schemas.microsoft.com/office/drawing/2014/main" id="{517E8624-FEB4-4827-8806-B9B8E6D91327}"/>
+                <a16:creationId xmlns:a16="http://schemas.microsoft.com/office/drawing/2014/main" id="{27AE8586-F3BD-49A3-BF12-D762B596AE54}"/>
               </a:ext>
             </a:extLst>
           </p:cNvPr>
@@ -9391,7 +9391,7 @@
           <p:cNvPr id="8" name="Rounded Rectangle 7">
             <a:extLst xmlns:a="http://schemas.openxmlformats.org/drawingml/2006/main">
               <a:ext uri="{FF2B5EF4-FFF2-40B4-BE49-F238E27FC236}">
-                <a16:creationId xmlns:a16="http://schemas.microsoft.com/office/drawing/2014/main" id="{35FEE5EB-B3E8-414D-8AB2-C7BC34CCDF7D}"/>
+                <a16:creationId xmlns:a16="http://schemas.microsoft.com/office/drawing/2014/main" id="{9B3F8BB5-C325-4808-8364-505E40DC6C95}"/>
               </a:ext>
             </a:extLst>
           </p:cNvPr>
@@ -9448,7 +9448,7 @@
           <p:cNvPr id="9" name="TextBox 8">
             <a:extLst xmlns:a="http://schemas.openxmlformats.org/drawingml/2006/main">
               <a:ext uri="{FF2B5EF4-FFF2-40B4-BE49-F238E27FC236}">
-                <a16:creationId xmlns:a16="http://schemas.microsoft.com/office/drawing/2014/main" id="{15CF180C-81AE-49D7-A434-057DB76972AC}"/>
+                <a16:creationId xmlns:a16="http://schemas.microsoft.com/office/drawing/2014/main" id="{1780C78C-0853-422A-B670-C7AF52E78E65}"/>
               </a:ext>
             </a:extLst>
           </p:cNvPr>
@@ -9495,7 +9495,7 @@
           <p:cNvPr id="10" name="TextBox 9">
             <a:extLst xmlns:a="http://schemas.openxmlformats.org/drawingml/2006/main">
               <a:ext uri="{FF2B5EF4-FFF2-40B4-BE49-F238E27FC236}">
-                <a16:creationId xmlns:a16="http://schemas.microsoft.com/office/drawing/2014/main" id="{1B25BC9C-1BE7-4871-9345-F5D9B125F8BB}"/>
+                <a16:creationId xmlns:a16="http://schemas.microsoft.com/office/drawing/2014/main" id="{CBB4EE18-4E22-45B2-A086-638844DD6F24}"/>
               </a:ext>
             </a:extLst>
           </p:cNvPr>
@@ -9542,7 +9542,7 @@
           <p:cNvPr id="11" name="Rounded Rectangle 10">
             <a:extLst xmlns:a="http://schemas.openxmlformats.org/drawingml/2006/main">
               <a:ext uri="{FF2B5EF4-FFF2-40B4-BE49-F238E27FC236}">
-                <a16:creationId xmlns:a16="http://schemas.microsoft.com/office/drawing/2014/main" id="{16BC7DBC-C411-4238-A2E3-B874B9550817}"/>
+                <a16:creationId xmlns:a16="http://schemas.microsoft.com/office/drawing/2014/main" id="{0D7A4A61-498C-43FD-8EB6-12C5E9372AD4}"/>
               </a:ext>
             </a:extLst>
           </p:cNvPr>
@@ -9599,7 +9599,7 @@
           <p:cNvPr id="12" name="TextBox 11">
             <a:extLst xmlns:a="http://schemas.openxmlformats.org/drawingml/2006/main">
               <a:ext uri="{FF2B5EF4-FFF2-40B4-BE49-F238E27FC236}">
-                <a16:creationId xmlns:a16="http://schemas.microsoft.com/office/drawing/2014/main" id="{CF69023B-E8EA-4D86-8E10-8CD1A0267C28}"/>
+                <a16:creationId xmlns:a16="http://schemas.microsoft.com/office/drawing/2014/main" id="{E672B3E3-1CD9-4DFD-94AC-D3C25BE000DE}"/>
               </a:ext>
             </a:extLst>
           </p:cNvPr>
@@ -9646,7 +9646,7 @@
           <p:cNvPr id="13" name="TextBox 12">
             <a:extLst xmlns:a="http://schemas.openxmlformats.org/drawingml/2006/main">
               <a:ext uri="{FF2B5EF4-FFF2-40B4-BE49-F238E27FC236}">
-                <a16:creationId xmlns:a16="http://schemas.microsoft.com/office/drawing/2014/main" id="{FBB67B59-8AAC-4E4C-B698-4968C4772F7A}"/>
+                <a16:creationId xmlns:a16="http://schemas.microsoft.com/office/drawing/2014/main" id="{8061720D-FEA9-4644-8DE4-D5AA55C8BC1B}"/>
               </a:ext>
             </a:extLst>
           </p:cNvPr>
@@ -9693,7 +9693,7 @@
           <p:cNvPr id="14" name="Rounded Rectangle 13">
             <a:extLst xmlns:a="http://schemas.openxmlformats.org/drawingml/2006/main">
               <a:ext uri="{FF2B5EF4-FFF2-40B4-BE49-F238E27FC236}">
-                <a16:creationId xmlns:a16="http://schemas.microsoft.com/office/drawing/2014/main" id="{4C4EFC9F-3184-4102-A484-33BE00EF45DE}"/>
+                <a16:creationId xmlns:a16="http://schemas.microsoft.com/office/drawing/2014/main" id="{8CDE1F78-9C06-46C8-8D75-9E254A769C5B}"/>
               </a:ext>
             </a:extLst>
           </p:cNvPr>
@@ -9750,7 +9750,7 @@
           <p:cNvPr id="15" name="TextBox 14">
             <a:extLst xmlns:a="http://schemas.openxmlformats.org/drawingml/2006/main">
               <a:ext uri="{FF2B5EF4-FFF2-40B4-BE49-F238E27FC236}">
-                <a16:creationId xmlns:a16="http://schemas.microsoft.com/office/drawing/2014/main" id="{C9F4944F-D45D-48CB-AB00-D18604016AC8}"/>
+                <a16:creationId xmlns:a16="http://schemas.microsoft.com/office/drawing/2014/main" id="{CE709C6F-C45C-41F0-89BA-2E4DB8AC0C7A}"/>
               </a:ext>
             </a:extLst>
           </p:cNvPr>
@@ -9797,7 +9797,7 @@
           <p:cNvPr id="16" name="TextBox 15">
             <a:extLst xmlns:a="http://schemas.openxmlformats.org/drawingml/2006/main">
               <a:ext uri="{FF2B5EF4-FFF2-40B4-BE49-F238E27FC236}">
-                <a16:creationId xmlns:a16="http://schemas.microsoft.com/office/drawing/2014/main" id="{10861D56-0599-47A7-83B4-569016B3962D}"/>
+                <a16:creationId xmlns:a16="http://schemas.microsoft.com/office/drawing/2014/main" id="{E62E1519-5BAB-46F5-98B1-3B33C3CA78C4}"/>
               </a:ext>
             </a:extLst>
           </p:cNvPr>
@@ -9844,7 +9844,7 @@
           <p:cNvPr id="17" name="TextBox 16">
             <a:extLst xmlns:a="http://schemas.openxmlformats.org/drawingml/2006/main">
               <a:ext uri="{FF2B5EF4-FFF2-40B4-BE49-F238E27FC236}">
-                <a16:creationId xmlns:a16="http://schemas.microsoft.com/office/drawing/2014/main" id="{A09B05AE-ADB2-421B-B567-5757CD85D3F5}"/>
+                <a16:creationId xmlns:a16="http://schemas.microsoft.com/office/drawing/2014/main" id="{A9D20434-C61C-4518-92AA-8360DE136FD3}"/>
               </a:ext>
             </a:extLst>
           </p:cNvPr>
@@ -9891,7 +9891,7 @@
           <p:cNvPr id="18" name="Rounded Rectangle 17">
             <a:extLst xmlns:a="http://schemas.openxmlformats.org/drawingml/2006/main">
               <a:ext uri="{FF2B5EF4-FFF2-40B4-BE49-F238E27FC236}">
-                <a16:creationId xmlns:a16="http://schemas.microsoft.com/office/drawing/2014/main" id="{3ADFFBCF-7BCD-4DF6-899F-9001F1903C93}"/>
+                <a16:creationId xmlns:a16="http://schemas.microsoft.com/office/drawing/2014/main" id="{902B73FD-849A-486F-8236-8F4882EC53A3}"/>
               </a:ext>
             </a:extLst>
           </p:cNvPr>
@@ -9948,7 +9948,7 @@
           <p:cNvPr id="19" name="TextBox 18">
             <a:extLst xmlns:a="http://schemas.openxmlformats.org/drawingml/2006/main">
               <a:ext uri="{FF2B5EF4-FFF2-40B4-BE49-F238E27FC236}">
-                <a16:creationId xmlns:a16="http://schemas.microsoft.com/office/drawing/2014/main" id="{9346B84E-9753-4740-ACD7-17FDCB700096}"/>
+                <a16:creationId xmlns:a16="http://schemas.microsoft.com/office/drawing/2014/main" id="{0E6923A2-5055-4DBC-A0CE-71F7F1410B0D}"/>
               </a:ext>
             </a:extLst>
           </p:cNvPr>
@@ -9995,7 +9995,7 @@
           <p:cNvPr id="20" name="TextBox 19">
             <a:extLst xmlns:a="http://schemas.openxmlformats.org/drawingml/2006/main">
               <a:ext uri="{FF2B5EF4-FFF2-40B4-BE49-F238E27FC236}">
-                <a16:creationId xmlns:a16="http://schemas.microsoft.com/office/drawing/2014/main" id="{7DCBA330-93FC-407B-9357-3CDD5C4D50F9}"/>
+                <a16:creationId xmlns:a16="http://schemas.microsoft.com/office/drawing/2014/main" id="{3CED486C-4CB9-4A0D-882B-C35C0F40C767}"/>
               </a:ext>
             </a:extLst>
           </p:cNvPr>
@@ -10040,7 +10040,7 @@
     </p:spTree>
     <p:extLst>
       <p:ext uri="{BB962C8B-B14F-4D97-AF65-F5344CB8AC3E}">
-        <p14:creationId xmlns:p14="http://schemas.microsoft.com/office/powerpoint/2010/main" val="82677182"/>
+        <p14:creationId xmlns:p14="http://schemas.microsoft.com/office/powerpoint/2010/main" val="2001480021"/>
       </p:ext>
     </p:extLst>
   </p:cSld>
@@ -10064,7 +10064,7 @@
           <p:cNvPr id="2" name="TextBox 1">
             <a:extLst xmlns:a="http://schemas.openxmlformats.org/drawingml/2006/main">
               <a:ext uri="{FF2B5EF4-FFF2-40B4-BE49-F238E27FC236}">
-                <a16:creationId xmlns:a16="http://schemas.microsoft.com/office/drawing/2014/main" id="{FB6B7EAC-2C94-4BD9-9986-AF972C28653D}"/>
+                <a16:creationId xmlns:a16="http://schemas.microsoft.com/office/drawing/2014/main" id="{77B57EFB-3D9D-4832-BCDD-A50A6EC0C577}"/>
               </a:ext>
             </a:extLst>
           </p:cNvPr>
@@ -10111,7 +10111,7 @@
           <p:cNvPr id="3" name="TextBox 2">
             <a:extLst xmlns:a="http://schemas.openxmlformats.org/drawingml/2006/main">
               <a:ext uri="{FF2B5EF4-FFF2-40B4-BE49-F238E27FC236}">
-                <a16:creationId xmlns:a16="http://schemas.microsoft.com/office/drawing/2014/main" id="{5BF86E35-5563-4AE4-8126-FE8F11D4AF07}"/>
+                <a16:creationId xmlns:a16="http://schemas.microsoft.com/office/drawing/2014/main" id="{FA60F6A7-85B6-4B44-96A7-EF5ED64A1C96}"/>
               </a:ext>
             </a:extLst>
           </p:cNvPr>
@@ -10158,7 +10158,7 @@
           <p:cNvPr id="4" name="Rectangle 3">
             <a:extLst xmlns:a="http://schemas.openxmlformats.org/drawingml/2006/main">
               <a:ext uri="{FF2B5EF4-FFF2-40B4-BE49-F238E27FC236}">
-                <a16:creationId xmlns:a16="http://schemas.microsoft.com/office/drawing/2014/main" id="{65898FD3-3A25-49CE-B920-14D0FB0BB6BA}"/>
+                <a16:creationId xmlns:a16="http://schemas.microsoft.com/office/drawing/2014/main" id="{EFE44A2E-BF41-4770-85DB-B455FC624F02}"/>
               </a:ext>
             </a:extLst>
           </p:cNvPr>
@@ -10213,7 +10213,7 @@
           <p:cNvPr id="5" name="Rectangle 4">
             <a:extLst xmlns:a="http://schemas.openxmlformats.org/drawingml/2006/main">
               <a:ext uri="{FF2B5EF4-FFF2-40B4-BE49-F238E27FC236}">
-                <a16:creationId xmlns:a16="http://schemas.microsoft.com/office/drawing/2014/main" id="{63C19A39-EB1E-44FB-8E9E-98338C770AD6}"/>
+                <a16:creationId xmlns:a16="http://schemas.microsoft.com/office/drawing/2014/main" id="{825AC6F5-F009-44F7-BEF3-E62CA119B0AD}"/>
               </a:ext>
             </a:extLst>
           </p:cNvPr>
@@ -10268,7 +10268,7 @@
           <p:cNvPr id="6" name="TextBox 5">
             <a:extLst xmlns:a="http://schemas.openxmlformats.org/drawingml/2006/main">
               <a:ext uri="{FF2B5EF4-FFF2-40B4-BE49-F238E27FC236}">
-                <a16:creationId xmlns:a16="http://schemas.microsoft.com/office/drawing/2014/main" id="{84CA68FD-6331-439B-A51A-D2175C873CF8}"/>
+                <a16:creationId xmlns:a16="http://schemas.microsoft.com/office/drawing/2014/main" id="{3E2AC30A-FA3E-48BF-8B5A-23D9FFE479D4}"/>
               </a:ext>
             </a:extLst>
           </p:cNvPr>
@@ -10305,7 +10305,7 @@
                 <a:ea typeface="Aptos"/>
                 <a:cs typeface="Aptos"/>
               </a:rPr>
-              <a:t>Independent public evidence summary · 2026.07.22-9 · 2026-07-22 · Sources: EP3032975B2; 7 O 3341/24</a:t>
+              <a:t>Independent public evidence summary · 2026.07.23-10 · 2026-07-22 · Sources: EP3032975B2; 7 O 3341/24</a:t>
             </a:r>
           </a:p>
         </p:txBody>
@@ -10315,7 +10315,7 @@
           <p:cNvPr id="7" name="TextBox 6">
             <a:extLst xmlns:a="http://schemas.openxmlformats.org/drawingml/2006/main">
               <a:ext uri="{FF2B5EF4-FFF2-40B4-BE49-F238E27FC236}">
-                <a16:creationId xmlns:a16="http://schemas.microsoft.com/office/drawing/2014/main" id="{D9286D33-8702-4EA0-BD5F-1042BE959590}"/>
+                <a16:creationId xmlns:a16="http://schemas.microsoft.com/office/drawing/2014/main" id="{52602B7A-1760-4EEA-B66C-792E686A8246}"/>
               </a:ext>
             </a:extLst>
           </p:cNvPr>
@@ -10362,7 +10362,7 @@
           <p:cNvPr id="8" name="TextBox 7">
             <a:extLst xmlns:a="http://schemas.openxmlformats.org/drawingml/2006/main">
               <a:ext uri="{FF2B5EF4-FFF2-40B4-BE49-F238E27FC236}">
-                <a16:creationId xmlns:a16="http://schemas.microsoft.com/office/drawing/2014/main" id="{831E2B19-35B4-4CAF-99D8-2E6106835E75}"/>
+                <a16:creationId xmlns:a16="http://schemas.microsoft.com/office/drawing/2014/main" id="{AAF0E03A-3B49-420D-BB5E-D24217D5E2D8}"/>
               </a:ext>
             </a:extLst>
           </p:cNvPr>
@@ -10409,7 +10409,7 @@
           <p:cNvPr id="9" name="TextBox 8">
             <a:extLst xmlns:a="http://schemas.openxmlformats.org/drawingml/2006/main">
               <a:ext uri="{FF2B5EF4-FFF2-40B4-BE49-F238E27FC236}">
-                <a16:creationId xmlns:a16="http://schemas.microsoft.com/office/drawing/2014/main" id="{A521DDAD-61E8-4A78-8349-C43A316F7143}"/>
+                <a16:creationId xmlns:a16="http://schemas.microsoft.com/office/drawing/2014/main" id="{4E6952FB-13FB-419B-B5E2-E13E35733509}"/>
               </a:ext>
             </a:extLst>
           </p:cNvPr>
@@ -10506,7 +10506,7 @@
           <p:cNvPr id="10" name="Rounded Rectangle 9">
             <a:extLst xmlns:a="http://schemas.openxmlformats.org/drawingml/2006/main">
               <a:ext uri="{FF2B5EF4-FFF2-40B4-BE49-F238E27FC236}">
-                <a16:creationId xmlns:a16="http://schemas.microsoft.com/office/drawing/2014/main" id="{A258EEAF-C4A5-4E05-8596-63B0FC2BA418}"/>
+                <a16:creationId xmlns:a16="http://schemas.microsoft.com/office/drawing/2014/main" id="{9A395377-9F35-425F-A100-29C581C88869}"/>
               </a:ext>
             </a:extLst>
           </p:cNvPr>
@@ -10563,7 +10563,7 @@
           <p:cNvPr id="11" name="TextBox 10">
             <a:extLst xmlns:a="http://schemas.openxmlformats.org/drawingml/2006/main">
               <a:ext uri="{FF2B5EF4-FFF2-40B4-BE49-F238E27FC236}">
-                <a16:creationId xmlns:a16="http://schemas.microsoft.com/office/drawing/2014/main" id="{1FF00502-8F67-4340-ACFC-FC78DEAD811D}"/>
+                <a16:creationId xmlns:a16="http://schemas.microsoft.com/office/drawing/2014/main" id="{FE9EF51A-8749-409F-A1F7-FE309D9DC83F}"/>
               </a:ext>
             </a:extLst>
           </p:cNvPr>
@@ -10610,7 +10610,7 @@
           <p:cNvPr id="12" name="TextBox 11">
             <a:extLst xmlns:a="http://schemas.openxmlformats.org/drawingml/2006/main">
               <a:ext uri="{FF2B5EF4-FFF2-40B4-BE49-F238E27FC236}">
-                <a16:creationId xmlns:a16="http://schemas.microsoft.com/office/drawing/2014/main" id="{015F55C5-9B47-4E0B-8A18-FF20413DCB5A}"/>
+                <a16:creationId xmlns:a16="http://schemas.microsoft.com/office/drawing/2014/main" id="{9F51153B-7C57-45E5-A36C-85BFA80D9B7B}"/>
               </a:ext>
             </a:extLst>
           </p:cNvPr>
@@ -10655,7 +10655,7 @@
     </p:spTree>
     <p:extLst>
       <p:ext uri="{BB962C8B-B14F-4D97-AF65-F5344CB8AC3E}">
-        <p14:creationId xmlns:p14="http://schemas.microsoft.com/office/powerpoint/2010/main" val="439742809"/>
+        <p14:creationId xmlns:p14="http://schemas.microsoft.com/office/powerpoint/2010/main" val="1511901522"/>
       </p:ext>
     </p:extLst>
   </p:cSld>
@@ -10679,7 +10679,7 @@
           <p:cNvPr id="2" name="TextBox 1">
             <a:extLst xmlns:a="http://schemas.openxmlformats.org/drawingml/2006/main">
               <a:ext uri="{FF2B5EF4-FFF2-40B4-BE49-F238E27FC236}">
-                <a16:creationId xmlns:a16="http://schemas.microsoft.com/office/drawing/2014/main" id="{9005B68D-AE0C-4D76-953B-37F5476BA1CB}"/>
+                <a16:creationId xmlns:a16="http://schemas.microsoft.com/office/drawing/2014/main" id="{080A4713-97BD-4B4A-A07B-61D02523689C}"/>
               </a:ext>
             </a:extLst>
           </p:cNvPr>
@@ -10726,7 +10726,7 @@
           <p:cNvPr id="3" name="TextBox 2">
             <a:extLst xmlns:a="http://schemas.openxmlformats.org/drawingml/2006/main">
               <a:ext uri="{FF2B5EF4-FFF2-40B4-BE49-F238E27FC236}">
-                <a16:creationId xmlns:a16="http://schemas.microsoft.com/office/drawing/2014/main" id="{D06B8F27-2A5B-4041-A84C-B772B3C8F861}"/>
+                <a16:creationId xmlns:a16="http://schemas.microsoft.com/office/drawing/2014/main" id="{33EA84BD-D2A3-417D-B994-DF553486B095}"/>
               </a:ext>
             </a:extLst>
           </p:cNvPr>
@@ -10773,7 +10773,7 @@
           <p:cNvPr id="4" name="Rectangle 3">
             <a:extLst xmlns:a="http://schemas.openxmlformats.org/drawingml/2006/main">
               <a:ext uri="{FF2B5EF4-FFF2-40B4-BE49-F238E27FC236}">
-                <a16:creationId xmlns:a16="http://schemas.microsoft.com/office/drawing/2014/main" id="{B7BF46F9-11F1-4C79-B283-669A6C23AB75}"/>
+                <a16:creationId xmlns:a16="http://schemas.microsoft.com/office/drawing/2014/main" id="{9562EEA0-8309-4F26-A065-BD499C48920E}"/>
               </a:ext>
             </a:extLst>
           </p:cNvPr>
@@ -10828,7 +10828,7 @@
           <p:cNvPr id="5" name="Rectangle 4">
             <a:extLst xmlns:a="http://schemas.openxmlformats.org/drawingml/2006/main">
               <a:ext uri="{FF2B5EF4-FFF2-40B4-BE49-F238E27FC236}">
-                <a16:creationId xmlns:a16="http://schemas.microsoft.com/office/drawing/2014/main" id="{2352A9F5-46EA-4A1B-855C-5AA780F2AC2B}"/>
+                <a16:creationId xmlns:a16="http://schemas.microsoft.com/office/drawing/2014/main" id="{DC64A8E2-92DD-4463-A04D-385889FC7A15}"/>
               </a:ext>
             </a:extLst>
           </p:cNvPr>
@@ -10883,7 +10883,7 @@
           <p:cNvPr id="6" name="TextBox 5">
             <a:extLst xmlns:a="http://schemas.openxmlformats.org/drawingml/2006/main">
               <a:ext uri="{FF2B5EF4-FFF2-40B4-BE49-F238E27FC236}">
-                <a16:creationId xmlns:a16="http://schemas.microsoft.com/office/drawing/2014/main" id="{4B1C8D14-C37A-4E1B-AAFE-A8AA94611718}"/>
+                <a16:creationId xmlns:a16="http://schemas.microsoft.com/office/drawing/2014/main" id="{5A4D130A-A1B4-496A-9CE7-D2687D7CA32B}"/>
               </a:ext>
             </a:extLst>
           </p:cNvPr>
@@ -10920,7 +10920,7 @@
                 <a:ea typeface="Aptos"/>
                 <a:cs typeface="Aptos"/>
               </a:rPr>
-              <a:t>Independent public evidence summary · 2026.07.22-9 · 2026-07-22 · Sources: Market-values; IMARC; GVR; Fortune</a:t>
+              <a:t>Independent public evidence summary · 2026.07.23-10 · 2026-07-22 · Sources: Market-values; IMARC; GVR; Fortune</a:t>
             </a:r>
           </a:p>
         </p:txBody>
@@ -10930,7 +10930,7 @@
           <p:cNvPr id="7" name="TextBox 6">
             <a:extLst xmlns:a="http://schemas.openxmlformats.org/drawingml/2006/main">
               <a:ext uri="{FF2B5EF4-FFF2-40B4-BE49-F238E27FC236}">
-                <a16:creationId xmlns:a16="http://schemas.microsoft.com/office/drawing/2014/main" id="{7F037393-1A3F-45F9-B68F-EE52205BCCC6}"/>
+                <a16:creationId xmlns:a16="http://schemas.microsoft.com/office/drawing/2014/main" id="{58588C3D-0EC1-4476-948A-B6EF82117D97}"/>
               </a:ext>
             </a:extLst>
           </p:cNvPr>
@@ -10977,7 +10977,7 @@
           <p:cNvPr id="8" name="Rounded Rectangle 7">
             <a:extLst xmlns:a="http://schemas.openxmlformats.org/drawingml/2006/main">
               <a:ext uri="{FF2B5EF4-FFF2-40B4-BE49-F238E27FC236}">
-                <a16:creationId xmlns:a16="http://schemas.microsoft.com/office/drawing/2014/main" id="{E040D1AA-1B68-4C3E-9707-441F37AAB0FA}"/>
+                <a16:creationId xmlns:a16="http://schemas.microsoft.com/office/drawing/2014/main" id="{7DCF8AF7-118F-4201-A525-0F101CA52EFD}"/>
               </a:ext>
             </a:extLst>
           </p:cNvPr>
@@ -11034,7 +11034,7 @@
           <p:cNvPr id="9" name="TextBox 8">
             <a:extLst xmlns:a="http://schemas.openxmlformats.org/drawingml/2006/main">
               <a:ext uri="{FF2B5EF4-FFF2-40B4-BE49-F238E27FC236}">
-                <a16:creationId xmlns:a16="http://schemas.microsoft.com/office/drawing/2014/main" id="{F2573276-9B62-4918-AE23-732CA3DAF1FC}"/>
+                <a16:creationId xmlns:a16="http://schemas.microsoft.com/office/drawing/2014/main" id="{11376589-F804-4DFB-AF60-B3E4DA8BE287}"/>
               </a:ext>
             </a:extLst>
           </p:cNvPr>
@@ -11081,7 +11081,7 @@
           <p:cNvPr id="10" name="TextBox 9">
             <a:extLst xmlns:a="http://schemas.openxmlformats.org/drawingml/2006/main">
               <a:ext uri="{FF2B5EF4-FFF2-40B4-BE49-F238E27FC236}">
-                <a16:creationId xmlns:a16="http://schemas.microsoft.com/office/drawing/2014/main" id="{39B4FCAD-523A-42E9-B3F3-A5E6DCAF6537}"/>
+                <a16:creationId xmlns:a16="http://schemas.microsoft.com/office/drawing/2014/main" id="{20F65E08-F45E-4AAE-ABE4-9F1FD62DD231}"/>
               </a:ext>
             </a:extLst>
           </p:cNvPr>
@@ -11128,7 +11128,7 @@
           <p:cNvPr id="11" name="Rounded Rectangle 10">
             <a:extLst xmlns:a="http://schemas.openxmlformats.org/drawingml/2006/main">
               <a:ext uri="{FF2B5EF4-FFF2-40B4-BE49-F238E27FC236}">
-                <a16:creationId xmlns:a16="http://schemas.microsoft.com/office/drawing/2014/main" id="{63C1D6E3-3D14-4EBE-A89F-ECBE29D5A3DF}"/>
+                <a16:creationId xmlns:a16="http://schemas.microsoft.com/office/drawing/2014/main" id="{FEA99B98-2172-4138-BC5D-A462B12208DD}"/>
               </a:ext>
             </a:extLst>
           </p:cNvPr>
@@ -11185,7 +11185,7 @@
           <p:cNvPr id="12" name="TextBox 11">
             <a:extLst xmlns:a="http://schemas.openxmlformats.org/drawingml/2006/main">
               <a:ext uri="{FF2B5EF4-FFF2-40B4-BE49-F238E27FC236}">
-                <a16:creationId xmlns:a16="http://schemas.microsoft.com/office/drawing/2014/main" id="{93ECAC4B-244A-427C-A2A2-B7F4770261AA}"/>
+                <a16:creationId xmlns:a16="http://schemas.microsoft.com/office/drawing/2014/main" id="{B729330C-D7A8-4EA0-BD3F-D78A74BE59F0}"/>
               </a:ext>
             </a:extLst>
           </p:cNvPr>
@@ -11232,7 +11232,7 @@
           <p:cNvPr id="13" name="TextBox 12">
             <a:extLst xmlns:a="http://schemas.openxmlformats.org/drawingml/2006/main">
               <a:ext uri="{FF2B5EF4-FFF2-40B4-BE49-F238E27FC236}">
-                <a16:creationId xmlns:a16="http://schemas.microsoft.com/office/drawing/2014/main" id="{669C9A28-CA56-4695-8E15-61EE8F14AE13}"/>
+                <a16:creationId xmlns:a16="http://schemas.microsoft.com/office/drawing/2014/main" id="{E62EE113-969D-407B-825C-3132CB3377D1}"/>
               </a:ext>
             </a:extLst>
           </p:cNvPr>
@@ -11279,7 +11279,7 @@
           <p:cNvPr id="14" name="Rounded Rectangle 13">
             <a:extLst xmlns:a="http://schemas.openxmlformats.org/drawingml/2006/main">
               <a:ext uri="{FF2B5EF4-FFF2-40B4-BE49-F238E27FC236}">
-                <a16:creationId xmlns:a16="http://schemas.microsoft.com/office/drawing/2014/main" id="{B6CED7F8-4DA9-423C-9A8E-2BC49DD62627}"/>
+                <a16:creationId xmlns:a16="http://schemas.microsoft.com/office/drawing/2014/main" id="{7BA74F93-D88D-41D7-A1B2-20F837A23EB0}"/>
               </a:ext>
             </a:extLst>
           </p:cNvPr>
@@ -11336,7 +11336,7 @@
           <p:cNvPr id="15" name="TextBox 14">
             <a:extLst xmlns:a="http://schemas.openxmlformats.org/drawingml/2006/main">
               <a:ext uri="{FF2B5EF4-FFF2-40B4-BE49-F238E27FC236}">
-                <a16:creationId xmlns:a16="http://schemas.microsoft.com/office/drawing/2014/main" id="{91048F51-C4A8-4693-9527-C65793D52110}"/>
+                <a16:creationId xmlns:a16="http://schemas.microsoft.com/office/drawing/2014/main" id="{BEB30840-9E14-4A8C-9176-F06010DB6B88}"/>
               </a:ext>
             </a:extLst>
           </p:cNvPr>
@@ -11383,7 +11383,7 @@
           <p:cNvPr id="16" name="TextBox 15">
             <a:extLst xmlns:a="http://schemas.openxmlformats.org/drawingml/2006/main">
               <a:ext uri="{FF2B5EF4-FFF2-40B4-BE49-F238E27FC236}">
-                <a16:creationId xmlns:a16="http://schemas.microsoft.com/office/drawing/2014/main" id="{08E40494-F98D-46D0-9F98-A939D0F0A523}"/>
+                <a16:creationId xmlns:a16="http://schemas.microsoft.com/office/drawing/2014/main" id="{B8485583-19A1-4D4C-9BAF-9C8FF8547246}"/>
               </a:ext>
             </a:extLst>
           </p:cNvPr>
@@ -11430,7 +11430,7 @@
           <p:cNvPr id="17" name="TextBox 16">
             <a:extLst xmlns:a="http://schemas.openxmlformats.org/drawingml/2006/main">
               <a:ext uri="{FF2B5EF4-FFF2-40B4-BE49-F238E27FC236}">
-                <a16:creationId xmlns:a16="http://schemas.microsoft.com/office/drawing/2014/main" id="{B300B04D-0D8A-4D3A-914A-E024B8E2C929}"/>
+                <a16:creationId xmlns:a16="http://schemas.microsoft.com/office/drawing/2014/main" id="{AD8C9A76-BB88-4F24-BD1E-BAA9E41BE018}"/>
               </a:ext>
             </a:extLst>
           </p:cNvPr>
@@ -11477,7 +11477,7 @@
           <p:cNvPr id="18" name="Rounded Rectangle 17">
             <a:extLst xmlns:a="http://schemas.openxmlformats.org/drawingml/2006/main">
               <a:ext uri="{FF2B5EF4-FFF2-40B4-BE49-F238E27FC236}">
-                <a16:creationId xmlns:a16="http://schemas.microsoft.com/office/drawing/2014/main" id="{25EFEEC6-49F5-4F16-A96D-211E49F7C87A}"/>
+                <a16:creationId xmlns:a16="http://schemas.microsoft.com/office/drawing/2014/main" id="{7BCC639B-BF51-4224-BDC9-D344A8110A7F}"/>
               </a:ext>
             </a:extLst>
           </p:cNvPr>
@@ -11534,7 +11534,7 @@
           <p:cNvPr id="19" name="TextBox 18">
             <a:extLst xmlns:a="http://schemas.openxmlformats.org/drawingml/2006/main">
               <a:ext uri="{FF2B5EF4-FFF2-40B4-BE49-F238E27FC236}">
-                <a16:creationId xmlns:a16="http://schemas.microsoft.com/office/drawing/2014/main" id="{2A6B2AC0-2F2B-42F9-B4BE-F827F6D629DF}"/>
+                <a16:creationId xmlns:a16="http://schemas.microsoft.com/office/drawing/2014/main" id="{2FC17345-52DF-4A4C-8C45-311FDA1F5FFD}"/>
               </a:ext>
             </a:extLst>
           </p:cNvPr>
@@ -11581,7 +11581,7 @@
           <p:cNvPr id="20" name="TextBox 19">
             <a:extLst xmlns:a="http://schemas.openxmlformats.org/drawingml/2006/main">
               <a:ext uri="{FF2B5EF4-FFF2-40B4-BE49-F238E27FC236}">
-                <a16:creationId xmlns:a16="http://schemas.microsoft.com/office/drawing/2014/main" id="{78F8908A-8423-4CE6-B28D-EB380A5CEDB1}"/>
+                <a16:creationId xmlns:a16="http://schemas.microsoft.com/office/drawing/2014/main" id="{1E62CAD9-0FCB-4528-BACE-89D9AA676C49}"/>
               </a:ext>
             </a:extLst>
           </p:cNvPr>
@@ -11626,7 +11626,7 @@
     </p:spTree>
     <p:extLst>
       <p:ext uri="{BB962C8B-B14F-4D97-AF65-F5344CB8AC3E}">
-        <p14:creationId xmlns:p14="http://schemas.microsoft.com/office/powerpoint/2010/main" val="2091767491"/>
+        <p14:creationId xmlns:p14="http://schemas.microsoft.com/office/powerpoint/2010/main" val="1519826926"/>
       </p:ext>
     </p:extLst>
   </p:cSld>
@@ -11650,7 +11650,7 @@
           <p:cNvPr id="2" name="TextBox 1">
             <a:extLst xmlns:a="http://schemas.openxmlformats.org/drawingml/2006/main">
               <a:ext uri="{FF2B5EF4-FFF2-40B4-BE49-F238E27FC236}">
-                <a16:creationId xmlns:a16="http://schemas.microsoft.com/office/drawing/2014/main" id="{F419ACCB-EF61-45C2-B45C-4885222CF581}"/>
+                <a16:creationId xmlns:a16="http://schemas.microsoft.com/office/drawing/2014/main" id="{8D65EAEF-A6F8-407C-A504-BA17FC0B5949}"/>
               </a:ext>
             </a:extLst>
           </p:cNvPr>
@@ -11697,7 +11697,7 @@
           <p:cNvPr id="3" name="TextBox 2">
             <a:extLst xmlns:a="http://schemas.openxmlformats.org/drawingml/2006/main">
               <a:ext uri="{FF2B5EF4-FFF2-40B4-BE49-F238E27FC236}">
-                <a16:creationId xmlns:a16="http://schemas.microsoft.com/office/drawing/2014/main" id="{4C1D878C-1088-4EEF-B357-A03A3836B3AF}"/>
+                <a16:creationId xmlns:a16="http://schemas.microsoft.com/office/drawing/2014/main" id="{5CC9A443-5AA4-47B1-84BC-787CCE65C8E5}"/>
               </a:ext>
             </a:extLst>
           </p:cNvPr>
@@ -11744,7 +11744,7 @@
           <p:cNvPr id="4" name="Rectangle 3">
             <a:extLst xmlns:a="http://schemas.openxmlformats.org/drawingml/2006/main">
               <a:ext uri="{FF2B5EF4-FFF2-40B4-BE49-F238E27FC236}">
-                <a16:creationId xmlns:a16="http://schemas.microsoft.com/office/drawing/2014/main" id="{7CC36072-EBF5-4605-AFBB-A7F6C000D97D}"/>
+                <a16:creationId xmlns:a16="http://schemas.microsoft.com/office/drawing/2014/main" id="{FD8E738D-4F77-4672-85B0-55B4A1B8090D}"/>
               </a:ext>
             </a:extLst>
           </p:cNvPr>
@@ -11799,7 +11799,7 @@
           <p:cNvPr id="5" name="Rectangle 4">
             <a:extLst xmlns:a="http://schemas.openxmlformats.org/drawingml/2006/main">
               <a:ext uri="{FF2B5EF4-FFF2-40B4-BE49-F238E27FC236}">
-                <a16:creationId xmlns:a16="http://schemas.microsoft.com/office/drawing/2014/main" id="{AF616CDD-3157-4E4E-A673-3AD15686B2E8}"/>
+                <a16:creationId xmlns:a16="http://schemas.microsoft.com/office/drawing/2014/main" id="{EC9CDACA-DC8F-4F9A-B1E2-9AD858DFAA50}"/>
               </a:ext>
             </a:extLst>
           </p:cNvPr>
@@ -11854,7 +11854,7 @@
           <p:cNvPr id="6" name="TextBox 5">
             <a:extLst xmlns:a="http://schemas.openxmlformats.org/drawingml/2006/main">
               <a:ext uri="{FF2B5EF4-FFF2-40B4-BE49-F238E27FC236}">
-                <a16:creationId xmlns:a16="http://schemas.microsoft.com/office/drawing/2014/main" id="{1489B7CE-0DF9-4CAD-B1FB-8040E90EAA8E}"/>
+                <a16:creationId xmlns:a16="http://schemas.microsoft.com/office/drawing/2014/main" id="{F78A6F79-77C7-4D8C-A976-7E15F118826A}"/>
               </a:ext>
             </a:extLst>
           </p:cNvPr>
@@ -11891,7 +11891,7 @@
                 <a:ea typeface="Aptos"/>
                 <a:cs typeface="Aptos"/>
               </a:rPr>
-              <a:t>Independent public evidence summary · 2026.07.22-9 · 2026-07-22 · Sources: WIPO licensing; WIPO IP Finance</a:t>
+              <a:t>Independent public evidence summary · 2026.07.23-10 · 2026-07-22 · Sources: WIPO licensing; WIPO IP Finance</a:t>
             </a:r>
           </a:p>
         </p:txBody>
@@ -11901,7 +11901,7 @@
           <p:cNvPr id="7" name="TextBox 6">
             <a:extLst xmlns:a="http://schemas.openxmlformats.org/drawingml/2006/main">
               <a:ext uri="{FF2B5EF4-FFF2-40B4-BE49-F238E27FC236}">
-                <a16:creationId xmlns:a16="http://schemas.microsoft.com/office/drawing/2014/main" id="{E15EBB6D-728E-4545-A3F6-7E34E030C5E8}"/>
+                <a16:creationId xmlns:a16="http://schemas.microsoft.com/office/drawing/2014/main" id="{C41B1EED-C567-4FD9-9668-92FD553E1AB1}"/>
               </a:ext>
             </a:extLst>
           </p:cNvPr>
@@ -11948,7 +11948,7 @@
           <p:cNvPr id="8" name="TextBox 7">
             <a:extLst xmlns:a="http://schemas.openxmlformats.org/drawingml/2006/main">
               <a:ext uri="{FF2B5EF4-FFF2-40B4-BE49-F238E27FC236}">
-                <a16:creationId xmlns:a16="http://schemas.microsoft.com/office/drawing/2014/main" id="{0F1927D9-C39C-4D6B-B686-02BFE999D2BE}"/>
+                <a16:creationId xmlns:a16="http://schemas.microsoft.com/office/drawing/2014/main" id="{69F897BC-7E92-4614-8824-7FA6C4618BDF}"/>
               </a:ext>
             </a:extLst>
           </p:cNvPr>
@@ -11995,7 +11995,7 @@
           <p:cNvPr id="9" name="TextBox 8">
             <a:extLst xmlns:a="http://schemas.openxmlformats.org/drawingml/2006/main">
               <a:ext uri="{FF2B5EF4-FFF2-40B4-BE49-F238E27FC236}">
-                <a16:creationId xmlns:a16="http://schemas.microsoft.com/office/drawing/2014/main" id="{EEFF9788-8605-456D-B49C-16A262C9A83F}"/>
+                <a16:creationId xmlns:a16="http://schemas.microsoft.com/office/drawing/2014/main" id="{43E1FE68-6CB5-4762-B818-9B45FBA13635}"/>
               </a:ext>
             </a:extLst>
           </p:cNvPr>
@@ -12092,7 +12092,7 @@
           <p:cNvPr id="10" name="Rounded Rectangle 9">
             <a:extLst xmlns:a="http://schemas.openxmlformats.org/drawingml/2006/main">
               <a:ext uri="{FF2B5EF4-FFF2-40B4-BE49-F238E27FC236}">
-                <a16:creationId xmlns:a16="http://schemas.microsoft.com/office/drawing/2014/main" id="{F2270BF7-0A5D-4628-B55C-F2788787DE5C}"/>
+                <a16:creationId xmlns:a16="http://schemas.microsoft.com/office/drawing/2014/main" id="{B6BCF434-04F0-45A9-B4E8-272FCCE5A76C}"/>
               </a:ext>
             </a:extLst>
           </p:cNvPr>
@@ -12149,7 +12149,7 @@
           <p:cNvPr id="11" name="TextBox 10">
             <a:extLst xmlns:a="http://schemas.openxmlformats.org/drawingml/2006/main">
               <a:ext uri="{FF2B5EF4-FFF2-40B4-BE49-F238E27FC236}">
-                <a16:creationId xmlns:a16="http://schemas.microsoft.com/office/drawing/2014/main" id="{322CAF19-5C90-40C2-8746-0C54926CD0AC}"/>
+                <a16:creationId xmlns:a16="http://schemas.microsoft.com/office/drawing/2014/main" id="{BDF1939F-32EB-433A-9CB5-E21CF1AF484D}"/>
               </a:ext>
             </a:extLst>
           </p:cNvPr>
@@ -12196,7 +12196,7 @@
           <p:cNvPr id="12" name="TextBox 11">
             <a:extLst xmlns:a="http://schemas.openxmlformats.org/drawingml/2006/main">
               <a:ext uri="{FF2B5EF4-FFF2-40B4-BE49-F238E27FC236}">
-                <a16:creationId xmlns:a16="http://schemas.microsoft.com/office/drawing/2014/main" id="{C42D156A-6742-4B0D-A966-1B4378DD6D64}"/>
+                <a16:creationId xmlns:a16="http://schemas.microsoft.com/office/drawing/2014/main" id="{4A77A1D1-D0AF-420E-A6AE-AEFD2090D2E4}"/>
               </a:ext>
             </a:extLst>
           </p:cNvPr>
@@ -12241,7 +12241,7 @@
     </p:spTree>
     <p:extLst>
       <p:ext uri="{BB962C8B-B14F-4D97-AF65-F5344CB8AC3E}">
-        <p14:creationId xmlns:p14="http://schemas.microsoft.com/office/powerpoint/2010/main" val="1456163167"/>
+        <p14:creationId xmlns:p14="http://schemas.microsoft.com/office/powerpoint/2010/main" val="1891481567"/>
       </p:ext>
     </p:extLst>
   </p:cSld>
@@ -12265,7 +12265,7 @@
           <p:cNvPr id="2" name="TextBox 1">
             <a:extLst xmlns:a="http://schemas.openxmlformats.org/drawingml/2006/main">
               <a:ext uri="{FF2B5EF4-FFF2-40B4-BE49-F238E27FC236}">
-                <a16:creationId xmlns:a16="http://schemas.microsoft.com/office/drawing/2014/main" id="{35838485-BA9B-4BFE-9820-FF04DCDE2388}"/>
+                <a16:creationId xmlns:a16="http://schemas.microsoft.com/office/drawing/2014/main" id="{7FFB4F40-13A2-44FC-9050-A94A98C7773C}"/>
               </a:ext>
             </a:extLst>
           </p:cNvPr>
@@ -12312,7 +12312,7 @@
           <p:cNvPr id="3" name="TextBox 2">
             <a:extLst xmlns:a="http://schemas.openxmlformats.org/drawingml/2006/main">
               <a:ext uri="{FF2B5EF4-FFF2-40B4-BE49-F238E27FC236}">
-                <a16:creationId xmlns:a16="http://schemas.microsoft.com/office/drawing/2014/main" id="{C96FC13A-77DB-4D5B-967F-6C8E9B16F951}"/>
+                <a16:creationId xmlns:a16="http://schemas.microsoft.com/office/drawing/2014/main" id="{4DC83234-5AFB-4066-A79A-37B3B826B643}"/>
               </a:ext>
             </a:extLst>
           </p:cNvPr>
@@ -12359,7 +12359,7 @@
           <p:cNvPr id="4" name="Rectangle 3">
             <a:extLst xmlns:a="http://schemas.openxmlformats.org/drawingml/2006/main">
               <a:ext uri="{FF2B5EF4-FFF2-40B4-BE49-F238E27FC236}">
-                <a16:creationId xmlns:a16="http://schemas.microsoft.com/office/drawing/2014/main" id="{98A7D335-E36E-450A-B49F-C254719B782B}"/>
+                <a16:creationId xmlns:a16="http://schemas.microsoft.com/office/drawing/2014/main" id="{0EB47BB9-5DB5-49B8-84F3-B60D913218F4}"/>
               </a:ext>
             </a:extLst>
           </p:cNvPr>
@@ -12414,7 +12414,7 @@
           <p:cNvPr id="5" name="Rectangle 4">
             <a:extLst xmlns:a="http://schemas.openxmlformats.org/drawingml/2006/main">
               <a:ext uri="{FF2B5EF4-FFF2-40B4-BE49-F238E27FC236}">
-                <a16:creationId xmlns:a16="http://schemas.microsoft.com/office/drawing/2014/main" id="{09E38D97-0C53-40E7-AE98-2B9106AC20CB}"/>
+                <a16:creationId xmlns:a16="http://schemas.microsoft.com/office/drawing/2014/main" id="{7983DEA1-BD92-4B48-ACFF-288F8D6523FB}"/>
               </a:ext>
             </a:extLst>
           </p:cNvPr>
@@ -12469,7 +12469,7 @@
           <p:cNvPr id="6" name="TextBox 5">
             <a:extLst xmlns:a="http://schemas.openxmlformats.org/drawingml/2006/main">
               <a:ext uri="{FF2B5EF4-FFF2-40B4-BE49-F238E27FC236}">
-                <a16:creationId xmlns:a16="http://schemas.microsoft.com/office/drawing/2014/main" id="{AF545ABC-5580-4E21-9E69-CE639697D5B3}"/>
+                <a16:creationId xmlns:a16="http://schemas.microsoft.com/office/drawing/2014/main" id="{DA514F6E-134F-402C-8DC8-E58EFD9C8371}"/>
               </a:ext>
             </a:extLst>
           </p:cNvPr>
@@ -12506,7 +12506,7 @@
                 <a:ea typeface="Aptos"/>
                 <a:cs typeface="Aptos"/>
               </a:rPr>
-              <a:t>Independent public evidence summary · 2026.07.22-9 · 2026-07-22 · Sources: Evidence Register; EPO; WIPO</a:t>
+              <a:t>Independent public evidence summary · 2026.07.23-10 · 2026-07-22 · Sources: Evidence Register; EPO; WIPO</a:t>
             </a:r>
           </a:p>
         </p:txBody>
@@ -12516,7 +12516,7 @@
           <p:cNvPr id="7" name="TextBox 6">
             <a:extLst xmlns:a="http://schemas.openxmlformats.org/drawingml/2006/main">
               <a:ext uri="{FF2B5EF4-FFF2-40B4-BE49-F238E27FC236}">
-                <a16:creationId xmlns:a16="http://schemas.microsoft.com/office/drawing/2014/main" id="{EEBC5121-71EB-40DF-A519-A51F7F87D4BF}"/>
+                <a16:creationId xmlns:a16="http://schemas.microsoft.com/office/drawing/2014/main" id="{BC45C712-AC73-49CB-8F96-623FFB668771}"/>
               </a:ext>
             </a:extLst>
           </p:cNvPr>
@@ -13003,7 +13003,7 @@
           <p:cNvPr id="9" name="TextBox 8">
             <a:extLst xmlns:a="http://schemas.openxmlformats.org/drawingml/2006/main">
               <a:ext uri="{FF2B5EF4-FFF2-40B4-BE49-F238E27FC236}">
-                <a16:creationId xmlns:a16="http://schemas.microsoft.com/office/drawing/2014/main" id="{65207E0B-AD5A-4A0E-AF4B-DF1DBBAE3D79}"/>
+                <a16:creationId xmlns:a16="http://schemas.microsoft.com/office/drawing/2014/main" id="{A64ACA7F-D9D7-42A8-9B47-0BD874D576B4}"/>
               </a:ext>
             </a:extLst>
           </p:cNvPr>
@@ -13048,7 +13048,7 @@
     </p:spTree>
     <p:extLst>
       <p:ext uri="{BB962C8B-B14F-4D97-AF65-F5344CB8AC3E}">
-        <p14:creationId xmlns:p14="http://schemas.microsoft.com/office/powerpoint/2010/main" val="1504271334"/>
+        <p14:creationId xmlns:p14="http://schemas.microsoft.com/office/powerpoint/2010/main" val="846039600"/>
       </p:ext>
     </p:extLst>
   </p:cSld>
@@ -13072,7 +13072,7 @@
           <p:cNvPr id="2" name="TextBox 1">
             <a:extLst xmlns:a="http://schemas.openxmlformats.org/drawingml/2006/main">
               <a:ext uri="{FF2B5EF4-FFF2-40B4-BE49-F238E27FC236}">
-                <a16:creationId xmlns:a16="http://schemas.microsoft.com/office/drawing/2014/main" id="{68707A51-AC8B-4565-B148-F320A886366E}"/>
+                <a16:creationId xmlns:a16="http://schemas.microsoft.com/office/drawing/2014/main" id="{0E6A03A2-13E2-4BCB-AF32-6BAB4EEA8BCC}"/>
               </a:ext>
             </a:extLst>
           </p:cNvPr>
@@ -13119,7 +13119,7 @@
           <p:cNvPr id="3" name="TextBox 2">
             <a:extLst xmlns:a="http://schemas.openxmlformats.org/drawingml/2006/main">
               <a:ext uri="{FF2B5EF4-FFF2-40B4-BE49-F238E27FC236}">
-                <a16:creationId xmlns:a16="http://schemas.microsoft.com/office/drawing/2014/main" id="{AA7523EA-6CB5-4E03-9E82-9B61F1C9CB3E}"/>
+                <a16:creationId xmlns:a16="http://schemas.microsoft.com/office/drawing/2014/main" id="{BC85A523-9B65-4F82-B6F1-9FF5DBE8B493}"/>
               </a:ext>
             </a:extLst>
           </p:cNvPr>
@@ -13166,7 +13166,7 @@
           <p:cNvPr id="4" name="Rectangle 3">
             <a:extLst xmlns:a="http://schemas.openxmlformats.org/drawingml/2006/main">
               <a:ext uri="{FF2B5EF4-FFF2-40B4-BE49-F238E27FC236}">
-                <a16:creationId xmlns:a16="http://schemas.microsoft.com/office/drawing/2014/main" id="{A75521A9-D575-4948-A945-CF49FC0B4837}"/>
+                <a16:creationId xmlns:a16="http://schemas.microsoft.com/office/drawing/2014/main" id="{B94693CB-F4EC-4A73-993A-523A5B5012C7}"/>
               </a:ext>
             </a:extLst>
           </p:cNvPr>
@@ -13221,7 +13221,7 @@
           <p:cNvPr id="5" name="Rectangle 4">
             <a:extLst xmlns:a="http://schemas.openxmlformats.org/drawingml/2006/main">
               <a:ext uri="{FF2B5EF4-FFF2-40B4-BE49-F238E27FC236}">
-                <a16:creationId xmlns:a16="http://schemas.microsoft.com/office/drawing/2014/main" id="{8CA6D8FE-103D-463F-A0F2-C1645EB3E3FC}"/>
+                <a16:creationId xmlns:a16="http://schemas.microsoft.com/office/drawing/2014/main" id="{AF54C567-24C1-4578-8DBE-104FCFB012A4}"/>
               </a:ext>
             </a:extLst>
           </p:cNvPr>
@@ -13276,7 +13276,7 @@
           <p:cNvPr id="6" name="TextBox 5">
             <a:extLst xmlns:a="http://schemas.openxmlformats.org/drawingml/2006/main">
               <a:ext uri="{FF2B5EF4-FFF2-40B4-BE49-F238E27FC236}">
-                <a16:creationId xmlns:a16="http://schemas.microsoft.com/office/drawing/2014/main" id="{7C0C99BE-AC89-4EC4-A4FC-69DE3B616A29}"/>
+                <a16:creationId xmlns:a16="http://schemas.microsoft.com/office/drawing/2014/main" id="{BFC1FB61-0C74-4872-A15D-A5260F370126}"/>
               </a:ext>
             </a:extLst>
           </p:cNvPr>
@@ -13313,7 +13313,7 @@
                 <a:ea typeface="Aptos"/>
                 <a:cs typeface="Aptos"/>
               </a:rPr>
-              <a:t>Independent public evidence summary · 2026.07.22-9 · 2026-07-22 · Sources: Evidence Register</a:t>
+              <a:t>Independent public evidence summary · 2026.07.23-10 · 2026-07-22 · Sources: Evidence Register</a:t>
             </a:r>
           </a:p>
         </p:txBody>
@@ -13323,7 +13323,7 @@
           <p:cNvPr id="7" name="TextBox 6">
             <a:extLst xmlns:a="http://schemas.openxmlformats.org/drawingml/2006/main">
               <a:ext uri="{FF2B5EF4-FFF2-40B4-BE49-F238E27FC236}">
-                <a16:creationId xmlns:a16="http://schemas.microsoft.com/office/drawing/2014/main" id="{F72FF125-E6A8-43CD-A5E3-0C6C8B61BEAA}"/>
+                <a16:creationId xmlns:a16="http://schemas.microsoft.com/office/drawing/2014/main" id="{08FB5066-5E5F-441E-8040-0B89F8CF7D7C}"/>
               </a:ext>
             </a:extLst>
           </p:cNvPr>
@@ -14056,7 +14056,7 @@
           <p:cNvPr id="9" name="TextBox 8">
             <a:extLst xmlns:a="http://schemas.openxmlformats.org/drawingml/2006/main">
               <a:ext uri="{FF2B5EF4-FFF2-40B4-BE49-F238E27FC236}">
-                <a16:creationId xmlns:a16="http://schemas.microsoft.com/office/drawing/2014/main" id="{7676C966-82C7-4C46-98B5-F4747ADE95DC}"/>
+                <a16:creationId xmlns:a16="http://schemas.microsoft.com/office/drawing/2014/main" id="{299F3F8A-EB95-49A7-8867-3BC1632D5C71}"/>
               </a:ext>
             </a:extLst>
           </p:cNvPr>
@@ -14101,7 +14101,7 @@
     </p:spTree>
     <p:extLst>
       <p:ext uri="{BB962C8B-B14F-4D97-AF65-F5344CB8AC3E}">
-        <p14:creationId xmlns:p14="http://schemas.microsoft.com/office/powerpoint/2010/main" val="1335032449"/>
+        <p14:creationId xmlns:p14="http://schemas.microsoft.com/office/powerpoint/2010/main" val="701863637"/>
       </p:ext>
     </p:extLst>
   </p:cSld>

--- a/site/downloads/pixan-bank-deck-medium-en.pptx
+++ b/site/downloads/pixan-bank-deck-medium-en.pptx
@@ -2,24 +2,24 @@
 <file path=ppt/presentation.xml><?xml version="1.0" encoding="utf-8"?>
 <p:presentation xmlns:p="http://schemas.openxmlformats.org/presentationml/2006/main">
   <p:sldMasterIdLst>
-    <p:sldMasterId xmlns:r="http://schemas.openxmlformats.org/officeDocument/2006/relationships" id="2147483648" r:id="R56590a6f56894f96"/>
+    <p:sldMasterId xmlns:r="http://schemas.openxmlformats.org/officeDocument/2006/relationships" id="2147483648" r:id="R170ea3ef70684201"/>
   </p:sldMasterIdLst>
   <p:notesMasterIdLst>
-    <p:notesMasterId xmlns:r="http://schemas.openxmlformats.org/officeDocument/2006/relationships" r:id="R96589331129a425f"/>
+    <p:notesMasterId xmlns:r="http://schemas.openxmlformats.org/officeDocument/2006/relationships" r:id="Rcbde520b7dbf41f6"/>
   </p:notesMasterIdLst>
   <p:sldIdLst>
-    <p:sldId xmlns:r="http://schemas.openxmlformats.org/officeDocument/2006/relationships" id="256" r:id="Rddd4a143d55c451d"/>
-    <p:sldId xmlns:r="http://schemas.openxmlformats.org/officeDocument/2006/relationships" id="257" r:id="R1f08c9a1ed1d42b1"/>
-    <p:sldId xmlns:r="http://schemas.openxmlformats.org/officeDocument/2006/relationships" id="258" r:id="Rb26b8126951b4846"/>
-    <p:sldId xmlns:r="http://schemas.openxmlformats.org/officeDocument/2006/relationships" id="259" r:id="Rf3618fcdbd4a439e"/>
-    <p:sldId xmlns:r="http://schemas.openxmlformats.org/officeDocument/2006/relationships" id="260" r:id="R46e46374e9c6437c"/>
-    <p:sldId xmlns:r="http://schemas.openxmlformats.org/officeDocument/2006/relationships" id="261" r:id="Rfca1e33fd38c4308"/>
-    <p:sldId xmlns:r="http://schemas.openxmlformats.org/officeDocument/2006/relationships" id="262" r:id="Rab290f85329f44c7"/>
-    <p:sldId xmlns:r="http://schemas.openxmlformats.org/officeDocument/2006/relationships" id="263" r:id="Rbe5117bbeb174f5c"/>
-    <p:sldId xmlns:r="http://schemas.openxmlformats.org/officeDocument/2006/relationships" id="264" r:id="Rcffaefbe9b3f4b33"/>
-    <p:sldId xmlns:r="http://schemas.openxmlformats.org/officeDocument/2006/relationships" id="265" r:id="Rd6af4678847c480c"/>
-    <p:sldId xmlns:r="http://schemas.openxmlformats.org/officeDocument/2006/relationships" id="266" r:id="R30a042643e234adf"/>
-    <p:sldId xmlns:r="http://schemas.openxmlformats.org/officeDocument/2006/relationships" id="267" r:id="R0df5c6582559446a"/>
+    <p:sldId xmlns:r="http://schemas.openxmlformats.org/officeDocument/2006/relationships" id="256" r:id="Rd27d8e1fa45f413d"/>
+    <p:sldId xmlns:r="http://schemas.openxmlformats.org/officeDocument/2006/relationships" id="257" r:id="Re4511d65aeea4b31"/>
+    <p:sldId xmlns:r="http://schemas.openxmlformats.org/officeDocument/2006/relationships" id="258" r:id="Ra0fb34e1034c46a1"/>
+    <p:sldId xmlns:r="http://schemas.openxmlformats.org/officeDocument/2006/relationships" id="259" r:id="R747d7aa8feef4702"/>
+    <p:sldId xmlns:r="http://schemas.openxmlformats.org/officeDocument/2006/relationships" id="260" r:id="R78747f5de97a4899"/>
+    <p:sldId xmlns:r="http://schemas.openxmlformats.org/officeDocument/2006/relationships" id="261" r:id="Ref76cfd06afa4beb"/>
+    <p:sldId xmlns:r="http://schemas.openxmlformats.org/officeDocument/2006/relationships" id="262" r:id="R7c3a3613304b4412"/>
+    <p:sldId xmlns:r="http://schemas.openxmlformats.org/officeDocument/2006/relationships" id="263" r:id="R0a51a747e12845ac"/>
+    <p:sldId xmlns:r="http://schemas.openxmlformats.org/officeDocument/2006/relationships" id="264" r:id="Ra7df97079dd94334"/>
+    <p:sldId xmlns:r="http://schemas.openxmlformats.org/officeDocument/2006/relationships" id="265" r:id="R701cbe5626e14245"/>
+    <p:sldId xmlns:r="http://schemas.openxmlformats.org/officeDocument/2006/relationships" id="266" r:id="R1137636998544cdd"/>
+    <p:sldId xmlns:r="http://schemas.openxmlformats.org/officeDocument/2006/relationships" id="267" r:id="R217c440fe5464433"/>
   </p:sldIdLst>
   <p:sldSz cx="12191999" cy="6858000"/>
   <p:notesSz cx="6858000" cy="9144000"/>
@@ -1340,7 +1340,7 @@
           <p:cNvPr id="2" name="Title 1">
             <a:extLst xmlns:a="http://schemas.openxmlformats.org/drawingml/2006/main">
               <a:ext uri="{FF2B5EF4-FFF2-40B4-BE49-F238E27FC236}">
-                <a16:creationId xmlns:a16="http://schemas.microsoft.com/office/drawing/2014/main" id="{FB5A9052-1296-463F-9B9C-CAE2E10FD004}"/>
+                <a16:creationId xmlns:a16="http://schemas.microsoft.com/office/drawing/2014/main" id="{776263AD-E3B4-46D7-877A-982F3B88319C}"/>
               </a:ext>
             </a:extLst>
           </p:cNvPr>
@@ -1372,7 +1372,7 @@
           <p:cNvPr id="3" name="Subtitle 2">
             <a:extLst xmlns:a="http://schemas.openxmlformats.org/drawingml/2006/main">
               <a:ext uri="{FF2B5EF4-FFF2-40B4-BE49-F238E27FC236}">
-                <a16:creationId xmlns:a16="http://schemas.microsoft.com/office/drawing/2014/main" id="{683E8531-802B-4066-8E38-F308FEA1D6DF}"/>
+                <a16:creationId xmlns:a16="http://schemas.microsoft.com/office/drawing/2014/main" id="{FACC7FBF-4DE3-41D6-B8FD-E1B81E795BCA}"/>
               </a:ext>
             </a:extLst>
           </p:cNvPr>
@@ -1495,7 +1495,7 @@
           <p:cNvPr id="4" name="Date Placeholder 3">
             <a:extLst xmlns:a="http://schemas.openxmlformats.org/drawingml/2006/main">
               <a:ext uri="{FF2B5EF4-FFF2-40B4-BE49-F238E27FC236}">
-                <a16:creationId xmlns:a16="http://schemas.microsoft.com/office/drawing/2014/main" id="{9A6C74CC-4785-4016-A75B-46542A742A55}"/>
+                <a16:creationId xmlns:a16="http://schemas.microsoft.com/office/drawing/2014/main" id="{8BE6738D-CA81-4F57-9AFE-C2B7D7AB4873}"/>
               </a:ext>
             </a:extLst>
           </p:cNvPr>
@@ -1522,7 +1522,7 @@
           <p:cNvPr id="5" name="Footer Placeholder 4">
             <a:extLst xmlns:a="http://schemas.openxmlformats.org/drawingml/2006/main">
               <a:ext uri="{FF2B5EF4-FFF2-40B4-BE49-F238E27FC236}">
-                <a16:creationId xmlns:a16="http://schemas.microsoft.com/office/drawing/2014/main" id="{80D8B97C-2B30-459A-98F1-B935FFB144CA}"/>
+                <a16:creationId xmlns:a16="http://schemas.microsoft.com/office/drawing/2014/main" id="{99DF5AC3-F31B-4FCC-8F1C-D30D7A1DD4ED}"/>
               </a:ext>
             </a:extLst>
           </p:cNvPr>
@@ -1545,7 +1545,7 @@
           <p:cNvPr id="6" name="Slide Number Placeholder 5">
             <a:extLst xmlns:a="http://schemas.openxmlformats.org/drawingml/2006/main">
               <a:ext uri="{FF2B5EF4-FFF2-40B4-BE49-F238E27FC236}">
-                <a16:creationId xmlns:a16="http://schemas.microsoft.com/office/drawing/2014/main" id="{08A15436-00CD-4389-951A-837344B69362}"/>
+                <a16:creationId xmlns:a16="http://schemas.microsoft.com/office/drawing/2014/main" id="{2809C113-4725-4129-8244-3C4A216556D1}"/>
               </a:ext>
             </a:extLst>
           </p:cNvPr>
@@ -1589,7 +1589,7 @@
           <p:cNvPr id="2" name="Title 1">
             <a:extLst xmlns:a="http://schemas.openxmlformats.org/drawingml/2006/main">
               <a:ext uri="{FF2B5EF4-FFF2-40B4-BE49-F238E27FC236}">
-                <a16:creationId xmlns:a16="http://schemas.microsoft.com/office/drawing/2014/main" id="{E093D239-7B42-4AD4-A082-BECF285B009E}"/>
+                <a16:creationId xmlns:a16="http://schemas.microsoft.com/office/drawing/2014/main" id="{26D9DA22-1BDE-403C-A126-C6EC16223695}"/>
               </a:ext>
             </a:extLst>
           </p:cNvPr>
@@ -1616,7 +1616,7 @@
           <p:cNvPr id="3" name="Vertical Text Placeholder 2">
             <a:extLst xmlns:a="http://schemas.openxmlformats.org/drawingml/2006/main">
               <a:ext uri="{FF2B5EF4-FFF2-40B4-BE49-F238E27FC236}">
-                <a16:creationId xmlns:a16="http://schemas.microsoft.com/office/drawing/2014/main" id="{F28F54FD-A585-4B92-A999-655F464CAC18}"/>
+                <a16:creationId xmlns:a16="http://schemas.microsoft.com/office/drawing/2014/main" id="{D04ADDBF-30AF-468E-9B13-071F7A560305}"/>
               </a:ext>
             </a:extLst>
           </p:cNvPr>
@@ -1678,7 +1678,7 @@
           <p:cNvPr id="4" name="Date Placeholder 3">
             <a:extLst xmlns:a="http://schemas.openxmlformats.org/drawingml/2006/main">
               <a:ext uri="{FF2B5EF4-FFF2-40B4-BE49-F238E27FC236}">
-                <a16:creationId xmlns:a16="http://schemas.microsoft.com/office/drawing/2014/main" id="{C53ABBEB-4C6A-4205-B9F1-9FDF935583B5}"/>
+                <a16:creationId xmlns:a16="http://schemas.microsoft.com/office/drawing/2014/main" id="{7B8A8DD3-627C-41D2-B0D6-1E6E8068C69D}"/>
               </a:ext>
             </a:extLst>
           </p:cNvPr>
@@ -1705,7 +1705,7 @@
           <p:cNvPr id="5" name="Footer Placeholder 4">
             <a:extLst xmlns:a="http://schemas.openxmlformats.org/drawingml/2006/main">
               <a:ext uri="{FF2B5EF4-FFF2-40B4-BE49-F238E27FC236}">
-                <a16:creationId xmlns:a16="http://schemas.microsoft.com/office/drawing/2014/main" id="{C6694F3C-ED69-4EEE-91BB-2A62EDD82064}"/>
+                <a16:creationId xmlns:a16="http://schemas.microsoft.com/office/drawing/2014/main" id="{7D12219D-43E6-4004-B8B2-E8D14CC5769B}"/>
               </a:ext>
             </a:extLst>
           </p:cNvPr>
@@ -1728,7 +1728,7 @@
           <p:cNvPr id="6" name="Slide Number Placeholder 5">
             <a:extLst xmlns:a="http://schemas.openxmlformats.org/drawingml/2006/main">
               <a:ext uri="{FF2B5EF4-FFF2-40B4-BE49-F238E27FC236}">
-                <a16:creationId xmlns:a16="http://schemas.microsoft.com/office/drawing/2014/main" id="{513107E2-E271-4C2B-8DBB-64B0E1BB7593}"/>
+                <a16:creationId xmlns:a16="http://schemas.microsoft.com/office/drawing/2014/main" id="{F7139771-A56C-46D7-BC0C-E96AE4CF850B}"/>
               </a:ext>
             </a:extLst>
           </p:cNvPr>
@@ -1772,7 +1772,7 @@
           <p:cNvPr id="2" name="Vertical Title 1">
             <a:extLst xmlns:a="http://schemas.openxmlformats.org/drawingml/2006/main">
               <a:ext uri="{FF2B5EF4-FFF2-40B4-BE49-F238E27FC236}">
-                <a16:creationId xmlns:a16="http://schemas.microsoft.com/office/drawing/2014/main" id="{AD4ED9C9-67EE-4035-8A86-F17CB99B7CA7}"/>
+                <a16:creationId xmlns:a16="http://schemas.microsoft.com/office/drawing/2014/main" id="{FD285871-973B-449B-9AD9-2522A1479F8E}"/>
               </a:ext>
             </a:extLst>
           </p:cNvPr>
@@ -1804,7 +1804,7 @@
           <p:cNvPr id="3" name="Vertical Text Placeholder 2">
             <a:extLst xmlns:a="http://schemas.openxmlformats.org/drawingml/2006/main">
               <a:ext uri="{FF2B5EF4-FFF2-40B4-BE49-F238E27FC236}">
-                <a16:creationId xmlns:a16="http://schemas.microsoft.com/office/drawing/2014/main" id="{81BB09EC-4FC5-40A3-9535-9C4DD3DCBDFE}"/>
+                <a16:creationId xmlns:a16="http://schemas.microsoft.com/office/drawing/2014/main" id="{E4223D60-A42E-4F74-B705-02435E097779}"/>
               </a:ext>
             </a:extLst>
           </p:cNvPr>
@@ -1871,7 +1871,7 @@
           <p:cNvPr id="4" name="Date Placeholder 3">
             <a:extLst xmlns:a="http://schemas.openxmlformats.org/drawingml/2006/main">
               <a:ext uri="{FF2B5EF4-FFF2-40B4-BE49-F238E27FC236}">
-                <a16:creationId xmlns:a16="http://schemas.microsoft.com/office/drawing/2014/main" id="{4C502415-B3F4-488C-A8FC-A6CE6988636A}"/>
+                <a16:creationId xmlns:a16="http://schemas.microsoft.com/office/drawing/2014/main" id="{781E0CBA-84A2-4796-BFFF-34DB05228A37}"/>
               </a:ext>
             </a:extLst>
           </p:cNvPr>
@@ -1898,7 +1898,7 @@
           <p:cNvPr id="5" name="Footer Placeholder 4">
             <a:extLst xmlns:a="http://schemas.openxmlformats.org/drawingml/2006/main">
               <a:ext uri="{FF2B5EF4-FFF2-40B4-BE49-F238E27FC236}">
-                <a16:creationId xmlns:a16="http://schemas.microsoft.com/office/drawing/2014/main" id="{3E5395ED-F908-4247-B26B-B695E775E046}"/>
+                <a16:creationId xmlns:a16="http://schemas.microsoft.com/office/drawing/2014/main" id="{C81466AD-267B-40BF-A5D9-326CF140946F}"/>
               </a:ext>
             </a:extLst>
           </p:cNvPr>
@@ -1921,7 +1921,7 @@
           <p:cNvPr id="6" name="Slide Number Placeholder 5">
             <a:extLst xmlns:a="http://schemas.openxmlformats.org/drawingml/2006/main">
               <a:ext uri="{FF2B5EF4-FFF2-40B4-BE49-F238E27FC236}">
-                <a16:creationId xmlns:a16="http://schemas.microsoft.com/office/drawing/2014/main" id="{2862AB2A-BED8-4A55-BA0D-DA39CB845EFA}"/>
+                <a16:creationId xmlns:a16="http://schemas.microsoft.com/office/drawing/2014/main" id="{BDD7B6D8-DCD6-4E36-837B-2CFD15D57278}"/>
               </a:ext>
             </a:extLst>
           </p:cNvPr>
@@ -1965,7 +1965,7 @@
           <p:cNvPr id="2" name="Title 1">
             <a:extLst xmlns:a="http://schemas.openxmlformats.org/drawingml/2006/main">
               <a:ext uri="{FF2B5EF4-FFF2-40B4-BE49-F238E27FC236}">
-                <a16:creationId xmlns:a16="http://schemas.microsoft.com/office/drawing/2014/main" id="{D64E65B1-76AF-4CBA-9E0E-7DD2C70554F2}"/>
+                <a16:creationId xmlns:a16="http://schemas.microsoft.com/office/drawing/2014/main" id="{A609C5F2-66C6-411C-91F2-B41A52AB82FC}"/>
               </a:ext>
             </a:extLst>
           </p:cNvPr>
@@ -1992,7 +1992,7 @@
           <p:cNvPr id="3" name="Content Placeholder 2">
             <a:extLst xmlns:a="http://schemas.openxmlformats.org/drawingml/2006/main">
               <a:ext uri="{FF2B5EF4-FFF2-40B4-BE49-F238E27FC236}">
-                <a16:creationId xmlns:a16="http://schemas.microsoft.com/office/drawing/2014/main" id="{C3A65829-ED9D-4AE9-8CE2-95BB49902D56}"/>
+                <a16:creationId xmlns:a16="http://schemas.microsoft.com/office/drawing/2014/main" id="{7EA4DF16-EFD6-4C8F-8061-6BDBCAC6C80B}"/>
               </a:ext>
             </a:extLst>
           </p:cNvPr>
@@ -2054,7 +2054,7 @@
           <p:cNvPr id="4" name="Date Placeholder 3">
             <a:extLst xmlns:a="http://schemas.openxmlformats.org/drawingml/2006/main">
               <a:ext uri="{FF2B5EF4-FFF2-40B4-BE49-F238E27FC236}">
-                <a16:creationId xmlns:a16="http://schemas.microsoft.com/office/drawing/2014/main" id="{DE47E1AA-FFF2-4403-841C-CF04750C78E2}"/>
+                <a16:creationId xmlns:a16="http://schemas.microsoft.com/office/drawing/2014/main" id="{3809749E-6D1B-41E7-BEBA-2AD88FD50615}"/>
               </a:ext>
             </a:extLst>
           </p:cNvPr>
@@ -2081,7 +2081,7 @@
           <p:cNvPr id="5" name="Footer Placeholder 4">
             <a:extLst xmlns:a="http://schemas.openxmlformats.org/drawingml/2006/main">
               <a:ext uri="{FF2B5EF4-FFF2-40B4-BE49-F238E27FC236}">
-                <a16:creationId xmlns:a16="http://schemas.microsoft.com/office/drawing/2014/main" id="{F77EA4CE-DEDD-4C34-8F77-25749331DCA8}"/>
+                <a16:creationId xmlns:a16="http://schemas.microsoft.com/office/drawing/2014/main" id="{CB28EEAE-0D0F-4CE7-8187-B7BA8A63421B}"/>
               </a:ext>
             </a:extLst>
           </p:cNvPr>
@@ -2104,7 +2104,7 @@
           <p:cNvPr id="6" name="Slide Number Placeholder 5">
             <a:extLst xmlns:a="http://schemas.openxmlformats.org/drawingml/2006/main">
               <a:ext uri="{FF2B5EF4-FFF2-40B4-BE49-F238E27FC236}">
-                <a16:creationId xmlns:a16="http://schemas.microsoft.com/office/drawing/2014/main" id="{4C79A083-836A-45E7-A448-14F1056FB63D}"/>
+                <a16:creationId xmlns:a16="http://schemas.microsoft.com/office/drawing/2014/main" id="{110D0045-3E98-4247-A1FE-1C54CE1F27C2}"/>
               </a:ext>
             </a:extLst>
           </p:cNvPr>
@@ -2148,7 +2148,7 @@
           <p:cNvPr id="2" name="Title 1">
             <a:extLst xmlns:a="http://schemas.openxmlformats.org/drawingml/2006/main">
               <a:ext uri="{FF2B5EF4-FFF2-40B4-BE49-F238E27FC236}">
-                <a16:creationId xmlns:a16="http://schemas.microsoft.com/office/drawing/2014/main" id="{F4D57A5F-A3BF-4577-8C38-C71BA0F85BCE}"/>
+                <a16:creationId xmlns:a16="http://schemas.microsoft.com/office/drawing/2014/main" id="{08CC0FFE-F954-4EF1-865F-72E499983A9F}"/>
               </a:ext>
             </a:extLst>
           </p:cNvPr>
@@ -2185,7 +2185,7 @@
           <p:cNvPr id="3" name="Text Placeholder 2">
             <a:extLst xmlns:a="http://schemas.openxmlformats.org/drawingml/2006/main">
               <a:ext uri="{FF2B5EF4-FFF2-40B4-BE49-F238E27FC236}">
-                <a16:creationId xmlns:a16="http://schemas.microsoft.com/office/drawing/2014/main" id="{74E6CD42-D2E7-4FC1-87DD-839C5E857C78}"/>
+                <a16:creationId xmlns:a16="http://schemas.microsoft.com/office/drawing/2014/main" id="{2B50A4D8-ECC6-4B9D-8DC0-0D2CD78EB139}"/>
               </a:ext>
             </a:extLst>
           </p:cNvPr>
@@ -2311,7 +2311,7 @@
           <p:cNvPr id="4" name="Date Placeholder 3">
             <a:extLst xmlns:a="http://schemas.openxmlformats.org/drawingml/2006/main">
               <a:ext uri="{FF2B5EF4-FFF2-40B4-BE49-F238E27FC236}">
-                <a16:creationId xmlns:a16="http://schemas.microsoft.com/office/drawing/2014/main" id="{6F8471F7-163B-4191-B514-1B95DE596E03}"/>
+                <a16:creationId xmlns:a16="http://schemas.microsoft.com/office/drawing/2014/main" id="{5C6B6AEF-0ED7-4DDD-9F08-FC0FB897C5BD}"/>
               </a:ext>
             </a:extLst>
           </p:cNvPr>
@@ -2338,7 +2338,7 @@
           <p:cNvPr id="5" name="Footer Placeholder 4">
             <a:extLst xmlns:a="http://schemas.openxmlformats.org/drawingml/2006/main">
               <a:ext uri="{FF2B5EF4-FFF2-40B4-BE49-F238E27FC236}">
-                <a16:creationId xmlns:a16="http://schemas.microsoft.com/office/drawing/2014/main" id="{D72D2E44-31C2-4F47-A643-9956B2A5B543}"/>
+                <a16:creationId xmlns:a16="http://schemas.microsoft.com/office/drawing/2014/main" id="{0C848AA4-F33E-4599-832E-A534A6629CE9}"/>
               </a:ext>
             </a:extLst>
           </p:cNvPr>
@@ -2361,7 +2361,7 @@
           <p:cNvPr id="6" name="Slide Number Placeholder 5">
             <a:extLst xmlns:a="http://schemas.openxmlformats.org/drawingml/2006/main">
               <a:ext uri="{FF2B5EF4-FFF2-40B4-BE49-F238E27FC236}">
-                <a16:creationId xmlns:a16="http://schemas.microsoft.com/office/drawing/2014/main" id="{43D974E6-E8B2-40AA-ACBA-8144CCA692EE}"/>
+                <a16:creationId xmlns:a16="http://schemas.microsoft.com/office/drawing/2014/main" id="{30C9921B-931F-40E7-A43E-E39497FC0E89}"/>
               </a:ext>
             </a:extLst>
           </p:cNvPr>
@@ -2405,7 +2405,7 @@
           <p:cNvPr id="2" name="Title 1">
             <a:extLst xmlns:a="http://schemas.openxmlformats.org/drawingml/2006/main">
               <a:ext uri="{FF2B5EF4-FFF2-40B4-BE49-F238E27FC236}">
-                <a16:creationId xmlns:a16="http://schemas.microsoft.com/office/drawing/2014/main" id="{54B38006-3D0A-4BE1-BF78-BD7458B99DF8}"/>
+                <a16:creationId xmlns:a16="http://schemas.microsoft.com/office/drawing/2014/main" id="{1DFEBAC4-3FF8-4DEE-9C0B-BEC5D69E2079}"/>
               </a:ext>
             </a:extLst>
           </p:cNvPr>
@@ -2432,7 +2432,7 @@
           <p:cNvPr id="3" name="Content Placeholder 2">
             <a:extLst xmlns:a="http://schemas.openxmlformats.org/drawingml/2006/main">
               <a:ext uri="{FF2B5EF4-FFF2-40B4-BE49-F238E27FC236}">
-                <a16:creationId xmlns:a16="http://schemas.microsoft.com/office/drawing/2014/main" id="{B593592F-CCA7-4EBA-A3D6-068B6169DD78}"/>
+                <a16:creationId xmlns:a16="http://schemas.microsoft.com/office/drawing/2014/main" id="{4E0DE634-0D1D-415D-AC8B-5D8AF517599D}"/>
               </a:ext>
             </a:extLst>
           </p:cNvPr>
@@ -2536,7 +2536,7 @@
           <p:cNvPr id="4" name="Content Placeholder 3">
             <a:extLst xmlns:a="http://schemas.openxmlformats.org/drawingml/2006/main">
               <a:ext uri="{FF2B5EF4-FFF2-40B4-BE49-F238E27FC236}">
-                <a16:creationId xmlns:a16="http://schemas.microsoft.com/office/drawing/2014/main" id="{0E6498A8-8BA0-4838-A8D8-79BF5C666F91}"/>
+                <a16:creationId xmlns:a16="http://schemas.microsoft.com/office/drawing/2014/main" id="{4DFFE361-1F38-4B12-A4CB-85BC2C4EE141}"/>
               </a:ext>
             </a:extLst>
           </p:cNvPr>
@@ -2640,7 +2640,7 @@
           <p:cNvPr id="5" name="Date Placeholder 4">
             <a:extLst xmlns:a="http://schemas.openxmlformats.org/drawingml/2006/main">
               <a:ext uri="{FF2B5EF4-FFF2-40B4-BE49-F238E27FC236}">
-                <a16:creationId xmlns:a16="http://schemas.microsoft.com/office/drawing/2014/main" id="{3B7195DB-9358-48C0-8D63-803B32D056D7}"/>
+                <a16:creationId xmlns:a16="http://schemas.microsoft.com/office/drawing/2014/main" id="{DFEA74F7-EAD9-48F0-BBB8-84B3531F5D2D}"/>
               </a:ext>
             </a:extLst>
           </p:cNvPr>
@@ -2667,7 +2667,7 @@
           <p:cNvPr id="6" name="Footer Placeholder 5">
             <a:extLst xmlns:a="http://schemas.openxmlformats.org/drawingml/2006/main">
               <a:ext uri="{FF2B5EF4-FFF2-40B4-BE49-F238E27FC236}">
-                <a16:creationId xmlns:a16="http://schemas.microsoft.com/office/drawing/2014/main" id="{2AC9E7A6-2B94-45A3-BC12-3241A49929B1}"/>
+                <a16:creationId xmlns:a16="http://schemas.microsoft.com/office/drawing/2014/main" id="{B06BB793-3969-4362-952D-5D8097BB2844}"/>
               </a:ext>
             </a:extLst>
           </p:cNvPr>
@@ -2690,7 +2690,7 @@
           <p:cNvPr id="7" name="Slide Number Placeholder 6">
             <a:extLst xmlns:a="http://schemas.openxmlformats.org/drawingml/2006/main">
               <a:ext uri="{FF2B5EF4-FFF2-40B4-BE49-F238E27FC236}">
-                <a16:creationId xmlns:a16="http://schemas.microsoft.com/office/drawing/2014/main" id="{6C2D402C-B600-4C25-A907-E14156A33A97}"/>
+                <a16:creationId xmlns:a16="http://schemas.microsoft.com/office/drawing/2014/main" id="{0C77A0DE-17FB-4149-B85A-27DCEEBC9617}"/>
               </a:ext>
             </a:extLst>
           </p:cNvPr>
@@ -2734,7 +2734,7 @@
           <p:cNvPr id="2" name="Title 1">
             <a:extLst xmlns:a="http://schemas.openxmlformats.org/drawingml/2006/main">
               <a:ext uri="{FF2B5EF4-FFF2-40B4-BE49-F238E27FC236}">
-                <a16:creationId xmlns:a16="http://schemas.microsoft.com/office/drawing/2014/main" id="{ACFB2C4A-D6A1-4F6C-B9DE-206E2808577F}"/>
+                <a16:creationId xmlns:a16="http://schemas.microsoft.com/office/drawing/2014/main" id="{6B892953-7DD9-4F92-AEAC-232671B1982C}"/>
               </a:ext>
             </a:extLst>
           </p:cNvPr>
@@ -2766,7 +2766,7 @@
           <p:cNvPr id="3" name="Text Placeholder 2">
             <a:extLst xmlns:a="http://schemas.openxmlformats.org/drawingml/2006/main">
               <a:ext uri="{FF2B5EF4-FFF2-40B4-BE49-F238E27FC236}">
-                <a16:creationId xmlns:a16="http://schemas.microsoft.com/office/drawing/2014/main" id="{5E4F0F05-DC9E-441B-B239-5A0B25772582}"/>
+                <a16:creationId xmlns:a16="http://schemas.microsoft.com/office/drawing/2014/main" id="{8E3E7897-22CA-41FA-A823-1BA6C2E824A6}"/>
               </a:ext>
             </a:extLst>
           </p:cNvPr>
@@ -2838,7 +2838,7 @@
           <p:cNvPr id="4" name="Content Placeholder 3">
             <a:extLst xmlns:a="http://schemas.openxmlformats.org/drawingml/2006/main">
               <a:ext uri="{FF2B5EF4-FFF2-40B4-BE49-F238E27FC236}">
-                <a16:creationId xmlns:a16="http://schemas.microsoft.com/office/drawing/2014/main" id="{4490E52C-7101-41F7-803F-D0B757A1BBB8}"/>
+                <a16:creationId xmlns:a16="http://schemas.microsoft.com/office/drawing/2014/main" id="{B0B9E777-687F-4496-BA6E-40CB2C74A4F3}"/>
               </a:ext>
             </a:extLst>
           </p:cNvPr>
@@ -2942,7 +2942,7 @@
           <p:cNvPr id="5" name="Text Placeholder 4">
             <a:extLst xmlns:a="http://schemas.openxmlformats.org/drawingml/2006/main">
               <a:ext uri="{FF2B5EF4-FFF2-40B4-BE49-F238E27FC236}">
-                <a16:creationId xmlns:a16="http://schemas.microsoft.com/office/drawing/2014/main" id="{C7D4CC92-B963-42B2-B69E-6ACE263BBED4}"/>
+                <a16:creationId xmlns:a16="http://schemas.microsoft.com/office/drawing/2014/main" id="{D6ABE719-A3E6-4205-AE0F-BEA4E8E3E61F}"/>
               </a:ext>
             </a:extLst>
           </p:cNvPr>
@@ -3014,7 +3014,7 @@
           <p:cNvPr id="6" name="Content Placeholder 5">
             <a:extLst xmlns:a="http://schemas.openxmlformats.org/drawingml/2006/main">
               <a:ext uri="{FF2B5EF4-FFF2-40B4-BE49-F238E27FC236}">
-                <a16:creationId xmlns:a16="http://schemas.microsoft.com/office/drawing/2014/main" id="{C68FFD18-CE73-4095-9AF7-31559E74B5BF}"/>
+                <a16:creationId xmlns:a16="http://schemas.microsoft.com/office/drawing/2014/main" id="{247DB147-27E3-4FEF-A8D7-1B906690F9BB}"/>
               </a:ext>
             </a:extLst>
           </p:cNvPr>
@@ -3118,7 +3118,7 @@
           <p:cNvPr id="7" name="Date Placeholder 6">
             <a:extLst xmlns:a="http://schemas.openxmlformats.org/drawingml/2006/main">
               <a:ext uri="{FF2B5EF4-FFF2-40B4-BE49-F238E27FC236}">
-                <a16:creationId xmlns:a16="http://schemas.microsoft.com/office/drawing/2014/main" id="{4FD775A9-83AE-4B09-A4A6-6952DFA3FC2E}"/>
+                <a16:creationId xmlns:a16="http://schemas.microsoft.com/office/drawing/2014/main" id="{5DC74563-E3DD-4B57-994D-E5B147BD2709}"/>
               </a:ext>
             </a:extLst>
           </p:cNvPr>
@@ -3145,7 +3145,7 @@
           <p:cNvPr id="8" name="Footer Placeholder 7">
             <a:extLst xmlns:a="http://schemas.openxmlformats.org/drawingml/2006/main">
               <a:ext uri="{FF2B5EF4-FFF2-40B4-BE49-F238E27FC236}">
-                <a16:creationId xmlns:a16="http://schemas.microsoft.com/office/drawing/2014/main" id="{46A60501-1215-49C0-88B4-408D19D66A7B}"/>
+                <a16:creationId xmlns:a16="http://schemas.microsoft.com/office/drawing/2014/main" id="{AD7CAE3F-047F-40DB-8B22-5009530F1E6A}"/>
               </a:ext>
             </a:extLst>
           </p:cNvPr>
@@ -3168,7 +3168,7 @@
           <p:cNvPr id="9" name="Slide Number Placeholder 8">
             <a:extLst xmlns:a="http://schemas.openxmlformats.org/drawingml/2006/main">
               <a:ext uri="{FF2B5EF4-FFF2-40B4-BE49-F238E27FC236}">
-                <a16:creationId xmlns:a16="http://schemas.microsoft.com/office/drawing/2014/main" id="{7A38AAFD-C04F-417A-AA3F-4BF63DADF13E}"/>
+                <a16:creationId xmlns:a16="http://schemas.microsoft.com/office/drawing/2014/main" id="{BE89C373-5D9F-4069-AE25-DDF8A164AF10}"/>
               </a:ext>
             </a:extLst>
           </p:cNvPr>
@@ -3212,7 +3212,7 @@
           <p:cNvPr id="2" name="Title 1">
             <a:extLst xmlns:a="http://schemas.openxmlformats.org/drawingml/2006/main">
               <a:ext uri="{FF2B5EF4-FFF2-40B4-BE49-F238E27FC236}">
-                <a16:creationId xmlns:a16="http://schemas.microsoft.com/office/drawing/2014/main" id="{F9BED791-8FDF-410E-A9C8-FDE07EB7E8C7}"/>
+                <a16:creationId xmlns:a16="http://schemas.microsoft.com/office/drawing/2014/main" id="{620FCFA1-0BC3-409F-ADAE-1284ED303C21}"/>
               </a:ext>
             </a:extLst>
           </p:cNvPr>
@@ -3239,7 +3239,7 @@
           <p:cNvPr id="3" name="Date Placeholder 2">
             <a:extLst xmlns:a="http://schemas.openxmlformats.org/drawingml/2006/main">
               <a:ext uri="{FF2B5EF4-FFF2-40B4-BE49-F238E27FC236}">
-                <a16:creationId xmlns:a16="http://schemas.microsoft.com/office/drawing/2014/main" id="{463028CF-87D6-48F4-B283-64904812DA3E}"/>
+                <a16:creationId xmlns:a16="http://schemas.microsoft.com/office/drawing/2014/main" id="{B77738E4-88C7-4D57-8B1D-DC4491CC414A}"/>
               </a:ext>
             </a:extLst>
           </p:cNvPr>
@@ -3266,7 +3266,7 @@
           <p:cNvPr id="4" name="Footer Placeholder 3">
             <a:extLst xmlns:a="http://schemas.openxmlformats.org/drawingml/2006/main">
               <a:ext uri="{FF2B5EF4-FFF2-40B4-BE49-F238E27FC236}">
-                <a16:creationId xmlns:a16="http://schemas.microsoft.com/office/drawing/2014/main" id="{295E7BF2-E7AF-4D7B-8F5F-EBDB65C9A3C2}"/>
+                <a16:creationId xmlns:a16="http://schemas.microsoft.com/office/drawing/2014/main" id="{757DF375-91C1-4F42-8031-3C9E2C26F8FC}"/>
               </a:ext>
             </a:extLst>
           </p:cNvPr>
@@ -3289,7 +3289,7 @@
           <p:cNvPr id="5" name="Slide Number Placeholder 4">
             <a:extLst xmlns:a="http://schemas.openxmlformats.org/drawingml/2006/main">
               <a:ext uri="{FF2B5EF4-FFF2-40B4-BE49-F238E27FC236}">
-                <a16:creationId xmlns:a16="http://schemas.microsoft.com/office/drawing/2014/main" id="{67E295DD-55A7-436D-BB7C-2C6DF45FFC6C}"/>
+                <a16:creationId xmlns:a16="http://schemas.microsoft.com/office/drawing/2014/main" id="{8262FB1F-D0F2-4D33-885D-0C03903C6729}"/>
               </a:ext>
             </a:extLst>
           </p:cNvPr>
@@ -3333,7 +3333,7 @@
           <p:cNvPr id="2" name="Date Placeholder 1">
             <a:extLst xmlns:a="http://schemas.openxmlformats.org/drawingml/2006/main">
               <a:ext uri="{FF2B5EF4-FFF2-40B4-BE49-F238E27FC236}">
-                <a16:creationId xmlns:a16="http://schemas.microsoft.com/office/drawing/2014/main" id="{D8EEF0CF-0312-4677-8D0E-A3AD64B47F09}"/>
+                <a16:creationId xmlns:a16="http://schemas.microsoft.com/office/drawing/2014/main" id="{BB3EB146-9B25-4C9E-B414-5723FDAAB68D}"/>
               </a:ext>
             </a:extLst>
           </p:cNvPr>
@@ -3360,7 +3360,7 @@
           <p:cNvPr id="3" name="Footer Placeholder 2">
             <a:extLst xmlns:a="http://schemas.openxmlformats.org/drawingml/2006/main">
               <a:ext uri="{FF2B5EF4-FFF2-40B4-BE49-F238E27FC236}">
-                <a16:creationId xmlns:a16="http://schemas.microsoft.com/office/drawing/2014/main" id="{E26C4469-BBA8-4E7F-A4D2-1E027B790DF3}"/>
+                <a16:creationId xmlns:a16="http://schemas.microsoft.com/office/drawing/2014/main" id="{E75C86DF-BF4E-46DA-BA73-C0CFEEDB512E}"/>
               </a:ext>
             </a:extLst>
           </p:cNvPr>
@@ -3383,7 +3383,7 @@
           <p:cNvPr id="4" name="Slide Number Placeholder 3">
             <a:extLst xmlns:a="http://schemas.openxmlformats.org/drawingml/2006/main">
               <a:ext uri="{FF2B5EF4-FFF2-40B4-BE49-F238E27FC236}">
-                <a16:creationId xmlns:a16="http://schemas.microsoft.com/office/drawing/2014/main" id="{78B51D1F-1C8A-47B0-99A3-9303C2730B7D}"/>
+                <a16:creationId xmlns:a16="http://schemas.microsoft.com/office/drawing/2014/main" id="{6E77E01F-525D-4717-962D-49904D3C36A4}"/>
               </a:ext>
             </a:extLst>
           </p:cNvPr>
@@ -3427,7 +3427,7 @@
           <p:cNvPr id="2" name="Title 1">
             <a:extLst xmlns:a="http://schemas.openxmlformats.org/drawingml/2006/main">
               <a:ext uri="{FF2B5EF4-FFF2-40B4-BE49-F238E27FC236}">
-                <a16:creationId xmlns:a16="http://schemas.microsoft.com/office/drawing/2014/main" id="{24ACA267-77EC-47F7-9B6F-8DF10D86CB24}"/>
+                <a16:creationId xmlns:a16="http://schemas.microsoft.com/office/drawing/2014/main" id="{A92394BC-1BAE-4DAA-AF44-EE9FB67F9463}"/>
               </a:ext>
             </a:extLst>
           </p:cNvPr>
@@ -3464,7 +3464,7 @@
           <p:cNvPr id="3" name="Content Placeholder 2">
             <a:extLst xmlns:a="http://schemas.openxmlformats.org/drawingml/2006/main">
               <a:ext uri="{FF2B5EF4-FFF2-40B4-BE49-F238E27FC236}">
-                <a16:creationId xmlns:a16="http://schemas.microsoft.com/office/drawing/2014/main" id="{E29DCB99-483B-428A-86E3-E2A262A2C51D}"/>
+                <a16:creationId xmlns:a16="http://schemas.microsoft.com/office/drawing/2014/main" id="{B6C5967C-2992-4399-8DCE-796ACC003FBB}"/>
               </a:ext>
             </a:extLst>
           </p:cNvPr>
@@ -3568,7 +3568,7 @@
           <p:cNvPr id="4" name="Text Placeholder 3">
             <a:extLst xmlns:a="http://schemas.openxmlformats.org/drawingml/2006/main">
               <a:ext uri="{FF2B5EF4-FFF2-40B4-BE49-F238E27FC236}">
-                <a16:creationId xmlns:a16="http://schemas.microsoft.com/office/drawing/2014/main" id="{0A7DA2EC-981F-49EB-960C-E7180DC3F7EE}"/>
+                <a16:creationId xmlns:a16="http://schemas.microsoft.com/office/drawing/2014/main" id="{1A111206-CAFA-4206-83E4-4E619EE7E47E}"/>
               </a:ext>
             </a:extLst>
           </p:cNvPr>
@@ -3640,7 +3640,7 @@
           <p:cNvPr id="5" name="Date Placeholder 4">
             <a:extLst xmlns:a="http://schemas.openxmlformats.org/drawingml/2006/main">
               <a:ext uri="{FF2B5EF4-FFF2-40B4-BE49-F238E27FC236}">
-                <a16:creationId xmlns:a16="http://schemas.microsoft.com/office/drawing/2014/main" id="{01E12126-9B43-4084-9B27-BD8B9AA5E62A}"/>
+                <a16:creationId xmlns:a16="http://schemas.microsoft.com/office/drawing/2014/main" id="{3B4EA0FD-7467-4675-8020-0051A56C852A}"/>
               </a:ext>
             </a:extLst>
           </p:cNvPr>
@@ -3667,7 +3667,7 @@
           <p:cNvPr id="6" name="Footer Placeholder 5">
             <a:extLst xmlns:a="http://schemas.openxmlformats.org/drawingml/2006/main">
               <a:ext uri="{FF2B5EF4-FFF2-40B4-BE49-F238E27FC236}">
-                <a16:creationId xmlns:a16="http://schemas.microsoft.com/office/drawing/2014/main" id="{67A88F3F-CF2C-43E0-A9D6-0A2890776426}"/>
+                <a16:creationId xmlns:a16="http://schemas.microsoft.com/office/drawing/2014/main" id="{AE99FBF6-A54D-4EBA-905E-4E81F11B88E9}"/>
               </a:ext>
             </a:extLst>
           </p:cNvPr>
@@ -3690,7 +3690,7 @@
           <p:cNvPr id="7" name="Slide Number Placeholder 6">
             <a:extLst xmlns:a="http://schemas.openxmlformats.org/drawingml/2006/main">
               <a:ext uri="{FF2B5EF4-FFF2-40B4-BE49-F238E27FC236}">
-                <a16:creationId xmlns:a16="http://schemas.microsoft.com/office/drawing/2014/main" id="{A6C7DFEA-96D5-4E99-B0A6-0B1F5710DAA8}"/>
+                <a16:creationId xmlns:a16="http://schemas.microsoft.com/office/drawing/2014/main" id="{B233937E-F063-4387-AAC5-D2FC23FADF71}"/>
               </a:ext>
             </a:extLst>
           </p:cNvPr>
@@ -3734,7 +3734,7 @@
           <p:cNvPr id="2" name="Title 1">
             <a:extLst xmlns:a="http://schemas.openxmlformats.org/drawingml/2006/main">
               <a:ext uri="{FF2B5EF4-FFF2-40B4-BE49-F238E27FC236}">
-                <a16:creationId xmlns:a16="http://schemas.microsoft.com/office/drawing/2014/main" id="{9ABD4FC7-2FEE-445C-B821-B5EAC8DFB29C}"/>
+                <a16:creationId xmlns:a16="http://schemas.microsoft.com/office/drawing/2014/main" id="{2E2783B5-68A6-434F-B2A4-605881DC5BB0}"/>
               </a:ext>
             </a:extLst>
           </p:cNvPr>
@@ -3771,7 +3771,7 @@
           <p:cNvPr id="3" name="Picture Placeholder 2">
             <a:extLst xmlns:a="http://schemas.openxmlformats.org/drawingml/2006/main">
               <a:ext uri="{FF2B5EF4-FFF2-40B4-BE49-F238E27FC236}">
-                <a16:creationId xmlns:a16="http://schemas.microsoft.com/office/drawing/2014/main" id="{F7F5CC6D-E557-4DD3-AFDC-19D43841A29A}"/>
+                <a16:creationId xmlns:a16="http://schemas.microsoft.com/office/drawing/2014/main" id="{F5EBB54A-FB4B-41BE-983C-202B74F3B201}"/>
               </a:ext>
             </a:extLst>
           </p:cNvPr>
@@ -3836,7 +3836,7 @@
           <p:cNvPr id="4" name="Text Placeholder 3">
             <a:extLst xmlns:a="http://schemas.openxmlformats.org/drawingml/2006/main">
               <a:ext uri="{FF2B5EF4-FFF2-40B4-BE49-F238E27FC236}">
-                <a16:creationId xmlns:a16="http://schemas.microsoft.com/office/drawing/2014/main" id="{D4D54638-2E23-44E1-B308-C0F887E14D23}"/>
+                <a16:creationId xmlns:a16="http://schemas.microsoft.com/office/drawing/2014/main" id="{D2F9880B-AB49-4F00-A02A-2E0ADBB0CA52}"/>
               </a:ext>
             </a:extLst>
           </p:cNvPr>
@@ -3908,7 +3908,7 @@
           <p:cNvPr id="5" name="Date Placeholder 4">
             <a:extLst xmlns:a="http://schemas.openxmlformats.org/drawingml/2006/main">
               <a:ext uri="{FF2B5EF4-FFF2-40B4-BE49-F238E27FC236}">
-                <a16:creationId xmlns:a16="http://schemas.microsoft.com/office/drawing/2014/main" id="{2FBC226B-DD4C-493E-8DD1-506F81D89DFF}"/>
+                <a16:creationId xmlns:a16="http://schemas.microsoft.com/office/drawing/2014/main" id="{3E91476B-2B95-48D4-BE20-10224C4B9855}"/>
               </a:ext>
             </a:extLst>
           </p:cNvPr>
@@ -3935,7 +3935,7 @@
           <p:cNvPr id="6" name="Footer Placeholder 5">
             <a:extLst xmlns:a="http://schemas.openxmlformats.org/drawingml/2006/main">
               <a:ext uri="{FF2B5EF4-FFF2-40B4-BE49-F238E27FC236}">
-                <a16:creationId xmlns:a16="http://schemas.microsoft.com/office/drawing/2014/main" id="{C35A0719-0A27-4A48-AA2A-CDDC24B45786}"/>
+                <a16:creationId xmlns:a16="http://schemas.microsoft.com/office/drawing/2014/main" id="{0EA51C61-94EC-4F87-8BAD-850F4CC933C5}"/>
               </a:ext>
             </a:extLst>
           </p:cNvPr>
@@ -3958,7 +3958,7 @@
           <p:cNvPr id="7" name="Slide Number Placeholder 6">
             <a:extLst xmlns:a="http://schemas.openxmlformats.org/drawingml/2006/main">
               <a:ext uri="{FF2B5EF4-FFF2-40B4-BE49-F238E27FC236}">
-                <a16:creationId xmlns:a16="http://schemas.microsoft.com/office/drawing/2014/main" id="{3E587390-A7DF-485E-AE37-D369D92AC535}"/>
+                <a16:creationId xmlns:a16="http://schemas.microsoft.com/office/drawing/2014/main" id="{CF2D1B9C-3C68-4C56-A54A-A4FDF222631D}"/>
               </a:ext>
             </a:extLst>
           </p:cNvPr>
@@ -4007,7 +4007,7 @@
           <p:cNvPr id="2" name="Title Placeholder 1">
             <a:extLst xmlns:a="http://schemas.openxmlformats.org/drawingml/2006/main">
               <a:ext uri="{FF2B5EF4-FFF2-40B4-BE49-F238E27FC236}">
-                <a16:creationId xmlns:a16="http://schemas.microsoft.com/office/drawing/2014/main" id="{C5C32A93-A251-4949-9915-1C65644096D8}"/>
+                <a16:creationId xmlns:a16="http://schemas.microsoft.com/office/drawing/2014/main" id="{51E68BD2-F289-41EF-AE2F-A9723A70539E}"/>
               </a:ext>
             </a:extLst>
           </p:cNvPr>
@@ -4044,7 +4044,7 @@
           <p:cNvPr id="3" name="Text Placeholder 2">
             <a:extLst xmlns:a="http://schemas.openxmlformats.org/drawingml/2006/main">
               <a:ext uri="{FF2B5EF4-FFF2-40B4-BE49-F238E27FC236}">
-                <a16:creationId xmlns:a16="http://schemas.microsoft.com/office/drawing/2014/main" id="{A67EF216-870A-4BF0-AA9A-AE90B78B6427}"/>
+                <a16:creationId xmlns:a16="http://schemas.microsoft.com/office/drawing/2014/main" id="{7CF8C628-D8E9-4A41-8A71-3DC425F5756A}"/>
               </a:ext>
             </a:extLst>
           </p:cNvPr>
@@ -4116,7 +4116,7 @@
           <p:cNvPr id="4" name="Date Placeholder 3">
             <a:extLst xmlns:a="http://schemas.openxmlformats.org/drawingml/2006/main">
               <a:ext uri="{FF2B5EF4-FFF2-40B4-BE49-F238E27FC236}">
-                <a16:creationId xmlns:a16="http://schemas.microsoft.com/office/drawing/2014/main" id="{31B21B47-7933-4B5A-8FC3-2A17004CFA30}"/>
+                <a16:creationId xmlns:a16="http://schemas.microsoft.com/office/drawing/2014/main" id="{AAC77D11-3CA5-4205-A849-460894210BE6}"/>
               </a:ext>
             </a:extLst>
           </p:cNvPr>
@@ -4162,7 +4162,7 @@
           <p:cNvPr id="5" name="Footer Placeholder 4">
             <a:extLst xmlns:a="http://schemas.openxmlformats.org/drawingml/2006/main">
               <a:ext uri="{FF2B5EF4-FFF2-40B4-BE49-F238E27FC236}">
-                <a16:creationId xmlns:a16="http://schemas.microsoft.com/office/drawing/2014/main" id="{56BADC6C-2752-4811-B7B5-801A143760C0}"/>
+                <a16:creationId xmlns:a16="http://schemas.microsoft.com/office/drawing/2014/main" id="{D6B95F20-A07F-4961-8EBB-AE61E70CF1AE}"/>
               </a:ext>
             </a:extLst>
           </p:cNvPr>
@@ -4204,7 +4204,7 @@
           <p:cNvPr id="6" name="Slide Number Placeholder 5">
             <a:extLst xmlns:a="http://schemas.openxmlformats.org/drawingml/2006/main">
               <a:ext uri="{FF2B5EF4-FFF2-40B4-BE49-F238E27FC236}">
-                <a16:creationId xmlns:a16="http://schemas.microsoft.com/office/drawing/2014/main" id="{010A006B-240A-4FEF-9DA0-BB863CFF1ADC}"/>
+                <a16:creationId xmlns:a16="http://schemas.microsoft.com/office/drawing/2014/main" id="{01721ED7-8A72-4390-AB82-A3371BD03142}"/>
               </a:ext>
             </a:extLst>
           </p:cNvPr>
@@ -4249,17 +4249,17 @@
   </p:cSld>
   <p:clrMap bg1="lt1" tx1="dk1" bg2="lt2" tx2="dk2" accent1="accent1" accent2="accent2" accent3="accent3" accent4="accent4" accent5="accent5" accent6="accent6" hlink="hlink" folHlink="folHlink"/>
   <p:sldLayoutIdLst>
-    <p:sldLayoutId xmlns:r="http://schemas.openxmlformats.org/officeDocument/2006/relationships" id="2147483649" r:id="R77a3e4e89ee142d2"/>
-    <p:sldLayoutId xmlns:r="http://schemas.openxmlformats.org/officeDocument/2006/relationships" id="2147483650" r:id="Ra99e70203fea40ef"/>
-    <p:sldLayoutId xmlns:r="http://schemas.openxmlformats.org/officeDocument/2006/relationships" id="2147483651" r:id="R7cfe0762974647c5"/>
-    <p:sldLayoutId xmlns:r="http://schemas.openxmlformats.org/officeDocument/2006/relationships" id="2147483652" r:id="Rcdf12847cb7c45a2"/>
-    <p:sldLayoutId xmlns:r="http://schemas.openxmlformats.org/officeDocument/2006/relationships" id="2147483653" r:id="Rbb69686d8b624a30"/>
-    <p:sldLayoutId xmlns:r="http://schemas.openxmlformats.org/officeDocument/2006/relationships" id="2147483654" r:id="R7e08d3348c034ef4"/>
-    <p:sldLayoutId xmlns:r="http://schemas.openxmlformats.org/officeDocument/2006/relationships" id="2147483655" r:id="Refb57027de6f489f"/>
-    <p:sldLayoutId xmlns:r="http://schemas.openxmlformats.org/officeDocument/2006/relationships" id="2147483656" r:id="R67350719e6004ade"/>
-    <p:sldLayoutId xmlns:r="http://schemas.openxmlformats.org/officeDocument/2006/relationships" id="2147483657" r:id="R3ef7e1a259034c9c"/>
-    <p:sldLayoutId xmlns:r="http://schemas.openxmlformats.org/officeDocument/2006/relationships" id="2147483658" r:id="R84b1f6b138b84ec2"/>
-    <p:sldLayoutId xmlns:r="http://schemas.openxmlformats.org/officeDocument/2006/relationships" id="2147483659" r:id="R47ee849155404ded"/>
+    <p:sldLayoutId xmlns:r="http://schemas.openxmlformats.org/officeDocument/2006/relationships" id="2147483649" r:id="Re59925fa353c4c44"/>
+    <p:sldLayoutId xmlns:r="http://schemas.openxmlformats.org/officeDocument/2006/relationships" id="2147483650" r:id="Rb3468bf2d03541fc"/>
+    <p:sldLayoutId xmlns:r="http://schemas.openxmlformats.org/officeDocument/2006/relationships" id="2147483651" r:id="R246e0b2f42354266"/>
+    <p:sldLayoutId xmlns:r="http://schemas.openxmlformats.org/officeDocument/2006/relationships" id="2147483652" r:id="Rd7f82dd04ecc486f"/>
+    <p:sldLayoutId xmlns:r="http://schemas.openxmlformats.org/officeDocument/2006/relationships" id="2147483653" r:id="Rf494981a8c9d41a7"/>
+    <p:sldLayoutId xmlns:r="http://schemas.openxmlformats.org/officeDocument/2006/relationships" id="2147483654" r:id="R03b19798db5b4647"/>
+    <p:sldLayoutId xmlns:r="http://schemas.openxmlformats.org/officeDocument/2006/relationships" id="2147483655" r:id="R0825125513104f80"/>
+    <p:sldLayoutId xmlns:r="http://schemas.openxmlformats.org/officeDocument/2006/relationships" id="2147483656" r:id="Rc91a830bd3a3440b"/>
+    <p:sldLayoutId xmlns:r="http://schemas.openxmlformats.org/officeDocument/2006/relationships" id="2147483657" r:id="R1232f4c040a1439f"/>
+    <p:sldLayoutId xmlns:r="http://schemas.openxmlformats.org/officeDocument/2006/relationships" id="2147483658" r:id="R559380bb6931498a"/>
+    <p:sldLayoutId xmlns:r="http://schemas.openxmlformats.org/officeDocument/2006/relationships" id="2147483659" r:id="R9b72b3cebda64fff"/>
   </p:sldLayoutIdLst>
   <p:txStyles>
     <p:titleStyle>
@@ -4812,7 +4812,7 @@
           <p:cNvPr id="2" name="Rectangle 1">
             <a:extLst xmlns:a="http://schemas.openxmlformats.org/drawingml/2006/main">
               <a:ext uri="{FF2B5EF4-FFF2-40B4-BE49-F238E27FC236}">
-                <a16:creationId xmlns:a16="http://schemas.microsoft.com/office/drawing/2014/main" id="{2A200AB8-6697-4C5C-BEE5-15B9196CF8B0}"/>
+                <a16:creationId xmlns:a16="http://schemas.microsoft.com/office/drawing/2014/main" id="{1991B3E1-D381-411C-8F2A-13786B1F1C32}"/>
               </a:ext>
             </a:extLst>
           </p:cNvPr>
@@ -4867,7 +4867,7 @@
           <p:cNvPr id="3" name="TextBox 2">
             <a:extLst xmlns:a="http://schemas.openxmlformats.org/drawingml/2006/main">
               <a:ext uri="{FF2B5EF4-FFF2-40B4-BE49-F238E27FC236}">
-                <a16:creationId xmlns:a16="http://schemas.microsoft.com/office/drawing/2014/main" id="{5564D042-A8BC-4C0F-B249-188DDDF97339}"/>
+                <a16:creationId xmlns:a16="http://schemas.microsoft.com/office/drawing/2014/main" id="{16F28E44-3346-4ACC-8A7E-D20FA315E859}"/>
               </a:ext>
             </a:extLst>
           </p:cNvPr>
@@ -4914,7 +4914,7 @@
           <p:cNvPr id="4" name="TextBox 3">
             <a:extLst xmlns:a="http://schemas.openxmlformats.org/drawingml/2006/main">
               <a:ext uri="{FF2B5EF4-FFF2-40B4-BE49-F238E27FC236}">
-                <a16:creationId xmlns:a16="http://schemas.microsoft.com/office/drawing/2014/main" id="{CF93215C-33B0-45F5-AF6B-A6F5254F30A7}"/>
+                <a16:creationId xmlns:a16="http://schemas.microsoft.com/office/drawing/2014/main" id="{8996D626-DEE3-486F-B6BB-55D11E33DCDE}"/>
               </a:ext>
             </a:extLst>
           </p:cNvPr>
@@ -4982,7 +4982,7 @@
           <p:cNvPr id="5" name="TextBox 4">
             <a:extLst xmlns:a="http://schemas.openxmlformats.org/drawingml/2006/main">
               <a:ext uri="{FF2B5EF4-FFF2-40B4-BE49-F238E27FC236}">
-                <a16:creationId xmlns:a16="http://schemas.microsoft.com/office/drawing/2014/main" id="{0674585E-D9F7-4F48-B83E-D93B69780F2F}"/>
+                <a16:creationId xmlns:a16="http://schemas.microsoft.com/office/drawing/2014/main" id="{96AF5362-0C22-480E-8FA8-7D8FC7456B11}"/>
               </a:ext>
             </a:extLst>
           </p:cNvPr>
@@ -5029,7 +5029,7 @@
           <p:cNvPr id="6" name="Rectangle 5">
             <a:extLst xmlns:a="http://schemas.openxmlformats.org/drawingml/2006/main">
               <a:ext uri="{FF2B5EF4-FFF2-40B4-BE49-F238E27FC236}">
-                <a16:creationId xmlns:a16="http://schemas.microsoft.com/office/drawing/2014/main" id="{1CBDCD5C-BEAD-4425-8DFE-458FE17EBD13}"/>
+                <a16:creationId xmlns:a16="http://schemas.microsoft.com/office/drawing/2014/main" id="{A67C47C0-DC35-4D82-9D36-7065A7E9311E}"/>
               </a:ext>
             </a:extLst>
           </p:cNvPr>
@@ -5084,7 +5084,7 @@
           <p:cNvPr id="7" name="TextBox 6">
             <a:extLst xmlns:a="http://schemas.openxmlformats.org/drawingml/2006/main">
               <a:ext uri="{FF2B5EF4-FFF2-40B4-BE49-F238E27FC236}">
-                <a16:creationId xmlns:a16="http://schemas.microsoft.com/office/drawing/2014/main" id="{1843A209-B903-4834-A6D9-B318AF3916CE}"/>
+                <a16:creationId xmlns:a16="http://schemas.microsoft.com/office/drawing/2014/main" id="{1A278FC5-0E7C-4C8B-81FD-B58993D1ECDE}"/>
               </a:ext>
             </a:extLst>
           </p:cNvPr>
@@ -5131,7 +5131,7 @@
           <p:cNvPr id="8" name="TextBox 7">
             <a:extLst xmlns:a="http://schemas.openxmlformats.org/drawingml/2006/main">
               <a:ext uri="{FF2B5EF4-FFF2-40B4-BE49-F238E27FC236}">
-                <a16:creationId xmlns:a16="http://schemas.microsoft.com/office/drawing/2014/main" id="{BFCF4E11-2C6B-47FD-8076-550161F4827F}"/>
+                <a16:creationId xmlns:a16="http://schemas.microsoft.com/office/drawing/2014/main" id="{067FE591-48DE-4EF6-A027-5E513614D7B0}"/>
               </a:ext>
             </a:extLst>
           </p:cNvPr>
@@ -5143,7 +5143,7 @@
         <p:spPr>
           <a:xfrm xmlns:a="http://schemas.openxmlformats.org/drawingml/2006/main">
             <a:off x="8732520" y="1700784"/>
-            <a:ext cx="2880360" cy="502920"/>
+            <a:ext cx="2880360" cy="515112"/>
           </a:xfrm>
           <a:prstGeom xmlns:a="http://schemas.openxmlformats.org/drawingml/2006/main" prst="rect">
             <a:avLst/>
@@ -5168,7 +5168,7 @@
                 <a:ea typeface="Aptos"/>
                 <a:cs typeface="Aptos"/>
               </a:rPr>
-              <a:t>2026.07.23-10</a:t>
+              <a:t>2026.07.23-11</a:t>
             </a:r>
           </a:p>
         </p:txBody>
@@ -5178,7 +5178,7 @@
           <p:cNvPr id="9" name="TextBox 8">
             <a:extLst xmlns:a="http://schemas.openxmlformats.org/drawingml/2006/main">
               <a:ext uri="{FF2B5EF4-FFF2-40B4-BE49-F238E27FC236}">
-                <a16:creationId xmlns:a16="http://schemas.microsoft.com/office/drawing/2014/main" id="{70D0AC0F-6366-44F3-9888-CCDDA1E30D41}"/>
+                <a16:creationId xmlns:a16="http://schemas.microsoft.com/office/drawing/2014/main" id="{B4DFB51F-7E2E-44B3-82C0-CAB5A77C694E}"/>
               </a:ext>
             </a:extLst>
           </p:cNvPr>
@@ -5246,7 +5246,7 @@
           <p:cNvPr id="10" name="TextBox 9">
             <a:extLst xmlns:a="http://schemas.openxmlformats.org/drawingml/2006/main">
               <a:ext uri="{FF2B5EF4-FFF2-40B4-BE49-F238E27FC236}">
-                <a16:creationId xmlns:a16="http://schemas.microsoft.com/office/drawing/2014/main" id="{669FD38D-3DAE-41F7-85A5-3B612C98B081}"/>
+                <a16:creationId xmlns:a16="http://schemas.microsoft.com/office/drawing/2014/main" id="{2DED812A-99A6-4684-AF17-065238F4C849}"/>
               </a:ext>
             </a:extLst>
           </p:cNvPr>
@@ -5293,7 +5293,7 @@
           <p:cNvPr id="11" name="TextBox 10">
             <a:extLst xmlns:a="http://schemas.openxmlformats.org/drawingml/2006/main">
               <a:ext uri="{FF2B5EF4-FFF2-40B4-BE49-F238E27FC236}">
-                <a16:creationId xmlns:a16="http://schemas.microsoft.com/office/drawing/2014/main" id="{46F3B3AE-542B-42CB-97A2-6D1B495DB800}"/>
+                <a16:creationId xmlns:a16="http://schemas.microsoft.com/office/drawing/2014/main" id="{F3056DE4-AFBF-4A0E-BC28-60337EC186A4}"/>
               </a:ext>
             </a:extLst>
           </p:cNvPr>
@@ -5340,7 +5340,7 @@
           <p:cNvPr id="12" name="TextBox 11">
             <a:extLst xmlns:a="http://schemas.openxmlformats.org/drawingml/2006/main">
               <a:ext uri="{FF2B5EF4-FFF2-40B4-BE49-F238E27FC236}">
-                <a16:creationId xmlns:a16="http://schemas.microsoft.com/office/drawing/2014/main" id="{FE1AD37D-C60F-4180-A609-152B5EFA1411}"/>
+                <a16:creationId xmlns:a16="http://schemas.microsoft.com/office/drawing/2014/main" id="{F63EB4C8-0CFC-4E08-8F77-6CF4182FEA95}"/>
               </a:ext>
             </a:extLst>
           </p:cNvPr>
@@ -5387,7 +5387,7 @@
           <p:cNvPr id="13" name="TextBox 12">
             <a:extLst xmlns:a="http://schemas.openxmlformats.org/drawingml/2006/main">
               <a:ext uri="{FF2B5EF4-FFF2-40B4-BE49-F238E27FC236}">
-                <a16:creationId xmlns:a16="http://schemas.microsoft.com/office/drawing/2014/main" id="{505127A2-7782-4BC2-B95C-C16106652751}"/>
+                <a16:creationId xmlns:a16="http://schemas.microsoft.com/office/drawing/2014/main" id="{4AC3D7D8-24C0-4126-8513-C925BE9E9EA1}"/>
               </a:ext>
             </a:extLst>
           </p:cNvPr>
@@ -5432,7 +5432,7 @@
     </p:spTree>
     <p:extLst>
       <p:ext uri="{BB962C8B-B14F-4D97-AF65-F5344CB8AC3E}">
-        <p14:creationId xmlns:p14="http://schemas.microsoft.com/office/powerpoint/2010/main" val="377808811"/>
+        <p14:creationId xmlns:p14="http://schemas.microsoft.com/office/powerpoint/2010/main" val="425192258"/>
       </p:ext>
     </p:extLst>
   </p:cSld>
@@ -5456,7 +5456,7 @@
           <p:cNvPr id="2" name="TextBox 1">
             <a:extLst xmlns:a="http://schemas.openxmlformats.org/drawingml/2006/main">
               <a:ext uri="{FF2B5EF4-FFF2-40B4-BE49-F238E27FC236}">
-                <a16:creationId xmlns:a16="http://schemas.microsoft.com/office/drawing/2014/main" id="{CD3E75E9-239D-4292-A4C3-8ABD59E1E431}"/>
+                <a16:creationId xmlns:a16="http://schemas.microsoft.com/office/drawing/2014/main" id="{77C9587F-153F-4E31-996D-3ABD47088968}"/>
               </a:ext>
             </a:extLst>
           </p:cNvPr>
@@ -5503,7 +5503,7 @@
           <p:cNvPr id="3" name="TextBox 2">
             <a:extLst xmlns:a="http://schemas.openxmlformats.org/drawingml/2006/main">
               <a:ext uri="{FF2B5EF4-FFF2-40B4-BE49-F238E27FC236}">
-                <a16:creationId xmlns:a16="http://schemas.microsoft.com/office/drawing/2014/main" id="{7A0F17EA-3248-4039-83A1-CA521A474D26}"/>
+                <a16:creationId xmlns:a16="http://schemas.microsoft.com/office/drawing/2014/main" id="{1F593444-62DC-49CD-A4E1-C1D8C9447B1D}"/>
               </a:ext>
             </a:extLst>
           </p:cNvPr>
@@ -5550,7 +5550,7 @@
           <p:cNvPr id="4" name="Rectangle 3">
             <a:extLst xmlns:a="http://schemas.openxmlformats.org/drawingml/2006/main">
               <a:ext uri="{FF2B5EF4-FFF2-40B4-BE49-F238E27FC236}">
-                <a16:creationId xmlns:a16="http://schemas.microsoft.com/office/drawing/2014/main" id="{E00F13C2-2039-4F5E-AD7E-E1532B857E51}"/>
+                <a16:creationId xmlns:a16="http://schemas.microsoft.com/office/drawing/2014/main" id="{D1991F35-855A-4D8A-AE43-F5574B812E2C}"/>
               </a:ext>
             </a:extLst>
           </p:cNvPr>
@@ -5605,7 +5605,7 @@
           <p:cNvPr id="5" name="Rectangle 4">
             <a:extLst xmlns:a="http://schemas.openxmlformats.org/drawingml/2006/main">
               <a:ext uri="{FF2B5EF4-FFF2-40B4-BE49-F238E27FC236}">
-                <a16:creationId xmlns:a16="http://schemas.microsoft.com/office/drawing/2014/main" id="{0CCD7D97-47A2-4031-A1F2-FA6234BEFC16}"/>
+                <a16:creationId xmlns:a16="http://schemas.microsoft.com/office/drawing/2014/main" id="{67804263-F263-49A8-855D-5E82FEFCAA33}"/>
               </a:ext>
             </a:extLst>
           </p:cNvPr>
@@ -5660,7 +5660,7 @@
           <p:cNvPr id="6" name="TextBox 5">
             <a:extLst xmlns:a="http://schemas.openxmlformats.org/drawingml/2006/main">
               <a:ext uri="{FF2B5EF4-FFF2-40B4-BE49-F238E27FC236}">
-                <a16:creationId xmlns:a16="http://schemas.microsoft.com/office/drawing/2014/main" id="{57B2976A-F54D-4668-AE76-E228427EC627}"/>
+                <a16:creationId xmlns:a16="http://schemas.microsoft.com/office/drawing/2014/main" id="{94EF40F8-3C20-40F3-9EA4-8F859A42E1D6}"/>
               </a:ext>
             </a:extLst>
           </p:cNvPr>
@@ -5697,7 +5697,7 @@
                 <a:ea typeface="Aptos"/>
                 <a:cs typeface="Aptos"/>
               </a:rPr>
-              <a:t>Independent public evidence summary · 2026.07.23-10 · 2026-07-22 · Sources: WIPO licensing; dispute resolution; IPscore</a:t>
+              <a:t>Independent public evidence summary · 2026.07.23-11 · 2026-07-22 · Sources: WIPO licensing; dispute resolution; IPscore</a:t>
             </a:r>
           </a:p>
         </p:txBody>
@@ -5707,7 +5707,7 @@
           <p:cNvPr id="7" name="TextBox 6">
             <a:extLst xmlns:a="http://schemas.openxmlformats.org/drawingml/2006/main">
               <a:ext uri="{FF2B5EF4-FFF2-40B4-BE49-F238E27FC236}">
-                <a16:creationId xmlns:a16="http://schemas.microsoft.com/office/drawing/2014/main" id="{D8D74D2C-A797-4C4F-8912-16726AFF32A8}"/>
+                <a16:creationId xmlns:a16="http://schemas.microsoft.com/office/drawing/2014/main" id="{176D3F50-7045-4676-A03C-0888746862BF}"/>
               </a:ext>
             </a:extLst>
           </p:cNvPr>
@@ -5754,7 +5754,7 @@
           <p:cNvPr id="8" name="Rounded Rectangle 7">
             <a:extLst xmlns:a="http://schemas.openxmlformats.org/drawingml/2006/main">
               <a:ext uri="{FF2B5EF4-FFF2-40B4-BE49-F238E27FC236}">
-                <a16:creationId xmlns:a16="http://schemas.microsoft.com/office/drawing/2014/main" id="{B27D78CE-E728-4EC2-A466-453882A5D243}"/>
+                <a16:creationId xmlns:a16="http://schemas.microsoft.com/office/drawing/2014/main" id="{F0BE56D0-D656-446F-A604-8FBC4E4F37A1}"/>
               </a:ext>
             </a:extLst>
           </p:cNvPr>
@@ -5811,7 +5811,7 @@
           <p:cNvPr id="9" name="TextBox 8">
             <a:extLst xmlns:a="http://schemas.openxmlformats.org/drawingml/2006/main">
               <a:ext uri="{FF2B5EF4-FFF2-40B4-BE49-F238E27FC236}">
-                <a16:creationId xmlns:a16="http://schemas.microsoft.com/office/drawing/2014/main" id="{A186D1B0-1EAD-45D3-B8E0-0A8E10ED3063}"/>
+                <a16:creationId xmlns:a16="http://schemas.microsoft.com/office/drawing/2014/main" id="{BA71D21C-33D7-4283-BFE9-D2FE265AA319}"/>
               </a:ext>
             </a:extLst>
           </p:cNvPr>
@@ -5858,7 +5858,7 @@
           <p:cNvPr id="10" name="TextBox 9">
             <a:extLst xmlns:a="http://schemas.openxmlformats.org/drawingml/2006/main">
               <a:ext uri="{FF2B5EF4-FFF2-40B4-BE49-F238E27FC236}">
-                <a16:creationId xmlns:a16="http://schemas.microsoft.com/office/drawing/2014/main" id="{CF0F8889-61DF-48D6-B164-0855B08C444C}"/>
+                <a16:creationId xmlns:a16="http://schemas.microsoft.com/office/drawing/2014/main" id="{22F23215-0C29-48EC-AC4F-5D259301D5B1}"/>
               </a:ext>
             </a:extLst>
           </p:cNvPr>
@@ -5905,7 +5905,7 @@
           <p:cNvPr id="11" name="TextBox 10">
             <a:extLst xmlns:a="http://schemas.openxmlformats.org/drawingml/2006/main">
               <a:ext uri="{FF2B5EF4-FFF2-40B4-BE49-F238E27FC236}">
-                <a16:creationId xmlns:a16="http://schemas.microsoft.com/office/drawing/2014/main" id="{E611C2CB-E102-42EA-A964-F3382B056427}"/>
+                <a16:creationId xmlns:a16="http://schemas.microsoft.com/office/drawing/2014/main" id="{FF73EFCD-6404-4C1F-8880-AE37DED7A684}"/>
               </a:ext>
             </a:extLst>
           </p:cNvPr>
@@ -5952,7 +5952,7 @@
           <p:cNvPr id="12" name="Rounded Rectangle 11">
             <a:extLst xmlns:a="http://schemas.openxmlformats.org/drawingml/2006/main">
               <a:ext uri="{FF2B5EF4-FFF2-40B4-BE49-F238E27FC236}">
-                <a16:creationId xmlns:a16="http://schemas.microsoft.com/office/drawing/2014/main" id="{F5FE146D-186C-4DFC-A311-BCEAA4396763}"/>
+                <a16:creationId xmlns:a16="http://schemas.microsoft.com/office/drawing/2014/main" id="{62DB6AF2-F874-49D6-9FCE-937908178C26}"/>
               </a:ext>
             </a:extLst>
           </p:cNvPr>
@@ -6009,7 +6009,7 @@
           <p:cNvPr id="13" name="TextBox 12">
             <a:extLst xmlns:a="http://schemas.openxmlformats.org/drawingml/2006/main">
               <a:ext uri="{FF2B5EF4-FFF2-40B4-BE49-F238E27FC236}">
-                <a16:creationId xmlns:a16="http://schemas.microsoft.com/office/drawing/2014/main" id="{FCB1EEA2-7CF7-4F80-8C2A-A18C5C44F11C}"/>
+                <a16:creationId xmlns:a16="http://schemas.microsoft.com/office/drawing/2014/main" id="{94921F09-A516-441E-B95D-0B2E58A2CAE0}"/>
               </a:ext>
             </a:extLst>
           </p:cNvPr>
@@ -6056,7 +6056,7 @@
           <p:cNvPr id="14" name="TextBox 13">
             <a:extLst xmlns:a="http://schemas.openxmlformats.org/drawingml/2006/main">
               <a:ext uri="{FF2B5EF4-FFF2-40B4-BE49-F238E27FC236}">
-                <a16:creationId xmlns:a16="http://schemas.microsoft.com/office/drawing/2014/main" id="{C74BDD53-5AE5-4865-BB2C-A410CC83F994}"/>
+                <a16:creationId xmlns:a16="http://schemas.microsoft.com/office/drawing/2014/main" id="{9ABE7177-2512-44A2-B79D-F9584283479D}"/>
               </a:ext>
             </a:extLst>
           </p:cNvPr>
@@ -6103,7 +6103,7 @@
           <p:cNvPr id="15" name="TextBox 14">
             <a:extLst xmlns:a="http://schemas.openxmlformats.org/drawingml/2006/main">
               <a:ext uri="{FF2B5EF4-FFF2-40B4-BE49-F238E27FC236}">
-                <a16:creationId xmlns:a16="http://schemas.microsoft.com/office/drawing/2014/main" id="{3407D1E4-7095-43BC-A74C-8D1F6FDE51D3}"/>
+                <a16:creationId xmlns:a16="http://schemas.microsoft.com/office/drawing/2014/main" id="{FF0C0877-BFBD-41B1-BE88-F595778C3A60}"/>
               </a:ext>
             </a:extLst>
           </p:cNvPr>
@@ -6150,7 +6150,7 @@
           <p:cNvPr id="16" name="Rounded Rectangle 15">
             <a:extLst xmlns:a="http://schemas.openxmlformats.org/drawingml/2006/main">
               <a:ext uri="{FF2B5EF4-FFF2-40B4-BE49-F238E27FC236}">
-                <a16:creationId xmlns:a16="http://schemas.microsoft.com/office/drawing/2014/main" id="{A7C4C40A-E7B3-450E-AEE1-2A53F09D2B76}"/>
+                <a16:creationId xmlns:a16="http://schemas.microsoft.com/office/drawing/2014/main" id="{B5B96893-353F-4A3A-AD59-3711893E1433}"/>
               </a:ext>
             </a:extLst>
           </p:cNvPr>
@@ -6207,7 +6207,7 @@
           <p:cNvPr id="17" name="TextBox 16">
             <a:extLst xmlns:a="http://schemas.openxmlformats.org/drawingml/2006/main">
               <a:ext uri="{FF2B5EF4-FFF2-40B4-BE49-F238E27FC236}">
-                <a16:creationId xmlns:a16="http://schemas.microsoft.com/office/drawing/2014/main" id="{A5C91283-8FCF-46C4-BD73-091F187EFBA1}"/>
+                <a16:creationId xmlns:a16="http://schemas.microsoft.com/office/drawing/2014/main" id="{4045EDD3-6CC4-41A1-A287-4026D0C5557E}"/>
               </a:ext>
             </a:extLst>
           </p:cNvPr>
@@ -6254,7 +6254,7 @@
           <p:cNvPr id="18" name="TextBox 17">
             <a:extLst xmlns:a="http://schemas.openxmlformats.org/drawingml/2006/main">
               <a:ext uri="{FF2B5EF4-FFF2-40B4-BE49-F238E27FC236}">
-                <a16:creationId xmlns:a16="http://schemas.microsoft.com/office/drawing/2014/main" id="{011413AE-8EF4-496A-811C-A6CDE28CE3C2}"/>
+                <a16:creationId xmlns:a16="http://schemas.microsoft.com/office/drawing/2014/main" id="{1082AC18-FCFF-46C4-A539-456468B8F492}"/>
               </a:ext>
             </a:extLst>
           </p:cNvPr>
@@ -6301,7 +6301,7 @@
           <p:cNvPr id="19" name="TextBox 18">
             <a:extLst xmlns:a="http://schemas.openxmlformats.org/drawingml/2006/main">
               <a:ext uri="{FF2B5EF4-FFF2-40B4-BE49-F238E27FC236}">
-                <a16:creationId xmlns:a16="http://schemas.microsoft.com/office/drawing/2014/main" id="{5EFE8EB6-71E7-4515-8CB5-B0D3079518B5}"/>
+                <a16:creationId xmlns:a16="http://schemas.microsoft.com/office/drawing/2014/main" id="{07E33646-6658-459F-81A6-5FC9750503D7}"/>
               </a:ext>
             </a:extLst>
           </p:cNvPr>
@@ -6348,7 +6348,7 @@
           <p:cNvPr id="20" name="Rounded Rectangle 19">
             <a:extLst xmlns:a="http://schemas.openxmlformats.org/drawingml/2006/main">
               <a:ext uri="{FF2B5EF4-FFF2-40B4-BE49-F238E27FC236}">
-                <a16:creationId xmlns:a16="http://schemas.microsoft.com/office/drawing/2014/main" id="{B623B203-483E-4B5E-9563-D54A12173682}"/>
+                <a16:creationId xmlns:a16="http://schemas.microsoft.com/office/drawing/2014/main" id="{D269A23B-2FE4-41B2-A951-5A687F224D5C}"/>
               </a:ext>
             </a:extLst>
           </p:cNvPr>
@@ -6405,7 +6405,7 @@
           <p:cNvPr id="21" name="TextBox 20">
             <a:extLst xmlns:a="http://schemas.openxmlformats.org/drawingml/2006/main">
               <a:ext uri="{FF2B5EF4-FFF2-40B4-BE49-F238E27FC236}">
-                <a16:creationId xmlns:a16="http://schemas.microsoft.com/office/drawing/2014/main" id="{8D75C95B-616D-4540-9610-4AAE210AF3B5}"/>
+                <a16:creationId xmlns:a16="http://schemas.microsoft.com/office/drawing/2014/main" id="{0445784C-4314-4035-9B91-C4463B3601DC}"/>
               </a:ext>
             </a:extLst>
           </p:cNvPr>
@@ -6452,7 +6452,7 @@
           <p:cNvPr id="22" name="TextBox 21">
             <a:extLst xmlns:a="http://schemas.openxmlformats.org/drawingml/2006/main">
               <a:ext uri="{FF2B5EF4-FFF2-40B4-BE49-F238E27FC236}">
-                <a16:creationId xmlns:a16="http://schemas.microsoft.com/office/drawing/2014/main" id="{002DFCBE-9702-463E-AEFE-279089CE5D4A}"/>
+                <a16:creationId xmlns:a16="http://schemas.microsoft.com/office/drawing/2014/main" id="{F79E7265-6651-4DA7-AE0B-F8543F9B92B6}"/>
               </a:ext>
             </a:extLst>
           </p:cNvPr>
@@ -6499,7 +6499,7 @@
           <p:cNvPr id="23" name="TextBox 22">
             <a:extLst xmlns:a="http://schemas.openxmlformats.org/drawingml/2006/main">
               <a:ext uri="{FF2B5EF4-FFF2-40B4-BE49-F238E27FC236}">
-                <a16:creationId xmlns:a16="http://schemas.microsoft.com/office/drawing/2014/main" id="{C2F08B53-4190-432D-8845-FCF0948E7ED3}"/>
+                <a16:creationId xmlns:a16="http://schemas.microsoft.com/office/drawing/2014/main" id="{CB7EBEA3-FB91-4BDA-B24F-C5A47B09AAE1}"/>
               </a:ext>
             </a:extLst>
           </p:cNvPr>
@@ -6546,7 +6546,7 @@
           <p:cNvPr id="24" name="TextBox 23">
             <a:extLst xmlns:a="http://schemas.openxmlformats.org/drawingml/2006/main">
               <a:ext uri="{FF2B5EF4-FFF2-40B4-BE49-F238E27FC236}">
-                <a16:creationId xmlns:a16="http://schemas.microsoft.com/office/drawing/2014/main" id="{B207E3BE-4B4B-4BD9-BEDD-D204629B611B}"/>
+                <a16:creationId xmlns:a16="http://schemas.microsoft.com/office/drawing/2014/main" id="{9D027271-2807-4AFE-BA1D-495A788E6E93}"/>
               </a:ext>
             </a:extLst>
           </p:cNvPr>
@@ -6591,7 +6591,7 @@
     </p:spTree>
     <p:extLst>
       <p:ext uri="{BB962C8B-B14F-4D97-AF65-F5344CB8AC3E}">
-        <p14:creationId xmlns:p14="http://schemas.microsoft.com/office/powerpoint/2010/main" val="1576017501"/>
+        <p14:creationId xmlns:p14="http://schemas.microsoft.com/office/powerpoint/2010/main" val="2056298953"/>
       </p:ext>
     </p:extLst>
   </p:cSld>
@@ -6615,7 +6615,7 @@
           <p:cNvPr id="2" name="TextBox 1">
             <a:extLst xmlns:a="http://schemas.openxmlformats.org/drawingml/2006/main">
               <a:ext uri="{FF2B5EF4-FFF2-40B4-BE49-F238E27FC236}">
-                <a16:creationId xmlns:a16="http://schemas.microsoft.com/office/drawing/2014/main" id="{79E9A73C-75C0-465C-BDCF-B79B6A2AF43D}"/>
+                <a16:creationId xmlns:a16="http://schemas.microsoft.com/office/drawing/2014/main" id="{7B139FB4-62E2-4911-9276-D5DB05CB6E13}"/>
               </a:ext>
             </a:extLst>
           </p:cNvPr>
@@ -6662,7 +6662,7 @@
           <p:cNvPr id="3" name="TextBox 2">
             <a:extLst xmlns:a="http://schemas.openxmlformats.org/drawingml/2006/main">
               <a:ext uri="{FF2B5EF4-FFF2-40B4-BE49-F238E27FC236}">
-                <a16:creationId xmlns:a16="http://schemas.microsoft.com/office/drawing/2014/main" id="{AC49513D-2558-4A10-811C-11453A1695D8}"/>
+                <a16:creationId xmlns:a16="http://schemas.microsoft.com/office/drawing/2014/main" id="{E85C73B2-040B-4F98-AD9E-D92C5C48A2D0}"/>
               </a:ext>
             </a:extLst>
           </p:cNvPr>
@@ -6709,7 +6709,7 @@
           <p:cNvPr id="4" name="Rectangle 3">
             <a:extLst xmlns:a="http://schemas.openxmlformats.org/drawingml/2006/main">
               <a:ext uri="{FF2B5EF4-FFF2-40B4-BE49-F238E27FC236}">
-                <a16:creationId xmlns:a16="http://schemas.microsoft.com/office/drawing/2014/main" id="{F9EB7186-5F97-41E9-B8D5-137DB6D567BF}"/>
+                <a16:creationId xmlns:a16="http://schemas.microsoft.com/office/drawing/2014/main" id="{1A1FD158-A3E9-4487-A279-708AB70A9069}"/>
               </a:ext>
             </a:extLst>
           </p:cNvPr>
@@ -6764,7 +6764,7 @@
           <p:cNvPr id="5" name="Rectangle 4">
             <a:extLst xmlns:a="http://schemas.openxmlformats.org/drawingml/2006/main">
               <a:ext uri="{FF2B5EF4-FFF2-40B4-BE49-F238E27FC236}">
-                <a16:creationId xmlns:a16="http://schemas.microsoft.com/office/drawing/2014/main" id="{CA13B586-8A1D-4B38-8DE3-0C230D51CEE5}"/>
+                <a16:creationId xmlns:a16="http://schemas.microsoft.com/office/drawing/2014/main" id="{B60F50A4-2A53-4A44-8B00-CB2E60D24D4A}"/>
               </a:ext>
             </a:extLst>
           </p:cNvPr>
@@ -6819,7 +6819,7 @@
           <p:cNvPr id="6" name="TextBox 5">
             <a:extLst xmlns:a="http://schemas.openxmlformats.org/drawingml/2006/main">
               <a:ext uri="{FF2B5EF4-FFF2-40B4-BE49-F238E27FC236}">
-                <a16:creationId xmlns:a16="http://schemas.microsoft.com/office/drawing/2014/main" id="{9078EEEC-472A-46B0-BC50-437D8065D130}"/>
+                <a16:creationId xmlns:a16="http://schemas.microsoft.com/office/drawing/2014/main" id="{53D62C8D-F504-4AC8-9496-CD247D38F71A}"/>
               </a:ext>
             </a:extLst>
           </p:cNvPr>
@@ -6856,7 +6856,7 @@
                 <a:ea typeface="Aptos"/>
                 <a:cs typeface="Aptos"/>
               </a:rPr>
-              <a:t>Independent public evidence summary · 2026.07.23-10 · 2026-07-22 · Sources: WIPO IP valuation; Market-values</a:t>
+              <a:t>Independent public evidence summary · 2026.07.23-11 · 2026-07-22 · Sources: WIPO IP valuation; Market-values</a:t>
             </a:r>
           </a:p>
         </p:txBody>
@@ -6866,7 +6866,7 @@
           <p:cNvPr id="7" name="TextBox 6">
             <a:extLst xmlns:a="http://schemas.openxmlformats.org/drawingml/2006/main">
               <a:ext uri="{FF2B5EF4-FFF2-40B4-BE49-F238E27FC236}">
-                <a16:creationId xmlns:a16="http://schemas.microsoft.com/office/drawing/2014/main" id="{0AB16858-B8B3-4054-8D02-8F1D4E5BAEFC}"/>
+                <a16:creationId xmlns:a16="http://schemas.microsoft.com/office/drawing/2014/main" id="{8F21D506-C595-43BD-AC44-AC2668779B4A}"/>
               </a:ext>
             </a:extLst>
           </p:cNvPr>
@@ -7436,7 +7436,7 @@
           <p:cNvPr id="9" name="TextBox 8">
             <a:extLst xmlns:a="http://schemas.openxmlformats.org/drawingml/2006/main">
               <a:ext uri="{FF2B5EF4-FFF2-40B4-BE49-F238E27FC236}">
-                <a16:creationId xmlns:a16="http://schemas.microsoft.com/office/drawing/2014/main" id="{E7D158E3-2665-492C-8A95-53F7D7ABEEC9}"/>
+                <a16:creationId xmlns:a16="http://schemas.microsoft.com/office/drawing/2014/main" id="{AA034052-323D-4A7D-A701-EDFBCB83C74A}"/>
               </a:ext>
             </a:extLst>
           </p:cNvPr>
@@ -7481,7 +7481,7 @@
     </p:spTree>
     <p:extLst>
       <p:ext uri="{BB962C8B-B14F-4D97-AF65-F5344CB8AC3E}">
-        <p14:creationId xmlns:p14="http://schemas.microsoft.com/office/powerpoint/2010/main" val="2007093740"/>
+        <p14:creationId xmlns:p14="http://schemas.microsoft.com/office/powerpoint/2010/main" val="1853031897"/>
       </p:ext>
     </p:extLst>
   </p:cSld>
@@ -7512,7 +7512,7 @@
           <p:cNvPr id="2" name="TextBox 1">
             <a:extLst xmlns:a="http://schemas.openxmlformats.org/drawingml/2006/main">
               <a:ext uri="{FF2B5EF4-FFF2-40B4-BE49-F238E27FC236}">
-                <a16:creationId xmlns:a16="http://schemas.microsoft.com/office/drawing/2014/main" id="{D7DE7FC8-68A4-47DB-B9DC-611777BCCEEA}"/>
+                <a16:creationId xmlns:a16="http://schemas.microsoft.com/office/drawing/2014/main" id="{06D69B22-E31A-4DDE-A872-EF67789E5C0A}"/>
               </a:ext>
             </a:extLst>
           </p:cNvPr>
@@ -7559,7 +7559,7 @@
           <p:cNvPr id="3" name="TextBox 2">
             <a:extLst xmlns:a="http://schemas.openxmlformats.org/drawingml/2006/main">
               <a:ext uri="{FF2B5EF4-FFF2-40B4-BE49-F238E27FC236}">
-                <a16:creationId xmlns:a16="http://schemas.microsoft.com/office/drawing/2014/main" id="{C1DCC4C0-19DE-4913-9ED9-F8D90DA0A4B8}"/>
+                <a16:creationId xmlns:a16="http://schemas.microsoft.com/office/drawing/2014/main" id="{6C9D7DE7-0417-47F7-B980-DDAC06CAD2CB}"/>
               </a:ext>
             </a:extLst>
           </p:cNvPr>
@@ -7606,7 +7606,7 @@
           <p:cNvPr id="4" name="TextBox 3">
             <a:extLst xmlns:a="http://schemas.openxmlformats.org/drawingml/2006/main">
               <a:ext uri="{FF2B5EF4-FFF2-40B4-BE49-F238E27FC236}">
-                <a16:creationId xmlns:a16="http://schemas.microsoft.com/office/drawing/2014/main" id="{8A1C5EDF-43ED-4155-BBB5-7AB61EBE6EE5}"/>
+                <a16:creationId xmlns:a16="http://schemas.microsoft.com/office/drawing/2014/main" id="{22059322-37EF-4169-A47B-C166829B84A3}"/>
               </a:ext>
             </a:extLst>
           </p:cNvPr>
@@ -7747,7 +7747,7 @@
           <p:cNvPr id="5" name="TextBox 4">
             <a:extLst xmlns:a="http://schemas.openxmlformats.org/drawingml/2006/main">
               <a:ext uri="{FF2B5EF4-FFF2-40B4-BE49-F238E27FC236}">
-                <a16:creationId xmlns:a16="http://schemas.microsoft.com/office/drawing/2014/main" id="{2E9344D7-4565-4257-A828-31AB29071354}"/>
+                <a16:creationId xmlns:a16="http://schemas.microsoft.com/office/drawing/2014/main" id="{621698CD-818C-4CF0-BB91-8B17C8B7E18E}"/>
               </a:ext>
             </a:extLst>
           </p:cNvPr>
@@ -7784,7 +7784,7 @@
                 <a:ea typeface="Aptos"/>
                 <a:cs typeface="Aptos"/>
               </a:rPr>
-              <a:t>Version 2026.07.23-10 · 2026-07-22 · 12 / 12</a:t>
+              <a:t>Version 2026.07.23-11 · 2026-07-22 · 12 / 12</a:t>
             </a:r>
           </a:p>
         </p:txBody>
@@ -7794,7 +7794,7 @@
           <p:cNvPr id="6" name="TextBox 5">
             <a:extLst xmlns:a="http://schemas.openxmlformats.org/drawingml/2006/main">
               <a:ext uri="{FF2B5EF4-FFF2-40B4-BE49-F238E27FC236}">
-                <a16:creationId xmlns:a16="http://schemas.microsoft.com/office/drawing/2014/main" id="{901C855A-5FCB-4025-AE9C-CD7B15E79617}"/>
+                <a16:creationId xmlns:a16="http://schemas.microsoft.com/office/drawing/2014/main" id="{EB241750-1E4B-4FB0-B4C8-5F0C1D7C8663}"/>
               </a:ext>
             </a:extLst>
           </p:cNvPr>
@@ -7839,7 +7839,7 @@
     </p:spTree>
     <p:extLst>
       <p:ext uri="{BB962C8B-B14F-4D97-AF65-F5344CB8AC3E}">
-        <p14:creationId xmlns:p14="http://schemas.microsoft.com/office/powerpoint/2010/main" val="1240678598"/>
+        <p14:creationId xmlns:p14="http://schemas.microsoft.com/office/powerpoint/2010/main" val="967057498"/>
       </p:ext>
     </p:extLst>
   </p:cSld>
@@ -7863,7 +7863,7 @@
           <p:cNvPr id="2" name="TextBox 1">
             <a:extLst xmlns:a="http://schemas.openxmlformats.org/drawingml/2006/main">
               <a:ext uri="{FF2B5EF4-FFF2-40B4-BE49-F238E27FC236}">
-                <a16:creationId xmlns:a16="http://schemas.microsoft.com/office/drawing/2014/main" id="{9D0CB1D5-DE5B-4B0A-9CBE-4942402B5D60}"/>
+                <a16:creationId xmlns:a16="http://schemas.microsoft.com/office/drawing/2014/main" id="{100DBEC2-B52A-415A-A664-CC2035C470DE}"/>
               </a:ext>
             </a:extLst>
           </p:cNvPr>
@@ -7910,7 +7910,7 @@
           <p:cNvPr id="3" name="TextBox 2">
             <a:extLst xmlns:a="http://schemas.openxmlformats.org/drawingml/2006/main">
               <a:ext uri="{FF2B5EF4-FFF2-40B4-BE49-F238E27FC236}">
-                <a16:creationId xmlns:a16="http://schemas.microsoft.com/office/drawing/2014/main" id="{C2A1A254-F927-4D01-B0E8-9AD1C18F7621}"/>
+                <a16:creationId xmlns:a16="http://schemas.microsoft.com/office/drawing/2014/main" id="{15E3858B-5868-4BF6-937E-7FBB0999813C}"/>
               </a:ext>
             </a:extLst>
           </p:cNvPr>
@@ -7957,7 +7957,7 @@
           <p:cNvPr id="4" name="Rectangle 3">
             <a:extLst xmlns:a="http://schemas.openxmlformats.org/drawingml/2006/main">
               <a:ext uri="{FF2B5EF4-FFF2-40B4-BE49-F238E27FC236}">
-                <a16:creationId xmlns:a16="http://schemas.microsoft.com/office/drawing/2014/main" id="{07B0BB45-0ECE-4BE8-B74C-EB841C96DBB9}"/>
+                <a16:creationId xmlns:a16="http://schemas.microsoft.com/office/drawing/2014/main" id="{527943EF-9B82-4368-B079-B3A1CD14EE79}"/>
               </a:ext>
             </a:extLst>
           </p:cNvPr>
@@ -8012,7 +8012,7 @@
           <p:cNvPr id="5" name="Rectangle 4">
             <a:extLst xmlns:a="http://schemas.openxmlformats.org/drawingml/2006/main">
               <a:ext uri="{FF2B5EF4-FFF2-40B4-BE49-F238E27FC236}">
-                <a16:creationId xmlns:a16="http://schemas.microsoft.com/office/drawing/2014/main" id="{32C7C4D7-54F2-46A7-8724-DCC9BB11D8DD}"/>
+                <a16:creationId xmlns:a16="http://schemas.microsoft.com/office/drawing/2014/main" id="{493BD28F-4278-4FC8-B03A-A8CE987EFD41}"/>
               </a:ext>
             </a:extLst>
           </p:cNvPr>
@@ -8067,7 +8067,7 @@
           <p:cNvPr id="6" name="TextBox 5">
             <a:extLst xmlns:a="http://schemas.openxmlformats.org/drawingml/2006/main">
               <a:ext uri="{FF2B5EF4-FFF2-40B4-BE49-F238E27FC236}">
-                <a16:creationId xmlns:a16="http://schemas.microsoft.com/office/drawing/2014/main" id="{31DC57B1-5CA2-46D8-9D7D-B2E36FC30BED}"/>
+                <a16:creationId xmlns:a16="http://schemas.microsoft.com/office/drawing/2014/main" id="{410A031C-830E-4CB2-9D1A-5BA65393DA3E}"/>
               </a:ext>
             </a:extLst>
           </p:cNvPr>
@@ -8104,7 +8104,7 @@
                 <a:ea typeface="Aptos"/>
                 <a:cs typeface="Aptos"/>
               </a:rPr>
-              <a:t>Independent public evidence summary · 2026.07.23-10 · 2026-07-22 · Sources: Atlas readiness; WIPO</a:t>
+              <a:t>Independent public evidence summary · 2026.07.23-11 · 2026-07-22 · Sources: Atlas readiness; WIPO</a:t>
             </a:r>
           </a:p>
         </p:txBody>
@@ -8114,7 +8114,7 @@
           <p:cNvPr id="7" name="TextBox 6">
             <a:extLst xmlns:a="http://schemas.openxmlformats.org/drawingml/2006/main">
               <a:ext uri="{FF2B5EF4-FFF2-40B4-BE49-F238E27FC236}">
-                <a16:creationId xmlns:a16="http://schemas.microsoft.com/office/drawing/2014/main" id="{7AEC287E-1232-4BCB-80C3-841336B0B191}"/>
+                <a16:creationId xmlns:a16="http://schemas.microsoft.com/office/drawing/2014/main" id="{FCC3E464-5F81-47EC-8369-08A958555121}"/>
               </a:ext>
             </a:extLst>
           </p:cNvPr>
@@ -8161,7 +8161,7 @@
           <p:cNvPr id="8" name="TextBox 7">
             <a:extLst xmlns:a="http://schemas.openxmlformats.org/drawingml/2006/main">
               <a:ext uri="{FF2B5EF4-FFF2-40B4-BE49-F238E27FC236}">
-                <a16:creationId xmlns:a16="http://schemas.microsoft.com/office/drawing/2014/main" id="{7931CA49-058D-436D-A8E0-22C0DE092F93}"/>
+                <a16:creationId xmlns:a16="http://schemas.microsoft.com/office/drawing/2014/main" id="{F30A053C-6B0A-4E2B-B3A1-7ED8BB35BEFC}"/>
               </a:ext>
             </a:extLst>
           </p:cNvPr>
@@ -8208,7 +8208,7 @@
           <p:cNvPr id="9" name="TextBox 8">
             <a:extLst xmlns:a="http://schemas.openxmlformats.org/drawingml/2006/main">
               <a:ext uri="{FF2B5EF4-FFF2-40B4-BE49-F238E27FC236}">
-                <a16:creationId xmlns:a16="http://schemas.microsoft.com/office/drawing/2014/main" id="{4A5689FF-B7F0-4B05-970B-753914FEB28C}"/>
+                <a16:creationId xmlns:a16="http://schemas.microsoft.com/office/drawing/2014/main" id="{661194C6-06F1-4A98-A2C8-9C81EA08CF91}"/>
               </a:ext>
             </a:extLst>
           </p:cNvPr>
@@ -8305,7 +8305,7 @@
           <p:cNvPr id="10" name="Rounded Rectangle 9">
             <a:extLst xmlns:a="http://schemas.openxmlformats.org/drawingml/2006/main">
               <a:ext uri="{FF2B5EF4-FFF2-40B4-BE49-F238E27FC236}">
-                <a16:creationId xmlns:a16="http://schemas.microsoft.com/office/drawing/2014/main" id="{7B8868C1-2EBF-4D57-892F-1CABEDC8B92D}"/>
+                <a16:creationId xmlns:a16="http://schemas.microsoft.com/office/drawing/2014/main" id="{E6D6A6E0-5B6E-4E34-A67E-1B838A568720}"/>
               </a:ext>
             </a:extLst>
           </p:cNvPr>
@@ -8362,7 +8362,7 @@
           <p:cNvPr id="11" name="TextBox 10">
             <a:extLst xmlns:a="http://schemas.openxmlformats.org/drawingml/2006/main">
               <a:ext uri="{FF2B5EF4-FFF2-40B4-BE49-F238E27FC236}">
-                <a16:creationId xmlns:a16="http://schemas.microsoft.com/office/drawing/2014/main" id="{4B5DB393-CB7B-4D59-A5C7-23D4C51C6A8E}"/>
+                <a16:creationId xmlns:a16="http://schemas.microsoft.com/office/drawing/2014/main" id="{1BDFDEE7-A958-4703-B1E4-12454AFF9DAC}"/>
               </a:ext>
             </a:extLst>
           </p:cNvPr>
@@ -8409,7 +8409,7 @@
           <p:cNvPr id="12" name="TextBox 11">
             <a:extLst xmlns:a="http://schemas.openxmlformats.org/drawingml/2006/main">
               <a:ext uri="{FF2B5EF4-FFF2-40B4-BE49-F238E27FC236}">
-                <a16:creationId xmlns:a16="http://schemas.microsoft.com/office/drawing/2014/main" id="{5E46CA9B-4783-4A26-8CA5-25425C0A6C0D}"/>
+                <a16:creationId xmlns:a16="http://schemas.microsoft.com/office/drawing/2014/main" id="{FEE8DD63-CFF8-485C-BA96-FD2729F245E9}"/>
               </a:ext>
             </a:extLst>
           </p:cNvPr>
@@ -8454,7 +8454,7 @@
     </p:spTree>
     <p:extLst>
       <p:ext uri="{BB962C8B-B14F-4D97-AF65-F5344CB8AC3E}">
-        <p14:creationId xmlns:p14="http://schemas.microsoft.com/office/powerpoint/2010/main" val="1488488454"/>
+        <p14:creationId xmlns:p14="http://schemas.microsoft.com/office/powerpoint/2010/main" val="1554358134"/>
       </p:ext>
     </p:extLst>
   </p:cSld>
@@ -8478,7 +8478,7 @@
           <p:cNvPr id="2" name="TextBox 1">
             <a:extLst xmlns:a="http://schemas.openxmlformats.org/drawingml/2006/main">
               <a:ext uri="{FF2B5EF4-FFF2-40B4-BE49-F238E27FC236}">
-                <a16:creationId xmlns:a16="http://schemas.microsoft.com/office/drawing/2014/main" id="{D7377DAF-3C96-44FC-A780-CAE213B1CC96}"/>
+                <a16:creationId xmlns:a16="http://schemas.microsoft.com/office/drawing/2014/main" id="{FB7B55E0-2015-4FC3-8770-CB5CC85B3B9B}"/>
               </a:ext>
             </a:extLst>
           </p:cNvPr>
@@ -8525,7 +8525,7 @@
           <p:cNvPr id="3" name="TextBox 2">
             <a:extLst xmlns:a="http://schemas.openxmlformats.org/drawingml/2006/main">
               <a:ext uri="{FF2B5EF4-FFF2-40B4-BE49-F238E27FC236}">
-                <a16:creationId xmlns:a16="http://schemas.microsoft.com/office/drawing/2014/main" id="{E781592C-621F-4618-A20F-48144F7ABE4E}"/>
+                <a16:creationId xmlns:a16="http://schemas.microsoft.com/office/drawing/2014/main" id="{E295CAAC-67D2-4B21-9263-647B338F8C7B}"/>
               </a:ext>
             </a:extLst>
           </p:cNvPr>
@@ -8572,7 +8572,7 @@
           <p:cNvPr id="4" name="Rectangle 3">
             <a:extLst xmlns:a="http://schemas.openxmlformats.org/drawingml/2006/main">
               <a:ext uri="{FF2B5EF4-FFF2-40B4-BE49-F238E27FC236}">
-                <a16:creationId xmlns:a16="http://schemas.microsoft.com/office/drawing/2014/main" id="{5498E72F-2E9F-454F-AD3C-28A4923BFDDF}"/>
+                <a16:creationId xmlns:a16="http://schemas.microsoft.com/office/drawing/2014/main" id="{F5411B7A-445A-4DC2-9525-C6AAF4300E23}"/>
               </a:ext>
             </a:extLst>
           </p:cNvPr>
@@ -8627,7 +8627,7 @@
           <p:cNvPr id="5" name="Rectangle 4">
             <a:extLst xmlns:a="http://schemas.openxmlformats.org/drawingml/2006/main">
               <a:ext uri="{FF2B5EF4-FFF2-40B4-BE49-F238E27FC236}">
-                <a16:creationId xmlns:a16="http://schemas.microsoft.com/office/drawing/2014/main" id="{A92A91DC-FC3B-47C3-9D0E-F681ACA2494D}"/>
+                <a16:creationId xmlns:a16="http://schemas.microsoft.com/office/drawing/2014/main" id="{031464EB-56DE-4EFC-A8BF-D13AE002493E}"/>
               </a:ext>
             </a:extLst>
           </p:cNvPr>
@@ -8682,7 +8682,7 @@
           <p:cNvPr id="6" name="TextBox 5">
             <a:extLst xmlns:a="http://schemas.openxmlformats.org/drawingml/2006/main">
               <a:ext uri="{FF2B5EF4-FFF2-40B4-BE49-F238E27FC236}">
-                <a16:creationId xmlns:a16="http://schemas.microsoft.com/office/drawing/2014/main" id="{4131EBDE-CD89-4CE7-A6CF-27628DCDB49E}"/>
+                <a16:creationId xmlns:a16="http://schemas.microsoft.com/office/drawing/2014/main" id="{6AE5B475-1F9D-4D7A-B541-E84577018456}"/>
               </a:ext>
             </a:extLst>
           </p:cNvPr>
@@ -8719,7 +8719,7 @@
                 <a:ea typeface="Aptos"/>
                 <a:cs typeface="Aptos"/>
               </a:rPr>
-              <a:t>Independent public evidence summary · 2026.07.23-10 · 2026-07-22 · Sources: EP3032975B2</a:t>
+              <a:t>Independent public evidence summary · 2026.07.23-11 · 2026-07-22 · Sources: EP3032975B2</a:t>
             </a:r>
           </a:p>
         </p:txBody>
@@ -8729,7 +8729,7 @@
           <p:cNvPr id="7" name="TextBox 6">
             <a:extLst xmlns:a="http://schemas.openxmlformats.org/drawingml/2006/main">
               <a:ext uri="{FF2B5EF4-FFF2-40B4-BE49-F238E27FC236}">
-                <a16:creationId xmlns:a16="http://schemas.microsoft.com/office/drawing/2014/main" id="{94067BCB-4DE0-4ACC-B123-9DF91AEB8895}"/>
+                <a16:creationId xmlns:a16="http://schemas.microsoft.com/office/drawing/2014/main" id="{50D2151E-70D9-4FFB-A9B1-5D53CC6AB68C}"/>
               </a:ext>
             </a:extLst>
           </p:cNvPr>
@@ -8776,7 +8776,7 @@
           <p:cNvPr id="8" name="TextBox 7">
             <a:extLst xmlns:a="http://schemas.openxmlformats.org/drawingml/2006/main">
               <a:ext uri="{FF2B5EF4-FFF2-40B4-BE49-F238E27FC236}">
-                <a16:creationId xmlns:a16="http://schemas.microsoft.com/office/drawing/2014/main" id="{7F8B2C26-0C98-4CFE-91B4-F73E0D216BFA}"/>
+                <a16:creationId xmlns:a16="http://schemas.microsoft.com/office/drawing/2014/main" id="{E0FEACF2-8E2A-4DE9-A476-F7F2CF9CBF00}"/>
               </a:ext>
             </a:extLst>
           </p:cNvPr>
@@ -8823,7 +8823,7 @@
           <p:cNvPr id="9" name="TextBox 8">
             <a:extLst xmlns:a="http://schemas.openxmlformats.org/drawingml/2006/main">
               <a:ext uri="{FF2B5EF4-FFF2-40B4-BE49-F238E27FC236}">
-                <a16:creationId xmlns:a16="http://schemas.microsoft.com/office/drawing/2014/main" id="{FFEE749D-0F8E-47F9-947F-F3F0F3F69CED}"/>
+                <a16:creationId xmlns:a16="http://schemas.microsoft.com/office/drawing/2014/main" id="{D9C89A85-1D46-4598-A62D-5DE0FE1E5387}"/>
               </a:ext>
             </a:extLst>
           </p:cNvPr>
@@ -8920,7 +8920,7 @@
           <p:cNvPr id="10" name="Rounded Rectangle 9">
             <a:extLst xmlns:a="http://schemas.openxmlformats.org/drawingml/2006/main">
               <a:ext uri="{FF2B5EF4-FFF2-40B4-BE49-F238E27FC236}">
-                <a16:creationId xmlns:a16="http://schemas.microsoft.com/office/drawing/2014/main" id="{9AC613D9-1A7A-401F-A8C5-DACD6475A4DB}"/>
+                <a16:creationId xmlns:a16="http://schemas.microsoft.com/office/drawing/2014/main" id="{0E3D0F84-AA2D-473B-BCBF-C7AE33170ACE}"/>
               </a:ext>
             </a:extLst>
           </p:cNvPr>
@@ -8977,7 +8977,7 @@
           <p:cNvPr id="11" name="TextBox 10">
             <a:extLst xmlns:a="http://schemas.openxmlformats.org/drawingml/2006/main">
               <a:ext uri="{FF2B5EF4-FFF2-40B4-BE49-F238E27FC236}">
-                <a16:creationId xmlns:a16="http://schemas.microsoft.com/office/drawing/2014/main" id="{5D710353-9C70-4FFC-93A9-3F6C49679FC4}"/>
+                <a16:creationId xmlns:a16="http://schemas.microsoft.com/office/drawing/2014/main" id="{AA538F12-7648-44E7-A9F7-9D2C07E467D5}"/>
               </a:ext>
             </a:extLst>
           </p:cNvPr>
@@ -9024,7 +9024,7 @@
           <p:cNvPr id="12" name="TextBox 11">
             <a:extLst xmlns:a="http://schemas.openxmlformats.org/drawingml/2006/main">
               <a:ext uri="{FF2B5EF4-FFF2-40B4-BE49-F238E27FC236}">
-                <a16:creationId xmlns:a16="http://schemas.microsoft.com/office/drawing/2014/main" id="{F6990641-3E7F-4548-ABF7-5C7A56688EF7}"/>
+                <a16:creationId xmlns:a16="http://schemas.microsoft.com/office/drawing/2014/main" id="{11B080C4-FB0A-42AC-8417-94BE3EF3750F}"/>
               </a:ext>
             </a:extLst>
           </p:cNvPr>
@@ -9069,7 +9069,7 @@
     </p:spTree>
     <p:extLst>
       <p:ext uri="{BB962C8B-B14F-4D97-AF65-F5344CB8AC3E}">
-        <p14:creationId xmlns:p14="http://schemas.microsoft.com/office/powerpoint/2010/main" val="80600213"/>
+        <p14:creationId xmlns:p14="http://schemas.microsoft.com/office/powerpoint/2010/main" val="1789202781"/>
       </p:ext>
     </p:extLst>
   </p:cSld>
@@ -9093,7 +9093,7 @@
           <p:cNvPr id="2" name="TextBox 1">
             <a:extLst xmlns:a="http://schemas.openxmlformats.org/drawingml/2006/main">
               <a:ext uri="{FF2B5EF4-FFF2-40B4-BE49-F238E27FC236}">
-                <a16:creationId xmlns:a16="http://schemas.microsoft.com/office/drawing/2014/main" id="{A5FFC027-1AC7-4CA4-9338-763BDF627B0E}"/>
+                <a16:creationId xmlns:a16="http://schemas.microsoft.com/office/drawing/2014/main" id="{270A08AE-45AF-416D-87AB-6A18F5C96C84}"/>
               </a:ext>
             </a:extLst>
           </p:cNvPr>
@@ -9140,7 +9140,7 @@
           <p:cNvPr id="3" name="TextBox 2">
             <a:extLst xmlns:a="http://schemas.openxmlformats.org/drawingml/2006/main">
               <a:ext uri="{FF2B5EF4-FFF2-40B4-BE49-F238E27FC236}">
-                <a16:creationId xmlns:a16="http://schemas.microsoft.com/office/drawing/2014/main" id="{4515D287-2D5F-44A7-9368-3D65503F1F00}"/>
+                <a16:creationId xmlns:a16="http://schemas.microsoft.com/office/drawing/2014/main" id="{134C1124-814B-4F12-936C-E5482EA616A1}"/>
               </a:ext>
             </a:extLst>
           </p:cNvPr>
@@ -9187,7 +9187,7 @@
           <p:cNvPr id="4" name="Rectangle 3">
             <a:extLst xmlns:a="http://schemas.openxmlformats.org/drawingml/2006/main">
               <a:ext uri="{FF2B5EF4-FFF2-40B4-BE49-F238E27FC236}">
-                <a16:creationId xmlns:a16="http://schemas.microsoft.com/office/drawing/2014/main" id="{B50FE150-BE70-4BF0-9A11-D7938B46A671}"/>
+                <a16:creationId xmlns:a16="http://schemas.microsoft.com/office/drawing/2014/main" id="{3F50618F-3D27-489D-A495-9879CA3C0287}"/>
               </a:ext>
             </a:extLst>
           </p:cNvPr>
@@ -9242,7 +9242,7 @@
           <p:cNvPr id="5" name="Rectangle 4">
             <a:extLst xmlns:a="http://schemas.openxmlformats.org/drawingml/2006/main">
               <a:ext uri="{FF2B5EF4-FFF2-40B4-BE49-F238E27FC236}">
-                <a16:creationId xmlns:a16="http://schemas.microsoft.com/office/drawing/2014/main" id="{AABB5C2D-5D8C-41D5-9049-70AD10D1290D}"/>
+                <a16:creationId xmlns:a16="http://schemas.microsoft.com/office/drawing/2014/main" id="{5583C519-C14F-4454-AA2E-A5F05AE085D0}"/>
               </a:ext>
             </a:extLst>
           </p:cNvPr>
@@ -9297,7 +9297,7 @@
           <p:cNvPr id="6" name="TextBox 5">
             <a:extLst xmlns:a="http://schemas.openxmlformats.org/drawingml/2006/main">
               <a:ext uri="{FF2B5EF4-FFF2-40B4-BE49-F238E27FC236}">
-                <a16:creationId xmlns:a16="http://schemas.microsoft.com/office/drawing/2014/main" id="{3655D1C7-B137-426A-91E1-D545E21C2492}"/>
+                <a16:creationId xmlns:a16="http://schemas.microsoft.com/office/drawing/2014/main" id="{2019F55E-B98F-47E2-ABFF-113FBAEC8F9B}"/>
               </a:ext>
             </a:extLst>
           </p:cNvPr>
@@ -9334,7 +9334,7 @@
                 <a:ea typeface="Aptos"/>
                 <a:cs typeface="Aptos"/>
               </a:rPr>
-              <a:t>Independent public evidence summary · 2026.07.23-10 · 2026-07-22 · Sources: EPO Register; EP3032975B2</a:t>
+              <a:t>Independent public evidence summary · 2026.07.23-11 · 2026-07-22 · Sources: EPO Register; EP3032975B2</a:t>
             </a:r>
           </a:p>
         </p:txBody>
@@ -9344,7 +9344,7 @@
           <p:cNvPr id="7" name="TextBox 6">
             <a:extLst xmlns:a="http://schemas.openxmlformats.org/drawingml/2006/main">
               <a:ext uri="{FF2B5EF4-FFF2-40B4-BE49-F238E27FC236}">
-                <a16:creationId xmlns:a16="http://schemas.microsoft.com/office/drawing/2014/main" id="{27AE8586-F3BD-49A3-BF12-D762B596AE54}"/>
+                <a16:creationId xmlns:a16="http://schemas.microsoft.com/office/drawing/2014/main" id="{72CD43DC-7A0B-4A79-A97A-86BD119DFC07}"/>
               </a:ext>
             </a:extLst>
           </p:cNvPr>
@@ -9391,7 +9391,7 @@
           <p:cNvPr id="8" name="Rounded Rectangle 7">
             <a:extLst xmlns:a="http://schemas.openxmlformats.org/drawingml/2006/main">
               <a:ext uri="{FF2B5EF4-FFF2-40B4-BE49-F238E27FC236}">
-                <a16:creationId xmlns:a16="http://schemas.microsoft.com/office/drawing/2014/main" id="{9B3F8BB5-C325-4808-8364-505E40DC6C95}"/>
+                <a16:creationId xmlns:a16="http://schemas.microsoft.com/office/drawing/2014/main" id="{3CB6FDB1-5954-4736-B2E8-F585B945310F}"/>
               </a:ext>
             </a:extLst>
           </p:cNvPr>
@@ -9448,7 +9448,7 @@
           <p:cNvPr id="9" name="TextBox 8">
             <a:extLst xmlns:a="http://schemas.openxmlformats.org/drawingml/2006/main">
               <a:ext uri="{FF2B5EF4-FFF2-40B4-BE49-F238E27FC236}">
-                <a16:creationId xmlns:a16="http://schemas.microsoft.com/office/drawing/2014/main" id="{1780C78C-0853-422A-B670-C7AF52E78E65}"/>
+                <a16:creationId xmlns:a16="http://schemas.microsoft.com/office/drawing/2014/main" id="{DF39D145-5B23-4564-8C70-CE08AAD2653A}"/>
               </a:ext>
             </a:extLst>
           </p:cNvPr>
@@ -9495,7 +9495,7 @@
           <p:cNvPr id="10" name="TextBox 9">
             <a:extLst xmlns:a="http://schemas.openxmlformats.org/drawingml/2006/main">
               <a:ext uri="{FF2B5EF4-FFF2-40B4-BE49-F238E27FC236}">
-                <a16:creationId xmlns:a16="http://schemas.microsoft.com/office/drawing/2014/main" id="{CBB4EE18-4E22-45B2-A086-638844DD6F24}"/>
+                <a16:creationId xmlns:a16="http://schemas.microsoft.com/office/drawing/2014/main" id="{D39AFDD3-CCD0-43A9-8F9A-481DFD3EB113}"/>
               </a:ext>
             </a:extLst>
           </p:cNvPr>
@@ -9542,7 +9542,7 @@
           <p:cNvPr id="11" name="Rounded Rectangle 10">
             <a:extLst xmlns:a="http://schemas.openxmlformats.org/drawingml/2006/main">
               <a:ext uri="{FF2B5EF4-FFF2-40B4-BE49-F238E27FC236}">
-                <a16:creationId xmlns:a16="http://schemas.microsoft.com/office/drawing/2014/main" id="{0D7A4A61-498C-43FD-8EB6-12C5E9372AD4}"/>
+                <a16:creationId xmlns:a16="http://schemas.microsoft.com/office/drawing/2014/main" id="{391949E9-7B8B-4F44-8827-B4A198B687E3}"/>
               </a:ext>
             </a:extLst>
           </p:cNvPr>
@@ -9599,7 +9599,7 @@
           <p:cNvPr id="12" name="TextBox 11">
             <a:extLst xmlns:a="http://schemas.openxmlformats.org/drawingml/2006/main">
               <a:ext uri="{FF2B5EF4-FFF2-40B4-BE49-F238E27FC236}">
-                <a16:creationId xmlns:a16="http://schemas.microsoft.com/office/drawing/2014/main" id="{E672B3E3-1CD9-4DFD-94AC-D3C25BE000DE}"/>
+                <a16:creationId xmlns:a16="http://schemas.microsoft.com/office/drawing/2014/main" id="{A8F080D4-3A49-44A0-8118-CDC368690330}"/>
               </a:ext>
             </a:extLst>
           </p:cNvPr>
@@ -9646,7 +9646,7 @@
           <p:cNvPr id="13" name="TextBox 12">
             <a:extLst xmlns:a="http://schemas.openxmlformats.org/drawingml/2006/main">
               <a:ext uri="{FF2B5EF4-FFF2-40B4-BE49-F238E27FC236}">
-                <a16:creationId xmlns:a16="http://schemas.microsoft.com/office/drawing/2014/main" id="{8061720D-FEA9-4644-8DE4-D5AA55C8BC1B}"/>
+                <a16:creationId xmlns:a16="http://schemas.microsoft.com/office/drawing/2014/main" id="{4FC13604-A034-4DB0-BA3A-8D992B15F165}"/>
               </a:ext>
             </a:extLst>
           </p:cNvPr>
@@ -9693,7 +9693,7 @@
           <p:cNvPr id="14" name="Rounded Rectangle 13">
             <a:extLst xmlns:a="http://schemas.openxmlformats.org/drawingml/2006/main">
               <a:ext uri="{FF2B5EF4-FFF2-40B4-BE49-F238E27FC236}">
-                <a16:creationId xmlns:a16="http://schemas.microsoft.com/office/drawing/2014/main" id="{8CDE1F78-9C06-46C8-8D75-9E254A769C5B}"/>
+                <a16:creationId xmlns:a16="http://schemas.microsoft.com/office/drawing/2014/main" id="{00FA99ED-1DE8-42EA-8229-A7F424545707}"/>
               </a:ext>
             </a:extLst>
           </p:cNvPr>
@@ -9750,7 +9750,7 @@
           <p:cNvPr id="15" name="TextBox 14">
             <a:extLst xmlns:a="http://schemas.openxmlformats.org/drawingml/2006/main">
               <a:ext uri="{FF2B5EF4-FFF2-40B4-BE49-F238E27FC236}">
-                <a16:creationId xmlns:a16="http://schemas.microsoft.com/office/drawing/2014/main" id="{CE709C6F-C45C-41F0-89BA-2E4DB8AC0C7A}"/>
+                <a16:creationId xmlns:a16="http://schemas.microsoft.com/office/drawing/2014/main" id="{0A372B84-BB24-48E2-A4EE-39CC7AAAD5AB}"/>
               </a:ext>
             </a:extLst>
           </p:cNvPr>
@@ -9797,7 +9797,7 @@
           <p:cNvPr id="16" name="TextBox 15">
             <a:extLst xmlns:a="http://schemas.openxmlformats.org/drawingml/2006/main">
               <a:ext uri="{FF2B5EF4-FFF2-40B4-BE49-F238E27FC236}">
-                <a16:creationId xmlns:a16="http://schemas.microsoft.com/office/drawing/2014/main" id="{E62E1519-5BAB-46F5-98B1-3B33C3CA78C4}"/>
+                <a16:creationId xmlns:a16="http://schemas.microsoft.com/office/drawing/2014/main" id="{2E580CB3-88B2-4182-A880-553D3810B388}"/>
               </a:ext>
             </a:extLst>
           </p:cNvPr>
@@ -9844,7 +9844,7 @@
           <p:cNvPr id="17" name="TextBox 16">
             <a:extLst xmlns:a="http://schemas.openxmlformats.org/drawingml/2006/main">
               <a:ext uri="{FF2B5EF4-FFF2-40B4-BE49-F238E27FC236}">
-                <a16:creationId xmlns:a16="http://schemas.microsoft.com/office/drawing/2014/main" id="{A9D20434-C61C-4518-92AA-8360DE136FD3}"/>
+                <a16:creationId xmlns:a16="http://schemas.microsoft.com/office/drawing/2014/main" id="{88659978-3090-43A4-A8B9-CD34C94577FD}"/>
               </a:ext>
             </a:extLst>
           </p:cNvPr>
@@ -9891,7 +9891,7 @@
           <p:cNvPr id="18" name="Rounded Rectangle 17">
             <a:extLst xmlns:a="http://schemas.openxmlformats.org/drawingml/2006/main">
               <a:ext uri="{FF2B5EF4-FFF2-40B4-BE49-F238E27FC236}">
-                <a16:creationId xmlns:a16="http://schemas.microsoft.com/office/drawing/2014/main" id="{902B73FD-849A-486F-8236-8F4882EC53A3}"/>
+                <a16:creationId xmlns:a16="http://schemas.microsoft.com/office/drawing/2014/main" id="{A1903AD4-80E7-4148-9437-7C319E123DED}"/>
               </a:ext>
             </a:extLst>
           </p:cNvPr>
@@ -9948,7 +9948,7 @@
           <p:cNvPr id="19" name="TextBox 18">
             <a:extLst xmlns:a="http://schemas.openxmlformats.org/drawingml/2006/main">
               <a:ext uri="{FF2B5EF4-FFF2-40B4-BE49-F238E27FC236}">
-                <a16:creationId xmlns:a16="http://schemas.microsoft.com/office/drawing/2014/main" id="{0E6923A2-5055-4DBC-A0CE-71F7F1410B0D}"/>
+                <a16:creationId xmlns:a16="http://schemas.microsoft.com/office/drawing/2014/main" id="{DF3EC3F1-33D4-40CD-9782-555E084F4665}"/>
               </a:ext>
             </a:extLst>
           </p:cNvPr>
@@ -9995,7 +9995,7 @@
           <p:cNvPr id="20" name="TextBox 19">
             <a:extLst xmlns:a="http://schemas.openxmlformats.org/drawingml/2006/main">
               <a:ext uri="{FF2B5EF4-FFF2-40B4-BE49-F238E27FC236}">
-                <a16:creationId xmlns:a16="http://schemas.microsoft.com/office/drawing/2014/main" id="{3CED486C-4CB9-4A0D-882B-C35C0F40C767}"/>
+                <a16:creationId xmlns:a16="http://schemas.microsoft.com/office/drawing/2014/main" id="{20EB94BA-4AF6-4AD4-8184-1554CEE2B0E2}"/>
               </a:ext>
             </a:extLst>
           </p:cNvPr>
@@ -10040,7 +10040,7 @@
     </p:spTree>
     <p:extLst>
       <p:ext uri="{BB962C8B-B14F-4D97-AF65-F5344CB8AC3E}">
-        <p14:creationId xmlns:p14="http://schemas.microsoft.com/office/powerpoint/2010/main" val="2001480021"/>
+        <p14:creationId xmlns:p14="http://schemas.microsoft.com/office/powerpoint/2010/main" val="1116796392"/>
       </p:ext>
     </p:extLst>
   </p:cSld>
@@ -10064,7 +10064,7 @@
           <p:cNvPr id="2" name="TextBox 1">
             <a:extLst xmlns:a="http://schemas.openxmlformats.org/drawingml/2006/main">
               <a:ext uri="{FF2B5EF4-FFF2-40B4-BE49-F238E27FC236}">
-                <a16:creationId xmlns:a16="http://schemas.microsoft.com/office/drawing/2014/main" id="{77B57EFB-3D9D-4832-BCDD-A50A6EC0C577}"/>
+                <a16:creationId xmlns:a16="http://schemas.microsoft.com/office/drawing/2014/main" id="{6EF34962-8DF4-4763-B87D-B9DB5D59A11F}"/>
               </a:ext>
             </a:extLst>
           </p:cNvPr>
@@ -10111,7 +10111,7 @@
           <p:cNvPr id="3" name="TextBox 2">
             <a:extLst xmlns:a="http://schemas.openxmlformats.org/drawingml/2006/main">
               <a:ext uri="{FF2B5EF4-FFF2-40B4-BE49-F238E27FC236}">
-                <a16:creationId xmlns:a16="http://schemas.microsoft.com/office/drawing/2014/main" id="{FA60F6A7-85B6-4B44-96A7-EF5ED64A1C96}"/>
+                <a16:creationId xmlns:a16="http://schemas.microsoft.com/office/drawing/2014/main" id="{1B772956-B450-469C-B7F4-4B465341159C}"/>
               </a:ext>
             </a:extLst>
           </p:cNvPr>
@@ -10158,7 +10158,7 @@
           <p:cNvPr id="4" name="Rectangle 3">
             <a:extLst xmlns:a="http://schemas.openxmlformats.org/drawingml/2006/main">
               <a:ext uri="{FF2B5EF4-FFF2-40B4-BE49-F238E27FC236}">
-                <a16:creationId xmlns:a16="http://schemas.microsoft.com/office/drawing/2014/main" id="{EFE44A2E-BF41-4770-85DB-B455FC624F02}"/>
+                <a16:creationId xmlns:a16="http://schemas.microsoft.com/office/drawing/2014/main" id="{A92CEC40-8934-4C31-B960-B4F54E0E3EFC}"/>
               </a:ext>
             </a:extLst>
           </p:cNvPr>
@@ -10213,7 +10213,7 @@
           <p:cNvPr id="5" name="Rectangle 4">
             <a:extLst xmlns:a="http://schemas.openxmlformats.org/drawingml/2006/main">
               <a:ext uri="{FF2B5EF4-FFF2-40B4-BE49-F238E27FC236}">
-                <a16:creationId xmlns:a16="http://schemas.microsoft.com/office/drawing/2014/main" id="{825AC6F5-F009-44F7-BEF3-E62CA119B0AD}"/>
+                <a16:creationId xmlns:a16="http://schemas.microsoft.com/office/drawing/2014/main" id="{707CD359-A02A-4C0A-A4CC-50A9C92DE165}"/>
               </a:ext>
             </a:extLst>
           </p:cNvPr>
@@ -10268,7 +10268,7 @@
           <p:cNvPr id="6" name="TextBox 5">
             <a:extLst xmlns:a="http://schemas.openxmlformats.org/drawingml/2006/main">
               <a:ext uri="{FF2B5EF4-FFF2-40B4-BE49-F238E27FC236}">
-                <a16:creationId xmlns:a16="http://schemas.microsoft.com/office/drawing/2014/main" id="{3E2AC30A-FA3E-48BF-8B5A-23D9FFE479D4}"/>
+                <a16:creationId xmlns:a16="http://schemas.microsoft.com/office/drawing/2014/main" id="{2A930AF8-FB15-48BA-BCC8-284481CDC29A}"/>
               </a:ext>
             </a:extLst>
           </p:cNvPr>
@@ -10305,7 +10305,7 @@
                 <a:ea typeface="Aptos"/>
                 <a:cs typeface="Aptos"/>
               </a:rPr>
-              <a:t>Independent public evidence summary · 2026.07.23-10 · 2026-07-22 · Sources: EP3032975B2; 7 O 3341/24</a:t>
+              <a:t>Independent public evidence summary · 2026.07.23-11 · 2026-07-22 · Sources: EP3032975B2; 7 O 3341/24</a:t>
             </a:r>
           </a:p>
         </p:txBody>
@@ -10315,7 +10315,7 @@
           <p:cNvPr id="7" name="TextBox 6">
             <a:extLst xmlns:a="http://schemas.openxmlformats.org/drawingml/2006/main">
               <a:ext uri="{FF2B5EF4-FFF2-40B4-BE49-F238E27FC236}">
-                <a16:creationId xmlns:a16="http://schemas.microsoft.com/office/drawing/2014/main" id="{52602B7A-1760-4EEA-B66C-792E686A8246}"/>
+                <a16:creationId xmlns:a16="http://schemas.microsoft.com/office/drawing/2014/main" id="{FA98817E-6F47-4639-BB11-AD48EF747AC3}"/>
               </a:ext>
             </a:extLst>
           </p:cNvPr>
@@ -10362,7 +10362,7 @@
           <p:cNvPr id="8" name="TextBox 7">
             <a:extLst xmlns:a="http://schemas.openxmlformats.org/drawingml/2006/main">
               <a:ext uri="{FF2B5EF4-FFF2-40B4-BE49-F238E27FC236}">
-                <a16:creationId xmlns:a16="http://schemas.microsoft.com/office/drawing/2014/main" id="{AAF0E03A-3B49-420D-BB5E-D24217D5E2D8}"/>
+                <a16:creationId xmlns:a16="http://schemas.microsoft.com/office/drawing/2014/main" id="{7F7E041C-C7A0-4C4B-A3F8-6DC532272196}"/>
               </a:ext>
             </a:extLst>
           </p:cNvPr>
@@ -10409,7 +10409,7 @@
           <p:cNvPr id="9" name="TextBox 8">
             <a:extLst xmlns:a="http://schemas.openxmlformats.org/drawingml/2006/main">
               <a:ext uri="{FF2B5EF4-FFF2-40B4-BE49-F238E27FC236}">
-                <a16:creationId xmlns:a16="http://schemas.microsoft.com/office/drawing/2014/main" id="{4E6952FB-13FB-419B-B5E2-E13E35733509}"/>
+                <a16:creationId xmlns:a16="http://schemas.microsoft.com/office/drawing/2014/main" id="{61A0E647-8C1C-49E4-B245-1B11ACD5EF6E}"/>
               </a:ext>
             </a:extLst>
           </p:cNvPr>
@@ -10506,7 +10506,7 @@
           <p:cNvPr id="10" name="Rounded Rectangle 9">
             <a:extLst xmlns:a="http://schemas.openxmlformats.org/drawingml/2006/main">
               <a:ext uri="{FF2B5EF4-FFF2-40B4-BE49-F238E27FC236}">
-                <a16:creationId xmlns:a16="http://schemas.microsoft.com/office/drawing/2014/main" id="{9A395377-9F35-425F-A100-29C581C88869}"/>
+                <a16:creationId xmlns:a16="http://schemas.microsoft.com/office/drawing/2014/main" id="{E3869E67-4110-4344-847A-C20B3E9063A4}"/>
               </a:ext>
             </a:extLst>
           </p:cNvPr>
@@ -10563,7 +10563,7 @@
           <p:cNvPr id="11" name="TextBox 10">
             <a:extLst xmlns:a="http://schemas.openxmlformats.org/drawingml/2006/main">
               <a:ext uri="{FF2B5EF4-FFF2-40B4-BE49-F238E27FC236}">
-                <a16:creationId xmlns:a16="http://schemas.microsoft.com/office/drawing/2014/main" id="{FE9EF51A-8749-409F-A1F7-FE309D9DC83F}"/>
+                <a16:creationId xmlns:a16="http://schemas.microsoft.com/office/drawing/2014/main" id="{7E3DB6C0-769C-45F8-9D24-AD3C240D26DA}"/>
               </a:ext>
             </a:extLst>
           </p:cNvPr>
@@ -10610,7 +10610,7 @@
           <p:cNvPr id="12" name="TextBox 11">
             <a:extLst xmlns:a="http://schemas.openxmlformats.org/drawingml/2006/main">
               <a:ext uri="{FF2B5EF4-FFF2-40B4-BE49-F238E27FC236}">
-                <a16:creationId xmlns:a16="http://schemas.microsoft.com/office/drawing/2014/main" id="{9F51153B-7C57-45E5-A36C-85BFA80D9B7B}"/>
+                <a16:creationId xmlns:a16="http://schemas.microsoft.com/office/drawing/2014/main" id="{532347B9-6C79-487C-9CF5-22D37687C3FD}"/>
               </a:ext>
             </a:extLst>
           </p:cNvPr>
@@ -10655,7 +10655,7 @@
     </p:spTree>
     <p:extLst>
       <p:ext uri="{BB962C8B-B14F-4D97-AF65-F5344CB8AC3E}">
-        <p14:creationId xmlns:p14="http://schemas.microsoft.com/office/powerpoint/2010/main" val="1511901522"/>
+        <p14:creationId xmlns:p14="http://schemas.microsoft.com/office/powerpoint/2010/main" val="1032955434"/>
       </p:ext>
     </p:extLst>
   </p:cSld>
@@ -10679,7 +10679,7 @@
           <p:cNvPr id="2" name="TextBox 1">
             <a:extLst xmlns:a="http://schemas.openxmlformats.org/drawingml/2006/main">
               <a:ext uri="{FF2B5EF4-FFF2-40B4-BE49-F238E27FC236}">
-                <a16:creationId xmlns:a16="http://schemas.microsoft.com/office/drawing/2014/main" id="{080A4713-97BD-4B4A-A07B-61D02523689C}"/>
+                <a16:creationId xmlns:a16="http://schemas.microsoft.com/office/drawing/2014/main" id="{8B75CBEB-39E1-4480-916F-E9640042F6AF}"/>
               </a:ext>
             </a:extLst>
           </p:cNvPr>
@@ -10726,7 +10726,7 @@
           <p:cNvPr id="3" name="TextBox 2">
             <a:extLst xmlns:a="http://schemas.openxmlformats.org/drawingml/2006/main">
               <a:ext uri="{FF2B5EF4-FFF2-40B4-BE49-F238E27FC236}">
-                <a16:creationId xmlns:a16="http://schemas.microsoft.com/office/drawing/2014/main" id="{33EA84BD-D2A3-417D-B994-DF553486B095}"/>
+                <a16:creationId xmlns:a16="http://schemas.microsoft.com/office/drawing/2014/main" id="{A165EFE7-42A5-4098-A1D0-2F140B4146EA}"/>
               </a:ext>
             </a:extLst>
           </p:cNvPr>
@@ -10773,7 +10773,7 @@
           <p:cNvPr id="4" name="Rectangle 3">
             <a:extLst xmlns:a="http://schemas.openxmlformats.org/drawingml/2006/main">
               <a:ext uri="{FF2B5EF4-FFF2-40B4-BE49-F238E27FC236}">
-                <a16:creationId xmlns:a16="http://schemas.microsoft.com/office/drawing/2014/main" id="{9562EEA0-8309-4F26-A065-BD499C48920E}"/>
+                <a16:creationId xmlns:a16="http://schemas.microsoft.com/office/drawing/2014/main" id="{273982D3-BFB3-40E0-AF68-0A2EA170AE75}"/>
               </a:ext>
             </a:extLst>
           </p:cNvPr>
@@ -10828,7 +10828,7 @@
           <p:cNvPr id="5" name="Rectangle 4">
             <a:extLst xmlns:a="http://schemas.openxmlformats.org/drawingml/2006/main">
               <a:ext uri="{FF2B5EF4-FFF2-40B4-BE49-F238E27FC236}">
-                <a16:creationId xmlns:a16="http://schemas.microsoft.com/office/drawing/2014/main" id="{DC64A8E2-92DD-4463-A04D-385889FC7A15}"/>
+                <a16:creationId xmlns:a16="http://schemas.microsoft.com/office/drawing/2014/main" id="{552C5A43-A7FF-44DC-825B-C4E07B4FF4E4}"/>
               </a:ext>
             </a:extLst>
           </p:cNvPr>
@@ -10883,7 +10883,7 @@
           <p:cNvPr id="6" name="TextBox 5">
             <a:extLst xmlns:a="http://schemas.openxmlformats.org/drawingml/2006/main">
               <a:ext uri="{FF2B5EF4-FFF2-40B4-BE49-F238E27FC236}">
-                <a16:creationId xmlns:a16="http://schemas.microsoft.com/office/drawing/2014/main" id="{5A4D130A-A1B4-496A-9CE7-D2687D7CA32B}"/>
+                <a16:creationId xmlns:a16="http://schemas.microsoft.com/office/drawing/2014/main" id="{7AD2395B-2782-46B6-A6C0-30C75BE076A4}"/>
               </a:ext>
             </a:extLst>
           </p:cNvPr>
@@ -10920,7 +10920,7 @@
                 <a:ea typeface="Aptos"/>
                 <a:cs typeface="Aptos"/>
               </a:rPr>
-              <a:t>Independent public evidence summary · 2026.07.23-10 · 2026-07-22 · Sources: Market-values; IMARC; GVR; Fortune</a:t>
+              <a:t>Independent public evidence summary · 2026.07.23-11 · 2026-07-22 · Sources: Market-values; IMARC; GVR; Fortune</a:t>
             </a:r>
           </a:p>
         </p:txBody>
@@ -10930,7 +10930,7 @@
           <p:cNvPr id="7" name="TextBox 6">
             <a:extLst xmlns:a="http://schemas.openxmlformats.org/drawingml/2006/main">
               <a:ext uri="{FF2B5EF4-FFF2-40B4-BE49-F238E27FC236}">
-                <a16:creationId xmlns:a16="http://schemas.microsoft.com/office/drawing/2014/main" id="{58588C3D-0EC1-4476-948A-B6EF82117D97}"/>
+                <a16:creationId xmlns:a16="http://schemas.microsoft.com/office/drawing/2014/main" id="{DBCFC535-A6D8-4ABF-B71B-7ADCBA84BD1B}"/>
               </a:ext>
             </a:extLst>
           </p:cNvPr>
@@ -10977,7 +10977,7 @@
           <p:cNvPr id="8" name="Rounded Rectangle 7">
             <a:extLst xmlns:a="http://schemas.openxmlformats.org/drawingml/2006/main">
               <a:ext uri="{FF2B5EF4-FFF2-40B4-BE49-F238E27FC236}">
-                <a16:creationId xmlns:a16="http://schemas.microsoft.com/office/drawing/2014/main" id="{7DCF8AF7-118F-4201-A525-0F101CA52EFD}"/>
+                <a16:creationId xmlns:a16="http://schemas.microsoft.com/office/drawing/2014/main" id="{EE3BA729-4615-4F0D-AE16-5D5185B9074D}"/>
               </a:ext>
             </a:extLst>
           </p:cNvPr>
@@ -11034,7 +11034,7 @@
           <p:cNvPr id="9" name="TextBox 8">
             <a:extLst xmlns:a="http://schemas.openxmlformats.org/drawingml/2006/main">
               <a:ext uri="{FF2B5EF4-FFF2-40B4-BE49-F238E27FC236}">
-                <a16:creationId xmlns:a16="http://schemas.microsoft.com/office/drawing/2014/main" id="{11376589-F804-4DFB-AF60-B3E4DA8BE287}"/>
+                <a16:creationId xmlns:a16="http://schemas.microsoft.com/office/drawing/2014/main" id="{1A9AFCFA-BA00-4C70-98FA-EECB8EF053AD}"/>
               </a:ext>
             </a:extLst>
           </p:cNvPr>
@@ -11081,7 +11081,7 @@
           <p:cNvPr id="10" name="TextBox 9">
             <a:extLst xmlns:a="http://schemas.openxmlformats.org/drawingml/2006/main">
               <a:ext uri="{FF2B5EF4-FFF2-40B4-BE49-F238E27FC236}">
-                <a16:creationId xmlns:a16="http://schemas.microsoft.com/office/drawing/2014/main" id="{20F65E08-F45E-4AAE-ABE4-9F1FD62DD231}"/>
+                <a16:creationId xmlns:a16="http://schemas.microsoft.com/office/drawing/2014/main" id="{DE12DE89-4C50-496B-B110-0B3DBA0494F9}"/>
               </a:ext>
             </a:extLst>
           </p:cNvPr>
@@ -11128,7 +11128,7 @@
           <p:cNvPr id="11" name="Rounded Rectangle 10">
             <a:extLst xmlns:a="http://schemas.openxmlformats.org/drawingml/2006/main">
               <a:ext uri="{FF2B5EF4-FFF2-40B4-BE49-F238E27FC236}">
-                <a16:creationId xmlns:a16="http://schemas.microsoft.com/office/drawing/2014/main" id="{FEA99B98-2172-4138-BC5D-A462B12208DD}"/>
+                <a16:creationId xmlns:a16="http://schemas.microsoft.com/office/drawing/2014/main" id="{E8CF87DC-579A-496F-A808-1D3CFEFDDACC}"/>
               </a:ext>
             </a:extLst>
           </p:cNvPr>
@@ -11185,7 +11185,7 @@
           <p:cNvPr id="12" name="TextBox 11">
             <a:extLst xmlns:a="http://schemas.openxmlformats.org/drawingml/2006/main">
               <a:ext uri="{FF2B5EF4-FFF2-40B4-BE49-F238E27FC236}">
-                <a16:creationId xmlns:a16="http://schemas.microsoft.com/office/drawing/2014/main" id="{B729330C-D7A8-4EA0-BD3F-D78A74BE59F0}"/>
+                <a16:creationId xmlns:a16="http://schemas.microsoft.com/office/drawing/2014/main" id="{D9872F64-7448-4CFC-92FE-7DE4BC6FFB44}"/>
               </a:ext>
             </a:extLst>
           </p:cNvPr>
@@ -11232,7 +11232,7 @@
           <p:cNvPr id="13" name="TextBox 12">
             <a:extLst xmlns:a="http://schemas.openxmlformats.org/drawingml/2006/main">
               <a:ext uri="{FF2B5EF4-FFF2-40B4-BE49-F238E27FC236}">
-                <a16:creationId xmlns:a16="http://schemas.microsoft.com/office/drawing/2014/main" id="{E62EE113-969D-407B-825C-3132CB3377D1}"/>
+                <a16:creationId xmlns:a16="http://schemas.microsoft.com/office/drawing/2014/main" id="{45DC56F6-09A5-49E6-A2DB-0FCB21DA90F2}"/>
               </a:ext>
             </a:extLst>
           </p:cNvPr>
@@ -11279,7 +11279,7 @@
           <p:cNvPr id="14" name="Rounded Rectangle 13">
             <a:extLst xmlns:a="http://schemas.openxmlformats.org/drawingml/2006/main">
               <a:ext uri="{FF2B5EF4-FFF2-40B4-BE49-F238E27FC236}">
-                <a16:creationId xmlns:a16="http://schemas.microsoft.com/office/drawing/2014/main" id="{7BA74F93-D88D-41D7-A1B2-20F837A23EB0}"/>
+                <a16:creationId xmlns:a16="http://schemas.microsoft.com/office/drawing/2014/main" id="{2756AD2B-0114-45E2-91E5-0BF89409043A}"/>
               </a:ext>
             </a:extLst>
           </p:cNvPr>
@@ -11336,7 +11336,7 @@
           <p:cNvPr id="15" name="TextBox 14">
             <a:extLst xmlns:a="http://schemas.openxmlformats.org/drawingml/2006/main">
               <a:ext uri="{FF2B5EF4-FFF2-40B4-BE49-F238E27FC236}">
-                <a16:creationId xmlns:a16="http://schemas.microsoft.com/office/drawing/2014/main" id="{BEB30840-9E14-4A8C-9176-F06010DB6B88}"/>
+                <a16:creationId xmlns:a16="http://schemas.microsoft.com/office/drawing/2014/main" id="{9F65BCB2-A0C5-4AB6-88C8-72682E1FD520}"/>
               </a:ext>
             </a:extLst>
           </p:cNvPr>
@@ -11383,7 +11383,7 @@
           <p:cNvPr id="16" name="TextBox 15">
             <a:extLst xmlns:a="http://schemas.openxmlformats.org/drawingml/2006/main">
               <a:ext uri="{FF2B5EF4-FFF2-40B4-BE49-F238E27FC236}">
-                <a16:creationId xmlns:a16="http://schemas.microsoft.com/office/drawing/2014/main" id="{B8485583-19A1-4D4C-9BAF-9C8FF8547246}"/>
+                <a16:creationId xmlns:a16="http://schemas.microsoft.com/office/drawing/2014/main" id="{4EEB218D-D4C4-407F-9E50-D5C83F44AFAD}"/>
               </a:ext>
             </a:extLst>
           </p:cNvPr>
@@ -11430,7 +11430,7 @@
           <p:cNvPr id="17" name="TextBox 16">
             <a:extLst xmlns:a="http://schemas.openxmlformats.org/drawingml/2006/main">
               <a:ext uri="{FF2B5EF4-FFF2-40B4-BE49-F238E27FC236}">
-                <a16:creationId xmlns:a16="http://schemas.microsoft.com/office/drawing/2014/main" id="{AD8C9A76-BB88-4F24-BD1E-BAA9E41BE018}"/>
+                <a16:creationId xmlns:a16="http://schemas.microsoft.com/office/drawing/2014/main" id="{9676DB7A-FB68-4EF5-9C0B-27DFE1ADA4A2}"/>
               </a:ext>
             </a:extLst>
           </p:cNvPr>
@@ -11477,7 +11477,7 @@
           <p:cNvPr id="18" name="Rounded Rectangle 17">
             <a:extLst xmlns:a="http://schemas.openxmlformats.org/drawingml/2006/main">
               <a:ext uri="{FF2B5EF4-FFF2-40B4-BE49-F238E27FC236}">
-                <a16:creationId xmlns:a16="http://schemas.microsoft.com/office/drawing/2014/main" id="{7BCC639B-BF51-4224-BDC9-D344A8110A7F}"/>
+                <a16:creationId xmlns:a16="http://schemas.microsoft.com/office/drawing/2014/main" id="{4376F999-8767-4F7F-906B-4292156B51E1}"/>
               </a:ext>
             </a:extLst>
           </p:cNvPr>
@@ -11534,7 +11534,7 @@
           <p:cNvPr id="19" name="TextBox 18">
             <a:extLst xmlns:a="http://schemas.openxmlformats.org/drawingml/2006/main">
               <a:ext uri="{FF2B5EF4-FFF2-40B4-BE49-F238E27FC236}">
-                <a16:creationId xmlns:a16="http://schemas.microsoft.com/office/drawing/2014/main" id="{2FC17345-52DF-4A4C-8C45-311FDA1F5FFD}"/>
+                <a16:creationId xmlns:a16="http://schemas.microsoft.com/office/drawing/2014/main" id="{29126942-8D9C-449D-B58D-286AAC19C731}"/>
               </a:ext>
             </a:extLst>
           </p:cNvPr>
@@ -11581,7 +11581,7 @@
           <p:cNvPr id="20" name="TextBox 19">
             <a:extLst xmlns:a="http://schemas.openxmlformats.org/drawingml/2006/main">
               <a:ext uri="{FF2B5EF4-FFF2-40B4-BE49-F238E27FC236}">
-                <a16:creationId xmlns:a16="http://schemas.microsoft.com/office/drawing/2014/main" id="{1E62CAD9-0FCB-4528-BACE-89D9AA676C49}"/>
+                <a16:creationId xmlns:a16="http://schemas.microsoft.com/office/drawing/2014/main" id="{48AB02D8-696A-4850-B066-7646C1CDD8F9}"/>
               </a:ext>
             </a:extLst>
           </p:cNvPr>
@@ -11626,7 +11626,7 @@
     </p:spTree>
     <p:extLst>
       <p:ext uri="{BB962C8B-B14F-4D97-AF65-F5344CB8AC3E}">
-        <p14:creationId xmlns:p14="http://schemas.microsoft.com/office/powerpoint/2010/main" val="1519826926"/>
+        <p14:creationId xmlns:p14="http://schemas.microsoft.com/office/powerpoint/2010/main" val="715578794"/>
       </p:ext>
     </p:extLst>
   </p:cSld>
@@ -11650,7 +11650,7 @@
           <p:cNvPr id="2" name="TextBox 1">
             <a:extLst xmlns:a="http://schemas.openxmlformats.org/drawingml/2006/main">
               <a:ext uri="{FF2B5EF4-FFF2-40B4-BE49-F238E27FC236}">
-                <a16:creationId xmlns:a16="http://schemas.microsoft.com/office/drawing/2014/main" id="{8D65EAEF-A6F8-407C-A504-BA17FC0B5949}"/>
+                <a16:creationId xmlns:a16="http://schemas.microsoft.com/office/drawing/2014/main" id="{C4C7550A-8542-41CC-8FBA-E529CC0C1E30}"/>
               </a:ext>
             </a:extLst>
           </p:cNvPr>
@@ -11697,7 +11697,7 @@
           <p:cNvPr id="3" name="TextBox 2">
             <a:extLst xmlns:a="http://schemas.openxmlformats.org/drawingml/2006/main">
               <a:ext uri="{FF2B5EF4-FFF2-40B4-BE49-F238E27FC236}">
-                <a16:creationId xmlns:a16="http://schemas.microsoft.com/office/drawing/2014/main" id="{5CC9A443-5AA4-47B1-84BC-787CCE65C8E5}"/>
+                <a16:creationId xmlns:a16="http://schemas.microsoft.com/office/drawing/2014/main" id="{033764A2-582F-4E04-AD99-4F7E4DD0AD3A}"/>
               </a:ext>
             </a:extLst>
           </p:cNvPr>
@@ -11744,7 +11744,7 @@
           <p:cNvPr id="4" name="Rectangle 3">
             <a:extLst xmlns:a="http://schemas.openxmlformats.org/drawingml/2006/main">
               <a:ext uri="{FF2B5EF4-FFF2-40B4-BE49-F238E27FC236}">
-                <a16:creationId xmlns:a16="http://schemas.microsoft.com/office/drawing/2014/main" id="{FD8E738D-4F77-4672-85B0-55B4A1B8090D}"/>
+                <a16:creationId xmlns:a16="http://schemas.microsoft.com/office/drawing/2014/main" id="{45780169-EB79-4F2C-BF69-07AD813C10EA}"/>
               </a:ext>
             </a:extLst>
           </p:cNvPr>
@@ -11799,7 +11799,7 @@
           <p:cNvPr id="5" name="Rectangle 4">
             <a:extLst xmlns:a="http://schemas.openxmlformats.org/drawingml/2006/main">
               <a:ext uri="{FF2B5EF4-FFF2-40B4-BE49-F238E27FC236}">
-                <a16:creationId xmlns:a16="http://schemas.microsoft.com/office/drawing/2014/main" id="{EC9CDACA-DC8F-4F9A-B1E2-9AD858DFAA50}"/>
+                <a16:creationId xmlns:a16="http://schemas.microsoft.com/office/drawing/2014/main" id="{391A70FB-04CA-4F09-A211-5D4E153FC43A}"/>
               </a:ext>
             </a:extLst>
           </p:cNvPr>
@@ -11854,7 +11854,7 @@
           <p:cNvPr id="6" name="TextBox 5">
             <a:extLst xmlns:a="http://schemas.openxmlformats.org/drawingml/2006/main">
               <a:ext uri="{FF2B5EF4-FFF2-40B4-BE49-F238E27FC236}">
-                <a16:creationId xmlns:a16="http://schemas.microsoft.com/office/drawing/2014/main" id="{F78A6F79-77C7-4D8C-A976-7E15F118826A}"/>
+                <a16:creationId xmlns:a16="http://schemas.microsoft.com/office/drawing/2014/main" id="{C4DF6528-A362-45D0-B02E-4D6212B96C46}"/>
               </a:ext>
             </a:extLst>
           </p:cNvPr>
@@ -11891,7 +11891,7 @@
                 <a:ea typeface="Aptos"/>
                 <a:cs typeface="Aptos"/>
               </a:rPr>
-              <a:t>Independent public evidence summary · 2026.07.23-10 · 2026-07-22 · Sources: WIPO licensing; WIPO IP Finance</a:t>
+              <a:t>Independent public evidence summary · 2026.07.23-11 · 2026-07-22 · Sources: WIPO licensing; WIPO IP Finance</a:t>
             </a:r>
           </a:p>
         </p:txBody>
@@ -11901,7 +11901,7 @@
           <p:cNvPr id="7" name="TextBox 6">
             <a:extLst xmlns:a="http://schemas.openxmlformats.org/drawingml/2006/main">
               <a:ext uri="{FF2B5EF4-FFF2-40B4-BE49-F238E27FC236}">
-                <a16:creationId xmlns:a16="http://schemas.microsoft.com/office/drawing/2014/main" id="{C41B1EED-C567-4FD9-9668-92FD553E1AB1}"/>
+                <a16:creationId xmlns:a16="http://schemas.microsoft.com/office/drawing/2014/main" id="{4D95E206-7002-4C68-AC12-430C69A6C6D1}"/>
               </a:ext>
             </a:extLst>
           </p:cNvPr>
@@ -11948,7 +11948,7 @@
           <p:cNvPr id="8" name="TextBox 7">
             <a:extLst xmlns:a="http://schemas.openxmlformats.org/drawingml/2006/main">
               <a:ext uri="{FF2B5EF4-FFF2-40B4-BE49-F238E27FC236}">
-                <a16:creationId xmlns:a16="http://schemas.microsoft.com/office/drawing/2014/main" id="{69F897BC-7E92-4614-8824-7FA6C4618BDF}"/>
+                <a16:creationId xmlns:a16="http://schemas.microsoft.com/office/drawing/2014/main" id="{7E150CE5-47CA-4BF3-A9B9-5B13C22013C4}"/>
               </a:ext>
             </a:extLst>
           </p:cNvPr>
@@ -11995,7 +11995,7 @@
           <p:cNvPr id="9" name="TextBox 8">
             <a:extLst xmlns:a="http://schemas.openxmlformats.org/drawingml/2006/main">
               <a:ext uri="{FF2B5EF4-FFF2-40B4-BE49-F238E27FC236}">
-                <a16:creationId xmlns:a16="http://schemas.microsoft.com/office/drawing/2014/main" id="{43E1FE68-6CB5-4762-B818-9B45FBA13635}"/>
+                <a16:creationId xmlns:a16="http://schemas.microsoft.com/office/drawing/2014/main" id="{BF66880D-2F4F-4694-97C4-5ECC482CC04C}"/>
               </a:ext>
             </a:extLst>
           </p:cNvPr>
@@ -12092,7 +12092,7 @@
           <p:cNvPr id="10" name="Rounded Rectangle 9">
             <a:extLst xmlns:a="http://schemas.openxmlformats.org/drawingml/2006/main">
               <a:ext uri="{FF2B5EF4-FFF2-40B4-BE49-F238E27FC236}">
-                <a16:creationId xmlns:a16="http://schemas.microsoft.com/office/drawing/2014/main" id="{B6BCF434-04F0-45A9-B4E8-272FCCE5A76C}"/>
+                <a16:creationId xmlns:a16="http://schemas.microsoft.com/office/drawing/2014/main" id="{A114455E-590D-4126-B355-61A8446D73E4}"/>
               </a:ext>
             </a:extLst>
           </p:cNvPr>
@@ -12149,7 +12149,7 @@
           <p:cNvPr id="11" name="TextBox 10">
             <a:extLst xmlns:a="http://schemas.openxmlformats.org/drawingml/2006/main">
               <a:ext uri="{FF2B5EF4-FFF2-40B4-BE49-F238E27FC236}">
-                <a16:creationId xmlns:a16="http://schemas.microsoft.com/office/drawing/2014/main" id="{BDF1939F-32EB-433A-9CB5-E21CF1AF484D}"/>
+                <a16:creationId xmlns:a16="http://schemas.microsoft.com/office/drawing/2014/main" id="{579D2693-F275-4BA5-BD28-65ECD16D7BD5}"/>
               </a:ext>
             </a:extLst>
           </p:cNvPr>
@@ -12196,7 +12196,7 @@
           <p:cNvPr id="12" name="TextBox 11">
             <a:extLst xmlns:a="http://schemas.openxmlformats.org/drawingml/2006/main">
               <a:ext uri="{FF2B5EF4-FFF2-40B4-BE49-F238E27FC236}">
-                <a16:creationId xmlns:a16="http://schemas.microsoft.com/office/drawing/2014/main" id="{4A77A1D1-D0AF-420E-A6AE-AEFD2090D2E4}"/>
+                <a16:creationId xmlns:a16="http://schemas.microsoft.com/office/drawing/2014/main" id="{5A81DE4F-774F-403F-AF39-A6EDB9242BD8}"/>
               </a:ext>
             </a:extLst>
           </p:cNvPr>
@@ -12241,7 +12241,7 @@
     </p:spTree>
     <p:extLst>
       <p:ext uri="{BB962C8B-B14F-4D97-AF65-F5344CB8AC3E}">
-        <p14:creationId xmlns:p14="http://schemas.microsoft.com/office/powerpoint/2010/main" val="1891481567"/>
+        <p14:creationId xmlns:p14="http://schemas.microsoft.com/office/powerpoint/2010/main" val="1609656464"/>
       </p:ext>
     </p:extLst>
   </p:cSld>
@@ -12265,7 +12265,7 @@
           <p:cNvPr id="2" name="TextBox 1">
             <a:extLst xmlns:a="http://schemas.openxmlformats.org/drawingml/2006/main">
               <a:ext uri="{FF2B5EF4-FFF2-40B4-BE49-F238E27FC236}">
-                <a16:creationId xmlns:a16="http://schemas.microsoft.com/office/drawing/2014/main" id="{7FFB4F40-13A2-44FC-9050-A94A98C7773C}"/>
+                <a16:creationId xmlns:a16="http://schemas.microsoft.com/office/drawing/2014/main" id="{AF00A7F1-9F9E-4DEE-9CC7-FEDEB27DBC57}"/>
               </a:ext>
             </a:extLst>
           </p:cNvPr>
@@ -12312,7 +12312,7 @@
           <p:cNvPr id="3" name="TextBox 2">
             <a:extLst xmlns:a="http://schemas.openxmlformats.org/drawingml/2006/main">
               <a:ext uri="{FF2B5EF4-FFF2-40B4-BE49-F238E27FC236}">
-                <a16:creationId xmlns:a16="http://schemas.microsoft.com/office/drawing/2014/main" id="{4DC83234-5AFB-4066-A79A-37B3B826B643}"/>
+                <a16:creationId xmlns:a16="http://schemas.microsoft.com/office/drawing/2014/main" id="{48CF5143-A092-465E-92B2-12BCEC1D22C7}"/>
               </a:ext>
             </a:extLst>
           </p:cNvPr>
@@ -12359,7 +12359,7 @@
           <p:cNvPr id="4" name="Rectangle 3">
             <a:extLst xmlns:a="http://schemas.openxmlformats.org/drawingml/2006/main">
               <a:ext uri="{FF2B5EF4-FFF2-40B4-BE49-F238E27FC236}">
-                <a16:creationId xmlns:a16="http://schemas.microsoft.com/office/drawing/2014/main" id="{0EB47BB9-5DB5-49B8-84F3-B60D913218F4}"/>
+                <a16:creationId xmlns:a16="http://schemas.microsoft.com/office/drawing/2014/main" id="{A3226DB1-DBEF-48DA-A4BF-87F825584027}"/>
               </a:ext>
             </a:extLst>
           </p:cNvPr>
@@ -12414,7 +12414,7 @@
           <p:cNvPr id="5" name="Rectangle 4">
             <a:extLst xmlns:a="http://schemas.openxmlformats.org/drawingml/2006/main">
               <a:ext uri="{FF2B5EF4-FFF2-40B4-BE49-F238E27FC236}">
-                <a16:creationId xmlns:a16="http://schemas.microsoft.com/office/drawing/2014/main" id="{7983DEA1-BD92-4B48-ACFF-288F8D6523FB}"/>
+                <a16:creationId xmlns:a16="http://schemas.microsoft.com/office/drawing/2014/main" id="{8C81C7C5-EE05-4CE1-9E79-690F76306F4A}"/>
               </a:ext>
             </a:extLst>
           </p:cNvPr>
@@ -12469,7 +12469,7 @@
           <p:cNvPr id="6" name="TextBox 5">
             <a:extLst xmlns:a="http://schemas.openxmlformats.org/drawingml/2006/main">
               <a:ext uri="{FF2B5EF4-FFF2-40B4-BE49-F238E27FC236}">
-                <a16:creationId xmlns:a16="http://schemas.microsoft.com/office/drawing/2014/main" id="{DA514F6E-134F-402C-8DC8-E58EFD9C8371}"/>
+                <a16:creationId xmlns:a16="http://schemas.microsoft.com/office/drawing/2014/main" id="{93F89525-4EA5-44E5-8433-2117D7F5ABCD}"/>
               </a:ext>
             </a:extLst>
           </p:cNvPr>
@@ -12506,7 +12506,7 @@
                 <a:ea typeface="Aptos"/>
                 <a:cs typeface="Aptos"/>
               </a:rPr>
-              <a:t>Independent public evidence summary · 2026.07.23-10 · 2026-07-22 · Sources: Evidence Register; EPO; WIPO</a:t>
+              <a:t>Independent public evidence summary · 2026.07.23-11 · 2026-07-22 · Sources: Evidence Register; EPO; WIPO</a:t>
             </a:r>
           </a:p>
         </p:txBody>
@@ -12516,7 +12516,7 @@
           <p:cNvPr id="7" name="TextBox 6">
             <a:extLst xmlns:a="http://schemas.openxmlformats.org/drawingml/2006/main">
               <a:ext uri="{FF2B5EF4-FFF2-40B4-BE49-F238E27FC236}">
-                <a16:creationId xmlns:a16="http://schemas.microsoft.com/office/drawing/2014/main" id="{BC45C712-AC73-49CB-8F96-623FFB668771}"/>
+                <a16:creationId xmlns:a16="http://schemas.microsoft.com/office/drawing/2014/main" id="{96D99C54-3529-45E2-875E-4190EACD2395}"/>
               </a:ext>
             </a:extLst>
           </p:cNvPr>
@@ -13003,7 +13003,7 @@
           <p:cNvPr id="9" name="TextBox 8">
             <a:extLst xmlns:a="http://schemas.openxmlformats.org/drawingml/2006/main">
               <a:ext uri="{FF2B5EF4-FFF2-40B4-BE49-F238E27FC236}">
-                <a16:creationId xmlns:a16="http://schemas.microsoft.com/office/drawing/2014/main" id="{A64ACA7F-D9D7-42A8-9B47-0BD874D576B4}"/>
+                <a16:creationId xmlns:a16="http://schemas.microsoft.com/office/drawing/2014/main" id="{B985358E-BFAC-42DF-B4BD-169715B5BB53}"/>
               </a:ext>
             </a:extLst>
           </p:cNvPr>
@@ -13048,7 +13048,7 @@
     </p:spTree>
     <p:extLst>
       <p:ext uri="{BB962C8B-B14F-4D97-AF65-F5344CB8AC3E}">
-        <p14:creationId xmlns:p14="http://schemas.microsoft.com/office/powerpoint/2010/main" val="846039600"/>
+        <p14:creationId xmlns:p14="http://schemas.microsoft.com/office/powerpoint/2010/main" val="1394461259"/>
       </p:ext>
     </p:extLst>
   </p:cSld>
@@ -13072,7 +13072,7 @@
           <p:cNvPr id="2" name="TextBox 1">
             <a:extLst xmlns:a="http://schemas.openxmlformats.org/drawingml/2006/main">
               <a:ext uri="{FF2B5EF4-FFF2-40B4-BE49-F238E27FC236}">
-                <a16:creationId xmlns:a16="http://schemas.microsoft.com/office/drawing/2014/main" id="{0E6A03A2-13E2-4BCB-AF32-6BAB4EEA8BCC}"/>
+                <a16:creationId xmlns:a16="http://schemas.microsoft.com/office/drawing/2014/main" id="{4D064CEB-4F67-45E1-9160-799BB9D584CF}"/>
               </a:ext>
             </a:extLst>
           </p:cNvPr>
@@ -13119,7 +13119,7 @@
           <p:cNvPr id="3" name="TextBox 2">
             <a:extLst xmlns:a="http://schemas.openxmlformats.org/drawingml/2006/main">
               <a:ext uri="{FF2B5EF4-FFF2-40B4-BE49-F238E27FC236}">
-                <a16:creationId xmlns:a16="http://schemas.microsoft.com/office/drawing/2014/main" id="{BC85A523-9B65-4F82-B6F1-9FF5DBE8B493}"/>
+                <a16:creationId xmlns:a16="http://schemas.microsoft.com/office/drawing/2014/main" id="{7E76542A-03FD-498D-B368-72509507E98E}"/>
               </a:ext>
             </a:extLst>
           </p:cNvPr>
@@ -13166,7 +13166,7 @@
           <p:cNvPr id="4" name="Rectangle 3">
             <a:extLst xmlns:a="http://schemas.openxmlformats.org/drawingml/2006/main">
               <a:ext uri="{FF2B5EF4-FFF2-40B4-BE49-F238E27FC236}">
-                <a16:creationId xmlns:a16="http://schemas.microsoft.com/office/drawing/2014/main" id="{B94693CB-F4EC-4A73-993A-523A5B5012C7}"/>
+                <a16:creationId xmlns:a16="http://schemas.microsoft.com/office/drawing/2014/main" id="{F715F480-1243-4079-ADC4-8193534DE956}"/>
               </a:ext>
             </a:extLst>
           </p:cNvPr>
@@ -13221,7 +13221,7 @@
           <p:cNvPr id="5" name="Rectangle 4">
             <a:extLst xmlns:a="http://schemas.openxmlformats.org/drawingml/2006/main">
               <a:ext uri="{FF2B5EF4-FFF2-40B4-BE49-F238E27FC236}">
-                <a16:creationId xmlns:a16="http://schemas.microsoft.com/office/drawing/2014/main" id="{AF54C567-24C1-4578-8DBE-104FCFB012A4}"/>
+                <a16:creationId xmlns:a16="http://schemas.microsoft.com/office/drawing/2014/main" id="{49B0FEEA-926F-4EE8-8186-71578450B4C4}"/>
               </a:ext>
             </a:extLst>
           </p:cNvPr>
@@ -13276,7 +13276,7 @@
           <p:cNvPr id="6" name="TextBox 5">
             <a:extLst xmlns:a="http://schemas.openxmlformats.org/drawingml/2006/main">
               <a:ext uri="{FF2B5EF4-FFF2-40B4-BE49-F238E27FC236}">
-                <a16:creationId xmlns:a16="http://schemas.microsoft.com/office/drawing/2014/main" id="{BFC1FB61-0C74-4872-A15D-A5260F370126}"/>
+                <a16:creationId xmlns:a16="http://schemas.microsoft.com/office/drawing/2014/main" id="{F0A343A8-5120-4982-87D6-E35B0FA4C3C8}"/>
               </a:ext>
             </a:extLst>
           </p:cNvPr>
@@ -13313,7 +13313,7 @@
                 <a:ea typeface="Aptos"/>
                 <a:cs typeface="Aptos"/>
               </a:rPr>
-              <a:t>Independent public evidence summary · 2026.07.23-10 · 2026-07-22 · Sources: Evidence Register</a:t>
+              <a:t>Independent public evidence summary · 2026.07.23-11 · 2026-07-22 · Sources: Evidence Register</a:t>
             </a:r>
           </a:p>
         </p:txBody>
@@ -13323,7 +13323,7 @@
           <p:cNvPr id="7" name="TextBox 6">
             <a:extLst xmlns:a="http://schemas.openxmlformats.org/drawingml/2006/main">
               <a:ext uri="{FF2B5EF4-FFF2-40B4-BE49-F238E27FC236}">
-                <a16:creationId xmlns:a16="http://schemas.microsoft.com/office/drawing/2014/main" id="{08FB5066-5E5F-441E-8040-0B89F8CF7D7C}"/>
+                <a16:creationId xmlns:a16="http://schemas.microsoft.com/office/drawing/2014/main" id="{218468D7-5449-4B90-AC26-F2B3018FF55A}"/>
               </a:ext>
             </a:extLst>
           </p:cNvPr>
@@ -14056,7 +14056,7 @@
           <p:cNvPr id="9" name="TextBox 8">
             <a:extLst xmlns:a="http://schemas.openxmlformats.org/drawingml/2006/main">
               <a:ext uri="{FF2B5EF4-FFF2-40B4-BE49-F238E27FC236}">
-                <a16:creationId xmlns:a16="http://schemas.microsoft.com/office/drawing/2014/main" id="{299F3F8A-EB95-49A7-8867-3BC1632D5C71}"/>
+                <a16:creationId xmlns:a16="http://schemas.microsoft.com/office/drawing/2014/main" id="{04A44E05-CC9E-4B98-9DEA-D60C4A0B61D9}"/>
               </a:ext>
             </a:extLst>
           </p:cNvPr>
@@ -14101,7 +14101,7 @@
     </p:spTree>
     <p:extLst>
       <p:ext uri="{BB962C8B-B14F-4D97-AF65-F5344CB8AC3E}">
-        <p14:creationId xmlns:p14="http://schemas.microsoft.com/office/powerpoint/2010/main" val="701863637"/>
+        <p14:creationId xmlns:p14="http://schemas.microsoft.com/office/powerpoint/2010/main" val="590008159"/>
       </p:ext>
     </p:extLst>
   </p:cSld>

--- a/site/downloads/pixan-bank-deck-medium-en.pptx
+++ b/site/downloads/pixan-bank-deck-medium-en.pptx
@@ -2,24 +2,24 @@
 <file path=ppt/presentation.xml><?xml version="1.0" encoding="utf-8"?>
 <p:presentation xmlns:p="http://schemas.openxmlformats.org/presentationml/2006/main">
   <p:sldMasterIdLst>
-    <p:sldMasterId xmlns:r="http://schemas.openxmlformats.org/officeDocument/2006/relationships" id="2147483648" r:id="R170ea3ef70684201"/>
+    <p:sldMasterId xmlns:r="http://schemas.openxmlformats.org/officeDocument/2006/relationships" id="2147483648" r:id="Re8950e66db7641e3"/>
   </p:sldMasterIdLst>
   <p:notesMasterIdLst>
-    <p:notesMasterId xmlns:r="http://schemas.openxmlformats.org/officeDocument/2006/relationships" r:id="Rcbde520b7dbf41f6"/>
+    <p:notesMasterId xmlns:r="http://schemas.openxmlformats.org/officeDocument/2006/relationships" r:id="R3c59e577b8534459"/>
   </p:notesMasterIdLst>
   <p:sldIdLst>
-    <p:sldId xmlns:r="http://schemas.openxmlformats.org/officeDocument/2006/relationships" id="256" r:id="Rd27d8e1fa45f413d"/>
-    <p:sldId xmlns:r="http://schemas.openxmlformats.org/officeDocument/2006/relationships" id="257" r:id="Re4511d65aeea4b31"/>
-    <p:sldId xmlns:r="http://schemas.openxmlformats.org/officeDocument/2006/relationships" id="258" r:id="Ra0fb34e1034c46a1"/>
-    <p:sldId xmlns:r="http://schemas.openxmlformats.org/officeDocument/2006/relationships" id="259" r:id="R747d7aa8feef4702"/>
-    <p:sldId xmlns:r="http://schemas.openxmlformats.org/officeDocument/2006/relationships" id="260" r:id="R78747f5de97a4899"/>
-    <p:sldId xmlns:r="http://schemas.openxmlformats.org/officeDocument/2006/relationships" id="261" r:id="Ref76cfd06afa4beb"/>
-    <p:sldId xmlns:r="http://schemas.openxmlformats.org/officeDocument/2006/relationships" id="262" r:id="R7c3a3613304b4412"/>
-    <p:sldId xmlns:r="http://schemas.openxmlformats.org/officeDocument/2006/relationships" id="263" r:id="R0a51a747e12845ac"/>
-    <p:sldId xmlns:r="http://schemas.openxmlformats.org/officeDocument/2006/relationships" id="264" r:id="Ra7df97079dd94334"/>
-    <p:sldId xmlns:r="http://schemas.openxmlformats.org/officeDocument/2006/relationships" id="265" r:id="R701cbe5626e14245"/>
-    <p:sldId xmlns:r="http://schemas.openxmlformats.org/officeDocument/2006/relationships" id="266" r:id="R1137636998544cdd"/>
-    <p:sldId xmlns:r="http://schemas.openxmlformats.org/officeDocument/2006/relationships" id="267" r:id="R217c440fe5464433"/>
+    <p:sldId xmlns:r="http://schemas.openxmlformats.org/officeDocument/2006/relationships" id="256" r:id="R6c25fff6dbd449e8"/>
+    <p:sldId xmlns:r="http://schemas.openxmlformats.org/officeDocument/2006/relationships" id="257" r:id="Rc2f8e31eea644adb"/>
+    <p:sldId xmlns:r="http://schemas.openxmlformats.org/officeDocument/2006/relationships" id="258" r:id="Rc4a265a4f5d347a0"/>
+    <p:sldId xmlns:r="http://schemas.openxmlformats.org/officeDocument/2006/relationships" id="259" r:id="R630799ef19334ea6"/>
+    <p:sldId xmlns:r="http://schemas.openxmlformats.org/officeDocument/2006/relationships" id="260" r:id="Rbd86723219b1433c"/>
+    <p:sldId xmlns:r="http://schemas.openxmlformats.org/officeDocument/2006/relationships" id="261" r:id="Rf174d2d197ae4672"/>
+    <p:sldId xmlns:r="http://schemas.openxmlformats.org/officeDocument/2006/relationships" id="262" r:id="R1bfd6b5142104633"/>
+    <p:sldId xmlns:r="http://schemas.openxmlformats.org/officeDocument/2006/relationships" id="263" r:id="R25794c2777c54097"/>
+    <p:sldId xmlns:r="http://schemas.openxmlformats.org/officeDocument/2006/relationships" id="264" r:id="R9a8dbe2eb7904c22"/>
+    <p:sldId xmlns:r="http://schemas.openxmlformats.org/officeDocument/2006/relationships" id="265" r:id="R965b25e2bb00466e"/>
+    <p:sldId xmlns:r="http://schemas.openxmlformats.org/officeDocument/2006/relationships" id="266" r:id="Rf86100370cd14802"/>
+    <p:sldId xmlns:r="http://schemas.openxmlformats.org/officeDocument/2006/relationships" id="267" r:id="R5c90c1e07b064d66"/>
   </p:sldIdLst>
   <p:sldSz cx="12191999" cy="6858000"/>
   <p:notesSz cx="6858000" cy="9144000"/>
@@ -1340,7 +1340,7 @@
           <p:cNvPr id="2" name="Title 1">
             <a:extLst xmlns:a="http://schemas.openxmlformats.org/drawingml/2006/main">
               <a:ext uri="{FF2B5EF4-FFF2-40B4-BE49-F238E27FC236}">
-                <a16:creationId xmlns:a16="http://schemas.microsoft.com/office/drawing/2014/main" id="{776263AD-E3B4-46D7-877A-982F3B88319C}"/>
+                <a16:creationId xmlns:a16="http://schemas.microsoft.com/office/drawing/2014/main" id="{E4957C14-670F-46D7-8B87-4CC0467905DC}"/>
               </a:ext>
             </a:extLst>
           </p:cNvPr>
@@ -1372,7 +1372,7 @@
           <p:cNvPr id="3" name="Subtitle 2">
             <a:extLst xmlns:a="http://schemas.openxmlformats.org/drawingml/2006/main">
               <a:ext uri="{FF2B5EF4-FFF2-40B4-BE49-F238E27FC236}">
-                <a16:creationId xmlns:a16="http://schemas.microsoft.com/office/drawing/2014/main" id="{FACC7FBF-4DE3-41D6-B8FD-E1B81E795BCA}"/>
+                <a16:creationId xmlns:a16="http://schemas.microsoft.com/office/drawing/2014/main" id="{068D6137-98A1-4F60-A251-11A3913CEB2F}"/>
               </a:ext>
             </a:extLst>
           </p:cNvPr>
@@ -1495,7 +1495,7 @@
           <p:cNvPr id="4" name="Date Placeholder 3">
             <a:extLst xmlns:a="http://schemas.openxmlformats.org/drawingml/2006/main">
               <a:ext uri="{FF2B5EF4-FFF2-40B4-BE49-F238E27FC236}">
-                <a16:creationId xmlns:a16="http://schemas.microsoft.com/office/drawing/2014/main" id="{8BE6738D-CA81-4F57-9AFE-C2B7D7AB4873}"/>
+                <a16:creationId xmlns:a16="http://schemas.microsoft.com/office/drawing/2014/main" id="{65A8C5CA-449E-4AD2-B479-90B8523DB520}"/>
               </a:ext>
             </a:extLst>
           </p:cNvPr>
@@ -1522,7 +1522,7 @@
           <p:cNvPr id="5" name="Footer Placeholder 4">
             <a:extLst xmlns:a="http://schemas.openxmlformats.org/drawingml/2006/main">
               <a:ext uri="{FF2B5EF4-FFF2-40B4-BE49-F238E27FC236}">
-                <a16:creationId xmlns:a16="http://schemas.microsoft.com/office/drawing/2014/main" id="{99DF5AC3-F31B-4FCC-8F1C-D30D7A1DD4ED}"/>
+                <a16:creationId xmlns:a16="http://schemas.microsoft.com/office/drawing/2014/main" id="{8AC10442-61B6-4C4F-A423-0F35D39C5CB2}"/>
               </a:ext>
             </a:extLst>
           </p:cNvPr>
@@ -1545,7 +1545,7 @@
           <p:cNvPr id="6" name="Slide Number Placeholder 5">
             <a:extLst xmlns:a="http://schemas.openxmlformats.org/drawingml/2006/main">
               <a:ext uri="{FF2B5EF4-FFF2-40B4-BE49-F238E27FC236}">
-                <a16:creationId xmlns:a16="http://schemas.microsoft.com/office/drawing/2014/main" id="{2809C113-4725-4129-8244-3C4A216556D1}"/>
+                <a16:creationId xmlns:a16="http://schemas.microsoft.com/office/drawing/2014/main" id="{9FA686EA-B2AD-4BA6-BFC4-008F99C014B2}"/>
               </a:ext>
             </a:extLst>
           </p:cNvPr>
@@ -1589,7 +1589,7 @@
           <p:cNvPr id="2" name="Title 1">
             <a:extLst xmlns:a="http://schemas.openxmlformats.org/drawingml/2006/main">
               <a:ext uri="{FF2B5EF4-FFF2-40B4-BE49-F238E27FC236}">
-                <a16:creationId xmlns:a16="http://schemas.microsoft.com/office/drawing/2014/main" id="{26D9DA22-1BDE-403C-A126-C6EC16223695}"/>
+                <a16:creationId xmlns:a16="http://schemas.microsoft.com/office/drawing/2014/main" id="{71EF2F70-EAB4-4A7C-8ABC-511B7742CA1B}"/>
               </a:ext>
             </a:extLst>
           </p:cNvPr>
@@ -1616,7 +1616,7 @@
           <p:cNvPr id="3" name="Vertical Text Placeholder 2">
             <a:extLst xmlns:a="http://schemas.openxmlformats.org/drawingml/2006/main">
               <a:ext uri="{FF2B5EF4-FFF2-40B4-BE49-F238E27FC236}">
-                <a16:creationId xmlns:a16="http://schemas.microsoft.com/office/drawing/2014/main" id="{D04ADDBF-30AF-468E-9B13-071F7A560305}"/>
+                <a16:creationId xmlns:a16="http://schemas.microsoft.com/office/drawing/2014/main" id="{DCB2996A-B160-4431-A568-21FCDF3DE790}"/>
               </a:ext>
             </a:extLst>
           </p:cNvPr>
@@ -1678,7 +1678,7 @@
           <p:cNvPr id="4" name="Date Placeholder 3">
             <a:extLst xmlns:a="http://schemas.openxmlformats.org/drawingml/2006/main">
               <a:ext uri="{FF2B5EF4-FFF2-40B4-BE49-F238E27FC236}">
-                <a16:creationId xmlns:a16="http://schemas.microsoft.com/office/drawing/2014/main" id="{7B8A8DD3-627C-41D2-B0D6-1E6E8068C69D}"/>
+                <a16:creationId xmlns:a16="http://schemas.microsoft.com/office/drawing/2014/main" id="{EFF37750-D69D-4640-BE19-E1D25C78683A}"/>
               </a:ext>
             </a:extLst>
           </p:cNvPr>
@@ -1705,7 +1705,7 @@
           <p:cNvPr id="5" name="Footer Placeholder 4">
             <a:extLst xmlns:a="http://schemas.openxmlformats.org/drawingml/2006/main">
               <a:ext uri="{FF2B5EF4-FFF2-40B4-BE49-F238E27FC236}">
-                <a16:creationId xmlns:a16="http://schemas.microsoft.com/office/drawing/2014/main" id="{7D12219D-43E6-4004-B8B2-E8D14CC5769B}"/>
+                <a16:creationId xmlns:a16="http://schemas.microsoft.com/office/drawing/2014/main" id="{914C2D51-EBA4-4607-B4A1-0C8DD52A98D1}"/>
               </a:ext>
             </a:extLst>
           </p:cNvPr>
@@ -1728,7 +1728,7 @@
           <p:cNvPr id="6" name="Slide Number Placeholder 5">
             <a:extLst xmlns:a="http://schemas.openxmlformats.org/drawingml/2006/main">
               <a:ext uri="{FF2B5EF4-FFF2-40B4-BE49-F238E27FC236}">
-                <a16:creationId xmlns:a16="http://schemas.microsoft.com/office/drawing/2014/main" id="{F7139771-A56C-46D7-BC0C-E96AE4CF850B}"/>
+                <a16:creationId xmlns:a16="http://schemas.microsoft.com/office/drawing/2014/main" id="{22AB5916-40A5-47DF-BBF1-9F0BBFF90B64}"/>
               </a:ext>
             </a:extLst>
           </p:cNvPr>
@@ -1772,7 +1772,7 @@
           <p:cNvPr id="2" name="Vertical Title 1">
             <a:extLst xmlns:a="http://schemas.openxmlformats.org/drawingml/2006/main">
               <a:ext uri="{FF2B5EF4-FFF2-40B4-BE49-F238E27FC236}">
-                <a16:creationId xmlns:a16="http://schemas.microsoft.com/office/drawing/2014/main" id="{FD285871-973B-449B-9AD9-2522A1479F8E}"/>
+                <a16:creationId xmlns:a16="http://schemas.microsoft.com/office/drawing/2014/main" id="{B857F54E-BDF5-4451-BB84-3B040F4FA8D2}"/>
               </a:ext>
             </a:extLst>
           </p:cNvPr>
@@ -1804,7 +1804,7 @@
           <p:cNvPr id="3" name="Vertical Text Placeholder 2">
             <a:extLst xmlns:a="http://schemas.openxmlformats.org/drawingml/2006/main">
               <a:ext uri="{FF2B5EF4-FFF2-40B4-BE49-F238E27FC236}">
-                <a16:creationId xmlns:a16="http://schemas.microsoft.com/office/drawing/2014/main" id="{E4223D60-A42E-4F74-B705-02435E097779}"/>
+                <a16:creationId xmlns:a16="http://schemas.microsoft.com/office/drawing/2014/main" id="{1489C2EA-776D-4256-A3C2-5E3296C15B2F}"/>
               </a:ext>
             </a:extLst>
           </p:cNvPr>
@@ -1871,7 +1871,7 @@
           <p:cNvPr id="4" name="Date Placeholder 3">
             <a:extLst xmlns:a="http://schemas.openxmlformats.org/drawingml/2006/main">
               <a:ext uri="{FF2B5EF4-FFF2-40B4-BE49-F238E27FC236}">
-                <a16:creationId xmlns:a16="http://schemas.microsoft.com/office/drawing/2014/main" id="{781E0CBA-84A2-4796-BFFF-34DB05228A37}"/>
+                <a16:creationId xmlns:a16="http://schemas.microsoft.com/office/drawing/2014/main" id="{A55A0AE2-4865-4186-8A4C-111EC4A10E51}"/>
               </a:ext>
             </a:extLst>
           </p:cNvPr>
@@ -1898,7 +1898,7 @@
           <p:cNvPr id="5" name="Footer Placeholder 4">
             <a:extLst xmlns:a="http://schemas.openxmlformats.org/drawingml/2006/main">
               <a:ext uri="{FF2B5EF4-FFF2-40B4-BE49-F238E27FC236}">
-                <a16:creationId xmlns:a16="http://schemas.microsoft.com/office/drawing/2014/main" id="{C81466AD-267B-40BF-A5D9-326CF140946F}"/>
+                <a16:creationId xmlns:a16="http://schemas.microsoft.com/office/drawing/2014/main" id="{1CF1E557-4A00-4330-AFA6-B500E9E6360A}"/>
               </a:ext>
             </a:extLst>
           </p:cNvPr>
@@ -1921,7 +1921,7 @@
           <p:cNvPr id="6" name="Slide Number Placeholder 5">
             <a:extLst xmlns:a="http://schemas.openxmlformats.org/drawingml/2006/main">
               <a:ext uri="{FF2B5EF4-FFF2-40B4-BE49-F238E27FC236}">
-                <a16:creationId xmlns:a16="http://schemas.microsoft.com/office/drawing/2014/main" id="{BDD7B6D8-DCD6-4E36-837B-2CFD15D57278}"/>
+                <a16:creationId xmlns:a16="http://schemas.microsoft.com/office/drawing/2014/main" id="{BAF04E28-0707-484F-91CB-AC50550612EB}"/>
               </a:ext>
             </a:extLst>
           </p:cNvPr>
@@ -1965,7 +1965,7 @@
           <p:cNvPr id="2" name="Title 1">
             <a:extLst xmlns:a="http://schemas.openxmlformats.org/drawingml/2006/main">
               <a:ext uri="{FF2B5EF4-FFF2-40B4-BE49-F238E27FC236}">
-                <a16:creationId xmlns:a16="http://schemas.microsoft.com/office/drawing/2014/main" id="{A609C5F2-66C6-411C-91F2-B41A52AB82FC}"/>
+                <a16:creationId xmlns:a16="http://schemas.microsoft.com/office/drawing/2014/main" id="{8112945D-023D-40D4-861D-409F3B436633}"/>
               </a:ext>
             </a:extLst>
           </p:cNvPr>
@@ -1992,7 +1992,7 @@
           <p:cNvPr id="3" name="Content Placeholder 2">
             <a:extLst xmlns:a="http://schemas.openxmlformats.org/drawingml/2006/main">
               <a:ext uri="{FF2B5EF4-FFF2-40B4-BE49-F238E27FC236}">
-                <a16:creationId xmlns:a16="http://schemas.microsoft.com/office/drawing/2014/main" id="{7EA4DF16-EFD6-4C8F-8061-6BDBCAC6C80B}"/>
+                <a16:creationId xmlns:a16="http://schemas.microsoft.com/office/drawing/2014/main" id="{5D8E58CD-33D9-492F-897F-B12E65D386D3}"/>
               </a:ext>
             </a:extLst>
           </p:cNvPr>
@@ -2054,7 +2054,7 @@
           <p:cNvPr id="4" name="Date Placeholder 3">
             <a:extLst xmlns:a="http://schemas.openxmlformats.org/drawingml/2006/main">
               <a:ext uri="{FF2B5EF4-FFF2-40B4-BE49-F238E27FC236}">
-                <a16:creationId xmlns:a16="http://schemas.microsoft.com/office/drawing/2014/main" id="{3809749E-6D1B-41E7-BEBA-2AD88FD50615}"/>
+                <a16:creationId xmlns:a16="http://schemas.microsoft.com/office/drawing/2014/main" id="{908CB6B6-2333-4352-9A5B-2634859A6A71}"/>
               </a:ext>
             </a:extLst>
           </p:cNvPr>
@@ -2081,7 +2081,7 @@
           <p:cNvPr id="5" name="Footer Placeholder 4">
             <a:extLst xmlns:a="http://schemas.openxmlformats.org/drawingml/2006/main">
               <a:ext uri="{FF2B5EF4-FFF2-40B4-BE49-F238E27FC236}">
-                <a16:creationId xmlns:a16="http://schemas.microsoft.com/office/drawing/2014/main" id="{CB28EEAE-0D0F-4CE7-8187-B7BA8A63421B}"/>
+                <a16:creationId xmlns:a16="http://schemas.microsoft.com/office/drawing/2014/main" id="{AB962E5D-B87B-491B-84AF-77D029ABFCA8}"/>
               </a:ext>
             </a:extLst>
           </p:cNvPr>
@@ -2104,7 +2104,7 @@
           <p:cNvPr id="6" name="Slide Number Placeholder 5">
             <a:extLst xmlns:a="http://schemas.openxmlformats.org/drawingml/2006/main">
               <a:ext uri="{FF2B5EF4-FFF2-40B4-BE49-F238E27FC236}">
-                <a16:creationId xmlns:a16="http://schemas.microsoft.com/office/drawing/2014/main" id="{110D0045-3E98-4247-A1FE-1C54CE1F27C2}"/>
+                <a16:creationId xmlns:a16="http://schemas.microsoft.com/office/drawing/2014/main" id="{1532B57D-D15C-4EF1-8D45-E0BA68DFC3DF}"/>
               </a:ext>
             </a:extLst>
           </p:cNvPr>
@@ -2148,7 +2148,7 @@
           <p:cNvPr id="2" name="Title 1">
             <a:extLst xmlns:a="http://schemas.openxmlformats.org/drawingml/2006/main">
               <a:ext uri="{FF2B5EF4-FFF2-40B4-BE49-F238E27FC236}">
-                <a16:creationId xmlns:a16="http://schemas.microsoft.com/office/drawing/2014/main" id="{08CC0FFE-F954-4EF1-865F-72E499983A9F}"/>
+                <a16:creationId xmlns:a16="http://schemas.microsoft.com/office/drawing/2014/main" id="{EF1D4B5E-A03F-4DF4-9783-4E79D0FF10FC}"/>
               </a:ext>
             </a:extLst>
           </p:cNvPr>
@@ -2185,7 +2185,7 @@
           <p:cNvPr id="3" name="Text Placeholder 2">
             <a:extLst xmlns:a="http://schemas.openxmlformats.org/drawingml/2006/main">
               <a:ext uri="{FF2B5EF4-FFF2-40B4-BE49-F238E27FC236}">
-                <a16:creationId xmlns:a16="http://schemas.microsoft.com/office/drawing/2014/main" id="{2B50A4D8-ECC6-4B9D-8DC0-0D2CD78EB139}"/>
+                <a16:creationId xmlns:a16="http://schemas.microsoft.com/office/drawing/2014/main" id="{8A78208E-3D0F-4EDD-B454-6DCF36A8A678}"/>
               </a:ext>
             </a:extLst>
           </p:cNvPr>
@@ -2311,7 +2311,7 @@
           <p:cNvPr id="4" name="Date Placeholder 3">
             <a:extLst xmlns:a="http://schemas.openxmlformats.org/drawingml/2006/main">
               <a:ext uri="{FF2B5EF4-FFF2-40B4-BE49-F238E27FC236}">
-                <a16:creationId xmlns:a16="http://schemas.microsoft.com/office/drawing/2014/main" id="{5C6B6AEF-0ED7-4DDD-9F08-FC0FB897C5BD}"/>
+                <a16:creationId xmlns:a16="http://schemas.microsoft.com/office/drawing/2014/main" id="{D8238160-51C0-496E-BDC4-5621B2AC87CE}"/>
               </a:ext>
             </a:extLst>
           </p:cNvPr>
@@ -2338,7 +2338,7 @@
           <p:cNvPr id="5" name="Footer Placeholder 4">
             <a:extLst xmlns:a="http://schemas.openxmlformats.org/drawingml/2006/main">
               <a:ext uri="{FF2B5EF4-FFF2-40B4-BE49-F238E27FC236}">
-                <a16:creationId xmlns:a16="http://schemas.microsoft.com/office/drawing/2014/main" id="{0C848AA4-F33E-4599-832E-A534A6629CE9}"/>
+                <a16:creationId xmlns:a16="http://schemas.microsoft.com/office/drawing/2014/main" id="{1CFAD14A-3E9E-4A27-8693-9648F7FA402B}"/>
               </a:ext>
             </a:extLst>
           </p:cNvPr>
@@ -2361,7 +2361,7 @@
           <p:cNvPr id="6" name="Slide Number Placeholder 5">
             <a:extLst xmlns:a="http://schemas.openxmlformats.org/drawingml/2006/main">
               <a:ext uri="{FF2B5EF4-FFF2-40B4-BE49-F238E27FC236}">
-                <a16:creationId xmlns:a16="http://schemas.microsoft.com/office/drawing/2014/main" id="{30C9921B-931F-40E7-A43E-E39497FC0E89}"/>
+                <a16:creationId xmlns:a16="http://schemas.microsoft.com/office/drawing/2014/main" id="{81B3FB06-9A1D-40E3-803F-95F421CC31B0}"/>
               </a:ext>
             </a:extLst>
           </p:cNvPr>
@@ -2405,7 +2405,7 @@
           <p:cNvPr id="2" name="Title 1">
             <a:extLst xmlns:a="http://schemas.openxmlformats.org/drawingml/2006/main">
               <a:ext uri="{FF2B5EF4-FFF2-40B4-BE49-F238E27FC236}">
-                <a16:creationId xmlns:a16="http://schemas.microsoft.com/office/drawing/2014/main" id="{1DFEBAC4-3FF8-4DEE-9C0B-BEC5D69E2079}"/>
+                <a16:creationId xmlns:a16="http://schemas.microsoft.com/office/drawing/2014/main" id="{52E4DBC3-68A1-4B5B-9955-FF2B27AB4A96}"/>
               </a:ext>
             </a:extLst>
           </p:cNvPr>
@@ -2432,7 +2432,7 @@
           <p:cNvPr id="3" name="Content Placeholder 2">
             <a:extLst xmlns:a="http://schemas.openxmlformats.org/drawingml/2006/main">
               <a:ext uri="{FF2B5EF4-FFF2-40B4-BE49-F238E27FC236}">
-                <a16:creationId xmlns:a16="http://schemas.microsoft.com/office/drawing/2014/main" id="{4E0DE634-0D1D-415D-AC8B-5D8AF517599D}"/>
+                <a16:creationId xmlns:a16="http://schemas.microsoft.com/office/drawing/2014/main" id="{D285B51C-1B1D-4CF2-8F9B-E0D8C58FA89F}"/>
               </a:ext>
             </a:extLst>
           </p:cNvPr>
@@ -2536,7 +2536,7 @@
           <p:cNvPr id="4" name="Content Placeholder 3">
             <a:extLst xmlns:a="http://schemas.openxmlformats.org/drawingml/2006/main">
               <a:ext uri="{FF2B5EF4-FFF2-40B4-BE49-F238E27FC236}">
-                <a16:creationId xmlns:a16="http://schemas.microsoft.com/office/drawing/2014/main" id="{4DFFE361-1F38-4B12-A4CB-85BC2C4EE141}"/>
+                <a16:creationId xmlns:a16="http://schemas.microsoft.com/office/drawing/2014/main" id="{F69BF90E-904C-4E2D-BF8B-B960B06D02DC}"/>
               </a:ext>
             </a:extLst>
           </p:cNvPr>
@@ -2640,7 +2640,7 @@
           <p:cNvPr id="5" name="Date Placeholder 4">
             <a:extLst xmlns:a="http://schemas.openxmlformats.org/drawingml/2006/main">
               <a:ext uri="{FF2B5EF4-FFF2-40B4-BE49-F238E27FC236}">
-                <a16:creationId xmlns:a16="http://schemas.microsoft.com/office/drawing/2014/main" id="{DFEA74F7-EAD9-48F0-BBB8-84B3531F5D2D}"/>
+                <a16:creationId xmlns:a16="http://schemas.microsoft.com/office/drawing/2014/main" id="{3671CCC6-98EC-4962-B378-3B09E4BA9B5A}"/>
               </a:ext>
             </a:extLst>
           </p:cNvPr>
@@ -2667,7 +2667,7 @@
           <p:cNvPr id="6" name="Footer Placeholder 5">
             <a:extLst xmlns:a="http://schemas.openxmlformats.org/drawingml/2006/main">
               <a:ext uri="{FF2B5EF4-FFF2-40B4-BE49-F238E27FC236}">
-                <a16:creationId xmlns:a16="http://schemas.microsoft.com/office/drawing/2014/main" id="{B06BB793-3969-4362-952D-5D8097BB2844}"/>
+                <a16:creationId xmlns:a16="http://schemas.microsoft.com/office/drawing/2014/main" id="{5C17C45A-4471-4C5E-A12F-330DD114427F}"/>
               </a:ext>
             </a:extLst>
           </p:cNvPr>
@@ -2690,7 +2690,7 @@
           <p:cNvPr id="7" name="Slide Number Placeholder 6">
             <a:extLst xmlns:a="http://schemas.openxmlformats.org/drawingml/2006/main">
               <a:ext uri="{FF2B5EF4-FFF2-40B4-BE49-F238E27FC236}">
-                <a16:creationId xmlns:a16="http://schemas.microsoft.com/office/drawing/2014/main" id="{0C77A0DE-17FB-4149-B85A-27DCEEBC9617}"/>
+                <a16:creationId xmlns:a16="http://schemas.microsoft.com/office/drawing/2014/main" id="{266D411D-AA13-462B-BBB5-EA282E8E3964}"/>
               </a:ext>
             </a:extLst>
           </p:cNvPr>
@@ -2734,7 +2734,7 @@
           <p:cNvPr id="2" name="Title 1">
             <a:extLst xmlns:a="http://schemas.openxmlformats.org/drawingml/2006/main">
               <a:ext uri="{FF2B5EF4-FFF2-40B4-BE49-F238E27FC236}">
-                <a16:creationId xmlns:a16="http://schemas.microsoft.com/office/drawing/2014/main" id="{6B892953-7DD9-4F92-AEAC-232671B1982C}"/>
+                <a16:creationId xmlns:a16="http://schemas.microsoft.com/office/drawing/2014/main" id="{7C2D7526-6045-4DD2-B335-5FB301C08FE7}"/>
               </a:ext>
             </a:extLst>
           </p:cNvPr>
@@ -2766,7 +2766,7 @@
           <p:cNvPr id="3" name="Text Placeholder 2">
             <a:extLst xmlns:a="http://schemas.openxmlformats.org/drawingml/2006/main">
               <a:ext uri="{FF2B5EF4-FFF2-40B4-BE49-F238E27FC236}">
-                <a16:creationId xmlns:a16="http://schemas.microsoft.com/office/drawing/2014/main" id="{8E3E7897-22CA-41FA-A823-1BA6C2E824A6}"/>
+                <a16:creationId xmlns:a16="http://schemas.microsoft.com/office/drawing/2014/main" id="{6DF82FEA-1894-49C0-8A9C-01934351773F}"/>
               </a:ext>
             </a:extLst>
           </p:cNvPr>
@@ -2838,7 +2838,7 @@
           <p:cNvPr id="4" name="Content Placeholder 3">
             <a:extLst xmlns:a="http://schemas.openxmlformats.org/drawingml/2006/main">
               <a:ext uri="{FF2B5EF4-FFF2-40B4-BE49-F238E27FC236}">
-                <a16:creationId xmlns:a16="http://schemas.microsoft.com/office/drawing/2014/main" id="{B0B9E777-687F-4496-BA6E-40CB2C74A4F3}"/>
+                <a16:creationId xmlns:a16="http://schemas.microsoft.com/office/drawing/2014/main" id="{2898A736-BC10-4040-B166-D17DB46165C8}"/>
               </a:ext>
             </a:extLst>
           </p:cNvPr>
@@ -2942,7 +2942,7 @@
           <p:cNvPr id="5" name="Text Placeholder 4">
             <a:extLst xmlns:a="http://schemas.openxmlformats.org/drawingml/2006/main">
               <a:ext uri="{FF2B5EF4-FFF2-40B4-BE49-F238E27FC236}">
-                <a16:creationId xmlns:a16="http://schemas.microsoft.com/office/drawing/2014/main" id="{D6ABE719-A3E6-4205-AE0F-BEA4E8E3E61F}"/>
+                <a16:creationId xmlns:a16="http://schemas.microsoft.com/office/drawing/2014/main" id="{DCD77CBD-A9E0-4A1D-BA0C-E7D588873C70}"/>
               </a:ext>
             </a:extLst>
           </p:cNvPr>
@@ -3014,7 +3014,7 @@
           <p:cNvPr id="6" name="Content Placeholder 5">
             <a:extLst xmlns:a="http://schemas.openxmlformats.org/drawingml/2006/main">
               <a:ext uri="{FF2B5EF4-FFF2-40B4-BE49-F238E27FC236}">
-                <a16:creationId xmlns:a16="http://schemas.microsoft.com/office/drawing/2014/main" id="{247DB147-27E3-4FEF-A8D7-1B906690F9BB}"/>
+                <a16:creationId xmlns:a16="http://schemas.microsoft.com/office/drawing/2014/main" id="{10C63289-9C45-47A2-9C9C-793B532D05E6}"/>
               </a:ext>
             </a:extLst>
           </p:cNvPr>
@@ -3118,7 +3118,7 @@
           <p:cNvPr id="7" name="Date Placeholder 6">
             <a:extLst xmlns:a="http://schemas.openxmlformats.org/drawingml/2006/main">
               <a:ext uri="{FF2B5EF4-FFF2-40B4-BE49-F238E27FC236}">
-                <a16:creationId xmlns:a16="http://schemas.microsoft.com/office/drawing/2014/main" id="{5DC74563-E3DD-4B57-994D-E5B147BD2709}"/>
+                <a16:creationId xmlns:a16="http://schemas.microsoft.com/office/drawing/2014/main" id="{621D6B36-5C1E-4CBE-A9A3-ED0F7F395860}"/>
               </a:ext>
             </a:extLst>
           </p:cNvPr>
@@ -3145,7 +3145,7 @@
           <p:cNvPr id="8" name="Footer Placeholder 7">
             <a:extLst xmlns:a="http://schemas.openxmlformats.org/drawingml/2006/main">
               <a:ext uri="{FF2B5EF4-FFF2-40B4-BE49-F238E27FC236}">
-                <a16:creationId xmlns:a16="http://schemas.microsoft.com/office/drawing/2014/main" id="{AD7CAE3F-047F-40DB-8B22-5009530F1E6A}"/>
+                <a16:creationId xmlns:a16="http://schemas.microsoft.com/office/drawing/2014/main" id="{053E5973-9D0A-4D38-9ADD-73A007743ED8}"/>
               </a:ext>
             </a:extLst>
           </p:cNvPr>
@@ -3168,7 +3168,7 @@
           <p:cNvPr id="9" name="Slide Number Placeholder 8">
             <a:extLst xmlns:a="http://schemas.openxmlformats.org/drawingml/2006/main">
               <a:ext uri="{FF2B5EF4-FFF2-40B4-BE49-F238E27FC236}">
-                <a16:creationId xmlns:a16="http://schemas.microsoft.com/office/drawing/2014/main" id="{BE89C373-5D9F-4069-AE25-DDF8A164AF10}"/>
+                <a16:creationId xmlns:a16="http://schemas.microsoft.com/office/drawing/2014/main" id="{8E26B628-0794-4797-B1CA-E4A83F699BC4}"/>
               </a:ext>
             </a:extLst>
           </p:cNvPr>
@@ -3212,7 +3212,7 @@
           <p:cNvPr id="2" name="Title 1">
             <a:extLst xmlns:a="http://schemas.openxmlformats.org/drawingml/2006/main">
               <a:ext uri="{FF2B5EF4-FFF2-40B4-BE49-F238E27FC236}">
-                <a16:creationId xmlns:a16="http://schemas.microsoft.com/office/drawing/2014/main" id="{620FCFA1-0BC3-409F-ADAE-1284ED303C21}"/>
+                <a16:creationId xmlns:a16="http://schemas.microsoft.com/office/drawing/2014/main" id="{50899AF0-EF0A-44BC-82E1-739EAB98564E}"/>
               </a:ext>
             </a:extLst>
           </p:cNvPr>
@@ -3239,7 +3239,7 @@
           <p:cNvPr id="3" name="Date Placeholder 2">
             <a:extLst xmlns:a="http://schemas.openxmlformats.org/drawingml/2006/main">
               <a:ext uri="{FF2B5EF4-FFF2-40B4-BE49-F238E27FC236}">
-                <a16:creationId xmlns:a16="http://schemas.microsoft.com/office/drawing/2014/main" id="{B77738E4-88C7-4D57-8B1D-DC4491CC414A}"/>
+                <a16:creationId xmlns:a16="http://schemas.microsoft.com/office/drawing/2014/main" id="{ED9F2F0D-0315-43DD-94E4-B2DEFF0280BA}"/>
               </a:ext>
             </a:extLst>
           </p:cNvPr>
@@ -3266,7 +3266,7 @@
           <p:cNvPr id="4" name="Footer Placeholder 3">
             <a:extLst xmlns:a="http://schemas.openxmlformats.org/drawingml/2006/main">
               <a:ext uri="{FF2B5EF4-FFF2-40B4-BE49-F238E27FC236}">
-                <a16:creationId xmlns:a16="http://schemas.microsoft.com/office/drawing/2014/main" id="{757DF375-91C1-4F42-8031-3C9E2C26F8FC}"/>
+                <a16:creationId xmlns:a16="http://schemas.microsoft.com/office/drawing/2014/main" id="{7F1D1C02-FBD5-464D-BDC3-11F781ECAE81}"/>
               </a:ext>
             </a:extLst>
           </p:cNvPr>
@@ -3289,7 +3289,7 @@
           <p:cNvPr id="5" name="Slide Number Placeholder 4">
             <a:extLst xmlns:a="http://schemas.openxmlformats.org/drawingml/2006/main">
               <a:ext uri="{FF2B5EF4-FFF2-40B4-BE49-F238E27FC236}">
-                <a16:creationId xmlns:a16="http://schemas.microsoft.com/office/drawing/2014/main" id="{8262FB1F-D0F2-4D33-885D-0C03903C6729}"/>
+                <a16:creationId xmlns:a16="http://schemas.microsoft.com/office/drawing/2014/main" id="{AA9057F8-9255-4A2A-ABFC-EB62F7E95F99}"/>
               </a:ext>
             </a:extLst>
           </p:cNvPr>
@@ -3333,7 +3333,7 @@
           <p:cNvPr id="2" name="Date Placeholder 1">
             <a:extLst xmlns:a="http://schemas.openxmlformats.org/drawingml/2006/main">
               <a:ext uri="{FF2B5EF4-FFF2-40B4-BE49-F238E27FC236}">
-                <a16:creationId xmlns:a16="http://schemas.microsoft.com/office/drawing/2014/main" id="{BB3EB146-9B25-4C9E-B414-5723FDAAB68D}"/>
+                <a16:creationId xmlns:a16="http://schemas.microsoft.com/office/drawing/2014/main" id="{F96CC8AF-B9B8-4888-867C-302B74E27B00}"/>
               </a:ext>
             </a:extLst>
           </p:cNvPr>
@@ -3360,7 +3360,7 @@
           <p:cNvPr id="3" name="Footer Placeholder 2">
             <a:extLst xmlns:a="http://schemas.openxmlformats.org/drawingml/2006/main">
               <a:ext uri="{FF2B5EF4-FFF2-40B4-BE49-F238E27FC236}">
-                <a16:creationId xmlns:a16="http://schemas.microsoft.com/office/drawing/2014/main" id="{E75C86DF-BF4E-46DA-BA73-C0CFEEDB512E}"/>
+                <a16:creationId xmlns:a16="http://schemas.microsoft.com/office/drawing/2014/main" id="{638D2251-93A0-41EF-B84F-2D911F4910C1}"/>
               </a:ext>
             </a:extLst>
           </p:cNvPr>
@@ -3383,7 +3383,7 @@
           <p:cNvPr id="4" name="Slide Number Placeholder 3">
             <a:extLst xmlns:a="http://schemas.openxmlformats.org/drawingml/2006/main">
               <a:ext uri="{FF2B5EF4-FFF2-40B4-BE49-F238E27FC236}">
-                <a16:creationId xmlns:a16="http://schemas.microsoft.com/office/drawing/2014/main" id="{6E77E01F-525D-4717-962D-49904D3C36A4}"/>
+                <a16:creationId xmlns:a16="http://schemas.microsoft.com/office/drawing/2014/main" id="{FEC508B6-EE10-489E-A3DB-0ABF4E08332D}"/>
               </a:ext>
             </a:extLst>
           </p:cNvPr>
@@ -3427,7 +3427,7 @@
           <p:cNvPr id="2" name="Title 1">
             <a:extLst xmlns:a="http://schemas.openxmlformats.org/drawingml/2006/main">
               <a:ext uri="{FF2B5EF4-FFF2-40B4-BE49-F238E27FC236}">
-                <a16:creationId xmlns:a16="http://schemas.microsoft.com/office/drawing/2014/main" id="{A92394BC-1BAE-4DAA-AF44-EE9FB67F9463}"/>
+                <a16:creationId xmlns:a16="http://schemas.microsoft.com/office/drawing/2014/main" id="{81EFEECF-230E-4B83-BE6B-AF46D23F201D}"/>
               </a:ext>
             </a:extLst>
           </p:cNvPr>
@@ -3464,7 +3464,7 @@
           <p:cNvPr id="3" name="Content Placeholder 2">
             <a:extLst xmlns:a="http://schemas.openxmlformats.org/drawingml/2006/main">
               <a:ext uri="{FF2B5EF4-FFF2-40B4-BE49-F238E27FC236}">
-                <a16:creationId xmlns:a16="http://schemas.microsoft.com/office/drawing/2014/main" id="{B6C5967C-2992-4399-8DCE-796ACC003FBB}"/>
+                <a16:creationId xmlns:a16="http://schemas.microsoft.com/office/drawing/2014/main" id="{904C5D9D-36F5-4685-929C-56B174132C75}"/>
               </a:ext>
             </a:extLst>
           </p:cNvPr>
@@ -3568,7 +3568,7 @@
           <p:cNvPr id="4" name="Text Placeholder 3">
             <a:extLst xmlns:a="http://schemas.openxmlformats.org/drawingml/2006/main">
               <a:ext uri="{FF2B5EF4-FFF2-40B4-BE49-F238E27FC236}">
-                <a16:creationId xmlns:a16="http://schemas.microsoft.com/office/drawing/2014/main" id="{1A111206-CAFA-4206-83E4-4E619EE7E47E}"/>
+                <a16:creationId xmlns:a16="http://schemas.microsoft.com/office/drawing/2014/main" id="{5ED24B24-AF6B-44AF-9C39-75524047EA1D}"/>
               </a:ext>
             </a:extLst>
           </p:cNvPr>
@@ -3640,7 +3640,7 @@
           <p:cNvPr id="5" name="Date Placeholder 4">
             <a:extLst xmlns:a="http://schemas.openxmlformats.org/drawingml/2006/main">
               <a:ext uri="{FF2B5EF4-FFF2-40B4-BE49-F238E27FC236}">
-                <a16:creationId xmlns:a16="http://schemas.microsoft.com/office/drawing/2014/main" id="{3B4EA0FD-7467-4675-8020-0051A56C852A}"/>
+                <a16:creationId xmlns:a16="http://schemas.microsoft.com/office/drawing/2014/main" id="{FFC42EAF-5111-4E76-8682-EC5294B86AA2}"/>
               </a:ext>
             </a:extLst>
           </p:cNvPr>
@@ -3667,7 +3667,7 @@
           <p:cNvPr id="6" name="Footer Placeholder 5">
             <a:extLst xmlns:a="http://schemas.openxmlformats.org/drawingml/2006/main">
               <a:ext uri="{FF2B5EF4-FFF2-40B4-BE49-F238E27FC236}">
-                <a16:creationId xmlns:a16="http://schemas.microsoft.com/office/drawing/2014/main" id="{AE99FBF6-A54D-4EBA-905E-4E81F11B88E9}"/>
+                <a16:creationId xmlns:a16="http://schemas.microsoft.com/office/drawing/2014/main" id="{288F05F0-183A-4819-A44B-0FF1DF65C2B7}"/>
               </a:ext>
             </a:extLst>
           </p:cNvPr>
@@ -3690,7 +3690,7 @@
           <p:cNvPr id="7" name="Slide Number Placeholder 6">
             <a:extLst xmlns:a="http://schemas.openxmlformats.org/drawingml/2006/main">
               <a:ext uri="{FF2B5EF4-FFF2-40B4-BE49-F238E27FC236}">
-                <a16:creationId xmlns:a16="http://schemas.microsoft.com/office/drawing/2014/main" id="{B233937E-F063-4387-AAC5-D2FC23FADF71}"/>
+                <a16:creationId xmlns:a16="http://schemas.microsoft.com/office/drawing/2014/main" id="{F49B3241-06C8-4118-9AFD-59CC346F4AED}"/>
               </a:ext>
             </a:extLst>
           </p:cNvPr>
@@ -3734,7 +3734,7 @@
           <p:cNvPr id="2" name="Title 1">
             <a:extLst xmlns:a="http://schemas.openxmlformats.org/drawingml/2006/main">
               <a:ext uri="{FF2B5EF4-FFF2-40B4-BE49-F238E27FC236}">
-                <a16:creationId xmlns:a16="http://schemas.microsoft.com/office/drawing/2014/main" id="{2E2783B5-68A6-434F-B2A4-605881DC5BB0}"/>
+                <a16:creationId xmlns:a16="http://schemas.microsoft.com/office/drawing/2014/main" id="{7C870695-6AC9-4FB4-85C6-CD28FFD43085}"/>
               </a:ext>
             </a:extLst>
           </p:cNvPr>
@@ -3771,7 +3771,7 @@
           <p:cNvPr id="3" name="Picture Placeholder 2">
             <a:extLst xmlns:a="http://schemas.openxmlformats.org/drawingml/2006/main">
               <a:ext uri="{FF2B5EF4-FFF2-40B4-BE49-F238E27FC236}">
-                <a16:creationId xmlns:a16="http://schemas.microsoft.com/office/drawing/2014/main" id="{F5EBB54A-FB4B-41BE-983C-202B74F3B201}"/>
+                <a16:creationId xmlns:a16="http://schemas.microsoft.com/office/drawing/2014/main" id="{15DF0524-4F07-482B-9CBE-3D9A65DCF1C6}"/>
               </a:ext>
             </a:extLst>
           </p:cNvPr>
@@ -3836,7 +3836,7 @@
           <p:cNvPr id="4" name="Text Placeholder 3">
             <a:extLst xmlns:a="http://schemas.openxmlformats.org/drawingml/2006/main">
               <a:ext uri="{FF2B5EF4-FFF2-40B4-BE49-F238E27FC236}">
-                <a16:creationId xmlns:a16="http://schemas.microsoft.com/office/drawing/2014/main" id="{D2F9880B-AB49-4F00-A02A-2E0ADBB0CA52}"/>
+                <a16:creationId xmlns:a16="http://schemas.microsoft.com/office/drawing/2014/main" id="{1A340798-E07C-40EA-BE06-CE74300FF492}"/>
               </a:ext>
             </a:extLst>
           </p:cNvPr>
@@ -3908,7 +3908,7 @@
           <p:cNvPr id="5" name="Date Placeholder 4">
             <a:extLst xmlns:a="http://schemas.openxmlformats.org/drawingml/2006/main">
               <a:ext uri="{FF2B5EF4-FFF2-40B4-BE49-F238E27FC236}">
-                <a16:creationId xmlns:a16="http://schemas.microsoft.com/office/drawing/2014/main" id="{3E91476B-2B95-48D4-BE20-10224C4B9855}"/>
+                <a16:creationId xmlns:a16="http://schemas.microsoft.com/office/drawing/2014/main" id="{E68C2C7A-C783-4114-BAFE-63B2C053A7D2}"/>
               </a:ext>
             </a:extLst>
           </p:cNvPr>
@@ -3935,7 +3935,7 @@
           <p:cNvPr id="6" name="Footer Placeholder 5">
             <a:extLst xmlns:a="http://schemas.openxmlformats.org/drawingml/2006/main">
               <a:ext uri="{FF2B5EF4-FFF2-40B4-BE49-F238E27FC236}">
-                <a16:creationId xmlns:a16="http://schemas.microsoft.com/office/drawing/2014/main" id="{0EA51C61-94EC-4F87-8BAD-850F4CC933C5}"/>
+                <a16:creationId xmlns:a16="http://schemas.microsoft.com/office/drawing/2014/main" id="{76447A56-B292-47D7-9B8D-79E81C7E87EF}"/>
               </a:ext>
             </a:extLst>
           </p:cNvPr>
@@ -3958,7 +3958,7 @@
           <p:cNvPr id="7" name="Slide Number Placeholder 6">
             <a:extLst xmlns:a="http://schemas.openxmlformats.org/drawingml/2006/main">
               <a:ext uri="{FF2B5EF4-FFF2-40B4-BE49-F238E27FC236}">
-                <a16:creationId xmlns:a16="http://schemas.microsoft.com/office/drawing/2014/main" id="{CF2D1B9C-3C68-4C56-A54A-A4FDF222631D}"/>
+                <a16:creationId xmlns:a16="http://schemas.microsoft.com/office/drawing/2014/main" id="{F36E96CE-F3BF-4F0F-9396-4425FA59F015}"/>
               </a:ext>
             </a:extLst>
           </p:cNvPr>
@@ -4007,7 +4007,7 @@
           <p:cNvPr id="2" name="Title Placeholder 1">
             <a:extLst xmlns:a="http://schemas.openxmlformats.org/drawingml/2006/main">
               <a:ext uri="{FF2B5EF4-FFF2-40B4-BE49-F238E27FC236}">
-                <a16:creationId xmlns:a16="http://schemas.microsoft.com/office/drawing/2014/main" id="{51E68BD2-F289-41EF-AE2F-A9723A70539E}"/>
+                <a16:creationId xmlns:a16="http://schemas.microsoft.com/office/drawing/2014/main" id="{583F3319-40FD-4A28-9042-3A104DA67D6A}"/>
               </a:ext>
             </a:extLst>
           </p:cNvPr>
@@ -4044,7 +4044,7 @@
           <p:cNvPr id="3" name="Text Placeholder 2">
             <a:extLst xmlns:a="http://schemas.openxmlformats.org/drawingml/2006/main">
               <a:ext uri="{FF2B5EF4-FFF2-40B4-BE49-F238E27FC236}">
-                <a16:creationId xmlns:a16="http://schemas.microsoft.com/office/drawing/2014/main" id="{7CF8C628-D8E9-4A41-8A71-3DC425F5756A}"/>
+                <a16:creationId xmlns:a16="http://schemas.microsoft.com/office/drawing/2014/main" id="{1F0451B0-8B82-4A90-9EAA-2D436D0875CE}"/>
               </a:ext>
             </a:extLst>
           </p:cNvPr>
@@ -4116,7 +4116,7 @@
           <p:cNvPr id="4" name="Date Placeholder 3">
             <a:extLst xmlns:a="http://schemas.openxmlformats.org/drawingml/2006/main">
               <a:ext uri="{FF2B5EF4-FFF2-40B4-BE49-F238E27FC236}">
-                <a16:creationId xmlns:a16="http://schemas.microsoft.com/office/drawing/2014/main" id="{AAC77D11-3CA5-4205-A849-460894210BE6}"/>
+                <a16:creationId xmlns:a16="http://schemas.microsoft.com/office/drawing/2014/main" id="{34CB029A-F10B-41B9-8AA4-683B9EBB1695}"/>
               </a:ext>
             </a:extLst>
           </p:cNvPr>
@@ -4162,7 +4162,7 @@
           <p:cNvPr id="5" name="Footer Placeholder 4">
             <a:extLst xmlns:a="http://schemas.openxmlformats.org/drawingml/2006/main">
               <a:ext uri="{FF2B5EF4-FFF2-40B4-BE49-F238E27FC236}">
-                <a16:creationId xmlns:a16="http://schemas.microsoft.com/office/drawing/2014/main" id="{D6B95F20-A07F-4961-8EBB-AE61E70CF1AE}"/>
+                <a16:creationId xmlns:a16="http://schemas.microsoft.com/office/drawing/2014/main" id="{C2862877-1D46-4840-AEAE-5DE1C21DE06A}"/>
               </a:ext>
             </a:extLst>
           </p:cNvPr>
@@ -4204,7 +4204,7 @@
           <p:cNvPr id="6" name="Slide Number Placeholder 5">
             <a:extLst xmlns:a="http://schemas.openxmlformats.org/drawingml/2006/main">
               <a:ext uri="{FF2B5EF4-FFF2-40B4-BE49-F238E27FC236}">
-                <a16:creationId xmlns:a16="http://schemas.microsoft.com/office/drawing/2014/main" id="{01721ED7-8A72-4390-AB82-A3371BD03142}"/>
+                <a16:creationId xmlns:a16="http://schemas.microsoft.com/office/drawing/2014/main" id="{291F8C90-7554-4616-9E94-8C14E0288376}"/>
               </a:ext>
             </a:extLst>
           </p:cNvPr>
@@ -4249,17 +4249,17 @@
   </p:cSld>
   <p:clrMap bg1="lt1" tx1="dk1" bg2="lt2" tx2="dk2" accent1="accent1" accent2="accent2" accent3="accent3" accent4="accent4" accent5="accent5" accent6="accent6" hlink="hlink" folHlink="folHlink"/>
   <p:sldLayoutIdLst>
-    <p:sldLayoutId xmlns:r="http://schemas.openxmlformats.org/officeDocument/2006/relationships" id="2147483649" r:id="Re59925fa353c4c44"/>
-    <p:sldLayoutId xmlns:r="http://schemas.openxmlformats.org/officeDocument/2006/relationships" id="2147483650" r:id="Rb3468bf2d03541fc"/>
-    <p:sldLayoutId xmlns:r="http://schemas.openxmlformats.org/officeDocument/2006/relationships" id="2147483651" r:id="R246e0b2f42354266"/>
-    <p:sldLayoutId xmlns:r="http://schemas.openxmlformats.org/officeDocument/2006/relationships" id="2147483652" r:id="Rd7f82dd04ecc486f"/>
-    <p:sldLayoutId xmlns:r="http://schemas.openxmlformats.org/officeDocument/2006/relationships" id="2147483653" r:id="Rf494981a8c9d41a7"/>
-    <p:sldLayoutId xmlns:r="http://schemas.openxmlformats.org/officeDocument/2006/relationships" id="2147483654" r:id="R03b19798db5b4647"/>
-    <p:sldLayoutId xmlns:r="http://schemas.openxmlformats.org/officeDocument/2006/relationships" id="2147483655" r:id="R0825125513104f80"/>
-    <p:sldLayoutId xmlns:r="http://schemas.openxmlformats.org/officeDocument/2006/relationships" id="2147483656" r:id="Rc91a830bd3a3440b"/>
-    <p:sldLayoutId xmlns:r="http://schemas.openxmlformats.org/officeDocument/2006/relationships" id="2147483657" r:id="R1232f4c040a1439f"/>
-    <p:sldLayoutId xmlns:r="http://schemas.openxmlformats.org/officeDocument/2006/relationships" id="2147483658" r:id="R559380bb6931498a"/>
-    <p:sldLayoutId xmlns:r="http://schemas.openxmlformats.org/officeDocument/2006/relationships" id="2147483659" r:id="R9b72b3cebda64fff"/>
+    <p:sldLayoutId xmlns:r="http://schemas.openxmlformats.org/officeDocument/2006/relationships" id="2147483649" r:id="R2c9e1d3c1ca94bf2"/>
+    <p:sldLayoutId xmlns:r="http://schemas.openxmlformats.org/officeDocument/2006/relationships" id="2147483650" r:id="R8f21fc178e4e486e"/>
+    <p:sldLayoutId xmlns:r="http://schemas.openxmlformats.org/officeDocument/2006/relationships" id="2147483651" r:id="Rb4a0ea070fd34842"/>
+    <p:sldLayoutId xmlns:r="http://schemas.openxmlformats.org/officeDocument/2006/relationships" id="2147483652" r:id="Re9dbcfe5a3be4eda"/>
+    <p:sldLayoutId xmlns:r="http://schemas.openxmlformats.org/officeDocument/2006/relationships" id="2147483653" r:id="Ra5a797ed88ed4c7d"/>
+    <p:sldLayoutId xmlns:r="http://schemas.openxmlformats.org/officeDocument/2006/relationships" id="2147483654" r:id="Re49b11345d1e4a53"/>
+    <p:sldLayoutId xmlns:r="http://schemas.openxmlformats.org/officeDocument/2006/relationships" id="2147483655" r:id="Ra07d9e840b3b4075"/>
+    <p:sldLayoutId xmlns:r="http://schemas.openxmlformats.org/officeDocument/2006/relationships" id="2147483656" r:id="R2e95faa8429e4e25"/>
+    <p:sldLayoutId xmlns:r="http://schemas.openxmlformats.org/officeDocument/2006/relationships" id="2147483657" r:id="Ra1252d046973425a"/>
+    <p:sldLayoutId xmlns:r="http://schemas.openxmlformats.org/officeDocument/2006/relationships" id="2147483658" r:id="R2d5427bc35134676"/>
+    <p:sldLayoutId xmlns:r="http://schemas.openxmlformats.org/officeDocument/2006/relationships" id="2147483659" r:id="R0b283c502908482a"/>
   </p:sldLayoutIdLst>
   <p:txStyles>
     <p:titleStyle>
@@ -4812,7 +4812,7 @@
           <p:cNvPr id="2" name="Rectangle 1">
             <a:extLst xmlns:a="http://schemas.openxmlformats.org/drawingml/2006/main">
               <a:ext uri="{FF2B5EF4-FFF2-40B4-BE49-F238E27FC236}">
-                <a16:creationId xmlns:a16="http://schemas.microsoft.com/office/drawing/2014/main" id="{1991B3E1-D381-411C-8F2A-13786B1F1C32}"/>
+                <a16:creationId xmlns:a16="http://schemas.microsoft.com/office/drawing/2014/main" id="{0310B872-6DA3-4786-ACBD-61D6D5F33734}"/>
               </a:ext>
             </a:extLst>
           </p:cNvPr>
@@ -4867,7 +4867,7 @@
           <p:cNvPr id="3" name="TextBox 2">
             <a:extLst xmlns:a="http://schemas.openxmlformats.org/drawingml/2006/main">
               <a:ext uri="{FF2B5EF4-FFF2-40B4-BE49-F238E27FC236}">
-                <a16:creationId xmlns:a16="http://schemas.microsoft.com/office/drawing/2014/main" id="{16F28E44-3346-4ACC-8A7E-D20FA315E859}"/>
+                <a16:creationId xmlns:a16="http://schemas.microsoft.com/office/drawing/2014/main" id="{D7EA2C1D-79BB-4AE6-B4B6-F73D94C68A4B}"/>
               </a:ext>
             </a:extLst>
           </p:cNvPr>
@@ -4914,7 +4914,7 @@
           <p:cNvPr id="4" name="TextBox 3">
             <a:extLst xmlns:a="http://schemas.openxmlformats.org/drawingml/2006/main">
               <a:ext uri="{FF2B5EF4-FFF2-40B4-BE49-F238E27FC236}">
-                <a16:creationId xmlns:a16="http://schemas.microsoft.com/office/drawing/2014/main" id="{8996D626-DEE3-486F-B6BB-55D11E33DCDE}"/>
+                <a16:creationId xmlns:a16="http://schemas.microsoft.com/office/drawing/2014/main" id="{0B86FA09-1686-465A-9244-4BA5A36241D3}"/>
               </a:ext>
             </a:extLst>
           </p:cNvPr>
@@ -4982,7 +4982,7 @@
           <p:cNvPr id="5" name="TextBox 4">
             <a:extLst xmlns:a="http://schemas.openxmlformats.org/drawingml/2006/main">
               <a:ext uri="{FF2B5EF4-FFF2-40B4-BE49-F238E27FC236}">
-                <a16:creationId xmlns:a16="http://schemas.microsoft.com/office/drawing/2014/main" id="{96AF5362-0C22-480E-8FA8-7D8FC7456B11}"/>
+                <a16:creationId xmlns:a16="http://schemas.microsoft.com/office/drawing/2014/main" id="{E21CAB8B-12B0-4384-B3BA-DD997CF6C53B}"/>
               </a:ext>
             </a:extLst>
           </p:cNvPr>
@@ -5029,7 +5029,7 @@
           <p:cNvPr id="6" name="Rectangle 5">
             <a:extLst xmlns:a="http://schemas.openxmlformats.org/drawingml/2006/main">
               <a:ext uri="{FF2B5EF4-FFF2-40B4-BE49-F238E27FC236}">
-                <a16:creationId xmlns:a16="http://schemas.microsoft.com/office/drawing/2014/main" id="{A67C47C0-DC35-4D82-9D36-7065A7E9311E}"/>
+                <a16:creationId xmlns:a16="http://schemas.microsoft.com/office/drawing/2014/main" id="{E4AC0778-903B-4EA7-B889-5E02C71F3326}"/>
               </a:ext>
             </a:extLst>
           </p:cNvPr>
@@ -5084,7 +5084,7 @@
           <p:cNvPr id="7" name="TextBox 6">
             <a:extLst xmlns:a="http://schemas.openxmlformats.org/drawingml/2006/main">
               <a:ext uri="{FF2B5EF4-FFF2-40B4-BE49-F238E27FC236}">
-                <a16:creationId xmlns:a16="http://schemas.microsoft.com/office/drawing/2014/main" id="{1A278FC5-0E7C-4C8B-81FD-B58993D1ECDE}"/>
+                <a16:creationId xmlns:a16="http://schemas.microsoft.com/office/drawing/2014/main" id="{C9AC3E29-03B4-4079-9037-0CB418AEAE8F}"/>
               </a:ext>
             </a:extLst>
           </p:cNvPr>
@@ -5131,7 +5131,7 @@
           <p:cNvPr id="8" name="TextBox 7">
             <a:extLst xmlns:a="http://schemas.openxmlformats.org/drawingml/2006/main">
               <a:ext uri="{FF2B5EF4-FFF2-40B4-BE49-F238E27FC236}">
-                <a16:creationId xmlns:a16="http://schemas.microsoft.com/office/drawing/2014/main" id="{067FE591-48DE-4EF6-A027-5E513614D7B0}"/>
+                <a16:creationId xmlns:a16="http://schemas.microsoft.com/office/drawing/2014/main" id="{11523C46-0477-4230-996D-FFF323CC9EB2}"/>
               </a:ext>
             </a:extLst>
           </p:cNvPr>
@@ -5168,7 +5168,7 @@
                 <a:ea typeface="Aptos"/>
                 <a:cs typeface="Aptos"/>
               </a:rPr>
-              <a:t>2026.07.23-11</a:t>
+              <a:t>2026.07.23-12</a:t>
             </a:r>
           </a:p>
         </p:txBody>
@@ -5178,7 +5178,7 @@
           <p:cNvPr id="9" name="TextBox 8">
             <a:extLst xmlns:a="http://schemas.openxmlformats.org/drawingml/2006/main">
               <a:ext uri="{FF2B5EF4-FFF2-40B4-BE49-F238E27FC236}">
-                <a16:creationId xmlns:a16="http://schemas.microsoft.com/office/drawing/2014/main" id="{B4DFB51F-7E2E-44B3-82C0-CAB5A77C694E}"/>
+                <a16:creationId xmlns:a16="http://schemas.microsoft.com/office/drawing/2014/main" id="{9CCEC84C-1016-43E2-8803-DC7F6173DA11}"/>
               </a:ext>
             </a:extLst>
           </p:cNvPr>
@@ -5246,7 +5246,7 @@
           <p:cNvPr id="10" name="TextBox 9">
             <a:extLst xmlns:a="http://schemas.openxmlformats.org/drawingml/2006/main">
               <a:ext uri="{FF2B5EF4-FFF2-40B4-BE49-F238E27FC236}">
-                <a16:creationId xmlns:a16="http://schemas.microsoft.com/office/drawing/2014/main" id="{2DED812A-99A6-4684-AF17-065238F4C849}"/>
+                <a16:creationId xmlns:a16="http://schemas.microsoft.com/office/drawing/2014/main" id="{6DA90246-F9C8-4C1B-80B3-B978E37354AB}"/>
               </a:ext>
             </a:extLst>
           </p:cNvPr>
@@ -5293,7 +5293,7 @@
           <p:cNvPr id="11" name="TextBox 10">
             <a:extLst xmlns:a="http://schemas.openxmlformats.org/drawingml/2006/main">
               <a:ext uri="{FF2B5EF4-FFF2-40B4-BE49-F238E27FC236}">
-                <a16:creationId xmlns:a16="http://schemas.microsoft.com/office/drawing/2014/main" id="{F3056DE4-AFBF-4A0E-BC28-60337EC186A4}"/>
+                <a16:creationId xmlns:a16="http://schemas.microsoft.com/office/drawing/2014/main" id="{045B86AF-B776-4B1A-8412-37147C4B4ED9}"/>
               </a:ext>
             </a:extLst>
           </p:cNvPr>
@@ -5340,7 +5340,7 @@
           <p:cNvPr id="12" name="TextBox 11">
             <a:extLst xmlns:a="http://schemas.openxmlformats.org/drawingml/2006/main">
               <a:ext uri="{FF2B5EF4-FFF2-40B4-BE49-F238E27FC236}">
-                <a16:creationId xmlns:a16="http://schemas.microsoft.com/office/drawing/2014/main" id="{F63EB4C8-0CFC-4E08-8F77-6CF4182FEA95}"/>
+                <a16:creationId xmlns:a16="http://schemas.microsoft.com/office/drawing/2014/main" id="{D397C0F0-B18B-4644-A33E-AC00C934C2AF}"/>
               </a:ext>
             </a:extLst>
           </p:cNvPr>
@@ -5387,7 +5387,7 @@
           <p:cNvPr id="13" name="TextBox 12">
             <a:extLst xmlns:a="http://schemas.openxmlformats.org/drawingml/2006/main">
               <a:ext uri="{FF2B5EF4-FFF2-40B4-BE49-F238E27FC236}">
-                <a16:creationId xmlns:a16="http://schemas.microsoft.com/office/drawing/2014/main" id="{4AC3D7D8-24C0-4126-8513-C925BE9E9EA1}"/>
+                <a16:creationId xmlns:a16="http://schemas.microsoft.com/office/drawing/2014/main" id="{388AA286-53C5-4C53-A233-37D0B051A4CC}"/>
               </a:ext>
             </a:extLst>
           </p:cNvPr>
@@ -5432,7 +5432,7 @@
     </p:spTree>
     <p:extLst>
       <p:ext uri="{BB962C8B-B14F-4D97-AF65-F5344CB8AC3E}">
-        <p14:creationId xmlns:p14="http://schemas.microsoft.com/office/powerpoint/2010/main" val="425192258"/>
+        <p14:creationId xmlns:p14="http://schemas.microsoft.com/office/powerpoint/2010/main" val="1442985194"/>
       </p:ext>
     </p:extLst>
   </p:cSld>
@@ -5456,7 +5456,7 @@
           <p:cNvPr id="2" name="TextBox 1">
             <a:extLst xmlns:a="http://schemas.openxmlformats.org/drawingml/2006/main">
               <a:ext uri="{FF2B5EF4-FFF2-40B4-BE49-F238E27FC236}">
-                <a16:creationId xmlns:a16="http://schemas.microsoft.com/office/drawing/2014/main" id="{77C9587F-153F-4E31-996D-3ABD47088968}"/>
+                <a16:creationId xmlns:a16="http://schemas.microsoft.com/office/drawing/2014/main" id="{B809E5AD-1496-4F96-B74F-FF6E780E5BA6}"/>
               </a:ext>
             </a:extLst>
           </p:cNvPr>
@@ -5503,7 +5503,7 @@
           <p:cNvPr id="3" name="TextBox 2">
             <a:extLst xmlns:a="http://schemas.openxmlformats.org/drawingml/2006/main">
               <a:ext uri="{FF2B5EF4-FFF2-40B4-BE49-F238E27FC236}">
-                <a16:creationId xmlns:a16="http://schemas.microsoft.com/office/drawing/2014/main" id="{1F593444-62DC-49CD-A4E1-C1D8C9447B1D}"/>
+                <a16:creationId xmlns:a16="http://schemas.microsoft.com/office/drawing/2014/main" id="{AF7B1F6C-5C42-42B9-A42C-BB623BBC1048}"/>
               </a:ext>
             </a:extLst>
           </p:cNvPr>
@@ -5523,8 +5523,8 @@
           <a:noFill xmlns:a="http://schemas.openxmlformats.org/drawingml/2006/main"/>
         </p:spPr>
         <p:txBody>
-          <a:bodyPr xmlns:a="http://schemas.openxmlformats.org/drawingml/2006/main" wrap="square" lIns="36576" tIns="36576" rIns="36576" bIns="36576" anchor="t">
-            <a:spAutoFit/>
+          <a:bodyPr xmlns:a="http://schemas.openxmlformats.org/drawingml/2006/main" wrap="none" lIns="36576" tIns="36576" rIns="36576" bIns="36576" anchor="t">
+            <a:noAutofit/>
           </a:bodyPr>
           <a:lstStyle xmlns:a="http://schemas.openxmlformats.org/drawingml/2006/main"/>
           <a:p xmlns:a="http://schemas.openxmlformats.org/drawingml/2006/main">
@@ -5532,7 +5532,7 @@
               <a:buNone/>
             </a:pPr>
             <a:r>
-              <a:rPr sz="3400" b="1">
+              <a:rPr sz="2738" b="1">
                 <a:solidFill>
                   <a:srgbClr val="071A2B"/>
                 </a:solidFill>
@@ -5550,7 +5550,7 @@
           <p:cNvPr id="4" name="Rectangle 3">
             <a:extLst xmlns:a="http://schemas.openxmlformats.org/drawingml/2006/main">
               <a:ext uri="{FF2B5EF4-FFF2-40B4-BE49-F238E27FC236}">
-                <a16:creationId xmlns:a16="http://schemas.microsoft.com/office/drawing/2014/main" id="{D1991F35-855A-4D8A-AE43-F5574B812E2C}"/>
+                <a16:creationId xmlns:a16="http://schemas.microsoft.com/office/drawing/2014/main" id="{B8E5EC13-15DE-43AB-B771-842ABB3B31D5}"/>
               </a:ext>
             </a:extLst>
           </p:cNvPr>
@@ -5605,7 +5605,7 @@
           <p:cNvPr id="5" name="Rectangle 4">
             <a:extLst xmlns:a="http://schemas.openxmlformats.org/drawingml/2006/main">
               <a:ext uri="{FF2B5EF4-FFF2-40B4-BE49-F238E27FC236}">
-                <a16:creationId xmlns:a16="http://schemas.microsoft.com/office/drawing/2014/main" id="{67804263-F263-49A8-855D-5E82FEFCAA33}"/>
+                <a16:creationId xmlns:a16="http://schemas.microsoft.com/office/drawing/2014/main" id="{1FF8F97B-30E6-48EE-B072-ECC42CC40F26}"/>
               </a:ext>
             </a:extLst>
           </p:cNvPr>
@@ -5660,7 +5660,7 @@
           <p:cNvPr id="6" name="TextBox 5">
             <a:extLst xmlns:a="http://schemas.openxmlformats.org/drawingml/2006/main">
               <a:ext uri="{FF2B5EF4-FFF2-40B4-BE49-F238E27FC236}">
-                <a16:creationId xmlns:a16="http://schemas.microsoft.com/office/drawing/2014/main" id="{94EF40F8-3C20-40F3-9EA4-8F859A42E1D6}"/>
+                <a16:creationId xmlns:a16="http://schemas.microsoft.com/office/drawing/2014/main" id="{026921C3-0BC7-4716-BC50-6BC6F2B82865}"/>
               </a:ext>
             </a:extLst>
           </p:cNvPr>
@@ -5697,7 +5697,7 @@
                 <a:ea typeface="Aptos"/>
                 <a:cs typeface="Aptos"/>
               </a:rPr>
-              <a:t>Independent public evidence summary · 2026.07.23-11 · 2026-07-22 · Sources: WIPO licensing; dispute resolution; IPscore</a:t>
+              <a:t>Independent public evidence summary · 2026.07.23-12 · 2026-07-22 · Sources: WIPO licensing; dispute resolution; IPscore</a:t>
             </a:r>
           </a:p>
         </p:txBody>
@@ -5707,7 +5707,7 @@
           <p:cNvPr id="7" name="TextBox 6">
             <a:extLst xmlns:a="http://schemas.openxmlformats.org/drawingml/2006/main">
               <a:ext uri="{FF2B5EF4-FFF2-40B4-BE49-F238E27FC236}">
-                <a16:creationId xmlns:a16="http://schemas.microsoft.com/office/drawing/2014/main" id="{176D3F50-7045-4676-A03C-0888746862BF}"/>
+                <a16:creationId xmlns:a16="http://schemas.microsoft.com/office/drawing/2014/main" id="{7AA03179-815E-4541-AE6A-FA848112927A}"/>
               </a:ext>
             </a:extLst>
           </p:cNvPr>
@@ -5754,7 +5754,7 @@
           <p:cNvPr id="8" name="Rounded Rectangle 7">
             <a:extLst xmlns:a="http://schemas.openxmlformats.org/drawingml/2006/main">
               <a:ext uri="{FF2B5EF4-FFF2-40B4-BE49-F238E27FC236}">
-                <a16:creationId xmlns:a16="http://schemas.microsoft.com/office/drawing/2014/main" id="{F0BE56D0-D656-446F-A604-8FBC4E4F37A1}"/>
+                <a16:creationId xmlns:a16="http://schemas.microsoft.com/office/drawing/2014/main" id="{00EDDD5A-99E5-4A52-AF37-136408B5FC91}"/>
               </a:ext>
             </a:extLst>
           </p:cNvPr>
@@ -5811,7 +5811,7 @@
           <p:cNvPr id="9" name="TextBox 8">
             <a:extLst xmlns:a="http://schemas.openxmlformats.org/drawingml/2006/main">
               <a:ext uri="{FF2B5EF4-FFF2-40B4-BE49-F238E27FC236}">
-                <a16:creationId xmlns:a16="http://schemas.microsoft.com/office/drawing/2014/main" id="{BA71D21C-33D7-4283-BFE9-D2FE265AA319}"/>
+                <a16:creationId xmlns:a16="http://schemas.microsoft.com/office/drawing/2014/main" id="{943FFA1A-51A3-4A4B-96DD-FA35FB162243}"/>
               </a:ext>
             </a:extLst>
           </p:cNvPr>
@@ -5858,7 +5858,7 @@
           <p:cNvPr id="10" name="TextBox 9">
             <a:extLst xmlns:a="http://schemas.openxmlformats.org/drawingml/2006/main">
               <a:ext uri="{FF2B5EF4-FFF2-40B4-BE49-F238E27FC236}">
-                <a16:creationId xmlns:a16="http://schemas.microsoft.com/office/drawing/2014/main" id="{22F23215-0C29-48EC-AC4F-5D259301D5B1}"/>
+                <a16:creationId xmlns:a16="http://schemas.microsoft.com/office/drawing/2014/main" id="{12FF1DB7-92F7-46D5-B27E-652DA719F960}"/>
               </a:ext>
             </a:extLst>
           </p:cNvPr>
@@ -5905,7 +5905,7 @@
           <p:cNvPr id="11" name="TextBox 10">
             <a:extLst xmlns:a="http://schemas.openxmlformats.org/drawingml/2006/main">
               <a:ext uri="{FF2B5EF4-FFF2-40B4-BE49-F238E27FC236}">
-                <a16:creationId xmlns:a16="http://schemas.microsoft.com/office/drawing/2014/main" id="{FF73EFCD-6404-4C1F-8880-AE37DED7A684}"/>
+                <a16:creationId xmlns:a16="http://schemas.microsoft.com/office/drawing/2014/main" id="{247BFEC9-B265-417A-80DE-199E60E7DFC6}"/>
               </a:ext>
             </a:extLst>
           </p:cNvPr>
@@ -5952,7 +5952,7 @@
           <p:cNvPr id="12" name="Rounded Rectangle 11">
             <a:extLst xmlns:a="http://schemas.openxmlformats.org/drawingml/2006/main">
               <a:ext uri="{FF2B5EF4-FFF2-40B4-BE49-F238E27FC236}">
-                <a16:creationId xmlns:a16="http://schemas.microsoft.com/office/drawing/2014/main" id="{62DB6AF2-F874-49D6-9FCE-937908178C26}"/>
+                <a16:creationId xmlns:a16="http://schemas.microsoft.com/office/drawing/2014/main" id="{1B677B38-664F-4496-833D-FB1FDE843CA3}"/>
               </a:ext>
             </a:extLst>
           </p:cNvPr>
@@ -6009,7 +6009,7 @@
           <p:cNvPr id="13" name="TextBox 12">
             <a:extLst xmlns:a="http://schemas.openxmlformats.org/drawingml/2006/main">
               <a:ext uri="{FF2B5EF4-FFF2-40B4-BE49-F238E27FC236}">
-                <a16:creationId xmlns:a16="http://schemas.microsoft.com/office/drawing/2014/main" id="{94921F09-A516-441E-B95D-0B2E58A2CAE0}"/>
+                <a16:creationId xmlns:a16="http://schemas.microsoft.com/office/drawing/2014/main" id="{BED49A3C-7687-4CAF-A7C1-9731F77167CF}"/>
               </a:ext>
             </a:extLst>
           </p:cNvPr>
@@ -6056,7 +6056,7 @@
           <p:cNvPr id="14" name="TextBox 13">
             <a:extLst xmlns:a="http://schemas.openxmlformats.org/drawingml/2006/main">
               <a:ext uri="{FF2B5EF4-FFF2-40B4-BE49-F238E27FC236}">
-                <a16:creationId xmlns:a16="http://schemas.microsoft.com/office/drawing/2014/main" id="{9ABE7177-2512-44A2-B79D-F9584283479D}"/>
+                <a16:creationId xmlns:a16="http://schemas.microsoft.com/office/drawing/2014/main" id="{F3554E65-03F7-4B4F-B534-242A23788C73}"/>
               </a:ext>
             </a:extLst>
           </p:cNvPr>
@@ -6103,7 +6103,7 @@
           <p:cNvPr id="15" name="TextBox 14">
             <a:extLst xmlns:a="http://schemas.openxmlformats.org/drawingml/2006/main">
               <a:ext uri="{FF2B5EF4-FFF2-40B4-BE49-F238E27FC236}">
-                <a16:creationId xmlns:a16="http://schemas.microsoft.com/office/drawing/2014/main" id="{FF0C0877-BFBD-41B1-BE88-F595778C3A60}"/>
+                <a16:creationId xmlns:a16="http://schemas.microsoft.com/office/drawing/2014/main" id="{19FB2D86-38C6-4BB5-B678-0EEA2D8864ED}"/>
               </a:ext>
             </a:extLst>
           </p:cNvPr>
@@ -6150,7 +6150,7 @@
           <p:cNvPr id="16" name="Rounded Rectangle 15">
             <a:extLst xmlns:a="http://schemas.openxmlformats.org/drawingml/2006/main">
               <a:ext uri="{FF2B5EF4-FFF2-40B4-BE49-F238E27FC236}">
-                <a16:creationId xmlns:a16="http://schemas.microsoft.com/office/drawing/2014/main" id="{B5B96893-353F-4A3A-AD59-3711893E1433}"/>
+                <a16:creationId xmlns:a16="http://schemas.microsoft.com/office/drawing/2014/main" id="{E92D6012-0292-4574-8AD1-C953C9C773E0}"/>
               </a:ext>
             </a:extLst>
           </p:cNvPr>
@@ -6207,7 +6207,7 @@
           <p:cNvPr id="17" name="TextBox 16">
             <a:extLst xmlns:a="http://schemas.openxmlformats.org/drawingml/2006/main">
               <a:ext uri="{FF2B5EF4-FFF2-40B4-BE49-F238E27FC236}">
-                <a16:creationId xmlns:a16="http://schemas.microsoft.com/office/drawing/2014/main" id="{4045EDD3-6CC4-41A1-A287-4026D0C5557E}"/>
+                <a16:creationId xmlns:a16="http://schemas.microsoft.com/office/drawing/2014/main" id="{507C8412-1495-4922-B5C4-802598E81CA9}"/>
               </a:ext>
             </a:extLst>
           </p:cNvPr>
@@ -6254,7 +6254,7 @@
           <p:cNvPr id="18" name="TextBox 17">
             <a:extLst xmlns:a="http://schemas.openxmlformats.org/drawingml/2006/main">
               <a:ext uri="{FF2B5EF4-FFF2-40B4-BE49-F238E27FC236}">
-                <a16:creationId xmlns:a16="http://schemas.microsoft.com/office/drawing/2014/main" id="{1082AC18-FCFF-46C4-A539-456468B8F492}"/>
+                <a16:creationId xmlns:a16="http://schemas.microsoft.com/office/drawing/2014/main" id="{16CFA00C-DCF2-43A7-BB1A-9A00EF9204DD}"/>
               </a:ext>
             </a:extLst>
           </p:cNvPr>
@@ -6301,7 +6301,7 @@
           <p:cNvPr id="19" name="TextBox 18">
             <a:extLst xmlns:a="http://schemas.openxmlformats.org/drawingml/2006/main">
               <a:ext uri="{FF2B5EF4-FFF2-40B4-BE49-F238E27FC236}">
-                <a16:creationId xmlns:a16="http://schemas.microsoft.com/office/drawing/2014/main" id="{07E33646-6658-459F-81A6-5FC9750503D7}"/>
+                <a16:creationId xmlns:a16="http://schemas.microsoft.com/office/drawing/2014/main" id="{A75065F2-620B-4DA6-B448-68A0DF079216}"/>
               </a:ext>
             </a:extLst>
           </p:cNvPr>
@@ -6348,7 +6348,7 @@
           <p:cNvPr id="20" name="Rounded Rectangle 19">
             <a:extLst xmlns:a="http://schemas.openxmlformats.org/drawingml/2006/main">
               <a:ext uri="{FF2B5EF4-FFF2-40B4-BE49-F238E27FC236}">
-                <a16:creationId xmlns:a16="http://schemas.microsoft.com/office/drawing/2014/main" id="{D269A23B-2FE4-41B2-A951-5A687F224D5C}"/>
+                <a16:creationId xmlns:a16="http://schemas.microsoft.com/office/drawing/2014/main" id="{C5053BC7-FBA3-4BC4-AEF3-B521C08F5A2C}"/>
               </a:ext>
             </a:extLst>
           </p:cNvPr>
@@ -6405,7 +6405,7 @@
           <p:cNvPr id="21" name="TextBox 20">
             <a:extLst xmlns:a="http://schemas.openxmlformats.org/drawingml/2006/main">
               <a:ext uri="{FF2B5EF4-FFF2-40B4-BE49-F238E27FC236}">
-                <a16:creationId xmlns:a16="http://schemas.microsoft.com/office/drawing/2014/main" id="{0445784C-4314-4035-9B91-C4463B3601DC}"/>
+                <a16:creationId xmlns:a16="http://schemas.microsoft.com/office/drawing/2014/main" id="{67843F21-F097-49F0-8E98-2CF5182860AA}"/>
               </a:ext>
             </a:extLst>
           </p:cNvPr>
@@ -6452,7 +6452,7 @@
           <p:cNvPr id="22" name="TextBox 21">
             <a:extLst xmlns:a="http://schemas.openxmlformats.org/drawingml/2006/main">
               <a:ext uri="{FF2B5EF4-FFF2-40B4-BE49-F238E27FC236}">
-                <a16:creationId xmlns:a16="http://schemas.microsoft.com/office/drawing/2014/main" id="{F79E7265-6651-4DA7-AE0B-F8543F9B92B6}"/>
+                <a16:creationId xmlns:a16="http://schemas.microsoft.com/office/drawing/2014/main" id="{A7435DA5-3607-4A14-B816-4B8DFA69D6E2}"/>
               </a:ext>
             </a:extLst>
           </p:cNvPr>
@@ -6499,7 +6499,7 @@
           <p:cNvPr id="23" name="TextBox 22">
             <a:extLst xmlns:a="http://schemas.openxmlformats.org/drawingml/2006/main">
               <a:ext uri="{FF2B5EF4-FFF2-40B4-BE49-F238E27FC236}">
-                <a16:creationId xmlns:a16="http://schemas.microsoft.com/office/drawing/2014/main" id="{CB7EBEA3-FB91-4BDA-B24F-C5A47B09AAE1}"/>
+                <a16:creationId xmlns:a16="http://schemas.microsoft.com/office/drawing/2014/main" id="{8B9DB356-362B-4A36-8B13-2DBDF81E7A5C}"/>
               </a:ext>
             </a:extLst>
           </p:cNvPr>
@@ -6546,7 +6546,7 @@
           <p:cNvPr id="24" name="TextBox 23">
             <a:extLst xmlns:a="http://schemas.openxmlformats.org/drawingml/2006/main">
               <a:ext uri="{FF2B5EF4-FFF2-40B4-BE49-F238E27FC236}">
-                <a16:creationId xmlns:a16="http://schemas.microsoft.com/office/drawing/2014/main" id="{9D027271-2807-4AFE-BA1D-495A788E6E93}"/>
+                <a16:creationId xmlns:a16="http://schemas.microsoft.com/office/drawing/2014/main" id="{74D2218B-839F-4A42-B294-DB7FF3BAFD35}"/>
               </a:ext>
             </a:extLst>
           </p:cNvPr>
@@ -6591,7 +6591,7 @@
     </p:spTree>
     <p:extLst>
       <p:ext uri="{BB962C8B-B14F-4D97-AF65-F5344CB8AC3E}">
-        <p14:creationId xmlns:p14="http://schemas.microsoft.com/office/powerpoint/2010/main" val="2056298953"/>
+        <p14:creationId xmlns:p14="http://schemas.microsoft.com/office/powerpoint/2010/main" val="1405531852"/>
       </p:ext>
     </p:extLst>
   </p:cSld>
@@ -6615,7 +6615,7 @@
           <p:cNvPr id="2" name="TextBox 1">
             <a:extLst xmlns:a="http://schemas.openxmlformats.org/drawingml/2006/main">
               <a:ext uri="{FF2B5EF4-FFF2-40B4-BE49-F238E27FC236}">
-                <a16:creationId xmlns:a16="http://schemas.microsoft.com/office/drawing/2014/main" id="{7B139FB4-62E2-4911-9276-D5DB05CB6E13}"/>
+                <a16:creationId xmlns:a16="http://schemas.microsoft.com/office/drawing/2014/main" id="{AA3FDAE3-FF84-4472-99FF-4F013A47EE75}"/>
               </a:ext>
             </a:extLst>
           </p:cNvPr>
@@ -6635,8 +6635,8 @@
           <a:noFill xmlns:a="http://schemas.openxmlformats.org/drawingml/2006/main"/>
         </p:spPr>
         <p:txBody>
-          <a:bodyPr xmlns:a="http://schemas.openxmlformats.org/drawingml/2006/main" wrap="square" lIns="36576" tIns="36576" rIns="36576" bIns="36576" anchor="t">
-            <a:spAutoFit/>
+          <a:bodyPr xmlns:a="http://schemas.openxmlformats.org/drawingml/2006/main" wrap="none" lIns="36576" tIns="36576" rIns="36576" bIns="36576" anchor="t">
+            <a:noAutofit/>
           </a:bodyPr>
           <a:lstStyle xmlns:a="http://schemas.openxmlformats.org/drawingml/2006/main"/>
           <a:p xmlns:a="http://schemas.openxmlformats.org/drawingml/2006/main">
@@ -6662,7 +6662,7 @@
           <p:cNvPr id="3" name="TextBox 2">
             <a:extLst xmlns:a="http://schemas.openxmlformats.org/drawingml/2006/main">
               <a:ext uri="{FF2B5EF4-FFF2-40B4-BE49-F238E27FC236}">
-                <a16:creationId xmlns:a16="http://schemas.microsoft.com/office/drawing/2014/main" id="{E85C73B2-040B-4F98-AD9E-D92C5C48A2D0}"/>
+                <a16:creationId xmlns:a16="http://schemas.microsoft.com/office/drawing/2014/main" id="{AEF6273D-C101-40D3-8E10-32821C8AFABC}"/>
               </a:ext>
             </a:extLst>
           </p:cNvPr>
@@ -6709,7 +6709,7 @@
           <p:cNvPr id="4" name="Rectangle 3">
             <a:extLst xmlns:a="http://schemas.openxmlformats.org/drawingml/2006/main">
               <a:ext uri="{FF2B5EF4-FFF2-40B4-BE49-F238E27FC236}">
-                <a16:creationId xmlns:a16="http://schemas.microsoft.com/office/drawing/2014/main" id="{1A1FD158-A3E9-4487-A279-708AB70A9069}"/>
+                <a16:creationId xmlns:a16="http://schemas.microsoft.com/office/drawing/2014/main" id="{911FD703-322C-486B-970F-528DF6D6A26C}"/>
               </a:ext>
             </a:extLst>
           </p:cNvPr>
@@ -6764,7 +6764,7 @@
           <p:cNvPr id="5" name="Rectangle 4">
             <a:extLst xmlns:a="http://schemas.openxmlformats.org/drawingml/2006/main">
               <a:ext uri="{FF2B5EF4-FFF2-40B4-BE49-F238E27FC236}">
-                <a16:creationId xmlns:a16="http://schemas.microsoft.com/office/drawing/2014/main" id="{B60F50A4-2A53-4A44-8B00-CB2E60D24D4A}"/>
+                <a16:creationId xmlns:a16="http://schemas.microsoft.com/office/drawing/2014/main" id="{659BE9DF-D2F2-409F-BA31-619E03419B67}"/>
               </a:ext>
             </a:extLst>
           </p:cNvPr>
@@ -6819,7 +6819,7 @@
           <p:cNvPr id="6" name="TextBox 5">
             <a:extLst xmlns:a="http://schemas.openxmlformats.org/drawingml/2006/main">
               <a:ext uri="{FF2B5EF4-FFF2-40B4-BE49-F238E27FC236}">
-                <a16:creationId xmlns:a16="http://schemas.microsoft.com/office/drawing/2014/main" id="{53D62C8D-F504-4AC8-9496-CD247D38F71A}"/>
+                <a16:creationId xmlns:a16="http://schemas.microsoft.com/office/drawing/2014/main" id="{580420AB-0E7C-4111-81CA-8CFBF25B0D6C}"/>
               </a:ext>
             </a:extLst>
           </p:cNvPr>
@@ -6856,7 +6856,7 @@
                 <a:ea typeface="Aptos"/>
                 <a:cs typeface="Aptos"/>
               </a:rPr>
-              <a:t>Independent public evidence summary · 2026.07.23-11 · 2026-07-22 · Sources: WIPO IP valuation; Market-values</a:t>
+              <a:t>Independent public evidence summary · 2026.07.23-12 · 2026-07-22 · Sources: WIPO IP valuation; Market-values</a:t>
             </a:r>
           </a:p>
         </p:txBody>
@@ -6866,7 +6866,7 @@
           <p:cNvPr id="7" name="TextBox 6">
             <a:extLst xmlns:a="http://schemas.openxmlformats.org/drawingml/2006/main">
               <a:ext uri="{FF2B5EF4-FFF2-40B4-BE49-F238E27FC236}">
-                <a16:creationId xmlns:a16="http://schemas.microsoft.com/office/drawing/2014/main" id="{8F21D506-C595-43BD-AC44-AC2668779B4A}"/>
+                <a16:creationId xmlns:a16="http://schemas.microsoft.com/office/drawing/2014/main" id="{9D373F09-0E67-4734-BF00-EF72B271AA0C}"/>
               </a:ext>
             </a:extLst>
           </p:cNvPr>
@@ -7436,7 +7436,7 @@
           <p:cNvPr id="9" name="TextBox 8">
             <a:extLst xmlns:a="http://schemas.openxmlformats.org/drawingml/2006/main">
               <a:ext uri="{FF2B5EF4-FFF2-40B4-BE49-F238E27FC236}">
-                <a16:creationId xmlns:a16="http://schemas.microsoft.com/office/drawing/2014/main" id="{AA034052-323D-4A7D-A701-EDFBCB83C74A}"/>
+                <a16:creationId xmlns:a16="http://schemas.microsoft.com/office/drawing/2014/main" id="{820818CB-7AD3-45DA-B91E-F46E48D5C697}"/>
               </a:ext>
             </a:extLst>
           </p:cNvPr>
@@ -7481,7 +7481,7 @@
     </p:spTree>
     <p:extLst>
       <p:ext uri="{BB962C8B-B14F-4D97-AF65-F5344CB8AC3E}">
-        <p14:creationId xmlns:p14="http://schemas.microsoft.com/office/powerpoint/2010/main" val="1853031897"/>
+        <p14:creationId xmlns:p14="http://schemas.microsoft.com/office/powerpoint/2010/main" val="508348867"/>
       </p:ext>
     </p:extLst>
   </p:cSld>
@@ -7512,7 +7512,7 @@
           <p:cNvPr id="2" name="TextBox 1">
             <a:extLst xmlns:a="http://schemas.openxmlformats.org/drawingml/2006/main">
               <a:ext uri="{FF2B5EF4-FFF2-40B4-BE49-F238E27FC236}">
-                <a16:creationId xmlns:a16="http://schemas.microsoft.com/office/drawing/2014/main" id="{06D69B22-E31A-4DDE-A872-EF67789E5C0A}"/>
+                <a16:creationId xmlns:a16="http://schemas.microsoft.com/office/drawing/2014/main" id="{59CCB2C4-F0A0-489E-BD75-4BEB267DD184}"/>
               </a:ext>
             </a:extLst>
           </p:cNvPr>
@@ -7559,7 +7559,7 @@
           <p:cNvPr id="3" name="TextBox 2">
             <a:extLst xmlns:a="http://schemas.openxmlformats.org/drawingml/2006/main">
               <a:ext uri="{FF2B5EF4-FFF2-40B4-BE49-F238E27FC236}">
-                <a16:creationId xmlns:a16="http://schemas.microsoft.com/office/drawing/2014/main" id="{6C9D7DE7-0417-47F7-B980-DDAC06CAD2CB}"/>
+                <a16:creationId xmlns:a16="http://schemas.microsoft.com/office/drawing/2014/main" id="{4EDE7D88-8C89-420E-BC33-A6FDD81175B6}"/>
               </a:ext>
             </a:extLst>
           </p:cNvPr>
@@ -7606,7 +7606,7 @@
           <p:cNvPr id="4" name="TextBox 3">
             <a:extLst xmlns:a="http://schemas.openxmlformats.org/drawingml/2006/main">
               <a:ext uri="{FF2B5EF4-FFF2-40B4-BE49-F238E27FC236}">
-                <a16:creationId xmlns:a16="http://schemas.microsoft.com/office/drawing/2014/main" id="{22059322-37EF-4169-A47B-C166829B84A3}"/>
+                <a16:creationId xmlns:a16="http://schemas.microsoft.com/office/drawing/2014/main" id="{D245F4A7-A5FD-4852-AA30-2A132941E320}"/>
               </a:ext>
             </a:extLst>
           </p:cNvPr>
@@ -7747,7 +7747,7 @@
           <p:cNvPr id="5" name="TextBox 4">
             <a:extLst xmlns:a="http://schemas.openxmlformats.org/drawingml/2006/main">
               <a:ext uri="{FF2B5EF4-FFF2-40B4-BE49-F238E27FC236}">
-                <a16:creationId xmlns:a16="http://schemas.microsoft.com/office/drawing/2014/main" id="{621698CD-818C-4CF0-BB91-8B17C8B7E18E}"/>
+                <a16:creationId xmlns:a16="http://schemas.microsoft.com/office/drawing/2014/main" id="{6E8022E9-3194-40B3-A4E1-D9AEE4965007}"/>
               </a:ext>
             </a:extLst>
           </p:cNvPr>
@@ -7784,7 +7784,7 @@
                 <a:ea typeface="Aptos"/>
                 <a:cs typeface="Aptos"/>
               </a:rPr>
-              <a:t>Version 2026.07.23-11 · 2026-07-22 · 12 / 12</a:t>
+              <a:t>Version 2026.07.23-12 · 2026-07-22 · 12 / 12</a:t>
             </a:r>
           </a:p>
         </p:txBody>
@@ -7794,7 +7794,7 @@
           <p:cNvPr id="6" name="TextBox 5">
             <a:extLst xmlns:a="http://schemas.openxmlformats.org/drawingml/2006/main">
               <a:ext uri="{FF2B5EF4-FFF2-40B4-BE49-F238E27FC236}">
-                <a16:creationId xmlns:a16="http://schemas.microsoft.com/office/drawing/2014/main" id="{EB241750-1E4B-4FB0-B4C8-5F0C1D7C8663}"/>
+                <a16:creationId xmlns:a16="http://schemas.microsoft.com/office/drawing/2014/main" id="{AE6A43D6-A06C-48D9-90B5-8163B7A28284}"/>
               </a:ext>
             </a:extLst>
           </p:cNvPr>
@@ -7839,7 +7839,7 @@
     </p:spTree>
     <p:extLst>
       <p:ext uri="{BB962C8B-B14F-4D97-AF65-F5344CB8AC3E}">
-        <p14:creationId xmlns:p14="http://schemas.microsoft.com/office/powerpoint/2010/main" val="967057498"/>
+        <p14:creationId xmlns:p14="http://schemas.microsoft.com/office/powerpoint/2010/main" val="795160005"/>
       </p:ext>
     </p:extLst>
   </p:cSld>
@@ -7863,7 +7863,7 @@
           <p:cNvPr id="2" name="TextBox 1">
             <a:extLst xmlns:a="http://schemas.openxmlformats.org/drawingml/2006/main">
               <a:ext uri="{FF2B5EF4-FFF2-40B4-BE49-F238E27FC236}">
-                <a16:creationId xmlns:a16="http://schemas.microsoft.com/office/drawing/2014/main" id="{100DBEC2-B52A-415A-A664-CC2035C470DE}"/>
+                <a16:creationId xmlns:a16="http://schemas.microsoft.com/office/drawing/2014/main" id="{0C705661-F757-4B98-BF2E-D36AAAD1AB16}"/>
               </a:ext>
             </a:extLst>
           </p:cNvPr>
@@ -7910,7 +7910,7 @@
           <p:cNvPr id="3" name="TextBox 2">
             <a:extLst xmlns:a="http://schemas.openxmlformats.org/drawingml/2006/main">
               <a:ext uri="{FF2B5EF4-FFF2-40B4-BE49-F238E27FC236}">
-                <a16:creationId xmlns:a16="http://schemas.microsoft.com/office/drawing/2014/main" id="{15E3858B-5868-4BF6-937E-7FBB0999813C}"/>
+                <a16:creationId xmlns:a16="http://schemas.microsoft.com/office/drawing/2014/main" id="{B454198D-EE00-46F7-A692-881FB09560FE}"/>
               </a:ext>
             </a:extLst>
           </p:cNvPr>
@@ -7930,8 +7930,8 @@
           <a:noFill xmlns:a="http://schemas.openxmlformats.org/drawingml/2006/main"/>
         </p:spPr>
         <p:txBody>
-          <a:bodyPr xmlns:a="http://schemas.openxmlformats.org/drawingml/2006/main" wrap="square" lIns="36576" tIns="36576" rIns="36576" bIns="36576" anchor="t">
-            <a:spAutoFit/>
+          <a:bodyPr xmlns:a="http://schemas.openxmlformats.org/drawingml/2006/main" wrap="none" lIns="36576" tIns="36576" rIns="36576" bIns="36576" anchor="t">
+            <a:noAutofit/>
           </a:bodyPr>
           <a:lstStyle xmlns:a="http://schemas.openxmlformats.org/drawingml/2006/main"/>
           <a:p xmlns:a="http://schemas.openxmlformats.org/drawingml/2006/main">
@@ -7939,7 +7939,7 @@
               <a:buNone/>
             </a:pPr>
             <a:r>
-              <a:rPr sz="3400" b="1">
+              <a:rPr sz="2550" b="1">
                 <a:solidFill>
                   <a:srgbClr val="071A2B"/>
                 </a:solidFill>
@@ -7957,7 +7957,7 @@
           <p:cNvPr id="4" name="Rectangle 3">
             <a:extLst xmlns:a="http://schemas.openxmlformats.org/drawingml/2006/main">
               <a:ext uri="{FF2B5EF4-FFF2-40B4-BE49-F238E27FC236}">
-                <a16:creationId xmlns:a16="http://schemas.microsoft.com/office/drawing/2014/main" id="{527943EF-9B82-4368-B079-B3A1CD14EE79}"/>
+                <a16:creationId xmlns:a16="http://schemas.microsoft.com/office/drawing/2014/main" id="{632DBC8C-D099-48A5-9CC9-3D8BCBC9D873}"/>
               </a:ext>
             </a:extLst>
           </p:cNvPr>
@@ -8012,7 +8012,7 @@
           <p:cNvPr id="5" name="Rectangle 4">
             <a:extLst xmlns:a="http://schemas.openxmlformats.org/drawingml/2006/main">
               <a:ext uri="{FF2B5EF4-FFF2-40B4-BE49-F238E27FC236}">
-                <a16:creationId xmlns:a16="http://schemas.microsoft.com/office/drawing/2014/main" id="{493BD28F-4278-4FC8-B03A-A8CE987EFD41}"/>
+                <a16:creationId xmlns:a16="http://schemas.microsoft.com/office/drawing/2014/main" id="{A22E50ED-70C1-46DE-BAFB-846ECDCD04C7}"/>
               </a:ext>
             </a:extLst>
           </p:cNvPr>
@@ -8067,7 +8067,7 @@
           <p:cNvPr id="6" name="TextBox 5">
             <a:extLst xmlns:a="http://schemas.openxmlformats.org/drawingml/2006/main">
               <a:ext uri="{FF2B5EF4-FFF2-40B4-BE49-F238E27FC236}">
-                <a16:creationId xmlns:a16="http://schemas.microsoft.com/office/drawing/2014/main" id="{410A031C-830E-4CB2-9D1A-5BA65393DA3E}"/>
+                <a16:creationId xmlns:a16="http://schemas.microsoft.com/office/drawing/2014/main" id="{253CF508-90E0-4A59-87C2-68AA84993A3A}"/>
               </a:ext>
             </a:extLst>
           </p:cNvPr>
@@ -8104,7 +8104,7 @@
                 <a:ea typeface="Aptos"/>
                 <a:cs typeface="Aptos"/>
               </a:rPr>
-              <a:t>Independent public evidence summary · 2026.07.23-11 · 2026-07-22 · Sources: Atlas readiness; WIPO</a:t>
+              <a:t>Independent public evidence summary · 2026.07.23-12 · 2026-07-22 · Sources: Atlas readiness; WIPO</a:t>
             </a:r>
           </a:p>
         </p:txBody>
@@ -8114,7 +8114,7 @@
           <p:cNvPr id="7" name="TextBox 6">
             <a:extLst xmlns:a="http://schemas.openxmlformats.org/drawingml/2006/main">
               <a:ext uri="{FF2B5EF4-FFF2-40B4-BE49-F238E27FC236}">
-                <a16:creationId xmlns:a16="http://schemas.microsoft.com/office/drawing/2014/main" id="{FCC3E464-5F81-47EC-8369-08A958555121}"/>
+                <a16:creationId xmlns:a16="http://schemas.microsoft.com/office/drawing/2014/main" id="{4C73A3D8-2991-483D-AB90-AF602201BAEC}"/>
               </a:ext>
             </a:extLst>
           </p:cNvPr>
@@ -8161,7 +8161,7 @@
           <p:cNvPr id="8" name="TextBox 7">
             <a:extLst xmlns:a="http://schemas.openxmlformats.org/drawingml/2006/main">
               <a:ext uri="{FF2B5EF4-FFF2-40B4-BE49-F238E27FC236}">
-                <a16:creationId xmlns:a16="http://schemas.microsoft.com/office/drawing/2014/main" id="{F30A053C-6B0A-4E2B-B3A1-7ED8BB35BEFC}"/>
+                <a16:creationId xmlns:a16="http://schemas.microsoft.com/office/drawing/2014/main" id="{F85B75E3-AA9C-4CB0-811D-56FB446EF087}"/>
               </a:ext>
             </a:extLst>
           </p:cNvPr>
@@ -8208,7 +8208,7 @@
           <p:cNvPr id="9" name="TextBox 8">
             <a:extLst xmlns:a="http://schemas.openxmlformats.org/drawingml/2006/main">
               <a:ext uri="{FF2B5EF4-FFF2-40B4-BE49-F238E27FC236}">
-                <a16:creationId xmlns:a16="http://schemas.microsoft.com/office/drawing/2014/main" id="{661194C6-06F1-4A98-A2C8-9C81EA08CF91}"/>
+                <a16:creationId xmlns:a16="http://schemas.microsoft.com/office/drawing/2014/main" id="{65F0765D-A44D-43A2-9C51-FE3B1715823A}"/>
               </a:ext>
             </a:extLst>
           </p:cNvPr>
@@ -8305,7 +8305,7 @@
           <p:cNvPr id="10" name="Rounded Rectangle 9">
             <a:extLst xmlns:a="http://schemas.openxmlformats.org/drawingml/2006/main">
               <a:ext uri="{FF2B5EF4-FFF2-40B4-BE49-F238E27FC236}">
-                <a16:creationId xmlns:a16="http://schemas.microsoft.com/office/drawing/2014/main" id="{E6D6A6E0-5B6E-4E34-A67E-1B838A568720}"/>
+                <a16:creationId xmlns:a16="http://schemas.microsoft.com/office/drawing/2014/main" id="{A4968CF8-A101-4E63-98AD-2296F603EE2A}"/>
               </a:ext>
             </a:extLst>
           </p:cNvPr>
@@ -8362,7 +8362,7 @@
           <p:cNvPr id="11" name="TextBox 10">
             <a:extLst xmlns:a="http://schemas.openxmlformats.org/drawingml/2006/main">
               <a:ext uri="{FF2B5EF4-FFF2-40B4-BE49-F238E27FC236}">
-                <a16:creationId xmlns:a16="http://schemas.microsoft.com/office/drawing/2014/main" id="{1BDFDEE7-A958-4703-B1E4-12454AFF9DAC}"/>
+                <a16:creationId xmlns:a16="http://schemas.microsoft.com/office/drawing/2014/main" id="{EFED347F-BA79-46A8-BC37-982B062AE772}"/>
               </a:ext>
             </a:extLst>
           </p:cNvPr>
@@ -8409,7 +8409,7 @@
           <p:cNvPr id="12" name="TextBox 11">
             <a:extLst xmlns:a="http://schemas.openxmlformats.org/drawingml/2006/main">
               <a:ext uri="{FF2B5EF4-FFF2-40B4-BE49-F238E27FC236}">
-                <a16:creationId xmlns:a16="http://schemas.microsoft.com/office/drawing/2014/main" id="{FEE8DD63-CFF8-485C-BA96-FD2729F245E9}"/>
+                <a16:creationId xmlns:a16="http://schemas.microsoft.com/office/drawing/2014/main" id="{2D85C838-D418-452E-AF6D-F3B4FE6FB4C7}"/>
               </a:ext>
             </a:extLst>
           </p:cNvPr>
@@ -8454,7 +8454,7 @@
     </p:spTree>
     <p:extLst>
       <p:ext uri="{BB962C8B-B14F-4D97-AF65-F5344CB8AC3E}">
-        <p14:creationId xmlns:p14="http://schemas.microsoft.com/office/powerpoint/2010/main" val="1554358134"/>
+        <p14:creationId xmlns:p14="http://schemas.microsoft.com/office/powerpoint/2010/main" val="340166705"/>
       </p:ext>
     </p:extLst>
   </p:cSld>
@@ -8478,7 +8478,7 @@
           <p:cNvPr id="2" name="TextBox 1">
             <a:extLst xmlns:a="http://schemas.openxmlformats.org/drawingml/2006/main">
               <a:ext uri="{FF2B5EF4-FFF2-40B4-BE49-F238E27FC236}">
-                <a16:creationId xmlns:a16="http://schemas.microsoft.com/office/drawing/2014/main" id="{FB7B55E0-2015-4FC3-8770-CB5CC85B3B9B}"/>
+                <a16:creationId xmlns:a16="http://schemas.microsoft.com/office/drawing/2014/main" id="{3C25EF60-E642-4755-BD38-B68BF7A1D884}"/>
               </a:ext>
             </a:extLst>
           </p:cNvPr>
@@ -8525,7 +8525,7 @@
           <p:cNvPr id="3" name="TextBox 2">
             <a:extLst xmlns:a="http://schemas.openxmlformats.org/drawingml/2006/main">
               <a:ext uri="{FF2B5EF4-FFF2-40B4-BE49-F238E27FC236}">
-                <a16:creationId xmlns:a16="http://schemas.microsoft.com/office/drawing/2014/main" id="{E295CAAC-67D2-4B21-9263-647B338F8C7B}"/>
+                <a16:creationId xmlns:a16="http://schemas.microsoft.com/office/drawing/2014/main" id="{CAFACF81-B0B0-451C-870B-699708AE26EE}"/>
               </a:ext>
             </a:extLst>
           </p:cNvPr>
@@ -8545,8 +8545,8 @@
           <a:noFill xmlns:a="http://schemas.openxmlformats.org/drawingml/2006/main"/>
         </p:spPr>
         <p:txBody>
-          <a:bodyPr xmlns:a="http://schemas.openxmlformats.org/drawingml/2006/main" wrap="square" lIns="36576" tIns="36576" rIns="36576" bIns="36576" anchor="t">
-            <a:spAutoFit/>
+          <a:bodyPr xmlns:a="http://schemas.openxmlformats.org/drawingml/2006/main" wrap="none" lIns="36576" tIns="36576" rIns="36576" bIns="36576" anchor="t">
+            <a:noAutofit/>
           </a:bodyPr>
           <a:lstStyle xmlns:a="http://schemas.openxmlformats.org/drawingml/2006/main"/>
           <a:p xmlns:a="http://schemas.openxmlformats.org/drawingml/2006/main">
@@ -8554,7 +8554,7 @@
               <a:buNone/>
             </a:pPr>
             <a:r>
-              <a:rPr sz="3400" b="1">
+              <a:rPr sz="2513" b="1">
                 <a:solidFill>
                   <a:srgbClr val="071A2B"/>
                 </a:solidFill>
@@ -8572,7 +8572,7 @@
           <p:cNvPr id="4" name="Rectangle 3">
             <a:extLst xmlns:a="http://schemas.openxmlformats.org/drawingml/2006/main">
               <a:ext uri="{FF2B5EF4-FFF2-40B4-BE49-F238E27FC236}">
-                <a16:creationId xmlns:a16="http://schemas.microsoft.com/office/drawing/2014/main" id="{F5411B7A-445A-4DC2-9525-C6AAF4300E23}"/>
+                <a16:creationId xmlns:a16="http://schemas.microsoft.com/office/drawing/2014/main" id="{49571D69-A964-4B46-B745-BB53C8B08978}"/>
               </a:ext>
             </a:extLst>
           </p:cNvPr>
@@ -8627,7 +8627,7 @@
           <p:cNvPr id="5" name="Rectangle 4">
             <a:extLst xmlns:a="http://schemas.openxmlformats.org/drawingml/2006/main">
               <a:ext uri="{FF2B5EF4-FFF2-40B4-BE49-F238E27FC236}">
-                <a16:creationId xmlns:a16="http://schemas.microsoft.com/office/drawing/2014/main" id="{031464EB-56DE-4EFC-A8BF-D13AE002493E}"/>
+                <a16:creationId xmlns:a16="http://schemas.microsoft.com/office/drawing/2014/main" id="{6C6D6B91-01C0-476E-985C-0F65F15108C9}"/>
               </a:ext>
             </a:extLst>
           </p:cNvPr>
@@ -8682,7 +8682,7 @@
           <p:cNvPr id="6" name="TextBox 5">
             <a:extLst xmlns:a="http://schemas.openxmlformats.org/drawingml/2006/main">
               <a:ext uri="{FF2B5EF4-FFF2-40B4-BE49-F238E27FC236}">
-                <a16:creationId xmlns:a16="http://schemas.microsoft.com/office/drawing/2014/main" id="{6AE5B475-1F9D-4D7A-B541-E84577018456}"/>
+                <a16:creationId xmlns:a16="http://schemas.microsoft.com/office/drawing/2014/main" id="{1B8CB0C7-EAF1-4926-B313-C4BBCA4705A4}"/>
               </a:ext>
             </a:extLst>
           </p:cNvPr>
@@ -8719,7 +8719,7 @@
                 <a:ea typeface="Aptos"/>
                 <a:cs typeface="Aptos"/>
               </a:rPr>
-              <a:t>Independent public evidence summary · 2026.07.23-11 · 2026-07-22 · Sources: EP3032975B2</a:t>
+              <a:t>Independent public evidence summary · 2026.07.23-12 · 2026-07-22 · Sources: EP3032975B2</a:t>
             </a:r>
           </a:p>
         </p:txBody>
@@ -8729,7 +8729,7 @@
           <p:cNvPr id="7" name="TextBox 6">
             <a:extLst xmlns:a="http://schemas.openxmlformats.org/drawingml/2006/main">
               <a:ext uri="{FF2B5EF4-FFF2-40B4-BE49-F238E27FC236}">
-                <a16:creationId xmlns:a16="http://schemas.microsoft.com/office/drawing/2014/main" id="{50D2151E-70D9-4FFB-A9B1-5D53CC6AB68C}"/>
+                <a16:creationId xmlns:a16="http://schemas.microsoft.com/office/drawing/2014/main" id="{AA431875-536D-4AD6-BA89-48B4225861F1}"/>
               </a:ext>
             </a:extLst>
           </p:cNvPr>
@@ -8776,7 +8776,7 @@
           <p:cNvPr id="8" name="TextBox 7">
             <a:extLst xmlns:a="http://schemas.openxmlformats.org/drawingml/2006/main">
               <a:ext uri="{FF2B5EF4-FFF2-40B4-BE49-F238E27FC236}">
-                <a16:creationId xmlns:a16="http://schemas.microsoft.com/office/drawing/2014/main" id="{E0FEACF2-8E2A-4DE9-A476-F7F2CF9CBF00}"/>
+                <a16:creationId xmlns:a16="http://schemas.microsoft.com/office/drawing/2014/main" id="{088C0FF3-A601-4D4B-BD79-3A3D49D9E678}"/>
               </a:ext>
             </a:extLst>
           </p:cNvPr>
@@ -8823,7 +8823,7 @@
           <p:cNvPr id="9" name="TextBox 8">
             <a:extLst xmlns:a="http://schemas.openxmlformats.org/drawingml/2006/main">
               <a:ext uri="{FF2B5EF4-FFF2-40B4-BE49-F238E27FC236}">
-                <a16:creationId xmlns:a16="http://schemas.microsoft.com/office/drawing/2014/main" id="{D9C89A85-1D46-4598-A62D-5DE0FE1E5387}"/>
+                <a16:creationId xmlns:a16="http://schemas.microsoft.com/office/drawing/2014/main" id="{D4BD65A7-F5F7-4DF2-8F24-A8E535B292F5}"/>
               </a:ext>
             </a:extLst>
           </p:cNvPr>
@@ -8920,7 +8920,7 @@
           <p:cNvPr id="10" name="Rounded Rectangle 9">
             <a:extLst xmlns:a="http://schemas.openxmlformats.org/drawingml/2006/main">
               <a:ext uri="{FF2B5EF4-FFF2-40B4-BE49-F238E27FC236}">
-                <a16:creationId xmlns:a16="http://schemas.microsoft.com/office/drawing/2014/main" id="{0E3D0F84-AA2D-473B-BCBF-C7AE33170ACE}"/>
+                <a16:creationId xmlns:a16="http://schemas.microsoft.com/office/drawing/2014/main" id="{304B1B01-3B8B-4EE8-B6A1-4A5C9815D4A9}"/>
               </a:ext>
             </a:extLst>
           </p:cNvPr>
@@ -8977,7 +8977,7 @@
           <p:cNvPr id="11" name="TextBox 10">
             <a:extLst xmlns:a="http://schemas.openxmlformats.org/drawingml/2006/main">
               <a:ext uri="{FF2B5EF4-FFF2-40B4-BE49-F238E27FC236}">
-                <a16:creationId xmlns:a16="http://schemas.microsoft.com/office/drawing/2014/main" id="{AA538F12-7648-44E7-A9F7-9D2C07E467D5}"/>
+                <a16:creationId xmlns:a16="http://schemas.microsoft.com/office/drawing/2014/main" id="{D51EC5CF-171B-45A5-A003-DC389C1A4367}"/>
               </a:ext>
             </a:extLst>
           </p:cNvPr>
@@ -9024,7 +9024,7 @@
           <p:cNvPr id="12" name="TextBox 11">
             <a:extLst xmlns:a="http://schemas.openxmlformats.org/drawingml/2006/main">
               <a:ext uri="{FF2B5EF4-FFF2-40B4-BE49-F238E27FC236}">
-                <a16:creationId xmlns:a16="http://schemas.microsoft.com/office/drawing/2014/main" id="{11B080C4-FB0A-42AC-8417-94BE3EF3750F}"/>
+                <a16:creationId xmlns:a16="http://schemas.microsoft.com/office/drawing/2014/main" id="{4CAA6203-14C9-4237-96F9-CB83343B9019}"/>
               </a:ext>
             </a:extLst>
           </p:cNvPr>
@@ -9069,7 +9069,7 @@
     </p:spTree>
     <p:extLst>
       <p:ext uri="{BB962C8B-B14F-4D97-AF65-F5344CB8AC3E}">
-        <p14:creationId xmlns:p14="http://schemas.microsoft.com/office/powerpoint/2010/main" val="1789202781"/>
+        <p14:creationId xmlns:p14="http://schemas.microsoft.com/office/powerpoint/2010/main" val="143379605"/>
       </p:ext>
     </p:extLst>
   </p:cSld>
@@ -9093,7 +9093,7 @@
           <p:cNvPr id="2" name="TextBox 1">
             <a:extLst xmlns:a="http://schemas.openxmlformats.org/drawingml/2006/main">
               <a:ext uri="{FF2B5EF4-FFF2-40B4-BE49-F238E27FC236}">
-                <a16:creationId xmlns:a16="http://schemas.microsoft.com/office/drawing/2014/main" id="{270A08AE-45AF-416D-87AB-6A18F5C96C84}"/>
+                <a16:creationId xmlns:a16="http://schemas.microsoft.com/office/drawing/2014/main" id="{B2487A3D-E058-4E3D-9165-EF2C9FABCD84}"/>
               </a:ext>
             </a:extLst>
           </p:cNvPr>
@@ -9140,7 +9140,7 @@
           <p:cNvPr id="3" name="TextBox 2">
             <a:extLst xmlns:a="http://schemas.openxmlformats.org/drawingml/2006/main">
               <a:ext uri="{FF2B5EF4-FFF2-40B4-BE49-F238E27FC236}">
-                <a16:creationId xmlns:a16="http://schemas.microsoft.com/office/drawing/2014/main" id="{134C1124-814B-4F12-936C-E5482EA616A1}"/>
+                <a16:creationId xmlns:a16="http://schemas.microsoft.com/office/drawing/2014/main" id="{01CCA2FD-0F56-4924-B6CE-8C0943B002C0}"/>
               </a:ext>
             </a:extLst>
           </p:cNvPr>
@@ -9160,8 +9160,8 @@
           <a:noFill xmlns:a="http://schemas.openxmlformats.org/drawingml/2006/main"/>
         </p:spPr>
         <p:txBody>
-          <a:bodyPr xmlns:a="http://schemas.openxmlformats.org/drawingml/2006/main" wrap="square" lIns="36576" tIns="36576" rIns="36576" bIns="36576" anchor="t">
-            <a:spAutoFit/>
+          <a:bodyPr xmlns:a="http://schemas.openxmlformats.org/drawingml/2006/main" wrap="none" lIns="36576" tIns="36576" rIns="36576" bIns="36576" anchor="t">
+            <a:noAutofit/>
           </a:bodyPr>
           <a:lstStyle xmlns:a="http://schemas.openxmlformats.org/drawingml/2006/main"/>
           <a:p xmlns:a="http://schemas.openxmlformats.org/drawingml/2006/main">
@@ -9169,7 +9169,7 @@
               <a:buNone/>
             </a:pPr>
             <a:r>
-              <a:rPr sz="3400" b="1">
+              <a:rPr sz="2250" b="1">
                 <a:solidFill>
                   <a:srgbClr val="071A2B"/>
                 </a:solidFill>
@@ -9187,7 +9187,7 @@
           <p:cNvPr id="4" name="Rectangle 3">
             <a:extLst xmlns:a="http://schemas.openxmlformats.org/drawingml/2006/main">
               <a:ext uri="{FF2B5EF4-FFF2-40B4-BE49-F238E27FC236}">
-                <a16:creationId xmlns:a16="http://schemas.microsoft.com/office/drawing/2014/main" id="{3F50618F-3D27-489D-A495-9879CA3C0287}"/>
+                <a16:creationId xmlns:a16="http://schemas.microsoft.com/office/drawing/2014/main" id="{D2B329DC-9ADA-44FF-9C3E-C7B8B75578A9}"/>
               </a:ext>
             </a:extLst>
           </p:cNvPr>
@@ -9242,7 +9242,7 @@
           <p:cNvPr id="5" name="Rectangle 4">
             <a:extLst xmlns:a="http://schemas.openxmlformats.org/drawingml/2006/main">
               <a:ext uri="{FF2B5EF4-FFF2-40B4-BE49-F238E27FC236}">
-                <a16:creationId xmlns:a16="http://schemas.microsoft.com/office/drawing/2014/main" id="{5583C519-C14F-4454-AA2E-A5F05AE085D0}"/>
+                <a16:creationId xmlns:a16="http://schemas.microsoft.com/office/drawing/2014/main" id="{39C61659-3651-4DD9-B0B0-72DB84DC7769}"/>
               </a:ext>
             </a:extLst>
           </p:cNvPr>
@@ -9297,7 +9297,7 @@
           <p:cNvPr id="6" name="TextBox 5">
             <a:extLst xmlns:a="http://schemas.openxmlformats.org/drawingml/2006/main">
               <a:ext uri="{FF2B5EF4-FFF2-40B4-BE49-F238E27FC236}">
-                <a16:creationId xmlns:a16="http://schemas.microsoft.com/office/drawing/2014/main" id="{2019F55E-B98F-47E2-ABFF-113FBAEC8F9B}"/>
+                <a16:creationId xmlns:a16="http://schemas.microsoft.com/office/drawing/2014/main" id="{A555B7E9-6B07-4D67-9707-750BCD22D9DC}"/>
               </a:ext>
             </a:extLst>
           </p:cNvPr>
@@ -9334,7 +9334,7 @@
                 <a:ea typeface="Aptos"/>
                 <a:cs typeface="Aptos"/>
               </a:rPr>
-              <a:t>Independent public evidence summary · 2026.07.23-11 · 2026-07-22 · Sources: EPO Register; EP3032975B2</a:t>
+              <a:t>Independent public evidence summary · 2026.07.23-12 · 2026-07-22 · Sources: EPO Register; EP3032975B2</a:t>
             </a:r>
           </a:p>
         </p:txBody>
@@ -9344,7 +9344,7 @@
           <p:cNvPr id="7" name="TextBox 6">
             <a:extLst xmlns:a="http://schemas.openxmlformats.org/drawingml/2006/main">
               <a:ext uri="{FF2B5EF4-FFF2-40B4-BE49-F238E27FC236}">
-                <a16:creationId xmlns:a16="http://schemas.microsoft.com/office/drawing/2014/main" id="{72CD43DC-7A0B-4A79-A97A-86BD119DFC07}"/>
+                <a16:creationId xmlns:a16="http://schemas.microsoft.com/office/drawing/2014/main" id="{5FCDC9B4-CDB8-4536-931C-0D84AA42E6FC}"/>
               </a:ext>
             </a:extLst>
           </p:cNvPr>
@@ -9391,7 +9391,7 @@
           <p:cNvPr id="8" name="Rounded Rectangle 7">
             <a:extLst xmlns:a="http://schemas.openxmlformats.org/drawingml/2006/main">
               <a:ext uri="{FF2B5EF4-FFF2-40B4-BE49-F238E27FC236}">
-                <a16:creationId xmlns:a16="http://schemas.microsoft.com/office/drawing/2014/main" id="{3CB6FDB1-5954-4736-B2E8-F585B945310F}"/>
+                <a16:creationId xmlns:a16="http://schemas.microsoft.com/office/drawing/2014/main" id="{D20A7CDA-E8BE-4829-BE60-A174FE1FB232}"/>
               </a:ext>
             </a:extLst>
           </p:cNvPr>
@@ -9448,7 +9448,7 @@
           <p:cNvPr id="9" name="TextBox 8">
             <a:extLst xmlns:a="http://schemas.openxmlformats.org/drawingml/2006/main">
               <a:ext uri="{FF2B5EF4-FFF2-40B4-BE49-F238E27FC236}">
-                <a16:creationId xmlns:a16="http://schemas.microsoft.com/office/drawing/2014/main" id="{DF39D145-5B23-4564-8C70-CE08AAD2653A}"/>
+                <a16:creationId xmlns:a16="http://schemas.microsoft.com/office/drawing/2014/main" id="{8177C048-0944-49A8-A955-8EA5B0DBC070}"/>
               </a:ext>
             </a:extLst>
           </p:cNvPr>
@@ -9495,7 +9495,7 @@
           <p:cNvPr id="10" name="TextBox 9">
             <a:extLst xmlns:a="http://schemas.openxmlformats.org/drawingml/2006/main">
               <a:ext uri="{FF2B5EF4-FFF2-40B4-BE49-F238E27FC236}">
-                <a16:creationId xmlns:a16="http://schemas.microsoft.com/office/drawing/2014/main" id="{D39AFDD3-CCD0-43A9-8F9A-481DFD3EB113}"/>
+                <a16:creationId xmlns:a16="http://schemas.microsoft.com/office/drawing/2014/main" id="{2E2280F9-D657-487B-85C2-41BEDD20AD38}"/>
               </a:ext>
             </a:extLst>
           </p:cNvPr>
@@ -9542,7 +9542,7 @@
           <p:cNvPr id="11" name="Rounded Rectangle 10">
             <a:extLst xmlns:a="http://schemas.openxmlformats.org/drawingml/2006/main">
               <a:ext uri="{FF2B5EF4-FFF2-40B4-BE49-F238E27FC236}">
-                <a16:creationId xmlns:a16="http://schemas.microsoft.com/office/drawing/2014/main" id="{391949E9-7B8B-4F44-8827-B4A198B687E3}"/>
+                <a16:creationId xmlns:a16="http://schemas.microsoft.com/office/drawing/2014/main" id="{498D8A2F-6618-4973-9938-05A14245C5DA}"/>
               </a:ext>
             </a:extLst>
           </p:cNvPr>
@@ -9599,7 +9599,7 @@
           <p:cNvPr id="12" name="TextBox 11">
             <a:extLst xmlns:a="http://schemas.openxmlformats.org/drawingml/2006/main">
               <a:ext uri="{FF2B5EF4-FFF2-40B4-BE49-F238E27FC236}">
-                <a16:creationId xmlns:a16="http://schemas.microsoft.com/office/drawing/2014/main" id="{A8F080D4-3A49-44A0-8118-CDC368690330}"/>
+                <a16:creationId xmlns:a16="http://schemas.microsoft.com/office/drawing/2014/main" id="{0927CE73-B2EF-4441-9911-FA37767901F0}"/>
               </a:ext>
             </a:extLst>
           </p:cNvPr>
@@ -9646,7 +9646,7 @@
           <p:cNvPr id="13" name="TextBox 12">
             <a:extLst xmlns:a="http://schemas.openxmlformats.org/drawingml/2006/main">
               <a:ext uri="{FF2B5EF4-FFF2-40B4-BE49-F238E27FC236}">
-                <a16:creationId xmlns:a16="http://schemas.microsoft.com/office/drawing/2014/main" id="{4FC13604-A034-4DB0-BA3A-8D992B15F165}"/>
+                <a16:creationId xmlns:a16="http://schemas.microsoft.com/office/drawing/2014/main" id="{F4351D14-EFC6-4A85-93F6-CDD7F123B703}"/>
               </a:ext>
             </a:extLst>
           </p:cNvPr>
@@ -9693,7 +9693,7 @@
           <p:cNvPr id="14" name="Rounded Rectangle 13">
             <a:extLst xmlns:a="http://schemas.openxmlformats.org/drawingml/2006/main">
               <a:ext uri="{FF2B5EF4-FFF2-40B4-BE49-F238E27FC236}">
-                <a16:creationId xmlns:a16="http://schemas.microsoft.com/office/drawing/2014/main" id="{00FA99ED-1DE8-42EA-8229-A7F424545707}"/>
+                <a16:creationId xmlns:a16="http://schemas.microsoft.com/office/drawing/2014/main" id="{382DB478-998A-4B77-9368-B038AC64CDFE}"/>
               </a:ext>
             </a:extLst>
           </p:cNvPr>
@@ -9750,7 +9750,7 @@
           <p:cNvPr id="15" name="TextBox 14">
             <a:extLst xmlns:a="http://schemas.openxmlformats.org/drawingml/2006/main">
               <a:ext uri="{FF2B5EF4-FFF2-40B4-BE49-F238E27FC236}">
-                <a16:creationId xmlns:a16="http://schemas.microsoft.com/office/drawing/2014/main" id="{0A372B84-BB24-48E2-A4EE-39CC7AAAD5AB}"/>
+                <a16:creationId xmlns:a16="http://schemas.microsoft.com/office/drawing/2014/main" id="{7A111212-76C9-4181-B104-0EC847A4648D}"/>
               </a:ext>
             </a:extLst>
           </p:cNvPr>
@@ -9797,7 +9797,7 @@
           <p:cNvPr id="16" name="TextBox 15">
             <a:extLst xmlns:a="http://schemas.openxmlformats.org/drawingml/2006/main">
               <a:ext uri="{FF2B5EF4-FFF2-40B4-BE49-F238E27FC236}">
-                <a16:creationId xmlns:a16="http://schemas.microsoft.com/office/drawing/2014/main" id="{2E580CB3-88B2-4182-A880-553D3810B388}"/>
+                <a16:creationId xmlns:a16="http://schemas.microsoft.com/office/drawing/2014/main" id="{79140BB6-2827-4FBC-B6EB-066A5C0EEB18}"/>
               </a:ext>
             </a:extLst>
           </p:cNvPr>
@@ -9844,7 +9844,7 @@
           <p:cNvPr id="17" name="TextBox 16">
             <a:extLst xmlns:a="http://schemas.openxmlformats.org/drawingml/2006/main">
               <a:ext uri="{FF2B5EF4-FFF2-40B4-BE49-F238E27FC236}">
-                <a16:creationId xmlns:a16="http://schemas.microsoft.com/office/drawing/2014/main" id="{88659978-3090-43A4-A8B9-CD34C94577FD}"/>
+                <a16:creationId xmlns:a16="http://schemas.microsoft.com/office/drawing/2014/main" id="{CDB3AF9F-CFC4-423D-AB57-1BA55BB0E117}"/>
               </a:ext>
             </a:extLst>
           </p:cNvPr>
@@ -9891,7 +9891,7 @@
           <p:cNvPr id="18" name="Rounded Rectangle 17">
             <a:extLst xmlns:a="http://schemas.openxmlformats.org/drawingml/2006/main">
               <a:ext uri="{FF2B5EF4-FFF2-40B4-BE49-F238E27FC236}">
-                <a16:creationId xmlns:a16="http://schemas.microsoft.com/office/drawing/2014/main" id="{A1903AD4-80E7-4148-9437-7C319E123DED}"/>
+                <a16:creationId xmlns:a16="http://schemas.microsoft.com/office/drawing/2014/main" id="{6CBF7DDC-ECAF-428D-9C6A-C381D7F6FD96}"/>
               </a:ext>
             </a:extLst>
           </p:cNvPr>
@@ -9948,7 +9948,7 @@
           <p:cNvPr id="19" name="TextBox 18">
             <a:extLst xmlns:a="http://schemas.openxmlformats.org/drawingml/2006/main">
               <a:ext uri="{FF2B5EF4-FFF2-40B4-BE49-F238E27FC236}">
-                <a16:creationId xmlns:a16="http://schemas.microsoft.com/office/drawing/2014/main" id="{DF3EC3F1-33D4-40CD-9782-555E084F4665}"/>
+                <a16:creationId xmlns:a16="http://schemas.microsoft.com/office/drawing/2014/main" id="{DB2C0172-C0EB-42BC-8870-AC09C0D8EE63}"/>
               </a:ext>
             </a:extLst>
           </p:cNvPr>
@@ -9995,7 +9995,7 @@
           <p:cNvPr id="20" name="TextBox 19">
             <a:extLst xmlns:a="http://schemas.openxmlformats.org/drawingml/2006/main">
               <a:ext uri="{FF2B5EF4-FFF2-40B4-BE49-F238E27FC236}">
-                <a16:creationId xmlns:a16="http://schemas.microsoft.com/office/drawing/2014/main" id="{20EB94BA-4AF6-4AD4-8184-1554CEE2B0E2}"/>
+                <a16:creationId xmlns:a16="http://schemas.microsoft.com/office/drawing/2014/main" id="{7074759A-3CEC-4618-BBCC-89706CD06895}"/>
               </a:ext>
             </a:extLst>
           </p:cNvPr>
@@ -10040,7 +10040,7 @@
     </p:spTree>
     <p:extLst>
       <p:ext uri="{BB962C8B-B14F-4D97-AF65-F5344CB8AC3E}">
-        <p14:creationId xmlns:p14="http://schemas.microsoft.com/office/powerpoint/2010/main" val="1116796392"/>
+        <p14:creationId xmlns:p14="http://schemas.microsoft.com/office/powerpoint/2010/main" val="1836246754"/>
       </p:ext>
     </p:extLst>
   </p:cSld>
@@ -10064,7 +10064,7 @@
           <p:cNvPr id="2" name="TextBox 1">
             <a:extLst xmlns:a="http://schemas.openxmlformats.org/drawingml/2006/main">
               <a:ext uri="{FF2B5EF4-FFF2-40B4-BE49-F238E27FC236}">
-                <a16:creationId xmlns:a16="http://schemas.microsoft.com/office/drawing/2014/main" id="{6EF34962-8DF4-4763-B87D-B9DB5D59A11F}"/>
+                <a16:creationId xmlns:a16="http://schemas.microsoft.com/office/drawing/2014/main" id="{3CAC7267-08B0-4A81-89F1-5426D7C1E664}"/>
               </a:ext>
             </a:extLst>
           </p:cNvPr>
@@ -10111,7 +10111,7 @@
           <p:cNvPr id="3" name="TextBox 2">
             <a:extLst xmlns:a="http://schemas.openxmlformats.org/drawingml/2006/main">
               <a:ext uri="{FF2B5EF4-FFF2-40B4-BE49-F238E27FC236}">
-                <a16:creationId xmlns:a16="http://schemas.microsoft.com/office/drawing/2014/main" id="{1B772956-B450-469C-B7F4-4B465341159C}"/>
+                <a16:creationId xmlns:a16="http://schemas.microsoft.com/office/drawing/2014/main" id="{1AE19E42-9C32-4449-BC57-99EE0ADE59D9}"/>
               </a:ext>
             </a:extLst>
           </p:cNvPr>
@@ -10131,8 +10131,8 @@
           <a:noFill xmlns:a="http://schemas.openxmlformats.org/drawingml/2006/main"/>
         </p:spPr>
         <p:txBody>
-          <a:bodyPr xmlns:a="http://schemas.openxmlformats.org/drawingml/2006/main" wrap="square" lIns="36576" tIns="36576" rIns="36576" bIns="36576" anchor="t">
-            <a:spAutoFit/>
+          <a:bodyPr xmlns:a="http://schemas.openxmlformats.org/drawingml/2006/main" wrap="none" lIns="36576" tIns="36576" rIns="36576" bIns="36576" anchor="t">
+            <a:noAutofit/>
           </a:bodyPr>
           <a:lstStyle xmlns:a="http://schemas.openxmlformats.org/drawingml/2006/main"/>
           <a:p xmlns:a="http://schemas.openxmlformats.org/drawingml/2006/main">
@@ -10140,7 +10140,7 @@
               <a:buNone/>
             </a:pPr>
             <a:r>
-              <a:rPr sz="3400" b="1">
+              <a:rPr sz="2513" b="1">
                 <a:solidFill>
                   <a:srgbClr val="071A2B"/>
                 </a:solidFill>
@@ -10158,7 +10158,7 @@
           <p:cNvPr id="4" name="Rectangle 3">
             <a:extLst xmlns:a="http://schemas.openxmlformats.org/drawingml/2006/main">
               <a:ext uri="{FF2B5EF4-FFF2-40B4-BE49-F238E27FC236}">
-                <a16:creationId xmlns:a16="http://schemas.microsoft.com/office/drawing/2014/main" id="{A92CEC40-8934-4C31-B960-B4F54E0E3EFC}"/>
+                <a16:creationId xmlns:a16="http://schemas.microsoft.com/office/drawing/2014/main" id="{6D5F37D6-0FAE-459A-81DF-665B74FEADE5}"/>
               </a:ext>
             </a:extLst>
           </p:cNvPr>
@@ -10213,7 +10213,7 @@
           <p:cNvPr id="5" name="Rectangle 4">
             <a:extLst xmlns:a="http://schemas.openxmlformats.org/drawingml/2006/main">
               <a:ext uri="{FF2B5EF4-FFF2-40B4-BE49-F238E27FC236}">
-                <a16:creationId xmlns:a16="http://schemas.microsoft.com/office/drawing/2014/main" id="{707CD359-A02A-4C0A-A4CC-50A9C92DE165}"/>
+                <a16:creationId xmlns:a16="http://schemas.microsoft.com/office/drawing/2014/main" id="{20D7CB4B-1234-40FE-96DD-9BE6B3B13EDE}"/>
               </a:ext>
             </a:extLst>
           </p:cNvPr>
@@ -10268,7 +10268,7 @@
           <p:cNvPr id="6" name="TextBox 5">
             <a:extLst xmlns:a="http://schemas.openxmlformats.org/drawingml/2006/main">
               <a:ext uri="{FF2B5EF4-FFF2-40B4-BE49-F238E27FC236}">
-                <a16:creationId xmlns:a16="http://schemas.microsoft.com/office/drawing/2014/main" id="{2A930AF8-FB15-48BA-BCC8-284481CDC29A}"/>
+                <a16:creationId xmlns:a16="http://schemas.microsoft.com/office/drawing/2014/main" id="{8E1F7B41-ECB7-46A1-B330-C67D6FC1B771}"/>
               </a:ext>
             </a:extLst>
           </p:cNvPr>
@@ -10305,7 +10305,7 @@
                 <a:ea typeface="Aptos"/>
                 <a:cs typeface="Aptos"/>
               </a:rPr>
-              <a:t>Independent public evidence summary · 2026.07.23-11 · 2026-07-22 · Sources: EP3032975B2; 7 O 3341/24</a:t>
+              <a:t>Independent public evidence summary · 2026.07.23-12 · 2026-07-22 · Sources: EP3032975B2; 7 O 3341/24</a:t>
             </a:r>
           </a:p>
         </p:txBody>
@@ -10315,7 +10315,7 @@
           <p:cNvPr id="7" name="TextBox 6">
             <a:extLst xmlns:a="http://schemas.openxmlformats.org/drawingml/2006/main">
               <a:ext uri="{FF2B5EF4-FFF2-40B4-BE49-F238E27FC236}">
-                <a16:creationId xmlns:a16="http://schemas.microsoft.com/office/drawing/2014/main" id="{FA98817E-6F47-4639-BB11-AD48EF747AC3}"/>
+                <a16:creationId xmlns:a16="http://schemas.microsoft.com/office/drawing/2014/main" id="{468302E5-62E4-4636-922A-1B746010FB00}"/>
               </a:ext>
             </a:extLst>
           </p:cNvPr>
@@ -10362,7 +10362,7 @@
           <p:cNvPr id="8" name="TextBox 7">
             <a:extLst xmlns:a="http://schemas.openxmlformats.org/drawingml/2006/main">
               <a:ext uri="{FF2B5EF4-FFF2-40B4-BE49-F238E27FC236}">
-                <a16:creationId xmlns:a16="http://schemas.microsoft.com/office/drawing/2014/main" id="{7F7E041C-C7A0-4C4B-A3F8-6DC532272196}"/>
+                <a16:creationId xmlns:a16="http://schemas.microsoft.com/office/drawing/2014/main" id="{064F2E72-E11B-4BC8-BAB2-BD3FE59A6F62}"/>
               </a:ext>
             </a:extLst>
           </p:cNvPr>
@@ -10409,7 +10409,7 @@
           <p:cNvPr id="9" name="TextBox 8">
             <a:extLst xmlns:a="http://schemas.openxmlformats.org/drawingml/2006/main">
               <a:ext uri="{FF2B5EF4-FFF2-40B4-BE49-F238E27FC236}">
-                <a16:creationId xmlns:a16="http://schemas.microsoft.com/office/drawing/2014/main" id="{61A0E647-8C1C-49E4-B245-1B11ACD5EF6E}"/>
+                <a16:creationId xmlns:a16="http://schemas.microsoft.com/office/drawing/2014/main" id="{1A31A9C9-BB1F-47EE-BA52-32E8DB21D29A}"/>
               </a:ext>
             </a:extLst>
           </p:cNvPr>
@@ -10506,7 +10506,7 @@
           <p:cNvPr id="10" name="Rounded Rectangle 9">
             <a:extLst xmlns:a="http://schemas.openxmlformats.org/drawingml/2006/main">
               <a:ext uri="{FF2B5EF4-FFF2-40B4-BE49-F238E27FC236}">
-                <a16:creationId xmlns:a16="http://schemas.microsoft.com/office/drawing/2014/main" id="{E3869E67-4110-4344-847A-C20B3E9063A4}"/>
+                <a16:creationId xmlns:a16="http://schemas.microsoft.com/office/drawing/2014/main" id="{9A9A60FF-3BFD-47E2-8506-2F1F2F801C82}"/>
               </a:ext>
             </a:extLst>
           </p:cNvPr>
@@ -10563,7 +10563,7 @@
           <p:cNvPr id="11" name="TextBox 10">
             <a:extLst xmlns:a="http://schemas.openxmlformats.org/drawingml/2006/main">
               <a:ext uri="{FF2B5EF4-FFF2-40B4-BE49-F238E27FC236}">
-                <a16:creationId xmlns:a16="http://schemas.microsoft.com/office/drawing/2014/main" id="{7E3DB6C0-769C-45F8-9D24-AD3C240D26DA}"/>
+                <a16:creationId xmlns:a16="http://schemas.microsoft.com/office/drawing/2014/main" id="{D5F2789B-7395-42A4-A5F9-7A3484AB0473}"/>
               </a:ext>
             </a:extLst>
           </p:cNvPr>
@@ -10610,7 +10610,7 @@
           <p:cNvPr id="12" name="TextBox 11">
             <a:extLst xmlns:a="http://schemas.openxmlformats.org/drawingml/2006/main">
               <a:ext uri="{FF2B5EF4-FFF2-40B4-BE49-F238E27FC236}">
-                <a16:creationId xmlns:a16="http://schemas.microsoft.com/office/drawing/2014/main" id="{532347B9-6C79-487C-9CF5-22D37687C3FD}"/>
+                <a16:creationId xmlns:a16="http://schemas.microsoft.com/office/drawing/2014/main" id="{5393ECF9-BF82-4022-9089-28DDE0AA608E}"/>
               </a:ext>
             </a:extLst>
           </p:cNvPr>
@@ -10655,7 +10655,7 @@
     </p:spTree>
     <p:extLst>
       <p:ext uri="{BB962C8B-B14F-4D97-AF65-F5344CB8AC3E}">
-        <p14:creationId xmlns:p14="http://schemas.microsoft.com/office/powerpoint/2010/main" val="1032955434"/>
+        <p14:creationId xmlns:p14="http://schemas.microsoft.com/office/powerpoint/2010/main" val="1088552265"/>
       </p:ext>
     </p:extLst>
   </p:cSld>
@@ -10679,7 +10679,7 @@
           <p:cNvPr id="2" name="TextBox 1">
             <a:extLst xmlns:a="http://schemas.openxmlformats.org/drawingml/2006/main">
               <a:ext uri="{FF2B5EF4-FFF2-40B4-BE49-F238E27FC236}">
-                <a16:creationId xmlns:a16="http://schemas.microsoft.com/office/drawing/2014/main" id="{8B75CBEB-39E1-4480-916F-E9640042F6AF}"/>
+                <a16:creationId xmlns:a16="http://schemas.microsoft.com/office/drawing/2014/main" id="{346B059B-A376-4819-8EB7-F61B6E3A9478}"/>
               </a:ext>
             </a:extLst>
           </p:cNvPr>
@@ -10726,7 +10726,7 @@
           <p:cNvPr id="3" name="TextBox 2">
             <a:extLst xmlns:a="http://schemas.openxmlformats.org/drawingml/2006/main">
               <a:ext uri="{FF2B5EF4-FFF2-40B4-BE49-F238E27FC236}">
-                <a16:creationId xmlns:a16="http://schemas.microsoft.com/office/drawing/2014/main" id="{A165EFE7-42A5-4098-A1D0-2F140B4146EA}"/>
+                <a16:creationId xmlns:a16="http://schemas.microsoft.com/office/drawing/2014/main" id="{4E50D58D-7738-487A-87BD-621373DA3993}"/>
               </a:ext>
             </a:extLst>
           </p:cNvPr>
@@ -10746,8 +10746,8 @@
           <a:noFill xmlns:a="http://schemas.openxmlformats.org/drawingml/2006/main"/>
         </p:spPr>
         <p:txBody>
-          <a:bodyPr xmlns:a="http://schemas.openxmlformats.org/drawingml/2006/main" wrap="square" lIns="36576" tIns="36576" rIns="36576" bIns="36576" anchor="t">
-            <a:spAutoFit/>
+          <a:bodyPr xmlns:a="http://schemas.openxmlformats.org/drawingml/2006/main" wrap="none" lIns="36576" tIns="36576" rIns="36576" bIns="36576" anchor="t">
+            <a:noAutofit/>
           </a:bodyPr>
           <a:lstStyle xmlns:a="http://schemas.openxmlformats.org/drawingml/2006/main"/>
           <a:p xmlns:a="http://schemas.openxmlformats.org/drawingml/2006/main">
@@ -10755,7 +10755,7 @@
               <a:buNone/>
             </a:pPr>
             <a:r>
-              <a:rPr sz="3400" b="1">
+              <a:rPr sz="2288" b="1">
                 <a:solidFill>
                   <a:srgbClr val="071A2B"/>
                 </a:solidFill>
@@ -10773,7 +10773,7 @@
           <p:cNvPr id="4" name="Rectangle 3">
             <a:extLst xmlns:a="http://schemas.openxmlformats.org/drawingml/2006/main">
               <a:ext uri="{FF2B5EF4-FFF2-40B4-BE49-F238E27FC236}">
-                <a16:creationId xmlns:a16="http://schemas.microsoft.com/office/drawing/2014/main" id="{273982D3-BFB3-40E0-AF68-0A2EA170AE75}"/>
+                <a16:creationId xmlns:a16="http://schemas.microsoft.com/office/drawing/2014/main" id="{6EEC6D59-FCC6-45CF-B217-2F7AFD029F6C}"/>
               </a:ext>
             </a:extLst>
           </p:cNvPr>
@@ -10828,7 +10828,7 @@
           <p:cNvPr id="5" name="Rectangle 4">
             <a:extLst xmlns:a="http://schemas.openxmlformats.org/drawingml/2006/main">
               <a:ext uri="{FF2B5EF4-FFF2-40B4-BE49-F238E27FC236}">
-                <a16:creationId xmlns:a16="http://schemas.microsoft.com/office/drawing/2014/main" id="{552C5A43-A7FF-44DC-825B-C4E07B4FF4E4}"/>
+                <a16:creationId xmlns:a16="http://schemas.microsoft.com/office/drawing/2014/main" id="{D6F841CF-7470-43E9-AAF9-3293188B8B6D}"/>
               </a:ext>
             </a:extLst>
           </p:cNvPr>
@@ -10883,7 +10883,7 @@
           <p:cNvPr id="6" name="TextBox 5">
             <a:extLst xmlns:a="http://schemas.openxmlformats.org/drawingml/2006/main">
               <a:ext uri="{FF2B5EF4-FFF2-40B4-BE49-F238E27FC236}">
-                <a16:creationId xmlns:a16="http://schemas.microsoft.com/office/drawing/2014/main" id="{7AD2395B-2782-46B6-A6C0-30C75BE076A4}"/>
+                <a16:creationId xmlns:a16="http://schemas.microsoft.com/office/drawing/2014/main" id="{30A6F2BE-ACE6-4F8C-964C-8626B7A7222F}"/>
               </a:ext>
             </a:extLst>
           </p:cNvPr>
@@ -10920,7 +10920,7 @@
                 <a:ea typeface="Aptos"/>
                 <a:cs typeface="Aptos"/>
               </a:rPr>
-              <a:t>Independent public evidence summary · 2026.07.23-11 · 2026-07-22 · Sources: Market-values; IMARC; GVR; Fortune</a:t>
+              <a:t>Independent public evidence summary · 2026.07.23-12 · 2026-07-22 · Sources: Market-values; IMARC; GVR; Fortune</a:t>
             </a:r>
           </a:p>
         </p:txBody>
@@ -10930,7 +10930,7 @@
           <p:cNvPr id="7" name="TextBox 6">
             <a:extLst xmlns:a="http://schemas.openxmlformats.org/drawingml/2006/main">
               <a:ext uri="{FF2B5EF4-FFF2-40B4-BE49-F238E27FC236}">
-                <a16:creationId xmlns:a16="http://schemas.microsoft.com/office/drawing/2014/main" id="{DBCFC535-A6D8-4ABF-B71B-7ADCBA84BD1B}"/>
+                <a16:creationId xmlns:a16="http://schemas.microsoft.com/office/drawing/2014/main" id="{D260817C-FC7C-47FB-8D41-8B7CFB606D06}"/>
               </a:ext>
             </a:extLst>
           </p:cNvPr>
@@ -10977,7 +10977,7 @@
           <p:cNvPr id="8" name="Rounded Rectangle 7">
             <a:extLst xmlns:a="http://schemas.openxmlformats.org/drawingml/2006/main">
               <a:ext uri="{FF2B5EF4-FFF2-40B4-BE49-F238E27FC236}">
-                <a16:creationId xmlns:a16="http://schemas.microsoft.com/office/drawing/2014/main" id="{EE3BA729-4615-4F0D-AE16-5D5185B9074D}"/>
+                <a16:creationId xmlns:a16="http://schemas.microsoft.com/office/drawing/2014/main" id="{51B5C81F-CF1A-406F-9B66-98CBAA843577}"/>
               </a:ext>
             </a:extLst>
           </p:cNvPr>
@@ -11034,7 +11034,7 @@
           <p:cNvPr id="9" name="TextBox 8">
             <a:extLst xmlns:a="http://schemas.openxmlformats.org/drawingml/2006/main">
               <a:ext uri="{FF2B5EF4-FFF2-40B4-BE49-F238E27FC236}">
-                <a16:creationId xmlns:a16="http://schemas.microsoft.com/office/drawing/2014/main" id="{1A9AFCFA-BA00-4C70-98FA-EECB8EF053AD}"/>
+                <a16:creationId xmlns:a16="http://schemas.microsoft.com/office/drawing/2014/main" id="{10F1331A-9D6A-4CC7-B765-83B4D4E7C97E}"/>
               </a:ext>
             </a:extLst>
           </p:cNvPr>
@@ -11081,7 +11081,7 @@
           <p:cNvPr id="10" name="TextBox 9">
             <a:extLst xmlns:a="http://schemas.openxmlformats.org/drawingml/2006/main">
               <a:ext uri="{FF2B5EF4-FFF2-40B4-BE49-F238E27FC236}">
-                <a16:creationId xmlns:a16="http://schemas.microsoft.com/office/drawing/2014/main" id="{DE12DE89-4C50-496B-B110-0B3DBA0494F9}"/>
+                <a16:creationId xmlns:a16="http://schemas.microsoft.com/office/drawing/2014/main" id="{7A4A68DB-D0C9-4F1A-87B4-BF2893CDD1F5}"/>
               </a:ext>
             </a:extLst>
           </p:cNvPr>
@@ -11128,7 +11128,7 @@
           <p:cNvPr id="11" name="Rounded Rectangle 10">
             <a:extLst xmlns:a="http://schemas.openxmlformats.org/drawingml/2006/main">
               <a:ext uri="{FF2B5EF4-FFF2-40B4-BE49-F238E27FC236}">
-                <a16:creationId xmlns:a16="http://schemas.microsoft.com/office/drawing/2014/main" id="{E8CF87DC-579A-496F-A808-1D3CFEFDDACC}"/>
+                <a16:creationId xmlns:a16="http://schemas.microsoft.com/office/drawing/2014/main" id="{1A0F89FB-2B3C-4B23-B41D-F073C1DBC721}"/>
               </a:ext>
             </a:extLst>
           </p:cNvPr>
@@ -11185,7 +11185,7 @@
           <p:cNvPr id="12" name="TextBox 11">
             <a:extLst xmlns:a="http://schemas.openxmlformats.org/drawingml/2006/main">
               <a:ext uri="{FF2B5EF4-FFF2-40B4-BE49-F238E27FC236}">
-                <a16:creationId xmlns:a16="http://schemas.microsoft.com/office/drawing/2014/main" id="{D9872F64-7448-4CFC-92FE-7DE4BC6FFB44}"/>
+                <a16:creationId xmlns:a16="http://schemas.microsoft.com/office/drawing/2014/main" id="{940D7415-F714-4FEE-BA97-88E8D8321B9E}"/>
               </a:ext>
             </a:extLst>
           </p:cNvPr>
@@ -11232,7 +11232,7 @@
           <p:cNvPr id="13" name="TextBox 12">
             <a:extLst xmlns:a="http://schemas.openxmlformats.org/drawingml/2006/main">
               <a:ext uri="{FF2B5EF4-FFF2-40B4-BE49-F238E27FC236}">
-                <a16:creationId xmlns:a16="http://schemas.microsoft.com/office/drawing/2014/main" id="{45DC56F6-09A5-49E6-A2DB-0FCB21DA90F2}"/>
+                <a16:creationId xmlns:a16="http://schemas.microsoft.com/office/drawing/2014/main" id="{2B527558-70D0-495F-98EA-AC326FD385B4}"/>
               </a:ext>
             </a:extLst>
           </p:cNvPr>
@@ -11279,7 +11279,7 @@
           <p:cNvPr id="14" name="Rounded Rectangle 13">
             <a:extLst xmlns:a="http://schemas.openxmlformats.org/drawingml/2006/main">
               <a:ext uri="{FF2B5EF4-FFF2-40B4-BE49-F238E27FC236}">
-                <a16:creationId xmlns:a16="http://schemas.microsoft.com/office/drawing/2014/main" id="{2756AD2B-0114-45E2-91E5-0BF89409043A}"/>
+                <a16:creationId xmlns:a16="http://schemas.microsoft.com/office/drawing/2014/main" id="{0F9C8B04-BF3A-4415-ADBA-C7317DED4857}"/>
               </a:ext>
             </a:extLst>
           </p:cNvPr>
@@ -11336,7 +11336,7 @@
           <p:cNvPr id="15" name="TextBox 14">
             <a:extLst xmlns:a="http://schemas.openxmlformats.org/drawingml/2006/main">
               <a:ext uri="{FF2B5EF4-FFF2-40B4-BE49-F238E27FC236}">
-                <a16:creationId xmlns:a16="http://schemas.microsoft.com/office/drawing/2014/main" id="{9F65BCB2-A0C5-4AB6-88C8-72682E1FD520}"/>
+                <a16:creationId xmlns:a16="http://schemas.microsoft.com/office/drawing/2014/main" id="{BF45A1DF-9876-4691-AD9A-9021C5B6CBBB}"/>
               </a:ext>
             </a:extLst>
           </p:cNvPr>
@@ -11383,7 +11383,7 @@
           <p:cNvPr id="16" name="TextBox 15">
             <a:extLst xmlns:a="http://schemas.openxmlformats.org/drawingml/2006/main">
               <a:ext uri="{FF2B5EF4-FFF2-40B4-BE49-F238E27FC236}">
-                <a16:creationId xmlns:a16="http://schemas.microsoft.com/office/drawing/2014/main" id="{4EEB218D-D4C4-407F-9E50-D5C83F44AFAD}"/>
+                <a16:creationId xmlns:a16="http://schemas.microsoft.com/office/drawing/2014/main" id="{A6D695C5-2596-4EF1-AA7C-EFB53A6B59E8}"/>
               </a:ext>
             </a:extLst>
           </p:cNvPr>
@@ -11430,7 +11430,7 @@
           <p:cNvPr id="17" name="TextBox 16">
             <a:extLst xmlns:a="http://schemas.openxmlformats.org/drawingml/2006/main">
               <a:ext uri="{FF2B5EF4-FFF2-40B4-BE49-F238E27FC236}">
-                <a16:creationId xmlns:a16="http://schemas.microsoft.com/office/drawing/2014/main" id="{9676DB7A-FB68-4EF5-9C0B-27DFE1ADA4A2}"/>
+                <a16:creationId xmlns:a16="http://schemas.microsoft.com/office/drawing/2014/main" id="{9D782440-9927-4166-BA04-44C13E2CEB93}"/>
               </a:ext>
             </a:extLst>
           </p:cNvPr>
@@ -11477,7 +11477,7 @@
           <p:cNvPr id="18" name="Rounded Rectangle 17">
             <a:extLst xmlns:a="http://schemas.openxmlformats.org/drawingml/2006/main">
               <a:ext uri="{FF2B5EF4-FFF2-40B4-BE49-F238E27FC236}">
-                <a16:creationId xmlns:a16="http://schemas.microsoft.com/office/drawing/2014/main" id="{4376F999-8767-4F7F-906B-4292156B51E1}"/>
+                <a16:creationId xmlns:a16="http://schemas.microsoft.com/office/drawing/2014/main" id="{EB37BCDC-1BCA-4648-883E-78F72D6BF0EF}"/>
               </a:ext>
             </a:extLst>
           </p:cNvPr>
@@ -11534,7 +11534,7 @@
           <p:cNvPr id="19" name="TextBox 18">
             <a:extLst xmlns:a="http://schemas.openxmlformats.org/drawingml/2006/main">
               <a:ext uri="{FF2B5EF4-FFF2-40B4-BE49-F238E27FC236}">
-                <a16:creationId xmlns:a16="http://schemas.microsoft.com/office/drawing/2014/main" id="{29126942-8D9C-449D-B58D-286AAC19C731}"/>
+                <a16:creationId xmlns:a16="http://schemas.microsoft.com/office/drawing/2014/main" id="{398898A8-1F18-4ADB-8723-28B1B510BEA1}"/>
               </a:ext>
             </a:extLst>
           </p:cNvPr>
@@ -11581,7 +11581,7 @@
           <p:cNvPr id="20" name="TextBox 19">
             <a:extLst xmlns:a="http://schemas.openxmlformats.org/drawingml/2006/main">
               <a:ext uri="{FF2B5EF4-FFF2-40B4-BE49-F238E27FC236}">
-                <a16:creationId xmlns:a16="http://schemas.microsoft.com/office/drawing/2014/main" id="{48AB02D8-696A-4850-B066-7646C1CDD8F9}"/>
+                <a16:creationId xmlns:a16="http://schemas.microsoft.com/office/drawing/2014/main" id="{B8AEF547-9C2C-46FA-9BB7-86F89051BE68}"/>
               </a:ext>
             </a:extLst>
           </p:cNvPr>
@@ -11626,7 +11626,7 @@
     </p:spTree>
     <p:extLst>
       <p:ext uri="{BB962C8B-B14F-4D97-AF65-F5344CB8AC3E}">
-        <p14:creationId xmlns:p14="http://schemas.microsoft.com/office/powerpoint/2010/main" val="715578794"/>
+        <p14:creationId xmlns:p14="http://schemas.microsoft.com/office/powerpoint/2010/main" val="585164574"/>
       </p:ext>
     </p:extLst>
   </p:cSld>
@@ -11650,7 +11650,7 @@
           <p:cNvPr id="2" name="TextBox 1">
             <a:extLst xmlns:a="http://schemas.openxmlformats.org/drawingml/2006/main">
               <a:ext uri="{FF2B5EF4-FFF2-40B4-BE49-F238E27FC236}">
-                <a16:creationId xmlns:a16="http://schemas.microsoft.com/office/drawing/2014/main" id="{C4C7550A-8542-41CC-8FBA-E529CC0C1E30}"/>
+                <a16:creationId xmlns:a16="http://schemas.microsoft.com/office/drawing/2014/main" id="{98B466B6-7E3B-418F-88A3-84E506D9AEF8}"/>
               </a:ext>
             </a:extLst>
           </p:cNvPr>
@@ -11697,7 +11697,7 @@
           <p:cNvPr id="3" name="TextBox 2">
             <a:extLst xmlns:a="http://schemas.openxmlformats.org/drawingml/2006/main">
               <a:ext uri="{FF2B5EF4-FFF2-40B4-BE49-F238E27FC236}">
-                <a16:creationId xmlns:a16="http://schemas.microsoft.com/office/drawing/2014/main" id="{033764A2-582F-4E04-AD99-4F7E4DD0AD3A}"/>
+                <a16:creationId xmlns:a16="http://schemas.microsoft.com/office/drawing/2014/main" id="{31794156-DCA9-4312-A51A-B79DC63DD822}"/>
               </a:ext>
             </a:extLst>
           </p:cNvPr>
@@ -11717,8 +11717,8 @@
           <a:noFill xmlns:a="http://schemas.openxmlformats.org/drawingml/2006/main"/>
         </p:spPr>
         <p:txBody>
-          <a:bodyPr xmlns:a="http://schemas.openxmlformats.org/drawingml/2006/main" wrap="square" lIns="36576" tIns="36576" rIns="36576" bIns="36576" anchor="t">
-            <a:spAutoFit/>
+          <a:bodyPr xmlns:a="http://schemas.openxmlformats.org/drawingml/2006/main" wrap="none" lIns="36576" tIns="36576" rIns="36576" bIns="36576" anchor="t">
+            <a:noAutofit/>
           </a:bodyPr>
           <a:lstStyle xmlns:a="http://schemas.openxmlformats.org/drawingml/2006/main"/>
           <a:p xmlns:a="http://schemas.openxmlformats.org/drawingml/2006/main">
@@ -11726,7 +11726,7 @@
               <a:buNone/>
             </a:pPr>
             <a:r>
-              <a:rPr sz="3400" b="1">
+              <a:rPr sz="2438" b="1">
                 <a:solidFill>
                   <a:srgbClr val="071A2B"/>
                 </a:solidFill>
@@ -11744,7 +11744,7 @@
           <p:cNvPr id="4" name="Rectangle 3">
             <a:extLst xmlns:a="http://schemas.openxmlformats.org/drawingml/2006/main">
               <a:ext uri="{FF2B5EF4-FFF2-40B4-BE49-F238E27FC236}">
-                <a16:creationId xmlns:a16="http://schemas.microsoft.com/office/drawing/2014/main" id="{45780169-EB79-4F2C-BF69-07AD813C10EA}"/>
+                <a16:creationId xmlns:a16="http://schemas.microsoft.com/office/drawing/2014/main" id="{27BB9F33-4CBA-4B83-90C8-805D144DE328}"/>
               </a:ext>
             </a:extLst>
           </p:cNvPr>
@@ -11799,7 +11799,7 @@
           <p:cNvPr id="5" name="Rectangle 4">
             <a:extLst xmlns:a="http://schemas.openxmlformats.org/drawingml/2006/main">
               <a:ext uri="{FF2B5EF4-FFF2-40B4-BE49-F238E27FC236}">
-                <a16:creationId xmlns:a16="http://schemas.microsoft.com/office/drawing/2014/main" id="{391A70FB-04CA-4F09-A211-5D4E153FC43A}"/>
+                <a16:creationId xmlns:a16="http://schemas.microsoft.com/office/drawing/2014/main" id="{E7A1E794-162D-4935-944E-AF380214CA1F}"/>
               </a:ext>
             </a:extLst>
           </p:cNvPr>
@@ -11854,7 +11854,7 @@
           <p:cNvPr id="6" name="TextBox 5">
             <a:extLst xmlns:a="http://schemas.openxmlformats.org/drawingml/2006/main">
               <a:ext uri="{FF2B5EF4-FFF2-40B4-BE49-F238E27FC236}">
-                <a16:creationId xmlns:a16="http://schemas.microsoft.com/office/drawing/2014/main" id="{C4DF6528-A362-45D0-B02E-4D6212B96C46}"/>
+                <a16:creationId xmlns:a16="http://schemas.microsoft.com/office/drawing/2014/main" id="{2C063D1D-065B-4EFF-8333-C64B51F92F08}"/>
               </a:ext>
             </a:extLst>
           </p:cNvPr>
@@ -11891,7 +11891,7 @@
                 <a:ea typeface="Aptos"/>
                 <a:cs typeface="Aptos"/>
               </a:rPr>
-              <a:t>Independent public evidence summary · 2026.07.23-11 · 2026-07-22 · Sources: WIPO licensing; WIPO IP Finance</a:t>
+              <a:t>Independent public evidence summary · 2026.07.23-12 · 2026-07-22 · Sources: WIPO licensing; WIPO IP Finance</a:t>
             </a:r>
           </a:p>
         </p:txBody>
@@ -11901,7 +11901,7 @@
           <p:cNvPr id="7" name="TextBox 6">
             <a:extLst xmlns:a="http://schemas.openxmlformats.org/drawingml/2006/main">
               <a:ext uri="{FF2B5EF4-FFF2-40B4-BE49-F238E27FC236}">
-                <a16:creationId xmlns:a16="http://schemas.microsoft.com/office/drawing/2014/main" id="{4D95E206-7002-4C68-AC12-430C69A6C6D1}"/>
+                <a16:creationId xmlns:a16="http://schemas.microsoft.com/office/drawing/2014/main" id="{99525BEC-EFB0-40DD-8E8C-8DCB2E5BA25E}"/>
               </a:ext>
             </a:extLst>
           </p:cNvPr>
@@ -11948,7 +11948,7 @@
           <p:cNvPr id="8" name="TextBox 7">
             <a:extLst xmlns:a="http://schemas.openxmlformats.org/drawingml/2006/main">
               <a:ext uri="{FF2B5EF4-FFF2-40B4-BE49-F238E27FC236}">
-                <a16:creationId xmlns:a16="http://schemas.microsoft.com/office/drawing/2014/main" id="{7E150CE5-47CA-4BF3-A9B9-5B13C22013C4}"/>
+                <a16:creationId xmlns:a16="http://schemas.microsoft.com/office/drawing/2014/main" id="{D232D389-6EF4-4E4E-B151-869F9DDBD32E}"/>
               </a:ext>
             </a:extLst>
           </p:cNvPr>
@@ -11995,7 +11995,7 @@
           <p:cNvPr id="9" name="TextBox 8">
             <a:extLst xmlns:a="http://schemas.openxmlformats.org/drawingml/2006/main">
               <a:ext uri="{FF2B5EF4-FFF2-40B4-BE49-F238E27FC236}">
-                <a16:creationId xmlns:a16="http://schemas.microsoft.com/office/drawing/2014/main" id="{BF66880D-2F4F-4694-97C4-5ECC482CC04C}"/>
+                <a16:creationId xmlns:a16="http://schemas.microsoft.com/office/drawing/2014/main" id="{1F683E69-60D4-42C6-9E24-68ABEDFD4EAE}"/>
               </a:ext>
             </a:extLst>
           </p:cNvPr>
@@ -12092,7 +12092,7 @@
           <p:cNvPr id="10" name="Rounded Rectangle 9">
             <a:extLst xmlns:a="http://schemas.openxmlformats.org/drawingml/2006/main">
               <a:ext uri="{FF2B5EF4-FFF2-40B4-BE49-F238E27FC236}">
-                <a16:creationId xmlns:a16="http://schemas.microsoft.com/office/drawing/2014/main" id="{A114455E-590D-4126-B355-61A8446D73E4}"/>
+                <a16:creationId xmlns:a16="http://schemas.microsoft.com/office/drawing/2014/main" id="{B2A0B7C5-0190-4464-A8C3-A960E2B9FF9B}"/>
               </a:ext>
             </a:extLst>
           </p:cNvPr>
@@ -12149,7 +12149,7 @@
           <p:cNvPr id="11" name="TextBox 10">
             <a:extLst xmlns:a="http://schemas.openxmlformats.org/drawingml/2006/main">
               <a:ext uri="{FF2B5EF4-FFF2-40B4-BE49-F238E27FC236}">
-                <a16:creationId xmlns:a16="http://schemas.microsoft.com/office/drawing/2014/main" id="{579D2693-F275-4BA5-BD28-65ECD16D7BD5}"/>
+                <a16:creationId xmlns:a16="http://schemas.microsoft.com/office/drawing/2014/main" id="{9B7B2870-1C5C-4E18-BA86-1C6C5F997F9F}"/>
               </a:ext>
             </a:extLst>
           </p:cNvPr>
@@ -12196,7 +12196,7 @@
           <p:cNvPr id="12" name="TextBox 11">
             <a:extLst xmlns:a="http://schemas.openxmlformats.org/drawingml/2006/main">
               <a:ext uri="{FF2B5EF4-FFF2-40B4-BE49-F238E27FC236}">
-                <a16:creationId xmlns:a16="http://schemas.microsoft.com/office/drawing/2014/main" id="{5A81DE4F-774F-403F-AF39-A6EDB9242BD8}"/>
+                <a16:creationId xmlns:a16="http://schemas.microsoft.com/office/drawing/2014/main" id="{48BBF761-D95B-47FD-BE65-A1CCC61085CE}"/>
               </a:ext>
             </a:extLst>
           </p:cNvPr>
@@ -12241,7 +12241,7 @@
     </p:spTree>
     <p:extLst>
       <p:ext uri="{BB962C8B-B14F-4D97-AF65-F5344CB8AC3E}">
-        <p14:creationId xmlns:p14="http://schemas.microsoft.com/office/powerpoint/2010/main" val="1609656464"/>
+        <p14:creationId xmlns:p14="http://schemas.microsoft.com/office/powerpoint/2010/main" val="2020093747"/>
       </p:ext>
     </p:extLst>
   </p:cSld>
@@ -12265,7 +12265,7 @@
           <p:cNvPr id="2" name="TextBox 1">
             <a:extLst xmlns:a="http://schemas.openxmlformats.org/drawingml/2006/main">
               <a:ext uri="{FF2B5EF4-FFF2-40B4-BE49-F238E27FC236}">
-                <a16:creationId xmlns:a16="http://schemas.microsoft.com/office/drawing/2014/main" id="{AF00A7F1-9F9E-4DEE-9CC7-FEDEB27DBC57}"/>
+                <a16:creationId xmlns:a16="http://schemas.microsoft.com/office/drawing/2014/main" id="{8F8E051E-4BEE-4CD5-82E6-0907EF292AB0}"/>
               </a:ext>
             </a:extLst>
           </p:cNvPr>
@@ -12312,7 +12312,7 @@
           <p:cNvPr id="3" name="TextBox 2">
             <a:extLst xmlns:a="http://schemas.openxmlformats.org/drawingml/2006/main">
               <a:ext uri="{FF2B5EF4-FFF2-40B4-BE49-F238E27FC236}">
-                <a16:creationId xmlns:a16="http://schemas.microsoft.com/office/drawing/2014/main" id="{48CF5143-A092-465E-92B2-12BCEC1D22C7}"/>
+                <a16:creationId xmlns:a16="http://schemas.microsoft.com/office/drawing/2014/main" id="{7A06E2D3-6BB6-4177-A79A-F643D5748981}"/>
               </a:ext>
             </a:extLst>
           </p:cNvPr>
@@ -12359,7 +12359,7 @@
           <p:cNvPr id="4" name="Rectangle 3">
             <a:extLst xmlns:a="http://schemas.openxmlformats.org/drawingml/2006/main">
               <a:ext uri="{FF2B5EF4-FFF2-40B4-BE49-F238E27FC236}">
-                <a16:creationId xmlns:a16="http://schemas.microsoft.com/office/drawing/2014/main" id="{A3226DB1-DBEF-48DA-A4BF-87F825584027}"/>
+                <a16:creationId xmlns:a16="http://schemas.microsoft.com/office/drawing/2014/main" id="{56F69209-BB69-497F-AA10-BEA72BEDD3DF}"/>
               </a:ext>
             </a:extLst>
           </p:cNvPr>
@@ -12414,7 +12414,7 @@
           <p:cNvPr id="5" name="Rectangle 4">
             <a:extLst xmlns:a="http://schemas.openxmlformats.org/drawingml/2006/main">
               <a:ext uri="{FF2B5EF4-FFF2-40B4-BE49-F238E27FC236}">
-                <a16:creationId xmlns:a16="http://schemas.microsoft.com/office/drawing/2014/main" id="{8C81C7C5-EE05-4CE1-9E79-690F76306F4A}"/>
+                <a16:creationId xmlns:a16="http://schemas.microsoft.com/office/drawing/2014/main" id="{D51C76DA-3CD4-4A33-9841-0A5D4C76C5B5}"/>
               </a:ext>
             </a:extLst>
           </p:cNvPr>
@@ -12469,7 +12469,7 @@
           <p:cNvPr id="6" name="TextBox 5">
             <a:extLst xmlns:a="http://schemas.openxmlformats.org/drawingml/2006/main">
               <a:ext uri="{FF2B5EF4-FFF2-40B4-BE49-F238E27FC236}">
-                <a16:creationId xmlns:a16="http://schemas.microsoft.com/office/drawing/2014/main" id="{93F89525-4EA5-44E5-8433-2117D7F5ABCD}"/>
+                <a16:creationId xmlns:a16="http://schemas.microsoft.com/office/drawing/2014/main" id="{3E02C089-F4D9-4D25-BF13-0C1A6B041BC5}"/>
               </a:ext>
             </a:extLst>
           </p:cNvPr>
@@ -12506,7 +12506,7 @@
                 <a:ea typeface="Aptos"/>
                 <a:cs typeface="Aptos"/>
               </a:rPr>
-              <a:t>Independent public evidence summary · 2026.07.23-11 · 2026-07-22 · Sources: Evidence Register; EPO; WIPO</a:t>
+              <a:t>Independent public evidence summary · 2026.07.23-12 · 2026-07-22 · Sources: Evidence Register; EPO; WIPO</a:t>
             </a:r>
           </a:p>
         </p:txBody>
@@ -12516,7 +12516,7 @@
           <p:cNvPr id="7" name="TextBox 6">
             <a:extLst xmlns:a="http://schemas.openxmlformats.org/drawingml/2006/main">
               <a:ext uri="{FF2B5EF4-FFF2-40B4-BE49-F238E27FC236}">
-                <a16:creationId xmlns:a16="http://schemas.microsoft.com/office/drawing/2014/main" id="{96D99C54-3529-45E2-875E-4190EACD2395}"/>
+                <a16:creationId xmlns:a16="http://schemas.microsoft.com/office/drawing/2014/main" id="{9E7CAF89-85EB-4649-A834-63B087C26FA5}"/>
               </a:ext>
             </a:extLst>
           </p:cNvPr>
@@ -13003,7 +13003,7 @@
           <p:cNvPr id="9" name="TextBox 8">
             <a:extLst xmlns:a="http://schemas.openxmlformats.org/drawingml/2006/main">
               <a:ext uri="{FF2B5EF4-FFF2-40B4-BE49-F238E27FC236}">
-                <a16:creationId xmlns:a16="http://schemas.microsoft.com/office/drawing/2014/main" id="{B985358E-BFAC-42DF-B4BD-169715B5BB53}"/>
+                <a16:creationId xmlns:a16="http://schemas.microsoft.com/office/drawing/2014/main" id="{C5D5D81A-CFC4-493F-8EF5-4DBD33363989}"/>
               </a:ext>
             </a:extLst>
           </p:cNvPr>
@@ -13048,7 +13048,7 @@
     </p:spTree>
     <p:extLst>
       <p:ext uri="{BB962C8B-B14F-4D97-AF65-F5344CB8AC3E}">
-        <p14:creationId xmlns:p14="http://schemas.microsoft.com/office/powerpoint/2010/main" val="1394461259"/>
+        <p14:creationId xmlns:p14="http://schemas.microsoft.com/office/powerpoint/2010/main" val="425300615"/>
       </p:ext>
     </p:extLst>
   </p:cSld>
@@ -13072,7 +13072,7 @@
           <p:cNvPr id="2" name="TextBox 1">
             <a:extLst xmlns:a="http://schemas.openxmlformats.org/drawingml/2006/main">
               <a:ext uri="{FF2B5EF4-FFF2-40B4-BE49-F238E27FC236}">
-                <a16:creationId xmlns:a16="http://schemas.microsoft.com/office/drawing/2014/main" id="{4D064CEB-4F67-45E1-9160-799BB9D584CF}"/>
+                <a16:creationId xmlns:a16="http://schemas.microsoft.com/office/drawing/2014/main" id="{AE860D33-E4D2-401F-858C-4D2AF4AC1384}"/>
               </a:ext>
             </a:extLst>
           </p:cNvPr>
@@ -13119,7 +13119,7 @@
           <p:cNvPr id="3" name="TextBox 2">
             <a:extLst xmlns:a="http://schemas.openxmlformats.org/drawingml/2006/main">
               <a:ext uri="{FF2B5EF4-FFF2-40B4-BE49-F238E27FC236}">
-                <a16:creationId xmlns:a16="http://schemas.microsoft.com/office/drawing/2014/main" id="{7E76542A-03FD-498D-B368-72509507E98E}"/>
+                <a16:creationId xmlns:a16="http://schemas.microsoft.com/office/drawing/2014/main" id="{CFE3F5AF-9E61-4E03-B006-E83ED4F46E3C}"/>
               </a:ext>
             </a:extLst>
           </p:cNvPr>
@@ -13166,7 +13166,7 @@
           <p:cNvPr id="4" name="Rectangle 3">
             <a:extLst xmlns:a="http://schemas.openxmlformats.org/drawingml/2006/main">
               <a:ext uri="{FF2B5EF4-FFF2-40B4-BE49-F238E27FC236}">
-                <a16:creationId xmlns:a16="http://schemas.microsoft.com/office/drawing/2014/main" id="{F715F480-1243-4079-ADC4-8193534DE956}"/>
+                <a16:creationId xmlns:a16="http://schemas.microsoft.com/office/drawing/2014/main" id="{289B37EE-7F62-4E9B-A099-41FCA25854F3}"/>
               </a:ext>
             </a:extLst>
           </p:cNvPr>
@@ -13221,7 +13221,7 @@
           <p:cNvPr id="5" name="Rectangle 4">
             <a:extLst xmlns:a="http://schemas.openxmlformats.org/drawingml/2006/main">
               <a:ext uri="{FF2B5EF4-FFF2-40B4-BE49-F238E27FC236}">
-                <a16:creationId xmlns:a16="http://schemas.microsoft.com/office/drawing/2014/main" id="{49B0FEEA-926F-4EE8-8186-71578450B4C4}"/>
+                <a16:creationId xmlns:a16="http://schemas.microsoft.com/office/drawing/2014/main" id="{6352430C-DDD0-4A55-931D-187FC94EC9CB}"/>
               </a:ext>
             </a:extLst>
           </p:cNvPr>
@@ -13276,7 +13276,7 @@
           <p:cNvPr id="6" name="TextBox 5">
             <a:extLst xmlns:a="http://schemas.openxmlformats.org/drawingml/2006/main">
               <a:ext uri="{FF2B5EF4-FFF2-40B4-BE49-F238E27FC236}">
-                <a16:creationId xmlns:a16="http://schemas.microsoft.com/office/drawing/2014/main" id="{F0A343A8-5120-4982-87D6-E35B0FA4C3C8}"/>
+                <a16:creationId xmlns:a16="http://schemas.microsoft.com/office/drawing/2014/main" id="{025DB16F-0D5D-4A35-B70E-1A718407C842}"/>
               </a:ext>
             </a:extLst>
           </p:cNvPr>
@@ -13313,7 +13313,7 @@
                 <a:ea typeface="Aptos"/>
                 <a:cs typeface="Aptos"/>
               </a:rPr>
-              <a:t>Independent public evidence summary · 2026.07.23-11 · 2026-07-22 · Sources: Evidence Register</a:t>
+              <a:t>Independent public evidence summary · 2026.07.23-12 · 2026-07-22 · Sources: Evidence Register</a:t>
             </a:r>
           </a:p>
         </p:txBody>
@@ -13323,7 +13323,7 @@
           <p:cNvPr id="7" name="TextBox 6">
             <a:extLst xmlns:a="http://schemas.openxmlformats.org/drawingml/2006/main">
               <a:ext uri="{FF2B5EF4-FFF2-40B4-BE49-F238E27FC236}">
-                <a16:creationId xmlns:a16="http://schemas.microsoft.com/office/drawing/2014/main" id="{218468D7-5449-4B90-AC26-F2B3018FF55A}"/>
+                <a16:creationId xmlns:a16="http://schemas.microsoft.com/office/drawing/2014/main" id="{F6DD166F-1497-4F7E-828B-EBADA247C4DA}"/>
               </a:ext>
             </a:extLst>
           </p:cNvPr>
@@ -14056,7 +14056,7 @@
           <p:cNvPr id="9" name="TextBox 8">
             <a:extLst xmlns:a="http://schemas.openxmlformats.org/drawingml/2006/main">
               <a:ext uri="{FF2B5EF4-FFF2-40B4-BE49-F238E27FC236}">
-                <a16:creationId xmlns:a16="http://schemas.microsoft.com/office/drawing/2014/main" id="{04A44E05-CC9E-4B98-9DEA-D60C4A0B61D9}"/>
+                <a16:creationId xmlns:a16="http://schemas.microsoft.com/office/drawing/2014/main" id="{932436EC-130A-4903-9D2D-5F69B547210C}"/>
               </a:ext>
             </a:extLst>
           </p:cNvPr>
@@ -14101,7 +14101,7 @@
     </p:spTree>
     <p:extLst>
       <p:ext uri="{BB962C8B-B14F-4D97-AF65-F5344CB8AC3E}">
-        <p14:creationId xmlns:p14="http://schemas.microsoft.com/office/powerpoint/2010/main" val="590008159"/>
+        <p14:creationId xmlns:p14="http://schemas.microsoft.com/office/powerpoint/2010/main" val="743573402"/>
       </p:ext>
     </p:extLst>
   </p:cSld>

--- a/site/downloads/pixan-bank-deck-medium-en.pptx
+++ b/site/downloads/pixan-bank-deck-medium-en.pptx
@@ -2,24 +2,24 @@
 <file path=ppt/presentation.xml><?xml version="1.0" encoding="utf-8"?>
 <p:presentation xmlns:p="http://schemas.openxmlformats.org/presentationml/2006/main">
   <p:sldMasterIdLst>
-    <p:sldMasterId xmlns:r="http://schemas.openxmlformats.org/officeDocument/2006/relationships" id="2147483648" r:id="Re8950e66db7641e3"/>
+    <p:sldMasterId xmlns:r="http://schemas.openxmlformats.org/officeDocument/2006/relationships" id="2147483648" r:id="R822bb5ee97b547ff"/>
   </p:sldMasterIdLst>
   <p:notesMasterIdLst>
-    <p:notesMasterId xmlns:r="http://schemas.openxmlformats.org/officeDocument/2006/relationships" r:id="R3c59e577b8534459"/>
+    <p:notesMasterId xmlns:r="http://schemas.openxmlformats.org/officeDocument/2006/relationships" r:id="Rec1c0fb012954419"/>
   </p:notesMasterIdLst>
   <p:sldIdLst>
-    <p:sldId xmlns:r="http://schemas.openxmlformats.org/officeDocument/2006/relationships" id="256" r:id="R6c25fff6dbd449e8"/>
-    <p:sldId xmlns:r="http://schemas.openxmlformats.org/officeDocument/2006/relationships" id="257" r:id="Rc2f8e31eea644adb"/>
-    <p:sldId xmlns:r="http://schemas.openxmlformats.org/officeDocument/2006/relationships" id="258" r:id="Rc4a265a4f5d347a0"/>
-    <p:sldId xmlns:r="http://schemas.openxmlformats.org/officeDocument/2006/relationships" id="259" r:id="R630799ef19334ea6"/>
-    <p:sldId xmlns:r="http://schemas.openxmlformats.org/officeDocument/2006/relationships" id="260" r:id="Rbd86723219b1433c"/>
-    <p:sldId xmlns:r="http://schemas.openxmlformats.org/officeDocument/2006/relationships" id="261" r:id="Rf174d2d197ae4672"/>
-    <p:sldId xmlns:r="http://schemas.openxmlformats.org/officeDocument/2006/relationships" id="262" r:id="R1bfd6b5142104633"/>
-    <p:sldId xmlns:r="http://schemas.openxmlformats.org/officeDocument/2006/relationships" id="263" r:id="R25794c2777c54097"/>
-    <p:sldId xmlns:r="http://schemas.openxmlformats.org/officeDocument/2006/relationships" id="264" r:id="R9a8dbe2eb7904c22"/>
-    <p:sldId xmlns:r="http://schemas.openxmlformats.org/officeDocument/2006/relationships" id="265" r:id="R965b25e2bb00466e"/>
-    <p:sldId xmlns:r="http://schemas.openxmlformats.org/officeDocument/2006/relationships" id="266" r:id="Rf86100370cd14802"/>
-    <p:sldId xmlns:r="http://schemas.openxmlformats.org/officeDocument/2006/relationships" id="267" r:id="R5c90c1e07b064d66"/>
+    <p:sldId xmlns:r="http://schemas.openxmlformats.org/officeDocument/2006/relationships" id="256" r:id="R933e64fd15484ff9"/>
+    <p:sldId xmlns:r="http://schemas.openxmlformats.org/officeDocument/2006/relationships" id="257" r:id="R346518882dec4b08"/>
+    <p:sldId xmlns:r="http://schemas.openxmlformats.org/officeDocument/2006/relationships" id="258" r:id="R1bb5be8cb62942dd"/>
+    <p:sldId xmlns:r="http://schemas.openxmlformats.org/officeDocument/2006/relationships" id="259" r:id="Re9facbc767ed4fc9"/>
+    <p:sldId xmlns:r="http://schemas.openxmlformats.org/officeDocument/2006/relationships" id="260" r:id="R534a096d7c194f71"/>
+    <p:sldId xmlns:r="http://schemas.openxmlformats.org/officeDocument/2006/relationships" id="261" r:id="R02eec8d3302942c1"/>
+    <p:sldId xmlns:r="http://schemas.openxmlformats.org/officeDocument/2006/relationships" id="262" r:id="R84f0a1fe0ed44dc9"/>
+    <p:sldId xmlns:r="http://schemas.openxmlformats.org/officeDocument/2006/relationships" id="263" r:id="R63b78021389b4088"/>
+    <p:sldId xmlns:r="http://schemas.openxmlformats.org/officeDocument/2006/relationships" id="264" r:id="R47f7168df0fd4186"/>
+    <p:sldId xmlns:r="http://schemas.openxmlformats.org/officeDocument/2006/relationships" id="265" r:id="R7e100ae0050c4484"/>
+    <p:sldId xmlns:r="http://schemas.openxmlformats.org/officeDocument/2006/relationships" id="266" r:id="Ra222a5197ab24bd3"/>
+    <p:sldId xmlns:r="http://schemas.openxmlformats.org/officeDocument/2006/relationships" id="267" r:id="R1ffd7e39c00e4fca"/>
   </p:sldIdLst>
   <p:sldSz cx="12191999" cy="6858000"/>
   <p:notesSz cx="6858000" cy="9144000"/>
@@ -1340,7 +1340,7 @@
           <p:cNvPr id="2" name="Title 1">
             <a:extLst xmlns:a="http://schemas.openxmlformats.org/drawingml/2006/main">
               <a:ext uri="{FF2B5EF4-FFF2-40B4-BE49-F238E27FC236}">
-                <a16:creationId xmlns:a16="http://schemas.microsoft.com/office/drawing/2014/main" id="{E4957C14-670F-46D7-8B87-4CC0467905DC}"/>
+                <a16:creationId xmlns:a16="http://schemas.microsoft.com/office/drawing/2014/main" id="{13F08619-CB8F-4058-9BDF-15C071C65277}"/>
               </a:ext>
             </a:extLst>
           </p:cNvPr>
@@ -1372,7 +1372,7 @@
           <p:cNvPr id="3" name="Subtitle 2">
             <a:extLst xmlns:a="http://schemas.openxmlformats.org/drawingml/2006/main">
               <a:ext uri="{FF2B5EF4-FFF2-40B4-BE49-F238E27FC236}">
-                <a16:creationId xmlns:a16="http://schemas.microsoft.com/office/drawing/2014/main" id="{068D6137-98A1-4F60-A251-11A3913CEB2F}"/>
+                <a16:creationId xmlns:a16="http://schemas.microsoft.com/office/drawing/2014/main" id="{E5D4C768-FF89-4D7A-92A6-2B290384CEE9}"/>
               </a:ext>
             </a:extLst>
           </p:cNvPr>
@@ -1495,7 +1495,7 @@
           <p:cNvPr id="4" name="Date Placeholder 3">
             <a:extLst xmlns:a="http://schemas.openxmlformats.org/drawingml/2006/main">
               <a:ext uri="{FF2B5EF4-FFF2-40B4-BE49-F238E27FC236}">
-                <a16:creationId xmlns:a16="http://schemas.microsoft.com/office/drawing/2014/main" id="{65A8C5CA-449E-4AD2-B479-90B8523DB520}"/>
+                <a16:creationId xmlns:a16="http://schemas.microsoft.com/office/drawing/2014/main" id="{8A7E8726-AEF8-46E1-8BA0-D1EEC16A7B0F}"/>
               </a:ext>
             </a:extLst>
           </p:cNvPr>
@@ -1522,7 +1522,7 @@
           <p:cNvPr id="5" name="Footer Placeholder 4">
             <a:extLst xmlns:a="http://schemas.openxmlformats.org/drawingml/2006/main">
               <a:ext uri="{FF2B5EF4-FFF2-40B4-BE49-F238E27FC236}">
-                <a16:creationId xmlns:a16="http://schemas.microsoft.com/office/drawing/2014/main" id="{8AC10442-61B6-4C4F-A423-0F35D39C5CB2}"/>
+                <a16:creationId xmlns:a16="http://schemas.microsoft.com/office/drawing/2014/main" id="{1D804837-714F-4011-845F-33CBF1E5E133}"/>
               </a:ext>
             </a:extLst>
           </p:cNvPr>
@@ -1545,7 +1545,7 @@
           <p:cNvPr id="6" name="Slide Number Placeholder 5">
             <a:extLst xmlns:a="http://schemas.openxmlformats.org/drawingml/2006/main">
               <a:ext uri="{FF2B5EF4-FFF2-40B4-BE49-F238E27FC236}">
-                <a16:creationId xmlns:a16="http://schemas.microsoft.com/office/drawing/2014/main" id="{9FA686EA-B2AD-4BA6-BFC4-008F99C014B2}"/>
+                <a16:creationId xmlns:a16="http://schemas.microsoft.com/office/drawing/2014/main" id="{620945EF-2762-4798-AD22-18D0D2192EA4}"/>
               </a:ext>
             </a:extLst>
           </p:cNvPr>
@@ -1589,7 +1589,7 @@
           <p:cNvPr id="2" name="Title 1">
             <a:extLst xmlns:a="http://schemas.openxmlformats.org/drawingml/2006/main">
               <a:ext uri="{FF2B5EF4-FFF2-40B4-BE49-F238E27FC236}">
-                <a16:creationId xmlns:a16="http://schemas.microsoft.com/office/drawing/2014/main" id="{71EF2F70-EAB4-4A7C-8ABC-511B7742CA1B}"/>
+                <a16:creationId xmlns:a16="http://schemas.microsoft.com/office/drawing/2014/main" id="{2804FA30-FA42-4D39-8839-A190AFA38831}"/>
               </a:ext>
             </a:extLst>
           </p:cNvPr>
@@ -1616,7 +1616,7 @@
           <p:cNvPr id="3" name="Vertical Text Placeholder 2">
             <a:extLst xmlns:a="http://schemas.openxmlformats.org/drawingml/2006/main">
               <a:ext uri="{FF2B5EF4-FFF2-40B4-BE49-F238E27FC236}">
-                <a16:creationId xmlns:a16="http://schemas.microsoft.com/office/drawing/2014/main" id="{DCB2996A-B160-4431-A568-21FCDF3DE790}"/>
+                <a16:creationId xmlns:a16="http://schemas.microsoft.com/office/drawing/2014/main" id="{02DF12CD-A874-46E4-A2F6-E71655D1306B}"/>
               </a:ext>
             </a:extLst>
           </p:cNvPr>
@@ -1678,7 +1678,7 @@
           <p:cNvPr id="4" name="Date Placeholder 3">
             <a:extLst xmlns:a="http://schemas.openxmlformats.org/drawingml/2006/main">
               <a:ext uri="{FF2B5EF4-FFF2-40B4-BE49-F238E27FC236}">
-                <a16:creationId xmlns:a16="http://schemas.microsoft.com/office/drawing/2014/main" id="{EFF37750-D69D-4640-BE19-E1D25C78683A}"/>
+                <a16:creationId xmlns:a16="http://schemas.microsoft.com/office/drawing/2014/main" id="{AB53434C-020D-44FF-A79E-BAA7BB2F487C}"/>
               </a:ext>
             </a:extLst>
           </p:cNvPr>
@@ -1705,7 +1705,7 @@
           <p:cNvPr id="5" name="Footer Placeholder 4">
             <a:extLst xmlns:a="http://schemas.openxmlformats.org/drawingml/2006/main">
               <a:ext uri="{FF2B5EF4-FFF2-40B4-BE49-F238E27FC236}">
-                <a16:creationId xmlns:a16="http://schemas.microsoft.com/office/drawing/2014/main" id="{914C2D51-EBA4-4607-B4A1-0C8DD52A98D1}"/>
+                <a16:creationId xmlns:a16="http://schemas.microsoft.com/office/drawing/2014/main" id="{3DABFB43-0A1D-4A6B-B3D2-A707E40702D2}"/>
               </a:ext>
             </a:extLst>
           </p:cNvPr>
@@ -1728,7 +1728,7 @@
           <p:cNvPr id="6" name="Slide Number Placeholder 5">
             <a:extLst xmlns:a="http://schemas.openxmlformats.org/drawingml/2006/main">
               <a:ext uri="{FF2B5EF4-FFF2-40B4-BE49-F238E27FC236}">
-                <a16:creationId xmlns:a16="http://schemas.microsoft.com/office/drawing/2014/main" id="{22AB5916-40A5-47DF-BBF1-9F0BBFF90B64}"/>
+                <a16:creationId xmlns:a16="http://schemas.microsoft.com/office/drawing/2014/main" id="{7B108D9C-9336-4D3A-9B3B-27D32E57F4EA}"/>
               </a:ext>
             </a:extLst>
           </p:cNvPr>
@@ -1772,7 +1772,7 @@
           <p:cNvPr id="2" name="Vertical Title 1">
             <a:extLst xmlns:a="http://schemas.openxmlformats.org/drawingml/2006/main">
               <a:ext uri="{FF2B5EF4-FFF2-40B4-BE49-F238E27FC236}">
-                <a16:creationId xmlns:a16="http://schemas.microsoft.com/office/drawing/2014/main" id="{B857F54E-BDF5-4451-BB84-3B040F4FA8D2}"/>
+                <a16:creationId xmlns:a16="http://schemas.microsoft.com/office/drawing/2014/main" id="{7676F195-2CE9-4C8C-9DF5-AAAE861604E5}"/>
               </a:ext>
             </a:extLst>
           </p:cNvPr>
@@ -1804,7 +1804,7 @@
           <p:cNvPr id="3" name="Vertical Text Placeholder 2">
             <a:extLst xmlns:a="http://schemas.openxmlformats.org/drawingml/2006/main">
               <a:ext uri="{FF2B5EF4-FFF2-40B4-BE49-F238E27FC236}">
-                <a16:creationId xmlns:a16="http://schemas.microsoft.com/office/drawing/2014/main" id="{1489C2EA-776D-4256-A3C2-5E3296C15B2F}"/>
+                <a16:creationId xmlns:a16="http://schemas.microsoft.com/office/drawing/2014/main" id="{D0907DD8-B570-4A47-A187-BF20A0003AE3}"/>
               </a:ext>
             </a:extLst>
           </p:cNvPr>
@@ -1871,7 +1871,7 @@
           <p:cNvPr id="4" name="Date Placeholder 3">
             <a:extLst xmlns:a="http://schemas.openxmlformats.org/drawingml/2006/main">
               <a:ext uri="{FF2B5EF4-FFF2-40B4-BE49-F238E27FC236}">
-                <a16:creationId xmlns:a16="http://schemas.microsoft.com/office/drawing/2014/main" id="{A55A0AE2-4865-4186-8A4C-111EC4A10E51}"/>
+                <a16:creationId xmlns:a16="http://schemas.microsoft.com/office/drawing/2014/main" id="{5C44A456-2A5C-4E03-99AF-A896901BC144}"/>
               </a:ext>
             </a:extLst>
           </p:cNvPr>
@@ -1898,7 +1898,7 @@
           <p:cNvPr id="5" name="Footer Placeholder 4">
             <a:extLst xmlns:a="http://schemas.openxmlformats.org/drawingml/2006/main">
               <a:ext uri="{FF2B5EF4-FFF2-40B4-BE49-F238E27FC236}">
-                <a16:creationId xmlns:a16="http://schemas.microsoft.com/office/drawing/2014/main" id="{1CF1E557-4A00-4330-AFA6-B500E9E6360A}"/>
+                <a16:creationId xmlns:a16="http://schemas.microsoft.com/office/drawing/2014/main" id="{4AA4AE51-4437-4445-AA76-D25FCC35CF45}"/>
               </a:ext>
             </a:extLst>
           </p:cNvPr>
@@ -1921,7 +1921,7 @@
           <p:cNvPr id="6" name="Slide Number Placeholder 5">
             <a:extLst xmlns:a="http://schemas.openxmlformats.org/drawingml/2006/main">
               <a:ext uri="{FF2B5EF4-FFF2-40B4-BE49-F238E27FC236}">
-                <a16:creationId xmlns:a16="http://schemas.microsoft.com/office/drawing/2014/main" id="{BAF04E28-0707-484F-91CB-AC50550612EB}"/>
+                <a16:creationId xmlns:a16="http://schemas.microsoft.com/office/drawing/2014/main" id="{F14116C3-8786-465E-8D15-50E157FF94B9}"/>
               </a:ext>
             </a:extLst>
           </p:cNvPr>
@@ -1965,7 +1965,7 @@
           <p:cNvPr id="2" name="Title 1">
             <a:extLst xmlns:a="http://schemas.openxmlformats.org/drawingml/2006/main">
               <a:ext uri="{FF2B5EF4-FFF2-40B4-BE49-F238E27FC236}">
-                <a16:creationId xmlns:a16="http://schemas.microsoft.com/office/drawing/2014/main" id="{8112945D-023D-40D4-861D-409F3B436633}"/>
+                <a16:creationId xmlns:a16="http://schemas.microsoft.com/office/drawing/2014/main" id="{0B1AE29C-A97E-495A-84B7-40F3E70230FD}"/>
               </a:ext>
             </a:extLst>
           </p:cNvPr>
@@ -1992,7 +1992,7 @@
           <p:cNvPr id="3" name="Content Placeholder 2">
             <a:extLst xmlns:a="http://schemas.openxmlformats.org/drawingml/2006/main">
               <a:ext uri="{FF2B5EF4-FFF2-40B4-BE49-F238E27FC236}">
-                <a16:creationId xmlns:a16="http://schemas.microsoft.com/office/drawing/2014/main" id="{5D8E58CD-33D9-492F-897F-B12E65D386D3}"/>
+                <a16:creationId xmlns:a16="http://schemas.microsoft.com/office/drawing/2014/main" id="{515440ED-16DE-4569-A56A-5EDE098FDFC6}"/>
               </a:ext>
             </a:extLst>
           </p:cNvPr>
@@ -2054,7 +2054,7 @@
           <p:cNvPr id="4" name="Date Placeholder 3">
             <a:extLst xmlns:a="http://schemas.openxmlformats.org/drawingml/2006/main">
               <a:ext uri="{FF2B5EF4-FFF2-40B4-BE49-F238E27FC236}">
-                <a16:creationId xmlns:a16="http://schemas.microsoft.com/office/drawing/2014/main" id="{908CB6B6-2333-4352-9A5B-2634859A6A71}"/>
+                <a16:creationId xmlns:a16="http://schemas.microsoft.com/office/drawing/2014/main" id="{D2D1333C-D8C0-4ACE-994C-C19AA992EBAD}"/>
               </a:ext>
             </a:extLst>
           </p:cNvPr>
@@ -2081,7 +2081,7 @@
           <p:cNvPr id="5" name="Footer Placeholder 4">
             <a:extLst xmlns:a="http://schemas.openxmlformats.org/drawingml/2006/main">
               <a:ext uri="{FF2B5EF4-FFF2-40B4-BE49-F238E27FC236}">
-                <a16:creationId xmlns:a16="http://schemas.microsoft.com/office/drawing/2014/main" id="{AB962E5D-B87B-491B-84AF-77D029ABFCA8}"/>
+                <a16:creationId xmlns:a16="http://schemas.microsoft.com/office/drawing/2014/main" id="{82295106-8792-461A-909C-738EE339BE02}"/>
               </a:ext>
             </a:extLst>
           </p:cNvPr>
@@ -2104,7 +2104,7 @@
           <p:cNvPr id="6" name="Slide Number Placeholder 5">
             <a:extLst xmlns:a="http://schemas.openxmlformats.org/drawingml/2006/main">
               <a:ext uri="{FF2B5EF4-FFF2-40B4-BE49-F238E27FC236}">
-                <a16:creationId xmlns:a16="http://schemas.microsoft.com/office/drawing/2014/main" id="{1532B57D-D15C-4EF1-8D45-E0BA68DFC3DF}"/>
+                <a16:creationId xmlns:a16="http://schemas.microsoft.com/office/drawing/2014/main" id="{DC9DCDF6-BFDF-4ACC-BB49-63AB97DD5516}"/>
               </a:ext>
             </a:extLst>
           </p:cNvPr>
@@ -2148,7 +2148,7 @@
           <p:cNvPr id="2" name="Title 1">
             <a:extLst xmlns:a="http://schemas.openxmlformats.org/drawingml/2006/main">
               <a:ext uri="{FF2B5EF4-FFF2-40B4-BE49-F238E27FC236}">
-                <a16:creationId xmlns:a16="http://schemas.microsoft.com/office/drawing/2014/main" id="{EF1D4B5E-A03F-4DF4-9783-4E79D0FF10FC}"/>
+                <a16:creationId xmlns:a16="http://schemas.microsoft.com/office/drawing/2014/main" id="{6E73F71A-C16A-4E14-A6EA-01841E068B14}"/>
               </a:ext>
             </a:extLst>
           </p:cNvPr>
@@ -2185,7 +2185,7 @@
           <p:cNvPr id="3" name="Text Placeholder 2">
             <a:extLst xmlns:a="http://schemas.openxmlformats.org/drawingml/2006/main">
               <a:ext uri="{FF2B5EF4-FFF2-40B4-BE49-F238E27FC236}">
-                <a16:creationId xmlns:a16="http://schemas.microsoft.com/office/drawing/2014/main" id="{8A78208E-3D0F-4EDD-B454-6DCF36A8A678}"/>
+                <a16:creationId xmlns:a16="http://schemas.microsoft.com/office/drawing/2014/main" id="{B6960FAF-B56E-45C0-AA82-9178AD69C72B}"/>
               </a:ext>
             </a:extLst>
           </p:cNvPr>
@@ -2311,7 +2311,7 @@
           <p:cNvPr id="4" name="Date Placeholder 3">
             <a:extLst xmlns:a="http://schemas.openxmlformats.org/drawingml/2006/main">
               <a:ext uri="{FF2B5EF4-FFF2-40B4-BE49-F238E27FC236}">
-                <a16:creationId xmlns:a16="http://schemas.microsoft.com/office/drawing/2014/main" id="{D8238160-51C0-496E-BDC4-5621B2AC87CE}"/>
+                <a16:creationId xmlns:a16="http://schemas.microsoft.com/office/drawing/2014/main" id="{E05028B3-BBD5-4CFE-8383-F7E42640F7E4}"/>
               </a:ext>
             </a:extLst>
           </p:cNvPr>
@@ -2338,7 +2338,7 @@
           <p:cNvPr id="5" name="Footer Placeholder 4">
             <a:extLst xmlns:a="http://schemas.openxmlformats.org/drawingml/2006/main">
               <a:ext uri="{FF2B5EF4-FFF2-40B4-BE49-F238E27FC236}">
-                <a16:creationId xmlns:a16="http://schemas.microsoft.com/office/drawing/2014/main" id="{1CFAD14A-3E9E-4A27-8693-9648F7FA402B}"/>
+                <a16:creationId xmlns:a16="http://schemas.microsoft.com/office/drawing/2014/main" id="{86D90D3A-BC5C-4D99-BFE6-9B02252EDEC7}"/>
               </a:ext>
             </a:extLst>
           </p:cNvPr>
@@ -2361,7 +2361,7 @@
           <p:cNvPr id="6" name="Slide Number Placeholder 5">
             <a:extLst xmlns:a="http://schemas.openxmlformats.org/drawingml/2006/main">
               <a:ext uri="{FF2B5EF4-FFF2-40B4-BE49-F238E27FC236}">
-                <a16:creationId xmlns:a16="http://schemas.microsoft.com/office/drawing/2014/main" id="{81B3FB06-9A1D-40E3-803F-95F421CC31B0}"/>
+                <a16:creationId xmlns:a16="http://schemas.microsoft.com/office/drawing/2014/main" id="{FB2FF7D4-3963-4448-848A-A3CACE1E3980}"/>
               </a:ext>
             </a:extLst>
           </p:cNvPr>
@@ -2405,7 +2405,7 @@
           <p:cNvPr id="2" name="Title 1">
             <a:extLst xmlns:a="http://schemas.openxmlformats.org/drawingml/2006/main">
               <a:ext uri="{FF2B5EF4-FFF2-40B4-BE49-F238E27FC236}">
-                <a16:creationId xmlns:a16="http://schemas.microsoft.com/office/drawing/2014/main" id="{52E4DBC3-68A1-4B5B-9955-FF2B27AB4A96}"/>
+                <a16:creationId xmlns:a16="http://schemas.microsoft.com/office/drawing/2014/main" id="{B45C957F-2326-4B2A-8C13-C741E6C4779B}"/>
               </a:ext>
             </a:extLst>
           </p:cNvPr>
@@ -2432,7 +2432,7 @@
           <p:cNvPr id="3" name="Content Placeholder 2">
             <a:extLst xmlns:a="http://schemas.openxmlformats.org/drawingml/2006/main">
               <a:ext uri="{FF2B5EF4-FFF2-40B4-BE49-F238E27FC236}">
-                <a16:creationId xmlns:a16="http://schemas.microsoft.com/office/drawing/2014/main" id="{D285B51C-1B1D-4CF2-8F9B-E0D8C58FA89F}"/>
+                <a16:creationId xmlns:a16="http://schemas.microsoft.com/office/drawing/2014/main" id="{D60F7E38-1834-434A-B569-D6B149E1D1C1}"/>
               </a:ext>
             </a:extLst>
           </p:cNvPr>
@@ -2536,7 +2536,7 @@
           <p:cNvPr id="4" name="Content Placeholder 3">
             <a:extLst xmlns:a="http://schemas.openxmlformats.org/drawingml/2006/main">
               <a:ext uri="{FF2B5EF4-FFF2-40B4-BE49-F238E27FC236}">
-                <a16:creationId xmlns:a16="http://schemas.microsoft.com/office/drawing/2014/main" id="{F69BF90E-904C-4E2D-BF8B-B960B06D02DC}"/>
+                <a16:creationId xmlns:a16="http://schemas.microsoft.com/office/drawing/2014/main" id="{91AD1485-9585-47C4-BF1A-D88DCBB5163C}"/>
               </a:ext>
             </a:extLst>
           </p:cNvPr>
@@ -2640,7 +2640,7 @@
           <p:cNvPr id="5" name="Date Placeholder 4">
             <a:extLst xmlns:a="http://schemas.openxmlformats.org/drawingml/2006/main">
               <a:ext uri="{FF2B5EF4-FFF2-40B4-BE49-F238E27FC236}">
-                <a16:creationId xmlns:a16="http://schemas.microsoft.com/office/drawing/2014/main" id="{3671CCC6-98EC-4962-B378-3B09E4BA9B5A}"/>
+                <a16:creationId xmlns:a16="http://schemas.microsoft.com/office/drawing/2014/main" id="{BF85B544-C06B-4D44-AFBD-7D2C523B0552}"/>
               </a:ext>
             </a:extLst>
           </p:cNvPr>
@@ -2667,7 +2667,7 @@
           <p:cNvPr id="6" name="Footer Placeholder 5">
             <a:extLst xmlns:a="http://schemas.openxmlformats.org/drawingml/2006/main">
               <a:ext uri="{FF2B5EF4-FFF2-40B4-BE49-F238E27FC236}">
-                <a16:creationId xmlns:a16="http://schemas.microsoft.com/office/drawing/2014/main" id="{5C17C45A-4471-4C5E-A12F-330DD114427F}"/>
+                <a16:creationId xmlns:a16="http://schemas.microsoft.com/office/drawing/2014/main" id="{8BEF6A24-3F9B-486F-A08B-4AEA98F06D16}"/>
               </a:ext>
             </a:extLst>
           </p:cNvPr>
@@ -2690,7 +2690,7 @@
           <p:cNvPr id="7" name="Slide Number Placeholder 6">
             <a:extLst xmlns:a="http://schemas.openxmlformats.org/drawingml/2006/main">
               <a:ext uri="{FF2B5EF4-FFF2-40B4-BE49-F238E27FC236}">
-                <a16:creationId xmlns:a16="http://schemas.microsoft.com/office/drawing/2014/main" id="{266D411D-AA13-462B-BBB5-EA282E8E3964}"/>
+                <a16:creationId xmlns:a16="http://schemas.microsoft.com/office/drawing/2014/main" id="{B8716359-1CAA-471F-BFBA-EDA4658BBF2A}"/>
               </a:ext>
             </a:extLst>
           </p:cNvPr>
@@ -2734,7 +2734,7 @@
           <p:cNvPr id="2" name="Title 1">
             <a:extLst xmlns:a="http://schemas.openxmlformats.org/drawingml/2006/main">
               <a:ext uri="{FF2B5EF4-FFF2-40B4-BE49-F238E27FC236}">
-                <a16:creationId xmlns:a16="http://schemas.microsoft.com/office/drawing/2014/main" id="{7C2D7526-6045-4DD2-B335-5FB301C08FE7}"/>
+                <a16:creationId xmlns:a16="http://schemas.microsoft.com/office/drawing/2014/main" id="{ED7143BD-9976-4443-8B54-CC96A1235333}"/>
               </a:ext>
             </a:extLst>
           </p:cNvPr>
@@ -2766,7 +2766,7 @@
           <p:cNvPr id="3" name="Text Placeholder 2">
             <a:extLst xmlns:a="http://schemas.openxmlformats.org/drawingml/2006/main">
               <a:ext uri="{FF2B5EF4-FFF2-40B4-BE49-F238E27FC236}">
-                <a16:creationId xmlns:a16="http://schemas.microsoft.com/office/drawing/2014/main" id="{6DF82FEA-1894-49C0-8A9C-01934351773F}"/>
+                <a16:creationId xmlns:a16="http://schemas.microsoft.com/office/drawing/2014/main" id="{8CDE1E70-1955-4FAA-86B9-F7EC46C29707}"/>
               </a:ext>
             </a:extLst>
           </p:cNvPr>
@@ -2838,7 +2838,7 @@
           <p:cNvPr id="4" name="Content Placeholder 3">
             <a:extLst xmlns:a="http://schemas.openxmlformats.org/drawingml/2006/main">
               <a:ext uri="{FF2B5EF4-FFF2-40B4-BE49-F238E27FC236}">
-                <a16:creationId xmlns:a16="http://schemas.microsoft.com/office/drawing/2014/main" id="{2898A736-BC10-4040-B166-D17DB46165C8}"/>
+                <a16:creationId xmlns:a16="http://schemas.microsoft.com/office/drawing/2014/main" id="{5B66AEC4-D056-4602-B17D-B8A9A5274DF9}"/>
               </a:ext>
             </a:extLst>
           </p:cNvPr>
@@ -2942,7 +2942,7 @@
           <p:cNvPr id="5" name="Text Placeholder 4">
             <a:extLst xmlns:a="http://schemas.openxmlformats.org/drawingml/2006/main">
               <a:ext uri="{FF2B5EF4-FFF2-40B4-BE49-F238E27FC236}">
-                <a16:creationId xmlns:a16="http://schemas.microsoft.com/office/drawing/2014/main" id="{DCD77CBD-A9E0-4A1D-BA0C-E7D588873C70}"/>
+                <a16:creationId xmlns:a16="http://schemas.microsoft.com/office/drawing/2014/main" id="{20194225-C288-4810-9F24-44215EC43DB3}"/>
               </a:ext>
             </a:extLst>
           </p:cNvPr>
@@ -3014,7 +3014,7 @@
           <p:cNvPr id="6" name="Content Placeholder 5">
             <a:extLst xmlns:a="http://schemas.openxmlformats.org/drawingml/2006/main">
               <a:ext uri="{FF2B5EF4-FFF2-40B4-BE49-F238E27FC236}">
-                <a16:creationId xmlns:a16="http://schemas.microsoft.com/office/drawing/2014/main" id="{10C63289-9C45-47A2-9C9C-793B532D05E6}"/>
+                <a16:creationId xmlns:a16="http://schemas.microsoft.com/office/drawing/2014/main" id="{3D947461-AB53-4480-B112-75C714543D9B}"/>
               </a:ext>
             </a:extLst>
           </p:cNvPr>
@@ -3118,7 +3118,7 @@
           <p:cNvPr id="7" name="Date Placeholder 6">
             <a:extLst xmlns:a="http://schemas.openxmlformats.org/drawingml/2006/main">
               <a:ext uri="{FF2B5EF4-FFF2-40B4-BE49-F238E27FC236}">
-                <a16:creationId xmlns:a16="http://schemas.microsoft.com/office/drawing/2014/main" id="{621D6B36-5C1E-4CBE-A9A3-ED0F7F395860}"/>
+                <a16:creationId xmlns:a16="http://schemas.microsoft.com/office/drawing/2014/main" id="{282C35A1-F4F6-4C29-BF3D-AB65E8A80B20}"/>
               </a:ext>
             </a:extLst>
           </p:cNvPr>
@@ -3145,7 +3145,7 @@
           <p:cNvPr id="8" name="Footer Placeholder 7">
             <a:extLst xmlns:a="http://schemas.openxmlformats.org/drawingml/2006/main">
               <a:ext uri="{FF2B5EF4-FFF2-40B4-BE49-F238E27FC236}">
-                <a16:creationId xmlns:a16="http://schemas.microsoft.com/office/drawing/2014/main" id="{053E5973-9D0A-4D38-9ADD-73A007743ED8}"/>
+                <a16:creationId xmlns:a16="http://schemas.microsoft.com/office/drawing/2014/main" id="{0EE25ACA-A22A-4BAE-B374-BA67533CA0ED}"/>
               </a:ext>
             </a:extLst>
           </p:cNvPr>
@@ -3168,7 +3168,7 @@
           <p:cNvPr id="9" name="Slide Number Placeholder 8">
             <a:extLst xmlns:a="http://schemas.openxmlformats.org/drawingml/2006/main">
               <a:ext uri="{FF2B5EF4-FFF2-40B4-BE49-F238E27FC236}">
-                <a16:creationId xmlns:a16="http://schemas.microsoft.com/office/drawing/2014/main" id="{8E26B628-0794-4797-B1CA-E4A83F699BC4}"/>
+                <a16:creationId xmlns:a16="http://schemas.microsoft.com/office/drawing/2014/main" id="{5C146C22-900F-4F79-8BDD-F8C59196DE03}"/>
               </a:ext>
             </a:extLst>
           </p:cNvPr>
@@ -3212,7 +3212,7 @@
           <p:cNvPr id="2" name="Title 1">
             <a:extLst xmlns:a="http://schemas.openxmlformats.org/drawingml/2006/main">
               <a:ext uri="{FF2B5EF4-FFF2-40B4-BE49-F238E27FC236}">
-                <a16:creationId xmlns:a16="http://schemas.microsoft.com/office/drawing/2014/main" id="{50899AF0-EF0A-44BC-82E1-739EAB98564E}"/>
+                <a16:creationId xmlns:a16="http://schemas.microsoft.com/office/drawing/2014/main" id="{9630F314-97FF-4072-A5B4-3EEC71102592}"/>
               </a:ext>
             </a:extLst>
           </p:cNvPr>
@@ -3239,7 +3239,7 @@
           <p:cNvPr id="3" name="Date Placeholder 2">
             <a:extLst xmlns:a="http://schemas.openxmlformats.org/drawingml/2006/main">
               <a:ext uri="{FF2B5EF4-FFF2-40B4-BE49-F238E27FC236}">
-                <a16:creationId xmlns:a16="http://schemas.microsoft.com/office/drawing/2014/main" id="{ED9F2F0D-0315-43DD-94E4-B2DEFF0280BA}"/>
+                <a16:creationId xmlns:a16="http://schemas.microsoft.com/office/drawing/2014/main" id="{43308FE5-FBC5-4639-8A2D-5A660F30324F}"/>
               </a:ext>
             </a:extLst>
           </p:cNvPr>
@@ -3266,7 +3266,7 @@
           <p:cNvPr id="4" name="Footer Placeholder 3">
             <a:extLst xmlns:a="http://schemas.openxmlformats.org/drawingml/2006/main">
               <a:ext uri="{FF2B5EF4-FFF2-40B4-BE49-F238E27FC236}">
-                <a16:creationId xmlns:a16="http://schemas.microsoft.com/office/drawing/2014/main" id="{7F1D1C02-FBD5-464D-BDC3-11F781ECAE81}"/>
+                <a16:creationId xmlns:a16="http://schemas.microsoft.com/office/drawing/2014/main" id="{6F46055F-2CCA-4815-A316-5B778B9AFB13}"/>
               </a:ext>
             </a:extLst>
           </p:cNvPr>
@@ -3289,7 +3289,7 @@
           <p:cNvPr id="5" name="Slide Number Placeholder 4">
             <a:extLst xmlns:a="http://schemas.openxmlformats.org/drawingml/2006/main">
               <a:ext uri="{FF2B5EF4-FFF2-40B4-BE49-F238E27FC236}">
-                <a16:creationId xmlns:a16="http://schemas.microsoft.com/office/drawing/2014/main" id="{AA9057F8-9255-4A2A-ABFC-EB62F7E95F99}"/>
+                <a16:creationId xmlns:a16="http://schemas.microsoft.com/office/drawing/2014/main" id="{6EB7325F-9A84-4F69-A763-313A062A27E2}"/>
               </a:ext>
             </a:extLst>
           </p:cNvPr>
@@ -3333,7 +3333,7 @@
           <p:cNvPr id="2" name="Date Placeholder 1">
             <a:extLst xmlns:a="http://schemas.openxmlformats.org/drawingml/2006/main">
               <a:ext uri="{FF2B5EF4-FFF2-40B4-BE49-F238E27FC236}">
-                <a16:creationId xmlns:a16="http://schemas.microsoft.com/office/drawing/2014/main" id="{F96CC8AF-B9B8-4888-867C-302B74E27B00}"/>
+                <a16:creationId xmlns:a16="http://schemas.microsoft.com/office/drawing/2014/main" id="{F8AAE7DE-08D5-4B5C-8830-2874D7128643}"/>
               </a:ext>
             </a:extLst>
           </p:cNvPr>
@@ -3360,7 +3360,7 @@
           <p:cNvPr id="3" name="Footer Placeholder 2">
             <a:extLst xmlns:a="http://schemas.openxmlformats.org/drawingml/2006/main">
               <a:ext uri="{FF2B5EF4-FFF2-40B4-BE49-F238E27FC236}">
-                <a16:creationId xmlns:a16="http://schemas.microsoft.com/office/drawing/2014/main" id="{638D2251-93A0-41EF-B84F-2D911F4910C1}"/>
+                <a16:creationId xmlns:a16="http://schemas.microsoft.com/office/drawing/2014/main" id="{39DCEC2B-58C3-4374-A3B0-C3B1EA07F993}"/>
               </a:ext>
             </a:extLst>
           </p:cNvPr>
@@ -3383,7 +3383,7 @@
           <p:cNvPr id="4" name="Slide Number Placeholder 3">
             <a:extLst xmlns:a="http://schemas.openxmlformats.org/drawingml/2006/main">
               <a:ext uri="{FF2B5EF4-FFF2-40B4-BE49-F238E27FC236}">
-                <a16:creationId xmlns:a16="http://schemas.microsoft.com/office/drawing/2014/main" id="{FEC508B6-EE10-489E-A3DB-0ABF4E08332D}"/>
+                <a16:creationId xmlns:a16="http://schemas.microsoft.com/office/drawing/2014/main" id="{7D812CC5-5C02-4A98-AEC1-22CD4225C17C}"/>
               </a:ext>
             </a:extLst>
           </p:cNvPr>
@@ -3427,7 +3427,7 @@
           <p:cNvPr id="2" name="Title 1">
             <a:extLst xmlns:a="http://schemas.openxmlformats.org/drawingml/2006/main">
               <a:ext uri="{FF2B5EF4-FFF2-40B4-BE49-F238E27FC236}">
-                <a16:creationId xmlns:a16="http://schemas.microsoft.com/office/drawing/2014/main" id="{81EFEECF-230E-4B83-BE6B-AF46D23F201D}"/>
+                <a16:creationId xmlns:a16="http://schemas.microsoft.com/office/drawing/2014/main" id="{2F0D1968-B999-4631-BC4D-3F807DC9FB82}"/>
               </a:ext>
             </a:extLst>
           </p:cNvPr>
@@ -3464,7 +3464,7 @@
           <p:cNvPr id="3" name="Content Placeholder 2">
             <a:extLst xmlns:a="http://schemas.openxmlformats.org/drawingml/2006/main">
               <a:ext uri="{FF2B5EF4-FFF2-40B4-BE49-F238E27FC236}">
-                <a16:creationId xmlns:a16="http://schemas.microsoft.com/office/drawing/2014/main" id="{904C5D9D-36F5-4685-929C-56B174132C75}"/>
+                <a16:creationId xmlns:a16="http://schemas.microsoft.com/office/drawing/2014/main" id="{F612A1FB-1BAB-41C7-A70A-94C7F93F2396}"/>
               </a:ext>
             </a:extLst>
           </p:cNvPr>
@@ -3568,7 +3568,7 @@
           <p:cNvPr id="4" name="Text Placeholder 3">
             <a:extLst xmlns:a="http://schemas.openxmlformats.org/drawingml/2006/main">
               <a:ext uri="{FF2B5EF4-FFF2-40B4-BE49-F238E27FC236}">
-                <a16:creationId xmlns:a16="http://schemas.microsoft.com/office/drawing/2014/main" id="{5ED24B24-AF6B-44AF-9C39-75524047EA1D}"/>
+                <a16:creationId xmlns:a16="http://schemas.microsoft.com/office/drawing/2014/main" id="{5F784594-95E9-4DB3-BB6F-01E9C3785DAB}"/>
               </a:ext>
             </a:extLst>
           </p:cNvPr>
@@ -3640,7 +3640,7 @@
           <p:cNvPr id="5" name="Date Placeholder 4">
             <a:extLst xmlns:a="http://schemas.openxmlformats.org/drawingml/2006/main">
               <a:ext uri="{FF2B5EF4-FFF2-40B4-BE49-F238E27FC236}">
-                <a16:creationId xmlns:a16="http://schemas.microsoft.com/office/drawing/2014/main" id="{FFC42EAF-5111-4E76-8682-EC5294B86AA2}"/>
+                <a16:creationId xmlns:a16="http://schemas.microsoft.com/office/drawing/2014/main" id="{48D2C96C-0428-4A2A-98F7-3E867F7BD330}"/>
               </a:ext>
             </a:extLst>
           </p:cNvPr>
@@ -3667,7 +3667,7 @@
           <p:cNvPr id="6" name="Footer Placeholder 5">
             <a:extLst xmlns:a="http://schemas.openxmlformats.org/drawingml/2006/main">
               <a:ext uri="{FF2B5EF4-FFF2-40B4-BE49-F238E27FC236}">
-                <a16:creationId xmlns:a16="http://schemas.microsoft.com/office/drawing/2014/main" id="{288F05F0-183A-4819-A44B-0FF1DF65C2B7}"/>
+                <a16:creationId xmlns:a16="http://schemas.microsoft.com/office/drawing/2014/main" id="{26810874-83D7-4A15-B028-127E7EE373DA}"/>
               </a:ext>
             </a:extLst>
           </p:cNvPr>
@@ -3690,7 +3690,7 @@
           <p:cNvPr id="7" name="Slide Number Placeholder 6">
             <a:extLst xmlns:a="http://schemas.openxmlformats.org/drawingml/2006/main">
               <a:ext uri="{FF2B5EF4-FFF2-40B4-BE49-F238E27FC236}">
-                <a16:creationId xmlns:a16="http://schemas.microsoft.com/office/drawing/2014/main" id="{F49B3241-06C8-4118-9AFD-59CC346F4AED}"/>
+                <a16:creationId xmlns:a16="http://schemas.microsoft.com/office/drawing/2014/main" id="{BC9DEA2E-77E3-4F48-8A4F-99B6F338278E}"/>
               </a:ext>
             </a:extLst>
           </p:cNvPr>
@@ -3734,7 +3734,7 @@
           <p:cNvPr id="2" name="Title 1">
             <a:extLst xmlns:a="http://schemas.openxmlformats.org/drawingml/2006/main">
               <a:ext uri="{FF2B5EF4-FFF2-40B4-BE49-F238E27FC236}">
-                <a16:creationId xmlns:a16="http://schemas.microsoft.com/office/drawing/2014/main" id="{7C870695-6AC9-4FB4-85C6-CD28FFD43085}"/>
+                <a16:creationId xmlns:a16="http://schemas.microsoft.com/office/drawing/2014/main" id="{66732305-F312-4790-BEDD-48A24218A6D8}"/>
               </a:ext>
             </a:extLst>
           </p:cNvPr>
@@ -3771,7 +3771,7 @@
           <p:cNvPr id="3" name="Picture Placeholder 2">
             <a:extLst xmlns:a="http://schemas.openxmlformats.org/drawingml/2006/main">
               <a:ext uri="{FF2B5EF4-FFF2-40B4-BE49-F238E27FC236}">
-                <a16:creationId xmlns:a16="http://schemas.microsoft.com/office/drawing/2014/main" id="{15DF0524-4F07-482B-9CBE-3D9A65DCF1C6}"/>
+                <a16:creationId xmlns:a16="http://schemas.microsoft.com/office/drawing/2014/main" id="{63329489-9E70-496D-A7C0-8363082E8221}"/>
               </a:ext>
             </a:extLst>
           </p:cNvPr>
@@ -3836,7 +3836,7 @@
           <p:cNvPr id="4" name="Text Placeholder 3">
             <a:extLst xmlns:a="http://schemas.openxmlformats.org/drawingml/2006/main">
               <a:ext uri="{FF2B5EF4-FFF2-40B4-BE49-F238E27FC236}">
-                <a16:creationId xmlns:a16="http://schemas.microsoft.com/office/drawing/2014/main" id="{1A340798-E07C-40EA-BE06-CE74300FF492}"/>
+                <a16:creationId xmlns:a16="http://schemas.microsoft.com/office/drawing/2014/main" id="{572A00A2-0665-4000-A9B8-86DCC9970F5F}"/>
               </a:ext>
             </a:extLst>
           </p:cNvPr>
@@ -3908,7 +3908,7 @@
           <p:cNvPr id="5" name="Date Placeholder 4">
             <a:extLst xmlns:a="http://schemas.openxmlformats.org/drawingml/2006/main">
               <a:ext uri="{FF2B5EF4-FFF2-40B4-BE49-F238E27FC236}">
-                <a16:creationId xmlns:a16="http://schemas.microsoft.com/office/drawing/2014/main" id="{E68C2C7A-C783-4114-BAFE-63B2C053A7D2}"/>
+                <a16:creationId xmlns:a16="http://schemas.microsoft.com/office/drawing/2014/main" id="{8CEAEE43-F6C7-4F68-9D78-30466E2AB9C4}"/>
               </a:ext>
             </a:extLst>
           </p:cNvPr>
@@ -3935,7 +3935,7 @@
           <p:cNvPr id="6" name="Footer Placeholder 5">
             <a:extLst xmlns:a="http://schemas.openxmlformats.org/drawingml/2006/main">
               <a:ext uri="{FF2B5EF4-FFF2-40B4-BE49-F238E27FC236}">
-                <a16:creationId xmlns:a16="http://schemas.microsoft.com/office/drawing/2014/main" id="{76447A56-B292-47D7-9B8D-79E81C7E87EF}"/>
+                <a16:creationId xmlns:a16="http://schemas.microsoft.com/office/drawing/2014/main" id="{2B589200-68EC-4EFC-B395-8F2F0925B6D1}"/>
               </a:ext>
             </a:extLst>
           </p:cNvPr>
@@ -3958,7 +3958,7 @@
           <p:cNvPr id="7" name="Slide Number Placeholder 6">
             <a:extLst xmlns:a="http://schemas.openxmlformats.org/drawingml/2006/main">
               <a:ext uri="{FF2B5EF4-FFF2-40B4-BE49-F238E27FC236}">
-                <a16:creationId xmlns:a16="http://schemas.microsoft.com/office/drawing/2014/main" id="{F36E96CE-F3BF-4F0F-9396-4425FA59F015}"/>
+                <a16:creationId xmlns:a16="http://schemas.microsoft.com/office/drawing/2014/main" id="{76A3CA6D-A97C-41DF-A649-5CC4621E8D1E}"/>
               </a:ext>
             </a:extLst>
           </p:cNvPr>
@@ -4007,7 +4007,7 @@
           <p:cNvPr id="2" name="Title Placeholder 1">
             <a:extLst xmlns:a="http://schemas.openxmlformats.org/drawingml/2006/main">
               <a:ext uri="{FF2B5EF4-FFF2-40B4-BE49-F238E27FC236}">
-                <a16:creationId xmlns:a16="http://schemas.microsoft.com/office/drawing/2014/main" id="{583F3319-40FD-4A28-9042-3A104DA67D6A}"/>
+                <a16:creationId xmlns:a16="http://schemas.microsoft.com/office/drawing/2014/main" id="{9452127C-4609-484A-A4AD-2EBCB0C21AA7}"/>
               </a:ext>
             </a:extLst>
           </p:cNvPr>
@@ -4044,7 +4044,7 @@
           <p:cNvPr id="3" name="Text Placeholder 2">
             <a:extLst xmlns:a="http://schemas.openxmlformats.org/drawingml/2006/main">
               <a:ext uri="{FF2B5EF4-FFF2-40B4-BE49-F238E27FC236}">
-                <a16:creationId xmlns:a16="http://schemas.microsoft.com/office/drawing/2014/main" id="{1F0451B0-8B82-4A90-9EAA-2D436D0875CE}"/>
+                <a16:creationId xmlns:a16="http://schemas.microsoft.com/office/drawing/2014/main" id="{C8111E72-3784-4934-A32A-47BF14304D6B}"/>
               </a:ext>
             </a:extLst>
           </p:cNvPr>
@@ -4116,7 +4116,7 @@
           <p:cNvPr id="4" name="Date Placeholder 3">
             <a:extLst xmlns:a="http://schemas.openxmlformats.org/drawingml/2006/main">
               <a:ext uri="{FF2B5EF4-FFF2-40B4-BE49-F238E27FC236}">
-                <a16:creationId xmlns:a16="http://schemas.microsoft.com/office/drawing/2014/main" id="{34CB029A-F10B-41B9-8AA4-683B9EBB1695}"/>
+                <a16:creationId xmlns:a16="http://schemas.microsoft.com/office/drawing/2014/main" id="{98E2C34D-AF87-426F-BE26-692D9CC27CE4}"/>
               </a:ext>
             </a:extLst>
           </p:cNvPr>
@@ -4162,7 +4162,7 @@
           <p:cNvPr id="5" name="Footer Placeholder 4">
             <a:extLst xmlns:a="http://schemas.openxmlformats.org/drawingml/2006/main">
               <a:ext uri="{FF2B5EF4-FFF2-40B4-BE49-F238E27FC236}">
-                <a16:creationId xmlns:a16="http://schemas.microsoft.com/office/drawing/2014/main" id="{C2862877-1D46-4840-AEAE-5DE1C21DE06A}"/>
+                <a16:creationId xmlns:a16="http://schemas.microsoft.com/office/drawing/2014/main" id="{AC9A902F-17A1-487D-8C92-96D399172639}"/>
               </a:ext>
             </a:extLst>
           </p:cNvPr>
@@ -4204,7 +4204,7 @@
           <p:cNvPr id="6" name="Slide Number Placeholder 5">
             <a:extLst xmlns:a="http://schemas.openxmlformats.org/drawingml/2006/main">
               <a:ext uri="{FF2B5EF4-FFF2-40B4-BE49-F238E27FC236}">
-                <a16:creationId xmlns:a16="http://schemas.microsoft.com/office/drawing/2014/main" id="{291F8C90-7554-4616-9E94-8C14E0288376}"/>
+                <a16:creationId xmlns:a16="http://schemas.microsoft.com/office/drawing/2014/main" id="{8274C7A8-D717-426A-80BD-CB4E2A8D64CA}"/>
               </a:ext>
             </a:extLst>
           </p:cNvPr>
@@ -4249,17 +4249,17 @@
   </p:cSld>
   <p:clrMap bg1="lt1" tx1="dk1" bg2="lt2" tx2="dk2" accent1="accent1" accent2="accent2" accent3="accent3" accent4="accent4" accent5="accent5" accent6="accent6" hlink="hlink" folHlink="folHlink"/>
   <p:sldLayoutIdLst>
-    <p:sldLayoutId xmlns:r="http://schemas.openxmlformats.org/officeDocument/2006/relationships" id="2147483649" r:id="R2c9e1d3c1ca94bf2"/>
-    <p:sldLayoutId xmlns:r="http://schemas.openxmlformats.org/officeDocument/2006/relationships" id="2147483650" r:id="R8f21fc178e4e486e"/>
-    <p:sldLayoutId xmlns:r="http://schemas.openxmlformats.org/officeDocument/2006/relationships" id="2147483651" r:id="Rb4a0ea070fd34842"/>
-    <p:sldLayoutId xmlns:r="http://schemas.openxmlformats.org/officeDocument/2006/relationships" id="2147483652" r:id="Re9dbcfe5a3be4eda"/>
-    <p:sldLayoutId xmlns:r="http://schemas.openxmlformats.org/officeDocument/2006/relationships" id="2147483653" r:id="Ra5a797ed88ed4c7d"/>
-    <p:sldLayoutId xmlns:r="http://schemas.openxmlformats.org/officeDocument/2006/relationships" id="2147483654" r:id="Re49b11345d1e4a53"/>
-    <p:sldLayoutId xmlns:r="http://schemas.openxmlformats.org/officeDocument/2006/relationships" id="2147483655" r:id="Ra07d9e840b3b4075"/>
-    <p:sldLayoutId xmlns:r="http://schemas.openxmlformats.org/officeDocument/2006/relationships" id="2147483656" r:id="R2e95faa8429e4e25"/>
-    <p:sldLayoutId xmlns:r="http://schemas.openxmlformats.org/officeDocument/2006/relationships" id="2147483657" r:id="Ra1252d046973425a"/>
-    <p:sldLayoutId xmlns:r="http://schemas.openxmlformats.org/officeDocument/2006/relationships" id="2147483658" r:id="R2d5427bc35134676"/>
-    <p:sldLayoutId xmlns:r="http://schemas.openxmlformats.org/officeDocument/2006/relationships" id="2147483659" r:id="R0b283c502908482a"/>
+    <p:sldLayoutId xmlns:r="http://schemas.openxmlformats.org/officeDocument/2006/relationships" id="2147483649" r:id="Rd9b523ba731e4f72"/>
+    <p:sldLayoutId xmlns:r="http://schemas.openxmlformats.org/officeDocument/2006/relationships" id="2147483650" r:id="R88f7ba3261a248f0"/>
+    <p:sldLayoutId xmlns:r="http://schemas.openxmlformats.org/officeDocument/2006/relationships" id="2147483651" r:id="R05529189b5604d4c"/>
+    <p:sldLayoutId xmlns:r="http://schemas.openxmlformats.org/officeDocument/2006/relationships" id="2147483652" r:id="R9707fa31482b47de"/>
+    <p:sldLayoutId xmlns:r="http://schemas.openxmlformats.org/officeDocument/2006/relationships" id="2147483653" r:id="R3a9f354f05894932"/>
+    <p:sldLayoutId xmlns:r="http://schemas.openxmlformats.org/officeDocument/2006/relationships" id="2147483654" r:id="Rd497ab22358a4475"/>
+    <p:sldLayoutId xmlns:r="http://schemas.openxmlformats.org/officeDocument/2006/relationships" id="2147483655" r:id="R3ff4fad01e124fbb"/>
+    <p:sldLayoutId xmlns:r="http://schemas.openxmlformats.org/officeDocument/2006/relationships" id="2147483656" r:id="R1011b353509b4e2b"/>
+    <p:sldLayoutId xmlns:r="http://schemas.openxmlformats.org/officeDocument/2006/relationships" id="2147483657" r:id="Rb92be743f0c347b0"/>
+    <p:sldLayoutId xmlns:r="http://schemas.openxmlformats.org/officeDocument/2006/relationships" id="2147483658" r:id="Rc944af5701034968"/>
+    <p:sldLayoutId xmlns:r="http://schemas.openxmlformats.org/officeDocument/2006/relationships" id="2147483659" r:id="R878b9f3751f64e12"/>
   </p:sldLayoutIdLst>
   <p:txStyles>
     <p:titleStyle>
@@ -4812,7 +4812,7 @@
           <p:cNvPr id="2" name="Rectangle 1">
             <a:extLst xmlns:a="http://schemas.openxmlformats.org/drawingml/2006/main">
               <a:ext uri="{FF2B5EF4-FFF2-40B4-BE49-F238E27FC236}">
-                <a16:creationId xmlns:a16="http://schemas.microsoft.com/office/drawing/2014/main" id="{0310B872-6DA3-4786-ACBD-61D6D5F33734}"/>
+                <a16:creationId xmlns:a16="http://schemas.microsoft.com/office/drawing/2014/main" id="{6C647061-5120-4822-A2E7-410E2FD6190A}"/>
               </a:ext>
             </a:extLst>
           </p:cNvPr>
@@ -4867,7 +4867,7 @@
           <p:cNvPr id="3" name="TextBox 2">
             <a:extLst xmlns:a="http://schemas.openxmlformats.org/drawingml/2006/main">
               <a:ext uri="{FF2B5EF4-FFF2-40B4-BE49-F238E27FC236}">
-                <a16:creationId xmlns:a16="http://schemas.microsoft.com/office/drawing/2014/main" id="{D7EA2C1D-79BB-4AE6-B4B6-F73D94C68A4B}"/>
+                <a16:creationId xmlns:a16="http://schemas.microsoft.com/office/drawing/2014/main" id="{AB6B4D25-BDB8-481B-B775-539B6A7451E7}"/>
               </a:ext>
             </a:extLst>
           </p:cNvPr>
@@ -4914,7 +4914,7 @@
           <p:cNvPr id="4" name="TextBox 3">
             <a:extLst xmlns:a="http://schemas.openxmlformats.org/drawingml/2006/main">
               <a:ext uri="{FF2B5EF4-FFF2-40B4-BE49-F238E27FC236}">
-                <a16:creationId xmlns:a16="http://schemas.microsoft.com/office/drawing/2014/main" id="{0B86FA09-1686-465A-9244-4BA5A36241D3}"/>
+                <a16:creationId xmlns:a16="http://schemas.microsoft.com/office/drawing/2014/main" id="{12E54FB1-85F3-4A8D-BDB4-E07E55226D8B}"/>
               </a:ext>
             </a:extLst>
           </p:cNvPr>
@@ -4982,7 +4982,7 @@
           <p:cNvPr id="5" name="TextBox 4">
             <a:extLst xmlns:a="http://schemas.openxmlformats.org/drawingml/2006/main">
               <a:ext uri="{FF2B5EF4-FFF2-40B4-BE49-F238E27FC236}">
-                <a16:creationId xmlns:a16="http://schemas.microsoft.com/office/drawing/2014/main" id="{E21CAB8B-12B0-4384-B3BA-DD997CF6C53B}"/>
+                <a16:creationId xmlns:a16="http://schemas.microsoft.com/office/drawing/2014/main" id="{6CF0F702-EB46-4D3C-9F4E-30D0F45EDBF3}"/>
               </a:ext>
             </a:extLst>
           </p:cNvPr>
@@ -5029,7 +5029,7 @@
           <p:cNvPr id="6" name="Rectangle 5">
             <a:extLst xmlns:a="http://schemas.openxmlformats.org/drawingml/2006/main">
               <a:ext uri="{FF2B5EF4-FFF2-40B4-BE49-F238E27FC236}">
-                <a16:creationId xmlns:a16="http://schemas.microsoft.com/office/drawing/2014/main" id="{E4AC0778-903B-4EA7-B889-5E02C71F3326}"/>
+                <a16:creationId xmlns:a16="http://schemas.microsoft.com/office/drawing/2014/main" id="{16471808-1172-442D-A0C3-7B741946D5EB}"/>
               </a:ext>
             </a:extLst>
           </p:cNvPr>
@@ -5084,7 +5084,7 @@
           <p:cNvPr id="7" name="TextBox 6">
             <a:extLst xmlns:a="http://schemas.openxmlformats.org/drawingml/2006/main">
               <a:ext uri="{FF2B5EF4-FFF2-40B4-BE49-F238E27FC236}">
-                <a16:creationId xmlns:a16="http://schemas.microsoft.com/office/drawing/2014/main" id="{C9AC3E29-03B4-4079-9037-0CB418AEAE8F}"/>
+                <a16:creationId xmlns:a16="http://schemas.microsoft.com/office/drawing/2014/main" id="{C3BD5879-2B25-4B4E-A7CD-F0918F31D3B2}"/>
               </a:ext>
             </a:extLst>
           </p:cNvPr>
@@ -5131,7 +5131,7 @@
           <p:cNvPr id="8" name="TextBox 7">
             <a:extLst xmlns:a="http://schemas.openxmlformats.org/drawingml/2006/main">
               <a:ext uri="{FF2B5EF4-FFF2-40B4-BE49-F238E27FC236}">
-                <a16:creationId xmlns:a16="http://schemas.microsoft.com/office/drawing/2014/main" id="{11523C46-0477-4230-996D-FFF323CC9EB2}"/>
+                <a16:creationId xmlns:a16="http://schemas.microsoft.com/office/drawing/2014/main" id="{74597E43-1770-44F2-B508-755ED9EF4D1E}"/>
               </a:ext>
             </a:extLst>
           </p:cNvPr>
@@ -5168,7 +5168,7 @@
                 <a:ea typeface="Aptos"/>
                 <a:cs typeface="Aptos"/>
               </a:rPr>
-              <a:t>2026.07.23-12</a:t>
+              <a:t>2026.07.23-13</a:t>
             </a:r>
           </a:p>
         </p:txBody>
@@ -5178,7 +5178,7 @@
           <p:cNvPr id="9" name="TextBox 8">
             <a:extLst xmlns:a="http://schemas.openxmlformats.org/drawingml/2006/main">
               <a:ext uri="{FF2B5EF4-FFF2-40B4-BE49-F238E27FC236}">
-                <a16:creationId xmlns:a16="http://schemas.microsoft.com/office/drawing/2014/main" id="{9CCEC84C-1016-43E2-8803-DC7F6173DA11}"/>
+                <a16:creationId xmlns:a16="http://schemas.microsoft.com/office/drawing/2014/main" id="{3D1B351E-C2A8-4F7E-AB3E-EAD62802EFCB}"/>
               </a:ext>
             </a:extLst>
           </p:cNvPr>
@@ -5246,7 +5246,7 @@
           <p:cNvPr id="10" name="TextBox 9">
             <a:extLst xmlns:a="http://schemas.openxmlformats.org/drawingml/2006/main">
               <a:ext uri="{FF2B5EF4-FFF2-40B4-BE49-F238E27FC236}">
-                <a16:creationId xmlns:a16="http://schemas.microsoft.com/office/drawing/2014/main" id="{6DA90246-F9C8-4C1B-80B3-B978E37354AB}"/>
+                <a16:creationId xmlns:a16="http://schemas.microsoft.com/office/drawing/2014/main" id="{449A131E-22B0-41F3-B015-E8997B8E49FD}"/>
               </a:ext>
             </a:extLst>
           </p:cNvPr>
@@ -5293,7 +5293,7 @@
           <p:cNvPr id="11" name="TextBox 10">
             <a:extLst xmlns:a="http://schemas.openxmlformats.org/drawingml/2006/main">
               <a:ext uri="{FF2B5EF4-FFF2-40B4-BE49-F238E27FC236}">
-                <a16:creationId xmlns:a16="http://schemas.microsoft.com/office/drawing/2014/main" id="{045B86AF-B776-4B1A-8412-37147C4B4ED9}"/>
+                <a16:creationId xmlns:a16="http://schemas.microsoft.com/office/drawing/2014/main" id="{251A6F3E-D22D-4C8D-BBA3-88F9D34D020F}"/>
               </a:ext>
             </a:extLst>
           </p:cNvPr>
@@ -5340,7 +5340,7 @@
           <p:cNvPr id="12" name="TextBox 11">
             <a:extLst xmlns:a="http://schemas.openxmlformats.org/drawingml/2006/main">
               <a:ext uri="{FF2B5EF4-FFF2-40B4-BE49-F238E27FC236}">
-                <a16:creationId xmlns:a16="http://schemas.microsoft.com/office/drawing/2014/main" id="{D397C0F0-B18B-4644-A33E-AC00C934C2AF}"/>
+                <a16:creationId xmlns:a16="http://schemas.microsoft.com/office/drawing/2014/main" id="{25856CC7-F734-4B24-8E40-8AEF869383A0}"/>
               </a:ext>
             </a:extLst>
           </p:cNvPr>
@@ -5387,7 +5387,7 @@
           <p:cNvPr id="13" name="TextBox 12">
             <a:extLst xmlns:a="http://schemas.openxmlformats.org/drawingml/2006/main">
               <a:ext uri="{FF2B5EF4-FFF2-40B4-BE49-F238E27FC236}">
-                <a16:creationId xmlns:a16="http://schemas.microsoft.com/office/drawing/2014/main" id="{388AA286-53C5-4C53-A233-37D0B051A4CC}"/>
+                <a16:creationId xmlns:a16="http://schemas.microsoft.com/office/drawing/2014/main" id="{C0D9C1BA-9778-4414-A398-6DE4206A7C3E}"/>
               </a:ext>
             </a:extLst>
           </p:cNvPr>
@@ -5432,7 +5432,7 @@
     </p:spTree>
     <p:extLst>
       <p:ext uri="{BB962C8B-B14F-4D97-AF65-F5344CB8AC3E}">
-        <p14:creationId xmlns:p14="http://schemas.microsoft.com/office/powerpoint/2010/main" val="1442985194"/>
+        <p14:creationId xmlns:p14="http://schemas.microsoft.com/office/powerpoint/2010/main" val="1238079466"/>
       </p:ext>
     </p:extLst>
   </p:cSld>
@@ -5456,7 +5456,7 @@
           <p:cNvPr id="2" name="TextBox 1">
             <a:extLst xmlns:a="http://schemas.openxmlformats.org/drawingml/2006/main">
               <a:ext uri="{FF2B5EF4-FFF2-40B4-BE49-F238E27FC236}">
-                <a16:creationId xmlns:a16="http://schemas.microsoft.com/office/drawing/2014/main" id="{B809E5AD-1496-4F96-B74F-FF6E780E5BA6}"/>
+                <a16:creationId xmlns:a16="http://schemas.microsoft.com/office/drawing/2014/main" id="{3F5B6711-6E61-46C7-8C5F-46F63A77D2C1}"/>
               </a:ext>
             </a:extLst>
           </p:cNvPr>
@@ -5503,7 +5503,7 @@
           <p:cNvPr id="3" name="TextBox 2">
             <a:extLst xmlns:a="http://schemas.openxmlformats.org/drawingml/2006/main">
               <a:ext uri="{FF2B5EF4-FFF2-40B4-BE49-F238E27FC236}">
-                <a16:creationId xmlns:a16="http://schemas.microsoft.com/office/drawing/2014/main" id="{AF7B1F6C-5C42-42B9-A42C-BB623BBC1048}"/>
+                <a16:creationId xmlns:a16="http://schemas.microsoft.com/office/drawing/2014/main" id="{1AB25294-9FF7-4150-BAA9-E77BD607C116}"/>
               </a:ext>
             </a:extLst>
           </p:cNvPr>
@@ -5550,7 +5550,7 @@
           <p:cNvPr id="4" name="Rectangle 3">
             <a:extLst xmlns:a="http://schemas.openxmlformats.org/drawingml/2006/main">
               <a:ext uri="{FF2B5EF4-FFF2-40B4-BE49-F238E27FC236}">
-                <a16:creationId xmlns:a16="http://schemas.microsoft.com/office/drawing/2014/main" id="{B8E5EC13-15DE-43AB-B771-842ABB3B31D5}"/>
+                <a16:creationId xmlns:a16="http://schemas.microsoft.com/office/drawing/2014/main" id="{F5A95906-EBBD-4A92-A31D-9E7052C1ECE7}"/>
               </a:ext>
             </a:extLst>
           </p:cNvPr>
@@ -5605,7 +5605,7 @@
           <p:cNvPr id="5" name="Rectangle 4">
             <a:extLst xmlns:a="http://schemas.openxmlformats.org/drawingml/2006/main">
               <a:ext uri="{FF2B5EF4-FFF2-40B4-BE49-F238E27FC236}">
-                <a16:creationId xmlns:a16="http://schemas.microsoft.com/office/drawing/2014/main" id="{1FF8F97B-30E6-48EE-B072-ECC42CC40F26}"/>
+                <a16:creationId xmlns:a16="http://schemas.microsoft.com/office/drawing/2014/main" id="{CC011A26-8545-4F1E-B9BF-8E12FFAAEAAA}"/>
               </a:ext>
             </a:extLst>
           </p:cNvPr>
@@ -5660,7 +5660,7 @@
           <p:cNvPr id="6" name="TextBox 5">
             <a:extLst xmlns:a="http://schemas.openxmlformats.org/drawingml/2006/main">
               <a:ext uri="{FF2B5EF4-FFF2-40B4-BE49-F238E27FC236}">
-                <a16:creationId xmlns:a16="http://schemas.microsoft.com/office/drawing/2014/main" id="{026921C3-0BC7-4716-BC50-6BC6F2B82865}"/>
+                <a16:creationId xmlns:a16="http://schemas.microsoft.com/office/drawing/2014/main" id="{8635D2D5-8629-4C98-B04E-9DF7167C9E9A}"/>
               </a:ext>
             </a:extLst>
           </p:cNvPr>
@@ -5697,7 +5697,7 @@
                 <a:ea typeface="Aptos"/>
                 <a:cs typeface="Aptos"/>
               </a:rPr>
-              <a:t>Independent public evidence summary · 2026.07.23-12 · 2026-07-22 · Sources: WIPO licensing; dispute resolution; IPscore</a:t>
+              <a:t>Independent public evidence summary · 2026.07.23-13 · 2026-07-22 · Sources: WIPO licensing; dispute resolution; IPscore</a:t>
             </a:r>
           </a:p>
         </p:txBody>
@@ -5707,7 +5707,7 @@
           <p:cNvPr id="7" name="TextBox 6">
             <a:extLst xmlns:a="http://schemas.openxmlformats.org/drawingml/2006/main">
               <a:ext uri="{FF2B5EF4-FFF2-40B4-BE49-F238E27FC236}">
-                <a16:creationId xmlns:a16="http://schemas.microsoft.com/office/drawing/2014/main" id="{7AA03179-815E-4541-AE6A-FA848112927A}"/>
+                <a16:creationId xmlns:a16="http://schemas.microsoft.com/office/drawing/2014/main" id="{A068D596-C40D-4326-949D-3A6B399D067E}"/>
               </a:ext>
             </a:extLst>
           </p:cNvPr>
@@ -5754,7 +5754,7 @@
           <p:cNvPr id="8" name="Rounded Rectangle 7">
             <a:extLst xmlns:a="http://schemas.openxmlformats.org/drawingml/2006/main">
               <a:ext uri="{FF2B5EF4-FFF2-40B4-BE49-F238E27FC236}">
-                <a16:creationId xmlns:a16="http://schemas.microsoft.com/office/drawing/2014/main" id="{00EDDD5A-99E5-4A52-AF37-136408B5FC91}"/>
+                <a16:creationId xmlns:a16="http://schemas.microsoft.com/office/drawing/2014/main" id="{F045A03D-E9A4-4319-946D-B837955C580C}"/>
               </a:ext>
             </a:extLst>
           </p:cNvPr>
@@ -5811,7 +5811,7 @@
           <p:cNvPr id="9" name="TextBox 8">
             <a:extLst xmlns:a="http://schemas.openxmlformats.org/drawingml/2006/main">
               <a:ext uri="{FF2B5EF4-FFF2-40B4-BE49-F238E27FC236}">
-                <a16:creationId xmlns:a16="http://schemas.microsoft.com/office/drawing/2014/main" id="{943FFA1A-51A3-4A4B-96DD-FA35FB162243}"/>
+                <a16:creationId xmlns:a16="http://schemas.microsoft.com/office/drawing/2014/main" id="{50743251-B71A-4488-B4FE-8FA6CBB48EE4}"/>
               </a:ext>
             </a:extLst>
           </p:cNvPr>
@@ -5858,7 +5858,7 @@
           <p:cNvPr id="10" name="TextBox 9">
             <a:extLst xmlns:a="http://schemas.openxmlformats.org/drawingml/2006/main">
               <a:ext uri="{FF2B5EF4-FFF2-40B4-BE49-F238E27FC236}">
-                <a16:creationId xmlns:a16="http://schemas.microsoft.com/office/drawing/2014/main" id="{12FF1DB7-92F7-46D5-B27E-652DA719F960}"/>
+                <a16:creationId xmlns:a16="http://schemas.microsoft.com/office/drawing/2014/main" id="{C0E60873-1883-4494-A5FB-1C00F1526AFC}"/>
               </a:ext>
             </a:extLst>
           </p:cNvPr>
@@ -5905,7 +5905,7 @@
           <p:cNvPr id="11" name="TextBox 10">
             <a:extLst xmlns:a="http://schemas.openxmlformats.org/drawingml/2006/main">
               <a:ext uri="{FF2B5EF4-FFF2-40B4-BE49-F238E27FC236}">
-                <a16:creationId xmlns:a16="http://schemas.microsoft.com/office/drawing/2014/main" id="{247BFEC9-B265-417A-80DE-199E60E7DFC6}"/>
+                <a16:creationId xmlns:a16="http://schemas.microsoft.com/office/drawing/2014/main" id="{7938744F-44F6-49CA-A3CB-6B88395E496F}"/>
               </a:ext>
             </a:extLst>
           </p:cNvPr>
@@ -5952,7 +5952,7 @@
           <p:cNvPr id="12" name="Rounded Rectangle 11">
             <a:extLst xmlns:a="http://schemas.openxmlformats.org/drawingml/2006/main">
               <a:ext uri="{FF2B5EF4-FFF2-40B4-BE49-F238E27FC236}">
-                <a16:creationId xmlns:a16="http://schemas.microsoft.com/office/drawing/2014/main" id="{1B677B38-664F-4496-833D-FB1FDE843CA3}"/>
+                <a16:creationId xmlns:a16="http://schemas.microsoft.com/office/drawing/2014/main" id="{2F56A2C0-5876-40F0-B142-97405253FB74}"/>
               </a:ext>
             </a:extLst>
           </p:cNvPr>
@@ -6009,7 +6009,7 @@
           <p:cNvPr id="13" name="TextBox 12">
             <a:extLst xmlns:a="http://schemas.openxmlformats.org/drawingml/2006/main">
               <a:ext uri="{FF2B5EF4-FFF2-40B4-BE49-F238E27FC236}">
-                <a16:creationId xmlns:a16="http://schemas.microsoft.com/office/drawing/2014/main" id="{BED49A3C-7687-4CAF-A7C1-9731F77167CF}"/>
+                <a16:creationId xmlns:a16="http://schemas.microsoft.com/office/drawing/2014/main" id="{DF8E7BE8-1EA1-439A-9272-0617C12905C1}"/>
               </a:ext>
             </a:extLst>
           </p:cNvPr>
@@ -6056,7 +6056,7 @@
           <p:cNvPr id="14" name="TextBox 13">
             <a:extLst xmlns:a="http://schemas.openxmlformats.org/drawingml/2006/main">
               <a:ext uri="{FF2B5EF4-FFF2-40B4-BE49-F238E27FC236}">
-                <a16:creationId xmlns:a16="http://schemas.microsoft.com/office/drawing/2014/main" id="{F3554E65-03F7-4B4F-B534-242A23788C73}"/>
+                <a16:creationId xmlns:a16="http://schemas.microsoft.com/office/drawing/2014/main" id="{FA18730E-9553-42E7-8FCE-67D17A8AC67C}"/>
               </a:ext>
             </a:extLst>
           </p:cNvPr>
@@ -6103,7 +6103,7 @@
           <p:cNvPr id="15" name="TextBox 14">
             <a:extLst xmlns:a="http://schemas.openxmlformats.org/drawingml/2006/main">
               <a:ext uri="{FF2B5EF4-FFF2-40B4-BE49-F238E27FC236}">
-                <a16:creationId xmlns:a16="http://schemas.microsoft.com/office/drawing/2014/main" id="{19FB2D86-38C6-4BB5-B678-0EEA2D8864ED}"/>
+                <a16:creationId xmlns:a16="http://schemas.microsoft.com/office/drawing/2014/main" id="{289877BA-8AD5-4FD3-8519-6D615AB54812}"/>
               </a:ext>
             </a:extLst>
           </p:cNvPr>
@@ -6150,7 +6150,7 @@
           <p:cNvPr id="16" name="Rounded Rectangle 15">
             <a:extLst xmlns:a="http://schemas.openxmlformats.org/drawingml/2006/main">
               <a:ext uri="{FF2B5EF4-FFF2-40B4-BE49-F238E27FC236}">
-                <a16:creationId xmlns:a16="http://schemas.microsoft.com/office/drawing/2014/main" id="{E92D6012-0292-4574-8AD1-C953C9C773E0}"/>
+                <a16:creationId xmlns:a16="http://schemas.microsoft.com/office/drawing/2014/main" id="{52AAC58E-9737-4304-83DF-A179567FFADE}"/>
               </a:ext>
             </a:extLst>
           </p:cNvPr>
@@ -6207,7 +6207,7 @@
           <p:cNvPr id="17" name="TextBox 16">
             <a:extLst xmlns:a="http://schemas.openxmlformats.org/drawingml/2006/main">
               <a:ext uri="{FF2B5EF4-FFF2-40B4-BE49-F238E27FC236}">
-                <a16:creationId xmlns:a16="http://schemas.microsoft.com/office/drawing/2014/main" id="{507C8412-1495-4922-B5C4-802598E81CA9}"/>
+                <a16:creationId xmlns:a16="http://schemas.microsoft.com/office/drawing/2014/main" id="{ABD910CB-6754-47A6-90CD-236066772718}"/>
               </a:ext>
             </a:extLst>
           </p:cNvPr>
@@ -6254,7 +6254,7 @@
           <p:cNvPr id="18" name="TextBox 17">
             <a:extLst xmlns:a="http://schemas.openxmlformats.org/drawingml/2006/main">
               <a:ext uri="{FF2B5EF4-FFF2-40B4-BE49-F238E27FC236}">
-                <a16:creationId xmlns:a16="http://schemas.microsoft.com/office/drawing/2014/main" id="{16CFA00C-DCF2-43A7-BB1A-9A00EF9204DD}"/>
+                <a16:creationId xmlns:a16="http://schemas.microsoft.com/office/drawing/2014/main" id="{E7956349-725B-4537-B1E6-15EF05F81E58}"/>
               </a:ext>
             </a:extLst>
           </p:cNvPr>
@@ -6301,7 +6301,7 @@
           <p:cNvPr id="19" name="TextBox 18">
             <a:extLst xmlns:a="http://schemas.openxmlformats.org/drawingml/2006/main">
               <a:ext uri="{FF2B5EF4-FFF2-40B4-BE49-F238E27FC236}">
-                <a16:creationId xmlns:a16="http://schemas.microsoft.com/office/drawing/2014/main" id="{A75065F2-620B-4DA6-B448-68A0DF079216}"/>
+                <a16:creationId xmlns:a16="http://schemas.microsoft.com/office/drawing/2014/main" id="{3A8C93A0-9ED8-46F2-9B4F-8558CAF471D9}"/>
               </a:ext>
             </a:extLst>
           </p:cNvPr>
@@ -6348,7 +6348,7 @@
           <p:cNvPr id="20" name="Rounded Rectangle 19">
             <a:extLst xmlns:a="http://schemas.openxmlformats.org/drawingml/2006/main">
               <a:ext uri="{FF2B5EF4-FFF2-40B4-BE49-F238E27FC236}">
-                <a16:creationId xmlns:a16="http://schemas.microsoft.com/office/drawing/2014/main" id="{C5053BC7-FBA3-4BC4-AEF3-B521C08F5A2C}"/>
+                <a16:creationId xmlns:a16="http://schemas.microsoft.com/office/drawing/2014/main" id="{7A95EB11-B0ED-422D-B432-71F70D9897A6}"/>
               </a:ext>
             </a:extLst>
           </p:cNvPr>
@@ -6405,7 +6405,7 @@
           <p:cNvPr id="21" name="TextBox 20">
             <a:extLst xmlns:a="http://schemas.openxmlformats.org/drawingml/2006/main">
               <a:ext uri="{FF2B5EF4-FFF2-40B4-BE49-F238E27FC236}">
-                <a16:creationId xmlns:a16="http://schemas.microsoft.com/office/drawing/2014/main" id="{67843F21-F097-49F0-8E98-2CF5182860AA}"/>
+                <a16:creationId xmlns:a16="http://schemas.microsoft.com/office/drawing/2014/main" id="{D3B9B376-011B-4597-8558-16B6B5AE356B}"/>
               </a:ext>
             </a:extLst>
           </p:cNvPr>
@@ -6452,7 +6452,7 @@
           <p:cNvPr id="22" name="TextBox 21">
             <a:extLst xmlns:a="http://schemas.openxmlformats.org/drawingml/2006/main">
               <a:ext uri="{FF2B5EF4-FFF2-40B4-BE49-F238E27FC236}">
-                <a16:creationId xmlns:a16="http://schemas.microsoft.com/office/drawing/2014/main" id="{A7435DA5-3607-4A14-B816-4B8DFA69D6E2}"/>
+                <a16:creationId xmlns:a16="http://schemas.microsoft.com/office/drawing/2014/main" id="{A73A5BC1-5616-48C3-9AC6-3B7620EC8C42}"/>
               </a:ext>
             </a:extLst>
           </p:cNvPr>
@@ -6499,7 +6499,7 @@
           <p:cNvPr id="23" name="TextBox 22">
             <a:extLst xmlns:a="http://schemas.openxmlformats.org/drawingml/2006/main">
               <a:ext uri="{FF2B5EF4-FFF2-40B4-BE49-F238E27FC236}">
-                <a16:creationId xmlns:a16="http://schemas.microsoft.com/office/drawing/2014/main" id="{8B9DB356-362B-4A36-8B13-2DBDF81E7A5C}"/>
+                <a16:creationId xmlns:a16="http://schemas.microsoft.com/office/drawing/2014/main" id="{A3090555-F118-46C9-86F6-FA6922F26344}"/>
               </a:ext>
             </a:extLst>
           </p:cNvPr>
@@ -6546,7 +6546,7 @@
           <p:cNvPr id="24" name="TextBox 23">
             <a:extLst xmlns:a="http://schemas.openxmlformats.org/drawingml/2006/main">
               <a:ext uri="{FF2B5EF4-FFF2-40B4-BE49-F238E27FC236}">
-                <a16:creationId xmlns:a16="http://schemas.microsoft.com/office/drawing/2014/main" id="{74D2218B-839F-4A42-B294-DB7FF3BAFD35}"/>
+                <a16:creationId xmlns:a16="http://schemas.microsoft.com/office/drawing/2014/main" id="{9A0AFA76-EE0C-48D8-898E-0E6B308F981E}"/>
               </a:ext>
             </a:extLst>
           </p:cNvPr>
@@ -6591,7 +6591,7 @@
     </p:spTree>
     <p:extLst>
       <p:ext uri="{BB962C8B-B14F-4D97-AF65-F5344CB8AC3E}">
-        <p14:creationId xmlns:p14="http://schemas.microsoft.com/office/powerpoint/2010/main" val="1405531852"/>
+        <p14:creationId xmlns:p14="http://schemas.microsoft.com/office/powerpoint/2010/main" val="1908788119"/>
       </p:ext>
     </p:extLst>
   </p:cSld>
@@ -6615,7 +6615,7 @@
           <p:cNvPr id="2" name="TextBox 1">
             <a:extLst xmlns:a="http://schemas.openxmlformats.org/drawingml/2006/main">
               <a:ext uri="{FF2B5EF4-FFF2-40B4-BE49-F238E27FC236}">
-                <a16:creationId xmlns:a16="http://schemas.microsoft.com/office/drawing/2014/main" id="{AA3FDAE3-FF84-4472-99FF-4F013A47EE75}"/>
+                <a16:creationId xmlns:a16="http://schemas.microsoft.com/office/drawing/2014/main" id="{88ECB53F-013E-47BD-99CF-DBC355DD9D5C}"/>
               </a:ext>
             </a:extLst>
           </p:cNvPr>
@@ -6662,7 +6662,7 @@
           <p:cNvPr id="3" name="TextBox 2">
             <a:extLst xmlns:a="http://schemas.openxmlformats.org/drawingml/2006/main">
               <a:ext uri="{FF2B5EF4-FFF2-40B4-BE49-F238E27FC236}">
-                <a16:creationId xmlns:a16="http://schemas.microsoft.com/office/drawing/2014/main" id="{AEF6273D-C101-40D3-8E10-32821C8AFABC}"/>
+                <a16:creationId xmlns:a16="http://schemas.microsoft.com/office/drawing/2014/main" id="{70B24598-EFF9-4BF0-A62B-D8F45BEEC775}"/>
               </a:ext>
             </a:extLst>
           </p:cNvPr>
@@ -6709,7 +6709,7 @@
           <p:cNvPr id="4" name="Rectangle 3">
             <a:extLst xmlns:a="http://schemas.openxmlformats.org/drawingml/2006/main">
               <a:ext uri="{FF2B5EF4-FFF2-40B4-BE49-F238E27FC236}">
-                <a16:creationId xmlns:a16="http://schemas.microsoft.com/office/drawing/2014/main" id="{911FD703-322C-486B-970F-528DF6D6A26C}"/>
+                <a16:creationId xmlns:a16="http://schemas.microsoft.com/office/drawing/2014/main" id="{1D3C2A99-F868-4F55-8819-8A471CC74DC2}"/>
               </a:ext>
             </a:extLst>
           </p:cNvPr>
@@ -6764,7 +6764,7 @@
           <p:cNvPr id="5" name="Rectangle 4">
             <a:extLst xmlns:a="http://schemas.openxmlformats.org/drawingml/2006/main">
               <a:ext uri="{FF2B5EF4-FFF2-40B4-BE49-F238E27FC236}">
-                <a16:creationId xmlns:a16="http://schemas.microsoft.com/office/drawing/2014/main" id="{659BE9DF-D2F2-409F-BA31-619E03419B67}"/>
+                <a16:creationId xmlns:a16="http://schemas.microsoft.com/office/drawing/2014/main" id="{EA49BC16-915F-473E-86C8-9F7CCBABBFC9}"/>
               </a:ext>
             </a:extLst>
           </p:cNvPr>
@@ -6819,7 +6819,7 @@
           <p:cNvPr id="6" name="TextBox 5">
             <a:extLst xmlns:a="http://schemas.openxmlformats.org/drawingml/2006/main">
               <a:ext uri="{FF2B5EF4-FFF2-40B4-BE49-F238E27FC236}">
-                <a16:creationId xmlns:a16="http://schemas.microsoft.com/office/drawing/2014/main" id="{580420AB-0E7C-4111-81CA-8CFBF25B0D6C}"/>
+                <a16:creationId xmlns:a16="http://schemas.microsoft.com/office/drawing/2014/main" id="{8536198C-E7E9-4F3F-B071-CB9960A211A8}"/>
               </a:ext>
             </a:extLst>
           </p:cNvPr>
@@ -6856,7 +6856,7 @@
                 <a:ea typeface="Aptos"/>
                 <a:cs typeface="Aptos"/>
               </a:rPr>
-              <a:t>Independent public evidence summary · 2026.07.23-12 · 2026-07-22 · Sources: WIPO IP valuation; Market-values</a:t>
+              <a:t>Independent public evidence summary · 2026.07.23-13 · 2026-07-22 · Sources: WIPO IP valuation; Market-values</a:t>
             </a:r>
           </a:p>
         </p:txBody>
@@ -6866,7 +6866,7 @@
           <p:cNvPr id="7" name="TextBox 6">
             <a:extLst xmlns:a="http://schemas.openxmlformats.org/drawingml/2006/main">
               <a:ext uri="{FF2B5EF4-FFF2-40B4-BE49-F238E27FC236}">
-                <a16:creationId xmlns:a16="http://schemas.microsoft.com/office/drawing/2014/main" id="{9D373F09-0E67-4734-BF00-EF72B271AA0C}"/>
+                <a16:creationId xmlns:a16="http://schemas.microsoft.com/office/drawing/2014/main" id="{F43871FD-23A8-4F42-8038-AFB72727D2B0}"/>
               </a:ext>
             </a:extLst>
           </p:cNvPr>
@@ -7436,7 +7436,7 @@
           <p:cNvPr id="9" name="TextBox 8">
             <a:extLst xmlns:a="http://schemas.openxmlformats.org/drawingml/2006/main">
               <a:ext uri="{FF2B5EF4-FFF2-40B4-BE49-F238E27FC236}">
-                <a16:creationId xmlns:a16="http://schemas.microsoft.com/office/drawing/2014/main" id="{820818CB-7AD3-45DA-B91E-F46E48D5C697}"/>
+                <a16:creationId xmlns:a16="http://schemas.microsoft.com/office/drawing/2014/main" id="{D4053663-FB7B-4105-A497-25A8D7E3CC23}"/>
               </a:ext>
             </a:extLst>
           </p:cNvPr>
@@ -7481,7 +7481,7 @@
     </p:spTree>
     <p:extLst>
       <p:ext uri="{BB962C8B-B14F-4D97-AF65-F5344CB8AC3E}">
-        <p14:creationId xmlns:p14="http://schemas.microsoft.com/office/powerpoint/2010/main" val="508348867"/>
+        <p14:creationId xmlns:p14="http://schemas.microsoft.com/office/powerpoint/2010/main" val="2124930073"/>
       </p:ext>
     </p:extLst>
   </p:cSld>
@@ -7512,7 +7512,7 @@
           <p:cNvPr id="2" name="TextBox 1">
             <a:extLst xmlns:a="http://schemas.openxmlformats.org/drawingml/2006/main">
               <a:ext uri="{FF2B5EF4-FFF2-40B4-BE49-F238E27FC236}">
-                <a16:creationId xmlns:a16="http://schemas.microsoft.com/office/drawing/2014/main" id="{59CCB2C4-F0A0-489E-BD75-4BEB267DD184}"/>
+                <a16:creationId xmlns:a16="http://schemas.microsoft.com/office/drawing/2014/main" id="{930FE656-6385-469B-89ED-957766AE3308}"/>
               </a:ext>
             </a:extLst>
           </p:cNvPr>
@@ -7559,7 +7559,7 @@
           <p:cNvPr id="3" name="TextBox 2">
             <a:extLst xmlns:a="http://schemas.openxmlformats.org/drawingml/2006/main">
               <a:ext uri="{FF2B5EF4-FFF2-40B4-BE49-F238E27FC236}">
-                <a16:creationId xmlns:a16="http://schemas.microsoft.com/office/drawing/2014/main" id="{4EDE7D88-8C89-420E-BC33-A6FDD81175B6}"/>
+                <a16:creationId xmlns:a16="http://schemas.microsoft.com/office/drawing/2014/main" id="{A961113F-C975-47FD-9699-F78E4F6FABCB}"/>
               </a:ext>
             </a:extLst>
           </p:cNvPr>
@@ -7606,7 +7606,7 @@
           <p:cNvPr id="4" name="TextBox 3">
             <a:extLst xmlns:a="http://schemas.openxmlformats.org/drawingml/2006/main">
               <a:ext uri="{FF2B5EF4-FFF2-40B4-BE49-F238E27FC236}">
-                <a16:creationId xmlns:a16="http://schemas.microsoft.com/office/drawing/2014/main" id="{D245F4A7-A5FD-4852-AA30-2A132941E320}"/>
+                <a16:creationId xmlns:a16="http://schemas.microsoft.com/office/drawing/2014/main" id="{31FF7961-81D4-4915-B6F9-8C2FEA979C62}"/>
               </a:ext>
             </a:extLst>
           </p:cNvPr>
@@ -7747,7 +7747,7 @@
           <p:cNvPr id="5" name="TextBox 4">
             <a:extLst xmlns:a="http://schemas.openxmlformats.org/drawingml/2006/main">
               <a:ext uri="{FF2B5EF4-FFF2-40B4-BE49-F238E27FC236}">
-                <a16:creationId xmlns:a16="http://schemas.microsoft.com/office/drawing/2014/main" id="{6E8022E9-3194-40B3-A4E1-D9AEE4965007}"/>
+                <a16:creationId xmlns:a16="http://schemas.microsoft.com/office/drawing/2014/main" id="{DAA7C6C1-1513-4E69-93CB-8C0DD9364DE6}"/>
               </a:ext>
             </a:extLst>
           </p:cNvPr>
@@ -7784,7 +7784,7 @@
                 <a:ea typeface="Aptos"/>
                 <a:cs typeface="Aptos"/>
               </a:rPr>
-              <a:t>Version 2026.07.23-12 · 2026-07-22 · 12 / 12</a:t>
+              <a:t>Version 2026.07.23-13 · 2026-07-22 · 12 / 12</a:t>
             </a:r>
           </a:p>
         </p:txBody>
@@ -7794,7 +7794,7 @@
           <p:cNvPr id="6" name="TextBox 5">
             <a:extLst xmlns:a="http://schemas.openxmlformats.org/drawingml/2006/main">
               <a:ext uri="{FF2B5EF4-FFF2-40B4-BE49-F238E27FC236}">
-                <a16:creationId xmlns:a16="http://schemas.microsoft.com/office/drawing/2014/main" id="{AE6A43D6-A06C-48D9-90B5-8163B7A28284}"/>
+                <a16:creationId xmlns:a16="http://schemas.microsoft.com/office/drawing/2014/main" id="{00F32189-E444-4248-BE59-612AC6431293}"/>
               </a:ext>
             </a:extLst>
           </p:cNvPr>
@@ -7839,7 +7839,7 @@
     </p:spTree>
     <p:extLst>
       <p:ext uri="{BB962C8B-B14F-4D97-AF65-F5344CB8AC3E}">
-        <p14:creationId xmlns:p14="http://schemas.microsoft.com/office/powerpoint/2010/main" val="795160005"/>
+        <p14:creationId xmlns:p14="http://schemas.microsoft.com/office/powerpoint/2010/main" val="1527218344"/>
       </p:ext>
     </p:extLst>
   </p:cSld>
@@ -7863,7 +7863,7 @@
           <p:cNvPr id="2" name="TextBox 1">
             <a:extLst xmlns:a="http://schemas.openxmlformats.org/drawingml/2006/main">
               <a:ext uri="{FF2B5EF4-FFF2-40B4-BE49-F238E27FC236}">
-                <a16:creationId xmlns:a16="http://schemas.microsoft.com/office/drawing/2014/main" id="{0C705661-F757-4B98-BF2E-D36AAAD1AB16}"/>
+                <a16:creationId xmlns:a16="http://schemas.microsoft.com/office/drawing/2014/main" id="{E3AF059B-FC85-42B5-B3BF-4A50BC4E5562}"/>
               </a:ext>
             </a:extLst>
           </p:cNvPr>
@@ -7910,7 +7910,7 @@
           <p:cNvPr id="3" name="TextBox 2">
             <a:extLst xmlns:a="http://schemas.openxmlformats.org/drawingml/2006/main">
               <a:ext uri="{FF2B5EF4-FFF2-40B4-BE49-F238E27FC236}">
-                <a16:creationId xmlns:a16="http://schemas.microsoft.com/office/drawing/2014/main" id="{B454198D-EE00-46F7-A692-881FB09560FE}"/>
+                <a16:creationId xmlns:a16="http://schemas.microsoft.com/office/drawing/2014/main" id="{15C8A431-8509-411A-84F8-B0515B8FAEFA}"/>
               </a:ext>
             </a:extLst>
           </p:cNvPr>
@@ -7957,7 +7957,7 @@
           <p:cNvPr id="4" name="Rectangle 3">
             <a:extLst xmlns:a="http://schemas.openxmlformats.org/drawingml/2006/main">
               <a:ext uri="{FF2B5EF4-FFF2-40B4-BE49-F238E27FC236}">
-                <a16:creationId xmlns:a16="http://schemas.microsoft.com/office/drawing/2014/main" id="{632DBC8C-D099-48A5-9CC9-3D8BCBC9D873}"/>
+                <a16:creationId xmlns:a16="http://schemas.microsoft.com/office/drawing/2014/main" id="{6FA961CC-2EF9-4D8D-87AC-40304DF66716}"/>
               </a:ext>
             </a:extLst>
           </p:cNvPr>
@@ -8012,7 +8012,7 @@
           <p:cNvPr id="5" name="Rectangle 4">
             <a:extLst xmlns:a="http://schemas.openxmlformats.org/drawingml/2006/main">
               <a:ext uri="{FF2B5EF4-FFF2-40B4-BE49-F238E27FC236}">
-                <a16:creationId xmlns:a16="http://schemas.microsoft.com/office/drawing/2014/main" id="{A22E50ED-70C1-46DE-BAFB-846ECDCD04C7}"/>
+                <a16:creationId xmlns:a16="http://schemas.microsoft.com/office/drawing/2014/main" id="{50A0DFB8-332C-47C5-AEBD-4F0A8CC5B373}"/>
               </a:ext>
             </a:extLst>
           </p:cNvPr>
@@ -8067,7 +8067,7 @@
           <p:cNvPr id="6" name="TextBox 5">
             <a:extLst xmlns:a="http://schemas.openxmlformats.org/drawingml/2006/main">
               <a:ext uri="{FF2B5EF4-FFF2-40B4-BE49-F238E27FC236}">
-                <a16:creationId xmlns:a16="http://schemas.microsoft.com/office/drawing/2014/main" id="{253CF508-90E0-4A59-87C2-68AA84993A3A}"/>
+                <a16:creationId xmlns:a16="http://schemas.microsoft.com/office/drawing/2014/main" id="{C4C52669-1F16-46AA-A27E-15AC8F429ED8}"/>
               </a:ext>
             </a:extLst>
           </p:cNvPr>
@@ -8104,7 +8104,7 @@
                 <a:ea typeface="Aptos"/>
                 <a:cs typeface="Aptos"/>
               </a:rPr>
-              <a:t>Independent public evidence summary · 2026.07.23-12 · 2026-07-22 · Sources: Atlas readiness; WIPO</a:t>
+              <a:t>Independent public evidence summary · 2026.07.23-13 · 2026-07-22 · Sources: Atlas readiness; WIPO</a:t>
             </a:r>
           </a:p>
         </p:txBody>
@@ -8114,7 +8114,7 @@
           <p:cNvPr id="7" name="TextBox 6">
             <a:extLst xmlns:a="http://schemas.openxmlformats.org/drawingml/2006/main">
               <a:ext uri="{FF2B5EF4-FFF2-40B4-BE49-F238E27FC236}">
-                <a16:creationId xmlns:a16="http://schemas.microsoft.com/office/drawing/2014/main" id="{4C73A3D8-2991-483D-AB90-AF602201BAEC}"/>
+                <a16:creationId xmlns:a16="http://schemas.microsoft.com/office/drawing/2014/main" id="{9A10B834-6B21-4903-B903-4A304EC2024D}"/>
               </a:ext>
             </a:extLst>
           </p:cNvPr>
@@ -8161,7 +8161,7 @@
           <p:cNvPr id="8" name="TextBox 7">
             <a:extLst xmlns:a="http://schemas.openxmlformats.org/drawingml/2006/main">
               <a:ext uri="{FF2B5EF4-FFF2-40B4-BE49-F238E27FC236}">
-                <a16:creationId xmlns:a16="http://schemas.microsoft.com/office/drawing/2014/main" id="{F85B75E3-AA9C-4CB0-811D-56FB446EF087}"/>
+                <a16:creationId xmlns:a16="http://schemas.microsoft.com/office/drawing/2014/main" id="{67963A2E-AF80-48B1-8FD5-E6440620A014}"/>
               </a:ext>
             </a:extLst>
           </p:cNvPr>
@@ -8208,7 +8208,7 @@
           <p:cNvPr id="9" name="TextBox 8">
             <a:extLst xmlns:a="http://schemas.openxmlformats.org/drawingml/2006/main">
               <a:ext uri="{FF2B5EF4-FFF2-40B4-BE49-F238E27FC236}">
-                <a16:creationId xmlns:a16="http://schemas.microsoft.com/office/drawing/2014/main" id="{65F0765D-A44D-43A2-9C51-FE3B1715823A}"/>
+                <a16:creationId xmlns:a16="http://schemas.microsoft.com/office/drawing/2014/main" id="{33494D3A-D4DC-483C-ADD8-E747AED85CBA}"/>
               </a:ext>
             </a:extLst>
           </p:cNvPr>
@@ -8305,7 +8305,7 @@
           <p:cNvPr id="10" name="Rounded Rectangle 9">
             <a:extLst xmlns:a="http://schemas.openxmlformats.org/drawingml/2006/main">
               <a:ext uri="{FF2B5EF4-FFF2-40B4-BE49-F238E27FC236}">
-                <a16:creationId xmlns:a16="http://schemas.microsoft.com/office/drawing/2014/main" id="{A4968CF8-A101-4E63-98AD-2296F603EE2A}"/>
+                <a16:creationId xmlns:a16="http://schemas.microsoft.com/office/drawing/2014/main" id="{76DB2296-A092-460A-A35B-8C7AD61F4A41}"/>
               </a:ext>
             </a:extLst>
           </p:cNvPr>
@@ -8362,7 +8362,7 @@
           <p:cNvPr id="11" name="TextBox 10">
             <a:extLst xmlns:a="http://schemas.openxmlformats.org/drawingml/2006/main">
               <a:ext uri="{FF2B5EF4-FFF2-40B4-BE49-F238E27FC236}">
-                <a16:creationId xmlns:a16="http://schemas.microsoft.com/office/drawing/2014/main" id="{EFED347F-BA79-46A8-BC37-982B062AE772}"/>
+                <a16:creationId xmlns:a16="http://schemas.microsoft.com/office/drawing/2014/main" id="{987A9CEF-3303-4F96-A07C-43A628CDC6C1}"/>
               </a:ext>
             </a:extLst>
           </p:cNvPr>
@@ -8409,7 +8409,7 @@
           <p:cNvPr id="12" name="TextBox 11">
             <a:extLst xmlns:a="http://schemas.openxmlformats.org/drawingml/2006/main">
               <a:ext uri="{FF2B5EF4-FFF2-40B4-BE49-F238E27FC236}">
-                <a16:creationId xmlns:a16="http://schemas.microsoft.com/office/drawing/2014/main" id="{2D85C838-D418-452E-AF6D-F3B4FE6FB4C7}"/>
+                <a16:creationId xmlns:a16="http://schemas.microsoft.com/office/drawing/2014/main" id="{0CAE1CC8-AB2F-44E4-8562-BC20B2716C4A}"/>
               </a:ext>
             </a:extLst>
           </p:cNvPr>
@@ -8454,7 +8454,7 @@
     </p:spTree>
     <p:extLst>
       <p:ext uri="{BB962C8B-B14F-4D97-AF65-F5344CB8AC3E}">
-        <p14:creationId xmlns:p14="http://schemas.microsoft.com/office/powerpoint/2010/main" val="340166705"/>
+        <p14:creationId xmlns:p14="http://schemas.microsoft.com/office/powerpoint/2010/main" val="1976823172"/>
       </p:ext>
     </p:extLst>
   </p:cSld>
@@ -8478,7 +8478,7 @@
           <p:cNvPr id="2" name="TextBox 1">
             <a:extLst xmlns:a="http://schemas.openxmlformats.org/drawingml/2006/main">
               <a:ext uri="{FF2B5EF4-FFF2-40B4-BE49-F238E27FC236}">
-                <a16:creationId xmlns:a16="http://schemas.microsoft.com/office/drawing/2014/main" id="{3C25EF60-E642-4755-BD38-B68BF7A1D884}"/>
+                <a16:creationId xmlns:a16="http://schemas.microsoft.com/office/drawing/2014/main" id="{5A1E6DDD-0367-4090-8501-ACE8249238D0}"/>
               </a:ext>
             </a:extLst>
           </p:cNvPr>
@@ -8525,7 +8525,7 @@
           <p:cNvPr id="3" name="TextBox 2">
             <a:extLst xmlns:a="http://schemas.openxmlformats.org/drawingml/2006/main">
               <a:ext uri="{FF2B5EF4-FFF2-40B4-BE49-F238E27FC236}">
-                <a16:creationId xmlns:a16="http://schemas.microsoft.com/office/drawing/2014/main" id="{CAFACF81-B0B0-451C-870B-699708AE26EE}"/>
+                <a16:creationId xmlns:a16="http://schemas.microsoft.com/office/drawing/2014/main" id="{B7B320A5-E071-4E76-903E-6497C18F3716}"/>
               </a:ext>
             </a:extLst>
           </p:cNvPr>
@@ -8572,7 +8572,7 @@
           <p:cNvPr id="4" name="Rectangle 3">
             <a:extLst xmlns:a="http://schemas.openxmlformats.org/drawingml/2006/main">
               <a:ext uri="{FF2B5EF4-FFF2-40B4-BE49-F238E27FC236}">
-                <a16:creationId xmlns:a16="http://schemas.microsoft.com/office/drawing/2014/main" id="{49571D69-A964-4B46-B745-BB53C8B08978}"/>
+                <a16:creationId xmlns:a16="http://schemas.microsoft.com/office/drawing/2014/main" id="{E323ACB9-59BA-4FD0-91D8-77260973A589}"/>
               </a:ext>
             </a:extLst>
           </p:cNvPr>
@@ -8627,7 +8627,7 @@
           <p:cNvPr id="5" name="Rectangle 4">
             <a:extLst xmlns:a="http://schemas.openxmlformats.org/drawingml/2006/main">
               <a:ext uri="{FF2B5EF4-FFF2-40B4-BE49-F238E27FC236}">
-                <a16:creationId xmlns:a16="http://schemas.microsoft.com/office/drawing/2014/main" id="{6C6D6B91-01C0-476E-985C-0F65F15108C9}"/>
+                <a16:creationId xmlns:a16="http://schemas.microsoft.com/office/drawing/2014/main" id="{97187CE6-4DC5-4312-986A-BFBD4FFFB81D}"/>
               </a:ext>
             </a:extLst>
           </p:cNvPr>
@@ -8682,7 +8682,7 @@
           <p:cNvPr id="6" name="TextBox 5">
             <a:extLst xmlns:a="http://schemas.openxmlformats.org/drawingml/2006/main">
               <a:ext uri="{FF2B5EF4-FFF2-40B4-BE49-F238E27FC236}">
-                <a16:creationId xmlns:a16="http://schemas.microsoft.com/office/drawing/2014/main" id="{1B8CB0C7-EAF1-4926-B313-C4BBCA4705A4}"/>
+                <a16:creationId xmlns:a16="http://schemas.microsoft.com/office/drawing/2014/main" id="{8780F66D-9DC0-4BF8-A785-098B228B96EA}"/>
               </a:ext>
             </a:extLst>
           </p:cNvPr>
@@ -8719,7 +8719,7 @@
                 <a:ea typeface="Aptos"/>
                 <a:cs typeface="Aptos"/>
               </a:rPr>
-              <a:t>Independent public evidence summary · 2026.07.23-12 · 2026-07-22 · Sources: EP3032975B2</a:t>
+              <a:t>Independent public evidence summary · 2026.07.23-13 · 2026-07-22 · Sources: EP3032975B2</a:t>
             </a:r>
           </a:p>
         </p:txBody>
@@ -8729,7 +8729,7 @@
           <p:cNvPr id="7" name="TextBox 6">
             <a:extLst xmlns:a="http://schemas.openxmlformats.org/drawingml/2006/main">
               <a:ext uri="{FF2B5EF4-FFF2-40B4-BE49-F238E27FC236}">
-                <a16:creationId xmlns:a16="http://schemas.microsoft.com/office/drawing/2014/main" id="{AA431875-536D-4AD6-BA89-48B4225861F1}"/>
+                <a16:creationId xmlns:a16="http://schemas.microsoft.com/office/drawing/2014/main" id="{B4B55961-2AA5-4153-AAB9-B8EF2254BD64}"/>
               </a:ext>
             </a:extLst>
           </p:cNvPr>
@@ -8776,7 +8776,7 @@
           <p:cNvPr id="8" name="TextBox 7">
             <a:extLst xmlns:a="http://schemas.openxmlformats.org/drawingml/2006/main">
               <a:ext uri="{FF2B5EF4-FFF2-40B4-BE49-F238E27FC236}">
-                <a16:creationId xmlns:a16="http://schemas.microsoft.com/office/drawing/2014/main" id="{088C0FF3-A601-4D4B-BD79-3A3D49D9E678}"/>
+                <a16:creationId xmlns:a16="http://schemas.microsoft.com/office/drawing/2014/main" id="{6DFE8A9E-99EC-4D99-9776-377178E3EFDA}"/>
               </a:ext>
             </a:extLst>
           </p:cNvPr>
@@ -8823,7 +8823,7 @@
           <p:cNvPr id="9" name="TextBox 8">
             <a:extLst xmlns:a="http://schemas.openxmlformats.org/drawingml/2006/main">
               <a:ext uri="{FF2B5EF4-FFF2-40B4-BE49-F238E27FC236}">
-                <a16:creationId xmlns:a16="http://schemas.microsoft.com/office/drawing/2014/main" id="{D4BD65A7-F5F7-4DF2-8F24-A8E535B292F5}"/>
+                <a16:creationId xmlns:a16="http://schemas.microsoft.com/office/drawing/2014/main" id="{9315B594-DC2B-4B8E-8605-9DE47A9316F5}"/>
               </a:ext>
             </a:extLst>
           </p:cNvPr>
@@ -8920,7 +8920,7 @@
           <p:cNvPr id="10" name="Rounded Rectangle 9">
             <a:extLst xmlns:a="http://schemas.openxmlformats.org/drawingml/2006/main">
               <a:ext uri="{FF2B5EF4-FFF2-40B4-BE49-F238E27FC236}">
-                <a16:creationId xmlns:a16="http://schemas.microsoft.com/office/drawing/2014/main" id="{304B1B01-3B8B-4EE8-B6A1-4A5C9815D4A9}"/>
+                <a16:creationId xmlns:a16="http://schemas.microsoft.com/office/drawing/2014/main" id="{B9E31B1A-D370-477B-B46F-6FDA18449A16}"/>
               </a:ext>
             </a:extLst>
           </p:cNvPr>
@@ -8977,7 +8977,7 @@
           <p:cNvPr id="11" name="TextBox 10">
             <a:extLst xmlns:a="http://schemas.openxmlformats.org/drawingml/2006/main">
               <a:ext uri="{FF2B5EF4-FFF2-40B4-BE49-F238E27FC236}">
-                <a16:creationId xmlns:a16="http://schemas.microsoft.com/office/drawing/2014/main" id="{D51EC5CF-171B-45A5-A003-DC389C1A4367}"/>
+                <a16:creationId xmlns:a16="http://schemas.microsoft.com/office/drawing/2014/main" id="{B6D4E96A-53E3-4025-9535-E79B349CBACA}"/>
               </a:ext>
             </a:extLst>
           </p:cNvPr>
@@ -9024,7 +9024,7 @@
           <p:cNvPr id="12" name="TextBox 11">
             <a:extLst xmlns:a="http://schemas.openxmlformats.org/drawingml/2006/main">
               <a:ext uri="{FF2B5EF4-FFF2-40B4-BE49-F238E27FC236}">
-                <a16:creationId xmlns:a16="http://schemas.microsoft.com/office/drawing/2014/main" id="{4CAA6203-14C9-4237-96F9-CB83343B9019}"/>
+                <a16:creationId xmlns:a16="http://schemas.microsoft.com/office/drawing/2014/main" id="{AD1F311B-0BC2-4962-B658-6F1EEA2DF7A3}"/>
               </a:ext>
             </a:extLst>
           </p:cNvPr>
@@ -9069,7 +9069,7 @@
     </p:spTree>
     <p:extLst>
       <p:ext uri="{BB962C8B-B14F-4D97-AF65-F5344CB8AC3E}">
-        <p14:creationId xmlns:p14="http://schemas.microsoft.com/office/powerpoint/2010/main" val="143379605"/>
+        <p14:creationId xmlns:p14="http://schemas.microsoft.com/office/powerpoint/2010/main" val="218495330"/>
       </p:ext>
     </p:extLst>
   </p:cSld>
@@ -9093,7 +9093,7 @@
           <p:cNvPr id="2" name="TextBox 1">
             <a:extLst xmlns:a="http://schemas.openxmlformats.org/drawingml/2006/main">
               <a:ext uri="{FF2B5EF4-FFF2-40B4-BE49-F238E27FC236}">
-                <a16:creationId xmlns:a16="http://schemas.microsoft.com/office/drawing/2014/main" id="{B2487A3D-E058-4E3D-9165-EF2C9FABCD84}"/>
+                <a16:creationId xmlns:a16="http://schemas.microsoft.com/office/drawing/2014/main" id="{3D0A454B-9A55-4D63-A891-16CB88260046}"/>
               </a:ext>
             </a:extLst>
           </p:cNvPr>
@@ -9140,7 +9140,7 @@
           <p:cNvPr id="3" name="TextBox 2">
             <a:extLst xmlns:a="http://schemas.openxmlformats.org/drawingml/2006/main">
               <a:ext uri="{FF2B5EF4-FFF2-40B4-BE49-F238E27FC236}">
-                <a16:creationId xmlns:a16="http://schemas.microsoft.com/office/drawing/2014/main" id="{01CCA2FD-0F56-4924-B6CE-8C0943B002C0}"/>
+                <a16:creationId xmlns:a16="http://schemas.microsoft.com/office/drawing/2014/main" id="{DC5CB2B2-03F8-405C-8AC2-1B1DDF7A2CCB}"/>
               </a:ext>
             </a:extLst>
           </p:cNvPr>
@@ -9187,7 +9187,7 @@
           <p:cNvPr id="4" name="Rectangle 3">
             <a:extLst xmlns:a="http://schemas.openxmlformats.org/drawingml/2006/main">
               <a:ext uri="{FF2B5EF4-FFF2-40B4-BE49-F238E27FC236}">
-                <a16:creationId xmlns:a16="http://schemas.microsoft.com/office/drawing/2014/main" id="{D2B329DC-9ADA-44FF-9C3E-C7B8B75578A9}"/>
+                <a16:creationId xmlns:a16="http://schemas.microsoft.com/office/drawing/2014/main" id="{948052A1-67A7-4E42-8EE1-38977FAA7C49}"/>
               </a:ext>
             </a:extLst>
           </p:cNvPr>
@@ -9242,7 +9242,7 @@
           <p:cNvPr id="5" name="Rectangle 4">
             <a:extLst xmlns:a="http://schemas.openxmlformats.org/drawingml/2006/main">
               <a:ext uri="{FF2B5EF4-FFF2-40B4-BE49-F238E27FC236}">
-                <a16:creationId xmlns:a16="http://schemas.microsoft.com/office/drawing/2014/main" id="{39C61659-3651-4DD9-B0B0-72DB84DC7769}"/>
+                <a16:creationId xmlns:a16="http://schemas.microsoft.com/office/drawing/2014/main" id="{552617AA-BFB7-4B10-832A-AF3F362BC564}"/>
               </a:ext>
             </a:extLst>
           </p:cNvPr>
@@ -9297,7 +9297,7 @@
           <p:cNvPr id="6" name="TextBox 5">
             <a:extLst xmlns:a="http://schemas.openxmlformats.org/drawingml/2006/main">
               <a:ext uri="{FF2B5EF4-FFF2-40B4-BE49-F238E27FC236}">
-                <a16:creationId xmlns:a16="http://schemas.microsoft.com/office/drawing/2014/main" id="{A555B7E9-6B07-4D67-9707-750BCD22D9DC}"/>
+                <a16:creationId xmlns:a16="http://schemas.microsoft.com/office/drawing/2014/main" id="{7255B584-0A87-439C-9192-A59EB58DBA7F}"/>
               </a:ext>
             </a:extLst>
           </p:cNvPr>
@@ -9334,7 +9334,7 @@
                 <a:ea typeface="Aptos"/>
                 <a:cs typeface="Aptos"/>
               </a:rPr>
-              <a:t>Independent public evidence summary · 2026.07.23-12 · 2026-07-22 · Sources: EPO Register; EP3032975B2</a:t>
+              <a:t>Independent public evidence summary · 2026.07.23-13 · 2026-07-22 · Sources: EPO Register; EP3032975B2</a:t>
             </a:r>
           </a:p>
         </p:txBody>
@@ -9344,7 +9344,7 @@
           <p:cNvPr id="7" name="TextBox 6">
             <a:extLst xmlns:a="http://schemas.openxmlformats.org/drawingml/2006/main">
               <a:ext uri="{FF2B5EF4-FFF2-40B4-BE49-F238E27FC236}">
-                <a16:creationId xmlns:a16="http://schemas.microsoft.com/office/drawing/2014/main" id="{5FCDC9B4-CDB8-4536-931C-0D84AA42E6FC}"/>
+                <a16:creationId xmlns:a16="http://schemas.microsoft.com/office/drawing/2014/main" id="{68A38A5D-6EFF-49A5-999E-A232CD5F13AC}"/>
               </a:ext>
             </a:extLst>
           </p:cNvPr>
@@ -9391,7 +9391,7 @@
           <p:cNvPr id="8" name="Rounded Rectangle 7">
             <a:extLst xmlns:a="http://schemas.openxmlformats.org/drawingml/2006/main">
               <a:ext uri="{FF2B5EF4-FFF2-40B4-BE49-F238E27FC236}">
-                <a16:creationId xmlns:a16="http://schemas.microsoft.com/office/drawing/2014/main" id="{D20A7CDA-E8BE-4829-BE60-A174FE1FB232}"/>
+                <a16:creationId xmlns:a16="http://schemas.microsoft.com/office/drawing/2014/main" id="{38F24BA8-08ED-4764-BD88-26AC1CBD3255}"/>
               </a:ext>
             </a:extLst>
           </p:cNvPr>
@@ -9448,7 +9448,7 @@
           <p:cNvPr id="9" name="TextBox 8">
             <a:extLst xmlns:a="http://schemas.openxmlformats.org/drawingml/2006/main">
               <a:ext uri="{FF2B5EF4-FFF2-40B4-BE49-F238E27FC236}">
-                <a16:creationId xmlns:a16="http://schemas.microsoft.com/office/drawing/2014/main" id="{8177C048-0944-49A8-A955-8EA5B0DBC070}"/>
+                <a16:creationId xmlns:a16="http://schemas.microsoft.com/office/drawing/2014/main" id="{CE338D07-34F8-4751-BF4C-F644F0127DF1}"/>
               </a:ext>
             </a:extLst>
           </p:cNvPr>
@@ -9495,7 +9495,7 @@
           <p:cNvPr id="10" name="TextBox 9">
             <a:extLst xmlns:a="http://schemas.openxmlformats.org/drawingml/2006/main">
               <a:ext uri="{FF2B5EF4-FFF2-40B4-BE49-F238E27FC236}">
-                <a16:creationId xmlns:a16="http://schemas.microsoft.com/office/drawing/2014/main" id="{2E2280F9-D657-487B-85C2-41BEDD20AD38}"/>
+                <a16:creationId xmlns:a16="http://schemas.microsoft.com/office/drawing/2014/main" id="{08FB73D4-42CF-4F5D-BB85-87B1BED16081}"/>
               </a:ext>
             </a:extLst>
           </p:cNvPr>
@@ -9542,7 +9542,7 @@
           <p:cNvPr id="11" name="Rounded Rectangle 10">
             <a:extLst xmlns:a="http://schemas.openxmlformats.org/drawingml/2006/main">
               <a:ext uri="{FF2B5EF4-FFF2-40B4-BE49-F238E27FC236}">
-                <a16:creationId xmlns:a16="http://schemas.microsoft.com/office/drawing/2014/main" id="{498D8A2F-6618-4973-9938-05A14245C5DA}"/>
+                <a16:creationId xmlns:a16="http://schemas.microsoft.com/office/drawing/2014/main" id="{1A83FDF3-8E7F-4067-A46B-56B574D48609}"/>
               </a:ext>
             </a:extLst>
           </p:cNvPr>
@@ -9599,7 +9599,7 @@
           <p:cNvPr id="12" name="TextBox 11">
             <a:extLst xmlns:a="http://schemas.openxmlformats.org/drawingml/2006/main">
               <a:ext uri="{FF2B5EF4-FFF2-40B4-BE49-F238E27FC236}">
-                <a16:creationId xmlns:a16="http://schemas.microsoft.com/office/drawing/2014/main" id="{0927CE73-B2EF-4441-9911-FA37767901F0}"/>
+                <a16:creationId xmlns:a16="http://schemas.microsoft.com/office/drawing/2014/main" id="{85D12563-EC04-4133-9328-293FFFF898EC}"/>
               </a:ext>
             </a:extLst>
           </p:cNvPr>
@@ -9646,7 +9646,7 @@
           <p:cNvPr id="13" name="TextBox 12">
             <a:extLst xmlns:a="http://schemas.openxmlformats.org/drawingml/2006/main">
               <a:ext uri="{FF2B5EF4-FFF2-40B4-BE49-F238E27FC236}">
-                <a16:creationId xmlns:a16="http://schemas.microsoft.com/office/drawing/2014/main" id="{F4351D14-EFC6-4A85-93F6-CDD7F123B703}"/>
+                <a16:creationId xmlns:a16="http://schemas.microsoft.com/office/drawing/2014/main" id="{019935A3-8251-4EAE-90B8-63673C577EB2}"/>
               </a:ext>
             </a:extLst>
           </p:cNvPr>
@@ -9693,7 +9693,7 @@
           <p:cNvPr id="14" name="Rounded Rectangle 13">
             <a:extLst xmlns:a="http://schemas.openxmlformats.org/drawingml/2006/main">
               <a:ext uri="{FF2B5EF4-FFF2-40B4-BE49-F238E27FC236}">
-                <a16:creationId xmlns:a16="http://schemas.microsoft.com/office/drawing/2014/main" id="{382DB478-998A-4B77-9368-B038AC64CDFE}"/>
+                <a16:creationId xmlns:a16="http://schemas.microsoft.com/office/drawing/2014/main" id="{2330E7B3-C1DF-451D-9CC8-DB387E6B759C}"/>
               </a:ext>
             </a:extLst>
           </p:cNvPr>
@@ -9750,7 +9750,7 @@
           <p:cNvPr id="15" name="TextBox 14">
             <a:extLst xmlns:a="http://schemas.openxmlformats.org/drawingml/2006/main">
               <a:ext uri="{FF2B5EF4-FFF2-40B4-BE49-F238E27FC236}">
-                <a16:creationId xmlns:a16="http://schemas.microsoft.com/office/drawing/2014/main" id="{7A111212-76C9-4181-B104-0EC847A4648D}"/>
+                <a16:creationId xmlns:a16="http://schemas.microsoft.com/office/drawing/2014/main" id="{FE7E710F-E4EC-40EF-857B-38CAA21FC918}"/>
               </a:ext>
             </a:extLst>
           </p:cNvPr>
@@ -9797,7 +9797,7 @@
           <p:cNvPr id="16" name="TextBox 15">
             <a:extLst xmlns:a="http://schemas.openxmlformats.org/drawingml/2006/main">
               <a:ext uri="{FF2B5EF4-FFF2-40B4-BE49-F238E27FC236}">
-                <a16:creationId xmlns:a16="http://schemas.microsoft.com/office/drawing/2014/main" id="{79140BB6-2827-4FBC-B6EB-066A5C0EEB18}"/>
+                <a16:creationId xmlns:a16="http://schemas.microsoft.com/office/drawing/2014/main" id="{708C87C5-94B4-4BA7-A143-ADC23F1C1471}"/>
               </a:ext>
             </a:extLst>
           </p:cNvPr>
@@ -9844,7 +9844,7 @@
           <p:cNvPr id="17" name="TextBox 16">
             <a:extLst xmlns:a="http://schemas.openxmlformats.org/drawingml/2006/main">
               <a:ext uri="{FF2B5EF4-FFF2-40B4-BE49-F238E27FC236}">
-                <a16:creationId xmlns:a16="http://schemas.microsoft.com/office/drawing/2014/main" id="{CDB3AF9F-CFC4-423D-AB57-1BA55BB0E117}"/>
+                <a16:creationId xmlns:a16="http://schemas.microsoft.com/office/drawing/2014/main" id="{16586D3E-D98F-475B-A0DC-EAF13E793CAD}"/>
               </a:ext>
             </a:extLst>
           </p:cNvPr>
@@ -9891,7 +9891,7 @@
           <p:cNvPr id="18" name="Rounded Rectangle 17">
             <a:extLst xmlns:a="http://schemas.openxmlformats.org/drawingml/2006/main">
               <a:ext uri="{FF2B5EF4-FFF2-40B4-BE49-F238E27FC236}">
-                <a16:creationId xmlns:a16="http://schemas.microsoft.com/office/drawing/2014/main" id="{6CBF7DDC-ECAF-428D-9C6A-C381D7F6FD96}"/>
+                <a16:creationId xmlns:a16="http://schemas.microsoft.com/office/drawing/2014/main" id="{3E791E65-00A5-4913-8712-221DCE54713C}"/>
               </a:ext>
             </a:extLst>
           </p:cNvPr>
@@ -9948,7 +9948,7 @@
           <p:cNvPr id="19" name="TextBox 18">
             <a:extLst xmlns:a="http://schemas.openxmlformats.org/drawingml/2006/main">
               <a:ext uri="{FF2B5EF4-FFF2-40B4-BE49-F238E27FC236}">
-                <a16:creationId xmlns:a16="http://schemas.microsoft.com/office/drawing/2014/main" id="{DB2C0172-C0EB-42BC-8870-AC09C0D8EE63}"/>
+                <a16:creationId xmlns:a16="http://schemas.microsoft.com/office/drawing/2014/main" id="{9AE085B8-A29E-4AFA-8700-61E0180F2AA7}"/>
               </a:ext>
             </a:extLst>
           </p:cNvPr>
@@ -9995,7 +9995,7 @@
           <p:cNvPr id="20" name="TextBox 19">
             <a:extLst xmlns:a="http://schemas.openxmlformats.org/drawingml/2006/main">
               <a:ext uri="{FF2B5EF4-FFF2-40B4-BE49-F238E27FC236}">
-                <a16:creationId xmlns:a16="http://schemas.microsoft.com/office/drawing/2014/main" id="{7074759A-3CEC-4618-BBCC-89706CD06895}"/>
+                <a16:creationId xmlns:a16="http://schemas.microsoft.com/office/drawing/2014/main" id="{99FB7ED9-5191-4974-8F24-A7116448D0E8}"/>
               </a:ext>
             </a:extLst>
           </p:cNvPr>
@@ -10040,7 +10040,7 @@
     </p:spTree>
     <p:extLst>
       <p:ext uri="{BB962C8B-B14F-4D97-AF65-F5344CB8AC3E}">
-        <p14:creationId xmlns:p14="http://schemas.microsoft.com/office/powerpoint/2010/main" val="1836246754"/>
+        <p14:creationId xmlns:p14="http://schemas.microsoft.com/office/powerpoint/2010/main" val="1137567861"/>
       </p:ext>
     </p:extLst>
   </p:cSld>
@@ -10064,7 +10064,7 @@
           <p:cNvPr id="2" name="TextBox 1">
             <a:extLst xmlns:a="http://schemas.openxmlformats.org/drawingml/2006/main">
               <a:ext uri="{FF2B5EF4-FFF2-40B4-BE49-F238E27FC236}">
-                <a16:creationId xmlns:a16="http://schemas.microsoft.com/office/drawing/2014/main" id="{3CAC7267-08B0-4A81-89F1-5426D7C1E664}"/>
+                <a16:creationId xmlns:a16="http://schemas.microsoft.com/office/drawing/2014/main" id="{13F825E6-557D-4AE9-9E37-5ABB8945BCC8}"/>
               </a:ext>
             </a:extLst>
           </p:cNvPr>
@@ -10111,7 +10111,7 @@
           <p:cNvPr id="3" name="TextBox 2">
             <a:extLst xmlns:a="http://schemas.openxmlformats.org/drawingml/2006/main">
               <a:ext uri="{FF2B5EF4-FFF2-40B4-BE49-F238E27FC236}">
-                <a16:creationId xmlns:a16="http://schemas.microsoft.com/office/drawing/2014/main" id="{1AE19E42-9C32-4449-BC57-99EE0ADE59D9}"/>
+                <a16:creationId xmlns:a16="http://schemas.microsoft.com/office/drawing/2014/main" id="{35900332-6C9A-4BD8-8EBC-A3C824E8B976}"/>
               </a:ext>
             </a:extLst>
           </p:cNvPr>
@@ -10158,7 +10158,7 @@
           <p:cNvPr id="4" name="Rectangle 3">
             <a:extLst xmlns:a="http://schemas.openxmlformats.org/drawingml/2006/main">
               <a:ext uri="{FF2B5EF4-FFF2-40B4-BE49-F238E27FC236}">
-                <a16:creationId xmlns:a16="http://schemas.microsoft.com/office/drawing/2014/main" id="{6D5F37D6-0FAE-459A-81DF-665B74FEADE5}"/>
+                <a16:creationId xmlns:a16="http://schemas.microsoft.com/office/drawing/2014/main" id="{461206AA-D9C9-47BE-B42E-B65DC7AC40CD}"/>
               </a:ext>
             </a:extLst>
           </p:cNvPr>
@@ -10213,7 +10213,7 @@
           <p:cNvPr id="5" name="Rectangle 4">
             <a:extLst xmlns:a="http://schemas.openxmlformats.org/drawingml/2006/main">
               <a:ext uri="{FF2B5EF4-FFF2-40B4-BE49-F238E27FC236}">
-                <a16:creationId xmlns:a16="http://schemas.microsoft.com/office/drawing/2014/main" id="{20D7CB4B-1234-40FE-96DD-9BE6B3B13EDE}"/>
+                <a16:creationId xmlns:a16="http://schemas.microsoft.com/office/drawing/2014/main" id="{947EE108-D8DC-4A69-8834-D91542D7A2DA}"/>
               </a:ext>
             </a:extLst>
           </p:cNvPr>
@@ -10268,7 +10268,7 @@
           <p:cNvPr id="6" name="TextBox 5">
             <a:extLst xmlns:a="http://schemas.openxmlformats.org/drawingml/2006/main">
               <a:ext uri="{FF2B5EF4-FFF2-40B4-BE49-F238E27FC236}">
-                <a16:creationId xmlns:a16="http://schemas.microsoft.com/office/drawing/2014/main" id="{8E1F7B41-ECB7-46A1-B330-C67D6FC1B771}"/>
+                <a16:creationId xmlns:a16="http://schemas.microsoft.com/office/drawing/2014/main" id="{05336FE9-B2DD-4A26-9C45-FC27F90A6331}"/>
               </a:ext>
             </a:extLst>
           </p:cNvPr>
@@ -10305,7 +10305,7 @@
                 <a:ea typeface="Aptos"/>
                 <a:cs typeface="Aptos"/>
               </a:rPr>
-              <a:t>Independent public evidence summary · 2026.07.23-12 · 2026-07-22 · Sources: EP3032975B2; 7 O 3341/24</a:t>
+              <a:t>Independent public evidence summary · 2026.07.23-13 · 2026-07-22 · Sources: EP3032975B2; 7 O 3341/24</a:t>
             </a:r>
           </a:p>
         </p:txBody>
@@ -10315,7 +10315,7 @@
           <p:cNvPr id="7" name="TextBox 6">
             <a:extLst xmlns:a="http://schemas.openxmlformats.org/drawingml/2006/main">
               <a:ext uri="{FF2B5EF4-FFF2-40B4-BE49-F238E27FC236}">
-                <a16:creationId xmlns:a16="http://schemas.microsoft.com/office/drawing/2014/main" id="{468302E5-62E4-4636-922A-1B746010FB00}"/>
+                <a16:creationId xmlns:a16="http://schemas.microsoft.com/office/drawing/2014/main" id="{3F450405-E4DD-4833-ACED-1625EBB9B973}"/>
               </a:ext>
             </a:extLst>
           </p:cNvPr>
@@ -10362,7 +10362,7 @@
           <p:cNvPr id="8" name="TextBox 7">
             <a:extLst xmlns:a="http://schemas.openxmlformats.org/drawingml/2006/main">
               <a:ext uri="{FF2B5EF4-FFF2-40B4-BE49-F238E27FC236}">
-                <a16:creationId xmlns:a16="http://schemas.microsoft.com/office/drawing/2014/main" id="{064F2E72-E11B-4BC8-BAB2-BD3FE59A6F62}"/>
+                <a16:creationId xmlns:a16="http://schemas.microsoft.com/office/drawing/2014/main" id="{BBD3003F-F95A-4A93-BB10-D4215701F099}"/>
               </a:ext>
             </a:extLst>
           </p:cNvPr>
@@ -10409,7 +10409,7 @@
           <p:cNvPr id="9" name="TextBox 8">
             <a:extLst xmlns:a="http://schemas.openxmlformats.org/drawingml/2006/main">
               <a:ext uri="{FF2B5EF4-FFF2-40B4-BE49-F238E27FC236}">
-                <a16:creationId xmlns:a16="http://schemas.microsoft.com/office/drawing/2014/main" id="{1A31A9C9-BB1F-47EE-BA52-32E8DB21D29A}"/>
+                <a16:creationId xmlns:a16="http://schemas.microsoft.com/office/drawing/2014/main" id="{2932584C-2594-4DB2-B3B7-CEBB970BE1E0}"/>
               </a:ext>
             </a:extLst>
           </p:cNvPr>
@@ -10506,7 +10506,7 @@
           <p:cNvPr id="10" name="Rounded Rectangle 9">
             <a:extLst xmlns:a="http://schemas.openxmlformats.org/drawingml/2006/main">
               <a:ext uri="{FF2B5EF4-FFF2-40B4-BE49-F238E27FC236}">
-                <a16:creationId xmlns:a16="http://schemas.microsoft.com/office/drawing/2014/main" id="{9A9A60FF-3BFD-47E2-8506-2F1F2F801C82}"/>
+                <a16:creationId xmlns:a16="http://schemas.microsoft.com/office/drawing/2014/main" id="{702248EC-FCCC-4B7A-9522-3B405B4A5FCB}"/>
               </a:ext>
             </a:extLst>
           </p:cNvPr>
@@ -10563,7 +10563,7 @@
           <p:cNvPr id="11" name="TextBox 10">
             <a:extLst xmlns:a="http://schemas.openxmlformats.org/drawingml/2006/main">
               <a:ext uri="{FF2B5EF4-FFF2-40B4-BE49-F238E27FC236}">
-                <a16:creationId xmlns:a16="http://schemas.microsoft.com/office/drawing/2014/main" id="{D5F2789B-7395-42A4-A5F9-7A3484AB0473}"/>
+                <a16:creationId xmlns:a16="http://schemas.microsoft.com/office/drawing/2014/main" id="{9FB30199-7931-4DBD-985C-1D0EF0ABC3B5}"/>
               </a:ext>
             </a:extLst>
           </p:cNvPr>
@@ -10610,7 +10610,7 @@
           <p:cNvPr id="12" name="TextBox 11">
             <a:extLst xmlns:a="http://schemas.openxmlformats.org/drawingml/2006/main">
               <a:ext uri="{FF2B5EF4-FFF2-40B4-BE49-F238E27FC236}">
-                <a16:creationId xmlns:a16="http://schemas.microsoft.com/office/drawing/2014/main" id="{5393ECF9-BF82-4022-9089-28DDE0AA608E}"/>
+                <a16:creationId xmlns:a16="http://schemas.microsoft.com/office/drawing/2014/main" id="{581FC800-44F5-4BEA-BFF5-8E16C0F07F2A}"/>
               </a:ext>
             </a:extLst>
           </p:cNvPr>
@@ -10655,7 +10655,7 @@
     </p:spTree>
     <p:extLst>
       <p:ext uri="{BB962C8B-B14F-4D97-AF65-F5344CB8AC3E}">
-        <p14:creationId xmlns:p14="http://schemas.microsoft.com/office/powerpoint/2010/main" val="1088552265"/>
+        <p14:creationId xmlns:p14="http://schemas.microsoft.com/office/powerpoint/2010/main" val="395112114"/>
       </p:ext>
     </p:extLst>
   </p:cSld>
@@ -10679,7 +10679,7 @@
           <p:cNvPr id="2" name="TextBox 1">
             <a:extLst xmlns:a="http://schemas.openxmlformats.org/drawingml/2006/main">
               <a:ext uri="{FF2B5EF4-FFF2-40B4-BE49-F238E27FC236}">
-                <a16:creationId xmlns:a16="http://schemas.microsoft.com/office/drawing/2014/main" id="{346B059B-A376-4819-8EB7-F61B6E3A9478}"/>
+                <a16:creationId xmlns:a16="http://schemas.microsoft.com/office/drawing/2014/main" id="{25CF5430-9968-4A5B-952C-0970F3EF06DD}"/>
               </a:ext>
             </a:extLst>
           </p:cNvPr>
@@ -10726,7 +10726,7 @@
           <p:cNvPr id="3" name="TextBox 2">
             <a:extLst xmlns:a="http://schemas.openxmlformats.org/drawingml/2006/main">
               <a:ext uri="{FF2B5EF4-FFF2-40B4-BE49-F238E27FC236}">
-                <a16:creationId xmlns:a16="http://schemas.microsoft.com/office/drawing/2014/main" id="{4E50D58D-7738-487A-87BD-621373DA3993}"/>
+                <a16:creationId xmlns:a16="http://schemas.microsoft.com/office/drawing/2014/main" id="{E6EE44B5-7A2E-4BA8-AAFC-D04BCEA0B4A2}"/>
               </a:ext>
             </a:extLst>
           </p:cNvPr>
@@ -10773,7 +10773,7 @@
           <p:cNvPr id="4" name="Rectangle 3">
             <a:extLst xmlns:a="http://schemas.openxmlformats.org/drawingml/2006/main">
               <a:ext uri="{FF2B5EF4-FFF2-40B4-BE49-F238E27FC236}">
-                <a16:creationId xmlns:a16="http://schemas.microsoft.com/office/drawing/2014/main" id="{6EEC6D59-FCC6-45CF-B217-2F7AFD029F6C}"/>
+                <a16:creationId xmlns:a16="http://schemas.microsoft.com/office/drawing/2014/main" id="{12557913-26DF-4B71-A9A2-E35341D7383F}"/>
               </a:ext>
             </a:extLst>
           </p:cNvPr>
@@ -10828,7 +10828,7 @@
           <p:cNvPr id="5" name="Rectangle 4">
             <a:extLst xmlns:a="http://schemas.openxmlformats.org/drawingml/2006/main">
               <a:ext uri="{FF2B5EF4-FFF2-40B4-BE49-F238E27FC236}">
-                <a16:creationId xmlns:a16="http://schemas.microsoft.com/office/drawing/2014/main" id="{D6F841CF-7470-43E9-AAF9-3293188B8B6D}"/>
+                <a16:creationId xmlns:a16="http://schemas.microsoft.com/office/drawing/2014/main" id="{2BDD9202-70F0-4329-B2B4-4717B364025C}"/>
               </a:ext>
             </a:extLst>
           </p:cNvPr>
@@ -10883,7 +10883,7 @@
           <p:cNvPr id="6" name="TextBox 5">
             <a:extLst xmlns:a="http://schemas.openxmlformats.org/drawingml/2006/main">
               <a:ext uri="{FF2B5EF4-FFF2-40B4-BE49-F238E27FC236}">
-                <a16:creationId xmlns:a16="http://schemas.microsoft.com/office/drawing/2014/main" id="{30A6F2BE-ACE6-4F8C-964C-8626B7A7222F}"/>
+                <a16:creationId xmlns:a16="http://schemas.microsoft.com/office/drawing/2014/main" id="{57CFA4CC-5E30-4D16-9A38-D06E9A21EC3C}"/>
               </a:ext>
             </a:extLst>
           </p:cNvPr>
@@ -10920,7 +10920,7 @@
                 <a:ea typeface="Aptos"/>
                 <a:cs typeface="Aptos"/>
               </a:rPr>
-              <a:t>Independent public evidence summary · 2026.07.23-12 · 2026-07-22 · Sources: Market-values; IMARC; GVR; Fortune</a:t>
+              <a:t>Independent public evidence summary · 2026.07.23-13 · 2026-07-22 · Sources: Market-values; IMARC; GVR; Fortune</a:t>
             </a:r>
           </a:p>
         </p:txBody>
@@ -10930,7 +10930,7 @@
           <p:cNvPr id="7" name="TextBox 6">
             <a:extLst xmlns:a="http://schemas.openxmlformats.org/drawingml/2006/main">
               <a:ext uri="{FF2B5EF4-FFF2-40B4-BE49-F238E27FC236}">
-                <a16:creationId xmlns:a16="http://schemas.microsoft.com/office/drawing/2014/main" id="{D260817C-FC7C-47FB-8D41-8B7CFB606D06}"/>
+                <a16:creationId xmlns:a16="http://schemas.microsoft.com/office/drawing/2014/main" id="{83CC3D3F-BDF9-401A-9915-D8AE2F827565}"/>
               </a:ext>
             </a:extLst>
           </p:cNvPr>
@@ -10977,7 +10977,7 @@
           <p:cNvPr id="8" name="Rounded Rectangle 7">
             <a:extLst xmlns:a="http://schemas.openxmlformats.org/drawingml/2006/main">
               <a:ext uri="{FF2B5EF4-FFF2-40B4-BE49-F238E27FC236}">
-                <a16:creationId xmlns:a16="http://schemas.microsoft.com/office/drawing/2014/main" id="{51B5C81F-CF1A-406F-9B66-98CBAA843577}"/>
+                <a16:creationId xmlns:a16="http://schemas.microsoft.com/office/drawing/2014/main" id="{C563F0B5-0CFC-48B7-A960-E90F8EA2ADCC}"/>
               </a:ext>
             </a:extLst>
           </p:cNvPr>
@@ -11034,7 +11034,7 @@
           <p:cNvPr id="9" name="TextBox 8">
             <a:extLst xmlns:a="http://schemas.openxmlformats.org/drawingml/2006/main">
               <a:ext uri="{FF2B5EF4-FFF2-40B4-BE49-F238E27FC236}">
-                <a16:creationId xmlns:a16="http://schemas.microsoft.com/office/drawing/2014/main" id="{10F1331A-9D6A-4CC7-B765-83B4D4E7C97E}"/>
+                <a16:creationId xmlns:a16="http://schemas.microsoft.com/office/drawing/2014/main" id="{A9D54879-7E42-45F2-9546-F9D6FA1D44B4}"/>
               </a:ext>
             </a:extLst>
           </p:cNvPr>
@@ -11081,7 +11081,7 @@
           <p:cNvPr id="10" name="TextBox 9">
             <a:extLst xmlns:a="http://schemas.openxmlformats.org/drawingml/2006/main">
               <a:ext uri="{FF2B5EF4-FFF2-40B4-BE49-F238E27FC236}">
-                <a16:creationId xmlns:a16="http://schemas.microsoft.com/office/drawing/2014/main" id="{7A4A68DB-D0C9-4F1A-87B4-BF2893CDD1F5}"/>
+                <a16:creationId xmlns:a16="http://schemas.microsoft.com/office/drawing/2014/main" id="{3CA2D109-023F-4618-85B2-EE54FB314B85}"/>
               </a:ext>
             </a:extLst>
           </p:cNvPr>
@@ -11128,7 +11128,7 @@
           <p:cNvPr id="11" name="Rounded Rectangle 10">
             <a:extLst xmlns:a="http://schemas.openxmlformats.org/drawingml/2006/main">
               <a:ext uri="{FF2B5EF4-FFF2-40B4-BE49-F238E27FC236}">
-                <a16:creationId xmlns:a16="http://schemas.microsoft.com/office/drawing/2014/main" id="{1A0F89FB-2B3C-4B23-B41D-F073C1DBC721}"/>
+                <a16:creationId xmlns:a16="http://schemas.microsoft.com/office/drawing/2014/main" id="{DE68CB34-6EBE-4410-9081-AD0CC1DB6A69}"/>
               </a:ext>
             </a:extLst>
           </p:cNvPr>
@@ -11185,7 +11185,7 @@
           <p:cNvPr id="12" name="TextBox 11">
             <a:extLst xmlns:a="http://schemas.openxmlformats.org/drawingml/2006/main">
               <a:ext uri="{FF2B5EF4-FFF2-40B4-BE49-F238E27FC236}">
-                <a16:creationId xmlns:a16="http://schemas.microsoft.com/office/drawing/2014/main" id="{940D7415-F714-4FEE-BA97-88E8D8321B9E}"/>
+                <a16:creationId xmlns:a16="http://schemas.microsoft.com/office/drawing/2014/main" id="{42D39270-BD8C-4DAD-9D27-4D6554DC6C11}"/>
               </a:ext>
             </a:extLst>
           </p:cNvPr>
@@ -11232,7 +11232,7 @@
           <p:cNvPr id="13" name="TextBox 12">
             <a:extLst xmlns:a="http://schemas.openxmlformats.org/drawingml/2006/main">
               <a:ext uri="{FF2B5EF4-FFF2-40B4-BE49-F238E27FC236}">
-                <a16:creationId xmlns:a16="http://schemas.microsoft.com/office/drawing/2014/main" id="{2B527558-70D0-495F-98EA-AC326FD385B4}"/>
+                <a16:creationId xmlns:a16="http://schemas.microsoft.com/office/drawing/2014/main" id="{661F0302-1E64-45B5-88CE-C854CEF2539E}"/>
               </a:ext>
             </a:extLst>
           </p:cNvPr>
@@ -11279,7 +11279,7 @@
           <p:cNvPr id="14" name="Rounded Rectangle 13">
             <a:extLst xmlns:a="http://schemas.openxmlformats.org/drawingml/2006/main">
               <a:ext uri="{FF2B5EF4-FFF2-40B4-BE49-F238E27FC236}">
-                <a16:creationId xmlns:a16="http://schemas.microsoft.com/office/drawing/2014/main" id="{0F9C8B04-BF3A-4415-ADBA-C7317DED4857}"/>
+                <a16:creationId xmlns:a16="http://schemas.microsoft.com/office/drawing/2014/main" id="{546B2CFF-DF58-48FD-A59C-72E6148256F9}"/>
               </a:ext>
             </a:extLst>
           </p:cNvPr>
@@ -11336,7 +11336,7 @@
           <p:cNvPr id="15" name="TextBox 14">
             <a:extLst xmlns:a="http://schemas.openxmlformats.org/drawingml/2006/main">
               <a:ext uri="{FF2B5EF4-FFF2-40B4-BE49-F238E27FC236}">
-                <a16:creationId xmlns:a16="http://schemas.microsoft.com/office/drawing/2014/main" id="{BF45A1DF-9876-4691-AD9A-9021C5B6CBBB}"/>
+                <a16:creationId xmlns:a16="http://schemas.microsoft.com/office/drawing/2014/main" id="{64591245-16B2-4DA6-A119-8E5B43A47F7C}"/>
               </a:ext>
             </a:extLst>
           </p:cNvPr>
@@ -11383,7 +11383,7 @@
           <p:cNvPr id="16" name="TextBox 15">
             <a:extLst xmlns:a="http://schemas.openxmlformats.org/drawingml/2006/main">
               <a:ext uri="{FF2B5EF4-FFF2-40B4-BE49-F238E27FC236}">
-                <a16:creationId xmlns:a16="http://schemas.microsoft.com/office/drawing/2014/main" id="{A6D695C5-2596-4EF1-AA7C-EFB53A6B59E8}"/>
+                <a16:creationId xmlns:a16="http://schemas.microsoft.com/office/drawing/2014/main" id="{6577C386-056A-40B5-99C8-2FA127A4DBC8}"/>
               </a:ext>
             </a:extLst>
           </p:cNvPr>
@@ -11430,7 +11430,7 @@
           <p:cNvPr id="17" name="TextBox 16">
             <a:extLst xmlns:a="http://schemas.openxmlformats.org/drawingml/2006/main">
               <a:ext uri="{FF2B5EF4-FFF2-40B4-BE49-F238E27FC236}">
-                <a16:creationId xmlns:a16="http://schemas.microsoft.com/office/drawing/2014/main" id="{9D782440-9927-4166-BA04-44C13E2CEB93}"/>
+                <a16:creationId xmlns:a16="http://schemas.microsoft.com/office/drawing/2014/main" id="{9996D4F7-2C29-4D08-8994-DAB3C9C69202}"/>
               </a:ext>
             </a:extLst>
           </p:cNvPr>
@@ -11477,7 +11477,7 @@
           <p:cNvPr id="18" name="Rounded Rectangle 17">
             <a:extLst xmlns:a="http://schemas.openxmlformats.org/drawingml/2006/main">
               <a:ext uri="{FF2B5EF4-FFF2-40B4-BE49-F238E27FC236}">
-                <a16:creationId xmlns:a16="http://schemas.microsoft.com/office/drawing/2014/main" id="{EB37BCDC-1BCA-4648-883E-78F72D6BF0EF}"/>
+                <a16:creationId xmlns:a16="http://schemas.microsoft.com/office/drawing/2014/main" id="{AB1BB00D-D1FB-4E7C-A194-DC6D25BD1F5B}"/>
               </a:ext>
             </a:extLst>
           </p:cNvPr>
@@ -11534,7 +11534,7 @@
           <p:cNvPr id="19" name="TextBox 18">
             <a:extLst xmlns:a="http://schemas.openxmlformats.org/drawingml/2006/main">
               <a:ext uri="{FF2B5EF4-FFF2-40B4-BE49-F238E27FC236}">
-                <a16:creationId xmlns:a16="http://schemas.microsoft.com/office/drawing/2014/main" id="{398898A8-1F18-4ADB-8723-28B1B510BEA1}"/>
+                <a16:creationId xmlns:a16="http://schemas.microsoft.com/office/drawing/2014/main" id="{61AAE06A-D102-4C19-B774-9D0BEB11D748}"/>
               </a:ext>
             </a:extLst>
           </p:cNvPr>
@@ -11581,7 +11581,7 @@
           <p:cNvPr id="20" name="TextBox 19">
             <a:extLst xmlns:a="http://schemas.openxmlformats.org/drawingml/2006/main">
               <a:ext uri="{FF2B5EF4-FFF2-40B4-BE49-F238E27FC236}">
-                <a16:creationId xmlns:a16="http://schemas.microsoft.com/office/drawing/2014/main" id="{B8AEF547-9C2C-46FA-9BB7-86F89051BE68}"/>
+                <a16:creationId xmlns:a16="http://schemas.microsoft.com/office/drawing/2014/main" id="{947D2A6C-70B1-4C5B-84FC-B694DCA134ED}"/>
               </a:ext>
             </a:extLst>
           </p:cNvPr>
@@ -11626,7 +11626,7 @@
     </p:spTree>
     <p:extLst>
       <p:ext uri="{BB962C8B-B14F-4D97-AF65-F5344CB8AC3E}">
-        <p14:creationId xmlns:p14="http://schemas.microsoft.com/office/powerpoint/2010/main" val="585164574"/>
+        <p14:creationId xmlns:p14="http://schemas.microsoft.com/office/powerpoint/2010/main" val="1662579053"/>
       </p:ext>
     </p:extLst>
   </p:cSld>
@@ -11650,7 +11650,7 @@
           <p:cNvPr id="2" name="TextBox 1">
             <a:extLst xmlns:a="http://schemas.openxmlformats.org/drawingml/2006/main">
               <a:ext uri="{FF2B5EF4-FFF2-40B4-BE49-F238E27FC236}">
-                <a16:creationId xmlns:a16="http://schemas.microsoft.com/office/drawing/2014/main" id="{98B466B6-7E3B-418F-88A3-84E506D9AEF8}"/>
+                <a16:creationId xmlns:a16="http://schemas.microsoft.com/office/drawing/2014/main" id="{B53E72B7-EEEE-4DC9-B87B-8F531BEBA330}"/>
               </a:ext>
             </a:extLst>
           </p:cNvPr>
@@ -11697,7 +11697,7 @@
           <p:cNvPr id="3" name="TextBox 2">
             <a:extLst xmlns:a="http://schemas.openxmlformats.org/drawingml/2006/main">
               <a:ext uri="{FF2B5EF4-FFF2-40B4-BE49-F238E27FC236}">
-                <a16:creationId xmlns:a16="http://schemas.microsoft.com/office/drawing/2014/main" id="{31794156-DCA9-4312-A51A-B79DC63DD822}"/>
+                <a16:creationId xmlns:a16="http://schemas.microsoft.com/office/drawing/2014/main" id="{75304C33-3254-4D8B-9331-5D520729034F}"/>
               </a:ext>
             </a:extLst>
           </p:cNvPr>
@@ -11744,7 +11744,7 @@
           <p:cNvPr id="4" name="Rectangle 3">
             <a:extLst xmlns:a="http://schemas.openxmlformats.org/drawingml/2006/main">
               <a:ext uri="{FF2B5EF4-FFF2-40B4-BE49-F238E27FC236}">
-                <a16:creationId xmlns:a16="http://schemas.microsoft.com/office/drawing/2014/main" id="{27BB9F33-4CBA-4B83-90C8-805D144DE328}"/>
+                <a16:creationId xmlns:a16="http://schemas.microsoft.com/office/drawing/2014/main" id="{9588E3EF-35CB-4E92-AFB1-EE96EEBEA9FE}"/>
               </a:ext>
             </a:extLst>
           </p:cNvPr>
@@ -11799,7 +11799,7 @@
           <p:cNvPr id="5" name="Rectangle 4">
             <a:extLst xmlns:a="http://schemas.openxmlformats.org/drawingml/2006/main">
               <a:ext uri="{FF2B5EF4-FFF2-40B4-BE49-F238E27FC236}">
-                <a16:creationId xmlns:a16="http://schemas.microsoft.com/office/drawing/2014/main" id="{E7A1E794-162D-4935-944E-AF380214CA1F}"/>
+                <a16:creationId xmlns:a16="http://schemas.microsoft.com/office/drawing/2014/main" id="{014DDC0E-A7DE-4152-8F7C-96FC511D3712}"/>
               </a:ext>
             </a:extLst>
           </p:cNvPr>
@@ -11854,7 +11854,7 @@
           <p:cNvPr id="6" name="TextBox 5">
             <a:extLst xmlns:a="http://schemas.openxmlformats.org/drawingml/2006/main">
               <a:ext uri="{FF2B5EF4-FFF2-40B4-BE49-F238E27FC236}">
-                <a16:creationId xmlns:a16="http://schemas.microsoft.com/office/drawing/2014/main" id="{2C063D1D-065B-4EFF-8333-C64B51F92F08}"/>
+                <a16:creationId xmlns:a16="http://schemas.microsoft.com/office/drawing/2014/main" id="{57EF61BD-B709-44F7-A34E-FF15FA607E90}"/>
               </a:ext>
             </a:extLst>
           </p:cNvPr>
@@ -11891,7 +11891,7 @@
                 <a:ea typeface="Aptos"/>
                 <a:cs typeface="Aptos"/>
               </a:rPr>
-              <a:t>Independent public evidence summary · 2026.07.23-12 · 2026-07-22 · Sources: WIPO licensing; WIPO IP Finance</a:t>
+              <a:t>Independent public evidence summary · 2026.07.23-13 · 2026-07-22 · Sources: WIPO licensing; WIPO IP Finance</a:t>
             </a:r>
           </a:p>
         </p:txBody>
@@ -11901,7 +11901,7 @@
           <p:cNvPr id="7" name="TextBox 6">
             <a:extLst xmlns:a="http://schemas.openxmlformats.org/drawingml/2006/main">
               <a:ext uri="{FF2B5EF4-FFF2-40B4-BE49-F238E27FC236}">
-                <a16:creationId xmlns:a16="http://schemas.microsoft.com/office/drawing/2014/main" id="{99525BEC-EFB0-40DD-8E8C-8DCB2E5BA25E}"/>
+                <a16:creationId xmlns:a16="http://schemas.microsoft.com/office/drawing/2014/main" id="{F2E052C2-7964-46E0-9091-93462EAC7B61}"/>
               </a:ext>
             </a:extLst>
           </p:cNvPr>
@@ -11948,7 +11948,7 @@
           <p:cNvPr id="8" name="TextBox 7">
             <a:extLst xmlns:a="http://schemas.openxmlformats.org/drawingml/2006/main">
               <a:ext uri="{FF2B5EF4-FFF2-40B4-BE49-F238E27FC236}">
-                <a16:creationId xmlns:a16="http://schemas.microsoft.com/office/drawing/2014/main" id="{D232D389-6EF4-4E4E-B151-869F9DDBD32E}"/>
+                <a16:creationId xmlns:a16="http://schemas.microsoft.com/office/drawing/2014/main" id="{A202F50D-A089-4BE5-B9C5-3108AFD8576B}"/>
               </a:ext>
             </a:extLst>
           </p:cNvPr>
@@ -11995,7 +11995,7 @@
           <p:cNvPr id="9" name="TextBox 8">
             <a:extLst xmlns:a="http://schemas.openxmlformats.org/drawingml/2006/main">
               <a:ext uri="{FF2B5EF4-FFF2-40B4-BE49-F238E27FC236}">
-                <a16:creationId xmlns:a16="http://schemas.microsoft.com/office/drawing/2014/main" id="{1F683E69-60D4-42C6-9E24-68ABEDFD4EAE}"/>
+                <a16:creationId xmlns:a16="http://schemas.microsoft.com/office/drawing/2014/main" id="{1159623E-9050-427A-8D0C-67A925AC2CE2}"/>
               </a:ext>
             </a:extLst>
           </p:cNvPr>
@@ -12092,7 +12092,7 @@
           <p:cNvPr id="10" name="Rounded Rectangle 9">
             <a:extLst xmlns:a="http://schemas.openxmlformats.org/drawingml/2006/main">
               <a:ext uri="{FF2B5EF4-FFF2-40B4-BE49-F238E27FC236}">
-                <a16:creationId xmlns:a16="http://schemas.microsoft.com/office/drawing/2014/main" id="{B2A0B7C5-0190-4464-A8C3-A960E2B9FF9B}"/>
+                <a16:creationId xmlns:a16="http://schemas.microsoft.com/office/drawing/2014/main" id="{03B51D91-936D-43A9-85E0-EC3D51B60416}"/>
               </a:ext>
             </a:extLst>
           </p:cNvPr>
@@ -12149,7 +12149,7 @@
           <p:cNvPr id="11" name="TextBox 10">
             <a:extLst xmlns:a="http://schemas.openxmlformats.org/drawingml/2006/main">
               <a:ext uri="{FF2B5EF4-FFF2-40B4-BE49-F238E27FC236}">
-                <a16:creationId xmlns:a16="http://schemas.microsoft.com/office/drawing/2014/main" id="{9B7B2870-1C5C-4E18-BA86-1C6C5F997F9F}"/>
+                <a16:creationId xmlns:a16="http://schemas.microsoft.com/office/drawing/2014/main" id="{25BC956E-4AEB-472A-B53A-68AD50E0BA18}"/>
               </a:ext>
             </a:extLst>
           </p:cNvPr>
@@ -12196,7 +12196,7 @@
           <p:cNvPr id="12" name="TextBox 11">
             <a:extLst xmlns:a="http://schemas.openxmlformats.org/drawingml/2006/main">
               <a:ext uri="{FF2B5EF4-FFF2-40B4-BE49-F238E27FC236}">
-                <a16:creationId xmlns:a16="http://schemas.microsoft.com/office/drawing/2014/main" id="{48BBF761-D95B-47FD-BE65-A1CCC61085CE}"/>
+                <a16:creationId xmlns:a16="http://schemas.microsoft.com/office/drawing/2014/main" id="{D42E3B00-B48D-4CB9-B7F6-F4FA56142A65}"/>
               </a:ext>
             </a:extLst>
           </p:cNvPr>
@@ -12241,7 +12241,7 @@
     </p:spTree>
     <p:extLst>
       <p:ext uri="{BB962C8B-B14F-4D97-AF65-F5344CB8AC3E}">
-        <p14:creationId xmlns:p14="http://schemas.microsoft.com/office/powerpoint/2010/main" val="2020093747"/>
+        <p14:creationId xmlns:p14="http://schemas.microsoft.com/office/powerpoint/2010/main" val="1448910148"/>
       </p:ext>
     </p:extLst>
   </p:cSld>
@@ -12265,7 +12265,7 @@
           <p:cNvPr id="2" name="TextBox 1">
             <a:extLst xmlns:a="http://schemas.openxmlformats.org/drawingml/2006/main">
               <a:ext uri="{FF2B5EF4-FFF2-40B4-BE49-F238E27FC236}">
-                <a16:creationId xmlns:a16="http://schemas.microsoft.com/office/drawing/2014/main" id="{8F8E051E-4BEE-4CD5-82E6-0907EF292AB0}"/>
+                <a16:creationId xmlns:a16="http://schemas.microsoft.com/office/drawing/2014/main" id="{A7AA2E98-8F37-4B51-9705-7AAF249E5671}"/>
               </a:ext>
             </a:extLst>
           </p:cNvPr>
@@ -12312,7 +12312,7 @@
           <p:cNvPr id="3" name="TextBox 2">
             <a:extLst xmlns:a="http://schemas.openxmlformats.org/drawingml/2006/main">
               <a:ext uri="{FF2B5EF4-FFF2-40B4-BE49-F238E27FC236}">
-                <a16:creationId xmlns:a16="http://schemas.microsoft.com/office/drawing/2014/main" id="{7A06E2D3-6BB6-4177-A79A-F643D5748981}"/>
+                <a16:creationId xmlns:a16="http://schemas.microsoft.com/office/drawing/2014/main" id="{033DB41C-F3EF-4DFA-A6B4-DA740A2AC6DF}"/>
               </a:ext>
             </a:extLst>
           </p:cNvPr>
@@ -12359,7 +12359,7 @@
           <p:cNvPr id="4" name="Rectangle 3">
             <a:extLst xmlns:a="http://schemas.openxmlformats.org/drawingml/2006/main">
               <a:ext uri="{FF2B5EF4-FFF2-40B4-BE49-F238E27FC236}">
-                <a16:creationId xmlns:a16="http://schemas.microsoft.com/office/drawing/2014/main" id="{56F69209-BB69-497F-AA10-BEA72BEDD3DF}"/>
+                <a16:creationId xmlns:a16="http://schemas.microsoft.com/office/drawing/2014/main" id="{AAABD353-05A7-4BEB-803B-C3F4A25E1113}"/>
               </a:ext>
             </a:extLst>
           </p:cNvPr>
@@ -12414,7 +12414,7 @@
           <p:cNvPr id="5" name="Rectangle 4">
             <a:extLst xmlns:a="http://schemas.openxmlformats.org/drawingml/2006/main">
               <a:ext uri="{FF2B5EF4-FFF2-40B4-BE49-F238E27FC236}">
-                <a16:creationId xmlns:a16="http://schemas.microsoft.com/office/drawing/2014/main" id="{D51C76DA-3CD4-4A33-9841-0A5D4C76C5B5}"/>
+                <a16:creationId xmlns:a16="http://schemas.microsoft.com/office/drawing/2014/main" id="{34BB8874-F684-4F23-94E5-5369AA934417}"/>
               </a:ext>
             </a:extLst>
           </p:cNvPr>
@@ -12469,7 +12469,7 @@
           <p:cNvPr id="6" name="TextBox 5">
             <a:extLst xmlns:a="http://schemas.openxmlformats.org/drawingml/2006/main">
               <a:ext uri="{FF2B5EF4-FFF2-40B4-BE49-F238E27FC236}">
-                <a16:creationId xmlns:a16="http://schemas.microsoft.com/office/drawing/2014/main" id="{3E02C089-F4D9-4D25-BF13-0C1A6B041BC5}"/>
+                <a16:creationId xmlns:a16="http://schemas.microsoft.com/office/drawing/2014/main" id="{D70E3795-C869-4A97-9170-9A5A492D0846}"/>
               </a:ext>
             </a:extLst>
           </p:cNvPr>
@@ -12506,7 +12506,7 @@
                 <a:ea typeface="Aptos"/>
                 <a:cs typeface="Aptos"/>
               </a:rPr>
-              <a:t>Independent public evidence summary · 2026.07.23-12 · 2026-07-22 · Sources: Evidence Register; EPO; WIPO</a:t>
+              <a:t>Independent public evidence summary · 2026.07.23-13 · 2026-07-22 · Sources: Evidence Register; EPO; WIPO</a:t>
             </a:r>
           </a:p>
         </p:txBody>
@@ -12516,7 +12516,7 @@
           <p:cNvPr id="7" name="TextBox 6">
             <a:extLst xmlns:a="http://schemas.openxmlformats.org/drawingml/2006/main">
               <a:ext uri="{FF2B5EF4-FFF2-40B4-BE49-F238E27FC236}">
-                <a16:creationId xmlns:a16="http://schemas.microsoft.com/office/drawing/2014/main" id="{9E7CAF89-85EB-4649-A834-63B087C26FA5}"/>
+                <a16:creationId xmlns:a16="http://schemas.microsoft.com/office/drawing/2014/main" id="{441038D8-2F9C-4F7A-81B3-A130E5A94625}"/>
               </a:ext>
             </a:extLst>
           </p:cNvPr>
@@ -13003,7 +13003,7 @@
           <p:cNvPr id="9" name="TextBox 8">
             <a:extLst xmlns:a="http://schemas.openxmlformats.org/drawingml/2006/main">
               <a:ext uri="{FF2B5EF4-FFF2-40B4-BE49-F238E27FC236}">
-                <a16:creationId xmlns:a16="http://schemas.microsoft.com/office/drawing/2014/main" id="{C5D5D81A-CFC4-493F-8EF5-4DBD33363989}"/>
+                <a16:creationId xmlns:a16="http://schemas.microsoft.com/office/drawing/2014/main" id="{F9F29981-7E12-4EFE-94E9-610DB10C1401}"/>
               </a:ext>
             </a:extLst>
           </p:cNvPr>
@@ -13048,7 +13048,7 @@
     </p:spTree>
     <p:extLst>
       <p:ext uri="{BB962C8B-B14F-4D97-AF65-F5344CB8AC3E}">
-        <p14:creationId xmlns:p14="http://schemas.microsoft.com/office/powerpoint/2010/main" val="425300615"/>
+        <p14:creationId xmlns:p14="http://schemas.microsoft.com/office/powerpoint/2010/main" val="479061843"/>
       </p:ext>
     </p:extLst>
   </p:cSld>
@@ -13072,7 +13072,7 @@
           <p:cNvPr id="2" name="TextBox 1">
             <a:extLst xmlns:a="http://schemas.openxmlformats.org/drawingml/2006/main">
               <a:ext uri="{FF2B5EF4-FFF2-40B4-BE49-F238E27FC236}">
-                <a16:creationId xmlns:a16="http://schemas.microsoft.com/office/drawing/2014/main" id="{AE860D33-E4D2-401F-858C-4D2AF4AC1384}"/>
+                <a16:creationId xmlns:a16="http://schemas.microsoft.com/office/drawing/2014/main" id="{5F94E844-CF78-46AA-8509-674441119B58}"/>
               </a:ext>
             </a:extLst>
           </p:cNvPr>
@@ -13119,7 +13119,7 @@
           <p:cNvPr id="3" name="TextBox 2">
             <a:extLst xmlns:a="http://schemas.openxmlformats.org/drawingml/2006/main">
               <a:ext uri="{FF2B5EF4-FFF2-40B4-BE49-F238E27FC236}">
-                <a16:creationId xmlns:a16="http://schemas.microsoft.com/office/drawing/2014/main" id="{CFE3F5AF-9E61-4E03-B006-E83ED4F46E3C}"/>
+                <a16:creationId xmlns:a16="http://schemas.microsoft.com/office/drawing/2014/main" id="{CFB31A71-F4AF-41D8-A3BA-7130A0ED675D}"/>
               </a:ext>
             </a:extLst>
           </p:cNvPr>
@@ -13166,7 +13166,7 @@
           <p:cNvPr id="4" name="Rectangle 3">
             <a:extLst xmlns:a="http://schemas.openxmlformats.org/drawingml/2006/main">
               <a:ext uri="{FF2B5EF4-FFF2-40B4-BE49-F238E27FC236}">
-                <a16:creationId xmlns:a16="http://schemas.microsoft.com/office/drawing/2014/main" id="{289B37EE-7F62-4E9B-A099-41FCA25854F3}"/>
+                <a16:creationId xmlns:a16="http://schemas.microsoft.com/office/drawing/2014/main" id="{06F66E5E-CB1D-4CBF-8F59-5B5C30CC03E1}"/>
               </a:ext>
             </a:extLst>
           </p:cNvPr>
@@ -13221,7 +13221,7 @@
           <p:cNvPr id="5" name="Rectangle 4">
             <a:extLst xmlns:a="http://schemas.openxmlformats.org/drawingml/2006/main">
               <a:ext uri="{FF2B5EF4-FFF2-40B4-BE49-F238E27FC236}">
-                <a16:creationId xmlns:a16="http://schemas.microsoft.com/office/drawing/2014/main" id="{6352430C-DDD0-4A55-931D-187FC94EC9CB}"/>
+                <a16:creationId xmlns:a16="http://schemas.microsoft.com/office/drawing/2014/main" id="{4B835B01-5EEB-49C8-8B49-A9DCF7FFA741}"/>
               </a:ext>
             </a:extLst>
           </p:cNvPr>
@@ -13276,7 +13276,7 @@
           <p:cNvPr id="6" name="TextBox 5">
             <a:extLst xmlns:a="http://schemas.openxmlformats.org/drawingml/2006/main">
               <a:ext uri="{FF2B5EF4-FFF2-40B4-BE49-F238E27FC236}">
-                <a16:creationId xmlns:a16="http://schemas.microsoft.com/office/drawing/2014/main" id="{025DB16F-0D5D-4A35-B70E-1A718407C842}"/>
+                <a16:creationId xmlns:a16="http://schemas.microsoft.com/office/drawing/2014/main" id="{7DBDB192-5022-4224-A5E0-BD851C197A93}"/>
               </a:ext>
             </a:extLst>
           </p:cNvPr>
@@ -13313,7 +13313,7 @@
                 <a:ea typeface="Aptos"/>
                 <a:cs typeface="Aptos"/>
               </a:rPr>
-              <a:t>Independent public evidence summary · 2026.07.23-12 · 2026-07-22 · Sources: Evidence Register</a:t>
+              <a:t>Independent public evidence summary · 2026.07.23-13 · 2026-07-22 · Sources: Evidence Register</a:t>
             </a:r>
           </a:p>
         </p:txBody>
@@ -13323,7 +13323,7 @@
           <p:cNvPr id="7" name="TextBox 6">
             <a:extLst xmlns:a="http://schemas.openxmlformats.org/drawingml/2006/main">
               <a:ext uri="{FF2B5EF4-FFF2-40B4-BE49-F238E27FC236}">
-                <a16:creationId xmlns:a16="http://schemas.microsoft.com/office/drawing/2014/main" id="{F6DD166F-1497-4F7E-828B-EBADA247C4DA}"/>
+                <a16:creationId xmlns:a16="http://schemas.microsoft.com/office/drawing/2014/main" id="{D3CA95B1-8470-4FF8-8CD0-F0490F7AB959}"/>
               </a:ext>
             </a:extLst>
           </p:cNvPr>
@@ -14056,7 +14056,7 @@
           <p:cNvPr id="9" name="TextBox 8">
             <a:extLst xmlns:a="http://schemas.openxmlformats.org/drawingml/2006/main">
               <a:ext uri="{FF2B5EF4-FFF2-40B4-BE49-F238E27FC236}">
-                <a16:creationId xmlns:a16="http://schemas.microsoft.com/office/drawing/2014/main" id="{932436EC-130A-4903-9D2D-5F69B547210C}"/>
+                <a16:creationId xmlns:a16="http://schemas.microsoft.com/office/drawing/2014/main" id="{E8D7EFDF-1273-4B27-B6A2-BFC2CD64BE48}"/>
               </a:ext>
             </a:extLst>
           </p:cNvPr>
@@ -14101,7 +14101,7 @@
     </p:spTree>
     <p:extLst>
       <p:ext uri="{BB962C8B-B14F-4D97-AF65-F5344CB8AC3E}">
-        <p14:creationId xmlns:p14="http://schemas.microsoft.com/office/powerpoint/2010/main" val="743573402"/>
+        <p14:creationId xmlns:p14="http://schemas.microsoft.com/office/powerpoint/2010/main" val="818730227"/>
       </p:ext>
     </p:extLst>
   </p:cSld>

--- a/site/downloads/pixan-bank-deck-medium-en.pptx
+++ b/site/downloads/pixan-bank-deck-medium-en.pptx
@@ -2,24 +2,24 @@
 <file path=ppt/presentation.xml><?xml version="1.0" encoding="utf-8"?>
 <p:presentation xmlns:p="http://schemas.openxmlformats.org/presentationml/2006/main">
   <p:sldMasterIdLst>
-    <p:sldMasterId xmlns:r="http://schemas.openxmlformats.org/officeDocument/2006/relationships" id="2147483648" r:id="R822bb5ee97b547ff"/>
+    <p:sldMasterId xmlns:r="http://schemas.openxmlformats.org/officeDocument/2006/relationships" id="2147483648" r:id="R8872a078aae6475b"/>
   </p:sldMasterIdLst>
   <p:notesMasterIdLst>
-    <p:notesMasterId xmlns:r="http://schemas.openxmlformats.org/officeDocument/2006/relationships" r:id="Rec1c0fb012954419"/>
+    <p:notesMasterId xmlns:r="http://schemas.openxmlformats.org/officeDocument/2006/relationships" r:id="R9906e3eafea844e7"/>
   </p:notesMasterIdLst>
   <p:sldIdLst>
-    <p:sldId xmlns:r="http://schemas.openxmlformats.org/officeDocument/2006/relationships" id="256" r:id="R933e64fd15484ff9"/>
-    <p:sldId xmlns:r="http://schemas.openxmlformats.org/officeDocument/2006/relationships" id="257" r:id="R346518882dec4b08"/>
-    <p:sldId xmlns:r="http://schemas.openxmlformats.org/officeDocument/2006/relationships" id="258" r:id="R1bb5be8cb62942dd"/>
-    <p:sldId xmlns:r="http://schemas.openxmlformats.org/officeDocument/2006/relationships" id="259" r:id="Re9facbc767ed4fc9"/>
-    <p:sldId xmlns:r="http://schemas.openxmlformats.org/officeDocument/2006/relationships" id="260" r:id="R534a096d7c194f71"/>
-    <p:sldId xmlns:r="http://schemas.openxmlformats.org/officeDocument/2006/relationships" id="261" r:id="R02eec8d3302942c1"/>
-    <p:sldId xmlns:r="http://schemas.openxmlformats.org/officeDocument/2006/relationships" id="262" r:id="R84f0a1fe0ed44dc9"/>
-    <p:sldId xmlns:r="http://schemas.openxmlformats.org/officeDocument/2006/relationships" id="263" r:id="R63b78021389b4088"/>
-    <p:sldId xmlns:r="http://schemas.openxmlformats.org/officeDocument/2006/relationships" id="264" r:id="R47f7168df0fd4186"/>
-    <p:sldId xmlns:r="http://schemas.openxmlformats.org/officeDocument/2006/relationships" id="265" r:id="R7e100ae0050c4484"/>
-    <p:sldId xmlns:r="http://schemas.openxmlformats.org/officeDocument/2006/relationships" id="266" r:id="Ra222a5197ab24bd3"/>
-    <p:sldId xmlns:r="http://schemas.openxmlformats.org/officeDocument/2006/relationships" id="267" r:id="R1ffd7e39c00e4fca"/>
+    <p:sldId xmlns:r="http://schemas.openxmlformats.org/officeDocument/2006/relationships" id="256" r:id="Rdae40e627dcb4b72"/>
+    <p:sldId xmlns:r="http://schemas.openxmlformats.org/officeDocument/2006/relationships" id="257" r:id="R8028ea888cc0431f"/>
+    <p:sldId xmlns:r="http://schemas.openxmlformats.org/officeDocument/2006/relationships" id="258" r:id="R96dbb29a4d9b491a"/>
+    <p:sldId xmlns:r="http://schemas.openxmlformats.org/officeDocument/2006/relationships" id="259" r:id="R838ee3d0112e4a84"/>
+    <p:sldId xmlns:r="http://schemas.openxmlformats.org/officeDocument/2006/relationships" id="260" r:id="R3032441c9c2b4bb6"/>
+    <p:sldId xmlns:r="http://schemas.openxmlformats.org/officeDocument/2006/relationships" id="261" r:id="Re26793f90ab248ae"/>
+    <p:sldId xmlns:r="http://schemas.openxmlformats.org/officeDocument/2006/relationships" id="262" r:id="Rdc53cb24ac2a4878"/>
+    <p:sldId xmlns:r="http://schemas.openxmlformats.org/officeDocument/2006/relationships" id="263" r:id="R58962bee56764dcf"/>
+    <p:sldId xmlns:r="http://schemas.openxmlformats.org/officeDocument/2006/relationships" id="264" r:id="Rdbc8267e539748a7"/>
+    <p:sldId xmlns:r="http://schemas.openxmlformats.org/officeDocument/2006/relationships" id="265" r:id="R263da803369244fd"/>
+    <p:sldId xmlns:r="http://schemas.openxmlformats.org/officeDocument/2006/relationships" id="266" r:id="Rde138ce8a78d45d8"/>
+    <p:sldId xmlns:r="http://schemas.openxmlformats.org/officeDocument/2006/relationships" id="267" r:id="R03bcebeefe9f4052"/>
   </p:sldIdLst>
   <p:sldSz cx="12191999" cy="6858000"/>
   <p:notesSz cx="6858000" cy="9144000"/>
@@ -1340,7 +1340,7 @@
           <p:cNvPr id="2" name="Title 1">
             <a:extLst xmlns:a="http://schemas.openxmlformats.org/drawingml/2006/main">
               <a:ext uri="{FF2B5EF4-FFF2-40B4-BE49-F238E27FC236}">
-                <a16:creationId xmlns:a16="http://schemas.microsoft.com/office/drawing/2014/main" id="{13F08619-CB8F-4058-9BDF-15C071C65277}"/>
+                <a16:creationId xmlns:a16="http://schemas.microsoft.com/office/drawing/2014/main" id="{2490DDE1-634D-4BFE-ACB2-18A8CAAFDC37}"/>
               </a:ext>
             </a:extLst>
           </p:cNvPr>
@@ -1372,7 +1372,7 @@
           <p:cNvPr id="3" name="Subtitle 2">
             <a:extLst xmlns:a="http://schemas.openxmlformats.org/drawingml/2006/main">
               <a:ext uri="{FF2B5EF4-FFF2-40B4-BE49-F238E27FC236}">
-                <a16:creationId xmlns:a16="http://schemas.microsoft.com/office/drawing/2014/main" id="{E5D4C768-FF89-4D7A-92A6-2B290384CEE9}"/>
+                <a16:creationId xmlns:a16="http://schemas.microsoft.com/office/drawing/2014/main" id="{295C0DFC-B17A-45D9-A5E7-490527A2CEA3}"/>
               </a:ext>
             </a:extLst>
           </p:cNvPr>
@@ -1495,7 +1495,7 @@
           <p:cNvPr id="4" name="Date Placeholder 3">
             <a:extLst xmlns:a="http://schemas.openxmlformats.org/drawingml/2006/main">
               <a:ext uri="{FF2B5EF4-FFF2-40B4-BE49-F238E27FC236}">
-                <a16:creationId xmlns:a16="http://schemas.microsoft.com/office/drawing/2014/main" id="{8A7E8726-AEF8-46E1-8BA0-D1EEC16A7B0F}"/>
+                <a16:creationId xmlns:a16="http://schemas.microsoft.com/office/drawing/2014/main" id="{8CFE3173-59A6-4BDA-92AC-9EFD3135E76E}"/>
               </a:ext>
             </a:extLst>
           </p:cNvPr>
@@ -1522,7 +1522,7 @@
           <p:cNvPr id="5" name="Footer Placeholder 4">
             <a:extLst xmlns:a="http://schemas.openxmlformats.org/drawingml/2006/main">
               <a:ext uri="{FF2B5EF4-FFF2-40B4-BE49-F238E27FC236}">
-                <a16:creationId xmlns:a16="http://schemas.microsoft.com/office/drawing/2014/main" id="{1D804837-714F-4011-845F-33CBF1E5E133}"/>
+                <a16:creationId xmlns:a16="http://schemas.microsoft.com/office/drawing/2014/main" id="{FAA5D2A1-5377-44C3-8BAD-2908AAD7EE2C}"/>
               </a:ext>
             </a:extLst>
           </p:cNvPr>
@@ -1545,7 +1545,7 @@
           <p:cNvPr id="6" name="Slide Number Placeholder 5">
             <a:extLst xmlns:a="http://schemas.openxmlformats.org/drawingml/2006/main">
               <a:ext uri="{FF2B5EF4-FFF2-40B4-BE49-F238E27FC236}">
-                <a16:creationId xmlns:a16="http://schemas.microsoft.com/office/drawing/2014/main" id="{620945EF-2762-4798-AD22-18D0D2192EA4}"/>
+                <a16:creationId xmlns:a16="http://schemas.microsoft.com/office/drawing/2014/main" id="{BAC15AB9-49F6-4E7E-BF2A-7131C845E319}"/>
               </a:ext>
             </a:extLst>
           </p:cNvPr>
@@ -1589,7 +1589,7 @@
           <p:cNvPr id="2" name="Title 1">
             <a:extLst xmlns:a="http://schemas.openxmlformats.org/drawingml/2006/main">
               <a:ext uri="{FF2B5EF4-FFF2-40B4-BE49-F238E27FC236}">
-                <a16:creationId xmlns:a16="http://schemas.microsoft.com/office/drawing/2014/main" id="{2804FA30-FA42-4D39-8839-A190AFA38831}"/>
+                <a16:creationId xmlns:a16="http://schemas.microsoft.com/office/drawing/2014/main" id="{4A70C24F-4522-40CD-B320-901F0FBB2A9E}"/>
               </a:ext>
             </a:extLst>
           </p:cNvPr>
@@ -1616,7 +1616,7 @@
           <p:cNvPr id="3" name="Vertical Text Placeholder 2">
             <a:extLst xmlns:a="http://schemas.openxmlformats.org/drawingml/2006/main">
               <a:ext uri="{FF2B5EF4-FFF2-40B4-BE49-F238E27FC236}">
-                <a16:creationId xmlns:a16="http://schemas.microsoft.com/office/drawing/2014/main" id="{02DF12CD-A874-46E4-A2F6-E71655D1306B}"/>
+                <a16:creationId xmlns:a16="http://schemas.microsoft.com/office/drawing/2014/main" id="{36FB928B-565E-481D-B1B4-35EC758AE7C4}"/>
               </a:ext>
             </a:extLst>
           </p:cNvPr>
@@ -1678,7 +1678,7 @@
           <p:cNvPr id="4" name="Date Placeholder 3">
             <a:extLst xmlns:a="http://schemas.openxmlformats.org/drawingml/2006/main">
               <a:ext uri="{FF2B5EF4-FFF2-40B4-BE49-F238E27FC236}">
-                <a16:creationId xmlns:a16="http://schemas.microsoft.com/office/drawing/2014/main" id="{AB53434C-020D-44FF-A79E-BAA7BB2F487C}"/>
+                <a16:creationId xmlns:a16="http://schemas.microsoft.com/office/drawing/2014/main" id="{F2D405DF-69DD-4A83-BFC6-D628BEFB46B4}"/>
               </a:ext>
             </a:extLst>
           </p:cNvPr>
@@ -1705,7 +1705,7 @@
           <p:cNvPr id="5" name="Footer Placeholder 4">
             <a:extLst xmlns:a="http://schemas.openxmlformats.org/drawingml/2006/main">
               <a:ext uri="{FF2B5EF4-FFF2-40B4-BE49-F238E27FC236}">
-                <a16:creationId xmlns:a16="http://schemas.microsoft.com/office/drawing/2014/main" id="{3DABFB43-0A1D-4A6B-B3D2-A707E40702D2}"/>
+                <a16:creationId xmlns:a16="http://schemas.microsoft.com/office/drawing/2014/main" id="{34EF3587-E40E-4493-895D-292613328191}"/>
               </a:ext>
             </a:extLst>
           </p:cNvPr>
@@ -1728,7 +1728,7 @@
           <p:cNvPr id="6" name="Slide Number Placeholder 5">
             <a:extLst xmlns:a="http://schemas.openxmlformats.org/drawingml/2006/main">
               <a:ext uri="{FF2B5EF4-FFF2-40B4-BE49-F238E27FC236}">
-                <a16:creationId xmlns:a16="http://schemas.microsoft.com/office/drawing/2014/main" id="{7B108D9C-9336-4D3A-9B3B-27D32E57F4EA}"/>
+                <a16:creationId xmlns:a16="http://schemas.microsoft.com/office/drawing/2014/main" id="{8A145117-FBF2-496F-8E7C-0E2A1EC5E058}"/>
               </a:ext>
             </a:extLst>
           </p:cNvPr>
@@ -1772,7 +1772,7 @@
           <p:cNvPr id="2" name="Vertical Title 1">
             <a:extLst xmlns:a="http://schemas.openxmlformats.org/drawingml/2006/main">
               <a:ext uri="{FF2B5EF4-FFF2-40B4-BE49-F238E27FC236}">
-                <a16:creationId xmlns:a16="http://schemas.microsoft.com/office/drawing/2014/main" id="{7676F195-2CE9-4C8C-9DF5-AAAE861604E5}"/>
+                <a16:creationId xmlns:a16="http://schemas.microsoft.com/office/drawing/2014/main" id="{5E421B21-A706-4EC2-A006-E6A1F87CAC09}"/>
               </a:ext>
             </a:extLst>
           </p:cNvPr>
@@ -1804,7 +1804,7 @@
           <p:cNvPr id="3" name="Vertical Text Placeholder 2">
             <a:extLst xmlns:a="http://schemas.openxmlformats.org/drawingml/2006/main">
               <a:ext uri="{FF2B5EF4-FFF2-40B4-BE49-F238E27FC236}">
-                <a16:creationId xmlns:a16="http://schemas.microsoft.com/office/drawing/2014/main" id="{D0907DD8-B570-4A47-A187-BF20A0003AE3}"/>
+                <a16:creationId xmlns:a16="http://schemas.microsoft.com/office/drawing/2014/main" id="{AD5673B6-DF07-4769-862E-14BE92D23E28}"/>
               </a:ext>
             </a:extLst>
           </p:cNvPr>
@@ -1871,7 +1871,7 @@
           <p:cNvPr id="4" name="Date Placeholder 3">
             <a:extLst xmlns:a="http://schemas.openxmlformats.org/drawingml/2006/main">
               <a:ext uri="{FF2B5EF4-FFF2-40B4-BE49-F238E27FC236}">
-                <a16:creationId xmlns:a16="http://schemas.microsoft.com/office/drawing/2014/main" id="{5C44A456-2A5C-4E03-99AF-A896901BC144}"/>
+                <a16:creationId xmlns:a16="http://schemas.microsoft.com/office/drawing/2014/main" id="{6CBEAC75-5DE4-4F36-8431-1377DA284AE8}"/>
               </a:ext>
             </a:extLst>
           </p:cNvPr>
@@ -1898,7 +1898,7 @@
           <p:cNvPr id="5" name="Footer Placeholder 4">
             <a:extLst xmlns:a="http://schemas.openxmlformats.org/drawingml/2006/main">
               <a:ext uri="{FF2B5EF4-FFF2-40B4-BE49-F238E27FC236}">
-                <a16:creationId xmlns:a16="http://schemas.microsoft.com/office/drawing/2014/main" id="{4AA4AE51-4437-4445-AA76-D25FCC35CF45}"/>
+                <a16:creationId xmlns:a16="http://schemas.microsoft.com/office/drawing/2014/main" id="{9D7FAA92-BF05-48FF-B49D-046DE82E0B9E}"/>
               </a:ext>
             </a:extLst>
           </p:cNvPr>
@@ -1921,7 +1921,7 @@
           <p:cNvPr id="6" name="Slide Number Placeholder 5">
             <a:extLst xmlns:a="http://schemas.openxmlformats.org/drawingml/2006/main">
               <a:ext uri="{FF2B5EF4-FFF2-40B4-BE49-F238E27FC236}">
-                <a16:creationId xmlns:a16="http://schemas.microsoft.com/office/drawing/2014/main" id="{F14116C3-8786-465E-8D15-50E157FF94B9}"/>
+                <a16:creationId xmlns:a16="http://schemas.microsoft.com/office/drawing/2014/main" id="{6F8AE522-2434-485B-BF92-6967BC179118}"/>
               </a:ext>
             </a:extLst>
           </p:cNvPr>
@@ -1965,7 +1965,7 @@
           <p:cNvPr id="2" name="Title 1">
             <a:extLst xmlns:a="http://schemas.openxmlformats.org/drawingml/2006/main">
               <a:ext uri="{FF2B5EF4-FFF2-40B4-BE49-F238E27FC236}">
-                <a16:creationId xmlns:a16="http://schemas.microsoft.com/office/drawing/2014/main" id="{0B1AE29C-A97E-495A-84B7-40F3E70230FD}"/>
+                <a16:creationId xmlns:a16="http://schemas.microsoft.com/office/drawing/2014/main" id="{1ADDCC78-8A5C-4772-A4E6-DD4FDF5DCB83}"/>
               </a:ext>
             </a:extLst>
           </p:cNvPr>
@@ -1992,7 +1992,7 @@
           <p:cNvPr id="3" name="Content Placeholder 2">
             <a:extLst xmlns:a="http://schemas.openxmlformats.org/drawingml/2006/main">
               <a:ext uri="{FF2B5EF4-FFF2-40B4-BE49-F238E27FC236}">
-                <a16:creationId xmlns:a16="http://schemas.microsoft.com/office/drawing/2014/main" id="{515440ED-16DE-4569-A56A-5EDE098FDFC6}"/>
+                <a16:creationId xmlns:a16="http://schemas.microsoft.com/office/drawing/2014/main" id="{E3A97F67-E429-4580-BCD5-000403A37362}"/>
               </a:ext>
             </a:extLst>
           </p:cNvPr>
@@ -2054,7 +2054,7 @@
           <p:cNvPr id="4" name="Date Placeholder 3">
             <a:extLst xmlns:a="http://schemas.openxmlformats.org/drawingml/2006/main">
               <a:ext uri="{FF2B5EF4-FFF2-40B4-BE49-F238E27FC236}">
-                <a16:creationId xmlns:a16="http://schemas.microsoft.com/office/drawing/2014/main" id="{D2D1333C-D8C0-4ACE-994C-C19AA992EBAD}"/>
+                <a16:creationId xmlns:a16="http://schemas.microsoft.com/office/drawing/2014/main" id="{80B0C90D-030F-455C-9DA8-419D63D0F7F6}"/>
               </a:ext>
             </a:extLst>
           </p:cNvPr>
@@ -2081,7 +2081,7 @@
           <p:cNvPr id="5" name="Footer Placeholder 4">
             <a:extLst xmlns:a="http://schemas.openxmlformats.org/drawingml/2006/main">
               <a:ext uri="{FF2B5EF4-FFF2-40B4-BE49-F238E27FC236}">
-                <a16:creationId xmlns:a16="http://schemas.microsoft.com/office/drawing/2014/main" id="{82295106-8792-461A-909C-738EE339BE02}"/>
+                <a16:creationId xmlns:a16="http://schemas.microsoft.com/office/drawing/2014/main" id="{D10242C0-B67C-4D0B-B0B9-7E15C0A4D93B}"/>
               </a:ext>
             </a:extLst>
           </p:cNvPr>
@@ -2104,7 +2104,7 @@
           <p:cNvPr id="6" name="Slide Number Placeholder 5">
             <a:extLst xmlns:a="http://schemas.openxmlformats.org/drawingml/2006/main">
               <a:ext uri="{FF2B5EF4-FFF2-40B4-BE49-F238E27FC236}">
-                <a16:creationId xmlns:a16="http://schemas.microsoft.com/office/drawing/2014/main" id="{DC9DCDF6-BFDF-4ACC-BB49-63AB97DD5516}"/>
+                <a16:creationId xmlns:a16="http://schemas.microsoft.com/office/drawing/2014/main" id="{1749018B-A45F-4BA3-859A-A571F3018FC9}"/>
               </a:ext>
             </a:extLst>
           </p:cNvPr>
@@ -2148,7 +2148,7 @@
           <p:cNvPr id="2" name="Title 1">
             <a:extLst xmlns:a="http://schemas.openxmlformats.org/drawingml/2006/main">
               <a:ext uri="{FF2B5EF4-FFF2-40B4-BE49-F238E27FC236}">
-                <a16:creationId xmlns:a16="http://schemas.microsoft.com/office/drawing/2014/main" id="{6E73F71A-C16A-4E14-A6EA-01841E068B14}"/>
+                <a16:creationId xmlns:a16="http://schemas.microsoft.com/office/drawing/2014/main" id="{55AFF59A-2E4E-42A5-9506-2862EFF4436E}"/>
               </a:ext>
             </a:extLst>
           </p:cNvPr>
@@ -2185,7 +2185,7 @@
           <p:cNvPr id="3" name="Text Placeholder 2">
             <a:extLst xmlns:a="http://schemas.openxmlformats.org/drawingml/2006/main">
               <a:ext uri="{FF2B5EF4-FFF2-40B4-BE49-F238E27FC236}">
-                <a16:creationId xmlns:a16="http://schemas.microsoft.com/office/drawing/2014/main" id="{B6960FAF-B56E-45C0-AA82-9178AD69C72B}"/>
+                <a16:creationId xmlns:a16="http://schemas.microsoft.com/office/drawing/2014/main" id="{403601EF-7DEF-4B00-9716-585E85C41D34}"/>
               </a:ext>
             </a:extLst>
           </p:cNvPr>
@@ -2311,7 +2311,7 @@
           <p:cNvPr id="4" name="Date Placeholder 3">
             <a:extLst xmlns:a="http://schemas.openxmlformats.org/drawingml/2006/main">
               <a:ext uri="{FF2B5EF4-FFF2-40B4-BE49-F238E27FC236}">
-                <a16:creationId xmlns:a16="http://schemas.microsoft.com/office/drawing/2014/main" id="{E05028B3-BBD5-4CFE-8383-F7E42640F7E4}"/>
+                <a16:creationId xmlns:a16="http://schemas.microsoft.com/office/drawing/2014/main" id="{4F468635-3AF1-4168-BA93-5742EA7A12DF}"/>
               </a:ext>
             </a:extLst>
           </p:cNvPr>
@@ -2338,7 +2338,7 @@
           <p:cNvPr id="5" name="Footer Placeholder 4">
             <a:extLst xmlns:a="http://schemas.openxmlformats.org/drawingml/2006/main">
               <a:ext uri="{FF2B5EF4-FFF2-40B4-BE49-F238E27FC236}">
-                <a16:creationId xmlns:a16="http://schemas.microsoft.com/office/drawing/2014/main" id="{86D90D3A-BC5C-4D99-BFE6-9B02252EDEC7}"/>
+                <a16:creationId xmlns:a16="http://schemas.microsoft.com/office/drawing/2014/main" id="{91C12112-B2F9-4696-B25A-723C14C15DD6}"/>
               </a:ext>
             </a:extLst>
           </p:cNvPr>
@@ -2361,7 +2361,7 @@
           <p:cNvPr id="6" name="Slide Number Placeholder 5">
             <a:extLst xmlns:a="http://schemas.openxmlformats.org/drawingml/2006/main">
               <a:ext uri="{FF2B5EF4-FFF2-40B4-BE49-F238E27FC236}">
-                <a16:creationId xmlns:a16="http://schemas.microsoft.com/office/drawing/2014/main" id="{FB2FF7D4-3963-4448-848A-A3CACE1E3980}"/>
+                <a16:creationId xmlns:a16="http://schemas.microsoft.com/office/drawing/2014/main" id="{2E33A3AC-88A9-4C5D-BE53-2153936886BC}"/>
               </a:ext>
             </a:extLst>
           </p:cNvPr>
@@ -2405,7 +2405,7 @@
           <p:cNvPr id="2" name="Title 1">
             <a:extLst xmlns:a="http://schemas.openxmlformats.org/drawingml/2006/main">
               <a:ext uri="{FF2B5EF4-FFF2-40B4-BE49-F238E27FC236}">
-                <a16:creationId xmlns:a16="http://schemas.microsoft.com/office/drawing/2014/main" id="{B45C957F-2326-4B2A-8C13-C741E6C4779B}"/>
+                <a16:creationId xmlns:a16="http://schemas.microsoft.com/office/drawing/2014/main" id="{D72B8943-0F37-4313-865E-ABD2D19B8283}"/>
               </a:ext>
             </a:extLst>
           </p:cNvPr>
@@ -2432,7 +2432,7 @@
           <p:cNvPr id="3" name="Content Placeholder 2">
             <a:extLst xmlns:a="http://schemas.openxmlformats.org/drawingml/2006/main">
               <a:ext uri="{FF2B5EF4-FFF2-40B4-BE49-F238E27FC236}">
-                <a16:creationId xmlns:a16="http://schemas.microsoft.com/office/drawing/2014/main" id="{D60F7E38-1834-434A-B569-D6B149E1D1C1}"/>
+                <a16:creationId xmlns:a16="http://schemas.microsoft.com/office/drawing/2014/main" id="{91377A7C-7BE5-483B-9C6F-B2CF70D67AF5}"/>
               </a:ext>
             </a:extLst>
           </p:cNvPr>
@@ -2536,7 +2536,7 @@
           <p:cNvPr id="4" name="Content Placeholder 3">
             <a:extLst xmlns:a="http://schemas.openxmlformats.org/drawingml/2006/main">
               <a:ext uri="{FF2B5EF4-FFF2-40B4-BE49-F238E27FC236}">
-                <a16:creationId xmlns:a16="http://schemas.microsoft.com/office/drawing/2014/main" id="{91AD1485-9585-47C4-BF1A-D88DCBB5163C}"/>
+                <a16:creationId xmlns:a16="http://schemas.microsoft.com/office/drawing/2014/main" id="{9B2E5AE2-2D8F-4E5D-AEA5-35E72489F966}"/>
               </a:ext>
             </a:extLst>
           </p:cNvPr>
@@ -2640,7 +2640,7 @@
           <p:cNvPr id="5" name="Date Placeholder 4">
             <a:extLst xmlns:a="http://schemas.openxmlformats.org/drawingml/2006/main">
               <a:ext uri="{FF2B5EF4-FFF2-40B4-BE49-F238E27FC236}">
-                <a16:creationId xmlns:a16="http://schemas.microsoft.com/office/drawing/2014/main" id="{BF85B544-C06B-4D44-AFBD-7D2C523B0552}"/>
+                <a16:creationId xmlns:a16="http://schemas.microsoft.com/office/drawing/2014/main" id="{FA4E7261-FC06-43DE-A301-E27FDB27E93E}"/>
               </a:ext>
             </a:extLst>
           </p:cNvPr>
@@ -2667,7 +2667,7 @@
           <p:cNvPr id="6" name="Footer Placeholder 5">
             <a:extLst xmlns:a="http://schemas.openxmlformats.org/drawingml/2006/main">
               <a:ext uri="{FF2B5EF4-FFF2-40B4-BE49-F238E27FC236}">
-                <a16:creationId xmlns:a16="http://schemas.microsoft.com/office/drawing/2014/main" id="{8BEF6A24-3F9B-486F-A08B-4AEA98F06D16}"/>
+                <a16:creationId xmlns:a16="http://schemas.microsoft.com/office/drawing/2014/main" id="{2A208F93-C165-4AE8-8254-85ACC1234A36}"/>
               </a:ext>
             </a:extLst>
           </p:cNvPr>
@@ -2690,7 +2690,7 @@
           <p:cNvPr id="7" name="Slide Number Placeholder 6">
             <a:extLst xmlns:a="http://schemas.openxmlformats.org/drawingml/2006/main">
               <a:ext uri="{FF2B5EF4-FFF2-40B4-BE49-F238E27FC236}">
-                <a16:creationId xmlns:a16="http://schemas.microsoft.com/office/drawing/2014/main" id="{B8716359-1CAA-471F-BFBA-EDA4658BBF2A}"/>
+                <a16:creationId xmlns:a16="http://schemas.microsoft.com/office/drawing/2014/main" id="{8FD7CE85-A6A5-486D-BA17-DFBA19E75FF9}"/>
               </a:ext>
             </a:extLst>
           </p:cNvPr>
@@ -2734,7 +2734,7 @@
           <p:cNvPr id="2" name="Title 1">
             <a:extLst xmlns:a="http://schemas.openxmlformats.org/drawingml/2006/main">
               <a:ext uri="{FF2B5EF4-FFF2-40B4-BE49-F238E27FC236}">
-                <a16:creationId xmlns:a16="http://schemas.microsoft.com/office/drawing/2014/main" id="{ED7143BD-9976-4443-8B54-CC96A1235333}"/>
+                <a16:creationId xmlns:a16="http://schemas.microsoft.com/office/drawing/2014/main" id="{1C79727C-7030-422A-8DF1-383DFF526D00}"/>
               </a:ext>
             </a:extLst>
           </p:cNvPr>
@@ -2766,7 +2766,7 @@
           <p:cNvPr id="3" name="Text Placeholder 2">
             <a:extLst xmlns:a="http://schemas.openxmlformats.org/drawingml/2006/main">
               <a:ext uri="{FF2B5EF4-FFF2-40B4-BE49-F238E27FC236}">
-                <a16:creationId xmlns:a16="http://schemas.microsoft.com/office/drawing/2014/main" id="{8CDE1E70-1955-4FAA-86B9-F7EC46C29707}"/>
+                <a16:creationId xmlns:a16="http://schemas.microsoft.com/office/drawing/2014/main" id="{C3745078-E4DE-466F-B2F7-6211A43F0DAE}"/>
               </a:ext>
             </a:extLst>
           </p:cNvPr>
@@ -2838,7 +2838,7 @@
           <p:cNvPr id="4" name="Content Placeholder 3">
             <a:extLst xmlns:a="http://schemas.openxmlformats.org/drawingml/2006/main">
               <a:ext uri="{FF2B5EF4-FFF2-40B4-BE49-F238E27FC236}">
-                <a16:creationId xmlns:a16="http://schemas.microsoft.com/office/drawing/2014/main" id="{5B66AEC4-D056-4602-B17D-B8A9A5274DF9}"/>
+                <a16:creationId xmlns:a16="http://schemas.microsoft.com/office/drawing/2014/main" id="{83EDEBB9-9204-469D-9E50-ED1A90185471}"/>
               </a:ext>
             </a:extLst>
           </p:cNvPr>
@@ -2942,7 +2942,7 @@
           <p:cNvPr id="5" name="Text Placeholder 4">
             <a:extLst xmlns:a="http://schemas.openxmlformats.org/drawingml/2006/main">
               <a:ext uri="{FF2B5EF4-FFF2-40B4-BE49-F238E27FC236}">
-                <a16:creationId xmlns:a16="http://schemas.microsoft.com/office/drawing/2014/main" id="{20194225-C288-4810-9F24-44215EC43DB3}"/>
+                <a16:creationId xmlns:a16="http://schemas.microsoft.com/office/drawing/2014/main" id="{B7ADD1BA-D505-45BF-BC23-032F8CB8E3EA}"/>
               </a:ext>
             </a:extLst>
           </p:cNvPr>
@@ -3014,7 +3014,7 @@
           <p:cNvPr id="6" name="Content Placeholder 5">
             <a:extLst xmlns:a="http://schemas.openxmlformats.org/drawingml/2006/main">
               <a:ext uri="{FF2B5EF4-FFF2-40B4-BE49-F238E27FC236}">
-                <a16:creationId xmlns:a16="http://schemas.microsoft.com/office/drawing/2014/main" id="{3D947461-AB53-4480-B112-75C714543D9B}"/>
+                <a16:creationId xmlns:a16="http://schemas.microsoft.com/office/drawing/2014/main" id="{6ADBC6AD-5690-4921-86B9-DE5E752D9551}"/>
               </a:ext>
             </a:extLst>
           </p:cNvPr>
@@ -3118,7 +3118,7 @@
           <p:cNvPr id="7" name="Date Placeholder 6">
             <a:extLst xmlns:a="http://schemas.openxmlformats.org/drawingml/2006/main">
               <a:ext uri="{FF2B5EF4-FFF2-40B4-BE49-F238E27FC236}">
-                <a16:creationId xmlns:a16="http://schemas.microsoft.com/office/drawing/2014/main" id="{282C35A1-F4F6-4C29-BF3D-AB65E8A80B20}"/>
+                <a16:creationId xmlns:a16="http://schemas.microsoft.com/office/drawing/2014/main" id="{D79DB571-E11F-43BD-ACB7-CDBD54A20769}"/>
               </a:ext>
             </a:extLst>
           </p:cNvPr>
@@ -3145,7 +3145,7 @@
           <p:cNvPr id="8" name="Footer Placeholder 7">
             <a:extLst xmlns:a="http://schemas.openxmlformats.org/drawingml/2006/main">
               <a:ext uri="{FF2B5EF4-FFF2-40B4-BE49-F238E27FC236}">
-                <a16:creationId xmlns:a16="http://schemas.microsoft.com/office/drawing/2014/main" id="{0EE25ACA-A22A-4BAE-B374-BA67533CA0ED}"/>
+                <a16:creationId xmlns:a16="http://schemas.microsoft.com/office/drawing/2014/main" id="{70D79937-9D7A-4F69-93C3-0BBBE812BA8B}"/>
               </a:ext>
             </a:extLst>
           </p:cNvPr>
@@ -3168,7 +3168,7 @@
           <p:cNvPr id="9" name="Slide Number Placeholder 8">
             <a:extLst xmlns:a="http://schemas.openxmlformats.org/drawingml/2006/main">
               <a:ext uri="{FF2B5EF4-FFF2-40B4-BE49-F238E27FC236}">
-                <a16:creationId xmlns:a16="http://schemas.microsoft.com/office/drawing/2014/main" id="{5C146C22-900F-4F79-8BDD-F8C59196DE03}"/>
+                <a16:creationId xmlns:a16="http://schemas.microsoft.com/office/drawing/2014/main" id="{A081EBD8-AFCD-4C8D-B559-39CAF7809973}"/>
               </a:ext>
             </a:extLst>
           </p:cNvPr>
@@ -3212,7 +3212,7 @@
           <p:cNvPr id="2" name="Title 1">
             <a:extLst xmlns:a="http://schemas.openxmlformats.org/drawingml/2006/main">
               <a:ext uri="{FF2B5EF4-FFF2-40B4-BE49-F238E27FC236}">
-                <a16:creationId xmlns:a16="http://schemas.microsoft.com/office/drawing/2014/main" id="{9630F314-97FF-4072-A5B4-3EEC71102592}"/>
+                <a16:creationId xmlns:a16="http://schemas.microsoft.com/office/drawing/2014/main" id="{F43FA65A-6157-4E7E-8BB6-7254D70F4C09}"/>
               </a:ext>
             </a:extLst>
           </p:cNvPr>
@@ -3239,7 +3239,7 @@
           <p:cNvPr id="3" name="Date Placeholder 2">
             <a:extLst xmlns:a="http://schemas.openxmlformats.org/drawingml/2006/main">
               <a:ext uri="{FF2B5EF4-FFF2-40B4-BE49-F238E27FC236}">
-                <a16:creationId xmlns:a16="http://schemas.microsoft.com/office/drawing/2014/main" id="{43308FE5-FBC5-4639-8A2D-5A660F30324F}"/>
+                <a16:creationId xmlns:a16="http://schemas.microsoft.com/office/drawing/2014/main" id="{F1B0B8AE-A77F-4DF1-9053-AF6897F6735A}"/>
               </a:ext>
             </a:extLst>
           </p:cNvPr>
@@ -3266,7 +3266,7 @@
           <p:cNvPr id="4" name="Footer Placeholder 3">
             <a:extLst xmlns:a="http://schemas.openxmlformats.org/drawingml/2006/main">
               <a:ext uri="{FF2B5EF4-FFF2-40B4-BE49-F238E27FC236}">
-                <a16:creationId xmlns:a16="http://schemas.microsoft.com/office/drawing/2014/main" id="{6F46055F-2CCA-4815-A316-5B778B9AFB13}"/>
+                <a16:creationId xmlns:a16="http://schemas.microsoft.com/office/drawing/2014/main" id="{7C07E76F-E0A1-40B8-B690-1F42D79B98A9}"/>
               </a:ext>
             </a:extLst>
           </p:cNvPr>
@@ -3289,7 +3289,7 @@
           <p:cNvPr id="5" name="Slide Number Placeholder 4">
             <a:extLst xmlns:a="http://schemas.openxmlformats.org/drawingml/2006/main">
               <a:ext uri="{FF2B5EF4-FFF2-40B4-BE49-F238E27FC236}">
-                <a16:creationId xmlns:a16="http://schemas.microsoft.com/office/drawing/2014/main" id="{6EB7325F-9A84-4F69-A763-313A062A27E2}"/>
+                <a16:creationId xmlns:a16="http://schemas.microsoft.com/office/drawing/2014/main" id="{2E3A39EC-E1E1-4E6D-9EE8-013D6A067020}"/>
               </a:ext>
             </a:extLst>
           </p:cNvPr>
@@ -3333,7 +3333,7 @@
           <p:cNvPr id="2" name="Date Placeholder 1">
             <a:extLst xmlns:a="http://schemas.openxmlformats.org/drawingml/2006/main">
               <a:ext uri="{FF2B5EF4-FFF2-40B4-BE49-F238E27FC236}">
-                <a16:creationId xmlns:a16="http://schemas.microsoft.com/office/drawing/2014/main" id="{F8AAE7DE-08D5-4B5C-8830-2874D7128643}"/>
+                <a16:creationId xmlns:a16="http://schemas.microsoft.com/office/drawing/2014/main" id="{D340CB40-A44E-42F6-A896-3F9053E7194C}"/>
               </a:ext>
             </a:extLst>
           </p:cNvPr>
@@ -3360,7 +3360,7 @@
           <p:cNvPr id="3" name="Footer Placeholder 2">
             <a:extLst xmlns:a="http://schemas.openxmlformats.org/drawingml/2006/main">
               <a:ext uri="{FF2B5EF4-FFF2-40B4-BE49-F238E27FC236}">
-                <a16:creationId xmlns:a16="http://schemas.microsoft.com/office/drawing/2014/main" id="{39DCEC2B-58C3-4374-A3B0-C3B1EA07F993}"/>
+                <a16:creationId xmlns:a16="http://schemas.microsoft.com/office/drawing/2014/main" id="{2E5AA2A8-3DDB-46DA-BBDC-D4B2CBCF003F}"/>
               </a:ext>
             </a:extLst>
           </p:cNvPr>
@@ -3383,7 +3383,7 @@
           <p:cNvPr id="4" name="Slide Number Placeholder 3">
             <a:extLst xmlns:a="http://schemas.openxmlformats.org/drawingml/2006/main">
               <a:ext uri="{FF2B5EF4-FFF2-40B4-BE49-F238E27FC236}">
-                <a16:creationId xmlns:a16="http://schemas.microsoft.com/office/drawing/2014/main" id="{7D812CC5-5C02-4A98-AEC1-22CD4225C17C}"/>
+                <a16:creationId xmlns:a16="http://schemas.microsoft.com/office/drawing/2014/main" id="{244B2CDA-6926-415E-A84B-648962EDD640}"/>
               </a:ext>
             </a:extLst>
           </p:cNvPr>
@@ -3427,7 +3427,7 @@
           <p:cNvPr id="2" name="Title 1">
             <a:extLst xmlns:a="http://schemas.openxmlformats.org/drawingml/2006/main">
               <a:ext uri="{FF2B5EF4-FFF2-40B4-BE49-F238E27FC236}">
-                <a16:creationId xmlns:a16="http://schemas.microsoft.com/office/drawing/2014/main" id="{2F0D1968-B999-4631-BC4D-3F807DC9FB82}"/>
+                <a16:creationId xmlns:a16="http://schemas.microsoft.com/office/drawing/2014/main" id="{76E53B29-383B-494C-ADE8-4EF7D409A76C}"/>
               </a:ext>
             </a:extLst>
           </p:cNvPr>
@@ -3464,7 +3464,7 @@
           <p:cNvPr id="3" name="Content Placeholder 2">
             <a:extLst xmlns:a="http://schemas.openxmlformats.org/drawingml/2006/main">
               <a:ext uri="{FF2B5EF4-FFF2-40B4-BE49-F238E27FC236}">
-                <a16:creationId xmlns:a16="http://schemas.microsoft.com/office/drawing/2014/main" id="{F612A1FB-1BAB-41C7-A70A-94C7F93F2396}"/>
+                <a16:creationId xmlns:a16="http://schemas.microsoft.com/office/drawing/2014/main" id="{C0E70AE0-1EC2-4B0B-B353-FE3E6BD4FBF9}"/>
               </a:ext>
             </a:extLst>
           </p:cNvPr>
@@ -3568,7 +3568,7 @@
           <p:cNvPr id="4" name="Text Placeholder 3">
             <a:extLst xmlns:a="http://schemas.openxmlformats.org/drawingml/2006/main">
               <a:ext uri="{FF2B5EF4-FFF2-40B4-BE49-F238E27FC236}">
-                <a16:creationId xmlns:a16="http://schemas.microsoft.com/office/drawing/2014/main" id="{5F784594-95E9-4DB3-BB6F-01E9C3785DAB}"/>
+                <a16:creationId xmlns:a16="http://schemas.microsoft.com/office/drawing/2014/main" id="{95789093-9FF1-4C57-927E-F8C3AA0B2D52}"/>
               </a:ext>
             </a:extLst>
           </p:cNvPr>
@@ -3640,7 +3640,7 @@
           <p:cNvPr id="5" name="Date Placeholder 4">
             <a:extLst xmlns:a="http://schemas.openxmlformats.org/drawingml/2006/main">
               <a:ext uri="{FF2B5EF4-FFF2-40B4-BE49-F238E27FC236}">
-                <a16:creationId xmlns:a16="http://schemas.microsoft.com/office/drawing/2014/main" id="{48D2C96C-0428-4A2A-98F7-3E867F7BD330}"/>
+                <a16:creationId xmlns:a16="http://schemas.microsoft.com/office/drawing/2014/main" id="{49816FB5-46E8-46A4-8EC7-D134CA0A3DFA}"/>
               </a:ext>
             </a:extLst>
           </p:cNvPr>
@@ -3667,7 +3667,7 @@
           <p:cNvPr id="6" name="Footer Placeholder 5">
             <a:extLst xmlns:a="http://schemas.openxmlformats.org/drawingml/2006/main">
               <a:ext uri="{FF2B5EF4-FFF2-40B4-BE49-F238E27FC236}">
-                <a16:creationId xmlns:a16="http://schemas.microsoft.com/office/drawing/2014/main" id="{26810874-83D7-4A15-B028-127E7EE373DA}"/>
+                <a16:creationId xmlns:a16="http://schemas.microsoft.com/office/drawing/2014/main" id="{C090C6D8-8935-498F-9710-691E3CED3F07}"/>
               </a:ext>
             </a:extLst>
           </p:cNvPr>
@@ -3690,7 +3690,7 @@
           <p:cNvPr id="7" name="Slide Number Placeholder 6">
             <a:extLst xmlns:a="http://schemas.openxmlformats.org/drawingml/2006/main">
               <a:ext uri="{FF2B5EF4-FFF2-40B4-BE49-F238E27FC236}">
-                <a16:creationId xmlns:a16="http://schemas.microsoft.com/office/drawing/2014/main" id="{BC9DEA2E-77E3-4F48-8A4F-99B6F338278E}"/>
+                <a16:creationId xmlns:a16="http://schemas.microsoft.com/office/drawing/2014/main" id="{9E37F279-EA8B-46D8-9B2B-F3579B9F2509}"/>
               </a:ext>
             </a:extLst>
           </p:cNvPr>
@@ -3734,7 +3734,7 @@
           <p:cNvPr id="2" name="Title 1">
             <a:extLst xmlns:a="http://schemas.openxmlformats.org/drawingml/2006/main">
               <a:ext uri="{FF2B5EF4-FFF2-40B4-BE49-F238E27FC236}">
-                <a16:creationId xmlns:a16="http://schemas.microsoft.com/office/drawing/2014/main" id="{66732305-F312-4790-BEDD-48A24218A6D8}"/>
+                <a16:creationId xmlns:a16="http://schemas.microsoft.com/office/drawing/2014/main" id="{8B70F6CF-2359-42F6-B0F8-86E474A6370D}"/>
               </a:ext>
             </a:extLst>
           </p:cNvPr>
@@ -3771,7 +3771,7 @@
           <p:cNvPr id="3" name="Picture Placeholder 2">
             <a:extLst xmlns:a="http://schemas.openxmlformats.org/drawingml/2006/main">
               <a:ext uri="{FF2B5EF4-FFF2-40B4-BE49-F238E27FC236}">
-                <a16:creationId xmlns:a16="http://schemas.microsoft.com/office/drawing/2014/main" id="{63329489-9E70-496D-A7C0-8363082E8221}"/>
+                <a16:creationId xmlns:a16="http://schemas.microsoft.com/office/drawing/2014/main" id="{E367A0BA-0B90-4EDE-A65A-7A50A506C84A}"/>
               </a:ext>
             </a:extLst>
           </p:cNvPr>
@@ -3836,7 +3836,7 @@
           <p:cNvPr id="4" name="Text Placeholder 3">
             <a:extLst xmlns:a="http://schemas.openxmlformats.org/drawingml/2006/main">
               <a:ext uri="{FF2B5EF4-FFF2-40B4-BE49-F238E27FC236}">
-                <a16:creationId xmlns:a16="http://schemas.microsoft.com/office/drawing/2014/main" id="{572A00A2-0665-4000-A9B8-86DCC9970F5F}"/>
+                <a16:creationId xmlns:a16="http://schemas.microsoft.com/office/drawing/2014/main" id="{C2014CE4-AF00-4F7D-9FD9-EB414BF09608}"/>
               </a:ext>
             </a:extLst>
           </p:cNvPr>
@@ -3908,7 +3908,7 @@
           <p:cNvPr id="5" name="Date Placeholder 4">
             <a:extLst xmlns:a="http://schemas.openxmlformats.org/drawingml/2006/main">
               <a:ext uri="{FF2B5EF4-FFF2-40B4-BE49-F238E27FC236}">
-                <a16:creationId xmlns:a16="http://schemas.microsoft.com/office/drawing/2014/main" id="{8CEAEE43-F6C7-4F68-9D78-30466E2AB9C4}"/>
+                <a16:creationId xmlns:a16="http://schemas.microsoft.com/office/drawing/2014/main" id="{59A782B6-D89E-44A8-9670-45BE9C971B08}"/>
               </a:ext>
             </a:extLst>
           </p:cNvPr>
@@ -3935,7 +3935,7 @@
           <p:cNvPr id="6" name="Footer Placeholder 5">
             <a:extLst xmlns:a="http://schemas.openxmlformats.org/drawingml/2006/main">
               <a:ext uri="{FF2B5EF4-FFF2-40B4-BE49-F238E27FC236}">
-                <a16:creationId xmlns:a16="http://schemas.microsoft.com/office/drawing/2014/main" id="{2B589200-68EC-4EFC-B395-8F2F0925B6D1}"/>
+                <a16:creationId xmlns:a16="http://schemas.microsoft.com/office/drawing/2014/main" id="{9B660529-AFB9-4332-92A1-7BAFA3064DA7}"/>
               </a:ext>
             </a:extLst>
           </p:cNvPr>
@@ -3958,7 +3958,7 @@
           <p:cNvPr id="7" name="Slide Number Placeholder 6">
             <a:extLst xmlns:a="http://schemas.openxmlformats.org/drawingml/2006/main">
               <a:ext uri="{FF2B5EF4-FFF2-40B4-BE49-F238E27FC236}">
-                <a16:creationId xmlns:a16="http://schemas.microsoft.com/office/drawing/2014/main" id="{76A3CA6D-A97C-41DF-A649-5CC4621E8D1E}"/>
+                <a16:creationId xmlns:a16="http://schemas.microsoft.com/office/drawing/2014/main" id="{20779D24-9D3A-41FE-867F-09D648BE3E2F}"/>
               </a:ext>
             </a:extLst>
           </p:cNvPr>
@@ -4007,7 +4007,7 @@
           <p:cNvPr id="2" name="Title Placeholder 1">
             <a:extLst xmlns:a="http://schemas.openxmlformats.org/drawingml/2006/main">
               <a:ext uri="{FF2B5EF4-FFF2-40B4-BE49-F238E27FC236}">
-                <a16:creationId xmlns:a16="http://schemas.microsoft.com/office/drawing/2014/main" id="{9452127C-4609-484A-A4AD-2EBCB0C21AA7}"/>
+                <a16:creationId xmlns:a16="http://schemas.microsoft.com/office/drawing/2014/main" id="{D26A4C47-161B-4DB6-94E0-5415A172588D}"/>
               </a:ext>
             </a:extLst>
           </p:cNvPr>
@@ -4044,7 +4044,7 @@
           <p:cNvPr id="3" name="Text Placeholder 2">
             <a:extLst xmlns:a="http://schemas.openxmlformats.org/drawingml/2006/main">
               <a:ext uri="{FF2B5EF4-FFF2-40B4-BE49-F238E27FC236}">
-                <a16:creationId xmlns:a16="http://schemas.microsoft.com/office/drawing/2014/main" id="{C8111E72-3784-4934-A32A-47BF14304D6B}"/>
+                <a16:creationId xmlns:a16="http://schemas.microsoft.com/office/drawing/2014/main" id="{F7823DAF-7EF3-4E7C-A5C6-B09777977750}"/>
               </a:ext>
             </a:extLst>
           </p:cNvPr>
@@ -4116,7 +4116,7 @@
           <p:cNvPr id="4" name="Date Placeholder 3">
             <a:extLst xmlns:a="http://schemas.openxmlformats.org/drawingml/2006/main">
               <a:ext uri="{FF2B5EF4-FFF2-40B4-BE49-F238E27FC236}">
-                <a16:creationId xmlns:a16="http://schemas.microsoft.com/office/drawing/2014/main" id="{98E2C34D-AF87-426F-BE26-692D9CC27CE4}"/>
+                <a16:creationId xmlns:a16="http://schemas.microsoft.com/office/drawing/2014/main" id="{82A1EF51-BB44-4359-A958-984134C0D3A4}"/>
               </a:ext>
             </a:extLst>
           </p:cNvPr>
@@ -4162,7 +4162,7 @@
           <p:cNvPr id="5" name="Footer Placeholder 4">
             <a:extLst xmlns:a="http://schemas.openxmlformats.org/drawingml/2006/main">
               <a:ext uri="{FF2B5EF4-FFF2-40B4-BE49-F238E27FC236}">
-                <a16:creationId xmlns:a16="http://schemas.microsoft.com/office/drawing/2014/main" id="{AC9A902F-17A1-487D-8C92-96D399172639}"/>
+                <a16:creationId xmlns:a16="http://schemas.microsoft.com/office/drawing/2014/main" id="{441A30E0-3D5B-497D-8131-F28E05A35FE6}"/>
               </a:ext>
             </a:extLst>
           </p:cNvPr>
@@ -4204,7 +4204,7 @@
           <p:cNvPr id="6" name="Slide Number Placeholder 5">
             <a:extLst xmlns:a="http://schemas.openxmlformats.org/drawingml/2006/main">
               <a:ext uri="{FF2B5EF4-FFF2-40B4-BE49-F238E27FC236}">
-                <a16:creationId xmlns:a16="http://schemas.microsoft.com/office/drawing/2014/main" id="{8274C7A8-D717-426A-80BD-CB4E2A8D64CA}"/>
+                <a16:creationId xmlns:a16="http://schemas.microsoft.com/office/drawing/2014/main" id="{D3730456-6B97-4669-84CD-6509C4765223}"/>
               </a:ext>
             </a:extLst>
           </p:cNvPr>
@@ -4249,17 +4249,17 @@
   </p:cSld>
   <p:clrMap bg1="lt1" tx1="dk1" bg2="lt2" tx2="dk2" accent1="accent1" accent2="accent2" accent3="accent3" accent4="accent4" accent5="accent5" accent6="accent6" hlink="hlink" folHlink="folHlink"/>
   <p:sldLayoutIdLst>
-    <p:sldLayoutId xmlns:r="http://schemas.openxmlformats.org/officeDocument/2006/relationships" id="2147483649" r:id="Rd9b523ba731e4f72"/>
-    <p:sldLayoutId xmlns:r="http://schemas.openxmlformats.org/officeDocument/2006/relationships" id="2147483650" r:id="R88f7ba3261a248f0"/>
-    <p:sldLayoutId xmlns:r="http://schemas.openxmlformats.org/officeDocument/2006/relationships" id="2147483651" r:id="R05529189b5604d4c"/>
-    <p:sldLayoutId xmlns:r="http://schemas.openxmlformats.org/officeDocument/2006/relationships" id="2147483652" r:id="R9707fa31482b47de"/>
-    <p:sldLayoutId xmlns:r="http://schemas.openxmlformats.org/officeDocument/2006/relationships" id="2147483653" r:id="R3a9f354f05894932"/>
-    <p:sldLayoutId xmlns:r="http://schemas.openxmlformats.org/officeDocument/2006/relationships" id="2147483654" r:id="Rd497ab22358a4475"/>
-    <p:sldLayoutId xmlns:r="http://schemas.openxmlformats.org/officeDocument/2006/relationships" id="2147483655" r:id="R3ff4fad01e124fbb"/>
-    <p:sldLayoutId xmlns:r="http://schemas.openxmlformats.org/officeDocument/2006/relationships" id="2147483656" r:id="R1011b353509b4e2b"/>
-    <p:sldLayoutId xmlns:r="http://schemas.openxmlformats.org/officeDocument/2006/relationships" id="2147483657" r:id="Rb92be743f0c347b0"/>
-    <p:sldLayoutId xmlns:r="http://schemas.openxmlformats.org/officeDocument/2006/relationships" id="2147483658" r:id="Rc944af5701034968"/>
-    <p:sldLayoutId xmlns:r="http://schemas.openxmlformats.org/officeDocument/2006/relationships" id="2147483659" r:id="R878b9f3751f64e12"/>
+    <p:sldLayoutId xmlns:r="http://schemas.openxmlformats.org/officeDocument/2006/relationships" id="2147483649" r:id="Rb97f598ddda14e36"/>
+    <p:sldLayoutId xmlns:r="http://schemas.openxmlformats.org/officeDocument/2006/relationships" id="2147483650" r:id="R9aa6838e3b214905"/>
+    <p:sldLayoutId xmlns:r="http://schemas.openxmlformats.org/officeDocument/2006/relationships" id="2147483651" r:id="R757e1e8d5de144de"/>
+    <p:sldLayoutId xmlns:r="http://schemas.openxmlformats.org/officeDocument/2006/relationships" id="2147483652" r:id="R9017ee44000d4501"/>
+    <p:sldLayoutId xmlns:r="http://schemas.openxmlformats.org/officeDocument/2006/relationships" id="2147483653" r:id="R6a44c15d9aa042c8"/>
+    <p:sldLayoutId xmlns:r="http://schemas.openxmlformats.org/officeDocument/2006/relationships" id="2147483654" r:id="R4a03000df729458f"/>
+    <p:sldLayoutId xmlns:r="http://schemas.openxmlformats.org/officeDocument/2006/relationships" id="2147483655" r:id="Refc51bd0aae14f7a"/>
+    <p:sldLayoutId xmlns:r="http://schemas.openxmlformats.org/officeDocument/2006/relationships" id="2147483656" r:id="R53af6b452429480b"/>
+    <p:sldLayoutId xmlns:r="http://schemas.openxmlformats.org/officeDocument/2006/relationships" id="2147483657" r:id="R6729639de2fe4094"/>
+    <p:sldLayoutId xmlns:r="http://schemas.openxmlformats.org/officeDocument/2006/relationships" id="2147483658" r:id="R7626a200fe25443e"/>
+    <p:sldLayoutId xmlns:r="http://schemas.openxmlformats.org/officeDocument/2006/relationships" id="2147483659" r:id="R880e9ed492974410"/>
   </p:sldLayoutIdLst>
   <p:txStyles>
     <p:titleStyle>
@@ -4812,7 +4812,7 @@
           <p:cNvPr id="2" name="Rectangle 1">
             <a:extLst xmlns:a="http://schemas.openxmlformats.org/drawingml/2006/main">
               <a:ext uri="{FF2B5EF4-FFF2-40B4-BE49-F238E27FC236}">
-                <a16:creationId xmlns:a16="http://schemas.microsoft.com/office/drawing/2014/main" id="{6C647061-5120-4822-A2E7-410E2FD6190A}"/>
+                <a16:creationId xmlns:a16="http://schemas.microsoft.com/office/drawing/2014/main" id="{462D8198-D8DB-4474-A5C1-3DF6F44D2D3A}"/>
               </a:ext>
             </a:extLst>
           </p:cNvPr>
@@ -4867,7 +4867,7 @@
           <p:cNvPr id="3" name="TextBox 2">
             <a:extLst xmlns:a="http://schemas.openxmlformats.org/drawingml/2006/main">
               <a:ext uri="{FF2B5EF4-FFF2-40B4-BE49-F238E27FC236}">
-                <a16:creationId xmlns:a16="http://schemas.microsoft.com/office/drawing/2014/main" id="{AB6B4D25-BDB8-481B-B775-539B6A7451E7}"/>
+                <a16:creationId xmlns:a16="http://schemas.microsoft.com/office/drawing/2014/main" id="{04FA1AA0-32C2-4D3F-87C4-CBE4839CAE72}"/>
               </a:ext>
             </a:extLst>
           </p:cNvPr>
@@ -4914,7 +4914,7 @@
           <p:cNvPr id="4" name="TextBox 3">
             <a:extLst xmlns:a="http://schemas.openxmlformats.org/drawingml/2006/main">
               <a:ext uri="{FF2B5EF4-FFF2-40B4-BE49-F238E27FC236}">
-                <a16:creationId xmlns:a16="http://schemas.microsoft.com/office/drawing/2014/main" id="{12E54FB1-85F3-4A8D-BDB4-E07E55226D8B}"/>
+                <a16:creationId xmlns:a16="http://schemas.microsoft.com/office/drawing/2014/main" id="{FF4D3F4B-5645-4EB1-9A1E-FBB28376D409}"/>
               </a:ext>
             </a:extLst>
           </p:cNvPr>
@@ -4982,7 +4982,7 @@
           <p:cNvPr id="5" name="TextBox 4">
             <a:extLst xmlns:a="http://schemas.openxmlformats.org/drawingml/2006/main">
               <a:ext uri="{FF2B5EF4-FFF2-40B4-BE49-F238E27FC236}">
-                <a16:creationId xmlns:a16="http://schemas.microsoft.com/office/drawing/2014/main" id="{6CF0F702-EB46-4D3C-9F4E-30D0F45EDBF3}"/>
+                <a16:creationId xmlns:a16="http://schemas.microsoft.com/office/drawing/2014/main" id="{56730E36-569C-48E2-8544-7BF4CFA88639}"/>
               </a:ext>
             </a:extLst>
           </p:cNvPr>
@@ -5029,7 +5029,7 @@
           <p:cNvPr id="6" name="Rectangle 5">
             <a:extLst xmlns:a="http://schemas.openxmlformats.org/drawingml/2006/main">
               <a:ext uri="{FF2B5EF4-FFF2-40B4-BE49-F238E27FC236}">
-                <a16:creationId xmlns:a16="http://schemas.microsoft.com/office/drawing/2014/main" id="{16471808-1172-442D-A0C3-7B741946D5EB}"/>
+                <a16:creationId xmlns:a16="http://schemas.microsoft.com/office/drawing/2014/main" id="{68158E07-89DB-4DE7-86D4-4932CB228086}"/>
               </a:ext>
             </a:extLst>
           </p:cNvPr>
@@ -5084,7 +5084,7 @@
           <p:cNvPr id="7" name="TextBox 6">
             <a:extLst xmlns:a="http://schemas.openxmlformats.org/drawingml/2006/main">
               <a:ext uri="{FF2B5EF4-FFF2-40B4-BE49-F238E27FC236}">
-                <a16:creationId xmlns:a16="http://schemas.microsoft.com/office/drawing/2014/main" id="{C3BD5879-2B25-4B4E-A7CD-F0918F31D3B2}"/>
+                <a16:creationId xmlns:a16="http://schemas.microsoft.com/office/drawing/2014/main" id="{675DBE5A-9DCB-4792-A345-4214E65A6620}"/>
               </a:ext>
             </a:extLst>
           </p:cNvPr>
@@ -5131,7 +5131,7 @@
           <p:cNvPr id="8" name="TextBox 7">
             <a:extLst xmlns:a="http://schemas.openxmlformats.org/drawingml/2006/main">
               <a:ext uri="{FF2B5EF4-FFF2-40B4-BE49-F238E27FC236}">
-                <a16:creationId xmlns:a16="http://schemas.microsoft.com/office/drawing/2014/main" id="{74597E43-1770-44F2-B508-755ED9EF4D1E}"/>
+                <a16:creationId xmlns:a16="http://schemas.microsoft.com/office/drawing/2014/main" id="{7A979EB6-B654-4BB1-A52D-5A47E80C29CD}"/>
               </a:ext>
             </a:extLst>
           </p:cNvPr>
@@ -5168,7 +5168,7 @@
                 <a:ea typeface="Aptos"/>
                 <a:cs typeface="Aptos"/>
               </a:rPr>
-              <a:t>2026.07.23-13</a:t>
+              <a:t>2026.07.23-14</a:t>
             </a:r>
           </a:p>
         </p:txBody>
@@ -5178,7 +5178,7 @@
           <p:cNvPr id="9" name="TextBox 8">
             <a:extLst xmlns:a="http://schemas.openxmlformats.org/drawingml/2006/main">
               <a:ext uri="{FF2B5EF4-FFF2-40B4-BE49-F238E27FC236}">
-                <a16:creationId xmlns:a16="http://schemas.microsoft.com/office/drawing/2014/main" id="{3D1B351E-C2A8-4F7E-AB3E-EAD62802EFCB}"/>
+                <a16:creationId xmlns:a16="http://schemas.microsoft.com/office/drawing/2014/main" id="{09DAF9D7-D7C6-4108-914C-49CAE06F6BDD}"/>
               </a:ext>
             </a:extLst>
           </p:cNvPr>
@@ -5246,7 +5246,7 @@
           <p:cNvPr id="10" name="TextBox 9">
             <a:extLst xmlns:a="http://schemas.openxmlformats.org/drawingml/2006/main">
               <a:ext uri="{FF2B5EF4-FFF2-40B4-BE49-F238E27FC236}">
-                <a16:creationId xmlns:a16="http://schemas.microsoft.com/office/drawing/2014/main" id="{449A131E-22B0-41F3-B015-E8997B8E49FD}"/>
+                <a16:creationId xmlns:a16="http://schemas.microsoft.com/office/drawing/2014/main" id="{44FE5C2B-6C80-40EB-A1B0-40D8F9F5C88C}"/>
               </a:ext>
             </a:extLst>
           </p:cNvPr>
@@ -5293,7 +5293,7 @@
           <p:cNvPr id="11" name="TextBox 10">
             <a:extLst xmlns:a="http://schemas.openxmlformats.org/drawingml/2006/main">
               <a:ext uri="{FF2B5EF4-FFF2-40B4-BE49-F238E27FC236}">
-                <a16:creationId xmlns:a16="http://schemas.microsoft.com/office/drawing/2014/main" id="{251A6F3E-D22D-4C8D-BBA3-88F9D34D020F}"/>
+                <a16:creationId xmlns:a16="http://schemas.microsoft.com/office/drawing/2014/main" id="{0C159203-EB2C-4A46-915C-D2AED7B1E4B3}"/>
               </a:ext>
             </a:extLst>
           </p:cNvPr>
@@ -5340,7 +5340,7 @@
           <p:cNvPr id="12" name="TextBox 11">
             <a:extLst xmlns:a="http://schemas.openxmlformats.org/drawingml/2006/main">
               <a:ext uri="{FF2B5EF4-FFF2-40B4-BE49-F238E27FC236}">
-                <a16:creationId xmlns:a16="http://schemas.microsoft.com/office/drawing/2014/main" id="{25856CC7-F734-4B24-8E40-8AEF869383A0}"/>
+                <a16:creationId xmlns:a16="http://schemas.microsoft.com/office/drawing/2014/main" id="{34CC5207-358F-42BA-A6AF-671CB3F686CC}"/>
               </a:ext>
             </a:extLst>
           </p:cNvPr>
@@ -5387,7 +5387,7 @@
           <p:cNvPr id="13" name="TextBox 12">
             <a:extLst xmlns:a="http://schemas.openxmlformats.org/drawingml/2006/main">
               <a:ext uri="{FF2B5EF4-FFF2-40B4-BE49-F238E27FC236}">
-                <a16:creationId xmlns:a16="http://schemas.microsoft.com/office/drawing/2014/main" id="{C0D9C1BA-9778-4414-A398-6DE4206A7C3E}"/>
+                <a16:creationId xmlns:a16="http://schemas.microsoft.com/office/drawing/2014/main" id="{6CD166D1-6CD5-4B78-9064-AA5C282DE09A}"/>
               </a:ext>
             </a:extLst>
           </p:cNvPr>
@@ -5432,7 +5432,7 @@
     </p:spTree>
     <p:extLst>
       <p:ext uri="{BB962C8B-B14F-4D97-AF65-F5344CB8AC3E}">
-        <p14:creationId xmlns:p14="http://schemas.microsoft.com/office/powerpoint/2010/main" val="1238079466"/>
+        <p14:creationId xmlns:p14="http://schemas.microsoft.com/office/powerpoint/2010/main" val="1564655156"/>
       </p:ext>
     </p:extLst>
   </p:cSld>
@@ -5456,7 +5456,7 @@
           <p:cNvPr id="2" name="TextBox 1">
             <a:extLst xmlns:a="http://schemas.openxmlformats.org/drawingml/2006/main">
               <a:ext uri="{FF2B5EF4-FFF2-40B4-BE49-F238E27FC236}">
-                <a16:creationId xmlns:a16="http://schemas.microsoft.com/office/drawing/2014/main" id="{3F5B6711-6E61-46C7-8C5F-46F63A77D2C1}"/>
+                <a16:creationId xmlns:a16="http://schemas.microsoft.com/office/drawing/2014/main" id="{EA99D455-4F11-4E89-B609-DB43BC120DBF}"/>
               </a:ext>
             </a:extLst>
           </p:cNvPr>
@@ -5503,7 +5503,7 @@
           <p:cNvPr id="3" name="TextBox 2">
             <a:extLst xmlns:a="http://schemas.openxmlformats.org/drawingml/2006/main">
               <a:ext uri="{FF2B5EF4-FFF2-40B4-BE49-F238E27FC236}">
-                <a16:creationId xmlns:a16="http://schemas.microsoft.com/office/drawing/2014/main" id="{1AB25294-9FF7-4150-BAA9-E77BD607C116}"/>
+                <a16:creationId xmlns:a16="http://schemas.microsoft.com/office/drawing/2014/main" id="{3C025A2C-FDF3-4242-BDD8-BE4E6792BAE2}"/>
               </a:ext>
             </a:extLst>
           </p:cNvPr>
@@ -5550,7 +5550,7 @@
           <p:cNvPr id="4" name="Rectangle 3">
             <a:extLst xmlns:a="http://schemas.openxmlformats.org/drawingml/2006/main">
               <a:ext uri="{FF2B5EF4-FFF2-40B4-BE49-F238E27FC236}">
-                <a16:creationId xmlns:a16="http://schemas.microsoft.com/office/drawing/2014/main" id="{F5A95906-EBBD-4A92-A31D-9E7052C1ECE7}"/>
+                <a16:creationId xmlns:a16="http://schemas.microsoft.com/office/drawing/2014/main" id="{377EF8A5-4A3D-4ADB-9C54-9186C909DF78}"/>
               </a:ext>
             </a:extLst>
           </p:cNvPr>
@@ -5605,7 +5605,7 @@
           <p:cNvPr id="5" name="Rectangle 4">
             <a:extLst xmlns:a="http://schemas.openxmlformats.org/drawingml/2006/main">
               <a:ext uri="{FF2B5EF4-FFF2-40B4-BE49-F238E27FC236}">
-                <a16:creationId xmlns:a16="http://schemas.microsoft.com/office/drawing/2014/main" id="{CC011A26-8545-4F1E-B9BF-8E12FFAAEAAA}"/>
+                <a16:creationId xmlns:a16="http://schemas.microsoft.com/office/drawing/2014/main" id="{0EAE3271-43BE-4F9C-9A36-F89D17B0498D}"/>
               </a:ext>
             </a:extLst>
           </p:cNvPr>
@@ -5660,7 +5660,7 @@
           <p:cNvPr id="6" name="TextBox 5">
             <a:extLst xmlns:a="http://schemas.openxmlformats.org/drawingml/2006/main">
               <a:ext uri="{FF2B5EF4-FFF2-40B4-BE49-F238E27FC236}">
-                <a16:creationId xmlns:a16="http://schemas.microsoft.com/office/drawing/2014/main" id="{8635D2D5-8629-4C98-B04E-9DF7167C9E9A}"/>
+                <a16:creationId xmlns:a16="http://schemas.microsoft.com/office/drawing/2014/main" id="{6603A9F1-6A62-478E-B3BE-E6C59BE33727}"/>
               </a:ext>
             </a:extLst>
           </p:cNvPr>
@@ -5697,7 +5697,7 @@
                 <a:ea typeface="Aptos"/>
                 <a:cs typeface="Aptos"/>
               </a:rPr>
-              <a:t>Independent public evidence summary · 2026.07.23-13 · 2026-07-22 · Sources: WIPO licensing; dispute resolution; IPscore</a:t>
+              <a:t>Independent public evidence summary · 2026.07.23-14 · 2026-07-22 · Sources: WIPO licensing; dispute resolution; IPscore</a:t>
             </a:r>
           </a:p>
         </p:txBody>
@@ -5707,7 +5707,7 @@
           <p:cNvPr id="7" name="TextBox 6">
             <a:extLst xmlns:a="http://schemas.openxmlformats.org/drawingml/2006/main">
               <a:ext uri="{FF2B5EF4-FFF2-40B4-BE49-F238E27FC236}">
-                <a16:creationId xmlns:a16="http://schemas.microsoft.com/office/drawing/2014/main" id="{A068D596-C40D-4326-949D-3A6B399D067E}"/>
+                <a16:creationId xmlns:a16="http://schemas.microsoft.com/office/drawing/2014/main" id="{95F824AB-B30B-4610-8177-815AEBAC8179}"/>
               </a:ext>
             </a:extLst>
           </p:cNvPr>
@@ -5754,7 +5754,7 @@
           <p:cNvPr id="8" name="Rounded Rectangle 7">
             <a:extLst xmlns:a="http://schemas.openxmlformats.org/drawingml/2006/main">
               <a:ext uri="{FF2B5EF4-FFF2-40B4-BE49-F238E27FC236}">
-                <a16:creationId xmlns:a16="http://schemas.microsoft.com/office/drawing/2014/main" id="{F045A03D-E9A4-4319-946D-B837955C580C}"/>
+                <a16:creationId xmlns:a16="http://schemas.microsoft.com/office/drawing/2014/main" id="{72BD0B32-A3C7-461A-8406-151153C4BA49}"/>
               </a:ext>
             </a:extLst>
           </p:cNvPr>
@@ -5811,7 +5811,7 @@
           <p:cNvPr id="9" name="TextBox 8">
             <a:extLst xmlns:a="http://schemas.openxmlformats.org/drawingml/2006/main">
               <a:ext uri="{FF2B5EF4-FFF2-40B4-BE49-F238E27FC236}">
-                <a16:creationId xmlns:a16="http://schemas.microsoft.com/office/drawing/2014/main" id="{50743251-B71A-4488-B4FE-8FA6CBB48EE4}"/>
+                <a16:creationId xmlns:a16="http://schemas.microsoft.com/office/drawing/2014/main" id="{40D080F8-72F6-47BD-B925-3A93199689AF}"/>
               </a:ext>
             </a:extLst>
           </p:cNvPr>
@@ -5858,7 +5858,7 @@
           <p:cNvPr id="10" name="TextBox 9">
             <a:extLst xmlns:a="http://schemas.openxmlformats.org/drawingml/2006/main">
               <a:ext uri="{FF2B5EF4-FFF2-40B4-BE49-F238E27FC236}">
-                <a16:creationId xmlns:a16="http://schemas.microsoft.com/office/drawing/2014/main" id="{C0E60873-1883-4494-A5FB-1C00F1526AFC}"/>
+                <a16:creationId xmlns:a16="http://schemas.microsoft.com/office/drawing/2014/main" id="{97FC646E-D160-4DE7-9065-9AFE8807EEBF}"/>
               </a:ext>
             </a:extLst>
           </p:cNvPr>
@@ -5905,7 +5905,7 @@
           <p:cNvPr id="11" name="TextBox 10">
             <a:extLst xmlns:a="http://schemas.openxmlformats.org/drawingml/2006/main">
               <a:ext uri="{FF2B5EF4-FFF2-40B4-BE49-F238E27FC236}">
-                <a16:creationId xmlns:a16="http://schemas.microsoft.com/office/drawing/2014/main" id="{7938744F-44F6-49CA-A3CB-6B88395E496F}"/>
+                <a16:creationId xmlns:a16="http://schemas.microsoft.com/office/drawing/2014/main" id="{D7FCAE4D-6663-4FB5-BFD4-1AEBD13DF308}"/>
               </a:ext>
             </a:extLst>
           </p:cNvPr>
@@ -5952,7 +5952,7 @@
           <p:cNvPr id="12" name="Rounded Rectangle 11">
             <a:extLst xmlns:a="http://schemas.openxmlformats.org/drawingml/2006/main">
               <a:ext uri="{FF2B5EF4-FFF2-40B4-BE49-F238E27FC236}">
-                <a16:creationId xmlns:a16="http://schemas.microsoft.com/office/drawing/2014/main" id="{2F56A2C0-5876-40F0-B142-97405253FB74}"/>
+                <a16:creationId xmlns:a16="http://schemas.microsoft.com/office/drawing/2014/main" id="{5D33F8A8-C897-4BB0-A6AD-13807C2F41C4}"/>
               </a:ext>
             </a:extLst>
           </p:cNvPr>
@@ -6009,7 +6009,7 @@
           <p:cNvPr id="13" name="TextBox 12">
             <a:extLst xmlns:a="http://schemas.openxmlformats.org/drawingml/2006/main">
               <a:ext uri="{FF2B5EF4-FFF2-40B4-BE49-F238E27FC236}">
-                <a16:creationId xmlns:a16="http://schemas.microsoft.com/office/drawing/2014/main" id="{DF8E7BE8-1EA1-439A-9272-0617C12905C1}"/>
+                <a16:creationId xmlns:a16="http://schemas.microsoft.com/office/drawing/2014/main" id="{EB2CB6EF-3F80-401C-8388-8BB18B0CF632}"/>
               </a:ext>
             </a:extLst>
           </p:cNvPr>
@@ -6056,7 +6056,7 @@
           <p:cNvPr id="14" name="TextBox 13">
             <a:extLst xmlns:a="http://schemas.openxmlformats.org/drawingml/2006/main">
               <a:ext uri="{FF2B5EF4-FFF2-40B4-BE49-F238E27FC236}">
-                <a16:creationId xmlns:a16="http://schemas.microsoft.com/office/drawing/2014/main" id="{FA18730E-9553-42E7-8FCE-67D17A8AC67C}"/>
+                <a16:creationId xmlns:a16="http://schemas.microsoft.com/office/drawing/2014/main" id="{18D9F77E-7793-42A2-B677-9E91DFF7A133}"/>
               </a:ext>
             </a:extLst>
           </p:cNvPr>
@@ -6103,7 +6103,7 @@
           <p:cNvPr id="15" name="TextBox 14">
             <a:extLst xmlns:a="http://schemas.openxmlformats.org/drawingml/2006/main">
               <a:ext uri="{FF2B5EF4-FFF2-40B4-BE49-F238E27FC236}">
-                <a16:creationId xmlns:a16="http://schemas.microsoft.com/office/drawing/2014/main" id="{289877BA-8AD5-4FD3-8519-6D615AB54812}"/>
+                <a16:creationId xmlns:a16="http://schemas.microsoft.com/office/drawing/2014/main" id="{5B16DC79-DC32-4551-BAE9-061C484C6695}"/>
               </a:ext>
             </a:extLst>
           </p:cNvPr>
@@ -6150,7 +6150,7 @@
           <p:cNvPr id="16" name="Rounded Rectangle 15">
             <a:extLst xmlns:a="http://schemas.openxmlformats.org/drawingml/2006/main">
               <a:ext uri="{FF2B5EF4-FFF2-40B4-BE49-F238E27FC236}">
-                <a16:creationId xmlns:a16="http://schemas.microsoft.com/office/drawing/2014/main" id="{52AAC58E-9737-4304-83DF-A179567FFADE}"/>
+                <a16:creationId xmlns:a16="http://schemas.microsoft.com/office/drawing/2014/main" id="{5FEA61BF-A004-4BAC-A941-7193A1DFEB22}"/>
               </a:ext>
             </a:extLst>
           </p:cNvPr>
@@ -6207,7 +6207,7 @@
           <p:cNvPr id="17" name="TextBox 16">
             <a:extLst xmlns:a="http://schemas.openxmlformats.org/drawingml/2006/main">
               <a:ext uri="{FF2B5EF4-FFF2-40B4-BE49-F238E27FC236}">
-                <a16:creationId xmlns:a16="http://schemas.microsoft.com/office/drawing/2014/main" id="{ABD910CB-6754-47A6-90CD-236066772718}"/>
+                <a16:creationId xmlns:a16="http://schemas.microsoft.com/office/drawing/2014/main" id="{38B0EFEA-9D0E-49AF-AD8A-B2F350BD0786}"/>
               </a:ext>
             </a:extLst>
           </p:cNvPr>
@@ -6254,7 +6254,7 @@
           <p:cNvPr id="18" name="TextBox 17">
             <a:extLst xmlns:a="http://schemas.openxmlformats.org/drawingml/2006/main">
               <a:ext uri="{FF2B5EF4-FFF2-40B4-BE49-F238E27FC236}">
-                <a16:creationId xmlns:a16="http://schemas.microsoft.com/office/drawing/2014/main" id="{E7956349-725B-4537-B1E6-15EF05F81E58}"/>
+                <a16:creationId xmlns:a16="http://schemas.microsoft.com/office/drawing/2014/main" id="{ABC20487-8C8A-4E6D-A1ED-4A5490FB7FAA}"/>
               </a:ext>
             </a:extLst>
           </p:cNvPr>
@@ -6301,7 +6301,7 @@
           <p:cNvPr id="19" name="TextBox 18">
             <a:extLst xmlns:a="http://schemas.openxmlformats.org/drawingml/2006/main">
               <a:ext uri="{FF2B5EF4-FFF2-40B4-BE49-F238E27FC236}">
-                <a16:creationId xmlns:a16="http://schemas.microsoft.com/office/drawing/2014/main" id="{3A8C93A0-9ED8-46F2-9B4F-8558CAF471D9}"/>
+                <a16:creationId xmlns:a16="http://schemas.microsoft.com/office/drawing/2014/main" id="{F761F76A-67CE-44CB-94FE-E0919073728C}"/>
               </a:ext>
             </a:extLst>
           </p:cNvPr>
@@ -6348,7 +6348,7 @@
           <p:cNvPr id="20" name="Rounded Rectangle 19">
             <a:extLst xmlns:a="http://schemas.openxmlformats.org/drawingml/2006/main">
               <a:ext uri="{FF2B5EF4-FFF2-40B4-BE49-F238E27FC236}">
-                <a16:creationId xmlns:a16="http://schemas.microsoft.com/office/drawing/2014/main" id="{7A95EB11-B0ED-422D-B432-71F70D9897A6}"/>
+                <a16:creationId xmlns:a16="http://schemas.microsoft.com/office/drawing/2014/main" id="{26DA0DF6-0BF1-4243-85D7-5D5946B4CC3A}"/>
               </a:ext>
             </a:extLst>
           </p:cNvPr>
@@ -6405,7 +6405,7 @@
           <p:cNvPr id="21" name="TextBox 20">
             <a:extLst xmlns:a="http://schemas.openxmlformats.org/drawingml/2006/main">
               <a:ext uri="{FF2B5EF4-FFF2-40B4-BE49-F238E27FC236}">
-                <a16:creationId xmlns:a16="http://schemas.microsoft.com/office/drawing/2014/main" id="{D3B9B376-011B-4597-8558-16B6B5AE356B}"/>
+                <a16:creationId xmlns:a16="http://schemas.microsoft.com/office/drawing/2014/main" id="{1D34C59D-1371-4D7D-916C-0DC46F44B0FB}"/>
               </a:ext>
             </a:extLst>
           </p:cNvPr>
@@ -6452,7 +6452,7 @@
           <p:cNvPr id="22" name="TextBox 21">
             <a:extLst xmlns:a="http://schemas.openxmlformats.org/drawingml/2006/main">
               <a:ext uri="{FF2B5EF4-FFF2-40B4-BE49-F238E27FC236}">
-                <a16:creationId xmlns:a16="http://schemas.microsoft.com/office/drawing/2014/main" id="{A73A5BC1-5616-48C3-9AC6-3B7620EC8C42}"/>
+                <a16:creationId xmlns:a16="http://schemas.microsoft.com/office/drawing/2014/main" id="{CF5C0B36-3753-4F53-8E62-569C3BE0FE6C}"/>
               </a:ext>
             </a:extLst>
           </p:cNvPr>
@@ -6499,7 +6499,7 @@
           <p:cNvPr id="23" name="TextBox 22">
             <a:extLst xmlns:a="http://schemas.openxmlformats.org/drawingml/2006/main">
               <a:ext uri="{FF2B5EF4-FFF2-40B4-BE49-F238E27FC236}">
-                <a16:creationId xmlns:a16="http://schemas.microsoft.com/office/drawing/2014/main" id="{A3090555-F118-46C9-86F6-FA6922F26344}"/>
+                <a16:creationId xmlns:a16="http://schemas.microsoft.com/office/drawing/2014/main" id="{A8347914-0FE6-404A-B224-22A757EE9E6B}"/>
               </a:ext>
             </a:extLst>
           </p:cNvPr>
@@ -6546,7 +6546,7 @@
           <p:cNvPr id="24" name="TextBox 23">
             <a:extLst xmlns:a="http://schemas.openxmlformats.org/drawingml/2006/main">
               <a:ext uri="{FF2B5EF4-FFF2-40B4-BE49-F238E27FC236}">
-                <a16:creationId xmlns:a16="http://schemas.microsoft.com/office/drawing/2014/main" id="{9A0AFA76-EE0C-48D8-898E-0E6B308F981E}"/>
+                <a16:creationId xmlns:a16="http://schemas.microsoft.com/office/drawing/2014/main" id="{1C538345-09F7-423F-943B-CF56516C0001}"/>
               </a:ext>
             </a:extLst>
           </p:cNvPr>
@@ -6591,7 +6591,7 @@
     </p:spTree>
     <p:extLst>
       <p:ext uri="{BB962C8B-B14F-4D97-AF65-F5344CB8AC3E}">
-        <p14:creationId xmlns:p14="http://schemas.microsoft.com/office/powerpoint/2010/main" val="1908788119"/>
+        <p14:creationId xmlns:p14="http://schemas.microsoft.com/office/powerpoint/2010/main" val="1339007908"/>
       </p:ext>
     </p:extLst>
   </p:cSld>
@@ -6615,7 +6615,7 @@
           <p:cNvPr id="2" name="TextBox 1">
             <a:extLst xmlns:a="http://schemas.openxmlformats.org/drawingml/2006/main">
               <a:ext uri="{FF2B5EF4-FFF2-40B4-BE49-F238E27FC236}">
-                <a16:creationId xmlns:a16="http://schemas.microsoft.com/office/drawing/2014/main" id="{88ECB53F-013E-47BD-99CF-DBC355DD9D5C}"/>
+                <a16:creationId xmlns:a16="http://schemas.microsoft.com/office/drawing/2014/main" id="{881DE902-703B-4F69-98B2-52093EDBE340}"/>
               </a:ext>
             </a:extLst>
           </p:cNvPr>
@@ -6662,7 +6662,7 @@
           <p:cNvPr id="3" name="TextBox 2">
             <a:extLst xmlns:a="http://schemas.openxmlformats.org/drawingml/2006/main">
               <a:ext uri="{FF2B5EF4-FFF2-40B4-BE49-F238E27FC236}">
-                <a16:creationId xmlns:a16="http://schemas.microsoft.com/office/drawing/2014/main" id="{70B24598-EFF9-4BF0-A62B-D8F45BEEC775}"/>
+                <a16:creationId xmlns:a16="http://schemas.microsoft.com/office/drawing/2014/main" id="{C3DA8A09-677D-4456-9237-97502BC8B718}"/>
               </a:ext>
             </a:extLst>
           </p:cNvPr>
@@ -6709,7 +6709,7 @@
           <p:cNvPr id="4" name="Rectangle 3">
             <a:extLst xmlns:a="http://schemas.openxmlformats.org/drawingml/2006/main">
               <a:ext uri="{FF2B5EF4-FFF2-40B4-BE49-F238E27FC236}">
-                <a16:creationId xmlns:a16="http://schemas.microsoft.com/office/drawing/2014/main" id="{1D3C2A99-F868-4F55-8819-8A471CC74DC2}"/>
+                <a16:creationId xmlns:a16="http://schemas.microsoft.com/office/drawing/2014/main" id="{0EEB8978-8B12-411A-B407-2879653C0344}"/>
               </a:ext>
             </a:extLst>
           </p:cNvPr>
@@ -6764,7 +6764,7 @@
           <p:cNvPr id="5" name="Rectangle 4">
             <a:extLst xmlns:a="http://schemas.openxmlformats.org/drawingml/2006/main">
               <a:ext uri="{FF2B5EF4-FFF2-40B4-BE49-F238E27FC236}">
-                <a16:creationId xmlns:a16="http://schemas.microsoft.com/office/drawing/2014/main" id="{EA49BC16-915F-473E-86C8-9F7CCBABBFC9}"/>
+                <a16:creationId xmlns:a16="http://schemas.microsoft.com/office/drawing/2014/main" id="{507809A9-C016-4890-96C7-51D5FE361041}"/>
               </a:ext>
             </a:extLst>
           </p:cNvPr>
@@ -6819,7 +6819,7 @@
           <p:cNvPr id="6" name="TextBox 5">
             <a:extLst xmlns:a="http://schemas.openxmlformats.org/drawingml/2006/main">
               <a:ext uri="{FF2B5EF4-FFF2-40B4-BE49-F238E27FC236}">
-                <a16:creationId xmlns:a16="http://schemas.microsoft.com/office/drawing/2014/main" id="{8536198C-E7E9-4F3F-B071-CB9960A211A8}"/>
+                <a16:creationId xmlns:a16="http://schemas.microsoft.com/office/drawing/2014/main" id="{C3BBAAB2-F288-475C-A57E-0D6A3CE57112}"/>
               </a:ext>
             </a:extLst>
           </p:cNvPr>
@@ -6856,7 +6856,7 @@
                 <a:ea typeface="Aptos"/>
                 <a:cs typeface="Aptos"/>
               </a:rPr>
-              <a:t>Independent public evidence summary · 2026.07.23-13 · 2026-07-22 · Sources: WIPO IP valuation; Market-values</a:t>
+              <a:t>Independent public evidence summary · 2026.07.23-14 · 2026-07-22 · Sources: WIPO IP valuation; Market-values</a:t>
             </a:r>
           </a:p>
         </p:txBody>
@@ -6866,7 +6866,7 @@
           <p:cNvPr id="7" name="TextBox 6">
             <a:extLst xmlns:a="http://schemas.openxmlformats.org/drawingml/2006/main">
               <a:ext uri="{FF2B5EF4-FFF2-40B4-BE49-F238E27FC236}">
-                <a16:creationId xmlns:a16="http://schemas.microsoft.com/office/drawing/2014/main" id="{F43871FD-23A8-4F42-8038-AFB72727D2B0}"/>
+                <a16:creationId xmlns:a16="http://schemas.microsoft.com/office/drawing/2014/main" id="{88638B8D-0725-4315-A5BA-2EDB3CBDCFAE}"/>
               </a:ext>
             </a:extLst>
           </p:cNvPr>
@@ -7436,7 +7436,7 @@
           <p:cNvPr id="9" name="TextBox 8">
             <a:extLst xmlns:a="http://schemas.openxmlformats.org/drawingml/2006/main">
               <a:ext uri="{FF2B5EF4-FFF2-40B4-BE49-F238E27FC236}">
-                <a16:creationId xmlns:a16="http://schemas.microsoft.com/office/drawing/2014/main" id="{D4053663-FB7B-4105-A497-25A8D7E3CC23}"/>
+                <a16:creationId xmlns:a16="http://schemas.microsoft.com/office/drawing/2014/main" id="{5C973054-C124-473C-BAEF-FC3A04833EBD}"/>
               </a:ext>
             </a:extLst>
           </p:cNvPr>
@@ -7481,7 +7481,7 @@
     </p:spTree>
     <p:extLst>
       <p:ext uri="{BB962C8B-B14F-4D97-AF65-F5344CB8AC3E}">
-        <p14:creationId xmlns:p14="http://schemas.microsoft.com/office/powerpoint/2010/main" val="2124930073"/>
+        <p14:creationId xmlns:p14="http://schemas.microsoft.com/office/powerpoint/2010/main" val="90319004"/>
       </p:ext>
     </p:extLst>
   </p:cSld>
@@ -7512,7 +7512,7 @@
           <p:cNvPr id="2" name="TextBox 1">
             <a:extLst xmlns:a="http://schemas.openxmlformats.org/drawingml/2006/main">
               <a:ext uri="{FF2B5EF4-FFF2-40B4-BE49-F238E27FC236}">
-                <a16:creationId xmlns:a16="http://schemas.microsoft.com/office/drawing/2014/main" id="{930FE656-6385-469B-89ED-957766AE3308}"/>
+                <a16:creationId xmlns:a16="http://schemas.microsoft.com/office/drawing/2014/main" id="{88EF2BA0-4B00-46BA-83BB-93EF4329C60D}"/>
               </a:ext>
             </a:extLst>
           </p:cNvPr>
@@ -7559,7 +7559,7 @@
           <p:cNvPr id="3" name="TextBox 2">
             <a:extLst xmlns:a="http://schemas.openxmlformats.org/drawingml/2006/main">
               <a:ext uri="{FF2B5EF4-FFF2-40B4-BE49-F238E27FC236}">
-                <a16:creationId xmlns:a16="http://schemas.microsoft.com/office/drawing/2014/main" id="{A961113F-C975-47FD-9699-F78E4F6FABCB}"/>
+                <a16:creationId xmlns:a16="http://schemas.microsoft.com/office/drawing/2014/main" id="{D6A18E3C-D535-40BC-85AF-C28303FA14FD}"/>
               </a:ext>
             </a:extLst>
           </p:cNvPr>
@@ -7606,7 +7606,7 @@
           <p:cNvPr id="4" name="TextBox 3">
             <a:extLst xmlns:a="http://schemas.openxmlformats.org/drawingml/2006/main">
               <a:ext uri="{FF2B5EF4-FFF2-40B4-BE49-F238E27FC236}">
-                <a16:creationId xmlns:a16="http://schemas.microsoft.com/office/drawing/2014/main" id="{31FF7961-81D4-4915-B6F9-8C2FEA979C62}"/>
+                <a16:creationId xmlns:a16="http://schemas.microsoft.com/office/drawing/2014/main" id="{C65B3208-2770-4CC5-A979-20FF7E0610AF}"/>
               </a:ext>
             </a:extLst>
           </p:cNvPr>
@@ -7747,7 +7747,7 @@
           <p:cNvPr id="5" name="TextBox 4">
             <a:extLst xmlns:a="http://schemas.openxmlformats.org/drawingml/2006/main">
               <a:ext uri="{FF2B5EF4-FFF2-40B4-BE49-F238E27FC236}">
-                <a16:creationId xmlns:a16="http://schemas.microsoft.com/office/drawing/2014/main" id="{DAA7C6C1-1513-4E69-93CB-8C0DD9364DE6}"/>
+                <a16:creationId xmlns:a16="http://schemas.microsoft.com/office/drawing/2014/main" id="{844AC219-1DB2-44BA-8BA8-67628CDFC8A3}"/>
               </a:ext>
             </a:extLst>
           </p:cNvPr>
@@ -7784,7 +7784,7 @@
                 <a:ea typeface="Aptos"/>
                 <a:cs typeface="Aptos"/>
               </a:rPr>
-              <a:t>Version 2026.07.23-13 · 2026-07-22 · 12 / 12</a:t>
+              <a:t>Version 2026.07.23-14 · 2026-07-22 · 12 / 12</a:t>
             </a:r>
           </a:p>
         </p:txBody>
@@ -7794,7 +7794,7 @@
           <p:cNvPr id="6" name="TextBox 5">
             <a:extLst xmlns:a="http://schemas.openxmlformats.org/drawingml/2006/main">
               <a:ext uri="{FF2B5EF4-FFF2-40B4-BE49-F238E27FC236}">
-                <a16:creationId xmlns:a16="http://schemas.microsoft.com/office/drawing/2014/main" id="{00F32189-E444-4248-BE59-612AC6431293}"/>
+                <a16:creationId xmlns:a16="http://schemas.microsoft.com/office/drawing/2014/main" id="{3C3E566A-2930-45D2-9B4D-820FB68C0142}"/>
               </a:ext>
             </a:extLst>
           </p:cNvPr>
@@ -7839,7 +7839,7 @@
     </p:spTree>
     <p:extLst>
       <p:ext uri="{BB962C8B-B14F-4D97-AF65-F5344CB8AC3E}">
-        <p14:creationId xmlns:p14="http://schemas.microsoft.com/office/powerpoint/2010/main" val="1527218344"/>
+        <p14:creationId xmlns:p14="http://schemas.microsoft.com/office/powerpoint/2010/main" val="521529771"/>
       </p:ext>
     </p:extLst>
   </p:cSld>
@@ -7863,7 +7863,7 @@
           <p:cNvPr id="2" name="TextBox 1">
             <a:extLst xmlns:a="http://schemas.openxmlformats.org/drawingml/2006/main">
               <a:ext uri="{FF2B5EF4-FFF2-40B4-BE49-F238E27FC236}">
-                <a16:creationId xmlns:a16="http://schemas.microsoft.com/office/drawing/2014/main" id="{E3AF059B-FC85-42B5-B3BF-4A50BC4E5562}"/>
+                <a16:creationId xmlns:a16="http://schemas.microsoft.com/office/drawing/2014/main" id="{5B0487CB-155F-47CC-B5F8-93D3436C73F9}"/>
               </a:ext>
             </a:extLst>
           </p:cNvPr>
@@ -7910,7 +7910,7 @@
           <p:cNvPr id="3" name="TextBox 2">
             <a:extLst xmlns:a="http://schemas.openxmlformats.org/drawingml/2006/main">
               <a:ext uri="{FF2B5EF4-FFF2-40B4-BE49-F238E27FC236}">
-                <a16:creationId xmlns:a16="http://schemas.microsoft.com/office/drawing/2014/main" id="{15C8A431-8509-411A-84F8-B0515B8FAEFA}"/>
+                <a16:creationId xmlns:a16="http://schemas.microsoft.com/office/drawing/2014/main" id="{0D1B37CA-3A0C-4CC0-A8B9-D793692D555D}"/>
               </a:ext>
             </a:extLst>
           </p:cNvPr>
@@ -7957,7 +7957,7 @@
           <p:cNvPr id="4" name="Rectangle 3">
             <a:extLst xmlns:a="http://schemas.openxmlformats.org/drawingml/2006/main">
               <a:ext uri="{FF2B5EF4-FFF2-40B4-BE49-F238E27FC236}">
-                <a16:creationId xmlns:a16="http://schemas.microsoft.com/office/drawing/2014/main" id="{6FA961CC-2EF9-4D8D-87AC-40304DF66716}"/>
+                <a16:creationId xmlns:a16="http://schemas.microsoft.com/office/drawing/2014/main" id="{925CA9AA-9AD5-425B-9EC2-6BD1962B8C67}"/>
               </a:ext>
             </a:extLst>
           </p:cNvPr>
@@ -8012,7 +8012,7 @@
           <p:cNvPr id="5" name="Rectangle 4">
             <a:extLst xmlns:a="http://schemas.openxmlformats.org/drawingml/2006/main">
               <a:ext uri="{FF2B5EF4-FFF2-40B4-BE49-F238E27FC236}">
-                <a16:creationId xmlns:a16="http://schemas.microsoft.com/office/drawing/2014/main" id="{50A0DFB8-332C-47C5-AEBD-4F0A8CC5B373}"/>
+                <a16:creationId xmlns:a16="http://schemas.microsoft.com/office/drawing/2014/main" id="{6F023F9F-9EA7-4BCD-8D63-B236A4609EB1}"/>
               </a:ext>
             </a:extLst>
           </p:cNvPr>
@@ -8067,7 +8067,7 @@
           <p:cNvPr id="6" name="TextBox 5">
             <a:extLst xmlns:a="http://schemas.openxmlformats.org/drawingml/2006/main">
               <a:ext uri="{FF2B5EF4-FFF2-40B4-BE49-F238E27FC236}">
-                <a16:creationId xmlns:a16="http://schemas.microsoft.com/office/drawing/2014/main" id="{C4C52669-1F16-46AA-A27E-15AC8F429ED8}"/>
+                <a16:creationId xmlns:a16="http://schemas.microsoft.com/office/drawing/2014/main" id="{B52A79ED-AC89-43F7-B405-95F0A1E803DC}"/>
               </a:ext>
             </a:extLst>
           </p:cNvPr>
@@ -8104,7 +8104,7 @@
                 <a:ea typeface="Aptos"/>
                 <a:cs typeface="Aptos"/>
               </a:rPr>
-              <a:t>Independent public evidence summary · 2026.07.23-13 · 2026-07-22 · Sources: Atlas readiness; WIPO</a:t>
+              <a:t>Independent public evidence summary · 2026.07.23-14 · 2026-07-22 · Sources: Atlas readiness; WIPO</a:t>
             </a:r>
           </a:p>
         </p:txBody>
@@ -8114,7 +8114,7 @@
           <p:cNvPr id="7" name="TextBox 6">
             <a:extLst xmlns:a="http://schemas.openxmlformats.org/drawingml/2006/main">
               <a:ext uri="{FF2B5EF4-FFF2-40B4-BE49-F238E27FC236}">
-                <a16:creationId xmlns:a16="http://schemas.microsoft.com/office/drawing/2014/main" id="{9A10B834-6B21-4903-B903-4A304EC2024D}"/>
+                <a16:creationId xmlns:a16="http://schemas.microsoft.com/office/drawing/2014/main" id="{8CA0E67B-01F2-45CA-99B4-98E887487206}"/>
               </a:ext>
             </a:extLst>
           </p:cNvPr>
@@ -8161,7 +8161,7 @@
           <p:cNvPr id="8" name="TextBox 7">
             <a:extLst xmlns:a="http://schemas.openxmlformats.org/drawingml/2006/main">
               <a:ext uri="{FF2B5EF4-FFF2-40B4-BE49-F238E27FC236}">
-                <a16:creationId xmlns:a16="http://schemas.microsoft.com/office/drawing/2014/main" id="{67963A2E-AF80-48B1-8FD5-E6440620A014}"/>
+                <a16:creationId xmlns:a16="http://schemas.microsoft.com/office/drawing/2014/main" id="{D2C818B2-FEE0-44D9-AC5E-D80300192387}"/>
               </a:ext>
             </a:extLst>
           </p:cNvPr>
@@ -8208,7 +8208,7 @@
           <p:cNvPr id="9" name="TextBox 8">
             <a:extLst xmlns:a="http://schemas.openxmlformats.org/drawingml/2006/main">
               <a:ext uri="{FF2B5EF4-FFF2-40B4-BE49-F238E27FC236}">
-                <a16:creationId xmlns:a16="http://schemas.microsoft.com/office/drawing/2014/main" id="{33494D3A-D4DC-483C-ADD8-E747AED85CBA}"/>
+                <a16:creationId xmlns:a16="http://schemas.microsoft.com/office/drawing/2014/main" id="{39F79D12-07BB-4A20-9B94-FE8D1196BCD6}"/>
               </a:ext>
             </a:extLst>
           </p:cNvPr>
@@ -8305,7 +8305,7 @@
           <p:cNvPr id="10" name="Rounded Rectangle 9">
             <a:extLst xmlns:a="http://schemas.openxmlformats.org/drawingml/2006/main">
               <a:ext uri="{FF2B5EF4-FFF2-40B4-BE49-F238E27FC236}">
-                <a16:creationId xmlns:a16="http://schemas.microsoft.com/office/drawing/2014/main" id="{76DB2296-A092-460A-A35B-8C7AD61F4A41}"/>
+                <a16:creationId xmlns:a16="http://schemas.microsoft.com/office/drawing/2014/main" id="{146AD862-27E9-403B-B8F5-F98A9812E628}"/>
               </a:ext>
             </a:extLst>
           </p:cNvPr>
@@ -8362,7 +8362,7 @@
           <p:cNvPr id="11" name="TextBox 10">
             <a:extLst xmlns:a="http://schemas.openxmlformats.org/drawingml/2006/main">
               <a:ext uri="{FF2B5EF4-FFF2-40B4-BE49-F238E27FC236}">
-                <a16:creationId xmlns:a16="http://schemas.microsoft.com/office/drawing/2014/main" id="{987A9CEF-3303-4F96-A07C-43A628CDC6C1}"/>
+                <a16:creationId xmlns:a16="http://schemas.microsoft.com/office/drawing/2014/main" id="{008D359B-CA93-406B-AE55-B2BA405597FF}"/>
               </a:ext>
             </a:extLst>
           </p:cNvPr>
@@ -8409,7 +8409,7 @@
           <p:cNvPr id="12" name="TextBox 11">
             <a:extLst xmlns:a="http://schemas.openxmlformats.org/drawingml/2006/main">
               <a:ext uri="{FF2B5EF4-FFF2-40B4-BE49-F238E27FC236}">
-                <a16:creationId xmlns:a16="http://schemas.microsoft.com/office/drawing/2014/main" id="{0CAE1CC8-AB2F-44E4-8562-BC20B2716C4A}"/>
+                <a16:creationId xmlns:a16="http://schemas.microsoft.com/office/drawing/2014/main" id="{03C01602-3557-411D-80E4-7B7E82896E0F}"/>
               </a:ext>
             </a:extLst>
           </p:cNvPr>
@@ -8454,7 +8454,7 @@
     </p:spTree>
     <p:extLst>
       <p:ext uri="{BB962C8B-B14F-4D97-AF65-F5344CB8AC3E}">
-        <p14:creationId xmlns:p14="http://schemas.microsoft.com/office/powerpoint/2010/main" val="1976823172"/>
+        <p14:creationId xmlns:p14="http://schemas.microsoft.com/office/powerpoint/2010/main" val="699295884"/>
       </p:ext>
     </p:extLst>
   </p:cSld>
@@ -8478,7 +8478,7 @@
           <p:cNvPr id="2" name="TextBox 1">
             <a:extLst xmlns:a="http://schemas.openxmlformats.org/drawingml/2006/main">
               <a:ext uri="{FF2B5EF4-FFF2-40B4-BE49-F238E27FC236}">
-                <a16:creationId xmlns:a16="http://schemas.microsoft.com/office/drawing/2014/main" id="{5A1E6DDD-0367-4090-8501-ACE8249238D0}"/>
+                <a16:creationId xmlns:a16="http://schemas.microsoft.com/office/drawing/2014/main" id="{D64333E2-A12B-4C06-A5B5-329BF9E32E20}"/>
               </a:ext>
             </a:extLst>
           </p:cNvPr>
@@ -8525,7 +8525,7 @@
           <p:cNvPr id="3" name="TextBox 2">
             <a:extLst xmlns:a="http://schemas.openxmlformats.org/drawingml/2006/main">
               <a:ext uri="{FF2B5EF4-FFF2-40B4-BE49-F238E27FC236}">
-                <a16:creationId xmlns:a16="http://schemas.microsoft.com/office/drawing/2014/main" id="{B7B320A5-E071-4E76-903E-6497C18F3716}"/>
+                <a16:creationId xmlns:a16="http://schemas.microsoft.com/office/drawing/2014/main" id="{D5BB24FC-0233-4FEB-B486-00EB9B22AFAD}"/>
               </a:ext>
             </a:extLst>
           </p:cNvPr>
@@ -8572,7 +8572,7 @@
           <p:cNvPr id="4" name="Rectangle 3">
             <a:extLst xmlns:a="http://schemas.openxmlformats.org/drawingml/2006/main">
               <a:ext uri="{FF2B5EF4-FFF2-40B4-BE49-F238E27FC236}">
-                <a16:creationId xmlns:a16="http://schemas.microsoft.com/office/drawing/2014/main" id="{E323ACB9-59BA-4FD0-91D8-77260973A589}"/>
+                <a16:creationId xmlns:a16="http://schemas.microsoft.com/office/drawing/2014/main" id="{2AFEC4C4-A7EC-461E-993C-E5DB80060D88}"/>
               </a:ext>
             </a:extLst>
           </p:cNvPr>
@@ -8627,7 +8627,7 @@
           <p:cNvPr id="5" name="Rectangle 4">
             <a:extLst xmlns:a="http://schemas.openxmlformats.org/drawingml/2006/main">
               <a:ext uri="{FF2B5EF4-FFF2-40B4-BE49-F238E27FC236}">
-                <a16:creationId xmlns:a16="http://schemas.microsoft.com/office/drawing/2014/main" id="{97187CE6-4DC5-4312-986A-BFBD4FFFB81D}"/>
+                <a16:creationId xmlns:a16="http://schemas.microsoft.com/office/drawing/2014/main" id="{96F06C93-DFD8-41C4-8EDC-FF4AC826B27B}"/>
               </a:ext>
             </a:extLst>
           </p:cNvPr>
@@ -8682,7 +8682,7 @@
           <p:cNvPr id="6" name="TextBox 5">
             <a:extLst xmlns:a="http://schemas.openxmlformats.org/drawingml/2006/main">
               <a:ext uri="{FF2B5EF4-FFF2-40B4-BE49-F238E27FC236}">
-                <a16:creationId xmlns:a16="http://schemas.microsoft.com/office/drawing/2014/main" id="{8780F66D-9DC0-4BF8-A785-098B228B96EA}"/>
+                <a16:creationId xmlns:a16="http://schemas.microsoft.com/office/drawing/2014/main" id="{BBC6DFC1-4C8E-4258-B423-552FECEBDA68}"/>
               </a:ext>
             </a:extLst>
           </p:cNvPr>
@@ -8719,7 +8719,7 @@
                 <a:ea typeface="Aptos"/>
                 <a:cs typeface="Aptos"/>
               </a:rPr>
-              <a:t>Independent public evidence summary · 2026.07.23-13 · 2026-07-22 · Sources: EP3032975B2</a:t>
+              <a:t>Independent public evidence summary · 2026.07.23-14 · 2026-07-22 · Sources: EP3032975B2</a:t>
             </a:r>
           </a:p>
         </p:txBody>
@@ -8729,7 +8729,7 @@
           <p:cNvPr id="7" name="TextBox 6">
             <a:extLst xmlns:a="http://schemas.openxmlformats.org/drawingml/2006/main">
               <a:ext uri="{FF2B5EF4-FFF2-40B4-BE49-F238E27FC236}">
-                <a16:creationId xmlns:a16="http://schemas.microsoft.com/office/drawing/2014/main" id="{B4B55961-2AA5-4153-AAB9-B8EF2254BD64}"/>
+                <a16:creationId xmlns:a16="http://schemas.microsoft.com/office/drawing/2014/main" id="{D3897421-7398-433E-944A-9330C650EC57}"/>
               </a:ext>
             </a:extLst>
           </p:cNvPr>
@@ -8776,7 +8776,7 @@
           <p:cNvPr id="8" name="TextBox 7">
             <a:extLst xmlns:a="http://schemas.openxmlformats.org/drawingml/2006/main">
               <a:ext uri="{FF2B5EF4-FFF2-40B4-BE49-F238E27FC236}">
-                <a16:creationId xmlns:a16="http://schemas.microsoft.com/office/drawing/2014/main" id="{6DFE8A9E-99EC-4D99-9776-377178E3EFDA}"/>
+                <a16:creationId xmlns:a16="http://schemas.microsoft.com/office/drawing/2014/main" id="{153F35F6-4272-4F0D-A60F-CD0F06CD7BBC}"/>
               </a:ext>
             </a:extLst>
           </p:cNvPr>
@@ -8823,7 +8823,7 @@
           <p:cNvPr id="9" name="TextBox 8">
             <a:extLst xmlns:a="http://schemas.openxmlformats.org/drawingml/2006/main">
               <a:ext uri="{FF2B5EF4-FFF2-40B4-BE49-F238E27FC236}">
-                <a16:creationId xmlns:a16="http://schemas.microsoft.com/office/drawing/2014/main" id="{9315B594-DC2B-4B8E-8605-9DE47A9316F5}"/>
+                <a16:creationId xmlns:a16="http://schemas.microsoft.com/office/drawing/2014/main" id="{066219BC-F34A-4D3E-9F5D-6236A3F10E9D}"/>
               </a:ext>
             </a:extLst>
           </p:cNvPr>
@@ -8920,7 +8920,7 @@
           <p:cNvPr id="10" name="Rounded Rectangle 9">
             <a:extLst xmlns:a="http://schemas.openxmlformats.org/drawingml/2006/main">
               <a:ext uri="{FF2B5EF4-FFF2-40B4-BE49-F238E27FC236}">
-                <a16:creationId xmlns:a16="http://schemas.microsoft.com/office/drawing/2014/main" id="{B9E31B1A-D370-477B-B46F-6FDA18449A16}"/>
+                <a16:creationId xmlns:a16="http://schemas.microsoft.com/office/drawing/2014/main" id="{9F719F46-2CFA-41F0-B4C1-6C8313E26D57}"/>
               </a:ext>
             </a:extLst>
           </p:cNvPr>
@@ -8977,7 +8977,7 @@
           <p:cNvPr id="11" name="TextBox 10">
             <a:extLst xmlns:a="http://schemas.openxmlformats.org/drawingml/2006/main">
               <a:ext uri="{FF2B5EF4-FFF2-40B4-BE49-F238E27FC236}">
-                <a16:creationId xmlns:a16="http://schemas.microsoft.com/office/drawing/2014/main" id="{B6D4E96A-53E3-4025-9535-E79B349CBACA}"/>
+                <a16:creationId xmlns:a16="http://schemas.microsoft.com/office/drawing/2014/main" id="{43A7D36A-55B9-4A60-89D5-3FD35E1AA924}"/>
               </a:ext>
             </a:extLst>
           </p:cNvPr>
@@ -9024,7 +9024,7 @@
           <p:cNvPr id="12" name="TextBox 11">
             <a:extLst xmlns:a="http://schemas.openxmlformats.org/drawingml/2006/main">
               <a:ext uri="{FF2B5EF4-FFF2-40B4-BE49-F238E27FC236}">
-                <a16:creationId xmlns:a16="http://schemas.microsoft.com/office/drawing/2014/main" id="{AD1F311B-0BC2-4962-B658-6F1EEA2DF7A3}"/>
+                <a16:creationId xmlns:a16="http://schemas.microsoft.com/office/drawing/2014/main" id="{E145ED39-A891-4204-8AAB-5F7A644345EC}"/>
               </a:ext>
             </a:extLst>
           </p:cNvPr>
@@ -9069,7 +9069,7 @@
     </p:spTree>
     <p:extLst>
       <p:ext uri="{BB962C8B-B14F-4D97-AF65-F5344CB8AC3E}">
-        <p14:creationId xmlns:p14="http://schemas.microsoft.com/office/powerpoint/2010/main" val="218495330"/>
+        <p14:creationId xmlns:p14="http://schemas.microsoft.com/office/powerpoint/2010/main" val="1702961698"/>
       </p:ext>
     </p:extLst>
   </p:cSld>
@@ -9093,7 +9093,7 @@
           <p:cNvPr id="2" name="TextBox 1">
             <a:extLst xmlns:a="http://schemas.openxmlformats.org/drawingml/2006/main">
               <a:ext uri="{FF2B5EF4-FFF2-40B4-BE49-F238E27FC236}">
-                <a16:creationId xmlns:a16="http://schemas.microsoft.com/office/drawing/2014/main" id="{3D0A454B-9A55-4D63-A891-16CB88260046}"/>
+                <a16:creationId xmlns:a16="http://schemas.microsoft.com/office/drawing/2014/main" id="{EA94DABC-200A-47BC-809A-7253F3BF9C27}"/>
               </a:ext>
             </a:extLst>
           </p:cNvPr>
@@ -9140,7 +9140,7 @@
           <p:cNvPr id="3" name="TextBox 2">
             <a:extLst xmlns:a="http://schemas.openxmlformats.org/drawingml/2006/main">
               <a:ext uri="{FF2B5EF4-FFF2-40B4-BE49-F238E27FC236}">
-                <a16:creationId xmlns:a16="http://schemas.microsoft.com/office/drawing/2014/main" id="{DC5CB2B2-03F8-405C-8AC2-1B1DDF7A2CCB}"/>
+                <a16:creationId xmlns:a16="http://schemas.microsoft.com/office/drawing/2014/main" id="{9073CBF8-292A-4BAE-8575-0A3FC8260B2B}"/>
               </a:ext>
             </a:extLst>
           </p:cNvPr>
@@ -9187,7 +9187,7 @@
           <p:cNvPr id="4" name="Rectangle 3">
             <a:extLst xmlns:a="http://schemas.openxmlformats.org/drawingml/2006/main">
               <a:ext uri="{FF2B5EF4-FFF2-40B4-BE49-F238E27FC236}">
-                <a16:creationId xmlns:a16="http://schemas.microsoft.com/office/drawing/2014/main" id="{948052A1-67A7-4E42-8EE1-38977FAA7C49}"/>
+                <a16:creationId xmlns:a16="http://schemas.microsoft.com/office/drawing/2014/main" id="{E62F88D9-F4EE-49C3-A1EC-B1D18905A9EA}"/>
               </a:ext>
             </a:extLst>
           </p:cNvPr>
@@ -9242,7 +9242,7 @@
           <p:cNvPr id="5" name="Rectangle 4">
             <a:extLst xmlns:a="http://schemas.openxmlformats.org/drawingml/2006/main">
               <a:ext uri="{FF2B5EF4-FFF2-40B4-BE49-F238E27FC236}">
-                <a16:creationId xmlns:a16="http://schemas.microsoft.com/office/drawing/2014/main" id="{552617AA-BFB7-4B10-832A-AF3F362BC564}"/>
+                <a16:creationId xmlns:a16="http://schemas.microsoft.com/office/drawing/2014/main" id="{DA310CE4-5C85-4289-B739-05CFA381BA11}"/>
               </a:ext>
             </a:extLst>
           </p:cNvPr>
@@ -9297,7 +9297,7 @@
           <p:cNvPr id="6" name="TextBox 5">
             <a:extLst xmlns:a="http://schemas.openxmlformats.org/drawingml/2006/main">
               <a:ext uri="{FF2B5EF4-FFF2-40B4-BE49-F238E27FC236}">
-                <a16:creationId xmlns:a16="http://schemas.microsoft.com/office/drawing/2014/main" id="{7255B584-0A87-439C-9192-A59EB58DBA7F}"/>
+                <a16:creationId xmlns:a16="http://schemas.microsoft.com/office/drawing/2014/main" id="{BDB6D613-9F00-4C9B-91ED-3B0F8EDF3BA3}"/>
               </a:ext>
             </a:extLst>
           </p:cNvPr>
@@ -9334,7 +9334,7 @@
                 <a:ea typeface="Aptos"/>
                 <a:cs typeface="Aptos"/>
               </a:rPr>
-              <a:t>Independent public evidence summary · 2026.07.23-13 · 2026-07-22 · Sources: EPO Register; EP3032975B2</a:t>
+              <a:t>Independent public evidence summary · 2026.07.23-14 · 2026-07-22 · Sources: EPO Register; EP3032975B2</a:t>
             </a:r>
           </a:p>
         </p:txBody>
@@ -9344,7 +9344,7 @@
           <p:cNvPr id="7" name="TextBox 6">
             <a:extLst xmlns:a="http://schemas.openxmlformats.org/drawingml/2006/main">
               <a:ext uri="{FF2B5EF4-FFF2-40B4-BE49-F238E27FC236}">
-                <a16:creationId xmlns:a16="http://schemas.microsoft.com/office/drawing/2014/main" id="{68A38A5D-6EFF-49A5-999E-A232CD5F13AC}"/>
+                <a16:creationId xmlns:a16="http://schemas.microsoft.com/office/drawing/2014/main" id="{4EB31023-3C07-4B51-97E8-FEEE7C0C7A53}"/>
               </a:ext>
             </a:extLst>
           </p:cNvPr>
@@ -9391,7 +9391,7 @@
           <p:cNvPr id="8" name="Rounded Rectangle 7">
             <a:extLst xmlns:a="http://schemas.openxmlformats.org/drawingml/2006/main">
               <a:ext uri="{FF2B5EF4-FFF2-40B4-BE49-F238E27FC236}">
-                <a16:creationId xmlns:a16="http://schemas.microsoft.com/office/drawing/2014/main" id="{38F24BA8-08ED-4764-BD88-26AC1CBD3255}"/>
+                <a16:creationId xmlns:a16="http://schemas.microsoft.com/office/drawing/2014/main" id="{A6F90FFA-A0F5-4F87-A82D-2C1DC62BA4B8}"/>
               </a:ext>
             </a:extLst>
           </p:cNvPr>
@@ -9448,7 +9448,7 @@
           <p:cNvPr id="9" name="TextBox 8">
             <a:extLst xmlns:a="http://schemas.openxmlformats.org/drawingml/2006/main">
               <a:ext uri="{FF2B5EF4-FFF2-40B4-BE49-F238E27FC236}">
-                <a16:creationId xmlns:a16="http://schemas.microsoft.com/office/drawing/2014/main" id="{CE338D07-34F8-4751-BF4C-F644F0127DF1}"/>
+                <a16:creationId xmlns:a16="http://schemas.microsoft.com/office/drawing/2014/main" id="{2B364910-BBFD-41C7-9D22-A5685DEA3267}"/>
               </a:ext>
             </a:extLst>
           </p:cNvPr>
@@ -9495,7 +9495,7 @@
           <p:cNvPr id="10" name="TextBox 9">
             <a:extLst xmlns:a="http://schemas.openxmlformats.org/drawingml/2006/main">
               <a:ext uri="{FF2B5EF4-FFF2-40B4-BE49-F238E27FC236}">
-                <a16:creationId xmlns:a16="http://schemas.microsoft.com/office/drawing/2014/main" id="{08FB73D4-42CF-4F5D-BB85-87B1BED16081}"/>
+                <a16:creationId xmlns:a16="http://schemas.microsoft.com/office/drawing/2014/main" id="{225166CA-F069-4CFF-8B9B-04F329AB3F6D}"/>
               </a:ext>
             </a:extLst>
           </p:cNvPr>
@@ -9542,7 +9542,7 @@
           <p:cNvPr id="11" name="Rounded Rectangle 10">
             <a:extLst xmlns:a="http://schemas.openxmlformats.org/drawingml/2006/main">
               <a:ext uri="{FF2B5EF4-FFF2-40B4-BE49-F238E27FC236}">
-                <a16:creationId xmlns:a16="http://schemas.microsoft.com/office/drawing/2014/main" id="{1A83FDF3-8E7F-4067-A46B-56B574D48609}"/>
+                <a16:creationId xmlns:a16="http://schemas.microsoft.com/office/drawing/2014/main" id="{5FE4274D-65E9-4332-89F5-63ADD72C531B}"/>
               </a:ext>
             </a:extLst>
           </p:cNvPr>
@@ -9599,7 +9599,7 @@
           <p:cNvPr id="12" name="TextBox 11">
             <a:extLst xmlns:a="http://schemas.openxmlformats.org/drawingml/2006/main">
               <a:ext uri="{FF2B5EF4-FFF2-40B4-BE49-F238E27FC236}">
-                <a16:creationId xmlns:a16="http://schemas.microsoft.com/office/drawing/2014/main" id="{85D12563-EC04-4133-9328-293FFFF898EC}"/>
+                <a16:creationId xmlns:a16="http://schemas.microsoft.com/office/drawing/2014/main" id="{3FF9401D-4670-4C3C-BC91-BF337C56BC6F}"/>
               </a:ext>
             </a:extLst>
           </p:cNvPr>
@@ -9646,7 +9646,7 @@
           <p:cNvPr id="13" name="TextBox 12">
             <a:extLst xmlns:a="http://schemas.openxmlformats.org/drawingml/2006/main">
               <a:ext uri="{FF2B5EF4-FFF2-40B4-BE49-F238E27FC236}">
-                <a16:creationId xmlns:a16="http://schemas.microsoft.com/office/drawing/2014/main" id="{019935A3-8251-4EAE-90B8-63673C577EB2}"/>
+                <a16:creationId xmlns:a16="http://schemas.microsoft.com/office/drawing/2014/main" id="{7933A338-02DB-4908-85A2-F440F4C389AC}"/>
               </a:ext>
             </a:extLst>
           </p:cNvPr>
@@ -9693,7 +9693,7 @@
           <p:cNvPr id="14" name="Rounded Rectangle 13">
             <a:extLst xmlns:a="http://schemas.openxmlformats.org/drawingml/2006/main">
               <a:ext uri="{FF2B5EF4-FFF2-40B4-BE49-F238E27FC236}">
-                <a16:creationId xmlns:a16="http://schemas.microsoft.com/office/drawing/2014/main" id="{2330E7B3-C1DF-451D-9CC8-DB387E6B759C}"/>
+                <a16:creationId xmlns:a16="http://schemas.microsoft.com/office/drawing/2014/main" id="{3C768663-5B9E-4B01-B393-F4AF1A27991F}"/>
               </a:ext>
             </a:extLst>
           </p:cNvPr>
@@ -9750,7 +9750,7 @@
           <p:cNvPr id="15" name="TextBox 14">
             <a:extLst xmlns:a="http://schemas.openxmlformats.org/drawingml/2006/main">
               <a:ext uri="{FF2B5EF4-FFF2-40B4-BE49-F238E27FC236}">
-                <a16:creationId xmlns:a16="http://schemas.microsoft.com/office/drawing/2014/main" id="{FE7E710F-E4EC-40EF-857B-38CAA21FC918}"/>
+                <a16:creationId xmlns:a16="http://schemas.microsoft.com/office/drawing/2014/main" id="{B70A9670-9748-4367-B063-F56AF61DB5CA}"/>
               </a:ext>
             </a:extLst>
           </p:cNvPr>
@@ -9797,7 +9797,7 @@
           <p:cNvPr id="16" name="TextBox 15">
             <a:extLst xmlns:a="http://schemas.openxmlformats.org/drawingml/2006/main">
               <a:ext uri="{FF2B5EF4-FFF2-40B4-BE49-F238E27FC236}">
-                <a16:creationId xmlns:a16="http://schemas.microsoft.com/office/drawing/2014/main" id="{708C87C5-94B4-4BA7-A143-ADC23F1C1471}"/>
+                <a16:creationId xmlns:a16="http://schemas.microsoft.com/office/drawing/2014/main" id="{96F6CFE8-4DB7-4EA0-9AEE-452728E9C9B6}"/>
               </a:ext>
             </a:extLst>
           </p:cNvPr>
@@ -9844,7 +9844,7 @@
           <p:cNvPr id="17" name="TextBox 16">
             <a:extLst xmlns:a="http://schemas.openxmlformats.org/drawingml/2006/main">
               <a:ext uri="{FF2B5EF4-FFF2-40B4-BE49-F238E27FC236}">
-                <a16:creationId xmlns:a16="http://schemas.microsoft.com/office/drawing/2014/main" id="{16586D3E-D98F-475B-A0DC-EAF13E793CAD}"/>
+                <a16:creationId xmlns:a16="http://schemas.microsoft.com/office/drawing/2014/main" id="{09FDED3C-8D25-4B3A-86E5-434D8A8A781E}"/>
               </a:ext>
             </a:extLst>
           </p:cNvPr>
@@ -9891,7 +9891,7 @@
           <p:cNvPr id="18" name="Rounded Rectangle 17">
             <a:extLst xmlns:a="http://schemas.openxmlformats.org/drawingml/2006/main">
               <a:ext uri="{FF2B5EF4-FFF2-40B4-BE49-F238E27FC236}">
-                <a16:creationId xmlns:a16="http://schemas.microsoft.com/office/drawing/2014/main" id="{3E791E65-00A5-4913-8712-221DCE54713C}"/>
+                <a16:creationId xmlns:a16="http://schemas.microsoft.com/office/drawing/2014/main" id="{28D2665E-7DF5-4B44-BDB0-3895BBD60262}"/>
               </a:ext>
             </a:extLst>
           </p:cNvPr>
@@ -9948,7 +9948,7 @@
           <p:cNvPr id="19" name="TextBox 18">
             <a:extLst xmlns:a="http://schemas.openxmlformats.org/drawingml/2006/main">
               <a:ext uri="{FF2B5EF4-FFF2-40B4-BE49-F238E27FC236}">
-                <a16:creationId xmlns:a16="http://schemas.microsoft.com/office/drawing/2014/main" id="{9AE085B8-A29E-4AFA-8700-61E0180F2AA7}"/>
+                <a16:creationId xmlns:a16="http://schemas.microsoft.com/office/drawing/2014/main" id="{A181E294-63BF-4714-AD4C-3E350B4AE08E}"/>
               </a:ext>
             </a:extLst>
           </p:cNvPr>
@@ -9995,7 +9995,7 @@
           <p:cNvPr id="20" name="TextBox 19">
             <a:extLst xmlns:a="http://schemas.openxmlformats.org/drawingml/2006/main">
               <a:ext uri="{FF2B5EF4-FFF2-40B4-BE49-F238E27FC236}">
-                <a16:creationId xmlns:a16="http://schemas.microsoft.com/office/drawing/2014/main" id="{99FB7ED9-5191-4974-8F24-A7116448D0E8}"/>
+                <a16:creationId xmlns:a16="http://schemas.microsoft.com/office/drawing/2014/main" id="{CB41909E-9E07-4489-8640-E0A550F53B1D}"/>
               </a:ext>
             </a:extLst>
           </p:cNvPr>
@@ -10040,7 +10040,7 @@
     </p:spTree>
     <p:extLst>
       <p:ext uri="{BB962C8B-B14F-4D97-AF65-F5344CB8AC3E}">
-        <p14:creationId xmlns:p14="http://schemas.microsoft.com/office/powerpoint/2010/main" val="1137567861"/>
+        <p14:creationId xmlns:p14="http://schemas.microsoft.com/office/powerpoint/2010/main" val="1872749638"/>
       </p:ext>
     </p:extLst>
   </p:cSld>
@@ -10064,7 +10064,7 @@
           <p:cNvPr id="2" name="TextBox 1">
             <a:extLst xmlns:a="http://schemas.openxmlformats.org/drawingml/2006/main">
               <a:ext uri="{FF2B5EF4-FFF2-40B4-BE49-F238E27FC236}">
-                <a16:creationId xmlns:a16="http://schemas.microsoft.com/office/drawing/2014/main" id="{13F825E6-557D-4AE9-9E37-5ABB8945BCC8}"/>
+                <a16:creationId xmlns:a16="http://schemas.microsoft.com/office/drawing/2014/main" id="{333DAA06-AC6D-414B-91C0-398F31BE7EBB}"/>
               </a:ext>
             </a:extLst>
           </p:cNvPr>
@@ -10111,7 +10111,7 @@
           <p:cNvPr id="3" name="TextBox 2">
             <a:extLst xmlns:a="http://schemas.openxmlformats.org/drawingml/2006/main">
               <a:ext uri="{FF2B5EF4-FFF2-40B4-BE49-F238E27FC236}">
-                <a16:creationId xmlns:a16="http://schemas.microsoft.com/office/drawing/2014/main" id="{35900332-6C9A-4BD8-8EBC-A3C824E8B976}"/>
+                <a16:creationId xmlns:a16="http://schemas.microsoft.com/office/drawing/2014/main" id="{645BEB42-3A77-425A-A7A9-508927A4629C}"/>
               </a:ext>
             </a:extLst>
           </p:cNvPr>
@@ -10158,7 +10158,7 @@
           <p:cNvPr id="4" name="Rectangle 3">
             <a:extLst xmlns:a="http://schemas.openxmlformats.org/drawingml/2006/main">
               <a:ext uri="{FF2B5EF4-FFF2-40B4-BE49-F238E27FC236}">
-                <a16:creationId xmlns:a16="http://schemas.microsoft.com/office/drawing/2014/main" id="{461206AA-D9C9-47BE-B42E-B65DC7AC40CD}"/>
+                <a16:creationId xmlns:a16="http://schemas.microsoft.com/office/drawing/2014/main" id="{DEFF4816-9B9C-498B-894D-07DF6A21CC74}"/>
               </a:ext>
             </a:extLst>
           </p:cNvPr>
@@ -10213,7 +10213,7 @@
           <p:cNvPr id="5" name="Rectangle 4">
             <a:extLst xmlns:a="http://schemas.openxmlformats.org/drawingml/2006/main">
               <a:ext uri="{FF2B5EF4-FFF2-40B4-BE49-F238E27FC236}">
-                <a16:creationId xmlns:a16="http://schemas.microsoft.com/office/drawing/2014/main" id="{947EE108-D8DC-4A69-8834-D91542D7A2DA}"/>
+                <a16:creationId xmlns:a16="http://schemas.microsoft.com/office/drawing/2014/main" id="{9746E653-990C-4DA1-BA2D-79352C51571A}"/>
               </a:ext>
             </a:extLst>
           </p:cNvPr>
@@ -10268,7 +10268,7 @@
           <p:cNvPr id="6" name="TextBox 5">
             <a:extLst xmlns:a="http://schemas.openxmlformats.org/drawingml/2006/main">
               <a:ext uri="{FF2B5EF4-FFF2-40B4-BE49-F238E27FC236}">
-                <a16:creationId xmlns:a16="http://schemas.microsoft.com/office/drawing/2014/main" id="{05336FE9-B2DD-4A26-9C45-FC27F90A6331}"/>
+                <a16:creationId xmlns:a16="http://schemas.microsoft.com/office/drawing/2014/main" id="{7706E7A5-2836-4A10-A81D-C3EBCF70ABDB}"/>
               </a:ext>
             </a:extLst>
           </p:cNvPr>
@@ -10305,7 +10305,7 @@
                 <a:ea typeface="Aptos"/>
                 <a:cs typeface="Aptos"/>
               </a:rPr>
-              <a:t>Independent public evidence summary · 2026.07.23-13 · 2026-07-22 · Sources: EP3032975B2; 7 O 3341/24</a:t>
+              <a:t>Independent public evidence summary · 2026.07.23-14 · 2026-07-22 · Sources: EP3032975B2; 7 O 3341/24</a:t>
             </a:r>
           </a:p>
         </p:txBody>
@@ -10315,7 +10315,7 @@
           <p:cNvPr id="7" name="TextBox 6">
             <a:extLst xmlns:a="http://schemas.openxmlformats.org/drawingml/2006/main">
               <a:ext uri="{FF2B5EF4-FFF2-40B4-BE49-F238E27FC236}">
-                <a16:creationId xmlns:a16="http://schemas.microsoft.com/office/drawing/2014/main" id="{3F450405-E4DD-4833-ACED-1625EBB9B973}"/>
+                <a16:creationId xmlns:a16="http://schemas.microsoft.com/office/drawing/2014/main" id="{D3357E9C-03AB-4709-98BC-227FF47CE6B9}"/>
               </a:ext>
             </a:extLst>
           </p:cNvPr>
@@ -10362,7 +10362,7 @@
           <p:cNvPr id="8" name="TextBox 7">
             <a:extLst xmlns:a="http://schemas.openxmlformats.org/drawingml/2006/main">
               <a:ext uri="{FF2B5EF4-FFF2-40B4-BE49-F238E27FC236}">
-                <a16:creationId xmlns:a16="http://schemas.microsoft.com/office/drawing/2014/main" id="{BBD3003F-F95A-4A93-BB10-D4215701F099}"/>
+                <a16:creationId xmlns:a16="http://schemas.microsoft.com/office/drawing/2014/main" id="{3C4F8C7C-19A8-4424-B9D9-FF4810E5A32B}"/>
               </a:ext>
             </a:extLst>
           </p:cNvPr>
@@ -10409,7 +10409,7 @@
           <p:cNvPr id="9" name="TextBox 8">
             <a:extLst xmlns:a="http://schemas.openxmlformats.org/drawingml/2006/main">
               <a:ext uri="{FF2B5EF4-FFF2-40B4-BE49-F238E27FC236}">
-                <a16:creationId xmlns:a16="http://schemas.microsoft.com/office/drawing/2014/main" id="{2932584C-2594-4DB2-B3B7-CEBB970BE1E0}"/>
+                <a16:creationId xmlns:a16="http://schemas.microsoft.com/office/drawing/2014/main" id="{967F2B17-DE81-4664-9C8A-9029996234F6}"/>
               </a:ext>
             </a:extLst>
           </p:cNvPr>
@@ -10506,7 +10506,7 @@
           <p:cNvPr id="10" name="Rounded Rectangle 9">
             <a:extLst xmlns:a="http://schemas.openxmlformats.org/drawingml/2006/main">
               <a:ext uri="{FF2B5EF4-FFF2-40B4-BE49-F238E27FC236}">
-                <a16:creationId xmlns:a16="http://schemas.microsoft.com/office/drawing/2014/main" id="{702248EC-FCCC-4B7A-9522-3B405B4A5FCB}"/>
+                <a16:creationId xmlns:a16="http://schemas.microsoft.com/office/drawing/2014/main" id="{7AAFE00F-863D-4EB3-A6A8-2361FBA3EE48}"/>
               </a:ext>
             </a:extLst>
           </p:cNvPr>
@@ -10563,7 +10563,7 @@
           <p:cNvPr id="11" name="TextBox 10">
             <a:extLst xmlns:a="http://schemas.openxmlformats.org/drawingml/2006/main">
               <a:ext uri="{FF2B5EF4-FFF2-40B4-BE49-F238E27FC236}">
-                <a16:creationId xmlns:a16="http://schemas.microsoft.com/office/drawing/2014/main" id="{9FB30199-7931-4DBD-985C-1D0EF0ABC3B5}"/>
+                <a16:creationId xmlns:a16="http://schemas.microsoft.com/office/drawing/2014/main" id="{B51DB12B-3A2D-4448-BFB0-0BCE5FFF315D}"/>
               </a:ext>
             </a:extLst>
           </p:cNvPr>
@@ -10610,7 +10610,7 @@
           <p:cNvPr id="12" name="TextBox 11">
             <a:extLst xmlns:a="http://schemas.openxmlformats.org/drawingml/2006/main">
               <a:ext uri="{FF2B5EF4-FFF2-40B4-BE49-F238E27FC236}">
-                <a16:creationId xmlns:a16="http://schemas.microsoft.com/office/drawing/2014/main" id="{581FC800-44F5-4BEA-BFF5-8E16C0F07F2A}"/>
+                <a16:creationId xmlns:a16="http://schemas.microsoft.com/office/drawing/2014/main" id="{E8CC60ED-8F0E-4A88-9114-7DE4C9B9DE5E}"/>
               </a:ext>
             </a:extLst>
           </p:cNvPr>
@@ -10655,7 +10655,7 @@
     </p:spTree>
     <p:extLst>
       <p:ext uri="{BB962C8B-B14F-4D97-AF65-F5344CB8AC3E}">
-        <p14:creationId xmlns:p14="http://schemas.microsoft.com/office/powerpoint/2010/main" val="395112114"/>
+        <p14:creationId xmlns:p14="http://schemas.microsoft.com/office/powerpoint/2010/main" val="1361028533"/>
       </p:ext>
     </p:extLst>
   </p:cSld>
@@ -10679,7 +10679,7 @@
           <p:cNvPr id="2" name="TextBox 1">
             <a:extLst xmlns:a="http://schemas.openxmlformats.org/drawingml/2006/main">
               <a:ext uri="{FF2B5EF4-FFF2-40B4-BE49-F238E27FC236}">
-                <a16:creationId xmlns:a16="http://schemas.microsoft.com/office/drawing/2014/main" id="{25CF5430-9968-4A5B-952C-0970F3EF06DD}"/>
+                <a16:creationId xmlns:a16="http://schemas.microsoft.com/office/drawing/2014/main" id="{2A2D9188-AC37-49AB-9BED-AAB521DBCFE0}"/>
               </a:ext>
             </a:extLst>
           </p:cNvPr>
@@ -10726,7 +10726,7 @@
           <p:cNvPr id="3" name="TextBox 2">
             <a:extLst xmlns:a="http://schemas.openxmlformats.org/drawingml/2006/main">
               <a:ext uri="{FF2B5EF4-FFF2-40B4-BE49-F238E27FC236}">
-                <a16:creationId xmlns:a16="http://schemas.microsoft.com/office/drawing/2014/main" id="{E6EE44B5-7A2E-4BA8-AAFC-D04BCEA0B4A2}"/>
+                <a16:creationId xmlns:a16="http://schemas.microsoft.com/office/drawing/2014/main" id="{8D809C50-F3E4-4859-A119-4F3E7FB35B0F}"/>
               </a:ext>
             </a:extLst>
           </p:cNvPr>
@@ -10773,7 +10773,7 @@
           <p:cNvPr id="4" name="Rectangle 3">
             <a:extLst xmlns:a="http://schemas.openxmlformats.org/drawingml/2006/main">
               <a:ext uri="{FF2B5EF4-FFF2-40B4-BE49-F238E27FC236}">
-                <a16:creationId xmlns:a16="http://schemas.microsoft.com/office/drawing/2014/main" id="{12557913-26DF-4B71-A9A2-E35341D7383F}"/>
+                <a16:creationId xmlns:a16="http://schemas.microsoft.com/office/drawing/2014/main" id="{720D7629-F0B6-4815-9A09-1F23E0D32838}"/>
               </a:ext>
             </a:extLst>
           </p:cNvPr>
@@ -10828,7 +10828,7 @@
           <p:cNvPr id="5" name="Rectangle 4">
             <a:extLst xmlns:a="http://schemas.openxmlformats.org/drawingml/2006/main">
               <a:ext uri="{FF2B5EF4-FFF2-40B4-BE49-F238E27FC236}">
-                <a16:creationId xmlns:a16="http://schemas.microsoft.com/office/drawing/2014/main" id="{2BDD9202-70F0-4329-B2B4-4717B364025C}"/>
+                <a16:creationId xmlns:a16="http://schemas.microsoft.com/office/drawing/2014/main" id="{32FF92FD-34F1-4719-A8F4-6AE573E2B9BF}"/>
               </a:ext>
             </a:extLst>
           </p:cNvPr>
@@ -10883,7 +10883,7 @@
           <p:cNvPr id="6" name="TextBox 5">
             <a:extLst xmlns:a="http://schemas.openxmlformats.org/drawingml/2006/main">
               <a:ext uri="{FF2B5EF4-FFF2-40B4-BE49-F238E27FC236}">
-                <a16:creationId xmlns:a16="http://schemas.microsoft.com/office/drawing/2014/main" id="{57CFA4CC-5E30-4D16-9A38-D06E9A21EC3C}"/>
+                <a16:creationId xmlns:a16="http://schemas.microsoft.com/office/drawing/2014/main" id="{9DB110E9-2114-4A37-9E43-22FA31C5BC5B}"/>
               </a:ext>
             </a:extLst>
           </p:cNvPr>
@@ -10920,7 +10920,7 @@
                 <a:ea typeface="Aptos"/>
                 <a:cs typeface="Aptos"/>
               </a:rPr>
-              <a:t>Independent public evidence summary · 2026.07.23-13 · 2026-07-22 · Sources: Market-values; IMARC; GVR; Fortune</a:t>
+              <a:t>Independent public evidence summary · 2026.07.23-14 · 2026-07-22 · Sources: Market-values; IMARC; GVR; Fortune</a:t>
             </a:r>
           </a:p>
         </p:txBody>
@@ -10930,7 +10930,7 @@
           <p:cNvPr id="7" name="TextBox 6">
             <a:extLst xmlns:a="http://schemas.openxmlformats.org/drawingml/2006/main">
               <a:ext uri="{FF2B5EF4-FFF2-40B4-BE49-F238E27FC236}">
-                <a16:creationId xmlns:a16="http://schemas.microsoft.com/office/drawing/2014/main" id="{83CC3D3F-BDF9-401A-9915-D8AE2F827565}"/>
+                <a16:creationId xmlns:a16="http://schemas.microsoft.com/office/drawing/2014/main" id="{565C3FA7-6D2E-460D-944C-65B4131A7CFE}"/>
               </a:ext>
             </a:extLst>
           </p:cNvPr>
@@ -10977,7 +10977,7 @@
           <p:cNvPr id="8" name="Rounded Rectangle 7">
             <a:extLst xmlns:a="http://schemas.openxmlformats.org/drawingml/2006/main">
               <a:ext uri="{FF2B5EF4-FFF2-40B4-BE49-F238E27FC236}">
-                <a16:creationId xmlns:a16="http://schemas.microsoft.com/office/drawing/2014/main" id="{C563F0B5-0CFC-48B7-A960-E90F8EA2ADCC}"/>
+                <a16:creationId xmlns:a16="http://schemas.microsoft.com/office/drawing/2014/main" id="{E51B201C-7596-4F50-97DD-365C8AA2211F}"/>
               </a:ext>
             </a:extLst>
           </p:cNvPr>
@@ -11034,7 +11034,7 @@
           <p:cNvPr id="9" name="TextBox 8">
             <a:extLst xmlns:a="http://schemas.openxmlformats.org/drawingml/2006/main">
               <a:ext uri="{FF2B5EF4-FFF2-40B4-BE49-F238E27FC236}">
-                <a16:creationId xmlns:a16="http://schemas.microsoft.com/office/drawing/2014/main" id="{A9D54879-7E42-45F2-9546-F9D6FA1D44B4}"/>
+                <a16:creationId xmlns:a16="http://schemas.microsoft.com/office/drawing/2014/main" id="{FE800125-E119-44CC-8A25-7AAE86B0C258}"/>
               </a:ext>
             </a:extLst>
           </p:cNvPr>
@@ -11081,7 +11081,7 @@
           <p:cNvPr id="10" name="TextBox 9">
             <a:extLst xmlns:a="http://schemas.openxmlformats.org/drawingml/2006/main">
               <a:ext uri="{FF2B5EF4-FFF2-40B4-BE49-F238E27FC236}">
-                <a16:creationId xmlns:a16="http://schemas.microsoft.com/office/drawing/2014/main" id="{3CA2D109-023F-4618-85B2-EE54FB314B85}"/>
+                <a16:creationId xmlns:a16="http://schemas.microsoft.com/office/drawing/2014/main" id="{4285CC05-DF62-4F49-849B-E4A6BCEA15E5}"/>
               </a:ext>
             </a:extLst>
           </p:cNvPr>
@@ -11128,7 +11128,7 @@
           <p:cNvPr id="11" name="Rounded Rectangle 10">
             <a:extLst xmlns:a="http://schemas.openxmlformats.org/drawingml/2006/main">
               <a:ext uri="{FF2B5EF4-FFF2-40B4-BE49-F238E27FC236}">
-                <a16:creationId xmlns:a16="http://schemas.microsoft.com/office/drawing/2014/main" id="{DE68CB34-6EBE-4410-9081-AD0CC1DB6A69}"/>
+                <a16:creationId xmlns:a16="http://schemas.microsoft.com/office/drawing/2014/main" id="{5393042C-422D-46DF-96BB-AEF7EFD48B57}"/>
               </a:ext>
             </a:extLst>
           </p:cNvPr>
@@ -11185,7 +11185,7 @@
           <p:cNvPr id="12" name="TextBox 11">
             <a:extLst xmlns:a="http://schemas.openxmlformats.org/drawingml/2006/main">
               <a:ext uri="{FF2B5EF4-FFF2-40B4-BE49-F238E27FC236}">
-                <a16:creationId xmlns:a16="http://schemas.microsoft.com/office/drawing/2014/main" id="{42D39270-BD8C-4DAD-9D27-4D6554DC6C11}"/>
+                <a16:creationId xmlns:a16="http://schemas.microsoft.com/office/drawing/2014/main" id="{B7D3BEDE-A735-40D1-B2B8-F8A38A9A0AB5}"/>
               </a:ext>
             </a:extLst>
           </p:cNvPr>
@@ -11232,7 +11232,7 @@
           <p:cNvPr id="13" name="TextBox 12">
             <a:extLst xmlns:a="http://schemas.openxmlformats.org/drawingml/2006/main">
               <a:ext uri="{FF2B5EF4-FFF2-40B4-BE49-F238E27FC236}">
-                <a16:creationId xmlns:a16="http://schemas.microsoft.com/office/drawing/2014/main" id="{661F0302-1E64-45B5-88CE-C854CEF2539E}"/>
+                <a16:creationId xmlns:a16="http://schemas.microsoft.com/office/drawing/2014/main" id="{0C72D2D7-1117-4D76-BF35-F2E421EFC0D4}"/>
               </a:ext>
             </a:extLst>
           </p:cNvPr>
@@ -11279,7 +11279,7 @@
           <p:cNvPr id="14" name="Rounded Rectangle 13">
             <a:extLst xmlns:a="http://schemas.openxmlformats.org/drawingml/2006/main">
               <a:ext uri="{FF2B5EF4-FFF2-40B4-BE49-F238E27FC236}">
-                <a16:creationId xmlns:a16="http://schemas.microsoft.com/office/drawing/2014/main" id="{546B2CFF-DF58-48FD-A59C-72E6148256F9}"/>
+                <a16:creationId xmlns:a16="http://schemas.microsoft.com/office/drawing/2014/main" id="{7AFD61D0-3197-4B13-9B26-C2FEFA345164}"/>
               </a:ext>
             </a:extLst>
           </p:cNvPr>
@@ -11336,7 +11336,7 @@
           <p:cNvPr id="15" name="TextBox 14">
             <a:extLst xmlns:a="http://schemas.openxmlformats.org/drawingml/2006/main">
               <a:ext uri="{FF2B5EF4-FFF2-40B4-BE49-F238E27FC236}">
-                <a16:creationId xmlns:a16="http://schemas.microsoft.com/office/drawing/2014/main" id="{64591245-16B2-4DA6-A119-8E5B43A47F7C}"/>
+                <a16:creationId xmlns:a16="http://schemas.microsoft.com/office/drawing/2014/main" id="{9C276609-CE2F-4FAE-ADDE-99F5C2793DF8}"/>
               </a:ext>
             </a:extLst>
           </p:cNvPr>
@@ -11383,7 +11383,7 @@
           <p:cNvPr id="16" name="TextBox 15">
             <a:extLst xmlns:a="http://schemas.openxmlformats.org/drawingml/2006/main">
               <a:ext uri="{FF2B5EF4-FFF2-40B4-BE49-F238E27FC236}">
-                <a16:creationId xmlns:a16="http://schemas.microsoft.com/office/drawing/2014/main" id="{6577C386-056A-40B5-99C8-2FA127A4DBC8}"/>
+                <a16:creationId xmlns:a16="http://schemas.microsoft.com/office/drawing/2014/main" id="{BA5F2A49-EFD7-410E-801B-E89C56CBC88F}"/>
               </a:ext>
             </a:extLst>
           </p:cNvPr>
@@ -11430,7 +11430,7 @@
           <p:cNvPr id="17" name="TextBox 16">
             <a:extLst xmlns:a="http://schemas.openxmlformats.org/drawingml/2006/main">
               <a:ext uri="{FF2B5EF4-FFF2-40B4-BE49-F238E27FC236}">
-                <a16:creationId xmlns:a16="http://schemas.microsoft.com/office/drawing/2014/main" id="{9996D4F7-2C29-4D08-8994-DAB3C9C69202}"/>
+                <a16:creationId xmlns:a16="http://schemas.microsoft.com/office/drawing/2014/main" id="{AC1BF362-6C10-4C91-A48B-BC6BB9F2DDC4}"/>
               </a:ext>
             </a:extLst>
           </p:cNvPr>
@@ -11477,7 +11477,7 @@
           <p:cNvPr id="18" name="Rounded Rectangle 17">
             <a:extLst xmlns:a="http://schemas.openxmlformats.org/drawingml/2006/main">
               <a:ext uri="{FF2B5EF4-FFF2-40B4-BE49-F238E27FC236}">
-                <a16:creationId xmlns:a16="http://schemas.microsoft.com/office/drawing/2014/main" id="{AB1BB00D-D1FB-4E7C-A194-DC6D25BD1F5B}"/>
+                <a16:creationId xmlns:a16="http://schemas.microsoft.com/office/drawing/2014/main" id="{F8DCBB40-37F0-4E38-AE9E-90D0B00085BE}"/>
               </a:ext>
             </a:extLst>
           </p:cNvPr>
@@ -11534,7 +11534,7 @@
           <p:cNvPr id="19" name="TextBox 18">
             <a:extLst xmlns:a="http://schemas.openxmlformats.org/drawingml/2006/main">
               <a:ext uri="{FF2B5EF4-FFF2-40B4-BE49-F238E27FC236}">
-                <a16:creationId xmlns:a16="http://schemas.microsoft.com/office/drawing/2014/main" id="{61AAE06A-D102-4C19-B774-9D0BEB11D748}"/>
+                <a16:creationId xmlns:a16="http://schemas.microsoft.com/office/drawing/2014/main" id="{16B4E986-D083-42DB-ABFD-7C73C9383769}"/>
               </a:ext>
             </a:extLst>
           </p:cNvPr>
@@ -11581,7 +11581,7 @@
           <p:cNvPr id="20" name="TextBox 19">
             <a:extLst xmlns:a="http://schemas.openxmlformats.org/drawingml/2006/main">
               <a:ext uri="{FF2B5EF4-FFF2-40B4-BE49-F238E27FC236}">
-                <a16:creationId xmlns:a16="http://schemas.microsoft.com/office/drawing/2014/main" id="{947D2A6C-70B1-4C5B-84FC-B694DCA134ED}"/>
+                <a16:creationId xmlns:a16="http://schemas.microsoft.com/office/drawing/2014/main" id="{AB8D7A5A-37AC-4E52-81BE-FA0FD62C4DA5}"/>
               </a:ext>
             </a:extLst>
           </p:cNvPr>
@@ -11626,7 +11626,7 @@
     </p:spTree>
     <p:extLst>
       <p:ext uri="{BB962C8B-B14F-4D97-AF65-F5344CB8AC3E}">
-        <p14:creationId xmlns:p14="http://schemas.microsoft.com/office/powerpoint/2010/main" val="1662579053"/>
+        <p14:creationId xmlns:p14="http://schemas.microsoft.com/office/powerpoint/2010/main" val="107720049"/>
       </p:ext>
     </p:extLst>
   </p:cSld>
@@ -11650,7 +11650,7 @@
           <p:cNvPr id="2" name="TextBox 1">
             <a:extLst xmlns:a="http://schemas.openxmlformats.org/drawingml/2006/main">
               <a:ext uri="{FF2B5EF4-FFF2-40B4-BE49-F238E27FC236}">
-                <a16:creationId xmlns:a16="http://schemas.microsoft.com/office/drawing/2014/main" id="{B53E72B7-EEEE-4DC9-B87B-8F531BEBA330}"/>
+                <a16:creationId xmlns:a16="http://schemas.microsoft.com/office/drawing/2014/main" id="{F333AF83-097A-4514-89A9-724C4FCBA43D}"/>
               </a:ext>
             </a:extLst>
           </p:cNvPr>
@@ -11697,7 +11697,7 @@
           <p:cNvPr id="3" name="TextBox 2">
             <a:extLst xmlns:a="http://schemas.openxmlformats.org/drawingml/2006/main">
               <a:ext uri="{FF2B5EF4-FFF2-40B4-BE49-F238E27FC236}">
-                <a16:creationId xmlns:a16="http://schemas.microsoft.com/office/drawing/2014/main" id="{75304C33-3254-4D8B-9331-5D520729034F}"/>
+                <a16:creationId xmlns:a16="http://schemas.microsoft.com/office/drawing/2014/main" id="{3F0CAD53-0E86-464D-A2DC-3DBAB8D7EC42}"/>
               </a:ext>
             </a:extLst>
           </p:cNvPr>
@@ -11744,7 +11744,7 @@
           <p:cNvPr id="4" name="Rectangle 3">
             <a:extLst xmlns:a="http://schemas.openxmlformats.org/drawingml/2006/main">
               <a:ext uri="{FF2B5EF4-FFF2-40B4-BE49-F238E27FC236}">
-                <a16:creationId xmlns:a16="http://schemas.microsoft.com/office/drawing/2014/main" id="{9588E3EF-35CB-4E92-AFB1-EE96EEBEA9FE}"/>
+                <a16:creationId xmlns:a16="http://schemas.microsoft.com/office/drawing/2014/main" id="{ACD092D5-5A18-46B7-9115-F499246DAAA2}"/>
               </a:ext>
             </a:extLst>
           </p:cNvPr>
@@ -11799,7 +11799,7 @@
           <p:cNvPr id="5" name="Rectangle 4">
             <a:extLst xmlns:a="http://schemas.openxmlformats.org/drawingml/2006/main">
               <a:ext uri="{FF2B5EF4-FFF2-40B4-BE49-F238E27FC236}">
-                <a16:creationId xmlns:a16="http://schemas.microsoft.com/office/drawing/2014/main" id="{014DDC0E-A7DE-4152-8F7C-96FC511D3712}"/>
+                <a16:creationId xmlns:a16="http://schemas.microsoft.com/office/drawing/2014/main" id="{3BF714A9-2F13-4918-86CF-45B40167807C}"/>
               </a:ext>
             </a:extLst>
           </p:cNvPr>
@@ -11854,7 +11854,7 @@
           <p:cNvPr id="6" name="TextBox 5">
             <a:extLst xmlns:a="http://schemas.openxmlformats.org/drawingml/2006/main">
               <a:ext uri="{FF2B5EF4-FFF2-40B4-BE49-F238E27FC236}">
-                <a16:creationId xmlns:a16="http://schemas.microsoft.com/office/drawing/2014/main" id="{57EF61BD-B709-44F7-A34E-FF15FA607E90}"/>
+                <a16:creationId xmlns:a16="http://schemas.microsoft.com/office/drawing/2014/main" id="{D0257CB4-908A-45F4-8DEF-AE1CEA50E74E}"/>
               </a:ext>
             </a:extLst>
           </p:cNvPr>
@@ -11891,7 +11891,7 @@
                 <a:ea typeface="Aptos"/>
                 <a:cs typeface="Aptos"/>
               </a:rPr>
-              <a:t>Independent public evidence summary · 2026.07.23-13 · 2026-07-22 · Sources: WIPO licensing; WIPO IP Finance</a:t>
+              <a:t>Independent public evidence summary · 2026.07.23-14 · 2026-07-22 · Sources: WIPO licensing; WIPO IP Finance</a:t>
             </a:r>
           </a:p>
         </p:txBody>
@@ -11901,7 +11901,7 @@
           <p:cNvPr id="7" name="TextBox 6">
             <a:extLst xmlns:a="http://schemas.openxmlformats.org/drawingml/2006/main">
               <a:ext uri="{FF2B5EF4-FFF2-40B4-BE49-F238E27FC236}">
-                <a16:creationId xmlns:a16="http://schemas.microsoft.com/office/drawing/2014/main" id="{F2E052C2-7964-46E0-9091-93462EAC7B61}"/>
+                <a16:creationId xmlns:a16="http://schemas.microsoft.com/office/drawing/2014/main" id="{88B92C77-E06B-42C0-8DCC-D6B2174555D2}"/>
               </a:ext>
             </a:extLst>
           </p:cNvPr>
@@ -11948,7 +11948,7 @@
           <p:cNvPr id="8" name="TextBox 7">
             <a:extLst xmlns:a="http://schemas.openxmlformats.org/drawingml/2006/main">
               <a:ext uri="{FF2B5EF4-FFF2-40B4-BE49-F238E27FC236}">
-                <a16:creationId xmlns:a16="http://schemas.microsoft.com/office/drawing/2014/main" id="{A202F50D-A089-4BE5-B9C5-3108AFD8576B}"/>
+                <a16:creationId xmlns:a16="http://schemas.microsoft.com/office/drawing/2014/main" id="{1E81E153-365C-411B-9F90-DC1762AED9AB}"/>
               </a:ext>
             </a:extLst>
           </p:cNvPr>
@@ -11995,7 +11995,7 @@
           <p:cNvPr id="9" name="TextBox 8">
             <a:extLst xmlns:a="http://schemas.openxmlformats.org/drawingml/2006/main">
               <a:ext uri="{FF2B5EF4-FFF2-40B4-BE49-F238E27FC236}">
-                <a16:creationId xmlns:a16="http://schemas.microsoft.com/office/drawing/2014/main" id="{1159623E-9050-427A-8D0C-67A925AC2CE2}"/>
+                <a16:creationId xmlns:a16="http://schemas.microsoft.com/office/drawing/2014/main" id="{52B37342-D3AA-454E-ACC8-AD805C0FD82B}"/>
               </a:ext>
             </a:extLst>
           </p:cNvPr>
@@ -12092,7 +12092,7 @@
           <p:cNvPr id="10" name="Rounded Rectangle 9">
             <a:extLst xmlns:a="http://schemas.openxmlformats.org/drawingml/2006/main">
               <a:ext uri="{FF2B5EF4-FFF2-40B4-BE49-F238E27FC236}">
-                <a16:creationId xmlns:a16="http://schemas.microsoft.com/office/drawing/2014/main" id="{03B51D91-936D-43A9-85E0-EC3D51B60416}"/>
+                <a16:creationId xmlns:a16="http://schemas.microsoft.com/office/drawing/2014/main" id="{78213792-13B5-4AA4-AEF4-B2D85F12E30C}"/>
               </a:ext>
             </a:extLst>
           </p:cNvPr>
@@ -12149,7 +12149,7 @@
           <p:cNvPr id="11" name="TextBox 10">
             <a:extLst xmlns:a="http://schemas.openxmlformats.org/drawingml/2006/main">
               <a:ext uri="{FF2B5EF4-FFF2-40B4-BE49-F238E27FC236}">
-                <a16:creationId xmlns:a16="http://schemas.microsoft.com/office/drawing/2014/main" id="{25BC956E-4AEB-472A-B53A-68AD50E0BA18}"/>
+                <a16:creationId xmlns:a16="http://schemas.microsoft.com/office/drawing/2014/main" id="{0B34E6A5-4807-45C5-AFF1-A5E4FE6C279B}"/>
               </a:ext>
             </a:extLst>
           </p:cNvPr>
@@ -12196,7 +12196,7 @@
           <p:cNvPr id="12" name="TextBox 11">
             <a:extLst xmlns:a="http://schemas.openxmlformats.org/drawingml/2006/main">
               <a:ext uri="{FF2B5EF4-FFF2-40B4-BE49-F238E27FC236}">
-                <a16:creationId xmlns:a16="http://schemas.microsoft.com/office/drawing/2014/main" id="{D42E3B00-B48D-4CB9-B7F6-F4FA56142A65}"/>
+                <a16:creationId xmlns:a16="http://schemas.microsoft.com/office/drawing/2014/main" id="{FFB25343-6A52-4C2B-B757-25F3C5E37DFE}"/>
               </a:ext>
             </a:extLst>
           </p:cNvPr>
@@ -12241,7 +12241,7 @@
     </p:spTree>
     <p:extLst>
       <p:ext uri="{BB962C8B-B14F-4D97-AF65-F5344CB8AC3E}">
-        <p14:creationId xmlns:p14="http://schemas.microsoft.com/office/powerpoint/2010/main" val="1448910148"/>
+        <p14:creationId xmlns:p14="http://schemas.microsoft.com/office/powerpoint/2010/main" val="1014553813"/>
       </p:ext>
     </p:extLst>
   </p:cSld>
@@ -12265,7 +12265,7 @@
           <p:cNvPr id="2" name="TextBox 1">
             <a:extLst xmlns:a="http://schemas.openxmlformats.org/drawingml/2006/main">
               <a:ext uri="{FF2B5EF4-FFF2-40B4-BE49-F238E27FC236}">
-                <a16:creationId xmlns:a16="http://schemas.microsoft.com/office/drawing/2014/main" id="{A7AA2E98-8F37-4B51-9705-7AAF249E5671}"/>
+                <a16:creationId xmlns:a16="http://schemas.microsoft.com/office/drawing/2014/main" id="{AAC8152B-3105-4812-A556-ABE10AC4BA2E}"/>
               </a:ext>
             </a:extLst>
           </p:cNvPr>
@@ -12312,7 +12312,7 @@
           <p:cNvPr id="3" name="TextBox 2">
             <a:extLst xmlns:a="http://schemas.openxmlformats.org/drawingml/2006/main">
               <a:ext uri="{FF2B5EF4-FFF2-40B4-BE49-F238E27FC236}">
-                <a16:creationId xmlns:a16="http://schemas.microsoft.com/office/drawing/2014/main" id="{033DB41C-F3EF-4DFA-A6B4-DA740A2AC6DF}"/>
+                <a16:creationId xmlns:a16="http://schemas.microsoft.com/office/drawing/2014/main" id="{61346E62-A451-4818-BD1F-4D2EE1589B16}"/>
               </a:ext>
             </a:extLst>
           </p:cNvPr>
@@ -12359,7 +12359,7 @@
           <p:cNvPr id="4" name="Rectangle 3">
             <a:extLst xmlns:a="http://schemas.openxmlformats.org/drawingml/2006/main">
               <a:ext uri="{FF2B5EF4-FFF2-40B4-BE49-F238E27FC236}">
-                <a16:creationId xmlns:a16="http://schemas.microsoft.com/office/drawing/2014/main" id="{AAABD353-05A7-4BEB-803B-C3F4A25E1113}"/>
+                <a16:creationId xmlns:a16="http://schemas.microsoft.com/office/drawing/2014/main" id="{34D567E0-A90C-4C0A-99EE-C2DDBB4D46F8}"/>
               </a:ext>
             </a:extLst>
           </p:cNvPr>
@@ -12414,7 +12414,7 @@
           <p:cNvPr id="5" name="Rectangle 4">
             <a:extLst xmlns:a="http://schemas.openxmlformats.org/drawingml/2006/main">
               <a:ext uri="{FF2B5EF4-FFF2-40B4-BE49-F238E27FC236}">
-                <a16:creationId xmlns:a16="http://schemas.microsoft.com/office/drawing/2014/main" id="{34BB8874-F684-4F23-94E5-5369AA934417}"/>
+                <a16:creationId xmlns:a16="http://schemas.microsoft.com/office/drawing/2014/main" id="{1D098A03-3B5E-4E4C-AD70-1C453D7B583E}"/>
               </a:ext>
             </a:extLst>
           </p:cNvPr>
@@ -12469,7 +12469,7 @@
           <p:cNvPr id="6" name="TextBox 5">
             <a:extLst xmlns:a="http://schemas.openxmlformats.org/drawingml/2006/main">
               <a:ext uri="{FF2B5EF4-FFF2-40B4-BE49-F238E27FC236}">
-                <a16:creationId xmlns:a16="http://schemas.microsoft.com/office/drawing/2014/main" id="{D70E3795-C869-4A97-9170-9A5A492D0846}"/>
+                <a16:creationId xmlns:a16="http://schemas.microsoft.com/office/drawing/2014/main" id="{59FF924F-3113-4A1C-A985-D41848A1BEB7}"/>
               </a:ext>
             </a:extLst>
           </p:cNvPr>
@@ -12506,7 +12506,7 @@
                 <a:ea typeface="Aptos"/>
                 <a:cs typeface="Aptos"/>
               </a:rPr>
-              <a:t>Independent public evidence summary · 2026.07.23-13 · 2026-07-22 · Sources: Evidence Register; EPO; WIPO</a:t>
+              <a:t>Independent public evidence summary · 2026.07.23-14 · 2026-07-22 · Sources: Evidence Register; EPO; WIPO</a:t>
             </a:r>
           </a:p>
         </p:txBody>
@@ -12516,7 +12516,7 @@
           <p:cNvPr id="7" name="TextBox 6">
             <a:extLst xmlns:a="http://schemas.openxmlformats.org/drawingml/2006/main">
               <a:ext uri="{FF2B5EF4-FFF2-40B4-BE49-F238E27FC236}">
-                <a16:creationId xmlns:a16="http://schemas.microsoft.com/office/drawing/2014/main" id="{441038D8-2F9C-4F7A-81B3-A130E5A94625}"/>
+                <a16:creationId xmlns:a16="http://schemas.microsoft.com/office/drawing/2014/main" id="{75A620A2-55CC-4464-B689-B1C275A20CEE}"/>
               </a:ext>
             </a:extLst>
           </p:cNvPr>
@@ -13003,7 +13003,7 @@
           <p:cNvPr id="9" name="TextBox 8">
             <a:extLst xmlns:a="http://schemas.openxmlformats.org/drawingml/2006/main">
               <a:ext uri="{FF2B5EF4-FFF2-40B4-BE49-F238E27FC236}">
-                <a16:creationId xmlns:a16="http://schemas.microsoft.com/office/drawing/2014/main" id="{F9F29981-7E12-4EFE-94E9-610DB10C1401}"/>
+                <a16:creationId xmlns:a16="http://schemas.microsoft.com/office/drawing/2014/main" id="{400FAA96-CA23-41FE-9B1C-4467B45C89C1}"/>
               </a:ext>
             </a:extLst>
           </p:cNvPr>
@@ -13048,7 +13048,7 @@
     </p:spTree>
     <p:extLst>
       <p:ext uri="{BB962C8B-B14F-4D97-AF65-F5344CB8AC3E}">
-        <p14:creationId xmlns:p14="http://schemas.microsoft.com/office/powerpoint/2010/main" val="479061843"/>
+        <p14:creationId xmlns:p14="http://schemas.microsoft.com/office/powerpoint/2010/main" val="876851996"/>
       </p:ext>
     </p:extLst>
   </p:cSld>
@@ -13072,7 +13072,7 @@
           <p:cNvPr id="2" name="TextBox 1">
             <a:extLst xmlns:a="http://schemas.openxmlformats.org/drawingml/2006/main">
               <a:ext uri="{FF2B5EF4-FFF2-40B4-BE49-F238E27FC236}">
-                <a16:creationId xmlns:a16="http://schemas.microsoft.com/office/drawing/2014/main" id="{5F94E844-CF78-46AA-8509-674441119B58}"/>
+                <a16:creationId xmlns:a16="http://schemas.microsoft.com/office/drawing/2014/main" id="{0A6152D2-E258-4E8A-909F-8740A45089FA}"/>
               </a:ext>
             </a:extLst>
           </p:cNvPr>
@@ -13119,7 +13119,7 @@
           <p:cNvPr id="3" name="TextBox 2">
             <a:extLst xmlns:a="http://schemas.openxmlformats.org/drawingml/2006/main">
               <a:ext uri="{FF2B5EF4-FFF2-40B4-BE49-F238E27FC236}">
-                <a16:creationId xmlns:a16="http://schemas.microsoft.com/office/drawing/2014/main" id="{CFB31A71-F4AF-41D8-A3BA-7130A0ED675D}"/>
+                <a16:creationId xmlns:a16="http://schemas.microsoft.com/office/drawing/2014/main" id="{1973F7BB-0722-49DE-8D6A-CCD5B4B5E3D1}"/>
               </a:ext>
             </a:extLst>
           </p:cNvPr>
@@ -13166,7 +13166,7 @@
           <p:cNvPr id="4" name="Rectangle 3">
             <a:extLst xmlns:a="http://schemas.openxmlformats.org/drawingml/2006/main">
               <a:ext uri="{FF2B5EF4-FFF2-40B4-BE49-F238E27FC236}">
-                <a16:creationId xmlns:a16="http://schemas.microsoft.com/office/drawing/2014/main" id="{06F66E5E-CB1D-4CBF-8F59-5B5C30CC03E1}"/>
+                <a16:creationId xmlns:a16="http://schemas.microsoft.com/office/drawing/2014/main" id="{DFE1CAE3-AA84-46D0-9E8B-A5EC4B7FE6F4}"/>
               </a:ext>
             </a:extLst>
           </p:cNvPr>
@@ -13221,7 +13221,7 @@
           <p:cNvPr id="5" name="Rectangle 4">
             <a:extLst xmlns:a="http://schemas.openxmlformats.org/drawingml/2006/main">
               <a:ext uri="{FF2B5EF4-FFF2-40B4-BE49-F238E27FC236}">
-                <a16:creationId xmlns:a16="http://schemas.microsoft.com/office/drawing/2014/main" id="{4B835B01-5EEB-49C8-8B49-A9DCF7FFA741}"/>
+                <a16:creationId xmlns:a16="http://schemas.microsoft.com/office/drawing/2014/main" id="{30F7AA65-D8F6-44A7-9ECE-66538CCE8C22}"/>
               </a:ext>
             </a:extLst>
           </p:cNvPr>
@@ -13276,7 +13276,7 @@
           <p:cNvPr id="6" name="TextBox 5">
             <a:extLst xmlns:a="http://schemas.openxmlformats.org/drawingml/2006/main">
               <a:ext uri="{FF2B5EF4-FFF2-40B4-BE49-F238E27FC236}">
-                <a16:creationId xmlns:a16="http://schemas.microsoft.com/office/drawing/2014/main" id="{7DBDB192-5022-4224-A5E0-BD851C197A93}"/>
+                <a16:creationId xmlns:a16="http://schemas.microsoft.com/office/drawing/2014/main" id="{77369AD5-7231-4754-B32B-5C40372AF29C}"/>
               </a:ext>
             </a:extLst>
           </p:cNvPr>
@@ -13313,7 +13313,7 @@
                 <a:ea typeface="Aptos"/>
                 <a:cs typeface="Aptos"/>
               </a:rPr>
-              <a:t>Independent public evidence summary · 2026.07.23-13 · 2026-07-22 · Sources: Evidence Register</a:t>
+              <a:t>Independent public evidence summary · 2026.07.23-14 · 2026-07-22 · Sources: Evidence Register</a:t>
             </a:r>
           </a:p>
         </p:txBody>
@@ -13323,7 +13323,7 @@
           <p:cNvPr id="7" name="TextBox 6">
             <a:extLst xmlns:a="http://schemas.openxmlformats.org/drawingml/2006/main">
               <a:ext uri="{FF2B5EF4-FFF2-40B4-BE49-F238E27FC236}">
-                <a16:creationId xmlns:a16="http://schemas.microsoft.com/office/drawing/2014/main" id="{D3CA95B1-8470-4FF8-8CD0-F0490F7AB959}"/>
+                <a16:creationId xmlns:a16="http://schemas.microsoft.com/office/drawing/2014/main" id="{FECE6921-2D26-4056-8E83-AC2F4238D25F}"/>
               </a:ext>
             </a:extLst>
           </p:cNvPr>
@@ -14056,7 +14056,7 @@
           <p:cNvPr id="9" name="TextBox 8">
             <a:extLst xmlns:a="http://schemas.openxmlformats.org/drawingml/2006/main">
               <a:ext uri="{FF2B5EF4-FFF2-40B4-BE49-F238E27FC236}">
-                <a16:creationId xmlns:a16="http://schemas.microsoft.com/office/drawing/2014/main" id="{E8D7EFDF-1273-4B27-B6A2-BFC2CD64BE48}"/>
+                <a16:creationId xmlns:a16="http://schemas.microsoft.com/office/drawing/2014/main" id="{1840E20F-3DFB-4998-8184-E893DA78711E}"/>
               </a:ext>
             </a:extLst>
           </p:cNvPr>
@@ -14101,7 +14101,7 @@
     </p:spTree>
     <p:extLst>
       <p:ext uri="{BB962C8B-B14F-4D97-AF65-F5344CB8AC3E}">
-        <p14:creationId xmlns:p14="http://schemas.microsoft.com/office/powerpoint/2010/main" val="818730227"/>
+        <p14:creationId xmlns:p14="http://schemas.microsoft.com/office/powerpoint/2010/main" val="479709993"/>
       </p:ext>
     </p:extLst>
   </p:cSld>

--- a/site/downloads/pixan-bank-deck-medium-en.pptx
+++ b/site/downloads/pixan-bank-deck-medium-en.pptx
@@ -2,24 +2,24 @@
 <file path=ppt/presentation.xml><?xml version="1.0" encoding="utf-8"?>
 <p:presentation xmlns:p="http://schemas.openxmlformats.org/presentationml/2006/main">
   <p:sldMasterIdLst>
-    <p:sldMasterId xmlns:r="http://schemas.openxmlformats.org/officeDocument/2006/relationships" id="2147483648" r:id="R8872a078aae6475b"/>
+    <p:sldMasterId xmlns:r="http://schemas.openxmlformats.org/officeDocument/2006/relationships" id="2147483648" r:id="R7bd00cdc78fb4774"/>
   </p:sldMasterIdLst>
   <p:notesMasterIdLst>
-    <p:notesMasterId xmlns:r="http://schemas.openxmlformats.org/officeDocument/2006/relationships" r:id="R9906e3eafea844e7"/>
+    <p:notesMasterId xmlns:r="http://schemas.openxmlformats.org/officeDocument/2006/relationships" r:id="R45db546a411b449e"/>
   </p:notesMasterIdLst>
   <p:sldIdLst>
-    <p:sldId xmlns:r="http://schemas.openxmlformats.org/officeDocument/2006/relationships" id="256" r:id="Rdae40e627dcb4b72"/>
-    <p:sldId xmlns:r="http://schemas.openxmlformats.org/officeDocument/2006/relationships" id="257" r:id="R8028ea888cc0431f"/>
-    <p:sldId xmlns:r="http://schemas.openxmlformats.org/officeDocument/2006/relationships" id="258" r:id="R96dbb29a4d9b491a"/>
-    <p:sldId xmlns:r="http://schemas.openxmlformats.org/officeDocument/2006/relationships" id="259" r:id="R838ee3d0112e4a84"/>
-    <p:sldId xmlns:r="http://schemas.openxmlformats.org/officeDocument/2006/relationships" id="260" r:id="R3032441c9c2b4bb6"/>
-    <p:sldId xmlns:r="http://schemas.openxmlformats.org/officeDocument/2006/relationships" id="261" r:id="Re26793f90ab248ae"/>
-    <p:sldId xmlns:r="http://schemas.openxmlformats.org/officeDocument/2006/relationships" id="262" r:id="Rdc53cb24ac2a4878"/>
-    <p:sldId xmlns:r="http://schemas.openxmlformats.org/officeDocument/2006/relationships" id="263" r:id="R58962bee56764dcf"/>
-    <p:sldId xmlns:r="http://schemas.openxmlformats.org/officeDocument/2006/relationships" id="264" r:id="Rdbc8267e539748a7"/>
-    <p:sldId xmlns:r="http://schemas.openxmlformats.org/officeDocument/2006/relationships" id="265" r:id="R263da803369244fd"/>
-    <p:sldId xmlns:r="http://schemas.openxmlformats.org/officeDocument/2006/relationships" id="266" r:id="Rde138ce8a78d45d8"/>
-    <p:sldId xmlns:r="http://schemas.openxmlformats.org/officeDocument/2006/relationships" id="267" r:id="R03bcebeefe9f4052"/>
+    <p:sldId xmlns:r="http://schemas.openxmlformats.org/officeDocument/2006/relationships" id="256" r:id="R7cbe9b18231a4303"/>
+    <p:sldId xmlns:r="http://schemas.openxmlformats.org/officeDocument/2006/relationships" id="257" r:id="R8fa3906a058e4ac7"/>
+    <p:sldId xmlns:r="http://schemas.openxmlformats.org/officeDocument/2006/relationships" id="258" r:id="R3a39f7e348654d97"/>
+    <p:sldId xmlns:r="http://schemas.openxmlformats.org/officeDocument/2006/relationships" id="259" r:id="R9ac48e35eefe42b6"/>
+    <p:sldId xmlns:r="http://schemas.openxmlformats.org/officeDocument/2006/relationships" id="260" r:id="Rbe81582345e04c6e"/>
+    <p:sldId xmlns:r="http://schemas.openxmlformats.org/officeDocument/2006/relationships" id="261" r:id="R95d82665849e49ea"/>
+    <p:sldId xmlns:r="http://schemas.openxmlformats.org/officeDocument/2006/relationships" id="262" r:id="R19c3ce4487944c55"/>
+    <p:sldId xmlns:r="http://schemas.openxmlformats.org/officeDocument/2006/relationships" id="263" r:id="R49eb2ae880904ab3"/>
+    <p:sldId xmlns:r="http://schemas.openxmlformats.org/officeDocument/2006/relationships" id="264" r:id="R4e67af77151c434e"/>
+    <p:sldId xmlns:r="http://schemas.openxmlformats.org/officeDocument/2006/relationships" id="265" r:id="R87d9172290844f4a"/>
+    <p:sldId xmlns:r="http://schemas.openxmlformats.org/officeDocument/2006/relationships" id="266" r:id="Rbede7635fa2f40aa"/>
+    <p:sldId xmlns:r="http://schemas.openxmlformats.org/officeDocument/2006/relationships" id="267" r:id="R14bae8b35941467d"/>
   </p:sldIdLst>
   <p:sldSz cx="12191999" cy="6858000"/>
   <p:notesSz cx="6858000" cy="9144000"/>
@@ -1340,7 +1340,7 @@
           <p:cNvPr id="2" name="Title 1">
             <a:extLst xmlns:a="http://schemas.openxmlformats.org/drawingml/2006/main">
               <a:ext uri="{FF2B5EF4-FFF2-40B4-BE49-F238E27FC236}">
-                <a16:creationId xmlns:a16="http://schemas.microsoft.com/office/drawing/2014/main" id="{2490DDE1-634D-4BFE-ACB2-18A8CAAFDC37}"/>
+                <a16:creationId xmlns:a16="http://schemas.microsoft.com/office/drawing/2014/main" id="{893CB071-FDB6-4E2F-98EC-81045704E049}"/>
               </a:ext>
             </a:extLst>
           </p:cNvPr>
@@ -1372,7 +1372,7 @@
           <p:cNvPr id="3" name="Subtitle 2">
             <a:extLst xmlns:a="http://schemas.openxmlformats.org/drawingml/2006/main">
               <a:ext uri="{FF2B5EF4-FFF2-40B4-BE49-F238E27FC236}">
-                <a16:creationId xmlns:a16="http://schemas.microsoft.com/office/drawing/2014/main" id="{295C0DFC-B17A-45D9-A5E7-490527A2CEA3}"/>
+                <a16:creationId xmlns:a16="http://schemas.microsoft.com/office/drawing/2014/main" id="{CD736D49-93B3-4CC3-B30D-17F781B5CF3F}"/>
               </a:ext>
             </a:extLst>
           </p:cNvPr>
@@ -1495,7 +1495,7 @@
           <p:cNvPr id="4" name="Date Placeholder 3">
             <a:extLst xmlns:a="http://schemas.openxmlformats.org/drawingml/2006/main">
               <a:ext uri="{FF2B5EF4-FFF2-40B4-BE49-F238E27FC236}">
-                <a16:creationId xmlns:a16="http://schemas.microsoft.com/office/drawing/2014/main" id="{8CFE3173-59A6-4BDA-92AC-9EFD3135E76E}"/>
+                <a16:creationId xmlns:a16="http://schemas.microsoft.com/office/drawing/2014/main" id="{F282E358-67F2-40A9-85C9-25225A3A5587}"/>
               </a:ext>
             </a:extLst>
           </p:cNvPr>
@@ -1522,7 +1522,7 @@
           <p:cNvPr id="5" name="Footer Placeholder 4">
             <a:extLst xmlns:a="http://schemas.openxmlformats.org/drawingml/2006/main">
               <a:ext uri="{FF2B5EF4-FFF2-40B4-BE49-F238E27FC236}">
-                <a16:creationId xmlns:a16="http://schemas.microsoft.com/office/drawing/2014/main" id="{FAA5D2A1-5377-44C3-8BAD-2908AAD7EE2C}"/>
+                <a16:creationId xmlns:a16="http://schemas.microsoft.com/office/drawing/2014/main" id="{867817E3-FC28-4F3C-BF17-4637578CF335}"/>
               </a:ext>
             </a:extLst>
           </p:cNvPr>
@@ -1545,7 +1545,7 @@
           <p:cNvPr id="6" name="Slide Number Placeholder 5">
             <a:extLst xmlns:a="http://schemas.openxmlformats.org/drawingml/2006/main">
               <a:ext uri="{FF2B5EF4-FFF2-40B4-BE49-F238E27FC236}">
-                <a16:creationId xmlns:a16="http://schemas.microsoft.com/office/drawing/2014/main" id="{BAC15AB9-49F6-4E7E-BF2A-7131C845E319}"/>
+                <a16:creationId xmlns:a16="http://schemas.microsoft.com/office/drawing/2014/main" id="{AD9A1783-C4C7-412A-8DD1-E5DF2AEFAF17}"/>
               </a:ext>
             </a:extLst>
           </p:cNvPr>
@@ -1589,7 +1589,7 @@
           <p:cNvPr id="2" name="Title 1">
             <a:extLst xmlns:a="http://schemas.openxmlformats.org/drawingml/2006/main">
               <a:ext uri="{FF2B5EF4-FFF2-40B4-BE49-F238E27FC236}">
-                <a16:creationId xmlns:a16="http://schemas.microsoft.com/office/drawing/2014/main" id="{4A70C24F-4522-40CD-B320-901F0FBB2A9E}"/>
+                <a16:creationId xmlns:a16="http://schemas.microsoft.com/office/drawing/2014/main" id="{18D01BE5-FB15-438C-9CA7-2F5388109DDB}"/>
               </a:ext>
             </a:extLst>
           </p:cNvPr>
@@ -1616,7 +1616,7 @@
           <p:cNvPr id="3" name="Vertical Text Placeholder 2">
             <a:extLst xmlns:a="http://schemas.openxmlformats.org/drawingml/2006/main">
               <a:ext uri="{FF2B5EF4-FFF2-40B4-BE49-F238E27FC236}">
-                <a16:creationId xmlns:a16="http://schemas.microsoft.com/office/drawing/2014/main" id="{36FB928B-565E-481D-B1B4-35EC758AE7C4}"/>
+                <a16:creationId xmlns:a16="http://schemas.microsoft.com/office/drawing/2014/main" id="{6302645D-E086-4EB8-B6E8-2F050C60A313}"/>
               </a:ext>
             </a:extLst>
           </p:cNvPr>
@@ -1678,7 +1678,7 @@
           <p:cNvPr id="4" name="Date Placeholder 3">
             <a:extLst xmlns:a="http://schemas.openxmlformats.org/drawingml/2006/main">
               <a:ext uri="{FF2B5EF4-FFF2-40B4-BE49-F238E27FC236}">
-                <a16:creationId xmlns:a16="http://schemas.microsoft.com/office/drawing/2014/main" id="{F2D405DF-69DD-4A83-BFC6-D628BEFB46B4}"/>
+                <a16:creationId xmlns:a16="http://schemas.microsoft.com/office/drawing/2014/main" id="{B01520EC-F97E-42B2-9192-E3225118A653}"/>
               </a:ext>
             </a:extLst>
           </p:cNvPr>
@@ -1705,7 +1705,7 @@
           <p:cNvPr id="5" name="Footer Placeholder 4">
             <a:extLst xmlns:a="http://schemas.openxmlformats.org/drawingml/2006/main">
               <a:ext uri="{FF2B5EF4-FFF2-40B4-BE49-F238E27FC236}">
-                <a16:creationId xmlns:a16="http://schemas.microsoft.com/office/drawing/2014/main" id="{34EF3587-E40E-4493-895D-292613328191}"/>
+                <a16:creationId xmlns:a16="http://schemas.microsoft.com/office/drawing/2014/main" id="{DCB1A74A-41D6-4E91-A463-83897AA34AAA}"/>
               </a:ext>
             </a:extLst>
           </p:cNvPr>
@@ -1728,7 +1728,7 @@
           <p:cNvPr id="6" name="Slide Number Placeholder 5">
             <a:extLst xmlns:a="http://schemas.openxmlformats.org/drawingml/2006/main">
               <a:ext uri="{FF2B5EF4-FFF2-40B4-BE49-F238E27FC236}">
-                <a16:creationId xmlns:a16="http://schemas.microsoft.com/office/drawing/2014/main" id="{8A145117-FBF2-496F-8E7C-0E2A1EC5E058}"/>
+                <a16:creationId xmlns:a16="http://schemas.microsoft.com/office/drawing/2014/main" id="{005E11FD-1099-45E6-A1CF-5710CFDFA047}"/>
               </a:ext>
             </a:extLst>
           </p:cNvPr>
@@ -1772,7 +1772,7 @@
           <p:cNvPr id="2" name="Vertical Title 1">
             <a:extLst xmlns:a="http://schemas.openxmlformats.org/drawingml/2006/main">
               <a:ext uri="{FF2B5EF4-FFF2-40B4-BE49-F238E27FC236}">
-                <a16:creationId xmlns:a16="http://schemas.microsoft.com/office/drawing/2014/main" id="{5E421B21-A706-4EC2-A006-E6A1F87CAC09}"/>
+                <a16:creationId xmlns:a16="http://schemas.microsoft.com/office/drawing/2014/main" id="{27DEC973-C504-4801-92D2-090B7A7C7B28}"/>
               </a:ext>
             </a:extLst>
           </p:cNvPr>
@@ -1804,7 +1804,7 @@
           <p:cNvPr id="3" name="Vertical Text Placeholder 2">
             <a:extLst xmlns:a="http://schemas.openxmlformats.org/drawingml/2006/main">
               <a:ext uri="{FF2B5EF4-FFF2-40B4-BE49-F238E27FC236}">
-                <a16:creationId xmlns:a16="http://schemas.microsoft.com/office/drawing/2014/main" id="{AD5673B6-DF07-4769-862E-14BE92D23E28}"/>
+                <a16:creationId xmlns:a16="http://schemas.microsoft.com/office/drawing/2014/main" id="{59E6260F-E3F8-4E26-95BE-BA7A712EB625}"/>
               </a:ext>
             </a:extLst>
           </p:cNvPr>
@@ -1871,7 +1871,7 @@
           <p:cNvPr id="4" name="Date Placeholder 3">
             <a:extLst xmlns:a="http://schemas.openxmlformats.org/drawingml/2006/main">
               <a:ext uri="{FF2B5EF4-FFF2-40B4-BE49-F238E27FC236}">
-                <a16:creationId xmlns:a16="http://schemas.microsoft.com/office/drawing/2014/main" id="{6CBEAC75-5DE4-4F36-8431-1377DA284AE8}"/>
+                <a16:creationId xmlns:a16="http://schemas.microsoft.com/office/drawing/2014/main" id="{D11CB64D-B64E-449B-8837-B18EDD57052C}"/>
               </a:ext>
             </a:extLst>
           </p:cNvPr>
@@ -1898,7 +1898,7 @@
           <p:cNvPr id="5" name="Footer Placeholder 4">
             <a:extLst xmlns:a="http://schemas.openxmlformats.org/drawingml/2006/main">
               <a:ext uri="{FF2B5EF4-FFF2-40B4-BE49-F238E27FC236}">
-                <a16:creationId xmlns:a16="http://schemas.microsoft.com/office/drawing/2014/main" id="{9D7FAA92-BF05-48FF-B49D-046DE82E0B9E}"/>
+                <a16:creationId xmlns:a16="http://schemas.microsoft.com/office/drawing/2014/main" id="{0DC3788C-4BEF-4BBE-9215-BE33EF01A145}"/>
               </a:ext>
             </a:extLst>
           </p:cNvPr>
@@ -1921,7 +1921,7 @@
           <p:cNvPr id="6" name="Slide Number Placeholder 5">
             <a:extLst xmlns:a="http://schemas.openxmlformats.org/drawingml/2006/main">
               <a:ext uri="{FF2B5EF4-FFF2-40B4-BE49-F238E27FC236}">
-                <a16:creationId xmlns:a16="http://schemas.microsoft.com/office/drawing/2014/main" id="{6F8AE522-2434-485B-BF92-6967BC179118}"/>
+                <a16:creationId xmlns:a16="http://schemas.microsoft.com/office/drawing/2014/main" id="{53BDD443-6E8A-41A5-A1C5-4E5365740FAA}"/>
               </a:ext>
             </a:extLst>
           </p:cNvPr>
@@ -1965,7 +1965,7 @@
           <p:cNvPr id="2" name="Title 1">
             <a:extLst xmlns:a="http://schemas.openxmlformats.org/drawingml/2006/main">
               <a:ext uri="{FF2B5EF4-FFF2-40B4-BE49-F238E27FC236}">
-                <a16:creationId xmlns:a16="http://schemas.microsoft.com/office/drawing/2014/main" id="{1ADDCC78-8A5C-4772-A4E6-DD4FDF5DCB83}"/>
+                <a16:creationId xmlns:a16="http://schemas.microsoft.com/office/drawing/2014/main" id="{3B1E3EE1-03C9-4D93-AA52-222A18DB9FC7}"/>
               </a:ext>
             </a:extLst>
           </p:cNvPr>
@@ -1992,7 +1992,7 @@
           <p:cNvPr id="3" name="Content Placeholder 2">
             <a:extLst xmlns:a="http://schemas.openxmlformats.org/drawingml/2006/main">
               <a:ext uri="{FF2B5EF4-FFF2-40B4-BE49-F238E27FC236}">
-                <a16:creationId xmlns:a16="http://schemas.microsoft.com/office/drawing/2014/main" id="{E3A97F67-E429-4580-BCD5-000403A37362}"/>
+                <a16:creationId xmlns:a16="http://schemas.microsoft.com/office/drawing/2014/main" id="{4DD16187-EFF5-4164-B2DE-51CE4F0E8C27}"/>
               </a:ext>
             </a:extLst>
           </p:cNvPr>
@@ -2054,7 +2054,7 @@
           <p:cNvPr id="4" name="Date Placeholder 3">
             <a:extLst xmlns:a="http://schemas.openxmlformats.org/drawingml/2006/main">
               <a:ext uri="{FF2B5EF4-FFF2-40B4-BE49-F238E27FC236}">
-                <a16:creationId xmlns:a16="http://schemas.microsoft.com/office/drawing/2014/main" id="{80B0C90D-030F-455C-9DA8-419D63D0F7F6}"/>
+                <a16:creationId xmlns:a16="http://schemas.microsoft.com/office/drawing/2014/main" id="{A367902C-682F-4ED4-A966-05332B939665}"/>
               </a:ext>
             </a:extLst>
           </p:cNvPr>
@@ -2081,7 +2081,7 @@
           <p:cNvPr id="5" name="Footer Placeholder 4">
             <a:extLst xmlns:a="http://schemas.openxmlformats.org/drawingml/2006/main">
               <a:ext uri="{FF2B5EF4-FFF2-40B4-BE49-F238E27FC236}">
-                <a16:creationId xmlns:a16="http://schemas.microsoft.com/office/drawing/2014/main" id="{D10242C0-B67C-4D0B-B0B9-7E15C0A4D93B}"/>
+                <a16:creationId xmlns:a16="http://schemas.microsoft.com/office/drawing/2014/main" id="{43926E5E-ED8B-49FB-B19C-2AB827EA04FF}"/>
               </a:ext>
             </a:extLst>
           </p:cNvPr>
@@ -2104,7 +2104,7 @@
           <p:cNvPr id="6" name="Slide Number Placeholder 5">
             <a:extLst xmlns:a="http://schemas.openxmlformats.org/drawingml/2006/main">
               <a:ext uri="{FF2B5EF4-FFF2-40B4-BE49-F238E27FC236}">
-                <a16:creationId xmlns:a16="http://schemas.microsoft.com/office/drawing/2014/main" id="{1749018B-A45F-4BA3-859A-A571F3018FC9}"/>
+                <a16:creationId xmlns:a16="http://schemas.microsoft.com/office/drawing/2014/main" id="{0A812921-0AEF-48E0-B42C-E3A5BAC70016}"/>
               </a:ext>
             </a:extLst>
           </p:cNvPr>
@@ -2148,7 +2148,7 @@
           <p:cNvPr id="2" name="Title 1">
             <a:extLst xmlns:a="http://schemas.openxmlformats.org/drawingml/2006/main">
               <a:ext uri="{FF2B5EF4-FFF2-40B4-BE49-F238E27FC236}">
-                <a16:creationId xmlns:a16="http://schemas.microsoft.com/office/drawing/2014/main" id="{55AFF59A-2E4E-42A5-9506-2862EFF4436E}"/>
+                <a16:creationId xmlns:a16="http://schemas.microsoft.com/office/drawing/2014/main" id="{CCA0482C-04E2-486B-B13C-060B550770A6}"/>
               </a:ext>
             </a:extLst>
           </p:cNvPr>
@@ -2185,7 +2185,7 @@
           <p:cNvPr id="3" name="Text Placeholder 2">
             <a:extLst xmlns:a="http://schemas.openxmlformats.org/drawingml/2006/main">
               <a:ext uri="{FF2B5EF4-FFF2-40B4-BE49-F238E27FC236}">
-                <a16:creationId xmlns:a16="http://schemas.microsoft.com/office/drawing/2014/main" id="{403601EF-7DEF-4B00-9716-585E85C41D34}"/>
+                <a16:creationId xmlns:a16="http://schemas.microsoft.com/office/drawing/2014/main" id="{860ABC3B-9C69-45C6-8B8E-BD54D70B99A0}"/>
               </a:ext>
             </a:extLst>
           </p:cNvPr>
@@ -2311,7 +2311,7 @@
           <p:cNvPr id="4" name="Date Placeholder 3">
             <a:extLst xmlns:a="http://schemas.openxmlformats.org/drawingml/2006/main">
               <a:ext uri="{FF2B5EF4-FFF2-40B4-BE49-F238E27FC236}">
-                <a16:creationId xmlns:a16="http://schemas.microsoft.com/office/drawing/2014/main" id="{4F468635-3AF1-4168-BA93-5742EA7A12DF}"/>
+                <a16:creationId xmlns:a16="http://schemas.microsoft.com/office/drawing/2014/main" id="{CADCC661-4F7E-41EA-B3CB-C61C1B82F296}"/>
               </a:ext>
             </a:extLst>
           </p:cNvPr>
@@ -2338,7 +2338,7 @@
           <p:cNvPr id="5" name="Footer Placeholder 4">
             <a:extLst xmlns:a="http://schemas.openxmlformats.org/drawingml/2006/main">
               <a:ext uri="{FF2B5EF4-FFF2-40B4-BE49-F238E27FC236}">
-                <a16:creationId xmlns:a16="http://schemas.microsoft.com/office/drawing/2014/main" id="{91C12112-B2F9-4696-B25A-723C14C15DD6}"/>
+                <a16:creationId xmlns:a16="http://schemas.microsoft.com/office/drawing/2014/main" id="{FBC98F47-1A00-4D2A-BF1A-A32FDD417C00}"/>
               </a:ext>
             </a:extLst>
           </p:cNvPr>
@@ -2361,7 +2361,7 @@
           <p:cNvPr id="6" name="Slide Number Placeholder 5">
             <a:extLst xmlns:a="http://schemas.openxmlformats.org/drawingml/2006/main">
               <a:ext uri="{FF2B5EF4-FFF2-40B4-BE49-F238E27FC236}">
-                <a16:creationId xmlns:a16="http://schemas.microsoft.com/office/drawing/2014/main" id="{2E33A3AC-88A9-4C5D-BE53-2153936886BC}"/>
+                <a16:creationId xmlns:a16="http://schemas.microsoft.com/office/drawing/2014/main" id="{F098D2B4-1832-4449-85D8-885A657414FB}"/>
               </a:ext>
             </a:extLst>
           </p:cNvPr>
@@ -2405,7 +2405,7 @@
           <p:cNvPr id="2" name="Title 1">
             <a:extLst xmlns:a="http://schemas.openxmlformats.org/drawingml/2006/main">
               <a:ext uri="{FF2B5EF4-FFF2-40B4-BE49-F238E27FC236}">
-                <a16:creationId xmlns:a16="http://schemas.microsoft.com/office/drawing/2014/main" id="{D72B8943-0F37-4313-865E-ABD2D19B8283}"/>
+                <a16:creationId xmlns:a16="http://schemas.microsoft.com/office/drawing/2014/main" id="{83853B09-51CA-4263-9BFF-5D37901468D5}"/>
               </a:ext>
             </a:extLst>
           </p:cNvPr>
@@ -2432,7 +2432,7 @@
           <p:cNvPr id="3" name="Content Placeholder 2">
             <a:extLst xmlns:a="http://schemas.openxmlformats.org/drawingml/2006/main">
               <a:ext uri="{FF2B5EF4-FFF2-40B4-BE49-F238E27FC236}">
-                <a16:creationId xmlns:a16="http://schemas.microsoft.com/office/drawing/2014/main" id="{91377A7C-7BE5-483B-9C6F-B2CF70D67AF5}"/>
+                <a16:creationId xmlns:a16="http://schemas.microsoft.com/office/drawing/2014/main" id="{E856FD38-E05E-477A-862D-74223F71AE16}"/>
               </a:ext>
             </a:extLst>
           </p:cNvPr>
@@ -2536,7 +2536,7 @@
           <p:cNvPr id="4" name="Content Placeholder 3">
             <a:extLst xmlns:a="http://schemas.openxmlformats.org/drawingml/2006/main">
               <a:ext uri="{FF2B5EF4-FFF2-40B4-BE49-F238E27FC236}">
-                <a16:creationId xmlns:a16="http://schemas.microsoft.com/office/drawing/2014/main" id="{9B2E5AE2-2D8F-4E5D-AEA5-35E72489F966}"/>
+                <a16:creationId xmlns:a16="http://schemas.microsoft.com/office/drawing/2014/main" id="{0E9FF4D9-0316-4272-91E2-CA0B297F727C}"/>
               </a:ext>
             </a:extLst>
           </p:cNvPr>
@@ -2640,7 +2640,7 @@
           <p:cNvPr id="5" name="Date Placeholder 4">
             <a:extLst xmlns:a="http://schemas.openxmlformats.org/drawingml/2006/main">
               <a:ext uri="{FF2B5EF4-FFF2-40B4-BE49-F238E27FC236}">
-                <a16:creationId xmlns:a16="http://schemas.microsoft.com/office/drawing/2014/main" id="{FA4E7261-FC06-43DE-A301-E27FDB27E93E}"/>
+                <a16:creationId xmlns:a16="http://schemas.microsoft.com/office/drawing/2014/main" id="{277D405F-6575-4400-876C-AF1DB1A752EF}"/>
               </a:ext>
             </a:extLst>
           </p:cNvPr>
@@ -2667,7 +2667,7 @@
           <p:cNvPr id="6" name="Footer Placeholder 5">
             <a:extLst xmlns:a="http://schemas.openxmlformats.org/drawingml/2006/main">
               <a:ext uri="{FF2B5EF4-FFF2-40B4-BE49-F238E27FC236}">
-                <a16:creationId xmlns:a16="http://schemas.microsoft.com/office/drawing/2014/main" id="{2A208F93-C165-4AE8-8254-85ACC1234A36}"/>
+                <a16:creationId xmlns:a16="http://schemas.microsoft.com/office/drawing/2014/main" id="{4C507100-A8D9-4F36-9894-374EAA5A614D}"/>
               </a:ext>
             </a:extLst>
           </p:cNvPr>
@@ -2690,7 +2690,7 @@
           <p:cNvPr id="7" name="Slide Number Placeholder 6">
             <a:extLst xmlns:a="http://schemas.openxmlformats.org/drawingml/2006/main">
               <a:ext uri="{FF2B5EF4-FFF2-40B4-BE49-F238E27FC236}">
-                <a16:creationId xmlns:a16="http://schemas.microsoft.com/office/drawing/2014/main" id="{8FD7CE85-A6A5-486D-BA17-DFBA19E75FF9}"/>
+                <a16:creationId xmlns:a16="http://schemas.microsoft.com/office/drawing/2014/main" id="{0283D28C-2B53-4344-97B0-E2DB6CAE4341}"/>
               </a:ext>
             </a:extLst>
           </p:cNvPr>
@@ -2734,7 +2734,7 @@
           <p:cNvPr id="2" name="Title 1">
             <a:extLst xmlns:a="http://schemas.openxmlformats.org/drawingml/2006/main">
               <a:ext uri="{FF2B5EF4-FFF2-40B4-BE49-F238E27FC236}">
-                <a16:creationId xmlns:a16="http://schemas.microsoft.com/office/drawing/2014/main" id="{1C79727C-7030-422A-8DF1-383DFF526D00}"/>
+                <a16:creationId xmlns:a16="http://schemas.microsoft.com/office/drawing/2014/main" id="{34466423-5927-4496-BD6F-972CF7A88821}"/>
               </a:ext>
             </a:extLst>
           </p:cNvPr>
@@ -2766,7 +2766,7 @@
           <p:cNvPr id="3" name="Text Placeholder 2">
             <a:extLst xmlns:a="http://schemas.openxmlformats.org/drawingml/2006/main">
               <a:ext uri="{FF2B5EF4-FFF2-40B4-BE49-F238E27FC236}">
-                <a16:creationId xmlns:a16="http://schemas.microsoft.com/office/drawing/2014/main" id="{C3745078-E4DE-466F-B2F7-6211A43F0DAE}"/>
+                <a16:creationId xmlns:a16="http://schemas.microsoft.com/office/drawing/2014/main" id="{66356C0A-671D-4396-B553-7C3797FEF98D}"/>
               </a:ext>
             </a:extLst>
           </p:cNvPr>
@@ -2838,7 +2838,7 @@
           <p:cNvPr id="4" name="Content Placeholder 3">
             <a:extLst xmlns:a="http://schemas.openxmlformats.org/drawingml/2006/main">
               <a:ext uri="{FF2B5EF4-FFF2-40B4-BE49-F238E27FC236}">
-                <a16:creationId xmlns:a16="http://schemas.microsoft.com/office/drawing/2014/main" id="{83EDEBB9-9204-469D-9E50-ED1A90185471}"/>
+                <a16:creationId xmlns:a16="http://schemas.microsoft.com/office/drawing/2014/main" id="{8173C583-5DE6-472E-B401-B7560348736B}"/>
               </a:ext>
             </a:extLst>
           </p:cNvPr>
@@ -2942,7 +2942,7 @@
           <p:cNvPr id="5" name="Text Placeholder 4">
             <a:extLst xmlns:a="http://schemas.openxmlformats.org/drawingml/2006/main">
               <a:ext uri="{FF2B5EF4-FFF2-40B4-BE49-F238E27FC236}">
-                <a16:creationId xmlns:a16="http://schemas.microsoft.com/office/drawing/2014/main" id="{B7ADD1BA-D505-45BF-BC23-032F8CB8E3EA}"/>
+                <a16:creationId xmlns:a16="http://schemas.microsoft.com/office/drawing/2014/main" id="{297FA1FE-4D93-41B8-ABE9-464A0B5A9CF3}"/>
               </a:ext>
             </a:extLst>
           </p:cNvPr>
@@ -3014,7 +3014,7 @@
           <p:cNvPr id="6" name="Content Placeholder 5">
             <a:extLst xmlns:a="http://schemas.openxmlformats.org/drawingml/2006/main">
               <a:ext uri="{FF2B5EF4-FFF2-40B4-BE49-F238E27FC236}">
-                <a16:creationId xmlns:a16="http://schemas.microsoft.com/office/drawing/2014/main" id="{6ADBC6AD-5690-4921-86B9-DE5E752D9551}"/>
+                <a16:creationId xmlns:a16="http://schemas.microsoft.com/office/drawing/2014/main" id="{5CE7D14F-E529-4A6E-9024-B7F3B1DD8934}"/>
               </a:ext>
             </a:extLst>
           </p:cNvPr>
@@ -3118,7 +3118,7 @@
           <p:cNvPr id="7" name="Date Placeholder 6">
             <a:extLst xmlns:a="http://schemas.openxmlformats.org/drawingml/2006/main">
               <a:ext uri="{FF2B5EF4-FFF2-40B4-BE49-F238E27FC236}">
-                <a16:creationId xmlns:a16="http://schemas.microsoft.com/office/drawing/2014/main" id="{D79DB571-E11F-43BD-ACB7-CDBD54A20769}"/>
+                <a16:creationId xmlns:a16="http://schemas.microsoft.com/office/drawing/2014/main" id="{4B1FDE28-B13B-42D1-951D-435AE603160E}"/>
               </a:ext>
             </a:extLst>
           </p:cNvPr>
@@ -3145,7 +3145,7 @@
           <p:cNvPr id="8" name="Footer Placeholder 7">
             <a:extLst xmlns:a="http://schemas.openxmlformats.org/drawingml/2006/main">
               <a:ext uri="{FF2B5EF4-FFF2-40B4-BE49-F238E27FC236}">
-                <a16:creationId xmlns:a16="http://schemas.microsoft.com/office/drawing/2014/main" id="{70D79937-9D7A-4F69-93C3-0BBBE812BA8B}"/>
+                <a16:creationId xmlns:a16="http://schemas.microsoft.com/office/drawing/2014/main" id="{89FC15E3-F15F-4619-80AE-3120384AA230}"/>
               </a:ext>
             </a:extLst>
           </p:cNvPr>
@@ -3168,7 +3168,7 @@
           <p:cNvPr id="9" name="Slide Number Placeholder 8">
             <a:extLst xmlns:a="http://schemas.openxmlformats.org/drawingml/2006/main">
               <a:ext uri="{FF2B5EF4-FFF2-40B4-BE49-F238E27FC236}">
-                <a16:creationId xmlns:a16="http://schemas.microsoft.com/office/drawing/2014/main" id="{A081EBD8-AFCD-4C8D-B559-39CAF7809973}"/>
+                <a16:creationId xmlns:a16="http://schemas.microsoft.com/office/drawing/2014/main" id="{3BE8D78B-35F9-4C05-A87D-B096BF34DFC9}"/>
               </a:ext>
             </a:extLst>
           </p:cNvPr>
@@ -3212,7 +3212,7 @@
           <p:cNvPr id="2" name="Title 1">
             <a:extLst xmlns:a="http://schemas.openxmlformats.org/drawingml/2006/main">
               <a:ext uri="{FF2B5EF4-FFF2-40B4-BE49-F238E27FC236}">
-                <a16:creationId xmlns:a16="http://schemas.microsoft.com/office/drawing/2014/main" id="{F43FA65A-6157-4E7E-8BB6-7254D70F4C09}"/>
+                <a16:creationId xmlns:a16="http://schemas.microsoft.com/office/drawing/2014/main" id="{5E97600C-DE7D-4A30-A543-B233D95E7E9F}"/>
               </a:ext>
             </a:extLst>
           </p:cNvPr>
@@ -3239,7 +3239,7 @@
           <p:cNvPr id="3" name="Date Placeholder 2">
             <a:extLst xmlns:a="http://schemas.openxmlformats.org/drawingml/2006/main">
               <a:ext uri="{FF2B5EF4-FFF2-40B4-BE49-F238E27FC236}">
-                <a16:creationId xmlns:a16="http://schemas.microsoft.com/office/drawing/2014/main" id="{F1B0B8AE-A77F-4DF1-9053-AF6897F6735A}"/>
+                <a16:creationId xmlns:a16="http://schemas.microsoft.com/office/drawing/2014/main" id="{16750DD8-164B-4C17-B059-52F06CA56C29}"/>
               </a:ext>
             </a:extLst>
           </p:cNvPr>
@@ -3266,7 +3266,7 @@
           <p:cNvPr id="4" name="Footer Placeholder 3">
             <a:extLst xmlns:a="http://schemas.openxmlformats.org/drawingml/2006/main">
               <a:ext uri="{FF2B5EF4-FFF2-40B4-BE49-F238E27FC236}">
-                <a16:creationId xmlns:a16="http://schemas.microsoft.com/office/drawing/2014/main" id="{7C07E76F-E0A1-40B8-B690-1F42D79B98A9}"/>
+                <a16:creationId xmlns:a16="http://schemas.microsoft.com/office/drawing/2014/main" id="{3A3E9E09-FE13-4A87-A3F1-234D5362683D}"/>
               </a:ext>
             </a:extLst>
           </p:cNvPr>
@@ -3289,7 +3289,7 @@
           <p:cNvPr id="5" name="Slide Number Placeholder 4">
             <a:extLst xmlns:a="http://schemas.openxmlformats.org/drawingml/2006/main">
               <a:ext uri="{FF2B5EF4-FFF2-40B4-BE49-F238E27FC236}">
-                <a16:creationId xmlns:a16="http://schemas.microsoft.com/office/drawing/2014/main" id="{2E3A39EC-E1E1-4E6D-9EE8-013D6A067020}"/>
+                <a16:creationId xmlns:a16="http://schemas.microsoft.com/office/drawing/2014/main" id="{D43A6FA9-AC4B-423F-9D80-D83EDD956606}"/>
               </a:ext>
             </a:extLst>
           </p:cNvPr>
@@ -3333,7 +3333,7 @@
           <p:cNvPr id="2" name="Date Placeholder 1">
             <a:extLst xmlns:a="http://schemas.openxmlformats.org/drawingml/2006/main">
               <a:ext uri="{FF2B5EF4-FFF2-40B4-BE49-F238E27FC236}">
-                <a16:creationId xmlns:a16="http://schemas.microsoft.com/office/drawing/2014/main" id="{D340CB40-A44E-42F6-A896-3F9053E7194C}"/>
+                <a16:creationId xmlns:a16="http://schemas.microsoft.com/office/drawing/2014/main" id="{917760BA-429F-4E35-A403-7B332267DF32}"/>
               </a:ext>
             </a:extLst>
           </p:cNvPr>
@@ -3360,7 +3360,7 @@
           <p:cNvPr id="3" name="Footer Placeholder 2">
             <a:extLst xmlns:a="http://schemas.openxmlformats.org/drawingml/2006/main">
               <a:ext uri="{FF2B5EF4-FFF2-40B4-BE49-F238E27FC236}">
-                <a16:creationId xmlns:a16="http://schemas.microsoft.com/office/drawing/2014/main" id="{2E5AA2A8-3DDB-46DA-BBDC-D4B2CBCF003F}"/>
+                <a16:creationId xmlns:a16="http://schemas.microsoft.com/office/drawing/2014/main" id="{A11C0052-60A1-4D53-96E3-0D634BFD291E}"/>
               </a:ext>
             </a:extLst>
           </p:cNvPr>
@@ -3383,7 +3383,7 @@
           <p:cNvPr id="4" name="Slide Number Placeholder 3">
             <a:extLst xmlns:a="http://schemas.openxmlformats.org/drawingml/2006/main">
               <a:ext uri="{FF2B5EF4-FFF2-40B4-BE49-F238E27FC236}">
-                <a16:creationId xmlns:a16="http://schemas.microsoft.com/office/drawing/2014/main" id="{244B2CDA-6926-415E-A84B-648962EDD640}"/>
+                <a16:creationId xmlns:a16="http://schemas.microsoft.com/office/drawing/2014/main" id="{186C781F-6855-44D2-9439-A2623A500383}"/>
               </a:ext>
             </a:extLst>
           </p:cNvPr>
@@ -3427,7 +3427,7 @@
           <p:cNvPr id="2" name="Title 1">
             <a:extLst xmlns:a="http://schemas.openxmlformats.org/drawingml/2006/main">
               <a:ext uri="{FF2B5EF4-FFF2-40B4-BE49-F238E27FC236}">
-                <a16:creationId xmlns:a16="http://schemas.microsoft.com/office/drawing/2014/main" id="{76E53B29-383B-494C-ADE8-4EF7D409A76C}"/>
+                <a16:creationId xmlns:a16="http://schemas.microsoft.com/office/drawing/2014/main" id="{5A9855EA-0CC2-4DE4-8BDE-13C995589079}"/>
               </a:ext>
             </a:extLst>
           </p:cNvPr>
@@ -3464,7 +3464,7 @@
           <p:cNvPr id="3" name="Content Placeholder 2">
             <a:extLst xmlns:a="http://schemas.openxmlformats.org/drawingml/2006/main">
               <a:ext uri="{FF2B5EF4-FFF2-40B4-BE49-F238E27FC236}">
-                <a16:creationId xmlns:a16="http://schemas.microsoft.com/office/drawing/2014/main" id="{C0E70AE0-1EC2-4B0B-B353-FE3E6BD4FBF9}"/>
+                <a16:creationId xmlns:a16="http://schemas.microsoft.com/office/drawing/2014/main" id="{F7BEC2F1-B728-4EA4-AE73-6FE1BA5C3113}"/>
               </a:ext>
             </a:extLst>
           </p:cNvPr>
@@ -3568,7 +3568,7 @@
           <p:cNvPr id="4" name="Text Placeholder 3">
             <a:extLst xmlns:a="http://schemas.openxmlformats.org/drawingml/2006/main">
               <a:ext uri="{FF2B5EF4-FFF2-40B4-BE49-F238E27FC236}">
-                <a16:creationId xmlns:a16="http://schemas.microsoft.com/office/drawing/2014/main" id="{95789093-9FF1-4C57-927E-F8C3AA0B2D52}"/>
+                <a16:creationId xmlns:a16="http://schemas.microsoft.com/office/drawing/2014/main" id="{5042435A-72B7-4E61-B00D-EE4BC48A9754}"/>
               </a:ext>
             </a:extLst>
           </p:cNvPr>
@@ -3640,7 +3640,7 @@
           <p:cNvPr id="5" name="Date Placeholder 4">
             <a:extLst xmlns:a="http://schemas.openxmlformats.org/drawingml/2006/main">
               <a:ext uri="{FF2B5EF4-FFF2-40B4-BE49-F238E27FC236}">
-                <a16:creationId xmlns:a16="http://schemas.microsoft.com/office/drawing/2014/main" id="{49816FB5-46E8-46A4-8EC7-D134CA0A3DFA}"/>
+                <a16:creationId xmlns:a16="http://schemas.microsoft.com/office/drawing/2014/main" id="{B5BC047D-5A69-41B5-A8BA-54B2EA879DE2}"/>
               </a:ext>
             </a:extLst>
           </p:cNvPr>
@@ -3667,7 +3667,7 @@
           <p:cNvPr id="6" name="Footer Placeholder 5">
             <a:extLst xmlns:a="http://schemas.openxmlformats.org/drawingml/2006/main">
               <a:ext uri="{FF2B5EF4-FFF2-40B4-BE49-F238E27FC236}">
-                <a16:creationId xmlns:a16="http://schemas.microsoft.com/office/drawing/2014/main" id="{C090C6D8-8935-498F-9710-691E3CED3F07}"/>
+                <a16:creationId xmlns:a16="http://schemas.microsoft.com/office/drawing/2014/main" id="{E8DA7739-AF3C-40C1-B0ED-FB11C8B239BC}"/>
               </a:ext>
             </a:extLst>
           </p:cNvPr>
@@ -3690,7 +3690,7 @@
           <p:cNvPr id="7" name="Slide Number Placeholder 6">
             <a:extLst xmlns:a="http://schemas.openxmlformats.org/drawingml/2006/main">
               <a:ext uri="{FF2B5EF4-FFF2-40B4-BE49-F238E27FC236}">
-                <a16:creationId xmlns:a16="http://schemas.microsoft.com/office/drawing/2014/main" id="{9E37F279-EA8B-46D8-9B2B-F3579B9F2509}"/>
+                <a16:creationId xmlns:a16="http://schemas.microsoft.com/office/drawing/2014/main" id="{7C57649D-AFB0-4E5F-8615-B28F3B1BE574}"/>
               </a:ext>
             </a:extLst>
           </p:cNvPr>
@@ -3734,7 +3734,7 @@
           <p:cNvPr id="2" name="Title 1">
             <a:extLst xmlns:a="http://schemas.openxmlformats.org/drawingml/2006/main">
               <a:ext uri="{FF2B5EF4-FFF2-40B4-BE49-F238E27FC236}">
-                <a16:creationId xmlns:a16="http://schemas.microsoft.com/office/drawing/2014/main" id="{8B70F6CF-2359-42F6-B0F8-86E474A6370D}"/>
+                <a16:creationId xmlns:a16="http://schemas.microsoft.com/office/drawing/2014/main" id="{84CA5425-51FB-4AF8-831B-E132DB045E71}"/>
               </a:ext>
             </a:extLst>
           </p:cNvPr>
@@ -3771,7 +3771,7 @@
           <p:cNvPr id="3" name="Picture Placeholder 2">
             <a:extLst xmlns:a="http://schemas.openxmlformats.org/drawingml/2006/main">
               <a:ext uri="{FF2B5EF4-FFF2-40B4-BE49-F238E27FC236}">
-                <a16:creationId xmlns:a16="http://schemas.microsoft.com/office/drawing/2014/main" id="{E367A0BA-0B90-4EDE-A65A-7A50A506C84A}"/>
+                <a16:creationId xmlns:a16="http://schemas.microsoft.com/office/drawing/2014/main" id="{693DFA41-53D1-4409-9C76-700C6ED0B092}"/>
               </a:ext>
             </a:extLst>
           </p:cNvPr>
@@ -3836,7 +3836,7 @@
           <p:cNvPr id="4" name="Text Placeholder 3">
             <a:extLst xmlns:a="http://schemas.openxmlformats.org/drawingml/2006/main">
               <a:ext uri="{FF2B5EF4-FFF2-40B4-BE49-F238E27FC236}">
-                <a16:creationId xmlns:a16="http://schemas.microsoft.com/office/drawing/2014/main" id="{C2014CE4-AF00-4F7D-9FD9-EB414BF09608}"/>
+                <a16:creationId xmlns:a16="http://schemas.microsoft.com/office/drawing/2014/main" id="{B0A82083-BAA8-489A-B95E-30F1C9277DA3}"/>
               </a:ext>
             </a:extLst>
           </p:cNvPr>
@@ -3908,7 +3908,7 @@
           <p:cNvPr id="5" name="Date Placeholder 4">
             <a:extLst xmlns:a="http://schemas.openxmlformats.org/drawingml/2006/main">
               <a:ext uri="{FF2B5EF4-FFF2-40B4-BE49-F238E27FC236}">
-                <a16:creationId xmlns:a16="http://schemas.microsoft.com/office/drawing/2014/main" id="{59A782B6-D89E-44A8-9670-45BE9C971B08}"/>
+                <a16:creationId xmlns:a16="http://schemas.microsoft.com/office/drawing/2014/main" id="{A8C9B86C-C4A1-4691-B327-204CD19A4B7B}"/>
               </a:ext>
             </a:extLst>
           </p:cNvPr>
@@ -3935,7 +3935,7 @@
           <p:cNvPr id="6" name="Footer Placeholder 5">
             <a:extLst xmlns:a="http://schemas.openxmlformats.org/drawingml/2006/main">
               <a:ext uri="{FF2B5EF4-FFF2-40B4-BE49-F238E27FC236}">
-                <a16:creationId xmlns:a16="http://schemas.microsoft.com/office/drawing/2014/main" id="{9B660529-AFB9-4332-92A1-7BAFA3064DA7}"/>
+                <a16:creationId xmlns:a16="http://schemas.microsoft.com/office/drawing/2014/main" id="{42C07262-A1FC-45AF-8103-7591F34C07BB}"/>
               </a:ext>
             </a:extLst>
           </p:cNvPr>
@@ -3958,7 +3958,7 @@
           <p:cNvPr id="7" name="Slide Number Placeholder 6">
             <a:extLst xmlns:a="http://schemas.openxmlformats.org/drawingml/2006/main">
               <a:ext uri="{FF2B5EF4-FFF2-40B4-BE49-F238E27FC236}">
-                <a16:creationId xmlns:a16="http://schemas.microsoft.com/office/drawing/2014/main" id="{20779D24-9D3A-41FE-867F-09D648BE3E2F}"/>
+                <a16:creationId xmlns:a16="http://schemas.microsoft.com/office/drawing/2014/main" id="{54CD0032-7ED1-4642-98D8-DA624E369368}"/>
               </a:ext>
             </a:extLst>
           </p:cNvPr>
@@ -4007,7 +4007,7 @@
           <p:cNvPr id="2" name="Title Placeholder 1">
             <a:extLst xmlns:a="http://schemas.openxmlformats.org/drawingml/2006/main">
               <a:ext uri="{FF2B5EF4-FFF2-40B4-BE49-F238E27FC236}">
-                <a16:creationId xmlns:a16="http://schemas.microsoft.com/office/drawing/2014/main" id="{D26A4C47-161B-4DB6-94E0-5415A172588D}"/>
+                <a16:creationId xmlns:a16="http://schemas.microsoft.com/office/drawing/2014/main" id="{3F095A68-3C3B-4FE3-A6DB-5E9594466588}"/>
               </a:ext>
             </a:extLst>
           </p:cNvPr>
@@ -4044,7 +4044,7 @@
           <p:cNvPr id="3" name="Text Placeholder 2">
             <a:extLst xmlns:a="http://schemas.openxmlformats.org/drawingml/2006/main">
               <a:ext uri="{FF2B5EF4-FFF2-40B4-BE49-F238E27FC236}">
-                <a16:creationId xmlns:a16="http://schemas.microsoft.com/office/drawing/2014/main" id="{F7823DAF-7EF3-4E7C-A5C6-B09777977750}"/>
+                <a16:creationId xmlns:a16="http://schemas.microsoft.com/office/drawing/2014/main" id="{E75C3797-38BA-450F-8BCB-DA712724F0C3}"/>
               </a:ext>
             </a:extLst>
           </p:cNvPr>
@@ -4116,7 +4116,7 @@
           <p:cNvPr id="4" name="Date Placeholder 3">
             <a:extLst xmlns:a="http://schemas.openxmlformats.org/drawingml/2006/main">
               <a:ext uri="{FF2B5EF4-FFF2-40B4-BE49-F238E27FC236}">
-                <a16:creationId xmlns:a16="http://schemas.microsoft.com/office/drawing/2014/main" id="{82A1EF51-BB44-4359-A958-984134C0D3A4}"/>
+                <a16:creationId xmlns:a16="http://schemas.microsoft.com/office/drawing/2014/main" id="{39B0535A-688E-4B58-B871-BE5FB23B60A0}"/>
               </a:ext>
             </a:extLst>
           </p:cNvPr>
@@ -4162,7 +4162,7 @@
           <p:cNvPr id="5" name="Footer Placeholder 4">
             <a:extLst xmlns:a="http://schemas.openxmlformats.org/drawingml/2006/main">
               <a:ext uri="{FF2B5EF4-FFF2-40B4-BE49-F238E27FC236}">
-                <a16:creationId xmlns:a16="http://schemas.microsoft.com/office/drawing/2014/main" id="{441A30E0-3D5B-497D-8131-F28E05A35FE6}"/>
+                <a16:creationId xmlns:a16="http://schemas.microsoft.com/office/drawing/2014/main" id="{F12F49EC-627E-4437-9414-7542EEA65C11}"/>
               </a:ext>
             </a:extLst>
           </p:cNvPr>
@@ -4204,7 +4204,7 @@
           <p:cNvPr id="6" name="Slide Number Placeholder 5">
             <a:extLst xmlns:a="http://schemas.openxmlformats.org/drawingml/2006/main">
               <a:ext uri="{FF2B5EF4-FFF2-40B4-BE49-F238E27FC236}">
-                <a16:creationId xmlns:a16="http://schemas.microsoft.com/office/drawing/2014/main" id="{D3730456-6B97-4669-84CD-6509C4765223}"/>
+                <a16:creationId xmlns:a16="http://schemas.microsoft.com/office/drawing/2014/main" id="{FD9BC8D1-7358-435E-9B03-C7B47D366756}"/>
               </a:ext>
             </a:extLst>
           </p:cNvPr>
@@ -4249,17 +4249,17 @@
   </p:cSld>
   <p:clrMap bg1="lt1" tx1="dk1" bg2="lt2" tx2="dk2" accent1="accent1" accent2="accent2" accent3="accent3" accent4="accent4" accent5="accent5" accent6="accent6" hlink="hlink" folHlink="folHlink"/>
   <p:sldLayoutIdLst>
-    <p:sldLayoutId xmlns:r="http://schemas.openxmlformats.org/officeDocument/2006/relationships" id="2147483649" r:id="Rb97f598ddda14e36"/>
-    <p:sldLayoutId xmlns:r="http://schemas.openxmlformats.org/officeDocument/2006/relationships" id="2147483650" r:id="R9aa6838e3b214905"/>
-    <p:sldLayoutId xmlns:r="http://schemas.openxmlformats.org/officeDocument/2006/relationships" id="2147483651" r:id="R757e1e8d5de144de"/>
-    <p:sldLayoutId xmlns:r="http://schemas.openxmlformats.org/officeDocument/2006/relationships" id="2147483652" r:id="R9017ee44000d4501"/>
-    <p:sldLayoutId xmlns:r="http://schemas.openxmlformats.org/officeDocument/2006/relationships" id="2147483653" r:id="R6a44c15d9aa042c8"/>
-    <p:sldLayoutId xmlns:r="http://schemas.openxmlformats.org/officeDocument/2006/relationships" id="2147483654" r:id="R4a03000df729458f"/>
-    <p:sldLayoutId xmlns:r="http://schemas.openxmlformats.org/officeDocument/2006/relationships" id="2147483655" r:id="Refc51bd0aae14f7a"/>
-    <p:sldLayoutId xmlns:r="http://schemas.openxmlformats.org/officeDocument/2006/relationships" id="2147483656" r:id="R53af6b452429480b"/>
-    <p:sldLayoutId xmlns:r="http://schemas.openxmlformats.org/officeDocument/2006/relationships" id="2147483657" r:id="R6729639de2fe4094"/>
-    <p:sldLayoutId xmlns:r="http://schemas.openxmlformats.org/officeDocument/2006/relationships" id="2147483658" r:id="R7626a200fe25443e"/>
-    <p:sldLayoutId xmlns:r="http://schemas.openxmlformats.org/officeDocument/2006/relationships" id="2147483659" r:id="R880e9ed492974410"/>
+    <p:sldLayoutId xmlns:r="http://schemas.openxmlformats.org/officeDocument/2006/relationships" id="2147483649" r:id="R5802b66091104732"/>
+    <p:sldLayoutId xmlns:r="http://schemas.openxmlformats.org/officeDocument/2006/relationships" id="2147483650" r:id="R910585c1b8c44737"/>
+    <p:sldLayoutId xmlns:r="http://schemas.openxmlformats.org/officeDocument/2006/relationships" id="2147483651" r:id="R47960bef1a064957"/>
+    <p:sldLayoutId xmlns:r="http://schemas.openxmlformats.org/officeDocument/2006/relationships" id="2147483652" r:id="R7baf2f5bb0f14c7d"/>
+    <p:sldLayoutId xmlns:r="http://schemas.openxmlformats.org/officeDocument/2006/relationships" id="2147483653" r:id="Re09a058364634a6d"/>
+    <p:sldLayoutId xmlns:r="http://schemas.openxmlformats.org/officeDocument/2006/relationships" id="2147483654" r:id="R550ff65a282743bc"/>
+    <p:sldLayoutId xmlns:r="http://schemas.openxmlformats.org/officeDocument/2006/relationships" id="2147483655" r:id="R77928f0a7b9143dd"/>
+    <p:sldLayoutId xmlns:r="http://schemas.openxmlformats.org/officeDocument/2006/relationships" id="2147483656" r:id="Rbe418784e7fd42d9"/>
+    <p:sldLayoutId xmlns:r="http://schemas.openxmlformats.org/officeDocument/2006/relationships" id="2147483657" r:id="Raf417f40e7944b6c"/>
+    <p:sldLayoutId xmlns:r="http://schemas.openxmlformats.org/officeDocument/2006/relationships" id="2147483658" r:id="R251fc99aaa994196"/>
+    <p:sldLayoutId xmlns:r="http://schemas.openxmlformats.org/officeDocument/2006/relationships" id="2147483659" r:id="R4d59b883590544e7"/>
   </p:sldLayoutIdLst>
   <p:txStyles>
     <p:titleStyle>
@@ -4812,7 +4812,7 @@
           <p:cNvPr id="2" name="Rectangle 1">
             <a:extLst xmlns:a="http://schemas.openxmlformats.org/drawingml/2006/main">
               <a:ext uri="{FF2B5EF4-FFF2-40B4-BE49-F238E27FC236}">
-                <a16:creationId xmlns:a16="http://schemas.microsoft.com/office/drawing/2014/main" id="{462D8198-D8DB-4474-A5C1-3DF6F44D2D3A}"/>
+                <a16:creationId xmlns:a16="http://schemas.microsoft.com/office/drawing/2014/main" id="{FA0BD2F9-AEB7-4045-8C29-B26917095EFD}"/>
               </a:ext>
             </a:extLst>
           </p:cNvPr>
@@ -4867,7 +4867,7 @@
           <p:cNvPr id="3" name="TextBox 2">
             <a:extLst xmlns:a="http://schemas.openxmlformats.org/drawingml/2006/main">
               <a:ext uri="{FF2B5EF4-FFF2-40B4-BE49-F238E27FC236}">
-                <a16:creationId xmlns:a16="http://schemas.microsoft.com/office/drawing/2014/main" id="{04FA1AA0-32C2-4D3F-87C4-CBE4839CAE72}"/>
+                <a16:creationId xmlns:a16="http://schemas.microsoft.com/office/drawing/2014/main" id="{D8A51428-C56E-45FC-B186-8F377004399C}"/>
               </a:ext>
             </a:extLst>
           </p:cNvPr>
@@ -4914,7 +4914,7 @@
           <p:cNvPr id="4" name="TextBox 3">
             <a:extLst xmlns:a="http://schemas.openxmlformats.org/drawingml/2006/main">
               <a:ext uri="{FF2B5EF4-FFF2-40B4-BE49-F238E27FC236}">
-                <a16:creationId xmlns:a16="http://schemas.microsoft.com/office/drawing/2014/main" id="{FF4D3F4B-5645-4EB1-9A1E-FBB28376D409}"/>
+                <a16:creationId xmlns:a16="http://schemas.microsoft.com/office/drawing/2014/main" id="{16ED7133-C6A1-48C8-8ABF-1D4E7B2D126D}"/>
               </a:ext>
             </a:extLst>
           </p:cNvPr>
@@ -4982,7 +4982,7 @@
           <p:cNvPr id="5" name="TextBox 4">
             <a:extLst xmlns:a="http://schemas.openxmlformats.org/drawingml/2006/main">
               <a:ext uri="{FF2B5EF4-FFF2-40B4-BE49-F238E27FC236}">
-                <a16:creationId xmlns:a16="http://schemas.microsoft.com/office/drawing/2014/main" id="{56730E36-569C-48E2-8544-7BF4CFA88639}"/>
+                <a16:creationId xmlns:a16="http://schemas.microsoft.com/office/drawing/2014/main" id="{DD992D2A-A169-4AFE-8982-1F48CA10559E}"/>
               </a:ext>
             </a:extLst>
           </p:cNvPr>
@@ -5029,7 +5029,7 @@
           <p:cNvPr id="6" name="Rectangle 5">
             <a:extLst xmlns:a="http://schemas.openxmlformats.org/drawingml/2006/main">
               <a:ext uri="{FF2B5EF4-FFF2-40B4-BE49-F238E27FC236}">
-                <a16:creationId xmlns:a16="http://schemas.microsoft.com/office/drawing/2014/main" id="{68158E07-89DB-4DE7-86D4-4932CB228086}"/>
+                <a16:creationId xmlns:a16="http://schemas.microsoft.com/office/drawing/2014/main" id="{18A268D2-D2FB-4A29-A026-4801B0444584}"/>
               </a:ext>
             </a:extLst>
           </p:cNvPr>
@@ -5084,7 +5084,7 @@
           <p:cNvPr id="7" name="TextBox 6">
             <a:extLst xmlns:a="http://schemas.openxmlformats.org/drawingml/2006/main">
               <a:ext uri="{FF2B5EF4-FFF2-40B4-BE49-F238E27FC236}">
-                <a16:creationId xmlns:a16="http://schemas.microsoft.com/office/drawing/2014/main" id="{675DBE5A-9DCB-4792-A345-4214E65A6620}"/>
+                <a16:creationId xmlns:a16="http://schemas.microsoft.com/office/drawing/2014/main" id="{98AF991A-216C-4677-9197-2AB2ED65E7D1}"/>
               </a:ext>
             </a:extLst>
           </p:cNvPr>
@@ -5131,7 +5131,7 @@
           <p:cNvPr id="8" name="TextBox 7">
             <a:extLst xmlns:a="http://schemas.openxmlformats.org/drawingml/2006/main">
               <a:ext uri="{FF2B5EF4-FFF2-40B4-BE49-F238E27FC236}">
-                <a16:creationId xmlns:a16="http://schemas.microsoft.com/office/drawing/2014/main" id="{7A979EB6-B654-4BB1-A52D-5A47E80C29CD}"/>
+                <a16:creationId xmlns:a16="http://schemas.microsoft.com/office/drawing/2014/main" id="{D98B2D12-E37D-4D9E-9071-93D577D7E20B}"/>
               </a:ext>
             </a:extLst>
           </p:cNvPr>
@@ -5168,7 +5168,7 @@
                 <a:ea typeface="Aptos"/>
                 <a:cs typeface="Aptos"/>
               </a:rPr>
-              <a:t>2026.07.23-14</a:t>
+              <a:t>2026.07.23-15</a:t>
             </a:r>
           </a:p>
         </p:txBody>
@@ -5178,7 +5178,7 @@
           <p:cNvPr id="9" name="TextBox 8">
             <a:extLst xmlns:a="http://schemas.openxmlformats.org/drawingml/2006/main">
               <a:ext uri="{FF2B5EF4-FFF2-40B4-BE49-F238E27FC236}">
-                <a16:creationId xmlns:a16="http://schemas.microsoft.com/office/drawing/2014/main" id="{09DAF9D7-D7C6-4108-914C-49CAE06F6BDD}"/>
+                <a16:creationId xmlns:a16="http://schemas.microsoft.com/office/drawing/2014/main" id="{4FA024B4-6C59-4B05-8809-E94D0D7F3D10}"/>
               </a:ext>
             </a:extLst>
           </p:cNvPr>
@@ -5246,7 +5246,7 @@
           <p:cNvPr id="10" name="TextBox 9">
             <a:extLst xmlns:a="http://schemas.openxmlformats.org/drawingml/2006/main">
               <a:ext uri="{FF2B5EF4-FFF2-40B4-BE49-F238E27FC236}">
-                <a16:creationId xmlns:a16="http://schemas.microsoft.com/office/drawing/2014/main" id="{44FE5C2B-6C80-40EB-A1B0-40D8F9F5C88C}"/>
+                <a16:creationId xmlns:a16="http://schemas.microsoft.com/office/drawing/2014/main" id="{A3172FF5-40F1-4648-A886-E29378C5DAE0}"/>
               </a:ext>
             </a:extLst>
           </p:cNvPr>
@@ -5293,7 +5293,7 @@
           <p:cNvPr id="11" name="TextBox 10">
             <a:extLst xmlns:a="http://schemas.openxmlformats.org/drawingml/2006/main">
               <a:ext uri="{FF2B5EF4-FFF2-40B4-BE49-F238E27FC236}">
-                <a16:creationId xmlns:a16="http://schemas.microsoft.com/office/drawing/2014/main" id="{0C159203-EB2C-4A46-915C-D2AED7B1E4B3}"/>
+                <a16:creationId xmlns:a16="http://schemas.microsoft.com/office/drawing/2014/main" id="{73CB8C0B-04FD-4011-80E4-621A045A7A48}"/>
               </a:ext>
             </a:extLst>
           </p:cNvPr>
@@ -5340,7 +5340,7 @@
           <p:cNvPr id="12" name="TextBox 11">
             <a:extLst xmlns:a="http://schemas.openxmlformats.org/drawingml/2006/main">
               <a:ext uri="{FF2B5EF4-FFF2-40B4-BE49-F238E27FC236}">
-                <a16:creationId xmlns:a16="http://schemas.microsoft.com/office/drawing/2014/main" id="{34CC5207-358F-42BA-A6AF-671CB3F686CC}"/>
+                <a16:creationId xmlns:a16="http://schemas.microsoft.com/office/drawing/2014/main" id="{C741132C-9CEB-4E83-A6E9-D9124A15F052}"/>
               </a:ext>
             </a:extLst>
           </p:cNvPr>
@@ -5387,7 +5387,7 @@
           <p:cNvPr id="13" name="TextBox 12">
             <a:extLst xmlns:a="http://schemas.openxmlformats.org/drawingml/2006/main">
               <a:ext uri="{FF2B5EF4-FFF2-40B4-BE49-F238E27FC236}">
-                <a16:creationId xmlns:a16="http://schemas.microsoft.com/office/drawing/2014/main" id="{6CD166D1-6CD5-4B78-9064-AA5C282DE09A}"/>
+                <a16:creationId xmlns:a16="http://schemas.microsoft.com/office/drawing/2014/main" id="{F3A7D54D-5430-4754-8BD2-989160DF2855}"/>
               </a:ext>
             </a:extLst>
           </p:cNvPr>
@@ -5432,7 +5432,7 @@
     </p:spTree>
     <p:extLst>
       <p:ext uri="{BB962C8B-B14F-4D97-AF65-F5344CB8AC3E}">
-        <p14:creationId xmlns:p14="http://schemas.microsoft.com/office/powerpoint/2010/main" val="1564655156"/>
+        <p14:creationId xmlns:p14="http://schemas.microsoft.com/office/powerpoint/2010/main" val="745098573"/>
       </p:ext>
     </p:extLst>
   </p:cSld>
@@ -5456,7 +5456,7 @@
           <p:cNvPr id="2" name="TextBox 1">
             <a:extLst xmlns:a="http://schemas.openxmlformats.org/drawingml/2006/main">
               <a:ext uri="{FF2B5EF4-FFF2-40B4-BE49-F238E27FC236}">
-                <a16:creationId xmlns:a16="http://schemas.microsoft.com/office/drawing/2014/main" id="{EA99D455-4F11-4E89-B609-DB43BC120DBF}"/>
+                <a16:creationId xmlns:a16="http://schemas.microsoft.com/office/drawing/2014/main" id="{20B1153F-6819-4293-8290-FAFD8547C007}"/>
               </a:ext>
             </a:extLst>
           </p:cNvPr>
@@ -5503,7 +5503,7 @@
           <p:cNvPr id="3" name="TextBox 2">
             <a:extLst xmlns:a="http://schemas.openxmlformats.org/drawingml/2006/main">
               <a:ext uri="{FF2B5EF4-FFF2-40B4-BE49-F238E27FC236}">
-                <a16:creationId xmlns:a16="http://schemas.microsoft.com/office/drawing/2014/main" id="{3C025A2C-FDF3-4242-BDD8-BE4E6792BAE2}"/>
+                <a16:creationId xmlns:a16="http://schemas.microsoft.com/office/drawing/2014/main" id="{BC1CB108-4F20-4159-9924-8AB1E7510114}"/>
               </a:ext>
             </a:extLst>
           </p:cNvPr>
@@ -5550,7 +5550,7 @@
           <p:cNvPr id="4" name="Rectangle 3">
             <a:extLst xmlns:a="http://schemas.openxmlformats.org/drawingml/2006/main">
               <a:ext uri="{FF2B5EF4-FFF2-40B4-BE49-F238E27FC236}">
-                <a16:creationId xmlns:a16="http://schemas.microsoft.com/office/drawing/2014/main" id="{377EF8A5-4A3D-4ADB-9C54-9186C909DF78}"/>
+                <a16:creationId xmlns:a16="http://schemas.microsoft.com/office/drawing/2014/main" id="{79390784-D188-4E86-9BAB-462F0D732690}"/>
               </a:ext>
             </a:extLst>
           </p:cNvPr>
@@ -5605,7 +5605,7 @@
           <p:cNvPr id="5" name="Rectangle 4">
             <a:extLst xmlns:a="http://schemas.openxmlformats.org/drawingml/2006/main">
               <a:ext uri="{FF2B5EF4-FFF2-40B4-BE49-F238E27FC236}">
-                <a16:creationId xmlns:a16="http://schemas.microsoft.com/office/drawing/2014/main" id="{0EAE3271-43BE-4F9C-9A36-F89D17B0498D}"/>
+                <a16:creationId xmlns:a16="http://schemas.microsoft.com/office/drawing/2014/main" id="{45EB4E33-BAD7-4A8E-8A55-F749CBAC4113}"/>
               </a:ext>
             </a:extLst>
           </p:cNvPr>
@@ -5660,7 +5660,7 @@
           <p:cNvPr id="6" name="TextBox 5">
             <a:extLst xmlns:a="http://schemas.openxmlformats.org/drawingml/2006/main">
               <a:ext uri="{FF2B5EF4-FFF2-40B4-BE49-F238E27FC236}">
-                <a16:creationId xmlns:a16="http://schemas.microsoft.com/office/drawing/2014/main" id="{6603A9F1-6A62-478E-B3BE-E6C59BE33727}"/>
+                <a16:creationId xmlns:a16="http://schemas.microsoft.com/office/drawing/2014/main" id="{6ECC0C0A-835C-4DF6-A69B-852FD631AE65}"/>
               </a:ext>
             </a:extLst>
           </p:cNvPr>
@@ -5697,7 +5697,7 @@
                 <a:ea typeface="Aptos"/>
                 <a:cs typeface="Aptos"/>
               </a:rPr>
-              <a:t>Independent public evidence summary · 2026.07.23-14 · 2026-07-22 · Sources: WIPO licensing; dispute resolution; IPscore</a:t>
+              <a:t>Independent public evidence summary · 2026.07.23-15 · 2026-07-22 · Sources: WIPO licensing; dispute resolution; IPscore</a:t>
             </a:r>
           </a:p>
         </p:txBody>
@@ -5707,7 +5707,7 @@
           <p:cNvPr id="7" name="TextBox 6">
             <a:extLst xmlns:a="http://schemas.openxmlformats.org/drawingml/2006/main">
               <a:ext uri="{FF2B5EF4-FFF2-40B4-BE49-F238E27FC236}">
-                <a16:creationId xmlns:a16="http://schemas.microsoft.com/office/drawing/2014/main" id="{95F824AB-B30B-4610-8177-815AEBAC8179}"/>
+                <a16:creationId xmlns:a16="http://schemas.microsoft.com/office/drawing/2014/main" id="{A793F2B5-DEFC-4EA0-8A80-2544280A5589}"/>
               </a:ext>
             </a:extLst>
           </p:cNvPr>
@@ -5754,7 +5754,7 @@
           <p:cNvPr id="8" name="Rounded Rectangle 7">
             <a:extLst xmlns:a="http://schemas.openxmlformats.org/drawingml/2006/main">
               <a:ext uri="{FF2B5EF4-FFF2-40B4-BE49-F238E27FC236}">
-                <a16:creationId xmlns:a16="http://schemas.microsoft.com/office/drawing/2014/main" id="{72BD0B32-A3C7-461A-8406-151153C4BA49}"/>
+                <a16:creationId xmlns:a16="http://schemas.microsoft.com/office/drawing/2014/main" id="{DDCFB12B-A9A5-475F-8972-89F31662586C}"/>
               </a:ext>
             </a:extLst>
           </p:cNvPr>
@@ -5811,7 +5811,7 @@
           <p:cNvPr id="9" name="TextBox 8">
             <a:extLst xmlns:a="http://schemas.openxmlformats.org/drawingml/2006/main">
               <a:ext uri="{FF2B5EF4-FFF2-40B4-BE49-F238E27FC236}">
-                <a16:creationId xmlns:a16="http://schemas.microsoft.com/office/drawing/2014/main" id="{40D080F8-72F6-47BD-B925-3A93199689AF}"/>
+                <a16:creationId xmlns:a16="http://schemas.microsoft.com/office/drawing/2014/main" id="{2BFF03E5-45E2-4625-AE47-2FEBADFDF2BE}"/>
               </a:ext>
             </a:extLst>
           </p:cNvPr>
@@ -5858,7 +5858,7 @@
           <p:cNvPr id="10" name="TextBox 9">
             <a:extLst xmlns:a="http://schemas.openxmlformats.org/drawingml/2006/main">
               <a:ext uri="{FF2B5EF4-FFF2-40B4-BE49-F238E27FC236}">
-                <a16:creationId xmlns:a16="http://schemas.microsoft.com/office/drawing/2014/main" id="{97FC646E-D160-4DE7-9065-9AFE8807EEBF}"/>
+                <a16:creationId xmlns:a16="http://schemas.microsoft.com/office/drawing/2014/main" id="{F14AB93A-8FB5-405C-88EA-89C8709FBF08}"/>
               </a:ext>
             </a:extLst>
           </p:cNvPr>
@@ -5905,7 +5905,7 @@
           <p:cNvPr id="11" name="TextBox 10">
             <a:extLst xmlns:a="http://schemas.openxmlformats.org/drawingml/2006/main">
               <a:ext uri="{FF2B5EF4-FFF2-40B4-BE49-F238E27FC236}">
-                <a16:creationId xmlns:a16="http://schemas.microsoft.com/office/drawing/2014/main" id="{D7FCAE4D-6663-4FB5-BFD4-1AEBD13DF308}"/>
+                <a16:creationId xmlns:a16="http://schemas.microsoft.com/office/drawing/2014/main" id="{B049D76C-79F9-40D4-8CAD-DF448EFDA2AE}"/>
               </a:ext>
             </a:extLst>
           </p:cNvPr>
@@ -5952,7 +5952,7 @@
           <p:cNvPr id="12" name="Rounded Rectangle 11">
             <a:extLst xmlns:a="http://schemas.openxmlformats.org/drawingml/2006/main">
               <a:ext uri="{FF2B5EF4-FFF2-40B4-BE49-F238E27FC236}">
-                <a16:creationId xmlns:a16="http://schemas.microsoft.com/office/drawing/2014/main" id="{5D33F8A8-C897-4BB0-A6AD-13807C2F41C4}"/>
+                <a16:creationId xmlns:a16="http://schemas.microsoft.com/office/drawing/2014/main" id="{87C2C662-4889-4AEF-A059-ADFAC895F2E6}"/>
               </a:ext>
             </a:extLst>
           </p:cNvPr>
@@ -6009,7 +6009,7 @@
           <p:cNvPr id="13" name="TextBox 12">
             <a:extLst xmlns:a="http://schemas.openxmlformats.org/drawingml/2006/main">
               <a:ext uri="{FF2B5EF4-FFF2-40B4-BE49-F238E27FC236}">
-                <a16:creationId xmlns:a16="http://schemas.microsoft.com/office/drawing/2014/main" id="{EB2CB6EF-3F80-401C-8388-8BB18B0CF632}"/>
+                <a16:creationId xmlns:a16="http://schemas.microsoft.com/office/drawing/2014/main" id="{0728E824-2EAB-430E-9DE9-66A71C70EC0F}"/>
               </a:ext>
             </a:extLst>
           </p:cNvPr>
@@ -6056,7 +6056,7 @@
           <p:cNvPr id="14" name="TextBox 13">
             <a:extLst xmlns:a="http://schemas.openxmlformats.org/drawingml/2006/main">
               <a:ext uri="{FF2B5EF4-FFF2-40B4-BE49-F238E27FC236}">
-                <a16:creationId xmlns:a16="http://schemas.microsoft.com/office/drawing/2014/main" id="{18D9F77E-7793-42A2-B677-9E91DFF7A133}"/>
+                <a16:creationId xmlns:a16="http://schemas.microsoft.com/office/drawing/2014/main" id="{28D0D1D2-9D88-4044-B10F-447BD0EA53A4}"/>
               </a:ext>
             </a:extLst>
           </p:cNvPr>
@@ -6103,7 +6103,7 @@
           <p:cNvPr id="15" name="TextBox 14">
             <a:extLst xmlns:a="http://schemas.openxmlformats.org/drawingml/2006/main">
               <a:ext uri="{FF2B5EF4-FFF2-40B4-BE49-F238E27FC236}">
-                <a16:creationId xmlns:a16="http://schemas.microsoft.com/office/drawing/2014/main" id="{5B16DC79-DC32-4551-BAE9-061C484C6695}"/>
+                <a16:creationId xmlns:a16="http://schemas.microsoft.com/office/drawing/2014/main" id="{F5C0D7C9-4818-43BB-B5D5-875FE8E30AB3}"/>
               </a:ext>
             </a:extLst>
           </p:cNvPr>
@@ -6150,7 +6150,7 @@
           <p:cNvPr id="16" name="Rounded Rectangle 15">
             <a:extLst xmlns:a="http://schemas.openxmlformats.org/drawingml/2006/main">
               <a:ext uri="{FF2B5EF4-FFF2-40B4-BE49-F238E27FC236}">
-                <a16:creationId xmlns:a16="http://schemas.microsoft.com/office/drawing/2014/main" id="{5FEA61BF-A004-4BAC-A941-7193A1DFEB22}"/>
+                <a16:creationId xmlns:a16="http://schemas.microsoft.com/office/drawing/2014/main" id="{8D294287-729C-4C40-ACFF-F895999AA35B}"/>
               </a:ext>
             </a:extLst>
           </p:cNvPr>
@@ -6207,7 +6207,7 @@
           <p:cNvPr id="17" name="TextBox 16">
             <a:extLst xmlns:a="http://schemas.openxmlformats.org/drawingml/2006/main">
               <a:ext uri="{FF2B5EF4-FFF2-40B4-BE49-F238E27FC236}">
-                <a16:creationId xmlns:a16="http://schemas.microsoft.com/office/drawing/2014/main" id="{38B0EFEA-9D0E-49AF-AD8A-B2F350BD0786}"/>
+                <a16:creationId xmlns:a16="http://schemas.microsoft.com/office/drawing/2014/main" id="{960242BA-C1FC-4D0A-88FA-AE5FDEF80910}"/>
               </a:ext>
             </a:extLst>
           </p:cNvPr>
@@ -6254,7 +6254,7 @@
           <p:cNvPr id="18" name="TextBox 17">
             <a:extLst xmlns:a="http://schemas.openxmlformats.org/drawingml/2006/main">
               <a:ext uri="{FF2B5EF4-FFF2-40B4-BE49-F238E27FC236}">
-                <a16:creationId xmlns:a16="http://schemas.microsoft.com/office/drawing/2014/main" id="{ABC20487-8C8A-4E6D-A1ED-4A5490FB7FAA}"/>
+                <a16:creationId xmlns:a16="http://schemas.microsoft.com/office/drawing/2014/main" id="{5718698F-A4DA-456F-BFD3-AD6E73E76A0A}"/>
               </a:ext>
             </a:extLst>
           </p:cNvPr>
@@ -6301,7 +6301,7 @@
           <p:cNvPr id="19" name="TextBox 18">
             <a:extLst xmlns:a="http://schemas.openxmlformats.org/drawingml/2006/main">
               <a:ext uri="{FF2B5EF4-FFF2-40B4-BE49-F238E27FC236}">
-                <a16:creationId xmlns:a16="http://schemas.microsoft.com/office/drawing/2014/main" id="{F761F76A-67CE-44CB-94FE-E0919073728C}"/>
+                <a16:creationId xmlns:a16="http://schemas.microsoft.com/office/drawing/2014/main" id="{9E0487C5-5A0C-48A8-A4ED-8022FED2657A}"/>
               </a:ext>
             </a:extLst>
           </p:cNvPr>
@@ -6348,7 +6348,7 @@
           <p:cNvPr id="20" name="Rounded Rectangle 19">
             <a:extLst xmlns:a="http://schemas.openxmlformats.org/drawingml/2006/main">
               <a:ext uri="{FF2B5EF4-FFF2-40B4-BE49-F238E27FC236}">
-                <a16:creationId xmlns:a16="http://schemas.microsoft.com/office/drawing/2014/main" id="{26DA0DF6-0BF1-4243-85D7-5D5946B4CC3A}"/>
+                <a16:creationId xmlns:a16="http://schemas.microsoft.com/office/drawing/2014/main" id="{00520AD8-0104-4DD8-AE5A-55D7D64B9019}"/>
               </a:ext>
             </a:extLst>
           </p:cNvPr>
@@ -6405,7 +6405,7 @@
           <p:cNvPr id="21" name="TextBox 20">
             <a:extLst xmlns:a="http://schemas.openxmlformats.org/drawingml/2006/main">
               <a:ext uri="{FF2B5EF4-FFF2-40B4-BE49-F238E27FC236}">
-                <a16:creationId xmlns:a16="http://schemas.microsoft.com/office/drawing/2014/main" id="{1D34C59D-1371-4D7D-916C-0DC46F44B0FB}"/>
+                <a16:creationId xmlns:a16="http://schemas.microsoft.com/office/drawing/2014/main" id="{55A52F6D-EED7-4D72-B4A5-0BF0EF13B542}"/>
               </a:ext>
             </a:extLst>
           </p:cNvPr>
@@ -6452,7 +6452,7 @@
           <p:cNvPr id="22" name="TextBox 21">
             <a:extLst xmlns:a="http://schemas.openxmlformats.org/drawingml/2006/main">
               <a:ext uri="{FF2B5EF4-FFF2-40B4-BE49-F238E27FC236}">
-                <a16:creationId xmlns:a16="http://schemas.microsoft.com/office/drawing/2014/main" id="{CF5C0B36-3753-4F53-8E62-569C3BE0FE6C}"/>
+                <a16:creationId xmlns:a16="http://schemas.microsoft.com/office/drawing/2014/main" id="{90ECFDD6-661A-4515-BFC2-6EC44FDE6D2E}"/>
               </a:ext>
             </a:extLst>
           </p:cNvPr>
@@ -6499,7 +6499,7 @@
           <p:cNvPr id="23" name="TextBox 22">
             <a:extLst xmlns:a="http://schemas.openxmlformats.org/drawingml/2006/main">
               <a:ext uri="{FF2B5EF4-FFF2-40B4-BE49-F238E27FC236}">
-                <a16:creationId xmlns:a16="http://schemas.microsoft.com/office/drawing/2014/main" id="{A8347914-0FE6-404A-B224-22A757EE9E6B}"/>
+                <a16:creationId xmlns:a16="http://schemas.microsoft.com/office/drawing/2014/main" id="{9A38F6E4-3111-4522-A61F-C9EC2B04513C}"/>
               </a:ext>
             </a:extLst>
           </p:cNvPr>
@@ -6546,7 +6546,7 @@
           <p:cNvPr id="24" name="TextBox 23">
             <a:extLst xmlns:a="http://schemas.openxmlformats.org/drawingml/2006/main">
               <a:ext uri="{FF2B5EF4-FFF2-40B4-BE49-F238E27FC236}">
-                <a16:creationId xmlns:a16="http://schemas.microsoft.com/office/drawing/2014/main" id="{1C538345-09F7-423F-943B-CF56516C0001}"/>
+                <a16:creationId xmlns:a16="http://schemas.microsoft.com/office/drawing/2014/main" id="{D17C0E1B-BFE2-4355-974E-426EB64EDB29}"/>
               </a:ext>
             </a:extLst>
           </p:cNvPr>
@@ -6591,7 +6591,7 @@
     </p:spTree>
     <p:extLst>
       <p:ext uri="{BB962C8B-B14F-4D97-AF65-F5344CB8AC3E}">
-        <p14:creationId xmlns:p14="http://schemas.microsoft.com/office/powerpoint/2010/main" val="1339007908"/>
+        <p14:creationId xmlns:p14="http://schemas.microsoft.com/office/powerpoint/2010/main" val="1863893012"/>
       </p:ext>
     </p:extLst>
   </p:cSld>
@@ -6615,7 +6615,7 @@
           <p:cNvPr id="2" name="TextBox 1">
             <a:extLst xmlns:a="http://schemas.openxmlformats.org/drawingml/2006/main">
               <a:ext uri="{FF2B5EF4-FFF2-40B4-BE49-F238E27FC236}">
-                <a16:creationId xmlns:a16="http://schemas.microsoft.com/office/drawing/2014/main" id="{881DE902-703B-4F69-98B2-52093EDBE340}"/>
+                <a16:creationId xmlns:a16="http://schemas.microsoft.com/office/drawing/2014/main" id="{EF6FD7A9-0625-4C51-B22B-25677E9079AC}"/>
               </a:ext>
             </a:extLst>
           </p:cNvPr>
@@ -6662,7 +6662,7 @@
           <p:cNvPr id="3" name="TextBox 2">
             <a:extLst xmlns:a="http://schemas.openxmlformats.org/drawingml/2006/main">
               <a:ext uri="{FF2B5EF4-FFF2-40B4-BE49-F238E27FC236}">
-                <a16:creationId xmlns:a16="http://schemas.microsoft.com/office/drawing/2014/main" id="{C3DA8A09-677D-4456-9237-97502BC8B718}"/>
+                <a16:creationId xmlns:a16="http://schemas.microsoft.com/office/drawing/2014/main" id="{A0BC5E06-0B9E-4F7C-8888-D2EDC811E3FC}"/>
               </a:ext>
             </a:extLst>
           </p:cNvPr>
@@ -6709,7 +6709,7 @@
           <p:cNvPr id="4" name="Rectangle 3">
             <a:extLst xmlns:a="http://schemas.openxmlformats.org/drawingml/2006/main">
               <a:ext uri="{FF2B5EF4-FFF2-40B4-BE49-F238E27FC236}">
-                <a16:creationId xmlns:a16="http://schemas.microsoft.com/office/drawing/2014/main" id="{0EEB8978-8B12-411A-B407-2879653C0344}"/>
+                <a16:creationId xmlns:a16="http://schemas.microsoft.com/office/drawing/2014/main" id="{CF48DC7A-8610-48AC-A91B-D13453AEE77C}"/>
               </a:ext>
             </a:extLst>
           </p:cNvPr>
@@ -6764,7 +6764,7 @@
           <p:cNvPr id="5" name="Rectangle 4">
             <a:extLst xmlns:a="http://schemas.openxmlformats.org/drawingml/2006/main">
               <a:ext uri="{FF2B5EF4-FFF2-40B4-BE49-F238E27FC236}">
-                <a16:creationId xmlns:a16="http://schemas.microsoft.com/office/drawing/2014/main" id="{507809A9-C016-4890-96C7-51D5FE361041}"/>
+                <a16:creationId xmlns:a16="http://schemas.microsoft.com/office/drawing/2014/main" id="{53E9BB08-F5AB-43A0-8A31-0C146D2D218F}"/>
               </a:ext>
             </a:extLst>
           </p:cNvPr>
@@ -6819,7 +6819,7 @@
           <p:cNvPr id="6" name="TextBox 5">
             <a:extLst xmlns:a="http://schemas.openxmlformats.org/drawingml/2006/main">
               <a:ext uri="{FF2B5EF4-FFF2-40B4-BE49-F238E27FC236}">
-                <a16:creationId xmlns:a16="http://schemas.microsoft.com/office/drawing/2014/main" id="{C3BBAAB2-F288-475C-A57E-0D6A3CE57112}"/>
+                <a16:creationId xmlns:a16="http://schemas.microsoft.com/office/drawing/2014/main" id="{1A75462E-4020-46CD-8CD6-CFB21A00ADCF}"/>
               </a:ext>
             </a:extLst>
           </p:cNvPr>
@@ -6856,7 +6856,7 @@
                 <a:ea typeface="Aptos"/>
                 <a:cs typeface="Aptos"/>
               </a:rPr>
-              <a:t>Independent public evidence summary · 2026.07.23-14 · 2026-07-22 · Sources: WIPO IP valuation; Market-values</a:t>
+              <a:t>Independent public evidence summary · 2026.07.23-15 · 2026-07-22 · Sources: WIPO IP valuation; Market-values</a:t>
             </a:r>
           </a:p>
         </p:txBody>
@@ -6866,7 +6866,7 @@
           <p:cNvPr id="7" name="TextBox 6">
             <a:extLst xmlns:a="http://schemas.openxmlformats.org/drawingml/2006/main">
               <a:ext uri="{FF2B5EF4-FFF2-40B4-BE49-F238E27FC236}">
-                <a16:creationId xmlns:a16="http://schemas.microsoft.com/office/drawing/2014/main" id="{88638B8D-0725-4315-A5BA-2EDB3CBDCFAE}"/>
+                <a16:creationId xmlns:a16="http://schemas.microsoft.com/office/drawing/2014/main" id="{5A55956F-B57E-402E-B99C-6DA362AEB0CB}"/>
               </a:ext>
             </a:extLst>
           </p:cNvPr>
@@ -7436,7 +7436,7 @@
           <p:cNvPr id="9" name="TextBox 8">
             <a:extLst xmlns:a="http://schemas.openxmlformats.org/drawingml/2006/main">
               <a:ext uri="{FF2B5EF4-FFF2-40B4-BE49-F238E27FC236}">
-                <a16:creationId xmlns:a16="http://schemas.microsoft.com/office/drawing/2014/main" id="{5C973054-C124-473C-BAEF-FC3A04833EBD}"/>
+                <a16:creationId xmlns:a16="http://schemas.microsoft.com/office/drawing/2014/main" id="{760C3BF4-8DB3-4FD2-8300-8DD18260A46B}"/>
               </a:ext>
             </a:extLst>
           </p:cNvPr>
@@ -7481,7 +7481,7 @@
     </p:spTree>
     <p:extLst>
       <p:ext uri="{BB962C8B-B14F-4D97-AF65-F5344CB8AC3E}">
-        <p14:creationId xmlns:p14="http://schemas.microsoft.com/office/powerpoint/2010/main" val="90319004"/>
+        <p14:creationId xmlns:p14="http://schemas.microsoft.com/office/powerpoint/2010/main" val="1845538076"/>
       </p:ext>
     </p:extLst>
   </p:cSld>
@@ -7512,7 +7512,7 @@
           <p:cNvPr id="2" name="TextBox 1">
             <a:extLst xmlns:a="http://schemas.openxmlformats.org/drawingml/2006/main">
               <a:ext uri="{FF2B5EF4-FFF2-40B4-BE49-F238E27FC236}">
-                <a16:creationId xmlns:a16="http://schemas.microsoft.com/office/drawing/2014/main" id="{88EF2BA0-4B00-46BA-83BB-93EF4329C60D}"/>
+                <a16:creationId xmlns:a16="http://schemas.microsoft.com/office/drawing/2014/main" id="{C4AF322B-D094-4379-A5BD-A6B429AF3703}"/>
               </a:ext>
             </a:extLst>
           </p:cNvPr>
@@ -7559,7 +7559,7 @@
           <p:cNvPr id="3" name="TextBox 2">
             <a:extLst xmlns:a="http://schemas.openxmlformats.org/drawingml/2006/main">
               <a:ext uri="{FF2B5EF4-FFF2-40B4-BE49-F238E27FC236}">
-                <a16:creationId xmlns:a16="http://schemas.microsoft.com/office/drawing/2014/main" id="{D6A18E3C-D535-40BC-85AF-C28303FA14FD}"/>
+                <a16:creationId xmlns:a16="http://schemas.microsoft.com/office/drawing/2014/main" id="{15C13454-2612-4932-8E71-85AB592A522C}"/>
               </a:ext>
             </a:extLst>
           </p:cNvPr>
@@ -7606,7 +7606,7 @@
           <p:cNvPr id="4" name="TextBox 3">
             <a:extLst xmlns:a="http://schemas.openxmlformats.org/drawingml/2006/main">
               <a:ext uri="{FF2B5EF4-FFF2-40B4-BE49-F238E27FC236}">
-                <a16:creationId xmlns:a16="http://schemas.microsoft.com/office/drawing/2014/main" id="{C65B3208-2770-4CC5-A979-20FF7E0610AF}"/>
+                <a16:creationId xmlns:a16="http://schemas.microsoft.com/office/drawing/2014/main" id="{2F5DB90E-50DF-466D-92DB-B1C5D204931C}"/>
               </a:ext>
             </a:extLst>
           </p:cNvPr>
@@ -7747,7 +7747,7 @@
           <p:cNvPr id="5" name="TextBox 4">
             <a:extLst xmlns:a="http://schemas.openxmlformats.org/drawingml/2006/main">
               <a:ext uri="{FF2B5EF4-FFF2-40B4-BE49-F238E27FC236}">
-                <a16:creationId xmlns:a16="http://schemas.microsoft.com/office/drawing/2014/main" id="{844AC219-1DB2-44BA-8BA8-67628CDFC8A3}"/>
+                <a16:creationId xmlns:a16="http://schemas.microsoft.com/office/drawing/2014/main" id="{B52B2934-6207-46E4-97E5-7B97B04C7111}"/>
               </a:ext>
             </a:extLst>
           </p:cNvPr>
@@ -7784,7 +7784,7 @@
                 <a:ea typeface="Aptos"/>
                 <a:cs typeface="Aptos"/>
               </a:rPr>
-              <a:t>Version 2026.07.23-14 · 2026-07-22 · 12 / 12</a:t>
+              <a:t>Version 2026.07.23-15 · 2026-07-22 · 12 / 12</a:t>
             </a:r>
           </a:p>
         </p:txBody>
@@ -7794,7 +7794,7 @@
           <p:cNvPr id="6" name="TextBox 5">
             <a:extLst xmlns:a="http://schemas.openxmlformats.org/drawingml/2006/main">
               <a:ext uri="{FF2B5EF4-FFF2-40B4-BE49-F238E27FC236}">
-                <a16:creationId xmlns:a16="http://schemas.microsoft.com/office/drawing/2014/main" id="{3C3E566A-2930-45D2-9B4D-820FB68C0142}"/>
+                <a16:creationId xmlns:a16="http://schemas.microsoft.com/office/drawing/2014/main" id="{AF5E9F87-C299-4F9B-95CA-4148E0B0120C}"/>
               </a:ext>
             </a:extLst>
           </p:cNvPr>
@@ -7839,7 +7839,7 @@
     </p:spTree>
     <p:extLst>
       <p:ext uri="{BB962C8B-B14F-4D97-AF65-F5344CB8AC3E}">
-        <p14:creationId xmlns:p14="http://schemas.microsoft.com/office/powerpoint/2010/main" val="521529771"/>
+        <p14:creationId xmlns:p14="http://schemas.microsoft.com/office/powerpoint/2010/main" val="973085813"/>
       </p:ext>
     </p:extLst>
   </p:cSld>
@@ -7863,7 +7863,7 @@
           <p:cNvPr id="2" name="TextBox 1">
             <a:extLst xmlns:a="http://schemas.openxmlformats.org/drawingml/2006/main">
               <a:ext uri="{FF2B5EF4-FFF2-40B4-BE49-F238E27FC236}">
-                <a16:creationId xmlns:a16="http://schemas.microsoft.com/office/drawing/2014/main" id="{5B0487CB-155F-47CC-B5F8-93D3436C73F9}"/>
+                <a16:creationId xmlns:a16="http://schemas.microsoft.com/office/drawing/2014/main" id="{84B8B2C9-CCB3-4CEA-85BD-BC46ADFBD1CE}"/>
               </a:ext>
             </a:extLst>
           </p:cNvPr>
@@ -7910,7 +7910,7 @@
           <p:cNvPr id="3" name="TextBox 2">
             <a:extLst xmlns:a="http://schemas.openxmlformats.org/drawingml/2006/main">
               <a:ext uri="{FF2B5EF4-FFF2-40B4-BE49-F238E27FC236}">
-                <a16:creationId xmlns:a16="http://schemas.microsoft.com/office/drawing/2014/main" id="{0D1B37CA-3A0C-4CC0-A8B9-D793692D555D}"/>
+                <a16:creationId xmlns:a16="http://schemas.microsoft.com/office/drawing/2014/main" id="{349286FF-24E2-4A82-B0D3-F1ABED1000FD}"/>
               </a:ext>
             </a:extLst>
           </p:cNvPr>
@@ -7957,7 +7957,7 @@
           <p:cNvPr id="4" name="Rectangle 3">
             <a:extLst xmlns:a="http://schemas.openxmlformats.org/drawingml/2006/main">
               <a:ext uri="{FF2B5EF4-FFF2-40B4-BE49-F238E27FC236}">
-                <a16:creationId xmlns:a16="http://schemas.microsoft.com/office/drawing/2014/main" id="{925CA9AA-9AD5-425B-9EC2-6BD1962B8C67}"/>
+                <a16:creationId xmlns:a16="http://schemas.microsoft.com/office/drawing/2014/main" id="{370C2361-BDA5-4F2E-8A32-B1BBBF65FD08}"/>
               </a:ext>
             </a:extLst>
           </p:cNvPr>
@@ -8012,7 +8012,7 @@
           <p:cNvPr id="5" name="Rectangle 4">
             <a:extLst xmlns:a="http://schemas.openxmlformats.org/drawingml/2006/main">
               <a:ext uri="{FF2B5EF4-FFF2-40B4-BE49-F238E27FC236}">
-                <a16:creationId xmlns:a16="http://schemas.microsoft.com/office/drawing/2014/main" id="{6F023F9F-9EA7-4BCD-8D63-B236A4609EB1}"/>
+                <a16:creationId xmlns:a16="http://schemas.microsoft.com/office/drawing/2014/main" id="{A5FDDED7-0D94-432B-A979-34831FC8533C}"/>
               </a:ext>
             </a:extLst>
           </p:cNvPr>
@@ -8067,7 +8067,7 @@
           <p:cNvPr id="6" name="TextBox 5">
             <a:extLst xmlns:a="http://schemas.openxmlformats.org/drawingml/2006/main">
               <a:ext uri="{FF2B5EF4-FFF2-40B4-BE49-F238E27FC236}">
-                <a16:creationId xmlns:a16="http://schemas.microsoft.com/office/drawing/2014/main" id="{B52A79ED-AC89-43F7-B405-95F0A1E803DC}"/>
+                <a16:creationId xmlns:a16="http://schemas.microsoft.com/office/drawing/2014/main" id="{820F117C-97AD-44F0-8B24-CB4D43B41AB2}"/>
               </a:ext>
             </a:extLst>
           </p:cNvPr>
@@ -8104,7 +8104,7 @@
                 <a:ea typeface="Aptos"/>
                 <a:cs typeface="Aptos"/>
               </a:rPr>
-              <a:t>Independent public evidence summary · 2026.07.23-14 · 2026-07-22 · Sources: Atlas readiness; WIPO</a:t>
+              <a:t>Independent public evidence summary · 2026.07.23-15 · 2026-07-22 · Sources: Atlas readiness; WIPO</a:t>
             </a:r>
           </a:p>
         </p:txBody>
@@ -8114,7 +8114,7 @@
           <p:cNvPr id="7" name="TextBox 6">
             <a:extLst xmlns:a="http://schemas.openxmlformats.org/drawingml/2006/main">
               <a:ext uri="{FF2B5EF4-FFF2-40B4-BE49-F238E27FC236}">
-                <a16:creationId xmlns:a16="http://schemas.microsoft.com/office/drawing/2014/main" id="{8CA0E67B-01F2-45CA-99B4-98E887487206}"/>
+                <a16:creationId xmlns:a16="http://schemas.microsoft.com/office/drawing/2014/main" id="{82DD985C-7556-4A33-8647-D442AF556B04}"/>
               </a:ext>
             </a:extLst>
           </p:cNvPr>
@@ -8161,7 +8161,7 @@
           <p:cNvPr id="8" name="TextBox 7">
             <a:extLst xmlns:a="http://schemas.openxmlformats.org/drawingml/2006/main">
               <a:ext uri="{FF2B5EF4-FFF2-40B4-BE49-F238E27FC236}">
-                <a16:creationId xmlns:a16="http://schemas.microsoft.com/office/drawing/2014/main" id="{D2C818B2-FEE0-44D9-AC5E-D80300192387}"/>
+                <a16:creationId xmlns:a16="http://schemas.microsoft.com/office/drawing/2014/main" id="{589A2395-0954-473D-B2DF-746A164B6F5D}"/>
               </a:ext>
             </a:extLst>
           </p:cNvPr>
@@ -8208,7 +8208,7 @@
           <p:cNvPr id="9" name="TextBox 8">
             <a:extLst xmlns:a="http://schemas.openxmlformats.org/drawingml/2006/main">
               <a:ext uri="{FF2B5EF4-FFF2-40B4-BE49-F238E27FC236}">
-                <a16:creationId xmlns:a16="http://schemas.microsoft.com/office/drawing/2014/main" id="{39F79D12-07BB-4A20-9B94-FE8D1196BCD6}"/>
+                <a16:creationId xmlns:a16="http://schemas.microsoft.com/office/drawing/2014/main" id="{871A701A-A5F7-4216-AF72-FC6903189478}"/>
               </a:ext>
             </a:extLst>
           </p:cNvPr>
@@ -8305,7 +8305,7 @@
           <p:cNvPr id="10" name="Rounded Rectangle 9">
             <a:extLst xmlns:a="http://schemas.openxmlformats.org/drawingml/2006/main">
               <a:ext uri="{FF2B5EF4-FFF2-40B4-BE49-F238E27FC236}">
-                <a16:creationId xmlns:a16="http://schemas.microsoft.com/office/drawing/2014/main" id="{146AD862-27E9-403B-B8F5-F98A9812E628}"/>
+                <a16:creationId xmlns:a16="http://schemas.microsoft.com/office/drawing/2014/main" id="{A0647B9C-C98E-4942-AF3E-9941EF04ED54}"/>
               </a:ext>
             </a:extLst>
           </p:cNvPr>
@@ -8362,7 +8362,7 @@
           <p:cNvPr id="11" name="TextBox 10">
             <a:extLst xmlns:a="http://schemas.openxmlformats.org/drawingml/2006/main">
               <a:ext uri="{FF2B5EF4-FFF2-40B4-BE49-F238E27FC236}">
-                <a16:creationId xmlns:a16="http://schemas.microsoft.com/office/drawing/2014/main" id="{008D359B-CA93-406B-AE55-B2BA405597FF}"/>
+                <a16:creationId xmlns:a16="http://schemas.microsoft.com/office/drawing/2014/main" id="{02781B4C-F94A-4579-8F3B-FF923F6FA45C}"/>
               </a:ext>
             </a:extLst>
           </p:cNvPr>
@@ -8409,7 +8409,7 @@
           <p:cNvPr id="12" name="TextBox 11">
             <a:extLst xmlns:a="http://schemas.openxmlformats.org/drawingml/2006/main">
               <a:ext uri="{FF2B5EF4-FFF2-40B4-BE49-F238E27FC236}">
-                <a16:creationId xmlns:a16="http://schemas.microsoft.com/office/drawing/2014/main" id="{03C01602-3557-411D-80E4-7B7E82896E0F}"/>
+                <a16:creationId xmlns:a16="http://schemas.microsoft.com/office/drawing/2014/main" id="{18D5BC21-D7FA-425C-8618-CD2CBECBCAC7}"/>
               </a:ext>
             </a:extLst>
           </p:cNvPr>
@@ -8454,7 +8454,7 @@
     </p:spTree>
     <p:extLst>
       <p:ext uri="{BB962C8B-B14F-4D97-AF65-F5344CB8AC3E}">
-        <p14:creationId xmlns:p14="http://schemas.microsoft.com/office/powerpoint/2010/main" val="699295884"/>
+        <p14:creationId xmlns:p14="http://schemas.microsoft.com/office/powerpoint/2010/main" val="1441230340"/>
       </p:ext>
     </p:extLst>
   </p:cSld>
@@ -8478,7 +8478,7 @@
           <p:cNvPr id="2" name="TextBox 1">
             <a:extLst xmlns:a="http://schemas.openxmlformats.org/drawingml/2006/main">
               <a:ext uri="{FF2B5EF4-FFF2-40B4-BE49-F238E27FC236}">
-                <a16:creationId xmlns:a16="http://schemas.microsoft.com/office/drawing/2014/main" id="{D64333E2-A12B-4C06-A5B5-329BF9E32E20}"/>
+                <a16:creationId xmlns:a16="http://schemas.microsoft.com/office/drawing/2014/main" id="{50B31499-2098-49E2-AE9C-3DD91CF3D564}"/>
               </a:ext>
             </a:extLst>
           </p:cNvPr>
@@ -8525,7 +8525,7 @@
           <p:cNvPr id="3" name="TextBox 2">
             <a:extLst xmlns:a="http://schemas.openxmlformats.org/drawingml/2006/main">
               <a:ext uri="{FF2B5EF4-FFF2-40B4-BE49-F238E27FC236}">
-                <a16:creationId xmlns:a16="http://schemas.microsoft.com/office/drawing/2014/main" id="{D5BB24FC-0233-4FEB-B486-00EB9B22AFAD}"/>
+                <a16:creationId xmlns:a16="http://schemas.microsoft.com/office/drawing/2014/main" id="{EEB71770-697D-4F54-9763-1815D40EF1E2}"/>
               </a:ext>
             </a:extLst>
           </p:cNvPr>
@@ -8572,7 +8572,7 @@
           <p:cNvPr id="4" name="Rectangle 3">
             <a:extLst xmlns:a="http://schemas.openxmlformats.org/drawingml/2006/main">
               <a:ext uri="{FF2B5EF4-FFF2-40B4-BE49-F238E27FC236}">
-                <a16:creationId xmlns:a16="http://schemas.microsoft.com/office/drawing/2014/main" id="{2AFEC4C4-A7EC-461E-993C-E5DB80060D88}"/>
+                <a16:creationId xmlns:a16="http://schemas.microsoft.com/office/drawing/2014/main" id="{10EFE56E-B4E2-47D6-AEC5-AFC48BC80D08}"/>
               </a:ext>
             </a:extLst>
           </p:cNvPr>
@@ -8627,7 +8627,7 @@
           <p:cNvPr id="5" name="Rectangle 4">
             <a:extLst xmlns:a="http://schemas.openxmlformats.org/drawingml/2006/main">
               <a:ext uri="{FF2B5EF4-FFF2-40B4-BE49-F238E27FC236}">
-                <a16:creationId xmlns:a16="http://schemas.microsoft.com/office/drawing/2014/main" id="{96F06C93-DFD8-41C4-8EDC-FF4AC826B27B}"/>
+                <a16:creationId xmlns:a16="http://schemas.microsoft.com/office/drawing/2014/main" id="{E0EC18DB-9148-4C44-BA47-068C27D3D834}"/>
               </a:ext>
             </a:extLst>
           </p:cNvPr>
@@ -8682,7 +8682,7 @@
           <p:cNvPr id="6" name="TextBox 5">
             <a:extLst xmlns:a="http://schemas.openxmlformats.org/drawingml/2006/main">
               <a:ext uri="{FF2B5EF4-FFF2-40B4-BE49-F238E27FC236}">
-                <a16:creationId xmlns:a16="http://schemas.microsoft.com/office/drawing/2014/main" id="{BBC6DFC1-4C8E-4258-B423-552FECEBDA68}"/>
+                <a16:creationId xmlns:a16="http://schemas.microsoft.com/office/drawing/2014/main" id="{52C4E03F-F873-4942-A639-0E3A0AD9ABD4}"/>
               </a:ext>
             </a:extLst>
           </p:cNvPr>
@@ -8719,7 +8719,7 @@
                 <a:ea typeface="Aptos"/>
                 <a:cs typeface="Aptos"/>
               </a:rPr>
-              <a:t>Independent public evidence summary · 2026.07.23-14 · 2026-07-22 · Sources: EP3032975B2</a:t>
+              <a:t>Independent public evidence summary · 2026.07.23-15 · 2026-07-22 · Sources: EP3032975B2</a:t>
             </a:r>
           </a:p>
         </p:txBody>
@@ -8729,7 +8729,7 @@
           <p:cNvPr id="7" name="TextBox 6">
             <a:extLst xmlns:a="http://schemas.openxmlformats.org/drawingml/2006/main">
               <a:ext uri="{FF2B5EF4-FFF2-40B4-BE49-F238E27FC236}">
-                <a16:creationId xmlns:a16="http://schemas.microsoft.com/office/drawing/2014/main" id="{D3897421-7398-433E-944A-9330C650EC57}"/>
+                <a16:creationId xmlns:a16="http://schemas.microsoft.com/office/drawing/2014/main" id="{893DBE4C-5B2E-46F5-A061-E6A505CCCF1C}"/>
               </a:ext>
             </a:extLst>
           </p:cNvPr>
@@ -8776,7 +8776,7 @@
           <p:cNvPr id="8" name="TextBox 7">
             <a:extLst xmlns:a="http://schemas.openxmlformats.org/drawingml/2006/main">
               <a:ext uri="{FF2B5EF4-FFF2-40B4-BE49-F238E27FC236}">
-                <a16:creationId xmlns:a16="http://schemas.microsoft.com/office/drawing/2014/main" id="{153F35F6-4272-4F0D-A60F-CD0F06CD7BBC}"/>
+                <a16:creationId xmlns:a16="http://schemas.microsoft.com/office/drawing/2014/main" id="{60FE2CB2-6B1B-4F86-9BA9-65FB74E5924A}"/>
               </a:ext>
             </a:extLst>
           </p:cNvPr>
@@ -8823,7 +8823,7 @@
           <p:cNvPr id="9" name="TextBox 8">
             <a:extLst xmlns:a="http://schemas.openxmlformats.org/drawingml/2006/main">
               <a:ext uri="{FF2B5EF4-FFF2-40B4-BE49-F238E27FC236}">
-                <a16:creationId xmlns:a16="http://schemas.microsoft.com/office/drawing/2014/main" id="{066219BC-F34A-4D3E-9F5D-6236A3F10E9D}"/>
+                <a16:creationId xmlns:a16="http://schemas.microsoft.com/office/drawing/2014/main" id="{89BD4630-081D-47B5-8D36-E7F3BE40501F}"/>
               </a:ext>
             </a:extLst>
           </p:cNvPr>
@@ -8920,7 +8920,7 @@
           <p:cNvPr id="10" name="Rounded Rectangle 9">
             <a:extLst xmlns:a="http://schemas.openxmlformats.org/drawingml/2006/main">
               <a:ext uri="{FF2B5EF4-FFF2-40B4-BE49-F238E27FC236}">
-                <a16:creationId xmlns:a16="http://schemas.microsoft.com/office/drawing/2014/main" id="{9F719F46-2CFA-41F0-B4C1-6C8313E26D57}"/>
+                <a16:creationId xmlns:a16="http://schemas.microsoft.com/office/drawing/2014/main" id="{67372E37-C827-4B6E-A456-D13E178A1165}"/>
               </a:ext>
             </a:extLst>
           </p:cNvPr>
@@ -8977,7 +8977,7 @@
           <p:cNvPr id="11" name="TextBox 10">
             <a:extLst xmlns:a="http://schemas.openxmlformats.org/drawingml/2006/main">
               <a:ext uri="{FF2B5EF4-FFF2-40B4-BE49-F238E27FC236}">
-                <a16:creationId xmlns:a16="http://schemas.microsoft.com/office/drawing/2014/main" id="{43A7D36A-55B9-4A60-89D5-3FD35E1AA924}"/>
+                <a16:creationId xmlns:a16="http://schemas.microsoft.com/office/drawing/2014/main" id="{186163EE-63A4-4C42-B9DB-E4069A676332}"/>
               </a:ext>
             </a:extLst>
           </p:cNvPr>
@@ -9024,7 +9024,7 @@
           <p:cNvPr id="12" name="TextBox 11">
             <a:extLst xmlns:a="http://schemas.openxmlformats.org/drawingml/2006/main">
               <a:ext uri="{FF2B5EF4-FFF2-40B4-BE49-F238E27FC236}">
-                <a16:creationId xmlns:a16="http://schemas.microsoft.com/office/drawing/2014/main" id="{E145ED39-A891-4204-8AAB-5F7A644345EC}"/>
+                <a16:creationId xmlns:a16="http://schemas.microsoft.com/office/drawing/2014/main" id="{1A5F1F78-4700-4C9B-B0B0-A7784258220D}"/>
               </a:ext>
             </a:extLst>
           </p:cNvPr>
@@ -9069,7 +9069,7 @@
     </p:spTree>
     <p:extLst>
       <p:ext uri="{BB962C8B-B14F-4D97-AF65-F5344CB8AC3E}">
-        <p14:creationId xmlns:p14="http://schemas.microsoft.com/office/powerpoint/2010/main" val="1702961698"/>
+        <p14:creationId xmlns:p14="http://schemas.microsoft.com/office/powerpoint/2010/main" val="1162552184"/>
       </p:ext>
     </p:extLst>
   </p:cSld>
@@ -9093,7 +9093,7 @@
           <p:cNvPr id="2" name="TextBox 1">
             <a:extLst xmlns:a="http://schemas.openxmlformats.org/drawingml/2006/main">
               <a:ext uri="{FF2B5EF4-FFF2-40B4-BE49-F238E27FC236}">
-                <a16:creationId xmlns:a16="http://schemas.microsoft.com/office/drawing/2014/main" id="{EA94DABC-200A-47BC-809A-7253F3BF9C27}"/>
+                <a16:creationId xmlns:a16="http://schemas.microsoft.com/office/drawing/2014/main" id="{9AC091C6-52DE-4CDB-B4A9-CB9FF933EAB0}"/>
               </a:ext>
             </a:extLst>
           </p:cNvPr>
@@ -9140,7 +9140,7 @@
           <p:cNvPr id="3" name="TextBox 2">
             <a:extLst xmlns:a="http://schemas.openxmlformats.org/drawingml/2006/main">
               <a:ext uri="{FF2B5EF4-FFF2-40B4-BE49-F238E27FC236}">
-                <a16:creationId xmlns:a16="http://schemas.microsoft.com/office/drawing/2014/main" id="{9073CBF8-292A-4BAE-8575-0A3FC8260B2B}"/>
+                <a16:creationId xmlns:a16="http://schemas.microsoft.com/office/drawing/2014/main" id="{C88366A9-00F9-4E56-8612-801D096B94B7}"/>
               </a:ext>
             </a:extLst>
           </p:cNvPr>
@@ -9187,7 +9187,7 @@
           <p:cNvPr id="4" name="Rectangle 3">
             <a:extLst xmlns:a="http://schemas.openxmlformats.org/drawingml/2006/main">
               <a:ext uri="{FF2B5EF4-FFF2-40B4-BE49-F238E27FC236}">
-                <a16:creationId xmlns:a16="http://schemas.microsoft.com/office/drawing/2014/main" id="{E62F88D9-F4EE-49C3-A1EC-B1D18905A9EA}"/>
+                <a16:creationId xmlns:a16="http://schemas.microsoft.com/office/drawing/2014/main" id="{9B1696F2-1FA6-479F-B5C2-F7A64E345945}"/>
               </a:ext>
             </a:extLst>
           </p:cNvPr>
@@ -9242,7 +9242,7 @@
           <p:cNvPr id="5" name="Rectangle 4">
             <a:extLst xmlns:a="http://schemas.openxmlformats.org/drawingml/2006/main">
               <a:ext uri="{FF2B5EF4-FFF2-40B4-BE49-F238E27FC236}">
-                <a16:creationId xmlns:a16="http://schemas.microsoft.com/office/drawing/2014/main" id="{DA310CE4-5C85-4289-B739-05CFA381BA11}"/>
+                <a16:creationId xmlns:a16="http://schemas.microsoft.com/office/drawing/2014/main" id="{E3CA2FF0-F45C-4B6E-BD25-446739BBC843}"/>
               </a:ext>
             </a:extLst>
           </p:cNvPr>
@@ -9297,7 +9297,7 @@
           <p:cNvPr id="6" name="TextBox 5">
             <a:extLst xmlns:a="http://schemas.openxmlformats.org/drawingml/2006/main">
               <a:ext uri="{FF2B5EF4-FFF2-40B4-BE49-F238E27FC236}">
-                <a16:creationId xmlns:a16="http://schemas.microsoft.com/office/drawing/2014/main" id="{BDB6D613-9F00-4C9B-91ED-3B0F8EDF3BA3}"/>
+                <a16:creationId xmlns:a16="http://schemas.microsoft.com/office/drawing/2014/main" id="{03880BF0-18D7-4F35-92B5-647507DF6301}"/>
               </a:ext>
             </a:extLst>
           </p:cNvPr>
@@ -9334,7 +9334,7 @@
                 <a:ea typeface="Aptos"/>
                 <a:cs typeface="Aptos"/>
               </a:rPr>
-              <a:t>Independent public evidence summary · 2026.07.23-14 · 2026-07-22 · Sources: EPO Register; EP3032975B2</a:t>
+              <a:t>Independent public evidence summary · 2026.07.23-15 · 2026-07-22 · Sources: EPO Register; EP3032975B2</a:t>
             </a:r>
           </a:p>
         </p:txBody>
@@ -9344,7 +9344,7 @@
           <p:cNvPr id="7" name="TextBox 6">
             <a:extLst xmlns:a="http://schemas.openxmlformats.org/drawingml/2006/main">
               <a:ext uri="{FF2B5EF4-FFF2-40B4-BE49-F238E27FC236}">
-                <a16:creationId xmlns:a16="http://schemas.microsoft.com/office/drawing/2014/main" id="{4EB31023-3C07-4B51-97E8-FEEE7C0C7A53}"/>
+                <a16:creationId xmlns:a16="http://schemas.microsoft.com/office/drawing/2014/main" id="{3797CAD4-7381-4C2B-BA0C-B4F55D2E3442}"/>
               </a:ext>
             </a:extLst>
           </p:cNvPr>
@@ -9391,7 +9391,7 @@
           <p:cNvPr id="8" name="Rounded Rectangle 7">
             <a:extLst xmlns:a="http://schemas.openxmlformats.org/drawingml/2006/main">
               <a:ext uri="{FF2B5EF4-FFF2-40B4-BE49-F238E27FC236}">
-                <a16:creationId xmlns:a16="http://schemas.microsoft.com/office/drawing/2014/main" id="{A6F90FFA-A0F5-4F87-A82D-2C1DC62BA4B8}"/>
+                <a16:creationId xmlns:a16="http://schemas.microsoft.com/office/drawing/2014/main" id="{8FB01C58-BF62-486F-B927-94F70EF8EA6F}"/>
               </a:ext>
             </a:extLst>
           </p:cNvPr>
@@ -9448,7 +9448,7 @@
           <p:cNvPr id="9" name="TextBox 8">
             <a:extLst xmlns:a="http://schemas.openxmlformats.org/drawingml/2006/main">
               <a:ext uri="{FF2B5EF4-FFF2-40B4-BE49-F238E27FC236}">
-                <a16:creationId xmlns:a16="http://schemas.microsoft.com/office/drawing/2014/main" id="{2B364910-BBFD-41C7-9D22-A5685DEA3267}"/>
+                <a16:creationId xmlns:a16="http://schemas.microsoft.com/office/drawing/2014/main" id="{6C5EC31F-7AE8-4E0C-BB29-6949F18E24A7}"/>
               </a:ext>
             </a:extLst>
           </p:cNvPr>
@@ -9495,7 +9495,7 @@
           <p:cNvPr id="10" name="TextBox 9">
             <a:extLst xmlns:a="http://schemas.openxmlformats.org/drawingml/2006/main">
               <a:ext uri="{FF2B5EF4-FFF2-40B4-BE49-F238E27FC236}">
-                <a16:creationId xmlns:a16="http://schemas.microsoft.com/office/drawing/2014/main" id="{225166CA-F069-4CFF-8B9B-04F329AB3F6D}"/>
+                <a16:creationId xmlns:a16="http://schemas.microsoft.com/office/drawing/2014/main" id="{1B96556F-9EAA-40C1-9781-8E7F969E3960}"/>
               </a:ext>
             </a:extLst>
           </p:cNvPr>
@@ -9542,7 +9542,7 @@
           <p:cNvPr id="11" name="Rounded Rectangle 10">
             <a:extLst xmlns:a="http://schemas.openxmlformats.org/drawingml/2006/main">
               <a:ext uri="{FF2B5EF4-FFF2-40B4-BE49-F238E27FC236}">
-                <a16:creationId xmlns:a16="http://schemas.microsoft.com/office/drawing/2014/main" id="{5FE4274D-65E9-4332-89F5-63ADD72C531B}"/>
+                <a16:creationId xmlns:a16="http://schemas.microsoft.com/office/drawing/2014/main" id="{77AA7F28-3B7D-4129-AA13-14D3D5004EDA}"/>
               </a:ext>
             </a:extLst>
           </p:cNvPr>
@@ -9599,7 +9599,7 @@
           <p:cNvPr id="12" name="TextBox 11">
             <a:extLst xmlns:a="http://schemas.openxmlformats.org/drawingml/2006/main">
               <a:ext uri="{FF2B5EF4-FFF2-40B4-BE49-F238E27FC236}">
-                <a16:creationId xmlns:a16="http://schemas.microsoft.com/office/drawing/2014/main" id="{3FF9401D-4670-4C3C-BC91-BF337C56BC6F}"/>
+                <a16:creationId xmlns:a16="http://schemas.microsoft.com/office/drawing/2014/main" id="{5708FFD0-F7FB-4279-8BF0-F689638FEDFF}"/>
               </a:ext>
             </a:extLst>
           </p:cNvPr>
@@ -9646,7 +9646,7 @@
           <p:cNvPr id="13" name="TextBox 12">
             <a:extLst xmlns:a="http://schemas.openxmlformats.org/drawingml/2006/main">
               <a:ext uri="{FF2B5EF4-FFF2-40B4-BE49-F238E27FC236}">
-                <a16:creationId xmlns:a16="http://schemas.microsoft.com/office/drawing/2014/main" id="{7933A338-02DB-4908-85A2-F440F4C389AC}"/>
+                <a16:creationId xmlns:a16="http://schemas.microsoft.com/office/drawing/2014/main" id="{E2911F1A-D394-465C-9C05-6A41D133E8DF}"/>
               </a:ext>
             </a:extLst>
           </p:cNvPr>
@@ -9693,7 +9693,7 @@
           <p:cNvPr id="14" name="Rounded Rectangle 13">
             <a:extLst xmlns:a="http://schemas.openxmlformats.org/drawingml/2006/main">
               <a:ext uri="{FF2B5EF4-FFF2-40B4-BE49-F238E27FC236}">
-                <a16:creationId xmlns:a16="http://schemas.microsoft.com/office/drawing/2014/main" id="{3C768663-5B9E-4B01-B393-F4AF1A27991F}"/>
+                <a16:creationId xmlns:a16="http://schemas.microsoft.com/office/drawing/2014/main" id="{528B2950-43F2-4250-92D9-0877417CD48D}"/>
               </a:ext>
             </a:extLst>
           </p:cNvPr>
@@ -9750,7 +9750,7 @@
           <p:cNvPr id="15" name="TextBox 14">
             <a:extLst xmlns:a="http://schemas.openxmlformats.org/drawingml/2006/main">
               <a:ext uri="{FF2B5EF4-FFF2-40B4-BE49-F238E27FC236}">
-                <a16:creationId xmlns:a16="http://schemas.microsoft.com/office/drawing/2014/main" id="{B70A9670-9748-4367-B063-F56AF61DB5CA}"/>
+                <a16:creationId xmlns:a16="http://schemas.microsoft.com/office/drawing/2014/main" id="{261E8E42-963F-45A1-82D2-5C0EE4AFA500}"/>
               </a:ext>
             </a:extLst>
           </p:cNvPr>
@@ -9797,7 +9797,7 @@
           <p:cNvPr id="16" name="TextBox 15">
             <a:extLst xmlns:a="http://schemas.openxmlformats.org/drawingml/2006/main">
               <a:ext uri="{FF2B5EF4-FFF2-40B4-BE49-F238E27FC236}">
-                <a16:creationId xmlns:a16="http://schemas.microsoft.com/office/drawing/2014/main" id="{96F6CFE8-4DB7-4EA0-9AEE-452728E9C9B6}"/>
+                <a16:creationId xmlns:a16="http://schemas.microsoft.com/office/drawing/2014/main" id="{FE38676E-06F1-4720-A0F3-2C5FAB9F1532}"/>
               </a:ext>
             </a:extLst>
           </p:cNvPr>
@@ -9844,7 +9844,7 @@
           <p:cNvPr id="17" name="TextBox 16">
             <a:extLst xmlns:a="http://schemas.openxmlformats.org/drawingml/2006/main">
               <a:ext uri="{FF2B5EF4-FFF2-40B4-BE49-F238E27FC236}">
-                <a16:creationId xmlns:a16="http://schemas.microsoft.com/office/drawing/2014/main" id="{09FDED3C-8D25-4B3A-86E5-434D8A8A781E}"/>
+                <a16:creationId xmlns:a16="http://schemas.microsoft.com/office/drawing/2014/main" id="{2D4F11DA-980E-4BB8-B22F-AB332C94BC53}"/>
               </a:ext>
             </a:extLst>
           </p:cNvPr>
@@ -9891,7 +9891,7 @@
           <p:cNvPr id="18" name="Rounded Rectangle 17">
             <a:extLst xmlns:a="http://schemas.openxmlformats.org/drawingml/2006/main">
               <a:ext uri="{FF2B5EF4-FFF2-40B4-BE49-F238E27FC236}">
-                <a16:creationId xmlns:a16="http://schemas.microsoft.com/office/drawing/2014/main" id="{28D2665E-7DF5-4B44-BDB0-3895BBD60262}"/>
+                <a16:creationId xmlns:a16="http://schemas.microsoft.com/office/drawing/2014/main" id="{C045CECC-7916-4F1F-9D20-621B30A58064}"/>
               </a:ext>
             </a:extLst>
           </p:cNvPr>
@@ -9948,7 +9948,7 @@
           <p:cNvPr id="19" name="TextBox 18">
             <a:extLst xmlns:a="http://schemas.openxmlformats.org/drawingml/2006/main">
               <a:ext uri="{FF2B5EF4-FFF2-40B4-BE49-F238E27FC236}">
-                <a16:creationId xmlns:a16="http://schemas.microsoft.com/office/drawing/2014/main" id="{A181E294-63BF-4714-AD4C-3E350B4AE08E}"/>
+                <a16:creationId xmlns:a16="http://schemas.microsoft.com/office/drawing/2014/main" id="{540BC090-9DFF-49BE-A544-F4DF04911E5F}"/>
               </a:ext>
             </a:extLst>
           </p:cNvPr>
@@ -9995,7 +9995,7 @@
           <p:cNvPr id="20" name="TextBox 19">
             <a:extLst xmlns:a="http://schemas.openxmlformats.org/drawingml/2006/main">
               <a:ext uri="{FF2B5EF4-FFF2-40B4-BE49-F238E27FC236}">
-                <a16:creationId xmlns:a16="http://schemas.microsoft.com/office/drawing/2014/main" id="{CB41909E-9E07-4489-8640-E0A550F53B1D}"/>
+                <a16:creationId xmlns:a16="http://schemas.microsoft.com/office/drawing/2014/main" id="{020D2B4A-017C-420C-9220-41171F979BEF}"/>
               </a:ext>
             </a:extLst>
           </p:cNvPr>
@@ -10040,7 +10040,7 @@
     </p:spTree>
     <p:extLst>
       <p:ext uri="{BB962C8B-B14F-4D97-AF65-F5344CB8AC3E}">
-        <p14:creationId xmlns:p14="http://schemas.microsoft.com/office/powerpoint/2010/main" val="1872749638"/>
+        <p14:creationId xmlns:p14="http://schemas.microsoft.com/office/powerpoint/2010/main" val="1425319304"/>
       </p:ext>
     </p:extLst>
   </p:cSld>
@@ -10064,7 +10064,7 @@
           <p:cNvPr id="2" name="TextBox 1">
             <a:extLst xmlns:a="http://schemas.openxmlformats.org/drawingml/2006/main">
               <a:ext uri="{FF2B5EF4-FFF2-40B4-BE49-F238E27FC236}">
-                <a16:creationId xmlns:a16="http://schemas.microsoft.com/office/drawing/2014/main" id="{333DAA06-AC6D-414B-91C0-398F31BE7EBB}"/>
+                <a16:creationId xmlns:a16="http://schemas.microsoft.com/office/drawing/2014/main" id="{C801A883-B320-4A44-8DD2-1A32ABD8251F}"/>
               </a:ext>
             </a:extLst>
           </p:cNvPr>
@@ -10111,7 +10111,7 @@
           <p:cNvPr id="3" name="TextBox 2">
             <a:extLst xmlns:a="http://schemas.openxmlformats.org/drawingml/2006/main">
               <a:ext uri="{FF2B5EF4-FFF2-40B4-BE49-F238E27FC236}">
-                <a16:creationId xmlns:a16="http://schemas.microsoft.com/office/drawing/2014/main" id="{645BEB42-3A77-425A-A7A9-508927A4629C}"/>
+                <a16:creationId xmlns:a16="http://schemas.microsoft.com/office/drawing/2014/main" id="{2E173198-7AA7-47E2-B03B-A61014EE65DA}"/>
               </a:ext>
             </a:extLst>
           </p:cNvPr>
@@ -10158,7 +10158,7 @@
           <p:cNvPr id="4" name="Rectangle 3">
             <a:extLst xmlns:a="http://schemas.openxmlformats.org/drawingml/2006/main">
               <a:ext uri="{FF2B5EF4-FFF2-40B4-BE49-F238E27FC236}">
-                <a16:creationId xmlns:a16="http://schemas.microsoft.com/office/drawing/2014/main" id="{DEFF4816-9B9C-498B-894D-07DF6A21CC74}"/>
+                <a16:creationId xmlns:a16="http://schemas.microsoft.com/office/drawing/2014/main" id="{6AF20F3D-1611-4FD1-A625-442EB15EFF8E}"/>
               </a:ext>
             </a:extLst>
           </p:cNvPr>
@@ -10213,7 +10213,7 @@
           <p:cNvPr id="5" name="Rectangle 4">
             <a:extLst xmlns:a="http://schemas.openxmlformats.org/drawingml/2006/main">
               <a:ext uri="{FF2B5EF4-FFF2-40B4-BE49-F238E27FC236}">
-                <a16:creationId xmlns:a16="http://schemas.microsoft.com/office/drawing/2014/main" id="{9746E653-990C-4DA1-BA2D-79352C51571A}"/>
+                <a16:creationId xmlns:a16="http://schemas.microsoft.com/office/drawing/2014/main" id="{F0E27165-22ED-42E2-8AA3-214627A6F6C9}"/>
               </a:ext>
             </a:extLst>
           </p:cNvPr>
@@ -10268,7 +10268,7 @@
           <p:cNvPr id="6" name="TextBox 5">
             <a:extLst xmlns:a="http://schemas.openxmlformats.org/drawingml/2006/main">
               <a:ext uri="{FF2B5EF4-FFF2-40B4-BE49-F238E27FC236}">
-                <a16:creationId xmlns:a16="http://schemas.microsoft.com/office/drawing/2014/main" id="{7706E7A5-2836-4A10-A81D-C3EBCF70ABDB}"/>
+                <a16:creationId xmlns:a16="http://schemas.microsoft.com/office/drawing/2014/main" id="{012D581E-F40C-4E15-ABC2-54B62A041F26}"/>
               </a:ext>
             </a:extLst>
           </p:cNvPr>
@@ -10305,7 +10305,7 @@
                 <a:ea typeface="Aptos"/>
                 <a:cs typeface="Aptos"/>
               </a:rPr>
-              <a:t>Independent public evidence summary · 2026.07.23-14 · 2026-07-22 · Sources: EP3032975B2; 7 O 3341/24</a:t>
+              <a:t>Independent public evidence summary · 2026.07.23-15 · 2026-07-22 · Sources: EP3032975B2; 7 O 3341/24</a:t>
             </a:r>
           </a:p>
         </p:txBody>
@@ -10315,7 +10315,7 @@
           <p:cNvPr id="7" name="TextBox 6">
             <a:extLst xmlns:a="http://schemas.openxmlformats.org/drawingml/2006/main">
               <a:ext uri="{FF2B5EF4-FFF2-40B4-BE49-F238E27FC236}">
-                <a16:creationId xmlns:a16="http://schemas.microsoft.com/office/drawing/2014/main" id="{D3357E9C-03AB-4709-98BC-227FF47CE6B9}"/>
+                <a16:creationId xmlns:a16="http://schemas.microsoft.com/office/drawing/2014/main" id="{BEDAE153-4E49-4C56-9F3E-ABF6972C7C76}"/>
               </a:ext>
             </a:extLst>
           </p:cNvPr>
@@ -10362,7 +10362,7 @@
           <p:cNvPr id="8" name="TextBox 7">
             <a:extLst xmlns:a="http://schemas.openxmlformats.org/drawingml/2006/main">
               <a:ext uri="{FF2B5EF4-FFF2-40B4-BE49-F238E27FC236}">
-                <a16:creationId xmlns:a16="http://schemas.microsoft.com/office/drawing/2014/main" id="{3C4F8C7C-19A8-4424-B9D9-FF4810E5A32B}"/>
+                <a16:creationId xmlns:a16="http://schemas.microsoft.com/office/drawing/2014/main" id="{E7AB64F2-15E6-43B7-8A23-647DAC7D659B}"/>
               </a:ext>
             </a:extLst>
           </p:cNvPr>
@@ -10409,7 +10409,7 @@
           <p:cNvPr id="9" name="TextBox 8">
             <a:extLst xmlns:a="http://schemas.openxmlformats.org/drawingml/2006/main">
               <a:ext uri="{FF2B5EF4-FFF2-40B4-BE49-F238E27FC236}">
-                <a16:creationId xmlns:a16="http://schemas.microsoft.com/office/drawing/2014/main" id="{967F2B17-DE81-4664-9C8A-9029996234F6}"/>
+                <a16:creationId xmlns:a16="http://schemas.microsoft.com/office/drawing/2014/main" id="{51849CD9-603A-4D4B-9CBC-B1396426CBE5}"/>
               </a:ext>
             </a:extLst>
           </p:cNvPr>
@@ -10506,7 +10506,7 @@
           <p:cNvPr id="10" name="Rounded Rectangle 9">
             <a:extLst xmlns:a="http://schemas.openxmlformats.org/drawingml/2006/main">
               <a:ext uri="{FF2B5EF4-FFF2-40B4-BE49-F238E27FC236}">
-                <a16:creationId xmlns:a16="http://schemas.microsoft.com/office/drawing/2014/main" id="{7AAFE00F-863D-4EB3-A6A8-2361FBA3EE48}"/>
+                <a16:creationId xmlns:a16="http://schemas.microsoft.com/office/drawing/2014/main" id="{4D1CF742-F610-46C8-B283-C8C4B29072A0}"/>
               </a:ext>
             </a:extLst>
           </p:cNvPr>
@@ -10563,7 +10563,7 @@
           <p:cNvPr id="11" name="TextBox 10">
             <a:extLst xmlns:a="http://schemas.openxmlformats.org/drawingml/2006/main">
               <a:ext uri="{FF2B5EF4-FFF2-40B4-BE49-F238E27FC236}">
-                <a16:creationId xmlns:a16="http://schemas.microsoft.com/office/drawing/2014/main" id="{B51DB12B-3A2D-4448-BFB0-0BCE5FFF315D}"/>
+                <a16:creationId xmlns:a16="http://schemas.microsoft.com/office/drawing/2014/main" id="{FC631C72-C4A6-4238-A435-C30E2E6DD1D2}"/>
               </a:ext>
             </a:extLst>
           </p:cNvPr>
@@ -10610,7 +10610,7 @@
           <p:cNvPr id="12" name="TextBox 11">
             <a:extLst xmlns:a="http://schemas.openxmlformats.org/drawingml/2006/main">
               <a:ext uri="{FF2B5EF4-FFF2-40B4-BE49-F238E27FC236}">
-                <a16:creationId xmlns:a16="http://schemas.microsoft.com/office/drawing/2014/main" id="{E8CC60ED-8F0E-4A88-9114-7DE4C9B9DE5E}"/>
+                <a16:creationId xmlns:a16="http://schemas.microsoft.com/office/drawing/2014/main" id="{DA455349-1A6C-4A89-AD1E-0BF8882D1657}"/>
               </a:ext>
             </a:extLst>
           </p:cNvPr>
@@ -10655,7 +10655,7 @@
     </p:spTree>
     <p:extLst>
       <p:ext uri="{BB962C8B-B14F-4D97-AF65-F5344CB8AC3E}">
-        <p14:creationId xmlns:p14="http://schemas.microsoft.com/office/powerpoint/2010/main" val="1361028533"/>
+        <p14:creationId xmlns:p14="http://schemas.microsoft.com/office/powerpoint/2010/main" val="82642986"/>
       </p:ext>
     </p:extLst>
   </p:cSld>
@@ -10679,7 +10679,7 @@
           <p:cNvPr id="2" name="TextBox 1">
             <a:extLst xmlns:a="http://schemas.openxmlformats.org/drawingml/2006/main">
               <a:ext uri="{FF2B5EF4-FFF2-40B4-BE49-F238E27FC236}">
-                <a16:creationId xmlns:a16="http://schemas.microsoft.com/office/drawing/2014/main" id="{2A2D9188-AC37-49AB-9BED-AAB521DBCFE0}"/>
+                <a16:creationId xmlns:a16="http://schemas.microsoft.com/office/drawing/2014/main" id="{846A273C-82E6-49B9-A584-F3B95BFE1448}"/>
               </a:ext>
             </a:extLst>
           </p:cNvPr>
@@ -10726,7 +10726,7 @@
           <p:cNvPr id="3" name="TextBox 2">
             <a:extLst xmlns:a="http://schemas.openxmlformats.org/drawingml/2006/main">
               <a:ext uri="{FF2B5EF4-FFF2-40B4-BE49-F238E27FC236}">
-                <a16:creationId xmlns:a16="http://schemas.microsoft.com/office/drawing/2014/main" id="{8D809C50-F3E4-4859-A119-4F3E7FB35B0F}"/>
+                <a16:creationId xmlns:a16="http://schemas.microsoft.com/office/drawing/2014/main" id="{F20946E9-97C5-4CE4-8C36-821B42B4DEC1}"/>
               </a:ext>
             </a:extLst>
           </p:cNvPr>
@@ -10773,7 +10773,7 @@
           <p:cNvPr id="4" name="Rectangle 3">
             <a:extLst xmlns:a="http://schemas.openxmlformats.org/drawingml/2006/main">
               <a:ext uri="{FF2B5EF4-FFF2-40B4-BE49-F238E27FC236}">
-                <a16:creationId xmlns:a16="http://schemas.microsoft.com/office/drawing/2014/main" id="{720D7629-F0B6-4815-9A09-1F23E0D32838}"/>
+                <a16:creationId xmlns:a16="http://schemas.microsoft.com/office/drawing/2014/main" id="{AE6D0B54-9FA3-4B3E-BDC8-470CBFEA7425}"/>
               </a:ext>
             </a:extLst>
           </p:cNvPr>
@@ -10828,7 +10828,7 @@
           <p:cNvPr id="5" name="Rectangle 4">
             <a:extLst xmlns:a="http://schemas.openxmlformats.org/drawingml/2006/main">
               <a:ext uri="{FF2B5EF4-FFF2-40B4-BE49-F238E27FC236}">
-                <a16:creationId xmlns:a16="http://schemas.microsoft.com/office/drawing/2014/main" id="{32FF92FD-34F1-4719-A8F4-6AE573E2B9BF}"/>
+                <a16:creationId xmlns:a16="http://schemas.microsoft.com/office/drawing/2014/main" id="{23B21057-7CBC-440E-831E-061E852DACFB}"/>
               </a:ext>
             </a:extLst>
           </p:cNvPr>
@@ -10883,7 +10883,7 @@
           <p:cNvPr id="6" name="TextBox 5">
             <a:extLst xmlns:a="http://schemas.openxmlformats.org/drawingml/2006/main">
               <a:ext uri="{FF2B5EF4-FFF2-40B4-BE49-F238E27FC236}">
-                <a16:creationId xmlns:a16="http://schemas.microsoft.com/office/drawing/2014/main" id="{9DB110E9-2114-4A37-9E43-22FA31C5BC5B}"/>
+                <a16:creationId xmlns:a16="http://schemas.microsoft.com/office/drawing/2014/main" id="{38387860-F331-4657-8F15-ECE41D2E6E9A}"/>
               </a:ext>
             </a:extLst>
           </p:cNvPr>
@@ -10920,7 +10920,7 @@
                 <a:ea typeface="Aptos"/>
                 <a:cs typeface="Aptos"/>
               </a:rPr>
-              <a:t>Independent public evidence summary · 2026.07.23-14 · 2026-07-22 · Sources: Market-values; IMARC; GVR; Fortune</a:t>
+              <a:t>Independent public evidence summary · 2026.07.23-15 · 2026-07-22 · Sources: Market-values; IMARC; GVR; Fortune</a:t>
             </a:r>
           </a:p>
         </p:txBody>
@@ -10930,7 +10930,7 @@
           <p:cNvPr id="7" name="TextBox 6">
             <a:extLst xmlns:a="http://schemas.openxmlformats.org/drawingml/2006/main">
               <a:ext uri="{FF2B5EF4-FFF2-40B4-BE49-F238E27FC236}">
-                <a16:creationId xmlns:a16="http://schemas.microsoft.com/office/drawing/2014/main" id="{565C3FA7-6D2E-460D-944C-65B4131A7CFE}"/>
+                <a16:creationId xmlns:a16="http://schemas.microsoft.com/office/drawing/2014/main" id="{B1290B9E-0100-4D62-A908-AA7DDB156BF1}"/>
               </a:ext>
             </a:extLst>
           </p:cNvPr>
@@ -10977,7 +10977,7 @@
           <p:cNvPr id="8" name="Rounded Rectangle 7">
             <a:extLst xmlns:a="http://schemas.openxmlformats.org/drawingml/2006/main">
               <a:ext uri="{FF2B5EF4-FFF2-40B4-BE49-F238E27FC236}">
-                <a16:creationId xmlns:a16="http://schemas.microsoft.com/office/drawing/2014/main" id="{E51B201C-7596-4F50-97DD-365C8AA2211F}"/>
+                <a16:creationId xmlns:a16="http://schemas.microsoft.com/office/drawing/2014/main" id="{A18F8368-11F3-4617-AD88-8E726453B1C9}"/>
               </a:ext>
             </a:extLst>
           </p:cNvPr>
@@ -11034,7 +11034,7 @@
           <p:cNvPr id="9" name="TextBox 8">
             <a:extLst xmlns:a="http://schemas.openxmlformats.org/drawingml/2006/main">
               <a:ext uri="{FF2B5EF4-FFF2-40B4-BE49-F238E27FC236}">
-                <a16:creationId xmlns:a16="http://schemas.microsoft.com/office/drawing/2014/main" id="{FE800125-E119-44CC-8A25-7AAE86B0C258}"/>
+                <a16:creationId xmlns:a16="http://schemas.microsoft.com/office/drawing/2014/main" id="{CA622434-1EED-450C-B9A4-5221CED542B5}"/>
               </a:ext>
             </a:extLst>
           </p:cNvPr>
@@ -11081,7 +11081,7 @@
           <p:cNvPr id="10" name="TextBox 9">
             <a:extLst xmlns:a="http://schemas.openxmlformats.org/drawingml/2006/main">
               <a:ext uri="{FF2B5EF4-FFF2-40B4-BE49-F238E27FC236}">
-                <a16:creationId xmlns:a16="http://schemas.microsoft.com/office/drawing/2014/main" id="{4285CC05-DF62-4F49-849B-E4A6BCEA15E5}"/>
+                <a16:creationId xmlns:a16="http://schemas.microsoft.com/office/drawing/2014/main" id="{F1442F14-4A7E-43D0-890C-86C4E6145FFC}"/>
               </a:ext>
             </a:extLst>
           </p:cNvPr>
@@ -11128,7 +11128,7 @@
           <p:cNvPr id="11" name="Rounded Rectangle 10">
             <a:extLst xmlns:a="http://schemas.openxmlformats.org/drawingml/2006/main">
               <a:ext uri="{FF2B5EF4-FFF2-40B4-BE49-F238E27FC236}">
-                <a16:creationId xmlns:a16="http://schemas.microsoft.com/office/drawing/2014/main" id="{5393042C-422D-46DF-96BB-AEF7EFD48B57}"/>
+                <a16:creationId xmlns:a16="http://schemas.microsoft.com/office/drawing/2014/main" id="{E07002DE-39C6-4991-A9D3-3DE5023E87F0}"/>
               </a:ext>
             </a:extLst>
           </p:cNvPr>
@@ -11185,7 +11185,7 @@
           <p:cNvPr id="12" name="TextBox 11">
             <a:extLst xmlns:a="http://schemas.openxmlformats.org/drawingml/2006/main">
               <a:ext uri="{FF2B5EF4-FFF2-40B4-BE49-F238E27FC236}">
-                <a16:creationId xmlns:a16="http://schemas.microsoft.com/office/drawing/2014/main" id="{B7D3BEDE-A735-40D1-B2B8-F8A38A9A0AB5}"/>
+                <a16:creationId xmlns:a16="http://schemas.microsoft.com/office/drawing/2014/main" id="{B318072B-200D-4477-AB12-D7AFD42A83C0}"/>
               </a:ext>
             </a:extLst>
           </p:cNvPr>
@@ -11232,7 +11232,7 @@
           <p:cNvPr id="13" name="TextBox 12">
             <a:extLst xmlns:a="http://schemas.openxmlformats.org/drawingml/2006/main">
               <a:ext uri="{FF2B5EF4-FFF2-40B4-BE49-F238E27FC236}">
-                <a16:creationId xmlns:a16="http://schemas.microsoft.com/office/drawing/2014/main" id="{0C72D2D7-1117-4D76-BF35-F2E421EFC0D4}"/>
+                <a16:creationId xmlns:a16="http://schemas.microsoft.com/office/drawing/2014/main" id="{4DDE2352-AB57-4963-A71B-BCE62AEBC375}"/>
               </a:ext>
             </a:extLst>
           </p:cNvPr>
@@ -11279,7 +11279,7 @@
           <p:cNvPr id="14" name="Rounded Rectangle 13">
             <a:extLst xmlns:a="http://schemas.openxmlformats.org/drawingml/2006/main">
               <a:ext uri="{FF2B5EF4-FFF2-40B4-BE49-F238E27FC236}">
-                <a16:creationId xmlns:a16="http://schemas.microsoft.com/office/drawing/2014/main" id="{7AFD61D0-3197-4B13-9B26-C2FEFA345164}"/>
+                <a16:creationId xmlns:a16="http://schemas.microsoft.com/office/drawing/2014/main" id="{55D94BA6-0FA8-478E-9641-B60EE464FA4E}"/>
               </a:ext>
             </a:extLst>
           </p:cNvPr>
@@ -11336,7 +11336,7 @@
           <p:cNvPr id="15" name="TextBox 14">
             <a:extLst xmlns:a="http://schemas.openxmlformats.org/drawingml/2006/main">
               <a:ext uri="{FF2B5EF4-FFF2-40B4-BE49-F238E27FC236}">
-                <a16:creationId xmlns:a16="http://schemas.microsoft.com/office/drawing/2014/main" id="{9C276609-CE2F-4FAE-ADDE-99F5C2793DF8}"/>
+                <a16:creationId xmlns:a16="http://schemas.microsoft.com/office/drawing/2014/main" id="{9C9A3367-079B-4CE1-B5A7-77C6AD6C9DFC}"/>
               </a:ext>
             </a:extLst>
           </p:cNvPr>
@@ -11383,7 +11383,7 @@
           <p:cNvPr id="16" name="TextBox 15">
             <a:extLst xmlns:a="http://schemas.openxmlformats.org/drawingml/2006/main">
               <a:ext uri="{FF2B5EF4-FFF2-40B4-BE49-F238E27FC236}">
-                <a16:creationId xmlns:a16="http://schemas.microsoft.com/office/drawing/2014/main" id="{BA5F2A49-EFD7-410E-801B-E89C56CBC88F}"/>
+                <a16:creationId xmlns:a16="http://schemas.microsoft.com/office/drawing/2014/main" id="{67372151-5D92-4944-9254-031C6D28019E}"/>
               </a:ext>
             </a:extLst>
           </p:cNvPr>
@@ -11430,7 +11430,7 @@
           <p:cNvPr id="17" name="TextBox 16">
             <a:extLst xmlns:a="http://schemas.openxmlformats.org/drawingml/2006/main">
               <a:ext uri="{FF2B5EF4-FFF2-40B4-BE49-F238E27FC236}">
-                <a16:creationId xmlns:a16="http://schemas.microsoft.com/office/drawing/2014/main" id="{AC1BF362-6C10-4C91-A48B-BC6BB9F2DDC4}"/>
+                <a16:creationId xmlns:a16="http://schemas.microsoft.com/office/drawing/2014/main" id="{9ADA6D07-F0B2-4E02-A59B-0171C93859C3}"/>
               </a:ext>
             </a:extLst>
           </p:cNvPr>
@@ -11477,7 +11477,7 @@
           <p:cNvPr id="18" name="Rounded Rectangle 17">
             <a:extLst xmlns:a="http://schemas.openxmlformats.org/drawingml/2006/main">
               <a:ext uri="{FF2B5EF4-FFF2-40B4-BE49-F238E27FC236}">
-                <a16:creationId xmlns:a16="http://schemas.microsoft.com/office/drawing/2014/main" id="{F8DCBB40-37F0-4E38-AE9E-90D0B00085BE}"/>
+                <a16:creationId xmlns:a16="http://schemas.microsoft.com/office/drawing/2014/main" id="{08922F8C-7C0F-4F3A-AEF9-79C679FA37C8}"/>
               </a:ext>
             </a:extLst>
           </p:cNvPr>
@@ -11534,7 +11534,7 @@
           <p:cNvPr id="19" name="TextBox 18">
             <a:extLst xmlns:a="http://schemas.openxmlformats.org/drawingml/2006/main">
               <a:ext uri="{FF2B5EF4-FFF2-40B4-BE49-F238E27FC236}">
-                <a16:creationId xmlns:a16="http://schemas.microsoft.com/office/drawing/2014/main" id="{16B4E986-D083-42DB-ABFD-7C73C9383769}"/>
+                <a16:creationId xmlns:a16="http://schemas.microsoft.com/office/drawing/2014/main" id="{636D39FB-CCF4-4809-8DD4-12D35A85E3D9}"/>
               </a:ext>
             </a:extLst>
           </p:cNvPr>
@@ -11581,7 +11581,7 @@
           <p:cNvPr id="20" name="TextBox 19">
             <a:extLst xmlns:a="http://schemas.openxmlformats.org/drawingml/2006/main">
               <a:ext uri="{FF2B5EF4-FFF2-40B4-BE49-F238E27FC236}">
-                <a16:creationId xmlns:a16="http://schemas.microsoft.com/office/drawing/2014/main" id="{AB8D7A5A-37AC-4E52-81BE-FA0FD62C4DA5}"/>
+                <a16:creationId xmlns:a16="http://schemas.microsoft.com/office/drawing/2014/main" id="{1FCBB400-EA67-4A63-99D8-048B79CBB01C}"/>
               </a:ext>
             </a:extLst>
           </p:cNvPr>
@@ -11626,7 +11626,7 @@
     </p:spTree>
     <p:extLst>
       <p:ext uri="{BB962C8B-B14F-4D97-AF65-F5344CB8AC3E}">
-        <p14:creationId xmlns:p14="http://schemas.microsoft.com/office/powerpoint/2010/main" val="107720049"/>
+        <p14:creationId xmlns:p14="http://schemas.microsoft.com/office/powerpoint/2010/main" val="700484083"/>
       </p:ext>
     </p:extLst>
   </p:cSld>
@@ -11650,7 +11650,7 @@
           <p:cNvPr id="2" name="TextBox 1">
             <a:extLst xmlns:a="http://schemas.openxmlformats.org/drawingml/2006/main">
               <a:ext uri="{FF2B5EF4-FFF2-40B4-BE49-F238E27FC236}">
-                <a16:creationId xmlns:a16="http://schemas.microsoft.com/office/drawing/2014/main" id="{F333AF83-097A-4514-89A9-724C4FCBA43D}"/>
+                <a16:creationId xmlns:a16="http://schemas.microsoft.com/office/drawing/2014/main" id="{4DF4D2C0-76BB-49F2-BFE9-6E23410D5D4A}"/>
               </a:ext>
             </a:extLst>
           </p:cNvPr>
@@ -11697,7 +11697,7 @@
           <p:cNvPr id="3" name="TextBox 2">
             <a:extLst xmlns:a="http://schemas.openxmlformats.org/drawingml/2006/main">
               <a:ext uri="{FF2B5EF4-FFF2-40B4-BE49-F238E27FC236}">
-                <a16:creationId xmlns:a16="http://schemas.microsoft.com/office/drawing/2014/main" id="{3F0CAD53-0E86-464D-A2DC-3DBAB8D7EC42}"/>
+                <a16:creationId xmlns:a16="http://schemas.microsoft.com/office/drawing/2014/main" id="{4993C675-2DB2-48E6-9F60-A1D568F4B6E0}"/>
               </a:ext>
             </a:extLst>
           </p:cNvPr>
@@ -11744,7 +11744,7 @@
           <p:cNvPr id="4" name="Rectangle 3">
             <a:extLst xmlns:a="http://schemas.openxmlformats.org/drawingml/2006/main">
               <a:ext uri="{FF2B5EF4-FFF2-40B4-BE49-F238E27FC236}">
-                <a16:creationId xmlns:a16="http://schemas.microsoft.com/office/drawing/2014/main" id="{ACD092D5-5A18-46B7-9115-F499246DAAA2}"/>
+                <a16:creationId xmlns:a16="http://schemas.microsoft.com/office/drawing/2014/main" id="{CEDFAD1C-B41D-4E2E-9FFB-04F63429DFA9}"/>
               </a:ext>
             </a:extLst>
           </p:cNvPr>
@@ -11799,7 +11799,7 @@
           <p:cNvPr id="5" name="Rectangle 4">
             <a:extLst xmlns:a="http://schemas.openxmlformats.org/drawingml/2006/main">
               <a:ext uri="{FF2B5EF4-FFF2-40B4-BE49-F238E27FC236}">
-                <a16:creationId xmlns:a16="http://schemas.microsoft.com/office/drawing/2014/main" id="{3BF714A9-2F13-4918-86CF-45B40167807C}"/>
+                <a16:creationId xmlns:a16="http://schemas.microsoft.com/office/drawing/2014/main" id="{0434B683-6770-462C-A909-ABCF6FA0A957}"/>
               </a:ext>
             </a:extLst>
           </p:cNvPr>
@@ -11854,7 +11854,7 @@
           <p:cNvPr id="6" name="TextBox 5">
             <a:extLst xmlns:a="http://schemas.openxmlformats.org/drawingml/2006/main">
               <a:ext uri="{FF2B5EF4-FFF2-40B4-BE49-F238E27FC236}">
-                <a16:creationId xmlns:a16="http://schemas.microsoft.com/office/drawing/2014/main" id="{D0257CB4-908A-45F4-8DEF-AE1CEA50E74E}"/>
+                <a16:creationId xmlns:a16="http://schemas.microsoft.com/office/drawing/2014/main" id="{9C72C607-DE02-4E43-805B-CC3E2B5A9E75}"/>
               </a:ext>
             </a:extLst>
           </p:cNvPr>
@@ -11891,7 +11891,7 @@
                 <a:ea typeface="Aptos"/>
                 <a:cs typeface="Aptos"/>
               </a:rPr>
-              <a:t>Independent public evidence summary · 2026.07.23-14 · 2026-07-22 · Sources: WIPO licensing; WIPO IP Finance</a:t>
+              <a:t>Independent public evidence summary · 2026.07.23-15 · 2026-07-22 · Sources: WIPO licensing; WIPO IP Finance</a:t>
             </a:r>
           </a:p>
         </p:txBody>
@@ -11901,7 +11901,7 @@
           <p:cNvPr id="7" name="TextBox 6">
             <a:extLst xmlns:a="http://schemas.openxmlformats.org/drawingml/2006/main">
               <a:ext uri="{FF2B5EF4-FFF2-40B4-BE49-F238E27FC236}">
-                <a16:creationId xmlns:a16="http://schemas.microsoft.com/office/drawing/2014/main" id="{88B92C77-E06B-42C0-8DCC-D6B2174555D2}"/>
+                <a16:creationId xmlns:a16="http://schemas.microsoft.com/office/drawing/2014/main" id="{3094B7E0-9B52-47E8-AA02-C4177BD8E9F6}"/>
               </a:ext>
             </a:extLst>
           </p:cNvPr>
@@ -11948,7 +11948,7 @@
           <p:cNvPr id="8" name="TextBox 7">
             <a:extLst xmlns:a="http://schemas.openxmlformats.org/drawingml/2006/main">
               <a:ext uri="{FF2B5EF4-FFF2-40B4-BE49-F238E27FC236}">
-                <a16:creationId xmlns:a16="http://schemas.microsoft.com/office/drawing/2014/main" id="{1E81E153-365C-411B-9F90-DC1762AED9AB}"/>
+                <a16:creationId xmlns:a16="http://schemas.microsoft.com/office/drawing/2014/main" id="{9E4F21D2-B4B1-499C-87DE-D140FC40FF9A}"/>
               </a:ext>
             </a:extLst>
           </p:cNvPr>
@@ -11995,7 +11995,7 @@
           <p:cNvPr id="9" name="TextBox 8">
             <a:extLst xmlns:a="http://schemas.openxmlformats.org/drawingml/2006/main">
               <a:ext uri="{FF2B5EF4-FFF2-40B4-BE49-F238E27FC236}">
-                <a16:creationId xmlns:a16="http://schemas.microsoft.com/office/drawing/2014/main" id="{52B37342-D3AA-454E-ACC8-AD805C0FD82B}"/>
+                <a16:creationId xmlns:a16="http://schemas.microsoft.com/office/drawing/2014/main" id="{631B2650-876B-4F2F-B984-4EFFBE42428F}"/>
               </a:ext>
             </a:extLst>
           </p:cNvPr>
@@ -12092,7 +12092,7 @@
           <p:cNvPr id="10" name="Rounded Rectangle 9">
             <a:extLst xmlns:a="http://schemas.openxmlformats.org/drawingml/2006/main">
               <a:ext uri="{FF2B5EF4-FFF2-40B4-BE49-F238E27FC236}">
-                <a16:creationId xmlns:a16="http://schemas.microsoft.com/office/drawing/2014/main" id="{78213792-13B5-4AA4-AEF4-B2D85F12E30C}"/>
+                <a16:creationId xmlns:a16="http://schemas.microsoft.com/office/drawing/2014/main" id="{06C420AD-A5AA-4A2D-B074-85B6D855CF46}"/>
               </a:ext>
             </a:extLst>
           </p:cNvPr>
@@ -12149,7 +12149,7 @@
           <p:cNvPr id="11" name="TextBox 10">
             <a:extLst xmlns:a="http://schemas.openxmlformats.org/drawingml/2006/main">
               <a:ext uri="{FF2B5EF4-FFF2-40B4-BE49-F238E27FC236}">
-                <a16:creationId xmlns:a16="http://schemas.microsoft.com/office/drawing/2014/main" id="{0B34E6A5-4807-45C5-AFF1-A5E4FE6C279B}"/>
+                <a16:creationId xmlns:a16="http://schemas.microsoft.com/office/drawing/2014/main" id="{2C71D6FC-4D15-4E94-9ECF-183CFF74C6E7}"/>
               </a:ext>
             </a:extLst>
           </p:cNvPr>
@@ -12196,7 +12196,7 @@
           <p:cNvPr id="12" name="TextBox 11">
             <a:extLst xmlns:a="http://schemas.openxmlformats.org/drawingml/2006/main">
               <a:ext uri="{FF2B5EF4-FFF2-40B4-BE49-F238E27FC236}">
-                <a16:creationId xmlns:a16="http://schemas.microsoft.com/office/drawing/2014/main" id="{FFB25343-6A52-4C2B-B757-25F3C5E37DFE}"/>
+                <a16:creationId xmlns:a16="http://schemas.microsoft.com/office/drawing/2014/main" id="{1741FC6D-FB35-4E32-B3B5-A69A4F9B7778}"/>
               </a:ext>
             </a:extLst>
           </p:cNvPr>
@@ -12241,7 +12241,7 @@
     </p:spTree>
     <p:extLst>
       <p:ext uri="{BB962C8B-B14F-4D97-AF65-F5344CB8AC3E}">
-        <p14:creationId xmlns:p14="http://schemas.microsoft.com/office/powerpoint/2010/main" val="1014553813"/>
+        <p14:creationId xmlns:p14="http://schemas.microsoft.com/office/powerpoint/2010/main" val="63937885"/>
       </p:ext>
     </p:extLst>
   </p:cSld>
@@ -12265,7 +12265,7 @@
           <p:cNvPr id="2" name="TextBox 1">
             <a:extLst xmlns:a="http://schemas.openxmlformats.org/drawingml/2006/main">
               <a:ext uri="{FF2B5EF4-FFF2-40B4-BE49-F238E27FC236}">
-                <a16:creationId xmlns:a16="http://schemas.microsoft.com/office/drawing/2014/main" id="{AAC8152B-3105-4812-A556-ABE10AC4BA2E}"/>
+                <a16:creationId xmlns:a16="http://schemas.microsoft.com/office/drawing/2014/main" id="{7344E825-FB54-4908-B012-F7B7A782D6D6}"/>
               </a:ext>
             </a:extLst>
           </p:cNvPr>
@@ -12312,7 +12312,7 @@
           <p:cNvPr id="3" name="TextBox 2">
             <a:extLst xmlns:a="http://schemas.openxmlformats.org/drawingml/2006/main">
               <a:ext uri="{FF2B5EF4-FFF2-40B4-BE49-F238E27FC236}">
-                <a16:creationId xmlns:a16="http://schemas.microsoft.com/office/drawing/2014/main" id="{61346E62-A451-4818-BD1F-4D2EE1589B16}"/>
+                <a16:creationId xmlns:a16="http://schemas.microsoft.com/office/drawing/2014/main" id="{63A48FE3-6324-4A48-844B-C37B8CD4EFAB}"/>
               </a:ext>
             </a:extLst>
           </p:cNvPr>
@@ -12359,7 +12359,7 @@
           <p:cNvPr id="4" name="Rectangle 3">
             <a:extLst xmlns:a="http://schemas.openxmlformats.org/drawingml/2006/main">
               <a:ext uri="{FF2B5EF4-FFF2-40B4-BE49-F238E27FC236}">
-                <a16:creationId xmlns:a16="http://schemas.microsoft.com/office/drawing/2014/main" id="{34D567E0-A90C-4C0A-99EE-C2DDBB4D46F8}"/>
+                <a16:creationId xmlns:a16="http://schemas.microsoft.com/office/drawing/2014/main" id="{F31EE200-442E-4445-AE37-2826C111BF51}"/>
               </a:ext>
             </a:extLst>
           </p:cNvPr>
@@ -12414,7 +12414,7 @@
           <p:cNvPr id="5" name="Rectangle 4">
             <a:extLst xmlns:a="http://schemas.openxmlformats.org/drawingml/2006/main">
               <a:ext uri="{FF2B5EF4-FFF2-40B4-BE49-F238E27FC236}">
-                <a16:creationId xmlns:a16="http://schemas.microsoft.com/office/drawing/2014/main" id="{1D098A03-3B5E-4E4C-AD70-1C453D7B583E}"/>
+                <a16:creationId xmlns:a16="http://schemas.microsoft.com/office/drawing/2014/main" id="{61907B74-1D63-4109-829B-B83E78C3D4A9}"/>
               </a:ext>
             </a:extLst>
           </p:cNvPr>
@@ -12469,7 +12469,7 @@
           <p:cNvPr id="6" name="TextBox 5">
             <a:extLst xmlns:a="http://schemas.openxmlformats.org/drawingml/2006/main">
               <a:ext uri="{FF2B5EF4-FFF2-40B4-BE49-F238E27FC236}">
-                <a16:creationId xmlns:a16="http://schemas.microsoft.com/office/drawing/2014/main" id="{59FF924F-3113-4A1C-A985-D41848A1BEB7}"/>
+                <a16:creationId xmlns:a16="http://schemas.microsoft.com/office/drawing/2014/main" id="{641B296C-1364-4FAC-8298-C8B8F8B0BD47}"/>
               </a:ext>
             </a:extLst>
           </p:cNvPr>
@@ -12506,7 +12506,7 @@
                 <a:ea typeface="Aptos"/>
                 <a:cs typeface="Aptos"/>
               </a:rPr>
-              <a:t>Independent public evidence summary · 2026.07.23-14 · 2026-07-22 · Sources: Evidence Register; EPO; WIPO</a:t>
+              <a:t>Independent public evidence summary · 2026.07.23-15 · 2026-07-22 · Sources: Evidence Register; EPO; WIPO</a:t>
             </a:r>
           </a:p>
         </p:txBody>
@@ -12516,7 +12516,7 @@
           <p:cNvPr id="7" name="TextBox 6">
             <a:extLst xmlns:a="http://schemas.openxmlformats.org/drawingml/2006/main">
               <a:ext uri="{FF2B5EF4-FFF2-40B4-BE49-F238E27FC236}">
-                <a16:creationId xmlns:a16="http://schemas.microsoft.com/office/drawing/2014/main" id="{75A620A2-55CC-4464-B689-B1C275A20CEE}"/>
+                <a16:creationId xmlns:a16="http://schemas.microsoft.com/office/drawing/2014/main" id="{A7A6D1CB-ADC5-4AF4-8BF1-E4DD024CE609}"/>
               </a:ext>
             </a:extLst>
           </p:cNvPr>
@@ -13003,7 +13003,7 @@
           <p:cNvPr id="9" name="TextBox 8">
             <a:extLst xmlns:a="http://schemas.openxmlformats.org/drawingml/2006/main">
               <a:ext uri="{FF2B5EF4-FFF2-40B4-BE49-F238E27FC236}">
-                <a16:creationId xmlns:a16="http://schemas.microsoft.com/office/drawing/2014/main" id="{400FAA96-CA23-41FE-9B1C-4467B45C89C1}"/>
+                <a16:creationId xmlns:a16="http://schemas.microsoft.com/office/drawing/2014/main" id="{3A02BF61-B98E-4134-BAD8-7A90955E0076}"/>
               </a:ext>
             </a:extLst>
           </p:cNvPr>
@@ -13048,7 +13048,7 @@
     </p:spTree>
     <p:extLst>
       <p:ext uri="{BB962C8B-B14F-4D97-AF65-F5344CB8AC3E}">
-        <p14:creationId xmlns:p14="http://schemas.microsoft.com/office/powerpoint/2010/main" val="876851996"/>
+        <p14:creationId xmlns:p14="http://schemas.microsoft.com/office/powerpoint/2010/main" val="703454727"/>
       </p:ext>
     </p:extLst>
   </p:cSld>
@@ -13072,7 +13072,7 @@
           <p:cNvPr id="2" name="TextBox 1">
             <a:extLst xmlns:a="http://schemas.openxmlformats.org/drawingml/2006/main">
               <a:ext uri="{FF2B5EF4-FFF2-40B4-BE49-F238E27FC236}">
-                <a16:creationId xmlns:a16="http://schemas.microsoft.com/office/drawing/2014/main" id="{0A6152D2-E258-4E8A-909F-8740A45089FA}"/>
+                <a16:creationId xmlns:a16="http://schemas.microsoft.com/office/drawing/2014/main" id="{98274926-634D-445E-AC29-2124AE2643A1}"/>
               </a:ext>
             </a:extLst>
           </p:cNvPr>
@@ -13119,7 +13119,7 @@
           <p:cNvPr id="3" name="TextBox 2">
             <a:extLst xmlns:a="http://schemas.openxmlformats.org/drawingml/2006/main">
               <a:ext uri="{FF2B5EF4-FFF2-40B4-BE49-F238E27FC236}">
-                <a16:creationId xmlns:a16="http://schemas.microsoft.com/office/drawing/2014/main" id="{1973F7BB-0722-49DE-8D6A-CCD5B4B5E3D1}"/>
+                <a16:creationId xmlns:a16="http://schemas.microsoft.com/office/drawing/2014/main" id="{42A36FB3-736E-43F8-9497-B55EE7EA552C}"/>
               </a:ext>
             </a:extLst>
           </p:cNvPr>
@@ -13166,7 +13166,7 @@
           <p:cNvPr id="4" name="Rectangle 3">
             <a:extLst xmlns:a="http://schemas.openxmlformats.org/drawingml/2006/main">
               <a:ext uri="{FF2B5EF4-FFF2-40B4-BE49-F238E27FC236}">
-                <a16:creationId xmlns:a16="http://schemas.microsoft.com/office/drawing/2014/main" id="{DFE1CAE3-AA84-46D0-9E8B-A5EC4B7FE6F4}"/>
+                <a16:creationId xmlns:a16="http://schemas.microsoft.com/office/drawing/2014/main" id="{927E2263-9EC8-411E-88D1-3D41BC97E206}"/>
               </a:ext>
             </a:extLst>
           </p:cNvPr>
@@ -13221,7 +13221,7 @@
           <p:cNvPr id="5" name="Rectangle 4">
             <a:extLst xmlns:a="http://schemas.openxmlformats.org/drawingml/2006/main">
               <a:ext uri="{FF2B5EF4-FFF2-40B4-BE49-F238E27FC236}">
-                <a16:creationId xmlns:a16="http://schemas.microsoft.com/office/drawing/2014/main" id="{30F7AA65-D8F6-44A7-9ECE-66538CCE8C22}"/>
+                <a16:creationId xmlns:a16="http://schemas.microsoft.com/office/drawing/2014/main" id="{920371B7-F972-438E-9917-3A5F4DA58416}"/>
               </a:ext>
             </a:extLst>
           </p:cNvPr>
@@ -13276,7 +13276,7 @@
           <p:cNvPr id="6" name="TextBox 5">
             <a:extLst xmlns:a="http://schemas.openxmlformats.org/drawingml/2006/main">
               <a:ext uri="{FF2B5EF4-FFF2-40B4-BE49-F238E27FC236}">
-                <a16:creationId xmlns:a16="http://schemas.microsoft.com/office/drawing/2014/main" id="{77369AD5-7231-4754-B32B-5C40372AF29C}"/>
+                <a16:creationId xmlns:a16="http://schemas.microsoft.com/office/drawing/2014/main" id="{D25792FE-26CE-4718-8FB4-7F4CC0B09384}"/>
               </a:ext>
             </a:extLst>
           </p:cNvPr>
@@ -13313,7 +13313,7 @@
                 <a:ea typeface="Aptos"/>
                 <a:cs typeface="Aptos"/>
               </a:rPr>
-              <a:t>Independent public evidence summary · 2026.07.23-14 · 2026-07-22 · Sources: Evidence Register</a:t>
+              <a:t>Independent public evidence summary · 2026.07.23-15 · 2026-07-22 · Sources: Evidence Register</a:t>
             </a:r>
           </a:p>
         </p:txBody>
@@ -13323,7 +13323,7 @@
           <p:cNvPr id="7" name="TextBox 6">
             <a:extLst xmlns:a="http://schemas.openxmlformats.org/drawingml/2006/main">
               <a:ext uri="{FF2B5EF4-FFF2-40B4-BE49-F238E27FC236}">
-                <a16:creationId xmlns:a16="http://schemas.microsoft.com/office/drawing/2014/main" id="{FECE6921-2D26-4056-8E83-AC2F4238D25F}"/>
+                <a16:creationId xmlns:a16="http://schemas.microsoft.com/office/drawing/2014/main" id="{BB013324-954F-423A-A243-9F5C427B5886}"/>
               </a:ext>
             </a:extLst>
           </p:cNvPr>
@@ -14056,7 +14056,7 @@
           <p:cNvPr id="9" name="TextBox 8">
             <a:extLst xmlns:a="http://schemas.openxmlformats.org/drawingml/2006/main">
               <a:ext uri="{FF2B5EF4-FFF2-40B4-BE49-F238E27FC236}">
-                <a16:creationId xmlns:a16="http://schemas.microsoft.com/office/drawing/2014/main" id="{1840E20F-3DFB-4998-8184-E893DA78711E}"/>
+                <a16:creationId xmlns:a16="http://schemas.microsoft.com/office/drawing/2014/main" id="{D5B49D2B-9CA2-4F18-A0A7-A38F188A3156}"/>
               </a:ext>
             </a:extLst>
           </p:cNvPr>
@@ -14101,7 +14101,7 @@
     </p:spTree>
     <p:extLst>
       <p:ext uri="{BB962C8B-B14F-4D97-AF65-F5344CB8AC3E}">
-        <p14:creationId xmlns:p14="http://schemas.microsoft.com/office/powerpoint/2010/main" val="479709993"/>
+        <p14:creationId xmlns:p14="http://schemas.microsoft.com/office/powerpoint/2010/main" val="463300707"/>
       </p:ext>
     </p:extLst>
   </p:cSld>

--- a/site/downloads/pixan-bank-deck-medium-en.pptx
+++ b/site/downloads/pixan-bank-deck-medium-en.pptx
@@ -2,24 +2,24 @@
 <file path=ppt/presentation.xml><?xml version="1.0" encoding="utf-8"?>
 <p:presentation xmlns:p="http://schemas.openxmlformats.org/presentationml/2006/main">
   <p:sldMasterIdLst>
-    <p:sldMasterId xmlns:r="http://schemas.openxmlformats.org/officeDocument/2006/relationships" id="2147483648" r:id="R7bd00cdc78fb4774"/>
+    <p:sldMasterId xmlns:r="http://schemas.openxmlformats.org/officeDocument/2006/relationships" id="2147483648" r:id="R0a4c9e29233a4ce8"/>
   </p:sldMasterIdLst>
   <p:notesMasterIdLst>
-    <p:notesMasterId xmlns:r="http://schemas.openxmlformats.org/officeDocument/2006/relationships" r:id="R45db546a411b449e"/>
+    <p:notesMasterId xmlns:r="http://schemas.openxmlformats.org/officeDocument/2006/relationships" r:id="R8030271d823c40e5"/>
   </p:notesMasterIdLst>
   <p:sldIdLst>
-    <p:sldId xmlns:r="http://schemas.openxmlformats.org/officeDocument/2006/relationships" id="256" r:id="R7cbe9b18231a4303"/>
-    <p:sldId xmlns:r="http://schemas.openxmlformats.org/officeDocument/2006/relationships" id="257" r:id="R8fa3906a058e4ac7"/>
-    <p:sldId xmlns:r="http://schemas.openxmlformats.org/officeDocument/2006/relationships" id="258" r:id="R3a39f7e348654d97"/>
-    <p:sldId xmlns:r="http://schemas.openxmlformats.org/officeDocument/2006/relationships" id="259" r:id="R9ac48e35eefe42b6"/>
-    <p:sldId xmlns:r="http://schemas.openxmlformats.org/officeDocument/2006/relationships" id="260" r:id="Rbe81582345e04c6e"/>
-    <p:sldId xmlns:r="http://schemas.openxmlformats.org/officeDocument/2006/relationships" id="261" r:id="R95d82665849e49ea"/>
-    <p:sldId xmlns:r="http://schemas.openxmlformats.org/officeDocument/2006/relationships" id="262" r:id="R19c3ce4487944c55"/>
-    <p:sldId xmlns:r="http://schemas.openxmlformats.org/officeDocument/2006/relationships" id="263" r:id="R49eb2ae880904ab3"/>
-    <p:sldId xmlns:r="http://schemas.openxmlformats.org/officeDocument/2006/relationships" id="264" r:id="R4e67af77151c434e"/>
-    <p:sldId xmlns:r="http://schemas.openxmlformats.org/officeDocument/2006/relationships" id="265" r:id="R87d9172290844f4a"/>
-    <p:sldId xmlns:r="http://schemas.openxmlformats.org/officeDocument/2006/relationships" id="266" r:id="Rbede7635fa2f40aa"/>
-    <p:sldId xmlns:r="http://schemas.openxmlformats.org/officeDocument/2006/relationships" id="267" r:id="R14bae8b35941467d"/>
+    <p:sldId xmlns:r="http://schemas.openxmlformats.org/officeDocument/2006/relationships" id="256" r:id="R2984835a59a0444c"/>
+    <p:sldId xmlns:r="http://schemas.openxmlformats.org/officeDocument/2006/relationships" id="257" r:id="Rd2439710b30549d6"/>
+    <p:sldId xmlns:r="http://schemas.openxmlformats.org/officeDocument/2006/relationships" id="258" r:id="Rf771ce95e34e4a29"/>
+    <p:sldId xmlns:r="http://schemas.openxmlformats.org/officeDocument/2006/relationships" id="259" r:id="Re7ce93a54c1247fb"/>
+    <p:sldId xmlns:r="http://schemas.openxmlformats.org/officeDocument/2006/relationships" id="260" r:id="R2d390b1d99a94ac1"/>
+    <p:sldId xmlns:r="http://schemas.openxmlformats.org/officeDocument/2006/relationships" id="261" r:id="R4c15c8be941f4a3a"/>
+    <p:sldId xmlns:r="http://schemas.openxmlformats.org/officeDocument/2006/relationships" id="262" r:id="R468432cb2c044b5a"/>
+    <p:sldId xmlns:r="http://schemas.openxmlformats.org/officeDocument/2006/relationships" id="263" r:id="Rac015fba173d48ef"/>
+    <p:sldId xmlns:r="http://schemas.openxmlformats.org/officeDocument/2006/relationships" id="264" r:id="R5b476b66fb5d475b"/>
+    <p:sldId xmlns:r="http://schemas.openxmlformats.org/officeDocument/2006/relationships" id="265" r:id="Rcf099f31e1484bb7"/>
+    <p:sldId xmlns:r="http://schemas.openxmlformats.org/officeDocument/2006/relationships" id="266" r:id="R5012779f7df844d5"/>
+    <p:sldId xmlns:r="http://schemas.openxmlformats.org/officeDocument/2006/relationships" id="267" r:id="Rd5cde795cba84000"/>
   </p:sldIdLst>
   <p:sldSz cx="12191999" cy="6858000"/>
   <p:notesSz cx="6858000" cy="9144000"/>
@@ -1340,7 +1340,7 @@
           <p:cNvPr id="2" name="Title 1">
             <a:extLst xmlns:a="http://schemas.openxmlformats.org/drawingml/2006/main">
               <a:ext uri="{FF2B5EF4-FFF2-40B4-BE49-F238E27FC236}">
-                <a16:creationId xmlns:a16="http://schemas.microsoft.com/office/drawing/2014/main" id="{893CB071-FDB6-4E2F-98EC-81045704E049}"/>
+                <a16:creationId xmlns:a16="http://schemas.microsoft.com/office/drawing/2014/main" id="{48542E43-870A-4119-AC32-A98D605A3BBF}"/>
               </a:ext>
             </a:extLst>
           </p:cNvPr>
@@ -1372,7 +1372,7 @@
           <p:cNvPr id="3" name="Subtitle 2">
             <a:extLst xmlns:a="http://schemas.openxmlformats.org/drawingml/2006/main">
               <a:ext uri="{FF2B5EF4-FFF2-40B4-BE49-F238E27FC236}">
-                <a16:creationId xmlns:a16="http://schemas.microsoft.com/office/drawing/2014/main" id="{CD736D49-93B3-4CC3-B30D-17F781B5CF3F}"/>
+                <a16:creationId xmlns:a16="http://schemas.microsoft.com/office/drawing/2014/main" id="{E43DE057-77A9-4C23-94A2-6F8D2DBF807E}"/>
               </a:ext>
             </a:extLst>
           </p:cNvPr>
@@ -1495,7 +1495,7 @@
           <p:cNvPr id="4" name="Date Placeholder 3">
             <a:extLst xmlns:a="http://schemas.openxmlformats.org/drawingml/2006/main">
               <a:ext uri="{FF2B5EF4-FFF2-40B4-BE49-F238E27FC236}">
-                <a16:creationId xmlns:a16="http://schemas.microsoft.com/office/drawing/2014/main" id="{F282E358-67F2-40A9-85C9-25225A3A5587}"/>
+                <a16:creationId xmlns:a16="http://schemas.microsoft.com/office/drawing/2014/main" id="{386F0F38-AEA3-4D0F-8B1B-B96B10E5CCFB}"/>
               </a:ext>
             </a:extLst>
           </p:cNvPr>
@@ -1522,7 +1522,7 @@
           <p:cNvPr id="5" name="Footer Placeholder 4">
             <a:extLst xmlns:a="http://schemas.openxmlformats.org/drawingml/2006/main">
               <a:ext uri="{FF2B5EF4-FFF2-40B4-BE49-F238E27FC236}">
-                <a16:creationId xmlns:a16="http://schemas.microsoft.com/office/drawing/2014/main" id="{867817E3-FC28-4F3C-BF17-4637578CF335}"/>
+                <a16:creationId xmlns:a16="http://schemas.microsoft.com/office/drawing/2014/main" id="{7468D109-2C8D-4208-A4A0-FA0D8AB70B53}"/>
               </a:ext>
             </a:extLst>
           </p:cNvPr>
@@ -1545,7 +1545,7 @@
           <p:cNvPr id="6" name="Slide Number Placeholder 5">
             <a:extLst xmlns:a="http://schemas.openxmlformats.org/drawingml/2006/main">
               <a:ext uri="{FF2B5EF4-FFF2-40B4-BE49-F238E27FC236}">
-                <a16:creationId xmlns:a16="http://schemas.microsoft.com/office/drawing/2014/main" id="{AD9A1783-C4C7-412A-8DD1-E5DF2AEFAF17}"/>
+                <a16:creationId xmlns:a16="http://schemas.microsoft.com/office/drawing/2014/main" id="{BF51CBD0-5845-44C6-A16B-538F4470C5D2}"/>
               </a:ext>
             </a:extLst>
           </p:cNvPr>
@@ -1589,7 +1589,7 @@
           <p:cNvPr id="2" name="Title 1">
             <a:extLst xmlns:a="http://schemas.openxmlformats.org/drawingml/2006/main">
               <a:ext uri="{FF2B5EF4-FFF2-40B4-BE49-F238E27FC236}">
-                <a16:creationId xmlns:a16="http://schemas.microsoft.com/office/drawing/2014/main" id="{18D01BE5-FB15-438C-9CA7-2F5388109DDB}"/>
+                <a16:creationId xmlns:a16="http://schemas.microsoft.com/office/drawing/2014/main" id="{4CD635DC-88C8-45C9-9285-71D213DCBACF}"/>
               </a:ext>
             </a:extLst>
           </p:cNvPr>
@@ -1616,7 +1616,7 @@
           <p:cNvPr id="3" name="Vertical Text Placeholder 2">
             <a:extLst xmlns:a="http://schemas.openxmlformats.org/drawingml/2006/main">
               <a:ext uri="{FF2B5EF4-FFF2-40B4-BE49-F238E27FC236}">
-                <a16:creationId xmlns:a16="http://schemas.microsoft.com/office/drawing/2014/main" id="{6302645D-E086-4EB8-B6E8-2F050C60A313}"/>
+                <a16:creationId xmlns:a16="http://schemas.microsoft.com/office/drawing/2014/main" id="{3A3C42E3-81D7-4893-A8FC-94788595F230}"/>
               </a:ext>
             </a:extLst>
           </p:cNvPr>
@@ -1678,7 +1678,7 @@
           <p:cNvPr id="4" name="Date Placeholder 3">
             <a:extLst xmlns:a="http://schemas.openxmlformats.org/drawingml/2006/main">
               <a:ext uri="{FF2B5EF4-FFF2-40B4-BE49-F238E27FC236}">
-                <a16:creationId xmlns:a16="http://schemas.microsoft.com/office/drawing/2014/main" id="{B01520EC-F97E-42B2-9192-E3225118A653}"/>
+                <a16:creationId xmlns:a16="http://schemas.microsoft.com/office/drawing/2014/main" id="{61DFE2E6-D80C-43F0-9B8B-79DD5089BB6E}"/>
               </a:ext>
             </a:extLst>
           </p:cNvPr>
@@ -1705,7 +1705,7 @@
           <p:cNvPr id="5" name="Footer Placeholder 4">
             <a:extLst xmlns:a="http://schemas.openxmlformats.org/drawingml/2006/main">
               <a:ext uri="{FF2B5EF4-FFF2-40B4-BE49-F238E27FC236}">
-                <a16:creationId xmlns:a16="http://schemas.microsoft.com/office/drawing/2014/main" id="{DCB1A74A-41D6-4E91-A463-83897AA34AAA}"/>
+                <a16:creationId xmlns:a16="http://schemas.microsoft.com/office/drawing/2014/main" id="{7AD3D0E3-B24F-4A23-8420-4572DEB8AE4B}"/>
               </a:ext>
             </a:extLst>
           </p:cNvPr>
@@ -1728,7 +1728,7 @@
           <p:cNvPr id="6" name="Slide Number Placeholder 5">
             <a:extLst xmlns:a="http://schemas.openxmlformats.org/drawingml/2006/main">
               <a:ext uri="{FF2B5EF4-FFF2-40B4-BE49-F238E27FC236}">
-                <a16:creationId xmlns:a16="http://schemas.microsoft.com/office/drawing/2014/main" id="{005E11FD-1099-45E6-A1CF-5710CFDFA047}"/>
+                <a16:creationId xmlns:a16="http://schemas.microsoft.com/office/drawing/2014/main" id="{624AC123-25DA-405C-A3E3-AF356A48DFD1}"/>
               </a:ext>
             </a:extLst>
           </p:cNvPr>
@@ -1772,7 +1772,7 @@
           <p:cNvPr id="2" name="Vertical Title 1">
             <a:extLst xmlns:a="http://schemas.openxmlformats.org/drawingml/2006/main">
               <a:ext uri="{FF2B5EF4-FFF2-40B4-BE49-F238E27FC236}">
-                <a16:creationId xmlns:a16="http://schemas.microsoft.com/office/drawing/2014/main" id="{27DEC973-C504-4801-92D2-090B7A7C7B28}"/>
+                <a16:creationId xmlns:a16="http://schemas.microsoft.com/office/drawing/2014/main" id="{E62FFE20-A19A-4200-806D-23193456D6D8}"/>
               </a:ext>
             </a:extLst>
           </p:cNvPr>
@@ -1804,7 +1804,7 @@
           <p:cNvPr id="3" name="Vertical Text Placeholder 2">
             <a:extLst xmlns:a="http://schemas.openxmlformats.org/drawingml/2006/main">
               <a:ext uri="{FF2B5EF4-FFF2-40B4-BE49-F238E27FC236}">
-                <a16:creationId xmlns:a16="http://schemas.microsoft.com/office/drawing/2014/main" id="{59E6260F-E3F8-4E26-95BE-BA7A712EB625}"/>
+                <a16:creationId xmlns:a16="http://schemas.microsoft.com/office/drawing/2014/main" id="{D9CA979B-4836-4349-825B-3D63EC0EEAC1}"/>
               </a:ext>
             </a:extLst>
           </p:cNvPr>
@@ -1871,7 +1871,7 @@
           <p:cNvPr id="4" name="Date Placeholder 3">
             <a:extLst xmlns:a="http://schemas.openxmlformats.org/drawingml/2006/main">
               <a:ext uri="{FF2B5EF4-FFF2-40B4-BE49-F238E27FC236}">
-                <a16:creationId xmlns:a16="http://schemas.microsoft.com/office/drawing/2014/main" id="{D11CB64D-B64E-449B-8837-B18EDD57052C}"/>
+                <a16:creationId xmlns:a16="http://schemas.microsoft.com/office/drawing/2014/main" id="{1FA7403A-A165-48F0-83DF-02C325DDA727}"/>
               </a:ext>
             </a:extLst>
           </p:cNvPr>
@@ -1898,7 +1898,7 @@
           <p:cNvPr id="5" name="Footer Placeholder 4">
             <a:extLst xmlns:a="http://schemas.openxmlformats.org/drawingml/2006/main">
               <a:ext uri="{FF2B5EF4-FFF2-40B4-BE49-F238E27FC236}">
-                <a16:creationId xmlns:a16="http://schemas.microsoft.com/office/drawing/2014/main" id="{0DC3788C-4BEF-4BBE-9215-BE33EF01A145}"/>
+                <a16:creationId xmlns:a16="http://schemas.microsoft.com/office/drawing/2014/main" id="{0CCE896E-F78A-4341-B759-ECD60F8B5B7A}"/>
               </a:ext>
             </a:extLst>
           </p:cNvPr>
@@ -1921,7 +1921,7 @@
           <p:cNvPr id="6" name="Slide Number Placeholder 5">
             <a:extLst xmlns:a="http://schemas.openxmlformats.org/drawingml/2006/main">
               <a:ext uri="{FF2B5EF4-FFF2-40B4-BE49-F238E27FC236}">
-                <a16:creationId xmlns:a16="http://schemas.microsoft.com/office/drawing/2014/main" id="{53BDD443-6E8A-41A5-A1C5-4E5365740FAA}"/>
+                <a16:creationId xmlns:a16="http://schemas.microsoft.com/office/drawing/2014/main" id="{57AC4EA1-6A33-49DE-9E83-48E2D4135392}"/>
               </a:ext>
             </a:extLst>
           </p:cNvPr>
@@ -1965,7 +1965,7 @@
           <p:cNvPr id="2" name="Title 1">
             <a:extLst xmlns:a="http://schemas.openxmlformats.org/drawingml/2006/main">
               <a:ext uri="{FF2B5EF4-FFF2-40B4-BE49-F238E27FC236}">
-                <a16:creationId xmlns:a16="http://schemas.microsoft.com/office/drawing/2014/main" id="{3B1E3EE1-03C9-4D93-AA52-222A18DB9FC7}"/>
+                <a16:creationId xmlns:a16="http://schemas.microsoft.com/office/drawing/2014/main" id="{2DC112C7-E951-4582-AFE1-BE6894B682CD}"/>
               </a:ext>
             </a:extLst>
           </p:cNvPr>
@@ -1992,7 +1992,7 @@
           <p:cNvPr id="3" name="Content Placeholder 2">
             <a:extLst xmlns:a="http://schemas.openxmlformats.org/drawingml/2006/main">
               <a:ext uri="{FF2B5EF4-FFF2-40B4-BE49-F238E27FC236}">
-                <a16:creationId xmlns:a16="http://schemas.microsoft.com/office/drawing/2014/main" id="{4DD16187-EFF5-4164-B2DE-51CE4F0E8C27}"/>
+                <a16:creationId xmlns:a16="http://schemas.microsoft.com/office/drawing/2014/main" id="{7829799A-08B8-4ECA-8D27-FE2D361DC217}"/>
               </a:ext>
             </a:extLst>
           </p:cNvPr>
@@ -2054,7 +2054,7 @@
           <p:cNvPr id="4" name="Date Placeholder 3">
             <a:extLst xmlns:a="http://schemas.openxmlformats.org/drawingml/2006/main">
               <a:ext uri="{FF2B5EF4-FFF2-40B4-BE49-F238E27FC236}">
-                <a16:creationId xmlns:a16="http://schemas.microsoft.com/office/drawing/2014/main" id="{A367902C-682F-4ED4-A966-05332B939665}"/>
+                <a16:creationId xmlns:a16="http://schemas.microsoft.com/office/drawing/2014/main" id="{EBE8889D-E085-4058-A1B1-00EF6C8BA84E}"/>
               </a:ext>
             </a:extLst>
           </p:cNvPr>
@@ -2081,7 +2081,7 @@
           <p:cNvPr id="5" name="Footer Placeholder 4">
             <a:extLst xmlns:a="http://schemas.openxmlformats.org/drawingml/2006/main">
               <a:ext uri="{FF2B5EF4-FFF2-40B4-BE49-F238E27FC236}">
-                <a16:creationId xmlns:a16="http://schemas.microsoft.com/office/drawing/2014/main" id="{43926E5E-ED8B-49FB-B19C-2AB827EA04FF}"/>
+                <a16:creationId xmlns:a16="http://schemas.microsoft.com/office/drawing/2014/main" id="{E8FC4CE7-FA92-4A4A-8D7C-F167AA392A6A}"/>
               </a:ext>
             </a:extLst>
           </p:cNvPr>
@@ -2104,7 +2104,7 @@
           <p:cNvPr id="6" name="Slide Number Placeholder 5">
             <a:extLst xmlns:a="http://schemas.openxmlformats.org/drawingml/2006/main">
               <a:ext uri="{FF2B5EF4-FFF2-40B4-BE49-F238E27FC236}">
-                <a16:creationId xmlns:a16="http://schemas.microsoft.com/office/drawing/2014/main" id="{0A812921-0AEF-48E0-B42C-E3A5BAC70016}"/>
+                <a16:creationId xmlns:a16="http://schemas.microsoft.com/office/drawing/2014/main" id="{6060C5B4-92F3-46CD-8E91-41E623EA562B}"/>
               </a:ext>
             </a:extLst>
           </p:cNvPr>
@@ -2148,7 +2148,7 @@
           <p:cNvPr id="2" name="Title 1">
             <a:extLst xmlns:a="http://schemas.openxmlformats.org/drawingml/2006/main">
               <a:ext uri="{FF2B5EF4-FFF2-40B4-BE49-F238E27FC236}">
-                <a16:creationId xmlns:a16="http://schemas.microsoft.com/office/drawing/2014/main" id="{CCA0482C-04E2-486B-B13C-060B550770A6}"/>
+                <a16:creationId xmlns:a16="http://schemas.microsoft.com/office/drawing/2014/main" id="{C2B3C825-F72B-4CC3-BAF4-F2A6DF0E88F3}"/>
               </a:ext>
             </a:extLst>
           </p:cNvPr>
@@ -2185,7 +2185,7 @@
           <p:cNvPr id="3" name="Text Placeholder 2">
             <a:extLst xmlns:a="http://schemas.openxmlformats.org/drawingml/2006/main">
               <a:ext uri="{FF2B5EF4-FFF2-40B4-BE49-F238E27FC236}">
-                <a16:creationId xmlns:a16="http://schemas.microsoft.com/office/drawing/2014/main" id="{860ABC3B-9C69-45C6-8B8E-BD54D70B99A0}"/>
+                <a16:creationId xmlns:a16="http://schemas.microsoft.com/office/drawing/2014/main" id="{C2D76AA0-CFBF-4C8F-B18D-F403C9D2CE8E}"/>
               </a:ext>
             </a:extLst>
           </p:cNvPr>
@@ -2311,7 +2311,7 @@
           <p:cNvPr id="4" name="Date Placeholder 3">
             <a:extLst xmlns:a="http://schemas.openxmlformats.org/drawingml/2006/main">
               <a:ext uri="{FF2B5EF4-FFF2-40B4-BE49-F238E27FC236}">
-                <a16:creationId xmlns:a16="http://schemas.microsoft.com/office/drawing/2014/main" id="{CADCC661-4F7E-41EA-B3CB-C61C1B82F296}"/>
+                <a16:creationId xmlns:a16="http://schemas.microsoft.com/office/drawing/2014/main" id="{617311D0-6FD6-4E07-89D8-A1710D0D438B}"/>
               </a:ext>
             </a:extLst>
           </p:cNvPr>
@@ -2338,7 +2338,7 @@
           <p:cNvPr id="5" name="Footer Placeholder 4">
             <a:extLst xmlns:a="http://schemas.openxmlformats.org/drawingml/2006/main">
               <a:ext uri="{FF2B5EF4-FFF2-40B4-BE49-F238E27FC236}">
-                <a16:creationId xmlns:a16="http://schemas.microsoft.com/office/drawing/2014/main" id="{FBC98F47-1A00-4D2A-BF1A-A32FDD417C00}"/>
+                <a16:creationId xmlns:a16="http://schemas.microsoft.com/office/drawing/2014/main" id="{942A53A4-9DB9-4E51-8D47-3C20E235EAD2}"/>
               </a:ext>
             </a:extLst>
           </p:cNvPr>
@@ -2361,7 +2361,7 @@
           <p:cNvPr id="6" name="Slide Number Placeholder 5">
             <a:extLst xmlns:a="http://schemas.openxmlformats.org/drawingml/2006/main">
               <a:ext uri="{FF2B5EF4-FFF2-40B4-BE49-F238E27FC236}">
-                <a16:creationId xmlns:a16="http://schemas.microsoft.com/office/drawing/2014/main" id="{F098D2B4-1832-4449-85D8-885A657414FB}"/>
+                <a16:creationId xmlns:a16="http://schemas.microsoft.com/office/drawing/2014/main" id="{993ECA05-EE24-443D-B7FA-2F7F33508829}"/>
               </a:ext>
             </a:extLst>
           </p:cNvPr>
@@ -2405,7 +2405,7 @@
           <p:cNvPr id="2" name="Title 1">
             <a:extLst xmlns:a="http://schemas.openxmlformats.org/drawingml/2006/main">
               <a:ext uri="{FF2B5EF4-FFF2-40B4-BE49-F238E27FC236}">
-                <a16:creationId xmlns:a16="http://schemas.microsoft.com/office/drawing/2014/main" id="{83853B09-51CA-4263-9BFF-5D37901468D5}"/>
+                <a16:creationId xmlns:a16="http://schemas.microsoft.com/office/drawing/2014/main" id="{8E758570-FF82-4D3C-8A9C-5CC0BDB35DEB}"/>
               </a:ext>
             </a:extLst>
           </p:cNvPr>
@@ -2432,7 +2432,7 @@
           <p:cNvPr id="3" name="Content Placeholder 2">
             <a:extLst xmlns:a="http://schemas.openxmlformats.org/drawingml/2006/main">
               <a:ext uri="{FF2B5EF4-FFF2-40B4-BE49-F238E27FC236}">
-                <a16:creationId xmlns:a16="http://schemas.microsoft.com/office/drawing/2014/main" id="{E856FD38-E05E-477A-862D-74223F71AE16}"/>
+                <a16:creationId xmlns:a16="http://schemas.microsoft.com/office/drawing/2014/main" id="{CEFBDB98-E31A-48E7-8908-9E88BE154BB3}"/>
               </a:ext>
             </a:extLst>
           </p:cNvPr>
@@ -2536,7 +2536,7 @@
           <p:cNvPr id="4" name="Content Placeholder 3">
             <a:extLst xmlns:a="http://schemas.openxmlformats.org/drawingml/2006/main">
               <a:ext uri="{FF2B5EF4-FFF2-40B4-BE49-F238E27FC236}">
-                <a16:creationId xmlns:a16="http://schemas.microsoft.com/office/drawing/2014/main" id="{0E9FF4D9-0316-4272-91E2-CA0B297F727C}"/>
+                <a16:creationId xmlns:a16="http://schemas.microsoft.com/office/drawing/2014/main" id="{4E9D041A-9555-4727-81B8-987169AF4CA1}"/>
               </a:ext>
             </a:extLst>
           </p:cNvPr>
@@ -2640,7 +2640,7 @@
           <p:cNvPr id="5" name="Date Placeholder 4">
             <a:extLst xmlns:a="http://schemas.openxmlformats.org/drawingml/2006/main">
               <a:ext uri="{FF2B5EF4-FFF2-40B4-BE49-F238E27FC236}">
-                <a16:creationId xmlns:a16="http://schemas.microsoft.com/office/drawing/2014/main" id="{277D405F-6575-4400-876C-AF1DB1A752EF}"/>
+                <a16:creationId xmlns:a16="http://schemas.microsoft.com/office/drawing/2014/main" id="{B7B13559-C6BA-467F-803C-0E57D8EA4561}"/>
               </a:ext>
             </a:extLst>
           </p:cNvPr>
@@ -2667,7 +2667,7 @@
           <p:cNvPr id="6" name="Footer Placeholder 5">
             <a:extLst xmlns:a="http://schemas.openxmlformats.org/drawingml/2006/main">
               <a:ext uri="{FF2B5EF4-FFF2-40B4-BE49-F238E27FC236}">
-                <a16:creationId xmlns:a16="http://schemas.microsoft.com/office/drawing/2014/main" id="{4C507100-A8D9-4F36-9894-374EAA5A614D}"/>
+                <a16:creationId xmlns:a16="http://schemas.microsoft.com/office/drawing/2014/main" id="{D8FC7F0D-FE05-411D-AA50-D747351F22A6}"/>
               </a:ext>
             </a:extLst>
           </p:cNvPr>
@@ -2690,7 +2690,7 @@
           <p:cNvPr id="7" name="Slide Number Placeholder 6">
             <a:extLst xmlns:a="http://schemas.openxmlformats.org/drawingml/2006/main">
               <a:ext uri="{FF2B5EF4-FFF2-40B4-BE49-F238E27FC236}">
-                <a16:creationId xmlns:a16="http://schemas.microsoft.com/office/drawing/2014/main" id="{0283D28C-2B53-4344-97B0-E2DB6CAE4341}"/>
+                <a16:creationId xmlns:a16="http://schemas.microsoft.com/office/drawing/2014/main" id="{47701F5D-F89C-4375-B233-529E0E8B474D}"/>
               </a:ext>
             </a:extLst>
           </p:cNvPr>
@@ -2734,7 +2734,7 @@
           <p:cNvPr id="2" name="Title 1">
             <a:extLst xmlns:a="http://schemas.openxmlformats.org/drawingml/2006/main">
               <a:ext uri="{FF2B5EF4-FFF2-40B4-BE49-F238E27FC236}">
-                <a16:creationId xmlns:a16="http://schemas.microsoft.com/office/drawing/2014/main" id="{34466423-5927-4496-BD6F-972CF7A88821}"/>
+                <a16:creationId xmlns:a16="http://schemas.microsoft.com/office/drawing/2014/main" id="{C1A43C1C-BA95-4249-9253-C84F9EF577C1}"/>
               </a:ext>
             </a:extLst>
           </p:cNvPr>
@@ -2766,7 +2766,7 @@
           <p:cNvPr id="3" name="Text Placeholder 2">
             <a:extLst xmlns:a="http://schemas.openxmlformats.org/drawingml/2006/main">
               <a:ext uri="{FF2B5EF4-FFF2-40B4-BE49-F238E27FC236}">
-                <a16:creationId xmlns:a16="http://schemas.microsoft.com/office/drawing/2014/main" id="{66356C0A-671D-4396-B553-7C3797FEF98D}"/>
+                <a16:creationId xmlns:a16="http://schemas.microsoft.com/office/drawing/2014/main" id="{03DAD9D4-5592-4D3E-BC16-5B1C9D80307F}"/>
               </a:ext>
             </a:extLst>
           </p:cNvPr>
@@ -2838,7 +2838,7 @@
           <p:cNvPr id="4" name="Content Placeholder 3">
             <a:extLst xmlns:a="http://schemas.openxmlformats.org/drawingml/2006/main">
               <a:ext uri="{FF2B5EF4-FFF2-40B4-BE49-F238E27FC236}">
-                <a16:creationId xmlns:a16="http://schemas.microsoft.com/office/drawing/2014/main" id="{8173C583-5DE6-472E-B401-B7560348736B}"/>
+                <a16:creationId xmlns:a16="http://schemas.microsoft.com/office/drawing/2014/main" id="{C950AE90-242B-4F4B-A0C3-31EBD4087AF9}"/>
               </a:ext>
             </a:extLst>
           </p:cNvPr>
@@ -2942,7 +2942,7 @@
           <p:cNvPr id="5" name="Text Placeholder 4">
             <a:extLst xmlns:a="http://schemas.openxmlformats.org/drawingml/2006/main">
               <a:ext uri="{FF2B5EF4-FFF2-40B4-BE49-F238E27FC236}">
-                <a16:creationId xmlns:a16="http://schemas.microsoft.com/office/drawing/2014/main" id="{297FA1FE-4D93-41B8-ABE9-464A0B5A9CF3}"/>
+                <a16:creationId xmlns:a16="http://schemas.microsoft.com/office/drawing/2014/main" id="{1E5A82F1-CA6D-4141-8664-E406FE10A94C}"/>
               </a:ext>
             </a:extLst>
           </p:cNvPr>
@@ -3014,7 +3014,7 @@
           <p:cNvPr id="6" name="Content Placeholder 5">
             <a:extLst xmlns:a="http://schemas.openxmlformats.org/drawingml/2006/main">
               <a:ext uri="{FF2B5EF4-FFF2-40B4-BE49-F238E27FC236}">
-                <a16:creationId xmlns:a16="http://schemas.microsoft.com/office/drawing/2014/main" id="{5CE7D14F-E529-4A6E-9024-B7F3B1DD8934}"/>
+                <a16:creationId xmlns:a16="http://schemas.microsoft.com/office/drawing/2014/main" id="{99587B93-5C2A-48AF-A88F-C1A66AEF14DC}"/>
               </a:ext>
             </a:extLst>
           </p:cNvPr>
@@ -3118,7 +3118,7 @@
           <p:cNvPr id="7" name="Date Placeholder 6">
             <a:extLst xmlns:a="http://schemas.openxmlformats.org/drawingml/2006/main">
               <a:ext uri="{FF2B5EF4-FFF2-40B4-BE49-F238E27FC236}">
-                <a16:creationId xmlns:a16="http://schemas.microsoft.com/office/drawing/2014/main" id="{4B1FDE28-B13B-42D1-951D-435AE603160E}"/>
+                <a16:creationId xmlns:a16="http://schemas.microsoft.com/office/drawing/2014/main" id="{AE6560AC-91ED-43B4-86FA-9FD4C5127D6F}"/>
               </a:ext>
             </a:extLst>
           </p:cNvPr>
@@ -3145,7 +3145,7 @@
           <p:cNvPr id="8" name="Footer Placeholder 7">
             <a:extLst xmlns:a="http://schemas.openxmlformats.org/drawingml/2006/main">
               <a:ext uri="{FF2B5EF4-FFF2-40B4-BE49-F238E27FC236}">
-                <a16:creationId xmlns:a16="http://schemas.microsoft.com/office/drawing/2014/main" id="{89FC15E3-F15F-4619-80AE-3120384AA230}"/>
+                <a16:creationId xmlns:a16="http://schemas.microsoft.com/office/drawing/2014/main" id="{96F285EB-E478-4C0F-8BE0-4E46B0A28FC2}"/>
               </a:ext>
             </a:extLst>
           </p:cNvPr>
@@ -3168,7 +3168,7 @@
           <p:cNvPr id="9" name="Slide Number Placeholder 8">
             <a:extLst xmlns:a="http://schemas.openxmlformats.org/drawingml/2006/main">
               <a:ext uri="{FF2B5EF4-FFF2-40B4-BE49-F238E27FC236}">
-                <a16:creationId xmlns:a16="http://schemas.microsoft.com/office/drawing/2014/main" id="{3BE8D78B-35F9-4C05-A87D-B096BF34DFC9}"/>
+                <a16:creationId xmlns:a16="http://schemas.microsoft.com/office/drawing/2014/main" id="{29F109BA-8CEB-4659-B81B-BFEA1949317D}"/>
               </a:ext>
             </a:extLst>
           </p:cNvPr>
@@ -3212,7 +3212,7 @@
           <p:cNvPr id="2" name="Title 1">
             <a:extLst xmlns:a="http://schemas.openxmlformats.org/drawingml/2006/main">
               <a:ext uri="{FF2B5EF4-FFF2-40B4-BE49-F238E27FC236}">
-                <a16:creationId xmlns:a16="http://schemas.microsoft.com/office/drawing/2014/main" id="{5E97600C-DE7D-4A30-A543-B233D95E7E9F}"/>
+                <a16:creationId xmlns:a16="http://schemas.microsoft.com/office/drawing/2014/main" id="{763EE53E-210B-4F65-B64B-2215F2CC78E2}"/>
               </a:ext>
             </a:extLst>
           </p:cNvPr>
@@ -3239,7 +3239,7 @@
           <p:cNvPr id="3" name="Date Placeholder 2">
             <a:extLst xmlns:a="http://schemas.openxmlformats.org/drawingml/2006/main">
               <a:ext uri="{FF2B5EF4-FFF2-40B4-BE49-F238E27FC236}">
-                <a16:creationId xmlns:a16="http://schemas.microsoft.com/office/drawing/2014/main" id="{16750DD8-164B-4C17-B059-52F06CA56C29}"/>
+                <a16:creationId xmlns:a16="http://schemas.microsoft.com/office/drawing/2014/main" id="{8EEABA0B-839B-4629-B748-0FA542B27193}"/>
               </a:ext>
             </a:extLst>
           </p:cNvPr>
@@ -3266,7 +3266,7 @@
           <p:cNvPr id="4" name="Footer Placeholder 3">
             <a:extLst xmlns:a="http://schemas.openxmlformats.org/drawingml/2006/main">
               <a:ext uri="{FF2B5EF4-FFF2-40B4-BE49-F238E27FC236}">
-                <a16:creationId xmlns:a16="http://schemas.microsoft.com/office/drawing/2014/main" id="{3A3E9E09-FE13-4A87-A3F1-234D5362683D}"/>
+                <a16:creationId xmlns:a16="http://schemas.microsoft.com/office/drawing/2014/main" id="{DE38C822-9229-47EF-9F62-0D2A0AF3E281}"/>
               </a:ext>
             </a:extLst>
           </p:cNvPr>
@@ -3289,7 +3289,7 @@
           <p:cNvPr id="5" name="Slide Number Placeholder 4">
             <a:extLst xmlns:a="http://schemas.openxmlformats.org/drawingml/2006/main">
               <a:ext uri="{FF2B5EF4-FFF2-40B4-BE49-F238E27FC236}">
-                <a16:creationId xmlns:a16="http://schemas.microsoft.com/office/drawing/2014/main" id="{D43A6FA9-AC4B-423F-9D80-D83EDD956606}"/>
+                <a16:creationId xmlns:a16="http://schemas.microsoft.com/office/drawing/2014/main" id="{093453C3-9E42-406F-A0AF-0DC5CA575F37}"/>
               </a:ext>
             </a:extLst>
           </p:cNvPr>
@@ -3333,7 +3333,7 @@
           <p:cNvPr id="2" name="Date Placeholder 1">
             <a:extLst xmlns:a="http://schemas.openxmlformats.org/drawingml/2006/main">
               <a:ext uri="{FF2B5EF4-FFF2-40B4-BE49-F238E27FC236}">
-                <a16:creationId xmlns:a16="http://schemas.microsoft.com/office/drawing/2014/main" id="{917760BA-429F-4E35-A403-7B332267DF32}"/>
+                <a16:creationId xmlns:a16="http://schemas.microsoft.com/office/drawing/2014/main" id="{777CA3A6-1AAA-41D1-B502-5F0C441748B2}"/>
               </a:ext>
             </a:extLst>
           </p:cNvPr>
@@ -3360,7 +3360,7 @@
           <p:cNvPr id="3" name="Footer Placeholder 2">
             <a:extLst xmlns:a="http://schemas.openxmlformats.org/drawingml/2006/main">
               <a:ext uri="{FF2B5EF4-FFF2-40B4-BE49-F238E27FC236}">
-                <a16:creationId xmlns:a16="http://schemas.microsoft.com/office/drawing/2014/main" id="{A11C0052-60A1-4D53-96E3-0D634BFD291E}"/>
+                <a16:creationId xmlns:a16="http://schemas.microsoft.com/office/drawing/2014/main" id="{DF6FF40B-A51F-4263-A098-45208C320181}"/>
               </a:ext>
             </a:extLst>
           </p:cNvPr>
@@ -3383,7 +3383,7 @@
           <p:cNvPr id="4" name="Slide Number Placeholder 3">
             <a:extLst xmlns:a="http://schemas.openxmlformats.org/drawingml/2006/main">
               <a:ext uri="{FF2B5EF4-FFF2-40B4-BE49-F238E27FC236}">
-                <a16:creationId xmlns:a16="http://schemas.microsoft.com/office/drawing/2014/main" id="{186C781F-6855-44D2-9439-A2623A500383}"/>
+                <a16:creationId xmlns:a16="http://schemas.microsoft.com/office/drawing/2014/main" id="{D717337A-4518-40E7-A6CC-122E7624B1C0}"/>
               </a:ext>
             </a:extLst>
           </p:cNvPr>
@@ -3427,7 +3427,7 @@
           <p:cNvPr id="2" name="Title 1">
             <a:extLst xmlns:a="http://schemas.openxmlformats.org/drawingml/2006/main">
               <a:ext uri="{FF2B5EF4-FFF2-40B4-BE49-F238E27FC236}">
-                <a16:creationId xmlns:a16="http://schemas.microsoft.com/office/drawing/2014/main" id="{5A9855EA-0CC2-4DE4-8BDE-13C995589079}"/>
+                <a16:creationId xmlns:a16="http://schemas.microsoft.com/office/drawing/2014/main" id="{E36D5B29-1236-43F1-B54F-C2C15F6CC599}"/>
               </a:ext>
             </a:extLst>
           </p:cNvPr>
@@ -3464,7 +3464,7 @@
           <p:cNvPr id="3" name="Content Placeholder 2">
             <a:extLst xmlns:a="http://schemas.openxmlformats.org/drawingml/2006/main">
               <a:ext uri="{FF2B5EF4-FFF2-40B4-BE49-F238E27FC236}">
-                <a16:creationId xmlns:a16="http://schemas.microsoft.com/office/drawing/2014/main" id="{F7BEC2F1-B728-4EA4-AE73-6FE1BA5C3113}"/>
+                <a16:creationId xmlns:a16="http://schemas.microsoft.com/office/drawing/2014/main" id="{1C931F8F-189E-460E-91B9-FF19555A760E}"/>
               </a:ext>
             </a:extLst>
           </p:cNvPr>
@@ -3568,7 +3568,7 @@
           <p:cNvPr id="4" name="Text Placeholder 3">
             <a:extLst xmlns:a="http://schemas.openxmlformats.org/drawingml/2006/main">
               <a:ext uri="{FF2B5EF4-FFF2-40B4-BE49-F238E27FC236}">
-                <a16:creationId xmlns:a16="http://schemas.microsoft.com/office/drawing/2014/main" id="{5042435A-72B7-4E61-B00D-EE4BC48A9754}"/>
+                <a16:creationId xmlns:a16="http://schemas.microsoft.com/office/drawing/2014/main" id="{C1C6758D-7DA7-4BD6-8616-A808DC3ACAFC}"/>
               </a:ext>
             </a:extLst>
           </p:cNvPr>
@@ -3640,7 +3640,7 @@
           <p:cNvPr id="5" name="Date Placeholder 4">
             <a:extLst xmlns:a="http://schemas.openxmlformats.org/drawingml/2006/main">
               <a:ext uri="{FF2B5EF4-FFF2-40B4-BE49-F238E27FC236}">
-                <a16:creationId xmlns:a16="http://schemas.microsoft.com/office/drawing/2014/main" id="{B5BC047D-5A69-41B5-A8BA-54B2EA879DE2}"/>
+                <a16:creationId xmlns:a16="http://schemas.microsoft.com/office/drawing/2014/main" id="{05A46515-919C-469A-B937-12CED1A0DDAA}"/>
               </a:ext>
             </a:extLst>
           </p:cNvPr>
@@ -3667,7 +3667,7 @@
           <p:cNvPr id="6" name="Footer Placeholder 5">
             <a:extLst xmlns:a="http://schemas.openxmlformats.org/drawingml/2006/main">
               <a:ext uri="{FF2B5EF4-FFF2-40B4-BE49-F238E27FC236}">
-                <a16:creationId xmlns:a16="http://schemas.microsoft.com/office/drawing/2014/main" id="{E8DA7739-AF3C-40C1-B0ED-FB11C8B239BC}"/>
+                <a16:creationId xmlns:a16="http://schemas.microsoft.com/office/drawing/2014/main" id="{4C2F2E61-CF0F-4E9B-A1B6-910651A6C64E}"/>
               </a:ext>
             </a:extLst>
           </p:cNvPr>
@@ -3690,7 +3690,7 @@
           <p:cNvPr id="7" name="Slide Number Placeholder 6">
             <a:extLst xmlns:a="http://schemas.openxmlformats.org/drawingml/2006/main">
               <a:ext uri="{FF2B5EF4-FFF2-40B4-BE49-F238E27FC236}">
-                <a16:creationId xmlns:a16="http://schemas.microsoft.com/office/drawing/2014/main" id="{7C57649D-AFB0-4E5F-8615-B28F3B1BE574}"/>
+                <a16:creationId xmlns:a16="http://schemas.microsoft.com/office/drawing/2014/main" id="{62FFE967-2BDF-4758-B3D1-6D333D301344}"/>
               </a:ext>
             </a:extLst>
           </p:cNvPr>
@@ -3734,7 +3734,7 @@
           <p:cNvPr id="2" name="Title 1">
             <a:extLst xmlns:a="http://schemas.openxmlformats.org/drawingml/2006/main">
               <a:ext uri="{FF2B5EF4-FFF2-40B4-BE49-F238E27FC236}">
-                <a16:creationId xmlns:a16="http://schemas.microsoft.com/office/drawing/2014/main" id="{84CA5425-51FB-4AF8-831B-E132DB045E71}"/>
+                <a16:creationId xmlns:a16="http://schemas.microsoft.com/office/drawing/2014/main" id="{04B8CA1D-1CBD-4826-9ED0-29ADA34433F6}"/>
               </a:ext>
             </a:extLst>
           </p:cNvPr>
@@ -3771,7 +3771,7 @@
           <p:cNvPr id="3" name="Picture Placeholder 2">
             <a:extLst xmlns:a="http://schemas.openxmlformats.org/drawingml/2006/main">
               <a:ext uri="{FF2B5EF4-FFF2-40B4-BE49-F238E27FC236}">
-                <a16:creationId xmlns:a16="http://schemas.microsoft.com/office/drawing/2014/main" id="{693DFA41-53D1-4409-9C76-700C6ED0B092}"/>
+                <a16:creationId xmlns:a16="http://schemas.microsoft.com/office/drawing/2014/main" id="{995EA556-8CBA-44C0-9E09-D13307C6E3C4}"/>
               </a:ext>
             </a:extLst>
           </p:cNvPr>
@@ -3836,7 +3836,7 @@
           <p:cNvPr id="4" name="Text Placeholder 3">
             <a:extLst xmlns:a="http://schemas.openxmlformats.org/drawingml/2006/main">
               <a:ext uri="{FF2B5EF4-FFF2-40B4-BE49-F238E27FC236}">
-                <a16:creationId xmlns:a16="http://schemas.microsoft.com/office/drawing/2014/main" id="{B0A82083-BAA8-489A-B95E-30F1C9277DA3}"/>
+                <a16:creationId xmlns:a16="http://schemas.microsoft.com/office/drawing/2014/main" id="{84EA6901-61E7-4A4B-878D-8CDBD9341E2B}"/>
               </a:ext>
             </a:extLst>
           </p:cNvPr>
@@ -3908,7 +3908,7 @@
           <p:cNvPr id="5" name="Date Placeholder 4">
             <a:extLst xmlns:a="http://schemas.openxmlformats.org/drawingml/2006/main">
               <a:ext uri="{FF2B5EF4-FFF2-40B4-BE49-F238E27FC236}">
-                <a16:creationId xmlns:a16="http://schemas.microsoft.com/office/drawing/2014/main" id="{A8C9B86C-C4A1-4691-B327-204CD19A4B7B}"/>
+                <a16:creationId xmlns:a16="http://schemas.microsoft.com/office/drawing/2014/main" id="{78768784-EA90-4550-B0FB-4AD7FF8AEB99}"/>
               </a:ext>
             </a:extLst>
           </p:cNvPr>
@@ -3935,7 +3935,7 @@
           <p:cNvPr id="6" name="Footer Placeholder 5">
             <a:extLst xmlns:a="http://schemas.openxmlformats.org/drawingml/2006/main">
               <a:ext uri="{FF2B5EF4-FFF2-40B4-BE49-F238E27FC236}">
-                <a16:creationId xmlns:a16="http://schemas.microsoft.com/office/drawing/2014/main" id="{42C07262-A1FC-45AF-8103-7591F34C07BB}"/>
+                <a16:creationId xmlns:a16="http://schemas.microsoft.com/office/drawing/2014/main" id="{485641A6-B972-4D61-B2DA-68E9A646BC7B}"/>
               </a:ext>
             </a:extLst>
           </p:cNvPr>
@@ -3958,7 +3958,7 @@
           <p:cNvPr id="7" name="Slide Number Placeholder 6">
             <a:extLst xmlns:a="http://schemas.openxmlformats.org/drawingml/2006/main">
               <a:ext uri="{FF2B5EF4-FFF2-40B4-BE49-F238E27FC236}">
-                <a16:creationId xmlns:a16="http://schemas.microsoft.com/office/drawing/2014/main" id="{54CD0032-7ED1-4642-98D8-DA624E369368}"/>
+                <a16:creationId xmlns:a16="http://schemas.microsoft.com/office/drawing/2014/main" id="{A2750483-A971-4C9B-B7F6-0785B32EADD1}"/>
               </a:ext>
             </a:extLst>
           </p:cNvPr>
@@ -4007,7 +4007,7 @@
           <p:cNvPr id="2" name="Title Placeholder 1">
             <a:extLst xmlns:a="http://schemas.openxmlformats.org/drawingml/2006/main">
               <a:ext uri="{FF2B5EF4-FFF2-40B4-BE49-F238E27FC236}">
-                <a16:creationId xmlns:a16="http://schemas.microsoft.com/office/drawing/2014/main" id="{3F095A68-3C3B-4FE3-A6DB-5E9594466588}"/>
+                <a16:creationId xmlns:a16="http://schemas.microsoft.com/office/drawing/2014/main" id="{F4FA4A0D-A34D-4B74-875C-000A302E290A}"/>
               </a:ext>
             </a:extLst>
           </p:cNvPr>
@@ -4044,7 +4044,7 @@
           <p:cNvPr id="3" name="Text Placeholder 2">
             <a:extLst xmlns:a="http://schemas.openxmlformats.org/drawingml/2006/main">
               <a:ext uri="{FF2B5EF4-FFF2-40B4-BE49-F238E27FC236}">
-                <a16:creationId xmlns:a16="http://schemas.microsoft.com/office/drawing/2014/main" id="{E75C3797-38BA-450F-8BCB-DA712724F0C3}"/>
+                <a16:creationId xmlns:a16="http://schemas.microsoft.com/office/drawing/2014/main" id="{3C911582-E9A7-4995-B8B8-83133D5804D0}"/>
               </a:ext>
             </a:extLst>
           </p:cNvPr>
@@ -4116,7 +4116,7 @@
           <p:cNvPr id="4" name="Date Placeholder 3">
             <a:extLst xmlns:a="http://schemas.openxmlformats.org/drawingml/2006/main">
               <a:ext uri="{FF2B5EF4-FFF2-40B4-BE49-F238E27FC236}">
-                <a16:creationId xmlns:a16="http://schemas.microsoft.com/office/drawing/2014/main" id="{39B0535A-688E-4B58-B871-BE5FB23B60A0}"/>
+                <a16:creationId xmlns:a16="http://schemas.microsoft.com/office/drawing/2014/main" id="{83E81F0F-5BDD-4613-8F52-F02D474F8C56}"/>
               </a:ext>
             </a:extLst>
           </p:cNvPr>
@@ -4162,7 +4162,7 @@
           <p:cNvPr id="5" name="Footer Placeholder 4">
             <a:extLst xmlns:a="http://schemas.openxmlformats.org/drawingml/2006/main">
               <a:ext uri="{FF2B5EF4-FFF2-40B4-BE49-F238E27FC236}">
-                <a16:creationId xmlns:a16="http://schemas.microsoft.com/office/drawing/2014/main" id="{F12F49EC-627E-4437-9414-7542EEA65C11}"/>
+                <a16:creationId xmlns:a16="http://schemas.microsoft.com/office/drawing/2014/main" id="{D9EA162C-DE0B-4528-8F62-C7431262B2D6}"/>
               </a:ext>
             </a:extLst>
           </p:cNvPr>
@@ -4204,7 +4204,7 @@
           <p:cNvPr id="6" name="Slide Number Placeholder 5">
             <a:extLst xmlns:a="http://schemas.openxmlformats.org/drawingml/2006/main">
               <a:ext uri="{FF2B5EF4-FFF2-40B4-BE49-F238E27FC236}">
-                <a16:creationId xmlns:a16="http://schemas.microsoft.com/office/drawing/2014/main" id="{FD9BC8D1-7358-435E-9B03-C7B47D366756}"/>
+                <a16:creationId xmlns:a16="http://schemas.microsoft.com/office/drawing/2014/main" id="{FE5D8CE5-D35B-4D0F-A5F9-44A847CA776C}"/>
               </a:ext>
             </a:extLst>
           </p:cNvPr>
@@ -4249,17 +4249,17 @@
   </p:cSld>
   <p:clrMap bg1="lt1" tx1="dk1" bg2="lt2" tx2="dk2" accent1="accent1" accent2="accent2" accent3="accent3" accent4="accent4" accent5="accent5" accent6="accent6" hlink="hlink" folHlink="folHlink"/>
   <p:sldLayoutIdLst>
-    <p:sldLayoutId xmlns:r="http://schemas.openxmlformats.org/officeDocument/2006/relationships" id="2147483649" r:id="R5802b66091104732"/>
-    <p:sldLayoutId xmlns:r="http://schemas.openxmlformats.org/officeDocument/2006/relationships" id="2147483650" r:id="R910585c1b8c44737"/>
-    <p:sldLayoutId xmlns:r="http://schemas.openxmlformats.org/officeDocument/2006/relationships" id="2147483651" r:id="R47960bef1a064957"/>
-    <p:sldLayoutId xmlns:r="http://schemas.openxmlformats.org/officeDocument/2006/relationships" id="2147483652" r:id="R7baf2f5bb0f14c7d"/>
-    <p:sldLayoutId xmlns:r="http://schemas.openxmlformats.org/officeDocument/2006/relationships" id="2147483653" r:id="Re09a058364634a6d"/>
-    <p:sldLayoutId xmlns:r="http://schemas.openxmlformats.org/officeDocument/2006/relationships" id="2147483654" r:id="R550ff65a282743bc"/>
-    <p:sldLayoutId xmlns:r="http://schemas.openxmlformats.org/officeDocument/2006/relationships" id="2147483655" r:id="R77928f0a7b9143dd"/>
-    <p:sldLayoutId xmlns:r="http://schemas.openxmlformats.org/officeDocument/2006/relationships" id="2147483656" r:id="Rbe418784e7fd42d9"/>
-    <p:sldLayoutId xmlns:r="http://schemas.openxmlformats.org/officeDocument/2006/relationships" id="2147483657" r:id="Raf417f40e7944b6c"/>
-    <p:sldLayoutId xmlns:r="http://schemas.openxmlformats.org/officeDocument/2006/relationships" id="2147483658" r:id="R251fc99aaa994196"/>
-    <p:sldLayoutId xmlns:r="http://schemas.openxmlformats.org/officeDocument/2006/relationships" id="2147483659" r:id="R4d59b883590544e7"/>
+    <p:sldLayoutId xmlns:r="http://schemas.openxmlformats.org/officeDocument/2006/relationships" id="2147483649" r:id="Rc7fc173cea4e4203"/>
+    <p:sldLayoutId xmlns:r="http://schemas.openxmlformats.org/officeDocument/2006/relationships" id="2147483650" r:id="Ree9a87b6423b4266"/>
+    <p:sldLayoutId xmlns:r="http://schemas.openxmlformats.org/officeDocument/2006/relationships" id="2147483651" r:id="Rfb2ffbafa91b4131"/>
+    <p:sldLayoutId xmlns:r="http://schemas.openxmlformats.org/officeDocument/2006/relationships" id="2147483652" r:id="R557f982557784cf8"/>
+    <p:sldLayoutId xmlns:r="http://schemas.openxmlformats.org/officeDocument/2006/relationships" id="2147483653" r:id="Rc58802c7ebb149e7"/>
+    <p:sldLayoutId xmlns:r="http://schemas.openxmlformats.org/officeDocument/2006/relationships" id="2147483654" r:id="R55afb0eee931483e"/>
+    <p:sldLayoutId xmlns:r="http://schemas.openxmlformats.org/officeDocument/2006/relationships" id="2147483655" r:id="Re36593a35d3746b8"/>
+    <p:sldLayoutId xmlns:r="http://schemas.openxmlformats.org/officeDocument/2006/relationships" id="2147483656" r:id="R98e4364ce19c4ef2"/>
+    <p:sldLayoutId xmlns:r="http://schemas.openxmlformats.org/officeDocument/2006/relationships" id="2147483657" r:id="R1af06ae03e7245ab"/>
+    <p:sldLayoutId xmlns:r="http://schemas.openxmlformats.org/officeDocument/2006/relationships" id="2147483658" r:id="Redc34225233d4762"/>
+    <p:sldLayoutId xmlns:r="http://schemas.openxmlformats.org/officeDocument/2006/relationships" id="2147483659" r:id="R1f5ff10375284c73"/>
   </p:sldLayoutIdLst>
   <p:txStyles>
     <p:titleStyle>
@@ -4812,7 +4812,7 @@
           <p:cNvPr id="2" name="Rectangle 1">
             <a:extLst xmlns:a="http://schemas.openxmlformats.org/drawingml/2006/main">
               <a:ext uri="{FF2B5EF4-FFF2-40B4-BE49-F238E27FC236}">
-                <a16:creationId xmlns:a16="http://schemas.microsoft.com/office/drawing/2014/main" id="{FA0BD2F9-AEB7-4045-8C29-B26917095EFD}"/>
+                <a16:creationId xmlns:a16="http://schemas.microsoft.com/office/drawing/2014/main" id="{80AF9501-51D7-4F21-9BF8-99D7F4200A0E}"/>
               </a:ext>
             </a:extLst>
           </p:cNvPr>
@@ -4867,7 +4867,7 @@
           <p:cNvPr id="3" name="TextBox 2">
             <a:extLst xmlns:a="http://schemas.openxmlformats.org/drawingml/2006/main">
               <a:ext uri="{FF2B5EF4-FFF2-40B4-BE49-F238E27FC236}">
-                <a16:creationId xmlns:a16="http://schemas.microsoft.com/office/drawing/2014/main" id="{D8A51428-C56E-45FC-B186-8F377004399C}"/>
+                <a16:creationId xmlns:a16="http://schemas.microsoft.com/office/drawing/2014/main" id="{C1A94F9A-251E-4D9B-95E7-EB877945BFF4}"/>
               </a:ext>
             </a:extLst>
           </p:cNvPr>
@@ -4914,7 +4914,7 @@
           <p:cNvPr id="4" name="TextBox 3">
             <a:extLst xmlns:a="http://schemas.openxmlformats.org/drawingml/2006/main">
               <a:ext uri="{FF2B5EF4-FFF2-40B4-BE49-F238E27FC236}">
-                <a16:creationId xmlns:a16="http://schemas.microsoft.com/office/drawing/2014/main" id="{16ED7133-C6A1-48C8-8ABF-1D4E7B2D126D}"/>
+                <a16:creationId xmlns:a16="http://schemas.microsoft.com/office/drawing/2014/main" id="{19B9F2E6-D0AE-4992-A079-0215FBB54ADB}"/>
               </a:ext>
             </a:extLst>
           </p:cNvPr>
@@ -4982,7 +4982,7 @@
           <p:cNvPr id="5" name="TextBox 4">
             <a:extLst xmlns:a="http://schemas.openxmlformats.org/drawingml/2006/main">
               <a:ext uri="{FF2B5EF4-FFF2-40B4-BE49-F238E27FC236}">
-                <a16:creationId xmlns:a16="http://schemas.microsoft.com/office/drawing/2014/main" id="{DD992D2A-A169-4AFE-8982-1F48CA10559E}"/>
+                <a16:creationId xmlns:a16="http://schemas.microsoft.com/office/drawing/2014/main" id="{04E9ACDC-84CB-4DC9-A688-717AB932DD35}"/>
               </a:ext>
             </a:extLst>
           </p:cNvPr>
@@ -5029,7 +5029,7 @@
           <p:cNvPr id="6" name="Rectangle 5">
             <a:extLst xmlns:a="http://schemas.openxmlformats.org/drawingml/2006/main">
               <a:ext uri="{FF2B5EF4-FFF2-40B4-BE49-F238E27FC236}">
-                <a16:creationId xmlns:a16="http://schemas.microsoft.com/office/drawing/2014/main" id="{18A268D2-D2FB-4A29-A026-4801B0444584}"/>
+                <a16:creationId xmlns:a16="http://schemas.microsoft.com/office/drawing/2014/main" id="{37B1BC0C-03EA-4442-AA14-2A1BADCBD9E5}"/>
               </a:ext>
             </a:extLst>
           </p:cNvPr>
@@ -5084,7 +5084,7 @@
           <p:cNvPr id="7" name="TextBox 6">
             <a:extLst xmlns:a="http://schemas.openxmlformats.org/drawingml/2006/main">
               <a:ext uri="{FF2B5EF4-FFF2-40B4-BE49-F238E27FC236}">
-                <a16:creationId xmlns:a16="http://schemas.microsoft.com/office/drawing/2014/main" id="{98AF991A-216C-4677-9197-2AB2ED65E7D1}"/>
+                <a16:creationId xmlns:a16="http://schemas.microsoft.com/office/drawing/2014/main" id="{E2CC9551-6097-4331-94AB-1355CFBC1B6D}"/>
               </a:ext>
             </a:extLst>
           </p:cNvPr>
@@ -5131,7 +5131,7 @@
           <p:cNvPr id="8" name="TextBox 7">
             <a:extLst xmlns:a="http://schemas.openxmlformats.org/drawingml/2006/main">
               <a:ext uri="{FF2B5EF4-FFF2-40B4-BE49-F238E27FC236}">
-                <a16:creationId xmlns:a16="http://schemas.microsoft.com/office/drawing/2014/main" id="{D98B2D12-E37D-4D9E-9071-93D577D7E20B}"/>
+                <a16:creationId xmlns:a16="http://schemas.microsoft.com/office/drawing/2014/main" id="{BF3D937D-C326-42A5-8969-93F8895EF395}"/>
               </a:ext>
             </a:extLst>
           </p:cNvPr>
@@ -5168,7 +5168,7 @@
                 <a:ea typeface="Aptos"/>
                 <a:cs typeface="Aptos"/>
               </a:rPr>
-              <a:t>2026.07.23-15</a:t>
+              <a:t>2026.07.23-16</a:t>
             </a:r>
           </a:p>
         </p:txBody>
@@ -5178,7 +5178,7 @@
           <p:cNvPr id="9" name="TextBox 8">
             <a:extLst xmlns:a="http://schemas.openxmlformats.org/drawingml/2006/main">
               <a:ext uri="{FF2B5EF4-FFF2-40B4-BE49-F238E27FC236}">
-                <a16:creationId xmlns:a16="http://schemas.microsoft.com/office/drawing/2014/main" id="{4FA024B4-6C59-4B05-8809-E94D0D7F3D10}"/>
+                <a16:creationId xmlns:a16="http://schemas.microsoft.com/office/drawing/2014/main" id="{4DB47733-2B56-4847-B76B-82354315A0F7}"/>
               </a:ext>
             </a:extLst>
           </p:cNvPr>
@@ -5246,7 +5246,7 @@
           <p:cNvPr id="10" name="TextBox 9">
             <a:extLst xmlns:a="http://schemas.openxmlformats.org/drawingml/2006/main">
               <a:ext uri="{FF2B5EF4-FFF2-40B4-BE49-F238E27FC236}">
-                <a16:creationId xmlns:a16="http://schemas.microsoft.com/office/drawing/2014/main" id="{A3172FF5-40F1-4648-A886-E29378C5DAE0}"/>
+                <a16:creationId xmlns:a16="http://schemas.microsoft.com/office/drawing/2014/main" id="{1DC55C57-FCF7-4CFC-B7F7-48BBBB08EEB4}"/>
               </a:ext>
             </a:extLst>
           </p:cNvPr>
@@ -5293,7 +5293,7 @@
           <p:cNvPr id="11" name="TextBox 10">
             <a:extLst xmlns:a="http://schemas.openxmlformats.org/drawingml/2006/main">
               <a:ext uri="{FF2B5EF4-FFF2-40B4-BE49-F238E27FC236}">
-                <a16:creationId xmlns:a16="http://schemas.microsoft.com/office/drawing/2014/main" id="{73CB8C0B-04FD-4011-80E4-621A045A7A48}"/>
+                <a16:creationId xmlns:a16="http://schemas.microsoft.com/office/drawing/2014/main" id="{768B553C-F309-4B82-9A61-E216EF338148}"/>
               </a:ext>
             </a:extLst>
           </p:cNvPr>
@@ -5340,7 +5340,7 @@
           <p:cNvPr id="12" name="TextBox 11">
             <a:extLst xmlns:a="http://schemas.openxmlformats.org/drawingml/2006/main">
               <a:ext uri="{FF2B5EF4-FFF2-40B4-BE49-F238E27FC236}">
-                <a16:creationId xmlns:a16="http://schemas.microsoft.com/office/drawing/2014/main" id="{C741132C-9CEB-4E83-A6E9-D9124A15F052}"/>
+                <a16:creationId xmlns:a16="http://schemas.microsoft.com/office/drawing/2014/main" id="{BC7DE33D-D004-4248-A097-C1A12C421D69}"/>
               </a:ext>
             </a:extLst>
           </p:cNvPr>
@@ -5387,7 +5387,7 @@
           <p:cNvPr id="13" name="TextBox 12">
             <a:extLst xmlns:a="http://schemas.openxmlformats.org/drawingml/2006/main">
               <a:ext uri="{FF2B5EF4-FFF2-40B4-BE49-F238E27FC236}">
-                <a16:creationId xmlns:a16="http://schemas.microsoft.com/office/drawing/2014/main" id="{F3A7D54D-5430-4754-8BD2-989160DF2855}"/>
+                <a16:creationId xmlns:a16="http://schemas.microsoft.com/office/drawing/2014/main" id="{24691EEE-71C3-4F11-BDB6-A207ED0A812E}"/>
               </a:ext>
             </a:extLst>
           </p:cNvPr>
@@ -5432,7 +5432,7 @@
     </p:spTree>
     <p:extLst>
       <p:ext uri="{BB962C8B-B14F-4D97-AF65-F5344CB8AC3E}">
-        <p14:creationId xmlns:p14="http://schemas.microsoft.com/office/powerpoint/2010/main" val="745098573"/>
+        <p14:creationId xmlns:p14="http://schemas.microsoft.com/office/powerpoint/2010/main" val="1773725903"/>
       </p:ext>
     </p:extLst>
   </p:cSld>
@@ -5456,7 +5456,7 @@
           <p:cNvPr id="2" name="TextBox 1">
             <a:extLst xmlns:a="http://schemas.openxmlformats.org/drawingml/2006/main">
               <a:ext uri="{FF2B5EF4-FFF2-40B4-BE49-F238E27FC236}">
-                <a16:creationId xmlns:a16="http://schemas.microsoft.com/office/drawing/2014/main" id="{20B1153F-6819-4293-8290-FAFD8547C007}"/>
+                <a16:creationId xmlns:a16="http://schemas.microsoft.com/office/drawing/2014/main" id="{BBCAD885-D9BE-4BFD-83C5-6217780DFDC8}"/>
               </a:ext>
             </a:extLst>
           </p:cNvPr>
@@ -5503,7 +5503,7 @@
           <p:cNvPr id="3" name="TextBox 2">
             <a:extLst xmlns:a="http://schemas.openxmlformats.org/drawingml/2006/main">
               <a:ext uri="{FF2B5EF4-FFF2-40B4-BE49-F238E27FC236}">
-                <a16:creationId xmlns:a16="http://schemas.microsoft.com/office/drawing/2014/main" id="{BC1CB108-4F20-4159-9924-8AB1E7510114}"/>
+                <a16:creationId xmlns:a16="http://schemas.microsoft.com/office/drawing/2014/main" id="{2E16017F-A5CB-48E2-8488-35D92C3AAEDF}"/>
               </a:ext>
             </a:extLst>
           </p:cNvPr>
@@ -5550,7 +5550,7 @@
           <p:cNvPr id="4" name="Rectangle 3">
             <a:extLst xmlns:a="http://schemas.openxmlformats.org/drawingml/2006/main">
               <a:ext uri="{FF2B5EF4-FFF2-40B4-BE49-F238E27FC236}">
-                <a16:creationId xmlns:a16="http://schemas.microsoft.com/office/drawing/2014/main" id="{79390784-D188-4E86-9BAB-462F0D732690}"/>
+                <a16:creationId xmlns:a16="http://schemas.microsoft.com/office/drawing/2014/main" id="{82AE1B71-100E-4E9D-88F5-925972D12C95}"/>
               </a:ext>
             </a:extLst>
           </p:cNvPr>
@@ -5605,7 +5605,7 @@
           <p:cNvPr id="5" name="Rectangle 4">
             <a:extLst xmlns:a="http://schemas.openxmlformats.org/drawingml/2006/main">
               <a:ext uri="{FF2B5EF4-FFF2-40B4-BE49-F238E27FC236}">
-                <a16:creationId xmlns:a16="http://schemas.microsoft.com/office/drawing/2014/main" id="{45EB4E33-BAD7-4A8E-8A55-F749CBAC4113}"/>
+                <a16:creationId xmlns:a16="http://schemas.microsoft.com/office/drawing/2014/main" id="{0FB3D474-FF4A-4A2F-848A-D478620C4D84}"/>
               </a:ext>
             </a:extLst>
           </p:cNvPr>
@@ -5660,7 +5660,7 @@
           <p:cNvPr id="6" name="TextBox 5">
             <a:extLst xmlns:a="http://schemas.openxmlformats.org/drawingml/2006/main">
               <a:ext uri="{FF2B5EF4-FFF2-40B4-BE49-F238E27FC236}">
-                <a16:creationId xmlns:a16="http://schemas.microsoft.com/office/drawing/2014/main" id="{6ECC0C0A-835C-4DF6-A69B-852FD631AE65}"/>
+                <a16:creationId xmlns:a16="http://schemas.microsoft.com/office/drawing/2014/main" id="{572138CC-3200-4DB7-BA9D-F0C5562F68D4}"/>
               </a:ext>
             </a:extLst>
           </p:cNvPr>
@@ -5697,7 +5697,7 @@
                 <a:ea typeface="Aptos"/>
                 <a:cs typeface="Aptos"/>
               </a:rPr>
-              <a:t>Independent public evidence summary · 2026.07.23-15 · 2026-07-22 · Sources: WIPO licensing; dispute resolution; IPscore</a:t>
+              <a:t>Independent public evidence summary · 2026.07.23-16 · 2026-07-22 · Sources: WIPO licensing; dispute resolution; IPscore</a:t>
             </a:r>
           </a:p>
         </p:txBody>
@@ -5707,7 +5707,7 @@
           <p:cNvPr id="7" name="TextBox 6">
             <a:extLst xmlns:a="http://schemas.openxmlformats.org/drawingml/2006/main">
               <a:ext uri="{FF2B5EF4-FFF2-40B4-BE49-F238E27FC236}">
-                <a16:creationId xmlns:a16="http://schemas.microsoft.com/office/drawing/2014/main" id="{A793F2B5-DEFC-4EA0-8A80-2544280A5589}"/>
+                <a16:creationId xmlns:a16="http://schemas.microsoft.com/office/drawing/2014/main" id="{BB0CFFCB-262F-496A-8569-D338B5001FF0}"/>
               </a:ext>
             </a:extLst>
           </p:cNvPr>
@@ -5754,7 +5754,7 @@
           <p:cNvPr id="8" name="Rounded Rectangle 7">
             <a:extLst xmlns:a="http://schemas.openxmlformats.org/drawingml/2006/main">
               <a:ext uri="{FF2B5EF4-FFF2-40B4-BE49-F238E27FC236}">
-                <a16:creationId xmlns:a16="http://schemas.microsoft.com/office/drawing/2014/main" id="{DDCFB12B-A9A5-475F-8972-89F31662586C}"/>
+                <a16:creationId xmlns:a16="http://schemas.microsoft.com/office/drawing/2014/main" id="{12C90362-E4DC-47FC-84DD-29D1A97857B3}"/>
               </a:ext>
             </a:extLst>
           </p:cNvPr>
@@ -5811,7 +5811,7 @@
           <p:cNvPr id="9" name="TextBox 8">
             <a:extLst xmlns:a="http://schemas.openxmlformats.org/drawingml/2006/main">
               <a:ext uri="{FF2B5EF4-FFF2-40B4-BE49-F238E27FC236}">
-                <a16:creationId xmlns:a16="http://schemas.microsoft.com/office/drawing/2014/main" id="{2BFF03E5-45E2-4625-AE47-2FEBADFDF2BE}"/>
+                <a16:creationId xmlns:a16="http://schemas.microsoft.com/office/drawing/2014/main" id="{64BF1AB5-170A-4A22-A2E8-2F1EC27FDE67}"/>
               </a:ext>
             </a:extLst>
           </p:cNvPr>
@@ -5858,7 +5858,7 @@
           <p:cNvPr id="10" name="TextBox 9">
             <a:extLst xmlns:a="http://schemas.openxmlformats.org/drawingml/2006/main">
               <a:ext uri="{FF2B5EF4-FFF2-40B4-BE49-F238E27FC236}">
-                <a16:creationId xmlns:a16="http://schemas.microsoft.com/office/drawing/2014/main" id="{F14AB93A-8FB5-405C-88EA-89C8709FBF08}"/>
+                <a16:creationId xmlns:a16="http://schemas.microsoft.com/office/drawing/2014/main" id="{BE7CB702-E98D-410E-8170-C31ACB6B4938}"/>
               </a:ext>
             </a:extLst>
           </p:cNvPr>
@@ -5905,7 +5905,7 @@
           <p:cNvPr id="11" name="TextBox 10">
             <a:extLst xmlns:a="http://schemas.openxmlformats.org/drawingml/2006/main">
               <a:ext uri="{FF2B5EF4-FFF2-40B4-BE49-F238E27FC236}">
-                <a16:creationId xmlns:a16="http://schemas.microsoft.com/office/drawing/2014/main" id="{B049D76C-79F9-40D4-8CAD-DF448EFDA2AE}"/>
+                <a16:creationId xmlns:a16="http://schemas.microsoft.com/office/drawing/2014/main" id="{2AB01624-0A38-4515-826B-9D36484917C4}"/>
               </a:ext>
             </a:extLst>
           </p:cNvPr>
@@ -5952,7 +5952,7 @@
           <p:cNvPr id="12" name="Rounded Rectangle 11">
             <a:extLst xmlns:a="http://schemas.openxmlformats.org/drawingml/2006/main">
               <a:ext uri="{FF2B5EF4-FFF2-40B4-BE49-F238E27FC236}">
-                <a16:creationId xmlns:a16="http://schemas.microsoft.com/office/drawing/2014/main" id="{87C2C662-4889-4AEF-A059-ADFAC895F2E6}"/>
+                <a16:creationId xmlns:a16="http://schemas.microsoft.com/office/drawing/2014/main" id="{63DD7B3C-669B-47B5-8C64-350D32922E5A}"/>
               </a:ext>
             </a:extLst>
           </p:cNvPr>
@@ -6009,7 +6009,7 @@
           <p:cNvPr id="13" name="TextBox 12">
             <a:extLst xmlns:a="http://schemas.openxmlformats.org/drawingml/2006/main">
               <a:ext uri="{FF2B5EF4-FFF2-40B4-BE49-F238E27FC236}">
-                <a16:creationId xmlns:a16="http://schemas.microsoft.com/office/drawing/2014/main" id="{0728E824-2EAB-430E-9DE9-66A71C70EC0F}"/>
+                <a16:creationId xmlns:a16="http://schemas.microsoft.com/office/drawing/2014/main" id="{8B112A15-A971-41FC-BA3B-81BC815DC556}"/>
               </a:ext>
             </a:extLst>
           </p:cNvPr>
@@ -6056,7 +6056,7 @@
           <p:cNvPr id="14" name="TextBox 13">
             <a:extLst xmlns:a="http://schemas.openxmlformats.org/drawingml/2006/main">
               <a:ext uri="{FF2B5EF4-FFF2-40B4-BE49-F238E27FC236}">
-                <a16:creationId xmlns:a16="http://schemas.microsoft.com/office/drawing/2014/main" id="{28D0D1D2-9D88-4044-B10F-447BD0EA53A4}"/>
+                <a16:creationId xmlns:a16="http://schemas.microsoft.com/office/drawing/2014/main" id="{F56E1838-ED4E-4956-8F3D-B015B0D1E3BA}"/>
               </a:ext>
             </a:extLst>
           </p:cNvPr>
@@ -6103,7 +6103,7 @@
           <p:cNvPr id="15" name="TextBox 14">
             <a:extLst xmlns:a="http://schemas.openxmlformats.org/drawingml/2006/main">
               <a:ext uri="{FF2B5EF4-FFF2-40B4-BE49-F238E27FC236}">
-                <a16:creationId xmlns:a16="http://schemas.microsoft.com/office/drawing/2014/main" id="{F5C0D7C9-4818-43BB-B5D5-875FE8E30AB3}"/>
+                <a16:creationId xmlns:a16="http://schemas.microsoft.com/office/drawing/2014/main" id="{0328C0A9-9DCB-4314-9E7B-DADDD8A98519}"/>
               </a:ext>
             </a:extLst>
           </p:cNvPr>
@@ -6150,7 +6150,7 @@
           <p:cNvPr id="16" name="Rounded Rectangle 15">
             <a:extLst xmlns:a="http://schemas.openxmlformats.org/drawingml/2006/main">
               <a:ext uri="{FF2B5EF4-FFF2-40B4-BE49-F238E27FC236}">
-                <a16:creationId xmlns:a16="http://schemas.microsoft.com/office/drawing/2014/main" id="{8D294287-729C-4C40-ACFF-F895999AA35B}"/>
+                <a16:creationId xmlns:a16="http://schemas.microsoft.com/office/drawing/2014/main" id="{1BDB2710-E6DB-4ABB-B659-8AE356B96157}"/>
               </a:ext>
             </a:extLst>
           </p:cNvPr>
@@ -6207,7 +6207,7 @@
           <p:cNvPr id="17" name="TextBox 16">
             <a:extLst xmlns:a="http://schemas.openxmlformats.org/drawingml/2006/main">
               <a:ext uri="{FF2B5EF4-FFF2-40B4-BE49-F238E27FC236}">
-                <a16:creationId xmlns:a16="http://schemas.microsoft.com/office/drawing/2014/main" id="{960242BA-C1FC-4D0A-88FA-AE5FDEF80910}"/>
+                <a16:creationId xmlns:a16="http://schemas.microsoft.com/office/drawing/2014/main" id="{0E490D84-6273-4CA9-A7F3-9C3B6BA75A75}"/>
               </a:ext>
             </a:extLst>
           </p:cNvPr>
@@ -6254,7 +6254,7 @@
           <p:cNvPr id="18" name="TextBox 17">
             <a:extLst xmlns:a="http://schemas.openxmlformats.org/drawingml/2006/main">
               <a:ext uri="{FF2B5EF4-FFF2-40B4-BE49-F238E27FC236}">
-                <a16:creationId xmlns:a16="http://schemas.microsoft.com/office/drawing/2014/main" id="{5718698F-A4DA-456F-BFD3-AD6E73E76A0A}"/>
+                <a16:creationId xmlns:a16="http://schemas.microsoft.com/office/drawing/2014/main" id="{0E7165AA-77A1-4A12-86BF-CDD224294716}"/>
               </a:ext>
             </a:extLst>
           </p:cNvPr>
@@ -6301,7 +6301,7 @@
           <p:cNvPr id="19" name="TextBox 18">
             <a:extLst xmlns:a="http://schemas.openxmlformats.org/drawingml/2006/main">
               <a:ext uri="{FF2B5EF4-FFF2-40B4-BE49-F238E27FC236}">
-                <a16:creationId xmlns:a16="http://schemas.microsoft.com/office/drawing/2014/main" id="{9E0487C5-5A0C-48A8-A4ED-8022FED2657A}"/>
+                <a16:creationId xmlns:a16="http://schemas.microsoft.com/office/drawing/2014/main" id="{AED2894B-9714-4B9C-A0B4-F66386DE1922}"/>
               </a:ext>
             </a:extLst>
           </p:cNvPr>
@@ -6348,7 +6348,7 @@
           <p:cNvPr id="20" name="Rounded Rectangle 19">
             <a:extLst xmlns:a="http://schemas.openxmlformats.org/drawingml/2006/main">
               <a:ext uri="{FF2B5EF4-FFF2-40B4-BE49-F238E27FC236}">
-                <a16:creationId xmlns:a16="http://schemas.microsoft.com/office/drawing/2014/main" id="{00520AD8-0104-4DD8-AE5A-55D7D64B9019}"/>
+                <a16:creationId xmlns:a16="http://schemas.microsoft.com/office/drawing/2014/main" id="{9EF10E90-90BC-4142-BDFF-A7FF5608C1D1}"/>
               </a:ext>
             </a:extLst>
           </p:cNvPr>
@@ -6405,7 +6405,7 @@
           <p:cNvPr id="21" name="TextBox 20">
             <a:extLst xmlns:a="http://schemas.openxmlformats.org/drawingml/2006/main">
               <a:ext uri="{FF2B5EF4-FFF2-40B4-BE49-F238E27FC236}">
-                <a16:creationId xmlns:a16="http://schemas.microsoft.com/office/drawing/2014/main" id="{55A52F6D-EED7-4D72-B4A5-0BF0EF13B542}"/>
+                <a16:creationId xmlns:a16="http://schemas.microsoft.com/office/drawing/2014/main" id="{11CD0853-B584-4B0E-A45C-4A62E177554D}"/>
               </a:ext>
             </a:extLst>
           </p:cNvPr>
@@ -6452,7 +6452,7 @@
           <p:cNvPr id="22" name="TextBox 21">
             <a:extLst xmlns:a="http://schemas.openxmlformats.org/drawingml/2006/main">
               <a:ext uri="{FF2B5EF4-FFF2-40B4-BE49-F238E27FC236}">
-                <a16:creationId xmlns:a16="http://schemas.microsoft.com/office/drawing/2014/main" id="{90ECFDD6-661A-4515-BFC2-6EC44FDE6D2E}"/>
+                <a16:creationId xmlns:a16="http://schemas.microsoft.com/office/drawing/2014/main" id="{0842E3F1-F72D-4939-B8AB-2205FA5F5CE0}"/>
               </a:ext>
             </a:extLst>
           </p:cNvPr>
@@ -6499,7 +6499,7 @@
           <p:cNvPr id="23" name="TextBox 22">
             <a:extLst xmlns:a="http://schemas.openxmlformats.org/drawingml/2006/main">
               <a:ext uri="{FF2B5EF4-FFF2-40B4-BE49-F238E27FC236}">
-                <a16:creationId xmlns:a16="http://schemas.microsoft.com/office/drawing/2014/main" id="{9A38F6E4-3111-4522-A61F-C9EC2B04513C}"/>
+                <a16:creationId xmlns:a16="http://schemas.microsoft.com/office/drawing/2014/main" id="{48F0C00B-1FCB-44CF-8591-A977D09318B4}"/>
               </a:ext>
             </a:extLst>
           </p:cNvPr>
@@ -6546,7 +6546,7 @@
           <p:cNvPr id="24" name="TextBox 23">
             <a:extLst xmlns:a="http://schemas.openxmlformats.org/drawingml/2006/main">
               <a:ext uri="{FF2B5EF4-FFF2-40B4-BE49-F238E27FC236}">
-                <a16:creationId xmlns:a16="http://schemas.microsoft.com/office/drawing/2014/main" id="{D17C0E1B-BFE2-4355-974E-426EB64EDB29}"/>
+                <a16:creationId xmlns:a16="http://schemas.microsoft.com/office/drawing/2014/main" id="{A2F7C796-5320-483E-A5FA-DAD5C3C9F3D8}"/>
               </a:ext>
             </a:extLst>
           </p:cNvPr>
@@ -6591,7 +6591,7 @@
     </p:spTree>
     <p:extLst>
       <p:ext uri="{BB962C8B-B14F-4D97-AF65-F5344CB8AC3E}">
-        <p14:creationId xmlns:p14="http://schemas.microsoft.com/office/powerpoint/2010/main" val="1863893012"/>
+        <p14:creationId xmlns:p14="http://schemas.microsoft.com/office/powerpoint/2010/main" val="1950347667"/>
       </p:ext>
     </p:extLst>
   </p:cSld>
@@ -6615,7 +6615,7 @@
           <p:cNvPr id="2" name="TextBox 1">
             <a:extLst xmlns:a="http://schemas.openxmlformats.org/drawingml/2006/main">
               <a:ext uri="{FF2B5EF4-FFF2-40B4-BE49-F238E27FC236}">
-                <a16:creationId xmlns:a16="http://schemas.microsoft.com/office/drawing/2014/main" id="{EF6FD7A9-0625-4C51-B22B-25677E9079AC}"/>
+                <a16:creationId xmlns:a16="http://schemas.microsoft.com/office/drawing/2014/main" id="{099523FB-5F13-4677-8CD9-E90D0A9F10CC}"/>
               </a:ext>
             </a:extLst>
           </p:cNvPr>
@@ -6662,7 +6662,7 @@
           <p:cNvPr id="3" name="TextBox 2">
             <a:extLst xmlns:a="http://schemas.openxmlformats.org/drawingml/2006/main">
               <a:ext uri="{FF2B5EF4-FFF2-40B4-BE49-F238E27FC236}">
-                <a16:creationId xmlns:a16="http://schemas.microsoft.com/office/drawing/2014/main" id="{A0BC5E06-0B9E-4F7C-8888-D2EDC811E3FC}"/>
+                <a16:creationId xmlns:a16="http://schemas.microsoft.com/office/drawing/2014/main" id="{FB2EE27A-9FDB-4C2E-9CCE-235284838D5A}"/>
               </a:ext>
             </a:extLst>
           </p:cNvPr>
@@ -6709,7 +6709,7 @@
           <p:cNvPr id="4" name="Rectangle 3">
             <a:extLst xmlns:a="http://schemas.openxmlformats.org/drawingml/2006/main">
               <a:ext uri="{FF2B5EF4-FFF2-40B4-BE49-F238E27FC236}">
-                <a16:creationId xmlns:a16="http://schemas.microsoft.com/office/drawing/2014/main" id="{CF48DC7A-8610-48AC-A91B-D13453AEE77C}"/>
+                <a16:creationId xmlns:a16="http://schemas.microsoft.com/office/drawing/2014/main" id="{9B8858B1-EDD1-43D3-8E2C-C3C430CC6BE9}"/>
               </a:ext>
             </a:extLst>
           </p:cNvPr>
@@ -6764,7 +6764,7 @@
           <p:cNvPr id="5" name="Rectangle 4">
             <a:extLst xmlns:a="http://schemas.openxmlformats.org/drawingml/2006/main">
               <a:ext uri="{FF2B5EF4-FFF2-40B4-BE49-F238E27FC236}">
-                <a16:creationId xmlns:a16="http://schemas.microsoft.com/office/drawing/2014/main" id="{53E9BB08-F5AB-43A0-8A31-0C146D2D218F}"/>
+                <a16:creationId xmlns:a16="http://schemas.microsoft.com/office/drawing/2014/main" id="{9128A027-32B6-4F37-9C67-8F20C1F3D38A}"/>
               </a:ext>
             </a:extLst>
           </p:cNvPr>
@@ -6819,7 +6819,7 @@
           <p:cNvPr id="6" name="TextBox 5">
             <a:extLst xmlns:a="http://schemas.openxmlformats.org/drawingml/2006/main">
               <a:ext uri="{FF2B5EF4-FFF2-40B4-BE49-F238E27FC236}">
-                <a16:creationId xmlns:a16="http://schemas.microsoft.com/office/drawing/2014/main" id="{1A75462E-4020-46CD-8CD6-CFB21A00ADCF}"/>
+                <a16:creationId xmlns:a16="http://schemas.microsoft.com/office/drawing/2014/main" id="{2D1D71BD-6F7A-4D45-90CE-637E85A8D222}"/>
               </a:ext>
             </a:extLst>
           </p:cNvPr>
@@ -6856,7 +6856,7 @@
                 <a:ea typeface="Aptos"/>
                 <a:cs typeface="Aptos"/>
               </a:rPr>
-              <a:t>Independent public evidence summary · 2026.07.23-15 · 2026-07-22 · Sources: WIPO IP valuation; Market-values</a:t>
+              <a:t>Independent public evidence summary · 2026.07.23-16 · 2026-07-22 · Sources: WIPO IP valuation; Market-values</a:t>
             </a:r>
           </a:p>
         </p:txBody>
@@ -6866,7 +6866,7 @@
           <p:cNvPr id="7" name="TextBox 6">
             <a:extLst xmlns:a="http://schemas.openxmlformats.org/drawingml/2006/main">
               <a:ext uri="{FF2B5EF4-FFF2-40B4-BE49-F238E27FC236}">
-                <a16:creationId xmlns:a16="http://schemas.microsoft.com/office/drawing/2014/main" id="{5A55956F-B57E-402E-B99C-6DA362AEB0CB}"/>
+                <a16:creationId xmlns:a16="http://schemas.microsoft.com/office/drawing/2014/main" id="{2BCF0507-2C35-414B-9124-C88EFCFB059C}"/>
               </a:ext>
             </a:extLst>
           </p:cNvPr>
@@ -7436,7 +7436,7 @@
           <p:cNvPr id="9" name="TextBox 8">
             <a:extLst xmlns:a="http://schemas.openxmlformats.org/drawingml/2006/main">
               <a:ext uri="{FF2B5EF4-FFF2-40B4-BE49-F238E27FC236}">
-                <a16:creationId xmlns:a16="http://schemas.microsoft.com/office/drawing/2014/main" id="{760C3BF4-8DB3-4FD2-8300-8DD18260A46B}"/>
+                <a16:creationId xmlns:a16="http://schemas.microsoft.com/office/drawing/2014/main" id="{117FEBF5-05E0-4BAA-B9BD-B0CD34CF9092}"/>
               </a:ext>
             </a:extLst>
           </p:cNvPr>
@@ -7481,7 +7481,7 @@
     </p:spTree>
     <p:extLst>
       <p:ext uri="{BB962C8B-B14F-4D97-AF65-F5344CB8AC3E}">
-        <p14:creationId xmlns:p14="http://schemas.microsoft.com/office/powerpoint/2010/main" val="1845538076"/>
+        <p14:creationId xmlns:p14="http://schemas.microsoft.com/office/powerpoint/2010/main" val="1308152411"/>
       </p:ext>
     </p:extLst>
   </p:cSld>
@@ -7512,7 +7512,7 @@
           <p:cNvPr id="2" name="TextBox 1">
             <a:extLst xmlns:a="http://schemas.openxmlformats.org/drawingml/2006/main">
               <a:ext uri="{FF2B5EF4-FFF2-40B4-BE49-F238E27FC236}">
-                <a16:creationId xmlns:a16="http://schemas.microsoft.com/office/drawing/2014/main" id="{C4AF322B-D094-4379-A5BD-A6B429AF3703}"/>
+                <a16:creationId xmlns:a16="http://schemas.microsoft.com/office/drawing/2014/main" id="{470452E5-922B-46EF-9FA0-F5A74C7FBEDA}"/>
               </a:ext>
             </a:extLst>
           </p:cNvPr>
@@ -7559,7 +7559,7 @@
           <p:cNvPr id="3" name="TextBox 2">
             <a:extLst xmlns:a="http://schemas.openxmlformats.org/drawingml/2006/main">
               <a:ext uri="{FF2B5EF4-FFF2-40B4-BE49-F238E27FC236}">
-                <a16:creationId xmlns:a16="http://schemas.microsoft.com/office/drawing/2014/main" id="{15C13454-2612-4932-8E71-85AB592A522C}"/>
+                <a16:creationId xmlns:a16="http://schemas.microsoft.com/office/drawing/2014/main" id="{AEA01E34-7850-47DC-A422-5E0B1C8620E8}"/>
               </a:ext>
             </a:extLst>
           </p:cNvPr>
@@ -7606,7 +7606,7 @@
           <p:cNvPr id="4" name="TextBox 3">
             <a:extLst xmlns:a="http://schemas.openxmlformats.org/drawingml/2006/main">
               <a:ext uri="{FF2B5EF4-FFF2-40B4-BE49-F238E27FC236}">
-                <a16:creationId xmlns:a16="http://schemas.microsoft.com/office/drawing/2014/main" id="{2F5DB90E-50DF-466D-92DB-B1C5D204931C}"/>
+                <a16:creationId xmlns:a16="http://schemas.microsoft.com/office/drawing/2014/main" id="{F0D189D5-6693-447D-A821-7229AA7B8A0C}"/>
               </a:ext>
             </a:extLst>
           </p:cNvPr>
@@ -7747,7 +7747,7 @@
           <p:cNvPr id="5" name="TextBox 4">
             <a:extLst xmlns:a="http://schemas.openxmlformats.org/drawingml/2006/main">
               <a:ext uri="{FF2B5EF4-FFF2-40B4-BE49-F238E27FC236}">
-                <a16:creationId xmlns:a16="http://schemas.microsoft.com/office/drawing/2014/main" id="{B52B2934-6207-46E4-97E5-7B97B04C7111}"/>
+                <a16:creationId xmlns:a16="http://schemas.microsoft.com/office/drawing/2014/main" id="{9B5B8DF3-F0AE-486D-9AAB-49F353CB923F}"/>
               </a:ext>
             </a:extLst>
           </p:cNvPr>
@@ -7784,7 +7784,7 @@
                 <a:ea typeface="Aptos"/>
                 <a:cs typeface="Aptos"/>
               </a:rPr>
-              <a:t>Version 2026.07.23-15 · 2026-07-22 · 12 / 12</a:t>
+              <a:t>Version 2026.07.23-16 · 2026-07-22 · 12 / 12</a:t>
             </a:r>
           </a:p>
         </p:txBody>
@@ -7794,7 +7794,7 @@
           <p:cNvPr id="6" name="TextBox 5">
             <a:extLst xmlns:a="http://schemas.openxmlformats.org/drawingml/2006/main">
               <a:ext uri="{FF2B5EF4-FFF2-40B4-BE49-F238E27FC236}">
-                <a16:creationId xmlns:a16="http://schemas.microsoft.com/office/drawing/2014/main" id="{AF5E9F87-C299-4F9B-95CA-4148E0B0120C}"/>
+                <a16:creationId xmlns:a16="http://schemas.microsoft.com/office/drawing/2014/main" id="{59CB61A2-6585-4F54-A917-7D4853F68917}"/>
               </a:ext>
             </a:extLst>
           </p:cNvPr>
@@ -7839,7 +7839,7 @@
     </p:spTree>
     <p:extLst>
       <p:ext uri="{BB962C8B-B14F-4D97-AF65-F5344CB8AC3E}">
-        <p14:creationId xmlns:p14="http://schemas.microsoft.com/office/powerpoint/2010/main" val="973085813"/>
+        <p14:creationId xmlns:p14="http://schemas.microsoft.com/office/powerpoint/2010/main" val="1922313877"/>
       </p:ext>
     </p:extLst>
   </p:cSld>
@@ -7863,7 +7863,7 @@
           <p:cNvPr id="2" name="TextBox 1">
             <a:extLst xmlns:a="http://schemas.openxmlformats.org/drawingml/2006/main">
               <a:ext uri="{FF2B5EF4-FFF2-40B4-BE49-F238E27FC236}">
-                <a16:creationId xmlns:a16="http://schemas.microsoft.com/office/drawing/2014/main" id="{84B8B2C9-CCB3-4CEA-85BD-BC46ADFBD1CE}"/>
+                <a16:creationId xmlns:a16="http://schemas.microsoft.com/office/drawing/2014/main" id="{FF49FE95-42A4-4DEF-9C94-1691DA4EE520}"/>
               </a:ext>
             </a:extLst>
           </p:cNvPr>
@@ -7910,7 +7910,7 @@
           <p:cNvPr id="3" name="TextBox 2">
             <a:extLst xmlns:a="http://schemas.openxmlformats.org/drawingml/2006/main">
               <a:ext uri="{FF2B5EF4-FFF2-40B4-BE49-F238E27FC236}">
-                <a16:creationId xmlns:a16="http://schemas.microsoft.com/office/drawing/2014/main" id="{349286FF-24E2-4A82-B0D3-F1ABED1000FD}"/>
+                <a16:creationId xmlns:a16="http://schemas.microsoft.com/office/drawing/2014/main" id="{FAEFDA99-3734-45D5-B715-A4486FCDAF82}"/>
               </a:ext>
             </a:extLst>
           </p:cNvPr>
@@ -7957,7 +7957,7 @@
           <p:cNvPr id="4" name="Rectangle 3">
             <a:extLst xmlns:a="http://schemas.openxmlformats.org/drawingml/2006/main">
               <a:ext uri="{FF2B5EF4-FFF2-40B4-BE49-F238E27FC236}">
-                <a16:creationId xmlns:a16="http://schemas.microsoft.com/office/drawing/2014/main" id="{370C2361-BDA5-4F2E-8A32-B1BBBF65FD08}"/>
+                <a16:creationId xmlns:a16="http://schemas.microsoft.com/office/drawing/2014/main" id="{C4C42033-1110-463A-857F-398056C02DB4}"/>
               </a:ext>
             </a:extLst>
           </p:cNvPr>
@@ -8012,7 +8012,7 @@
           <p:cNvPr id="5" name="Rectangle 4">
             <a:extLst xmlns:a="http://schemas.openxmlformats.org/drawingml/2006/main">
               <a:ext uri="{FF2B5EF4-FFF2-40B4-BE49-F238E27FC236}">
-                <a16:creationId xmlns:a16="http://schemas.microsoft.com/office/drawing/2014/main" id="{A5FDDED7-0D94-432B-A979-34831FC8533C}"/>
+                <a16:creationId xmlns:a16="http://schemas.microsoft.com/office/drawing/2014/main" id="{C02CDD22-3551-46BB-B09E-65DD48D4173C}"/>
               </a:ext>
             </a:extLst>
           </p:cNvPr>
@@ -8067,7 +8067,7 @@
           <p:cNvPr id="6" name="TextBox 5">
             <a:extLst xmlns:a="http://schemas.openxmlformats.org/drawingml/2006/main">
               <a:ext uri="{FF2B5EF4-FFF2-40B4-BE49-F238E27FC236}">
-                <a16:creationId xmlns:a16="http://schemas.microsoft.com/office/drawing/2014/main" id="{820F117C-97AD-44F0-8B24-CB4D43B41AB2}"/>
+                <a16:creationId xmlns:a16="http://schemas.microsoft.com/office/drawing/2014/main" id="{6FCA807D-5BE9-4BA9-9B07-F51EE0667397}"/>
               </a:ext>
             </a:extLst>
           </p:cNvPr>
@@ -8104,7 +8104,7 @@
                 <a:ea typeface="Aptos"/>
                 <a:cs typeface="Aptos"/>
               </a:rPr>
-              <a:t>Independent public evidence summary · 2026.07.23-15 · 2026-07-22 · Sources: Atlas readiness; WIPO</a:t>
+              <a:t>Independent public evidence summary · 2026.07.23-16 · 2026-07-22 · Sources: Atlas readiness; WIPO</a:t>
             </a:r>
           </a:p>
         </p:txBody>
@@ -8114,7 +8114,7 @@
           <p:cNvPr id="7" name="TextBox 6">
             <a:extLst xmlns:a="http://schemas.openxmlformats.org/drawingml/2006/main">
               <a:ext uri="{FF2B5EF4-FFF2-40B4-BE49-F238E27FC236}">
-                <a16:creationId xmlns:a16="http://schemas.microsoft.com/office/drawing/2014/main" id="{82DD985C-7556-4A33-8647-D442AF556B04}"/>
+                <a16:creationId xmlns:a16="http://schemas.microsoft.com/office/drawing/2014/main" id="{6AFDE460-A2BD-47D2-8004-B77689373FA1}"/>
               </a:ext>
             </a:extLst>
           </p:cNvPr>
@@ -8161,7 +8161,7 @@
           <p:cNvPr id="8" name="TextBox 7">
             <a:extLst xmlns:a="http://schemas.openxmlformats.org/drawingml/2006/main">
               <a:ext uri="{FF2B5EF4-FFF2-40B4-BE49-F238E27FC236}">
-                <a16:creationId xmlns:a16="http://schemas.microsoft.com/office/drawing/2014/main" id="{589A2395-0954-473D-B2DF-746A164B6F5D}"/>
+                <a16:creationId xmlns:a16="http://schemas.microsoft.com/office/drawing/2014/main" id="{D06A7B0F-A8B0-4E29-B238-A7B38DF44BBD}"/>
               </a:ext>
             </a:extLst>
           </p:cNvPr>
@@ -8208,7 +8208,7 @@
           <p:cNvPr id="9" name="TextBox 8">
             <a:extLst xmlns:a="http://schemas.openxmlformats.org/drawingml/2006/main">
               <a:ext uri="{FF2B5EF4-FFF2-40B4-BE49-F238E27FC236}">
-                <a16:creationId xmlns:a16="http://schemas.microsoft.com/office/drawing/2014/main" id="{871A701A-A5F7-4216-AF72-FC6903189478}"/>
+                <a16:creationId xmlns:a16="http://schemas.microsoft.com/office/drawing/2014/main" id="{412214DD-68AD-450C-A812-6304745CD2B8}"/>
               </a:ext>
             </a:extLst>
           </p:cNvPr>
@@ -8305,7 +8305,7 @@
           <p:cNvPr id="10" name="Rounded Rectangle 9">
             <a:extLst xmlns:a="http://schemas.openxmlformats.org/drawingml/2006/main">
               <a:ext uri="{FF2B5EF4-FFF2-40B4-BE49-F238E27FC236}">
-                <a16:creationId xmlns:a16="http://schemas.microsoft.com/office/drawing/2014/main" id="{A0647B9C-C98E-4942-AF3E-9941EF04ED54}"/>
+                <a16:creationId xmlns:a16="http://schemas.microsoft.com/office/drawing/2014/main" id="{CB3392CB-0FB8-4C3C-8894-73694D1A02D2}"/>
               </a:ext>
             </a:extLst>
           </p:cNvPr>
@@ -8362,7 +8362,7 @@
           <p:cNvPr id="11" name="TextBox 10">
             <a:extLst xmlns:a="http://schemas.openxmlformats.org/drawingml/2006/main">
               <a:ext uri="{FF2B5EF4-FFF2-40B4-BE49-F238E27FC236}">
-                <a16:creationId xmlns:a16="http://schemas.microsoft.com/office/drawing/2014/main" id="{02781B4C-F94A-4579-8F3B-FF923F6FA45C}"/>
+                <a16:creationId xmlns:a16="http://schemas.microsoft.com/office/drawing/2014/main" id="{D2B730AA-F89C-4E32-A824-A9F4F4F1785A}"/>
               </a:ext>
             </a:extLst>
           </p:cNvPr>
@@ -8409,7 +8409,7 @@
           <p:cNvPr id="12" name="TextBox 11">
             <a:extLst xmlns:a="http://schemas.openxmlformats.org/drawingml/2006/main">
               <a:ext uri="{FF2B5EF4-FFF2-40B4-BE49-F238E27FC236}">
-                <a16:creationId xmlns:a16="http://schemas.microsoft.com/office/drawing/2014/main" id="{18D5BC21-D7FA-425C-8618-CD2CBECBCAC7}"/>
+                <a16:creationId xmlns:a16="http://schemas.microsoft.com/office/drawing/2014/main" id="{4A531CFB-5251-40C7-A966-A09ECBB36F8A}"/>
               </a:ext>
             </a:extLst>
           </p:cNvPr>
@@ -8454,7 +8454,7 @@
     </p:spTree>
     <p:extLst>
       <p:ext uri="{BB962C8B-B14F-4D97-AF65-F5344CB8AC3E}">
-        <p14:creationId xmlns:p14="http://schemas.microsoft.com/office/powerpoint/2010/main" val="1441230340"/>
+        <p14:creationId xmlns:p14="http://schemas.microsoft.com/office/powerpoint/2010/main" val="268250790"/>
       </p:ext>
     </p:extLst>
   </p:cSld>
@@ -8478,7 +8478,7 @@
           <p:cNvPr id="2" name="TextBox 1">
             <a:extLst xmlns:a="http://schemas.openxmlformats.org/drawingml/2006/main">
               <a:ext uri="{FF2B5EF4-FFF2-40B4-BE49-F238E27FC236}">
-                <a16:creationId xmlns:a16="http://schemas.microsoft.com/office/drawing/2014/main" id="{50B31499-2098-49E2-AE9C-3DD91CF3D564}"/>
+                <a16:creationId xmlns:a16="http://schemas.microsoft.com/office/drawing/2014/main" id="{439C1B62-8A53-41E2-B81E-31B5E654CA30}"/>
               </a:ext>
             </a:extLst>
           </p:cNvPr>
@@ -8525,7 +8525,7 @@
           <p:cNvPr id="3" name="TextBox 2">
             <a:extLst xmlns:a="http://schemas.openxmlformats.org/drawingml/2006/main">
               <a:ext uri="{FF2B5EF4-FFF2-40B4-BE49-F238E27FC236}">
-                <a16:creationId xmlns:a16="http://schemas.microsoft.com/office/drawing/2014/main" id="{EEB71770-697D-4F54-9763-1815D40EF1E2}"/>
+                <a16:creationId xmlns:a16="http://schemas.microsoft.com/office/drawing/2014/main" id="{A090DA8D-EA06-445A-ACC0-20C1CFB89523}"/>
               </a:ext>
             </a:extLst>
           </p:cNvPr>
@@ -8572,7 +8572,7 @@
           <p:cNvPr id="4" name="Rectangle 3">
             <a:extLst xmlns:a="http://schemas.openxmlformats.org/drawingml/2006/main">
               <a:ext uri="{FF2B5EF4-FFF2-40B4-BE49-F238E27FC236}">
-                <a16:creationId xmlns:a16="http://schemas.microsoft.com/office/drawing/2014/main" id="{10EFE56E-B4E2-47D6-AEC5-AFC48BC80D08}"/>
+                <a16:creationId xmlns:a16="http://schemas.microsoft.com/office/drawing/2014/main" id="{F364E1AB-8ABD-4AD3-BF1D-DC6290AB30FD}"/>
               </a:ext>
             </a:extLst>
           </p:cNvPr>
@@ -8627,7 +8627,7 @@
           <p:cNvPr id="5" name="Rectangle 4">
             <a:extLst xmlns:a="http://schemas.openxmlformats.org/drawingml/2006/main">
               <a:ext uri="{FF2B5EF4-FFF2-40B4-BE49-F238E27FC236}">
-                <a16:creationId xmlns:a16="http://schemas.microsoft.com/office/drawing/2014/main" id="{E0EC18DB-9148-4C44-BA47-068C27D3D834}"/>
+                <a16:creationId xmlns:a16="http://schemas.microsoft.com/office/drawing/2014/main" id="{F44F2562-EF4F-44E3-BFF6-576A910A5314}"/>
               </a:ext>
             </a:extLst>
           </p:cNvPr>
@@ -8682,7 +8682,7 @@
           <p:cNvPr id="6" name="TextBox 5">
             <a:extLst xmlns:a="http://schemas.openxmlformats.org/drawingml/2006/main">
               <a:ext uri="{FF2B5EF4-FFF2-40B4-BE49-F238E27FC236}">
-                <a16:creationId xmlns:a16="http://schemas.microsoft.com/office/drawing/2014/main" id="{52C4E03F-F873-4942-A639-0E3A0AD9ABD4}"/>
+                <a16:creationId xmlns:a16="http://schemas.microsoft.com/office/drawing/2014/main" id="{6C7508E1-4DEA-4DDD-AC4C-24C82167D547}"/>
               </a:ext>
             </a:extLst>
           </p:cNvPr>
@@ -8719,7 +8719,7 @@
                 <a:ea typeface="Aptos"/>
                 <a:cs typeface="Aptos"/>
               </a:rPr>
-              <a:t>Independent public evidence summary · 2026.07.23-15 · 2026-07-22 · Sources: EP3032975B2</a:t>
+              <a:t>Independent public evidence summary · 2026.07.23-16 · 2026-07-22 · Sources: EP3032975B2</a:t>
             </a:r>
           </a:p>
         </p:txBody>
@@ -8729,7 +8729,7 @@
           <p:cNvPr id="7" name="TextBox 6">
             <a:extLst xmlns:a="http://schemas.openxmlformats.org/drawingml/2006/main">
               <a:ext uri="{FF2B5EF4-FFF2-40B4-BE49-F238E27FC236}">
-                <a16:creationId xmlns:a16="http://schemas.microsoft.com/office/drawing/2014/main" id="{893DBE4C-5B2E-46F5-A061-E6A505CCCF1C}"/>
+                <a16:creationId xmlns:a16="http://schemas.microsoft.com/office/drawing/2014/main" id="{EEC4C2C9-1F74-46A9-AB90-7DD4405176AD}"/>
               </a:ext>
             </a:extLst>
           </p:cNvPr>
@@ -8776,7 +8776,7 @@
           <p:cNvPr id="8" name="TextBox 7">
             <a:extLst xmlns:a="http://schemas.openxmlformats.org/drawingml/2006/main">
               <a:ext uri="{FF2B5EF4-FFF2-40B4-BE49-F238E27FC236}">
-                <a16:creationId xmlns:a16="http://schemas.microsoft.com/office/drawing/2014/main" id="{60FE2CB2-6B1B-4F86-9BA9-65FB74E5924A}"/>
+                <a16:creationId xmlns:a16="http://schemas.microsoft.com/office/drawing/2014/main" id="{641CAB65-518A-4420-8CE9-E0480400B424}"/>
               </a:ext>
             </a:extLst>
           </p:cNvPr>
@@ -8823,7 +8823,7 @@
           <p:cNvPr id="9" name="TextBox 8">
             <a:extLst xmlns:a="http://schemas.openxmlformats.org/drawingml/2006/main">
               <a:ext uri="{FF2B5EF4-FFF2-40B4-BE49-F238E27FC236}">
-                <a16:creationId xmlns:a16="http://schemas.microsoft.com/office/drawing/2014/main" id="{89BD4630-081D-47B5-8D36-E7F3BE40501F}"/>
+                <a16:creationId xmlns:a16="http://schemas.microsoft.com/office/drawing/2014/main" id="{D5A75490-B208-418B-94C8-C81623BF1116}"/>
               </a:ext>
             </a:extLst>
           </p:cNvPr>
@@ -8920,7 +8920,7 @@
           <p:cNvPr id="10" name="Rounded Rectangle 9">
             <a:extLst xmlns:a="http://schemas.openxmlformats.org/drawingml/2006/main">
               <a:ext uri="{FF2B5EF4-FFF2-40B4-BE49-F238E27FC236}">
-                <a16:creationId xmlns:a16="http://schemas.microsoft.com/office/drawing/2014/main" id="{67372E37-C827-4B6E-A456-D13E178A1165}"/>
+                <a16:creationId xmlns:a16="http://schemas.microsoft.com/office/drawing/2014/main" id="{26891B69-68CB-4652-BDCB-279E98E455BA}"/>
               </a:ext>
             </a:extLst>
           </p:cNvPr>
@@ -8977,7 +8977,7 @@
           <p:cNvPr id="11" name="TextBox 10">
             <a:extLst xmlns:a="http://schemas.openxmlformats.org/drawingml/2006/main">
               <a:ext uri="{FF2B5EF4-FFF2-40B4-BE49-F238E27FC236}">
-                <a16:creationId xmlns:a16="http://schemas.microsoft.com/office/drawing/2014/main" id="{186163EE-63A4-4C42-B9DB-E4069A676332}"/>
+                <a16:creationId xmlns:a16="http://schemas.microsoft.com/office/drawing/2014/main" id="{CEAE6288-47FF-4484-99FA-CA0E1A767BC3}"/>
               </a:ext>
             </a:extLst>
           </p:cNvPr>
@@ -9024,7 +9024,7 @@
           <p:cNvPr id="12" name="TextBox 11">
             <a:extLst xmlns:a="http://schemas.openxmlformats.org/drawingml/2006/main">
               <a:ext uri="{FF2B5EF4-FFF2-40B4-BE49-F238E27FC236}">
-                <a16:creationId xmlns:a16="http://schemas.microsoft.com/office/drawing/2014/main" id="{1A5F1F78-4700-4C9B-B0B0-A7784258220D}"/>
+                <a16:creationId xmlns:a16="http://schemas.microsoft.com/office/drawing/2014/main" id="{6C3B3009-E1E3-47DB-ABC4-6C42E76D5293}"/>
               </a:ext>
             </a:extLst>
           </p:cNvPr>
@@ -9069,7 +9069,7 @@
     </p:spTree>
     <p:extLst>
       <p:ext uri="{BB962C8B-B14F-4D97-AF65-F5344CB8AC3E}">
-        <p14:creationId xmlns:p14="http://schemas.microsoft.com/office/powerpoint/2010/main" val="1162552184"/>
+        <p14:creationId xmlns:p14="http://schemas.microsoft.com/office/powerpoint/2010/main" val="824765102"/>
       </p:ext>
     </p:extLst>
   </p:cSld>
@@ -9093,7 +9093,7 @@
           <p:cNvPr id="2" name="TextBox 1">
             <a:extLst xmlns:a="http://schemas.openxmlformats.org/drawingml/2006/main">
               <a:ext uri="{FF2B5EF4-FFF2-40B4-BE49-F238E27FC236}">
-                <a16:creationId xmlns:a16="http://schemas.microsoft.com/office/drawing/2014/main" id="{9AC091C6-52DE-4CDB-B4A9-CB9FF933EAB0}"/>
+                <a16:creationId xmlns:a16="http://schemas.microsoft.com/office/drawing/2014/main" id="{0D87D198-7BD3-47E1-9C99-A6E1F68811F0}"/>
               </a:ext>
             </a:extLst>
           </p:cNvPr>
@@ -9140,7 +9140,7 @@
           <p:cNvPr id="3" name="TextBox 2">
             <a:extLst xmlns:a="http://schemas.openxmlformats.org/drawingml/2006/main">
               <a:ext uri="{FF2B5EF4-FFF2-40B4-BE49-F238E27FC236}">
-                <a16:creationId xmlns:a16="http://schemas.microsoft.com/office/drawing/2014/main" id="{C88366A9-00F9-4E56-8612-801D096B94B7}"/>
+                <a16:creationId xmlns:a16="http://schemas.microsoft.com/office/drawing/2014/main" id="{61C0873D-00F4-4621-ADDB-6025326427CF}"/>
               </a:ext>
             </a:extLst>
           </p:cNvPr>
@@ -9187,7 +9187,7 @@
           <p:cNvPr id="4" name="Rectangle 3">
             <a:extLst xmlns:a="http://schemas.openxmlformats.org/drawingml/2006/main">
               <a:ext uri="{FF2B5EF4-FFF2-40B4-BE49-F238E27FC236}">
-                <a16:creationId xmlns:a16="http://schemas.microsoft.com/office/drawing/2014/main" id="{9B1696F2-1FA6-479F-B5C2-F7A64E345945}"/>
+                <a16:creationId xmlns:a16="http://schemas.microsoft.com/office/drawing/2014/main" id="{3941C8D0-FC58-41F6-BE84-26676317324E}"/>
               </a:ext>
             </a:extLst>
           </p:cNvPr>
@@ -9242,7 +9242,7 @@
           <p:cNvPr id="5" name="Rectangle 4">
             <a:extLst xmlns:a="http://schemas.openxmlformats.org/drawingml/2006/main">
               <a:ext uri="{FF2B5EF4-FFF2-40B4-BE49-F238E27FC236}">
-                <a16:creationId xmlns:a16="http://schemas.microsoft.com/office/drawing/2014/main" id="{E3CA2FF0-F45C-4B6E-BD25-446739BBC843}"/>
+                <a16:creationId xmlns:a16="http://schemas.microsoft.com/office/drawing/2014/main" id="{81CDB2EA-482B-478F-9672-DB18208F5152}"/>
               </a:ext>
             </a:extLst>
           </p:cNvPr>
@@ -9297,7 +9297,7 @@
           <p:cNvPr id="6" name="TextBox 5">
             <a:extLst xmlns:a="http://schemas.openxmlformats.org/drawingml/2006/main">
               <a:ext uri="{FF2B5EF4-FFF2-40B4-BE49-F238E27FC236}">
-                <a16:creationId xmlns:a16="http://schemas.microsoft.com/office/drawing/2014/main" id="{03880BF0-18D7-4F35-92B5-647507DF6301}"/>
+                <a16:creationId xmlns:a16="http://schemas.microsoft.com/office/drawing/2014/main" id="{6DF3A397-CFA0-47A7-95D3-EFC1F4A132A3}"/>
               </a:ext>
             </a:extLst>
           </p:cNvPr>
@@ -9334,7 +9334,7 @@
                 <a:ea typeface="Aptos"/>
                 <a:cs typeface="Aptos"/>
               </a:rPr>
-              <a:t>Independent public evidence summary · 2026.07.23-15 · 2026-07-22 · Sources: EPO Register; EP3032975B2</a:t>
+              <a:t>Independent public evidence summary · 2026.07.23-16 · 2026-07-22 · Sources: EPO Register; EP3032975B2</a:t>
             </a:r>
           </a:p>
         </p:txBody>
@@ -9344,7 +9344,7 @@
           <p:cNvPr id="7" name="TextBox 6">
             <a:extLst xmlns:a="http://schemas.openxmlformats.org/drawingml/2006/main">
               <a:ext uri="{FF2B5EF4-FFF2-40B4-BE49-F238E27FC236}">
-                <a16:creationId xmlns:a16="http://schemas.microsoft.com/office/drawing/2014/main" id="{3797CAD4-7381-4C2B-BA0C-B4F55D2E3442}"/>
+                <a16:creationId xmlns:a16="http://schemas.microsoft.com/office/drawing/2014/main" id="{5867C676-DA5F-463C-BC86-6306EEE9D58A}"/>
               </a:ext>
             </a:extLst>
           </p:cNvPr>
@@ -9391,7 +9391,7 @@
           <p:cNvPr id="8" name="Rounded Rectangle 7">
             <a:extLst xmlns:a="http://schemas.openxmlformats.org/drawingml/2006/main">
               <a:ext uri="{FF2B5EF4-FFF2-40B4-BE49-F238E27FC236}">
-                <a16:creationId xmlns:a16="http://schemas.microsoft.com/office/drawing/2014/main" id="{8FB01C58-BF62-486F-B927-94F70EF8EA6F}"/>
+                <a16:creationId xmlns:a16="http://schemas.microsoft.com/office/drawing/2014/main" id="{E63D8080-4EF6-4140-A2FA-2DCBECDF5834}"/>
               </a:ext>
             </a:extLst>
           </p:cNvPr>
@@ -9448,7 +9448,7 @@
           <p:cNvPr id="9" name="TextBox 8">
             <a:extLst xmlns:a="http://schemas.openxmlformats.org/drawingml/2006/main">
               <a:ext uri="{FF2B5EF4-FFF2-40B4-BE49-F238E27FC236}">
-                <a16:creationId xmlns:a16="http://schemas.microsoft.com/office/drawing/2014/main" id="{6C5EC31F-7AE8-4E0C-BB29-6949F18E24A7}"/>
+                <a16:creationId xmlns:a16="http://schemas.microsoft.com/office/drawing/2014/main" id="{F167AAAA-1FC1-4839-BD3D-5E29B4B1C528}"/>
               </a:ext>
             </a:extLst>
           </p:cNvPr>
@@ -9495,7 +9495,7 @@
           <p:cNvPr id="10" name="TextBox 9">
             <a:extLst xmlns:a="http://schemas.openxmlformats.org/drawingml/2006/main">
               <a:ext uri="{FF2B5EF4-FFF2-40B4-BE49-F238E27FC236}">
-                <a16:creationId xmlns:a16="http://schemas.microsoft.com/office/drawing/2014/main" id="{1B96556F-9EAA-40C1-9781-8E7F969E3960}"/>
+                <a16:creationId xmlns:a16="http://schemas.microsoft.com/office/drawing/2014/main" id="{7967249C-5746-415D-957E-8505D563D0DC}"/>
               </a:ext>
             </a:extLst>
           </p:cNvPr>
@@ -9542,7 +9542,7 @@
           <p:cNvPr id="11" name="Rounded Rectangle 10">
             <a:extLst xmlns:a="http://schemas.openxmlformats.org/drawingml/2006/main">
               <a:ext uri="{FF2B5EF4-FFF2-40B4-BE49-F238E27FC236}">
-                <a16:creationId xmlns:a16="http://schemas.microsoft.com/office/drawing/2014/main" id="{77AA7F28-3B7D-4129-AA13-14D3D5004EDA}"/>
+                <a16:creationId xmlns:a16="http://schemas.microsoft.com/office/drawing/2014/main" id="{E56772D1-8AAE-4F76-B680-198AF568D4D6}"/>
               </a:ext>
             </a:extLst>
           </p:cNvPr>
@@ -9599,7 +9599,7 @@
           <p:cNvPr id="12" name="TextBox 11">
             <a:extLst xmlns:a="http://schemas.openxmlformats.org/drawingml/2006/main">
               <a:ext uri="{FF2B5EF4-FFF2-40B4-BE49-F238E27FC236}">
-                <a16:creationId xmlns:a16="http://schemas.microsoft.com/office/drawing/2014/main" id="{5708FFD0-F7FB-4279-8BF0-F689638FEDFF}"/>
+                <a16:creationId xmlns:a16="http://schemas.microsoft.com/office/drawing/2014/main" id="{851A790E-CBBB-4786-9EE0-A40F8F0C4BAE}"/>
               </a:ext>
             </a:extLst>
           </p:cNvPr>
@@ -9646,7 +9646,7 @@
           <p:cNvPr id="13" name="TextBox 12">
             <a:extLst xmlns:a="http://schemas.openxmlformats.org/drawingml/2006/main">
               <a:ext uri="{FF2B5EF4-FFF2-40B4-BE49-F238E27FC236}">
-                <a16:creationId xmlns:a16="http://schemas.microsoft.com/office/drawing/2014/main" id="{E2911F1A-D394-465C-9C05-6A41D133E8DF}"/>
+                <a16:creationId xmlns:a16="http://schemas.microsoft.com/office/drawing/2014/main" id="{1E7B485E-C576-4447-A1B7-07303CD6BA62}"/>
               </a:ext>
             </a:extLst>
           </p:cNvPr>
@@ -9693,7 +9693,7 @@
           <p:cNvPr id="14" name="Rounded Rectangle 13">
             <a:extLst xmlns:a="http://schemas.openxmlformats.org/drawingml/2006/main">
               <a:ext uri="{FF2B5EF4-FFF2-40B4-BE49-F238E27FC236}">
-                <a16:creationId xmlns:a16="http://schemas.microsoft.com/office/drawing/2014/main" id="{528B2950-43F2-4250-92D9-0877417CD48D}"/>
+                <a16:creationId xmlns:a16="http://schemas.microsoft.com/office/drawing/2014/main" id="{76C03128-B871-4677-884E-36A19910876E}"/>
               </a:ext>
             </a:extLst>
           </p:cNvPr>
@@ -9750,7 +9750,7 @@
           <p:cNvPr id="15" name="TextBox 14">
             <a:extLst xmlns:a="http://schemas.openxmlformats.org/drawingml/2006/main">
               <a:ext uri="{FF2B5EF4-FFF2-40B4-BE49-F238E27FC236}">
-                <a16:creationId xmlns:a16="http://schemas.microsoft.com/office/drawing/2014/main" id="{261E8E42-963F-45A1-82D2-5C0EE4AFA500}"/>
+                <a16:creationId xmlns:a16="http://schemas.microsoft.com/office/drawing/2014/main" id="{6E64B091-8511-4690-AAEF-55EB93FBD14F}"/>
               </a:ext>
             </a:extLst>
           </p:cNvPr>
@@ -9797,7 +9797,7 @@
           <p:cNvPr id="16" name="TextBox 15">
             <a:extLst xmlns:a="http://schemas.openxmlformats.org/drawingml/2006/main">
               <a:ext uri="{FF2B5EF4-FFF2-40B4-BE49-F238E27FC236}">
-                <a16:creationId xmlns:a16="http://schemas.microsoft.com/office/drawing/2014/main" id="{FE38676E-06F1-4720-A0F3-2C5FAB9F1532}"/>
+                <a16:creationId xmlns:a16="http://schemas.microsoft.com/office/drawing/2014/main" id="{2938CCC8-03B1-46A1-9987-03A448BF6BCF}"/>
               </a:ext>
             </a:extLst>
           </p:cNvPr>
@@ -9844,7 +9844,7 @@
           <p:cNvPr id="17" name="TextBox 16">
             <a:extLst xmlns:a="http://schemas.openxmlformats.org/drawingml/2006/main">
               <a:ext uri="{FF2B5EF4-FFF2-40B4-BE49-F238E27FC236}">
-                <a16:creationId xmlns:a16="http://schemas.microsoft.com/office/drawing/2014/main" id="{2D4F11DA-980E-4BB8-B22F-AB332C94BC53}"/>
+                <a16:creationId xmlns:a16="http://schemas.microsoft.com/office/drawing/2014/main" id="{87B08DD7-C2B9-4FB7-BCC6-1D7F90BD72CB}"/>
               </a:ext>
             </a:extLst>
           </p:cNvPr>
@@ -9891,7 +9891,7 @@
           <p:cNvPr id="18" name="Rounded Rectangle 17">
             <a:extLst xmlns:a="http://schemas.openxmlformats.org/drawingml/2006/main">
               <a:ext uri="{FF2B5EF4-FFF2-40B4-BE49-F238E27FC236}">
-                <a16:creationId xmlns:a16="http://schemas.microsoft.com/office/drawing/2014/main" id="{C045CECC-7916-4F1F-9D20-621B30A58064}"/>
+                <a16:creationId xmlns:a16="http://schemas.microsoft.com/office/drawing/2014/main" id="{15C6BC1A-CB04-4255-A8E9-32352FC82EE1}"/>
               </a:ext>
             </a:extLst>
           </p:cNvPr>
@@ -9948,7 +9948,7 @@
           <p:cNvPr id="19" name="TextBox 18">
             <a:extLst xmlns:a="http://schemas.openxmlformats.org/drawingml/2006/main">
               <a:ext uri="{FF2B5EF4-FFF2-40B4-BE49-F238E27FC236}">
-                <a16:creationId xmlns:a16="http://schemas.microsoft.com/office/drawing/2014/main" id="{540BC090-9DFF-49BE-A544-F4DF04911E5F}"/>
+                <a16:creationId xmlns:a16="http://schemas.microsoft.com/office/drawing/2014/main" id="{ECB0BCBD-BAC7-412A-9F99-08E9BCFC1B21}"/>
               </a:ext>
             </a:extLst>
           </p:cNvPr>
@@ -9995,7 +9995,7 @@
           <p:cNvPr id="20" name="TextBox 19">
             <a:extLst xmlns:a="http://schemas.openxmlformats.org/drawingml/2006/main">
               <a:ext uri="{FF2B5EF4-FFF2-40B4-BE49-F238E27FC236}">
-                <a16:creationId xmlns:a16="http://schemas.microsoft.com/office/drawing/2014/main" id="{020D2B4A-017C-420C-9220-41171F979BEF}"/>
+                <a16:creationId xmlns:a16="http://schemas.microsoft.com/office/drawing/2014/main" id="{4F231C04-AA18-4247-BC13-C8908F81E4DB}"/>
               </a:ext>
             </a:extLst>
           </p:cNvPr>
@@ -10040,7 +10040,7 @@
     </p:spTree>
     <p:extLst>
       <p:ext uri="{BB962C8B-B14F-4D97-AF65-F5344CB8AC3E}">
-        <p14:creationId xmlns:p14="http://schemas.microsoft.com/office/powerpoint/2010/main" val="1425319304"/>
+        <p14:creationId xmlns:p14="http://schemas.microsoft.com/office/powerpoint/2010/main" val="47567735"/>
       </p:ext>
     </p:extLst>
   </p:cSld>
@@ -10064,7 +10064,7 @@
           <p:cNvPr id="2" name="TextBox 1">
             <a:extLst xmlns:a="http://schemas.openxmlformats.org/drawingml/2006/main">
               <a:ext uri="{FF2B5EF4-FFF2-40B4-BE49-F238E27FC236}">
-                <a16:creationId xmlns:a16="http://schemas.microsoft.com/office/drawing/2014/main" id="{C801A883-B320-4A44-8DD2-1A32ABD8251F}"/>
+                <a16:creationId xmlns:a16="http://schemas.microsoft.com/office/drawing/2014/main" id="{998BE578-BEB3-4087-B2C4-5549C71CE9F2}"/>
               </a:ext>
             </a:extLst>
           </p:cNvPr>
@@ -10111,7 +10111,7 @@
           <p:cNvPr id="3" name="TextBox 2">
             <a:extLst xmlns:a="http://schemas.openxmlformats.org/drawingml/2006/main">
               <a:ext uri="{FF2B5EF4-FFF2-40B4-BE49-F238E27FC236}">
-                <a16:creationId xmlns:a16="http://schemas.microsoft.com/office/drawing/2014/main" id="{2E173198-7AA7-47E2-B03B-A61014EE65DA}"/>
+                <a16:creationId xmlns:a16="http://schemas.microsoft.com/office/drawing/2014/main" id="{E7EAB164-9D18-4C3D-A124-C30FB36546E5}"/>
               </a:ext>
             </a:extLst>
           </p:cNvPr>
@@ -10158,7 +10158,7 @@
           <p:cNvPr id="4" name="Rectangle 3">
             <a:extLst xmlns:a="http://schemas.openxmlformats.org/drawingml/2006/main">
               <a:ext uri="{FF2B5EF4-FFF2-40B4-BE49-F238E27FC236}">
-                <a16:creationId xmlns:a16="http://schemas.microsoft.com/office/drawing/2014/main" id="{6AF20F3D-1611-4FD1-A625-442EB15EFF8E}"/>
+                <a16:creationId xmlns:a16="http://schemas.microsoft.com/office/drawing/2014/main" id="{0881B98B-4B85-4236-A925-5AD553C0B542}"/>
               </a:ext>
             </a:extLst>
           </p:cNvPr>
@@ -10213,7 +10213,7 @@
           <p:cNvPr id="5" name="Rectangle 4">
             <a:extLst xmlns:a="http://schemas.openxmlformats.org/drawingml/2006/main">
               <a:ext uri="{FF2B5EF4-FFF2-40B4-BE49-F238E27FC236}">
-                <a16:creationId xmlns:a16="http://schemas.microsoft.com/office/drawing/2014/main" id="{F0E27165-22ED-42E2-8AA3-214627A6F6C9}"/>
+                <a16:creationId xmlns:a16="http://schemas.microsoft.com/office/drawing/2014/main" id="{C3B9B954-75FB-4A9F-B902-861682C9A973}"/>
               </a:ext>
             </a:extLst>
           </p:cNvPr>
@@ -10268,7 +10268,7 @@
           <p:cNvPr id="6" name="TextBox 5">
             <a:extLst xmlns:a="http://schemas.openxmlformats.org/drawingml/2006/main">
               <a:ext uri="{FF2B5EF4-FFF2-40B4-BE49-F238E27FC236}">
-                <a16:creationId xmlns:a16="http://schemas.microsoft.com/office/drawing/2014/main" id="{012D581E-F40C-4E15-ABC2-54B62A041F26}"/>
+                <a16:creationId xmlns:a16="http://schemas.microsoft.com/office/drawing/2014/main" id="{AB64F095-ABC8-4811-83BD-99BC8E993B82}"/>
               </a:ext>
             </a:extLst>
           </p:cNvPr>
@@ -10305,7 +10305,7 @@
                 <a:ea typeface="Aptos"/>
                 <a:cs typeface="Aptos"/>
               </a:rPr>
-              <a:t>Independent public evidence summary · 2026.07.23-15 · 2026-07-22 · Sources: EP3032975B2; 7 O 3341/24</a:t>
+              <a:t>Independent public evidence summary · 2026.07.23-16 · 2026-07-22 · Sources: EP3032975B2; 7 O 3341/24</a:t>
             </a:r>
           </a:p>
         </p:txBody>
@@ -10315,7 +10315,7 @@
           <p:cNvPr id="7" name="TextBox 6">
             <a:extLst xmlns:a="http://schemas.openxmlformats.org/drawingml/2006/main">
               <a:ext uri="{FF2B5EF4-FFF2-40B4-BE49-F238E27FC236}">
-                <a16:creationId xmlns:a16="http://schemas.microsoft.com/office/drawing/2014/main" id="{BEDAE153-4E49-4C56-9F3E-ABF6972C7C76}"/>
+                <a16:creationId xmlns:a16="http://schemas.microsoft.com/office/drawing/2014/main" id="{B162AFB3-542F-48BF-A1A9-006027C81959}"/>
               </a:ext>
             </a:extLst>
           </p:cNvPr>
@@ -10362,7 +10362,7 @@
           <p:cNvPr id="8" name="TextBox 7">
             <a:extLst xmlns:a="http://schemas.openxmlformats.org/drawingml/2006/main">
               <a:ext uri="{FF2B5EF4-FFF2-40B4-BE49-F238E27FC236}">
-                <a16:creationId xmlns:a16="http://schemas.microsoft.com/office/drawing/2014/main" id="{E7AB64F2-15E6-43B7-8A23-647DAC7D659B}"/>
+                <a16:creationId xmlns:a16="http://schemas.microsoft.com/office/drawing/2014/main" id="{6169C0D5-B021-4306-BBA0-74824B7AB501}"/>
               </a:ext>
             </a:extLst>
           </p:cNvPr>
@@ -10409,7 +10409,7 @@
           <p:cNvPr id="9" name="TextBox 8">
             <a:extLst xmlns:a="http://schemas.openxmlformats.org/drawingml/2006/main">
               <a:ext uri="{FF2B5EF4-FFF2-40B4-BE49-F238E27FC236}">
-                <a16:creationId xmlns:a16="http://schemas.microsoft.com/office/drawing/2014/main" id="{51849CD9-603A-4D4B-9CBC-B1396426CBE5}"/>
+                <a16:creationId xmlns:a16="http://schemas.microsoft.com/office/drawing/2014/main" id="{4D9F2049-6F67-48C4-858F-CC4A2E1BE63A}"/>
               </a:ext>
             </a:extLst>
           </p:cNvPr>
@@ -10506,7 +10506,7 @@
           <p:cNvPr id="10" name="Rounded Rectangle 9">
             <a:extLst xmlns:a="http://schemas.openxmlformats.org/drawingml/2006/main">
               <a:ext uri="{FF2B5EF4-FFF2-40B4-BE49-F238E27FC236}">
-                <a16:creationId xmlns:a16="http://schemas.microsoft.com/office/drawing/2014/main" id="{4D1CF742-F610-46C8-B283-C8C4B29072A0}"/>
+                <a16:creationId xmlns:a16="http://schemas.microsoft.com/office/drawing/2014/main" id="{86D96542-3D74-41E2-9C08-B11C6C947B4E}"/>
               </a:ext>
             </a:extLst>
           </p:cNvPr>
@@ -10563,7 +10563,7 @@
           <p:cNvPr id="11" name="TextBox 10">
             <a:extLst xmlns:a="http://schemas.openxmlformats.org/drawingml/2006/main">
               <a:ext uri="{FF2B5EF4-FFF2-40B4-BE49-F238E27FC236}">
-                <a16:creationId xmlns:a16="http://schemas.microsoft.com/office/drawing/2014/main" id="{FC631C72-C4A6-4238-A435-C30E2E6DD1D2}"/>
+                <a16:creationId xmlns:a16="http://schemas.microsoft.com/office/drawing/2014/main" id="{821CCBA4-1E17-42B1-92D0-29DB55B58F39}"/>
               </a:ext>
             </a:extLst>
           </p:cNvPr>
@@ -10610,7 +10610,7 @@
           <p:cNvPr id="12" name="TextBox 11">
             <a:extLst xmlns:a="http://schemas.openxmlformats.org/drawingml/2006/main">
               <a:ext uri="{FF2B5EF4-FFF2-40B4-BE49-F238E27FC236}">
-                <a16:creationId xmlns:a16="http://schemas.microsoft.com/office/drawing/2014/main" id="{DA455349-1A6C-4A89-AD1E-0BF8882D1657}"/>
+                <a16:creationId xmlns:a16="http://schemas.microsoft.com/office/drawing/2014/main" id="{49158CE8-0E71-48AE-A17F-E5B040B7B738}"/>
               </a:ext>
             </a:extLst>
           </p:cNvPr>
@@ -10655,7 +10655,7 @@
     </p:spTree>
     <p:extLst>
       <p:ext uri="{BB962C8B-B14F-4D97-AF65-F5344CB8AC3E}">
-        <p14:creationId xmlns:p14="http://schemas.microsoft.com/office/powerpoint/2010/main" val="82642986"/>
+        <p14:creationId xmlns:p14="http://schemas.microsoft.com/office/powerpoint/2010/main" val="2015225750"/>
       </p:ext>
     </p:extLst>
   </p:cSld>
@@ -10679,7 +10679,7 @@
           <p:cNvPr id="2" name="TextBox 1">
             <a:extLst xmlns:a="http://schemas.openxmlformats.org/drawingml/2006/main">
               <a:ext uri="{FF2B5EF4-FFF2-40B4-BE49-F238E27FC236}">
-                <a16:creationId xmlns:a16="http://schemas.microsoft.com/office/drawing/2014/main" id="{846A273C-82E6-49B9-A584-F3B95BFE1448}"/>
+                <a16:creationId xmlns:a16="http://schemas.microsoft.com/office/drawing/2014/main" id="{E3B67A0E-2B84-4196-93FC-D481312728F4}"/>
               </a:ext>
             </a:extLst>
           </p:cNvPr>
@@ -10726,7 +10726,7 @@
           <p:cNvPr id="3" name="TextBox 2">
             <a:extLst xmlns:a="http://schemas.openxmlformats.org/drawingml/2006/main">
               <a:ext uri="{FF2B5EF4-FFF2-40B4-BE49-F238E27FC236}">
-                <a16:creationId xmlns:a16="http://schemas.microsoft.com/office/drawing/2014/main" id="{F20946E9-97C5-4CE4-8C36-821B42B4DEC1}"/>
+                <a16:creationId xmlns:a16="http://schemas.microsoft.com/office/drawing/2014/main" id="{360B797C-4817-4DDA-A3CE-095F5FAD5DA8}"/>
               </a:ext>
             </a:extLst>
           </p:cNvPr>
@@ -10773,7 +10773,7 @@
           <p:cNvPr id="4" name="Rectangle 3">
             <a:extLst xmlns:a="http://schemas.openxmlformats.org/drawingml/2006/main">
               <a:ext uri="{FF2B5EF4-FFF2-40B4-BE49-F238E27FC236}">
-                <a16:creationId xmlns:a16="http://schemas.microsoft.com/office/drawing/2014/main" id="{AE6D0B54-9FA3-4B3E-BDC8-470CBFEA7425}"/>
+                <a16:creationId xmlns:a16="http://schemas.microsoft.com/office/drawing/2014/main" id="{A5B03F39-7FEF-4EA9-8F70-31D9B09B1C78}"/>
               </a:ext>
             </a:extLst>
           </p:cNvPr>
@@ -10828,7 +10828,7 @@
           <p:cNvPr id="5" name="Rectangle 4">
             <a:extLst xmlns:a="http://schemas.openxmlformats.org/drawingml/2006/main">
               <a:ext uri="{FF2B5EF4-FFF2-40B4-BE49-F238E27FC236}">
-                <a16:creationId xmlns:a16="http://schemas.microsoft.com/office/drawing/2014/main" id="{23B21057-7CBC-440E-831E-061E852DACFB}"/>
+                <a16:creationId xmlns:a16="http://schemas.microsoft.com/office/drawing/2014/main" id="{FB8ADC96-478D-4CAF-9011-0C9859C78430}"/>
               </a:ext>
             </a:extLst>
           </p:cNvPr>
@@ -10883,7 +10883,7 @@
           <p:cNvPr id="6" name="TextBox 5">
             <a:extLst xmlns:a="http://schemas.openxmlformats.org/drawingml/2006/main">
               <a:ext uri="{FF2B5EF4-FFF2-40B4-BE49-F238E27FC236}">
-                <a16:creationId xmlns:a16="http://schemas.microsoft.com/office/drawing/2014/main" id="{38387860-F331-4657-8F15-ECE41D2E6E9A}"/>
+                <a16:creationId xmlns:a16="http://schemas.microsoft.com/office/drawing/2014/main" id="{9EE9A080-4964-4529-BC78-CD2C058769EE}"/>
               </a:ext>
             </a:extLst>
           </p:cNvPr>
@@ -10920,7 +10920,7 @@
                 <a:ea typeface="Aptos"/>
                 <a:cs typeface="Aptos"/>
               </a:rPr>
-              <a:t>Independent public evidence summary · 2026.07.23-15 · 2026-07-22 · Sources: Market-values; IMARC; GVR; Fortune</a:t>
+              <a:t>Independent public evidence summary · 2026.07.23-16 · 2026-07-22 · Sources: Market-values; IMARC; GVR; Fortune</a:t>
             </a:r>
           </a:p>
         </p:txBody>
@@ -10930,7 +10930,7 @@
           <p:cNvPr id="7" name="TextBox 6">
             <a:extLst xmlns:a="http://schemas.openxmlformats.org/drawingml/2006/main">
               <a:ext uri="{FF2B5EF4-FFF2-40B4-BE49-F238E27FC236}">
-                <a16:creationId xmlns:a16="http://schemas.microsoft.com/office/drawing/2014/main" id="{B1290B9E-0100-4D62-A908-AA7DDB156BF1}"/>
+                <a16:creationId xmlns:a16="http://schemas.microsoft.com/office/drawing/2014/main" id="{8516738B-1392-4D3F-8079-72E79EE83159}"/>
               </a:ext>
             </a:extLst>
           </p:cNvPr>
@@ -10977,7 +10977,7 @@
           <p:cNvPr id="8" name="Rounded Rectangle 7">
             <a:extLst xmlns:a="http://schemas.openxmlformats.org/drawingml/2006/main">
               <a:ext uri="{FF2B5EF4-FFF2-40B4-BE49-F238E27FC236}">
-                <a16:creationId xmlns:a16="http://schemas.microsoft.com/office/drawing/2014/main" id="{A18F8368-11F3-4617-AD88-8E726453B1C9}"/>
+                <a16:creationId xmlns:a16="http://schemas.microsoft.com/office/drawing/2014/main" id="{585EA7C3-3C35-416E-800E-73DDCAC93D68}"/>
               </a:ext>
             </a:extLst>
           </p:cNvPr>
@@ -11034,7 +11034,7 @@
           <p:cNvPr id="9" name="TextBox 8">
             <a:extLst xmlns:a="http://schemas.openxmlformats.org/drawingml/2006/main">
               <a:ext uri="{FF2B5EF4-FFF2-40B4-BE49-F238E27FC236}">
-                <a16:creationId xmlns:a16="http://schemas.microsoft.com/office/drawing/2014/main" id="{CA622434-1EED-450C-B9A4-5221CED542B5}"/>
+                <a16:creationId xmlns:a16="http://schemas.microsoft.com/office/drawing/2014/main" id="{E42D5BD3-2D10-4207-93FD-F28C8B3877DE}"/>
               </a:ext>
             </a:extLst>
           </p:cNvPr>
@@ -11081,7 +11081,7 @@
           <p:cNvPr id="10" name="TextBox 9">
             <a:extLst xmlns:a="http://schemas.openxmlformats.org/drawingml/2006/main">
               <a:ext uri="{FF2B5EF4-FFF2-40B4-BE49-F238E27FC236}">
-                <a16:creationId xmlns:a16="http://schemas.microsoft.com/office/drawing/2014/main" id="{F1442F14-4A7E-43D0-890C-86C4E6145FFC}"/>
+                <a16:creationId xmlns:a16="http://schemas.microsoft.com/office/drawing/2014/main" id="{776658E5-003E-404F-9244-1CDAF85CFE0B}"/>
               </a:ext>
             </a:extLst>
           </p:cNvPr>
@@ -11128,7 +11128,7 @@
           <p:cNvPr id="11" name="Rounded Rectangle 10">
             <a:extLst xmlns:a="http://schemas.openxmlformats.org/drawingml/2006/main">
               <a:ext uri="{FF2B5EF4-FFF2-40B4-BE49-F238E27FC236}">
-                <a16:creationId xmlns:a16="http://schemas.microsoft.com/office/drawing/2014/main" id="{E07002DE-39C6-4991-A9D3-3DE5023E87F0}"/>
+                <a16:creationId xmlns:a16="http://schemas.microsoft.com/office/drawing/2014/main" id="{AD4A576D-9774-4A9D-9781-0EBAF64AC266}"/>
               </a:ext>
             </a:extLst>
           </p:cNvPr>
@@ -11185,7 +11185,7 @@
           <p:cNvPr id="12" name="TextBox 11">
             <a:extLst xmlns:a="http://schemas.openxmlformats.org/drawingml/2006/main">
               <a:ext uri="{FF2B5EF4-FFF2-40B4-BE49-F238E27FC236}">
-                <a16:creationId xmlns:a16="http://schemas.microsoft.com/office/drawing/2014/main" id="{B318072B-200D-4477-AB12-D7AFD42A83C0}"/>
+                <a16:creationId xmlns:a16="http://schemas.microsoft.com/office/drawing/2014/main" id="{20A98095-6006-4A8E-AD10-979B1C08A58A}"/>
               </a:ext>
             </a:extLst>
           </p:cNvPr>
@@ -11232,7 +11232,7 @@
           <p:cNvPr id="13" name="TextBox 12">
             <a:extLst xmlns:a="http://schemas.openxmlformats.org/drawingml/2006/main">
               <a:ext uri="{FF2B5EF4-FFF2-40B4-BE49-F238E27FC236}">
-                <a16:creationId xmlns:a16="http://schemas.microsoft.com/office/drawing/2014/main" id="{4DDE2352-AB57-4963-A71B-BCE62AEBC375}"/>
+                <a16:creationId xmlns:a16="http://schemas.microsoft.com/office/drawing/2014/main" id="{ECA79E6D-86C8-422D-B81C-883DF600FF9C}"/>
               </a:ext>
             </a:extLst>
           </p:cNvPr>
@@ -11279,7 +11279,7 @@
           <p:cNvPr id="14" name="Rounded Rectangle 13">
             <a:extLst xmlns:a="http://schemas.openxmlformats.org/drawingml/2006/main">
               <a:ext uri="{FF2B5EF4-FFF2-40B4-BE49-F238E27FC236}">
-                <a16:creationId xmlns:a16="http://schemas.microsoft.com/office/drawing/2014/main" id="{55D94BA6-0FA8-478E-9641-B60EE464FA4E}"/>
+                <a16:creationId xmlns:a16="http://schemas.microsoft.com/office/drawing/2014/main" id="{D3B260E5-25E6-4F2F-A52E-8242DD999F05}"/>
               </a:ext>
             </a:extLst>
           </p:cNvPr>
@@ -11336,7 +11336,7 @@
           <p:cNvPr id="15" name="TextBox 14">
             <a:extLst xmlns:a="http://schemas.openxmlformats.org/drawingml/2006/main">
               <a:ext uri="{FF2B5EF4-FFF2-40B4-BE49-F238E27FC236}">
-                <a16:creationId xmlns:a16="http://schemas.microsoft.com/office/drawing/2014/main" id="{9C9A3367-079B-4CE1-B5A7-77C6AD6C9DFC}"/>
+                <a16:creationId xmlns:a16="http://schemas.microsoft.com/office/drawing/2014/main" id="{F1E2F2A6-2440-4722-BE6A-FBCA8D9EB4AA}"/>
               </a:ext>
             </a:extLst>
           </p:cNvPr>
@@ -11383,7 +11383,7 @@
           <p:cNvPr id="16" name="TextBox 15">
             <a:extLst xmlns:a="http://schemas.openxmlformats.org/drawingml/2006/main">
               <a:ext uri="{FF2B5EF4-FFF2-40B4-BE49-F238E27FC236}">
-                <a16:creationId xmlns:a16="http://schemas.microsoft.com/office/drawing/2014/main" id="{67372151-5D92-4944-9254-031C6D28019E}"/>
+                <a16:creationId xmlns:a16="http://schemas.microsoft.com/office/drawing/2014/main" id="{305D5357-270B-45E4-BB4F-80DD3A6E5CE7}"/>
               </a:ext>
             </a:extLst>
           </p:cNvPr>
@@ -11430,7 +11430,7 @@
           <p:cNvPr id="17" name="TextBox 16">
             <a:extLst xmlns:a="http://schemas.openxmlformats.org/drawingml/2006/main">
               <a:ext uri="{FF2B5EF4-FFF2-40B4-BE49-F238E27FC236}">
-                <a16:creationId xmlns:a16="http://schemas.microsoft.com/office/drawing/2014/main" id="{9ADA6D07-F0B2-4E02-A59B-0171C93859C3}"/>
+                <a16:creationId xmlns:a16="http://schemas.microsoft.com/office/drawing/2014/main" id="{E63A138C-BE9A-458A-B5C8-684D80DE9775}"/>
               </a:ext>
             </a:extLst>
           </p:cNvPr>
@@ -11477,7 +11477,7 @@
           <p:cNvPr id="18" name="Rounded Rectangle 17">
             <a:extLst xmlns:a="http://schemas.openxmlformats.org/drawingml/2006/main">
               <a:ext uri="{FF2B5EF4-FFF2-40B4-BE49-F238E27FC236}">
-                <a16:creationId xmlns:a16="http://schemas.microsoft.com/office/drawing/2014/main" id="{08922F8C-7C0F-4F3A-AEF9-79C679FA37C8}"/>
+                <a16:creationId xmlns:a16="http://schemas.microsoft.com/office/drawing/2014/main" id="{68EEAFE0-138D-46C2-B6AC-B52E96A807E9}"/>
               </a:ext>
             </a:extLst>
           </p:cNvPr>
@@ -11534,7 +11534,7 @@
           <p:cNvPr id="19" name="TextBox 18">
             <a:extLst xmlns:a="http://schemas.openxmlformats.org/drawingml/2006/main">
               <a:ext uri="{FF2B5EF4-FFF2-40B4-BE49-F238E27FC236}">
-                <a16:creationId xmlns:a16="http://schemas.microsoft.com/office/drawing/2014/main" id="{636D39FB-CCF4-4809-8DD4-12D35A85E3D9}"/>
+                <a16:creationId xmlns:a16="http://schemas.microsoft.com/office/drawing/2014/main" id="{5A2865D7-3A1D-4496-BF24-ACD8F7FAF5B8}"/>
               </a:ext>
             </a:extLst>
           </p:cNvPr>
@@ -11581,7 +11581,7 @@
           <p:cNvPr id="20" name="TextBox 19">
             <a:extLst xmlns:a="http://schemas.openxmlformats.org/drawingml/2006/main">
               <a:ext uri="{FF2B5EF4-FFF2-40B4-BE49-F238E27FC236}">
-                <a16:creationId xmlns:a16="http://schemas.microsoft.com/office/drawing/2014/main" id="{1FCBB400-EA67-4A63-99D8-048B79CBB01C}"/>
+                <a16:creationId xmlns:a16="http://schemas.microsoft.com/office/drawing/2014/main" id="{083D6E84-227F-45DC-901D-FDC1F47F6E74}"/>
               </a:ext>
             </a:extLst>
           </p:cNvPr>
@@ -11626,7 +11626,7 @@
     </p:spTree>
     <p:extLst>
       <p:ext uri="{BB962C8B-B14F-4D97-AF65-F5344CB8AC3E}">
-        <p14:creationId xmlns:p14="http://schemas.microsoft.com/office/powerpoint/2010/main" val="700484083"/>
+        <p14:creationId xmlns:p14="http://schemas.microsoft.com/office/powerpoint/2010/main" val="630013886"/>
       </p:ext>
     </p:extLst>
   </p:cSld>
@@ -11650,7 +11650,7 @@
           <p:cNvPr id="2" name="TextBox 1">
             <a:extLst xmlns:a="http://schemas.openxmlformats.org/drawingml/2006/main">
               <a:ext uri="{FF2B5EF4-FFF2-40B4-BE49-F238E27FC236}">
-                <a16:creationId xmlns:a16="http://schemas.microsoft.com/office/drawing/2014/main" id="{4DF4D2C0-76BB-49F2-BFE9-6E23410D5D4A}"/>
+                <a16:creationId xmlns:a16="http://schemas.microsoft.com/office/drawing/2014/main" id="{E8B38D50-BC00-41A2-AA44-3D198BDC285F}"/>
               </a:ext>
             </a:extLst>
           </p:cNvPr>
@@ -11697,7 +11697,7 @@
           <p:cNvPr id="3" name="TextBox 2">
             <a:extLst xmlns:a="http://schemas.openxmlformats.org/drawingml/2006/main">
               <a:ext uri="{FF2B5EF4-FFF2-40B4-BE49-F238E27FC236}">
-                <a16:creationId xmlns:a16="http://schemas.microsoft.com/office/drawing/2014/main" id="{4993C675-2DB2-48E6-9F60-A1D568F4B6E0}"/>
+                <a16:creationId xmlns:a16="http://schemas.microsoft.com/office/drawing/2014/main" id="{DE80A0AA-C55A-4D9F-BD2D-F37957C6E1F8}"/>
               </a:ext>
             </a:extLst>
           </p:cNvPr>
@@ -11744,7 +11744,7 @@
           <p:cNvPr id="4" name="Rectangle 3">
             <a:extLst xmlns:a="http://schemas.openxmlformats.org/drawingml/2006/main">
               <a:ext uri="{FF2B5EF4-FFF2-40B4-BE49-F238E27FC236}">
-                <a16:creationId xmlns:a16="http://schemas.microsoft.com/office/drawing/2014/main" id="{CEDFAD1C-B41D-4E2E-9FFB-04F63429DFA9}"/>
+                <a16:creationId xmlns:a16="http://schemas.microsoft.com/office/drawing/2014/main" id="{AB95CA8C-B083-4F89-8157-4C34A016889E}"/>
               </a:ext>
             </a:extLst>
           </p:cNvPr>
@@ -11799,7 +11799,7 @@
           <p:cNvPr id="5" name="Rectangle 4">
             <a:extLst xmlns:a="http://schemas.openxmlformats.org/drawingml/2006/main">
               <a:ext uri="{FF2B5EF4-FFF2-40B4-BE49-F238E27FC236}">
-                <a16:creationId xmlns:a16="http://schemas.microsoft.com/office/drawing/2014/main" id="{0434B683-6770-462C-A909-ABCF6FA0A957}"/>
+                <a16:creationId xmlns:a16="http://schemas.microsoft.com/office/drawing/2014/main" id="{C1719DB8-B57C-49B2-A1BA-D934EEB59B39}"/>
               </a:ext>
             </a:extLst>
           </p:cNvPr>
@@ -11854,7 +11854,7 @@
           <p:cNvPr id="6" name="TextBox 5">
             <a:extLst xmlns:a="http://schemas.openxmlformats.org/drawingml/2006/main">
               <a:ext uri="{FF2B5EF4-FFF2-40B4-BE49-F238E27FC236}">
-                <a16:creationId xmlns:a16="http://schemas.microsoft.com/office/drawing/2014/main" id="{9C72C607-DE02-4E43-805B-CC3E2B5A9E75}"/>
+                <a16:creationId xmlns:a16="http://schemas.microsoft.com/office/drawing/2014/main" id="{2925C6F1-A6DD-40FF-8BE8-BE08AD843A25}"/>
               </a:ext>
             </a:extLst>
           </p:cNvPr>
@@ -11891,7 +11891,7 @@
                 <a:ea typeface="Aptos"/>
                 <a:cs typeface="Aptos"/>
               </a:rPr>
-              <a:t>Independent public evidence summary · 2026.07.23-15 · 2026-07-22 · Sources: WIPO licensing; WIPO IP Finance</a:t>
+              <a:t>Independent public evidence summary · 2026.07.23-16 · 2026-07-22 · Sources: WIPO licensing; WIPO IP Finance</a:t>
             </a:r>
           </a:p>
         </p:txBody>
@@ -11901,7 +11901,7 @@
           <p:cNvPr id="7" name="TextBox 6">
             <a:extLst xmlns:a="http://schemas.openxmlformats.org/drawingml/2006/main">
               <a:ext uri="{FF2B5EF4-FFF2-40B4-BE49-F238E27FC236}">
-                <a16:creationId xmlns:a16="http://schemas.microsoft.com/office/drawing/2014/main" id="{3094B7E0-9B52-47E8-AA02-C4177BD8E9F6}"/>
+                <a16:creationId xmlns:a16="http://schemas.microsoft.com/office/drawing/2014/main" id="{CF67CB06-A495-4034-AAEC-CEB37BCDD0C6}"/>
               </a:ext>
             </a:extLst>
           </p:cNvPr>
@@ -11948,7 +11948,7 @@
           <p:cNvPr id="8" name="TextBox 7">
             <a:extLst xmlns:a="http://schemas.openxmlformats.org/drawingml/2006/main">
               <a:ext uri="{FF2B5EF4-FFF2-40B4-BE49-F238E27FC236}">
-                <a16:creationId xmlns:a16="http://schemas.microsoft.com/office/drawing/2014/main" id="{9E4F21D2-B4B1-499C-87DE-D140FC40FF9A}"/>
+                <a16:creationId xmlns:a16="http://schemas.microsoft.com/office/drawing/2014/main" id="{C9B12B50-168E-42BA-B3A5-20DF33B4D1B9}"/>
               </a:ext>
             </a:extLst>
           </p:cNvPr>
@@ -11995,7 +11995,7 @@
           <p:cNvPr id="9" name="TextBox 8">
             <a:extLst xmlns:a="http://schemas.openxmlformats.org/drawingml/2006/main">
               <a:ext uri="{FF2B5EF4-FFF2-40B4-BE49-F238E27FC236}">
-                <a16:creationId xmlns:a16="http://schemas.microsoft.com/office/drawing/2014/main" id="{631B2650-876B-4F2F-B984-4EFFBE42428F}"/>
+                <a16:creationId xmlns:a16="http://schemas.microsoft.com/office/drawing/2014/main" id="{10A7444C-85C8-4D1A-9F13-025C64B20413}"/>
               </a:ext>
             </a:extLst>
           </p:cNvPr>
@@ -12092,7 +12092,7 @@
           <p:cNvPr id="10" name="Rounded Rectangle 9">
             <a:extLst xmlns:a="http://schemas.openxmlformats.org/drawingml/2006/main">
               <a:ext uri="{FF2B5EF4-FFF2-40B4-BE49-F238E27FC236}">
-                <a16:creationId xmlns:a16="http://schemas.microsoft.com/office/drawing/2014/main" id="{06C420AD-A5AA-4A2D-B074-85B6D855CF46}"/>
+                <a16:creationId xmlns:a16="http://schemas.microsoft.com/office/drawing/2014/main" id="{698E7C2F-77FE-4DA1-9598-209822CF953C}"/>
               </a:ext>
             </a:extLst>
           </p:cNvPr>
@@ -12149,7 +12149,7 @@
           <p:cNvPr id="11" name="TextBox 10">
             <a:extLst xmlns:a="http://schemas.openxmlformats.org/drawingml/2006/main">
               <a:ext uri="{FF2B5EF4-FFF2-40B4-BE49-F238E27FC236}">
-                <a16:creationId xmlns:a16="http://schemas.microsoft.com/office/drawing/2014/main" id="{2C71D6FC-4D15-4E94-9ECF-183CFF74C6E7}"/>
+                <a16:creationId xmlns:a16="http://schemas.microsoft.com/office/drawing/2014/main" id="{D910E5A3-870F-49B8-AA5B-DDA7B1520FB9}"/>
               </a:ext>
             </a:extLst>
           </p:cNvPr>
@@ -12196,7 +12196,7 @@
           <p:cNvPr id="12" name="TextBox 11">
             <a:extLst xmlns:a="http://schemas.openxmlformats.org/drawingml/2006/main">
               <a:ext uri="{FF2B5EF4-FFF2-40B4-BE49-F238E27FC236}">
-                <a16:creationId xmlns:a16="http://schemas.microsoft.com/office/drawing/2014/main" id="{1741FC6D-FB35-4E32-B3B5-A69A4F9B7778}"/>
+                <a16:creationId xmlns:a16="http://schemas.microsoft.com/office/drawing/2014/main" id="{3D7FE59A-DC23-404D-A680-FEF69D883FD6}"/>
               </a:ext>
             </a:extLst>
           </p:cNvPr>
@@ -12241,7 +12241,7 @@
     </p:spTree>
     <p:extLst>
       <p:ext uri="{BB962C8B-B14F-4D97-AF65-F5344CB8AC3E}">
-        <p14:creationId xmlns:p14="http://schemas.microsoft.com/office/powerpoint/2010/main" val="63937885"/>
+        <p14:creationId xmlns:p14="http://schemas.microsoft.com/office/powerpoint/2010/main" val="303168158"/>
       </p:ext>
     </p:extLst>
   </p:cSld>
@@ -12265,7 +12265,7 @@
           <p:cNvPr id="2" name="TextBox 1">
             <a:extLst xmlns:a="http://schemas.openxmlformats.org/drawingml/2006/main">
               <a:ext uri="{FF2B5EF4-FFF2-40B4-BE49-F238E27FC236}">
-                <a16:creationId xmlns:a16="http://schemas.microsoft.com/office/drawing/2014/main" id="{7344E825-FB54-4908-B012-F7B7A782D6D6}"/>
+                <a16:creationId xmlns:a16="http://schemas.microsoft.com/office/drawing/2014/main" id="{EDA46EE5-F28E-40A2-9CC6-C6EF2D1DD23A}"/>
               </a:ext>
             </a:extLst>
           </p:cNvPr>
@@ -12312,7 +12312,7 @@
           <p:cNvPr id="3" name="TextBox 2">
             <a:extLst xmlns:a="http://schemas.openxmlformats.org/drawingml/2006/main">
               <a:ext uri="{FF2B5EF4-FFF2-40B4-BE49-F238E27FC236}">
-                <a16:creationId xmlns:a16="http://schemas.microsoft.com/office/drawing/2014/main" id="{63A48FE3-6324-4A48-844B-C37B8CD4EFAB}"/>
+                <a16:creationId xmlns:a16="http://schemas.microsoft.com/office/drawing/2014/main" id="{E8B1C18C-0C43-430D-B6D6-25363DBCFADF}"/>
               </a:ext>
             </a:extLst>
           </p:cNvPr>
@@ -12359,7 +12359,7 @@
           <p:cNvPr id="4" name="Rectangle 3">
             <a:extLst xmlns:a="http://schemas.openxmlformats.org/drawingml/2006/main">
               <a:ext uri="{FF2B5EF4-FFF2-40B4-BE49-F238E27FC236}">
-                <a16:creationId xmlns:a16="http://schemas.microsoft.com/office/drawing/2014/main" id="{F31EE200-442E-4445-AE37-2826C111BF51}"/>
+                <a16:creationId xmlns:a16="http://schemas.microsoft.com/office/drawing/2014/main" id="{979097EB-985F-468B-9C1C-E0CE5E4F05F8}"/>
               </a:ext>
             </a:extLst>
           </p:cNvPr>
@@ -12414,7 +12414,7 @@
           <p:cNvPr id="5" name="Rectangle 4">
             <a:extLst xmlns:a="http://schemas.openxmlformats.org/drawingml/2006/main">
               <a:ext uri="{FF2B5EF4-FFF2-40B4-BE49-F238E27FC236}">
-                <a16:creationId xmlns:a16="http://schemas.microsoft.com/office/drawing/2014/main" id="{61907B74-1D63-4109-829B-B83E78C3D4A9}"/>
+                <a16:creationId xmlns:a16="http://schemas.microsoft.com/office/drawing/2014/main" id="{E77D304C-DE3D-489D-B407-2419FA5CC789}"/>
               </a:ext>
             </a:extLst>
           </p:cNvPr>
@@ -12469,7 +12469,7 @@
           <p:cNvPr id="6" name="TextBox 5">
             <a:extLst xmlns:a="http://schemas.openxmlformats.org/drawingml/2006/main">
               <a:ext uri="{FF2B5EF4-FFF2-40B4-BE49-F238E27FC236}">
-                <a16:creationId xmlns:a16="http://schemas.microsoft.com/office/drawing/2014/main" id="{641B296C-1364-4FAC-8298-C8B8F8B0BD47}"/>
+                <a16:creationId xmlns:a16="http://schemas.microsoft.com/office/drawing/2014/main" id="{1BD5674A-84A4-4C5A-9E41-1BFEB1A46025}"/>
               </a:ext>
             </a:extLst>
           </p:cNvPr>
@@ -12506,7 +12506,7 @@
                 <a:ea typeface="Aptos"/>
                 <a:cs typeface="Aptos"/>
               </a:rPr>
-              <a:t>Independent public evidence summary · 2026.07.23-15 · 2026-07-22 · Sources: Evidence Register; EPO; WIPO</a:t>
+              <a:t>Independent public evidence summary · 2026.07.23-16 · 2026-07-22 · Sources: Evidence Register; EPO; WIPO</a:t>
             </a:r>
           </a:p>
         </p:txBody>
@@ -12516,7 +12516,7 @@
           <p:cNvPr id="7" name="TextBox 6">
             <a:extLst xmlns:a="http://schemas.openxmlformats.org/drawingml/2006/main">
               <a:ext uri="{FF2B5EF4-FFF2-40B4-BE49-F238E27FC236}">
-                <a16:creationId xmlns:a16="http://schemas.microsoft.com/office/drawing/2014/main" id="{A7A6D1CB-ADC5-4AF4-8BF1-E4DD024CE609}"/>
+                <a16:creationId xmlns:a16="http://schemas.microsoft.com/office/drawing/2014/main" id="{3D8C2F7B-279C-4A92-8D1C-40A3CB603CA8}"/>
               </a:ext>
             </a:extLst>
           </p:cNvPr>
@@ -13003,7 +13003,7 @@
           <p:cNvPr id="9" name="TextBox 8">
             <a:extLst xmlns:a="http://schemas.openxmlformats.org/drawingml/2006/main">
               <a:ext uri="{FF2B5EF4-FFF2-40B4-BE49-F238E27FC236}">
-                <a16:creationId xmlns:a16="http://schemas.microsoft.com/office/drawing/2014/main" id="{3A02BF61-B98E-4134-BAD8-7A90955E0076}"/>
+                <a16:creationId xmlns:a16="http://schemas.microsoft.com/office/drawing/2014/main" id="{6977EACA-90AF-41FC-A371-E22E82D0E0F4}"/>
               </a:ext>
             </a:extLst>
           </p:cNvPr>
@@ -13048,7 +13048,7 @@
     </p:spTree>
     <p:extLst>
       <p:ext uri="{BB962C8B-B14F-4D97-AF65-F5344CB8AC3E}">
-        <p14:creationId xmlns:p14="http://schemas.microsoft.com/office/powerpoint/2010/main" val="703454727"/>
+        <p14:creationId xmlns:p14="http://schemas.microsoft.com/office/powerpoint/2010/main" val="700342587"/>
       </p:ext>
     </p:extLst>
   </p:cSld>
@@ -13072,7 +13072,7 @@
           <p:cNvPr id="2" name="TextBox 1">
             <a:extLst xmlns:a="http://schemas.openxmlformats.org/drawingml/2006/main">
               <a:ext uri="{FF2B5EF4-FFF2-40B4-BE49-F238E27FC236}">
-                <a16:creationId xmlns:a16="http://schemas.microsoft.com/office/drawing/2014/main" id="{98274926-634D-445E-AC29-2124AE2643A1}"/>
+                <a16:creationId xmlns:a16="http://schemas.microsoft.com/office/drawing/2014/main" id="{6EF4C795-E4A5-4B4D-92F0-884D799F3BEC}"/>
               </a:ext>
             </a:extLst>
           </p:cNvPr>
@@ -13119,7 +13119,7 @@
           <p:cNvPr id="3" name="TextBox 2">
             <a:extLst xmlns:a="http://schemas.openxmlformats.org/drawingml/2006/main">
               <a:ext uri="{FF2B5EF4-FFF2-40B4-BE49-F238E27FC236}">
-                <a16:creationId xmlns:a16="http://schemas.microsoft.com/office/drawing/2014/main" id="{42A36FB3-736E-43F8-9497-B55EE7EA552C}"/>
+                <a16:creationId xmlns:a16="http://schemas.microsoft.com/office/drawing/2014/main" id="{09B015B1-7FBA-46BA-89A0-0D11ED225602}"/>
               </a:ext>
             </a:extLst>
           </p:cNvPr>
@@ -13166,7 +13166,7 @@
           <p:cNvPr id="4" name="Rectangle 3">
             <a:extLst xmlns:a="http://schemas.openxmlformats.org/drawingml/2006/main">
               <a:ext uri="{FF2B5EF4-FFF2-40B4-BE49-F238E27FC236}">
-                <a16:creationId xmlns:a16="http://schemas.microsoft.com/office/drawing/2014/main" id="{927E2263-9EC8-411E-88D1-3D41BC97E206}"/>
+                <a16:creationId xmlns:a16="http://schemas.microsoft.com/office/drawing/2014/main" id="{CF9365B0-34D6-4EF3-B294-40C2518C98A1}"/>
               </a:ext>
             </a:extLst>
           </p:cNvPr>
@@ -13221,7 +13221,7 @@
           <p:cNvPr id="5" name="Rectangle 4">
             <a:extLst xmlns:a="http://schemas.openxmlformats.org/drawingml/2006/main">
               <a:ext uri="{FF2B5EF4-FFF2-40B4-BE49-F238E27FC236}">
-                <a16:creationId xmlns:a16="http://schemas.microsoft.com/office/drawing/2014/main" id="{920371B7-F972-438E-9917-3A5F4DA58416}"/>
+                <a16:creationId xmlns:a16="http://schemas.microsoft.com/office/drawing/2014/main" id="{A5BF6B39-DDA4-431B-9FDE-BCCC393BB918}"/>
               </a:ext>
             </a:extLst>
           </p:cNvPr>
@@ -13276,7 +13276,7 @@
           <p:cNvPr id="6" name="TextBox 5">
             <a:extLst xmlns:a="http://schemas.openxmlformats.org/drawingml/2006/main">
               <a:ext uri="{FF2B5EF4-FFF2-40B4-BE49-F238E27FC236}">
-                <a16:creationId xmlns:a16="http://schemas.microsoft.com/office/drawing/2014/main" id="{D25792FE-26CE-4718-8FB4-7F4CC0B09384}"/>
+                <a16:creationId xmlns:a16="http://schemas.microsoft.com/office/drawing/2014/main" id="{AFBA04A0-CF8C-470E-B2A5-99117820DBFF}"/>
               </a:ext>
             </a:extLst>
           </p:cNvPr>
@@ -13313,7 +13313,7 @@
                 <a:ea typeface="Aptos"/>
                 <a:cs typeface="Aptos"/>
               </a:rPr>
-              <a:t>Independent public evidence summary · 2026.07.23-15 · 2026-07-22 · Sources: Evidence Register</a:t>
+              <a:t>Independent public evidence summary · 2026.07.23-16 · 2026-07-22 · Sources: Evidence Register</a:t>
             </a:r>
           </a:p>
         </p:txBody>
@@ -13323,7 +13323,7 @@
           <p:cNvPr id="7" name="TextBox 6">
             <a:extLst xmlns:a="http://schemas.openxmlformats.org/drawingml/2006/main">
               <a:ext uri="{FF2B5EF4-FFF2-40B4-BE49-F238E27FC236}">
-                <a16:creationId xmlns:a16="http://schemas.microsoft.com/office/drawing/2014/main" id="{BB013324-954F-423A-A243-9F5C427B5886}"/>
+                <a16:creationId xmlns:a16="http://schemas.microsoft.com/office/drawing/2014/main" id="{735B287E-656F-42E0-908C-3952909A0FD4}"/>
               </a:ext>
             </a:extLst>
           </p:cNvPr>
@@ -14056,7 +14056,7 @@
           <p:cNvPr id="9" name="TextBox 8">
             <a:extLst xmlns:a="http://schemas.openxmlformats.org/drawingml/2006/main">
               <a:ext uri="{FF2B5EF4-FFF2-40B4-BE49-F238E27FC236}">
-                <a16:creationId xmlns:a16="http://schemas.microsoft.com/office/drawing/2014/main" id="{D5B49D2B-9CA2-4F18-A0A7-A38F188A3156}"/>
+                <a16:creationId xmlns:a16="http://schemas.microsoft.com/office/drawing/2014/main" id="{5669A97A-CD0A-49AA-883E-F5D6BABC4078}"/>
               </a:ext>
             </a:extLst>
           </p:cNvPr>
@@ -14101,7 +14101,7 @@
     </p:spTree>
     <p:extLst>
       <p:ext uri="{BB962C8B-B14F-4D97-AF65-F5344CB8AC3E}">
-        <p14:creationId xmlns:p14="http://schemas.microsoft.com/office/powerpoint/2010/main" val="463300707"/>
+        <p14:creationId xmlns:p14="http://schemas.microsoft.com/office/powerpoint/2010/main" val="442353219"/>
       </p:ext>
     </p:extLst>
   </p:cSld>

--- a/site/downloads/pixan-bank-deck-medium-en.pptx
+++ b/site/downloads/pixan-bank-deck-medium-en.pptx
@@ -2,24 +2,24 @@
 <file path=ppt/presentation.xml><?xml version="1.0" encoding="utf-8"?>
 <p:presentation xmlns:p="http://schemas.openxmlformats.org/presentationml/2006/main">
   <p:sldMasterIdLst>
-    <p:sldMasterId xmlns:r="http://schemas.openxmlformats.org/officeDocument/2006/relationships" id="2147483648" r:id="R0a4c9e29233a4ce8"/>
+    <p:sldMasterId xmlns:r="http://schemas.openxmlformats.org/officeDocument/2006/relationships" id="2147483648" r:id="R14ff932c48c8455c"/>
   </p:sldMasterIdLst>
   <p:notesMasterIdLst>
-    <p:notesMasterId xmlns:r="http://schemas.openxmlformats.org/officeDocument/2006/relationships" r:id="R8030271d823c40e5"/>
+    <p:notesMasterId xmlns:r="http://schemas.openxmlformats.org/officeDocument/2006/relationships" r:id="Rc87697b205d045fb"/>
   </p:notesMasterIdLst>
   <p:sldIdLst>
-    <p:sldId xmlns:r="http://schemas.openxmlformats.org/officeDocument/2006/relationships" id="256" r:id="R2984835a59a0444c"/>
-    <p:sldId xmlns:r="http://schemas.openxmlformats.org/officeDocument/2006/relationships" id="257" r:id="Rd2439710b30549d6"/>
-    <p:sldId xmlns:r="http://schemas.openxmlformats.org/officeDocument/2006/relationships" id="258" r:id="Rf771ce95e34e4a29"/>
-    <p:sldId xmlns:r="http://schemas.openxmlformats.org/officeDocument/2006/relationships" id="259" r:id="Re7ce93a54c1247fb"/>
-    <p:sldId xmlns:r="http://schemas.openxmlformats.org/officeDocument/2006/relationships" id="260" r:id="R2d390b1d99a94ac1"/>
-    <p:sldId xmlns:r="http://schemas.openxmlformats.org/officeDocument/2006/relationships" id="261" r:id="R4c15c8be941f4a3a"/>
-    <p:sldId xmlns:r="http://schemas.openxmlformats.org/officeDocument/2006/relationships" id="262" r:id="R468432cb2c044b5a"/>
-    <p:sldId xmlns:r="http://schemas.openxmlformats.org/officeDocument/2006/relationships" id="263" r:id="Rac015fba173d48ef"/>
-    <p:sldId xmlns:r="http://schemas.openxmlformats.org/officeDocument/2006/relationships" id="264" r:id="R5b476b66fb5d475b"/>
-    <p:sldId xmlns:r="http://schemas.openxmlformats.org/officeDocument/2006/relationships" id="265" r:id="Rcf099f31e1484bb7"/>
-    <p:sldId xmlns:r="http://schemas.openxmlformats.org/officeDocument/2006/relationships" id="266" r:id="R5012779f7df844d5"/>
-    <p:sldId xmlns:r="http://schemas.openxmlformats.org/officeDocument/2006/relationships" id="267" r:id="Rd5cde795cba84000"/>
+    <p:sldId xmlns:r="http://schemas.openxmlformats.org/officeDocument/2006/relationships" id="256" r:id="R5664879f63164c19"/>
+    <p:sldId xmlns:r="http://schemas.openxmlformats.org/officeDocument/2006/relationships" id="257" r:id="R137852f5c4ab4d4c"/>
+    <p:sldId xmlns:r="http://schemas.openxmlformats.org/officeDocument/2006/relationships" id="258" r:id="R185acb507f5b45bf"/>
+    <p:sldId xmlns:r="http://schemas.openxmlformats.org/officeDocument/2006/relationships" id="259" r:id="Rb6ddd29c99394aa0"/>
+    <p:sldId xmlns:r="http://schemas.openxmlformats.org/officeDocument/2006/relationships" id="260" r:id="R2dcca258a24d4c8f"/>
+    <p:sldId xmlns:r="http://schemas.openxmlformats.org/officeDocument/2006/relationships" id="261" r:id="R57015e848ecd4758"/>
+    <p:sldId xmlns:r="http://schemas.openxmlformats.org/officeDocument/2006/relationships" id="262" r:id="Rc935a09e211742f5"/>
+    <p:sldId xmlns:r="http://schemas.openxmlformats.org/officeDocument/2006/relationships" id="263" r:id="R7d4b1b15abd64b1d"/>
+    <p:sldId xmlns:r="http://schemas.openxmlformats.org/officeDocument/2006/relationships" id="264" r:id="R1040af19bc8d48d6"/>
+    <p:sldId xmlns:r="http://schemas.openxmlformats.org/officeDocument/2006/relationships" id="265" r:id="R56e6a31b70494e6e"/>
+    <p:sldId xmlns:r="http://schemas.openxmlformats.org/officeDocument/2006/relationships" id="266" r:id="R93c92e4543074b94"/>
+    <p:sldId xmlns:r="http://schemas.openxmlformats.org/officeDocument/2006/relationships" id="267" r:id="Rb80424da47454b30"/>
   </p:sldIdLst>
   <p:sldSz cx="12191999" cy="6858000"/>
   <p:notesSz cx="6858000" cy="9144000"/>
@@ -1340,7 +1340,7 @@
           <p:cNvPr id="2" name="Title 1">
             <a:extLst xmlns:a="http://schemas.openxmlformats.org/drawingml/2006/main">
               <a:ext uri="{FF2B5EF4-FFF2-40B4-BE49-F238E27FC236}">
-                <a16:creationId xmlns:a16="http://schemas.microsoft.com/office/drawing/2014/main" id="{48542E43-870A-4119-AC32-A98D605A3BBF}"/>
+                <a16:creationId xmlns:a16="http://schemas.microsoft.com/office/drawing/2014/main" id="{37BBFE7C-DBFA-470B-BB5E-365F06FA20F7}"/>
               </a:ext>
             </a:extLst>
           </p:cNvPr>
@@ -1372,7 +1372,7 @@
           <p:cNvPr id="3" name="Subtitle 2">
             <a:extLst xmlns:a="http://schemas.openxmlformats.org/drawingml/2006/main">
               <a:ext uri="{FF2B5EF4-FFF2-40B4-BE49-F238E27FC236}">
-                <a16:creationId xmlns:a16="http://schemas.microsoft.com/office/drawing/2014/main" id="{E43DE057-77A9-4C23-94A2-6F8D2DBF807E}"/>
+                <a16:creationId xmlns:a16="http://schemas.microsoft.com/office/drawing/2014/main" id="{4F5F6946-4A14-4457-AEC8-423F9843691F}"/>
               </a:ext>
             </a:extLst>
           </p:cNvPr>
@@ -1495,7 +1495,7 @@
           <p:cNvPr id="4" name="Date Placeholder 3">
             <a:extLst xmlns:a="http://schemas.openxmlformats.org/drawingml/2006/main">
               <a:ext uri="{FF2B5EF4-FFF2-40B4-BE49-F238E27FC236}">
-                <a16:creationId xmlns:a16="http://schemas.microsoft.com/office/drawing/2014/main" id="{386F0F38-AEA3-4D0F-8B1B-B96B10E5CCFB}"/>
+                <a16:creationId xmlns:a16="http://schemas.microsoft.com/office/drawing/2014/main" id="{EA8D10F0-FD90-4D7C-8CBE-72CE793202CF}"/>
               </a:ext>
             </a:extLst>
           </p:cNvPr>
@@ -1522,7 +1522,7 @@
           <p:cNvPr id="5" name="Footer Placeholder 4">
             <a:extLst xmlns:a="http://schemas.openxmlformats.org/drawingml/2006/main">
               <a:ext uri="{FF2B5EF4-FFF2-40B4-BE49-F238E27FC236}">
-                <a16:creationId xmlns:a16="http://schemas.microsoft.com/office/drawing/2014/main" id="{7468D109-2C8D-4208-A4A0-FA0D8AB70B53}"/>
+                <a16:creationId xmlns:a16="http://schemas.microsoft.com/office/drawing/2014/main" id="{9D2BF74F-AD15-4FBE-BA9D-72428C00D522}"/>
               </a:ext>
             </a:extLst>
           </p:cNvPr>
@@ -1545,7 +1545,7 @@
           <p:cNvPr id="6" name="Slide Number Placeholder 5">
             <a:extLst xmlns:a="http://schemas.openxmlformats.org/drawingml/2006/main">
               <a:ext uri="{FF2B5EF4-FFF2-40B4-BE49-F238E27FC236}">
-                <a16:creationId xmlns:a16="http://schemas.microsoft.com/office/drawing/2014/main" id="{BF51CBD0-5845-44C6-A16B-538F4470C5D2}"/>
+                <a16:creationId xmlns:a16="http://schemas.microsoft.com/office/drawing/2014/main" id="{27996F79-7E29-48E3-B575-CEAFE148705D}"/>
               </a:ext>
             </a:extLst>
           </p:cNvPr>
@@ -1589,7 +1589,7 @@
           <p:cNvPr id="2" name="Title 1">
             <a:extLst xmlns:a="http://schemas.openxmlformats.org/drawingml/2006/main">
               <a:ext uri="{FF2B5EF4-FFF2-40B4-BE49-F238E27FC236}">
-                <a16:creationId xmlns:a16="http://schemas.microsoft.com/office/drawing/2014/main" id="{4CD635DC-88C8-45C9-9285-71D213DCBACF}"/>
+                <a16:creationId xmlns:a16="http://schemas.microsoft.com/office/drawing/2014/main" id="{39DEB391-6631-4CB3-8591-930E5C0A7450}"/>
               </a:ext>
             </a:extLst>
           </p:cNvPr>
@@ -1616,7 +1616,7 @@
           <p:cNvPr id="3" name="Vertical Text Placeholder 2">
             <a:extLst xmlns:a="http://schemas.openxmlformats.org/drawingml/2006/main">
               <a:ext uri="{FF2B5EF4-FFF2-40B4-BE49-F238E27FC236}">
-                <a16:creationId xmlns:a16="http://schemas.microsoft.com/office/drawing/2014/main" id="{3A3C42E3-81D7-4893-A8FC-94788595F230}"/>
+                <a16:creationId xmlns:a16="http://schemas.microsoft.com/office/drawing/2014/main" id="{B8905449-0E7E-415D-9EBD-6EE1FE3E2D9D}"/>
               </a:ext>
             </a:extLst>
           </p:cNvPr>
@@ -1678,7 +1678,7 @@
           <p:cNvPr id="4" name="Date Placeholder 3">
             <a:extLst xmlns:a="http://schemas.openxmlformats.org/drawingml/2006/main">
               <a:ext uri="{FF2B5EF4-FFF2-40B4-BE49-F238E27FC236}">
-                <a16:creationId xmlns:a16="http://schemas.microsoft.com/office/drawing/2014/main" id="{61DFE2E6-D80C-43F0-9B8B-79DD5089BB6E}"/>
+                <a16:creationId xmlns:a16="http://schemas.microsoft.com/office/drawing/2014/main" id="{C75573B2-5444-40DD-84D7-B71F77C4469F}"/>
               </a:ext>
             </a:extLst>
           </p:cNvPr>
@@ -1705,7 +1705,7 @@
           <p:cNvPr id="5" name="Footer Placeholder 4">
             <a:extLst xmlns:a="http://schemas.openxmlformats.org/drawingml/2006/main">
               <a:ext uri="{FF2B5EF4-FFF2-40B4-BE49-F238E27FC236}">
-                <a16:creationId xmlns:a16="http://schemas.microsoft.com/office/drawing/2014/main" id="{7AD3D0E3-B24F-4A23-8420-4572DEB8AE4B}"/>
+                <a16:creationId xmlns:a16="http://schemas.microsoft.com/office/drawing/2014/main" id="{B513900B-1CE5-4C71-A57F-D1E444298704}"/>
               </a:ext>
             </a:extLst>
           </p:cNvPr>
@@ -1728,7 +1728,7 @@
           <p:cNvPr id="6" name="Slide Number Placeholder 5">
             <a:extLst xmlns:a="http://schemas.openxmlformats.org/drawingml/2006/main">
               <a:ext uri="{FF2B5EF4-FFF2-40B4-BE49-F238E27FC236}">
-                <a16:creationId xmlns:a16="http://schemas.microsoft.com/office/drawing/2014/main" id="{624AC123-25DA-405C-A3E3-AF356A48DFD1}"/>
+                <a16:creationId xmlns:a16="http://schemas.microsoft.com/office/drawing/2014/main" id="{A817155A-3263-4612-9FE6-C0458CE3186D}"/>
               </a:ext>
             </a:extLst>
           </p:cNvPr>
@@ -1772,7 +1772,7 @@
           <p:cNvPr id="2" name="Vertical Title 1">
             <a:extLst xmlns:a="http://schemas.openxmlformats.org/drawingml/2006/main">
               <a:ext uri="{FF2B5EF4-FFF2-40B4-BE49-F238E27FC236}">
-                <a16:creationId xmlns:a16="http://schemas.microsoft.com/office/drawing/2014/main" id="{E62FFE20-A19A-4200-806D-23193456D6D8}"/>
+                <a16:creationId xmlns:a16="http://schemas.microsoft.com/office/drawing/2014/main" id="{CCAAE2FE-FA3E-4456-B901-6A0B25C1B17D}"/>
               </a:ext>
             </a:extLst>
           </p:cNvPr>
@@ -1804,7 +1804,7 @@
           <p:cNvPr id="3" name="Vertical Text Placeholder 2">
             <a:extLst xmlns:a="http://schemas.openxmlformats.org/drawingml/2006/main">
               <a:ext uri="{FF2B5EF4-FFF2-40B4-BE49-F238E27FC236}">
-                <a16:creationId xmlns:a16="http://schemas.microsoft.com/office/drawing/2014/main" id="{D9CA979B-4836-4349-825B-3D63EC0EEAC1}"/>
+                <a16:creationId xmlns:a16="http://schemas.microsoft.com/office/drawing/2014/main" id="{53FA47AE-7046-42BB-945F-C0729FB62D87}"/>
               </a:ext>
             </a:extLst>
           </p:cNvPr>
@@ -1871,7 +1871,7 @@
           <p:cNvPr id="4" name="Date Placeholder 3">
             <a:extLst xmlns:a="http://schemas.openxmlformats.org/drawingml/2006/main">
               <a:ext uri="{FF2B5EF4-FFF2-40B4-BE49-F238E27FC236}">
-                <a16:creationId xmlns:a16="http://schemas.microsoft.com/office/drawing/2014/main" id="{1FA7403A-A165-48F0-83DF-02C325DDA727}"/>
+                <a16:creationId xmlns:a16="http://schemas.microsoft.com/office/drawing/2014/main" id="{47BC7815-0188-4C93-9AC6-CBC8CA97917D}"/>
               </a:ext>
             </a:extLst>
           </p:cNvPr>
@@ -1898,7 +1898,7 @@
           <p:cNvPr id="5" name="Footer Placeholder 4">
             <a:extLst xmlns:a="http://schemas.openxmlformats.org/drawingml/2006/main">
               <a:ext uri="{FF2B5EF4-FFF2-40B4-BE49-F238E27FC236}">
-                <a16:creationId xmlns:a16="http://schemas.microsoft.com/office/drawing/2014/main" id="{0CCE896E-F78A-4341-B759-ECD60F8B5B7A}"/>
+                <a16:creationId xmlns:a16="http://schemas.microsoft.com/office/drawing/2014/main" id="{634D1E8F-9B03-43FA-B3F4-23D5D31732B8}"/>
               </a:ext>
             </a:extLst>
           </p:cNvPr>
@@ -1921,7 +1921,7 @@
           <p:cNvPr id="6" name="Slide Number Placeholder 5">
             <a:extLst xmlns:a="http://schemas.openxmlformats.org/drawingml/2006/main">
               <a:ext uri="{FF2B5EF4-FFF2-40B4-BE49-F238E27FC236}">
-                <a16:creationId xmlns:a16="http://schemas.microsoft.com/office/drawing/2014/main" id="{57AC4EA1-6A33-49DE-9E83-48E2D4135392}"/>
+                <a16:creationId xmlns:a16="http://schemas.microsoft.com/office/drawing/2014/main" id="{F488F74F-C99F-4B1A-80EE-18F4A51DBEE0}"/>
               </a:ext>
             </a:extLst>
           </p:cNvPr>
@@ -1965,7 +1965,7 @@
           <p:cNvPr id="2" name="Title 1">
             <a:extLst xmlns:a="http://schemas.openxmlformats.org/drawingml/2006/main">
               <a:ext uri="{FF2B5EF4-FFF2-40B4-BE49-F238E27FC236}">
-                <a16:creationId xmlns:a16="http://schemas.microsoft.com/office/drawing/2014/main" id="{2DC112C7-E951-4582-AFE1-BE6894B682CD}"/>
+                <a16:creationId xmlns:a16="http://schemas.microsoft.com/office/drawing/2014/main" id="{BA6D6B12-972F-4BF8-8986-537761FE903B}"/>
               </a:ext>
             </a:extLst>
           </p:cNvPr>
@@ -1992,7 +1992,7 @@
           <p:cNvPr id="3" name="Content Placeholder 2">
             <a:extLst xmlns:a="http://schemas.openxmlformats.org/drawingml/2006/main">
               <a:ext uri="{FF2B5EF4-FFF2-40B4-BE49-F238E27FC236}">
-                <a16:creationId xmlns:a16="http://schemas.microsoft.com/office/drawing/2014/main" id="{7829799A-08B8-4ECA-8D27-FE2D361DC217}"/>
+                <a16:creationId xmlns:a16="http://schemas.microsoft.com/office/drawing/2014/main" id="{14711D23-046A-4393-A053-01E58F16CA1C}"/>
               </a:ext>
             </a:extLst>
           </p:cNvPr>
@@ -2054,7 +2054,7 @@
           <p:cNvPr id="4" name="Date Placeholder 3">
             <a:extLst xmlns:a="http://schemas.openxmlformats.org/drawingml/2006/main">
               <a:ext uri="{FF2B5EF4-FFF2-40B4-BE49-F238E27FC236}">
-                <a16:creationId xmlns:a16="http://schemas.microsoft.com/office/drawing/2014/main" id="{EBE8889D-E085-4058-A1B1-00EF6C8BA84E}"/>
+                <a16:creationId xmlns:a16="http://schemas.microsoft.com/office/drawing/2014/main" id="{756A6D75-3147-44D6-9A35-F6100BA0090E}"/>
               </a:ext>
             </a:extLst>
           </p:cNvPr>
@@ -2081,7 +2081,7 @@
           <p:cNvPr id="5" name="Footer Placeholder 4">
             <a:extLst xmlns:a="http://schemas.openxmlformats.org/drawingml/2006/main">
               <a:ext uri="{FF2B5EF4-FFF2-40B4-BE49-F238E27FC236}">
-                <a16:creationId xmlns:a16="http://schemas.microsoft.com/office/drawing/2014/main" id="{E8FC4CE7-FA92-4A4A-8D7C-F167AA392A6A}"/>
+                <a16:creationId xmlns:a16="http://schemas.microsoft.com/office/drawing/2014/main" id="{41BA0E1E-00BF-45E5-A2FF-5E81F13CFC95}"/>
               </a:ext>
             </a:extLst>
           </p:cNvPr>
@@ -2104,7 +2104,7 @@
           <p:cNvPr id="6" name="Slide Number Placeholder 5">
             <a:extLst xmlns:a="http://schemas.openxmlformats.org/drawingml/2006/main">
               <a:ext uri="{FF2B5EF4-FFF2-40B4-BE49-F238E27FC236}">
-                <a16:creationId xmlns:a16="http://schemas.microsoft.com/office/drawing/2014/main" id="{6060C5B4-92F3-46CD-8E91-41E623EA562B}"/>
+                <a16:creationId xmlns:a16="http://schemas.microsoft.com/office/drawing/2014/main" id="{C57A503E-8156-425A-8032-5A84E62757F7}"/>
               </a:ext>
             </a:extLst>
           </p:cNvPr>
@@ -2148,7 +2148,7 @@
           <p:cNvPr id="2" name="Title 1">
             <a:extLst xmlns:a="http://schemas.openxmlformats.org/drawingml/2006/main">
               <a:ext uri="{FF2B5EF4-FFF2-40B4-BE49-F238E27FC236}">
-                <a16:creationId xmlns:a16="http://schemas.microsoft.com/office/drawing/2014/main" id="{C2B3C825-F72B-4CC3-BAF4-F2A6DF0E88F3}"/>
+                <a16:creationId xmlns:a16="http://schemas.microsoft.com/office/drawing/2014/main" id="{73AF9A4E-73C5-4533-ABF7-DBD4C086EE81}"/>
               </a:ext>
             </a:extLst>
           </p:cNvPr>
@@ -2185,7 +2185,7 @@
           <p:cNvPr id="3" name="Text Placeholder 2">
             <a:extLst xmlns:a="http://schemas.openxmlformats.org/drawingml/2006/main">
               <a:ext uri="{FF2B5EF4-FFF2-40B4-BE49-F238E27FC236}">
-                <a16:creationId xmlns:a16="http://schemas.microsoft.com/office/drawing/2014/main" id="{C2D76AA0-CFBF-4C8F-B18D-F403C9D2CE8E}"/>
+                <a16:creationId xmlns:a16="http://schemas.microsoft.com/office/drawing/2014/main" id="{16559FC3-7A89-4ADD-9E6E-1974A0CF0A82}"/>
               </a:ext>
             </a:extLst>
           </p:cNvPr>
@@ -2311,7 +2311,7 @@
           <p:cNvPr id="4" name="Date Placeholder 3">
             <a:extLst xmlns:a="http://schemas.openxmlformats.org/drawingml/2006/main">
               <a:ext uri="{FF2B5EF4-FFF2-40B4-BE49-F238E27FC236}">
-                <a16:creationId xmlns:a16="http://schemas.microsoft.com/office/drawing/2014/main" id="{617311D0-6FD6-4E07-89D8-A1710D0D438B}"/>
+                <a16:creationId xmlns:a16="http://schemas.microsoft.com/office/drawing/2014/main" id="{DDBDEBBB-507F-4F32-B2EC-A9937B1F6D3C}"/>
               </a:ext>
             </a:extLst>
           </p:cNvPr>
@@ -2338,7 +2338,7 @@
           <p:cNvPr id="5" name="Footer Placeholder 4">
             <a:extLst xmlns:a="http://schemas.openxmlformats.org/drawingml/2006/main">
               <a:ext uri="{FF2B5EF4-FFF2-40B4-BE49-F238E27FC236}">
-                <a16:creationId xmlns:a16="http://schemas.microsoft.com/office/drawing/2014/main" id="{942A53A4-9DB9-4E51-8D47-3C20E235EAD2}"/>
+                <a16:creationId xmlns:a16="http://schemas.microsoft.com/office/drawing/2014/main" id="{6B8A3805-8E7C-41CF-9919-6A015C97B7D1}"/>
               </a:ext>
             </a:extLst>
           </p:cNvPr>
@@ -2361,7 +2361,7 @@
           <p:cNvPr id="6" name="Slide Number Placeholder 5">
             <a:extLst xmlns:a="http://schemas.openxmlformats.org/drawingml/2006/main">
               <a:ext uri="{FF2B5EF4-FFF2-40B4-BE49-F238E27FC236}">
-                <a16:creationId xmlns:a16="http://schemas.microsoft.com/office/drawing/2014/main" id="{993ECA05-EE24-443D-B7FA-2F7F33508829}"/>
+                <a16:creationId xmlns:a16="http://schemas.microsoft.com/office/drawing/2014/main" id="{57D852A1-38CD-407B-9D80-C261691D068B}"/>
               </a:ext>
             </a:extLst>
           </p:cNvPr>
@@ -2405,7 +2405,7 @@
           <p:cNvPr id="2" name="Title 1">
             <a:extLst xmlns:a="http://schemas.openxmlformats.org/drawingml/2006/main">
               <a:ext uri="{FF2B5EF4-FFF2-40B4-BE49-F238E27FC236}">
-                <a16:creationId xmlns:a16="http://schemas.microsoft.com/office/drawing/2014/main" id="{8E758570-FF82-4D3C-8A9C-5CC0BDB35DEB}"/>
+                <a16:creationId xmlns:a16="http://schemas.microsoft.com/office/drawing/2014/main" id="{8FBE63F5-11DC-4640-B8F3-2F4AB3775CF1}"/>
               </a:ext>
             </a:extLst>
           </p:cNvPr>
@@ -2432,7 +2432,7 @@
           <p:cNvPr id="3" name="Content Placeholder 2">
             <a:extLst xmlns:a="http://schemas.openxmlformats.org/drawingml/2006/main">
               <a:ext uri="{FF2B5EF4-FFF2-40B4-BE49-F238E27FC236}">
-                <a16:creationId xmlns:a16="http://schemas.microsoft.com/office/drawing/2014/main" id="{CEFBDB98-E31A-48E7-8908-9E88BE154BB3}"/>
+                <a16:creationId xmlns:a16="http://schemas.microsoft.com/office/drawing/2014/main" id="{026023A5-6E4F-4F4D-8759-519968AD86E8}"/>
               </a:ext>
             </a:extLst>
           </p:cNvPr>
@@ -2536,7 +2536,7 @@
           <p:cNvPr id="4" name="Content Placeholder 3">
             <a:extLst xmlns:a="http://schemas.openxmlformats.org/drawingml/2006/main">
               <a:ext uri="{FF2B5EF4-FFF2-40B4-BE49-F238E27FC236}">
-                <a16:creationId xmlns:a16="http://schemas.microsoft.com/office/drawing/2014/main" id="{4E9D041A-9555-4727-81B8-987169AF4CA1}"/>
+                <a16:creationId xmlns:a16="http://schemas.microsoft.com/office/drawing/2014/main" id="{185A32B0-C75C-40C4-800A-FCE07AC16543}"/>
               </a:ext>
             </a:extLst>
           </p:cNvPr>
@@ -2640,7 +2640,7 @@
           <p:cNvPr id="5" name="Date Placeholder 4">
             <a:extLst xmlns:a="http://schemas.openxmlformats.org/drawingml/2006/main">
               <a:ext uri="{FF2B5EF4-FFF2-40B4-BE49-F238E27FC236}">
-                <a16:creationId xmlns:a16="http://schemas.microsoft.com/office/drawing/2014/main" id="{B7B13559-C6BA-467F-803C-0E57D8EA4561}"/>
+                <a16:creationId xmlns:a16="http://schemas.microsoft.com/office/drawing/2014/main" id="{2EFB8BB0-2565-4B95-9229-F625542F0529}"/>
               </a:ext>
             </a:extLst>
           </p:cNvPr>
@@ -2667,7 +2667,7 @@
           <p:cNvPr id="6" name="Footer Placeholder 5">
             <a:extLst xmlns:a="http://schemas.openxmlformats.org/drawingml/2006/main">
               <a:ext uri="{FF2B5EF4-FFF2-40B4-BE49-F238E27FC236}">
-                <a16:creationId xmlns:a16="http://schemas.microsoft.com/office/drawing/2014/main" id="{D8FC7F0D-FE05-411D-AA50-D747351F22A6}"/>
+                <a16:creationId xmlns:a16="http://schemas.microsoft.com/office/drawing/2014/main" id="{168F1B1E-4AE4-41ED-935C-0323328908FE}"/>
               </a:ext>
             </a:extLst>
           </p:cNvPr>
@@ -2690,7 +2690,7 @@
           <p:cNvPr id="7" name="Slide Number Placeholder 6">
             <a:extLst xmlns:a="http://schemas.openxmlformats.org/drawingml/2006/main">
               <a:ext uri="{FF2B5EF4-FFF2-40B4-BE49-F238E27FC236}">
-                <a16:creationId xmlns:a16="http://schemas.microsoft.com/office/drawing/2014/main" id="{47701F5D-F89C-4375-B233-529E0E8B474D}"/>
+                <a16:creationId xmlns:a16="http://schemas.microsoft.com/office/drawing/2014/main" id="{9EADCC5F-615D-405F-8CD5-C0584CA6F4EA}"/>
               </a:ext>
             </a:extLst>
           </p:cNvPr>
@@ -2734,7 +2734,7 @@
           <p:cNvPr id="2" name="Title 1">
             <a:extLst xmlns:a="http://schemas.openxmlformats.org/drawingml/2006/main">
               <a:ext uri="{FF2B5EF4-FFF2-40B4-BE49-F238E27FC236}">
-                <a16:creationId xmlns:a16="http://schemas.microsoft.com/office/drawing/2014/main" id="{C1A43C1C-BA95-4249-9253-C84F9EF577C1}"/>
+                <a16:creationId xmlns:a16="http://schemas.microsoft.com/office/drawing/2014/main" id="{6EC4B6BD-A440-43B1-8869-D1E9A21DD33F}"/>
               </a:ext>
             </a:extLst>
           </p:cNvPr>
@@ -2766,7 +2766,7 @@
           <p:cNvPr id="3" name="Text Placeholder 2">
             <a:extLst xmlns:a="http://schemas.openxmlformats.org/drawingml/2006/main">
               <a:ext uri="{FF2B5EF4-FFF2-40B4-BE49-F238E27FC236}">
-                <a16:creationId xmlns:a16="http://schemas.microsoft.com/office/drawing/2014/main" id="{03DAD9D4-5592-4D3E-BC16-5B1C9D80307F}"/>
+                <a16:creationId xmlns:a16="http://schemas.microsoft.com/office/drawing/2014/main" id="{652EDBEE-2592-4A22-BBF0-063F6A1D4D6C}"/>
               </a:ext>
             </a:extLst>
           </p:cNvPr>
@@ -2838,7 +2838,7 @@
           <p:cNvPr id="4" name="Content Placeholder 3">
             <a:extLst xmlns:a="http://schemas.openxmlformats.org/drawingml/2006/main">
               <a:ext uri="{FF2B5EF4-FFF2-40B4-BE49-F238E27FC236}">
-                <a16:creationId xmlns:a16="http://schemas.microsoft.com/office/drawing/2014/main" id="{C950AE90-242B-4F4B-A0C3-31EBD4087AF9}"/>
+                <a16:creationId xmlns:a16="http://schemas.microsoft.com/office/drawing/2014/main" id="{2E1D6DC3-5B4B-4157-9FB4-600A5AFA54D8}"/>
               </a:ext>
             </a:extLst>
           </p:cNvPr>
@@ -2942,7 +2942,7 @@
           <p:cNvPr id="5" name="Text Placeholder 4">
             <a:extLst xmlns:a="http://schemas.openxmlformats.org/drawingml/2006/main">
               <a:ext uri="{FF2B5EF4-FFF2-40B4-BE49-F238E27FC236}">
-                <a16:creationId xmlns:a16="http://schemas.microsoft.com/office/drawing/2014/main" id="{1E5A82F1-CA6D-4141-8664-E406FE10A94C}"/>
+                <a16:creationId xmlns:a16="http://schemas.microsoft.com/office/drawing/2014/main" id="{788A2D52-7098-4F32-B6B0-01A3D03D8AA2}"/>
               </a:ext>
             </a:extLst>
           </p:cNvPr>
@@ -3014,7 +3014,7 @@
           <p:cNvPr id="6" name="Content Placeholder 5">
             <a:extLst xmlns:a="http://schemas.openxmlformats.org/drawingml/2006/main">
               <a:ext uri="{FF2B5EF4-FFF2-40B4-BE49-F238E27FC236}">
-                <a16:creationId xmlns:a16="http://schemas.microsoft.com/office/drawing/2014/main" id="{99587B93-5C2A-48AF-A88F-C1A66AEF14DC}"/>
+                <a16:creationId xmlns:a16="http://schemas.microsoft.com/office/drawing/2014/main" id="{8B5D52EF-03CD-41AC-99A4-2F9C85529D41}"/>
               </a:ext>
             </a:extLst>
           </p:cNvPr>
@@ -3118,7 +3118,7 @@
           <p:cNvPr id="7" name="Date Placeholder 6">
             <a:extLst xmlns:a="http://schemas.openxmlformats.org/drawingml/2006/main">
               <a:ext uri="{FF2B5EF4-FFF2-40B4-BE49-F238E27FC236}">
-                <a16:creationId xmlns:a16="http://schemas.microsoft.com/office/drawing/2014/main" id="{AE6560AC-91ED-43B4-86FA-9FD4C5127D6F}"/>
+                <a16:creationId xmlns:a16="http://schemas.microsoft.com/office/drawing/2014/main" id="{A32AA920-5003-4D7C-A44F-42F58F02657C}"/>
               </a:ext>
             </a:extLst>
           </p:cNvPr>
@@ -3145,7 +3145,7 @@
           <p:cNvPr id="8" name="Footer Placeholder 7">
             <a:extLst xmlns:a="http://schemas.openxmlformats.org/drawingml/2006/main">
               <a:ext uri="{FF2B5EF4-FFF2-40B4-BE49-F238E27FC236}">
-                <a16:creationId xmlns:a16="http://schemas.microsoft.com/office/drawing/2014/main" id="{96F285EB-E478-4C0F-8BE0-4E46B0A28FC2}"/>
+                <a16:creationId xmlns:a16="http://schemas.microsoft.com/office/drawing/2014/main" id="{396C8AAC-3B78-4CE8-91FE-3D0006DD4543}"/>
               </a:ext>
             </a:extLst>
           </p:cNvPr>
@@ -3168,7 +3168,7 @@
           <p:cNvPr id="9" name="Slide Number Placeholder 8">
             <a:extLst xmlns:a="http://schemas.openxmlformats.org/drawingml/2006/main">
               <a:ext uri="{FF2B5EF4-FFF2-40B4-BE49-F238E27FC236}">
-                <a16:creationId xmlns:a16="http://schemas.microsoft.com/office/drawing/2014/main" id="{29F109BA-8CEB-4659-B81B-BFEA1949317D}"/>
+                <a16:creationId xmlns:a16="http://schemas.microsoft.com/office/drawing/2014/main" id="{5E2600CD-856B-434D-ABBE-BFE6253E61F2}"/>
               </a:ext>
             </a:extLst>
           </p:cNvPr>
@@ -3212,7 +3212,7 @@
           <p:cNvPr id="2" name="Title 1">
             <a:extLst xmlns:a="http://schemas.openxmlformats.org/drawingml/2006/main">
               <a:ext uri="{FF2B5EF4-FFF2-40B4-BE49-F238E27FC236}">
-                <a16:creationId xmlns:a16="http://schemas.microsoft.com/office/drawing/2014/main" id="{763EE53E-210B-4F65-B64B-2215F2CC78E2}"/>
+                <a16:creationId xmlns:a16="http://schemas.microsoft.com/office/drawing/2014/main" id="{FC61D64F-B30D-4BA0-A21F-1CC15B7F7429}"/>
               </a:ext>
             </a:extLst>
           </p:cNvPr>
@@ -3239,7 +3239,7 @@
           <p:cNvPr id="3" name="Date Placeholder 2">
             <a:extLst xmlns:a="http://schemas.openxmlformats.org/drawingml/2006/main">
               <a:ext uri="{FF2B5EF4-FFF2-40B4-BE49-F238E27FC236}">
-                <a16:creationId xmlns:a16="http://schemas.microsoft.com/office/drawing/2014/main" id="{8EEABA0B-839B-4629-B748-0FA542B27193}"/>
+                <a16:creationId xmlns:a16="http://schemas.microsoft.com/office/drawing/2014/main" id="{162E158F-8BA7-4BF5-9F01-BBA401138B68}"/>
               </a:ext>
             </a:extLst>
           </p:cNvPr>
@@ -3266,7 +3266,7 @@
           <p:cNvPr id="4" name="Footer Placeholder 3">
             <a:extLst xmlns:a="http://schemas.openxmlformats.org/drawingml/2006/main">
               <a:ext uri="{FF2B5EF4-FFF2-40B4-BE49-F238E27FC236}">
-                <a16:creationId xmlns:a16="http://schemas.microsoft.com/office/drawing/2014/main" id="{DE38C822-9229-47EF-9F62-0D2A0AF3E281}"/>
+                <a16:creationId xmlns:a16="http://schemas.microsoft.com/office/drawing/2014/main" id="{765CC351-BB6A-45F4-9A61-AD47C3839F71}"/>
               </a:ext>
             </a:extLst>
           </p:cNvPr>
@@ -3289,7 +3289,7 @@
           <p:cNvPr id="5" name="Slide Number Placeholder 4">
             <a:extLst xmlns:a="http://schemas.openxmlformats.org/drawingml/2006/main">
               <a:ext uri="{FF2B5EF4-FFF2-40B4-BE49-F238E27FC236}">
-                <a16:creationId xmlns:a16="http://schemas.microsoft.com/office/drawing/2014/main" id="{093453C3-9E42-406F-A0AF-0DC5CA575F37}"/>
+                <a16:creationId xmlns:a16="http://schemas.microsoft.com/office/drawing/2014/main" id="{E5A4345A-30BF-4970-9DEF-8E73C73C6EB4}"/>
               </a:ext>
             </a:extLst>
           </p:cNvPr>
@@ -3333,7 +3333,7 @@
           <p:cNvPr id="2" name="Date Placeholder 1">
             <a:extLst xmlns:a="http://schemas.openxmlformats.org/drawingml/2006/main">
               <a:ext uri="{FF2B5EF4-FFF2-40B4-BE49-F238E27FC236}">
-                <a16:creationId xmlns:a16="http://schemas.microsoft.com/office/drawing/2014/main" id="{777CA3A6-1AAA-41D1-B502-5F0C441748B2}"/>
+                <a16:creationId xmlns:a16="http://schemas.microsoft.com/office/drawing/2014/main" id="{647E472B-D08E-4ED1-83FD-0672785E65B7}"/>
               </a:ext>
             </a:extLst>
           </p:cNvPr>
@@ -3360,7 +3360,7 @@
           <p:cNvPr id="3" name="Footer Placeholder 2">
             <a:extLst xmlns:a="http://schemas.openxmlformats.org/drawingml/2006/main">
               <a:ext uri="{FF2B5EF4-FFF2-40B4-BE49-F238E27FC236}">
-                <a16:creationId xmlns:a16="http://schemas.microsoft.com/office/drawing/2014/main" id="{DF6FF40B-A51F-4263-A098-45208C320181}"/>
+                <a16:creationId xmlns:a16="http://schemas.microsoft.com/office/drawing/2014/main" id="{9A3AC2B7-ABDD-4A54-9756-0C35EF522D17}"/>
               </a:ext>
             </a:extLst>
           </p:cNvPr>
@@ -3383,7 +3383,7 @@
           <p:cNvPr id="4" name="Slide Number Placeholder 3">
             <a:extLst xmlns:a="http://schemas.openxmlformats.org/drawingml/2006/main">
               <a:ext uri="{FF2B5EF4-FFF2-40B4-BE49-F238E27FC236}">
-                <a16:creationId xmlns:a16="http://schemas.microsoft.com/office/drawing/2014/main" id="{D717337A-4518-40E7-A6CC-122E7624B1C0}"/>
+                <a16:creationId xmlns:a16="http://schemas.microsoft.com/office/drawing/2014/main" id="{22F0F556-8B4C-4CD0-B4B9-CC03FD77509A}"/>
               </a:ext>
             </a:extLst>
           </p:cNvPr>
@@ -3427,7 +3427,7 @@
           <p:cNvPr id="2" name="Title 1">
             <a:extLst xmlns:a="http://schemas.openxmlformats.org/drawingml/2006/main">
               <a:ext uri="{FF2B5EF4-FFF2-40B4-BE49-F238E27FC236}">
-                <a16:creationId xmlns:a16="http://schemas.microsoft.com/office/drawing/2014/main" id="{E36D5B29-1236-43F1-B54F-C2C15F6CC599}"/>
+                <a16:creationId xmlns:a16="http://schemas.microsoft.com/office/drawing/2014/main" id="{1580994E-4B99-409B-BBA2-37831CF05328}"/>
               </a:ext>
             </a:extLst>
           </p:cNvPr>
@@ -3464,7 +3464,7 @@
           <p:cNvPr id="3" name="Content Placeholder 2">
             <a:extLst xmlns:a="http://schemas.openxmlformats.org/drawingml/2006/main">
               <a:ext uri="{FF2B5EF4-FFF2-40B4-BE49-F238E27FC236}">
-                <a16:creationId xmlns:a16="http://schemas.microsoft.com/office/drawing/2014/main" id="{1C931F8F-189E-460E-91B9-FF19555A760E}"/>
+                <a16:creationId xmlns:a16="http://schemas.microsoft.com/office/drawing/2014/main" id="{7854A9BB-C4A6-4486-8F3D-87FE7CCD30D5}"/>
               </a:ext>
             </a:extLst>
           </p:cNvPr>
@@ -3568,7 +3568,7 @@
           <p:cNvPr id="4" name="Text Placeholder 3">
             <a:extLst xmlns:a="http://schemas.openxmlformats.org/drawingml/2006/main">
               <a:ext uri="{FF2B5EF4-FFF2-40B4-BE49-F238E27FC236}">
-                <a16:creationId xmlns:a16="http://schemas.microsoft.com/office/drawing/2014/main" id="{C1C6758D-7DA7-4BD6-8616-A808DC3ACAFC}"/>
+                <a16:creationId xmlns:a16="http://schemas.microsoft.com/office/drawing/2014/main" id="{A72DADCC-DD06-4F54-9C47-33FEFADC5F81}"/>
               </a:ext>
             </a:extLst>
           </p:cNvPr>
@@ -3640,7 +3640,7 @@
           <p:cNvPr id="5" name="Date Placeholder 4">
             <a:extLst xmlns:a="http://schemas.openxmlformats.org/drawingml/2006/main">
               <a:ext uri="{FF2B5EF4-FFF2-40B4-BE49-F238E27FC236}">
-                <a16:creationId xmlns:a16="http://schemas.microsoft.com/office/drawing/2014/main" id="{05A46515-919C-469A-B937-12CED1A0DDAA}"/>
+                <a16:creationId xmlns:a16="http://schemas.microsoft.com/office/drawing/2014/main" id="{3A4B98CF-CD53-47AC-B5F3-068434BCF3C5}"/>
               </a:ext>
             </a:extLst>
           </p:cNvPr>
@@ -3667,7 +3667,7 @@
           <p:cNvPr id="6" name="Footer Placeholder 5">
             <a:extLst xmlns:a="http://schemas.openxmlformats.org/drawingml/2006/main">
               <a:ext uri="{FF2B5EF4-FFF2-40B4-BE49-F238E27FC236}">
-                <a16:creationId xmlns:a16="http://schemas.microsoft.com/office/drawing/2014/main" id="{4C2F2E61-CF0F-4E9B-A1B6-910651A6C64E}"/>
+                <a16:creationId xmlns:a16="http://schemas.microsoft.com/office/drawing/2014/main" id="{627E2E31-69CC-4875-A695-E5633FB3CED8}"/>
               </a:ext>
             </a:extLst>
           </p:cNvPr>
@@ -3690,7 +3690,7 @@
           <p:cNvPr id="7" name="Slide Number Placeholder 6">
             <a:extLst xmlns:a="http://schemas.openxmlformats.org/drawingml/2006/main">
               <a:ext uri="{FF2B5EF4-FFF2-40B4-BE49-F238E27FC236}">
-                <a16:creationId xmlns:a16="http://schemas.microsoft.com/office/drawing/2014/main" id="{62FFE967-2BDF-4758-B3D1-6D333D301344}"/>
+                <a16:creationId xmlns:a16="http://schemas.microsoft.com/office/drawing/2014/main" id="{96C8719C-E6E6-4BF4-A250-A02C0EA9856A}"/>
               </a:ext>
             </a:extLst>
           </p:cNvPr>
@@ -3734,7 +3734,7 @@
           <p:cNvPr id="2" name="Title 1">
             <a:extLst xmlns:a="http://schemas.openxmlformats.org/drawingml/2006/main">
               <a:ext uri="{FF2B5EF4-FFF2-40B4-BE49-F238E27FC236}">
-                <a16:creationId xmlns:a16="http://schemas.microsoft.com/office/drawing/2014/main" id="{04B8CA1D-1CBD-4826-9ED0-29ADA34433F6}"/>
+                <a16:creationId xmlns:a16="http://schemas.microsoft.com/office/drawing/2014/main" id="{CB6FCF95-962D-48C7-87EA-7D09553CC8C0}"/>
               </a:ext>
             </a:extLst>
           </p:cNvPr>
@@ -3771,7 +3771,7 @@
           <p:cNvPr id="3" name="Picture Placeholder 2">
             <a:extLst xmlns:a="http://schemas.openxmlformats.org/drawingml/2006/main">
               <a:ext uri="{FF2B5EF4-FFF2-40B4-BE49-F238E27FC236}">
-                <a16:creationId xmlns:a16="http://schemas.microsoft.com/office/drawing/2014/main" id="{995EA556-8CBA-44C0-9E09-D13307C6E3C4}"/>
+                <a16:creationId xmlns:a16="http://schemas.microsoft.com/office/drawing/2014/main" id="{ECE24CF6-E45D-4408-B992-D31A3B656535}"/>
               </a:ext>
             </a:extLst>
           </p:cNvPr>
@@ -3836,7 +3836,7 @@
           <p:cNvPr id="4" name="Text Placeholder 3">
             <a:extLst xmlns:a="http://schemas.openxmlformats.org/drawingml/2006/main">
               <a:ext uri="{FF2B5EF4-FFF2-40B4-BE49-F238E27FC236}">
-                <a16:creationId xmlns:a16="http://schemas.microsoft.com/office/drawing/2014/main" id="{84EA6901-61E7-4A4B-878D-8CDBD9341E2B}"/>
+                <a16:creationId xmlns:a16="http://schemas.microsoft.com/office/drawing/2014/main" id="{693D3B57-72C4-456C-953F-500AB22D5D7B}"/>
               </a:ext>
             </a:extLst>
           </p:cNvPr>
@@ -3908,7 +3908,7 @@
           <p:cNvPr id="5" name="Date Placeholder 4">
             <a:extLst xmlns:a="http://schemas.openxmlformats.org/drawingml/2006/main">
               <a:ext uri="{FF2B5EF4-FFF2-40B4-BE49-F238E27FC236}">
-                <a16:creationId xmlns:a16="http://schemas.microsoft.com/office/drawing/2014/main" id="{78768784-EA90-4550-B0FB-4AD7FF8AEB99}"/>
+                <a16:creationId xmlns:a16="http://schemas.microsoft.com/office/drawing/2014/main" id="{2581BAA7-DE87-479F-825C-02FFE2EFE8FB}"/>
               </a:ext>
             </a:extLst>
           </p:cNvPr>
@@ -3935,7 +3935,7 @@
           <p:cNvPr id="6" name="Footer Placeholder 5">
             <a:extLst xmlns:a="http://schemas.openxmlformats.org/drawingml/2006/main">
               <a:ext uri="{FF2B5EF4-FFF2-40B4-BE49-F238E27FC236}">
-                <a16:creationId xmlns:a16="http://schemas.microsoft.com/office/drawing/2014/main" id="{485641A6-B972-4D61-B2DA-68E9A646BC7B}"/>
+                <a16:creationId xmlns:a16="http://schemas.microsoft.com/office/drawing/2014/main" id="{2B341CB6-0185-4D11-8CA4-79212386197F}"/>
               </a:ext>
             </a:extLst>
           </p:cNvPr>
@@ -3958,7 +3958,7 @@
           <p:cNvPr id="7" name="Slide Number Placeholder 6">
             <a:extLst xmlns:a="http://schemas.openxmlformats.org/drawingml/2006/main">
               <a:ext uri="{FF2B5EF4-FFF2-40B4-BE49-F238E27FC236}">
-                <a16:creationId xmlns:a16="http://schemas.microsoft.com/office/drawing/2014/main" id="{A2750483-A971-4C9B-B7F6-0785B32EADD1}"/>
+                <a16:creationId xmlns:a16="http://schemas.microsoft.com/office/drawing/2014/main" id="{C5D3F275-CF17-485B-B116-393F6D571090}"/>
               </a:ext>
             </a:extLst>
           </p:cNvPr>
@@ -4007,7 +4007,7 @@
           <p:cNvPr id="2" name="Title Placeholder 1">
             <a:extLst xmlns:a="http://schemas.openxmlformats.org/drawingml/2006/main">
               <a:ext uri="{FF2B5EF4-FFF2-40B4-BE49-F238E27FC236}">
-                <a16:creationId xmlns:a16="http://schemas.microsoft.com/office/drawing/2014/main" id="{F4FA4A0D-A34D-4B74-875C-000A302E290A}"/>
+                <a16:creationId xmlns:a16="http://schemas.microsoft.com/office/drawing/2014/main" id="{74465F11-837C-4EF2-8147-2C3F41FA98C9}"/>
               </a:ext>
             </a:extLst>
           </p:cNvPr>
@@ -4044,7 +4044,7 @@
           <p:cNvPr id="3" name="Text Placeholder 2">
             <a:extLst xmlns:a="http://schemas.openxmlformats.org/drawingml/2006/main">
               <a:ext uri="{FF2B5EF4-FFF2-40B4-BE49-F238E27FC236}">
-                <a16:creationId xmlns:a16="http://schemas.microsoft.com/office/drawing/2014/main" id="{3C911582-E9A7-4995-B8B8-83133D5804D0}"/>
+                <a16:creationId xmlns:a16="http://schemas.microsoft.com/office/drawing/2014/main" id="{E2DEF6D8-EA80-48DB-9CC0-EB20AEA55360}"/>
               </a:ext>
             </a:extLst>
           </p:cNvPr>
@@ -4116,7 +4116,7 @@
           <p:cNvPr id="4" name="Date Placeholder 3">
             <a:extLst xmlns:a="http://schemas.openxmlformats.org/drawingml/2006/main">
               <a:ext uri="{FF2B5EF4-FFF2-40B4-BE49-F238E27FC236}">
-                <a16:creationId xmlns:a16="http://schemas.microsoft.com/office/drawing/2014/main" id="{83E81F0F-5BDD-4613-8F52-F02D474F8C56}"/>
+                <a16:creationId xmlns:a16="http://schemas.microsoft.com/office/drawing/2014/main" id="{C45BB857-9D3C-4D42-82E2-ECA9C6FEACA9}"/>
               </a:ext>
             </a:extLst>
           </p:cNvPr>
@@ -4162,7 +4162,7 @@
           <p:cNvPr id="5" name="Footer Placeholder 4">
             <a:extLst xmlns:a="http://schemas.openxmlformats.org/drawingml/2006/main">
               <a:ext uri="{FF2B5EF4-FFF2-40B4-BE49-F238E27FC236}">
-                <a16:creationId xmlns:a16="http://schemas.microsoft.com/office/drawing/2014/main" id="{D9EA162C-DE0B-4528-8F62-C7431262B2D6}"/>
+                <a16:creationId xmlns:a16="http://schemas.microsoft.com/office/drawing/2014/main" id="{7CF0F6EB-056B-49A6-848B-C6D7F00F9231}"/>
               </a:ext>
             </a:extLst>
           </p:cNvPr>
@@ -4204,7 +4204,7 @@
           <p:cNvPr id="6" name="Slide Number Placeholder 5">
             <a:extLst xmlns:a="http://schemas.openxmlformats.org/drawingml/2006/main">
               <a:ext uri="{FF2B5EF4-FFF2-40B4-BE49-F238E27FC236}">
-                <a16:creationId xmlns:a16="http://schemas.microsoft.com/office/drawing/2014/main" id="{FE5D8CE5-D35B-4D0F-A5F9-44A847CA776C}"/>
+                <a16:creationId xmlns:a16="http://schemas.microsoft.com/office/drawing/2014/main" id="{CEE769C4-7CCA-48D6-BA11-49DBD762DB75}"/>
               </a:ext>
             </a:extLst>
           </p:cNvPr>
@@ -4249,17 +4249,17 @@
   </p:cSld>
   <p:clrMap bg1="lt1" tx1="dk1" bg2="lt2" tx2="dk2" accent1="accent1" accent2="accent2" accent3="accent3" accent4="accent4" accent5="accent5" accent6="accent6" hlink="hlink" folHlink="folHlink"/>
   <p:sldLayoutIdLst>
-    <p:sldLayoutId xmlns:r="http://schemas.openxmlformats.org/officeDocument/2006/relationships" id="2147483649" r:id="Rc7fc173cea4e4203"/>
-    <p:sldLayoutId xmlns:r="http://schemas.openxmlformats.org/officeDocument/2006/relationships" id="2147483650" r:id="Ree9a87b6423b4266"/>
-    <p:sldLayoutId xmlns:r="http://schemas.openxmlformats.org/officeDocument/2006/relationships" id="2147483651" r:id="Rfb2ffbafa91b4131"/>
-    <p:sldLayoutId xmlns:r="http://schemas.openxmlformats.org/officeDocument/2006/relationships" id="2147483652" r:id="R557f982557784cf8"/>
-    <p:sldLayoutId xmlns:r="http://schemas.openxmlformats.org/officeDocument/2006/relationships" id="2147483653" r:id="Rc58802c7ebb149e7"/>
-    <p:sldLayoutId xmlns:r="http://schemas.openxmlformats.org/officeDocument/2006/relationships" id="2147483654" r:id="R55afb0eee931483e"/>
-    <p:sldLayoutId xmlns:r="http://schemas.openxmlformats.org/officeDocument/2006/relationships" id="2147483655" r:id="Re36593a35d3746b8"/>
-    <p:sldLayoutId xmlns:r="http://schemas.openxmlformats.org/officeDocument/2006/relationships" id="2147483656" r:id="R98e4364ce19c4ef2"/>
-    <p:sldLayoutId xmlns:r="http://schemas.openxmlformats.org/officeDocument/2006/relationships" id="2147483657" r:id="R1af06ae03e7245ab"/>
-    <p:sldLayoutId xmlns:r="http://schemas.openxmlformats.org/officeDocument/2006/relationships" id="2147483658" r:id="Redc34225233d4762"/>
-    <p:sldLayoutId xmlns:r="http://schemas.openxmlformats.org/officeDocument/2006/relationships" id="2147483659" r:id="R1f5ff10375284c73"/>
+    <p:sldLayoutId xmlns:r="http://schemas.openxmlformats.org/officeDocument/2006/relationships" id="2147483649" r:id="R9443039d893d4a07"/>
+    <p:sldLayoutId xmlns:r="http://schemas.openxmlformats.org/officeDocument/2006/relationships" id="2147483650" r:id="R92ad09993b994a68"/>
+    <p:sldLayoutId xmlns:r="http://schemas.openxmlformats.org/officeDocument/2006/relationships" id="2147483651" r:id="R3dd436487b134952"/>
+    <p:sldLayoutId xmlns:r="http://schemas.openxmlformats.org/officeDocument/2006/relationships" id="2147483652" r:id="R3da6f22198eb4302"/>
+    <p:sldLayoutId xmlns:r="http://schemas.openxmlformats.org/officeDocument/2006/relationships" id="2147483653" r:id="R4a8ba36f8002429c"/>
+    <p:sldLayoutId xmlns:r="http://schemas.openxmlformats.org/officeDocument/2006/relationships" id="2147483654" r:id="R6742d2f3279f4719"/>
+    <p:sldLayoutId xmlns:r="http://schemas.openxmlformats.org/officeDocument/2006/relationships" id="2147483655" r:id="R4894858333094f16"/>
+    <p:sldLayoutId xmlns:r="http://schemas.openxmlformats.org/officeDocument/2006/relationships" id="2147483656" r:id="R20e7329a70914d08"/>
+    <p:sldLayoutId xmlns:r="http://schemas.openxmlformats.org/officeDocument/2006/relationships" id="2147483657" r:id="Rc517c42f52e04300"/>
+    <p:sldLayoutId xmlns:r="http://schemas.openxmlformats.org/officeDocument/2006/relationships" id="2147483658" r:id="R6cd08312f7b9442d"/>
+    <p:sldLayoutId xmlns:r="http://schemas.openxmlformats.org/officeDocument/2006/relationships" id="2147483659" r:id="Rd4553f29f9b14b64"/>
   </p:sldLayoutIdLst>
   <p:txStyles>
     <p:titleStyle>
@@ -4812,7 +4812,7 @@
           <p:cNvPr id="2" name="Rectangle 1">
             <a:extLst xmlns:a="http://schemas.openxmlformats.org/drawingml/2006/main">
               <a:ext uri="{FF2B5EF4-FFF2-40B4-BE49-F238E27FC236}">
-                <a16:creationId xmlns:a16="http://schemas.microsoft.com/office/drawing/2014/main" id="{80AF9501-51D7-4F21-9BF8-99D7F4200A0E}"/>
+                <a16:creationId xmlns:a16="http://schemas.microsoft.com/office/drawing/2014/main" id="{733313A9-8C61-45BD-A679-81A5BB82C9DC}"/>
               </a:ext>
             </a:extLst>
           </p:cNvPr>
@@ -4867,7 +4867,7 @@
           <p:cNvPr id="3" name="TextBox 2">
             <a:extLst xmlns:a="http://schemas.openxmlformats.org/drawingml/2006/main">
               <a:ext uri="{FF2B5EF4-FFF2-40B4-BE49-F238E27FC236}">
-                <a16:creationId xmlns:a16="http://schemas.microsoft.com/office/drawing/2014/main" id="{C1A94F9A-251E-4D9B-95E7-EB877945BFF4}"/>
+                <a16:creationId xmlns:a16="http://schemas.microsoft.com/office/drawing/2014/main" id="{E6D0CAC7-D42A-4246-BD02-044D22E98A71}"/>
               </a:ext>
             </a:extLst>
           </p:cNvPr>
@@ -4914,7 +4914,7 @@
           <p:cNvPr id="4" name="TextBox 3">
             <a:extLst xmlns:a="http://schemas.openxmlformats.org/drawingml/2006/main">
               <a:ext uri="{FF2B5EF4-FFF2-40B4-BE49-F238E27FC236}">
-                <a16:creationId xmlns:a16="http://schemas.microsoft.com/office/drawing/2014/main" id="{19B9F2E6-D0AE-4992-A079-0215FBB54ADB}"/>
+                <a16:creationId xmlns:a16="http://schemas.microsoft.com/office/drawing/2014/main" id="{6A9A632E-D226-46D2-B3A3-DBEEE2F1DE1C}"/>
               </a:ext>
             </a:extLst>
           </p:cNvPr>
@@ -4982,7 +4982,7 @@
           <p:cNvPr id="5" name="TextBox 4">
             <a:extLst xmlns:a="http://schemas.openxmlformats.org/drawingml/2006/main">
               <a:ext uri="{FF2B5EF4-FFF2-40B4-BE49-F238E27FC236}">
-                <a16:creationId xmlns:a16="http://schemas.microsoft.com/office/drawing/2014/main" id="{04E9ACDC-84CB-4DC9-A688-717AB932DD35}"/>
+                <a16:creationId xmlns:a16="http://schemas.microsoft.com/office/drawing/2014/main" id="{42C3EA56-09CA-48D4-8497-54E82494B03E}"/>
               </a:ext>
             </a:extLst>
           </p:cNvPr>
@@ -5029,7 +5029,7 @@
           <p:cNvPr id="6" name="Rectangle 5">
             <a:extLst xmlns:a="http://schemas.openxmlformats.org/drawingml/2006/main">
               <a:ext uri="{FF2B5EF4-FFF2-40B4-BE49-F238E27FC236}">
-                <a16:creationId xmlns:a16="http://schemas.microsoft.com/office/drawing/2014/main" id="{37B1BC0C-03EA-4442-AA14-2A1BADCBD9E5}"/>
+                <a16:creationId xmlns:a16="http://schemas.microsoft.com/office/drawing/2014/main" id="{9AF2F06F-53FB-4A11-AA68-2C1D0EE3EFA9}"/>
               </a:ext>
             </a:extLst>
           </p:cNvPr>
@@ -5084,7 +5084,7 @@
           <p:cNvPr id="7" name="TextBox 6">
             <a:extLst xmlns:a="http://schemas.openxmlformats.org/drawingml/2006/main">
               <a:ext uri="{FF2B5EF4-FFF2-40B4-BE49-F238E27FC236}">
-                <a16:creationId xmlns:a16="http://schemas.microsoft.com/office/drawing/2014/main" id="{E2CC9551-6097-4331-94AB-1355CFBC1B6D}"/>
+                <a16:creationId xmlns:a16="http://schemas.microsoft.com/office/drawing/2014/main" id="{ACD8DDBF-45CF-4A11-B058-E149E7137CEE}"/>
               </a:ext>
             </a:extLst>
           </p:cNvPr>
@@ -5131,7 +5131,7 @@
           <p:cNvPr id="8" name="TextBox 7">
             <a:extLst xmlns:a="http://schemas.openxmlformats.org/drawingml/2006/main">
               <a:ext uri="{FF2B5EF4-FFF2-40B4-BE49-F238E27FC236}">
-                <a16:creationId xmlns:a16="http://schemas.microsoft.com/office/drawing/2014/main" id="{BF3D937D-C326-42A5-8969-93F8895EF395}"/>
+                <a16:creationId xmlns:a16="http://schemas.microsoft.com/office/drawing/2014/main" id="{C83C5A7C-D122-4FFC-A8CE-927354012E86}"/>
               </a:ext>
             </a:extLst>
           </p:cNvPr>
@@ -5143,7 +5143,7 @@
         <p:spPr>
           <a:xfrm xmlns:a="http://schemas.openxmlformats.org/drawingml/2006/main">
             <a:off x="8732520" y="1700784"/>
-            <a:ext cx="2880360" cy="515112"/>
+            <a:ext cx="2880360" cy="502920"/>
           </a:xfrm>
           <a:prstGeom xmlns:a="http://schemas.openxmlformats.org/drawingml/2006/main" prst="rect">
             <a:avLst/>
@@ -5168,7 +5168,7 @@
                 <a:ea typeface="Aptos"/>
                 <a:cs typeface="Aptos"/>
               </a:rPr>
-              <a:t>2026.07.23-16</a:t>
+              <a:t>2026.07.24-17</a:t>
             </a:r>
           </a:p>
         </p:txBody>
@@ -5178,7 +5178,7 @@
           <p:cNvPr id="9" name="TextBox 8">
             <a:extLst xmlns:a="http://schemas.openxmlformats.org/drawingml/2006/main">
               <a:ext uri="{FF2B5EF4-FFF2-40B4-BE49-F238E27FC236}">
-                <a16:creationId xmlns:a16="http://schemas.microsoft.com/office/drawing/2014/main" id="{4DB47733-2B56-4847-B76B-82354315A0F7}"/>
+                <a16:creationId xmlns:a16="http://schemas.microsoft.com/office/drawing/2014/main" id="{30670456-9B08-4FC5-884E-EF27703C91E0}"/>
               </a:ext>
             </a:extLst>
           </p:cNvPr>
@@ -5215,7 +5215,7 @@
                 <a:ea typeface="Aptos"/>
                 <a:cs typeface="Aptos"/>
               </a:rPr>
-              <a:t>Updated 2026-07-22</a:t>
+              <a:t>Updated 2026-07-24</a:t>
             </a:r>
             <a:br>
               <a:rPr sz="1700" b="0">
@@ -5246,7 +5246,7 @@
           <p:cNvPr id="10" name="TextBox 9">
             <a:extLst xmlns:a="http://schemas.openxmlformats.org/drawingml/2006/main">
               <a:ext uri="{FF2B5EF4-FFF2-40B4-BE49-F238E27FC236}">
-                <a16:creationId xmlns:a16="http://schemas.microsoft.com/office/drawing/2014/main" id="{1DC55C57-FCF7-4CFC-B7F7-48BBBB08EEB4}"/>
+                <a16:creationId xmlns:a16="http://schemas.microsoft.com/office/drawing/2014/main" id="{AF4A8B76-B969-4DD0-BFC7-70DE3BCDE08E}"/>
               </a:ext>
             </a:extLst>
           </p:cNvPr>
@@ -5293,7 +5293,7 @@
           <p:cNvPr id="11" name="TextBox 10">
             <a:extLst xmlns:a="http://schemas.openxmlformats.org/drawingml/2006/main">
               <a:ext uri="{FF2B5EF4-FFF2-40B4-BE49-F238E27FC236}">
-                <a16:creationId xmlns:a16="http://schemas.microsoft.com/office/drawing/2014/main" id="{768B553C-F309-4B82-9A61-E216EF338148}"/>
+                <a16:creationId xmlns:a16="http://schemas.microsoft.com/office/drawing/2014/main" id="{C1338F63-93E3-4228-81BA-103F79FB8C4F}"/>
               </a:ext>
             </a:extLst>
           </p:cNvPr>
@@ -5340,7 +5340,7 @@
           <p:cNvPr id="12" name="TextBox 11">
             <a:extLst xmlns:a="http://schemas.openxmlformats.org/drawingml/2006/main">
               <a:ext uri="{FF2B5EF4-FFF2-40B4-BE49-F238E27FC236}">
-                <a16:creationId xmlns:a16="http://schemas.microsoft.com/office/drawing/2014/main" id="{BC7DE33D-D004-4248-A097-C1A12C421D69}"/>
+                <a16:creationId xmlns:a16="http://schemas.microsoft.com/office/drawing/2014/main" id="{6DD0B23B-E8AB-49F7-ADFB-2D129F32B9F6}"/>
               </a:ext>
             </a:extLst>
           </p:cNvPr>
@@ -5387,7 +5387,7 @@
           <p:cNvPr id="13" name="TextBox 12">
             <a:extLst xmlns:a="http://schemas.openxmlformats.org/drawingml/2006/main">
               <a:ext uri="{FF2B5EF4-FFF2-40B4-BE49-F238E27FC236}">
-                <a16:creationId xmlns:a16="http://schemas.microsoft.com/office/drawing/2014/main" id="{24691EEE-71C3-4F11-BDB6-A207ED0A812E}"/>
+                <a16:creationId xmlns:a16="http://schemas.microsoft.com/office/drawing/2014/main" id="{805ADC1E-83AB-4973-9F4E-0084D9323B0D}"/>
               </a:ext>
             </a:extLst>
           </p:cNvPr>
@@ -5432,7 +5432,7 @@
     </p:spTree>
     <p:extLst>
       <p:ext uri="{BB962C8B-B14F-4D97-AF65-F5344CB8AC3E}">
-        <p14:creationId xmlns:p14="http://schemas.microsoft.com/office/powerpoint/2010/main" val="1773725903"/>
+        <p14:creationId xmlns:p14="http://schemas.microsoft.com/office/powerpoint/2010/main" val="1154884845"/>
       </p:ext>
     </p:extLst>
   </p:cSld>
@@ -5456,7 +5456,7 @@
           <p:cNvPr id="2" name="TextBox 1">
             <a:extLst xmlns:a="http://schemas.openxmlformats.org/drawingml/2006/main">
               <a:ext uri="{FF2B5EF4-FFF2-40B4-BE49-F238E27FC236}">
-                <a16:creationId xmlns:a16="http://schemas.microsoft.com/office/drawing/2014/main" id="{BBCAD885-D9BE-4BFD-83C5-6217780DFDC8}"/>
+                <a16:creationId xmlns:a16="http://schemas.microsoft.com/office/drawing/2014/main" id="{35D5A351-87D5-4FC0-8C4E-AF27DA021E35}"/>
               </a:ext>
             </a:extLst>
           </p:cNvPr>
@@ -5503,7 +5503,7 @@
           <p:cNvPr id="3" name="TextBox 2">
             <a:extLst xmlns:a="http://schemas.openxmlformats.org/drawingml/2006/main">
               <a:ext uri="{FF2B5EF4-FFF2-40B4-BE49-F238E27FC236}">
-                <a16:creationId xmlns:a16="http://schemas.microsoft.com/office/drawing/2014/main" id="{2E16017F-A5CB-48E2-8488-35D92C3AAEDF}"/>
+                <a16:creationId xmlns:a16="http://schemas.microsoft.com/office/drawing/2014/main" id="{6ADF16A6-6735-461A-8CF2-DD6D78617E47}"/>
               </a:ext>
             </a:extLst>
           </p:cNvPr>
@@ -5550,7 +5550,7 @@
           <p:cNvPr id="4" name="Rectangle 3">
             <a:extLst xmlns:a="http://schemas.openxmlformats.org/drawingml/2006/main">
               <a:ext uri="{FF2B5EF4-FFF2-40B4-BE49-F238E27FC236}">
-                <a16:creationId xmlns:a16="http://schemas.microsoft.com/office/drawing/2014/main" id="{82AE1B71-100E-4E9D-88F5-925972D12C95}"/>
+                <a16:creationId xmlns:a16="http://schemas.microsoft.com/office/drawing/2014/main" id="{714F9F99-B660-497D-89AB-585E2B0AAE87}"/>
               </a:ext>
             </a:extLst>
           </p:cNvPr>
@@ -5605,7 +5605,7 @@
           <p:cNvPr id="5" name="Rectangle 4">
             <a:extLst xmlns:a="http://schemas.openxmlformats.org/drawingml/2006/main">
               <a:ext uri="{FF2B5EF4-FFF2-40B4-BE49-F238E27FC236}">
-                <a16:creationId xmlns:a16="http://schemas.microsoft.com/office/drawing/2014/main" id="{0FB3D474-FF4A-4A2F-848A-D478620C4D84}"/>
+                <a16:creationId xmlns:a16="http://schemas.microsoft.com/office/drawing/2014/main" id="{AE8F04C8-0DC6-4B31-9B6D-1314443C3C5C}"/>
               </a:ext>
             </a:extLst>
           </p:cNvPr>
@@ -5660,7 +5660,7 @@
           <p:cNvPr id="6" name="TextBox 5">
             <a:extLst xmlns:a="http://schemas.openxmlformats.org/drawingml/2006/main">
               <a:ext uri="{FF2B5EF4-FFF2-40B4-BE49-F238E27FC236}">
-                <a16:creationId xmlns:a16="http://schemas.microsoft.com/office/drawing/2014/main" id="{572138CC-3200-4DB7-BA9D-F0C5562F68D4}"/>
+                <a16:creationId xmlns:a16="http://schemas.microsoft.com/office/drawing/2014/main" id="{B8E5B3EE-F0EB-4001-982E-0E5DE9F63CA0}"/>
               </a:ext>
             </a:extLst>
           </p:cNvPr>
@@ -5697,7 +5697,7 @@
                 <a:ea typeface="Aptos"/>
                 <a:cs typeface="Aptos"/>
               </a:rPr>
-              <a:t>Independent public evidence summary · 2026.07.23-16 · 2026-07-22 · Sources: WIPO licensing; dispute resolution; IPscore</a:t>
+              <a:t>Independent public evidence summary · 2026.07.24-17 · 2026-07-24 · Sources: WIPO licensing; dispute resolution; IPscore</a:t>
             </a:r>
           </a:p>
         </p:txBody>
@@ -5707,7 +5707,7 @@
           <p:cNvPr id="7" name="TextBox 6">
             <a:extLst xmlns:a="http://schemas.openxmlformats.org/drawingml/2006/main">
               <a:ext uri="{FF2B5EF4-FFF2-40B4-BE49-F238E27FC236}">
-                <a16:creationId xmlns:a16="http://schemas.microsoft.com/office/drawing/2014/main" id="{BB0CFFCB-262F-496A-8569-D338B5001FF0}"/>
+                <a16:creationId xmlns:a16="http://schemas.microsoft.com/office/drawing/2014/main" id="{2B436EB6-8026-4C4B-A7FD-A4A63D8F2D23}"/>
               </a:ext>
             </a:extLst>
           </p:cNvPr>
@@ -5754,7 +5754,7 @@
           <p:cNvPr id="8" name="Rounded Rectangle 7">
             <a:extLst xmlns:a="http://schemas.openxmlformats.org/drawingml/2006/main">
               <a:ext uri="{FF2B5EF4-FFF2-40B4-BE49-F238E27FC236}">
-                <a16:creationId xmlns:a16="http://schemas.microsoft.com/office/drawing/2014/main" id="{12C90362-E4DC-47FC-84DD-29D1A97857B3}"/>
+                <a16:creationId xmlns:a16="http://schemas.microsoft.com/office/drawing/2014/main" id="{ED62F44C-6DEB-4925-BEE2-AFD1F8705DC7}"/>
               </a:ext>
             </a:extLst>
           </p:cNvPr>
@@ -5811,7 +5811,7 @@
           <p:cNvPr id="9" name="TextBox 8">
             <a:extLst xmlns:a="http://schemas.openxmlformats.org/drawingml/2006/main">
               <a:ext uri="{FF2B5EF4-FFF2-40B4-BE49-F238E27FC236}">
-                <a16:creationId xmlns:a16="http://schemas.microsoft.com/office/drawing/2014/main" id="{64BF1AB5-170A-4A22-A2E8-2F1EC27FDE67}"/>
+                <a16:creationId xmlns:a16="http://schemas.microsoft.com/office/drawing/2014/main" id="{BCA66CC8-6216-404C-80A6-F28701001512}"/>
               </a:ext>
             </a:extLst>
           </p:cNvPr>
@@ -5858,7 +5858,7 @@
           <p:cNvPr id="10" name="TextBox 9">
             <a:extLst xmlns:a="http://schemas.openxmlformats.org/drawingml/2006/main">
               <a:ext uri="{FF2B5EF4-FFF2-40B4-BE49-F238E27FC236}">
-                <a16:creationId xmlns:a16="http://schemas.microsoft.com/office/drawing/2014/main" id="{BE7CB702-E98D-410E-8170-C31ACB6B4938}"/>
+                <a16:creationId xmlns:a16="http://schemas.microsoft.com/office/drawing/2014/main" id="{4346A864-467E-4542-82EB-4FD9ED80D1CB}"/>
               </a:ext>
             </a:extLst>
           </p:cNvPr>
@@ -5905,7 +5905,7 @@
           <p:cNvPr id="11" name="TextBox 10">
             <a:extLst xmlns:a="http://schemas.openxmlformats.org/drawingml/2006/main">
               <a:ext uri="{FF2B5EF4-FFF2-40B4-BE49-F238E27FC236}">
-                <a16:creationId xmlns:a16="http://schemas.microsoft.com/office/drawing/2014/main" id="{2AB01624-0A38-4515-826B-9D36484917C4}"/>
+                <a16:creationId xmlns:a16="http://schemas.microsoft.com/office/drawing/2014/main" id="{A17B3E55-4840-45AF-A469-B69553D05990}"/>
               </a:ext>
             </a:extLst>
           </p:cNvPr>
@@ -5952,7 +5952,7 @@
           <p:cNvPr id="12" name="Rounded Rectangle 11">
             <a:extLst xmlns:a="http://schemas.openxmlformats.org/drawingml/2006/main">
               <a:ext uri="{FF2B5EF4-FFF2-40B4-BE49-F238E27FC236}">
-                <a16:creationId xmlns:a16="http://schemas.microsoft.com/office/drawing/2014/main" id="{63DD7B3C-669B-47B5-8C64-350D32922E5A}"/>
+                <a16:creationId xmlns:a16="http://schemas.microsoft.com/office/drawing/2014/main" id="{1B6CFC91-F9AC-4295-A6BE-3ED4C3D0182C}"/>
               </a:ext>
             </a:extLst>
           </p:cNvPr>
@@ -6009,7 +6009,7 @@
           <p:cNvPr id="13" name="TextBox 12">
             <a:extLst xmlns:a="http://schemas.openxmlformats.org/drawingml/2006/main">
               <a:ext uri="{FF2B5EF4-FFF2-40B4-BE49-F238E27FC236}">
-                <a16:creationId xmlns:a16="http://schemas.microsoft.com/office/drawing/2014/main" id="{8B112A15-A971-41FC-BA3B-81BC815DC556}"/>
+                <a16:creationId xmlns:a16="http://schemas.microsoft.com/office/drawing/2014/main" id="{12302EDA-CF60-4E81-847C-60FE980150C0}"/>
               </a:ext>
             </a:extLst>
           </p:cNvPr>
@@ -6056,7 +6056,7 @@
           <p:cNvPr id="14" name="TextBox 13">
             <a:extLst xmlns:a="http://schemas.openxmlformats.org/drawingml/2006/main">
               <a:ext uri="{FF2B5EF4-FFF2-40B4-BE49-F238E27FC236}">
-                <a16:creationId xmlns:a16="http://schemas.microsoft.com/office/drawing/2014/main" id="{F56E1838-ED4E-4956-8F3D-B015B0D1E3BA}"/>
+                <a16:creationId xmlns:a16="http://schemas.microsoft.com/office/drawing/2014/main" id="{9AD15083-27F4-476A-9FA4-1C0F7C41C6C7}"/>
               </a:ext>
             </a:extLst>
           </p:cNvPr>
@@ -6103,7 +6103,7 @@
           <p:cNvPr id="15" name="TextBox 14">
             <a:extLst xmlns:a="http://schemas.openxmlformats.org/drawingml/2006/main">
               <a:ext uri="{FF2B5EF4-FFF2-40B4-BE49-F238E27FC236}">
-                <a16:creationId xmlns:a16="http://schemas.microsoft.com/office/drawing/2014/main" id="{0328C0A9-9DCB-4314-9E7B-DADDD8A98519}"/>
+                <a16:creationId xmlns:a16="http://schemas.microsoft.com/office/drawing/2014/main" id="{499C5490-1317-48C7-B946-7467C1DA6507}"/>
               </a:ext>
             </a:extLst>
           </p:cNvPr>
@@ -6150,7 +6150,7 @@
           <p:cNvPr id="16" name="Rounded Rectangle 15">
             <a:extLst xmlns:a="http://schemas.openxmlformats.org/drawingml/2006/main">
               <a:ext uri="{FF2B5EF4-FFF2-40B4-BE49-F238E27FC236}">
-                <a16:creationId xmlns:a16="http://schemas.microsoft.com/office/drawing/2014/main" id="{1BDB2710-E6DB-4ABB-B659-8AE356B96157}"/>
+                <a16:creationId xmlns:a16="http://schemas.microsoft.com/office/drawing/2014/main" id="{6B3FDE2C-B09D-4AFA-94FA-16DB5A2967A3}"/>
               </a:ext>
             </a:extLst>
           </p:cNvPr>
@@ -6207,7 +6207,7 @@
           <p:cNvPr id="17" name="TextBox 16">
             <a:extLst xmlns:a="http://schemas.openxmlformats.org/drawingml/2006/main">
               <a:ext uri="{FF2B5EF4-FFF2-40B4-BE49-F238E27FC236}">
-                <a16:creationId xmlns:a16="http://schemas.microsoft.com/office/drawing/2014/main" id="{0E490D84-6273-4CA9-A7F3-9C3B6BA75A75}"/>
+                <a16:creationId xmlns:a16="http://schemas.microsoft.com/office/drawing/2014/main" id="{C78C1ED0-982F-4BDE-84E5-9DFAC1D01314}"/>
               </a:ext>
             </a:extLst>
           </p:cNvPr>
@@ -6254,7 +6254,7 @@
           <p:cNvPr id="18" name="TextBox 17">
             <a:extLst xmlns:a="http://schemas.openxmlformats.org/drawingml/2006/main">
               <a:ext uri="{FF2B5EF4-FFF2-40B4-BE49-F238E27FC236}">
-                <a16:creationId xmlns:a16="http://schemas.microsoft.com/office/drawing/2014/main" id="{0E7165AA-77A1-4A12-86BF-CDD224294716}"/>
+                <a16:creationId xmlns:a16="http://schemas.microsoft.com/office/drawing/2014/main" id="{1887F29E-C434-415B-8879-3BF38E73E7B5}"/>
               </a:ext>
             </a:extLst>
           </p:cNvPr>
@@ -6301,7 +6301,7 @@
           <p:cNvPr id="19" name="TextBox 18">
             <a:extLst xmlns:a="http://schemas.openxmlformats.org/drawingml/2006/main">
               <a:ext uri="{FF2B5EF4-FFF2-40B4-BE49-F238E27FC236}">
-                <a16:creationId xmlns:a16="http://schemas.microsoft.com/office/drawing/2014/main" id="{AED2894B-9714-4B9C-A0B4-F66386DE1922}"/>
+                <a16:creationId xmlns:a16="http://schemas.microsoft.com/office/drawing/2014/main" id="{36BCFA66-0DA3-483B-84C5-1FC535754BDA}"/>
               </a:ext>
             </a:extLst>
           </p:cNvPr>
@@ -6348,7 +6348,7 @@
           <p:cNvPr id="20" name="Rounded Rectangle 19">
             <a:extLst xmlns:a="http://schemas.openxmlformats.org/drawingml/2006/main">
               <a:ext uri="{FF2B5EF4-FFF2-40B4-BE49-F238E27FC236}">
-                <a16:creationId xmlns:a16="http://schemas.microsoft.com/office/drawing/2014/main" id="{9EF10E90-90BC-4142-BDFF-A7FF5608C1D1}"/>
+                <a16:creationId xmlns:a16="http://schemas.microsoft.com/office/drawing/2014/main" id="{4306ECA0-90E7-4A46-873E-26BAC25C455E}"/>
               </a:ext>
             </a:extLst>
           </p:cNvPr>
@@ -6405,7 +6405,7 @@
           <p:cNvPr id="21" name="TextBox 20">
             <a:extLst xmlns:a="http://schemas.openxmlformats.org/drawingml/2006/main">
               <a:ext uri="{FF2B5EF4-FFF2-40B4-BE49-F238E27FC236}">
-                <a16:creationId xmlns:a16="http://schemas.microsoft.com/office/drawing/2014/main" id="{11CD0853-B584-4B0E-A45C-4A62E177554D}"/>
+                <a16:creationId xmlns:a16="http://schemas.microsoft.com/office/drawing/2014/main" id="{66F88424-872A-45FD-82BB-250164F2343F}"/>
               </a:ext>
             </a:extLst>
           </p:cNvPr>
@@ -6452,7 +6452,7 @@
           <p:cNvPr id="22" name="TextBox 21">
             <a:extLst xmlns:a="http://schemas.openxmlformats.org/drawingml/2006/main">
               <a:ext uri="{FF2B5EF4-FFF2-40B4-BE49-F238E27FC236}">
-                <a16:creationId xmlns:a16="http://schemas.microsoft.com/office/drawing/2014/main" id="{0842E3F1-F72D-4939-B8AB-2205FA5F5CE0}"/>
+                <a16:creationId xmlns:a16="http://schemas.microsoft.com/office/drawing/2014/main" id="{0FCA070D-90EA-462B-A7EB-04DAFE72930F}"/>
               </a:ext>
             </a:extLst>
           </p:cNvPr>
@@ -6499,7 +6499,7 @@
           <p:cNvPr id="23" name="TextBox 22">
             <a:extLst xmlns:a="http://schemas.openxmlformats.org/drawingml/2006/main">
               <a:ext uri="{FF2B5EF4-FFF2-40B4-BE49-F238E27FC236}">
-                <a16:creationId xmlns:a16="http://schemas.microsoft.com/office/drawing/2014/main" id="{48F0C00B-1FCB-44CF-8591-A977D09318B4}"/>
+                <a16:creationId xmlns:a16="http://schemas.microsoft.com/office/drawing/2014/main" id="{0CED04BC-19DF-4720-AEF6-3FD9869DA8E8}"/>
               </a:ext>
             </a:extLst>
           </p:cNvPr>
@@ -6546,7 +6546,7 @@
           <p:cNvPr id="24" name="TextBox 23">
             <a:extLst xmlns:a="http://schemas.openxmlformats.org/drawingml/2006/main">
               <a:ext uri="{FF2B5EF4-FFF2-40B4-BE49-F238E27FC236}">
-                <a16:creationId xmlns:a16="http://schemas.microsoft.com/office/drawing/2014/main" id="{A2F7C796-5320-483E-A5FA-DAD5C3C9F3D8}"/>
+                <a16:creationId xmlns:a16="http://schemas.microsoft.com/office/drawing/2014/main" id="{E2454E64-C7FE-478A-9870-9CF14CF60AF8}"/>
               </a:ext>
             </a:extLst>
           </p:cNvPr>
@@ -6591,7 +6591,7 @@
     </p:spTree>
     <p:extLst>
       <p:ext uri="{BB962C8B-B14F-4D97-AF65-F5344CB8AC3E}">
-        <p14:creationId xmlns:p14="http://schemas.microsoft.com/office/powerpoint/2010/main" val="1950347667"/>
+        <p14:creationId xmlns:p14="http://schemas.microsoft.com/office/powerpoint/2010/main" val="326522153"/>
       </p:ext>
     </p:extLst>
   </p:cSld>
@@ -6615,7 +6615,7 @@
           <p:cNvPr id="2" name="TextBox 1">
             <a:extLst xmlns:a="http://schemas.openxmlformats.org/drawingml/2006/main">
               <a:ext uri="{FF2B5EF4-FFF2-40B4-BE49-F238E27FC236}">
-                <a16:creationId xmlns:a16="http://schemas.microsoft.com/office/drawing/2014/main" id="{099523FB-5F13-4677-8CD9-E90D0A9F10CC}"/>
+                <a16:creationId xmlns:a16="http://schemas.microsoft.com/office/drawing/2014/main" id="{8DC9FF91-E197-46A2-ADD7-E9610F3C997F}"/>
               </a:ext>
             </a:extLst>
           </p:cNvPr>
@@ -6662,7 +6662,7 @@
           <p:cNvPr id="3" name="TextBox 2">
             <a:extLst xmlns:a="http://schemas.openxmlformats.org/drawingml/2006/main">
               <a:ext uri="{FF2B5EF4-FFF2-40B4-BE49-F238E27FC236}">
-                <a16:creationId xmlns:a16="http://schemas.microsoft.com/office/drawing/2014/main" id="{FB2EE27A-9FDB-4C2E-9CCE-235284838D5A}"/>
+                <a16:creationId xmlns:a16="http://schemas.microsoft.com/office/drawing/2014/main" id="{367D8C65-E0B4-49B2-99A8-AA09061D2351}"/>
               </a:ext>
             </a:extLst>
           </p:cNvPr>
@@ -6674,7 +6674,7 @@
         <p:spPr>
           <a:xfrm xmlns:a="http://schemas.openxmlformats.org/drawingml/2006/main">
             <a:off x="502920" y="621792"/>
-            <a:ext cx="11109960" cy="591312"/>
+            <a:ext cx="11109960" cy="804672"/>
           </a:xfrm>
           <a:prstGeom xmlns:a="http://schemas.openxmlformats.org/drawingml/2006/main" prst="rect">
             <a:avLst/>
@@ -6691,7 +6691,7 @@
               <a:buNone/>
             </a:pPr>
             <a:r>
-              <a:rPr sz="3400" b="1">
+              <a:rPr sz="3000" b="1">
                 <a:solidFill>
                   <a:srgbClr val="071A2B"/>
                 </a:solidFill>
@@ -6709,18 +6709,18 @@
           <p:cNvPr id="4" name="Rectangle 3">
             <a:extLst xmlns:a="http://schemas.openxmlformats.org/drawingml/2006/main">
               <a:ext uri="{FF2B5EF4-FFF2-40B4-BE49-F238E27FC236}">
-                <a16:creationId xmlns:a16="http://schemas.microsoft.com/office/drawing/2014/main" id="{9B8858B1-EDD1-43D3-8E2C-C3C430CC6BE9}"/>
-              </a:ext>
-            </a:extLst>
-          </p:cNvPr>
-          <p:cNvSpPr>
-            <a:spLocks xmlns:a="http://schemas.openxmlformats.org/drawingml/2006/main" noGrp="1"/>
-          </p:cNvSpPr>
-          <p:nvPr/>
-        </p:nvSpPr>
-        <p:spPr>
-          <a:xfrm xmlns:a="http://schemas.openxmlformats.org/drawingml/2006/main">
-            <a:off x="502920" y="1225296"/>
+                <a16:creationId xmlns:a16="http://schemas.microsoft.com/office/drawing/2014/main" id="{FAB1C45C-EA35-45B3-A6F3-668A1E693DD5}"/>
+              </a:ext>
+            </a:extLst>
+          </p:cNvPr>
+          <p:cNvSpPr>
+            <a:spLocks xmlns:a="http://schemas.openxmlformats.org/drawingml/2006/main" noGrp="1"/>
+          </p:cNvSpPr>
+          <p:nvPr/>
+        </p:nvSpPr>
+        <p:spPr>
+          <a:xfrm xmlns:a="http://schemas.openxmlformats.org/drawingml/2006/main">
+            <a:off x="502920" y="1554480"/>
             <a:ext cx="960120" cy="50292"/>
           </a:xfrm>
           <a:prstGeom xmlns:a="http://schemas.openxmlformats.org/drawingml/2006/main" prst="rect">
@@ -6764,7 +6764,7 @@
           <p:cNvPr id="5" name="Rectangle 4">
             <a:extLst xmlns:a="http://schemas.openxmlformats.org/drawingml/2006/main">
               <a:ext uri="{FF2B5EF4-FFF2-40B4-BE49-F238E27FC236}">
-                <a16:creationId xmlns:a16="http://schemas.microsoft.com/office/drawing/2014/main" id="{9128A027-32B6-4F37-9C67-8F20C1F3D38A}"/>
+                <a16:creationId xmlns:a16="http://schemas.microsoft.com/office/drawing/2014/main" id="{CFE10D64-8E9D-4DBC-A986-1AFC86E47378}"/>
               </a:ext>
             </a:extLst>
           </p:cNvPr>
@@ -6819,7 +6819,7 @@
           <p:cNvPr id="6" name="TextBox 5">
             <a:extLst xmlns:a="http://schemas.openxmlformats.org/drawingml/2006/main">
               <a:ext uri="{FF2B5EF4-FFF2-40B4-BE49-F238E27FC236}">
-                <a16:creationId xmlns:a16="http://schemas.microsoft.com/office/drawing/2014/main" id="{2D1D71BD-6F7A-4D45-90CE-637E85A8D222}"/>
+                <a16:creationId xmlns:a16="http://schemas.microsoft.com/office/drawing/2014/main" id="{CD9303A9-DDC6-423D-80DA-AA3A9C83D70F}"/>
               </a:ext>
             </a:extLst>
           </p:cNvPr>
@@ -6856,7 +6856,7 @@
                 <a:ea typeface="Aptos"/>
                 <a:cs typeface="Aptos"/>
               </a:rPr>
-              <a:t>Independent public evidence summary · 2026.07.23-16 · 2026-07-22 · Sources: WIPO IP valuation; Market-values</a:t>
+              <a:t>Independent public evidence summary · 2026.07.24-17 · 2026-07-24 · Sources: WIPO IP valuation; Market-values</a:t>
             </a:r>
           </a:p>
         </p:txBody>
@@ -6866,7 +6866,7 @@
           <p:cNvPr id="7" name="TextBox 6">
             <a:extLst xmlns:a="http://schemas.openxmlformats.org/drawingml/2006/main">
               <a:ext uri="{FF2B5EF4-FFF2-40B4-BE49-F238E27FC236}">
-                <a16:creationId xmlns:a16="http://schemas.microsoft.com/office/drawing/2014/main" id="{2BCF0507-2C35-414B-9124-C88EFCFB059C}"/>
+                <a16:creationId xmlns:a16="http://schemas.microsoft.com/office/drawing/2014/main" id="{B9359D59-9144-49B7-9007-E086CCCC1429}"/>
               </a:ext>
             </a:extLst>
           </p:cNvPr>
@@ -6915,8 +6915,8 @@
           <p:nvPr/>
         </p:nvGraphicFramePr>
         <p:xfrm>
-          <a:off xmlns:a="http://schemas.openxmlformats.org/drawingml/2006/main" x="530352" y="1536192"/>
-          <a:ext xmlns:a="http://schemas.openxmlformats.org/drawingml/2006/main" cx="11109959" cy="3977637"/>
+          <a:off xmlns:a="http://schemas.openxmlformats.org/drawingml/2006/main" x="530352" y="1719072"/>
+          <a:ext xmlns:a="http://schemas.openxmlformats.org/drawingml/2006/main" cx="11109959" cy="3794757"/>
         </p:xfrm>
         <a:graphic xmlns:a="http://schemas.openxmlformats.org/drawingml/2006/main">
           <a:graphicData uri="http://schemas.openxmlformats.org/drawingml/2006/table">
@@ -7012,7 +7012,7 @@
                   </a:tcPr>
                 </a:tc>
               </a:tr>
-              <a:tr h="707745">
+              <a:tr h="671169">
                 <a:tc>
                   <a:txBody>
                     <a:bodyPr/>
@@ -7084,7 +7084,7 @@
                           <a:ea typeface="Aptos"/>
                           <a:cs typeface="Aptos"/>
                         </a:rPr>
-                        <a:t>0 retail-value donors</a:t>
+                        <a:t>0/3 retail-value donors; 4 candidates failed D1–D10</a:t>
                       </a:r>
                     </a:p>
                   </a:txBody>
@@ -7095,7 +7095,7 @@
                   </a:tcPr>
                 </a:tc>
               </a:tr>
-              <a:tr h="707745">
+              <a:tr h="671169">
                 <a:tc>
                   <a:txBody>
                     <a:bodyPr/>
@@ -7178,7 +7178,7 @@
                   </a:tcPr>
                 </a:tc>
               </a:tr>
-              <a:tr h="707745">
+              <a:tr h="671169">
                 <a:tc>
                   <a:txBody>
                     <a:bodyPr/>
@@ -7261,7 +7261,7 @@
                   </a:tcPr>
                 </a:tc>
               </a:tr>
-              <a:tr h="707745">
+              <a:tr h="671169">
                 <a:tc>
                   <a:txBody>
                     <a:bodyPr/>
@@ -7344,7 +7344,7 @@
                   </a:tcPr>
                 </a:tc>
               </a:tr>
-              <a:tr h="707745">
+              <a:tr h="671169">
                 <a:tc>
                   <a:txBody>
                     <a:bodyPr/>
@@ -7436,7 +7436,7 @@
           <p:cNvPr id="9" name="TextBox 8">
             <a:extLst xmlns:a="http://schemas.openxmlformats.org/drawingml/2006/main">
               <a:ext uri="{FF2B5EF4-FFF2-40B4-BE49-F238E27FC236}">
-                <a16:creationId xmlns:a16="http://schemas.microsoft.com/office/drawing/2014/main" id="{117FEBF5-05E0-4BAA-B9BD-B0CD34CF9092}"/>
+                <a16:creationId xmlns:a16="http://schemas.microsoft.com/office/drawing/2014/main" id="{3894190B-4748-4B21-B94A-47358E00B7D4}"/>
               </a:ext>
             </a:extLst>
           </p:cNvPr>
@@ -7481,7 +7481,7 @@
     </p:spTree>
     <p:extLst>
       <p:ext uri="{BB962C8B-B14F-4D97-AF65-F5344CB8AC3E}">
-        <p14:creationId xmlns:p14="http://schemas.microsoft.com/office/powerpoint/2010/main" val="1308152411"/>
+        <p14:creationId xmlns:p14="http://schemas.microsoft.com/office/powerpoint/2010/main" val="1167385152"/>
       </p:ext>
     </p:extLst>
   </p:cSld>
@@ -7512,7 +7512,7 @@
           <p:cNvPr id="2" name="TextBox 1">
             <a:extLst xmlns:a="http://schemas.openxmlformats.org/drawingml/2006/main">
               <a:ext uri="{FF2B5EF4-FFF2-40B4-BE49-F238E27FC236}">
-                <a16:creationId xmlns:a16="http://schemas.microsoft.com/office/drawing/2014/main" id="{470452E5-922B-46EF-9FA0-F5A74C7FBEDA}"/>
+                <a16:creationId xmlns:a16="http://schemas.microsoft.com/office/drawing/2014/main" id="{E1935346-65F8-40EF-96B5-5BCD4F00327D}"/>
               </a:ext>
             </a:extLst>
           </p:cNvPr>
@@ -7559,7 +7559,7 @@
           <p:cNvPr id="3" name="TextBox 2">
             <a:extLst xmlns:a="http://schemas.openxmlformats.org/drawingml/2006/main">
               <a:ext uri="{FF2B5EF4-FFF2-40B4-BE49-F238E27FC236}">
-                <a16:creationId xmlns:a16="http://schemas.microsoft.com/office/drawing/2014/main" id="{AEA01E34-7850-47DC-A422-5E0B1C8620E8}"/>
+                <a16:creationId xmlns:a16="http://schemas.microsoft.com/office/drawing/2014/main" id="{08745E78-C693-454C-8CCD-F4F95F613182}"/>
               </a:ext>
             </a:extLst>
           </p:cNvPr>
@@ -7606,7 +7606,7 @@
           <p:cNvPr id="4" name="TextBox 3">
             <a:extLst xmlns:a="http://schemas.openxmlformats.org/drawingml/2006/main">
               <a:ext uri="{FF2B5EF4-FFF2-40B4-BE49-F238E27FC236}">
-                <a16:creationId xmlns:a16="http://schemas.microsoft.com/office/drawing/2014/main" id="{F0D189D5-6693-447D-A821-7229AA7B8A0C}"/>
+                <a16:creationId xmlns:a16="http://schemas.microsoft.com/office/drawing/2014/main" id="{9456030F-8591-467A-8E4B-451B1B7B7FB3}"/>
               </a:ext>
             </a:extLst>
           </p:cNvPr>
@@ -7747,7 +7747,7 @@
           <p:cNvPr id="5" name="TextBox 4">
             <a:extLst xmlns:a="http://schemas.openxmlformats.org/drawingml/2006/main">
               <a:ext uri="{FF2B5EF4-FFF2-40B4-BE49-F238E27FC236}">
-                <a16:creationId xmlns:a16="http://schemas.microsoft.com/office/drawing/2014/main" id="{9B5B8DF3-F0AE-486D-9AAB-49F353CB923F}"/>
+                <a16:creationId xmlns:a16="http://schemas.microsoft.com/office/drawing/2014/main" id="{AEBEFC98-2B6A-44AA-833B-A57B36CAAF43}"/>
               </a:ext>
             </a:extLst>
           </p:cNvPr>
@@ -7784,7 +7784,7 @@
                 <a:ea typeface="Aptos"/>
                 <a:cs typeface="Aptos"/>
               </a:rPr>
-              <a:t>Version 2026.07.23-16 · 2026-07-22 · 12 / 12</a:t>
+              <a:t>Version 2026.07.24-17 · 2026-07-24 · 12 / 12</a:t>
             </a:r>
           </a:p>
         </p:txBody>
@@ -7794,7 +7794,7 @@
           <p:cNvPr id="6" name="TextBox 5">
             <a:extLst xmlns:a="http://schemas.openxmlformats.org/drawingml/2006/main">
               <a:ext uri="{FF2B5EF4-FFF2-40B4-BE49-F238E27FC236}">
-                <a16:creationId xmlns:a16="http://schemas.microsoft.com/office/drawing/2014/main" id="{59CB61A2-6585-4F54-A917-7D4853F68917}"/>
+                <a16:creationId xmlns:a16="http://schemas.microsoft.com/office/drawing/2014/main" id="{9E58CA37-63A1-4AFB-B100-8257B2DB8143}"/>
               </a:ext>
             </a:extLst>
           </p:cNvPr>
@@ -7839,7 +7839,7 @@
     </p:spTree>
     <p:extLst>
       <p:ext uri="{BB962C8B-B14F-4D97-AF65-F5344CB8AC3E}">
-        <p14:creationId xmlns:p14="http://schemas.microsoft.com/office/powerpoint/2010/main" val="1922313877"/>
+        <p14:creationId xmlns:p14="http://schemas.microsoft.com/office/powerpoint/2010/main" val="156126911"/>
       </p:ext>
     </p:extLst>
   </p:cSld>
@@ -7863,7 +7863,7 @@
           <p:cNvPr id="2" name="TextBox 1">
             <a:extLst xmlns:a="http://schemas.openxmlformats.org/drawingml/2006/main">
               <a:ext uri="{FF2B5EF4-FFF2-40B4-BE49-F238E27FC236}">
-                <a16:creationId xmlns:a16="http://schemas.microsoft.com/office/drawing/2014/main" id="{FF49FE95-42A4-4DEF-9C94-1691DA4EE520}"/>
+                <a16:creationId xmlns:a16="http://schemas.microsoft.com/office/drawing/2014/main" id="{A467A43E-5A61-491E-89A4-753A16D9F202}"/>
               </a:ext>
             </a:extLst>
           </p:cNvPr>
@@ -7910,7 +7910,7 @@
           <p:cNvPr id="3" name="TextBox 2">
             <a:extLst xmlns:a="http://schemas.openxmlformats.org/drawingml/2006/main">
               <a:ext uri="{FF2B5EF4-FFF2-40B4-BE49-F238E27FC236}">
-                <a16:creationId xmlns:a16="http://schemas.microsoft.com/office/drawing/2014/main" id="{FAEFDA99-3734-45D5-B715-A4486FCDAF82}"/>
+                <a16:creationId xmlns:a16="http://schemas.microsoft.com/office/drawing/2014/main" id="{3426E3E5-75BD-4DD2-AAA0-DED6F9F60940}"/>
               </a:ext>
             </a:extLst>
           </p:cNvPr>
@@ -7957,7 +7957,7 @@
           <p:cNvPr id="4" name="Rectangle 3">
             <a:extLst xmlns:a="http://schemas.openxmlformats.org/drawingml/2006/main">
               <a:ext uri="{FF2B5EF4-FFF2-40B4-BE49-F238E27FC236}">
-                <a16:creationId xmlns:a16="http://schemas.microsoft.com/office/drawing/2014/main" id="{C4C42033-1110-463A-857F-398056C02DB4}"/>
+                <a16:creationId xmlns:a16="http://schemas.microsoft.com/office/drawing/2014/main" id="{4486994F-1EEB-4B68-9969-99FB432A440A}"/>
               </a:ext>
             </a:extLst>
           </p:cNvPr>
@@ -8012,7 +8012,7 @@
           <p:cNvPr id="5" name="Rectangle 4">
             <a:extLst xmlns:a="http://schemas.openxmlformats.org/drawingml/2006/main">
               <a:ext uri="{FF2B5EF4-FFF2-40B4-BE49-F238E27FC236}">
-                <a16:creationId xmlns:a16="http://schemas.microsoft.com/office/drawing/2014/main" id="{C02CDD22-3551-46BB-B09E-65DD48D4173C}"/>
+                <a16:creationId xmlns:a16="http://schemas.microsoft.com/office/drawing/2014/main" id="{20A7CDB6-7735-42F9-A1D0-817A3B299A75}"/>
               </a:ext>
             </a:extLst>
           </p:cNvPr>
@@ -8067,7 +8067,7 @@
           <p:cNvPr id="6" name="TextBox 5">
             <a:extLst xmlns:a="http://schemas.openxmlformats.org/drawingml/2006/main">
               <a:ext uri="{FF2B5EF4-FFF2-40B4-BE49-F238E27FC236}">
-                <a16:creationId xmlns:a16="http://schemas.microsoft.com/office/drawing/2014/main" id="{6FCA807D-5BE9-4BA9-9B07-F51EE0667397}"/>
+                <a16:creationId xmlns:a16="http://schemas.microsoft.com/office/drawing/2014/main" id="{6FBD1525-2F1B-4225-9FD8-6D968A5E82F2}"/>
               </a:ext>
             </a:extLst>
           </p:cNvPr>
@@ -8104,7 +8104,7 @@
                 <a:ea typeface="Aptos"/>
                 <a:cs typeface="Aptos"/>
               </a:rPr>
-              <a:t>Independent public evidence summary · 2026.07.23-16 · 2026-07-22 · Sources: Atlas readiness; WIPO</a:t>
+              <a:t>Independent public evidence summary · 2026.07.24-17 · 2026-07-24 · Sources: Atlas readiness; WIPO</a:t>
             </a:r>
           </a:p>
         </p:txBody>
@@ -8114,7 +8114,7 @@
           <p:cNvPr id="7" name="TextBox 6">
             <a:extLst xmlns:a="http://schemas.openxmlformats.org/drawingml/2006/main">
               <a:ext uri="{FF2B5EF4-FFF2-40B4-BE49-F238E27FC236}">
-                <a16:creationId xmlns:a16="http://schemas.microsoft.com/office/drawing/2014/main" id="{6AFDE460-A2BD-47D2-8004-B77689373FA1}"/>
+                <a16:creationId xmlns:a16="http://schemas.microsoft.com/office/drawing/2014/main" id="{FFDF2B85-B855-4478-9777-5D005B5BE694}"/>
               </a:ext>
             </a:extLst>
           </p:cNvPr>
@@ -8161,7 +8161,7 @@
           <p:cNvPr id="8" name="TextBox 7">
             <a:extLst xmlns:a="http://schemas.openxmlformats.org/drawingml/2006/main">
               <a:ext uri="{FF2B5EF4-FFF2-40B4-BE49-F238E27FC236}">
-                <a16:creationId xmlns:a16="http://schemas.microsoft.com/office/drawing/2014/main" id="{D06A7B0F-A8B0-4E29-B238-A7B38DF44BBD}"/>
+                <a16:creationId xmlns:a16="http://schemas.microsoft.com/office/drawing/2014/main" id="{F178739E-44DA-4924-9E48-8A32183CB8A1}"/>
               </a:ext>
             </a:extLst>
           </p:cNvPr>
@@ -8208,7 +8208,7 @@
           <p:cNvPr id="9" name="TextBox 8">
             <a:extLst xmlns:a="http://schemas.openxmlformats.org/drawingml/2006/main">
               <a:ext uri="{FF2B5EF4-FFF2-40B4-BE49-F238E27FC236}">
-                <a16:creationId xmlns:a16="http://schemas.microsoft.com/office/drawing/2014/main" id="{412214DD-68AD-450C-A812-6304745CD2B8}"/>
+                <a16:creationId xmlns:a16="http://schemas.microsoft.com/office/drawing/2014/main" id="{8215C51C-7765-436D-A60A-E71A76187D7A}"/>
               </a:ext>
             </a:extLst>
           </p:cNvPr>
@@ -8305,7 +8305,7 @@
           <p:cNvPr id="10" name="Rounded Rectangle 9">
             <a:extLst xmlns:a="http://schemas.openxmlformats.org/drawingml/2006/main">
               <a:ext uri="{FF2B5EF4-FFF2-40B4-BE49-F238E27FC236}">
-                <a16:creationId xmlns:a16="http://schemas.microsoft.com/office/drawing/2014/main" id="{CB3392CB-0FB8-4C3C-8894-73694D1A02D2}"/>
+                <a16:creationId xmlns:a16="http://schemas.microsoft.com/office/drawing/2014/main" id="{E684253C-0552-499A-A904-E40E100B3AF6}"/>
               </a:ext>
             </a:extLst>
           </p:cNvPr>
@@ -8362,7 +8362,7 @@
           <p:cNvPr id="11" name="TextBox 10">
             <a:extLst xmlns:a="http://schemas.openxmlformats.org/drawingml/2006/main">
               <a:ext uri="{FF2B5EF4-FFF2-40B4-BE49-F238E27FC236}">
-                <a16:creationId xmlns:a16="http://schemas.microsoft.com/office/drawing/2014/main" id="{D2B730AA-F89C-4E32-A824-A9F4F4F1785A}"/>
+                <a16:creationId xmlns:a16="http://schemas.microsoft.com/office/drawing/2014/main" id="{AF361F45-7044-4CA8-A2DD-E5AA7FB7F3CE}"/>
               </a:ext>
             </a:extLst>
           </p:cNvPr>
@@ -8409,7 +8409,7 @@
           <p:cNvPr id="12" name="TextBox 11">
             <a:extLst xmlns:a="http://schemas.openxmlformats.org/drawingml/2006/main">
               <a:ext uri="{FF2B5EF4-FFF2-40B4-BE49-F238E27FC236}">
-                <a16:creationId xmlns:a16="http://schemas.microsoft.com/office/drawing/2014/main" id="{4A531CFB-5251-40C7-A966-A09ECBB36F8A}"/>
+                <a16:creationId xmlns:a16="http://schemas.microsoft.com/office/drawing/2014/main" id="{79110566-59EE-4419-8CC9-25ED6B713626}"/>
               </a:ext>
             </a:extLst>
           </p:cNvPr>
@@ -8454,7 +8454,7 @@
     </p:spTree>
     <p:extLst>
       <p:ext uri="{BB962C8B-B14F-4D97-AF65-F5344CB8AC3E}">
-        <p14:creationId xmlns:p14="http://schemas.microsoft.com/office/powerpoint/2010/main" val="268250790"/>
+        <p14:creationId xmlns:p14="http://schemas.microsoft.com/office/powerpoint/2010/main" val="1070493168"/>
       </p:ext>
     </p:extLst>
   </p:cSld>
@@ -8478,7 +8478,7 @@
           <p:cNvPr id="2" name="TextBox 1">
             <a:extLst xmlns:a="http://schemas.openxmlformats.org/drawingml/2006/main">
               <a:ext uri="{FF2B5EF4-FFF2-40B4-BE49-F238E27FC236}">
-                <a16:creationId xmlns:a16="http://schemas.microsoft.com/office/drawing/2014/main" id="{439C1B62-8A53-41E2-B81E-31B5E654CA30}"/>
+                <a16:creationId xmlns:a16="http://schemas.microsoft.com/office/drawing/2014/main" id="{A2001C6E-900B-407F-B474-12587BB1D2F7}"/>
               </a:ext>
             </a:extLst>
           </p:cNvPr>
@@ -8525,7 +8525,7 @@
           <p:cNvPr id="3" name="TextBox 2">
             <a:extLst xmlns:a="http://schemas.openxmlformats.org/drawingml/2006/main">
               <a:ext uri="{FF2B5EF4-FFF2-40B4-BE49-F238E27FC236}">
-                <a16:creationId xmlns:a16="http://schemas.microsoft.com/office/drawing/2014/main" id="{A090DA8D-EA06-445A-ACC0-20C1CFB89523}"/>
+                <a16:creationId xmlns:a16="http://schemas.microsoft.com/office/drawing/2014/main" id="{A8E185EB-68DA-4228-963A-0E73452FE981}"/>
               </a:ext>
             </a:extLst>
           </p:cNvPr>
@@ -8572,7 +8572,7 @@
           <p:cNvPr id="4" name="Rectangle 3">
             <a:extLst xmlns:a="http://schemas.openxmlformats.org/drawingml/2006/main">
               <a:ext uri="{FF2B5EF4-FFF2-40B4-BE49-F238E27FC236}">
-                <a16:creationId xmlns:a16="http://schemas.microsoft.com/office/drawing/2014/main" id="{F364E1AB-8ABD-4AD3-BF1D-DC6290AB30FD}"/>
+                <a16:creationId xmlns:a16="http://schemas.microsoft.com/office/drawing/2014/main" id="{88E0E469-99AA-42DF-A082-9C8F87C2D3D8}"/>
               </a:ext>
             </a:extLst>
           </p:cNvPr>
@@ -8627,7 +8627,7 @@
           <p:cNvPr id="5" name="Rectangle 4">
             <a:extLst xmlns:a="http://schemas.openxmlformats.org/drawingml/2006/main">
               <a:ext uri="{FF2B5EF4-FFF2-40B4-BE49-F238E27FC236}">
-                <a16:creationId xmlns:a16="http://schemas.microsoft.com/office/drawing/2014/main" id="{F44F2562-EF4F-44E3-BFF6-576A910A5314}"/>
+                <a16:creationId xmlns:a16="http://schemas.microsoft.com/office/drawing/2014/main" id="{C95881EC-33F1-42E4-AEAE-AC281787112B}"/>
               </a:ext>
             </a:extLst>
           </p:cNvPr>
@@ -8682,7 +8682,7 @@
           <p:cNvPr id="6" name="TextBox 5">
             <a:extLst xmlns:a="http://schemas.openxmlformats.org/drawingml/2006/main">
               <a:ext uri="{FF2B5EF4-FFF2-40B4-BE49-F238E27FC236}">
-                <a16:creationId xmlns:a16="http://schemas.microsoft.com/office/drawing/2014/main" id="{6C7508E1-4DEA-4DDD-AC4C-24C82167D547}"/>
+                <a16:creationId xmlns:a16="http://schemas.microsoft.com/office/drawing/2014/main" id="{9EE42AD2-D7DB-4630-B582-640688046C6D}"/>
               </a:ext>
             </a:extLst>
           </p:cNvPr>
@@ -8719,7 +8719,7 @@
                 <a:ea typeface="Aptos"/>
                 <a:cs typeface="Aptos"/>
               </a:rPr>
-              <a:t>Independent public evidence summary · 2026.07.23-16 · 2026-07-22 · Sources: EP3032975B2</a:t>
+              <a:t>Independent public evidence summary · 2026.07.24-17 · 2026-07-24 · Sources: EP3032975B2</a:t>
             </a:r>
           </a:p>
         </p:txBody>
@@ -8729,7 +8729,7 @@
           <p:cNvPr id="7" name="TextBox 6">
             <a:extLst xmlns:a="http://schemas.openxmlformats.org/drawingml/2006/main">
               <a:ext uri="{FF2B5EF4-FFF2-40B4-BE49-F238E27FC236}">
-                <a16:creationId xmlns:a16="http://schemas.microsoft.com/office/drawing/2014/main" id="{EEC4C2C9-1F74-46A9-AB90-7DD4405176AD}"/>
+                <a16:creationId xmlns:a16="http://schemas.microsoft.com/office/drawing/2014/main" id="{9EE80CE9-20A2-4D49-9730-3A60CDFD3670}"/>
               </a:ext>
             </a:extLst>
           </p:cNvPr>
@@ -8776,7 +8776,7 @@
           <p:cNvPr id="8" name="TextBox 7">
             <a:extLst xmlns:a="http://schemas.openxmlformats.org/drawingml/2006/main">
               <a:ext uri="{FF2B5EF4-FFF2-40B4-BE49-F238E27FC236}">
-                <a16:creationId xmlns:a16="http://schemas.microsoft.com/office/drawing/2014/main" id="{641CAB65-518A-4420-8CE9-E0480400B424}"/>
+                <a16:creationId xmlns:a16="http://schemas.microsoft.com/office/drawing/2014/main" id="{9DD01F8C-12D3-45B0-8CBC-5C8FF45F72D1}"/>
               </a:ext>
             </a:extLst>
           </p:cNvPr>
@@ -8823,7 +8823,7 @@
           <p:cNvPr id="9" name="TextBox 8">
             <a:extLst xmlns:a="http://schemas.openxmlformats.org/drawingml/2006/main">
               <a:ext uri="{FF2B5EF4-FFF2-40B4-BE49-F238E27FC236}">
-                <a16:creationId xmlns:a16="http://schemas.microsoft.com/office/drawing/2014/main" id="{D5A75490-B208-418B-94C8-C81623BF1116}"/>
+                <a16:creationId xmlns:a16="http://schemas.microsoft.com/office/drawing/2014/main" id="{30018251-8853-4CE8-8A3C-DB974269B2CB}"/>
               </a:ext>
             </a:extLst>
           </p:cNvPr>
@@ -8920,7 +8920,7 @@
           <p:cNvPr id="10" name="Rounded Rectangle 9">
             <a:extLst xmlns:a="http://schemas.openxmlformats.org/drawingml/2006/main">
               <a:ext uri="{FF2B5EF4-FFF2-40B4-BE49-F238E27FC236}">
-                <a16:creationId xmlns:a16="http://schemas.microsoft.com/office/drawing/2014/main" id="{26891B69-68CB-4652-BDCB-279E98E455BA}"/>
+                <a16:creationId xmlns:a16="http://schemas.microsoft.com/office/drawing/2014/main" id="{622055E6-0E50-4C10-9EB9-5EB1F2370B8C}"/>
               </a:ext>
             </a:extLst>
           </p:cNvPr>
@@ -8977,7 +8977,7 @@
           <p:cNvPr id="11" name="TextBox 10">
             <a:extLst xmlns:a="http://schemas.openxmlformats.org/drawingml/2006/main">
               <a:ext uri="{FF2B5EF4-FFF2-40B4-BE49-F238E27FC236}">
-                <a16:creationId xmlns:a16="http://schemas.microsoft.com/office/drawing/2014/main" id="{CEAE6288-47FF-4484-99FA-CA0E1A767BC3}"/>
+                <a16:creationId xmlns:a16="http://schemas.microsoft.com/office/drawing/2014/main" id="{DBE42DFF-5C0C-4660-B833-37F5640F96DF}"/>
               </a:ext>
             </a:extLst>
           </p:cNvPr>
@@ -9024,7 +9024,7 @@
           <p:cNvPr id="12" name="TextBox 11">
             <a:extLst xmlns:a="http://schemas.openxmlformats.org/drawingml/2006/main">
               <a:ext uri="{FF2B5EF4-FFF2-40B4-BE49-F238E27FC236}">
-                <a16:creationId xmlns:a16="http://schemas.microsoft.com/office/drawing/2014/main" id="{6C3B3009-E1E3-47DB-ABC4-6C42E76D5293}"/>
+                <a16:creationId xmlns:a16="http://schemas.microsoft.com/office/drawing/2014/main" id="{03ABABF5-3C6B-4E87-8AB9-E2F6FCCF36B9}"/>
               </a:ext>
             </a:extLst>
           </p:cNvPr>
@@ -9069,7 +9069,7 @@
     </p:spTree>
     <p:extLst>
       <p:ext uri="{BB962C8B-B14F-4D97-AF65-F5344CB8AC3E}">
-        <p14:creationId xmlns:p14="http://schemas.microsoft.com/office/powerpoint/2010/main" val="824765102"/>
+        <p14:creationId xmlns:p14="http://schemas.microsoft.com/office/powerpoint/2010/main" val="567507125"/>
       </p:ext>
     </p:extLst>
   </p:cSld>
@@ -9093,7 +9093,7 @@
           <p:cNvPr id="2" name="TextBox 1">
             <a:extLst xmlns:a="http://schemas.openxmlformats.org/drawingml/2006/main">
               <a:ext uri="{FF2B5EF4-FFF2-40B4-BE49-F238E27FC236}">
-                <a16:creationId xmlns:a16="http://schemas.microsoft.com/office/drawing/2014/main" id="{0D87D198-7BD3-47E1-9C99-A6E1F68811F0}"/>
+                <a16:creationId xmlns:a16="http://schemas.microsoft.com/office/drawing/2014/main" id="{959C23C0-7384-4161-8D4F-D3206C591345}"/>
               </a:ext>
             </a:extLst>
           </p:cNvPr>
@@ -9140,7 +9140,7 @@
           <p:cNvPr id="3" name="TextBox 2">
             <a:extLst xmlns:a="http://schemas.openxmlformats.org/drawingml/2006/main">
               <a:ext uri="{FF2B5EF4-FFF2-40B4-BE49-F238E27FC236}">
-                <a16:creationId xmlns:a16="http://schemas.microsoft.com/office/drawing/2014/main" id="{61C0873D-00F4-4621-ADDB-6025326427CF}"/>
+                <a16:creationId xmlns:a16="http://schemas.microsoft.com/office/drawing/2014/main" id="{13827838-98CE-46C8-9F31-BD2A44AE5140}"/>
               </a:ext>
             </a:extLst>
           </p:cNvPr>
@@ -9187,7 +9187,7 @@
           <p:cNvPr id="4" name="Rectangle 3">
             <a:extLst xmlns:a="http://schemas.openxmlformats.org/drawingml/2006/main">
               <a:ext uri="{FF2B5EF4-FFF2-40B4-BE49-F238E27FC236}">
-                <a16:creationId xmlns:a16="http://schemas.microsoft.com/office/drawing/2014/main" id="{3941C8D0-FC58-41F6-BE84-26676317324E}"/>
+                <a16:creationId xmlns:a16="http://schemas.microsoft.com/office/drawing/2014/main" id="{BDD582B1-0B6A-4405-B9BE-305F80CE85A2}"/>
               </a:ext>
             </a:extLst>
           </p:cNvPr>
@@ -9242,7 +9242,7 @@
           <p:cNvPr id="5" name="Rectangle 4">
             <a:extLst xmlns:a="http://schemas.openxmlformats.org/drawingml/2006/main">
               <a:ext uri="{FF2B5EF4-FFF2-40B4-BE49-F238E27FC236}">
-                <a16:creationId xmlns:a16="http://schemas.microsoft.com/office/drawing/2014/main" id="{81CDB2EA-482B-478F-9672-DB18208F5152}"/>
+                <a16:creationId xmlns:a16="http://schemas.microsoft.com/office/drawing/2014/main" id="{6475F675-CA63-4F0A-B17D-D9943C22072B}"/>
               </a:ext>
             </a:extLst>
           </p:cNvPr>
@@ -9297,7 +9297,7 @@
           <p:cNvPr id="6" name="TextBox 5">
             <a:extLst xmlns:a="http://schemas.openxmlformats.org/drawingml/2006/main">
               <a:ext uri="{FF2B5EF4-FFF2-40B4-BE49-F238E27FC236}">
-                <a16:creationId xmlns:a16="http://schemas.microsoft.com/office/drawing/2014/main" id="{6DF3A397-CFA0-47A7-95D3-EFC1F4A132A3}"/>
+                <a16:creationId xmlns:a16="http://schemas.microsoft.com/office/drawing/2014/main" id="{6E68C2CE-72F9-4D1A-81C0-61FE8EA2A2E6}"/>
               </a:ext>
             </a:extLst>
           </p:cNvPr>
@@ -9334,7 +9334,7 @@
                 <a:ea typeface="Aptos"/>
                 <a:cs typeface="Aptos"/>
               </a:rPr>
-              <a:t>Independent public evidence summary · 2026.07.23-16 · 2026-07-22 · Sources: EPO Register; EP3032975B2</a:t>
+              <a:t>Independent public evidence summary · 2026.07.24-17 · 2026-07-24 · Sources: EPO Register; EP3032975B2</a:t>
             </a:r>
           </a:p>
         </p:txBody>
@@ -9344,7 +9344,7 @@
           <p:cNvPr id="7" name="TextBox 6">
             <a:extLst xmlns:a="http://schemas.openxmlformats.org/drawingml/2006/main">
               <a:ext uri="{FF2B5EF4-FFF2-40B4-BE49-F238E27FC236}">
-                <a16:creationId xmlns:a16="http://schemas.microsoft.com/office/drawing/2014/main" id="{5867C676-DA5F-463C-BC86-6306EEE9D58A}"/>
+                <a16:creationId xmlns:a16="http://schemas.microsoft.com/office/drawing/2014/main" id="{73ADAD7E-DC12-464D-AE6A-E89317C85F93}"/>
               </a:ext>
             </a:extLst>
           </p:cNvPr>
@@ -9391,7 +9391,7 @@
           <p:cNvPr id="8" name="Rounded Rectangle 7">
             <a:extLst xmlns:a="http://schemas.openxmlformats.org/drawingml/2006/main">
               <a:ext uri="{FF2B5EF4-FFF2-40B4-BE49-F238E27FC236}">
-                <a16:creationId xmlns:a16="http://schemas.microsoft.com/office/drawing/2014/main" id="{E63D8080-4EF6-4140-A2FA-2DCBECDF5834}"/>
+                <a16:creationId xmlns:a16="http://schemas.microsoft.com/office/drawing/2014/main" id="{05BC6E2A-4A73-44A5-BBBE-618DFAD3A519}"/>
               </a:ext>
             </a:extLst>
           </p:cNvPr>
@@ -9448,7 +9448,7 @@
           <p:cNvPr id="9" name="TextBox 8">
             <a:extLst xmlns:a="http://schemas.openxmlformats.org/drawingml/2006/main">
               <a:ext uri="{FF2B5EF4-FFF2-40B4-BE49-F238E27FC236}">
-                <a16:creationId xmlns:a16="http://schemas.microsoft.com/office/drawing/2014/main" id="{F167AAAA-1FC1-4839-BD3D-5E29B4B1C528}"/>
+                <a16:creationId xmlns:a16="http://schemas.microsoft.com/office/drawing/2014/main" id="{424858EA-D907-4C6B-B67F-8CE9CA446BD6}"/>
               </a:ext>
             </a:extLst>
           </p:cNvPr>
@@ -9495,7 +9495,7 @@
           <p:cNvPr id="10" name="TextBox 9">
             <a:extLst xmlns:a="http://schemas.openxmlformats.org/drawingml/2006/main">
               <a:ext uri="{FF2B5EF4-FFF2-40B4-BE49-F238E27FC236}">
-                <a16:creationId xmlns:a16="http://schemas.microsoft.com/office/drawing/2014/main" id="{7967249C-5746-415D-957E-8505D563D0DC}"/>
+                <a16:creationId xmlns:a16="http://schemas.microsoft.com/office/drawing/2014/main" id="{1B6D662C-13EC-498B-AEFF-9CAE5F300810}"/>
               </a:ext>
             </a:extLst>
           </p:cNvPr>
@@ -9542,7 +9542,7 @@
           <p:cNvPr id="11" name="Rounded Rectangle 10">
             <a:extLst xmlns:a="http://schemas.openxmlformats.org/drawingml/2006/main">
               <a:ext uri="{FF2B5EF4-FFF2-40B4-BE49-F238E27FC236}">
-                <a16:creationId xmlns:a16="http://schemas.microsoft.com/office/drawing/2014/main" id="{E56772D1-8AAE-4F76-B680-198AF568D4D6}"/>
+                <a16:creationId xmlns:a16="http://schemas.microsoft.com/office/drawing/2014/main" id="{49F19166-6EF5-4FD3-B134-CADD53D04319}"/>
               </a:ext>
             </a:extLst>
           </p:cNvPr>
@@ -9599,7 +9599,7 @@
           <p:cNvPr id="12" name="TextBox 11">
             <a:extLst xmlns:a="http://schemas.openxmlformats.org/drawingml/2006/main">
               <a:ext uri="{FF2B5EF4-FFF2-40B4-BE49-F238E27FC236}">
-                <a16:creationId xmlns:a16="http://schemas.microsoft.com/office/drawing/2014/main" id="{851A790E-CBBB-4786-9EE0-A40F8F0C4BAE}"/>
+                <a16:creationId xmlns:a16="http://schemas.microsoft.com/office/drawing/2014/main" id="{D304F7C9-F172-450C-AF2D-9FD065B80D1C}"/>
               </a:ext>
             </a:extLst>
           </p:cNvPr>
@@ -9646,7 +9646,7 @@
           <p:cNvPr id="13" name="TextBox 12">
             <a:extLst xmlns:a="http://schemas.openxmlformats.org/drawingml/2006/main">
               <a:ext uri="{FF2B5EF4-FFF2-40B4-BE49-F238E27FC236}">
-                <a16:creationId xmlns:a16="http://schemas.microsoft.com/office/drawing/2014/main" id="{1E7B485E-C576-4447-A1B7-07303CD6BA62}"/>
+                <a16:creationId xmlns:a16="http://schemas.microsoft.com/office/drawing/2014/main" id="{BB01F8E9-F47A-4F00-88EE-510BD2AD5AE4}"/>
               </a:ext>
             </a:extLst>
           </p:cNvPr>
@@ -9693,7 +9693,7 @@
           <p:cNvPr id="14" name="Rounded Rectangle 13">
             <a:extLst xmlns:a="http://schemas.openxmlformats.org/drawingml/2006/main">
               <a:ext uri="{FF2B5EF4-FFF2-40B4-BE49-F238E27FC236}">
-                <a16:creationId xmlns:a16="http://schemas.microsoft.com/office/drawing/2014/main" id="{76C03128-B871-4677-884E-36A19910876E}"/>
+                <a16:creationId xmlns:a16="http://schemas.microsoft.com/office/drawing/2014/main" id="{3680A569-4346-4811-BF89-1748228DED3D}"/>
               </a:ext>
             </a:extLst>
           </p:cNvPr>
@@ -9750,7 +9750,7 @@
           <p:cNvPr id="15" name="TextBox 14">
             <a:extLst xmlns:a="http://schemas.openxmlformats.org/drawingml/2006/main">
               <a:ext uri="{FF2B5EF4-FFF2-40B4-BE49-F238E27FC236}">
-                <a16:creationId xmlns:a16="http://schemas.microsoft.com/office/drawing/2014/main" id="{6E64B091-8511-4690-AAEF-55EB93FBD14F}"/>
+                <a16:creationId xmlns:a16="http://schemas.microsoft.com/office/drawing/2014/main" id="{8F7F3D94-2E17-46E0-B9C3-A009FA02FE1E}"/>
               </a:ext>
             </a:extLst>
           </p:cNvPr>
@@ -9797,7 +9797,7 @@
           <p:cNvPr id="16" name="TextBox 15">
             <a:extLst xmlns:a="http://schemas.openxmlformats.org/drawingml/2006/main">
               <a:ext uri="{FF2B5EF4-FFF2-40B4-BE49-F238E27FC236}">
-                <a16:creationId xmlns:a16="http://schemas.microsoft.com/office/drawing/2014/main" id="{2938CCC8-03B1-46A1-9987-03A448BF6BCF}"/>
+                <a16:creationId xmlns:a16="http://schemas.microsoft.com/office/drawing/2014/main" id="{D510154F-74F7-4112-A39E-2D74E8C8F33A}"/>
               </a:ext>
             </a:extLst>
           </p:cNvPr>
@@ -9844,7 +9844,7 @@
           <p:cNvPr id="17" name="TextBox 16">
             <a:extLst xmlns:a="http://schemas.openxmlformats.org/drawingml/2006/main">
               <a:ext uri="{FF2B5EF4-FFF2-40B4-BE49-F238E27FC236}">
-                <a16:creationId xmlns:a16="http://schemas.microsoft.com/office/drawing/2014/main" id="{87B08DD7-C2B9-4FB7-BCC6-1D7F90BD72CB}"/>
+                <a16:creationId xmlns:a16="http://schemas.microsoft.com/office/drawing/2014/main" id="{7F922B05-90B2-4C83-9D3F-B5EE7AFF7E97}"/>
               </a:ext>
             </a:extLst>
           </p:cNvPr>
@@ -9891,7 +9891,7 @@
           <p:cNvPr id="18" name="Rounded Rectangle 17">
             <a:extLst xmlns:a="http://schemas.openxmlformats.org/drawingml/2006/main">
               <a:ext uri="{FF2B5EF4-FFF2-40B4-BE49-F238E27FC236}">
-                <a16:creationId xmlns:a16="http://schemas.microsoft.com/office/drawing/2014/main" id="{15C6BC1A-CB04-4255-A8E9-32352FC82EE1}"/>
+                <a16:creationId xmlns:a16="http://schemas.microsoft.com/office/drawing/2014/main" id="{C714CCF9-9132-4FA8-B021-591129340DA4}"/>
               </a:ext>
             </a:extLst>
           </p:cNvPr>
@@ -9948,7 +9948,7 @@
           <p:cNvPr id="19" name="TextBox 18">
             <a:extLst xmlns:a="http://schemas.openxmlformats.org/drawingml/2006/main">
               <a:ext uri="{FF2B5EF4-FFF2-40B4-BE49-F238E27FC236}">
-                <a16:creationId xmlns:a16="http://schemas.microsoft.com/office/drawing/2014/main" id="{ECB0BCBD-BAC7-412A-9F99-08E9BCFC1B21}"/>
+                <a16:creationId xmlns:a16="http://schemas.microsoft.com/office/drawing/2014/main" id="{6C69826C-7708-4581-9DE8-4B8BE8E872FD}"/>
               </a:ext>
             </a:extLst>
           </p:cNvPr>
@@ -9995,7 +9995,7 @@
           <p:cNvPr id="20" name="TextBox 19">
             <a:extLst xmlns:a="http://schemas.openxmlformats.org/drawingml/2006/main">
               <a:ext uri="{FF2B5EF4-FFF2-40B4-BE49-F238E27FC236}">
-                <a16:creationId xmlns:a16="http://schemas.microsoft.com/office/drawing/2014/main" id="{4F231C04-AA18-4247-BC13-C8908F81E4DB}"/>
+                <a16:creationId xmlns:a16="http://schemas.microsoft.com/office/drawing/2014/main" id="{F7DFBA14-95A8-492A-BDC4-9B73F52B8C57}"/>
               </a:ext>
             </a:extLst>
           </p:cNvPr>
@@ -10040,7 +10040,7 @@
     </p:spTree>
     <p:extLst>
       <p:ext uri="{BB962C8B-B14F-4D97-AF65-F5344CB8AC3E}">
-        <p14:creationId xmlns:p14="http://schemas.microsoft.com/office/powerpoint/2010/main" val="47567735"/>
+        <p14:creationId xmlns:p14="http://schemas.microsoft.com/office/powerpoint/2010/main" val="1660921336"/>
       </p:ext>
     </p:extLst>
   </p:cSld>
@@ -10064,7 +10064,7 @@
           <p:cNvPr id="2" name="TextBox 1">
             <a:extLst xmlns:a="http://schemas.openxmlformats.org/drawingml/2006/main">
               <a:ext uri="{FF2B5EF4-FFF2-40B4-BE49-F238E27FC236}">
-                <a16:creationId xmlns:a16="http://schemas.microsoft.com/office/drawing/2014/main" id="{998BE578-BEB3-4087-B2C4-5549C71CE9F2}"/>
+                <a16:creationId xmlns:a16="http://schemas.microsoft.com/office/drawing/2014/main" id="{BB6CE26A-56CA-4EB4-8FD1-607AAD9362B7}"/>
               </a:ext>
             </a:extLst>
           </p:cNvPr>
@@ -10111,7 +10111,7 @@
           <p:cNvPr id="3" name="TextBox 2">
             <a:extLst xmlns:a="http://schemas.openxmlformats.org/drawingml/2006/main">
               <a:ext uri="{FF2B5EF4-FFF2-40B4-BE49-F238E27FC236}">
-                <a16:creationId xmlns:a16="http://schemas.microsoft.com/office/drawing/2014/main" id="{E7EAB164-9D18-4C3D-A124-C30FB36546E5}"/>
+                <a16:creationId xmlns:a16="http://schemas.microsoft.com/office/drawing/2014/main" id="{12B497AC-5EE1-449A-9336-ECBC46EFFB7F}"/>
               </a:ext>
             </a:extLst>
           </p:cNvPr>
@@ -10158,7 +10158,7 @@
           <p:cNvPr id="4" name="Rectangle 3">
             <a:extLst xmlns:a="http://schemas.openxmlformats.org/drawingml/2006/main">
               <a:ext uri="{FF2B5EF4-FFF2-40B4-BE49-F238E27FC236}">
-                <a16:creationId xmlns:a16="http://schemas.microsoft.com/office/drawing/2014/main" id="{0881B98B-4B85-4236-A925-5AD553C0B542}"/>
+                <a16:creationId xmlns:a16="http://schemas.microsoft.com/office/drawing/2014/main" id="{90A4EA1D-2021-43A6-95AE-D0AC405A9674}"/>
               </a:ext>
             </a:extLst>
           </p:cNvPr>
@@ -10213,7 +10213,7 @@
           <p:cNvPr id="5" name="Rectangle 4">
             <a:extLst xmlns:a="http://schemas.openxmlformats.org/drawingml/2006/main">
               <a:ext uri="{FF2B5EF4-FFF2-40B4-BE49-F238E27FC236}">
-                <a16:creationId xmlns:a16="http://schemas.microsoft.com/office/drawing/2014/main" id="{C3B9B954-75FB-4A9F-B902-861682C9A973}"/>
+                <a16:creationId xmlns:a16="http://schemas.microsoft.com/office/drawing/2014/main" id="{4F9D81A9-585B-46FB-9551-5DA9306EDEEF}"/>
               </a:ext>
             </a:extLst>
           </p:cNvPr>
@@ -10268,7 +10268,7 @@
           <p:cNvPr id="6" name="TextBox 5">
             <a:extLst xmlns:a="http://schemas.openxmlformats.org/drawingml/2006/main">
               <a:ext uri="{FF2B5EF4-FFF2-40B4-BE49-F238E27FC236}">
-                <a16:creationId xmlns:a16="http://schemas.microsoft.com/office/drawing/2014/main" id="{AB64F095-ABC8-4811-83BD-99BC8E993B82}"/>
+                <a16:creationId xmlns:a16="http://schemas.microsoft.com/office/drawing/2014/main" id="{8B6F8DEA-9F9F-46FD-B354-B2F664372BB5}"/>
               </a:ext>
             </a:extLst>
           </p:cNvPr>
@@ -10305,7 +10305,7 @@
                 <a:ea typeface="Aptos"/>
                 <a:cs typeface="Aptos"/>
               </a:rPr>
-              <a:t>Independent public evidence summary · 2026.07.23-16 · 2026-07-22 · Sources: EP3032975B2; 7 O 3341/24</a:t>
+              <a:t>Independent public evidence summary · 2026.07.24-17 · 2026-07-24 · Sources: EP3032975B2; 7 O 3341/24</a:t>
             </a:r>
           </a:p>
         </p:txBody>
@@ -10315,7 +10315,7 @@
           <p:cNvPr id="7" name="TextBox 6">
             <a:extLst xmlns:a="http://schemas.openxmlformats.org/drawingml/2006/main">
               <a:ext uri="{FF2B5EF4-FFF2-40B4-BE49-F238E27FC236}">
-                <a16:creationId xmlns:a16="http://schemas.microsoft.com/office/drawing/2014/main" id="{B162AFB3-542F-48BF-A1A9-006027C81959}"/>
+                <a16:creationId xmlns:a16="http://schemas.microsoft.com/office/drawing/2014/main" id="{49D7AFEC-BD93-47E2-8585-058C0E68E3C0}"/>
               </a:ext>
             </a:extLst>
           </p:cNvPr>
@@ -10362,7 +10362,7 @@
           <p:cNvPr id="8" name="TextBox 7">
             <a:extLst xmlns:a="http://schemas.openxmlformats.org/drawingml/2006/main">
               <a:ext uri="{FF2B5EF4-FFF2-40B4-BE49-F238E27FC236}">
-                <a16:creationId xmlns:a16="http://schemas.microsoft.com/office/drawing/2014/main" id="{6169C0D5-B021-4306-BBA0-74824B7AB501}"/>
+                <a16:creationId xmlns:a16="http://schemas.microsoft.com/office/drawing/2014/main" id="{8D497F52-738B-4F3E-ABB0-AD31C634575F}"/>
               </a:ext>
             </a:extLst>
           </p:cNvPr>
@@ -10409,7 +10409,7 @@
           <p:cNvPr id="9" name="TextBox 8">
             <a:extLst xmlns:a="http://schemas.openxmlformats.org/drawingml/2006/main">
               <a:ext uri="{FF2B5EF4-FFF2-40B4-BE49-F238E27FC236}">
-                <a16:creationId xmlns:a16="http://schemas.microsoft.com/office/drawing/2014/main" id="{4D9F2049-6F67-48C4-858F-CC4A2E1BE63A}"/>
+                <a16:creationId xmlns:a16="http://schemas.microsoft.com/office/drawing/2014/main" id="{CF47237E-66E2-496B-A084-DF75CDF88208}"/>
               </a:ext>
             </a:extLst>
           </p:cNvPr>
@@ -10506,7 +10506,7 @@
           <p:cNvPr id="10" name="Rounded Rectangle 9">
             <a:extLst xmlns:a="http://schemas.openxmlformats.org/drawingml/2006/main">
               <a:ext uri="{FF2B5EF4-FFF2-40B4-BE49-F238E27FC236}">
-                <a16:creationId xmlns:a16="http://schemas.microsoft.com/office/drawing/2014/main" id="{86D96542-3D74-41E2-9C08-B11C6C947B4E}"/>
+                <a16:creationId xmlns:a16="http://schemas.microsoft.com/office/drawing/2014/main" id="{94CFE299-1B49-451E-BDA9-3786264E6E62}"/>
               </a:ext>
             </a:extLst>
           </p:cNvPr>
@@ -10563,7 +10563,7 @@
           <p:cNvPr id="11" name="TextBox 10">
             <a:extLst xmlns:a="http://schemas.openxmlformats.org/drawingml/2006/main">
               <a:ext uri="{FF2B5EF4-FFF2-40B4-BE49-F238E27FC236}">
-                <a16:creationId xmlns:a16="http://schemas.microsoft.com/office/drawing/2014/main" id="{821CCBA4-1E17-42B1-92D0-29DB55B58F39}"/>
+                <a16:creationId xmlns:a16="http://schemas.microsoft.com/office/drawing/2014/main" id="{2AD639C6-5B05-48B2-8521-8F8ECB34FF11}"/>
               </a:ext>
             </a:extLst>
           </p:cNvPr>
@@ -10610,7 +10610,7 @@
           <p:cNvPr id="12" name="TextBox 11">
             <a:extLst xmlns:a="http://schemas.openxmlformats.org/drawingml/2006/main">
               <a:ext uri="{FF2B5EF4-FFF2-40B4-BE49-F238E27FC236}">
-                <a16:creationId xmlns:a16="http://schemas.microsoft.com/office/drawing/2014/main" id="{49158CE8-0E71-48AE-A17F-E5B040B7B738}"/>
+                <a16:creationId xmlns:a16="http://schemas.microsoft.com/office/drawing/2014/main" id="{B70BB94E-84B6-426C-B603-37079C55DCF4}"/>
               </a:ext>
             </a:extLst>
           </p:cNvPr>
@@ -10655,7 +10655,7 @@
     </p:spTree>
     <p:extLst>
       <p:ext uri="{BB962C8B-B14F-4D97-AF65-F5344CB8AC3E}">
-        <p14:creationId xmlns:p14="http://schemas.microsoft.com/office/powerpoint/2010/main" val="2015225750"/>
+        <p14:creationId xmlns:p14="http://schemas.microsoft.com/office/powerpoint/2010/main" val="1729350471"/>
       </p:ext>
     </p:extLst>
   </p:cSld>
@@ -10679,7 +10679,7 @@
           <p:cNvPr id="2" name="TextBox 1">
             <a:extLst xmlns:a="http://schemas.openxmlformats.org/drawingml/2006/main">
               <a:ext uri="{FF2B5EF4-FFF2-40B4-BE49-F238E27FC236}">
-                <a16:creationId xmlns:a16="http://schemas.microsoft.com/office/drawing/2014/main" id="{E3B67A0E-2B84-4196-93FC-D481312728F4}"/>
+                <a16:creationId xmlns:a16="http://schemas.microsoft.com/office/drawing/2014/main" id="{13251B6E-567D-464D-91EC-CC818B682DB0}"/>
               </a:ext>
             </a:extLst>
           </p:cNvPr>
@@ -10726,7 +10726,7 @@
           <p:cNvPr id="3" name="TextBox 2">
             <a:extLst xmlns:a="http://schemas.openxmlformats.org/drawingml/2006/main">
               <a:ext uri="{FF2B5EF4-FFF2-40B4-BE49-F238E27FC236}">
-                <a16:creationId xmlns:a16="http://schemas.microsoft.com/office/drawing/2014/main" id="{360B797C-4817-4DDA-A3CE-095F5FAD5DA8}"/>
+                <a16:creationId xmlns:a16="http://schemas.microsoft.com/office/drawing/2014/main" id="{72D37280-31C4-41C2-A347-794C51E0B1B9}"/>
               </a:ext>
             </a:extLst>
           </p:cNvPr>
@@ -10773,7 +10773,7 @@
           <p:cNvPr id="4" name="Rectangle 3">
             <a:extLst xmlns:a="http://schemas.openxmlformats.org/drawingml/2006/main">
               <a:ext uri="{FF2B5EF4-FFF2-40B4-BE49-F238E27FC236}">
-                <a16:creationId xmlns:a16="http://schemas.microsoft.com/office/drawing/2014/main" id="{A5B03F39-7FEF-4EA9-8F70-31D9B09B1C78}"/>
+                <a16:creationId xmlns:a16="http://schemas.microsoft.com/office/drawing/2014/main" id="{58FC4DED-36EE-48BC-BEA4-500B55493420}"/>
               </a:ext>
             </a:extLst>
           </p:cNvPr>
@@ -10828,7 +10828,7 @@
           <p:cNvPr id="5" name="Rectangle 4">
             <a:extLst xmlns:a="http://schemas.openxmlformats.org/drawingml/2006/main">
               <a:ext uri="{FF2B5EF4-FFF2-40B4-BE49-F238E27FC236}">
-                <a16:creationId xmlns:a16="http://schemas.microsoft.com/office/drawing/2014/main" id="{FB8ADC96-478D-4CAF-9011-0C9859C78430}"/>
+                <a16:creationId xmlns:a16="http://schemas.microsoft.com/office/drawing/2014/main" id="{4AEEFD81-A7EB-4EFE-8181-96A68C2899CD}"/>
               </a:ext>
             </a:extLst>
           </p:cNvPr>
@@ -10883,7 +10883,7 @@
           <p:cNvPr id="6" name="TextBox 5">
             <a:extLst xmlns:a="http://schemas.openxmlformats.org/drawingml/2006/main">
               <a:ext uri="{FF2B5EF4-FFF2-40B4-BE49-F238E27FC236}">
-                <a16:creationId xmlns:a16="http://schemas.microsoft.com/office/drawing/2014/main" id="{9EE9A080-4964-4529-BC78-CD2C058769EE}"/>
+                <a16:creationId xmlns:a16="http://schemas.microsoft.com/office/drawing/2014/main" id="{CB043428-E3C8-4EA4-9A0C-9A5A6E6653F5}"/>
               </a:ext>
             </a:extLst>
           </p:cNvPr>
@@ -10920,7 +10920,7 @@
                 <a:ea typeface="Aptos"/>
                 <a:cs typeface="Aptos"/>
               </a:rPr>
-              <a:t>Independent public evidence summary · 2026.07.23-16 · 2026-07-22 · Sources: Market-values; IMARC; GVR; Fortune</a:t>
+              <a:t>Independent public evidence summary · 2026.07.24-17 · 2026-07-24 · Sources: Market-values; IMARC; GVR; Fortune; European Commission</a:t>
             </a:r>
           </a:p>
         </p:txBody>
@@ -10930,7 +10930,7 @@
           <p:cNvPr id="7" name="TextBox 6">
             <a:extLst xmlns:a="http://schemas.openxmlformats.org/drawingml/2006/main">
               <a:ext uri="{FF2B5EF4-FFF2-40B4-BE49-F238E27FC236}">
-                <a16:creationId xmlns:a16="http://schemas.microsoft.com/office/drawing/2014/main" id="{8516738B-1392-4D3F-8079-72E79EE83159}"/>
+                <a16:creationId xmlns:a16="http://schemas.microsoft.com/office/drawing/2014/main" id="{E4E1CEFF-C6D6-46B5-9510-E58A57756A71}"/>
               </a:ext>
             </a:extLst>
           </p:cNvPr>
@@ -10977,7 +10977,7 @@
           <p:cNvPr id="8" name="Rounded Rectangle 7">
             <a:extLst xmlns:a="http://schemas.openxmlformats.org/drawingml/2006/main">
               <a:ext uri="{FF2B5EF4-FFF2-40B4-BE49-F238E27FC236}">
-                <a16:creationId xmlns:a16="http://schemas.microsoft.com/office/drawing/2014/main" id="{585EA7C3-3C35-416E-800E-73DDCAC93D68}"/>
+                <a16:creationId xmlns:a16="http://schemas.microsoft.com/office/drawing/2014/main" id="{9B37E6A4-9872-4AB5-8D87-FC008E8E09B2}"/>
               </a:ext>
             </a:extLst>
           </p:cNvPr>
@@ -11034,7 +11034,7 @@
           <p:cNvPr id="9" name="TextBox 8">
             <a:extLst xmlns:a="http://schemas.openxmlformats.org/drawingml/2006/main">
               <a:ext uri="{FF2B5EF4-FFF2-40B4-BE49-F238E27FC236}">
-                <a16:creationId xmlns:a16="http://schemas.microsoft.com/office/drawing/2014/main" id="{E42D5BD3-2D10-4207-93FD-F28C8B3877DE}"/>
+                <a16:creationId xmlns:a16="http://schemas.microsoft.com/office/drawing/2014/main" id="{6F4EE265-DF59-492F-9AAE-402D335FB9EE}"/>
               </a:ext>
             </a:extLst>
           </p:cNvPr>
@@ -11071,7 +11071,7 @@
                 <a:ea typeface="Aptos"/>
                 <a:cs typeface="Aptos"/>
               </a:rPr>
-              <a:t>195</a:t>
+              <a:t>20</a:t>
             </a:r>
           </a:p>
         </p:txBody>
@@ -11081,7 +11081,7 @@
           <p:cNvPr id="10" name="TextBox 9">
             <a:extLst xmlns:a="http://schemas.openxmlformats.org/drawingml/2006/main">
               <a:ext uri="{FF2B5EF4-FFF2-40B4-BE49-F238E27FC236}">
-                <a16:creationId xmlns:a16="http://schemas.microsoft.com/office/drawing/2014/main" id="{776658E5-003E-404F-9244-1CDAF85CFE0B}"/>
+                <a16:creationId xmlns:a16="http://schemas.microsoft.com/office/drawing/2014/main" id="{F5AC71B1-5CA8-4768-BEC5-0F1CEC59E842}"/>
               </a:ext>
             </a:extLst>
           </p:cNvPr>
@@ -11093,7 +11093,7 @@
         <p:spPr>
           <a:xfrm xmlns:a="http://schemas.openxmlformats.org/drawingml/2006/main">
             <a:off x="694944" y="2468879"/>
-            <a:ext cx="3203448" cy="438912"/>
+            <a:ext cx="3203448" cy="499872"/>
           </a:xfrm>
           <a:prstGeom xmlns:a="http://schemas.openxmlformats.org/drawingml/2006/main" prst="rect">
             <a:avLst/>
@@ -11118,7 +11118,7 @@
                 <a:ea typeface="Aptos"/>
                 <a:cs typeface="Aptos"/>
               </a:rPr>
-              <a:t>country research rows</a:t>
+              <a:t>official annual observations from 6 countries</a:t>
             </a:r>
           </a:p>
         </p:txBody>
@@ -11128,7 +11128,7 @@
           <p:cNvPr id="11" name="Rounded Rectangle 10">
             <a:extLst xmlns:a="http://schemas.openxmlformats.org/drawingml/2006/main">
               <a:ext uri="{FF2B5EF4-FFF2-40B4-BE49-F238E27FC236}">
-                <a16:creationId xmlns:a16="http://schemas.microsoft.com/office/drawing/2014/main" id="{AD4A576D-9774-4A9D-9781-0EBAF64AC266}"/>
+                <a16:creationId xmlns:a16="http://schemas.microsoft.com/office/drawing/2014/main" id="{C56B7B6E-BC7B-4706-A68E-C512AB581E19}"/>
               </a:ext>
             </a:extLst>
           </p:cNvPr>
@@ -11185,7 +11185,7 @@
           <p:cNvPr id="12" name="TextBox 11">
             <a:extLst xmlns:a="http://schemas.openxmlformats.org/drawingml/2006/main">
               <a:ext uri="{FF2B5EF4-FFF2-40B4-BE49-F238E27FC236}">
-                <a16:creationId xmlns:a16="http://schemas.microsoft.com/office/drawing/2014/main" id="{20A98095-6006-4A8E-AD10-979B1C08A58A}"/>
+                <a16:creationId xmlns:a16="http://schemas.microsoft.com/office/drawing/2014/main" id="{664B19AF-803E-49D7-848C-66012A208406}"/>
               </a:ext>
             </a:extLst>
           </p:cNvPr>
@@ -11214,7 +11214,7 @@
               <a:buNone/>
             </a:pPr>
             <a:r>
-              <a:rPr sz="2700" b="1">
+              <a:rPr sz="2250" b="1">
                 <a:solidFill>
                   <a:srgbClr val="0D5F86"/>
                 </a:solidFill>
@@ -11222,7 +11222,7 @@
                 <a:ea typeface="Aptos"/>
                 <a:cs typeface="Aptos"/>
               </a:rPr>
-              <a:t>5</a:t>
+              <a:t>NZD 280.685m</a:t>
             </a:r>
           </a:p>
         </p:txBody>
@@ -11232,7 +11232,7 @@
           <p:cNvPr id="13" name="TextBox 12">
             <a:extLst xmlns:a="http://schemas.openxmlformats.org/drawingml/2006/main">
               <a:ext uri="{FF2B5EF4-FFF2-40B4-BE49-F238E27FC236}">
-                <a16:creationId xmlns:a16="http://schemas.microsoft.com/office/drawing/2014/main" id="{ECA79E6D-86C8-422D-B81C-883DF600FF9C}"/>
+                <a16:creationId xmlns:a16="http://schemas.microsoft.com/office/drawing/2014/main" id="{2B859EE5-340B-45E2-9968-FFE97DB77BB9}"/>
               </a:ext>
             </a:extLst>
           </p:cNvPr>
@@ -11244,7 +11244,7 @@
         <p:spPr>
           <a:xfrm xmlns:a="http://schemas.openxmlformats.org/drawingml/2006/main">
             <a:off x="4483608" y="2468879"/>
-            <a:ext cx="3203448" cy="438912"/>
+            <a:ext cx="3203448" cy="499872"/>
           </a:xfrm>
           <a:prstGeom xmlns:a="http://schemas.openxmlformats.org/drawingml/2006/main" prst="rect">
             <a:avLst/>
@@ -11269,7 +11269,7 @@
                 <a:ea typeface="Aptos"/>
                 <a:cs typeface="Aptos"/>
               </a:rPr>
-              <a:t>countries with annual observations</a:t>
+              <a:t>New Zealand 2024: raw sum from 29 files</a:t>
             </a:r>
           </a:p>
         </p:txBody>
@@ -11279,7 +11279,7 @@
           <p:cNvPr id="14" name="Rounded Rectangle 13">
             <a:extLst xmlns:a="http://schemas.openxmlformats.org/drawingml/2006/main">
               <a:ext uri="{FF2B5EF4-FFF2-40B4-BE49-F238E27FC236}">
-                <a16:creationId xmlns:a16="http://schemas.microsoft.com/office/drawing/2014/main" id="{D3B260E5-25E6-4F2F-A52E-8242DD999F05}"/>
+                <a16:creationId xmlns:a16="http://schemas.microsoft.com/office/drawing/2014/main" id="{266804AA-5D23-41DF-BDE1-B712D6F51D22}"/>
               </a:ext>
             </a:extLst>
           </p:cNvPr>
@@ -11336,7 +11336,7 @@
           <p:cNvPr id="15" name="TextBox 14">
             <a:extLst xmlns:a="http://schemas.openxmlformats.org/drawingml/2006/main">
               <a:ext uri="{FF2B5EF4-FFF2-40B4-BE49-F238E27FC236}">
-                <a16:creationId xmlns:a16="http://schemas.microsoft.com/office/drawing/2014/main" id="{F1E2F2A6-2440-4722-BE6A-FBCA8D9EB4AA}"/>
+                <a16:creationId xmlns:a16="http://schemas.microsoft.com/office/drawing/2014/main" id="{2F79686D-7671-47F3-B8DE-7B71F04CE691}"/>
               </a:ext>
             </a:extLst>
           </p:cNvPr>
@@ -11373,7 +11373,7 @@
                 <a:ea typeface="Aptos"/>
                 <a:cs typeface="Aptos"/>
               </a:rPr>
-              <a:t>USD 26.0–46.32bn</a:t>
+              <a:t>EUR 4.99bn</a:t>
             </a:r>
           </a:p>
         </p:txBody>
@@ -11383,7 +11383,7 @@
           <p:cNvPr id="16" name="TextBox 15">
             <a:extLst xmlns:a="http://schemas.openxmlformats.org/drawingml/2006/main">
               <a:ext uri="{FF2B5EF4-FFF2-40B4-BE49-F238E27FC236}">
-                <a16:creationId xmlns:a16="http://schemas.microsoft.com/office/drawing/2014/main" id="{305D5357-270B-45E4-BB4F-80DD3A6E5CE7}"/>
+                <a16:creationId xmlns:a16="http://schemas.microsoft.com/office/drawing/2014/main" id="{C10994E7-CBAB-4480-8582-459A20164EDA}"/>
               </a:ext>
             </a:extLst>
           </p:cNvPr>
@@ -11395,7 +11395,7 @@
         <p:spPr>
           <a:xfrm xmlns:a="http://schemas.openxmlformats.org/drawingml/2006/main">
             <a:off x="8272272" y="2468879"/>
-            <a:ext cx="3203448" cy="438912"/>
+            <a:ext cx="3203448" cy="499872"/>
           </a:xfrm>
           <a:prstGeom xmlns:a="http://schemas.openxmlformats.org/drawingml/2006/main" prst="rect">
             <a:avLst/>
@@ -11420,7 +11420,7 @@
                 <a:ea typeface="Aptos"/>
                 <a:cs typeface="Aptos"/>
               </a:rPr>
-              <a:t>commercial global 2025 range</a:t>
+              <a:t>EU 2023: Commission-published benchmark</a:t>
             </a:r>
           </a:p>
         </p:txBody>
@@ -11430,7 +11430,7 @@
           <p:cNvPr id="17" name="TextBox 16">
             <a:extLst xmlns:a="http://schemas.openxmlformats.org/drawingml/2006/main">
               <a:ext uri="{FF2B5EF4-FFF2-40B4-BE49-F238E27FC236}">
-                <a16:creationId xmlns:a16="http://schemas.microsoft.com/office/drawing/2014/main" id="{E63A138C-BE9A-458A-B5C8-684D80DE9775}"/>
+                <a16:creationId xmlns:a16="http://schemas.microsoft.com/office/drawing/2014/main" id="{76C23826-0A80-455D-862D-348E01F17C38}"/>
               </a:ext>
             </a:extLst>
           </p:cNvPr>
@@ -11467,7 +11467,7 @@
                 <a:ea typeface="Aptos"/>
                 <a:cs typeface="Aptos"/>
               </a:rPr>
-              <a:t>Germany: the liquid model has low confidence and a range of EUR 667.92–1,654.62 million; it must not be presented as observed sales.</a:t>
+              <a:t>4/4 candidates failed the D1–D10 protocol; the accepted-donor gate is 0/3.</a:t>
             </a:r>
           </a:p>
         </p:txBody>
@@ -11477,7 +11477,7 @@
           <p:cNvPr id="18" name="Rounded Rectangle 17">
             <a:extLst xmlns:a="http://schemas.openxmlformats.org/drawingml/2006/main">
               <a:ext uri="{FF2B5EF4-FFF2-40B4-BE49-F238E27FC236}">
-                <a16:creationId xmlns:a16="http://schemas.microsoft.com/office/drawing/2014/main" id="{68EEAFE0-138D-46C2-B6AC-B52E96A807E9}"/>
+                <a16:creationId xmlns:a16="http://schemas.microsoft.com/office/drawing/2014/main" id="{1B77E487-9ACC-49B2-9EFF-15A73824E054}"/>
               </a:ext>
             </a:extLst>
           </p:cNvPr>
@@ -11534,7 +11534,7 @@
           <p:cNvPr id="19" name="TextBox 18">
             <a:extLst xmlns:a="http://schemas.openxmlformats.org/drawingml/2006/main">
               <a:ext uri="{FF2B5EF4-FFF2-40B4-BE49-F238E27FC236}">
-                <a16:creationId xmlns:a16="http://schemas.microsoft.com/office/drawing/2014/main" id="{5A2865D7-3A1D-4496-BF24-ACD8F7FAF5B8}"/>
+                <a16:creationId xmlns:a16="http://schemas.microsoft.com/office/drawing/2014/main" id="{F431A1FC-6A70-4B68-BDFF-A9334ADD0490}"/>
               </a:ext>
             </a:extLst>
           </p:cNvPr>
@@ -11581,7 +11581,7 @@
           <p:cNvPr id="20" name="TextBox 19">
             <a:extLst xmlns:a="http://schemas.openxmlformats.org/drawingml/2006/main">
               <a:ext uri="{FF2B5EF4-FFF2-40B4-BE49-F238E27FC236}">
-                <a16:creationId xmlns:a16="http://schemas.microsoft.com/office/drawing/2014/main" id="{083D6E84-227F-45DC-901D-FDC1F47F6E74}"/>
+                <a16:creationId xmlns:a16="http://schemas.microsoft.com/office/drawing/2014/main" id="{277332C2-C4F0-4277-B4D2-378810A1D39C}"/>
               </a:ext>
             </a:extLst>
           </p:cNvPr>
@@ -11593,7 +11593,7 @@
         <p:spPr>
           <a:xfrm xmlns:a="http://schemas.openxmlformats.org/drawingml/2006/main">
             <a:off x="731520" y="5038344"/>
-            <a:ext cx="10597896" cy="530352"/>
+            <a:ext cx="10597896" cy="1216152"/>
           </a:xfrm>
           <a:prstGeom xmlns:a="http://schemas.openxmlformats.org/drawingml/2006/main" prst="rect">
             <a:avLst/>
@@ -11618,7 +11618,7 @@
                 <a:ea typeface="Aptos"/>
                 <a:cs typeface="Aptos"/>
               </a:rPr>
-              <a:t>There are 0 accepted official national consumer-retail values. Atlas does not publish its own global estimate before the methodological gates are met.</a:t>
+              <a:t>New Zealand's raw sum reconciles to the official ≥NZD 280m headline; the NZD 264.561m repeated-row sensitivity is not a corrected estimate, and the identified-vaping raw sum is NZD 274.18m. The EU figure is a supported institutional benchmark based on commercial Euromonitor 2025 data; Cyprus, Luxembourg and Malta are missing. The commercial USD 26.0–46.32bn range and Germany's EUR 667.92m–1,654.62m liquid model are cross-checks, not the atlas's global estimate.</a:t>
             </a:r>
           </a:p>
         </p:txBody>
@@ -11626,7 +11626,7 @@
     </p:spTree>
     <p:extLst>
       <p:ext uri="{BB962C8B-B14F-4D97-AF65-F5344CB8AC3E}">
-        <p14:creationId xmlns:p14="http://schemas.microsoft.com/office/powerpoint/2010/main" val="630013886"/>
+        <p14:creationId xmlns:p14="http://schemas.microsoft.com/office/powerpoint/2010/main" val="1342130835"/>
       </p:ext>
     </p:extLst>
   </p:cSld>
@@ -11650,7 +11650,7 @@
           <p:cNvPr id="2" name="TextBox 1">
             <a:extLst xmlns:a="http://schemas.openxmlformats.org/drawingml/2006/main">
               <a:ext uri="{FF2B5EF4-FFF2-40B4-BE49-F238E27FC236}">
-                <a16:creationId xmlns:a16="http://schemas.microsoft.com/office/drawing/2014/main" id="{E8B38D50-BC00-41A2-AA44-3D198BDC285F}"/>
+                <a16:creationId xmlns:a16="http://schemas.microsoft.com/office/drawing/2014/main" id="{5C2DD201-BB1E-4AA6-903D-8069E34C5F61}"/>
               </a:ext>
             </a:extLst>
           </p:cNvPr>
@@ -11697,7 +11697,7 @@
           <p:cNvPr id="3" name="TextBox 2">
             <a:extLst xmlns:a="http://schemas.openxmlformats.org/drawingml/2006/main">
               <a:ext uri="{FF2B5EF4-FFF2-40B4-BE49-F238E27FC236}">
-                <a16:creationId xmlns:a16="http://schemas.microsoft.com/office/drawing/2014/main" id="{DE80A0AA-C55A-4D9F-BD2D-F37957C6E1F8}"/>
+                <a16:creationId xmlns:a16="http://schemas.microsoft.com/office/drawing/2014/main" id="{A48841C0-BBDA-4209-8916-80FA08737CAA}"/>
               </a:ext>
             </a:extLst>
           </p:cNvPr>
@@ -11744,7 +11744,7 @@
           <p:cNvPr id="4" name="Rectangle 3">
             <a:extLst xmlns:a="http://schemas.openxmlformats.org/drawingml/2006/main">
               <a:ext uri="{FF2B5EF4-FFF2-40B4-BE49-F238E27FC236}">
-                <a16:creationId xmlns:a16="http://schemas.microsoft.com/office/drawing/2014/main" id="{AB95CA8C-B083-4F89-8157-4C34A016889E}"/>
+                <a16:creationId xmlns:a16="http://schemas.microsoft.com/office/drawing/2014/main" id="{8E53A31A-0979-4EBF-B14E-C0C5E2C0D103}"/>
               </a:ext>
             </a:extLst>
           </p:cNvPr>
@@ -11799,7 +11799,7 @@
           <p:cNvPr id="5" name="Rectangle 4">
             <a:extLst xmlns:a="http://schemas.openxmlformats.org/drawingml/2006/main">
               <a:ext uri="{FF2B5EF4-FFF2-40B4-BE49-F238E27FC236}">
-                <a16:creationId xmlns:a16="http://schemas.microsoft.com/office/drawing/2014/main" id="{C1719DB8-B57C-49B2-A1BA-D934EEB59B39}"/>
+                <a16:creationId xmlns:a16="http://schemas.microsoft.com/office/drawing/2014/main" id="{1DB60502-C357-403B-B3CF-BC6F7DDB5BEA}"/>
               </a:ext>
             </a:extLst>
           </p:cNvPr>
@@ -11854,7 +11854,7 @@
           <p:cNvPr id="6" name="TextBox 5">
             <a:extLst xmlns:a="http://schemas.openxmlformats.org/drawingml/2006/main">
               <a:ext uri="{FF2B5EF4-FFF2-40B4-BE49-F238E27FC236}">
-                <a16:creationId xmlns:a16="http://schemas.microsoft.com/office/drawing/2014/main" id="{2925C6F1-A6DD-40FF-8BE8-BE08AD843A25}"/>
+                <a16:creationId xmlns:a16="http://schemas.microsoft.com/office/drawing/2014/main" id="{3D71EBB3-58D7-4092-931D-0A2156A0C6BB}"/>
               </a:ext>
             </a:extLst>
           </p:cNvPr>
@@ -11891,7 +11891,7 @@
                 <a:ea typeface="Aptos"/>
                 <a:cs typeface="Aptos"/>
               </a:rPr>
-              <a:t>Independent public evidence summary · 2026.07.23-16 · 2026-07-22 · Sources: WIPO licensing; WIPO IP Finance</a:t>
+              <a:t>Independent public evidence summary · 2026.07.24-17 · 2026-07-24 · Sources: WIPO licensing; WIPO IP Finance</a:t>
             </a:r>
           </a:p>
         </p:txBody>
@@ -11901,7 +11901,7 @@
           <p:cNvPr id="7" name="TextBox 6">
             <a:extLst xmlns:a="http://schemas.openxmlformats.org/drawingml/2006/main">
               <a:ext uri="{FF2B5EF4-FFF2-40B4-BE49-F238E27FC236}">
-                <a16:creationId xmlns:a16="http://schemas.microsoft.com/office/drawing/2014/main" id="{CF67CB06-A495-4034-AAEC-CEB37BCDD0C6}"/>
+                <a16:creationId xmlns:a16="http://schemas.microsoft.com/office/drawing/2014/main" id="{E0046C0D-CC03-490F-8C6C-7AB05121AB57}"/>
               </a:ext>
             </a:extLst>
           </p:cNvPr>
@@ -11948,7 +11948,7 @@
           <p:cNvPr id="8" name="TextBox 7">
             <a:extLst xmlns:a="http://schemas.openxmlformats.org/drawingml/2006/main">
               <a:ext uri="{FF2B5EF4-FFF2-40B4-BE49-F238E27FC236}">
-                <a16:creationId xmlns:a16="http://schemas.microsoft.com/office/drawing/2014/main" id="{C9B12B50-168E-42BA-B3A5-20DF33B4D1B9}"/>
+                <a16:creationId xmlns:a16="http://schemas.microsoft.com/office/drawing/2014/main" id="{43845A80-8FA2-4B09-9ACE-64D253F1A717}"/>
               </a:ext>
             </a:extLst>
           </p:cNvPr>
@@ -11995,7 +11995,7 @@
           <p:cNvPr id="9" name="TextBox 8">
             <a:extLst xmlns:a="http://schemas.openxmlformats.org/drawingml/2006/main">
               <a:ext uri="{FF2B5EF4-FFF2-40B4-BE49-F238E27FC236}">
-                <a16:creationId xmlns:a16="http://schemas.microsoft.com/office/drawing/2014/main" id="{10A7444C-85C8-4D1A-9F13-025C64B20413}"/>
+                <a16:creationId xmlns:a16="http://schemas.microsoft.com/office/drawing/2014/main" id="{E81FBA63-92E2-4304-91E0-52E80D5A8C92}"/>
               </a:ext>
             </a:extLst>
           </p:cNvPr>
@@ -12092,7 +12092,7 @@
           <p:cNvPr id="10" name="Rounded Rectangle 9">
             <a:extLst xmlns:a="http://schemas.openxmlformats.org/drawingml/2006/main">
               <a:ext uri="{FF2B5EF4-FFF2-40B4-BE49-F238E27FC236}">
-                <a16:creationId xmlns:a16="http://schemas.microsoft.com/office/drawing/2014/main" id="{698E7C2F-77FE-4DA1-9598-209822CF953C}"/>
+                <a16:creationId xmlns:a16="http://schemas.microsoft.com/office/drawing/2014/main" id="{4ECF484F-7EB1-428A-B319-718948440E9F}"/>
               </a:ext>
             </a:extLst>
           </p:cNvPr>
@@ -12149,7 +12149,7 @@
           <p:cNvPr id="11" name="TextBox 10">
             <a:extLst xmlns:a="http://schemas.openxmlformats.org/drawingml/2006/main">
               <a:ext uri="{FF2B5EF4-FFF2-40B4-BE49-F238E27FC236}">
-                <a16:creationId xmlns:a16="http://schemas.microsoft.com/office/drawing/2014/main" id="{D910E5A3-870F-49B8-AA5B-DDA7B1520FB9}"/>
+                <a16:creationId xmlns:a16="http://schemas.microsoft.com/office/drawing/2014/main" id="{E521F958-89D8-4238-B488-9E51DC196288}"/>
               </a:ext>
             </a:extLst>
           </p:cNvPr>
@@ -12196,7 +12196,7 @@
           <p:cNvPr id="12" name="TextBox 11">
             <a:extLst xmlns:a="http://schemas.openxmlformats.org/drawingml/2006/main">
               <a:ext uri="{FF2B5EF4-FFF2-40B4-BE49-F238E27FC236}">
-                <a16:creationId xmlns:a16="http://schemas.microsoft.com/office/drawing/2014/main" id="{3D7FE59A-DC23-404D-A680-FEF69D883FD6}"/>
+                <a16:creationId xmlns:a16="http://schemas.microsoft.com/office/drawing/2014/main" id="{67709E45-9F06-4BC6-8A3D-CE1FBC8D3594}"/>
               </a:ext>
             </a:extLst>
           </p:cNvPr>
@@ -12241,7 +12241,7 @@
     </p:spTree>
     <p:extLst>
       <p:ext uri="{BB962C8B-B14F-4D97-AF65-F5344CB8AC3E}">
-        <p14:creationId xmlns:p14="http://schemas.microsoft.com/office/powerpoint/2010/main" val="303168158"/>
+        <p14:creationId xmlns:p14="http://schemas.microsoft.com/office/powerpoint/2010/main" val="1086088144"/>
       </p:ext>
     </p:extLst>
   </p:cSld>
@@ -12265,7 +12265,7 @@
           <p:cNvPr id="2" name="TextBox 1">
             <a:extLst xmlns:a="http://schemas.openxmlformats.org/drawingml/2006/main">
               <a:ext uri="{FF2B5EF4-FFF2-40B4-BE49-F238E27FC236}">
-                <a16:creationId xmlns:a16="http://schemas.microsoft.com/office/drawing/2014/main" id="{EDA46EE5-F28E-40A2-9CC6-C6EF2D1DD23A}"/>
+                <a16:creationId xmlns:a16="http://schemas.microsoft.com/office/drawing/2014/main" id="{B828F889-76C9-43DF-A985-4905321F9CF9}"/>
               </a:ext>
             </a:extLst>
           </p:cNvPr>
@@ -12312,7 +12312,7 @@
           <p:cNvPr id="3" name="TextBox 2">
             <a:extLst xmlns:a="http://schemas.openxmlformats.org/drawingml/2006/main">
               <a:ext uri="{FF2B5EF4-FFF2-40B4-BE49-F238E27FC236}">
-                <a16:creationId xmlns:a16="http://schemas.microsoft.com/office/drawing/2014/main" id="{E8B1C18C-0C43-430D-B6D6-25363DBCFADF}"/>
+                <a16:creationId xmlns:a16="http://schemas.microsoft.com/office/drawing/2014/main" id="{181AE82B-51A4-494E-808F-A015996186B1}"/>
               </a:ext>
             </a:extLst>
           </p:cNvPr>
@@ -12324,7 +12324,7 @@
         <p:spPr>
           <a:xfrm xmlns:a="http://schemas.openxmlformats.org/drawingml/2006/main">
             <a:off x="502920" y="621792"/>
-            <a:ext cx="11109960" cy="591312"/>
+            <a:ext cx="11109960" cy="804672"/>
           </a:xfrm>
           <a:prstGeom xmlns:a="http://schemas.openxmlformats.org/drawingml/2006/main" prst="rect">
             <a:avLst/>
@@ -12341,7 +12341,7 @@
               <a:buNone/>
             </a:pPr>
             <a:r>
-              <a:rPr sz="3400" b="1">
+              <a:rPr sz="3000" b="1">
                 <a:solidFill>
                   <a:srgbClr val="071A2B"/>
                 </a:solidFill>
@@ -12359,18 +12359,18 @@
           <p:cNvPr id="4" name="Rectangle 3">
             <a:extLst xmlns:a="http://schemas.openxmlformats.org/drawingml/2006/main">
               <a:ext uri="{FF2B5EF4-FFF2-40B4-BE49-F238E27FC236}">
-                <a16:creationId xmlns:a16="http://schemas.microsoft.com/office/drawing/2014/main" id="{979097EB-985F-468B-9C1C-E0CE5E4F05F8}"/>
-              </a:ext>
-            </a:extLst>
-          </p:cNvPr>
-          <p:cNvSpPr>
-            <a:spLocks xmlns:a="http://schemas.openxmlformats.org/drawingml/2006/main" noGrp="1"/>
-          </p:cNvSpPr>
-          <p:nvPr/>
-        </p:nvSpPr>
-        <p:spPr>
-          <a:xfrm xmlns:a="http://schemas.openxmlformats.org/drawingml/2006/main">
-            <a:off x="502920" y="1225296"/>
+                <a16:creationId xmlns:a16="http://schemas.microsoft.com/office/drawing/2014/main" id="{08B4AE7F-7264-47F3-9393-F646E404060F}"/>
+              </a:ext>
+            </a:extLst>
+          </p:cNvPr>
+          <p:cNvSpPr>
+            <a:spLocks xmlns:a="http://schemas.openxmlformats.org/drawingml/2006/main" noGrp="1"/>
+          </p:cNvSpPr>
+          <p:nvPr/>
+        </p:nvSpPr>
+        <p:spPr>
+          <a:xfrm xmlns:a="http://schemas.openxmlformats.org/drawingml/2006/main">
+            <a:off x="502920" y="1554480"/>
             <a:ext cx="960120" cy="50292"/>
           </a:xfrm>
           <a:prstGeom xmlns:a="http://schemas.openxmlformats.org/drawingml/2006/main" prst="rect">
@@ -12414,7 +12414,7 @@
           <p:cNvPr id="5" name="Rectangle 4">
             <a:extLst xmlns:a="http://schemas.openxmlformats.org/drawingml/2006/main">
               <a:ext uri="{FF2B5EF4-FFF2-40B4-BE49-F238E27FC236}">
-                <a16:creationId xmlns:a16="http://schemas.microsoft.com/office/drawing/2014/main" id="{E77D304C-DE3D-489D-B407-2419FA5CC789}"/>
+                <a16:creationId xmlns:a16="http://schemas.microsoft.com/office/drawing/2014/main" id="{66F03936-FCFD-478F-A7C0-2E1A801CBB8C}"/>
               </a:ext>
             </a:extLst>
           </p:cNvPr>
@@ -12469,7 +12469,7 @@
           <p:cNvPr id="6" name="TextBox 5">
             <a:extLst xmlns:a="http://schemas.openxmlformats.org/drawingml/2006/main">
               <a:ext uri="{FF2B5EF4-FFF2-40B4-BE49-F238E27FC236}">
-                <a16:creationId xmlns:a16="http://schemas.microsoft.com/office/drawing/2014/main" id="{1BD5674A-84A4-4C5A-9E41-1BFEB1A46025}"/>
+                <a16:creationId xmlns:a16="http://schemas.microsoft.com/office/drawing/2014/main" id="{21EC4B82-B246-41AC-8373-916177F50407}"/>
               </a:ext>
             </a:extLst>
           </p:cNvPr>
@@ -12506,7 +12506,7 @@
                 <a:ea typeface="Aptos"/>
                 <a:cs typeface="Aptos"/>
               </a:rPr>
-              <a:t>Independent public evidence summary · 2026.07.23-16 · 2026-07-22 · Sources: Evidence Register; EPO; WIPO</a:t>
+              <a:t>Independent public evidence summary · 2026.07.24-17 · 2026-07-24 · Sources: Evidence Register; EPO; WIPO</a:t>
             </a:r>
           </a:p>
         </p:txBody>
@@ -12516,7 +12516,7 @@
           <p:cNvPr id="7" name="TextBox 6">
             <a:extLst xmlns:a="http://schemas.openxmlformats.org/drawingml/2006/main">
               <a:ext uri="{FF2B5EF4-FFF2-40B4-BE49-F238E27FC236}">
-                <a16:creationId xmlns:a16="http://schemas.microsoft.com/office/drawing/2014/main" id="{3D8C2F7B-279C-4A92-8D1C-40A3CB603CA8}"/>
+                <a16:creationId xmlns:a16="http://schemas.microsoft.com/office/drawing/2014/main" id="{5D77794C-6899-45C2-B9D2-36A8136F417B}"/>
               </a:ext>
             </a:extLst>
           </p:cNvPr>
@@ -12565,8 +12565,8 @@
           <p:nvPr/>
         </p:nvGraphicFramePr>
         <p:xfrm>
-          <a:off xmlns:a="http://schemas.openxmlformats.org/drawingml/2006/main" x="530352" y="1536192"/>
-          <a:ext xmlns:a="http://schemas.openxmlformats.org/drawingml/2006/main" cx="11109958" cy="3977636"/>
+          <a:off xmlns:a="http://schemas.openxmlformats.org/drawingml/2006/main" x="530352" y="1719072"/>
+          <a:ext xmlns:a="http://schemas.openxmlformats.org/drawingml/2006/main" cx="11109958" cy="3794760"/>
         </p:xfrm>
         <a:graphic xmlns:a="http://schemas.openxmlformats.org/drawingml/2006/main">
           <a:graphicData uri="http://schemas.openxmlformats.org/drawingml/2006/table">
@@ -12662,7 +12662,7 @@
                   </a:tcPr>
                 </a:tc>
               </a:tr>
-              <a:tr h="884681">
+              <a:tr h="838962">
                 <a:tc>
                   <a:txBody>
                     <a:bodyPr/>
@@ -12745,7 +12745,7 @@
                   </a:tcPr>
                 </a:tc>
               </a:tr>
-              <a:tr h="884681">
+              <a:tr h="838962">
                 <a:tc>
                   <a:txBody>
                     <a:bodyPr/>
@@ -12828,7 +12828,7 @@
                   </a:tcPr>
                 </a:tc>
               </a:tr>
-              <a:tr h="884681">
+              <a:tr h="838962">
                 <a:tc>
                   <a:txBody>
                     <a:bodyPr/>
@@ -12911,7 +12911,7 @@
                   </a:tcPr>
                 </a:tc>
               </a:tr>
-              <a:tr h="884681">
+              <a:tr h="838962">
                 <a:tc>
                   <a:txBody>
                     <a:bodyPr/>
@@ -13003,7 +13003,7 @@
           <p:cNvPr id="9" name="TextBox 8">
             <a:extLst xmlns:a="http://schemas.openxmlformats.org/drawingml/2006/main">
               <a:ext uri="{FF2B5EF4-FFF2-40B4-BE49-F238E27FC236}">
-                <a16:creationId xmlns:a16="http://schemas.microsoft.com/office/drawing/2014/main" id="{6977EACA-90AF-41FC-A371-E22E82D0E0F4}"/>
+                <a16:creationId xmlns:a16="http://schemas.microsoft.com/office/drawing/2014/main" id="{FBD34ABC-F449-40F8-8D99-8FDD8746A452}"/>
               </a:ext>
             </a:extLst>
           </p:cNvPr>
@@ -13048,7 +13048,7 @@
     </p:spTree>
     <p:extLst>
       <p:ext uri="{BB962C8B-B14F-4D97-AF65-F5344CB8AC3E}">
-        <p14:creationId xmlns:p14="http://schemas.microsoft.com/office/powerpoint/2010/main" val="700342587"/>
+        <p14:creationId xmlns:p14="http://schemas.microsoft.com/office/powerpoint/2010/main" val="1052708707"/>
       </p:ext>
     </p:extLst>
   </p:cSld>
@@ -13072,7 +13072,7 @@
           <p:cNvPr id="2" name="TextBox 1">
             <a:extLst xmlns:a="http://schemas.openxmlformats.org/drawingml/2006/main">
               <a:ext uri="{FF2B5EF4-FFF2-40B4-BE49-F238E27FC236}">
-                <a16:creationId xmlns:a16="http://schemas.microsoft.com/office/drawing/2014/main" id="{6EF4C795-E4A5-4B4D-92F0-884D799F3BEC}"/>
+                <a16:creationId xmlns:a16="http://schemas.microsoft.com/office/drawing/2014/main" id="{8CE39133-FA70-481D-A709-D7F650C54C90}"/>
               </a:ext>
             </a:extLst>
           </p:cNvPr>
@@ -13119,7 +13119,7 @@
           <p:cNvPr id="3" name="TextBox 2">
             <a:extLst xmlns:a="http://schemas.openxmlformats.org/drawingml/2006/main">
               <a:ext uri="{FF2B5EF4-FFF2-40B4-BE49-F238E27FC236}">
-                <a16:creationId xmlns:a16="http://schemas.microsoft.com/office/drawing/2014/main" id="{09B015B1-7FBA-46BA-89A0-0D11ED225602}"/>
+                <a16:creationId xmlns:a16="http://schemas.microsoft.com/office/drawing/2014/main" id="{EBAF4194-8D94-43AA-89AB-49709177AA24}"/>
               </a:ext>
             </a:extLst>
           </p:cNvPr>
@@ -13131,7 +13131,7 @@
         <p:spPr>
           <a:xfrm xmlns:a="http://schemas.openxmlformats.org/drawingml/2006/main">
             <a:off x="502920" y="621792"/>
-            <a:ext cx="11109960" cy="591312"/>
+            <a:ext cx="11109960" cy="804672"/>
           </a:xfrm>
           <a:prstGeom xmlns:a="http://schemas.openxmlformats.org/drawingml/2006/main" prst="rect">
             <a:avLst/>
@@ -13148,7 +13148,7 @@
               <a:buNone/>
             </a:pPr>
             <a:r>
-              <a:rPr sz="3400" b="1">
+              <a:rPr sz="3000" b="1">
                 <a:solidFill>
                   <a:srgbClr val="071A2B"/>
                 </a:solidFill>
@@ -13166,18 +13166,18 @@
           <p:cNvPr id="4" name="Rectangle 3">
             <a:extLst xmlns:a="http://schemas.openxmlformats.org/drawingml/2006/main">
               <a:ext uri="{FF2B5EF4-FFF2-40B4-BE49-F238E27FC236}">
-                <a16:creationId xmlns:a16="http://schemas.microsoft.com/office/drawing/2014/main" id="{CF9365B0-34D6-4EF3-B294-40C2518C98A1}"/>
-              </a:ext>
-            </a:extLst>
-          </p:cNvPr>
-          <p:cNvSpPr>
-            <a:spLocks xmlns:a="http://schemas.openxmlformats.org/drawingml/2006/main" noGrp="1"/>
-          </p:cNvSpPr>
-          <p:nvPr/>
-        </p:nvSpPr>
-        <p:spPr>
-          <a:xfrm xmlns:a="http://schemas.openxmlformats.org/drawingml/2006/main">
-            <a:off x="502920" y="1225296"/>
+                <a16:creationId xmlns:a16="http://schemas.microsoft.com/office/drawing/2014/main" id="{1E59D0FD-DC0D-40B8-88D7-82B4034208EF}"/>
+              </a:ext>
+            </a:extLst>
+          </p:cNvPr>
+          <p:cNvSpPr>
+            <a:spLocks xmlns:a="http://schemas.openxmlformats.org/drawingml/2006/main" noGrp="1"/>
+          </p:cNvSpPr>
+          <p:nvPr/>
+        </p:nvSpPr>
+        <p:spPr>
+          <a:xfrm xmlns:a="http://schemas.openxmlformats.org/drawingml/2006/main">
+            <a:off x="502920" y="1554480"/>
             <a:ext cx="960120" cy="50292"/>
           </a:xfrm>
           <a:prstGeom xmlns:a="http://schemas.openxmlformats.org/drawingml/2006/main" prst="rect">
@@ -13221,7 +13221,7 @@
           <p:cNvPr id="5" name="Rectangle 4">
             <a:extLst xmlns:a="http://schemas.openxmlformats.org/drawingml/2006/main">
               <a:ext uri="{FF2B5EF4-FFF2-40B4-BE49-F238E27FC236}">
-                <a16:creationId xmlns:a16="http://schemas.microsoft.com/office/drawing/2014/main" id="{A5BF6B39-DDA4-431B-9FDE-BCCC393BB918}"/>
+                <a16:creationId xmlns:a16="http://schemas.microsoft.com/office/drawing/2014/main" id="{BB064590-C23E-4985-B9AF-A42F8620C243}"/>
               </a:ext>
             </a:extLst>
           </p:cNvPr>
@@ -13276,7 +13276,7 @@
           <p:cNvPr id="6" name="TextBox 5">
             <a:extLst xmlns:a="http://schemas.openxmlformats.org/drawingml/2006/main">
               <a:ext uri="{FF2B5EF4-FFF2-40B4-BE49-F238E27FC236}">
-                <a16:creationId xmlns:a16="http://schemas.microsoft.com/office/drawing/2014/main" id="{AFBA04A0-CF8C-470E-B2A5-99117820DBFF}"/>
+                <a16:creationId xmlns:a16="http://schemas.microsoft.com/office/drawing/2014/main" id="{76BBE4B1-0270-420B-A628-E30AE04B9C88}"/>
               </a:ext>
             </a:extLst>
           </p:cNvPr>
@@ -13313,7 +13313,7 @@
                 <a:ea typeface="Aptos"/>
                 <a:cs typeface="Aptos"/>
               </a:rPr>
-              <a:t>Independent public evidence summary · 2026.07.23-16 · 2026-07-22 · Sources: Evidence Register</a:t>
+              <a:t>Independent public evidence summary · 2026.07.24-17 · 2026-07-24 · Sources: Evidence Register</a:t>
             </a:r>
           </a:p>
         </p:txBody>
@@ -13323,7 +13323,7 @@
           <p:cNvPr id="7" name="TextBox 6">
             <a:extLst xmlns:a="http://schemas.openxmlformats.org/drawingml/2006/main">
               <a:ext uri="{FF2B5EF4-FFF2-40B4-BE49-F238E27FC236}">
-                <a16:creationId xmlns:a16="http://schemas.microsoft.com/office/drawing/2014/main" id="{735B287E-656F-42E0-908C-3952909A0FD4}"/>
+                <a16:creationId xmlns:a16="http://schemas.microsoft.com/office/drawing/2014/main" id="{9C23BA76-D55A-43C1-B179-1C5D241E58F4}"/>
               </a:ext>
             </a:extLst>
           </p:cNvPr>
@@ -13372,8 +13372,8 @@
           <p:nvPr/>
         </p:nvGraphicFramePr>
         <p:xfrm>
-          <a:off xmlns:a="http://schemas.openxmlformats.org/drawingml/2006/main" x="530352" y="1536192"/>
-          <a:ext xmlns:a="http://schemas.openxmlformats.org/drawingml/2006/main" cx="11109958" cy="3977637"/>
+          <a:off xmlns:a="http://schemas.openxmlformats.org/drawingml/2006/main" x="530352" y="1719072"/>
+          <a:ext xmlns:a="http://schemas.openxmlformats.org/drawingml/2006/main" cx="11109958" cy="3794757"/>
         </p:xfrm>
         <a:graphic xmlns:a="http://schemas.openxmlformats.org/drawingml/2006/main">
           <a:graphicData uri="http://schemas.openxmlformats.org/drawingml/2006/table">
@@ -13497,7 +13497,7 @@
                   </a:tcPr>
                 </a:tc>
               </a:tr>
-              <a:tr h="707745">
+              <a:tr h="671169">
                 <a:tc>
                   <a:txBody>
                     <a:bodyPr/>
@@ -13607,7 +13607,7 @@
                   </a:tcPr>
                 </a:tc>
               </a:tr>
-              <a:tr h="707745">
+              <a:tr h="671169">
                 <a:tc>
                   <a:txBody>
                     <a:bodyPr/>
@@ -13717,7 +13717,7 @@
                   </a:tcPr>
                 </a:tc>
               </a:tr>
-              <a:tr h="707745">
+              <a:tr h="671169">
                 <a:tc>
                   <a:txBody>
                     <a:bodyPr/>
@@ -13789,7 +13789,7 @@
                           <a:ea typeface="Aptos"/>
                           <a:cs typeface="Aptos"/>
                         </a:rPr>
-                        <a:t>Official figures from 5 countries</a:t>
+                        <a:t>official figures from 6 countries</a:t>
                       </a:r>
                     </a:p>
                   </a:txBody>
@@ -13827,7 +13827,7 @@
                   </a:tcPr>
                 </a:tc>
               </a:tr>
-              <a:tr h="707745">
+              <a:tr h="671169">
                 <a:tc>
                   <a:txBody>
                     <a:bodyPr/>
@@ -13937,7 +13937,7 @@
                   </a:tcPr>
                 </a:tc>
               </a:tr>
-              <a:tr h="707745">
+              <a:tr h="671169">
                 <a:tc>
                   <a:txBody>
                     <a:bodyPr/>
@@ -14056,7 +14056,7 @@
           <p:cNvPr id="9" name="TextBox 8">
             <a:extLst xmlns:a="http://schemas.openxmlformats.org/drawingml/2006/main">
               <a:ext uri="{FF2B5EF4-FFF2-40B4-BE49-F238E27FC236}">
-                <a16:creationId xmlns:a16="http://schemas.microsoft.com/office/drawing/2014/main" id="{5669A97A-CD0A-49AA-883E-F5D6BABC4078}"/>
+                <a16:creationId xmlns:a16="http://schemas.microsoft.com/office/drawing/2014/main" id="{C7F3F397-0DB9-4D36-9B7E-438558D925A3}"/>
               </a:ext>
             </a:extLst>
           </p:cNvPr>
@@ -14101,7 +14101,7 @@
     </p:spTree>
     <p:extLst>
       <p:ext uri="{BB962C8B-B14F-4D97-AF65-F5344CB8AC3E}">
-        <p14:creationId xmlns:p14="http://schemas.microsoft.com/office/powerpoint/2010/main" val="442353219"/>
+        <p14:creationId xmlns:p14="http://schemas.microsoft.com/office/powerpoint/2010/main" val="44100345"/>
       </p:ext>
     </p:extLst>
   </p:cSld>

--- a/site/downloads/pixan-bank-deck-medium-en.pptx
+++ b/site/downloads/pixan-bank-deck-medium-en.pptx
@@ -2,122 +2,27 @@
 <file path=ppt/presentation.xml><?xml version="1.0" encoding="utf-8"?>
 <p:presentation xmlns:p="http://schemas.openxmlformats.org/presentationml/2006/main">
   <p:sldMasterIdLst>
-    <p:sldMasterId xmlns:r="http://schemas.openxmlformats.org/officeDocument/2006/relationships" id="2147483648" r:id="R14ff932c48c8455c"/>
+    <p:sldMasterId xmlns:r="http://schemas.openxmlformats.org/officeDocument/2006/relationships" id="2147483648" r:id="R7526251a27db4f11"/>
   </p:sldMasterIdLst>
   <p:notesMasterIdLst>
-    <p:notesMasterId xmlns:r="http://schemas.openxmlformats.org/officeDocument/2006/relationships" r:id="Rc87697b205d045fb"/>
+    <p:notesMasterId xmlns:r="http://schemas.openxmlformats.org/officeDocument/2006/relationships" r:id="Rba86299c7fa94b0d"/>
   </p:notesMasterIdLst>
   <p:sldIdLst>
-    <p:sldId xmlns:r="http://schemas.openxmlformats.org/officeDocument/2006/relationships" id="256" r:id="R5664879f63164c19"/>
-    <p:sldId xmlns:r="http://schemas.openxmlformats.org/officeDocument/2006/relationships" id="257" r:id="R137852f5c4ab4d4c"/>
-    <p:sldId xmlns:r="http://schemas.openxmlformats.org/officeDocument/2006/relationships" id="258" r:id="R185acb507f5b45bf"/>
-    <p:sldId xmlns:r="http://schemas.openxmlformats.org/officeDocument/2006/relationships" id="259" r:id="Rb6ddd29c99394aa0"/>
-    <p:sldId xmlns:r="http://schemas.openxmlformats.org/officeDocument/2006/relationships" id="260" r:id="R2dcca258a24d4c8f"/>
-    <p:sldId xmlns:r="http://schemas.openxmlformats.org/officeDocument/2006/relationships" id="261" r:id="R57015e848ecd4758"/>
-    <p:sldId xmlns:r="http://schemas.openxmlformats.org/officeDocument/2006/relationships" id="262" r:id="Rc935a09e211742f5"/>
-    <p:sldId xmlns:r="http://schemas.openxmlformats.org/officeDocument/2006/relationships" id="263" r:id="R7d4b1b15abd64b1d"/>
-    <p:sldId xmlns:r="http://schemas.openxmlformats.org/officeDocument/2006/relationships" id="264" r:id="R1040af19bc8d48d6"/>
-    <p:sldId xmlns:r="http://schemas.openxmlformats.org/officeDocument/2006/relationships" id="265" r:id="R56e6a31b70494e6e"/>
-    <p:sldId xmlns:r="http://schemas.openxmlformats.org/officeDocument/2006/relationships" id="266" r:id="R93c92e4543074b94"/>
-    <p:sldId xmlns:r="http://schemas.openxmlformats.org/officeDocument/2006/relationships" id="267" r:id="Rb80424da47454b30"/>
+    <p:sldId xmlns:r="http://schemas.openxmlformats.org/officeDocument/2006/relationships" id="256" r:id="R436cf42aa2bc46f2"/>
+    <p:sldId xmlns:r="http://schemas.openxmlformats.org/officeDocument/2006/relationships" id="257" r:id="R29422b23a91a45ef"/>
+    <p:sldId xmlns:r="http://schemas.openxmlformats.org/officeDocument/2006/relationships" id="258" r:id="Re45f1c4c2ff44156"/>
+    <p:sldId xmlns:r="http://schemas.openxmlformats.org/officeDocument/2006/relationships" id="259" r:id="Rad3725b86d3243fd"/>
+    <p:sldId xmlns:r="http://schemas.openxmlformats.org/officeDocument/2006/relationships" id="260" r:id="R984a7f5960e14c23"/>
+    <p:sldId xmlns:r="http://schemas.openxmlformats.org/officeDocument/2006/relationships" id="261" r:id="R76fee3072efa4ebf"/>
+    <p:sldId xmlns:r="http://schemas.openxmlformats.org/officeDocument/2006/relationships" id="262" r:id="R21a00206b9e14782"/>
+    <p:sldId xmlns:r="http://schemas.openxmlformats.org/officeDocument/2006/relationships" id="263" r:id="R56c8ff23dcca4e3b"/>
+    <p:sldId xmlns:r="http://schemas.openxmlformats.org/officeDocument/2006/relationships" id="264" r:id="R16603375221a4981"/>
+    <p:sldId xmlns:r="http://schemas.openxmlformats.org/officeDocument/2006/relationships" id="265" r:id="R3b23bc1fcd0e402b"/>
+    <p:sldId xmlns:r="http://schemas.openxmlformats.org/officeDocument/2006/relationships" id="266" r:id="R926323f4bee843bc"/>
+    <p:sldId xmlns:r="http://schemas.openxmlformats.org/officeDocument/2006/relationships" id="267" r:id="Rd4377e795e184c48"/>
   </p:sldIdLst>
   <p:sldSz cx="12191999" cy="6858000"/>
   <p:notesSz cx="6858000" cy="9144000"/>
-  <p:defaultTextStyle>
-    <a:defPPr xmlns:a="http://schemas.openxmlformats.org/drawingml/2006/main">
-      <a:defRPr lang="en-US"/>
-    </a:defPPr>
-    <a:lvl1pPr xmlns:a="http://schemas.openxmlformats.org/drawingml/2006/main" marL="0" indent="0" algn="l" defTabSz="914400">
-      <a:defRPr sz="1800" kern="1200">
-        <a:solidFill>
-          <a:schemeClr val="tx1"/>
-        </a:solidFill>
-        <a:latin typeface="+mn-lt"/>
-        <a:ea typeface="+mn-ea"/>
-        <a:cs typeface="+mn-cs"/>
-      </a:defRPr>
-    </a:lvl1pPr>
-    <a:lvl2pPr xmlns:a="http://schemas.openxmlformats.org/drawingml/2006/main" marL="457200" indent="0" algn="l" defTabSz="914400">
-      <a:defRPr sz="1800" kern="1200">
-        <a:solidFill>
-          <a:schemeClr val="tx1"/>
-        </a:solidFill>
-        <a:latin typeface="+mn-lt"/>
-        <a:ea typeface="+mn-ea"/>
-        <a:cs typeface="+mn-cs"/>
-      </a:defRPr>
-    </a:lvl2pPr>
-    <a:lvl3pPr xmlns:a="http://schemas.openxmlformats.org/drawingml/2006/main" marL="914400" indent="0" algn="l" defTabSz="914400">
-      <a:defRPr sz="1800" kern="1200">
-        <a:solidFill>
-          <a:schemeClr val="tx1"/>
-        </a:solidFill>
-        <a:latin typeface="+mn-lt"/>
-        <a:ea typeface="+mn-ea"/>
-        <a:cs typeface="+mn-cs"/>
-      </a:defRPr>
-    </a:lvl3pPr>
-    <a:lvl4pPr xmlns:a="http://schemas.openxmlformats.org/drawingml/2006/main" marL="1371600" indent="0" algn="l" defTabSz="914400">
-      <a:defRPr sz="1800" kern="1200">
-        <a:solidFill>
-          <a:schemeClr val="tx1"/>
-        </a:solidFill>
-        <a:latin typeface="+mn-lt"/>
-        <a:ea typeface="+mn-ea"/>
-        <a:cs typeface="+mn-cs"/>
-      </a:defRPr>
-    </a:lvl4pPr>
-    <a:lvl5pPr xmlns:a="http://schemas.openxmlformats.org/drawingml/2006/main" marL="1828800" indent="0" algn="l" defTabSz="914400">
-      <a:defRPr sz="1800" kern="1200">
-        <a:solidFill>
-          <a:schemeClr val="tx1"/>
-        </a:solidFill>
-        <a:latin typeface="+mn-lt"/>
-        <a:ea typeface="+mn-ea"/>
-        <a:cs typeface="+mn-cs"/>
-      </a:defRPr>
-    </a:lvl5pPr>
-    <a:lvl6pPr xmlns:a="http://schemas.openxmlformats.org/drawingml/2006/main" marL="2286000" indent="0" algn="l" defTabSz="914400">
-      <a:defRPr sz="1800" kern="1200">
-        <a:solidFill>
-          <a:schemeClr val="tx1"/>
-        </a:solidFill>
-        <a:latin typeface="+mn-lt"/>
-        <a:ea typeface="+mn-ea"/>
-        <a:cs typeface="+mn-cs"/>
-      </a:defRPr>
-    </a:lvl6pPr>
-    <a:lvl7pPr xmlns:a="http://schemas.openxmlformats.org/drawingml/2006/main" marL="2743200" indent="0" algn="l" defTabSz="914400">
-      <a:defRPr sz="1800" kern="1200">
-        <a:solidFill>
-          <a:schemeClr val="tx1"/>
-        </a:solidFill>
-        <a:latin typeface="+mn-lt"/>
-        <a:ea typeface="+mn-ea"/>
-        <a:cs typeface="+mn-cs"/>
-      </a:defRPr>
-    </a:lvl7pPr>
-    <a:lvl8pPr xmlns:a="http://schemas.openxmlformats.org/drawingml/2006/main" marL="3200400" indent="0" algn="l" defTabSz="914400">
-      <a:defRPr sz="1800" kern="1200">
-        <a:solidFill>
-          <a:schemeClr val="tx1"/>
-        </a:solidFill>
-        <a:latin typeface="+mn-lt"/>
-        <a:ea typeface="+mn-ea"/>
-        <a:cs typeface="+mn-cs"/>
-      </a:defRPr>
-    </a:lvl8pPr>
-    <a:lvl9pPr xmlns:a="http://schemas.openxmlformats.org/drawingml/2006/main" marL="3657600" indent="0" algn="l" defTabSz="914400">
-      <a:defRPr sz="1800" kern="1200">
-        <a:solidFill>
-          <a:schemeClr val="tx1"/>
-        </a:solidFill>
-        <a:latin typeface="+mn-lt"/>
-        <a:ea typeface="+mn-ea"/>
-        <a:cs typeface="+mn-cs"/>
-      </a:defRPr>
-    </a:lvl9pPr>
-  </p:defaultTextStyle>
 </p:presentation>
 </file>
 
@@ -569,7 +474,96 @@
         <p:txBody>
           <a:bodyPr xmlns:a="http://schemas.openxmlformats.org/drawingml/2006/main"/>
           <a:lstStyle xmlns:a="http://schemas.openxmlformats.org/drawingml/2006/main"/>
-          <a:p xmlns:a="http://schemas.openxmlformats.org/drawingml/2006/main"/>
+          <a:p xmlns:a="http://schemas.openxmlformats.org/drawingml/2006/main">
+            <a:r>
+              <a:t>[Sources]</a:t>
+            </a:r>
+          </a:p>
+          <a:p xmlns:a="http://schemas.openxmlformats.org/drawingml/2006/main">
+            <a:r>
+              <a:t>- https://register.epo.org/application?number=EP14836345&amp;lng=en&amp;tab=main</a:t>
+            </a:r>
+          </a:p>
+          <a:p xmlns:a="http://schemas.openxmlformats.org/drawingml/2006/main">
+            <a:r>
+              <a:t>- https://data.epo.org/publication-server/rest/v1.2/patents/EP3032975NWB2/document.pdf</a:t>
+            </a:r>
+          </a:p>
+          <a:p xmlns:a="http://schemas.openxmlformats.org/drawingml/2006/main">
+            <a:r>
+              <a:t>- https://www.rechtsprechung-im-internet.de/jportal/?quelle=jlink&amp;docid=JURE269032275&amp;psml=bsjrsprod.psml</a:t>
+            </a:r>
+          </a:p>
+          <a:p xmlns:a="http://schemas.openxmlformats.org/drawingml/2006/main">
+            <a:r>
+              <a:t>- https://www.gesetze-bayern.de/Content/Document/Y-300-Z-BECKRS-B-2026-N-14206</a:t>
+            </a:r>
+          </a:p>
+          <a:p xmlns:a="http://schemas.openxmlformats.org/drawingml/2006/main">
+            <a:r>
+              <a:t>- https://www.health.govt.nz/regulation-legislation/vaping-herbal-smoking-and-smokeless-tobacco/requirements/complete-a-notifiable-product-annual-return/annual-returns-2024</a:t>
+            </a:r>
+          </a:p>
+          <a:p xmlns:a="http://schemas.openxmlformats.org/drawingml/2006/main">
+            <a:r>
+              <a:t>- https://www.ftc.gov/reports/e-cigarette-report-2021</a:t>
+            </a:r>
+          </a:p>
+          <a:p xmlns:a="http://schemas.openxmlformats.org/drawingml/2006/main">
+            <a:r>
+              <a:t>- https://www.wipo.int/en/web/ip-financing</a:t>
+            </a:r>
+          </a:p>
+          <a:p xmlns:a="http://schemas.openxmlformats.org/drawingml/2006/main">
+            <a:r>
+              <a:t>- https://data.ecb.europa.eu/data/datasets/exr/data-information</a:t>
+            </a:r>
+          </a:p>
+          <a:p xmlns:a="http://schemas.openxmlformats.org/drawingml/2006/main">
+            <a:r>
+              <a:t>- https://www.ecb.europa.eu/stats/policy_and_exchange_rates/euro_reference_exchange_rates/html/index.en.html</a:t>
+            </a:r>
+          </a:p>
+          <a:p xmlns:a="http://schemas.openxmlformats.org/drawingml/2006/main">
+            <a:r>
+              <a:t>- https://data-api.ecb.europa.eu/service/data/EXR/A.NZD.EUR.SP00.A?startPeriod=2024&amp;endPeriod=2024&amp;format=csvdata</a:t>
+            </a:r>
+          </a:p>
+          <a:p xmlns:a="http://schemas.openxmlformats.org/drawingml/2006/main">
+            <a:r>
+              <a:t>- https://data-api.ecb.europa.eu/service/data/EXR/A.USD.EUR.SP00.A?startPeriod=2021&amp;endPeriod=2021&amp;format=csvdata</a:t>
+            </a:r>
+          </a:p>
+          <a:p xmlns:a="http://schemas.openxmlformats.org/drawingml/2006/main">
+            <a:r>
+              <a:t/>
+            </a:r>
+          </a:p>
+          <a:p xmlns:a="http://schemas.openxmlformats.org/drawingml/2006/main">
+            <a:r>
+              <a:t>[FX methodology]</a:t>
+            </a:r>
+          </a:p>
+          <a:p xmlns:a="http://schemas.openxmlformats.org/drawingml/2006/main">
+            <a:r>
+              <a:t>- EUR equivalent = original monetary amount divided by the ECB annual-average reference rate expressed as currency units per euro.</a:t>
+            </a:r>
+          </a:p>
+          <a:p xmlns:a="http://schemas.openxmlformats.org/drawingml/2006/main">
+            <a:r>
+              <a:t>- The source value and source currency remain primary. The EUR figure is a secondary analytical equivalent, not an observed transaction value or a current spot conversion.</a:t>
+            </a:r>
+          </a:p>
+          <a:p xmlns:a="http://schemas.openxmlformats.org/drawingml/2006/main">
+            <a:r>
+              <a:t>- NZD 2024: ECB-EXR-A-NZD-EUR-SP00-A-2024 · 1.788048828125 currency units per EUR</a:t>
+            </a:r>
+          </a:p>
+          <a:p xmlns:a="http://schemas.openxmlformats.org/drawingml/2006/main">
+            <a:r>
+              <a:t>- USD 2021: ECB-EXR-A-USD-EUR-SP00-A-2021 · 1.1827403100775 currency units per EUR</a:t>
+            </a:r>
+          </a:p>
         </p:txBody>
       </p:sp>
       <p:sp>
@@ -635,7 +629,96 @@
         <p:txBody>
           <a:bodyPr xmlns:a="http://schemas.openxmlformats.org/drawingml/2006/main"/>
           <a:lstStyle xmlns:a="http://schemas.openxmlformats.org/drawingml/2006/main"/>
-          <a:p xmlns:a="http://schemas.openxmlformats.org/drawingml/2006/main"/>
+          <a:p xmlns:a="http://schemas.openxmlformats.org/drawingml/2006/main">
+            <a:r>
+              <a:t>[Sources]</a:t>
+            </a:r>
+          </a:p>
+          <a:p xmlns:a="http://schemas.openxmlformats.org/drawingml/2006/main">
+            <a:r>
+              <a:t>- https://register.epo.org/application?number=EP14836345&amp;lng=en&amp;tab=main</a:t>
+            </a:r>
+          </a:p>
+          <a:p xmlns:a="http://schemas.openxmlformats.org/drawingml/2006/main">
+            <a:r>
+              <a:t>- https://data.epo.org/publication-server/rest/v1.2/patents/EP3032975NWB2/document.pdf</a:t>
+            </a:r>
+          </a:p>
+          <a:p xmlns:a="http://schemas.openxmlformats.org/drawingml/2006/main">
+            <a:r>
+              <a:t>- https://www.rechtsprechung-im-internet.de/jportal/?quelle=jlink&amp;docid=JURE269032275&amp;psml=bsjrsprod.psml</a:t>
+            </a:r>
+          </a:p>
+          <a:p xmlns:a="http://schemas.openxmlformats.org/drawingml/2006/main">
+            <a:r>
+              <a:t>- https://www.gesetze-bayern.de/Content/Document/Y-300-Z-BECKRS-B-2026-N-14206</a:t>
+            </a:r>
+          </a:p>
+          <a:p xmlns:a="http://schemas.openxmlformats.org/drawingml/2006/main">
+            <a:r>
+              <a:t>- https://www.health.govt.nz/regulation-legislation/vaping-herbal-smoking-and-smokeless-tobacco/requirements/complete-a-notifiable-product-annual-return/annual-returns-2024</a:t>
+            </a:r>
+          </a:p>
+          <a:p xmlns:a="http://schemas.openxmlformats.org/drawingml/2006/main">
+            <a:r>
+              <a:t>- https://www.ftc.gov/reports/e-cigarette-report-2021</a:t>
+            </a:r>
+          </a:p>
+          <a:p xmlns:a="http://schemas.openxmlformats.org/drawingml/2006/main">
+            <a:r>
+              <a:t>- https://www.wipo.int/en/web/ip-financing</a:t>
+            </a:r>
+          </a:p>
+          <a:p xmlns:a="http://schemas.openxmlformats.org/drawingml/2006/main">
+            <a:r>
+              <a:t>- https://data.ecb.europa.eu/data/datasets/exr/data-information</a:t>
+            </a:r>
+          </a:p>
+          <a:p xmlns:a="http://schemas.openxmlformats.org/drawingml/2006/main">
+            <a:r>
+              <a:t>- https://www.ecb.europa.eu/stats/policy_and_exchange_rates/euro_reference_exchange_rates/html/index.en.html</a:t>
+            </a:r>
+          </a:p>
+          <a:p xmlns:a="http://schemas.openxmlformats.org/drawingml/2006/main">
+            <a:r>
+              <a:t>- https://data-api.ecb.europa.eu/service/data/EXR/A.NZD.EUR.SP00.A?startPeriod=2024&amp;endPeriod=2024&amp;format=csvdata</a:t>
+            </a:r>
+          </a:p>
+          <a:p xmlns:a="http://schemas.openxmlformats.org/drawingml/2006/main">
+            <a:r>
+              <a:t>- https://data-api.ecb.europa.eu/service/data/EXR/A.USD.EUR.SP00.A?startPeriod=2021&amp;endPeriod=2021&amp;format=csvdata</a:t>
+            </a:r>
+          </a:p>
+          <a:p xmlns:a="http://schemas.openxmlformats.org/drawingml/2006/main">
+            <a:r>
+              <a:t/>
+            </a:r>
+          </a:p>
+          <a:p xmlns:a="http://schemas.openxmlformats.org/drawingml/2006/main">
+            <a:r>
+              <a:t>[FX methodology]</a:t>
+            </a:r>
+          </a:p>
+          <a:p xmlns:a="http://schemas.openxmlformats.org/drawingml/2006/main">
+            <a:r>
+              <a:t>- EUR equivalent = original monetary amount divided by the ECB annual-average reference rate expressed as currency units per euro.</a:t>
+            </a:r>
+          </a:p>
+          <a:p xmlns:a="http://schemas.openxmlformats.org/drawingml/2006/main">
+            <a:r>
+              <a:t>- The source value and source currency remain primary. The EUR figure is a secondary analytical equivalent, not an observed transaction value or a current spot conversion.</a:t>
+            </a:r>
+          </a:p>
+          <a:p xmlns:a="http://schemas.openxmlformats.org/drawingml/2006/main">
+            <a:r>
+              <a:t>- NZD 2024: ECB-EXR-A-NZD-EUR-SP00-A-2024 · 1.788048828125 currency units per EUR</a:t>
+            </a:r>
+          </a:p>
+          <a:p xmlns:a="http://schemas.openxmlformats.org/drawingml/2006/main">
+            <a:r>
+              <a:t>- USD 2021: ECB-EXR-A-USD-EUR-SP00-A-2021 · 1.1827403100775 currency units per EUR</a:t>
+            </a:r>
+          </a:p>
         </p:txBody>
       </p:sp>
       <p:sp>
@@ -701,7 +784,96 @@
         <p:txBody>
           <a:bodyPr xmlns:a="http://schemas.openxmlformats.org/drawingml/2006/main"/>
           <a:lstStyle xmlns:a="http://schemas.openxmlformats.org/drawingml/2006/main"/>
-          <a:p xmlns:a="http://schemas.openxmlformats.org/drawingml/2006/main"/>
+          <a:p xmlns:a="http://schemas.openxmlformats.org/drawingml/2006/main">
+            <a:r>
+              <a:t>[Sources]</a:t>
+            </a:r>
+          </a:p>
+          <a:p xmlns:a="http://schemas.openxmlformats.org/drawingml/2006/main">
+            <a:r>
+              <a:t>- https://register.epo.org/application?number=EP14836345&amp;lng=en&amp;tab=main</a:t>
+            </a:r>
+          </a:p>
+          <a:p xmlns:a="http://schemas.openxmlformats.org/drawingml/2006/main">
+            <a:r>
+              <a:t>- https://data.epo.org/publication-server/rest/v1.2/patents/EP3032975NWB2/document.pdf</a:t>
+            </a:r>
+          </a:p>
+          <a:p xmlns:a="http://schemas.openxmlformats.org/drawingml/2006/main">
+            <a:r>
+              <a:t>- https://www.rechtsprechung-im-internet.de/jportal/?quelle=jlink&amp;docid=JURE269032275&amp;psml=bsjrsprod.psml</a:t>
+            </a:r>
+          </a:p>
+          <a:p xmlns:a="http://schemas.openxmlformats.org/drawingml/2006/main">
+            <a:r>
+              <a:t>- https://www.gesetze-bayern.de/Content/Document/Y-300-Z-BECKRS-B-2026-N-14206</a:t>
+            </a:r>
+          </a:p>
+          <a:p xmlns:a="http://schemas.openxmlformats.org/drawingml/2006/main">
+            <a:r>
+              <a:t>- https://www.health.govt.nz/regulation-legislation/vaping-herbal-smoking-and-smokeless-tobacco/requirements/complete-a-notifiable-product-annual-return/annual-returns-2024</a:t>
+            </a:r>
+          </a:p>
+          <a:p xmlns:a="http://schemas.openxmlformats.org/drawingml/2006/main">
+            <a:r>
+              <a:t>- https://www.ftc.gov/reports/e-cigarette-report-2021</a:t>
+            </a:r>
+          </a:p>
+          <a:p xmlns:a="http://schemas.openxmlformats.org/drawingml/2006/main">
+            <a:r>
+              <a:t>- https://www.wipo.int/en/web/ip-financing</a:t>
+            </a:r>
+          </a:p>
+          <a:p xmlns:a="http://schemas.openxmlformats.org/drawingml/2006/main">
+            <a:r>
+              <a:t>- https://data.ecb.europa.eu/data/datasets/exr/data-information</a:t>
+            </a:r>
+          </a:p>
+          <a:p xmlns:a="http://schemas.openxmlformats.org/drawingml/2006/main">
+            <a:r>
+              <a:t>- https://www.ecb.europa.eu/stats/policy_and_exchange_rates/euro_reference_exchange_rates/html/index.en.html</a:t>
+            </a:r>
+          </a:p>
+          <a:p xmlns:a="http://schemas.openxmlformats.org/drawingml/2006/main">
+            <a:r>
+              <a:t>- https://data-api.ecb.europa.eu/service/data/EXR/A.NZD.EUR.SP00.A?startPeriod=2024&amp;endPeriod=2024&amp;format=csvdata</a:t>
+            </a:r>
+          </a:p>
+          <a:p xmlns:a="http://schemas.openxmlformats.org/drawingml/2006/main">
+            <a:r>
+              <a:t>- https://data-api.ecb.europa.eu/service/data/EXR/A.USD.EUR.SP00.A?startPeriod=2021&amp;endPeriod=2021&amp;format=csvdata</a:t>
+            </a:r>
+          </a:p>
+          <a:p xmlns:a="http://schemas.openxmlformats.org/drawingml/2006/main">
+            <a:r>
+              <a:t/>
+            </a:r>
+          </a:p>
+          <a:p xmlns:a="http://schemas.openxmlformats.org/drawingml/2006/main">
+            <a:r>
+              <a:t>[FX methodology]</a:t>
+            </a:r>
+          </a:p>
+          <a:p xmlns:a="http://schemas.openxmlformats.org/drawingml/2006/main">
+            <a:r>
+              <a:t>- EUR equivalent = original monetary amount divided by the ECB annual-average reference rate expressed as currency units per euro.</a:t>
+            </a:r>
+          </a:p>
+          <a:p xmlns:a="http://schemas.openxmlformats.org/drawingml/2006/main">
+            <a:r>
+              <a:t>- The source value and source currency remain primary. The EUR figure is a secondary analytical equivalent, not an observed transaction value or a current spot conversion.</a:t>
+            </a:r>
+          </a:p>
+          <a:p xmlns:a="http://schemas.openxmlformats.org/drawingml/2006/main">
+            <a:r>
+              <a:t>- NZD 2024: ECB-EXR-A-NZD-EUR-SP00-A-2024 · 1.788048828125 currency units per EUR</a:t>
+            </a:r>
+          </a:p>
+          <a:p xmlns:a="http://schemas.openxmlformats.org/drawingml/2006/main">
+            <a:r>
+              <a:t>- USD 2021: ECB-EXR-A-USD-EUR-SP00-A-2021 · 1.1827403100775 currency units per EUR</a:t>
+            </a:r>
+          </a:p>
         </p:txBody>
       </p:sp>
       <p:sp>
@@ -767,7 +939,96 @@
         <p:txBody>
           <a:bodyPr xmlns:a="http://schemas.openxmlformats.org/drawingml/2006/main"/>
           <a:lstStyle xmlns:a="http://schemas.openxmlformats.org/drawingml/2006/main"/>
-          <a:p xmlns:a="http://schemas.openxmlformats.org/drawingml/2006/main"/>
+          <a:p xmlns:a="http://schemas.openxmlformats.org/drawingml/2006/main">
+            <a:r>
+              <a:t>[Sources]</a:t>
+            </a:r>
+          </a:p>
+          <a:p xmlns:a="http://schemas.openxmlformats.org/drawingml/2006/main">
+            <a:r>
+              <a:t>- https://register.epo.org/application?number=EP14836345&amp;lng=en&amp;tab=main</a:t>
+            </a:r>
+          </a:p>
+          <a:p xmlns:a="http://schemas.openxmlformats.org/drawingml/2006/main">
+            <a:r>
+              <a:t>- https://data.epo.org/publication-server/rest/v1.2/patents/EP3032975NWB2/document.pdf</a:t>
+            </a:r>
+          </a:p>
+          <a:p xmlns:a="http://schemas.openxmlformats.org/drawingml/2006/main">
+            <a:r>
+              <a:t>- https://www.rechtsprechung-im-internet.de/jportal/?quelle=jlink&amp;docid=JURE269032275&amp;psml=bsjrsprod.psml</a:t>
+            </a:r>
+          </a:p>
+          <a:p xmlns:a="http://schemas.openxmlformats.org/drawingml/2006/main">
+            <a:r>
+              <a:t>- https://www.gesetze-bayern.de/Content/Document/Y-300-Z-BECKRS-B-2026-N-14206</a:t>
+            </a:r>
+          </a:p>
+          <a:p xmlns:a="http://schemas.openxmlformats.org/drawingml/2006/main">
+            <a:r>
+              <a:t>- https://www.health.govt.nz/regulation-legislation/vaping-herbal-smoking-and-smokeless-tobacco/requirements/complete-a-notifiable-product-annual-return/annual-returns-2024</a:t>
+            </a:r>
+          </a:p>
+          <a:p xmlns:a="http://schemas.openxmlformats.org/drawingml/2006/main">
+            <a:r>
+              <a:t>- https://www.ftc.gov/reports/e-cigarette-report-2021</a:t>
+            </a:r>
+          </a:p>
+          <a:p xmlns:a="http://schemas.openxmlformats.org/drawingml/2006/main">
+            <a:r>
+              <a:t>- https://www.wipo.int/en/web/ip-financing</a:t>
+            </a:r>
+          </a:p>
+          <a:p xmlns:a="http://schemas.openxmlformats.org/drawingml/2006/main">
+            <a:r>
+              <a:t>- https://data.ecb.europa.eu/data/datasets/exr/data-information</a:t>
+            </a:r>
+          </a:p>
+          <a:p xmlns:a="http://schemas.openxmlformats.org/drawingml/2006/main">
+            <a:r>
+              <a:t>- https://www.ecb.europa.eu/stats/policy_and_exchange_rates/euro_reference_exchange_rates/html/index.en.html</a:t>
+            </a:r>
+          </a:p>
+          <a:p xmlns:a="http://schemas.openxmlformats.org/drawingml/2006/main">
+            <a:r>
+              <a:t>- https://data-api.ecb.europa.eu/service/data/EXR/A.NZD.EUR.SP00.A?startPeriod=2024&amp;endPeriod=2024&amp;format=csvdata</a:t>
+            </a:r>
+          </a:p>
+          <a:p xmlns:a="http://schemas.openxmlformats.org/drawingml/2006/main">
+            <a:r>
+              <a:t>- https://data-api.ecb.europa.eu/service/data/EXR/A.USD.EUR.SP00.A?startPeriod=2021&amp;endPeriod=2021&amp;format=csvdata</a:t>
+            </a:r>
+          </a:p>
+          <a:p xmlns:a="http://schemas.openxmlformats.org/drawingml/2006/main">
+            <a:r>
+              <a:t/>
+            </a:r>
+          </a:p>
+          <a:p xmlns:a="http://schemas.openxmlformats.org/drawingml/2006/main">
+            <a:r>
+              <a:t>[FX methodology]</a:t>
+            </a:r>
+          </a:p>
+          <a:p xmlns:a="http://schemas.openxmlformats.org/drawingml/2006/main">
+            <a:r>
+              <a:t>- EUR equivalent = original monetary amount divided by the ECB annual-average reference rate expressed as currency units per euro.</a:t>
+            </a:r>
+          </a:p>
+          <a:p xmlns:a="http://schemas.openxmlformats.org/drawingml/2006/main">
+            <a:r>
+              <a:t>- The source value and source currency remain primary. The EUR figure is a secondary analytical equivalent, not an observed transaction value or a current spot conversion.</a:t>
+            </a:r>
+          </a:p>
+          <a:p xmlns:a="http://schemas.openxmlformats.org/drawingml/2006/main">
+            <a:r>
+              <a:t>- NZD 2024: ECB-EXR-A-NZD-EUR-SP00-A-2024 · 1.788048828125 currency units per EUR</a:t>
+            </a:r>
+          </a:p>
+          <a:p xmlns:a="http://schemas.openxmlformats.org/drawingml/2006/main">
+            <a:r>
+              <a:t>- USD 2021: ECB-EXR-A-USD-EUR-SP00-A-2021 · 1.1827403100775 currency units per EUR</a:t>
+            </a:r>
+          </a:p>
         </p:txBody>
       </p:sp>
       <p:sp>
@@ -833,7 +1094,96 @@
         <p:txBody>
           <a:bodyPr xmlns:a="http://schemas.openxmlformats.org/drawingml/2006/main"/>
           <a:lstStyle xmlns:a="http://schemas.openxmlformats.org/drawingml/2006/main"/>
-          <a:p xmlns:a="http://schemas.openxmlformats.org/drawingml/2006/main"/>
+          <a:p xmlns:a="http://schemas.openxmlformats.org/drawingml/2006/main">
+            <a:r>
+              <a:t>[Sources]</a:t>
+            </a:r>
+          </a:p>
+          <a:p xmlns:a="http://schemas.openxmlformats.org/drawingml/2006/main">
+            <a:r>
+              <a:t>- https://register.epo.org/application?number=EP14836345&amp;lng=en&amp;tab=main</a:t>
+            </a:r>
+          </a:p>
+          <a:p xmlns:a="http://schemas.openxmlformats.org/drawingml/2006/main">
+            <a:r>
+              <a:t>- https://data.epo.org/publication-server/rest/v1.2/patents/EP3032975NWB2/document.pdf</a:t>
+            </a:r>
+          </a:p>
+          <a:p xmlns:a="http://schemas.openxmlformats.org/drawingml/2006/main">
+            <a:r>
+              <a:t>- https://www.rechtsprechung-im-internet.de/jportal/?quelle=jlink&amp;docid=JURE269032275&amp;psml=bsjrsprod.psml</a:t>
+            </a:r>
+          </a:p>
+          <a:p xmlns:a="http://schemas.openxmlformats.org/drawingml/2006/main">
+            <a:r>
+              <a:t>- https://www.gesetze-bayern.de/Content/Document/Y-300-Z-BECKRS-B-2026-N-14206</a:t>
+            </a:r>
+          </a:p>
+          <a:p xmlns:a="http://schemas.openxmlformats.org/drawingml/2006/main">
+            <a:r>
+              <a:t>- https://www.health.govt.nz/regulation-legislation/vaping-herbal-smoking-and-smokeless-tobacco/requirements/complete-a-notifiable-product-annual-return/annual-returns-2024</a:t>
+            </a:r>
+          </a:p>
+          <a:p xmlns:a="http://schemas.openxmlformats.org/drawingml/2006/main">
+            <a:r>
+              <a:t>- https://www.ftc.gov/reports/e-cigarette-report-2021</a:t>
+            </a:r>
+          </a:p>
+          <a:p xmlns:a="http://schemas.openxmlformats.org/drawingml/2006/main">
+            <a:r>
+              <a:t>- https://www.wipo.int/en/web/ip-financing</a:t>
+            </a:r>
+          </a:p>
+          <a:p xmlns:a="http://schemas.openxmlformats.org/drawingml/2006/main">
+            <a:r>
+              <a:t>- https://data.ecb.europa.eu/data/datasets/exr/data-information</a:t>
+            </a:r>
+          </a:p>
+          <a:p xmlns:a="http://schemas.openxmlformats.org/drawingml/2006/main">
+            <a:r>
+              <a:t>- https://www.ecb.europa.eu/stats/policy_and_exchange_rates/euro_reference_exchange_rates/html/index.en.html</a:t>
+            </a:r>
+          </a:p>
+          <a:p xmlns:a="http://schemas.openxmlformats.org/drawingml/2006/main">
+            <a:r>
+              <a:t>- https://data-api.ecb.europa.eu/service/data/EXR/A.NZD.EUR.SP00.A?startPeriod=2024&amp;endPeriod=2024&amp;format=csvdata</a:t>
+            </a:r>
+          </a:p>
+          <a:p xmlns:a="http://schemas.openxmlformats.org/drawingml/2006/main">
+            <a:r>
+              <a:t>- https://data-api.ecb.europa.eu/service/data/EXR/A.USD.EUR.SP00.A?startPeriod=2021&amp;endPeriod=2021&amp;format=csvdata</a:t>
+            </a:r>
+          </a:p>
+          <a:p xmlns:a="http://schemas.openxmlformats.org/drawingml/2006/main">
+            <a:r>
+              <a:t/>
+            </a:r>
+          </a:p>
+          <a:p xmlns:a="http://schemas.openxmlformats.org/drawingml/2006/main">
+            <a:r>
+              <a:t>[FX methodology]</a:t>
+            </a:r>
+          </a:p>
+          <a:p xmlns:a="http://schemas.openxmlformats.org/drawingml/2006/main">
+            <a:r>
+              <a:t>- EUR equivalent = original monetary amount divided by the ECB annual-average reference rate expressed as currency units per euro.</a:t>
+            </a:r>
+          </a:p>
+          <a:p xmlns:a="http://schemas.openxmlformats.org/drawingml/2006/main">
+            <a:r>
+              <a:t>- The source value and source currency remain primary. The EUR figure is a secondary analytical equivalent, not an observed transaction value or a current spot conversion.</a:t>
+            </a:r>
+          </a:p>
+          <a:p xmlns:a="http://schemas.openxmlformats.org/drawingml/2006/main">
+            <a:r>
+              <a:t>- NZD 2024: ECB-EXR-A-NZD-EUR-SP00-A-2024 · 1.788048828125 currency units per EUR</a:t>
+            </a:r>
+          </a:p>
+          <a:p xmlns:a="http://schemas.openxmlformats.org/drawingml/2006/main">
+            <a:r>
+              <a:t>- USD 2021: ECB-EXR-A-USD-EUR-SP00-A-2021 · 1.1827403100775 currency units per EUR</a:t>
+            </a:r>
+          </a:p>
         </p:txBody>
       </p:sp>
       <p:sp>
@@ -899,7 +1249,96 @@
         <p:txBody>
           <a:bodyPr xmlns:a="http://schemas.openxmlformats.org/drawingml/2006/main"/>
           <a:lstStyle xmlns:a="http://schemas.openxmlformats.org/drawingml/2006/main"/>
-          <a:p xmlns:a="http://schemas.openxmlformats.org/drawingml/2006/main"/>
+          <a:p xmlns:a="http://schemas.openxmlformats.org/drawingml/2006/main">
+            <a:r>
+              <a:t>[Sources]</a:t>
+            </a:r>
+          </a:p>
+          <a:p xmlns:a="http://schemas.openxmlformats.org/drawingml/2006/main">
+            <a:r>
+              <a:t>- https://register.epo.org/application?number=EP14836345&amp;lng=en&amp;tab=main</a:t>
+            </a:r>
+          </a:p>
+          <a:p xmlns:a="http://schemas.openxmlformats.org/drawingml/2006/main">
+            <a:r>
+              <a:t>- https://data.epo.org/publication-server/rest/v1.2/patents/EP3032975NWB2/document.pdf</a:t>
+            </a:r>
+          </a:p>
+          <a:p xmlns:a="http://schemas.openxmlformats.org/drawingml/2006/main">
+            <a:r>
+              <a:t>- https://www.rechtsprechung-im-internet.de/jportal/?quelle=jlink&amp;docid=JURE269032275&amp;psml=bsjrsprod.psml</a:t>
+            </a:r>
+          </a:p>
+          <a:p xmlns:a="http://schemas.openxmlformats.org/drawingml/2006/main">
+            <a:r>
+              <a:t>- https://www.gesetze-bayern.de/Content/Document/Y-300-Z-BECKRS-B-2026-N-14206</a:t>
+            </a:r>
+          </a:p>
+          <a:p xmlns:a="http://schemas.openxmlformats.org/drawingml/2006/main">
+            <a:r>
+              <a:t>- https://www.health.govt.nz/regulation-legislation/vaping-herbal-smoking-and-smokeless-tobacco/requirements/complete-a-notifiable-product-annual-return/annual-returns-2024</a:t>
+            </a:r>
+          </a:p>
+          <a:p xmlns:a="http://schemas.openxmlformats.org/drawingml/2006/main">
+            <a:r>
+              <a:t>- https://www.ftc.gov/reports/e-cigarette-report-2021</a:t>
+            </a:r>
+          </a:p>
+          <a:p xmlns:a="http://schemas.openxmlformats.org/drawingml/2006/main">
+            <a:r>
+              <a:t>- https://www.wipo.int/en/web/ip-financing</a:t>
+            </a:r>
+          </a:p>
+          <a:p xmlns:a="http://schemas.openxmlformats.org/drawingml/2006/main">
+            <a:r>
+              <a:t>- https://data.ecb.europa.eu/data/datasets/exr/data-information</a:t>
+            </a:r>
+          </a:p>
+          <a:p xmlns:a="http://schemas.openxmlformats.org/drawingml/2006/main">
+            <a:r>
+              <a:t>- https://www.ecb.europa.eu/stats/policy_and_exchange_rates/euro_reference_exchange_rates/html/index.en.html</a:t>
+            </a:r>
+          </a:p>
+          <a:p xmlns:a="http://schemas.openxmlformats.org/drawingml/2006/main">
+            <a:r>
+              <a:t>- https://data-api.ecb.europa.eu/service/data/EXR/A.NZD.EUR.SP00.A?startPeriod=2024&amp;endPeriod=2024&amp;format=csvdata</a:t>
+            </a:r>
+          </a:p>
+          <a:p xmlns:a="http://schemas.openxmlformats.org/drawingml/2006/main">
+            <a:r>
+              <a:t>- https://data-api.ecb.europa.eu/service/data/EXR/A.USD.EUR.SP00.A?startPeriod=2021&amp;endPeriod=2021&amp;format=csvdata</a:t>
+            </a:r>
+          </a:p>
+          <a:p xmlns:a="http://schemas.openxmlformats.org/drawingml/2006/main">
+            <a:r>
+              <a:t/>
+            </a:r>
+          </a:p>
+          <a:p xmlns:a="http://schemas.openxmlformats.org/drawingml/2006/main">
+            <a:r>
+              <a:t>[FX methodology]</a:t>
+            </a:r>
+          </a:p>
+          <a:p xmlns:a="http://schemas.openxmlformats.org/drawingml/2006/main">
+            <a:r>
+              <a:t>- EUR equivalent = original monetary amount divided by the ECB annual-average reference rate expressed as currency units per euro.</a:t>
+            </a:r>
+          </a:p>
+          <a:p xmlns:a="http://schemas.openxmlformats.org/drawingml/2006/main">
+            <a:r>
+              <a:t>- The source value and source currency remain primary. The EUR figure is a secondary analytical equivalent, not an observed transaction value or a current spot conversion.</a:t>
+            </a:r>
+          </a:p>
+          <a:p xmlns:a="http://schemas.openxmlformats.org/drawingml/2006/main">
+            <a:r>
+              <a:t>- NZD 2024: ECB-EXR-A-NZD-EUR-SP00-A-2024 · 1.788048828125 currency units per EUR</a:t>
+            </a:r>
+          </a:p>
+          <a:p xmlns:a="http://schemas.openxmlformats.org/drawingml/2006/main">
+            <a:r>
+              <a:t>- USD 2021: ECB-EXR-A-USD-EUR-SP00-A-2021 · 1.1827403100775 currency units per EUR</a:t>
+            </a:r>
+          </a:p>
         </p:txBody>
       </p:sp>
       <p:sp>
@@ -965,7 +1404,96 @@
         <p:txBody>
           <a:bodyPr xmlns:a="http://schemas.openxmlformats.org/drawingml/2006/main"/>
           <a:lstStyle xmlns:a="http://schemas.openxmlformats.org/drawingml/2006/main"/>
-          <a:p xmlns:a="http://schemas.openxmlformats.org/drawingml/2006/main"/>
+          <a:p xmlns:a="http://schemas.openxmlformats.org/drawingml/2006/main">
+            <a:r>
+              <a:t>[Sources]</a:t>
+            </a:r>
+          </a:p>
+          <a:p xmlns:a="http://schemas.openxmlformats.org/drawingml/2006/main">
+            <a:r>
+              <a:t>- https://register.epo.org/application?number=EP14836345&amp;lng=en&amp;tab=main</a:t>
+            </a:r>
+          </a:p>
+          <a:p xmlns:a="http://schemas.openxmlformats.org/drawingml/2006/main">
+            <a:r>
+              <a:t>- https://data.epo.org/publication-server/rest/v1.2/patents/EP3032975NWB2/document.pdf</a:t>
+            </a:r>
+          </a:p>
+          <a:p xmlns:a="http://schemas.openxmlformats.org/drawingml/2006/main">
+            <a:r>
+              <a:t>- https://www.rechtsprechung-im-internet.de/jportal/?quelle=jlink&amp;docid=JURE269032275&amp;psml=bsjrsprod.psml</a:t>
+            </a:r>
+          </a:p>
+          <a:p xmlns:a="http://schemas.openxmlformats.org/drawingml/2006/main">
+            <a:r>
+              <a:t>- https://www.gesetze-bayern.de/Content/Document/Y-300-Z-BECKRS-B-2026-N-14206</a:t>
+            </a:r>
+          </a:p>
+          <a:p xmlns:a="http://schemas.openxmlformats.org/drawingml/2006/main">
+            <a:r>
+              <a:t>- https://www.health.govt.nz/regulation-legislation/vaping-herbal-smoking-and-smokeless-tobacco/requirements/complete-a-notifiable-product-annual-return/annual-returns-2024</a:t>
+            </a:r>
+          </a:p>
+          <a:p xmlns:a="http://schemas.openxmlformats.org/drawingml/2006/main">
+            <a:r>
+              <a:t>- https://www.ftc.gov/reports/e-cigarette-report-2021</a:t>
+            </a:r>
+          </a:p>
+          <a:p xmlns:a="http://schemas.openxmlformats.org/drawingml/2006/main">
+            <a:r>
+              <a:t>- https://www.wipo.int/en/web/ip-financing</a:t>
+            </a:r>
+          </a:p>
+          <a:p xmlns:a="http://schemas.openxmlformats.org/drawingml/2006/main">
+            <a:r>
+              <a:t>- https://data.ecb.europa.eu/data/datasets/exr/data-information</a:t>
+            </a:r>
+          </a:p>
+          <a:p xmlns:a="http://schemas.openxmlformats.org/drawingml/2006/main">
+            <a:r>
+              <a:t>- https://www.ecb.europa.eu/stats/policy_and_exchange_rates/euro_reference_exchange_rates/html/index.en.html</a:t>
+            </a:r>
+          </a:p>
+          <a:p xmlns:a="http://schemas.openxmlformats.org/drawingml/2006/main">
+            <a:r>
+              <a:t>- https://data-api.ecb.europa.eu/service/data/EXR/A.NZD.EUR.SP00.A?startPeriod=2024&amp;endPeriod=2024&amp;format=csvdata</a:t>
+            </a:r>
+          </a:p>
+          <a:p xmlns:a="http://schemas.openxmlformats.org/drawingml/2006/main">
+            <a:r>
+              <a:t>- https://data-api.ecb.europa.eu/service/data/EXR/A.USD.EUR.SP00.A?startPeriod=2021&amp;endPeriod=2021&amp;format=csvdata</a:t>
+            </a:r>
+          </a:p>
+          <a:p xmlns:a="http://schemas.openxmlformats.org/drawingml/2006/main">
+            <a:r>
+              <a:t/>
+            </a:r>
+          </a:p>
+          <a:p xmlns:a="http://schemas.openxmlformats.org/drawingml/2006/main">
+            <a:r>
+              <a:t>[FX methodology]</a:t>
+            </a:r>
+          </a:p>
+          <a:p xmlns:a="http://schemas.openxmlformats.org/drawingml/2006/main">
+            <a:r>
+              <a:t>- EUR equivalent = original monetary amount divided by the ECB annual-average reference rate expressed as currency units per euro.</a:t>
+            </a:r>
+          </a:p>
+          <a:p xmlns:a="http://schemas.openxmlformats.org/drawingml/2006/main">
+            <a:r>
+              <a:t>- The source value and source currency remain primary. The EUR figure is a secondary analytical equivalent, not an observed transaction value or a current spot conversion.</a:t>
+            </a:r>
+          </a:p>
+          <a:p xmlns:a="http://schemas.openxmlformats.org/drawingml/2006/main">
+            <a:r>
+              <a:t>- NZD 2024: ECB-EXR-A-NZD-EUR-SP00-A-2024 · 1.788048828125 currency units per EUR</a:t>
+            </a:r>
+          </a:p>
+          <a:p xmlns:a="http://schemas.openxmlformats.org/drawingml/2006/main">
+            <a:r>
+              <a:t>- USD 2021: ECB-EXR-A-USD-EUR-SP00-A-2021 · 1.1827403100775 currency units per EUR</a:t>
+            </a:r>
+          </a:p>
         </p:txBody>
       </p:sp>
       <p:sp>
@@ -1031,7 +1559,96 @@
         <p:txBody>
           <a:bodyPr xmlns:a="http://schemas.openxmlformats.org/drawingml/2006/main"/>
           <a:lstStyle xmlns:a="http://schemas.openxmlformats.org/drawingml/2006/main"/>
-          <a:p xmlns:a="http://schemas.openxmlformats.org/drawingml/2006/main"/>
+          <a:p xmlns:a="http://schemas.openxmlformats.org/drawingml/2006/main">
+            <a:r>
+              <a:t>[Sources]</a:t>
+            </a:r>
+          </a:p>
+          <a:p xmlns:a="http://schemas.openxmlformats.org/drawingml/2006/main">
+            <a:r>
+              <a:t>- https://register.epo.org/application?number=EP14836345&amp;lng=en&amp;tab=main</a:t>
+            </a:r>
+          </a:p>
+          <a:p xmlns:a="http://schemas.openxmlformats.org/drawingml/2006/main">
+            <a:r>
+              <a:t>- https://data.epo.org/publication-server/rest/v1.2/patents/EP3032975NWB2/document.pdf</a:t>
+            </a:r>
+          </a:p>
+          <a:p xmlns:a="http://schemas.openxmlformats.org/drawingml/2006/main">
+            <a:r>
+              <a:t>- https://www.rechtsprechung-im-internet.de/jportal/?quelle=jlink&amp;docid=JURE269032275&amp;psml=bsjrsprod.psml</a:t>
+            </a:r>
+          </a:p>
+          <a:p xmlns:a="http://schemas.openxmlformats.org/drawingml/2006/main">
+            <a:r>
+              <a:t>- https://www.gesetze-bayern.de/Content/Document/Y-300-Z-BECKRS-B-2026-N-14206</a:t>
+            </a:r>
+          </a:p>
+          <a:p xmlns:a="http://schemas.openxmlformats.org/drawingml/2006/main">
+            <a:r>
+              <a:t>- https://www.health.govt.nz/regulation-legislation/vaping-herbal-smoking-and-smokeless-tobacco/requirements/complete-a-notifiable-product-annual-return/annual-returns-2024</a:t>
+            </a:r>
+          </a:p>
+          <a:p xmlns:a="http://schemas.openxmlformats.org/drawingml/2006/main">
+            <a:r>
+              <a:t>- https://www.ftc.gov/reports/e-cigarette-report-2021</a:t>
+            </a:r>
+          </a:p>
+          <a:p xmlns:a="http://schemas.openxmlformats.org/drawingml/2006/main">
+            <a:r>
+              <a:t>- https://www.wipo.int/en/web/ip-financing</a:t>
+            </a:r>
+          </a:p>
+          <a:p xmlns:a="http://schemas.openxmlformats.org/drawingml/2006/main">
+            <a:r>
+              <a:t>- https://data.ecb.europa.eu/data/datasets/exr/data-information</a:t>
+            </a:r>
+          </a:p>
+          <a:p xmlns:a="http://schemas.openxmlformats.org/drawingml/2006/main">
+            <a:r>
+              <a:t>- https://www.ecb.europa.eu/stats/policy_and_exchange_rates/euro_reference_exchange_rates/html/index.en.html</a:t>
+            </a:r>
+          </a:p>
+          <a:p xmlns:a="http://schemas.openxmlformats.org/drawingml/2006/main">
+            <a:r>
+              <a:t>- https://data-api.ecb.europa.eu/service/data/EXR/A.NZD.EUR.SP00.A?startPeriod=2024&amp;endPeriod=2024&amp;format=csvdata</a:t>
+            </a:r>
+          </a:p>
+          <a:p xmlns:a="http://schemas.openxmlformats.org/drawingml/2006/main">
+            <a:r>
+              <a:t>- https://data-api.ecb.europa.eu/service/data/EXR/A.USD.EUR.SP00.A?startPeriod=2021&amp;endPeriod=2021&amp;format=csvdata</a:t>
+            </a:r>
+          </a:p>
+          <a:p xmlns:a="http://schemas.openxmlformats.org/drawingml/2006/main">
+            <a:r>
+              <a:t/>
+            </a:r>
+          </a:p>
+          <a:p xmlns:a="http://schemas.openxmlformats.org/drawingml/2006/main">
+            <a:r>
+              <a:t>[FX methodology]</a:t>
+            </a:r>
+          </a:p>
+          <a:p xmlns:a="http://schemas.openxmlformats.org/drawingml/2006/main">
+            <a:r>
+              <a:t>- EUR equivalent = original monetary amount divided by the ECB annual-average reference rate expressed as currency units per euro.</a:t>
+            </a:r>
+          </a:p>
+          <a:p xmlns:a="http://schemas.openxmlformats.org/drawingml/2006/main">
+            <a:r>
+              <a:t>- The source value and source currency remain primary. The EUR figure is a secondary analytical equivalent, not an observed transaction value or a current spot conversion.</a:t>
+            </a:r>
+          </a:p>
+          <a:p xmlns:a="http://schemas.openxmlformats.org/drawingml/2006/main">
+            <a:r>
+              <a:t>- NZD 2024: ECB-EXR-A-NZD-EUR-SP00-A-2024 · 1.788048828125 currency units per EUR</a:t>
+            </a:r>
+          </a:p>
+          <a:p xmlns:a="http://schemas.openxmlformats.org/drawingml/2006/main">
+            <a:r>
+              <a:t>- USD 2021: ECB-EXR-A-USD-EUR-SP00-A-2021 · 1.1827403100775 currency units per EUR</a:t>
+            </a:r>
+          </a:p>
         </p:txBody>
       </p:sp>
       <p:sp>
@@ -1097,7 +1714,96 @@
         <p:txBody>
           <a:bodyPr xmlns:a="http://schemas.openxmlformats.org/drawingml/2006/main"/>
           <a:lstStyle xmlns:a="http://schemas.openxmlformats.org/drawingml/2006/main"/>
-          <a:p xmlns:a="http://schemas.openxmlformats.org/drawingml/2006/main"/>
+          <a:p xmlns:a="http://schemas.openxmlformats.org/drawingml/2006/main">
+            <a:r>
+              <a:t>[Sources]</a:t>
+            </a:r>
+          </a:p>
+          <a:p xmlns:a="http://schemas.openxmlformats.org/drawingml/2006/main">
+            <a:r>
+              <a:t>- https://register.epo.org/application?number=EP14836345&amp;lng=en&amp;tab=main</a:t>
+            </a:r>
+          </a:p>
+          <a:p xmlns:a="http://schemas.openxmlformats.org/drawingml/2006/main">
+            <a:r>
+              <a:t>- https://data.epo.org/publication-server/rest/v1.2/patents/EP3032975NWB2/document.pdf</a:t>
+            </a:r>
+          </a:p>
+          <a:p xmlns:a="http://schemas.openxmlformats.org/drawingml/2006/main">
+            <a:r>
+              <a:t>- https://www.rechtsprechung-im-internet.de/jportal/?quelle=jlink&amp;docid=JURE269032275&amp;psml=bsjrsprod.psml</a:t>
+            </a:r>
+          </a:p>
+          <a:p xmlns:a="http://schemas.openxmlformats.org/drawingml/2006/main">
+            <a:r>
+              <a:t>- https://www.gesetze-bayern.de/Content/Document/Y-300-Z-BECKRS-B-2026-N-14206</a:t>
+            </a:r>
+          </a:p>
+          <a:p xmlns:a="http://schemas.openxmlformats.org/drawingml/2006/main">
+            <a:r>
+              <a:t>- https://www.health.govt.nz/regulation-legislation/vaping-herbal-smoking-and-smokeless-tobacco/requirements/complete-a-notifiable-product-annual-return/annual-returns-2024</a:t>
+            </a:r>
+          </a:p>
+          <a:p xmlns:a="http://schemas.openxmlformats.org/drawingml/2006/main">
+            <a:r>
+              <a:t>- https://www.ftc.gov/reports/e-cigarette-report-2021</a:t>
+            </a:r>
+          </a:p>
+          <a:p xmlns:a="http://schemas.openxmlformats.org/drawingml/2006/main">
+            <a:r>
+              <a:t>- https://www.wipo.int/en/web/ip-financing</a:t>
+            </a:r>
+          </a:p>
+          <a:p xmlns:a="http://schemas.openxmlformats.org/drawingml/2006/main">
+            <a:r>
+              <a:t>- https://data.ecb.europa.eu/data/datasets/exr/data-information</a:t>
+            </a:r>
+          </a:p>
+          <a:p xmlns:a="http://schemas.openxmlformats.org/drawingml/2006/main">
+            <a:r>
+              <a:t>- https://www.ecb.europa.eu/stats/policy_and_exchange_rates/euro_reference_exchange_rates/html/index.en.html</a:t>
+            </a:r>
+          </a:p>
+          <a:p xmlns:a="http://schemas.openxmlformats.org/drawingml/2006/main">
+            <a:r>
+              <a:t>- https://data-api.ecb.europa.eu/service/data/EXR/A.NZD.EUR.SP00.A?startPeriod=2024&amp;endPeriod=2024&amp;format=csvdata</a:t>
+            </a:r>
+          </a:p>
+          <a:p xmlns:a="http://schemas.openxmlformats.org/drawingml/2006/main">
+            <a:r>
+              <a:t>- https://data-api.ecb.europa.eu/service/data/EXR/A.USD.EUR.SP00.A?startPeriod=2021&amp;endPeriod=2021&amp;format=csvdata</a:t>
+            </a:r>
+          </a:p>
+          <a:p xmlns:a="http://schemas.openxmlformats.org/drawingml/2006/main">
+            <a:r>
+              <a:t/>
+            </a:r>
+          </a:p>
+          <a:p xmlns:a="http://schemas.openxmlformats.org/drawingml/2006/main">
+            <a:r>
+              <a:t>[FX methodology]</a:t>
+            </a:r>
+          </a:p>
+          <a:p xmlns:a="http://schemas.openxmlformats.org/drawingml/2006/main">
+            <a:r>
+              <a:t>- EUR equivalent = original monetary amount divided by the ECB annual-average reference rate expressed as currency units per euro.</a:t>
+            </a:r>
+          </a:p>
+          <a:p xmlns:a="http://schemas.openxmlformats.org/drawingml/2006/main">
+            <a:r>
+              <a:t>- The source value and source currency remain primary. The EUR figure is a secondary analytical equivalent, not an observed transaction value or a current spot conversion.</a:t>
+            </a:r>
+          </a:p>
+          <a:p xmlns:a="http://schemas.openxmlformats.org/drawingml/2006/main">
+            <a:r>
+              <a:t>- NZD 2024: ECB-EXR-A-NZD-EUR-SP00-A-2024 · 1.788048828125 currency units per EUR</a:t>
+            </a:r>
+          </a:p>
+          <a:p xmlns:a="http://schemas.openxmlformats.org/drawingml/2006/main">
+            <a:r>
+              <a:t>- USD 2021: ECB-EXR-A-USD-EUR-SP00-A-2021 · 1.1827403100775 currency units per EUR</a:t>
+            </a:r>
+          </a:p>
         </p:txBody>
       </p:sp>
       <p:sp>
@@ -1163,7 +1869,96 @@
         <p:txBody>
           <a:bodyPr xmlns:a="http://schemas.openxmlformats.org/drawingml/2006/main"/>
           <a:lstStyle xmlns:a="http://schemas.openxmlformats.org/drawingml/2006/main"/>
-          <a:p xmlns:a="http://schemas.openxmlformats.org/drawingml/2006/main"/>
+          <a:p xmlns:a="http://schemas.openxmlformats.org/drawingml/2006/main">
+            <a:r>
+              <a:t>[Sources]</a:t>
+            </a:r>
+          </a:p>
+          <a:p xmlns:a="http://schemas.openxmlformats.org/drawingml/2006/main">
+            <a:r>
+              <a:t>- https://register.epo.org/application?number=EP14836345&amp;lng=en&amp;tab=main</a:t>
+            </a:r>
+          </a:p>
+          <a:p xmlns:a="http://schemas.openxmlformats.org/drawingml/2006/main">
+            <a:r>
+              <a:t>- https://data.epo.org/publication-server/rest/v1.2/patents/EP3032975NWB2/document.pdf</a:t>
+            </a:r>
+          </a:p>
+          <a:p xmlns:a="http://schemas.openxmlformats.org/drawingml/2006/main">
+            <a:r>
+              <a:t>- https://www.rechtsprechung-im-internet.de/jportal/?quelle=jlink&amp;docid=JURE269032275&amp;psml=bsjrsprod.psml</a:t>
+            </a:r>
+          </a:p>
+          <a:p xmlns:a="http://schemas.openxmlformats.org/drawingml/2006/main">
+            <a:r>
+              <a:t>- https://www.gesetze-bayern.de/Content/Document/Y-300-Z-BECKRS-B-2026-N-14206</a:t>
+            </a:r>
+          </a:p>
+          <a:p xmlns:a="http://schemas.openxmlformats.org/drawingml/2006/main">
+            <a:r>
+              <a:t>- https://www.health.govt.nz/regulation-legislation/vaping-herbal-smoking-and-smokeless-tobacco/requirements/complete-a-notifiable-product-annual-return/annual-returns-2024</a:t>
+            </a:r>
+          </a:p>
+          <a:p xmlns:a="http://schemas.openxmlformats.org/drawingml/2006/main">
+            <a:r>
+              <a:t>- https://www.ftc.gov/reports/e-cigarette-report-2021</a:t>
+            </a:r>
+          </a:p>
+          <a:p xmlns:a="http://schemas.openxmlformats.org/drawingml/2006/main">
+            <a:r>
+              <a:t>- https://www.wipo.int/en/web/ip-financing</a:t>
+            </a:r>
+          </a:p>
+          <a:p xmlns:a="http://schemas.openxmlformats.org/drawingml/2006/main">
+            <a:r>
+              <a:t>- https://data.ecb.europa.eu/data/datasets/exr/data-information</a:t>
+            </a:r>
+          </a:p>
+          <a:p xmlns:a="http://schemas.openxmlformats.org/drawingml/2006/main">
+            <a:r>
+              <a:t>- https://www.ecb.europa.eu/stats/policy_and_exchange_rates/euro_reference_exchange_rates/html/index.en.html</a:t>
+            </a:r>
+          </a:p>
+          <a:p xmlns:a="http://schemas.openxmlformats.org/drawingml/2006/main">
+            <a:r>
+              <a:t>- https://data-api.ecb.europa.eu/service/data/EXR/A.NZD.EUR.SP00.A?startPeriod=2024&amp;endPeriod=2024&amp;format=csvdata</a:t>
+            </a:r>
+          </a:p>
+          <a:p xmlns:a="http://schemas.openxmlformats.org/drawingml/2006/main">
+            <a:r>
+              <a:t>- https://data-api.ecb.europa.eu/service/data/EXR/A.USD.EUR.SP00.A?startPeriod=2021&amp;endPeriod=2021&amp;format=csvdata</a:t>
+            </a:r>
+          </a:p>
+          <a:p xmlns:a="http://schemas.openxmlformats.org/drawingml/2006/main">
+            <a:r>
+              <a:t/>
+            </a:r>
+          </a:p>
+          <a:p xmlns:a="http://schemas.openxmlformats.org/drawingml/2006/main">
+            <a:r>
+              <a:t>[FX methodology]</a:t>
+            </a:r>
+          </a:p>
+          <a:p xmlns:a="http://schemas.openxmlformats.org/drawingml/2006/main">
+            <a:r>
+              <a:t>- EUR equivalent = original monetary amount divided by the ECB annual-average reference rate expressed as currency units per euro.</a:t>
+            </a:r>
+          </a:p>
+          <a:p xmlns:a="http://schemas.openxmlformats.org/drawingml/2006/main">
+            <a:r>
+              <a:t>- The source value and source currency remain primary. The EUR figure is a secondary analytical equivalent, not an observed transaction value or a current spot conversion.</a:t>
+            </a:r>
+          </a:p>
+          <a:p xmlns:a="http://schemas.openxmlformats.org/drawingml/2006/main">
+            <a:r>
+              <a:t>- NZD 2024: ECB-EXR-A-NZD-EUR-SP00-A-2024 · 1.788048828125 currency units per EUR</a:t>
+            </a:r>
+          </a:p>
+          <a:p xmlns:a="http://schemas.openxmlformats.org/drawingml/2006/main">
+            <a:r>
+              <a:t>- USD 2021: ECB-EXR-A-USD-EUR-SP00-A-2021 · 1.1827403100775 currency units per EUR</a:t>
+            </a:r>
+          </a:p>
         </p:txBody>
       </p:sp>
       <p:sp>
@@ -1229,7 +2024,96 @@
         <p:txBody>
           <a:bodyPr xmlns:a="http://schemas.openxmlformats.org/drawingml/2006/main"/>
           <a:lstStyle xmlns:a="http://schemas.openxmlformats.org/drawingml/2006/main"/>
-          <a:p xmlns:a="http://schemas.openxmlformats.org/drawingml/2006/main"/>
+          <a:p xmlns:a="http://schemas.openxmlformats.org/drawingml/2006/main">
+            <a:r>
+              <a:t>[Sources]</a:t>
+            </a:r>
+          </a:p>
+          <a:p xmlns:a="http://schemas.openxmlformats.org/drawingml/2006/main">
+            <a:r>
+              <a:t>- https://register.epo.org/application?number=EP14836345&amp;lng=en&amp;tab=main</a:t>
+            </a:r>
+          </a:p>
+          <a:p xmlns:a="http://schemas.openxmlformats.org/drawingml/2006/main">
+            <a:r>
+              <a:t>- https://data.epo.org/publication-server/rest/v1.2/patents/EP3032975NWB2/document.pdf</a:t>
+            </a:r>
+          </a:p>
+          <a:p xmlns:a="http://schemas.openxmlformats.org/drawingml/2006/main">
+            <a:r>
+              <a:t>- https://www.rechtsprechung-im-internet.de/jportal/?quelle=jlink&amp;docid=JURE269032275&amp;psml=bsjrsprod.psml</a:t>
+            </a:r>
+          </a:p>
+          <a:p xmlns:a="http://schemas.openxmlformats.org/drawingml/2006/main">
+            <a:r>
+              <a:t>- https://www.gesetze-bayern.de/Content/Document/Y-300-Z-BECKRS-B-2026-N-14206</a:t>
+            </a:r>
+          </a:p>
+          <a:p xmlns:a="http://schemas.openxmlformats.org/drawingml/2006/main">
+            <a:r>
+              <a:t>- https://www.health.govt.nz/regulation-legislation/vaping-herbal-smoking-and-smokeless-tobacco/requirements/complete-a-notifiable-product-annual-return/annual-returns-2024</a:t>
+            </a:r>
+          </a:p>
+          <a:p xmlns:a="http://schemas.openxmlformats.org/drawingml/2006/main">
+            <a:r>
+              <a:t>- https://www.ftc.gov/reports/e-cigarette-report-2021</a:t>
+            </a:r>
+          </a:p>
+          <a:p xmlns:a="http://schemas.openxmlformats.org/drawingml/2006/main">
+            <a:r>
+              <a:t>- https://www.wipo.int/en/web/ip-financing</a:t>
+            </a:r>
+          </a:p>
+          <a:p xmlns:a="http://schemas.openxmlformats.org/drawingml/2006/main">
+            <a:r>
+              <a:t>- https://data.ecb.europa.eu/data/datasets/exr/data-information</a:t>
+            </a:r>
+          </a:p>
+          <a:p xmlns:a="http://schemas.openxmlformats.org/drawingml/2006/main">
+            <a:r>
+              <a:t>- https://www.ecb.europa.eu/stats/policy_and_exchange_rates/euro_reference_exchange_rates/html/index.en.html</a:t>
+            </a:r>
+          </a:p>
+          <a:p xmlns:a="http://schemas.openxmlformats.org/drawingml/2006/main">
+            <a:r>
+              <a:t>- https://data-api.ecb.europa.eu/service/data/EXR/A.NZD.EUR.SP00.A?startPeriod=2024&amp;endPeriod=2024&amp;format=csvdata</a:t>
+            </a:r>
+          </a:p>
+          <a:p xmlns:a="http://schemas.openxmlformats.org/drawingml/2006/main">
+            <a:r>
+              <a:t>- https://data-api.ecb.europa.eu/service/data/EXR/A.USD.EUR.SP00.A?startPeriod=2021&amp;endPeriod=2021&amp;format=csvdata</a:t>
+            </a:r>
+          </a:p>
+          <a:p xmlns:a="http://schemas.openxmlformats.org/drawingml/2006/main">
+            <a:r>
+              <a:t/>
+            </a:r>
+          </a:p>
+          <a:p xmlns:a="http://schemas.openxmlformats.org/drawingml/2006/main">
+            <a:r>
+              <a:t>[FX methodology]</a:t>
+            </a:r>
+          </a:p>
+          <a:p xmlns:a="http://schemas.openxmlformats.org/drawingml/2006/main">
+            <a:r>
+              <a:t>- EUR equivalent = original monetary amount divided by the ECB annual-average reference rate expressed as currency units per euro.</a:t>
+            </a:r>
+          </a:p>
+          <a:p xmlns:a="http://schemas.openxmlformats.org/drawingml/2006/main">
+            <a:r>
+              <a:t>- The source value and source currency remain primary. The EUR figure is a secondary analytical equivalent, not an observed transaction value or a current spot conversion.</a:t>
+            </a:r>
+          </a:p>
+          <a:p xmlns:a="http://schemas.openxmlformats.org/drawingml/2006/main">
+            <a:r>
+              <a:t>- NZD 2024: ECB-EXR-A-NZD-EUR-SP00-A-2024 · 1.788048828125 currency units per EUR</a:t>
+            </a:r>
+          </a:p>
+          <a:p xmlns:a="http://schemas.openxmlformats.org/drawingml/2006/main">
+            <a:r>
+              <a:t>- USD 2021: ECB-EXR-A-USD-EUR-SP00-A-2021 · 1.1827403100775 currency units per EUR</a:t>
+            </a:r>
+          </a:p>
         </p:txBody>
       </p:sp>
       <p:sp>
@@ -1295,7 +2179,96 @@
         <p:txBody>
           <a:bodyPr xmlns:a="http://schemas.openxmlformats.org/drawingml/2006/main"/>
           <a:lstStyle xmlns:a="http://schemas.openxmlformats.org/drawingml/2006/main"/>
-          <a:p xmlns:a="http://schemas.openxmlformats.org/drawingml/2006/main"/>
+          <a:p xmlns:a="http://schemas.openxmlformats.org/drawingml/2006/main">
+            <a:r>
+              <a:t>[Sources]</a:t>
+            </a:r>
+          </a:p>
+          <a:p xmlns:a="http://schemas.openxmlformats.org/drawingml/2006/main">
+            <a:r>
+              <a:t>- https://register.epo.org/application?number=EP14836345&amp;lng=en&amp;tab=main</a:t>
+            </a:r>
+          </a:p>
+          <a:p xmlns:a="http://schemas.openxmlformats.org/drawingml/2006/main">
+            <a:r>
+              <a:t>- https://data.epo.org/publication-server/rest/v1.2/patents/EP3032975NWB2/document.pdf</a:t>
+            </a:r>
+          </a:p>
+          <a:p xmlns:a="http://schemas.openxmlformats.org/drawingml/2006/main">
+            <a:r>
+              <a:t>- https://www.rechtsprechung-im-internet.de/jportal/?quelle=jlink&amp;docid=JURE269032275&amp;psml=bsjrsprod.psml</a:t>
+            </a:r>
+          </a:p>
+          <a:p xmlns:a="http://schemas.openxmlformats.org/drawingml/2006/main">
+            <a:r>
+              <a:t>- https://www.gesetze-bayern.de/Content/Document/Y-300-Z-BECKRS-B-2026-N-14206</a:t>
+            </a:r>
+          </a:p>
+          <a:p xmlns:a="http://schemas.openxmlformats.org/drawingml/2006/main">
+            <a:r>
+              <a:t>- https://www.health.govt.nz/regulation-legislation/vaping-herbal-smoking-and-smokeless-tobacco/requirements/complete-a-notifiable-product-annual-return/annual-returns-2024</a:t>
+            </a:r>
+          </a:p>
+          <a:p xmlns:a="http://schemas.openxmlformats.org/drawingml/2006/main">
+            <a:r>
+              <a:t>- https://www.ftc.gov/reports/e-cigarette-report-2021</a:t>
+            </a:r>
+          </a:p>
+          <a:p xmlns:a="http://schemas.openxmlformats.org/drawingml/2006/main">
+            <a:r>
+              <a:t>- https://www.wipo.int/en/web/ip-financing</a:t>
+            </a:r>
+          </a:p>
+          <a:p xmlns:a="http://schemas.openxmlformats.org/drawingml/2006/main">
+            <a:r>
+              <a:t>- https://data.ecb.europa.eu/data/datasets/exr/data-information</a:t>
+            </a:r>
+          </a:p>
+          <a:p xmlns:a="http://schemas.openxmlformats.org/drawingml/2006/main">
+            <a:r>
+              <a:t>- https://www.ecb.europa.eu/stats/policy_and_exchange_rates/euro_reference_exchange_rates/html/index.en.html</a:t>
+            </a:r>
+          </a:p>
+          <a:p xmlns:a="http://schemas.openxmlformats.org/drawingml/2006/main">
+            <a:r>
+              <a:t>- https://data-api.ecb.europa.eu/service/data/EXR/A.NZD.EUR.SP00.A?startPeriod=2024&amp;endPeriod=2024&amp;format=csvdata</a:t>
+            </a:r>
+          </a:p>
+          <a:p xmlns:a="http://schemas.openxmlformats.org/drawingml/2006/main">
+            <a:r>
+              <a:t>- https://data-api.ecb.europa.eu/service/data/EXR/A.USD.EUR.SP00.A?startPeriod=2021&amp;endPeriod=2021&amp;format=csvdata</a:t>
+            </a:r>
+          </a:p>
+          <a:p xmlns:a="http://schemas.openxmlformats.org/drawingml/2006/main">
+            <a:r>
+              <a:t/>
+            </a:r>
+          </a:p>
+          <a:p xmlns:a="http://schemas.openxmlformats.org/drawingml/2006/main">
+            <a:r>
+              <a:t>[FX methodology]</a:t>
+            </a:r>
+          </a:p>
+          <a:p xmlns:a="http://schemas.openxmlformats.org/drawingml/2006/main">
+            <a:r>
+              <a:t>- EUR equivalent = original monetary amount divided by the ECB annual-average reference rate expressed as currency units per euro.</a:t>
+            </a:r>
+          </a:p>
+          <a:p xmlns:a="http://schemas.openxmlformats.org/drawingml/2006/main">
+            <a:r>
+              <a:t>- The source value and source currency remain primary. The EUR figure is a secondary analytical equivalent, not an observed transaction value or a current spot conversion.</a:t>
+            </a:r>
+          </a:p>
+          <a:p xmlns:a="http://schemas.openxmlformats.org/drawingml/2006/main">
+            <a:r>
+              <a:t>- NZD 2024: ECB-EXR-A-NZD-EUR-SP00-A-2024 · 1.788048828125 currency units per EUR</a:t>
+            </a:r>
+          </a:p>
+          <a:p xmlns:a="http://schemas.openxmlformats.org/drawingml/2006/main">
+            <a:r>
+              <a:t>- USD 2021: ECB-EXR-A-USD-EUR-SP00-A-2021 · 1.1827403100775 currency units per EUR</a:t>
+            </a:r>
+          </a:p>
         </p:txBody>
       </p:sp>
       <p:sp>
@@ -4249,17 +5222,17 @@
   </p:cSld>
   <p:clrMap bg1="lt1" tx1="dk1" bg2="lt2" tx2="dk2" accent1="accent1" accent2="accent2" accent3="accent3" accent4="accent4" accent5="accent5" accent6="accent6" hlink="hlink" folHlink="folHlink"/>
   <p:sldLayoutIdLst>
-    <p:sldLayoutId xmlns:r="http://schemas.openxmlformats.org/officeDocument/2006/relationships" id="2147483649" r:id="R9443039d893d4a07"/>
-    <p:sldLayoutId xmlns:r="http://schemas.openxmlformats.org/officeDocument/2006/relationships" id="2147483650" r:id="R92ad09993b994a68"/>
-    <p:sldLayoutId xmlns:r="http://schemas.openxmlformats.org/officeDocument/2006/relationships" id="2147483651" r:id="R3dd436487b134952"/>
-    <p:sldLayoutId xmlns:r="http://schemas.openxmlformats.org/officeDocument/2006/relationships" id="2147483652" r:id="R3da6f22198eb4302"/>
-    <p:sldLayoutId xmlns:r="http://schemas.openxmlformats.org/officeDocument/2006/relationships" id="2147483653" r:id="R4a8ba36f8002429c"/>
-    <p:sldLayoutId xmlns:r="http://schemas.openxmlformats.org/officeDocument/2006/relationships" id="2147483654" r:id="R6742d2f3279f4719"/>
-    <p:sldLayoutId xmlns:r="http://schemas.openxmlformats.org/officeDocument/2006/relationships" id="2147483655" r:id="R4894858333094f16"/>
-    <p:sldLayoutId xmlns:r="http://schemas.openxmlformats.org/officeDocument/2006/relationships" id="2147483656" r:id="R20e7329a70914d08"/>
-    <p:sldLayoutId xmlns:r="http://schemas.openxmlformats.org/officeDocument/2006/relationships" id="2147483657" r:id="Rc517c42f52e04300"/>
-    <p:sldLayoutId xmlns:r="http://schemas.openxmlformats.org/officeDocument/2006/relationships" id="2147483658" r:id="R6cd08312f7b9442d"/>
-    <p:sldLayoutId xmlns:r="http://schemas.openxmlformats.org/officeDocument/2006/relationships" id="2147483659" r:id="Rd4553f29f9b14b64"/>
+    <p:sldLayoutId xmlns:r="http://schemas.openxmlformats.org/officeDocument/2006/relationships" id="2147483649" r:id="R36a67585548742c2"/>
+    <p:sldLayoutId xmlns:r="http://schemas.openxmlformats.org/officeDocument/2006/relationships" id="2147483650" r:id="R4e76c1fd9b6e45d7"/>
+    <p:sldLayoutId xmlns:r="http://schemas.openxmlformats.org/officeDocument/2006/relationships" id="2147483651" r:id="Rc03bf58751224094"/>
+    <p:sldLayoutId xmlns:r="http://schemas.openxmlformats.org/officeDocument/2006/relationships" id="2147483652" r:id="R86fa4aa19d5f47cd"/>
+    <p:sldLayoutId xmlns:r="http://schemas.openxmlformats.org/officeDocument/2006/relationships" id="2147483653" r:id="Rb05b88ace2024790"/>
+    <p:sldLayoutId xmlns:r="http://schemas.openxmlformats.org/officeDocument/2006/relationships" id="2147483654" r:id="R6b9c8eb0b1ae44f3"/>
+    <p:sldLayoutId xmlns:r="http://schemas.openxmlformats.org/officeDocument/2006/relationships" id="2147483655" r:id="R3f289171080e4723"/>
+    <p:sldLayoutId xmlns:r="http://schemas.openxmlformats.org/officeDocument/2006/relationships" id="2147483656" r:id="R2ed6887c35144d5a"/>
+    <p:sldLayoutId xmlns:r="http://schemas.openxmlformats.org/officeDocument/2006/relationships" id="2147483657" r:id="R804b2b083d484efa"/>
+    <p:sldLayoutId xmlns:r="http://schemas.openxmlformats.org/officeDocument/2006/relationships" id="2147483658" r:id="R1d9ee90dd88d4571"/>
+    <p:sldLayoutId xmlns:r="http://schemas.openxmlformats.org/officeDocument/2006/relationships" id="2147483659" r:id="R6b52bc519f6d4fcb"/>
   </p:sldLayoutIdLst>
   <p:txStyles>
     <p:titleStyle>
@@ -4953,16 +5926,7 @@
               </a:rPr>
               <a:t>From patent to a lender-ready</a:t>
             </a:r>
-            <a:br>
-              <a:rPr sz="4000" b="1">
-                <a:solidFill>
-                  <a:srgbClr val="FFFFFF"/>
-                </a:solidFill>
-                <a:latin typeface="Aptos"/>
-                <a:ea typeface="Aptos"/>
-                <a:cs typeface="Aptos"/>
-              </a:rPr>
-            </a:br>
+            <a:br/>
             <a:r>
               <a:rPr sz="4000" b="1">
                 <a:solidFill>
@@ -5143,7 +6107,7 @@
         <p:spPr>
           <a:xfrm xmlns:a="http://schemas.openxmlformats.org/drawingml/2006/main">
             <a:off x="8732520" y="1700784"/>
-            <a:ext cx="2880360" cy="502920"/>
+            <a:ext cx="2880360" cy="515112"/>
           </a:xfrm>
           <a:prstGeom xmlns:a="http://schemas.openxmlformats.org/drawingml/2006/main" prst="rect">
             <a:avLst/>
@@ -5168,7 +6132,7 @@
                 <a:ea typeface="Aptos"/>
                 <a:cs typeface="Aptos"/>
               </a:rPr>
-              <a:t>2026.07.24-17</a:t>
+              <a:t>2026.07.24-18</a:t>
             </a:r>
           </a:p>
         </p:txBody>
@@ -5217,16 +6181,7 @@
               </a:rPr>
               <a:t>Updated 2026-07-24</a:t>
             </a:r>
-            <a:br>
-              <a:rPr sz="1700" b="0">
-                <a:solidFill>
-                  <a:srgbClr val="FFFFFF"/>
-                </a:solidFill>
-                <a:latin typeface="Aptos"/>
-                <a:ea typeface="Aptos"/>
-                <a:cs typeface="Aptos"/>
-              </a:rPr>
-            </a:br>
+            <a:br/>
             <a:r>
               <a:rPr sz="1700" b="0">
                 <a:solidFill>
@@ -5697,7 +6652,7 @@
                 <a:ea typeface="Aptos"/>
                 <a:cs typeface="Aptos"/>
               </a:rPr>
-              <a:t>Independent public evidence summary · 2026.07.24-17 · 2026-07-24 · Sources: WIPO licensing; dispute resolution; IPscore</a:t>
+              <a:t>Independent public evidence summary · 2026.07.24-18 · 2026-07-24 · Sources: WIPO licensing; dispute resolution; IPscore</a:t>
             </a:r>
           </a:p>
         </p:txBody>
@@ -6856,7 +7811,7 @@
                 <a:ea typeface="Aptos"/>
                 <a:cs typeface="Aptos"/>
               </a:rPr>
-              <a:t>Independent public evidence summary · 2026.07.24-17 · 2026-07-24 · Sources: WIPO IP valuation; Market-values</a:t>
+              <a:t>Independent public evidence summary · 2026.07.24-18 · 2026-07-24 · Sources: WIPO IP valuation; Market-values</a:t>
             </a:r>
           </a:p>
         </p:txBody>
@@ -7084,7 +8039,7 @@
                           <a:ea typeface="Aptos"/>
                           <a:cs typeface="Aptos"/>
                         </a:rPr>
-                        <a:t>0/3 retail-value donors; 4 candidates failed D1–D10</a:t>
+                        <a:t>0/3 retail-value donors; 5 candidates remain outside the D1–D10 gate</a:t>
                       </a:r>
                     </a:p>
                   </a:txBody>
@@ -7784,7 +8739,7 @@
                 <a:ea typeface="Aptos"/>
                 <a:cs typeface="Aptos"/>
               </a:rPr>
-              <a:t>Version 2026.07.24-17 · 2026-07-24 · 12 / 12</a:t>
+              <a:t>Version 2026.07.24-18 · 2026-07-24 · 12 / 12</a:t>
             </a:r>
           </a:p>
         </p:txBody>
@@ -8104,7 +9059,7 @@
                 <a:ea typeface="Aptos"/>
                 <a:cs typeface="Aptos"/>
               </a:rPr>
-              <a:t>Independent public evidence summary · 2026.07.24-17 · 2026-07-24 · Sources: Atlas readiness; WIPO</a:t>
+              <a:t>Independent public evidence summary · 2026.07.24-18 · 2026-07-24 · Sources: Atlas readiness; WIPO</a:t>
             </a:r>
           </a:p>
         </p:txBody>
@@ -8719,7 +9674,7 @@
                 <a:ea typeface="Aptos"/>
                 <a:cs typeface="Aptos"/>
               </a:rPr>
-              <a:t>Independent public evidence summary · 2026.07.24-17 · 2026-07-24 · Sources: EP3032975B2</a:t>
+              <a:t>Independent public evidence summary · 2026.07.24-18 · 2026-07-24 · Sources: EP3032975B2</a:t>
             </a:r>
           </a:p>
         </p:txBody>
@@ -9334,7 +10289,7 @@
                 <a:ea typeface="Aptos"/>
                 <a:cs typeface="Aptos"/>
               </a:rPr>
-              <a:t>Independent public evidence summary · 2026.07.24-17 · 2026-07-24 · Sources: EPO Register; EP3032975B2</a:t>
+              <a:t>Independent public evidence summary · 2026.07.24-18 · 2026-07-24 · Sources: EPO Register; EP3032975B2</a:t>
             </a:r>
           </a:p>
         </p:txBody>
@@ -10305,7 +11260,7 @@
                 <a:ea typeface="Aptos"/>
                 <a:cs typeface="Aptos"/>
               </a:rPr>
-              <a:t>Independent public evidence summary · 2026.07.24-17 · 2026-07-24 · Sources: EP3032975B2; 7 O 3341/24</a:t>
+              <a:t>Independent public evidence summary · 2026.07.24-18 · 2026-07-24 · Sources: EP3032975B2; 7 O 3341/24</a:t>
             </a:r>
           </a:p>
         </p:txBody>
@@ -10763,7 +11718,7 @@
                 <a:ea typeface="Aptos"/>
                 <a:cs typeface="Aptos"/>
               </a:rPr>
-              <a:t>Market size is currently a range and a set of observations — not one number</a:t>
+              <a:t>Market size remains a range — not a single value</a:t>
             </a:r>
           </a:p>
         </p:txBody>
@@ -10920,7 +11875,7 @@
                 <a:ea typeface="Aptos"/>
                 <a:cs typeface="Aptos"/>
               </a:rPr>
-              <a:t>Independent public evidence summary · 2026.07.24-17 · 2026-07-24 · Sources: Market-values; IMARC; GVR; Fortune; European Commission</a:t>
+              <a:t>Independent public evidence summary · 2026.07.24-18 · 2026-07-24 · Sources: Market-values; FTC; IMARC; GVR; Fortune; European Commission</a:t>
             </a:r>
           </a:p>
         </p:txBody>
@@ -11071,7 +12026,7 @@
                 <a:ea typeface="Aptos"/>
                 <a:cs typeface="Aptos"/>
               </a:rPr>
-              <a:t>20</a:t>
+              <a:t>27</a:t>
             </a:r>
           </a:p>
         </p:txBody>
@@ -11118,7 +12073,7 @@
                 <a:ea typeface="Aptos"/>
                 <a:cs typeface="Aptos"/>
               </a:rPr>
-              <a:t>official annual observations from 6 countries</a:t>
+              <a:t>official annual observations from 7 countries</a:t>
             </a:r>
           </a:p>
         </p:txBody>
@@ -11222,7 +12177,7 @@
                 <a:ea typeface="Aptos"/>
                 <a:cs typeface="Aptos"/>
               </a:rPr>
-              <a:t>NZD 280.685m</a:t>
+              <a:t>NZD 533.7–731.2m</a:t>
             </a:r>
           </a:p>
         </p:txBody>
@@ -11269,7 +12224,7 @@
                 <a:ea typeface="Aptos"/>
                 <a:cs typeface="Aptos"/>
               </a:rPr>
-              <a:t>New Zealand 2024: raw sum from 29 files</a:t>
+              <a:t>≈EUR 298.5–408.9m · ECB 2024</a:t>
             </a:r>
           </a:p>
         </p:txBody>
@@ -11467,7 +12422,7 @@
                 <a:ea typeface="Aptos"/>
                 <a:cs typeface="Aptos"/>
               </a:rPr>
-              <a:t>4/4 candidates failed the D1–D10 protocol; the accepted-donor gate is 0/3.</a:t>
+              <a:t>5/5 candidates remain outside the D1–D10 gate; the accepted-donor count is 0/3.</a:t>
             </a:r>
           </a:p>
         </p:txBody>
@@ -11618,7 +12573,7 @@
                 <a:ea typeface="Aptos"/>
                 <a:cs typeface="Aptos"/>
               </a:rPr>
-              <a:t>New Zealand's raw sum reconciles to the official ≥NZD 280m headline; the NZD 264.561m repeated-row sensitivity is not a corrected estimate, and the identified-vaping raw sum is NZD 274.18m. The EU figure is a supported institutional benchmark based on commercial Euromonitor 2025 data; Cyprus, Luxembourg and Malta are missing. The commercial USD 26.0–46.32bn range and Germany's EUR 667.92m–1,654.62m liquid model are cross-checks, not the atlas's global estimate.</a:t>
+              <a:t>NZ 2024: NZD 533.7–731.2m (≈EUR 298.5–408.9m; ECB 2024) is a supported model. FTC 2021: USD 2.763bn (≈EUR 2.336bn; ECB 2021) is manufacturer reporting. EU and commercial figures are not summed.</a:t>
             </a:r>
           </a:p>
         </p:txBody>
@@ -11891,7 +12846,7 @@
                 <a:ea typeface="Aptos"/>
                 <a:cs typeface="Aptos"/>
               </a:rPr>
-              <a:t>Independent public evidence summary · 2026.07.24-17 · 2026-07-24 · Sources: WIPO licensing; WIPO IP Finance</a:t>
+              <a:t>Independent public evidence summary · 2026.07.24-18 · 2026-07-24 · Sources: WIPO licensing; WIPO IP Finance</a:t>
             </a:r>
           </a:p>
         </p:txBody>
@@ -12506,7 +13461,7 @@
                 <a:ea typeface="Aptos"/>
                 <a:cs typeface="Aptos"/>
               </a:rPr>
-              <a:t>Independent public evidence summary · 2026.07.24-17 · 2026-07-24 · Sources: Evidence Register; EPO; WIPO</a:t>
+              <a:t>Independent public evidence summary · 2026.07.24-18 · 2026-07-24 · Sources: Evidence Register; EPO; WIPO</a:t>
             </a:r>
           </a:p>
         </p:txBody>
@@ -13313,7 +14268,7 @@
                 <a:ea typeface="Aptos"/>
                 <a:cs typeface="Aptos"/>
               </a:rPr>
-              <a:t>Independent public evidence summary · 2026.07.24-17 · 2026-07-24 · Sources: Evidence Register</a:t>
+              <a:t>Independent public evidence summary · 2026.07.24-18 · 2026-07-24 · Sources: Evidence Register</a:t>
             </a:r>
           </a:p>
         </p:txBody>
@@ -13789,7 +14744,7 @@
                           <a:ea typeface="Aptos"/>
                           <a:cs typeface="Aptos"/>
                         </a:rPr>
-                        <a:t>official figures from 6 countries</a:t>
+                        <a:t>official routes from 7 countries</a:t>
                       </a:r>
                     </a:p>
                   </a:txBody>

--- a/site/downloads/pixan-bank-deck-medium-en.pptx
+++ b/site/downloads/pixan-bank-deck-medium-en.pptx
@@ -2,24 +2,24 @@
 <file path=ppt/presentation.xml><?xml version="1.0" encoding="utf-8"?>
 <p:presentation xmlns:p="http://schemas.openxmlformats.org/presentationml/2006/main">
   <p:sldMasterIdLst>
-    <p:sldMasterId xmlns:r="http://schemas.openxmlformats.org/officeDocument/2006/relationships" id="2147483648" r:id="R7526251a27db4f11"/>
+    <p:sldMasterId xmlns:r="http://schemas.openxmlformats.org/officeDocument/2006/relationships" id="2147483648" r:id="Rc5fa7083be4b4b30"/>
   </p:sldMasterIdLst>
   <p:notesMasterIdLst>
-    <p:notesMasterId xmlns:r="http://schemas.openxmlformats.org/officeDocument/2006/relationships" r:id="Rba86299c7fa94b0d"/>
+    <p:notesMasterId xmlns:r="http://schemas.openxmlformats.org/officeDocument/2006/relationships" r:id="R1257e6d53d7b46f2"/>
   </p:notesMasterIdLst>
   <p:sldIdLst>
-    <p:sldId xmlns:r="http://schemas.openxmlformats.org/officeDocument/2006/relationships" id="256" r:id="R436cf42aa2bc46f2"/>
-    <p:sldId xmlns:r="http://schemas.openxmlformats.org/officeDocument/2006/relationships" id="257" r:id="R29422b23a91a45ef"/>
-    <p:sldId xmlns:r="http://schemas.openxmlformats.org/officeDocument/2006/relationships" id="258" r:id="Re45f1c4c2ff44156"/>
-    <p:sldId xmlns:r="http://schemas.openxmlformats.org/officeDocument/2006/relationships" id="259" r:id="Rad3725b86d3243fd"/>
-    <p:sldId xmlns:r="http://schemas.openxmlformats.org/officeDocument/2006/relationships" id="260" r:id="R984a7f5960e14c23"/>
-    <p:sldId xmlns:r="http://schemas.openxmlformats.org/officeDocument/2006/relationships" id="261" r:id="R76fee3072efa4ebf"/>
-    <p:sldId xmlns:r="http://schemas.openxmlformats.org/officeDocument/2006/relationships" id="262" r:id="R21a00206b9e14782"/>
-    <p:sldId xmlns:r="http://schemas.openxmlformats.org/officeDocument/2006/relationships" id="263" r:id="R56c8ff23dcca4e3b"/>
-    <p:sldId xmlns:r="http://schemas.openxmlformats.org/officeDocument/2006/relationships" id="264" r:id="R16603375221a4981"/>
-    <p:sldId xmlns:r="http://schemas.openxmlformats.org/officeDocument/2006/relationships" id="265" r:id="R3b23bc1fcd0e402b"/>
-    <p:sldId xmlns:r="http://schemas.openxmlformats.org/officeDocument/2006/relationships" id="266" r:id="R926323f4bee843bc"/>
-    <p:sldId xmlns:r="http://schemas.openxmlformats.org/officeDocument/2006/relationships" id="267" r:id="Rd4377e795e184c48"/>
+    <p:sldId xmlns:r="http://schemas.openxmlformats.org/officeDocument/2006/relationships" id="256" r:id="Rf615dc3adac348eb"/>
+    <p:sldId xmlns:r="http://schemas.openxmlformats.org/officeDocument/2006/relationships" id="257" r:id="Rdd7b9d47e0bb4448"/>
+    <p:sldId xmlns:r="http://schemas.openxmlformats.org/officeDocument/2006/relationships" id="258" r:id="Rf3cfe9b732694445"/>
+    <p:sldId xmlns:r="http://schemas.openxmlformats.org/officeDocument/2006/relationships" id="259" r:id="Rd6be21e0ab174734"/>
+    <p:sldId xmlns:r="http://schemas.openxmlformats.org/officeDocument/2006/relationships" id="260" r:id="Ra67b2f49bdbe45c8"/>
+    <p:sldId xmlns:r="http://schemas.openxmlformats.org/officeDocument/2006/relationships" id="261" r:id="R2fee7bcf9a4040a1"/>
+    <p:sldId xmlns:r="http://schemas.openxmlformats.org/officeDocument/2006/relationships" id="262" r:id="Rfb94a84122af46a3"/>
+    <p:sldId xmlns:r="http://schemas.openxmlformats.org/officeDocument/2006/relationships" id="263" r:id="R7f5c96d07f994553"/>
+    <p:sldId xmlns:r="http://schemas.openxmlformats.org/officeDocument/2006/relationships" id="264" r:id="Rc6221bbfb5244d70"/>
+    <p:sldId xmlns:r="http://schemas.openxmlformats.org/officeDocument/2006/relationships" id="265" r:id="Rae1394c433e54482"/>
+    <p:sldId xmlns:r="http://schemas.openxmlformats.org/officeDocument/2006/relationships" id="266" r:id="R32a7988faccd4784"/>
+    <p:sldId xmlns:r="http://schemas.openxmlformats.org/officeDocument/2006/relationships" id="267" r:id="R50756bc65e01490f"/>
   </p:sldIdLst>
   <p:sldSz cx="12191999" cy="6858000"/>
   <p:notesSz cx="6858000" cy="9144000"/>
@@ -506,6 +506,11 @@
           </a:p>
           <a:p xmlns:a="http://schemas.openxmlformats.org/drawingml/2006/main">
             <a:r>
+              <a:t>- https://www150.statcan.gc.ca/t1/tbl1/en/tv.action?pid=2010007101</a:t>
+            </a:r>
+          </a:p>
+          <a:p xmlns:a="http://schemas.openxmlformats.org/drawingml/2006/main">
+            <a:r>
               <a:t>- https://www.ftc.gov/reports/e-cigarette-report-2021</a:t>
             </a:r>
           </a:p>
@@ -536,6 +541,11 @@
           </a:p>
           <a:p xmlns:a="http://schemas.openxmlformats.org/drawingml/2006/main">
             <a:r>
+              <a:t>- https://data-api.ecb.europa.eu/service/data/EXR/A.CAD.EUR.SP00.A?startPeriod=2024&amp;endPeriod=2024&amp;format=csvdata</a:t>
+            </a:r>
+          </a:p>
+          <a:p xmlns:a="http://schemas.openxmlformats.org/drawingml/2006/main">
+            <a:r>
               <a:t/>
             </a:r>
           </a:p>
@@ -562,6 +572,11 @@
           <a:p xmlns:a="http://schemas.openxmlformats.org/drawingml/2006/main">
             <a:r>
               <a:t>- USD 2021: ECB-EXR-A-USD-EUR-SP00-A-2021 · 1.1827403100775 currency units per EUR</a:t>
+            </a:r>
+          </a:p>
+          <a:p xmlns:a="http://schemas.openxmlformats.org/drawingml/2006/main">
+            <a:r>
+              <a:t>- CAD 2024: ECB-EXR-A-CAD-EUR-SP00-A-2024 · 1.482110546875 currency units per EUR</a:t>
             </a:r>
           </a:p>
         </p:txBody>
@@ -661,6 +676,11 @@
           </a:p>
           <a:p xmlns:a="http://schemas.openxmlformats.org/drawingml/2006/main">
             <a:r>
+              <a:t>- https://www150.statcan.gc.ca/t1/tbl1/en/tv.action?pid=2010007101</a:t>
+            </a:r>
+          </a:p>
+          <a:p xmlns:a="http://schemas.openxmlformats.org/drawingml/2006/main">
+            <a:r>
               <a:t>- https://www.ftc.gov/reports/e-cigarette-report-2021</a:t>
             </a:r>
           </a:p>
@@ -691,6 +711,11 @@
           </a:p>
           <a:p xmlns:a="http://schemas.openxmlformats.org/drawingml/2006/main">
             <a:r>
+              <a:t>- https://data-api.ecb.europa.eu/service/data/EXR/A.CAD.EUR.SP00.A?startPeriod=2024&amp;endPeriod=2024&amp;format=csvdata</a:t>
+            </a:r>
+          </a:p>
+          <a:p xmlns:a="http://schemas.openxmlformats.org/drawingml/2006/main">
+            <a:r>
               <a:t/>
             </a:r>
           </a:p>
@@ -717,6 +742,11 @@
           <a:p xmlns:a="http://schemas.openxmlformats.org/drawingml/2006/main">
             <a:r>
               <a:t>- USD 2021: ECB-EXR-A-USD-EUR-SP00-A-2021 · 1.1827403100775 currency units per EUR</a:t>
+            </a:r>
+          </a:p>
+          <a:p xmlns:a="http://schemas.openxmlformats.org/drawingml/2006/main">
+            <a:r>
+              <a:t>- CAD 2024: ECB-EXR-A-CAD-EUR-SP00-A-2024 · 1.482110546875 currency units per EUR</a:t>
             </a:r>
           </a:p>
         </p:txBody>
@@ -816,6 +846,11 @@
           </a:p>
           <a:p xmlns:a="http://schemas.openxmlformats.org/drawingml/2006/main">
             <a:r>
+              <a:t>- https://www150.statcan.gc.ca/t1/tbl1/en/tv.action?pid=2010007101</a:t>
+            </a:r>
+          </a:p>
+          <a:p xmlns:a="http://schemas.openxmlformats.org/drawingml/2006/main">
+            <a:r>
               <a:t>- https://www.ftc.gov/reports/e-cigarette-report-2021</a:t>
             </a:r>
           </a:p>
@@ -846,6 +881,11 @@
           </a:p>
           <a:p xmlns:a="http://schemas.openxmlformats.org/drawingml/2006/main">
             <a:r>
+              <a:t>- https://data-api.ecb.europa.eu/service/data/EXR/A.CAD.EUR.SP00.A?startPeriod=2024&amp;endPeriod=2024&amp;format=csvdata</a:t>
+            </a:r>
+          </a:p>
+          <a:p xmlns:a="http://schemas.openxmlformats.org/drawingml/2006/main">
+            <a:r>
               <a:t/>
             </a:r>
           </a:p>
@@ -872,6 +912,11 @@
           <a:p xmlns:a="http://schemas.openxmlformats.org/drawingml/2006/main">
             <a:r>
               <a:t>- USD 2021: ECB-EXR-A-USD-EUR-SP00-A-2021 · 1.1827403100775 currency units per EUR</a:t>
+            </a:r>
+          </a:p>
+          <a:p xmlns:a="http://schemas.openxmlformats.org/drawingml/2006/main">
+            <a:r>
+              <a:t>- CAD 2024: ECB-EXR-A-CAD-EUR-SP00-A-2024 · 1.482110546875 currency units per EUR</a:t>
             </a:r>
           </a:p>
         </p:txBody>
@@ -971,6 +1016,11 @@
           </a:p>
           <a:p xmlns:a="http://schemas.openxmlformats.org/drawingml/2006/main">
             <a:r>
+              <a:t>- https://www150.statcan.gc.ca/t1/tbl1/en/tv.action?pid=2010007101</a:t>
+            </a:r>
+          </a:p>
+          <a:p xmlns:a="http://schemas.openxmlformats.org/drawingml/2006/main">
+            <a:r>
               <a:t>- https://www.ftc.gov/reports/e-cigarette-report-2021</a:t>
             </a:r>
           </a:p>
@@ -1001,6 +1051,11 @@
           </a:p>
           <a:p xmlns:a="http://schemas.openxmlformats.org/drawingml/2006/main">
             <a:r>
+              <a:t>- https://data-api.ecb.europa.eu/service/data/EXR/A.CAD.EUR.SP00.A?startPeriod=2024&amp;endPeriod=2024&amp;format=csvdata</a:t>
+            </a:r>
+          </a:p>
+          <a:p xmlns:a="http://schemas.openxmlformats.org/drawingml/2006/main">
+            <a:r>
               <a:t/>
             </a:r>
           </a:p>
@@ -1027,6 +1082,11 @@
           <a:p xmlns:a="http://schemas.openxmlformats.org/drawingml/2006/main">
             <a:r>
               <a:t>- USD 2021: ECB-EXR-A-USD-EUR-SP00-A-2021 · 1.1827403100775 currency units per EUR</a:t>
+            </a:r>
+          </a:p>
+          <a:p xmlns:a="http://schemas.openxmlformats.org/drawingml/2006/main">
+            <a:r>
+              <a:t>- CAD 2024: ECB-EXR-A-CAD-EUR-SP00-A-2024 · 1.482110546875 currency units per EUR</a:t>
             </a:r>
           </a:p>
         </p:txBody>
@@ -1126,6 +1186,11 @@
           </a:p>
           <a:p xmlns:a="http://schemas.openxmlformats.org/drawingml/2006/main">
             <a:r>
+              <a:t>- https://www150.statcan.gc.ca/t1/tbl1/en/tv.action?pid=2010007101</a:t>
+            </a:r>
+          </a:p>
+          <a:p xmlns:a="http://schemas.openxmlformats.org/drawingml/2006/main">
+            <a:r>
               <a:t>- https://www.ftc.gov/reports/e-cigarette-report-2021</a:t>
             </a:r>
           </a:p>
@@ -1156,6 +1221,11 @@
           </a:p>
           <a:p xmlns:a="http://schemas.openxmlformats.org/drawingml/2006/main">
             <a:r>
+              <a:t>- https://data-api.ecb.europa.eu/service/data/EXR/A.CAD.EUR.SP00.A?startPeriod=2024&amp;endPeriod=2024&amp;format=csvdata</a:t>
+            </a:r>
+          </a:p>
+          <a:p xmlns:a="http://schemas.openxmlformats.org/drawingml/2006/main">
+            <a:r>
               <a:t/>
             </a:r>
           </a:p>
@@ -1182,6 +1252,11 @@
           <a:p xmlns:a="http://schemas.openxmlformats.org/drawingml/2006/main">
             <a:r>
               <a:t>- USD 2021: ECB-EXR-A-USD-EUR-SP00-A-2021 · 1.1827403100775 currency units per EUR</a:t>
+            </a:r>
+          </a:p>
+          <a:p xmlns:a="http://schemas.openxmlformats.org/drawingml/2006/main">
+            <a:r>
+              <a:t>- CAD 2024: ECB-EXR-A-CAD-EUR-SP00-A-2024 · 1.482110546875 currency units per EUR</a:t>
             </a:r>
           </a:p>
         </p:txBody>
@@ -1281,6 +1356,11 @@
           </a:p>
           <a:p xmlns:a="http://schemas.openxmlformats.org/drawingml/2006/main">
             <a:r>
+              <a:t>- https://www150.statcan.gc.ca/t1/tbl1/en/tv.action?pid=2010007101</a:t>
+            </a:r>
+          </a:p>
+          <a:p xmlns:a="http://schemas.openxmlformats.org/drawingml/2006/main">
+            <a:r>
               <a:t>- https://www.ftc.gov/reports/e-cigarette-report-2021</a:t>
             </a:r>
           </a:p>
@@ -1311,6 +1391,11 @@
           </a:p>
           <a:p xmlns:a="http://schemas.openxmlformats.org/drawingml/2006/main">
             <a:r>
+              <a:t>- https://data-api.ecb.europa.eu/service/data/EXR/A.CAD.EUR.SP00.A?startPeriod=2024&amp;endPeriod=2024&amp;format=csvdata</a:t>
+            </a:r>
+          </a:p>
+          <a:p xmlns:a="http://schemas.openxmlformats.org/drawingml/2006/main">
+            <a:r>
               <a:t/>
             </a:r>
           </a:p>
@@ -1337,6 +1422,11 @@
           <a:p xmlns:a="http://schemas.openxmlformats.org/drawingml/2006/main">
             <a:r>
               <a:t>- USD 2021: ECB-EXR-A-USD-EUR-SP00-A-2021 · 1.1827403100775 currency units per EUR</a:t>
+            </a:r>
+          </a:p>
+          <a:p xmlns:a="http://schemas.openxmlformats.org/drawingml/2006/main">
+            <a:r>
+              <a:t>- CAD 2024: ECB-EXR-A-CAD-EUR-SP00-A-2024 · 1.482110546875 currency units per EUR</a:t>
             </a:r>
           </a:p>
         </p:txBody>
@@ -1436,6 +1526,11 @@
           </a:p>
           <a:p xmlns:a="http://schemas.openxmlformats.org/drawingml/2006/main">
             <a:r>
+              <a:t>- https://www150.statcan.gc.ca/t1/tbl1/en/tv.action?pid=2010007101</a:t>
+            </a:r>
+          </a:p>
+          <a:p xmlns:a="http://schemas.openxmlformats.org/drawingml/2006/main">
+            <a:r>
               <a:t>- https://www.ftc.gov/reports/e-cigarette-report-2021</a:t>
             </a:r>
           </a:p>
@@ -1466,6 +1561,11 @@
           </a:p>
           <a:p xmlns:a="http://schemas.openxmlformats.org/drawingml/2006/main">
             <a:r>
+              <a:t>- https://data-api.ecb.europa.eu/service/data/EXR/A.CAD.EUR.SP00.A?startPeriod=2024&amp;endPeriod=2024&amp;format=csvdata</a:t>
+            </a:r>
+          </a:p>
+          <a:p xmlns:a="http://schemas.openxmlformats.org/drawingml/2006/main">
+            <a:r>
               <a:t/>
             </a:r>
           </a:p>
@@ -1492,6 +1592,11 @@
           <a:p xmlns:a="http://schemas.openxmlformats.org/drawingml/2006/main">
             <a:r>
               <a:t>- USD 2021: ECB-EXR-A-USD-EUR-SP00-A-2021 · 1.1827403100775 currency units per EUR</a:t>
+            </a:r>
+          </a:p>
+          <a:p xmlns:a="http://schemas.openxmlformats.org/drawingml/2006/main">
+            <a:r>
+              <a:t>- CAD 2024: ECB-EXR-A-CAD-EUR-SP00-A-2024 · 1.482110546875 currency units per EUR</a:t>
             </a:r>
           </a:p>
         </p:txBody>
@@ -1591,6 +1696,11 @@
           </a:p>
           <a:p xmlns:a="http://schemas.openxmlformats.org/drawingml/2006/main">
             <a:r>
+              <a:t>- https://www150.statcan.gc.ca/t1/tbl1/en/tv.action?pid=2010007101</a:t>
+            </a:r>
+          </a:p>
+          <a:p xmlns:a="http://schemas.openxmlformats.org/drawingml/2006/main">
+            <a:r>
               <a:t>- https://www.ftc.gov/reports/e-cigarette-report-2021</a:t>
             </a:r>
           </a:p>
@@ -1621,6 +1731,11 @@
           </a:p>
           <a:p xmlns:a="http://schemas.openxmlformats.org/drawingml/2006/main">
             <a:r>
+              <a:t>- https://data-api.ecb.europa.eu/service/data/EXR/A.CAD.EUR.SP00.A?startPeriod=2024&amp;endPeriod=2024&amp;format=csvdata</a:t>
+            </a:r>
+          </a:p>
+          <a:p xmlns:a="http://schemas.openxmlformats.org/drawingml/2006/main">
+            <a:r>
               <a:t/>
             </a:r>
           </a:p>
@@ -1647,6 +1762,11 @@
           <a:p xmlns:a="http://schemas.openxmlformats.org/drawingml/2006/main">
             <a:r>
               <a:t>- USD 2021: ECB-EXR-A-USD-EUR-SP00-A-2021 · 1.1827403100775 currency units per EUR</a:t>
+            </a:r>
+          </a:p>
+          <a:p xmlns:a="http://schemas.openxmlformats.org/drawingml/2006/main">
+            <a:r>
+              <a:t>- CAD 2024: ECB-EXR-A-CAD-EUR-SP00-A-2024 · 1.482110546875 currency units per EUR</a:t>
             </a:r>
           </a:p>
         </p:txBody>
@@ -1746,6 +1866,11 @@
           </a:p>
           <a:p xmlns:a="http://schemas.openxmlformats.org/drawingml/2006/main">
             <a:r>
+              <a:t>- https://www150.statcan.gc.ca/t1/tbl1/en/tv.action?pid=2010007101</a:t>
+            </a:r>
+          </a:p>
+          <a:p xmlns:a="http://schemas.openxmlformats.org/drawingml/2006/main">
+            <a:r>
               <a:t>- https://www.ftc.gov/reports/e-cigarette-report-2021</a:t>
             </a:r>
           </a:p>
@@ -1776,6 +1901,11 @@
           </a:p>
           <a:p xmlns:a="http://schemas.openxmlformats.org/drawingml/2006/main">
             <a:r>
+              <a:t>- https://data-api.ecb.europa.eu/service/data/EXR/A.CAD.EUR.SP00.A?startPeriod=2024&amp;endPeriod=2024&amp;format=csvdata</a:t>
+            </a:r>
+          </a:p>
+          <a:p xmlns:a="http://schemas.openxmlformats.org/drawingml/2006/main">
+            <a:r>
               <a:t/>
             </a:r>
           </a:p>
@@ -1802,6 +1932,11 @@
           <a:p xmlns:a="http://schemas.openxmlformats.org/drawingml/2006/main">
             <a:r>
               <a:t>- USD 2021: ECB-EXR-A-USD-EUR-SP00-A-2021 · 1.1827403100775 currency units per EUR</a:t>
+            </a:r>
+          </a:p>
+          <a:p xmlns:a="http://schemas.openxmlformats.org/drawingml/2006/main">
+            <a:r>
+              <a:t>- CAD 2024: ECB-EXR-A-CAD-EUR-SP00-A-2024 · 1.482110546875 currency units per EUR</a:t>
             </a:r>
           </a:p>
         </p:txBody>
@@ -1901,6 +2036,11 @@
           </a:p>
           <a:p xmlns:a="http://schemas.openxmlformats.org/drawingml/2006/main">
             <a:r>
+              <a:t>- https://www150.statcan.gc.ca/t1/tbl1/en/tv.action?pid=2010007101</a:t>
+            </a:r>
+          </a:p>
+          <a:p xmlns:a="http://schemas.openxmlformats.org/drawingml/2006/main">
+            <a:r>
               <a:t>- https://www.ftc.gov/reports/e-cigarette-report-2021</a:t>
             </a:r>
           </a:p>
@@ -1931,6 +2071,11 @@
           </a:p>
           <a:p xmlns:a="http://schemas.openxmlformats.org/drawingml/2006/main">
             <a:r>
+              <a:t>- https://data-api.ecb.europa.eu/service/data/EXR/A.CAD.EUR.SP00.A?startPeriod=2024&amp;endPeriod=2024&amp;format=csvdata</a:t>
+            </a:r>
+          </a:p>
+          <a:p xmlns:a="http://schemas.openxmlformats.org/drawingml/2006/main">
+            <a:r>
               <a:t/>
             </a:r>
           </a:p>
@@ -1957,6 +2102,11 @@
           <a:p xmlns:a="http://schemas.openxmlformats.org/drawingml/2006/main">
             <a:r>
               <a:t>- USD 2021: ECB-EXR-A-USD-EUR-SP00-A-2021 · 1.1827403100775 currency units per EUR</a:t>
+            </a:r>
+          </a:p>
+          <a:p xmlns:a="http://schemas.openxmlformats.org/drawingml/2006/main">
+            <a:r>
+              <a:t>- CAD 2024: ECB-EXR-A-CAD-EUR-SP00-A-2024 · 1.482110546875 currency units per EUR</a:t>
             </a:r>
           </a:p>
         </p:txBody>
@@ -2056,6 +2206,11 @@
           </a:p>
           <a:p xmlns:a="http://schemas.openxmlformats.org/drawingml/2006/main">
             <a:r>
+              <a:t>- https://www150.statcan.gc.ca/t1/tbl1/en/tv.action?pid=2010007101</a:t>
+            </a:r>
+          </a:p>
+          <a:p xmlns:a="http://schemas.openxmlformats.org/drawingml/2006/main">
+            <a:r>
               <a:t>- https://www.ftc.gov/reports/e-cigarette-report-2021</a:t>
             </a:r>
           </a:p>
@@ -2086,6 +2241,11 @@
           </a:p>
           <a:p xmlns:a="http://schemas.openxmlformats.org/drawingml/2006/main">
             <a:r>
+              <a:t>- https://data-api.ecb.europa.eu/service/data/EXR/A.CAD.EUR.SP00.A?startPeriod=2024&amp;endPeriod=2024&amp;format=csvdata</a:t>
+            </a:r>
+          </a:p>
+          <a:p xmlns:a="http://schemas.openxmlformats.org/drawingml/2006/main">
+            <a:r>
               <a:t/>
             </a:r>
           </a:p>
@@ -2112,6 +2272,11 @@
           <a:p xmlns:a="http://schemas.openxmlformats.org/drawingml/2006/main">
             <a:r>
               <a:t>- USD 2021: ECB-EXR-A-USD-EUR-SP00-A-2021 · 1.1827403100775 currency units per EUR</a:t>
+            </a:r>
+          </a:p>
+          <a:p xmlns:a="http://schemas.openxmlformats.org/drawingml/2006/main">
+            <a:r>
+              <a:t>- CAD 2024: ECB-EXR-A-CAD-EUR-SP00-A-2024 · 1.482110546875 currency units per EUR</a:t>
             </a:r>
           </a:p>
         </p:txBody>
@@ -2211,6 +2376,11 @@
           </a:p>
           <a:p xmlns:a="http://schemas.openxmlformats.org/drawingml/2006/main">
             <a:r>
+              <a:t>- https://www150.statcan.gc.ca/t1/tbl1/en/tv.action?pid=2010007101</a:t>
+            </a:r>
+          </a:p>
+          <a:p xmlns:a="http://schemas.openxmlformats.org/drawingml/2006/main">
+            <a:r>
               <a:t>- https://www.ftc.gov/reports/e-cigarette-report-2021</a:t>
             </a:r>
           </a:p>
@@ -2241,6 +2411,11 @@
           </a:p>
           <a:p xmlns:a="http://schemas.openxmlformats.org/drawingml/2006/main">
             <a:r>
+              <a:t>- https://data-api.ecb.europa.eu/service/data/EXR/A.CAD.EUR.SP00.A?startPeriod=2024&amp;endPeriod=2024&amp;format=csvdata</a:t>
+            </a:r>
+          </a:p>
+          <a:p xmlns:a="http://schemas.openxmlformats.org/drawingml/2006/main">
+            <a:r>
               <a:t/>
             </a:r>
           </a:p>
@@ -2267,6 +2442,11 @@
           <a:p xmlns:a="http://schemas.openxmlformats.org/drawingml/2006/main">
             <a:r>
               <a:t>- USD 2021: ECB-EXR-A-USD-EUR-SP00-A-2021 · 1.1827403100775 currency units per EUR</a:t>
+            </a:r>
+          </a:p>
+          <a:p xmlns:a="http://schemas.openxmlformats.org/drawingml/2006/main">
+            <a:r>
+              <a:t>- CAD 2024: ECB-EXR-A-CAD-EUR-SP00-A-2024 · 1.482110546875 currency units per EUR</a:t>
             </a:r>
           </a:p>
         </p:txBody>
@@ -5222,17 +5402,17 @@
   </p:cSld>
   <p:clrMap bg1="lt1" tx1="dk1" bg2="lt2" tx2="dk2" accent1="accent1" accent2="accent2" accent3="accent3" accent4="accent4" accent5="accent5" accent6="accent6" hlink="hlink" folHlink="folHlink"/>
   <p:sldLayoutIdLst>
-    <p:sldLayoutId xmlns:r="http://schemas.openxmlformats.org/officeDocument/2006/relationships" id="2147483649" r:id="R36a67585548742c2"/>
-    <p:sldLayoutId xmlns:r="http://schemas.openxmlformats.org/officeDocument/2006/relationships" id="2147483650" r:id="R4e76c1fd9b6e45d7"/>
-    <p:sldLayoutId xmlns:r="http://schemas.openxmlformats.org/officeDocument/2006/relationships" id="2147483651" r:id="Rc03bf58751224094"/>
-    <p:sldLayoutId xmlns:r="http://schemas.openxmlformats.org/officeDocument/2006/relationships" id="2147483652" r:id="R86fa4aa19d5f47cd"/>
-    <p:sldLayoutId xmlns:r="http://schemas.openxmlformats.org/officeDocument/2006/relationships" id="2147483653" r:id="Rb05b88ace2024790"/>
-    <p:sldLayoutId xmlns:r="http://schemas.openxmlformats.org/officeDocument/2006/relationships" id="2147483654" r:id="R6b9c8eb0b1ae44f3"/>
-    <p:sldLayoutId xmlns:r="http://schemas.openxmlformats.org/officeDocument/2006/relationships" id="2147483655" r:id="R3f289171080e4723"/>
-    <p:sldLayoutId xmlns:r="http://schemas.openxmlformats.org/officeDocument/2006/relationships" id="2147483656" r:id="R2ed6887c35144d5a"/>
-    <p:sldLayoutId xmlns:r="http://schemas.openxmlformats.org/officeDocument/2006/relationships" id="2147483657" r:id="R804b2b083d484efa"/>
-    <p:sldLayoutId xmlns:r="http://schemas.openxmlformats.org/officeDocument/2006/relationships" id="2147483658" r:id="R1d9ee90dd88d4571"/>
-    <p:sldLayoutId xmlns:r="http://schemas.openxmlformats.org/officeDocument/2006/relationships" id="2147483659" r:id="R6b52bc519f6d4fcb"/>
+    <p:sldLayoutId xmlns:r="http://schemas.openxmlformats.org/officeDocument/2006/relationships" id="2147483649" r:id="R096f07c71c0c415e"/>
+    <p:sldLayoutId xmlns:r="http://schemas.openxmlformats.org/officeDocument/2006/relationships" id="2147483650" r:id="Rfd64cbc4ea884d5b"/>
+    <p:sldLayoutId xmlns:r="http://schemas.openxmlformats.org/officeDocument/2006/relationships" id="2147483651" r:id="Rbd4f3f6f061e42b4"/>
+    <p:sldLayoutId xmlns:r="http://schemas.openxmlformats.org/officeDocument/2006/relationships" id="2147483652" r:id="R1410289c09724547"/>
+    <p:sldLayoutId xmlns:r="http://schemas.openxmlformats.org/officeDocument/2006/relationships" id="2147483653" r:id="Rb3ec1ea85be040f8"/>
+    <p:sldLayoutId xmlns:r="http://schemas.openxmlformats.org/officeDocument/2006/relationships" id="2147483654" r:id="Rba47bb3c22ce41d4"/>
+    <p:sldLayoutId xmlns:r="http://schemas.openxmlformats.org/officeDocument/2006/relationships" id="2147483655" r:id="R4b824153450d465b"/>
+    <p:sldLayoutId xmlns:r="http://schemas.openxmlformats.org/officeDocument/2006/relationships" id="2147483656" r:id="R271531bfc9e64049"/>
+    <p:sldLayoutId xmlns:r="http://schemas.openxmlformats.org/officeDocument/2006/relationships" id="2147483657" r:id="Rfe71133028db4972"/>
+    <p:sldLayoutId xmlns:r="http://schemas.openxmlformats.org/officeDocument/2006/relationships" id="2147483658" r:id="R8a31a11ca4af4bc1"/>
+    <p:sldLayoutId xmlns:r="http://schemas.openxmlformats.org/officeDocument/2006/relationships" id="2147483659" r:id="R739f458340c14780"/>
   </p:sldLayoutIdLst>
   <p:txStyles>
     <p:titleStyle>
@@ -6132,7 +6312,7 @@
                 <a:ea typeface="Aptos"/>
                 <a:cs typeface="Aptos"/>
               </a:rPr>
-              <a:t>2026.07.24-18</a:t>
+              <a:t>2026.07.24-19</a:t>
             </a:r>
           </a:p>
         </p:txBody>
@@ -6652,7 +6832,7 @@
                 <a:ea typeface="Aptos"/>
                 <a:cs typeface="Aptos"/>
               </a:rPr>
-              <a:t>Independent public evidence summary · 2026.07.24-18 · 2026-07-24 · Sources: WIPO licensing; dispute resolution; IPscore</a:t>
+              <a:t>Independent public evidence summary · 2026.07.24-19 · 2026-07-24 · Sources: WIPO licensing; dispute resolution; IPscore</a:t>
             </a:r>
           </a:p>
         </p:txBody>
@@ -7811,7 +7991,7 @@
                 <a:ea typeface="Aptos"/>
                 <a:cs typeface="Aptos"/>
               </a:rPr>
-              <a:t>Independent public evidence summary · 2026.07.24-18 · 2026-07-24 · Sources: WIPO IP valuation; Market-values</a:t>
+              <a:t>Independent public evidence summary · 2026.07.24-19 · 2026-07-24 · Sources: WIPO IP valuation; Market-values</a:t>
             </a:r>
           </a:p>
         </p:txBody>
@@ -8739,7 +8919,7 @@
                 <a:ea typeface="Aptos"/>
                 <a:cs typeface="Aptos"/>
               </a:rPr>
-              <a:t>Version 2026.07.24-18 · 2026-07-24 · 12 / 12</a:t>
+              <a:t>Version 2026.07.24-19 · 2026-07-24 · 12 / 12</a:t>
             </a:r>
           </a:p>
         </p:txBody>
@@ -9059,7 +9239,7 @@
                 <a:ea typeface="Aptos"/>
                 <a:cs typeface="Aptos"/>
               </a:rPr>
-              <a:t>Independent public evidence summary · 2026.07.24-18 · 2026-07-24 · Sources: Atlas readiness; WIPO</a:t>
+              <a:t>Independent public evidence summary · 2026.07.24-19 · 2026-07-24 · Sources: Atlas readiness; WIPO</a:t>
             </a:r>
           </a:p>
         </p:txBody>
@@ -9674,7 +9854,7 @@
                 <a:ea typeface="Aptos"/>
                 <a:cs typeface="Aptos"/>
               </a:rPr>
-              <a:t>Independent public evidence summary · 2026.07.24-18 · 2026-07-24 · Sources: EP3032975B2</a:t>
+              <a:t>Independent public evidence summary · 2026.07.24-19 · 2026-07-24 · Sources: EP3032975B2</a:t>
             </a:r>
           </a:p>
         </p:txBody>
@@ -10289,7 +10469,7 @@
                 <a:ea typeface="Aptos"/>
                 <a:cs typeface="Aptos"/>
               </a:rPr>
-              <a:t>Independent public evidence summary · 2026.07.24-18 · 2026-07-24 · Sources: EPO Register; EP3032975B2</a:t>
+              <a:t>Independent public evidence summary · 2026.07.24-19 · 2026-07-24 · Sources: EPO Register; EP3032975B2</a:t>
             </a:r>
           </a:p>
         </p:txBody>
@@ -11260,7 +11440,7 @@
                 <a:ea typeface="Aptos"/>
                 <a:cs typeface="Aptos"/>
               </a:rPr>
-              <a:t>Independent public evidence summary · 2026.07.24-18 · 2026-07-24 · Sources: EP3032975B2; 7 O 3341/24</a:t>
+              <a:t>Independent public evidence summary · 2026.07.24-19 · 2026-07-24 · Sources: EP3032975B2; 7 O 3341/24</a:t>
             </a:r>
           </a:p>
         </p:txBody>
@@ -11875,7 +12055,7 @@
                 <a:ea typeface="Aptos"/>
                 <a:cs typeface="Aptos"/>
               </a:rPr>
-              <a:t>Independent public evidence summary · 2026.07.24-18 · 2026-07-24 · Sources: Market-values; FTC; IMARC; GVR; Fortune; European Commission</a:t>
+              <a:t>Independent public evidence summary · 2026.07.24-19 · 2026-07-24 · Sources: Statistics Canada; Market-values; FTC; IMARC; GVR; Fortune; European Commission</a:t>
             </a:r>
           </a:p>
         </p:txBody>
@@ -12026,7 +12206,7 @@
                 <a:ea typeface="Aptos"/>
                 <a:cs typeface="Aptos"/>
               </a:rPr>
-              <a:t>27</a:t>
+              <a:t>34</a:t>
             </a:r>
           </a:p>
         </p:txBody>
@@ -12565,7 +12745,7 @@
               <a:buNone/>
             </a:pPr>
             <a:r>
-              <a:rPr sz="1500" b="0">
+              <a:rPr sz="1350" b="0">
                 <a:solidFill>
                   <a:srgbClr val="182935"/>
                 </a:solidFill>
@@ -12573,7 +12753,7 @@
                 <a:ea typeface="Aptos"/>
                 <a:cs typeface="Aptos"/>
               </a:rPr>
-              <a:t>NZ 2024: NZD 533.7–731.2m (≈EUR 298.5–408.9m; ECB 2024) is a supported model. FTC 2021: USD 2.763bn (≈EUR 2.336bn; ECB 2021) is manufacturer reporting. EU and commercial figures are not summed.</a:t>
+              <a:t>Canada 2024: retail CAD 1.219bn (≈EUR 822.6m; ECB 2024); shipments CAD 1.161bn (≈EUR 783.2m; ECB 2024); all retail quarters quality E and bridge open. FTC 2021 USD 2.763bn (≈EUR 2.336bn; ECB 2021) is manufacturer reporting. Do not sum the routes.</a:t>
             </a:r>
           </a:p>
         </p:txBody>
@@ -12846,7 +13026,7 @@
                 <a:ea typeface="Aptos"/>
                 <a:cs typeface="Aptos"/>
               </a:rPr>
-              <a:t>Independent public evidence summary · 2026.07.24-18 · 2026-07-24 · Sources: WIPO licensing; WIPO IP Finance</a:t>
+              <a:t>Independent public evidence summary · 2026.07.24-19 · 2026-07-24 · Sources: WIPO licensing; WIPO IP Finance</a:t>
             </a:r>
           </a:p>
         </p:txBody>
@@ -13461,7 +13641,7 @@
                 <a:ea typeface="Aptos"/>
                 <a:cs typeface="Aptos"/>
               </a:rPr>
-              <a:t>Independent public evidence summary · 2026.07.24-18 · 2026-07-24 · Sources: Evidence Register; EPO; WIPO</a:t>
+              <a:t>Independent public evidence summary · 2026.07.24-19 · 2026-07-24 · Sources: Evidence Register; EPO; WIPO</a:t>
             </a:r>
           </a:p>
         </p:txBody>
@@ -14268,7 +14448,7 @@
                 <a:ea typeface="Aptos"/>
                 <a:cs typeface="Aptos"/>
               </a:rPr>
-              <a:t>Independent public evidence summary · 2026.07.24-18 · 2026-07-24 · Sources: Evidence Register</a:t>
+              <a:t>Independent public evidence summary · 2026.07.24-19 · 2026-07-24 · Sources: Evidence Register</a:t>
             </a:r>
           </a:p>
         </p:txBody>

--- a/site/downloads/pixan-bank-deck-medium-en.pptx
+++ b/site/downloads/pixan-bank-deck-medium-en.pptx
@@ -2,24 +2,24 @@
 <file path=ppt/presentation.xml><?xml version="1.0" encoding="utf-8"?>
 <p:presentation xmlns:p="http://schemas.openxmlformats.org/presentationml/2006/main">
   <p:sldMasterIdLst>
-    <p:sldMasterId xmlns:r="http://schemas.openxmlformats.org/officeDocument/2006/relationships" id="2147483648" r:id="Rc5fa7083be4b4b30"/>
+    <p:sldMasterId xmlns:r="http://schemas.openxmlformats.org/officeDocument/2006/relationships" id="2147483648" r:id="Rbc2454242da643ac"/>
   </p:sldMasterIdLst>
   <p:notesMasterIdLst>
-    <p:notesMasterId xmlns:r="http://schemas.openxmlformats.org/officeDocument/2006/relationships" r:id="R1257e6d53d7b46f2"/>
+    <p:notesMasterId xmlns:r="http://schemas.openxmlformats.org/officeDocument/2006/relationships" r:id="Rd8f1b4a6e9e04567"/>
   </p:notesMasterIdLst>
   <p:sldIdLst>
-    <p:sldId xmlns:r="http://schemas.openxmlformats.org/officeDocument/2006/relationships" id="256" r:id="Rf615dc3adac348eb"/>
-    <p:sldId xmlns:r="http://schemas.openxmlformats.org/officeDocument/2006/relationships" id="257" r:id="Rdd7b9d47e0bb4448"/>
-    <p:sldId xmlns:r="http://schemas.openxmlformats.org/officeDocument/2006/relationships" id="258" r:id="Rf3cfe9b732694445"/>
-    <p:sldId xmlns:r="http://schemas.openxmlformats.org/officeDocument/2006/relationships" id="259" r:id="Rd6be21e0ab174734"/>
-    <p:sldId xmlns:r="http://schemas.openxmlformats.org/officeDocument/2006/relationships" id="260" r:id="Ra67b2f49bdbe45c8"/>
-    <p:sldId xmlns:r="http://schemas.openxmlformats.org/officeDocument/2006/relationships" id="261" r:id="R2fee7bcf9a4040a1"/>
-    <p:sldId xmlns:r="http://schemas.openxmlformats.org/officeDocument/2006/relationships" id="262" r:id="Rfb94a84122af46a3"/>
-    <p:sldId xmlns:r="http://schemas.openxmlformats.org/officeDocument/2006/relationships" id="263" r:id="R7f5c96d07f994553"/>
-    <p:sldId xmlns:r="http://schemas.openxmlformats.org/officeDocument/2006/relationships" id="264" r:id="Rc6221bbfb5244d70"/>
-    <p:sldId xmlns:r="http://schemas.openxmlformats.org/officeDocument/2006/relationships" id="265" r:id="Rae1394c433e54482"/>
-    <p:sldId xmlns:r="http://schemas.openxmlformats.org/officeDocument/2006/relationships" id="266" r:id="R32a7988faccd4784"/>
-    <p:sldId xmlns:r="http://schemas.openxmlformats.org/officeDocument/2006/relationships" id="267" r:id="R50756bc65e01490f"/>
+    <p:sldId xmlns:r="http://schemas.openxmlformats.org/officeDocument/2006/relationships" id="256" r:id="Recd85c4c9138496a"/>
+    <p:sldId xmlns:r="http://schemas.openxmlformats.org/officeDocument/2006/relationships" id="257" r:id="R98736bb56f354012"/>
+    <p:sldId xmlns:r="http://schemas.openxmlformats.org/officeDocument/2006/relationships" id="258" r:id="R3e3e60907eda4b58"/>
+    <p:sldId xmlns:r="http://schemas.openxmlformats.org/officeDocument/2006/relationships" id="259" r:id="R3612f948c962484e"/>
+    <p:sldId xmlns:r="http://schemas.openxmlformats.org/officeDocument/2006/relationships" id="260" r:id="Ree635b57cf7a4b59"/>
+    <p:sldId xmlns:r="http://schemas.openxmlformats.org/officeDocument/2006/relationships" id="261" r:id="Rb28fcbc1f0bf4273"/>
+    <p:sldId xmlns:r="http://schemas.openxmlformats.org/officeDocument/2006/relationships" id="262" r:id="Ra3dd099bac89423e"/>
+    <p:sldId xmlns:r="http://schemas.openxmlformats.org/officeDocument/2006/relationships" id="263" r:id="Rdce3784964e74dbd"/>
+    <p:sldId xmlns:r="http://schemas.openxmlformats.org/officeDocument/2006/relationships" id="264" r:id="Rfb10fa7f975c458b"/>
+    <p:sldId xmlns:r="http://schemas.openxmlformats.org/officeDocument/2006/relationships" id="265" r:id="R34a422206d0e4095"/>
+    <p:sldId xmlns:r="http://schemas.openxmlformats.org/officeDocument/2006/relationships" id="266" r:id="R5fdc5188ac8a475b"/>
+    <p:sldId xmlns:r="http://schemas.openxmlformats.org/officeDocument/2006/relationships" id="267" r:id="R6de5431a6165453e"/>
   </p:sldIdLst>
   <p:sldSz cx="12191999" cy="6858000"/>
   <p:notesSz cx="6858000" cy="9144000"/>
@@ -5402,17 +5402,17 @@
   </p:cSld>
   <p:clrMap bg1="lt1" tx1="dk1" bg2="lt2" tx2="dk2" accent1="accent1" accent2="accent2" accent3="accent3" accent4="accent4" accent5="accent5" accent6="accent6" hlink="hlink" folHlink="folHlink"/>
   <p:sldLayoutIdLst>
-    <p:sldLayoutId xmlns:r="http://schemas.openxmlformats.org/officeDocument/2006/relationships" id="2147483649" r:id="R096f07c71c0c415e"/>
-    <p:sldLayoutId xmlns:r="http://schemas.openxmlformats.org/officeDocument/2006/relationships" id="2147483650" r:id="Rfd64cbc4ea884d5b"/>
-    <p:sldLayoutId xmlns:r="http://schemas.openxmlformats.org/officeDocument/2006/relationships" id="2147483651" r:id="Rbd4f3f6f061e42b4"/>
-    <p:sldLayoutId xmlns:r="http://schemas.openxmlformats.org/officeDocument/2006/relationships" id="2147483652" r:id="R1410289c09724547"/>
-    <p:sldLayoutId xmlns:r="http://schemas.openxmlformats.org/officeDocument/2006/relationships" id="2147483653" r:id="Rb3ec1ea85be040f8"/>
-    <p:sldLayoutId xmlns:r="http://schemas.openxmlformats.org/officeDocument/2006/relationships" id="2147483654" r:id="Rba47bb3c22ce41d4"/>
-    <p:sldLayoutId xmlns:r="http://schemas.openxmlformats.org/officeDocument/2006/relationships" id="2147483655" r:id="R4b824153450d465b"/>
-    <p:sldLayoutId xmlns:r="http://schemas.openxmlformats.org/officeDocument/2006/relationships" id="2147483656" r:id="R271531bfc9e64049"/>
-    <p:sldLayoutId xmlns:r="http://schemas.openxmlformats.org/officeDocument/2006/relationships" id="2147483657" r:id="Rfe71133028db4972"/>
-    <p:sldLayoutId xmlns:r="http://schemas.openxmlformats.org/officeDocument/2006/relationships" id="2147483658" r:id="R8a31a11ca4af4bc1"/>
-    <p:sldLayoutId xmlns:r="http://schemas.openxmlformats.org/officeDocument/2006/relationships" id="2147483659" r:id="R739f458340c14780"/>
+    <p:sldLayoutId xmlns:r="http://schemas.openxmlformats.org/officeDocument/2006/relationships" id="2147483649" r:id="Rf6ebe3a53f014f3a"/>
+    <p:sldLayoutId xmlns:r="http://schemas.openxmlformats.org/officeDocument/2006/relationships" id="2147483650" r:id="R9f8306385a47458b"/>
+    <p:sldLayoutId xmlns:r="http://schemas.openxmlformats.org/officeDocument/2006/relationships" id="2147483651" r:id="R645580898d184431"/>
+    <p:sldLayoutId xmlns:r="http://schemas.openxmlformats.org/officeDocument/2006/relationships" id="2147483652" r:id="R07f81a693d5644a9"/>
+    <p:sldLayoutId xmlns:r="http://schemas.openxmlformats.org/officeDocument/2006/relationships" id="2147483653" r:id="Ra9234f655cf042e2"/>
+    <p:sldLayoutId xmlns:r="http://schemas.openxmlformats.org/officeDocument/2006/relationships" id="2147483654" r:id="R8f3b9f59d72944a6"/>
+    <p:sldLayoutId xmlns:r="http://schemas.openxmlformats.org/officeDocument/2006/relationships" id="2147483655" r:id="Ra4804a83250c4050"/>
+    <p:sldLayoutId xmlns:r="http://schemas.openxmlformats.org/officeDocument/2006/relationships" id="2147483656" r:id="R67ca08be54f44896"/>
+    <p:sldLayoutId xmlns:r="http://schemas.openxmlformats.org/officeDocument/2006/relationships" id="2147483657" r:id="R98e2e01a2af845e3"/>
+    <p:sldLayoutId xmlns:r="http://schemas.openxmlformats.org/officeDocument/2006/relationships" id="2147483658" r:id="R677c81865e534107"/>
+    <p:sldLayoutId xmlns:r="http://schemas.openxmlformats.org/officeDocument/2006/relationships" id="2147483659" r:id="R974a486383de43b8"/>
   </p:sldLayoutIdLst>
   <p:txStyles>
     <p:titleStyle>
@@ -6312,7 +6312,7 @@
                 <a:ea typeface="Aptos"/>
                 <a:cs typeface="Aptos"/>
               </a:rPr>
-              <a:t>2026.07.24-19</a:t>
+              <a:t>2026.07.24-20</a:t>
             </a:r>
           </a:p>
         </p:txBody>
@@ -6832,7 +6832,7 @@
                 <a:ea typeface="Aptos"/>
                 <a:cs typeface="Aptos"/>
               </a:rPr>
-              <a:t>Independent public evidence summary · 2026.07.24-19 · 2026-07-24 · Sources: WIPO licensing; dispute resolution; IPscore</a:t>
+              <a:t>Independent public evidence summary · 2026.07.24-20 · 2026-07-24 · Sources: WIPO licensing; dispute resolution; IPscore</a:t>
             </a:r>
           </a:p>
         </p:txBody>
@@ -7991,7 +7991,7 @@
                 <a:ea typeface="Aptos"/>
                 <a:cs typeface="Aptos"/>
               </a:rPr>
-              <a:t>Independent public evidence summary · 2026.07.24-19 · 2026-07-24 · Sources: WIPO IP valuation; Market-values</a:t>
+              <a:t>Independent public evidence summary · 2026.07.24-20 · 2026-07-24 · Sources: WIPO IP valuation; Market-values</a:t>
             </a:r>
           </a:p>
         </p:txBody>
@@ -8919,7 +8919,7 @@
                 <a:ea typeface="Aptos"/>
                 <a:cs typeface="Aptos"/>
               </a:rPr>
-              <a:t>Version 2026.07.24-19 · 2026-07-24 · 12 / 12</a:t>
+              <a:t>Version 2026.07.24-20 · 2026-07-24 · 12 / 12</a:t>
             </a:r>
           </a:p>
         </p:txBody>
@@ -9239,7 +9239,7 @@
                 <a:ea typeface="Aptos"/>
                 <a:cs typeface="Aptos"/>
               </a:rPr>
-              <a:t>Independent public evidence summary · 2026.07.24-19 · 2026-07-24 · Sources: Atlas readiness; WIPO</a:t>
+              <a:t>Independent public evidence summary · 2026.07.24-20 · 2026-07-24 · Sources: Atlas readiness; WIPO</a:t>
             </a:r>
           </a:p>
         </p:txBody>
@@ -9854,7 +9854,7 @@
                 <a:ea typeface="Aptos"/>
                 <a:cs typeface="Aptos"/>
               </a:rPr>
-              <a:t>Independent public evidence summary · 2026.07.24-19 · 2026-07-24 · Sources: EP3032975B2</a:t>
+              <a:t>Independent public evidence summary · 2026.07.24-20 · 2026-07-24 · Sources: EP3032975B2</a:t>
             </a:r>
           </a:p>
         </p:txBody>
@@ -10469,7 +10469,7 @@
                 <a:ea typeface="Aptos"/>
                 <a:cs typeface="Aptos"/>
               </a:rPr>
-              <a:t>Independent public evidence summary · 2026.07.24-19 · 2026-07-24 · Sources: EPO Register; EP3032975B2</a:t>
+              <a:t>Independent public evidence summary · 2026.07.24-20 · 2026-07-24 · Sources: EPO Register; EP3032975B2</a:t>
             </a:r>
           </a:p>
         </p:txBody>
@@ -11440,7 +11440,7 @@
                 <a:ea typeface="Aptos"/>
                 <a:cs typeface="Aptos"/>
               </a:rPr>
-              <a:t>Independent public evidence summary · 2026.07.24-19 · 2026-07-24 · Sources: EP3032975B2; 7 O 3341/24</a:t>
+              <a:t>Independent public evidence summary · 2026.07.24-20 · 2026-07-24 · Sources: EP3032975B2; 7 O 3341/24</a:t>
             </a:r>
           </a:p>
         </p:txBody>
@@ -12055,7 +12055,7 @@
                 <a:ea typeface="Aptos"/>
                 <a:cs typeface="Aptos"/>
               </a:rPr>
-              <a:t>Independent public evidence summary · 2026.07.24-19 · 2026-07-24 · Sources: Statistics Canada; Market-values; FTC; IMARC; GVR; Fortune; European Commission</a:t>
+              <a:t>Independent public evidence summary · 2026.07.24-20 · 2026-07-24 · Sources: Statistics Canada; Market-values; FTC; IMARC; GVR; Fortune; European Commission</a:t>
             </a:r>
           </a:p>
         </p:txBody>
@@ -13026,7 +13026,7 @@
                 <a:ea typeface="Aptos"/>
                 <a:cs typeface="Aptos"/>
               </a:rPr>
-              <a:t>Independent public evidence summary · 2026.07.24-19 · 2026-07-24 · Sources: WIPO licensing; WIPO IP Finance</a:t>
+              <a:t>Independent public evidence summary · 2026.07.24-20 · 2026-07-24 · Sources: WIPO licensing; WIPO IP Finance</a:t>
             </a:r>
           </a:p>
         </p:txBody>
@@ -13641,7 +13641,7 @@
                 <a:ea typeface="Aptos"/>
                 <a:cs typeface="Aptos"/>
               </a:rPr>
-              <a:t>Independent public evidence summary · 2026.07.24-19 · 2026-07-24 · Sources: Evidence Register; EPO; WIPO</a:t>
+              <a:t>Independent public evidence summary · 2026.07.24-20 · 2026-07-24 · Sources: Evidence Register; EPO; WIPO</a:t>
             </a:r>
           </a:p>
         </p:txBody>
@@ -14448,7 +14448,7 @@
                 <a:ea typeface="Aptos"/>
                 <a:cs typeface="Aptos"/>
               </a:rPr>
-              <a:t>Independent public evidence summary · 2026.07.24-19 · 2026-07-24 · Sources: Evidence Register</a:t>
+              <a:t>Independent public evidence summary · 2026.07.24-20 · 2026-07-24 · Sources: Evidence Register</a:t>
             </a:r>
           </a:p>
         </p:txBody>

--- a/site/downloads/pixan-bank-deck-medium-en.pptx
+++ b/site/downloads/pixan-bank-deck-medium-en.pptx
@@ -2,24 +2,24 @@
 <file path=ppt/presentation.xml><?xml version="1.0" encoding="utf-8"?>
 <p:presentation xmlns:p="http://schemas.openxmlformats.org/presentationml/2006/main">
   <p:sldMasterIdLst>
-    <p:sldMasterId xmlns:r="http://schemas.openxmlformats.org/officeDocument/2006/relationships" id="2147483648" r:id="Rbc2454242da643ac"/>
+    <p:sldMasterId xmlns:r="http://schemas.openxmlformats.org/officeDocument/2006/relationships" id="2147483648" r:id="R2dd39a76bf074fe3"/>
   </p:sldMasterIdLst>
   <p:notesMasterIdLst>
-    <p:notesMasterId xmlns:r="http://schemas.openxmlformats.org/officeDocument/2006/relationships" r:id="Rd8f1b4a6e9e04567"/>
+    <p:notesMasterId xmlns:r="http://schemas.openxmlformats.org/officeDocument/2006/relationships" r:id="R6fb15ce85e7f44cc"/>
   </p:notesMasterIdLst>
   <p:sldIdLst>
-    <p:sldId xmlns:r="http://schemas.openxmlformats.org/officeDocument/2006/relationships" id="256" r:id="Recd85c4c9138496a"/>
-    <p:sldId xmlns:r="http://schemas.openxmlformats.org/officeDocument/2006/relationships" id="257" r:id="R98736bb56f354012"/>
-    <p:sldId xmlns:r="http://schemas.openxmlformats.org/officeDocument/2006/relationships" id="258" r:id="R3e3e60907eda4b58"/>
-    <p:sldId xmlns:r="http://schemas.openxmlformats.org/officeDocument/2006/relationships" id="259" r:id="R3612f948c962484e"/>
-    <p:sldId xmlns:r="http://schemas.openxmlformats.org/officeDocument/2006/relationships" id="260" r:id="Ree635b57cf7a4b59"/>
-    <p:sldId xmlns:r="http://schemas.openxmlformats.org/officeDocument/2006/relationships" id="261" r:id="Rb28fcbc1f0bf4273"/>
-    <p:sldId xmlns:r="http://schemas.openxmlformats.org/officeDocument/2006/relationships" id="262" r:id="Ra3dd099bac89423e"/>
-    <p:sldId xmlns:r="http://schemas.openxmlformats.org/officeDocument/2006/relationships" id="263" r:id="Rdce3784964e74dbd"/>
-    <p:sldId xmlns:r="http://schemas.openxmlformats.org/officeDocument/2006/relationships" id="264" r:id="Rfb10fa7f975c458b"/>
-    <p:sldId xmlns:r="http://schemas.openxmlformats.org/officeDocument/2006/relationships" id="265" r:id="R34a422206d0e4095"/>
-    <p:sldId xmlns:r="http://schemas.openxmlformats.org/officeDocument/2006/relationships" id="266" r:id="R5fdc5188ac8a475b"/>
-    <p:sldId xmlns:r="http://schemas.openxmlformats.org/officeDocument/2006/relationships" id="267" r:id="R6de5431a6165453e"/>
+    <p:sldId xmlns:r="http://schemas.openxmlformats.org/officeDocument/2006/relationships" id="256" r:id="R0806a344b4d84f46"/>
+    <p:sldId xmlns:r="http://schemas.openxmlformats.org/officeDocument/2006/relationships" id="257" r:id="R42961c9e222a4b31"/>
+    <p:sldId xmlns:r="http://schemas.openxmlformats.org/officeDocument/2006/relationships" id="258" r:id="R0c6306a5783a44d1"/>
+    <p:sldId xmlns:r="http://schemas.openxmlformats.org/officeDocument/2006/relationships" id="259" r:id="Rc9cafd46ee2c44c0"/>
+    <p:sldId xmlns:r="http://schemas.openxmlformats.org/officeDocument/2006/relationships" id="260" r:id="R5d7bc4a31c324ed5"/>
+    <p:sldId xmlns:r="http://schemas.openxmlformats.org/officeDocument/2006/relationships" id="261" r:id="R14653efce29b44db"/>
+    <p:sldId xmlns:r="http://schemas.openxmlformats.org/officeDocument/2006/relationships" id="262" r:id="R3a22fe0a42914ea3"/>
+    <p:sldId xmlns:r="http://schemas.openxmlformats.org/officeDocument/2006/relationships" id="263" r:id="R4c8763fb5e0c4b23"/>
+    <p:sldId xmlns:r="http://schemas.openxmlformats.org/officeDocument/2006/relationships" id="264" r:id="R76e6e6c8c7eb4307"/>
+    <p:sldId xmlns:r="http://schemas.openxmlformats.org/officeDocument/2006/relationships" id="265" r:id="R0e094797a84b4ea3"/>
+    <p:sldId xmlns:r="http://schemas.openxmlformats.org/officeDocument/2006/relationships" id="266" r:id="Rbd77954a3e294994"/>
+    <p:sldId xmlns:r="http://schemas.openxmlformats.org/officeDocument/2006/relationships" id="267" r:id="R652ceafef9f144dc"/>
   </p:sldIdLst>
   <p:sldSz cx="12191999" cy="6858000"/>
   <p:notesSz cx="6858000" cy="9144000"/>
@@ -5402,17 +5402,17 @@
   </p:cSld>
   <p:clrMap bg1="lt1" tx1="dk1" bg2="lt2" tx2="dk2" accent1="accent1" accent2="accent2" accent3="accent3" accent4="accent4" accent5="accent5" accent6="accent6" hlink="hlink" folHlink="folHlink"/>
   <p:sldLayoutIdLst>
-    <p:sldLayoutId xmlns:r="http://schemas.openxmlformats.org/officeDocument/2006/relationships" id="2147483649" r:id="Rf6ebe3a53f014f3a"/>
-    <p:sldLayoutId xmlns:r="http://schemas.openxmlformats.org/officeDocument/2006/relationships" id="2147483650" r:id="R9f8306385a47458b"/>
-    <p:sldLayoutId xmlns:r="http://schemas.openxmlformats.org/officeDocument/2006/relationships" id="2147483651" r:id="R645580898d184431"/>
-    <p:sldLayoutId xmlns:r="http://schemas.openxmlformats.org/officeDocument/2006/relationships" id="2147483652" r:id="R07f81a693d5644a9"/>
-    <p:sldLayoutId xmlns:r="http://schemas.openxmlformats.org/officeDocument/2006/relationships" id="2147483653" r:id="Ra9234f655cf042e2"/>
-    <p:sldLayoutId xmlns:r="http://schemas.openxmlformats.org/officeDocument/2006/relationships" id="2147483654" r:id="R8f3b9f59d72944a6"/>
-    <p:sldLayoutId xmlns:r="http://schemas.openxmlformats.org/officeDocument/2006/relationships" id="2147483655" r:id="Ra4804a83250c4050"/>
-    <p:sldLayoutId xmlns:r="http://schemas.openxmlformats.org/officeDocument/2006/relationships" id="2147483656" r:id="R67ca08be54f44896"/>
-    <p:sldLayoutId xmlns:r="http://schemas.openxmlformats.org/officeDocument/2006/relationships" id="2147483657" r:id="R98e2e01a2af845e3"/>
-    <p:sldLayoutId xmlns:r="http://schemas.openxmlformats.org/officeDocument/2006/relationships" id="2147483658" r:id="R677c81865e534107"/>
-    <p:sldLayoutId xmlns:r="http://schemas.openxmlformats.org/officeDocument/2006/relationships" id="2147483659" r:id="R974a486383de43b8"/>
+    <p:sldLayoutId xmlns:r="http://schemas.openxmlformats.org/officeDocument/2006/relationships" id="2147483649" r:id="R2d2e2f9a908d4811"/>
+    <p:sldLayoutId xmlns:r="http://schemas.openxmlformats.org/officeDocument/2006/relationships" id="2147483650" r:id="Rde1ee6fc8e654625"/>
+    <p:sldLayoutId xmlns:r="http://schemas.openxmlformats.org/officeDocument/2006/relationships" id="2147483651" r:id="Rff161c55e3064d95"/>
+    <p:sldLayoutId xmlns:r="http://schemas.openxmlformats.org/officeDocument/2006/relationships" id="2147483652" r:id="R00e08159031348fd"/>
+    <p:sldLayoutId xmlns:r="http://schemas.openxmlformats.org/officeDocument/2006/relationships" id="2147483653" r:id="R33bff2c954dd4bc5"/>
+    <p:sldLayoutId xmlns:r="http://schemas.openxmlformats.org/officeDocument/2006/relationships" id="2147483654" r:id="R5a4cfa48ffb041f7"/>
+    <p:sldLayoutId xmlns:r="http://schemas.openxmlformats.org/officeDocument/2006/relationships" id="2147483655" r:id="R224e981c582d4256"/>
+    <p:sldLayoutId xmlns:r="http://schemas.openxmlformats.org/officeDocument/2006/relationships" id="2147483656" r:id="R4146ffe46e9f4451"/>
+    <p:sldLayoutId xmlns:r="http://schemas.openxmlformats.org/officeDocument/2006/relationships" id="2147483657" r:id="R0d1076853a464690"/>
+    <p:sldLayoutId xmlns:r="http://schemas.openxmlformats.org/officeDocument/2006/relationships" id="2147483658" r:id="R371bd2309c254ddf"/>
+    <p:sldLayoutId xmlns:r="http://schemas.openxmlformats.org/officeDocument/2006/relationships" id="2147483659" r:id="R70d4c26d405a4f2c"/>
   </p:sldLayoutIdLst>
   <p:txStyles>
     <p:titleStyle>
@@ -6312,7 +6312,7 @@
                 <a:ea typeface="Aptos"/>
                 <a:cs typeface="Aptos"/>
               </a:rPr>
-              <a:t>2026.07.24-20</a:t>
+              <a:t>2026.07.24-21</a:t>
             </a:r>
           </a:p>
         </p:txBody>
@@ -6832,7 +6832,7 @@
                 <a:ea typeface="Aptos"/>
                 <a:cs typeface="Aptos"/>
               </a:rPr>
-              <a:t>Independent public evidence summary · 2026.07.24-20 · 2026-07-24 · Sources: WIPO licensing; dispute resolution; IPscore</a:t>
+              <a:t>Independent public evidence summary · 2026.07.24-21 · 2026-07-24 · Sources: WIPO licensing; dispute resolution; IPscore</a:t>
             </a:r>
           </a:p>
         </p:txBody>
@@ -7991,7 +7991,7 @@
                 <a:ea typeface="Aptos"/>
                 <a:cs typeface="Aptos"/>
               </a:rPr>
-              <a:t>Independent public evidence summary · 2026.07.24-20 · 2026-07-24 · Sources: WIPO IP valuation; Market-values</a:t>
+              <a:t>Independent public evidence summary · 2026.07.24-21 · 2026-07-24 · Sources: WIPO IP valuation; Market-values</a:t>
             </a:r>
           </a:p>
         </p:txBody>
@@ -8919,7 +8919,7 @@
                 <a:ea typeface="Aptos"/>
                 <a:cs typeface="Aptos"/>
               </a:rPr>
-              <a:t>Version 2026.07.24-20 · 2026-07-24 · 12 / 12</a:t>
+              <a:t>Version 2026.07.24-21 · 2026-07-24 · 12 / 12</a:t>
             </a:r>
           </a:p>
         </p:txBody>
@@ -9239,7 +9239,7 @@
                 <a:ea typeface="Aptos"/>
                 <a:cs typeface="Aptos"/>
               </a:rPr>
-              <a:t>Independent public evidence summary · 2026.07.24-20 · 2026-07-24 · Sources: Atlas readiness; WIPO</a:t>
+              <a:t>Independent public evidence summary · 2026.07.24-21 · 2026-07-24 · Sources: Atlas readiness; WIPO</a:t>
             </a:r>
           </a:p>
         </p:txBody>
@@ -9854,7 +9854,7 @@
                 <a:ea typeface="Aptos"/>
                 <a:cs typeface="Aptos"/>
               </a:rPr>
-              <a:t>Independent public evidence summary · 2026.07.24-20 · 2026-07-24 · Sources: EP3032975B2</a:t>
+              <a:t>Independent public evidence summary · 2026.07.24-21 · 2026-07-24 · Sources: EP3032975B2</a:t>
             </a:r>
           </a:p>
         </p:txBody>
@@ -10469,7 +10469,7 @@
                 <a:ea typeface="Aptos"/>
                 <a:cs typeface="Aptos"/>
               </a:rPr>
-              <a:t>Independent public evidence summary · 2026.07.24-20 · 2026-07-24 · Sources: EPO Register; EP3032975B2</a:t>
+              <a:t>Independent public evidence summary · 2026.07.24-21 · 2026-07-24 · Sources: EPO Register; EP3032975B2</a:t>
             </a:r>
           </a:p>
         </p:txBody>
@@ -11440,7 +11440,7 @@
                 <a:ea typeface="Aptos"/>
                 <a:cs typeface="Aptos"/>
               </a:rPr>
-              <a:t>Independent public evidence summary · 2026.07.24-20 · 2026-07-24 · Sources: EP3032975B2; 7 O 3341/24</a:t>
+              <a:t>Independent public evidence summary · 2026.07.24-21 · 2026-07-24 · Sources: EP3032975B2; 7 O 3341/24</a:t>
             </a:r>
           </a:p>
         </p:txBody>
@@ -12055,7 +12055,7 @@
                 <a:ea typeface="Aptos"/>
                 <a:cs typeface="Aptos"/>
               </a:rPr>
-              <a:t>Independent public evidence summary · 2026.07.24-20 · 2026-07-24 · Sources: Statistics Canada; Market-values; FTC; IMARC; GVR; Fortune; European Commission</a:t>
+              <a:t>Independent public evidence summary · 2026.07.24-21 · 2026-07-24 · Sources: Statistics Canada; Market-values; FTC; IMARC; GVR; Fortune; European Commission</a:t>
             </a:r>
           </a:p>
         </p:txBody>
@@ -13026,7 +13026,7 @@
                 <a:ea typeface="Aptos"/>
                 <a:cs typeface="Aptos"/>
               </a:rPr>
-              <a:t>Independent public evidence summary · 2026.07.24-20 · 2026-07-24 · Sources: WIPO licensing; WIPO IP Finance</a:t>
+              <a:t>Independent public evidence summary · 2026.07.24-21 · 2026-07-24 · Sources: WIPO licensing; WIPO IP Finance</a:t>
             </a:r>
           </a:p>
         </p:txBody>
@@ -13641,7 +13641,7 @@
                 <a:ea typeface="Aptos"/>
                 <a:cs typeface="Aptos"/>
               </a:rPr>
-              <a:t>Independent public evidence summary · 2026.07.24-20 · 2026-07-24 · Sources: Evidence Register; EPO; WIPO</a:t>
+              <a:t>Independent public evidence summary · 2026.07.24-21 · 2026-07-24 · Sources: Evidence Register; EPO; WIPO</a:t>
             </a:r>
           </a:p>
         </p:txBody>
@@ -14448,7 +14448,7 @@
                 <a:ea typeface="Aptos"/>
                 <a:cs typeface="Aptos"/>
               </a:rPr>
-              <a:t>Independent public evidence summary · 2026.07.24-20 · 2026-07-24 · Sources: Evidence Register</a:t>
+              <a:t>Independent public evidence summary · 2026.07.24-21 · 2026-07-24 · Sources: Evidence Register</a:t>
             </a:r>
           </a:p>
         </p:txBody>
